--- a/PRIO_Plano_Trabalho_CAPEX_2027.pptx
+++ b/PRIO_Plano_Trabalho_CAPEX_2027.pptx
@@ -250,16 +250,16 @@
                 <c:formatCode>General</c:formatCode>
                 <c:ptCount val="4"/>
                 <c:pt idx="0">
-                  <c:v>15.98</c:v>
+                  <c:v>18.14</c:v>
                 </c:pt>
                 <c:pt idx="1">
-                  <c:v>7.19</c:v>
+                  <c:v>8.83</c:v>
                 </c:pt>
                 <c:pt idx="2">
-                  <c:v>2.91</c:v>
+                  <c:v>3.46</c:v>
                 </c:pt>
                 <c:pt idx="3">
-                  <c:v>3.44</c:v>
+                  <c:v>4.55</c:v>
                 </c:pt>
               </c:numCache>
             </c:numRef>
@@ -2813,7 +2813,7 @@
                 <a:ea typeface="Cambria" pitchFamily="34" charset="-122"/>
                 <a:cs typeface="Cambria" pitchFamily="34" charset="-120"/>
               </a:rPr>
-              <a:t>US$ 1,7 mi</a:t>
+              <a:t>US$ 2,6 mi</a:t>
             </a:r>
             <a:endParaRPr lang="en-US" sz="2100" dirty="0"/>
           </a:p>
@@ -2913,7 +2913,7 @@
                 <a:ea typeface="Cambria" pitchFamily="34" charset="-122"/>
                 <a:cs typeface="Cambria" pitchFamily="34" charset="-120"/>
               </a:rPr>
-              <a:t>US$ 1,2 mi</a:t>
+              <a:t>US$ 3,7 mi</a:t>
             </a:r>
             <a:endParaRPr lang="en-US" sz="2100" dirty="0"/>
           </a:p>
@@ -3013,7 +3013,7 @@
                 <a:ea typeface="Cambria" pitchFamily="34" charset="-122"/>
                 <a:cs typeface="Cambria" pitchFamily="34" charset="-120"/>
               </a:rPr>
-              <a:t>US$ 2,9 mi</a:t>
+              <a:t>US$ 3,5 mi</a:t>
             </a:r>
             <a:endParaRPr lang="en-US" sz="2100" dirty="0"/>
           </a:p>
@@ -3113,7 +3113,7 @@
                 <a:ea typeface="Cambria" pitchFamily="34" charset="-122"/>
                 <a:cs typeface="Cambria" pitchFamily="34" charset="-120"/>
               </a:rPr>
-              <a:t>121</a:t>
+              <a:t>3.846</a:t>
             </a:r>
             <a:endParaRPr lang="en-US" sz="2100" dirty="0"/>
           </a:p>
@@ -3152,7 +3152,7 @@
                 <a:ea typeface="Calibri" pitchFamily="34" charset="-122"/>
                 <a:cs typeface="Calibri" pitchFamily="34" charset="-120"/>
               </a:rPr>
-              <a:t>POB TOTAL</a:t>
+              <a:t>POB TOTAL (POB-DIA)</a:t>
             </a:r>
             <a:endParaRPr lang="en-US" sz="850" dirty="0"/>
           </a:p>
@@ -3292,7 +3292,7 @@
                 <a:ea typeface="Calibri" pitchFamily="34" charset="-122"/>
                 <a:cs typeface="Calibri" pitchFamily="34" charset="-120"/>
               </a:rPr>
-              <a:t>US$ 2,3 mi</a:t>
+              <a:t>US$ 5,1 mi</a:t>
             </a:r>
             <a:endParaRPr lang="en-US" sz="1100" dirty="0"/>
           </a:p>
@@ -3323,7 +3323,7 @@
               <a:buNone/>
             </a:pPr>
             <a:r>
-              <a:rPr lang="en-US" sz="900" dirty="0">
+              <a:rPr lang="en-US" sz="850" dirty="0">
                 <a:solidFill>
                   <a:srgbClr val="5B6B73"/>
                 </a:solidFill>
@@ -3331,9 +3331,9 @@
                 <a:ea typeface="Calibri" pitchFamily="34" charset="-122"/>
                 <a:cs typeface="Calibri" pitchFamily="34" charset="-120"/>
               </a:rPr>
-              <a:t>51 POB</a:t>
+              <a:t>2.176 POB-dia</a:t>
             </a:r>
-            <a:endParaRPr lang="en-US" sz="900" dirty="0"/>
+            <a:endParaRPr lang="en-US" sz="850" dirty="0"/>
           </a:p>
         </p:txBody>
       </p:sp>
@@ -3429,7 +3429,7 @@
                 <a:ea typeface="Calibri" pitchFamily="34" charset="-122"/>
                 <a:cs typeface="Calibri" pitchFamily="34" charset="-120"/>
               </a:rPr>
-              <a:t>US$ 565,1 mil</a:t>
+              <a:t>US$ 1,1 mi</a:t>
             </a:r>
             <a:endParaRPr lang="en-US" sz="1100" dirty="0"/>
           </a:p>
@@ -3460,7 +3460,7 @@
               <a:buNone/>
             </a:pPr>
             <a:r>
-              <a:rPr lang="en-US" sz="900" dirty="0">
+              <a:rPr lang="en-US" sz="850" dirty="0">
                 <a:solidFill>
                   <a:srgbClr val="5B6B73"/>
                 </a:solidFill>
@@ -3468,9 +3468,9 @@
                 <a:ea typeface="Calibri" pitchFamily="34" charset="-122"/>
                 <a:cs typeface="Calibri" pitchFamily="34" charset="-120"/>
               </a:rPr>
-              <a:t>70 POB</a:t>
+              <a:t>1.650 POB-dia</a:t>
             </a:r>
-            <a:endParaRPr lang="en-US" sz="900" dirty="0"/>
+            <a:endParaRPr lang="en-US" sz="850" dirty="0"/>
           </a:p>
         </p:txBody>
       </p:sp>
@@ -3483,6 +3483,260 @@
         <p:spPr>
           <a:xfrm>
             <a:off x="566928" y="3630168"/>
+            <a:ext cx="2995574" cy="365760"/>
+          </a:xfrm>
+          <a:prstGeom prst="rect">
+            <a:avLst/>
+          </a:prstGeom>
+          <a:noFill/>
+          <a:ln/>
+        </p:spPr>
+        <p:txBody>
+          <a:bodyPr wrap="square" lIns="0" tIns="0" rIns="0" bIns="0" rtlCol="0" anchor="ctr"/>
+          <a:lstStyle/>
+          <a:p>
+            <a:pPr indent="0" marL="0">
+              <a:buNone/>
+            </a:pPr>
+            <a:r>
+              <a:rPr lang="en-US" sz="1100" dirty="0">
+                <a:solidFill>
+                  <a:srgbClr val="1C2B33"/>
+                </a:solidFill>
+                <a:latin typeface="Calibri" pitchFamily="34" charset="0"/>
+                <a:ea typeface="Calibri" pitchFamily="34" charset="-122"/>
+                <a:cs typeface="Calibri" pitchFamily="34" charset="-120"/>
+              </a:rPr>
+              <a:t>P&amp;Q - Processos</a:t>
+            </a:r>
+            <a:endParaRPr lang="en-US" sz="1100" dirty="0"/>
+          </a:p>
+        </p:txBody>
+      </p:sp>
+      <p:sp>
+        <p:nvSpPr>
+          <p:cNvPr id="28" name="Text 26"/>
+          <p:cNvSpPr txBox="1"/>
+          <p:nvPr/>
+        </p:nvSpPr>
+        <p:spPr>
+          <a:xfrm>
+            <a:off x="3452774" y="3630168"/>
+            <a:ext cx="1497787" cy="365760"/>
+          </a:xfrm>
+          <a:prstGeom prst="rect">
+            <a:avLst/>
+          </a:prstGeom>
+          <a:noFill/>
+          <a:ln/>
+        </p:spPr>
+        <p:txBody>
+          <a:bodyPr wrap="square" lIns="0" tIns="0" rIns="0" bIns="0" rtlCol="0" anchor="ctr"/>
+          <a:lstStyle/>
+          <a:p>
+            <a:pPr algn="r" indent="0" marL="0">
+              <a:buNone/>
+            </a:pPr>
+            <a:r>
+              <a:rPr lang="en-US" sz="1100" b="1" dirty="0">
+                <a:solidFill>
+                  <a:srgbClr val="0B2A3D"/>
+                </a:solidFill>
+                <a:latin typeface="Calibri" pitchFamily="34" charset="0"/>
+                <a:ea typeface="Calibri" pitchFamily="34" charset="-122"/>
+                <a:cs typeface="Calibri" pitchFamily="34" charset="-120"/>
+              </a:rPr>
+              <a:t>US$ 150,5 mil</a:t>
+            </a:r>
+            <a:endParaRPr lang="en-US" sz="1100" dirty="0"/>
+          </a:p>
+        </p:txBody>
+      </p:sp>
+      <p:sp>
+        <p:nvSpPr>
+          <p:cNvPr id="29" name="Text 27"/>
+          <p:cNvSpPr txBox="1"/>
+          <p:nvPr/>
+        </p:nvSpPr>
+        <p:spPr>
+          <a:xfrm>
+            <a:off x="4840834" y="3630168"/>
+            <a:ext cx="965606" cy="365760"/>
+          </a:xfrm>
+          <a:prstGeom prst="rect">
+            <a:avLst/>
+          </a:prstGeom>
+          <a:noFill/>
+          <a:ln/>
+        </p:spPr>
+        <p:txBody>
+          <a:bodyPr wrap="square" lIns="0" tIns="0" rIns="0" bIns="0" rtlCol="0" anchor="ctr"/>
+          <a:lstStyle/>
+          <a:p>
+            <a:pPr algn="r" indent="0" marL="0">
+              <a:buNone/>
+            </a:pPr>
+            <a:r>
+              <a:rPr lang="en-US" sz="850" dirty="0">
+                <a:solidFill>
+                  <a:srgbClr val="5B6B73"/>
+                </a:solidFill>
+                <a:latin typeface="Calibri" pitchFamily="34" charset="0"/>
+                <a:ea typeface="Calibri" pitchFamily="34" charset="-122"/>
+                <a:cs typeface="Calibri" pitchFamily="34" charset="-120"/>
+              </a:rPr>
+              <a:t>14 POB-dia</a:t>
+            </a:r>
+            <a:endParaRPr lang="en-US" sz="850" dirty="0"/>
+          </a:p>
+        </p:txBody>
+      </p:sp>
+      <p:sp>
+        <p:nvSpPr>
+          <p:cNvPr id="30" name="Shape 28"/>
+          <p:cNvSpPr/>
+          <p:nvPr/>
+        </p:nvSpPr>
+        <p:spPr>
+          <a:xfrm>
+            <a:off x="457200" y="3995928"/>
+            <a:ext cx="5349240" cy="365760"/>
+          </a:xfrm>
+          <a:prstGeom prst="rect">
+            <a:avLst/>
+          </a:prstGeom>
+          <a:solidFill>
+            <a:srgbClr val="F0F4F5"/>
+          </a:solidFill>
+          <a:ln/>
+        </p:spPr>
+      </p:sp>
+      <p:sp>
+        <p:nvSpPr>
+          <p:cNvPr id="31" name="Text 29"/>
+          <p:cNvSpPr txBox="1"/>
+          <p:nvPr/>
+        </p:nvSpPr>
+        <p:spPr>
+          <a:xfrm>
+            <a:off x="566928" y="3995928"/>
+            <a:ext cx="2995574" cy="365760"/>
+          </a:xfrm>
+          <a:prstGeom prst="rect">
+            <a:avLst/>
+          </a:prstGeom>
+          <a:noFill/>
+          <a:ln/>
+        </p:spPr>
+        <p:txBody>
+          <a:bodyPr wrap="square" lIns="0" tIns="0" rIns="0" bIns="0" rtlCol="0" anchor="ctr"/>
+          <a:lstStyle/>
+          <a:p>
+            <a:pPr indent="0" marL="0">
+              <a:buNone/>
+            </a:pPr>
+            <a:r>
+              <a:rPr lang="en-US" sz="1100" dirty="0">
+                <a:solidFill>
+                  <a:srgbClr val="1C2B33"/>
+                </a:solidFill>
+                <a:latin typeface="Calibri" pitchFamily="34" charset="0"/>
+                <a:ea typeface="Calibri" pitchFamily="34" charset="-122"/>
+                <a:cs typeface="Calibri" pitchFamily="34" charset="-120"/>
+              </a:rPr>
+              <a:t>P&amp;Q - Químicos</a:t>
+            </a:r>
+            <a:endParaRPr lang="en-US" sz="1100" dirty="0"/>
+          </a:p>
+        </p:txBody>
+      </p:sp>
+      <p:sp>
+        <p:nvSpPr>
+          <p:cNvPr id="32" name="Text 30"/>
+          <p:cNvSpPr txBox="1"/>
+          <p:nvPr/>
+        </p:nvSpPr>
+        <p:spPr>
+          <a:xfrm>
+            <a:off x="3452774" y="3995928"/>
+            <a:ext cx="1497787" cy="365760"/>
+          </a:xfrm>
+          <a:prstGeom prst="rect">
+            <a:avLst/>
+          </a:prstGeom>
+          <a:noFill/>
+          <a:ln/>
+        </p:spPr>
+        <p:txBody>
+          <a:bodyPr wrap="square" lIns="0" tIns="0" rIns="0" bIns="0" rtlCol="0" anchor="ctr"/>
+          <a:lstStyle/>
+          <a:p>
+            <a:pPr algn="r" indent="0" marL="0">
+              <a:buNone/>
+            </a:pPr>
+            <a:r>
+              <a:rPr lang="en-US" sz="1100" b="1" dirty="0">
+                <a:solidFill>
+                  <a:srgbClr val="0B2A3D"/>
+                </a:solidFill>
+                <a:latin typeface="Calibri" pitchFamily="34" charset="0"/>
+                <a:ea typeface="Calibri" pitchFamily="34" charset="-122"/>
+                <a:cs typeface="Calibri" pitchFamily="34" charset="-120"/>
+              </a:rPr>
+              <a:t>US$ 10,0 mil</a:t>
+            </a:r>
+            <a:endParaRPr lang="en-US" sz="1100" dirty="0"/>
+          </a:p>
+        </p:txBody>
+      </p:sp>
+      <p:sp>
+        <p:nvSpPr>
+          <p:cNvPr id="33" name="Text 31"/>
+          <p:cNvSpPr txBox="1"/>
+          <p:nvPr/>
+        </p:nvSpPr>
+        <p:spPr>
+          <a:xfrm>
+            <a:off x="4840834" y="3995928"/>
+            <a:ext cx="965606" cy="365760"/>
+          </a:xfrm>
+          <a:prstGeom prst="rect">
+            <a:avLst/>
+          </a:prstGeom>
+          <a:noFill/>
+          <a:ln/>
+        </p:spPr>
+        <p:txBody>
+          <a:bodyPr wrap="square" lIns="0" tIns="0" rIns="0" bIns="0" rtlCol="0" anchor="ctr"/>
+          <a:lstStyle/>
+          <a:p>
+            <a:pPr algn="r" indent="0" marL="0">
+              <a:buNone/>
+            </a:pPr>
+            <a:r>
+              <a:rPr lang="en-US" sz="850" dirty="0">
+                <a:solidFill>
+                  <a:srgbClr val="5B6B73"/>
+                </a:solidFill>
+                <a:latin typeface="Calibri" pitchFamily="34" charset="0"/>
+                <a:ea typeface="Calibri" pitchFamily="34" charset="-122"/>
+                <a:cs typeface="Calibri" pitchFamily="34" charset="-120"/>
+              </a:rPr>
+              <a:t>6 POB-dia</a:t>
+            </a:r>
+            <a:endParaRPr lang="en-US" sz="850" dirty="0"/>
+          </a:p>
+        </p:txBody>
+      </p:sp>
+      <p:sp>
+        <p:nvSpPr>
+          <p:cNvPr id="34" name="Text 32"/>
+          <p:cNvSpPr txBox="1"/>
+          <p:nvPr/>
+        </p:nvSpPr>
+        <p:spPr>
+          <a:xfrm>
+            <a:off x="566928" y="4361688"/>
             <a:ext cx="2995574" cy="365760"/>
           </a:xfrm>
           <a:prstGeom prst="rect">
@@ -3515,13 +3769,13 @@
       </p:sp>
       <p:sp>
         <p:nvSpPr>
-          <p:cNvPr id="28" name="Text 26"/>
+          <p:cNvPr id="35" name="Text 33"/>
           <p:cNvSpPr txBox="1"/>
           <p:nvPr/>
         </p:nvSpPr>
         <p:spPr>
           <a:xfrm>
-            <a:off x="3452774" y="3630168"/>
+            <a:off x="3452774" y="4361688"/>
             <a:ext cx="1497787" cy="365760"/>
           </a:xfrm>
           <a:prstGeom prst="rect">
@@ -3554,13 +3808,13 @@
       </p:sp>
       <p:sp>
         <p:nvSpPr>
-          <p:cNvPr id="29" name="Text 27"/>
+          <p:cNvPr id="36" name="Text 34"/>
           <p:cNvSpPr txBox="1"/>
           <p:nvPr/>
         </p:nvSpPr>
         <p:spPr>
           <a:xfrm>
-            <a:off x="4840834" y="3630168"/>
+            <a:off x="4840834" y="4361688"/>
             <a:ext cx="965606" cy="365760"/>
           </a:xfrm>
           <a:prstGeom prst="rect">
@@ -3577,7 +3831,7 @@
               <a:buNone/>
             </a:pPr>
             <a:r>
-              <a:rPr lang="en-US" sz="900" dirty="0">
+              <a:rPr lang="en-US" sz="850" dirty="0">
                 <a:solidFill>
                   <a:srgbClr val="5B6B73"/>
                 </a:solidFill>
@@ -3585,15 +3839,15 @@
                 <a:ea typeface="Calibri" pitchFamily="34" charset="-122"/>
                 <a:cs typeface="Calibri" pitchFamily="34" charset="-120"/>
               </a:rPr>
-              <a:t>0 POB</a:t>
+              <a:t>0 POB-dia</a:t>
             </a:r>
-            <a:endParaRPr lang="en-US" sz="900" dirty="0"/>
+            <a:endParaRPr lang="en-US" sz="850" dirty="0"/>
           </a:p>
         </p:txBody>
       </p:sp>
       <p:sp>
         <p:nvSpPr>
-          <p:cNvPr id="30" name="Text 28"/>
+          <p:cNvPr id="37" name="Text 35"/>
           <p:cNvSpPr txBox="1"/>
           <p:nvPr/>
         </p:nvSpPr>
@@ -3632,7 +3886,7 @@
       </p:sp>
       <p:sp>
         <p:nvSpPr>
-          <p:cNvPr id="31" name="Shape 29"/>
+          <p:cNvPr id="38" name="Shape 36"/>
           <p:cNvSpPr/>
           <p:nvPr/>
         </p:nvSpPr>
@@ -3655,13 +3909,150 @@
       </p:sp>
       <p:sp>
         <p:nvSpPr>
-          <p:cNvPr id="32" name="Text 30"/>
+          <p:cNvPr id="39" name="Text 37"/>
           <p:cNvSpPr txBox="1"/>
           <p:nvPr/>
         </p:nvSpPr>
         <p:spPr>
           <a:xfrm>
             <a:off x="6464808" y="2898648"/>
+            <a:ext cx="2995574" cy="365760"/>
+          </a:xfrm>
+          <a:prstGeom prst="rect">
+            <a:avLst/>
+          </a:prstGeom>
+          <a:noFill/>
+          <a:ln/>
+        </p:spPr>
+        <p:txBody>
+          <a:bodyPr wrap="square" lIns="0" tIns="0" rIns="0" bIns="0" rtlCol="0" anchor="ctr"/>
+          <a:lstStyle/>
+          <a:p>
+            <a:pPr indent="0" marL="0">
+              <a:buNone/>
+            </a:pPr>
+            <a:r>
+              <a:rPr lang="en-US" sz="1100" dirty="0">
+                <a:solidFill>
+                  <a:srgbClr val="1C2B33"/>
+                </a:solidFill>
+                <a:latin typeface="Calibri" pitchFamily="34" charset="0"/>
+                <a:ea typeface="Calibri" pitchFamily="34" charset="-122"/>
+                <a:cs typeface="Calibri" pitchFamily="34" charset="-120"/>
+              </a:rPr>
+              <a:t>Desenvolvimento de Produção</a:t>
+            </a:r>
+            <a:endParaRPr lang="en-US" sz="1100" dirty="0"/>
+          </a:p>
+        </p:txBody>
+      </p:sp>
+      <p:sp>
+        <p:nvSpPr>
+          <p:cNvPr id="40" name="Text 38"/>
+          <p:cNvSpPr txBox="1"/>
+          <p:nvPr/>
+        </p:nvSpPr>
+        <p:spPr>
+          <a:xfrm>
+            <a:off x="9350654" y="2898648"/>
+            <a:ext cx="1497787" cy="365760"/>
+          </a:xfrm>
+          <a:prstGeom prst="rect">
+            <a:avLst/>
+          </a:prstGeom>
+          <a:noFill/>
+          <a:ln/>
+        </p:spPr>
+        <p:txBody>
+          <a:bodyPr wrap="square" lIns="0" tIns="0" rIns="0" bIns="0" rtlCol="0" anchor="ctr"/>
+          <a:lstStyle/>
+          <a:p>
+            <a:pPr algn="r" indent="0" marL="0">
+              <a:buNone/>
+            </a:pPr>
+            <a:r>
+              <a:rPr lang="en-US" sz="1100" b="1" dirty="0">
+                <a:solidFill>
+                  <a:srgbClr val="0B2A3D"/>
+                </a:solidFill>
+                <a:latin typeface="Calibri" pitchFamily="34" charset="0"/>
+                <a:ea typeface="Calibri" pitchFamily="34" charset="-122"/>
+                <a:cs typeface="Calibri" pitchFamily="34" charset="-120"/>
+              </a:rPr>
+              <a:t>US$ 2,9 mi</a:t>
+            </a:r>
+            <a:endParaRPr lang="en-US" sz="1100" dirty="0"/>
+          </a:p>
+        </p:txBody>
+      </p:sp>
+      <p:sp>
+        <p:nvSpPr>
+          <p:cNvPr id="41" name="Text 39"/>
+          <p:cNvSpPr txBox="1"/>
+          <p:nvPr/>
+        </p:nvSpPr>
+        <p:spPr>
+          <a:xfrm>
+            <a:off x="10738714" y="2898648"/>
+            <a:ext cx="965606" cy="365760"/>
+          </a:xfrm>
+          <a:prstGeom prst="rect">
+            <a:avLst/>
+          </a:prstGeom>
+          <a:noFill/>
+          <a:ln/>
+        </p:spPr>
+        <p:txBody>
+          <a:bodyPr wrap="square" lIns="0" tIns="0" rIns="0" bIns="0" rtlCol="0" anchor="ctr"/>
+          <a:lstStyle/>
+          <a:p>
+            <a:pPr algn="r" indent="0" marL="0">
+              <a:buNone/>
+            </a:pPr>
+            <a:r>
+              <a:rPr lang="en-US" sz="850" dirty="0">
+                <a:solidFill>
+                  <a:srgbClr val="5B6B73"/>
+                </a:solidFill>
+                <a:latin typeface="Calibri" pitchFamily="34" charset="0"/>
+                <a:ea typeface="Calibri" pitchFamily="34" charset="-122"/>
+                <a:cs typeface="Calibri" pitchFamily="34" charset="-120"/>
+              </a:rPr>
+              <a:t>1.223 POB-dia</a:t>
+            </a:r>
+            <a:endParaRPr lang="en-US" sz="850" dirty="0"/>
+          </a:p>
+        </p:txBody>
+      </p:sp>
+      <p:sp>
+        <p:nvSpPr>
+          <p:cNvPr id="42" name="Shape 40"/>
+          <p:cNvSpPr/>
+          <p:nvPr/>
+        </p:nvSpPr>
+        <p:spPr>
+          <a:xfrm>
+            <a:off x="6355080" y="3264408"/>
+            <a:ext cx="5349240" cy="365760"/>
+          </a:xfrm>
+          <a:prstGeom prst="rect">
+            <a:avLst/>
+          </a:prstGeom>
+          <a:solidFill>
+            <a:srgbClr val="F0F4F5"/>
+          </a:solidFill>
+          <a:ln/>
+        </p:spPr>
+      </p:sp>
+      <p:sp>
+        <p:nvSpPr>
+          <p:cNvPr id="43" name="Text 41"/>
+          <p:cNvSpPr txBox="1"/>
+          <p:nvPr/>
+        </p:nvSpPr>
+        <p:spPr>
+          <a:xfrm>
+            <a:off x="6464808" y="3264408"/>
             <a:ext cx="2995574" cy="365760"/>
           </a:xfrm>
           <a:prstGeom prst="rect">
@@ -3694,13 +4085,13 @@
       </p:sp>
       <p:sp>
         <p:nvSpPr>
-          <p:cNvPr id="33" name="Text 31"/>
+          <p:cNvPr id="44" name="Text 42"/>
           <p:cNvSpPr txBox="1"/>
           <p:nvPr/>
         </p:nvSpPr>
         <p:spPr>
           <a:xfrm>
-            <a:off x="9350654" y="2898648"/>
+            <a:off x="9350654" y="3264408"/>
             <a:ext cx="1497787" cy="365760"/>
           </a:xfrm>
           <a:prstGeom prst="rect">
@@ -3725,7 +4116,7 @@
                 <a:ea typeface="Calibri" pitchFamily="34" charset="-122"/>
                 <a:cs typeface="Calibri" pitchFamily="34" charset="-120"/>
               </a:rPr>
-              <a:t>US$ 2,3 mi</a:t>
+              <a:t>US$ 2,9 mi</a:t>
             </a:r>
             <a:endParaRPr lang="en-US" sz="1100" dirty="0"/>
           </a:p>
@@ -3733,13 +4124,13 @@
       </p:sp>
       <p:sp>
         <p:nvSpPr>
-          <p:cNvPr id="34" name="Text 32"/>
+          <p:cNvPr id="45" name="Text 43"/>
           <p:cNvSpPr txBox="1"/>
           <p:nvPr/>
         </p:nvSpPr>
         <p:spPr>
           <a:xfrm>
-            <a:off x="10738714" y="2898648"/>
+            <a:off x="10738714" y="3264408"/>
             <a:ext cx="965606" cy="365760"/>
           </a:xfrm>
           <a:prstGeom prst="rect">
@@ -3756,7 +4147,7 @@
               <a:buNone/>
             </a:pPr>
             <a:r>
-              <a:rPr lang="en-US" sz="900" dirty="0">
+              <a:rPr lang="en-US" sz="850" dirty="0">
                 <a:solidFill>
                   <a:srgbClr val="5B6B73"/>
                 </a:solidFill>
@@ -3764,41 +4155,21 @@
                 <a:ea typeface="Calibri" pitchFamily="34" charset="-122"/>
                 <a:cs typeface="Calibri" pitchFamily="34" charset="-120"/>
               </a:rPr>
-              <a:t>119 POB</a:t>
+              <a:t>2.589 POB-dia</a:t>
             </a:r>
-            <a:endParaRPr lang="en-US" sz="900" dirty="0"/>
+            <a:endParaRPr lang="en-US" sz="850" dirty="0"/>
           </a:p>
         </p:txBody>
       </p:sp>
       <p:sp>
         <p:nvSpPr>
-          <p:cNvPr id="35" name="Shape 33"/>
-          <p:cNvSpPr/>
-          <p:nvPr/>
-        </p:nvSpPr>
-        <p:spPr>
-          <a:xfrm>
-            <a:off x="6355080" y="3264408"/>
-            <a:ext cx="5349240" cy="365760"/>
-          </a:xfrm>
-          <a:prstGeom prst="rect">
-            <a:avLst/>
-          </a:prstGeom>
-          <a:solidFill>
-            <a:srgbClr val="F0F4F5"/>
-          </a:solidFill>
-          <a:ln/>
-        </p:spPr>
-      </p:sp>
-      <p:sp>
-        <p:nvSpPr>
-          <p:cNvPr id="36" name="Text 34"/>
+          <p:cNvPr id="46" name="Text 44"/>
           <p:cNvSpPr txBox="1"/>
           <p:nvPr/>
         </p:nvSpPr>
         <p:spPr>
           <a:xfrm>
-            <a:off x="6464808" y="3264408"/>
+            <a:off x="6464808" y="3630168"/>
             <a:ext cx="2995574" cy="365760"/>
           </a:xfrm>
           <a:prstGeom prst="rect">
@@ -3831,13 +4202,13 @@
       </p:sp>
       <p:sp>
         <p:nvSpPr>
-          <p:cNvPr id="37" name="Text 35"/>
+          <p:cNvPr id="47" name="Text 45"/>
           <p:cNvSpPr txBox="1"/>
           <p:nvPr/>
         </p:nvSpPr>
         <p:spPr>
           <a:xfrm>
-            <a:off x="9350654" y="3264408"/>
+            <a:off x="9350654" y="3630168"/>
             <a:ext cx="1497787" cy="365760"/>
           </a:xfrm>
           <a:prstGeom prst="rect">
@@ -3870,13 +4241,13 @@
       </p:sp>
       <p:sp>
         <p:nvSpPr>
-          <p:cNvPr id="38" name="Text 36"/>
+          <p:cNvPr id="48" name="Text 46"/>
           <p:cNvSpPr txBox="1"/>
           <p:nvPr/>
         </p:nvSpPr>
         <p:spPr>
           <a:xfrm>
-            <a:off x="10738714" y="3264408"/>
+            <a:off x="10738714" y="3630168"/>
             <a:ext cx="965606" cy="365760"/>
           </a:xfrm>
           <a:prstGeom prst="rect">
@@ -3893,7 +4264,7 @@
               <a:buNone/>
             </a:pPr>
             <a:r>
-              <a:rPr lang="en-US" sz="900" dirty="0">
+              <a:rPr lang="en-US" sz="850" dirty="0">
                 <a:solidFill>
                   <a:srgbClr val="5B6B73"/>
                 </a:solidFill>
@@ -3901,21 +4272,158 @@
                 <a:ea typeface="Calibri" pitchFamily="34" charset="-122"/>
                 <a:cs typeface="Calibri" pitchFamily="34" charset="-120"/>
               </a:rPr>
-              <a:t>2 POB</a:t>
+              <a:t>28 POB-dia</a:t>
             </a:r>
-            <a:endParaRPr lang="en-US" sz="900" dirty="0"/>
+            <a:endParaRPr lang="en-US" sz="850" dirty="0"/>
           </a:p>
         </p:txBody>
       </p:sp>
       <p:sp>
         <p:nvSpPr>
-          <p:cNvPr id="39" name="Text 37"/>
+          <p:cNvPr id="49" name="Shape 47"/>
+          <p:cNvSpPr/>
+          <p:nvPr/>
+        </p:nvSpPr>
+        <p:spPr>
+          <a:xfrm>
+            <a:off x="6355080" y="3995928"/>
+            <a:ext cx="5349240" cy="365760"/>
+          </a:xfrm>
+          <a:prstGeom prst="rect">
+            <a:avLst/>
+          </a:prstGeom>
+          <a:solidFill>
+            <a:srgbClr val="F0F4F5"/>
+          </a:solidFill>
+          <a:ln/>
+        </p:spPr>
+      </p:sp>
+      <p:sp>
+        <p:nvSpPr>
+          <p:cNvPr id="50" name="Text 48"/>
           <p:cNvSpPr txBox="1"/>
           <p:nvPr/>
         </p:nvSpPr>
         <p:spPr>
           <a:xfrm>
-            <a:off x="6464808" y="3630168"/>
+            <a:off x="6464808" y="3995928"/>
+            <a:ext cx="2995574" cy="365760"/>
+          </a:xfrm>
+          <a:prstGeom prst="rect">
+            <a:avLst/>
+          </a:prstGeom>
+          <a:noFill/>
+          <a:ln/>
+        </p:spPr>
+        <p:txBody>
+          <a:bodyPr wrap="square" lIns="0" tIns="0" rIns="0" bIns="0" rtlCol="0" anchor="ctr"/>
+          <a:lstStyle/>
+          <a:p>
+            <a:pPr indent="0" marL="0">
+              <a:buNone/>
+            </a:pPr>
+            <a:r>
+              <a:rPr lang="en-US" sz="1100" dirty="0">
+                <a:solidFill>
+                  <a:srgbClr val="1C2B33"/>
+                </a:solidFill>
+                <a:latin typeface="Calibri" pitchFamily="34" charset="0"/>
+                <a:ea typeface="Calibri" pitchFamily="34" charset="-122"/>
+                <a:cs typeface="Calibri" pitchFamily="34" charset="-120"/>
+              </a:rPr>
+              <a:t>Rotina Operacional</a:t>
+            </a:r>
+            <a:endParaRPr lang="en-US" sz="1100" dirty="0"/>
+          </a:p>
+        </p:txBody>
+      </p:sp>
+      <p:sp>
+        <p:nvSpPr>
+          <p:cNvPr id="51" name="Text 49"/>
+          <p:cNvSpPr txBox="1"/>
+          <p:nvPr/>
+        </p:nvSpPr>
+        <p:spPr>
+          <a:xfrm>
+            <a:off x="9350654" y="3995928"/>
+            <a:ext cx="1497787" cy="365760"/>
+          </a:xfrm>
+          <a:prstGeom prst="rect">
+            <a:avLst/>
+          </a:prstGeom>
+          <a:noFill/>
+          <a:ln/>
+        </p:spPr>
+        <p:txBody>
+          <a:bodyPr wrap="square" lIns="0" tIns="0" rIns="0" bIns="0" rtlCol="0" anchor="ctr"/>
+          <a:lstStyle/>
+          <a:p>
+            <a:pPr algn="r" indent="0" marL="0">
+              <a:buNone/>
+            </a:pPr>
+            <a:r>
+              <a:rPr lang="en-US" sz="1100" b="1" dirty="0">
+                <a:solidFill>
+                  <a:srgbClr val="0B2A3D"/>
+                </a:solidFill>
+                <a:latin typeface="Calibri" pitchFamily="34" charset="0"/>
+                <a:ea typeface="Calibri" pitchFamily="34" charset="-122"/>
+                <a:cs typeface="Calibri" pitchFamily="34" charset="-120"/>
+              </a:rPr>
+              <a:t>US$ 10,0 mil</a:t>
+            </a:r>
+            <a:endParaRPr lang="en-US" sz="1100" dirty="0"/>
+          </a:p>
+        </p:txBody>
+      </p:sp>
+      <p:sp>
+        <p:nvSpPr>
+          <p:cNvPr id="52" name="Text 50"/>
+          <p:cNvSpPr txBox="1"/>
+          <p:nvPr/>
+        </p:nvSpPr>
+        <p:spPr>
+          <a:xfrm>
+            <a:off x="10738714" y="3995928"/>
+            <a:ext cx="965606" cy="365760"/>
+          </a:xfrm>
+          <a:prstGeom prst="rect">
+            <a:avLst/>
+          </a:prstGeom>
+          <a:noFill/>
+          <a:ln/>
+        </p:spPr>
+        <p:txBody>
+          <a:bodyPr wrap="square" lIns="0" tIns="0" rIns="0" bIns="0" rtlCol="0" anchor="ctr"/>
+          <a:lstStyle/>
+          <a:p>
+            <a:pPr algn="r" indent="0" marL="0">
+              <a:buNone/>
+            </a:pPr>
+            <a:r>
+              <a:rPr lang="en-US" sz="850" dirty="0">
+                <a:solidFill>
+                  <a:srgbClr val="5B6B73"/>
+                </a:solidFill>
+                <a:latin typeface="Calibri" pitchFamily="34" charset="0"/>
+                <a:ea typeface="Calibri" pitchFamily="34" charset="-122"/>
+                <a:cs typeface="Calibri" pitchFamily="34" charset="-120"/>
+              </a:rPr>
+              <a:t>6 POB-dia</a:t>
+            </a:r>
+            <a:endParaRPr lang="en-US" sz="850" dirty="0"/>
+          </a:p>
+        </p:txBody>
+      </p:sp>
+      <p:sp>
+        <p:nvSpPr>
+          <p:cNvPr id="53" name="Text 51"/>
+          <p:cNvSpPr txBox="1"/>
+          <p:nvPr/>
+        </p:nvSpPr>
+        <p:spPr>
+          <a:xfrm>
+            <a:off x="6464808" y="4361688"/>
             <a:ext cx="2995574" cy="365760"/>
           </a:xfrm>
           <a:prstGeom prst="rect">
@@ -3948,13 +4456,13 @@
       </p:sp>
       <p:sp>
         <p:nvSpPr>
-          <p:cNvPr id="40" name="Text 38"/>
+          <p:cNvPr id="54" name="Text 52"/>
           <p:cNvSpPr txBox="1"/>
           <p:nvPr/>
         </p:nvSpPr>
         <p:spPr>
           <a:xfrm>
-            <a:off x="9350654" y="3630168"/>
+            <a:off x="9350654" y="4361688"/>
             <a:ext cx="1497787" cy="365760"/>
           </a:xfrm>
           <a:prstGeom prst="rect">
@@ -3987,13 +4495,13 @@
       </p:sp>
       <p:sp>
         <p:nvSpPr>
-          <p:cNvPr id="41" name="Text 39"/>
+          <p:cNvPr id="55" name="Text 53"/>
           <p:cNvSpPr txBox="1"/>
           <p:nvPr/>
         </p:nvSpPr>
         <p:spPr>
           <a:xfrm>
-            <a:off x="10738714" y="3630168"/>
+            <a:off x="10738714" y="4361688"/>
             <a:ext cx="965606" cy="365760"/>
           </a:xfrm>
           <a:prstGeom prst="rect">
@@ -4010,7 +4518,7 @@
               <a:buNone/>
             </a:pPr>
             <a:r>
-              <a:rPr lang="en-US" sz="900" dirty="0">
+              <a:rPr lang="en-US" sz="850" dirty="0">
                 <a:solidFill>
                   <a:srgbClr val="5B6B73"/>
                 </a:solidFill>
@@ -4018,15 +4526,15 @@
                 <a:ea typeface="Calibri" pitchFamily="34" charset="-122"/>
                 <a:cs typeface="Calibri" pitchFamily="34" charset="-120"/>
               </a:rPr>
-              <a:t>0 POB</a:t>
+              <a:t>0 POB-dia</a:t>
             </a:r>
-            <a:endParaRPr lang="en-US" sz="900" dirty="0"/>
+            <a:endParaRPr lang="en-US" sz="850" dirty="0"/>
           </a:p>
         </p:txBody>
       </p:sp>
       <p:sp>
         <p:nvSpPr>
-          <p:cNvPr id="42" name="Text 40"/>
+          <p:cNvPr id="56" name="Text 54"/>
           <p:cNvSpPr txBox="1"/>
           <p:nvPr/>
         </p:nvSpPr>
@@ -4057,7 +4565,7 @@
                 <a:ea typeface="Calibri" pitchFamily="34" charset="-122"/>
                 <a:cs typeface="Calibri" pitchFamily="34" charset="-120"/>
               </a:rPr>
-              <a:t>Metodologia: soma de Custo de Serviço + Custo de Material (Jan–Dez), para itens de Cost Allocation = CAPEX com status 'Contar' ou 'TA'. O total desconsidera a categoria Desenvolvimento de Produção (sem itens para este ativo).</a:t>
+              <a:t>Metodologia: soma de Custo de Serviço + Custo de Material (Jan–Dez), para itens de Cost Allocation = CAPEX com status 'Contar' ou 'TA'. POB em POB-dia (pessoas a bordo × dias). O total desconsidera a categoria Desenvolvimento de Produção (US$ 2,9 mi, mantida na lista de Categoria apenas para referência).</a:t>
             </a:r>
             <a:endParaRPr lang="en-US" sz="850" dirty="0"/>
           </a:p>
@@ -7996,7 +8504,7 @@
                 <a:ea typeface="Calibri" pitchFamily="34" charset="-122"/>
                 <a:cs typeface="Calibri" pitchFamily="34" charset="-120"/>
               </a:rPr>
-              <a:t>Fonte: Plano Integrado · aba 'Geral - Em análise' · itens de Cost Allocation = CAPEX, status 'Contar' + 'TA'. Lista completa disponível na planilha em anexo.</a:t>
+              <a:t>Fonte: Plano Integrado · aba 'Geral - Em análise' · coluna 'Valor Total' · itens de Cost Allocation = CAPEX, status 'Contar' + 'TA'. Lista completa disponível na planilha em anexo. Extrato pendente de atualização — pode não somar exatamente ao total da Composição de Custo e POB.</a:t>
             </a:r>
             <a:endParaRPr lang="en-US" sz="850" dirty="0"/>
           </a:p>
@@ -8483,7 +8991,7 @@
                 <a:ea typeface="Cambria" pitchFamily="34" charset="-122"/>
                 <a:cs typeface="Cambria" pitchFamily="34" charset="-120"/>
               </a:rPr>
-              <a:t>US$ 2,3 mi</a:t>
+              <a:t>US$ 5,9 mi</a:t>
             </a:r>
             <a:endParaRPr lang="en-US" sz="2100" dirty="0"/>
           </a:p>
@@ -8583,7 +9091,7 @@
                 <a:ea typeface="Cambria" pitchFamily="34" charset="-122"/>
                 <a:cs typeface="Cambria" pitchFamily="34" charset="-120"/>
               </a:rPr>
-              <a:t>US$ 1,1 mi</a:t>
+              <a:t>US$ 7,1 mi</a:t>
             </a:r>
             <a:endParaRPr lang="en-US" sz="2100" dirty="0"/>
           </a:p>
@@ -8683,7 +9191,7 @@
                 <a:ea typeface="Cambria" pitchFamily="34" charset="-122"/>
                 <a:cs typeface="Cambria" pitchFamily="34" charset="-120"/>
               </a:rPr>
-              <a:t>US$ 3,4 mi</a:t>
+              <a:t>US$ 4,5 mi</a:t>
             </a:r>
             <a:endParaRPr lang="en-US" sz="2100" dirty="0"/>
           </a:p>
@@ -8783,7 +9291,7 @@
                 <a:ea typeface="Cambria" pitchFamily="34" charset="-122"/>
                 <a:cs typeface="Cambria" pitchFamily="34" charset="-120"/>
               </a:rPr>
-              <a:t>135</a:t>
+              <a:t>5.186</a:t>
             </a:r>
             <a:endParaRPr lang="en-US" sz="2100" dirty="0"/>
           </a:p>
@@ -8822,7 +9330,7 @@
                 <a:ea typeface="Calibri" pitchFamily="34" charset="-122"/>
                 <a:cs typeface="Calibri" pitchFamily="34" charset="-120"/>
               </a:rPr>
-              <a:t>POB TOTAL</a:t>
+              <a:t>POB TOTAL (POB-DIA)</a:t>
             </a:r>
             <a:endParaRPr lang="en-US" sz="850" dirty="0"/>
           </a:p>
@@ -8962,7 +9470,7 @@
                 <a:ea typeface="Calibri" pitchFamily="34" charset="-122"/>
                 <a:cs typeface="Calibri" pitchFamily="34" charset="-120"/>
               </a:rPr>
-              <a:t>US$ 1,8 mi</a:t>
+              <a:t>US$ 10,1 mi</a:t>
             </a:r>
             <a:endParaRPr lang="en-US" sz="1100" dirty="0"/>
           </a:p>
@@ -8993,7 +9501,7 @@
               <a:buNone/>
             </a:pPr>
             <a:r>
-              <a:rPr lang="en-US" sz="900" dirty="0">
+              <a:rPr lang="en-US" sz="850" dirty="0">
                 <a:solidFill>
                   <a:srgbClr val="5B6B73"/>
                 </a:solidFill>
@@ -9001,9 +9509,9 @@
                 <a:ea typeface="Calibri" pitchFamily="34" charset="-122"/>
                 <a:cs typeface="Calibri" pitchFamily="34" charset="-120"/>
               </a:rPr>
-              <a:t>41 POB</a:t>
+              <a:t>3.036 POB-dia</a:t>
             </a:r>
-            <a:endParaRPr lang="en-US" sz="900" dirty="0"/>
+            <a:endParaRPr lang="en-US" sz="850" dirty="0"/>
           </a:p>
         </p:txBody>
       </p:sp>
@@ -9099,7 +9607,7 @@
                 <a:ea typeface="Calibri" pitchFamily="34" charset="-122"/>
                 <a:cs typeface="Calibri" pitchFamily="34" charset="-120"/>
               </a:rPr>
-              <a:t>US$ 889,8 mil</a:t>
+              <a:t>US$ 1,9 mi</a:t>
             </a:r>
             <a:endParaRPr lang="en-US" sz="1100" dirty="0"/>
           </a:p>
@@ -9130,7 +9638,7 @@
               <a:buNone/>
             </a:pPr>
             <a:r>
-              <a:rPr lang="en-US" sz="900" dirty="0">
+              <a:rPr lang="en-US" sz="850" dirty="0">
                 <a:solidFill>
                   <a:srgbClr val="5B6B73"/>
                 </a:solidFill>
@@ -9138,9 +9646,9 @@
                 <a:ea typeface="Calibri" pitchFamily="34" charset="-122"/>
                 <a:cs typeface="Calibri" pitchFamily="34" charset="-120"/>
               </a:rPr>
-              <a:t>90 POB</a:t>
+              <a:t>2.010 POB-dia</a:t>
             </a:r>
-            <a:endParaRPr lang="en-US" sz="900" dirty="0"/>
+            <a:endParaRPr lang="en-US" sz="850" dirty="0"/>
           </a:p>
         </p:txBody>
       </p:sp>
@@ -9247,7 +9755,7 @@
               <a:buNone/>
             </a:pPr>
             <a:r>
-              <a:rPr lang="en-US" sz="900" dirty="0">
+              <a:rPr lang="en-US" sz="850" dirty="0">
                 <a:solidFill>
                   <a:srgbClr val="5B6B73"/>
                 </a:solidFill>
@@ -9255,9 +9763,9 @@
                 <a:ea typeface="Calibri" pitchFamily="34" charset="-122"/>
                 <a:cs typeface="Calibri" pitchFamily="34" charset="-120"/>
               </a:rPr>
-              <a:t>4 POB</a:t>
+              <a:t>120 POB-dia</a:t>
             </a:r>
-            <a:endParaRPr lang="en-US" sz="900" dirty="0"/>
+            <a:endParaRPr lang="en-US" sz="850" dirty="0"/>
           </a:p>
         </p:txBody>
       </p:sp>
@@ -9290,6 +9798,260 @@
         <p:spPr>
           <a:xfrm>
             <a:off x="566928" y="3995928"/>
+            <a:ext cx="2995574" cy="365760"/>
+          </a:xfrm>
+          <a:prstGeom prst="rect">
+            <a:avLst/>
+          </a:prstGeom>
+          <a:noFill/>
+          <a:ln/>
+        </p:spPr>
+        <p:txBody>
+          <a:bodyPr wrap="square" lIns="0" tIns="0" rIns="0" bIns="0" rtlCol="0" anchor="ctr"/>
+          <a:lstStyle/>
+          <a:p>
+            <a:pPr indent="0" marL="0">
+              <a:buNone/>
+            </a:pPr>
+            <a:r>
+              <a:rPr lang="en-US" sz="1100" dirty="0">
+                <a:solidFill>
+                  <a:srgbClr val="1C2B33"/>
+                </a:solidFill>
+                <a:latin typeface="Calibri" pitchFamily="34" charset="0"/>
+                <a:ea typeface="Calibri" pitchFamily="34" charset="-122"/>
+                <a:cs typeface="Calibri" pitchFamily="34" charset="-120"/>
+              </a:rPr>
+              <a:t>CON - Construção</a:t>
+            </a:r>
+            <a:endParaRPr lang="en-US" sz="1100" dirty="0"/>
+          </a:p>
+        </p:txBody>
+      </p:sp>
+      <p:sp>
+        <p:nvSpPr>
+          <p:cNvPr id="32" name="Text 30"/>
+          <p:cNvSpPr txBox="1"/>
+          <p:nvPr/>
+        </p:nvSpPr>
+        <p:spPr>
+          <a:xfrm>
+            <a:off x="3452774" y="3995928"/>
+            <a:ext cx="1497787" cy="365760"/>
+          </a:xfrm>
+          <a:prstGeom prst="rect">
+            <a:avLst/>
+          </a:prstGeom>
+          <a:noFill/>
+          <a:ln/>
+        </p:spPr>
+        <p:txBody>
+          <a:bodyPr wrap="square" lIns="0" tIns="0" rIns="0" bIns="0" rtlCol="0" anchor="ctr"/>
+          <a:lstStyle/>
+          <a:p>
+            <a:pPr algn="r" indent="0" marL="0">
+              <a:buNone/>
+            </a:pPr>
+            <a:r>
+              <a:rPr lang="en-US" sz="1100" b="1" dirty="0">
+                <a:solidFill>
+                  <a:srgbClr val="0B2A3D"/>
+                </a:solidFill>
+                <a:latin typeface="Calibri" pitchFamily="34" charset="0"/>
+                <a:ea typeface="Calibri" pitchFamily="34" charset="-122"/>
+                <a:cs typeface="Calibri" pitchFamily="34" charset="-120"/>
+              </a:rPr>
+              <a:t>US$ 150,5 mil</a:t>
+            </a:r>
+            <a:endParaRPr lang="en-US" sz="1100" dirty="0"/>
+          </a:p>
+        </p:txBody>
+      </p:sp>
+      <p:sp>
+        <p:nvSpPr>
+          <p:cNvPr id="33" name="Text 31"/>
+          <p:cNvSpPr txBox="1"/>
+          <p:nvPr/>
+        </p:nvSpPr>
+        <p:spPr>
+          <a:xfrm>
+            <a:off x="4840834" y="3995928"/>
+            <a:ext cx="965606" cy="365760"/>
+          </a:xfrm>
+          <a:prstGeom prst="rect">
+            <a:avLst/>
+          </a:prstGeom>
+          <a:noFill/>
+          <a:ln/>
+        </p:spPr>
+        <p:txBody>
+          <a:bodyPr wrap="square" lIns="0" tIns="0" rIns="0" bIns="0" rtlCol="0" anchor="ctr"/>
+          <a:lstStyle/>
+          <a:p>
+            <a:pPr algn="r" indent="0" marL="0">
+              <a:buNone/>
+            </a:pPr>
+            <a:r>
+              <a:rPr lang="en-US" sz="850" dirty="0">
+                <a:solidFill>
+                  <a:srgbClr val="5B6B73"/>
+                </a:solidFill>
+                <a:latin typeface="Calibri" pitchFamily="34" charset="0"/>
+                <a:ea typeface="Calibri" pitchFamily="34" charset="-122"/>
+                <a:cs typeface="Calibri" pitchFamily="34" charset="-120"/>
+              </a:rPr>
+              <a:t>14 POB-dia</a:t>
+            </a:r>
+            <a:endParaRPr lang="en-US" sz="850" dirty="0"/>
+          </a:p>
+        </p:txBody>
+      </p:sp>
+      <p:sp>
+        <p:nvSpPr>
+          <p:cNvPr id="34" name="Text 32"/>
+          <p:cNvSpPr txBox="1"/>
+          <p:nvPr/>
+        </p:nvSpPr>
+        <p:spPr>
+          <a:xfrm>
+            <a:off x="566928" y="4361688"/>
+            <a:ext cx="2995574" cy="365760"/>
+          </a:xfrm>
+          <a:prstGeom prst="rect">
+            <a:avLst/>
+          </a:prstGeom>
+          <a:noFill/>
+          <a:ln/>
+        </p:spPr>
+        <p:txBody>
+          <a:bodyPr wrap="square" lIns="0" tIns="0" rIns="0" bIns="0" rtlCol="0" anchor="ctr"/>
+          <a:lstStyle/>
+          <a:p>
+            <a:pPr indent="0" marL="0">
+              <a:buNone/>
+            </a:pPr>
+            <a:r>
+              <a:rPr lang="en-US" sz="1100" dirty="0">
+                <a:solidFill>
+                  <a:srgbClr val="1C2B33"/>
+                </a:solidFill>
+                <a:latin typeface="Calibri" pitchFamily="34" charset="0"/>
+                <a:ea typeface="Calibri" pitchFamily="34" charset="-122"/>
+                <a:cs typeface="Calibri" pitchFamily="34" charset="-120"/>
+              </a:rPr>
+              <a:t>P&amp;Q - Químicos</a:t>
+            </a:r>
+            <a:endParaRPr lang="en-US" sz="1100" dirty="0"/>
+          </a:p>
+        </p:txBody>
+      </p:sp>
+      <p:sp>
+        <p:nvSpPr>
+          <p:cNvPr id="35" name="Text 33"/>
+          <p:cNvSpPr txBox="1"/>
+          <p:nvPr/>
+        </p:nvSpPr>
+        <p:spPr>
+          <a:xfrm>
+            <a:off x="3452774" y="4361688"/>
+            <a:ext cx="1497787" cy="365760"/>
+          </a:xfrm>
+          <a:prstGeom prst="rect">
+            <a:avLst/>
+          </a:prstGeom>
+          <a:noFill/>
+          <a:ln/>
+        </p:spPr>
+        <p:txBody>
+          <a:bodyPr wrap="square" lIns="0" tIns="0" rIns="0" bIns="0" rtlCol="0" anchor="ctr"/>
+          <a:lstStyle/>
+          <a:p>
+            <a:pPr algn="r" indent="0" marL="0">
+              <a:buNone/>
+            </a:pPr>
+            <a:r>
+              <a:rPr lang="en-US" sz="1100" b="1" dirty="0">
+                <a:solidFill>
+                  <a:srgbClr val="0B2A3D"/>
+                </a:solidFill>
+                <a:latin typeface="Calibri" pitchFamily="34" charset="0"/>
+                <a:ea typeface="Calibri" pitchFamily="34" charset="-122"/>
+                <a:cs typeface="Calibri" pitchFamily="34" charset="-120"/>
+              </a:rPr>
+              <a:t>US$ 10,0 mil</a:t>
+            </a:r>
+            <a:endParaRPr lang="en-US" sz="1100" dirty="0"/>
+          </a:p>
+        </p:txBody>
+      </p:sp>
+      <p:sp>
+        <p:nvSpPr>
+          <p:cNvPr id="36" name="Text 34"/>
+          <p:cNvSpPr txBox="1"/>
+          <p:nvPr/>
+        </p:nvSpPr>
+        <p:spPr>
+          <a:xfrm>
+            <a:off x="4840834" y="4361688"/>
+            <a:ext cx="965606" cy="365760"/>
+          </a:xfrm>
+          <a:prstGeom prst="rect">
+            <a:avLst/>
+          </a:prstGeom>
+          <a:noFill/>
+          <a:ln/>
+        </p:spPr>
+        <p:txBody>
+          <a:bodyPr wrap="square" lIns="0" tIns="0" rIns="0" bIns="0" rtlCol="0" anchor="ctr"/>
+          <a:lstStyle/>
+          <a:p>
+            <a:pPr algn="r" indent="0" marL="0">
+              <a:buNone/>
+            </a:pPr>
+            <a:r>
+              <a:rPr lang="en-US" sz="850" dirty="0">
+                <a:solidFill>
+                  <a:srgbClr val="5B6B73"/>
+                </a:solidFill>
+                <a:latin typeface="Calibri" pitchFamily="34" charset="0"/>
+                <a:ea typeface="Calibri" pitchFamily="34" charset="-122"/>
+                <a:cs typeface="Calibri" pitchFamily="34" charset="-120"/>
+              </a:rPr>
+              <a:t>6 POB-dia</a:t>
+            </a:r>
+            <a:endParaRPr lang="en-US" sz="850" dirty="0"/>
+          </a:p>
+        </p:txBody>
+      </p:sp>
+      <p:sp>
+        <p:nvSpPr>
+          <p:cNvPr id="37" name="Shape 35"/>
+          <p:cNvSpPr/>
+          <p:nvPr/>
+        </p:nvSpPr>
+        <p:spPr>
+          <a:xfrm>
+            <a:off x="457200" y="4727448"/>
+            <a:ext cx="5349240" cy="365760"/>
+          </a:xfrm>
+          <a:prstGeom prst="rect">
+            <a:avLst/>
+          </a:prstGeom>
+          <a:solidFill>
+            <a:srgbClr val="F0F4F5"/>
+          </a:solidFill>
+          <a:ln/>
+        </p:spPr>
+      </p:sp>
+      <p:sp>
+        <p:nvSpPr>
+          <p:cNvPr id="38" name="Text 36"/>
+          <p:cNvSpPr txBox="1"/>
+          <p:nvPr/>
+        </p:nvSpPr>
+        <p:spPr>
+          <a:xfrm>
+            <a:off x="566928" y="4727448"/>
             <a:ext cx="2995574" cy="365760"/>
           </a:xfrm>
           <a:prstGeom prst="rect">
@@ -9322,13 +10084,13 @@
       </p:sp>
       <p:sp>
         <p:nvSpPr>
-          <p:cNvPr id="32" name="Text 30"/>
+          <p:cNvPr id="39" name="Text 37"/>
           <p:cNvSpPr txBox="1"/>
           <p:nvPr/>
         </p:nvSpPr>
         <p:spPr>
           <a:xfrm>
-            <a:off x="3452774" y="3995928"/>
+            <a:off x="3452774" y="4727448"/>
             <a:ext cx="1497787" cy="365760"/>
           </a:xfrm>
           <a:prstGeom prst="rect">
@@ -9361,13 +10123,13 @@
       </p:sp>
       <p:sp>
         <p:nvSpPr>
-          <p:cNvPr id="33" name="Text 31"/>
+          <p:cNvPr id="40" name="Text 38"/>
           <p:cNvSpPr txBox="1"/>
           <p:nvPr/>
         </p:nvSpPr>
         <p:spPr>
           <a:xfrm>
-            <a:off x="4840834" y="3995928"/>
+            <a:off x="4840834" y="4727448"/>
             <a:ext cx="965606" cy="365760"/>
           </a:xfrm>
           <a:prstGeom prst="rect">
@@ -9384,7 +10146,7 @@
               <a:buNone/>
             </a:pPr>
             <a:r>
-              <a:rPr lang="en-US" sz="900" dirty="0">
+              <a:rPr lang="en-US" sz="850" dirty="0">
                 <a:solidFill>
                   <a:srgbClr val="5B6B73"/>
                 </a:solidFill>
@@ -9392,15 +10154,15 @@
                 <a:ea typeface="Calibri" pitchFamily="34" charset="-122"/>
                 <a:cs typeface="Calibri" pitchFamily="34" charset="-120"/>
               </a:rPr>
-              <a:t>0 POB</a:t>
+              <a:t>0 POB-dia</a:t>
             </a:r>
-            <a:endParaRPr lang="en-US" sz="900" dirty="0"/>
+            <a:endParaRPr lang="en-US" sz="850" dirty="0"/>
           </a:p>
         </p:txBody>
       </p:sp>
       <p:sp>
         <p:nvSpPr>
-          <p:cNvPr id="34" name="Text 32"/>
+          <p:cNvPr id="41" name="Text 39"/>
           <p:cNvSpPr txBox="1"/>
           <p:nvPr/>
         </p:nvSpPr>
@@ -9439,7 +10201,7 @@
       </p:sp>
       <p:sp>
         <p:nvSpPr>
-          <p:cNvPr id="35" name="Shape 33"/>
+          <p:cNvPr id="42" name="Shape 40"/>
           <p:cNvSpPr/>
           <p:nvPr/>
         </p:nvSpPr>
@@ -9462,13 +10224,150 @@
       </p:sp>
       <p:sp>
         <p:nvSpPr>
-          <p:cNvPr id="36" name="Text 34"/>
+          <p:cNvPr id="43" name="Text 41"/>
           <p:cNvSpPr txBox="1"/>
           <p:nvPr/>
         </p:nvSpPr>
         <p:spPr>
           <a:xfrm>
             <a:off x="6464808" y="2898648"/>
+            <a:ext cx="2995574" cy="365760"/>
+          </a:xfrm>
+          <a:prstGeom prst="rect">
+            <a:avLst/>
+          </a:prstGeom>
+          <a:noFill/>
+          <a:ln/>
+        </p:spPr>
+        <p:txBody>
+          <a:bodyPr wrap="square" lIns="0" tIns="0" rIns="0" bIns="0" rtlCol="0" anchor="ctr"/>
+          <a:lstStyle/>
+          <a:p>
+            <a:pPr indent="0" marL="0">
+              <a:buNone/>
+            </a:pPr>
+            <a:r>
+              <a:rPr lang="en-US" sz="1100" dirty="0">
+                <a:solidFill>
+                  <a:srgbClr val="1C2B33"/>
+                </a:solidFill>
+                <a:latin typeface="Calibri" pitchFamily="34" charset="0"/>
+                <a:ea typeface="Calibri" pitchFamily="34" charset="-122"/>
+                <a:cs typeface="Calibri" pitchFamily="34" charset="-120"/>
+              </a:rPr>
+              <a:t>Desenvolvimento de Produção</a:t>
+            </a:r>
+            <a:endParaRPr lang="en-US" sz="1100" dirty="0"/>
+          </a:p>
+        </p:txBody>
+      </p:sp>
+      <p:sp>
+        <p:nvSpPr>
+          <p:cNvPr id="44" name="Text 42"/>
+          <p:cNvSpPr txBox="1"/>
+          <p:nvPr/>
+        </p:nvSpPr>
+        <p:spPr>
+          <a:xfrm>
+            <a:off x="9350654" y="2898648"/>
+            <a:ext cx="1497787" cy="365760"/>
+          </a:xfrm>
+          <a:prstGeom prst="rect">
+            <a:avLst/>
+          </a:prstGeom>
+          <a:noFill/>
+          <a:ln/>
+        </p:spPr>
+        <p:txBody>
+          <a:bodyPr wrap="square" lIns="0" tIns="0" rIns="0" bIns="0" rtlCol="0" anchor="ctr"/>
+          <a:lstStyle/>
+          <a:p>
+            <a:pPr algn="r" indent="0" marL="0">
+              <a:buNone/>
+            </a:pPr>
+            <a:r>
+              <a:rPr lang="en-US" sz="1100" b="1" dirty="0">
+                <a:solidFill>
+                  <a:srgbClr val="0B2A3D"/>
+                </a:solidFill>
+                <a:latin typeface="Calibri" pitchFamily="34" charset="0"/>
+                <a:ea typeface="Calibri" pitchFamily="34" charset="-122"/>
+                <a:cs typeface="Calibri" pitchFamily="34" charset="-120"/>
+              </a:rPr>
+              <a:t>US$ 8,4 mi</a:t>
+            </a:r>
+            <a:endParaRPr lang="en-US" sz="1100" dirty="0"/>
+          </a:p>
+        </p:txBody>
+      </p:sp>
+      <p:sp>
+        <p:nvSpPr>
+          <p:cNvPr id="45" name="Text 43"/>
+          <p:cNvSpPr txBox="1"/>
+          <p:nvPr/>
+        </p:nvSpPr>
+        <p:spPr>
+          <a:xfrm>
+            <a:off x="10738714" y="2898648"/>
+            <a:ext cx="965606" cy="365760"/>
+          </a:xfrm>
+          <a:prstGeom prst="rect">
+            <a:avLst/>
+          </a:prstGeom>
+          <a:noFill/>
+          <a:ln/>
+        </p:spPr>
+        <p:txBody>
+          <a:bodyPr wrap="square" lIns="0" tIns="0" rIns="0" bIns="0" rtlCol="0" anchor="ctr"/>
+          <a:lstStyle/>
+          <a:p>
+            <a:pPr algn="r" indent="0" marL="0">
+              <a:buNone/>
+            </a:pPr>
+            <a:r>
+              <a:rPr lang="en-US" sz="850" dirty="0">
+                <a:solidFill>
+                  <a:srgbClr val="5B6B73"/>
+                </a:solidFill>
+                <a:latin typeface="Calibri" pitchFamily="34" charset="0"/>
+                <a:ea typeface="Calibri" pitchFamily="34" charset="-122"/>
+                <a:cs typeface="Calibri" pitchFamily="34" charset="-120"/>
+              </a:rPr>
+              <a:t>2.284 POB-dia</a:t>
+            </a:r>
+            <a:endParaRPr lang="en-US" sz="850" dirty="0"/>
+          </a:p>
+        </p:txBody>
+      </p:sp>
+      <p:sp>
+        <p:nvSpPr>
+          <p:cNvPr id="46" name="Shape 44"/>
+          <p:cNvSpPr/>
+          <p:nvPr/>
+        </p:nvSpPr>
+        <p:spPr>
+          <a:xfrm>
+            <a:off x="6355080" y="3264408"/>
+            <a:ext cx="5349240" cy="365760"/>
+          </a:xfrm>
+          <a:prstGeom prst="rect">
+            <a:avLst/>
+          </a:prstGeom>
+          <a:solidFill>
+            <a:srgbClr val="F0F4F5"/>
+          </a:solidFill>
+          <a:ln/>
+        </p:spPr>
+      </p:sp>
+      <p:sp>
+        <p:nvSpPr>
+          <p:cNvPr id="47" name="Text 45"/>
+          <p:cNvSpPr txBox="1"/>
+          <p:nvPr/>
+        </p:nvSpPr>
+        <p:spPr>
+          <a:xfrm>
+            <a:off x="6464808" y="3264408"/>
             <a:ext cx="2995574" cy="365760"/>
           </a:xfrm>
           <a:prstGeom prst="rect">
@@ -9501,13 +10400,13 @@
       </p:sp>
       <p:sp>
         <p:nvSpPr>
-          <p:cNvPr id="37" name="Text 35"/>
+          <p:cNvPr id="48" name="Text 46"/>
           <p:cNvSpPr txBox="1"/>
           <p:nvPr/>
         </p:nvSpPr>
         <p:spPr>
           <a:xfrm>
-            <a:off x="9350654" y="2898648"/>
+            <a:off x="9350654" y="3264408"/>
             <a:ext cx="1497787" cy="365760"/>
           </a:xfrm>
           <a:prstGeom prst="rect">
@@ -9532,7 +10431,7 @@
                 <a:ea typeface="Calibri" pitchFamily="34" charset="-122"/>
                 <a:cs typeface="Calibri" pitchFamily="34" charset="-120"/>
               </a:rPr>
-              <a:t>US$ 2,8 mi</a:t>
+              <a:t>US$ 3,9 mi</a:t>
             </a:r>
             <a:endParaRPr lang="en-US" sz="1100" dirty="0"/>
           </a:p>
@@ -9540,13 +10439,13 @@
       </p:sp>
       <p:sp>
         <p:nvSpPr>
-          <p:cNvPr id="38" name="Text 36"/>
+          <p:cNvPr id="49" name="Text 47"/>
           <p:cNvSpPr txBox="1"/>
           <p:nvPr/>
         </p:nvSpPr>
         <p:spPr>
           <a:xfrm>
-            <a:off x="10738714" y="2898648"/>
+            <a:off x="10738714" y="3264408"/>
             <a:ext cx="965606" cy="365760"/>
           </a:xfrm>
           <a:prstGeom prst="rect">
@@ -9563,7 +10462,7 @@
               <a:buNone/>
             </a:pPr>
             <a:r>
-              <a:rPr lang="en-US" sz="900" dirty="0">
+              <a:rPr lang="en-US" sz="850" dirty="0">
                 <a:solidFill>
                   <a:srgbClr val="5B6B73"/>
                 </a:solidFill>
@@ -9571,41 +10470,21 @@
                 <a:ea typeface="Calibri" pitchFamily="34" charset="-122"/>
                 <a:cs typeface="Calibri" pitchFamily="34" charset="-120"/>
               </a:rPr>
-              <a:t>129 POB</a:t>
+              <a:t>2.844 POB-dia</a:t>
             </a:r>
-            <a:endParaRPr lang="en-US" sz="900" dirty="0"/>
+            <a:endParaRPr lang="en-US" sz="850" dirty="0"/>
           </a:p>
         </p:txBody>
       </p:sp>
       <p:sp>
         <p:nvSpPr>
-          <p:cNvPr id="39" name="Shape 37"/>
-          <p:cNvSpPr/>
-          <p:nvPr/>
-        </p:nvSpPr>
-        <p:spPr>
-          <a:xfrm>
-            <a:off x="6355080" y="3264408"/>
-            <a:ext cx="5349240" cy="365760"/>
-          </a:xfrm>
-          <a:prstGeom prst="rect">
-            <a:avLst/>
-          </a:prstGeom>
-          <a:solidFill>
-            <a:srgbClr val="F0F4F5"/>
-          </a:solidFill>
-          <a:ln/>
-        </p:spPr>
-      </p:sp>
-      <p:sp>
-        <p:nvSpPr>
-          <p:cNvPr id="40" name="Text 38"/>
+          <p:cNvPr id="50" name="Text 48"/>
           <p:cNvSpPr txBox="1"/>
           <p:nvPr/>
         </p:nvSpPr>
         <p:spPr>
           <a:xfrm>
-            <a:off x="6464808" y="3264408"/>
+            <a:off x="6464808" y="3630168"/>
             <a:ext cx="2995574" cy="365760"/>
           </a:xfrm>
           <a:prstGeom prst="rect">
@@ -9638,13 +10517,13 @@
       </p:sp>
       <p:sp>
         <p:nvSpPr>
-          <p:cNvPr id="41" name="Text 39"/>
+          <p:cNvPr id="51" name="Text 49"/>
           <p:cNvSpPr txBox="1"/>
           <p:nvPr/>
         </p:nvSpPr>
         <p:spPr>
           <a:xfrm>
-            <a:off x="9350654" y="3264408"/>
+            <a:off x="9350654" y="3630168"/>
             <a:ext cx="1497787" cy="365760"/>
           </a:xfrm>
           <a:prstGeom prst="rect">
@@ -9677,13 +10556,13 @@
       </p:sp>
       <p:sp>
         <p:nvSpPr>
-          <p:cNvPr id="42" name="Text 40"/>
+          <p:cNvPr id="52" name="Text 50"/>
           <p:cNvSpPr txBox="1"/>
           <p:nvPr/>
         </p:nvSpPr>
         <p:spPr>
           <a:xfrm>
-            <a:off x="10738714" y="3264408"/>
+            <a:off x="10738714" y="3630168"/>
             <a:ext cx="965606" cy="365760"/>
           </a:xfrm>
           <a:prstGeom prst="rect">
@@ -9700,7 +10579,7 @@
               <a:buNone/>
             </a:pPr>
             <a:r>
-              <a:rPr lang="en-US" sz="900" dirty="0">
+              <a:rPr lang="en-US" sz="850" dirty="0">
                 <a:solidFill>
                   <a:srgbClr val="5B6B73"/>
                 </a:solidFill>
@@ -9708,21 +10587,158 @@
                 <a:ea typeface="Calibri" pitchFamily="34" charset="-122"/>
                 <a:cs typeface="Calibri" pitchFamily="34" charset="-120"/>
               </a:rPr>
-              <a:t>6 POB</a:t>
+              <a:t>52 POB-dia</a:t>
             </a:r>
-            <a:endParaRPr lang="en-US" sz="900" dirty="0"/>
+            <a:endParaRPr lang="en-US" sz="850" dirty="0"/>
           </a:p>
         </p:txBody>
       </p:sp>
       <p:sp>
         <p:nvSpPr>
-          <p:cNvPr id="43" name="Text 41"/>
+          <p:cNvPr id="53" name="Shape 51"/>
+          <p:cNvSpPr/>
+          <p:nvPr/>
+        </p:nvSpPr>
+        <p:spPr>
+          <a:xfrm>
+            <a:off x="6355080" y="3995928"/>
+            <a:ext cx="5349240" cy="365760"/>
+          </a:xfrm>
+          <a:prstGeom prst="rect">
+            <a:avLst/>
+          </a:prstGeom>
+          <a:solidFill>
+            <a:srgbClr val="F0F4F5"/>
+          </a:solidFill>
+          <a:ln/>
+        </p:spPr>
+      </p:sp>
+      <p:sp>
+        <p:nvSpPr>
+          <p:cNvPr id="54" name="Text 52"/>
           <p:cNvSpPr txBox="1"/>
           <p:nvPr/>
         </p:nvSpPr>
         <p:spPr>
           <a:xfrm>
-            <a:off x="6464808" y="3630168"/>
+            <a:off x="6464808" y="3995928"/>
+            <a:ext cx="2995574" cy="365760"/>
+          </a:xfrm>
+          <a:prstGeom prst="rect">
+            <a:avLst/>
+          </a:prstGeom>
+          <a:noFill/>
+          <a:ln/>
+        </p:spPr>
+        <p:txBody>
+          <a:bodyPr wrap="square" lIns="0" tIns="0" rIns="0" bIns="0" rtlCol="0" anchor="ctr"/>
+          <a:lstStyle/>
+          <a:p>
+            <a:pPr indent="0" marL="0">
+              <a:buNone/>
+            </a:pPr>
+            <a:r>
+              <a:rPr lang="en-US" sz="1100" dirty="0">
+                <a:solidFill>
+                  <a:srgbClr val="1C2B33"/>
+                </a:solidFill>
+                <a:latin typeface="Calibri" pitchFamily="34" charset="0"/>
+                <a:ea typeface="Calibri" pitchFamily="34" charset="-122"/>
+                <a:cs typeface="Calibri" pitchFamily="34" charset="-120"/>
+              </a:rPr>
+              <a:t>Rotina Operacional</a:t>
+            </a:r>
+            <a:endParaRPr lang="en-US" sz="1100" dirty="0"/>
+          </a:p>
+        </p:txBody>
+      </p:sp>
+      <p:sp>
+        <p:nvSpPr>
+          <p:cNvPr id="55" name="Text 53"/>
+          <p:cNvSpPr txBox="1"/>
+          <p:nvPr/>
+        </p:nvSpPr>
+        <p:spPr>
+          <a:xfrm>
+            <a:off x="9350654" y="3995928"/>
+            <a:ext cx="1497787" cy="365760"/>
+          </a:xfrm>
+          <a:prstGeom prst="rect">
+            <a:avLst/>
+          </a:prstGeom>
+          <a:noFill/>
+          <a:ln/>
+        </p:spPr>
+        <p:txBody>
+          <a:bodyPr wrap="square" lIns="0" tIns="0" rIns="0" bIns="0" rtlCol="0" anchor="ctr"/>
+          <a:lstStyle/>
+          <a:p>
+            <a:pPr algn="r" indent="0" marL="0">
+              <a:buNone/>
+            </a:pPr>
+            <a:r>
+              <a:rPr lang="en-US" sz="1100" b="1" dirty="0">
+                <a:solidFill>
+                  <a:srgbClr val="0B2A3D"/>
+                </a:solidFill>
+                <a:latin typeface="Calibri" pitchFamily="34" charset="0"/>
+                <a:ea typeface="Calibri" pitchFamily="34" charset="-122"/>
+                <a:cs typeface="Calibri" pitchFamily="34" charset="-120"/>
+              </a:rPr>
+              <a:t>US$ 10,0 mil</a:t>
+            </a:r>
+            <a:endParaRPr lang="en-US" sz="1100" dirty="0"/>
+          </a:p>
+        </p:txBody>
+      </p:sp>
+      <p:sp>
+        <p:nvSpPr>
+          <p:cNvPr id="56" name="Text 54"/>
+          <p:cNvSpPr txBox="1"/>
+          <p:nvPr/>
+        </p:nvSpPr>
+        <p:spPr>
+          <a:xfrm>
+            <a:off x="10738714" y="3995928"/>
+            <a:ext cx="965606" cy="365760"/>
+          </a:xfrm>
+          <a:prstGeom prst="rect">
+            <a:avLst/>
+          </a:prstGeom>
+          <a:noFill/>
+          <a:ln/>
+        </p:spPr>
+        <p:txBody>
+          <a:bodyPr wrap="square" lIns="0" tIns="0" rIns="0" bIns="0" rtlCol="0" anchor="ctr"/>
+          <a:lstStyle/>
+          <a:p>
+            <a:pPr algn="r" indent="0" marL="0">
+              <a:buNone/>
+            </a:pPr>
+            <a:r>
+              <a:rPr lang="en-US" sz="850" dirty="0">
+                <a:solidFill>
+                  <a:srgbClr val="5B6B73"/>
+                </a:solidFill>
+                <a:latin typeface="Calibri" pitchFamily="34" charset="0"/>
+                <a:ea typeface="Calibri" pitchFamily="34" charset="-122"/>
+                <a:cs typeface="Calibri" pitchFamily="34" charset="-120"/>
+              </a:rPr>
+              <a:t>6 POB-dia</a:t>
+            </a:r>
+            <a:endParaRPr lang="en-US" sz="850" dirty="0"/>
+          </a:p>
+        </p:txBody>
+      </p:sp>
+      <p:sp>
+        <p:nvSpPr>
+          <p:cNvPr id="57" name="Text 55"/>
+          <p:cNvSpPr txBox="1"/>
+          <p:nvPr/>
+        </p:nvSpPr>
+        <p:spPr>
+          <a:xfrm>
+            <a:off x="6464808" y="4361688"/>
             <a:ext cx="2995574" cy="365760"/>
           </a:xfrm>
           <a:prstGeom prst="rect">
@@ -9755,13 +10771,13 @@
       </p:sp>
       <p:sp>
         <p:nvSpPr>
-          <p:cNvPr id="44" name="Text 42"/>
+          <p:cNvPr id="58" name="Text 56"/>
           <p:cNvSpPr txBox="1"/>
           <p:nvPr/>
         </p:nvSpPr>
         <p:spPr>
           <a:xfrm>
-            <a:off x="9350654" y="3630168"/>
+            <a:off x="9350654" y="4361688"/>
             <a:ext cx="1497787" cy="365760"/>
           </a:xfrm>
           <a:prstGeom prst="rect">
@@ -9794,13 +10810,13 @@
       </p:sp>
       <p:sp>
         <p:nvSpPr>
-          <p:cNvPr id="45" name="Text 43"/>
+          <p:cNvPr id="59" name="Text 57"/>
           <p:cNvSpPr txBox="1"/>
           <p:nvPr/>
         </p:nvSpPr>
         <p:spPr>
           <a:xfrm>
-            <a:off x="10738714" y="3630168"/>
+            <a:off x="10738714" y="4361688"/>
             <a:ext cx="965606" cy="365760"/>
           </a:xfrm>
           <a:prstGeom prst="rect">
@@ -9817,7 +10833,7 @@
               <a:buNone/>
             </a:pPr>
             <a:r>
-              <a:rPr lang="en-US" sz="900" dirty="0">
+              <a:rPr lang="en-US" sz="850" dirty="0">
                 <a:solidFill>
                   <a:srgbClr val="5B6B73"/>
                 </a:solidFill>
@@ -9825,15 +10841,15 @@
                 <a:ea typeface="Calibri" pitchFamily="34" charset="-122"/>
                 <a:cs typeface="Calibri" pitchFamily="34" charset="-120"/>
               </a:rPr>
-              <a:t>0 POB</a:t>
+              <a:t>0 POB-dia</a:t>
             </a:r>
-            <a:endParaRPr lang="en-US" sz="900" dirty="0"/>
+            <a:endParaRPr lang="en-US" sz="850" dirty="0"/>
           </a:p>
         </p:txBody>
       </p:sp>
       <p:sp>
         <p:nvSpPr>
-          <p:cNvPr id="46" name="Text 44"/>
+          <p:cNvPr id="60" name="Text 58"/>
           <p:cNvSpPr txBox="1"/>
           <p:nvPr/>
         </p:nvSpPr>
@@ -9864,7 +10880,7 @@
                 <a:ea typeface="Calibri" pitchFamily="34" charset="-122"/>
                 <a:cs typeface="Calibri" pitchFamily="34" charset="-120"/>
               </a:rPr>
-              <a:t>Metodologia: soma de Custo de Serviço + Custo de Material (Jan–Dez), para itens de Cost Allocation = CAPEX com status 'Contar' ou 'TA'. O total desconsidera a categoria Desenvolvimento de Produção (sem itens para este ativo).</a:t>
+              <a:t>Metodologia: soma de Custo de Serviço + Custo de Material (Jan–Dez), para itens de Cost Allocation = CAPEX com status 'Contar' ou 'TA'. POB em POB-dia (pessoas a bordo × dias). O total desconsidera a categoria Desenvolvimento de Produção (US$ 8,4 mi, mantida na lista de Categoria apenas para referência).</a:t>
             </a:r>
             <a:endParaRPr lang="en-US" sz="850" dirty="0"/>
           </a:p>
@@ -13803,7 +14819,7 @@
                 <a:ea typeface="Calibri" pitchFamily="34" charset="-122"/>
                 <a:cs typeface="Calibri" pitchFamily="34" charset="-120"/>
               </a:rPr>
-              <a:t>Fonte: Plano Integrado · aba 'Geral - Em análise' · itens de Cost Allocation = CAPEX, status 'Contar' + 'TA'. Lista completa disponível na planilha em anexo.</a:t>
+              <a:t>Fonte: Plano Integrado · aba 'Geral - Em análise' · coluna 'Valor Total' · itens de Cost Allocation = CAPEX, status 'Contar' + 'TA'. Lista completa disponível na planilha em anexo. Extrato pendente de atualização — pode não somar exatamente ao total da Composição de Custo e POB.</a:t>
             </a:r>
             <a:endParaRPr lang="en-US" sz="850" dirty="0"/>
           </a:p>
@@ -13967,7 +14983,7 @@
                 <a:ea typeface="Cambria" pitchFamily="34" charset="-122"/>
                 <a:cs typeface="Cambria" pitchFamily="34" charset="-120"/>
               </a:rPr>
-              <a:t>US$ 29,5 mi</a:t>
+              <a:t>US$ 35,0 mi</a:t>
             </a:r>
             <a:endParaRPr lang="en-US" sz="2600" dirty="0"/>
           </a:p>
@@ -14106,7 +15122,7 @@
                 <a:ea typeface="Cambria" pitchFamily="34" charset="-122"/>
                 <a:cs typeface="Cambria" pitchFamily="34" charset="-120"/>
               </a:rPr>
-              <a:t>706</a:t>
+              <a:t>19.668</a:t>
             </a:r>
             <a:endParaRPr lang="en-US" sz="2600" dirty="0"/>
           </a:p>
@@ -14145,7 +15161,7 @@
                 <a:ea typeface="Calibri" pitchFamily="34" charset="-122"/>
                 <a:cs typeface="Calibri" pitchFamily="34" charset="-120"/>
               </a:rPr>
-              <a:t>POB TOTAL</a:t>
+              <a:t>POB TOTAL (POB-DIA)</a:t>
             </a:r>
             <a:endParaRPr lang="en-US" sz="950" dirty="0"/>
           </a:p>
@@ -14184,7 +15200,7 @@
                 <a:ea typeface="Calibri" pitchFamily="34" charset="-122"/>
                 <a:cs typeface="Calibri" pitchFamily="34" charset="-120"/>
               </a:rPr>
-              <a:t>pessoas a bordo alocadas</a:t>
+              <a:t>pessoas a bordo × dias, no ano</a:t>
             </a:r>
             <a:endParaRPr lang="en-US" sz="850" dirty="0"/>
           </a:p>
@@ -14688,7 +15704,7 @@
                             <a:srgbClr val="FFFFFF"/>
                           </a:solidFill>
                         </a:rPr>
-                        <a:t>POB</a:t>
+                        <a:t>POB-DIA</a:t>
                       </a:r>
                       <a:endParaRPr lang="en-US" sz="1000" dirty="0"/>
                     </a:p>
@@ -14873,7 +15889,7 @@
                             <a:srgbClr val="1C2B33"/>
                           </a:solidFill>
                         </a:rPr>
-                        <a:t>US$ 16,0 mi</a:t>
+                        <a:t>US$ 18,1 mi</a:t>
                       </a:r>
                       <a:endParaRPr lang="en-US" sz="1050" dirty="0"/>
                     </a:p>
@@ -14934,7 +15950,7 @@
                             <a:srgbClr val="1C2B33"/>
                           </a:solidFill>
                         </a:rPr>
-                        <a:t>268</a:t>
+                        <a:t>5.544</a:t>
                       </a:r>
                       <a:endParaRPr lang="en-US" sz="1050" dirty="0"/>
                     </a:p>
@@ -15119,7 +16135,7 @@
                             <a:srgbClr val="1C2B33"/>
                           </a:solidFill>
                         </a:rPr>
-                        <a:t>US$ 7,2 mi</a:t>
+                        <a:t>US$ 8,8 mi</a:t>
                       </a:r>
                       <a:endParaRPr lang="en-US" sz="1050" dirty="0"/>
                     </a:p>
@@ -15180,7 +16196,7 @@
                             <a:srgbClr val="1C2B33"/>
                           </a:solidFill>
                         </a:rPr>
-                        <a:t>182</a:t>
+                        <a:t>5.092</a:t>
                       </a:r>
                       <a:endParaRPr lang="en-US" sz="1050" dirty="0"/>
                     </a:p>
@@ -15365,7 +16381,7 @@
                             <a:srgbClr val="1C2B33"/>
                           </a:solidFill>
                         </a:rPr>
-                        <a:t>US$ 2,9 mi</a:t>
+                        <a:t>US$ 3,5 mi</a:t>
                       </a:r>
                       <a:endParaRPr lang="en-US" sz="1050" dirty="0"/>
                     </a:p>
@@ -15426,7 +16442,7 @@
                             <a:srgbClr val="1C2B33"/>
                           </a:solidFill>
                         </a:rPr>
-                        <a:t>121</a:t>
+                        <a:t>3.846</a:t>
                       </a:r>
                       <a:endParaRPr lang="en-US" sz="1050" dirty="0"/>
                     </a:p>
@@ -15611,7 +16627,7 @@
                             <a:srgbClr val="1C2B33"/>
                           </a:solidFill>
                         </a:rPr>
-                        <a:t>US$ 3,4 mi</a:t>
+                        <a:t>US$ 4,5 mi</a:t>
                       </a:r>
                       <a:endParaRPr lang="en-US" sz="1050" dirty="0"/>
                     </a:p>
@@ -15672,7 +16688,7 @@
                             <a:srgbClr val="1C2B33"/>
                           </a:solidFill>
                         </a:rPr>
-                        <a:t>135</a:t>
+                        <a:t>5.186</a:t>
                       </a:r>
                       <a:endParaRPr lang="en-US" sz="1050" dirty="0"/>
                     </a:p>
@@ -15857,7 +16873,7 @@
                             <a:srgbClr val="0B2A3D"/>
                           </a:solidFill>
                         </a:rPr>
-                        <a:t>US$ 29,5 mi</a:t>
+                        <a:t>US$ 35,0 mi</a:t>
                       </a:r>
                       <a:endParaRPr lang="en-US" sz="1050" dirty="0"/>
                     </a:p>
@@ -15918,7 +16934,7 @@
                             <a:srgbClr val="0B2A3D"/>
                           </a:solidFill>
                         </a:rPr>
-                        <a:t>706</a:t>
+                        <a:t>19.668</a:t>
                       </a:r>
                       <a:endParaRPr lang="en-US" sz="1050" dirty="0"/>
                     </a:p>
@@ -16651,7 +17667,7 @@
                 <a:ea typeface="Cambria" pitchFamily="34" charset="-122"/>
                 <a:cs typeface="Cambria" pitchFamily="34" charset="-120"/>
               </a:rPr>
-              <a:t>US$ 9,8 mi</a:t>
+              <a:t>US$ 12,0 mi</a:t>
             </a:r>
             <a:endParaRPr lang="en-US" sz="2100" dirty="0"/>
           </a:p>
@@ -16751,7 +17767,7 @@
                 <a:ea typeface="Cambria" pitchFamily="34" charset="-122"/>
                 <a:cs typeface="Cambria" pitchFamily="34" charset="-120"/>
               </a:rPr>
-              <a:t>US$ 16,0 mi</a:t>
+              <a:t>US$ 18,1 mi</a:t>
             </a:r>
             <a:endParaRPr lang="en-US" sz="2100" dirty="0"/>
           </a:p>
@@ -16851,7 +17867,7 @@
                 <a:ea typeface="Cambria" pitchFamily="34" charset="-122"/>
                 <a:cs typeface="Cambria" pitchFamily="34" charset="-120"/>
               </a:rPr>
-              <a:t>268</a:t>
+              <a:t>5.544</a:t>
             </a:r>
             <a:endParaRPr lang="en-US" sz="2100" dirty="0"/>
           </a:p>
@@ -16890,7 +17906,7 @@
                 <a:ea typeface="Calibri" pitchFamily="34" charset="-122"/>
                 <a:cs typeface="Calibri" pitchFamily="34" charset="-120"/>
               </a:rPr>
-              <a:t>POB TOTAL</a:t>
+              <a:t>POB TOTAL (POB-DIA)</a:t>
             </a:r>
             <a:endParaRPr lang="en-US" sz="850" dirty="0"/>
           </a:p>
@@ -17061,7 +18077,7 @@
               <a:buNone/>
             </a:pPr>
             <a:r>
-              <a:rPr lang="en-US" sz="900" dirty="0">
+              <a:rPr lang="en-US" sz="850" dirty="0">
                 <a:solidFill>
                   <a:srgbClr val="5B6B73"/>
                 </a:solidFill>
@@ -17069,9 +18085,9 @@
                 <a:ea typeface="Calibri" pitchFamily="34" charset="-122"/>
                 <a:cs typeface="Calibri" pitchFamily="34" charset="-120"/>
               </a:rPr>
-              <a:t>92 POB</a:t>
+              <a:t>1.611 POB-dia</a:t>
             </a:r>
-            <a:endParaRPr lang="en-US" sz="900" dirty="0"/>
+            <a:endParaRPr lang="en-US" sz="850" dirty="0"/>
           </a:p>
         </p:txBody>
       </p:sp>
@@ -17198,7 +18214,7 @@
               <a:buNone/>
             </a:pPr>
             <a:r>
-              <a:rPr lang="en-US" sz="900" dirty="0">
+              <a:rPr lang="en-US" sz="850" dirty="0">
                 <a:solidFill>
                   <a:srgbClr val="5B6B73"/>
                 </a:solidFill>
@@ -17206,9 +18222,9 @@
                 <a:ea typeface="Calibri" pitchFamily="34" charset="-122"/>
                 <a:cs typeface="Calibri" pitchFamily="34" charset="-120"/>
               </a:rPr>
-              <a:t>16 POB</a:t>
+              <a:t>224 POB-dia</a:t>
             </a:r>
-            <a:endParaRPr lang="en-US" sz="900" dirty="0"/>
+            <a:endParaRPr lang="en-US" sz="850" dirty="0"/>
           </a:p>
         </p:txBody>
       </p:sp>
@@ -17221,6 +18237,143 @@
         <p:spPr>
           <a:xfrm>
             <a:off x="566928" y="3630168"/>
+            <a:ext cx="2995574" cy="365760"/>
+          </a:xfrm>
+          <a:prstGeom prst="rect">
+            <a:avLst/>
+          </a:prstGeom>
+          <a:noFill/>
+          <a:ln/>
+        </p:spPr>
+        <p:txBody>
+          <a:bodyPr wrap="square" lIns="0" tIns="0" rIns="0" bIns="0" rtlCol="0" anchor="ctr"/>
+          <a:lstStyle/>
+          <a:p>
+            <a:pPr indent="0" marL="0">
+              <a:buNone/>
+            </a:pPr>
+            <a:r>
+              <a:rPr lang="en-US" sz="1100" dirty="0">
+                <a:solidFill>
+                  <a:srgbClr val="1C2B33"/>
+                </a:solidFill>
+                <a:latin typeface="Calibri" pitchFamily="34" charset="0"/>
+                <a:ea typeface="Calibri" pitchFamily="34" charset="-122"/>
+                <a:cs typeface="Calibri" pitchFamily="34" charset="-120"/>
+              </a:rPr>
+              <a:t>TA - Parada Programada</a:t>
+            </a:r>
+            <a:endParaRPr lang="en-US" sz="1100" dirty="0"/>
+          </a:p>
+        </p:txBody>
+      </p:sp>
+      <p:sp>
+        <p:nvSpPr>
+          <p:cNvPr id="28" name="Text 26"/>
+          <p:cNvSpPr txBox="1"/>
+          <p:nvPr/>
+        </p:nvSpPr>
+        <p:spPr>
+          <a:xfrm>
+            <a:off x="3452774" y="3630168"/>
+            <a:ext cx="1497787" cy="365760"/>
+          </a:xfrm>
+          <a:prstGeom prst="rect">
+            <a:avLst/>
+          </a:prstGeom>
+          <a:noFill/>
+          <a:ln/>
+        </p:spPr>
+        <p:txBody>
+          <a:bodyPr wrap="square" lIns="0" tIns="0" rIns="0" bIns="0" rtlCol="0" anchor="ctr"/>
+          <a:lstStyle/>
+          <a:p>
+            <a:pPr algn="r" indent="0" marL="0">
+              <a:buNone/>
+            </a:pPr>
+            <a:r>
+              <a:rPr lang="en-US" sz="1100" b="1" dirty="0">
+                <a:solidFill>
+                  <a:srgbClr val="0B2A3D"/>
+                </a:solidFill>
+                <a:latin typeface="Calibri" pitchFamily="34" charset="0"/>
+                <a:ea typeface="Calibri" pitchFamily="34" charset="-122"/>
+                <a:cs typeface="Calibri" pitchFamily="34" charset="-120"/>
+              </a:rPr>
+              <a:t>US$ 3,3 mi</a:t>
+            </a:r>
+            <a:endParaRPr lang="en-US" sz="1100" dirty="0"/>
+          </a:p>
+        </p:txBody>
+      </p:sp>
+      <p:sp>
+        <p:nvSpPr>
+          <p:cNvPr id="29" name="Text 27"/>
+          <p:cNvSpPr txBox="1"/>
+          <p:nvPr/>
+        </p:nvSpPr>
+        <p:spPr>
+          <a:xfrm>
+            <a:off x="4840834" y="3630168"/>
+            <a:ext cx="965606" cy="365760"/>
+          </a:xfrm>
+          <a:prstGeom prst="rect">
+            <a:avLst/>
+          </a:prstGeom>
+          <a:noFill/>
+          <a:ln/>
+        </p:spPr>
+        <p:txBody>
+          <a:bodyPr wrap="square" lIns="0" tIns="0" rIns="0" bIns="0" rtlCol="0" anchor="ctr"/>
+          <a:lstStyle/>
+          <a:p>
+            <a:pPr algn="r" indent="0" marL="0">
+              <a:buNone/>
+            </a:pPr>
+            <a:r>
+              <a:rPr lang="en-US" sz="850" dirty="0">
+                <a:solidFill>
+                  <a:srgbClr val="5B6B73"/>
+                </a:solidFill>
+                <a:latin typeface="Calibri" pitchFamily="34" charset="0"/>
+                <a:ea typeface="Calibri" pitchFamily="34" charset="-122"/>
+                <a:cs typeface="Calibri" pitchFamily="34" charset="-120"/>
+              </a:rPr>
+              <a:t>2.865 POB-dia</a:t>
+            </a:r>
+            <a:endParaRPr lang="en-US" sz="850" dirty="0"/>
+          </a:p>
+        </p:txBody>
+      </p:sp>
+      <p:sp>
+        <p:nvSpPr>
+          <p:cNvPr id="30" name="Shape 28"/>
+          <p:cNvSpPr/>
+          <p:nvPr/>
+        </p:nvSpPr>
+        <p:spPr>
+          <a:xfrm>
+            <a:off x="457200" y="3995928"/>
+            <a:ext cx="5349240" cy="365760"/>
+          </a:xfrm>
+          <a:prstGeom prst="rect">
+            <a:avLst/>
+          </a:prstGeom>
+          <a:solidFill>
+            <a:srgbClr val="F0F4F5"/>
+          </a:solidFill>
+          <a:ln/>
+        </p:spPr>
+      </p:sp>
+      <p:sp>
+        <p:nvSpPr>
+          <p:cNvPr id="31" name="Text 29"/>
+          <p:cNvSpPr txBox="1"/>
+          <p:nvPr/>
+        </p:nvSpPr>
+        <p:spPr>
+          <a:xfrm>
+            <a:off x="566928" y="3995928"/>
             <a:ext cx="2995574" cy="365760"/>
           </a:xfrm>
           <a:prstGeom prst="rect">
@@ -17253,13 +18406,13 @@
       </p:sp>
       <p:sp>
         <p:nvSpPr>
-          <p:cNvPr id="28" name="Text 26"/>
+          <p:cNvPr id="32" name="Text 30"/>
           <p:cNvSpPr txBox="1"/>
           <p:nvPr/>
         </p:nvSpPr>
         <p:spPr>
           <a:xfrm>
-            <a:off x="3452774" y="3630168"/>
+            <a:off x="3452774" y="3995928"/>
             <a:ext cx="1497787" cy="365760"/>
           </a:xfrm>
           <a:prstGeom prst="rect">
@@ -17292,13 +18445,13 @@
       </p:sp>
       <p:sp>
         <p:nvSpPr>
-          <p:cNvPr id="29" name="Text 27"/>
+          <p:cNvPr id="33" name="Text 31"/>
           <p:cNvSpPr txBox="1"/>
           <p:nvPr/>
         </p:nvSpPr>
         <p:spPr>
           <a:xfrm>
-            <a:off x="4840834" y="3630168"/>
+            <a:off x="4840834" y="3995928"/>
             <a:ext cx="965606" cy="365760"/>
           </a:xfrm>
           <a:prstGeom prst="rect">
@@ -17315,7 +18468,7 @@
               <a:buNone/>
             </a:pPr>
             <a:r>
-              <a:rPr lang="en-US" sz="900" dirty="0">
+              <a:rPr lang="en-US" sz="850" dirty="0">
                 <a:solidFill>
                   <a:srgbClr val="5B6B73"/>
                 </a:solidFill>
@@ -17323,146 +18476,9 @@
                 <a:ea typeface="Calibri" pitchFamily="34" charset="-122"/>
                 <a:cs typeface="Calibri" pitchFamily="34" charset="-120"/>
               </a:rPr>
-              <a:t>14 POB</a:t>
+              <a:t>248 POB-dia</a:t>
             </a:r>
-            <a:endParaRPr lang="en-US" sz="900" dirty="0"/>
-          </a:p>
-        </p:txBody>
-      </p:sp>
-      <p:sp>
-        <p:nvSpPr>
-          <p:cNvPr id="30" name="Shape 28"/>
-          <p:cNvSpPr/>
-          <p:nvPr/>
-        </p:nvSpPr>
-        <p:spPr>
-          <a:xfrm>
-            <a:off x="457200" y="3995928"/>
-            <a:ext cx="5349240" cy="365760"/>
-          </a:xfrm>
-          <a:prstGeom prst="rect">
-            <a:avLst/>
-          </a:prstGeom>
-          <a:solidFill>
-            <a:srgbClr val="F0F4F5"/>
-          </a:solidFill>
-          <a:ln/>
-        </p:spPr>
-      </p:sp>
-      <p:sp>
-        <p:nvSpPr>
-          <p:cNvPr id="31" name="Text 29"/>
-          <p:cNvSpPr txBox="1"/>
-          <p:nvPr/>
-        </p:nvSpPr>
-        <p:spPr>
-          <a:xfrm>
-            <a:off x="566928" y="3995928"/>
-            <a:ext cx="2995574" cy="365760"/>
-          </a:xfrm>
-          <a:prstGeom prst="rect">
-            <a:avLst/>
-          </a:prstGeom>
-          <a:noFill/>
-          <a:ln/>
-        </p:spPr>
-        <p:txBody>
-          <a:bodyPr wrap="square" lIns="0" tIns="0" rIns="0" bIns="0" rtlCol="0" anchor="ctr"/>
-          <a:lstStyle/>
-          <a:p>
-            <a:pPr indent="0" marL="0">
-              <a:buNone/>
-            </a:pPr>
-            <a:r>
-              <a:rPr lang="en-US" sz="1100" dirty="0">
-                <a:solidFill>
-                  <a:srgbClr val="1C2B33"/>
-                </a:solidFill>
-                <a:latin typeface="Calibri" pitchFamily="34" charset="0"/>
-                <a:ea typeface="Calibri" pitchFamily="34" charset="-122"/>
-                <a:cs typeface="Calibri" pitchFamily="34" charset="-120"/>
-              </a:rPr>
-              <a:t>TA - Parada Programada</a:t>
-            </a:r>
-            <a:endParaRPr lang="en-US" sz="1100" dirty="0"/>
-          </a:p>
-        </p:txBody>
-      </p:sp>
-      <p:sp>
-        <p:nvSpPr>
-          <p:cNvPr id="32" name="Text 30"/>
-          <p:cNvSpPr txBox="1"/>
-          <p:nvPr/>
-        </p:nvSpPr>
-        <p:spPr>
-          <a:xfrm>
-            <a:off x="3452774" y="3995928"/>
-            <a:ext cx="1497787" cy="365760"/>
-          </a:xfrm>
-          <a:prstGeom prst="rect">
-            <a:avLst/>
-          </a:prstGeom>
-          <a:noFill/>
-          <a:ln/>
-        </p:spPr>
-        <p:txBody>
-          <a:bodyPr wrap="square" lIns="0" tIns="0" rIns="0" bIns="0" rtlCol="0" anchor="ctr"/>
-          <a:lstStyle/>
-          <a:p>
-            <a:pPr algn="r" indent="0" marL="0">
-              <a:buNone/>
-            </a:pPr>
-            <a:r>
-              <a:rPr lang="en-US" sz="1100" b="1" dirty="0">
-                <a:solidFill>
-                  <a:srgbClr val="0B2A3D"/>
-                </a:solidFill>
-                <a:latin typeface="Calibri" pitchFamily="34" charset="0"/>
-                <a:ea typeface="Calibri" pitchFamily="34" charset="-122"/>
-                <a:cs typeface="Calibri" pitchFamily="34" charset="-120"/>
-              </a:rPr>
-              <a:t>US$ 1,2 mi</a:t>
-            </a:r>
-            <a:endParaRPr lang="en-US" sz="1100" dirty="0"/>
-          </a:p>
-        </p:txBody>
-      </p:sp>
-      <p:sp>
-        <p:nvSpPr>
-          <p:cNvPr id="33" name="Text 31"/>
-          <p:cNvSpPr txBox="1"/>
-          <p:nvPr/>
-        </p:nvSpPr>
-        <p:spPr>
-          <a:xfrm>
-            <a:off x="4840834" y="3995928"/>
-            <a:ext cx="965606" cy="365760"/>
-          </a:xfrm>
-          <a:prstGeom prst="rect">
-            <a:avLst/>
-          </a:prstGeom>
-          <a:noFill/>
-          <a:ln/>
-        </p:spPr>
-        <p:txBody>
-          <a:bodyPr wrap="square" lIns="0" tIns="0" rIns="0" bIns="0" rtlCol="0" anchor="ctr"/>
-          <a:lstStyle/>
-          <a:p>
-            <a:pPr algn="r" indent="0" marL="0">
-              <a:buNone/>
-            </a:pPr>
-            <a:r>
-              <a:rPr lang="en-US" sz="900" dirty="0">
-                <a:solidFill>
-                  <a:srgbClr val="5B6B73"/>
-                </a:solidFill>
-                <a:latin typeface="Calibri" pitchFamily="34" charset="0"/>
-                <a:ea typeface="Calibri" pitchFamily="34" charset="-122"/>
-                <a:cs typeface="Calibri" pitchFamily="34" charset="-120"/>
-              </a:rPr>
-              <a:t>127 POB</a:t>
-            </a:r>
-            <a:endParaRPr lang="en-US" sz="900" dirty="0"/>
+            <a:endParaRPr lang="en-US" sz="850" dirty="0"/>
           </a:p>
         </p:txBody>
       </p:sp>
@@ -17569,7 +18585,7 @@
               <a:buNone/>
             </a:pPr>
             <a:r>
-              <a:rPr lang="en-US" sz="900" dirty="0">
+              <a:rPr lang="en-US" sz="850" dirty="0">
                 <a:solidFill>
                   <a:srgbClr val="5B6B73"/>
                 </a:solidFill>
@@ -17577,9 +18593,9 @@
                 <a:ea typeface="Calibri" pitchFamily="34" charset="-122"/>
                 <a:cs typeface="Calibri" pitchFamily="34" charset="-120"/>
               </a:rPr>
-              <a:t>18 POB</a:t>
+              <a:t>540 POB-dia</a:t>
             </a:r>
-            <a:endParaRPr lang="en-US" sz="900" dirty="0"/>
+            <a:endParaRPr lang="en-US" sz="850" dirty="0"/>
           </a:p>
         </p:txBody>
       </p:sp>
@@ -17612,6 +18628,123 @@
         <p:spPr>
           <a:xfrm>
             <a:off x="566928" y="4727448"/>
+            <a:ext cx="2995574" cy="365760"/>
+          </a:xfrm>
+          <a:prstGeom prst="rect">
+            <a:avLst/>
+          </a:prstGeom>
+          <a:noFill/>
+          <a:ln/>
+        </p:spPr>
+        <p:txBody>
+          <a:bodyPr wrap="square" lIns="0" tIns="0" rIns="0" bIns="0" rtlCol="0" anchor="ctr"/>
+          <a:lstStyle/>
+          <a:p>
+            <a:pPr indent="0" marL="0">
+              <a:buNone/>
+            </a:pPr>
+            <a:r>
+              <a:rPr lang="en-US" sz="1100" dirty="0">
+                <a:solidFill>
+                  <a:srgbClr val="1C2B33"/>
+                </a:solidFill>
+                <a:latin typeface="Calibri" pitchFamily="34" charset="0"/>
+                <a:ea typeface="Calibri" pitchFamily="34" charset="-122"/>
+                <a:cs typeface="Calibri" pitchFamily="34" charset="-120"/>
+              </a:rPr>
+              <a:t>P&amp;Q - Químicos</a:t>
+            </a:r>
+            <a:endParaRPr lang="en-US" sz="1100" dirty="0"/>
+          </a:p>
+        </p:txBody>
+      </p:sp>
+      <p:sp>
+        <p:nvSpPr>
+          <p:cNvPr id="39" name="Text 37"/>
+          <p:cNvSpPr txBox="1"/>
+          <p:nvPr/>
+        </p:nvSpPr>
+        <p:spPr>
+          <a:xfrm>
+            <a:off x="3452774" y="4727448"/>
+            <a:ext cx="1497787" cy="365760"/>
+          </a:xfrm>
+          <a:prstGeom prst="rect">
+            <a:avLst/>
+          </a:prstGeom>
+          <a:noFill/>
+          <a:ln/>
+        </p:spPr>
+        <p:txBody>
+          <a:bodyPr wrap="square" lIns="0" tIns="0" rIns="0" bIns="0" rtlCol="0" anchor="ctr"/>
+          <a:lstStyle/>
+          <a:p>
+            <a:pPr algn="r" indent="0" marL="0">
+              <a:buNone/>
+            </a:pPr>
+            <a:r>
+              <a:rPr lang="en-US" sz="1100" b="1" dirty="0">
+                <a:solidFill>
+                  <a:srgbClr val="0B2A3D"/>
+                </a:solidFill>
+                <a:latin typeface="Calibri" pitchFamily="34" charset="0"/>
+                <a:ea typeface="Calibri" pitchFamily="34" charset="-122"/>
+                <a:cs typeface="Calibri" pitchFamily="34" charset="-120"/>
+              </a:rPr>
+              <a:t>US$ 140,5 mil</a:t>
+            </a:r>
+            <a:endParaRPr lang="en-US" sz="1100" dirty="0"/>
+          </a:p>
+        </p:txBody>
+      </p:sp>
+      <p:sp>
+        <p:nvSpPr>
+          <p:cNvPr id="40" name="Text 38"/>
+          <p:cNvSpPr txBox="1"/>
+          <p:nvPr/>
+        </p:nvSpPr>
+        <p:spPr>
+          <a:xfrm>
+            <a:off x="4840834" y="4727448"/>
+            <a:ext cx="965606" cy="365760"/>
+          </a:xfrm>
+          <a:prstGeom prst="rect">
+            <a:avLst/>
+          </a:prstGeom>
+          <a:noFill/>
+          <a:ln/>
+        </p:spPr>
+        <p:txBody>
+          <a:bodyPr wrap="square" lIns="0" tIns="0" rIns="0" bIns="0" rtlCol="0" anchor="ctr"/>
+          <a:lstStyle/>
+          <a:p>
+            <a:pPr algn="r" indent="0" marL="0">
+              <a:buNone/>
+            </a:pPr>
+            <a:r>
+              <a:rPr lang="en-US" sz="850" dirty="0">
+                <a:solidFill>
+                  <a:srgbClr val="5B6B73"/>
+                </a:solidFill>
+                <a:latin typeface="Calibri" pitchFamily="34" charset="0"/>
+                <a:ea typeface="Calibri" pitchFamily="34" charset="-122"/>
+                <a:cs typeface="Calibri" pitchFamily="34" charset="-120"/>
+              </a:rPr>
+              <a:t>56 POB-dia</a:t>
+            </a:r>
+            <a:endParaRPr lang="en-US" sz="850" dirty="0"/>
+          </a:p>
+        </p:txBody>
+      </p:sp>
+      <p:sp>
+        <p:nvSpPr>
+          <p:cNvPr id="41" name="Text 39"/>
+          <p:cNvSpPr txBox="1"/>
+          <p:nvPr/>
+        </p:nvSpPr>
+        <p:spPr>
+          <a:xfrm>
+            <a:off x="566928" y="5093208"/>
             <a:ext cx="2995574" cy="365760"/>
           </a:xfrm>
           <a:prstGeom prst="rect">
@@ -17644,13 +18777,13 @@
       </p:sp>
       <p:sp>
         <p:nvSpPr>
-          <p:cNvPr id="39" name="Text 37"/>
+          <p:cNvPr id="42" name="Text 40"/>
           <p:cNvSpPr txBox="1"/>
           <p:nvPr/>
         </p:nvSpPr>
         <p:spPr>
           <a:xfrm>
-            <a:off x="3452774" y="4727448"/>
+            <a:off x="3452774" y="5093208"/>
             <a:ext cx="1497787" cy="365760"/>
           </a:xfrm>
           <a:prstGeom prst="rect">
@@ -17683,13 +18816,13 @@
       </p:sp>
       <p:sp>
         <p:nvSpPr>
-          <p:cNvPr id="40" name="Text 38"/>
+          <p:cNvPr id="43" name="Text 41"/>
           <p:cNvSpPr txBox="1"/>
           <p:nvPr/>
         </p:nvSpPr>
         <p:spPr>
           <a:xfrm>
-            <a:off x="4840834" y="4727448"/>
+            <a:off x="4840834" y="5093208"/>
             <a:ext cx="965606" cy="365760"/>
           </a:xfrm>
           <a:prstGeom prst="rect">
@@ -17706,7 +18839,7 @@
               <a:buNone/>
             </a:pPr>
             <a:r>
-              <a:rPr lang="en-US" sz="900" dirty="0">
+              <a:rPr lang="en-US" sz="850" dirty="0">
                 <a:solidFill>
                   <a:srgbClr val="5B6B73"/>
                 </a:solidFill>
@@ -17714,126 +18847,9 @@
                 <a:ea typeface="Calibri" pitchFamily="34" charset="-122"/>
                 <a:cs typeface="Calibri" pitchFamily="34" charset="-120"/>
               </a:rPr>
-              <a:t>0 POB</a:t>
+              <a:t>0 POB-dia</a:t>
             </a:r>
-            <a:endParaRPr lang="en-US" sz="900" dirty="0"/>
-          </a:p>
-        </p:txBody>
-      </p:sp>
-      <p:sp>
-        <p:nvSpPr>
-          <p:cNvPr id="41" name="Text 39"/>
-          <p:cNvSpPr txBox="1"/>
-          <p:nvPr/>
-        </p:nvSpPr>
-        <p:spPr>
-          <a:xfrm>
-            <a:off x="566928" y="5093208"/>
-            <a:ext cx="2995574" cy="365760"/>
-          </a:xfrm>
-          <a:prstGeom prst="rect">
-            <a:avLst/>
-          </a:prstGeom>
-          <a:noFill/>
-          <a:ln/>
-        </p:spPr>
-        <p:txBody>
-          <a:bodyPr wrap="square" lIns="0" tIns="0" rIns="0" bIns="0" rtlCol="0" anchor="ctr"/>
-          <a:lstStyle/>
-          <a:p>
-            <a:pPr indent="0" marL="0">
-              <a:buNone/>
-            </a:pPr>
-            <a:r>
-              <a:rPr lang="en-US" sz="1100" dirty="0">
-                <a:solidFill>
-                  <a:srgbClr val="1C2B33"/>
-                </a:solidFill>
-                <a:latin typeface="Calibri" pitchFamily="34" charset="0"/>
-                <a:ea typeface="Calibri" pitchFamily="34" charset="-122"/>
-                <a:cs typeface="Calibri" pitchFamily="34" charset="-120"/>
-              </a:rPr>
-              <a:t>P&amp;Q - Químicos</a:t>
-            </a:r>
-            <a:endParaRPr lang="en-US" sz="1100" dirty="0"/>
-          </a:p>
-        </p:txBody>
-      </p:sp>
-      <p:sp>
-        <p:nvSpPr>
-          <p:cNvPr id="42" name="Text 40"/>
-          <p:cNvSpPr txBox="1"/>
-          <p:nvPr/>
-        </p:nvSpPr>
-        <p:spPr>
-          <a:xfrm>
-            <a:off x="3452774" y="5093208"/>
-            <a:ext cx="1497787" cy="365760"/>
-          </a:xfrm>
-          <a:prstGeom prst="rect">
-            <a:avLst/>
-          </a:prstGeom>
-          <a:noFill/>
-          <a:ln/>
-        </p:spPr>
-        <p:txBody>
-          <a:bodyPr wrap="square" lIns="0" tIns="0" rIns="0" bIns="0" rtlCol="0" anchor="ctr"/>
-          <a:lstStyle/>
-          <a:p>
-            <a:pPr algn="r" indent="0" marL="0">
-              <a:buNone/>
-            </a:pPr>
-            <a:r>
-              <a:rPr lang="en-US" sz="1100" b="1" dirty="0">
-                <a:solidFill>
-                  <a:srgbClr val="0B2A3D"/>
-                </a:solidFill>
-                <a:latin typeface="Calibri" pitchFamily="34" charset="0"/>
-                <a:ea typeface="Calibri" pitchFamily="34" charset="-122"/>
-                <a:cs typeface="Calibri" pitchFamily="34" charset="-120"/>
-              </a:rPr>
-              <a:t>US$ 40,0 mil</a:t>
-            </a:r>
-            <a:endParaRPr lang="en-US" sz="1100" dirty="0"/>
-          </a:p>
-        </p:txBody>
-      </p:sp>
-      <p:sp>
-        <p:nvSpPr>
-          <p:cNvPr id="43" name="Text 41"/>
-          <p:cNvSpPr txBox="1"/>
-          <p:nvPr/>
-        </p:nvSpPr>
-        <p:spPr>
-          <a:xfrm>
-            <a:off x="4840834" y="5093208"/>
-            <a:ext cx="965606" cy="365760"/>
-          </a:xfrm>
-          <a:prstGeom prst="rect">
-            <a:avLst/>
-          </a:prstGeom>
-          <a:noFill/>
-          <a:ln/>
-        </p:spPr>
-        <p:txBody>
-          <a:bodyPr wrap="square" lIns="0" tIns="0" rIns="0" bIns="0" rtlCol="0" anchor="ctr"/>
-          <a:lstStyle/>
-          <a:p>
-            <a:pPr algn="r" indent="0" marL="0">
-              <a:buNone/>
-            </a:pPr>
-            <a:r>
-              <a:rPr lang="en-US" sz="900" dirty="0">
-                <a:solidFill>
-                  <a:srgbClr val="5B6B73"/>
-                </a:solidFill>
-                <a:latin typeface="Calibri" pitchFamily="34" charset="0"/>
-                <a:ea typeface="Calibri" pitchFamily="34" charset="-122"/>
-                <a:cs typeface="Calibri" pitchFamily="34" charset="-120"/>
-              </a:rPr>
-              <a:t>1 POB</a:t>
-            </a:r>
-            <a:endParaRPr lang="en-US" sz="900" dirty="0"/>
+            <a:endParaRPr lang="en-US" sz="850" dirty="0"/>
           </a:p>
         </p:txBody>
       </p:sp>
@@ -17971,7 +18987,7 @@
                 <a:ea typeface="Calibri" pitchFamily="34" charset="-122"/>
                 <a:cs typeface="Calibri" pitchFamily="34" charset="-120"/>
               </a:rPr>
-              <a:t>US$ 7,0 mi</a:t>
+              <a:t>US$ 9,2 mi</a:t>
             </a:r>
             <a:endParaRPr lang="en-US" sz="1100" dirty="0"/>
           </a:p>
@@ -18002,7 +19018,7 @@
               <a:buNone/>
             </a:pPr>
             <a:r>
-              <a:rPr lang="en-US" sz="900" dirty="0">
+              <a:rPr lang="en-US" sz="850" dirty="0">
                 <a:solidFill>
                   <a:srgbClr val="5B6B73"/>
                 </a:solidFill>
@@ -18010,9 +19026,9 @@
                 <a:ea typeface="Calibri" pitchFamily="34" charset="-122"/>
                 <a:cs typeface="Calibri" pitchFamily="34" charset="-120"/>
               </a:rPr>
-              <a:t>175 POB</a:t>
+              <a:t>3.447 POB-dia</a:t>
             </a:r>
-            <a:endParaRPr lang="en-US" sz="900" dirty="0"/>
+            <a:endParaRPr lang="en-US" sz="850" dirty="0"/>
           </a:p>
         </p:txBody>
       </p:sp>
@@ -18139,7 +19155,7 @@
               <a:buNone/>
             </a:pPr>
             <a:r>
-              <a:rPr lang="en-US" sz="900" dirty="0">
+              <a:rPr lang="en-US" sz="850" dirty="0">
                 <a:solidFill>
                   <a:srgbClr val="5B6B73"/>
                 </a:solidFill>
@@ -18147,9 +19163,9 @@
                 <a:ea typeface="Calibri" pitchFamily="34" charset="-122"/>
                 <a:cs typeface="Calibri" pitchFamily="34" charset="-120"/>
               </a:rPr>
-              <a:t>38 POB</a:t>
+              <a:t>988 POB-dia</a:t>
             </a:r>
-            <a:endParaRPr lang="en-US" sz="900" dirty="0"/>
+            <a:endParaRPr lang="en-US" sz="850" dirty="0"/>
           </a:p>
         </p:txBody>
       </p:sp>
@@ -18256,7 +19272,7 @@
               <a:buNone/>
             </a:pPr>
             <a:r>
-              <a:rPr lang="en-US" sz="900" dirty="0">
+              <a:rPr lang="en-US" sz="850" dirty="0">
                 <a:solidFill>
                   <a:srgbClr val="5B6B73"/>
                 </a:solidFill>
@@ -18264,9 +19280,9 @@
                 <a:ea typeface="Calibri" pitchFamily="34" charset="-122"/>
                 <a:cs typeface="Calibri" pitchFamily="34" charset="-120"/>
               </a:rPr>
-              <a:t>32 POB</a:t>
+              <a:t>674 POB-dia</a:t>
             </a:r>
-            <a:endParaRPr lang="en-US" sz="900" dirty="0"/>
+            <a:endParaRPr lang="en-US" sz="850" dirty="0"/>
           </a:p>
         </p:txBody>
       </p:sp>
@@ -18393,7 +19409,7 @@
               <a:buNone/>
             </a:pPr>
             <a:r>
-              <a:rPr lang="en-US" sz="900" dirty="0">
+              <a:rPr lang="en-US" sz="850" dirty="0">
                 <a:solidFill>
                   <a:srgbClr val="5B6B73"/>
                 </a:solidFill>
@@ -18401,15 +19417,132 @@
                 <a:ea typeface="Calibri" pitchFamily="34" charset="-122"/>
                 <a:cs typeface="Calibri" pitchFamily="34" charset="-120"/>
               </a:rPr>
-              <a:t>23 POB</a:t>
+              <a:t>392 POB-dia</a:t>
             </a:r>
-            <a:endParaRPr lang="en-US" sz="900" dirty="0"/>
+            <a:endParaRPr lang="en-US" sz="850" dirty="0"/>
           </a:p>
         </p:txBody>
       </p:sp>
       <p:sp>
         <p:nvSpPr>
           <p:cNvPr id="60" name="Text 58"/>
+          <p:cNvSpPr txBox="1"/>
+          <p:nvPr/>
+        </p:nvSpPr>
+        <p:spPr>
+          <a:xfrm>
+            <a:off x="6464808" y="4361688"/>
+            <a:ext cx="2995574" cy="365760"/>
+          </a:xfrm>
+          <a:prstGeom prst="rect">
+            <a:avLst/>
+          </a:prstGeom>
+          <a:noFill/>
+          <a:ln/>
+        </p:spPr>
+        <p:txBody>
+          <a:bodyPr wrap="square" lIns="0" tIns="0" rIns="0" bIns="0" rtlCol="0" anchor="ctr"/>
+          <a:lstStyle/>
+          <a:p>
+            <a:pPr indent="0" marL="0">
+              <a:buNone/>
+            </a:pPr>
+            <a:r>
+              <a:rPr lang="en-US" sz="1100" dirty="0">
+                <a:solidFill>
+                  <a:srgbClr val="1C2B33"/>
+                </a:solidFill>
+                <a:latin typeface="Calibri" pitchFamily="34" charset="0"/>
+                <a:ea typeface="Calibri" pitchFamily="34" charset="-122"/>
+                <a:cs typeface="Calibri" pitchFamily="34" charset="-120"/>
+              </a:rPr>
+              <a:t>Desenvolvimento de Produção</a:t>
+            </a:r>
+            <a:endParaRPr lang="en-US" sz="1100" dirty="0"/>
+          </a:p>
+        </p:txBody>
+      </p:sp>
+      <p:sp>
+        <p:nvSpPr>
+          <p:cNvPr id="61" name="Text 59"/>
+          <p:cNvSpPr txBox="1"/>
+          <p:nvPr/>
+        </p:nvSpPr>
+        <p:spPr>
+          <a:xfrm>
+            <a:off x="9350654" y="4361688"/>
+            <a:ext cx="1497787" cy="365760"/>
+          </a:xfrm>
+          <a:prstGeom prst="rect">
+            <a:avLst/>
+          </a:prstGeom>
+          <a:noFill/>
+          <a:ln/>
+        </p:spPr>
+        <p:txBody>
+          <a:bodyPr wrap="square" lIns="0" tIns="0" rIns="0" bIns="0" rtlCol="0" anchor="ctr"/>
+          <a:lstStyle/>
+          <a:p>
+            <a:pPr algn="r" indent="0" marL="0">
+              <a:buNone/>
+            </a:pPr>
+            <a:r>
+              <a:rPr lang="en-US" sz="1100" b="1" dirty="0">
+                <a:solidFill>
+                  <a:srgbClr val="0B2A3D"/>
+                </a:solidFill>
+                <a:latin typeface="Calibri" pitchFamily="34" charset="0"/>
+                <a:ea typeface="Calibri" pitchFamily="34" charset="-122"/>
+                <a:cs typeface="Calibri" pitchFamily="34" charset="-120"/>
+              </a:rPr>
+              <a:t>US$ 90,5 mil</a:t>
+            </a:r>
+            <a:endParaRPr lang="en-US" sz="1100" dirty="0"/>
+          </a:p>
+        </p:txBody>
+      </p:sp>
+      <p:sp>
+        <p:nvSpPr>
+          <p:cNvPr id="62" name="Text 60"/>
+          <p:cNvSpPr txBox="1"/>
+          <p:nvPr/>
+        </p:nvSpPr>
+        <p:spPr>
+          <a:xfrm>
+            <a:off x="10738714" y="4361688"/>
+            <a:ext cx="965606" cy="365760"/>
+          </a:xfrm>
+          <a:prstGeom prst="rect">
+            <a:avLst/>
+          </a:prstGeom>
+          <a:noFill/>
+          <a:ln/>
+        </p:spPr>
+        <p:txBody>
+          <a:bodyPr wrap="square" lIns="0" tIns="0" rIns="0" bIns="0" rtlCol="0" anchor="ctr"/>
+          <a:lstStyle/>
+          <a:p>
+            <a:pPr algn="r" indent="0" marL="0">
+              <a:buNone/>
+            </a:pPr>
+            <a:r>
+              <a:rPr lang="en-US" sz="850" dirty="0">
+                <a:solidFill>
+                  <a:srgbClr val="5B6B73"/>
+                </a:solidFill>
+                <a:latin typeface="Calibri" pitchFamily="34" charset="0"/>
+                <a:ea typeface="Calibri" pitchFamily="34" charset="-122"/>
+                <a:cs typeface="Calibri" pitchFamily="34" charset="-120"/>
+              </a:rPr>
+              <a:t>43 POB-dia</a:t>
+            </a:r>
+            <a:endParaRPr lang="en-US" sz="850" dirty="0"/>
+          </a:p>
+        </p:txBody>
+      </p:sp>
+      <p:sp>
+        <p:nvSpPr>
+          <p:cNvPr id="63" name="Text 61"/>
           <p:cNvSpPr txBox="1"/>
           <p:nvPr/>
         </p:nvSpPr>
@@ -18440,7 +19573,7 @@
                 <a:ea typeface="Calibri" pitchFamily="34" charset="-122"/>
                 <a:cs typeface="Calibri" pitchFamily="34" charset="-120"/>
               </a:rPr>
-              <a:t>Metodologia: soma de Custo de Serviço + Custo de Material (Jan–Dez), para itens de Cost Allocation = CAPEX com status 'Contar' ou 'TA'. O total desconsidera a categoria Desenvolvimento de Produção (sem itens para este ativo).</a:t>
+              <a:t>Metodologia: soma de Custo de Serviço + Custo de Material (Jan–Dez), para itens de Cost Allocation = CAPEX com status 'Contar' ou 'TA'. POB em POB-dia (pessoas a bordo × dias). O total desconsidera a categoria Desenvolvimento de Produção (US$ 90,5 mil, mantida na lista de Categoria apenas para referência).</a:t>
             </a:r>
             <a:endParaRPr lang="en-US" sz="850" dirty="0"/>
           </a:p>
@@ -22379,7 +23512,7 @@
                 <a:ea typeface="Calibri" pitchFamily="34" charset="-122"/>
                 <a:cs typeface="Calibri" pitchFamily="34" charset="-120"/>
               </a:rPr>
-              <a:t>Fonte: Plano Integrado · aba 'Geral - Em análise' · itens de Cost Allocation = CAPEX, status 'Contar' + 'TA'. Lista completa disponível na planilha em anexo.</a:t>
+              <a:t>Fonte: Plano Integrado · aba 'Geral - Em análise' · coluna 'Valor Total' · itens de Cost Allocation = CAPEX, status 'Contar' + 'TA'. Lista completa disponível na planilha em anexo. Extrato pendente de atualização — pode não somar exatamente ao total da Composição de Custo e POB.</a:t>
             </a:r>
             <a:endParaRPr lang="en-US" sz="850" dirty="0"/>
           </a:p>
@@ -22866,7 +23999,7 @@
                 <a:ea typeface="Cambria" pitchFamily="34" charset="-122"/>
                 <a:cs typeface="Cambria" pitchFamily="34" charset="-120"/>
               </a:rPr>
-              <a:t>US$ 5,9 mi</a:t>
+              <a:t>US$ 7,2 mi</a:t>
             </a:r>
             <a:endParaRPr lang="en-US" sz="2100" dirty="0"/>
           </a:p>
@@ -22966,7 +24099,7 @@
                 <a:ea typeface="Cambria" pitchFamily="34" charset="-122"/>
                 <a:cs typeface="Cambria" pitchFamily="34" charset="-120"/>
               </a:rPr>
-              <a:t>US$ 1,3 mi</a:t>
+              <a:t>US$ 8,0 mi</a:t>
             </a:r>
             <a:endParaRPr lang="en-US" sz="2100" dirty="0"/>
           </a:p>
@@ -23066,7 +24199,7 @@
                 <a:ea typeface="Cambria" pitchFamily="34" charset="-122"/>
                 <a:cs typeface="Cambria" pitchFamily="34" charset="-120"/>
               </a:rPr>
-              <a:t>US$ 7,2 mi</a:t>
+              <a:t>US$ 8,8 mi</a:t>
             </a:r>
             <a:endParaRPr lang="en-US" sz="2100" dirty="0"/>
           </a:p>
@@ -23166,7 +24299,7 @@
                 <a:ea typeface="Cambria" pitchFamily="34" charset="-122"/>
                 <a:cs typeface="Cambria" pitchFamily="34" charset="-120"/>
               </a:rPr>
-              <a:t>182</a:t>
+              <a:t>5.092</a:t>
             </a:r>
             <a:endParaRPr lang="en-US" sz="2100" dirty="0"/>
           </a:p>
@@ -23205,7 +24338,7 @@
                 <a:ea typeface="Calibri" pitchFamily="34" charset="-122"/>
                 <a:cs typeface="Calibri" pitchFamily="34" charset="-120"/>
               </a:rPr>
-              <a:t>POB TOTAL</a:t>
+              <a:t>POB TOTAL (POB-DIA)</a:t>
             </a:r>
             <a:endParaRPr lang="en-US" sz="850" dirty="0"/>
           </a:p>
@@ -23306,6 +24439,143 @@
                 <a:ea typeface="Calibri" pitchFamily="34" charset="-122"/>
                 <a:cs typeface="Calibri" pitchFamily="34" charset="-120"/>
               </a:rPr>
+              <a:t>Projetos</a:t>
+            </a:r>
+            <a:endParaRPr lang="en-US" sz="1100" dirty="0"/>
+          </a:p>
+        </p:txBody>
+      </p:sp>
+      <p:sp>
+        <p:nvSpPr>
+          <p:cNvPr id="21" name="Text 19"/>
+          <p:cNvSpPr txBox="1"/>
+          <p:nvPr/>
+        </p:nvSpPr>
+        <p:spPr>
+          <a:xfrm>
+            <a:off x="3452774" y="2898648"/>
+            <a:ext cx="1497787" cy="365760"/>
+          </a:xfrm>
+          <a:prstGeom prst="rect">
+            <a:avLst/>
+          </a:prstGeom>
+          <a:noFill/>
+          <a:ln/>
+        </p:spPr>
+        <p:txBody>
+          <a:bodyPr wrap="square" lIns="0" tIns="0" rIns="0" bIns="0" rtlCol="0" anchor="ctr"/>
+          <a:lstStyle/>
+          <a:p>
+            <a:pPr algn="r" indent="0" marL="0">
+              <a:buNone/>
+            </a:pPr>
+            <a:r>
+              <a:rPr lang="en-US" sz="1100" b="1" dirty="0">
+                <a:solidFill>
+                  <a:srgbClr val="0B2A3D"/>
+                </a:solidFill>
+                <a:latin typeface="Calibri" pitchFamily="34" charset="0"/>
+                <a:ea typeface="Calibri" pitchFamily="34" charset="-122"/>
+                <a:cs typeface="Calibri" pitchFamily="34" charset="-120"/>
+              </a:rPr>
+              <a:t>US$ 8,3 mi</a:t>
+            </a:r>
+            <a:endParaRPr lang="en-US" sz="1100" dirty="0"/>
+          </a:p>
+        </p:txBody>
+      </p:sp>
+      <p:sp>
+        <p:nvSpPr>
+          <p:cNvPr id="22" name="Text 20"/>
+          <p:cNvSpPr txBox="1"/>
+          <p:nvPr/>
+        </p:nvSpPr>
+        <p:spPr>
+          <a:xfrm>
+            <a:off x="4840834" y="2898648"/>
+            <a:ext cx="965606" cy="365760"/>
+          </a:xfrm>
+          <a:prstGeom prst="rect">
+            <a:avLst/>
+          </a:prstGeom>
+          <a:noFill/>
+          <a:ln/>
+        </p:spPr>
+        <p:txBody>
+          <a:bodyPr wrap="square" lIns="0" tIns="0" rIns="0" bIns="0" rtlCol="0" anchor="ctr"/>
+          <a:lstStyle/>
+          <a:p>
+            <a:pPr algn="r" indent="0" marL="0">
+              <a:buNone/>
+            </a:pPr>
+            <a:r>
+              <a:rPr lang="en-US" sz="850" dirty="0">
+                <a:solidFill>
+                  <a:srgbClr val="5B6B73"/>
+                </a:solidFill>
+                <a:latin typeface="Calibri" pitchFamily="34" charset="0"/>
+                <a:ea typeface="Calibri" pitchFamily="34" charset="-122"/>
+                <a:cs typeface="Calibri" pitchFamily="34" charset="-120"/>
+              </a:rPr>
+              <a:t>1.932 POB-dia</a:t>
+            </a:r>
+            <a:endParaRPr lang="en-US" sz="850" dirty="0"/>
+          </a:p>
+        </p:txBody>
+      </p:sp>
+      <p:sp>
+        <p:nvSpPr>
+          <p:cNvPr id="23" name="Shape 21"/>
+          <p:cNvSpPr/>
+          <p:nvPr/>
+        </p:nvSpPr>
+        <p:spPr>
+          <a:xfrm>
+            <a:off x="457200" y="3264408"/>
+            <a:ext cx="5349240" cy="365760"/>
+          </a:xfrm>
+          <a:prstGeom prst="rect">
+            <a:avLst/>
+          </a:prstGeom>
+          <a:solidFill>
+            <a:srgbClr val="F0F4F5"/>
+          </a:solidFill>
+          <a:ln/>
+        </p:spPr>
+      </p:sp>
+      <p:sp>
+        <p:nvSpPr>
+          <p:cNvPr id="24" name="Text 22"/>
+          <p:cNvSpPr txBox="1"/>
+          <p:nvPr/>
+        </p:nvSpPr>
+        <p:spPr>
+          <a:xfrm>
+            <a:off x="566928" y="3264408"/>
+            <a:ext cx="2995574" cy="365760"/>
+          </a:xfrm>
+          <a:prstGeom prst="rect">
+            <a:avLst/>
+          </a:prstGeom>
+          <a:noFill/>
+          <a:ln/>
+        </p:spPr>
+        <p:txBody>
+          <a:bodyPr wrap="square" lIns="0" tIns="0" rIns="0" bIns="0" rtlCol="0" anchor="ctr"/>
+          <a:lstStyle/>
+          <a:p>
+            <a:pPr indent="0" marL="0">
+              <a:buNone/>
+            </a:pPr>
+            <a:r>
+              <a:rPr lang="en-US" sz="1100" dirty="0">
+                <a:solidFill>
+                  <a:srgbClr val="1C2B33"/>
+                </a:solidFill>
+                <a:latin typeface="Calibri" pitchFamily="34" charset="0"/>
+                <a:ea typeface="Calibri" pitchFamily="34" charset="-122"/>
+                <a:cs typeface="Calibri" pitchFamily="34" charset="-120"/>
+              </a:rPr>
               <a:t>MNT – Manutenção</a:t>
             </a:r>
             <a:endParaRPr lang="en-US" sz="1100" dirty="0"/>
@@ -23314,13 +24584,13 @@
       </p:sp>
       <p:sp>
         <p:nvSpPr>
-          <p:cNvPr id="21" name="Text 19"/>
+          <p:cNvPr id="25" name="Text 23"/>
           <p:cNvSpPr txBox="1"/>
           <p:nvPr/>
         </p:nvSpPr>
         <p:spPr>
           <a:xfrm>
-            <a:off x="3452774" y="2898648"/>
+            <a:off x="3452774" y="3264408"/>
             <a:ext cx="1497787" cy="365760"/>
           </a:xfrm>
           <a:prstGeom prst="rect">
@@ -23353,13 +24623,13 @@
       </p:sp>
       <p:sp>
         <p:nvSpPr>
-          <p:cNvPr id="22" name="Text 20"/>
+          <p:cNvPr id="26" name="Text 24"/>
           <p:cNvSpPr txBox="1"/>
           <p:nvPr/>
         </p:nvSpPr>
         <p:spPr>
           <a:xfrm>
-            <a:off x="4840834" y="2898648"/>
+            <a:off x="4840834" y="3264408"/>
             <a:ext cx="965606" cy="365760"/>
           </a:xfrm>
           <a:prstGeom prst="rect">
@@ -23376,7 +24646,7 @@
               <a:buNone/>
             </a:pPr>
             <a:r>
-              <a:rPr lang="en-US" sz="900" dirty="0">
+              <a:rPr lang="en-US" sz="850" dirty="0">
                 <a:solidFill>
                   <a:srgbClr val="5B6B73"/>
                 </a:solidFill>
@@ -23384,146 +24654,9 @@
                 <a:ea typeface="Calibri" pitchFamily="34" charset="-122"/>
                 <a:cs typeface="Calibri" pitchFamily="34" charset="-120"/>
               </a:rPr>
-              <a:t>20 POB</a:t>
+              <a:t>700 POB-dia</a:t>
             </a:r>
-            <a:endParaRPr lang="en-US" sz="900" dirty="0"/>
-          </a:p>
-        </p:txBody>
-      </p:sp>
-      <p:sp>
-        <p:nvSpPr>
-          <p:cNvPr id="23" name="Shape 21"/>
-          <p:cNvSpPr/>
-          <p:nvPr/>
-        </p:nvSpPr>
-        <p:spPr>
-          <a:xfrm>
-            <a:off x="457200" y="3264408"/>
-            <a:ext cx="5349240" cy="365760"/>
-          </a:xfrm>
-          <a:prstGeom prst="rect">
-            <a:avLst/>
-          </a:prstGeom>
-          <a:solidFill>
-            <a:srgbClr val="F0F4F5"/>
-          </a:solidFill>
-          <a:ln/>
-        </p:spPr>
-      </p:sp>
-      <p:sp>
-        <p:nvSpPr>
-          <p:cNvPr id="24" name="Text 22"/>
-          <p:cNvSpPr txBox="1"/>
-          <p:nvPr/>
-        </p:nvSpPr>
-        <p:spPr>
-          <a:xfrm>
-            <a:off x="566928" y="3264408"/>
-            <a:ext cx="2995574" cy="365760"/>
-          </a:xfrm>
-          <a:prstGeom prst="rect">
-            <a:avLst/>
-          </a:prstGeom>
-          <a:noFill/>
-          <a:ln/>
-        </p:spPr>
-        <p:txBody>
-          <a:bodyPr wrap="square" lIns="0" tIns="0" rIns="0" bIns="0" rtlCol="0" anchor="ctr"/>
-          <a:lstStyle/>
-          <a:p>
-            <a:pPr indent="0" marL="0">
-              <a:buNone/>
-            </a:pPr>
-            <a:r>
-              <a:rPr lang="en-US" sz="1100" dirty="0">
-                <a:solidFill>
-                  <a:srgbClr val="1C2B33"/>
-                </a:solidFill>
-                <a:latin typeface="Calibri" pitchFamily="34" charset="0"/>
-                <a:ea typeface="Calibri" pitchFamily="34" charset="-122"/>
-                <a:cs typeface="Calibri" pitchFamily="34" charset="-120"/>
-              </a:rPr>
-              <a:t>Projetos</a:t>
-            </a:r>
-            <a:endParaRPr lang="en-US" sz="1100" dirty="0"/>
-          </a:p>
-        </p:txBody>
-      </p:sp>
-      <p:sp>
-        <p:nvSpPr>
-          <p:cNvPr id="25" name="Text 23"/>
-          <p:cNvSpPr txBox="1"/>
-          <p:nvPr/>
-        </p:nvSpPr>
-        <p:spPr>
-          <a:xfrm>
-            <a:off x="3452774" y="3264408"/>
-            <a:ext cx="1497787" cy="365760"/>
-          </a:xfrm>
-          <a:prstGeom prst="rect">
-            <a:avLst/>
-          </a:prstGeom>
-          <a:noFill/>
-          <a:ln/>
-        </p:spPr>
-        <p:txBody>
-          <a:bodyPr wrap="square" lIns="0" tIns="0" rIns="0" bIns="0" rtlCol="0" anchor="ctr"/>
-          <a:lstStyle/>
-          <a:p>
-            <a:pPr algn="r" indent="0" marL="0">
-              <a:buNone/>
-            </a:pPr>
-            <a:r>
-              <a:rPr lang="en-US" sz="1100" b="1" dirty="0">
-                <a:solidFill>
-                  <a:srgbClr val="0B2A3D"/>
-                </a:solidFill>
-                <a:latin typeface="Calibri" pitchFamily="34" charset="0"/>
-                <a:ea typeface="Calibri" pitchFamily="34" charset="-122"/>
-                <a:cs typeface="Calibri" pitchFamily="34" charset="-120"/>
-              </a:rPr>
-              <a:t>US$ 2,2 mi</a:t>
-            </a:r>
-            <a:endParaRPr lang="en-US" sz="1100" dirty="0"/>
-          </a:p>
-        </p:txBody>
-      </p:sp>
-      <p:sp>
-        <p:nvSpPr>
-          <p:cNvPr id="26" name="Text 24"/>
-          <p:cNvSpPr txBox="1"/>
-          <p:nvPr/>
-        </p:nvSpPr>
-        <p:spPr>
-          <a:xfrm>
-            <a:off x="4840834" y="3264408"/>
-            <a:ext cx="965606" cy="365760"/>
-          </a:xfrm>
-          <a:prstGeom prst="rect">
-            <a:avLst/>
-          </a:prstGeom>
-          <a:noFill/>
-          <a:ln/>
-        </p:spPr>
-        <p:txBody>
-          <a:bodyPr wrap="square" lIns="0" tIns="0" rIns="0" bIns="0" rtlCol="0" anchor="ctr"/>
-          <a:lstStyle/>
-          <a:p>
-            <a:pPr algn="r" indent="0" marL="0">
-              <a:buNone/>
-            </a:pPr>
-            <a:r>
-              <a:rPr lang="en-US" sz="900" dirty="0">
-                <a:solidFill>
-                  <a:srgbClr val="5B6B73"/>
-                </a:solidFill>
-                <a:latin typeface="Calibri" pitchFamily="34" charset="0"/>
-                <a:ea typeface="Calibri" pitchFamily="34" charset="-122"/>
-                <a:cs typeface="Calibri" pitchFamily="34" charset="-120"/>
-              </a:rPr>
-              <a:t>54 POB</a:t>
-            </a:r>
-            <a:endParaRPr lang="en-US" sz="900" dirty="0"/>
+            <a:endParaRPr lang="en-US" sz="850" dirty="0"/>
           </a:p>
         </p:txBody>
       </p:sp>
@@ -23599,7 +24732,7 @@
                 <a:ea typeface="Calibri" pitchFamily="34" charset="-122"/>
                 <a:cs typeface="Calibri" pitchFamily="34" charset="-120"/>
               </a:rPr>
-              <a:t>US$ 897,7 mil</a:t>
+              <a:t>US$ 2,5 mi</a:t>
             </a:r>
             <a:endParaRPr lang="en-US" sz="1100" dirty="0"/>
           </a:p>
@@ -23630,7 +24763,7 @@
               <a:buNone/>
             </a:pPr>
             <a:r>
-              <a:rPr lang="en-US" sz="900" dirty="0">
+              <a:rPr lang="en-US" sz="850" dirty="0">
                 <a:solidFill>
                   <a:srgbClr val="5B6B73"/>
                 </a:solidFill>
@@ -23638,9 +24771,9 @@
                 <a:ea typeface="Calibri" pitchFamily="34" charset="-122"/>
                 <a:cs typeface="Calibri" pitchFamily="34" charset="-120"/>
               </a:rPr>
-              <a:t>101 POB</a:t>
+              <a:t>2.280 POB-dia</a:t>
             </a:r>
-            <a:endParaRPr lang="en-US" sz="900" dirty="0"/>
+            <a:endParaRPr lang="en-US" sz="850" dirty="0"/>
           </a:p>
         </p:txBody>
       </p:sp>
@@ -23767,7 +24900,7 @@
               <a:buNone/>
             </a:pPr>
             <a:r>
-              <a:rPr lang="en-US" sz="900" dirty="0">
+              <a:rPr lang="en-US" sz="850" dirty="0">
                 <a:solidFill>
                   <a:srgbClr val="5B6B73"/>
                 </a:solidFill>
@@ -23775,9 +24908,9 @@
                 <a:ea typeface="Calibri" pitchFamily="34" charset="-122"/>
                 <a:cs typeface="Calibri" pitchFamily="34" charset="-120"/>
               </a:rPr>
-              <a:t>5 POB</a:t>
+              <a:t>150 POB-dia</a:t>
             </a:r>
-            <a:endParaRPr lang="en-US" sz="900" dirty="0"/>
+            <a:endParaRPr lang="en-US" sz="850" dirty="0"/>
           </a:p>
         </p:txBody>
       </p:sp>
@@ -23790,6 +24923,143 @@
         <p:spPr>
           <a:xfrm>
             <a:off x="566928" y="4361688"/>
+            <a:ext cx="2995574" cy="365760"/>
+          </a:xfrm>
+          <a:prstGeom prst="rect">
+            <a:avLst/>
+          </a:prstGeom>
+          <a:noFill/>
+          <a:ln/>
+        </p:spPr>
+        <p:txBody>
+          <a:bodyPr wrap="square" lIns="0" tIns="0" rIns="0" bIns="0" rtlCol="0" anchor="ctr"/>
+          <a:lstStyle/>
+          <a:p>
+            <a:pPr indent="0" marL="0">
+              <a:buNone/>
+            </a:pPr>
+            <a:r>
+              <a:rPr lang="en-US" sz="1100" dirty="0">
+                <a:solidFill>
+                  <a:srgbClr val="1C2B33"/>
+                </a:solidFill>
+                <a:latin typeface="Calibri" pitchFamily="34" charset="0"/>
+                <a:ea typeface="Calibri" pitchFamily="34" charset="-122"/>
+                <a:cs typeface="Calibri" pitchFamily="34" charset="-120"/>
+              </a:rPr>
+              <a:t>P&amp;Q - Processos</a:t>
+            </a:r>
+            <a:endParaRPr lang="en-US" sz="1100" dirty="0"/>
+          </a:p>
+        </p:txBody>
+      </p:sp>
+      <p:sp>
+        <p:nvSpPr>
+          <p:cNvPr id="35" name="Text 33"/>
+          <p:cNvSpPr txBox="1"/>
+          <p:nvPr/>
+        </p:nvSpPr>
+        <p:spPr>
+          <a:xfrm>
+            <a:off x="3452774" y="4361688"/>
+            <a:ext cx="1497787" cy="365760"/>
+          </a:xfrm>
+          <a:prstGeom prst="rect">
+            <a:avLst/>
+          </a:prstGeom>
+          <a:noFill/>
+          <a:ln/>
+        </p:spPr>
+        <p:txBody>
+          <a:bodyPr wrap="square" lIns="0" tIns="0" rIns="0" bIns="0" rtlCol="0" anchor="ctr"/>
+          <a:lstStyle/>
+          <a:p>
+            <a:pPr algn="r" indent="0" marL="0">
+              <a:buNone/>
+            </a:pPr>
+            <a:r>
+              <a:rPr lang="en-US" sz="1100" b="1" dirty="0">
+                <a:solidFill>
+                  <a:srgbClr val="0B2A3D"/>
+                </a:solidFill>
+                <a:latin typeface="Calibri" pitchFamily="34" charset="0"/>
+                <a:ea typeface="Calibri" pitchFamily="34" charset="-122"/>
+                <a:cs typeface="Calibri" pitchFamily="34" charset="-120"/>
+              </a:rPr>
+              <a:t>US$ 150,5 mil</a:t>
+            </a:r>
+            <a:endParaRPr lang="en-US" sz="1100" dirty="0"/>
+          </a:p>
+        </p:txBody>
+      </p:sp>
+      <p:sp>
+        <p:nvSpPr>
+          <p:cNvPr id="36" name="Text 34"/>
+          <p:cNvSpPr txBox="1"/>
+          <p:nvPr/>
+        </p:nvSpPr>
+        <p:spPr>
+          <a:xfrm>
+            <a:off x="4840834" y="4361688"/>
+            <a:ext cx="965606" cy="365760"/>
+          </a:xfrm>
+          <a:prstGeom prst="rect">
+            <a:avLst/>
+          </a:prstGeom>
+          <a:noFill/>
+          <a:ln/>
+        </p:spPr>
+        <p:txBody>
+          <a:bodyPr wrap="square" lIns="0" tIns="0" rIns="0" bIns="0" rtlCol="0" anchor="ctr"/>
+          <a:lstStyle/>
+          <a:p>
+            <a:pPr algn="r" indent="0" marL="0">
+              <a:buNone/>
+            </a:pPr>
+            <a:r>
+              <a:rPr lang="en-US" sz="850" dirty="0">
+                <a:solidFill>
+                  <a:srgbClr val="5B6B73"/>
+                </a:solidFill>
+                <a:latin typeface="Calibri" pitchFamily="34" charset="0"/>
+                <a:ea typeface="Calibri" pitchFamily="34" charset="-122"/>
+                <a:cs typeface="Calibri" pitchFamily="34" charset="-120"/>
+              </a:rPr>
+              <a:t>14 POB-dia</a:t>
+            </a:r>
+            <a:endParaRPr lang="en-US" sz="850" dirty="0"/>
+          </a:p>
+        </p:txBody>
+      </p:sp>
+      <p:sp>
+        <p:nvSpPr>
+          <p:cNvPr id="37" name="Shape 35"/>
+          <p:cNvSpPr/>
+          <p:nvPr/>
+        </p:nvSpPr>
+        <p:spPr>
+          <a:xfrm>
+            <a:off x="457200" y="4727448"/>
+            <a:ext cx="5349240" cy="365760"/>
+          </a:xfrm>
+          <a:prstGeom prst="rect">
+            <a:avLst/>
+          </a:prstGeom>
+          <a:solidFill>
+            <a:srgbClr val="F0F4F5"/>
+          </a:solidFill>
+          <a:ln/>
+        </p:spPr>
+      </p:sp>
+      <p:sp>
+        <p:nvSpPr>
+          <p:cNvPr id="38" name="Text 36"/>
+          <p:cNvSpPr txBox="1"/>
+          <p:nvPr/>
+        </p:nvSpPr>
+        <p:spPr>
+          <a:xfrm>
+            <a:off x="566928" y="4727448"/>
             <a:ext cx="2995574" cy="365760"/>
           </a:xfrm>
           <a:prstGeom prst="rect">
@@ -23822,13 +25092,13 @@
       </p:sp>
       <p:sp>
         <p:nvSpPr>
-          <p:cNvPr id="35" name="Text 33"/>
+          <p:cNvPr id="39" name="Text 37"/>
           <p:cNvSpPr txBox="1"/>
           <p:nvPr/>
         </p:nvSpPr>
         <p:spPr>
           <a:xfrm>
-            <a:off x="3452774" y="4361688"/>
+            <a:off x="3452774" y="4727448"/>
             <a:ext cx="1497787" cy="365760"/>
           </a:xfrm>
           <a:prstGeom prst="rect">
@@ -23853,7 +25123,7 @@
                 <a:ea typeface="Calibri" pitchFamily="34" charset="-122"/>
                 <a:cs typeface="Calibri" pitchFamily="34" charset="-120"/>
               </a:rPr>
-              <a:t>US$ 30,0 mil</a:t>
+              <a:t>US$ 40,0 mil</a:t>
             </a:r>
             <a:endParaRPr lang="en-US" sz="1100" dirty="0"/>
           </a:p>
@@ -23861,13 +25131,13 @@
       </p:sp>
       <p:sp>
         <p:nvSpPr>
-          <p:cNvPr id="36" name="Text 34"/>
+          <p:cNvPr id="40" name="Text 38"/>
           <p:cNvSpPr txBox="1"/>
           <p:nvPr/>
         </p:nvSpPr>
         <p:spPr>
           <a:xfrm>
-            <a:off x="4840834" y="4361688"/>
+            <a:off x="4840834" y="4727448"/>
             <a:ext cx="965606" cy="365760"/>
           </a:xfrm>
           <a:prstGeom prst="rect">
@@ -23884,7 +25154,7 @@
               <a:buNone/>
             </a:pPr>
             <a:r>
-              <a:rPr lang="en-US" sz="900" dirty="0">
+              <a:rPr lang="en-US" sz="850" dirty="0">
                 <a:solidFill>
                   <a:srgbClr val="5B6B73"/>
                 </a:solidFill>
@@ -23892,41 +25162,21 @@
                 <a:ea typeface="Calibri" pitchFamily="34" charset="-122"/>
                 <a:cs typeface="Calibri" pitchFamily="34" charset="-120"/>
               </a:rPr>
-              <a:t>2 POB</a:t>
+              <a:t>16 POB-dia</a:t>
             </a:r>
-            <a:endParaRPr lang="en-US" sz="900" dirty="0"/>
+            <a:endParaRPr lang="en-US" sz="850" dirty="0"/>
           </a:p>
         </p:txBody>
       </p:sp>
       <p:sp>
         <p:nvSpPr>
-          <p:cNvPr id="37" name="Shape 35"/>
-          <p:cNvSpPr/>
-          <p:nvPr/>
-        </p:nvSpPr>
-        <p:spPr>
-          <a:xfrm>
-            <a:off x="457200" y="4727448"/>
-            <a:ext cx="5349240" cy="365760"/>
-          </a:xfrm>
-          <a:prstGeom prst="rect">
-            <a:avLst/>
-          </a:prstGeom>
-          <a:solidFill>
-            <a:srgbClr val="F0F4F5"/>
-          </a:solidFill>
-          <a:ln/>
-        </p:spPr>
-      </p:sp>
-      <p:sp>
-        <p:nvSpPr>
-          <p:cNvPr id="38" name="Text 36"/>
+          <p:cNvPr id="41" name="Text 39"/>
           <p:cNvSpPr txBox="1"/>
           <p:nvPr/>
         </p:nvSpPr>
         <p:spPr>
           <a:xfrm>
-            <a:off x="566928" y="4727448"/>
+            <a:off x="566928" y="5093208"/>
             <a:ext cx="2995574" cy="365760"/>
           </a:xfrm>
           <a:prstGeom prst="rect">
@@ -23959,13 +25209,13 @@
       </p:sp>
       <p:sp>
         <p:nvSpPr>
-          <p:cNvPr id="39" name="Text 37"/>
+          <p:cNvPr id="42" name="Text 40"/>
           <p:cNvSpPr txBox="1"/>
           <p:nvPr/>
         </p:nvSpPr>
         <p:spPr>
           <a:xfrm>
-            <a:off x="3452774" y="4727448"/>
+            <a:off x="3452774" y="5093208"/>
             <a:ext cx="1497787" cy="365760"/>
           </a:xfrm>
           <a:prstGeom prst="rect">
@@ -23998,13 +25248,13 @@
       </p:sp>
       <p:sp>
         <p:nvSpPr>
-          <p:cNvPr id="40" name="Text 38"/>
+          <p:cNvPr id="43" name="Text 41"/>
           <p:cNvSpPr txBox="1"/>
           <p:nvPr/>
         </p:nvSpPr>
         <p:spPr>
           <a:xfrm>
-            <a:off x="4840834" y="4727448"/>
+            <a:off x="4840834" y="5093208"/>
             <a:ext cx="965606" cy="365760"/>
           </a:xfrm>
           <a:prstGeom prst="rect">
@@ -24021,7 +25271,7 @@
               <a:buNone/>
             </a:pPr>
             <a:r>
-              <a:rPr lang="en-US" sz="900" dirty="0">
+              <a:rPr lang="en-US" sz="850" dirty="0">
                 <a:solidFill>
                   <a:srgbClr val="5B6B73"/>
                 </a:solidFill>
@@ -24029,15 +25279,15 @@
                 <a:ea typeface="Calibri" pitchFamily="34" charset="-122"/>
                 <a:cs typeface="Calibri" pitchFamily="34" charset="-120"/>
               </a:rPr>
-              <a:t>0 POB</a:t>
+              <a:t>0 POB-dia</a:t>
             </a:r>
-            <a:endParaRPr lang="en-US" sz="900" dirty="0"/>
+            <a:endParaRPr lang="en-US" sz="850" dirty="0"/>
           </a:p>
         </p:txBody>
       </p:sp>
       <p:sp>
         <p:nvSpPr>
-          <p:cNvPr id="41" name="Text 39"/>
+          <p:cNvPr id="44" name="Text 42"/>
           <p:cNvSpPr txBox="1"/>
           <p:nvPr/>
         </p:nvSpPr>
@@ -24076,7 +25326,7 @@
       </p:sp>
       <p:sp>
         <p:nvSpPr>
-          <p:cNvPr id="42" name="Shape 40"/>
+          <p:cNvPr id="45" name="Shape 43"/>
           <p:cNvSpPr/>
           <p:nvPr/>
         </p:nvSpPr>
@@ -24099,13 +25349,267 @@
       </p:sp>
       <p:sp>
         <p:nvSpPr>
-          <p:cNvPr id="43" name="Text 41"/>
+          <p:cNvPr id="46" name="Text 44"/>
           <p:cNvSpPr txBox="1"/>
           <p:nvPr/>
         </p:nvSpPr>
         <p:spPr>
           <a:xfrm>
             <a:off x="6464808" y="2898648"/>
+            <a:ext cx="2995574" cy="365760"/>
+          </a:xfrm>
+          <a:prstGeom prst="rect">
+            <a:avLst/>
+          </a:prstGeom>
+          <a:noFill/>
+          <a:ln/>
+        </p:spPr>
+        <p:txBody>
+          <a:bodyPr wrap="square" lIns="0" tIns="0" rIns="0" bIns="0" rtlCol="0" anchor="ctr"/>
+          <a:lstStyle/>
+          <a:p>
+            <a:pPr indent="0" marL="0">
+              <a:buNone/>
+            </a:pPr>
+            <a:r>
+              <a:rPr lang="en-US" sz="1100" dirty="0">
+                <a:solidFill>
+                  <a:srgbClr val="1C2B33"/>
+                </a:solidFill>
+                <a:latin typeface="Calibri" pitchFamily="34" charset="0"/>
+                <a:ea typeface="Calibri" pitchFamily="34" charset="-122"/>
+                <a:cs typeface="Calibri" pitchFamily="34" charset="-120"/>
+              </a:rPr>
+              <a:t>Desenvolvimento de Produção</a:t>
+            </a:r>
+            <a:endParaRPr lang="en-US" sz="1100" dirty="0"/>
+          </a:p>
+        </p:txBody>
+      </p:sp>
+      <p:sp>
+        <p:nvSpPr>
+          <p:cNvPr id="47" name="Text 45"/>
+          <p:cNvSpPr txBox="1"/>
+          <p:nvPr/>
+        </p:nvSpPr>
+        <p:spPr>
+          <a:xfrm>
+            <a:off x="9350654" y="2898648"/>
+            <a:ext cx="1497787" cy="365760"/>
+          </a:xfrm>
+          <a:prstGeom prst="rect">
+            <a:avLst/>
+          </a:prstGeom>
+          <a:noFill/>
+          <a:ln/>
+        </p:spPr>
+        <p:txBody>
+          <a:bodyPr wrap="square" lIns="0" tIns="0" rIns="0" bIns="0" rtlCol="0" anchor="ctr"/>
+          <a:lstStyle/>
+          <a:p>
+            <a:pPr algn="r" indent="0" marL="0">
+              <a:buNone/>
+            </a:pPr>
+            <a:r>
+              <a:rPr lang="en-US" sz="1100" b="1" dirty="0">
+                <a:solidFill>
+                  <a:srgbClr val="0B2A3D"/>
+                </a:solidFill>
+                <a:latin typeface="Calibri" pitchFamily="34" charset="0"/>
+                <a:ea typeface="Calibri" pitchFamily="34" charset="-122"/>
+                <a:cs typeface="Calibri" pitchFamily="34" charset="-120"/>
+              </a:rPr>
+              <a:t>US$ 6,3 mi</a:t>
+            </a:r>
+            <a:endParaRPr lang="en-US" sz="1100" dirty="0"/>
+          </a:p>
+        </p:txBody>
+      </p:sp>
+      <p:sp>
+        <p:nvSpPr>
+          <p:cNvPr id="48" name="Text 46"/>
+          <p:cNvSpPr txBox="1"/>
+          <p:nvPr/>
+        </p:nvSpPr>
+        <p:spPr>
+          <a:xfrm>
+            <a:off x="10738714" y="2898648"/>
+            <a:ext cx="965606" cy="365760"/>
+          </a:xfrm>
+          <a:prstGeom prst="rect">
+            <a:avLst/>
+          </a:prstGeom>
+          <a:noFill/>
+          <a:ln/>
+        </p:spPr>
+        <p:txBody>
+          <a:bodyPr wrap="square" lIns="0" tIns="0" rIns="0" bIns="0" rtlCol="0" anchor="ctr"/>
+          <a:lstStyle/>
+          <a:p>
+            <a:pPr algn="r" indent="0" marL="0">
+              <a:buNone/>
+            </a:pPr>
+            <a:r>
+              <a:rPr lang="en-US" sz="850" dirty="0">
+                <a:solidFill>
+                  <a:srgbClr val="5B6B73"/>
+                </a:solidFill>
+                <a:latin typeface="Calibri" pitchFamily="34" charset="0"/>
+                <a:ea typeface="Calibri" pitchFamily="34" charset="-122"/>
+                <a:cs typeface="Calibri" pitchFamily="34" charset="-120"/>
+              </a:rPr>
+              <a:t>990 POB-dia</a:t>
+            </a:r>
+            <a:endParaRPr lang="en-US" sz="850" dirty="0"/>
+          </a:p>
+        </p:txBody>
+      </p:sp>
+      <p:sp>
+        <p:nvSpPr>
+          <p:cNvPr id="49" name="Shape 47"/>
+          <p:cNvSpPr/>
+          <p:nvPr/>
+        </p:nvSpPr>
+        <p:spPr>
+          <a:xfrm>
+            <a:off x="6355080" y="3264408"/>
+            <a:ext cx="5349240" cy="365760"/>
+          </a:xfrm>
+          <a:prstGeom prst="rect">
+            <a:avLst/>
+          </a:prstGeom>
+          <a:solidFill>
+            <a:srgbClr val="F0F4F5"/>
+          </a:solidFill>
+          <a:ln/>
+        </p:spPr>
+      </p:sp>
+      <p:sp>
+        <p:nvSpPr>
+          <p:cNvPr id="50" name="Text 48"/>
+          <p:cNvSpPr txBox="1"/>
+          <p:nvPr/>
+        </p:nvSpPr>
+        <p:spPr>
+          <a:xfrm>
+            <a:off x="6464808" y="3264408"/>
+            <a:ext cx="2995574" cy="365760"/>
+          </a:xfrm>
+          <a:prstGeom prst="rect">
+            <a:avLst/>
+          </a:prstGeom>
+          <a:noFill/>
+          <a:ln/>
+        </p:spPr>
+        <p:txBody>
+          <a:bodyPr wrap="square" lIns="0" tIns="0" rIns="0" bIns="0" rtlCol="0" anchor="ctr"/>
+          <a:lstStyle/>
+          <a:p>
+            <a:pPr indent="0" marL="0">
+              <a:buNone/>
+            </a:pPr>
+            <a:r>
+              <a:rPr lang="en-US" sz="1100" dirty="0">
+                <a:solidFill>
+                  <a:srgbClr val="1C2B33"/>
+                </a:solidFill>
+                <a:latin typeface="Calibri" pitchFamily="34" charset="0"/>
+                <a:ea typeface="Calibri" pitchFamily="34" charset="-122"/>
+                <a:cs typeface="Calibri" pitchFamily="34" charset="-120"/>
+              </a:rPr>
+              <a:t>Eficiência de Produção</a:t>
+            </a:r>
+            <a:endParaRPr lang="en-US" sz="1100" dirty="0"/>
+          </a:p>
+        </p:txBody>
+      </p:sp>
+      <p:sp>
+        <p:nvSpPr>
+          <p:cNvPr id="51" name="Text 49"/>
+          <p:cNvSpPr txBox="1"/>
+          <p:nvPr/>
+        </p:nvSpPr>
+        <p:spPr>
+          <a:xfrm>
+            <a:off x="9350654" y="3264408"/>
+            <a:ext cx="1497787" cy="365760"/>
+          </a:xfrm>
+          <a:prstGeom prst="rect">
+            <a:avLst/>
+          </a:prstGeom>
+          <a:noFill/>
+          <a:ln/>
+        </p:spPr>
+        <p:txBody>
+          <a:bodyPr wrap="square" lIns="0" tIns="0" rIns="0" bIns="0" rtlCol="0" anchor="ctr"/>
+          <a:lstStyle/>
+          <a:p>
+            <a:pPr algn="r" indent="0" marL="0">
+              <a:buNone/>
+            </a:pPr>
+            <a:r>
+              <a:rPr lang="en-US" sz="1100" b="1" dirty="0">
+                <a:solidFill>
+                  <a:srgbClr val="0B2A3D"/>
+                </a:solidFill>
+                <a:latin typeface="Calibri" pitchFamily="34" charset="0"/>
+                <a:ea typeface="Calibri" pitchFamily="34" charset="-122"/>
+                <a:cs typeface="Calibri" pitchFamily="34" charset="-120"/>
+              </a:rPr>
+              <a:t>US$ 3,7 mi</a:t>
+            </a:r>
+            <a:endParaRPr lang="en-US" sz="1100" dirty="0"/>
+          </a:p>
+        </p:txBody>
+      </p:sp>
+      <p:sp>
+        <p:nvSpPr>
+          <p:cNvPr id="52" name="Text 50"/>
+          <p:cNvSpPr txBox="1"/>
+          <p:nvPr/>
+        </p:nvSpPr>
+        <p:spPr>
+          <a:xfrm>
+            <a:off x="10738714" y="3264408"/>
+            <a:ext cx="965606" cy="365760"/>
+          </a:xfrm>
+          <a:prstGeom prst="rect">
+            <a:avLst/>
+          </a:prstGeom>
+          <a:noFill/>
+          <a:ln/>
+        </p:spPr>
+        <p:txBody>
+          <a:bodyPr wrap="square" lIns="0" tIns="0" rIns="0" bIns="0" rtlCol="0" anchor="ctr"/>
+          <a:lstStyle/>
+          <a:p>
+            <a:pPr algn="r" indent="0" marL="0">
+              <a:buNone/>
+            </a:pPr>
+            <a:r>
+              <a:rPr lang="en-US" sz="850" dirty="0">
+                <a:solidFill>
+                  <a:srgbClr val="5B6B73"/>
+                </a:solidFill>
+                <a:latin typeface="Calibri" pitchFamily="34" charset="0"/>
+                <a:ea typeface="Calibri" pitchFamily="34" charset="-122"/>
+                <a:cs typeface="Calibri" pitchFamily="34" charset="-120"/>
+              </a:rPr>
+              <a:t>2.860 POB-dia</a:t>
+            </a:r>
+            <a:endParaRPr lang="en-US" sz="850" dirty="0"/>
+          </a:p>
+        </p:txBody>
+      </p:sp>
+      <p:sp>
+        <p:nvSpPr>
+          <p:cNvPr id="53" name="Text 51"/>
+          <p:cNvSpPr txBox="1"/>
+          <p:nvPr/>
+        </p:nvSpPr>
+        <p:spPr>
+          <a:xfrm>
+            <a:off x="6464808" y="3630168"/>
             <a:ext cx="2995574" cy="365760"/>
           </a:xfrm>
           <a:prstGeom prst="rect">
@@ -24138,13 +25642,13 @@
       </p:sp>
       <p:sp>
         <p:nvSpPr>
-          <p:cNvPr id="44" name="Text 42"/>
+          <p:cNvPr id="54" name="Text 52"/>
           <p:cNvSpPr txBox="1"/>
           <p:nvPr/>
         </p:nvSpPr>
         <p:spPr>
           <a:xfrm>
-            <a:off x="9350654" y="2898648"/>
+            <a:off x="9350654" y="3630168"/>
             <a:ext cx="1497787" cy="365760"/>
           </a:xfrm>
           <a:prstGeom prst="rect">
@@ -24177,13 +25681,13 @@
       </p:sp>
       <p:sp>
         <p:nvSpPr>
-          <p:cNvPr id="45" name="Text 43"/>
+          <p:cNvPr id="55" name="Text 53"/>
           <p:cNvSpPr txBox="1"/>
           <p:nvPr/>
         </p:nvSpPr>
         <p:spPr>
           <a:xfrm>
-            <a:off x="10738714" y="2898648"/>
+            <a:off x="10738714" y="3630168"/>
             <a:ext cx="965606" cy="365760"/>
           </a:xfrm>
           <a:prstGeom prst="rect">
@@ -24200,7 +25704,7 @@
               <a:buNone/>
             </a:pPr>
             <a:r>
-              <a:rPr lang="en-US" sz="900" dirty="0">
+              <a:rPr lang="en-US" sz="850" dirty="0">
                 <a:solidFill>
                   <a:srgbClr val="5B6B73"/>
                 </a:solidFill>
@@ -24208,21 +25712,21 @@
                 <a:ea typeface="Calibri" pitchFamily="34" charset="-122"/>
                 <a:cs typeface="Calibri" pitchFamily="34" charset="-120"/>
               </a:rPr>
-              <a:t>20 POB</a:t>
+              <a:t>700 POB-dia</a:t>
             </a:r>
-            <a:endParaRPr lang="en-US" sz="900" dirty="0"/>
+            <a:endParaRPr lang="en-US" sz="850" dirty="0"/>
           </a:p>
         </p:txBody>
       </p:sp>
       <p:sp>
         <p:nvSpPr>
-          <p:cNvPr id="46" name="Shape 44"/>
+          <p:cNvPr id="56" name="Shape 54"/>
           <p:cNvSpPr/>
           <p:nvPr/>
         </p:nvSpPr>
         <p:spPr>
           <a:xfrm>
-            <a:off x="6355080" y="3264408"/>
+            <a:off x="6355080" y="3995928"/>
             <a:ext cx="5349240" cy="365760"/>
           </a:xfrm>
           <a:prstGeom prst="rect">
@@ -24236,130 +25740,13 @@
       </p:sp>
       <p:sp>
         <p:nvSpPr>
-          <p:cNvPr id="47" name="Text 45"/>
+          <p:cNvPr id="57" name="Text 55"/>
           <p:cNvSpPr txBox="1"/>
           <p:nvPr/>
         </p:nvSpPr>
         <p:spPr>
           <a:xfrm>
-            <a:off x="6464808" y="3264408"/>
-            <a:ext cx="2995574" cy="365760"/>
-          </a:xfrm>
-          <a:prstGeom prst="rect">
-            <a:avLst/>
-          </a:prstGeom>
-          <a:noFill/>
-          <a:ln/>
-        </p:spPr>
-        <p:txBody>
-          <a:bodyPr wrap="square" lIns="0" tIns="0" rIns="0" bIns="0" rtlCol="0" anchor="ctr"/>
-          <a:lstStyle/>
-          <a:p>
-            <a:pPr indent="0" marL="0">
-              <a:buNone/>
-            </a:pPr>
-            <a:r>
-              <a:rPr lang="en-US" sz="1100" dirty="0">
-                <a:solidFill>
-                  <a:srgbClr val="1C2B33"/>
-                </a:solidFill>
-                <a:latin typeface="Calibri" pitchFamily="34" charset="0"/>
-                <a:ea typeface="Calibri" pitchFamily="34" charset="-122"/>
-                <a:cs typeface="Calibri" pitchFamily="34" charset="-120"/>
-              </a:rPr>
-              <a:t>Eficiência de Produção</a:t>
-            </a:r>
-            <a:endParaRPr lang="en-US" sz="1100" dirty="0"/>
-          </a:p>
-        </p:txBody>
-      </p:sp>
-      <p:sp>
-        <p:nvSpPr>
-          <p:cNvPr id="48" name="Text 46"/>
-          <p:cNvSpPr txBox="1"/>
-          <p:nvPr/>
-        </p:nvSpPr>
-        <p:spPr>
-          <a:xfrm>
-            <a:off x="9350654" y="3264408"/>
-            <a:ext cx="1497787" cy="365760"/>
-          </a:xfrm>
-          <a:prstGeom prst="rect">
-            <a:avLst/>
-          </a:prstGeom>
-          <a:noFill/>
-          <a:ln/>
-        </p:spPr>
-        <p:txBody>
-          <a:bodyPr wrap="square" lIns="0" tIns="0" rIns="0" bIns="0" rtlCol="0" anchor="ctr"/>
-          <a:lstStyle/>
-          <a:p>
-            <a:pPr algn="r" indent="0" marL="0">
-              <a:buNone/>
-            </a:pPr>
-            <a:r>
-              <a:rPr lang="en-US" sz="1100" b="1" dirty="0">
-                <a:solidFill>
-                  <a:srgbClr val="0B2A3D"/>
-                </a:solidFill>
-                <a:latin typeface="Calibri" pitchFamily="34" charset="0"/>
-                <a:ea typeface="Calibri" pitchFamily="34" charset="-122"/>
-                <a:cs typeface="Calibri" pitchFamily="34" charset="-120"/>
-              </a:rPr>
-              <a:t>US$ 2,1 mi</a:t>
-            </a:r>
-            <a:endParaRPr lang="en-US" sz="1100" dirty="0"/>
-          </a:p>
-        </p:txBody>
-      </p:sp>
-      <p:sp>
-        <p:nvSpPr>
-          <p:cNvPr id="49" name="Text 47"/>
-          <p:cNvSpPr txBox="1"/>
-          <p:nvPr/>
-        </p:nvSpPr>
-        <p:spPr>
-          <a:xfrm>
-            <a:off x="10738714" y="3264408"/>
-            <a:ext cx="965606" cy="365760"/>
-          </a:xfrm>
-          <a:prstGeom prst="rect">
-            <a:avLst/>
-          </a:prstGeom>
-          <a:noFill/>
-          <a:ln/>
-        </p:spPr>
-        <p:txBody>
-          <a:bodyPr wrap="square" lIns="0" tIns="0" rIns="0" bIns="0" rtlCol="0" anchor="ctr"/>
-          <a:lstStyle/>
-          <a:p>
-            <a:pPr algn="r" indent="0" marL="0">
-              <a:buNone/>
-            </a:pPr>
-            <a:r>
-              <a:rPr lang="en-US" sz="900" dirty="0">
-                <a:solidFill>
-                  <a:srgbClr val="5B6B73"/>
-                </a:solidFill>
-                <a:latin typeface="Calibri" pitchFamily="34" charset="0"/>
-                <a:ea typeface="Calibri" pitchFamily="34" charset="-122"/>
-                <a:cs typeface="Calibri" pitchFamily="34" charset="-120"/>
-              </a:rPr>
-              <a:t>132 POB</a:t>
-            </a:r>
-            <a:endParaRPr lang="en-US" sz="900" dirty="0"/>
-          </a:p>
-        </p:txBody>
-      </p:sp>
-      <p:sp>
-        <p:nvSpPr>
-          <p:cNvPr id="50" name="Text 48"/>
-          <p:cNvSpPr txBox="1"/>
-          <p:nvPr/>
-        </p:nvSpPr>
-        <p:spPr>
-          <a:xfrm>
-            <a:off x="6464808" y="3630168"/>
+            <a:off x="6464808" y="3995928"/>
             <a:ext cx="2995574" cy="365760"/>
           </a:xfrm>
           <a:prstGeom prst="rect">
@@ -24392,13 +25779,13 @@
       </p:sp>
       <p:sp>
         <p:nvSpPr>
-          <p:cNvPr id="51" name="Text 49"/>
+          <p:cNvPr id="58" name="Text 56"/>
           <p:cNvSpPr txBox="1"/>
           <p:nvPr/>
         </p:nvSpPr>
         <p:spPr>
           <a:xfrm>
-            <a:off x="9350654" y="3630168"/>
+            <a:off x="9350654" y="3995928"/>
             <a:ext cx="1497787" cy="365760"/>
           </a:xfrm>
           <a:prstGeom prst="rect">
@@ -24431,13 +25818,13 @@
       </p:sp>
       <p:sp>
         <p:nvSpPr>
-          <p:cNvPr id="52" name="Text 50"/>
+          <p:cNvPr id="59" name="Text 57"/>
           <p:cNvSpPr txBox="1"/>
           <p:nvPr/>
         </p:nvSpPr>
         <p:spPr>
           <a:xfrm>
-            <a:off x="10738714" y="3630168"/>
+            <a:off x="10738714" y="3995928"/>
             <a:ext cx="965606" cy="365760"/>
           </a:xfrm>
           <a:prstGeom prst="rect">
@@ -24454,7 +25841,7 @@
               <a:buNone/>
             </a:pPr>
             <a:r>
-              <a:rPr lang="en-US" sz="900" dirty="0">
+              <a:rPr lang="en-US" sz="850" dirty="0">
                 <a:solidFill>
                   <a:srgbClr val="5B6B73"/>
                 </a:solidFill>
@@ -24462,41 +25849,21 @@
                 <a:ea typeface="Calibri" pitchFamily="34" charset="-122"/>
                 <a:cs typeface="Calibri" pitchFamily="34" charset="-120"/>
               </a:rPr>
-              <a:t>12 POB</a:t>
+              <a:t>116 POB-dia</a:t>
             </a:r>
-            <a:endParaRPr lang="en-US" sz="900" dirty="0"/>
+            <a:endParaRPr lang="en-US" sz="850" dirty="0"/>
           </a:p>
         </p:txBody>
       </p:sp>
       <p:sp>
         <p:nvSpPr>
-          <p:cNvPr id="53" name="Shape 51"/>
-          <p:cNvSpPr/>
-          <p:nvPr/>
-        </p:nvSpPr>
-        <p:spPr>
-          <a:xfrm>
-            <a:off x="6355080" y="3995928"/>
-            <a:ext cx="5349240" cy="365760"/>
-          </a:xfrm>
-          <a:prstGeom prst="rect">
-            <a:avLst/>
-          </a:prstGeom>
-          <a:solidFill>
-            <a:srgbClr val="F0F4F5"/>
-          </a:solidFill>
-          <a:ln/>
-        </p:spPr>
-      </p:sp>
-      <p:sp>
-        <p:nvSpPr>
-          <p:cNvPr id="54" name="Text 52"/>
+          <p:cNvPr id="60" name="Text 58"/>
           <p:cNvSpPr txBox="1"/>
           <p:nvPr/>
         </p:nvSpPr>
         <p:spPr>
           <a:xfrm>
-            <a:off x="6464808" y="3995928"/>
+            <a:off x="6464808" y="4361688"/>
             <a:ext cx="2995574" cy="365760"/>
           </a:xfrm>
           <a:prstGeom prst="rect">
@@ -24529,13 +25896,13 @@
       </p:sp>
       <p:sp>
         <p:nvSpPr>
-          <p:cNvPr id="55" name="Text 53"/>
+          <p:cNvPr id="61" name="Text 59"/>
           <p:cNvSpPr txBox="1"/>
           <p:nvPr/>
         </p:nvSpPr>
         <p:spPr>
           <a:xfrm>
-            <a:off x="9350654" y="3995928"/>
+            <a:off x="9350654" y="4361688"/>
             <a:ext cx="1497787" cy="365760"/>
           </a:xfrm>
           <a:prstGeom prst="rect">
@@ -24560,7 +25927,7 @@
                 <a:ea typeface="Calibri" pitchFamily="34" charset="-122"/>
                 <a:cs typeface="Calibri" pitchFamily="34" charset="-120"/>
               </a:rPr>
-              <a:t>US$ 465,5 mil</a:t>
+              <a:t>US$ 475,5 mil</a:t>
             </a:r>
             <a:endParaRPr lang="en-US" sz="1100" dirty="0"/>
           </a:p>
@@ -24568,13 +25935,13 @@
       </p:sp>
       <p:sp>
         <p:nvSpPr>
-          <p:cNvPr id="56" name="Text 54"/>
+          <p:cNvPr id="62" name="Text 60"/>
           <p:cNvSpPr txBox="1"/>
           <p:nvPr/>
         </p:nvSpPr>
         <p:spPr>
           <a:xfrm>
-            <a:off x="10738714" y="3995928"/>
+            <a:off x="10738714" y="4361688"/>
             <a:ext cx="965606" cy="365760"/>
           </a:xfrm>
           <a:prstGeom prst="rect">
@@ -24591,7 +25958,7 @@
               <a:buNone/>
             </a:pPr>
             <a:r>
-              <a:rPr lang="en-US" sz="900" dirty="0">
+              <a:rPr lang="en-US" sz="850" dirty="0">
                 <a:solidFill>
                   <a:srgbClr val="5B6B73"/>
                 </a:solidFill>
@@ -24599,15 +25966,15 @@
                 <a:ea typeface="Calibri" pitchFamily="34" charset="-122"/>
                 <a:cs typeface="Calibri" pitchFamily="34" charset="-120"/>
               </a:rPr>
-              <a:t>18 POB</a:t>
+              <a:t>426 POB-dia</a:t>
             </a:r>
-            <a:endParaRPr lang="en-US" sz="900" dirty="0"/>
+            <a:endParaRPr lang="en-US" sz="850" dirty="0"/>
           </a:p>
         </p:txBody>
       </p:sp>
       <p:sp>
         <p:nvSpPr>
-          <p:cNvPr id="57" name="Text 55"/>
+          <p:cNvPr id="63" name="Text 61"/>
           <p:cNvSpPr txBox="1"/>
           <p:nvPr/>
         </p:nvSpPr>
@@ -24638,7 +26005,7 @@
                 <a:ea typeface="Calibri" pitchFamily="34" charset="-122"/>
                 <a:cs typeface="Calibri" pitchFamily="34" charset="-120"/>
               </a:rPr>
-              <a:t>Metodologia: soma de Custo de Serviço + Custo de Material (Jan–Dez), para itens de Cost Allocation = CAPEX com status 'Contar' ou 'TA'. O total desconsidera a categoria Desenvolvimento de Produção (sem itens para este ativo).</a:t>
+              <a:t>Metodologia: soma de Custo de Serviço + Custo de Material (Jan–Dez), para itens de Cost Allocation = CAPEX com status 'Contar' ou 'TA'. POB em POB-dia (pessoas a bordo × dias). O total desconsidera a categoria Desenvolvimento de Produção (US$ 6,3 mi, mantida na lista de Categoria apenas para referência).</a:t>
             </a:r>
             <a:endParaRPr lang="en-US" sz="850" dirty="0"/>
           </a:p>
@@ -28577,7 +29944,7 @@
                 <a:ea typeface="Calibri" pitchFamily="34" charset="-122"/>
                 <a:cs typeface="Calibri" pitchFamily="34" charset="-120"/>
               </a:rPr>
-              <a:t>Fonte: Plano Integrado · aba 'Geral - Em análise' · itens de Cost Allocation = CAPEX, status 'Contar' + 'TA'. Lista completa disponível na planilha em anexo.</a:t>
+              <a:t>Fonte: Plano Integrado · aba 'Geral - Em análise' · coluna 'Valor Total' · itens de Cost Allocation = CAPEX, status 'Contar' + 'TA'. Lista completa disponível na planilha em anexo. Extrato pendente de atualização — pode não somar exatamente ao total da Composição de Custo e POB.</a:t>
             </a:r>
             <a:endParaRPr lang="en-US" sz="850" dirty="0"/>
           </a:p>

--- a/PRIO_Plano_Trabalho_CAPEX_2027.pptx
+++ b/PRIO_Plano_Trabalho_CAPEX_2027.pptx
@@ -250,16 +250,16 @@
                 <c:formatCode>General</c:formatCode>
                 <c:ptCount val="4"/>
                 <c:pt idx="0">
-                  <c:v>18.14</c:v>
+                  <c:v>15.98</c:v>
                 </c:pt>
                 <c:pt idx="1">
-                  <c:v>8.83</c:v>
+                  <c:v>7.19</c:v>
                 </c:pt>
                 <c:pt idx="2">
-                  <c:v>3.46</c:v>
+                  <c:v>2.91</c:v>
                 </c:pt>
                 <c:pt idx="3">
-                  <c:v>4.55</c:v>
+                  <c:v>3.44</c:v>
                 </c:pt>
               </c:numCache>
             </c:numRef>
@@ -2813,7 +2813,7 @@
                 <a:ea typeface="Cambria" pitchFamily="34" charset="-122"/>
                 <a:cs typeface="Cambria" pitchFamily="34" charset="-120"/>
               </a:rPr>
-              <a:t>US$ 2,6 mi</a:t>
+              <a:t>US$ 1,7 mi</a:t>
             </a:r>
             <a:endParaRPr lang="en-US" sz="2100" dirty="0"/>
           </a:p>
@@ -2913,7 +2913,7 @@
                 <a:ea typeface="Cambria" pitchFamily="34" charset="-122"/>
                 <a:cs typeface="Cambria" pitchFamily="34" charset="-120"/>
               </a:rPr>
-              <a:t>US$ 3,7 mi</a:t>
+              <a:t>US$ 1,2 mi</a:t>
             </a:r>
             <a:endParaRPr lang="en-US" sz="2100" dirty="0"/>
           </a:p>
@@ -3013,7 +3013,7 @@
                 <a:ea typeface="Cambria" pitchFamily="34" charset="-122"/>
                 <a:cs typeface="Cambria" pitchFamily="34" charset="-120"/>
               </a:rPr>
-              <a:t>US$ 3,5 mi</a:t>
+              <a:t>US$ 2,9 mi</a:t>
             </a:r>
             <a:endParaRPr lang="en-US" sz="2100" dirty="0"/>
           </a:p>
@@ -3113,7 +3113,7 @@
                 <a:ea typeface="Cambria" pitchFamily="34" charset="-122"/>
                 <a:cs typeface="Cambria" pitchFamily="34" charset="-120"/>
               </a:rPr>
-              <a:t>3.846</a:t>
+              <a:t>121</a:t>
             </a:r>
             <a:endParaRPr lang="en-US" sz="2100" dirty="0"/>
           </a:p>
@@ -3152,7 +3152,7 @@
                 <a:ea typeface="Calibri" pitchFamily="34" charset="-122"/>
                 <a:cs typeface="Calibri" pitchFamily="34" charset="-120"/>
               </a:rPr>
-              <a:t>POB TOTAL (POB-DIA)</a:t>
+              <a:t>POB TOTAL</a:t>
             </a:r>
             <a:endParaRPr lang="en-US" sz="850" dirty="0"/>
           </a:p>
@@ -3292,7 +3292,7 @@
                 <a:ea typeface="Calibri" pitchFamily="34" charset="-122"/>
                 <a:cs typeface="Calibri" pitchFamily="34" charset="-120"/>
               </a:rPr>
-              <a:t>US$ 5,1 mi</a:t>
+              <a:t>US$ 2,3 mi</a:t>
             </a:r>
             <a:endParaRPr lang="en-US" sz="1100" dirty="0"/>
           </a:p>
@@ -3323,7 +3323,7 @@
               <a:buNone/>
             </a:pPr>
             <a:r>
-              <a:rPr lang="en-US" sz="850" dirty="0">
+              <a:rPr lang="en-US" sz="900" dirty="0">
                 <a:solidFill>
                   <a:srgbClr val="5B6B73"/>
                 </a:solidFill>
@@ -3331,9 +3331,9 @@
                 <a:ea typeface="Calibri" pitchFamily="34" charset="-122"/>
                 <a:cs typeface="Calibri" pitchFamily="34" charset="-120"/>
               </a:rPr>
-              <a:t>2.176 POB-dia</a:t>
+              <a:t>51 POB</a:t>
             </a:r>
-            <a:endParaRPr lang="en-US" sz="850" dirty="0"/>
+            <a:endParaRPr lang="en-US" sz="900" dirty="0"/>
           </a:p>
         </p:txBody>
       </p:sp>
@@ -3429,7 +3429,7 @@
                 <a:ea typeface="Calibri" pitchFamily="34" charset="-122"/>
                 <a:cs typeface="Calibri" pitchFamily="34" charset="-120"/>
               </a:rPr>
-              <a:t>US$ 1,1 mi</a:t>
+              <a:t>US$ 565,1 mil</a:t>
             </a:r>
             <a:endParaRPr lang="en-US" sz="1100" dirty="0"/>
           </a:p>
@@ -3460,7 +3460,7 @@
               <a:buNone/>
             </a:pPr>
             <a:r>
-              <a:rPr lang="en-US" sz="850" dirty="0">
+              <a:rPr lang="en-US" sz="900" dirty="0">
                 <a:solidFill>
                   <a:srgbClr val="5B6B73"/>
                 </a:solidFill>
@@ -3468,9 +3468,9 @@
                 <a:ea typeface="Calibri" pitchFamily="34" charset="-122"/>
                 <a:cs typeface="Calibri" pitchFamily="34" charset="-120"/>
               </a:rPr>
-              <a:t>1.650 POB-dia</a:t>
+              <a:t>70 POB</a:t>
             </a:r>
-            <a:endParaRPr lang="en-US" sz="850" dirty="0"/>
+            <a:endParaRPr lang="en-US" sz="900" dirty="0"/>
           </a:p>
         </p:txBody>
       </p:sp>
@@ -3483,260 +3483,6 @@
         <p:spPr>
           <a:xfrm>
             <a:off x="566928" y="3630168"/>
-            <a:ext cx="2995574" cy="365760"/>
-          </a:xfrm>
-          <a:prstGeom prst="rect">
-            <a:avLst/>
-          </a:prstGeom>
-          <a:noFill/>
-          <a:ln/>
-        </p:spPr>
-        <p:txBody>
-          <a:bodyPr wrap="square" lIns="0" tIns="0" rIns="0" bIns="0" rtlCol="0" anchor="ctr"/>
-          <a:lstStyle/>
-          <a:p>
-            <a:pPr indent="0" marL="0">
-              <a:buNone/>
-            </a:pPr>
-            <a:r>
-              <a:rPr lang="en-US" sz="1100" dirty="0">
-                <a:solidFill>
-                  <a:srgbClr val="1C2B33"/>
-                </a:solidFill>
-                <a:latin typeface="Calibri" pitchFamily="34" charset="0"/>
-                <a:ea typeface="Calibri" pitchFamily="34" charset="-122"/>
-                <a:cs typeface="Calibri" pitchFamily="34" charset="-120"/>
-              </a:rPr>
-              <a:t>P&amp;Q - Processos</a:t>
-            </a:r>
-            <a:endParaRPr lang="en-US" sz="1100" dirty="0"/>
-          </a:p>
-        </p:txBody>
-      </p:sp>
-      <p:sp>
-        <p:nvSpPr>
-          <p:cNvPr id="28" name="Text 26"/>
-          <p:cNvSpPr txBox="1"/>
-          <p:nvPr/>
-        </p:nvSpPr>
-        <p:spPr>
-          <a:xfrm>
-            <a:off x="3452774" y="3630168"/>
-            <a:ext cx="1497787" cy="365760"/>
-          </a:xfrm>
-          <a:prstGeom prst="rect">
-            <a:avLst/>
-          </a:prstGeom>
-          <a:noFill/>
-          <a:ln/>
-        </p:spPr>
-        <p:txBody>
-          <a:bodyPr wrap="square" lIns="0" tIns="0" rIns="0" bIns="0" rtlCol="0" anchor="ctr"/>
-          <a:lstStyle/>
-          <a:p>
-            <a:pPr algn="r" indent="0" marL="0">
-              <a:buNone/>
-            </a:pPr>
-            <a:r>
-              <a:rPr lang="en-US" sz="1100" b="1" dirty="0">
-                <a:solidFill>
-                  <a:srgbClr val="0B2A3D"/>
-                </a:solidFill>
-                <a:latin typeface="Calibri" pitchFamily="34" charset="0"/>
-                <a:ea typeface="Calibri" pitchFamily="34" charset="-122"/>
-                <a:cs typeface="Calibri" pitchFamily="34" charset="-120"/>
-              </a:rPr>
-              <a:t>US$ 150,5 mil</a:t>
-            </a:r>
-            <a:endParaRPr lang="en-US" sz="1100" dirty="0"/>
-          </a:p>
-        </p:txBody>
-      </p:sp>
-      <p:sp>
-        <p:nvSpPr>
-          <p:cNvPr id="29" name="Text 27"/>
-          <p:cNvSpPr txBox="1"/>
-          <p:nvPr/>
-        </p:nvSpPr>
-        <p:spPr>
-          <a:xfrm>
-            <a:off x="4840834" y="3630168"/>
-            <a:ext cx="965606" cy="365760"/>
-          </a:xfrm>
-          <a:prstGeom prst="rect">
-            <a:avLst/>
-          </a:prstGeom>
-          <a:noFill/>
-          <a:ln/>
-        </p:spPr>
-        <p:txBody>
-          <a:bodyPr wrap="square" lIns="0" tIns="0" rIns="0" bIns="0" rtlCol="0" anchor="ctr"/>
-          <a:lstStyle/>
-          <a:p>
-            <a:pPr algn="r" indent="0" marL="0">
-              <a:buNone/>
-            </a:pPr>
-            <a:r>
-              <a:rPr lang="en-US" sz="850" dirty="0">
-                <a:solidFill>
-                  <a:srgbClr val="5B6B73"/>
-                </a:solidFill>
-                <a:latin typeface="Calibri" pitchFamily="34" charset="0"/>
-                <a:ea typeface="Calibri" pitchFamily="34" charset="-122"/>
-                <a:cs typeface="Calibri" pitchFamily="34" charset="-120"/>
-              </a:rPr>
-              <a:t>14 POB-dia</a:t>
-            </a:r>
-            <a:endParaRPr lang="en-US" sz="850" dirty="0"/>
-          </a:p>
-        </p:txBody>
-      </p:sp>
-      <p:sp>
-        <p:nvSpPr>
-          <p:cNvPr id="30" name="Shape 28"/>
-          <p:cNvSpPr/>
-          <p:nvPr/>
-        </p:nvSpPr>
-        <p:spPr>
-          <a:xfrm>
-            <a:off x="457200" y="3995928"/>
-            <a:ext cx="5349240" cy="365760"/>
-          </a:xfrm>
-          <a:prstGeom prst="rect">
-            <a:avLst/>
-          </a:prstGeom>
-          <a:solidFill>
-            <a:srgbClr val="F0F4F5"/>
-          </a:solidFill>
-          <a:ln/>
-        </p:spPr>
-      </p:sp>
-      <p:sp>
-        <p:nvSpPr>
-          <p:cNvPr id="31" name="Text 29"/>
-          <p:cNvSpPr txBox="1"/>
-          <p:nvPr/>
-        </p:nvSpPr>
-        <p:spPr>
-          <a:xfrm>
-            <a:off x="566928" y="3995928"/>
-            <a:ext cx="2995574" cy="365760"/>
-          </a:xfrm>
-          <a:prstGeom prst="rect">
-            <a:avLst/>
-          </a:prstGeom>
-          <a:noFill/>
-          <a:ln/>
-        </p:spPr>
-        <p:txBody>
-          <a:bodyPr wrap="square" lIns="0" tIns="0" rIns="0" bIns="0" rtlCol="0" anchor="ctr"/>
-          <a:lstStyle/>
-          <a:p>
-            <a:pPr indent="0" marL="0">
-              <a:buNone/>
-            </a:pPr>
-            <a:r>
-              <a:rPr lang="en-US" sz="1100" dirty="0">
-                <a:solidFill>
-                  <a:srgbClr val="1C2B33"/>
-                </a:solidFill>
-                <a:latin typeface="Calibri" pitchFamily="34" charset="0"/>
-                <a:ea typeface="Calibri" pitchFamily="34" charset="-122"/>
-                <a:cs typeface="Calibri" pitchFamily="34" charset="-120"/>
-              </a:rPr>
-              <a:t>P&amp;Q - Químicos</a:t>
-            </a:r>
-            <a:endParaRPr lang="en-US" sz="1100" dirty="0"/>
-          </a:p>
-        </p:txBody>
-      </p:sp>
-      <p:sp>
-        <p:nvSpPr>
-          <p:cNvPr id="32" name="Text 30"/>
-          <p:cNvSpPr txBox="1"/>
-          <p:nvPr/>
-        </p:nvSpPr>
-        <p:spPr>
-          <a:xfrm>
-            <a:off x="3452774" y="3995928"/>
-            <a:ext cx="1497787" cy="365760"/>
-          </a:xfrm>
-          <a:prstGeom prst="rect">
-            <a:avLst/>
-          </a:prstGeom>
-          <a:noFill/>
-          <a:ln/>
-        </p:spPr>
-        <p:txBody>
-          <a:bodyPr wrap="square" lIns="0" tIns="0" rIns="0" bIns="0" rtlCol="0" anchor="ctr"/>
-          <a:lstStyle/>
-          <a:p>
-            <a:pPr algn="r" indent="0" marL="0">
-              <a:buNone/>
-            </a:pPr>
-            <a:r>
-              <a:rPr lang="en-US" sz="1100" b="1" dirty="0">
-                <a:solidFill>
-                  <a:srgbClr val="0B2A3D"/>
-                </a:solidFill>
-                <a:latin typeface="Calibri" pitchFamily="34" charset="0"/>
-                <a:ea typeface="Calibri" pitchFamily="34" charset="-122"/>
-                <a:cs typeface="Calibri" pitchFamily="34" charset="-120"/>
-              </a:rPr>
-              <a:t>US$ 10,0 mil</a:t>
-            </a:r>
-            <a:endParaRPr lang="en-US" sz="1100" dirty="0"/>
-          </a:p>
-        </p:txBody>
-      </p:sp>
-      <p:sp>
-        <p:nvSpPr>
-          <p:cNvPr id="33" name="Text 31"/>
-          <p:cNvSpPr txBox="1"/>
-          <p:nvPr/>
-        </p:nvSpPr>
-        <p:spPr>
-          <a:xfrm>
-            <a:off x="4840834" y="3995928"/>
-            <a:ext cx="965606" cy="365760"/>
-          </a:xfrm>
-          <a:prstGeom prst="rect">
-            <a:avLst/>
-          </a:prstGeom>
-          <a:noFill/>
-          <a:ln/>
-        </p:spPr>
-        <p:txBody>
-          <a:bodyPr wrap="square" lIns="0" tIns="0" rIns="0" bIns="0" rtlCol="0" anchor="ctr"/>
-          <a:lstStyle/>
-          <a:p>
-            <a:pPr algn="r" indent="0" marL="0">
-              <a:buNone/>
-            </a:pPr>
-            <a:r>
-              <a:rPr lang="en-US" sz="850" dirty="0">
-                <a:solidFill>
-                  <a:srgbClr val="5B6B73"/>
-                </a:solidFill>
-                <a:latin typeface="Calibri" pitchFamily="34" charset="0"/>
-                <a:ea typeface="Calibri" pitchFamily="34" charset="-122"/>
-                <a:cs typeface="Calibri" pitchFamily="34" charset="-120"/>
-              </a:rPr>
-              <a:t>6 POB-dia</a:t>
-            </a:r>
-            <a:endParaRPr lang="en-US" sz="850" dirty="0"/>
-          </a:p>
-        </p:txBody>
-      </p:sp>
-      <p:sp>
-        <p:nvSpPr>
-          <p:cNvPr id="34" name="Text 32"/>
-          <p:cNvSpPr txBox="1"/>
-          <p:nvPr/>
-        </p:nvSpPr>
-        <p:spPr>
-          <a:xfrm>
-            <a:off x="566928" y="4361688"/>
             <a:ext cx="2995574" cy="365760"/>
           </a:xfrm>
           <a:prstGeom prst="rect">
@@ -3769,13 +3515,13 @@
       </p:sp>
       <p:sp>
         <p:nvSpPr>
-          <p:cNvPr id="35" name="Text 33"/>
+          <p:cNvPr id="28" name="Text 26"/>
           <p:cNvSpPr txBox="1"/>
           <p:nvPr/>
         </p:nvSpPr>
         <p:spPr>
           <a:xfrm>
-            <a:off x="3452774" y="4361688"/>
+            <a:off x="3452774" y="3630168"/>
             <a:ext cx="1497787" cy="365760"/>
           </a:xfrm>
           <a:prstGeom prst="rect">
@@ -3808,13 +3554,13 @@
       </p:sp>
       <p:sp>
         <p:nvSpPr>
-          <p:cNvPr id="36" name="Text 34"/>
+          <p:cNvPr id="29" name="Text 27"/>
           <p:cNvSpPr txBox="1"/>
           <p:nvPr/>
         </p:nvSpPr>
         <p:spPr>
           <a:xfrm>
-            <a:off x="4840834" y="4361688"/>
+            <a:off x="4840834" y="3630168"/>
             <a:ext cx="965606" cy="365760"/>
           </a:xfrm>
           <a:prstGeom prst="rect">
@@ -3831,7 +3577,7 @@
               <a:buNone/>
             </a:pPr>
             <a:r>
-              <a:rPr lang="en-US" sz="850" dirty="0">
+              <a:rPr lang="en-US" sz="900" dirty="0">
                 <a:solidFill>
                   <a:srgbClr val="5B6B73"/>
                 </a:solidFill>
@@ -3839,15 +3585,15 @@
                 <a:ea typeface="Calibri" pitchFamily="34" charset="-122"/>
                 <a:cs typeface="Calibri" pitchFamily="34" charset="-120"/>
               </a:rPr>
-              <a:t>0 POB-dia</a:t>
+              <a:t>0 POB</a:t>
             </a:r>
-            <a:endParaRPr lang="en-US" sz="850" dirty="0"/>
+            <a:endParaRPr lang="en-US" sz="900" dirty="0"/>
           </a:p>
         </p:txBody>
       </p:sp>
       <p:sp>
         <p:nvSpPr>
-          <p:cNvPr id="37" name="Text 35"/>
+          <p:cNvPr id="30" name="Text 28"/>
           <p:cNvSpPr txBox="1"/>
           <p:nvPr/>
         </p:nvSpPr>
@@ -3886,7 +3632,7 @@
       </p:sp>
       <p:sp>
         <p:nvSpPr>
-          <p:cNvPr id="38" name="Shape 36"/>
+          <p:cNvPr id="31" name="Shape 29"/>
           <p:cNvSpPr/>
           <p:nvPr/>
         </p:nvSpPr>
@@ -3909,150 +3655,13 @@
       </p:sp>
       <p:sp>
         <p:nvSpPr>
-          <p:cNvPr id="39" name="Text 37"/>
+          <p:cNvPr id="32" name="Text 30"/>
           <p:cNvSpPr txBox="1"/>
           <p:nvPr/>
         </p:nvSpPr>
         <p:spPr>
           <a:xfrm>
             <a:off x="6464808" y="2898648"/>
-            <a:ext cx="2995574" cy="365760"/>
-          </a:xfrm>
-          <a:prstGeom prst="rect">
-            <a:avLst/>
-          </a:prstGeom>
-          <a:noFill/>
-          <a:ln/>
-        </p:spPr>
-        <p:txBody>
-          <a:bodyPr wrap="square" lIns="0" tIns="0" rIns="0" bIns="0" rtlCol="0" anchor="ctr"/>
-          <a:lstStyle/>
-          <a:p>
-            <a:pPr indent="0" marL="0">
-              <a:buNone/>
-            </a:pPr>
-            <a:r>
-              <a:rPr lang="en-US" sz="1100" dirty="0">
-                <a:solidFill>
-                  <a:srgbClr val="1C2B33"/>
-                </a:solidFill>
-                <a:latin typeface="Calibri" pitchFamily="34" charset="0"/>
-                <a:ea typeface="Calibri" pitchFamily="34" charset="-122"/>
-                <a:cs typeface="Calibri" pitchFamily="34" charset="-120"/>
-              </a:rPr>
-              <a:t>Desenvolvimento de Produção</a:t>
-            </a:r>
-            <a:endParaRPr lang="en-US" sz="1100" dirty="0"/>
-          </a:p>
-        </p:txBody>
-      </p:sp>
-      <p:sp>
-        <p:nvSpPr>
-          <p:cNvPr id="40" name="Text 38"/>
-          <p:cNvSpPr txBox="1"/>
-          <p:nvPr/>
-        </p:nvSpPr>
-        <p:spPr>
-          <a:xfrm>
-            <a:off x="9350654" y="2898648"/>
-            <a:ext cx="1497787" cy="365760"/>
-          </a:xfrm>
-          <a:prstGeom prst="rect">
-            <a:avLst/>
-          </a:prstGeom>
-          <a:noFill/>
-          <a:ln/>
-        </p:spPr>
-        <p:txBody>
-          <a:bodyPr wrap="square" lIns="0" tIns="0" rIns="0" bIns="0" rtlCol="0" anchor="ctr"/>
-          <a:lstStyle/>
-          <a:p>
-            <a:pPr algn="r" indent="0" marL="0">
-              <a:buNone/>
-            </a:pPr>
-            <a:r>
-              <a:rPr lang="en-US" sz="1100" b="1" dirty="0">
-                <a:solidFill>
-                  <a:srgbClr val="0B2A3D"/>
-                </a:solidFill>
-                <a:latin typeface="Calibri" pitchFamily="34" charset="0"/>
-                <a:ea typeface="Calibri" pitchFamily="34" charset="-122"/>
-                <a:cs typeface="Calibri" pitchFamily="34" charset="-120"/>
-              </a:rPr>
-              <a:t>US$ 2,9 mi</a:t>
-            </a:r>
-            <a:endParaRPr lang="en-US" sz="1100" dirty="0"/>
-          </a:p>
-        </p:txBody>
-      </p:sp>
-      <p:sp>
-        <p:nvSpPr>
-          <p:cNvPr id="41" name="Text 39"/>
-          <p:cNvSpPr txBox="1"/>
-          <p:nvPr/>
-        </p:nvSpPr>
-        <p:spPr>
-          <a:xfrm>
-            <a:off x="10738714" y="2898648"/>
-            <a:ext cx="965606" cy="365760"/>
-          </a:xfrm>
-          <a:prstGeom prst="rect">
-            <a:avLst/>
-          </a:prstGeom>
-          <a:noFill/>
-          <a:ln/>
-        </p:spPr>
-        <p:txBody>
-          <a:bodyPr wrap="square" lIns="0" tIns="0" rIns="0" bIns="0" rtlCol="0" anchor="ctr"/>
-          <a:lstStyle/>
-          <a:p>
-            <a:pPr algn="r" indent="0" marL="0">
-              <a:buNone/>
-            </a:pPr>
-            <a:r>
-              <a:rPr lang="en-US" sz="850" dirty="0">
-                <a:solidFill>
-                  <a:srgbClr val="5B6B73"/>
-                </a:solidFill>
-                <a:latin typeface="Calibri" pitchFamily="34" charset="0"/>
-                <a:ea typeface="Calibri" pitchFamily="34" charset="-122"/>
-                <a:cs typeface="Calibri" pitchFamily="34" charset="-120"/>
-              </a:rPr>
-              <a:t>1.223 POB-dia</a:t>
-            </a:r>
-            <a:endParaRPr lang="en-US" sz="850" dirty="0"/>
-          </a:p>
-        </p:txBody>
-      </p:sp>
-      <p:sp>
-        <p:nvSpPr>
-          <p:cNvPr id="42" name="Shape 40"/>
-          <p:cNvSpPr/>
-          <p:nvPr/>
-        </p:nvSpPr>
-        <p:spPr>
-          <a:xfrm>
-            <a:off x="6355080" y="3264408"/>
-            <a:ext cx="5349240" cy="365760"/>
-          </a:xfrm>
-          <a:prstGeom prst="rect">
-            <a:avLst/>
-          </a:prstGeom>
-          <a:solidFill>
-            <a:srgbClr val="F0F4F5"/>
-          </a:solidFill>
-          <a:ln/>
-        </p:spPr>
-      </p:sp>
-      <p:sp>
-        <p:nvSpPr>
-          <p:cNvPr id="43" name="Text 41"/>
-          <p:cNvSpPr txBox="1"/>
-          <p:nvPr/>
-        </p:nvSpPr>
-        <p:spPr>
-          <a:xfrm>
-            <a:off x="6464808" y="3264408"/>
             <a:ext cx="2995574" cy="365760"/>
           </a:xfrm>
           <a:prstGeom prst="rect">
@@ -4085,13 +3694,13 @@
       </p:sp>
       <p:sp>
         <p:nvSpPr>
-          <p:cNvPr id="44" name="Text 42"/>
+          <p:cNvPr id="33" name="Text 31"/>
           <p:cNvSpPr txBox="1"/>
           <p:nvPr/>
         </p:nvSpPr>
         <p:spPr>
           <a:xfrm>
-            <a:off x="9350654" y="3264408"/>
+            <a:off x="9350654" y="2898648"/>
             <a:ext cx="1497787" cy="365760"/>
           </a:xfrm>
           <a:prstGeom prst="rect">
@@ -4116,7 +3725,7 @@
                 <a:ea typeface="Calibri" pitchFamily="34" charset="-122"/>
                 <a:cs typeface="Calibri" pitchFamily="34" charset="-120"/>
               </a:rPr>
-              <a:t>US$ 2,9 mi</a:t>
+              <a:t>US$ 2,3 mi</a:t>
             </a:r>
             <a:endParaRPr lang="en-US" sz="1100" dirty="0"/>
           </a:p>
@@ -4124,13 +3733,13 @@
       </p:sp>
       <p:sp>
         <p:nvSpPr>
-          <p:cNvPr id="45" name="Text 43"/>
+          <p:cNvPr id="34" name="Text 32"/>
           <p:cNvSpPr txBox="1"/>
           <p:nvPr/>
         </p:nvSpPr>
         <p:spPr>
           <a:xfrm>
-            <a:off x="10738714" y="3264408"/>
+            <a:off x="10738714" y="2898648"/>
             <a:ext cx="965606" cy="365760"/>
           </a:xfrm>
           <a:prstGeom prst="rect">
@@ -4147,7 +3756,7 @@
               <a:buNone/>
             </a:pPr>
             <a:r>
-              <a:rPr lang="en-US" sz="850" dirty="0">
+              <a:rPr lang="en-US" sz="900" dirty="0">
                 <a:solidFill>
                   <a:srgbClr val="5B6B73"/>
                 </a:solidFill>
@@ -4155,21 +3764,41 @@
                 <a:ea typeface="Calibri" pitchFamily="34" charset="-122"/>
                 <a:cs typeface="Calibri" pitchFamily="34" charset="-120"/>
               </a:rPr>
-              <a:t>2.589 POB-dia</a:t>
+              <a:t>119 POB</a:t>
             </a:r>
-            <a:endParaRPr lang="en-US" sz="850" dirty="0"/>
+            <a:endParaRPr lang="en-US" sz="900" dirty="0"/>
           </a:p>
         </p:txBody>
       </p:sp>
       <p:sp>
         <p:nvSpPr>
-          <p:cNvPr id="46" name="Text 44"/>
+          <p:cNvPr id="35" name="Shape 33"/>
+          <p:cNvSpPr/>
+          <p:nvPr/>
+        </p:nvSpPr>
+        <p:spPr>
+          <a:xfrm>
+            <a:off x="6355080" y="3264408"/>
+            <a:ext cx="5349240" cy="365760"/>
+          </a:xfrm>
+          <a:prstGeom prst="rect">
+            <a:avLst/>
+          </a:prstGeom>
+          <a:solidFill>
+            <a:srgbClr val="F0F4F5"/>
+          </a:solidFill>
+          <a:ln/>
+        </p:spPr>
+      </p:sp>
+      <p:sp>
+        <p:nvSpPr>
+          <p:cNvPr id="36" name="Text 34"/>
           <p:cNvSpPr txBox="1"/>
           <p:nvPr/>
         </p:nvSpPr>
         <p:spPr>
           <a:xfrm>
-            <a:off x="6464808" y="3630168"/>
+            <a:off x="6464808" y="3264408"/>
             <a:ext cx="2995574" cy="365760"/>
           </a:xfrm>
           <a:prstGeom prst="rect">
@@ -4202,13 +3831,13 @@
       </p:sp>
       <p:sp>
         <p:nvSpPr>
-          <p:cNvPr id="47" name="Text 45"/>
+          <p:cNvPr id="37" name="Text 35"/>
           <p:cNvSpPr txBox="1"/>
           <p:nvPr/>
         </p:nvSpPr>
         <p:spPr>
           <a:xfrm>
-            <a:off x="9350654" y="3630168"/>
+            <a:off x="9350654" y="3264408"/>
             <a:ext cx="1497787" cy="365760"/>
           </a:xfrm>
           <a:prstGeom prst="rect">
@@ -4241,13 +3870,13 @@
       </p:sp>
       <p:sp>
         <p:nvSpPr>
-          <p:cNvPr id="48" name="Text 46"/>
+          <p:cNvPr id="38" name="Text 36"/>
           <p:cNvSpPr txBox="1"/>
           <p:nvPr/>
         </p:nvSpPr>
         <p:spPr>
           <a:xfrm>
-            <a:off x="10738714" y="3630168"/>
+            <a:off x="10738714" y="3264408"/>
             <a:ext cx="965606" cy="365760"/>
           </a:xfrm>
           <a:prstGeom prst="rect">
@@ -4264,7 +3893,7 @@
               <a:buNone/>
             </a:pPr>
             <a:r>
-              <a:rPr lang="en-US" sz="850" dirty="0">
+              <a:rPr lang="en-US" sz="900" dirty="0">
                 <a:solidFill>
                   <a:srgbClr val="5B6B73"/>
                 </a:solidFill>
@@ -4272,158 +3901,21 @@
                 <a:ea typeface="Calibri" pitchFamily="34" charset="-122"/>
                 <a:cs typeface="Calibri" pitchFamily="34" charset="-120"/>
               </a:rPr>
-              <a:t>28 POB-dia</a:t>
+              <a:t>2 POB</a:t>
             </a:r>
-            <a:endParaRPr lang="en-US" sz="850" dirty="0"/>
+            <a:endParaRPr lang="en-US" sz="900" dirty="0"/>
           </a:p>
         </p:txBody>
       </p:sp>
       <p:sp>
         <p:nvSpPr>
-          <p:cNvPr id="49" name="Shape 47"/>
-          <p:cNvSpPr/>
+          <p:cNvPr id="39" name="Text 37"/>
+          <p:cNvSpPr txBox="1"/>
           <p:nvPr/>
         </p:nvSpPr>
         <p:spPr>
           <a:xfrm>
-            <a:off x="6355080" y="3995928"/>
-            <a:ext cx="5349240" cy="365760"/>
-          </a:xfrm>
-          <a:prstGeom prst="rect">
-            <a:avLst/>
-          </a:prstGeom>
-          <a:solidFill>
-            <a:srgbClr val="F0F4F5"/>
-          </a:solidFill>
-          <a:ln/>
-        </p:spPr>
-      </p:sp>
-      <p:sp>
-        <p:nvSpPr>
-          <p:cNvPr id="50" name="Text 48"/>
-          <p:cNvSpPr txBox="1"/>
-          <p:nvPr/>
-        </p:nvSpPr>
-        <p:spPr>
-          <a:xfrm>
-            <a:off x="6464808" y="3995928"/>
-            <a:ext cx="2995574" cy="365760"/>
-          </a:xfrm>
-          <a:prstGeom prst="rect">
-            <a:avLst/>
-          </a:prstGeom>
-          <a:noFill/>
-          <a:ln/>
-        </p:spPr>
-        <p:txBody>
-          <a:bodyPr wrap="square" lIns="0" tIns="0" rIns="0" bIns="0" rtlCol="0" anchor="ctr"/>
-          <a:lstStyle/>
-          <a:p>
-            <a:pPr indent="0" marL="0">
-              <a:buNone/>
-            </a:pPr>
-            <a:r>
-              <a:rPr lang="en-US" sz="1100" dirty="0">
-                <a:solidFill>
-                  <a:srgbClr val="1C2B33"/>
-                </a:solidFill>
-                <a:latin typeface="Calibri" pitchFamily="34" charset="0"/>
-                <a:ea typeface="Calibri" pitchFamily="34" charset="-122"/>
-                <a:cs typeface="Calibri" pitchFamily="34" charset="-120"/>
-              </a:rPr>
-              <a:t>Rotina Operacional</a:t>
-            </a:r>
-            <a:endParaRPr lang="en-US" sz="1100" dirty="0"/>
-          </a:p>
-        </p:txBody>
-      </p:sp>
-      <p:sp>
-        <p:nvSpPr>
-          <p:cNvPr id="51" name="Text 49"/>
-          <p:cNvSpPr txBox="1"/>
-          <p:nvPr/>
-        </p:nvSpPr>
-        <p:spPr>
-          <a:xfrm>
-            <a:off x="9350654" y="3995928"/>
-            <a:ext cx="1497787" cy="365760"/>
-          </a:xfrm>
-          <a:prstGeom prst="rect">
-            <a:avLst/>
-          </a:prstGeom>
-          <a:noFill/>
-          <a:ln/>
-        </p:spPr>
-        <p:txBody>
-          <a:bodyPr wrap="square" lIns="0" tIns="0" rIns="0" bIns="0" rtlCol="0" anchor="ctr"/>
-          <a:lstStyle/>
-          <a:p>
-            <a:pPr algn="r" indent="0" marL="0">
-              <a:buNone/>
-            </a:pPr>
-            <a:r>
-              <a:rPr lang="en-US" sz="1100" b="1" dirty="0">
-                <a:solidFill>
-                  <a:srgbClr val="0B2A3D"/>
-                </a:solidFill>
-                <a:latin typeface="Calibri" pitchFamily="34" charset="0"/>
-                <a:ea typeface="Calibri" pitchFamily="34" charset="-122"/>
-                <a:cs typeface="Calibri" pitchFamily="34" charset="-120"/>
-              </a:rPr>
-              <a:t>US$ 10,0 mil</a:t>
-            </a:r>
-            <a:endParaRPr lang="en-US" sz="1100" dirty="0"/>
-          </a:p>
-        </p:txBody>
-      </p:sp>
-      <p:sp>
-        <p:nvSpPr>
-          <p:cNvPr id="52" name="Text 50"/>
-          <p:cNvSpPr txBox="1"/>
-          <p:nvPr/>
-        </p:nvSpPr>
-        <p:spPr>
-          <a:xfrm>
-            <a:off x="10738714" y="3995928"/>
-            <a:ext cx="965606" cy="365760"/>
-          </a:xfrm>
-          <a:prstGeom prst="rect">
-            <a:avLst/>
-          </a:prstGeom>
-          <a:noFill/>
-          <a:ln/>
-        </p:spPr>
-        <p:txBody>
-          <a:bodyPr wrap="square" lIns="0" tIns="0" rIns="0" bIns="0" rtlCol="0" anchor="ctr"/>
-          <a:lstStyle/>
-          <a:p>
-            <a:pPr algn="r" indent="0" marL="0">
-              <a:buNone/>
-            </a:pPr>
-            <a:r>
-              <a:rPr lang="en-US" sz="850" dirty="0">
-                <a:solidFill>
-                  <a:srgbClr val="5B6B73"/>
-                </a:solidFill>
-                <a:latin typeface="Calibri" pitchFamily="34" charset="0"/>
-                <a:ea typeface="Calibri" pitchFamily="34" charset="-122"/>
-                <a:cs typeface="Calibri" pitchFamily="34" charset="-120"/>
-              </a:rPr>
-              <a:t>6 POB-dia</a:t>
-            </a:r>
-            <a:endParaRPr lang="en-US" sz="850" dirty="0"/>
-          </a:p>
-        </p:txBody>
-      </p:sp>
-      <p:sp>
-        <p:nvSpPr>
-          <p:cNvPr id="53" name="Text 51"/>
-          <p:cNvSpPr txBox="1"/>
-          <p:nvPr/>
-        </p:nvSpPr>
-        <p:spPr>
-          <a:xfrm>
-            <a:off x="6464808" y="4361688"/>
+            <a:off x="6464808" y="3630168"/>
             <a:ext cx="2995574" cy="365760"/>
           </a:xfrm>
           <a:prstGeom prst="rect">
@@ -4456,13 +3948,13 @@
       </p:sp>
       <p:sp>
         <p:nvSpPr>
-          <p:cNvPr id="54" name="Text 52"/>
+          <p:cNvPr id="40" name="Text 38"/>
           <p:cNvSpPr txBox="1"/>
           <p:nvPr/>
         </p:nvSpPr>
         <p:spPr>
           <a:xfrm>
-            <a:off x="9350654" y="4361688"/>
+            <a:off x="9350654" y="3630168"/>
             <a:ext cx="1497787" cy="365760"/>
           </a:xfrm>
           <a:prstGeom prst="rect">
@@ -4495,13 +3987,13 @@
       </p:sp>
       <p:sp>
         <p:nvSpPr>
-          <p:cNvPr id="55" name="Text 53"/>
+          <p:cNvPr id="41" name="Text 39"/>
           <p:cNvSpPr txBox="1"/>
           <p:nvPr/>
         </p:nvSpPr>
         <p:spPr>
           <a:xfrm>
-            <a:off x="10738714" y="4361688"/>
+            <a:off x="10738714" y="3630168"/>
             <a:ext cx="965606" cy="365760"/>
           </a:xfrm>
           <a:prstGeom prst="rect">
@@ -4518,7 +4010,7 @@
               <a:buNone/>
             </a:pPr>
             <a:r>
-              <a:rPr lang="en-US" sz="850" dirty="0">
+              <a:rPr lang="en-US" sz="900" dirty="0">
                 <a:solidFill>
                   <a:srgbClr val="5B6B73"/>
                 </a:solidFill>
@@ -4526,15 +4018,15 @@
                 <a:ea typeface="Calibri" pitchFamily="34" charset="-122"/>
                 <a:cs typeface="Calibri" pitchFamily="34" charset="-120"/>
               </a:rPr>
-              <a:t>0 POB-dia</a:t>
+              <a:t>0 POB</a:t>
             </a:r>
-            <a:endParaRPr lang="en-US" sz="850" dirty="0"/>
+            <a:endParaRPr lang="en-US" sz="900" dirty="0"/>
           </a:p>
         </p:txBody>
       </p:sp>
       <p:sp>
         <p:nvSpPr>
-          <p:cNvPr id="56" name="Text 54"/>
+          <p:cNvPr id="42" name="Text 40"/>
           <p:cNvSpPr txBox="1"/>
           <p:nvPr/>
         </p:nvSpPr>
@@ -4565,7 +4057,7 @@
                 <a:ea typeface="Calibri" pitchFamily="34" charset="-122"/>
                 <a:cs typeface="Calibri" pitchFamily="34" charset="-120"/>
               </a:rPr>
-              <a:t>Metodologia: soma de Custo de Serviço + Custo de Material (Jan–Dez), para itens de Cost Allocation = CAPEX com status 'Contar' ou 'TA'. POB em POB-dia (pessoas a bordo × dias). O total desconsidera a categoria Desenvolvimento de Produção (US$ 2,9 mi, mantida na lista de Categoria apenas para referência).</a:t>
+              <a:t>Metodologia: soma de Custo de Serviço + Custo de Material (Jan–Dez), para itens de Cost Allocation = CAPEX com status 'Contar' ou 'TA'. O total desconsidera a categoria Desenvolvimento de Produção (sem itens para este ativo).</a:t>
             </a:r>
             <a:endParaRPr lang="en-US" sz="850" dirty="0"/>
           </a:p>
@@ -8504,7 +7996,7 @@
                 <a:ea typeface="Calibri" pitchFamily="34" charset="-122"/>
                 <a:cs typeface="Calibri" pitchFamily="34" charset="-120"/>
               </a:rPr>
-              <a:t>Fonte: Plano Integrado · aba 'Geral - Em análise' · coluna 'Valor Total' · itens de Cost Allocation = CAPEX, status 'Contar' + 'TA'. Lista completa disponível na planilha em anexo. Extrato pendente de atualização — pode não somar exatamente ao total da Composição de Custo e POB.</a:t>
+              <a:t>Fonte: Plano Integrado · aba 'Geral - Em análise' · itens de Cost Allocation = CAPEX, status 'Contar' + 'TA'. Lista completa disponível na planilha em anexo.</a:t>
             </a:r>
             <a:endParaRPr lang="en-US" sz="850" dirty="0"/>
           </a:p>
@@ -8991,7 +8483,7 @@
                 <a:ea typeface="Cambria" pitchFamily="34" charset="-122"/>
                 <a:cs typeface="Cambria" pitchFamily="34" charset="-120"/>
               </a:rPr>
-              <a:t>US$ 5,9 mi</a:t>
+              <a:t>US$ 2,3 mi</a:t>
             </a:r>
             <a:endParaRPr lang="en-US" sz="2100" dirty="0"/>
           </a:p>
@@ -9091,7 +8583,7 @@
                 <a:ea typeface="Cambria" pitchFamily="34" charset="-122"/>
                 <a:cs typeface="Cambria" pitchFamily="34" charset="-120"/>
               </a:rPr>
-              <a:t>US$ 7,1 mi</a:t>
+              <a:t>US$ 1,1 mi</a:t>
             </a:r>
             <a:endParaRPr lang="en-US" sz="2100" dirty="0"/>
           </a:p>
@@ -9191,7 +8683,7 @@
                 <a:ea typeface="Cambria" pitchFamily="34" charset="-122"/>
                 <a:cs typeface="Cambria" pitchFamily="34" charset="-120"/>
               </a:rPr>
-              <a:t>US$ 4,5 mi</a:t>
+              <a:t>US$ 3,4 mi</a:t>
             </a:r>
             <a:endParaRPr lang="en-US" sz="2100" dirty="0"/>
           </a:p>
@@ -9291,7 +8783,7 @@
                 <a:ea typeface="Cambria" pitchFamily="34" charset="-122"/>
                 <a:cs typeface="Cambria" pitchFamily="34" charset="-120"/>
               </a:rPr>
-              <a:t>5.186</a:t>
+              <a:t>135</a:t>
             </a:r>
             <a:endParaRPr lang="en-US" sz="2100" dirty="0"/>
           </a:p>
@@ -9330,7 +8822,7 @@
                 <a:ea typeface="Calibri" pitchFamily="34" charset="-122"/>
                 <a:cs typeface="Calibri" pitchFamily="34" charset="-120"/>
               </a:rPr>
-              <a:t>POB TOTAL (POB-DIA)</a:t>
+              <a:t>POB TOTAL</a:t>
             </a:r>
             <a:endParaRPr lang="en-US" sz="850" dirty="0"/>
           </a:p>
@@ -9470,7 +8962,7 @@
                 <a:ea typeface="Calibri" pitchFamily="34" charset="-122"/>
                 <a:cs typeface="Calibri" pitchFamily="34" charset="-120"/>
               </a:rPr>
-              <a:t>US$ 10,1 mi</a:t>
+              <a:t>US$ 1,8 mi</a:t>
             </a:r>
             <a:endParaRPr lang="en-US" sz="1100" dirty="0"/>
           </a:p>
@@ -9501,7 +8993,7 @@
               <a:buNone/>
             </a:pPr>
             <a:r>
-              <a:rPr lang="en-US" sz="850" dirty="0">
+              <a:rPr lang="en-US" sz="900" dirty="0">
                 <a:solidFill>
                   <a:srgbClr val="5B6B73"/>
                 </a:solidFill>
@@ -9509,9 +9001,9 @@
                 <a:ea typeface="Calibri" pitchFamily="34" charset="-122"/>
                 <a:cs typeface="Calibri" pitchFamily="34" charset="-120"/>
               </a:rPr>
-              <a:t>3.036 POB-dia</a:t>
+              <a:t>41 POB</a:t>
             </a:r>
-            <a:endParaRPr lang="en-US" sz="850" dirty="0"/>
+            <a:endParaRPr lang="en-US" sz="900" dirty="0"/>
           </a:p>
         </p:txBody>
       </p:sp>
@@ -9607,7 +9099,7 @@
                 <a:ea typeface="Calibri" pitchFamily="34" charset="-122"/>
                 <a:cs typeface="Calibri" pitchFamily="34" charset="-120"/>
               </a:rPr>
-              <a:t>US$ 1,9 mi</a:t>
+              <a:t>US$ 889,8 mil</a:t>
             </a:r>
             <a:endParaRPr lang="en-US" sz="1100" dirty="0"/>
           </a:p>
@@ -9638,7 +9130,7 @@
               <a:buNone/>
             </a:pPr>
             <a:r>
-              <a:rPr lang="en-US" sz="850" dirty="0">
+              <a:rPr lang="en-US" sz="900" dirty="0">
                 <a:solidFill>
                   <a:srgbClr val="5B6B73"/>
                 </a:solidFill>
@@ -9646,9 +9138,9 @@
                 <a:ea typeface="Calibri" pitchFamily="34" charset="-122"/>
                 <a:cs typeface="Calibri" pitchFamily="34" charset="-120"/>
               </a:rPr>
-              <a:t>2.010 POB-dia</a:t>
+              <a:t>90 POB</a:t>
             </a:r>
-            <a:endParaRPr lang="en-US" sz="850" dirty="0"/>
+            <a:endParaRPr lang="en-US" sz="900" dirty="0"/>
           </a:p>
         </p:txBody>
       </p:sp>
@@ -9755,7 +9247,7 @@
               <a:buNone/>
             </a:pPr>
             <a:r>
-              <a:rPr lang="en-US" sz="850" dirty="0">
+              <a:rPr lang="en-US" sz="900" dirty="0">
                 <a:solidFill>
                   <a:srgbClr val="5B6B73"/>
                 </a:solidFill>
@@ -9763,9 +9255,9 @@
                 <a:ea typeface="Calibri" pitchFamily="34" charset="-122"/>
                 <a:cs typeface="Calibri" pitchFamily="34" charset="-120"/>
               </a:rPr>
-              <a:t>120 POB-dia</a:t>
+              <a:t>4 POB</a:t>
             </a:r>
-            <a:endParaRPr lang="en-US" sz="850" dirty="0"/>
+            <a:endParaRPr lang="en-US" sz="900" dirty="0"/>
           </a:p>
         </p:txBody>
       </p:sp>
@@ -9798,260 +9290,6 @@
         <p:spPr>
           <a:xfrm>
             <a:off x="566928" y="3995928"/>
-            <a:ext cx="2995574" cy="365760"/>
-          </a:xfrm>
-          <a:prstGeom prst="rect">
-            <a:avLst/>
-          </a:prstGeom>
-          <a:noFill/>
-          <a:ln/>
-        </p:spPr>
-        <p:txBody>
-          <a:bodyPr wrap="square" lIns="0" tIns="0" rIns="0" bIns="0" rtlCol="0" anchor="ctr"/>
-          <a:lstStyle/>
-          <a:p>
-            <a:pPr indent="0" marL="0">
-              <a:buNone/>
-            </a:pPr>
-            <a:r>
-              <a:rPr lang="en-US" sz="1100" dirty="0">
-                <a:solidFill>
-                  <a:srgbClr val="1C2B33"/>
-                </a:solidFill>
-                <a:latin typeface="Calibri" pitchFamily="34" charset="0"/>
-                <a:ea typeface="Calibri" pitchFamily="34" charset="-122"/>
-                <a:cs typeface="Calibri" pitchFamily="34" charset="-120"/>
-              </a:rPr>
-              <a:t>CON - Construção</a:t>
-            </a:r>
-            <a:endParaRPr lang="en-US" sz="1100" dirty="0"/>
-          </a:p>
-        </p:txBody>
-      </p:sp>
-      <p:sp>
-        <p:nvSpPr>
-          <p:cNvPr id="32" name="Text 30"/>
-          <p:cNvSpPr txBox="1"/>
-          <p:nvPr/>
-        </p:nvSpPr>
-        <p:spPr>
-          <a:xfrm>
-            <a:off x="3452774" y="3995928"/>
-            <a:ext cx="1497787" cy="365760"/>
-          </a:xfrm>
-          <a:prstGeom prst="rect">
-            <a:avLst/>
-          </a:prstGeom>
-          <a:noFill/>
-          <a:ln/>
-        </p:spPr>
-        <p:txBody>
-          <a:bodyPr wrap="square" lIns="0" tIns="0" rIns="0" bIns="0" rtlCol="0" anchor="ctr"/>
-          <a:lstStyle/>
-          <a:p>
-            <a:pPr algn="r" indent="0" marL="0">
-              <a:buNone/>
-            </a:pPr>
-            <a:r>
-              <a:rPr lang="en-US" sz="1100" b="1" dirty="0">
-                <a:solidFill>
-                  <a:srgbClr val="0B2A3D"/>
-                </a:solidFill>
-                <a:latin typeface="Calibri" pitchFamily="34" charset="0"/>
-                <a:ea typeface="Calibri" pitchFamily="34" charset="-122"/>
-                <a:cs typeface="Calibri" pitchFamily="34" charset="-120"/>
-              </a:rPr>
-              <a:t>US$ 150,5 mil</a:t>
-            </a:r>
-            <a:endParaRPr lang="en-US" sz="1100" dirty="0"/>
-          </a:p>
-        </p:txBody>
-      </p:sp>
-      <p:sp>
-        <p:nvSpPr>
-          <p:cNvPr id="33" name="Text 31"/>
-          <p:cNvSpPr txBox="1"/>
-          <p:nvPr/>
-        </p:nvSpPr>
-        <p:spPr>
-          <a:xfrm>
-            <a:off x="4840834" y="3995928"/>
-            <a:ext cx="965606" cy="365760"/>
-          </a:xfrm>
-          <a:prstGeom prst="rect">
-            <a:avLst/>
-          </a:prstGeom>
-          <a:noFill/>
-          <a:ln/>
-        </p:spPr>
-        <p:txBody>
-          <a:bodyPr wrap="square" lIns="0" tIns="0" rIns="0" bIns="0" rtlCol="0" anchor="ctr"/>
-          <a:lstStyle/>
-          <a:p>
-            <a:pPr algn="r" indent="0" marL="0">
-              <a:buNone/>
-            </a:pPr>
-            <a:r>
-              <a:rPr lang="en-US" sz="850" dirty="0">
-                <a:solidFill>
-                  <a:srgbClr val="5B6B73"/>
-                </a:solidFill>
-                <a:latin typeface="Calibri" pitchFamily="34" charset="0"/>
-                <a:ea typeface="Calibri" pitchFamily="34" charset="-122"/>
-                <a:cs typeface="Calibri" pitchFamily="34" charset="-120"/>
-              </a:rPr>
-              <a:t>14 POB-dia</a:t>
-            </a:r>
-            <a:endParaRPr lang="en-US" sz="850" dirty="0"/>
-          </a:p>
-        </p:txBody>
-      </p:sp>
-      <p:sp>
-        <p:nvSpPr>
-          <p:cNvPr id="34" name="Text 32"/>
-          <p:cNvSpPr txBox="1"/>
-          <p:nvPr/>
-        </p:nvSpPr>
-        <p:spPr>
-          <a:xfrm>
-            <a:off x="566928" y="4361688"/>
-            <a:ext cx="2995574" cy="365760"/>
-          </a:xfrm>
-          <a:prstGeom prst="rect">
-            <a:avLst/>
-          </a:prstGeom>
-          <a:noFill/>
-          <a:ln/>
-        </p:spPr>
-        <p:txBody>
-          <a:bodyPr wrap="square" lIns="0" tIns="0" rIns="0" bIns="0" rtlCol="0" anchor="ctr"/>
-          <a:lstStyle/>
-          <a:p>
-            <a:pPr indent="0" marL="0">
-              <a:buNone/>
-            </a:pPr>
-            <a:r>
-              <a:rPr lang="en-US" sz="1100" dirty="0">
-                <a:solidFill>
-                  <a:srgbClr val="1C2B33"/>
-                </a:solidFill>
-                <a:latin typeface="Calibri" pitchFamily="34" charset="0"/>
-                <a:ea typeface="Calibri" pitchFamily="34" charset="-122"/>
-                <a:cs typeface="Calibri" pitchFamily="34" charset="-120"/>
-              </a:rPr>
-              <a:t>P&amp;Q - Químicos</a:t>
-            </a:r>
-            <a:endParaRPr lang="en-US" sz="1100" dirty="0"/>
-          </a:p>
-        </p:txBody>
-      </p:sp>
-      <p:sp>
-        <p:nvSpPr>
-          <p:cNvPr id="35" name="Text 33"/>
-          <p:cNvSpPr txBox="1"/>
-          <p:nvPr/>
-        </p:nvSpPr>
-        <p:spPr>
-          <a:xfrm>
-            <a:off x="3452774" y="4361688"/>
-            <a:ext cx="1497787" cy="365760"/>
-          </a:xfrm>
-          <a:prstGeom prst="rect">
-            <a:avLst/>
-          </a:prstGeom>
-          <a:noFill/>
-          <a:ln/>
-        </p:spPr>
-        <p:txBody>
-          <a:bodyPr wrap="square" lIns="0" tIns="0" rIns="0" bIns="0" rtlCol="0" anchor="ctr"/>
-          <a:lstStyle/>
-          <a:p>
-            <a:pPr algn="r" indent="0" marL="0">
-              <a:buNone/>
-            </a:pPr>
-            <a:r>
-              <a:rPr lang="en-US" sz="1100" b="1" dirty="0">
-                <a:solidFill>
-                  <a:srgbClr val="0B2A3D"/>
-                </a:solidFill>
-                <a:latin typeface="Calibri" pitchFamily="34" charset="0"/>
-                <a:ea typeface="Calibri" pitchFamily="34" charset="-122"/>
-                <a:cs typeface="Calibri" pitchFamily="34" charset="-120"/>
-              </a:rPr>
-              <a:t>US$ 10,0 mil</a:t>
-            </a:r>
-            <a:endParaRPr lang="en-US" sz="1100" dirty="0"/>
-          </a:p>
-        </p:txBody>
-      </p:sp>
-      <p:sp>
-        <p:nvSpPr>
-          <p:cNvPr id="36" name="Text 34"/>
-          <p:cNvSpPr txBox="1"/>
-          <p:nvPr/>
-        </p:nvSpPr>
-        <p:spPr>
-          <a:xfrm>
-            <a:off x="4840834" y="4361688"/>
-            <a:ext cx="965606" cy="365760"/>
-          </a:xfrm>
-          <a:prstGeom prst="rect">
-            <a:avLst/>
-          </a:prstGeom>
-          <a:noFill/>
-          <a:ln/>
-        </p:spPr>
-        <p:txBody>
-          <a:bodyPr wrap="square" lIns="0" tIns="0" rIns="0" bIns="0" rtlCol="0" anchor="ctr"/>
-          <a:lstStyle/>
-          <a:p>
-            <a:pPr algn="r" indent="0" marL="0">
-              <a:buNone/>
-            </a:pPr>
-            <a:r>
-              <a:rPr lang="en-US" sz="850" dirty="0">
-                <a:solidFill>
-                  <a:srgbClr val="5B6B73"/>
-                </a:solidFill>
-                <a:latin typeface="Calibri" pitchFamily="34" charset="0"/>
-                <a:ea typeface="Calibri" pitchFamily="34" charset="-122"/>
-                <a:cs typeface="Calibri" pitchFamily="34" charset="-120"/>
-              </a:rPr>
-              <a:t>6 POB-dia</a:t>
-            </a:r>
-            <a:endParaRPr lang="en-US" sz="850" dirty="0"/>
-          </a:p>
-        </p:txBody>
-      </p:sp>
-      <p:sp>
-        <p:nvSpPr>
-          <p:cNvPr id="37" name="Shape 35"/>
-          <p:cNvSpPr/>
-          <p:nvPr/>
-        </p:nvSpPr>
-        <p:spPr>
-          <a:xfrm>
-            <a:off x="457200" y="4727448"/>
-            <a:ext cx="5349240" cy="365760"/>
-          </a:xfrm>
-          <a:prstGeom prst="rect">
-            <a:avLst/>
-          </a:prstGeom>
-          <a:solidFill>
-            <a:srgbClr val="F0F4F5"/>
-          </a:solidFill>
-          <a:ln/>
-        </p:spPr>
-      </p:sp>
-      <p:sp>
-        <p:nvSpPr>
-          <p:cNvPr id="38" name="Text 36"/>
-          <p:cNvSpPr txBox="1"/>
-          <p:nvPr/>
-        </p:nvSpPr>
-        <p:spPr>
-          <a:xfrm>
-            <a:off x="566928" y="4727448"/>
             <a:ext cx="2995574" cy="365760"/>
           </a:xfrm>
           <a:prstGeom prst="rect">
@@ -10084,13 +9322,13 @@
       </p:sp>
       <p:sp>
         <p:nvSpPr>
-          <p:cNvPr id="39" name="Text 37"/>
+          <p:cNvPr id="32" name="Text 30"/>
           <p:cNvSpPr txBox="1"/>
           <p:nvPr/>
         </p:nvSpPr>
         <p:spPr>
           <a:xfrm>
-            <a:off x="3452774" y="4727448"/>
+            <a:off x="3452774" y="3995928"/>
             <a:ext cx="1497787" cy="365760"/>
           </a:xfrm>
           <a:prstGeom prst="rect">
@@ -10123,13 +9361,13 @@
       </p:sp>
       <p:sp>
         <p:nvSpPr>
-          <p:cNvPr id="40" name="Text 38"/>
+          <p:cNvPr id="33" name="Text 31"/>
           <p:cNvSpPr txBox="1"/>
           <p:nvPr/>
         </p:nvSpPr>
         <p:spPr>
           <a:xfrm>
-            <a:off x="4840834" y="4727448"/>
+            <a:off x="4840834" y="3995928"/>
             <a:ext cx="965606" cy="365760"/>
           </a:xfrm>
           <a:prstGeom prst="rect">
@@ -10146,7 +9384,7 @@
               <a:buNone/>
             </a:pPr>
             <a:r>
-              <a:rPr lang="en-US" sz="850" dirty="0">
+              <a:rPr lang="en-US" sz="900" dirty="0">
                 <a:solidFill>
                   <a:srgbClr val="5B6B73"/>
                 </a:solidFill>
@@ -10154,15 +9392,15 @@
                 <a:ea typeface="Calibri" pitchFamily="34" charset="-122"/>
                 <a:cs typeface="Calibri" pitchFamily="34" charset="-120"/>
               </a:rPr>
-              <a:t>0 POB-dia</a:t>
+              <a:t>0 POB</a:t>
             </a:r>
-            <a:endParaRPr lang="en-US" sz="850" dirty="0"/>
+            <a:endParaRPr lang="en-US" sz="900" dirty="0"/>
           </a:p>
         </p:txBody>
       </p:sp>
       <p:sp>
         <p:nvSpPr>
-          <p:cNvPr id="41" name="Text 39"/>
+          <p:cNvPr id="34" name="Text 32"/>
           <p:cNvSpPr txBox="1"/>
           <p:nvPr/>
         </p:nvSpPr>
@@ -10201,7 +9439,7 @@
       </p:sp>
       <p:sp>
         <p:nvSpPr>
-          <p:cNvPr id="42" name="Shape 40"/>
+          <p:cNvPr id="35" name="Shape 33"/>
           <p:cNvSpPr/>
           <p:nvPr/>
         </p:nvSpPr>
@@ -10224,150 +9462,13 @@
       </p:sp>
       <p:sp>
         <p:nvSpPr>
-          <p:cNvPr id="43" name="Text 41"/>
+          <p:cNvPr id="36" name="Text 34"/>
           <p:cNvSpPr txBox="1"/>
           <p:nvPr/>
         </p:nvSpPr>
         <p:spPr>
           <a:xfrm>
             <a:off x="6464808" y="2898648"/>
-            <a:ext cx="2995574" cy="365760"/>
-          </a:xfrm>
-          <a:prstGeom prst="rect">
-            <a:avLst/>
-          </a:prstGeom>
-          <a:noFill/>
-          <a:ln/>
-        </p:spPr>
-        <p:txBody>
-          <a:bodyPr wrap="square" lIns="0" tIns="0" rIns="0" bIns="0" rtlCol="0" anchor="ctr"/>
-          <a:lstStyle/>
-          <a:p>
-            <a:pPr indent="0" marL="0">
-              <a:buNone/>
-            </a:pPr>
-            <a:r>
-              <a:rPr lang="en-US" sz="1100" dirty="0">
-                <a:solidFill>
-                  <a:srgbClr val="1C2B33"/>
-                </a:solidFill>
-                <a:latin typeface="Calibri" pitchFamily="34" charset="0"/>
-                <a:ea typeface="Calibri" pitchFamily="34" charset="-122"/>
-                <a:cs typeface="Calibri" pitchFamily="34" charset="-120"/>
-              </a:rPr>
-              <a:t>Desenvolvimento de Produção</a:t>
-            </a:r>
-            <a:endParaRPr lang="en-US" sz="1100" dirty="0"/>
-          </a:p>
-        </p:txBody>
-      </p:sp>
-      <p:sp>
-        <p:nvSpPr>
-          <p:cNvPr id="44" name="Text 42"/>
-          <p:cNvSpPr txBox="1"/>
-          <p:nvPr/>
-        </p:nvSpPr>
-        <p:spPr>
-          <a:xfrm>
-            <a:off x="9350654" y="2898648"/>
-            <a:ext cx="1497787" cy="365760"/>
-          </a:xfrm>
-          <a:prstGeom prst="rect">
-            <a:avLst/>
-          </a:prstGeom>
-          <a:noFill/>
-          <a:ln/>
-        </p:spPr>
-        <p:txBody>
-          <a:bodyPr wrap="square" lIns="0" tIns="0" rIns="0" bIns="0" rtlCol="0" anchor="ctr"/>
-          <a:lstStyle/>
-          <a:p>
-            <a:pPr algn="r" indent="0" marL="0">
-              <a:buNone/>
-            </a:pPr>
-            <a:r>
-              <a:rPr lang="en-US" sz="1100" b="1" dirty="0">
-                <a:solidFill>
-                  <a:srgbClr val="0B2A3D"/>
-                </a:solidFill>
-                <a:latin typeface="Calibri" pitchFamily="34" charset="0"/>
-                <a:ea typeface="Calibri" pitchFamily="34" charset="-122"/>
-                <a:cs typeface="Calibri" pitchFamily="34" charset="-120"/>
-              </a:rPr>
-              <a:t>US$ 8,4 mi</a:t>
-            </a:r>
-            <a:endParaRPr lang="en-US" sz="1100" dirty="0"/>
-          </a:p>
-        </p:txBody>
-      </p:sp>
-      <p:sp>
-        <p:nvSpPr>
-          <p:cNvPr id="45" name="Text 43"/>
-          <p:cNvSpPr txBox="1"/>
-          <p:nvPr/>
-        </p:nvSpPr>
-        <p:spPr>
-          <a:xfrm>
-            <a:off x="10738714" y="2898648"/>
-            <a:ext cx="965606" cy="365760"/>
-          </a:xfrm>
-          <a:prstGeom prst="rect">
-            <a:avLst/>
-          </a:prstGeom>
-          <a:noFill/>
-          <a:ln/>
-        </p:spPr>
-        <p:txBody>
-          <a:bodyPr wrap="square" lIns="0" tIns="0" rIns="0" bIns="0" rtlCol="0" anchor="ctr"/>
-          <a:lstStyle/>
-          <a:p>
-            <a:pPr algn="r" indent="0" marL="0">
-              <a:buNone/>
-            </a:pPr>
-            <a:r>
-              <a:rPr lang="en-US" sz="850" dirty="0">
-                <a:solidFill>
-                  <a:srgbClr val="5B6B73"/>
-                </a:solidFill>
-                <a:latin typeface="Calibri" pitchFamily="34" charset="0"/>
-                <a:ea typeface="Calibri" pitchFamily="34" charset="-122"/>
-                <a:cs typeface="Calibri" pitchFamily="34" charset="-120"/>
-              </a:rPr>
-              <a:t>2.284 POB-dia</a:t>
-            </a:r>
-            <a:endParaRPr lang="en-US" sz="850" dirty="0"/>
-          </a:p>
-        </p:txBody>
-      </p:sp>
-      <p:sp>
-        <p:nvSpPr>
-          <p:cNvPr id="46" name="Shape 44"/>
-          <p:cNvSpPr/>
-          <p:nvPr/>
-        </p:nvSpPr>
-        <p:spPr>
-          <a:xfrm>
-            <a:off x="6355080" y="3264408"/>
-            <a:ext cx="5349240" cy="365760"/>
-          </a:xfrm>
-          <a:prstGeom prst="rect">
-            <a:avLst/>
-          </a:prstGeom>
-          <a:solidFill>
-            <a:srgbClr val="F0F4F5"/>
-          </a:solidFill>
-          <a:ln/>
-        </p:spPr>
-      </p:sp>
-      <p:sp>
-        <p:nvSpPr>
-          <p:cNvPr id="47" name="Text 45"/>
-          <p:cNvSpPr txBox="1"/>
-          <p:nvPr/>
-        </p:nvSpPr>
-        <p:spPr>
-          <a:xfrm>
-            <a:off x="6464808" y="3264408"/>
             <a:ext cx="2995574" cy="365760"/>
           </a:xfrm>
           <a:prstGeom prst="rect">
@@ -10400,13 +9501,13 @@
       </p:sp>
       <p:sp>
         <p:nvSpPr>
-          <p:cNvPr id="48" name="Text 46"/>
+          <p:cNvPr id="37" name="Text 35"/>
           <p:cNvSpPr txBox="1"/>
           <p:nvPr/>
         </p:nvSpPr>
         <p:spPr>
           <a:xfrm>
-            <a:off x="9350654" y="3264408"/>
+            <a:off x="9350654" y="2898648"/>
             <a:ext cx="1497787" cy="365760"/>
           </a:xfrm>
           <a:prstGeom prst="rect">
@@ -10431,7 +9532,7 @@
                 <a:ea typeface="Calibri" pitchFamily="34" charset="-122"/>
                 <a:cs typeface="Calibri" pitchFamily="34" charset="-120"/>
               </a:rPr>
-              <a:t>US$ 3,9 mi</a:t>
+              <a:t>US$ 2,8 mi</a:t>
             </a:r>
             <a:endParaRPr lang="en-US" sz="1100" dirty="0"/>
           </a:p>
@@ -10439,13 +9540,13 @@
       </p:sp>
       <p:sp>
         <p:nvSpPr>
-          <p:cNvPr id="49" name="Text 47"/>
+          <p:cNvPr id="38" name="Text 36"/>
           <p:cNvSpPr txBox="1"/>
           <p:nvPr/>
         </p:nvSpPr>
         <p:spPr>
           <a:xfrm>
-            <a:off x="10738714" y="3264408"/>
+            <a:off x="10738714" y="2898648"/>
             <a:ext cx="965606" cy="365760"/>
           </a:xfrm>
           <a:prstGeom prst="rect">
@@ -10462,7 +9563,7 @@
               <a:buNone/>
             </a:pPr>
             <a:r>
-              <a:rPr lang="en-US" sz="850" dirty="0">
+              <a:rPr lang="en-US" sz="900" dirty="0">
                 <a:solidFill>
                   <a:srgbClr val="5B6B73"/>
                 </a:solidFill>
@@ -10470,21 +9571,41 @@
                 <a:ea typeface="Calibri" pitchFamily="34" charset="-122"/>
                 <a:cs typeface="Calibri" pitchFamily="34" charset="-120"/>
               </a:rPr>
-              <a:t>2.844 POB-dia</a:t>
+              <a:t>129 POB</a:t>
             </a:r>
-            <a:endParaRPr lang="en-US" sz="850" dirty="0"/>
+            <a:endParaRPr lang="en-US" sz="900" dirty="0"/>
           </a:p>
         </p:txBody>
       </p:sp>
       <p:sp>
         <p:nvSpPr>
-          <p:cNvPr id="50" name="Text 48"/>
+          <p:cNvPr id="39" name="Shape 37"/>
+          <p:cNvSpPr/>
+          <p:nvPr/>
+        </p:nvSpPr>
+        <p:spPr>
+          <a:xfrm>
+            <a:off x="6355080" y="3264408"/>
+            <a:ext cx="5349240" cy="365760"/>
+          </a:xfrm>
+          <a:prstGeom prst="rect">
+            <a:avLst/>
+          </a:prstGeom>
+          <a:solidFill>
+            <a:srgbClr val="F0F4F5"/>
+          </a:solidFill>
+          <a:ln/>
+        </p:spPr>
+      </p:sp>
+      <p:sp>
+        <p:nvSpPr>
+          <p:cNvPr id="40" name="Text 38"/>
           <p:cNvSpPr txBox="1"/>
           <p:nvPr/>
         </p:nvSpPr>
         <p:spPr>
           <a:xfrm>
-            <a:off x="6464808" y="3630168"/>
+            <a:off x="6464808" y="3264408"/>
             <a:ext cx="2995574" cy="365760"/>
           </a:xfrm>
           <a:prstGeom prst="rect">
@@ -10517,13 +9638,13 @@
       </p:sp>
       <p:sp>
         <p:nvSpPr>
-          <p:cNvPr id="51" name="Text 49"/>
+          <p:cNvPr id="41" name="Text 39"/>
           <p:cNvSpPr txBox="1"/>
           <p:nvPr/>
         </p:nvSpPr>
         <p:spPr>
           <a:xfrm>
-            <a:off x="9350654" y="3630168"/>
+            <a:off x="9350654" y="3264408"/>
             <a:ext cx="1497787" cy="365760"/>
           </a:xfrm>
           <a:prstGeom prst="rect">
@@ -10556,13 +9677,13 @@
       </p:sp>
       <p:sp>
         <p:nvSpPr>
-          <p:cNvPr id="52" name="Text 50"/>
+          <p:cNvPr id="42" name="Text 40"/>
           <p:cNvSpPr txBox="1"/>
           <p:nvPr/>
         </p:nvSpPr>
         <p:spPr>
           <a:xfrm>
-            <a:off x="10738714" y="3630168"/>
+            <a:off x="10738714" y="3264408"/>
             <a:ext cx="965606" cy="365760"/>
           </a:xfrm>
           <a:prstGeom prst="rect">
@@ -10579,7 +9700,7 @@
               <a:buNone/>
             </a:pPr>
             <a:r>
-              <a:rPr lang="en-US" sz="850" dirty="0">
+              <a:rPr lang="en-US" sz="900" dirty="0">
                 <a:solidFill>
                   <a:srgbClr val="5B6B73"/>
                 </a:solidFill>
@@ -10587,158 +9708,21 @@
                 <a:ea typeface="Calibri" pitchFamily="34" charset="-122"/>
                 <a:cs typeface="Calibri" pitchFamily="34" charset="-120"/>
               </a:rPr>
-              <a:t>52 POB-dia</a:t>
+              <a:t>6 POB</a:t>
             </a:r>
-            <a:endParaRPr lang="en-US" sz="850" dirty="0"/>
+            <a:endParaRPr lang="en-US" sz="900" dirty="0"/>
           </a:p>
         </p:txBody>
       </p:sp>
       <p:sp>
         <p:nvSpPr>
-          <p:cNvPr id="53" name="Shape 51"/>
-          <p:cNvSpPr/>
+          <p:cNvPr id="43" name="Text 41"/>
+          <p:cNvSpPr txBox="1"/>
           <p:nvPr/>
         </p:nvSpPr>
         <p:spPr>
           <a:xfrm>
-            <a:off x="6355080" y="3995928"/>
-            <a:ext cx="5349240" cy="365760"/>
-          </a:xfrm>
-          <a:prstGeom prst="rect">
-            <a:avLst/>
-          </a:prstGeom>
-          <a:solidFill>
-            <a:srgbClr val="F0F4F5"/>
-          </a:solidFill>
-          <a:ln/>
-        </p:spPr>
-      </p:sp>
-      <p:sp>
-        <p:nvSpPr>
-          <p:cNvPr id="54" name="Text 52"/>
-          <p:cNvSpPr txBox="1"/>
-          <p:nvPr/>
-        </p:nvSpPr>
-        <p:spPr>
-          <a:xfrm>
-            <a:off x="6464808" y="3995928"/>
-            <a:ext cx="2995574" cy="365760"/>
-          </a:xfrm>
-          <a:prstGeom prst="rect">
-            <a:avLst/>
-          </a:prstGeom>
-          <a:noFill/>
-          <a:ln/>
-        </p:spPr>
-        <p:txBody>
-          <a:bodyPr wrap="square" lIns="0" tIns="0" rIns="0" bIns="0" rtlCol="0" anchor="ctr"/>
-          <a:lstStyle/>
-          <a:p>
-            <a:pPr indent="0" marL="0">
-              <a:buNone/>
-            </a:pPr>
-            <a:r>
-              <a:rPr lang="en-US" sz="1100" dirty="0">
-                <a:solidFill>
-                  <a:srgbClr val="1C2B33"/>
-                </a:solidFill>
-                <a:latin typeface="Calibri" pitchFamily="34" charset="0"/>
-                <a:ea typeface="Calibri" pitchFamily="34" charset="-122"/>
-                <a:cs typeface="Calibri" pitchFamily="34" charset="-120"/>
-              </a:rPr>
-              <a:t>Rotina Operacional</a:t>
-            </a:r>
-            <a:endParaRPr lang="en-US" sz="1100" dirty="0"/>
-          </a:p>
-        </p:txBody>
-      </p:sp>
-      <p:sp>
-        <p:nvSpPr>
-          <p:cNvPr id="55" name="Text 53"/>
-          <p:cNvSpPr txBox="1"/>
-          <p:nvPr/>
-        </p:nvSpPr>
-        <p:spPr>
-          <a:xfrm>
-            <a:off x="9350654" y="3995928"/>
-            <a:ext cx="1497787" cy="365760"/>
-          </a:xfrm>
-          <a:prstGeom prst="rect">
-            <a:avLst/>
-          </a:prstGeom>
-          <a:noFill/>
-          <a:ln/>
-        </p:spPr>
-        <p:txBody>
-          <a:bodyPr wrap="square" lIns="0" tIns="0" rIns="0" bIns="0" rtlCol="0" anchor="ctr"/>
-          <a:lstStyle/>
-          <a:p>
-            <a:pPr algn="r" indent="0" marL="0">
-              <a:buNone/>
-            </a:pPr>
-            <a:r>
-              <a:rPr lang="en-US" sz="1100" b="1" dirty="0">
-                <a:solidFill>
-                  <a:srgbClr val="0B2A3D"/>
-                </a:solidFill>
-                <a:latin typeface="Calibri" pitchFamily="34" charset="0"/>
-                <a:ea typeface="Calibri" pitchFamily="34" charset="-122"/>
-                <a:cs typeface="Calibri" pitchFamily="34" charset="-120"/>
-              </a:rPr>
-              <a:t>US$ 10,0 mil</a:t>
-            </a:r>
-            <a:endParaRPr lang="en-US" sz="1100" dirty="0"/>
-          </a:p>
-        </p:txBody>
-      </p:sp>
-      <p:sp>
-        <p:nvSpPr>
-          <p:cNvPr id="56" name="Text 54"/>
-          <p:cNvSpPr txBox="1"/>
-          <p:nvPr/>
-        </p:nvSpPr>
-        <p:spPr>
-          <a:xfrm>
-            <a:off x="10738714" y="3995928"/>
-            <a:ext cx="965606" cy="365760"/>
-          </a:xfrm>
-          <a:prstGeom prst="rect">
-            <a:avLst/>
-          </a:prstGeom>
-          <a:noFill/>
-          <a:ln/>
-        </p:spPr>
-        <p:txBody>
-          <a:bodyPr wrap="square" lIns="0" tIns="0" rIns="0" bIns="0" rtlCol="0" anchor="ctr"/>
-          <a:lstStyle/>
-          <a:p>
-            <a:pPr algn="r" indent="0" marL="0">
-              <a:buNone/>
-            </a:pPr>
-            <a:r>
-              <a:rPr lang="en-US" sz="850" dirty="0">
-                <a:solidFill>
-                  <a:srgbClr val="5B6B73"/>
-                </a:solidFill>
-                <a:latin typeface="Calibri" pitchFamily="34" charset="0"/>
-                <a:ea typeface="Calibri" pitchFamily="34" charset="-122"/>
-                <a:cs typeface="Calibri" pitchFamily="34" charset="-120"/>
-              </a:rPr>
-              <a:t>6 POB-dia</a:t>
-            </a:r>
-            <a:endParaRPr lang="en-US" sz="850" dirty="0"/>
-          </a:p>
-        </p:txBody>
-      </p:sp>
-      <p:sp>
-        <p:nvSpPr>
-          <p:cNvPr id="57" name="Text 55"/>
-          <p:cNvSpPr txBox="1"/>
-          <p:nvPr/>
-        </p:nvSpPr>
-        <p:spPr>
-          <a:xfrm>
-            <a:off x="6464808" y="4361688"/>
+            <a:off x="6464808" y="3630168"/>
             <a:ext cx="2995574" cy="365760"/>
           </a:xfrm>
           <a:prstGeom prst="rect">
@@ -10771,13 +9755,13 @@
       </p:sp>
       <p:sp>
         <p:nvSpPr>
-          <p:cNvPr id="58" name="Text 56"/>
+          <p:cNvPr id="44" name="Text 42"/>
           <p:cNvSpPr txBox="1"/>
           <p:nvPr/>
         </p:nvSpPr>
         <p:spPr>
           <a:xfrm>
-            <a:off x="9350654" y="4361688"/>
+            <a:off x="9350654" y="3630168"/>
             <a:ext cx="1497787" cy="365760"/>
           </a:xfrm>
           <a:prstGeom prst="rect">
@@ -10810,13 +9794,13 @@
       </p:sp>
       <p:sp>
         <p:nvSpPr>
-          <p:cNvPr id="59" name="Text 57"/>
+          <p:cNvPr id="45" name="Text 43"/>
           <p:cNvSpPr txBox="1"/>
           <p:nvPr/>
         </p:nvSpPr>
         <p:spPr>
           <a:xfrm>
-            <a:off x="10738714" y="4361688"/>
+            <a:off x="10738714" y="3630168"/>
             <a:ext cx="965606" cy="365760"/>
           </a:xfrm>
           <a:prstGeom prst="rect">
@@ -10833,7 +9817,7 @@
               <a:buNone/>
             </a:pPr>
             <a:r>
-              <a:rPr lang="en-US" sz="850" dirty="0">
+              <a:rPr lang="en-US" sz="900" dirty="0">
                 <a:solidFill>
                   <a:srgbClr val="5B6B73"/>
                 </a:solidFill>
@@ -10841,15 +9825,15 @@
                 <a:ea typeface="Calibri" pitchFamily="34" charset="-122"/>
                 <a:cs typeface="Calibri" pitchFamily="34" charset="-120"/>
               </a:rPr>
-              <a:t>0 POB-dia</a:t>
+              <a:t>0 POB</a:t>
             </a:r>
-            <a:endParaRPr lang="en-US" sz="850" dirty="0"/>
+            <a:endParaRPr lang="en-US" sz="900" dirty="0"/>
           </a:p>
         </p:txBody>
       </p:sp>
       <p:sp>
         <p:nvSpPr>
-          <p:cNvPr id="60" name="Text 58"/>
+          <p:cNvPr id="46" name="Text 44"/>
           <p:cNvSpPr txBox="1"/>
           <p:nvPr/>
         </p:nvSpPr>
@@ -10880,7 +9864,7 @@
                 <a:ea typeface="Calibri" pitchFamily="34" charset="-122"/>
                 <a:cs typeface="Calibri" pitchFamily="34" charset="-120"/>
               </a:rPr>
-              <a:t>Metodologia: soma de Custo de Serviço + Custo de Material (Jan–Dez), para itens de Cost Allocation = CAPEX com status 'Contar' ou 'TA'. POB em POB-dia (pessoas a bordo × dias). O total desconsidera a categoria Desenvolvimento de Produção (US$ 8,4 mi, mantida na lista de Categoria apenas para referência).</a:t>
+              <a:t>Metodologia: soma de Custo de Serviço + Custo de Material (Jan–Dez), para itens de Cost Allocation = CAPEX com status 'Contar' ou 'TA'. O total desconsidera a categoria Desenvolvimento de Produção (sem itens para este ativo).</a:t>
             </a:r>
             <a:endParaRPr lang="en-US" sz="850" dirty="0"/>
           </a:p>
@@ -14819,7 +13803,7 @@
                 <a:ea typeface="Calibri" pitchFamily="34" charset="-122"/>
                 <a:cs typeface="Calibri" pitchFamily="34" charset="-120"/>
               </a:rPr>
-              <a:t>Fonte: Plano Integrado · aba 'Geral - Em análise' · coluna 'Valor Total' · itens de Cost Allocation = CAPEX, status 'Contar' + 'TA'. Lista completa disponível na planilha em anexo. Extrato pendente de atualização — pode não somar exatamente ao total da Composição de Custo e POB.</a:t>
+              <a:t>Fonte: Plano Integrado · aba 'Geral - Em análise' · itens de Cost Allocation = CAPEX, status 'Contar' + 'TA'. Lista completa disponível na planilha em anexo.</a:t>
             </a:r>
             <a:endParaRPr lang="en-US" sz="850" dirty="0"/>
           </a:p>
@@ -14983,7 +13967,7 @@
                 <a:ea typeface="Cambria" pitchFamily="34" charset="-122"/>
                 <a:cs typeface="Cambria" pitchFamily="34" charset="-120"/>
               </a:rPr>
-              <a:t>US$ 35,0 mi</a:t>
+              <a:t>US$ 29,5 mi</a:t>
             </a:r>
             <a:endParaRPr lang="en-US" sz="2600" dirty="0"/>
           </a:p>
@@ -15122,7 +14106,7 @@
                 <a:ea typeface="Cambria" pitchFamily="34" charset="-122"/>
                 <a:cs typeface="Cambria" pitchFamily="34" charset="-120"/>
               </a:rPr>
-              <a:t>19.668</a:t>
+              <a:t>706</a:t>
             </a:r>
             <a:endParaRPr lang="en-US" sz="2600" dirty="0"/>
           </a:p>
@@ -15161,7 +14145,7 @@
                 <a:ea typeface="Calibri" pitchFamily="34" charset="-122"/>
                 <a:cs typeface="Calibri" pitchFamily="34" charset="-120"/>
               </a:rPr>
-              <a:t>POB TOTAL (POB-DIA)</a:t>
+              <a:t>POB TOTAL</a:t>
             </a:r>
             <a:endParaRPr lang="en-US" sz="950" dirty="0"/>
           </a:p>
@@ -15200,7 +14184,7 @@
                 <a:ea typeface="Calibri" pitchFamily="34" charset="-122"/>
                 <a:cs typeface="Calibri" pitchFamily="34" charset="-120"/>
               </a:rPr>
-              <a:t>pessoas a bordo × dias, no ano</a:t>
+              <a:t>pessoas a bordo alocadas</a:t>
             </a:r>
             <a:endParaRPr lang="en-US" sz="850" dirty="0"/>
           </a:p>
@@ -15704,7 +14688,7 @@
                             <a:srgbClr val="FFFFFF"/>
                           </a:solidFill>
                         </a:rPr>
-                        <a:t>POB-DIA</a:t>
+                        <a:t>POB</a:t>
                       </a:r>
                       <a:endParaRPr lang="en-US" sz="1000" dirty="0"/>
                     </a:p>
@@ -15889,7 +14873,7 @@
                             <a:srgbClr val="1C2B33"/>
                           </a:solidFill>
                         </a:rPr>
-                        <a:t>US$ 18,1 mi</a:t>
+                        <a:t>US$ 16,0 mi</a:t>
                       </a:r>
                       <a:endParaRPr lang="en-US" sz="1050" dirty="0"/>
                     </a:p>
@@ -15950,7 +14934,7 @@
                             <a:srgbClr val="1C2B33"/>
                           </a:solidFill>
                         </a:rPr>
-                        <a:t>5.544</a:t>
+                        <a:t>268</a:t>
                       </a:r>
                       <a:endParaRPr lang="en-US" sz="1050" dirty="0"/>
                     </a:p>
@@ -16135,7 +15119,7 @@
                             <a:srgbClr val="1C2B33"/>
                           </a:solidFill>
                         </a:rPr>
-                        <a:t>US$ 8,8 mi</a:t>
+                        <a:t>US$ 7,2 mi</a:t>
                       </a:r>
                       <a:endParaRPr lang="en-US" sz="1050" dirty="0"/>
                     </a:p>
@@ -16196,7 +15180,7 @@
                             <a:srgbClr val="1C2B33"/>
                           </a:solidFill>
                         </a:rPr>
-                        <a:t>5.092</a:t>
+                        <a:t>182</a:t>
                       </a:r>
                       <a:endParaRPr lang="en-US" sz="1050" dirty="0"/>
                     </a:p>
@@ -16381,7 +15365,7 @@
                             <a:srgbClr val="1C2B33"/>
                           </a:solidFill>
                         </a:rPr>
-                        <a:t>US$ 3,5 mi</a:t>
+                        <a:t>US$ 2,9 mi</a:t>
                       </a:r>
                       <a:endParaRPr lang="en-US" sz="1050" dirty="0"/>
                     </a:p>
@@ -16442,7 +15426,7 @@
                             <a:srgbClr val="1C2B33"/>
                           </a:solidFill>
                         </a:rPr>
-                        <a:t>3.846</a:t>
+                        <a:t>121</a:t>
                       </a:r>
                       <a:endParaRPr lang="en-US" sz="1050" dirty="0"/>
                     </a:p>
@@ -16627,7 +15611,7 @@
                             <a:srgbClr val="1C2B33"/>
                           </a:solidFill>
                         </a:rPr>
-                        <a:t>US$ 4,5 mi</a:t>
+                        <a:t>US$ 3,4 mi</a:t>
                       </a:r>
                       <a:endParaRPr lang="en-US" sz="1050" dirty="0"/>
                     </a:p>
@@ -16688,7 +15672,7 @@
                             <a:srgbClr val="1C2B33"/>
                           </a:solidFill>
                         </a:rPr>
-                        <a:t>5.186</a:t>
+                        <a:t>135</a:t>
                       </a:r>
                       <a:endParaRPr lang="en-US" sz="1050" dirty="0"/>
                     </a:p>
@@ -16873,7 +15857,7 @@
                             <a:srgbClr val="0B2A3D"/>
                           </a:solidFill>
                         </a:rPr>
-                        <a:t>US$ 35,0 mi</a:t>
+                        <a:t>US$ 29,5 mi</a:t>
                       </a:r>
                       <a:endParaRPr lang="en-US" sz="1050" dirty="0"/>
                     </a:p>
@@ -16934,7 +15918,7 @@
                             <a:srgbClr val="0B2A3D"/>
                           </a:solidFill>
                         </a:rPr>
-                        <a:t>19.668</a:t>
+                        <a:t>706</a:t>
                       </a:r>
                       <a:endParaRPr lang="en-US" sz="1050" dirty="0"/>
                     </a:p>
@@ -17667,7 +16651,7 @@
                 <a:ea typeface="Cambria" pitchFamily="34" charset="-122"/>
                 <a:cs typeface="Cambria" pitchFamily="34" charset="-120"/>
               </a:rPr>
-              <a:t>US$ 12,0 mi</a:t>
+              <a:t>US$ 9,8 mi</a:t>
             </a:r>
             <a:endParaRPr lang="en-US" sz="2100" dirty="0"/>
           </a:p>
@@ -17767,7 +16751,7 @@
                 <a:ea typeface="Cambria" pitchFamily="34" charset="-122"/>
                 <a:cs typeface="Cambria" pitchFamily="34" charset="-120"/>
               </a:rPr>
-              <a:t>US$ 18,1 mi</a:t>
+              <a:t>US$ 16,0 mi</a:t>
             </a:r>
             <a:endParaRPr lang="en-US" sz="2100" dirty="0"/>
           </a:p>
@@ -17867,7 +16851,7 @@
                 <a:ea typeface="Cambria" pitchFamily="34" charset="-122"/>
                 <a:cs typeface="Cambria" pitchFamily="34" charset="-120"/>
               </a:rPr>
-              <a:t>5.544</a:t>
+              <a:t>268</a:t>
             </a:r>
             <a:endParaRPr lang="en-US" sz="2100" dirty="0"/>
           </a:p>
@@ -17906,7 +16890,7 @@
                 <a:ea typeface="Calibri" pitchFamily="34" charset="-122"/>
                 <a:cs typeface="Calibri" pitchFamily="34" charset="-120"/>
               </a:rPr>
-              <a:t>POB TOTAL (POB-DIA)</a:t>
+              <a:t>POB TOTAL</a:t>
             </a:r>
             <a:endParaRPr lang="en-US" sz="850" dirty="0"/>
           </a:p>
@@ -18077,7 +17061,7 @@
               <a:buNone/>
             </a:pPr>
             <a:r>
-              <a:rPr lang="en-US" sz="850" dirty="0">
+              <a:rPr lang="en-US" sz="900" dirty="0">
                 <a:solidFill>
                   <a:srgbClr val="5B6B73"/>
                 </a:solidFill>
@@ -18085,9 +17069,9 @@
                 <a:ea typeface="Calibri" pitchFamily="34" charset="-122"/>
                 <a:cs typeface="Calibri" pitchFamily="34" charset="-120"/>
               </a:rPr>
-              <a:t>1.611 POB-dia</a:t>
+              <a:t>92 POB</a:t>
             </a:r>
-            <a:endParaRPr lang="en-US" sz="850" dirty="0"/>
+            <a:endParaRPr lang="en-US" sz="900" dirty="0"/>
           </a:p>
         </p:txBody>
       </p:sp>
@@ -18214,7 +17198,7 @@
               <a:buNone/>
             </a:pPr>
             <a:r>
-              <a:rPr lang="en-US" sz="850" dirty="0">
+              <a:rPr lang="en-US" sz="900" dirty="0">
                 <a:solidFill>
                   <a:srgbClr val="5B6B73"/>
                 </a:solidFill>
@@ -18222,9 +17206,9 @@
                 <a:ea typeface="Calibri" pitchFamily="34" charset="-122"/>
                 <a:cs typeface="Calibri" pitchFamily="34" charset="-120"/>
               </a:rPr>
-              <a:t>224 POB-dia</a:t>
+              <a:t>16 POB</a:t>
             </a:r>
-            <a:endParaRPr lang="en-US" sz="850" dirty="0"/>
+            <a:endParaRPr lang="en-US" sz="900" dirty="0"/>
           </a:p>
         </p:txBody>
       </p:sp>
@@ -18237,6 +17221,143 @@
         <p:spPr>
           <a:xfrm>
             <a:off x="566928" y="3630168"/>
+            <a:ext cx="2995574" cy="365760"/>
+          </a:xfrm>
+          <a:prstGeom prst="rect">
+            <a:avLst/>
+          </a:prstGeom>
+          <a:noFill/>
+          <a:ln/>
+        </p:spPr>
+        <p:txBody>
+          <a:bodyPr wrap="square" lIns="0" tIns="0" rIns="0" bIns="0" rtlCol="0" anchor="ctr"/>
+          <a:lstStyle/>
+          <a:p>
+            <a:pPr indent="0" marL="0">
+              <a:buNone/>
+            </a:pPr>
+            <a:r>
+              <a:rPr lang="en-US" sz="1100" dirty="0">
+                <a:solidFill>
+                  <a:srgbClr val="1C2B33"/>
+                </a:solidFill>
+                <a:latin typeface="Calibri" pitchFamily="34" charset="0"/>
+                <a:ea typeface="Calibri" pitchFamily="34" charset="-122"/>
+                <a:cs typeface="Calibri" pitchFamily="34" charset="-120"/>
+              </a:rPr>
+              <a:t>MNT – Manutenção</a:t>
+            </a:r>
+            <a:endParaRPr lang="en-US" sz="1100" dirty="0"/>
+          </a:p>
+        </p:txBody>
+      </p:sp>
+      <p:sp>
+        <p:nvSpPr>
+          <p:cNvPr id="28" name="Text 26"/>
+          <p:cNvSpPr txBox="1"/>
+          <p:nvPr/>
+        </p:nvSpPr>
+        <p:spPr>
+          <a:xfrm>
+            <a:off x="3452774" y="3630168"/>
+            <a:ext cx="1497787" cy="365760"/>
+          </a:xfrm>
+          <a:prstGeom prst="rect">
+            <a:avLst/>
+          </a:prstGeom>
+          <a:noFill/>
+          <a:ln/>
+        </p:spPr>
+        <p:txBody>
+          <a:bodyPr wrap="square" lIns="0" tIns="0" rIns="0" bIns="0" rtlCol="0" anchor="ctr"/>
+          <a:lstStyle/>
+          <a:p>
+            <a:pPr algn="r" indent="0" marL="0">
+              <a:buNone/>
+            </a:pPr>
+            <a:r>
+              <a:rPr lang="en-US" sz="1100" b="1" dirty="0">
+                <a:solidFill>
+                  <a:srgbClr val="0B2A3D"/>
+                </a:solidFill>
+                <a:latin typeface="Calibri" pitchFamily="34" charset="0"/>
+                <a:ea typeface="Calibri" pitchFamily="34" charset="-122"/>
+                <a:cs typeface="Calibri" pitchFamily="34" charset="-120"/>
+              </a:rPr>
+              <a:t>US$ 2,4 mi</a:t>
+            </a:r>
+            <a:endParaRPr lang="en-US" sz="1100" dirty="0"/>
+          </a:p>
+        </p:txBody>
+      </p:sp>
+      <p:sp>
+        <p:nvSpPr>
+          <p:cNvPr id="29" name="Text 27"/>
+          <p:cNvSpPr txBox="1"/>
+          <p:nvPr/>
+        </p:nvSpPr>
+        <p:spPr>
+          <a:xfrm>
+            <a:off x="4840834" y="3630168"/>
+            <a:ext cx="965606" cy="365760"/>
+          </a:xfrm>
+          <a:prstGeom prst="rect">
+            <a:avLst/>
+          </a:prstGeom>
+          <a:noFill/>
+          <a:ln/>
+        </p:spPr>
+        <p:txBody>
+          <a:bodyPr wrap="square" lIns="0" tIns="0" rIns="0" bIns="0" rtlCol="0" anchor="ctr"/>
+          <a:lstStyle/>
+          <a:p>
+            <a:pPr algn="r" indent="0" marL="0">
+              <a:buNone/>
+            </a:pPr>
+            <a:r>
+              <a:rPr lang="en-US" sz="900" dirty="0">
+                <a:solidFill>
+                  <a:srgbClr val="5B6B73"/>
+                </a:solidFill>
+                <a:latin typeface="Calibri" pitchFamily="34" charset="0"/>
+                <a:ea typeface="Calibri" pitchFamily="34" charset="-122"/>
+                <a:cs typeface="Calibri" pitchFamily="34" charset="-120"/>
+              </a:rPr>
+              <a:t>14 POB</a:t>
+            </a:r>
+            <a:endParaRPr lang="en-US" sz="900" dirty="0"/>
+          </a:p>
+        </p:txBody>
+      </p:sp>
+      <p:sp>
+        <p:nvSpPr>
+          <p:cNvPr id="30" name="Shape 28"/>
+          <p:cNvSpPr/>
+          <p:nvPr/>
+        </p:nvSpPr>
+        <p:spPr>
+          <a:xfrm>
+            <a:off x="457200" y="3995928"/>
+            <a:ext cx="5349240" cy="365760"/>
+          </a:xfrm>
+          <a:prstGeom prst="rect">
+            <a:avLst/>
+          </a:prstGeom>
+          <a:solidFill>
+            <a:srgbClr val="F0F4F5"/>
+          </a:solidFill>
+          <a:ln/>
+        </p:spPr>
+      </p:sp>
+      <p:sp>
+        <p:nvSpPr>
+          <p:cNvPr id="31" name="Text 29"/>
+          <p:cNvSpPr txBox="1"/>
+          <p:nvPr/>
+        </p:nvSpPr>
+        <p:spPr>
+          <a:xfrm>
+            <a:off x="566928" y="3995928"/>
             <a:ext cx="2995574" cy="365760"/>
           </a:xfrm>
           <a:prstGeom prst="rect">
@@ -18269,143 +17390,6 @@
       </p:sp>
       <p:sp>
         <p:nvSpPr>
-          <p:cNvPr id="28" name="Text 26"/>
-          <p:cNvSpPr txBox="1"/>
-          <p:nvPr/>
-        </p:nvSpPr>
-        <p:spPr>
-          <a:xfrm>
-            <a:off x="3452774" y="3630168"/>
-            <a:ext cx="1497787" cy="365760"/>
-          </a:xfrm>
-          <a:prstGeom prst="rect">
-            <a:avLst/>
-          </a:prstGeom>
-          <a:noFill/>
-          <a:ln/>
-        </p:spPr>
-        <p:txBody>
-          <a:bodyPr wrap="square" lIns="0" tIns="0" rIns="0" bIns="0" rtlCol="0" anchor="ctr"/>
-          <a:lstStyle/>
-          <a:p>
-            <a:pPr algn="r" indent="0" marL="0">
-              <a:buNone/>
-            </a:pPr>
-            <a:r>
-              <a:rPr lang="en-US" sz="1100" b="1" dirty="0">
-                <a:solidFill>
-                  <a:srgbClr val="0B2A3D"/>
-                </a:solidFill>
-                <a:latin typeface="Calibri" pitchFamily="34" charset="0"/>
-                <a:ea typeface="Calibri" pitchFamily="34" charset="-122"/>
-                <a:cs typeface="Calibri" pitchFamily="34" charset="-120"/>
-              </a:rPr>
-              <a:t>US$ 3,3 mi</a:t>
-            </a:r>
-            <a:endParaRPr lang="en-US" sz="1100" dirty="0"/>
-          </a:p>
-        </p:txBody>
-      </p:sp>
-      <p:sp>
-        <p:nvSpPr>
-          <p:cNvPr id="29" name="Text 27"/>
-          <p:cNvSpPr txBox="1"/>
-          <p:nvPr/>
-        </p:nvSpPr>
-        <p:spPr>
-          <a:xfrm>
-            <a:off x="4840834" y="3630168"/>
-            <a:ext cx="965606" cy="365760"/>
-          </a:xfrm>
-          <a:prstGeom prst="rect">
-            <a:avLst/>
-          </a:prstGeom>
-          <a:noFill/>
-          <a:ln/>
-        </p:spPr>
-        <p:txBody>
-          <a:bodyPr wrap="square" lIns="0" tIns="0" rIns="0" bIns="0" rtlCol="0" anchor="ctr"/>
-          <a:lstStyle/>
-          <a:p>
-            <a:pPr algn="r" indent="0" marL="0">
-              <a:buNone/>
-            </a:pPr>
-            <a:r>
-              <a:rPr lang="en-US" sz="850" dirty="0">
-                <a:solidFill>
-                  <a:srgbClr val="5B6B73"/>
-                </a:solidFill>
-                <a:latin typeface="Calibri" pitchFamily="34" charset="0"/>
-                <a:ea typeface="Calibri" pitchFamily="34" charset="-122"/>
-                <a:cs typeface="Calibri" pitchFamily="34" charset="-120"/>
-              </a:rPr>
-              <a:t>2.865 POB-dia</a:t>
-            </a:r>
-            <a:endParaRPr lang="en-US" sz="850" dirty="0"/>
-          </a:p>
-        </p:txBody>
-      </p:sp>
-      <p:sp>
-        <p:nvSpPr>
-          <p:cNvPr id="30" name="Shape 28"/>
-          <p:cNvSpPr/>
-          <p:nvPr/>
-        </p:nvSpPr>
-        <p:spPr>
-          <a:xfrm>
-            <a:off x="457200" y="3995928"/>
-            <a:ext cx="5349240" cy="365760"/>
-          </a:xfrm>
-          <a:prstGeom prst="rect">
-            <a:avLst/>
-          </a:prstGeom>
-          <a:solidFill>
-            <a:srgbClr val="F0F4F5"/>
-          </a:solidFill>
-          <a:ln/>
-        </p:spPr>
-      </p:sp>
-      <p:sp>
-        <p:nvSpPr>
-          <p:cNvPr id="31" name="Text 29"/>
-          <p:cNvSpPr txBox="1"/>
-          <p:nvPr/>
-        </p:nvSpPr>
-        <p:spPr>
-          <a:xfrm>
-            <a:off x="566928" y="3995928"/>
-            <a:ext cx="2995574" cy="365760"/>
-          </a:xfrm>
-          <a:prstGeom prst="rect">
-            <a:avLst/>
-          </a:prstGeom>
-          <a:noFill/>
-          <a:ln/>
-        </p:spPr>
-        <p:txBody>
-          <a:bodyPr wrap="square" lIns="0" tIns="0" rIns="0" bIns="0" rtlCol="0" anchor="ctr"/>
-          <a:lstStyle/>
-          <a:p>
-            <a:pPr indent="0" marL="0">
-              <a:buNone/>
-            </a:pPr>
-            <a:r>
-              <a:rPr lang="en-US" sz="1100" dirty="0">
-                <a:solidFill>
-                  <a:srgbClr val="1C2B33"/>
-                </a:solidFill>
-                <a:latin typeface="Calibri" pitchFamily="34" charset="0"/>
-                <a:ea typeface="Calibri" pitchFamily="34" charset="-122"/>
-                <a:cs typeface="Calibri" pitchFamily="34" charset="-120"/>
-              </a:rPr>
-              <a:t>MNT – Manutenção</a:t>
-            </a:r>
-            <a:endParaRPr lang="en-US" sz="1100" dirty="0"/>
-          </a:p>
-        </p:txBody>
-      </p:sp>
-      <p:sp>
-        <p:nvSpPr>
           <p:cNvPr id="32" name="Text 30"/>
           <p:cNvSpPr txBox="1"/>
           <p:nvPr/>
@@ -18437,7 +17421,7 @@
                 <a:ea typeface="Calibri" pitchFamily="34" charset="-122"/>
                 <a:cs typeface="Calibri" pitchFamily="34" charset="-120"/>
               </a:rPr>
-              <a:t>US$ 2,4 mi</a:t>
+              <a:t>US$ 1,2 mi</a:t>
             </a:r>
             <a:endParaRPr lang="en-US" sz="1100" dirty="0"/>
           </a:p>
@@ -18468,7 +17452,7 @@
               <a:buNone/>
             </a:pPr>
             <a:r>
-              <a:rPr lang="en-US" sz="850" dirty="0">
+              <a:rPr lang="en-US" sz="900" dirty="0">
                 <a:solidFill>
                   <a:srgbClr val="5B6B73"/>
                 </a:solidFill>
@@ -18476,9 +17460,9 @@
                 <a:ea typeface="Calibri" pitchFamily="34" charset="-122"/>
                 <a:cs typeface="Calibri" pitchFamily="34" charset="-120"/>
               </a:rPr>
-              <a:t>248 POB-dia</a:t>
+              <a:t>127 POB</a:t>
             </a:r>
-            <a:endParaRPr lang="en-US" sz="850" dirty="0"/>
+            <a:endParaRPr lang="en-US" sz="900" dirty="0"/>
           </a:p>
         </p:txBody>
       </p:sp>
@@ -18585,7 +17569,7 @@
               <a:buNone/>
             </a:pPr>
             <a:r>
-              <a:rPr lang="en-US" sz="850" dirty="0">
+              <a:rPr lang="en-US" sz="900" dirty="0">
                 <a:solidFill>
                   <a:srgbClr val="5B6B73"/>
                 </a:solidFill>
@@ -18593,9 +17577,9 @@
                 <a:ea typeface="Calibri" pitchFamily="34" charset="-122"/>
                 <a:cs typeface="Calibri" pitchFamily="34" charset="-120"/>
               </a:rPr>
-              <a:t>540 POB-dia</a:t>
+              <a:t>18 POB</a:t>
             </a:r>
-            <a:endParaRPr lang="en-US" sz="850" dirty="0"/>
+            <a:endParaRPr lang="en-US" sz="900" dirty="0"/>
           </a:p>
         </p:txBody>
       </p:sp>
@@ -18628,6 +17612,123 @@
         <p:spPr>
           <a:xfrm>
             <a:off x="566928" y="4727448"/>
+            <a:ext cx="2995574" cy="365760"/>
+          </a:xfrm>
+          <a:prstGeom prst="rect">
+            <a:avLst/>
+          </a:prstGeom>
+          <a:noFill/>
+          <a:ln/>
+        </p:spPr>
+        <p:txBody>
+          <a:bodyPr wrap="square" lIns="0" tIns="0" rIns="0" bIns="0" rtlCol="0" anchor="ctr"/>
+          <a:lstStyle/>
+          <a:p>
+            <a:pPr indent="0" marL="0">
+              <a:buNone/>
+            </a:pPr>
+            <a:r>
+              <a:rPr lang="en-US" sz="1100" dirty="0">
+                <a:solidFill>
+                  <a:srgbClr val="1C2B33"/>
+                </a:solidFill>
+                <a:latin typeface="Calibri" pitchFamily="34" charset="0"/>
+                <a:ea typeface="Calibri" pitchFamily="34" charset="-122"/>
+                <a:cs typeface="Calibri" pitchFamily="34" charset="-120"/>
+              </a:rPr>
+              <a:t>Segurança de Processos</a:t>
+            </a:r>
+            <a:endParaRPr lang="en-US" sz="1100" dirty="0"/>
+          </a:p>
+        </p:txBody>
+      </p:sp>
+      <p:sp>
+        <p:nvSpPr>
+          <p:cNvPr id="39" name="Text 37"/>
+          <p:cNvSpPr txBox="1"/>
+          <p:nvPr/>
+        </p:nvSpPr>
+        <p:spPr>
+          <a:xfrm>
+            <a:off x="3452774" y="4727448"/>
+            <a:ext cx="1497787" cy="365760"/>
+          </a:xfrm>
+          <a:prstGeom prst="rect">
+            <a:avLst/>
+          </a:prstGeom>
+          <a:noFill/>
+          <a:ln/>
+        </p:spPr>
+        <p:txBody>
+          <a:bodyPr wrap="square" lIns="0" tIns="0" rIns="0" bIns="0" rtlCol="0" anchor="ctr"/>
+          <a:lstStyle/>
+          <a:p>
+            <a:pPr algn="r" indent="0" marL="0">
+              <a:buNone/>
+            </a:pPr>
+            <a:r>
+              <a:rPr lang="en-US" sz="1100" b="1" dirty="0">
+                <a:solidFill>
+                  <a:srgbClr val="0B2A3D"/>
+                </a:solidFill>
+                <a:latin typeface="Calibri" pitchFamily="34" charset="0"/>
+                <a:ea typeface="Calibri" pitchFamily="34" charset="-122"/>
+                <a:cs typeface="Calibri" pitchFamily="34" charset="-120"/>
+              </a:rPr>
+              <a:t>US$ 138,5 mil</a:t>
+            </a:r>
+            <a:endParaRPr lang="en-US" sz="1100" dirty="0"/>
+          </a:p>
+        </p:txBody>
+      </p:sp>
+      <p:sp>
+        <p:nvSpPr>
+          <p:cNvPr id="40" name="Text 38"/>
+          <p:cNvSpPr txBox="1"/>
+          <p:nvPr/>
+        </p:nvSpPr>
+        <p:spPr>
+          <a:xfrm>
+            <a:off x="4840834" y="4727448"/>
+            <a:ext cx="965606" cy="365760"/>
+          </a:xfrm>
+          <a:prstGeom prst="rect">
+            <a:avLst/>
+          </a:prstGeom>
+          <a:noFill/>
+          <a:ln/>
+        </p:spPr>
+        <p:txBody>
+          <a:bodyPr wrap="square" lIns="0" tIns="0" rIns="0" bIns="0" rtlCol="0" anchor="ctr"/>
+          <a:lstStyle/>
+          <a:p>
+            <a:pPr algn="r" indent="0" marL="0">
+              <a:buNone/>
+            </a:pPr>
+            <a:r>
+              <a:rPr lang="en-US" sz="900" dirty="0">
+                <a:solidFill>
+                  <a:srgbClr val="5B6B73"/>
+                </a:solidFill>
+                <a:latin typeface="Calibri" pitchFamily="34" charset="0"/>
+                <a:ea typeface="Calibri" pitchFamily="34" charset="-122"/>
+                <a:cs typeface="Calibri" pitchFamily="34" charset="-120"/>
+              </a:rPr>
+              <a:t>0 POB</a:t>
+            </a:r>
+            <a:endParaRPr lang="en-US" sz="900" dirty="0"/>
+          </a:p>
+        </p:txBody>
+      </p:sp>
+      <p:sp>
+        <p:nvSpPr>
+          <p:cNvPr id="41" name="Text 39"/>
+          <p:cNvSpPr txBox="1"/>
+          <p:nvPr/>
+        </p:nvSpPr>
+        <p:spPr>
+          <a:xfrm>
+            <a:off x="566928" y="5093208"/>
             <a:ext cx="2995574" cy="365760"/>
           </a:xfrm>
           <a:prstGeom prst="rect">
@@ -18660,123 +17761,6 @@
       </p:sp>
       <p:sp>
         <p:nvSpPr>
-          <p:cNvPr id="39" name="Text 37"/>
-          <p:cNvSpPr txBox="1"/>
-          <p:nvPr/>
-        </p:nvSpPr>
-        <p:spPr>
-          <a:xfrm>
-            <a:off x="3452774" y="4727448"/>
-            <a:ext cx="1497787" cy="365760"/>
-          </a:xfrm>
-          <a:prstGeom prst="rect">
-            <a:avLst/>
-          </a:prstGeom>
-          <a:noFill/>
-          <a:ln/>
-        </p:spPr>
-        <p:txBody>
-          <a:bodyPr wrap="square" lIns="0" tIns="0" rIns="0" bIns="0" rtlCol="0" anchor="ctr"/>
-          <a:lstStyle/>
-          <a:p>
-            <a:pPr algn="r" indent="0" marL="0">
-              <a:buNone/>
-            </a:pPr>
-            <a:r>
-              <a:rPr lang="en-US" sz="1100" b="1" dirty="0">
-                <a:solidFill>
-                  <a:srgbClr val="0B2A3D"/>
-                </a:solidFill>
-                <a:latin typeface="Calibri" pitchFamily="34" charset="0"/>
-                <a:ea typeface="Calibri" pitchFamily="34" charset="-122"/>
-                <a:cs typeface="Calibri" pitchFamily="34" charset="-120"/>
-              </a:rPr>
-              <a:t>US$ 140,5 mil</a:t>
-            </a:r>
-            <a:endParaRPr lang="en-US" sz="1100" dirty="0"/>
-          </a:p>
-        </p:txBody>
-      </p:sp>
-      <p:sp>
-        <p:nvSpPr>
-          <p:cNvPr id="40" name="Text 38"/>
-          <p:cNvSpPr txBox="1"/>
-          <p:nvPr/>
-        </p:nvSpPr>
-        <p:spPr>
-          <a:xfrm>
-            <a:off x="4840834" y="4727448"/>
-            <a:ext cx="965606" cy="365760"/>
-          </a:xfrm>
-          <a:prstGeom prst="rect">
-            <a:avLst/>
-          </a:prstGeom>
-          <a:noFill/>
-          <a:ln/>
-        </p:spPr>
-        <p:txBody>
-          <a:bodyPr wrap="square" lIns="0" tIns="0" rIns="0" bIns="0" rtlCol="0" anchor="ctr"/>
-          <a:lstStyle/>
-          <a:p>
-            <a:pPr algn="r" indent="0" marL="0">
-              <a:buNone/>
-            </a:pPr>
-            <a:r>
-              <a:rPr lang="en-US" sz="850" dirty="0">
-                <a:solidFill>
-                  <a:srgbClr val="5B6B73"/>
-                </a:solidFill>
-                <a:latin typeface="Calibri" pitchFamily="34" charset="0"/>
-                <a:ea typeface="Calibri" pitchFamily="34" charset="-122"/>
-                <a:cs typeface="Calibri" pitchFamily="34" charset="-120"/>
-              </a:rPr>
-              <a:t>56 POB-dia</a:t>
-            </a:r>
-            <a:endParaRPr lang="en-US" sz="850" dirty="0"/>
-          </a:p>
-        </p:txBody>
-      </p:sp>
-      <p:sp>
-        <p:nvSpPr>
-          <p:cNvPr id="41" name="Text 39"/>
-          <p:cNvSpPr txBox="1"/>
-          <p:nvPr/>
-        </p:nvSpPr>
-        <p:spPr>
-          <a:xfrm>
-            <a:off x="566928" y="5093208"/>
-            <a:ext cx="2995574" cy="365760"/>
-          </a:xfrm>
-          <a:prstGeom prst="rect">
-            <a:avLst/>
-          </a:prstGeom>
-          <a:noFill/>
-          <a:ln/>
-        </p:spPr>
-        <p:txBody>
-          <a:bodyPr wrap="square" lIns="0" tIns="0" rIns="0" bIns="0" rtlCol="0" anchor="ctr"/>
-          <a:lstStyle/>
-          <a:p>
-            <a:pPr indent="0" marL="0">
-              <a:buNone/>
-            </a:pPr>
-            <a:r>
-              <a:rPr lang="en-US" sz="1100" dirty="0">
-                <a:solidFill>
-                  <a:srgbClr val="1C2B33"/>
-                </a:solidFill>
-                <a:latin typeface="Calibri" pitchFamily="34" charset="0"/>
-                <a:ea typeface="Calibri" pitchFamily="34" charset="-122"/>
-                <a:cs typeface="Calibri" pitchFamily="34" charset="-120"/>
-              </a:rPr>
-              <a:t>Segurança de Processos</a:t>
-            </a:r>
-            <a:endParaRPr lang="en-US" sz="1100" dirty="0"/>
-          </a:p>
-        </p:txBody>
-      </p:sp>
-      <p:sp>
-        <p:nvSpPr>
           <p:cNvPr id="42" name="Text 40"/>
           <p:cNvSpPr txBox="1"/>
           <p:nvPr/>
@@ -18808,7 +17792,7 @@
                 <a:ea typeface="Calibri" pitchFamily="34" charset="-122"/>
                 <a:cs typeface="Calibri" pitchFamily="34" charset="-120"/>
               </a:rPr>
-              <a:t>US$ 138,5 mil</a:t>
+              <a:t>US$ 40,0 mil</a:t>
             </a:r>
             <a:endParaRPr lang="en-US" sz="1100" dirty="0"/>
           </a:p>
@@ -18839,7 +17823,7 @@
               <a:buNone/>
             </a:pPr>
             <a:r>
-              <a:rPr lang="en-US" sz="850" dirty="0">
+              <a:rPr lang="en-US" sz="900" dirty="0">
                 <a:solidFill>
                   <a:srgbClr val="5B6B73"/>
                 </a:solidFill>
@@ -18847,9 +17831,9 @@
                 <a:ea typeface="Calibri" pitchFamily="34" charset="-122"/>
                 <a:cs typeface="Calibri" pitchFamily="34" charset="-120"/>
               </a:rPr>
-              <a:t>0 POB-dia</a:t>
+              <a:t>1 POB</a:t>
             </a:r>
-            <a:endParaRPr lang="en-US" sz="850" dirty="0"/>
+            <a:endParaRPr lang="en-US" sz="900" dirty="0"/>
           </a:p>
         </p:txBody>
       </p:sp>
@@ -18987,7 +17971,7 @@
                 <a:ea typeface="Calibri" pitchFamily="34" charset="-122"/>
                 <a:cs typeface="Calibri" pitchFamily="34" charset="-120"/>
               </a:rPr>
-              <a:t>US$ 9,2 mi</a:t>
+              <a:t>US$ 7,0 mi</a:t>
             </a:r>
             <a:endParaRPr lang="en-US" sz="1100" dirty="0"/>
           </a:p>
@@ -19018,7 +18002,7 @@
               <a:buNone/>
             </a:pPr>
             <a:r>
-              <a:rPr lang="en-US" sz="850" dirty="0">
+              <a:rPr lang="en-US" sz="900" dirty="0">
                 <a:solidFill>
                   <a:srgbClr val="5B6B73"/>
                 </a:solidFill>
@@ -19026,9 +18010,9 @@
                 <a:ea typeface="Calibri" pitchFamily="34" charset="-122"/>
                 <a:cs typeface="Calibri" pitchFamily="34" charset="-120"/>
               </a:rPr>
-              <a:t>3.447 POB-dia</a:t>
+              <a:t>175 POB</a:t>
             </a:r>
-            <a:endParaRPr lang="en-US" sz="850" dirty="0"/>
+            <a:endParaRPr lang="en-US" sz="900" dirty="0"/>
           </a:p>
         </p:txBody>
       </p:sp>
@@ -19155,7 +18139,7 @@
               <a:buNone/>
             </a:pPr>
             <a:r>
-              <a:rPr lang="en-US" sz="850" dirty="0">
+              <a:rPr lang="en-US" sz="900" dirty="0">
                 <a:solidFill>
                   <a:srgbClr val="5B6B73"/>
                 </a:solidFill>
@@ -19163,9 +18147,9 @@
                 <a:ea typeface="Calibri" pitchFamily="34" charset="-122"/>
                 <a:cs typeface="Calibri" pitchFamily="34" charset="-120"/>
               </a:rPr>
-              <a:t>988 POB-dia</a:t>
+              <a:t>38 POB</a:t>
             </a:r>
-            <a:endParaRPr lang="en-US" sz="850" dirty="0"/>
+            <a:endParaRPr lang="en-US" sz="900" dirty="0"/>
           </a:p>
         </p:txBody>
       </p:sp>
@@ -19272,7 +18256,7 @@
               <a:buNone/>
             </a:pPr>
             <a:r>
-              <a:rPr lang="en-US" sz="850" dirty="0">
+              <a:rPr lang="en-US" sz="900" dirty="0">
                 <a:solidFill>
                   <a:srgbClr val="5B6B73"/>
                 </a:solidFill>
@@ -19280,9 +18264,9 @@
                 <a:ea typeface="Calibri" pitchFamily="34" charset="-122"/>
                 <a:cs typeface="Calibri" pitchFamily="34" charset="-120"/>
               </a:rPr>
-              <a:t>674 POB-dia</a:t>
+              <a:t>32 POB</a:t>
             </a:r>
-            <a:endParaRPr lang="en-US" sz="850" dirty="0"/>
+            <a:endParaRPr lang="en-US" sz="900" dirty="0"/>
           </a:p>
         </p:txBody>
       </p:sp>
@@ -19409,7 +18393,7 @@
               <a:buNone/>
             </a:pPr>
             <a:r>
-              <a:rPr lang="en-US" sz="850" dirty="0">
+              <a:rPr lang="en-US" sz="900" dirty="0">
                 <a:solidFill>
                   <a:srgbClr val="5B6B73"/>
                 </a:solidFill>
@@ -19417,132 +18401,15 @@
                 <a:ea typeface="Calibri" pitchFamily="34" charset="-122"/>
                 <a:cs typeface="Calibri" pitchFamily="34" charset="-120"/>
               </a:rPr>
-              <a:t>392 POB-dia</a:t>
+              <a:t>23 POB</a:t>
             </a:r>
-            <a:endParaRPr lang="en-US" sz="850" dirty="0"/>
+            <a:endParaRPr lang="en-US" sz="900" dirty="0"/>
           </a:p>
         </p:txBody>
       </p:sp>
       <p:sp>
         <p:nvSpPr>
           <p:cNvPr id="60" name="Text 58"/>
-          <p:cNvSpPr txBox="1"/>
-          <p:nvPr/>
-        </p:nvSpPr>
-        <p:spPr>
-          <a:xfrm>
-            <a:off x="6464808" y="4361688"/>
-            <a:ext cx="2995574" cy="365760"/>
-          </a:xfrm>
-          <a:prstGeom prst="rect">
-            <a:avLst/>
-          </a:prstGeom>
-          <a:noFill/>
-          <a:ln/>
-        </p:spPr>
-        <p:txBody>
-          <a:bodyPr wrap="square" lIns="0" tIns="0" rIns="0" bIns="0" rtlCol="0" anchor="ctr"/>
-          <a:lstStyle/>
-          <a:p>
-            <a:pPr indent="0" marL="0">
-              <a:buNone/>
-            </a:pPr>
-            <a:r>
-              <a:rPr lang="en-US" sz="1100" dirty="0">
-                <a:solidFill>
-                  <a:srgbClr val="1C2B33"/>
-                </a:solidFill>
-                <a:latin typeface="Calibri" pitchFamily="34" charset="0"/>
-                <a:ea typeface="Calibri" pitchFamily="34" charset="-122"/>
-                <a:cs typeface="Calibri" pitchFamily="34" charset="-120"/>
-              </a:rPr>
-              <a:t>Desenvolvimento de Produção</a:t>
-            </a:r>
-            <a:endParaRPr lang="en-US" sz="1100" dirty="0"/>
-          </a:p>
-        </p:txBody>
-      </p:sp>
-      <p:sp>
-        <p:nvSpPr>
-          <p:cNvPr id="61" name="Text 59"/>
-          <p:cNvSpPr txBox="1"/>
-          <p:nvPr/>
-        </p:nvSpPr>
-        <p:spPr>
-          <a:xfrm>
-            <a:off x="9350654" y="4361688"/>
-            <a:ext cx="1497787" cy="365760"/>
-          </a:xfrm>
-          <a:prstGeom prst="rect">
-            <a:avLst/>
-          </a:prstGeom>
-          <a:noFill/>
-          <a:ln/>
-        </p:spPr>
-        <p:txBody>
-          <a:bodyPr wrap="square" lIns="0" tIns="0" rIns="0" bIns="0" rtlCol="0" anchor="ctr"/>
-          <a:lstStyle/>
-          <a:p>
-            <a:pPr algn="r" indent="0" marL="0">
-              <a:buNone/>
-            </a:pPr>
-            <a:r>
-              <a:rPr lang="en-US" sz="1100" b="1" dirty="0">
-                <a:solidFill>
-                  <a:srgbClr val="0B2A3D"/>
-                </a:solidFill>
-                <a:latin typeface="Calibri" pitchFamily="34" charset="0"/>
-                <a:ea typeface="Calibri" pitchFamily="34" charset="-122"/>
-                <a:cs typeface="Calibri" pitchFamily="34" charset="-120"/>
-              </a:rPr>
-              <a:t>US$ 90,5 mil</a:t>
-            </a:r>
-            <a:endParaRPr lang="en-US" sz="1100" dirty="0"/>
-          </a:p>
-        </p:txBody>
-      </p:sp>
-      <p:sp>
-        <p:nvSpPr>
-          <p:cNvPr id="62" name="Text 60"/>
-          <p:cNvSpPr txBox="1"/>
-          <p:nvPr/>
-        </p:nvSpPr>
-        <p:spPr>
-          <a:xfrm>
-            <a:off x="10738714" y="4361688"/>
-            <a:ext cx="965606" cy="365760"/>
-          </a:xfrm>
-          <a:prstGeom prst="rect">
-            <a:avLst/>
-          </a:prstGeom>
-          <a:noFill/>
-          <a:ln/>
-        </p:spPr>
-        <p:txBody>
-          <a:bodyPr wrap="square" lIns="0" tIns="0" rIns="0" bIns="0" rtlCol="0" anchor="ctr"/>
-          <a:lstStyle/>
-          <a:p>
-            <a:pPr algn="r" indent="0" marL="0">
-              <a:buNone/>
-            </a:pPr>
-            <a:r>
-              <a:rPr lang="en-US" sz="850" dirty="0">
-                <a:solidFill>
-                  <a:srgbClr val="5B6B73"/>
-                </a:solidFill>
-                <a:latin typeface="Calibri" pitchFamily="34" charset="0"/>
-                <a:ea typeface="Calibri" pitchFamily="34" charset="-122"/>
-                <a:cs typeface="Calibri" pitchFamily="34" charset="-120"/>
-              </a:rPr>
-              <a:t>43 POB-dia</a:t>
-            </a:r>
-            <a:endParaRPr lang="en-US" sz="850" dirty="0"/>
-          </a:p>
-        </p:txBody>
-      </p:sp>
-      <p:sp>
-        <p:nvSpPr>
-          <p:cNvPr id="63" name="Text 61"/>
           <p:cNvSpPr txBox="1"/>
           <p:nvPr/>
         </p:nvSpPr>
@@ -19573,7 +18440,7 @@
                 <a:ea typeface="Calibri" pitchFamily="34" charset="-122"/>
                 <a:cs typeface="Calibri" pitchFamily="34" charset="-120"/>
               </a:rPr>
-              <a:t>Metodologia: soma de Custo de Serviço + Custo de Material (Jan–Dez), para itens de Cost Allocation = CAPEX com status 'Contar' ou 'TA'. POB em POB-dia (pessoas a bordo × dias). O total desconsidera a categoria Desenvolvimento de Produção (US$ 90,5 mil, mantida na lista de Categoria apenas para referência).</a:t>
+              <a:t>Metodologia: soma de Custo de Serviço + Custo de Material (Jan–Dez), para itens de Cost Allocation = CAPEX com status 'Contar' ou 'TA'. O total desconsidera a categoria Desenvolvimento de Produção (sem itens para este ativo).</a:t>
             </a:r>
             <a:endParaRPr lang="en-US" sz="850" dirty="0"/>
           </a:p>
@@ -23512,7 +22379,7 @@
                 <a:ea typeface="Calibri" pitchFamily="34" charset="-122"/>
                 <a:cs typeface="Calibri" pitchFamily="34" charset="-120"/>
               </a:rPr>
-              <a:t>Fonte: Plano Integrado · aba 'Geral - Em análise' · coluna 'Valor Total' · itens de Cost Allocation = CAPEX, status 'Contar' + 'TA'. Lista completa disponível na planilha em anexo. Extrato pendente de atualização — pode não somar exatamente ao total da Composição de Custo e POB.</a:t>
+              <a:t>Fonte: Plano Integrado · aba 'Geral - Em análise' · itens de Cost Allocation = CAPEX, status 'Contar' + 'TA'. Lista completa disponível na planilha em anexo.</a:t>
             </a:r>
             <a:endParaRPr lang="en-US" sz="850" dirty="0"/>
           </a:p>
@@ -23999,7 +22866,7 @@
                 <a:ea typeface="Cambria" pitchFamily="34" charset="-122"/>
                 <a:cs typeface="Cambria" pitchFamily="34" charset="-120"/>
               </a:rPr>
-              <a:t>US$ 7,2 mi</a:t>
+              <a:t>US$ 5,9 mi</a:t>
             </a:r>
             <a:endParaRPr lang="en-US" sz="2100" dirty="0"/>
           </a:p>
@@ -24099,7 +22966,7 @@
                 <a:ea typeface="Cambria" pitchFamily="34" charset="-122"/>
                 <a:cs typeface="Cambria" pitchFamily="34" charset="-120"/>
               </a:rPr>
-              <a:t>US$ 8,0 mi</a:t>
+              <a:t>US$ 1,3 mi</a:t>
             </a:r>
             <a:endParaRPr lang="en-US" sz="2100" dirty="0"/>
           </a:p>
@@ -24199,7 +23066,7 @@
                 <a:ea typeface="Cambria" pitchFamily="34" charset="-122"/>
                 <a:cs typeface="Cambria" pitchFamily="34" charset="-120"/>
               </a:rPr>
-              <a:t>US$ 8,8 mi</a:t>
+              <a:t>US$ 7,2 mi</a:t>
             </a:r>
             <a:endParaRPr lang="en-US" sz="2100" dirty="0"/>
           </a:p>
@@ -24299,7 +23166,7 @@
                 <a:ea typeface="Cambria" pitchFamily="34" charset="-122"/>
                 <a:cs typeface="Cambria" pitchFamily="34" charset="-120"/>
               </a:rPr>
-              <a:t>5.092</a:t>
+              <a:t>182</a:t>
             </a:r>
             <a:endParaRPr lang="en-US" sz="2100" dirty="0"/>
           </a:p>
@@ -24338,7 +23205,7 @@
                 <a:ea typeface="Calibri" pitchFamily="34" charset="-122"/>
                 <a:cs typeface="Calibri" pitchFamily="34" charset="-120"/>
               </a:rPr>
-              <a:t>POB TOTAL (POB-DIA)</a:t>
+              <a:t>POB TOTAL</a:t>
             </a:r>
             <a:endParaRPr lang="en-US" sz="850" dirty="0"/>
           </a:p>
@@ -24439,143 +23306,6 @@
                 <a:ea typeface="Calibri" pitchFamily="34" charset="-122"/>
                 <a:cs typeface="Calibri" pitchFamily="34" charset="-120"/>
               </a:rPr>
-              <a:t>Projetos</a:t>
-            </a:r>
-            <a:endParaRPr lang="en-US" sz="1100" dirty="0"/>
-          </a:p>
-        </p:txBody>
-      </p:sp>
-      <p:sp>
-        <p:nvSpPr>
-          <p:cNvPr id="21" name="Text 19"/>
-          <p:cNvSpPr txBox="1"/>
-          <p:nvPr/>
-        </p:nvSpPr>
-        <p:spPr>
-          <a:xfrm>
-            <a:off x="3452774" y="2898648"/>
-            <a:ext cx="1497787" cy="365760"/>
-          </a:xfrm>
-          <a:prstGeom prst="rect">
-            <a:avLst/>
-          </a:prstGeom>
-          <a:noFill/>
-          <a:ln/>
-        </p:spPr>
-        <p:txBody>
-          <a:bodyPr wrap="square" lIns="0" tIns="0" rIns="0" bIns="0" rtlCol="0" anchor="ctr"/>
-          <a:lstStyle/>
-          <a:p>
-            <a:pPr algn="r" indent="0" marL="0">
-              <a:buNone/>
-            </a:pPr>
-            <a:r>
-              <a:rPr lang="en-US" sz="1100" b="1" dirty="0">
-                <a:solidFill>
-                  <a:srgbClr val="0B2A3D"/>
-                </a:solidFill>
-                <a:latin typeface="Calibri" pitchFamily="34" charset="0"/>
-                <a:ea typeface="Calibri" pitchFamily="34" charset="-122"/>
-                <a:cs typeface="Calibri" pitchFamily="34" charset="-120"/>
-              </a:rPr>
-              <a:t>US$ 8,3 mi</a:t>
-            </a:r>
-            <a:endParaRPr lang="en-US" sz="1100" dirty="0"/>
-          </a:p>
-        </p:txBody>
-      </p:sp>
-      <p:sp>
-        <p:nvSpPr>
-          <p:cNvPr id="22" name="Text 20"/>
-          <p:cNvSpPr txBox="1"/>
-          <p:nvPr/>
-        </p:nvSpPr>
-        <p:spPr>
-          <a:xfrm>
-            <a:off x="4840834" y="2898648"/>
-            <a:ext cx="965606" cy="365760"/>
-          </a:xfrm>
-          <a:prstGeom prst="rect">
-            <a:avLst/>
-          </a:prstGeom>
-          <a:noFill/>
-          <a:ln/>
-        </p:spPr>
-        <p:txBody>
-          <a:bodyPr wrap="square" lIns="0" tIns="0" rIns="0" bIns="0" rtlCol="0" anchor="ctr"/>
-          <a:lstStyle/>
-          <a:p>
-            <a:pPr algn="r" indent="0" marL="0">
-              <a:buNone/>
-            </a:pPr>
-            <a:r>
-              <a:rPr lang="en-US" sz="850" dirty="0">
-                <a:solidFill>
-                  <a:srgbClr val="5B6B73"/>
-                </a:solidFill>
-                <a:latin typeface="Calibri" pitchFamily="34" charset="0"/>
-                <a:ea typeface="Calibri" pitchFamily="34" charset="-122"/>
-                <a:cs typeface="Calibri" pitchFamily="34" charset="-120"/>
-              </a:rPr>
-              <a:t>1.932 POB-dia</a:t>
-            </a:r>
-            <a:endParaRPr lang="en-US" sz="850" dirty="0"/>
-          </a:p>
-        </p:txBody>
-      </p:sp>
-      <p:sp>
-        <p:nvSpPr>
-          <p:cNvPr id="23" name="Shape 21"/>
-          <p:cNvSpPr/>
-          <p:nvPr/>
-        </p:nvSpPr>
-        <p:spPr>
-          <a:xfrm>
-            <a:off x="457200" y="3264408"/>
-            <a:ext cx="5349240" cy="365760"/>
-          </a:xfrm>
-          <a:prstGeom prst="rect">
-            <a:avLst/>
-          </a:prstGeom>
-          <a:solidFill>
-            <a:srgbClr val="F0F4F5"/>
-          </a:solidFill>
-          <a:ln/>
-        </p:spPr>
-      </p:sp>
-      <p:sp>
-        <p:nvSpPr>
-          <p:cNvPr id="24" name="Text 22"/>
-          <p:cNvSpPr txBox="1"/>
-          <p:nvPr/>
-        </p:nvSpPr>
-        <p:spPr>
-          <a:xfrm>
-            <a:off x="566928" y="3264408"/>
-            <a:ext cx="2995574" cy="365760"/>
-          </a:xfrm>
-          <a:prstGeom prst="rect">
-            <a:avLst/>
-          </a:prstGeom>
-          <a:noFill/>
-          <a:ln/>
-        </p:spPr>
-        <p:txBody>
-          <a:bodyPr wrap="square" lIns="0" tIns="0" rIns="0" bIns="0" rtlCol="0" anchor="ctr"/>
-          <a:lstStyle/>
-          <a:p>
-            <a:pPr indent="0" marL="0">
-              <a:buNone/>
-            </a:pPr>
-            <a:r>
-              <a:rPr lang="en-US" sz="1100" dirty="0">
-                <a:solidFill>
-                  <a:srgbClr val="1C2B33"/>
-                </a:solidFill>
-                <a:latin typeface="Calibri" pitchFamily="34" charset="0"/>
-                <a:ea typeface="Calibri" pitchFamily="34" charset="-122"/>
-                <a:cs typeface="Calibri" pitchFamily="34" charset="-120"/>
-              </a:rPr>
               <a:t>MNT – Manutenção</a:t>
             </a:r>
             <a:endParaRPr lang="en-US" sz="1100" dirty="0"/>
@@ -24584,13 +23314,13 @@
       </p:sp>
       <p:sp>
         <p:nvSpPr>
-          <p:cNvPr id="25" name="Text 23"/>
+          <p:cNvPr id="21" name="Text 19"/>
           <p:cNvSpPr txBox="1"/>
           <p:nvPr/>
         </p:nvSpPr>
         <p:spPr>
           <a:xfrm>
-            <a:off x="3452774" y="3264408"/>
+            <a:off x="3452774" y="2898648"/>
             <a:ext cx="1497787" cy="365760"/>
           </a:xfrm>
           <a:prstGeom prst="rect">
@@ -24623,6 +23353,143 @@
       </p:sp>
       <p:sp>
         <p:nvSpPr>
+          <p:cNvPr id="22" name="Text 20"/>
+          <p:cNvSpPr txBox="1"/>
+          <p:nvPr/>
+        </p:nvSpPr>
+        <p:spPr>
+          <a:xfrm>
+            <a:off x="4840834" y="2898648"/>
+            <a:ext cx="965606" cy="365760"/>
+          </a:xfrm>
+          <a:prstGeom prst="rect">
+            <a:avLst/>
+          </a:prstGeom>
+          <a:noFill/>
+          <a:ln/>
+        </p:spPr>
+        <p:txBody>
+          <a:bodyPr wrap="square" lIns="0" tIns="0" rIns="0" bIns="0" rtlCol="0" anchor="ctr"/>
+          <a:lstStyle/>
+          <a:p>
+            <a:pPr algn="r" indent="0" marL="0">
+              <a:buNone/>
+            </a:pPr>
+            <a:r>
+              <a:rPr lang="en-US" sz="900" dirty="0">
+                <a:solidFill>
+                  <a:srgbClr val="5B6B73"/>
+                </a:solidFill>
+                <a:latin typeface="Calibri" pitchFamily="34" charset="0"/>
+                <a:ea typeface="Calibri" pitchFamily="34" charset="-122"/>
+                <a:cs typeface="Calibri" pitchFamily="34" charset="-120"/>
+              </a:rPr>
+              <a:t>20 POB</a:t>
+            </a:r>
+            <a:endParaRPr lang="en-US" sz="900" dirty="0"/>
+          </a:p>
+        </p:txBody>
+      </p:sp>
+      <p:sp>
+        <p:nvSpPr>
+          <p:cNvPr id="23" name="Shape 21"/>
+          <p:cNvSpPr/>
+          <p:nvPr/>
+        </p:nvSpPr>
+        <p:spPr>
+          <a:xfrm>
+            <a:off x="457200" y="3264408"/>
+            <a:ext cx="5349240" cy="365760"/>
+          </a:xfrm>
+          <a:prstGeom prst="rect">
+            <a:avLst/>
+          </a:prstGeom>
+          <a:solidFill>
+            <a:srgbClr val="F0F4F5"/>
+          </a:solidFill>
+          <a:ln/>
+        </p:spPr>
+      </p:sp>
+      <p:sp>
+        <p:nvSpPr>
+          <p:cNvPr id="24" name="Text 22"/>
+          <p:cNvSpPr txBox="1"/>
+          <p:nvPr/>
+        </p:nvSpPr>
+        <p:spPr>
+          <a:xfrm>
+            <a:off x="566928" y="3264408"/>
+            <a:ext cx="2995574" cy="365760"/>
+          </a:xfrm>
+          <a:prstGeom prst="rect">
+            <a:avLst/>
+          </a:prstGeom>
+          <a:noFill/>
+          <a:ln/>
+        </p:spPr>
+        <p:txBody>
+          <a:bodyPr wrap="square" lIns="0" tIns="0" rIns="0" bIns="0" rtlCol="0" anchor="ctr"/>
+          <a:lstStyle/>
+          <a:p>
+            <a:pPr indent="0" marL="0">
+              <a:buNone/>
+            </a:pPr>
+            <a:r>
+              <a:rPr lang="en-US" sz="1100" dirty="0">
+                <a:solidFill>
+                  <a:srgbClr val="1C2B33"/>
+                </a:solidFill>
+                <a:latin typeface="Calibri" pitchFamily="34" charset="0"/>
+                <a:ea typeface="Calibri" pitchFamily="34" charset="-122"/>
+                <a:cs typeface="Calibri" pitchFamily="34" charset="-120"/>
+              </a:rPr>
+              <a:t>Projetos</a:t>
+            </a:r>
+            <a:endParaRPr lang="en-US" sz="1100" dirty="0"/>
+          </a:p>
+        </p:txBody>
+      </p:sp>
+      <p:sp>
+        <p:nvSpPr>
+          <p:cNvPr id="25" name="Text 23"/>
+          <p:cNvSpPr txBox="1"/>
+          <p:nvPr/>
+        </p:nvSpPr>
+        <p:spPr>
+          <a:xfrm>
+            <a:off x="3452774" y="3264408"/>
+            <a:ext cx="1497787" cy="365760"/>
+          </a:xfrm>
+          <a:prstGeom prst="rect">
+            <a:avLst/>
+          </a:prstGeom>
+          <a:noFill/>
+          <a:ln/>
+        </p:spPr>
+        <p:txBody>
+          <a:bodyPr wrap="square" lIns="0" tIns="0" rIns="0" bIns="0" rtlCol="0" anchor="ctr"/>
+          <a:lstStyle/>
+          <a:p>
+            <a:pPr algn="r" indent="0" marL="0">
+              <a:buNone/>
+            </a:pPr>
+            <a:r>
+              <a:rPr lang="en-US" sz="1100" b="1" dirty="0">
+                <a:solidFill>
+                  <a:srgbClr val="0B2A3D"/>
+                </a:solidFill>
+                <a:latin typeface="Calibri" pitchFamily="34" charset="0"/>
+                <a:ea typeface="Calibri" pitchFamily="34" charset="-122"/>
+                <a:cs typeface="Calibri" pitchFamily="34" charset="-120"/>
+              </a:rPr>
+              <a:t>US$ 2,2 mi</a:t>
+            </a:r>
+            <a:endParaRPr lang="en-US" sz="1100" dirty="0"/>
+          </a:p>
+        </p:txBody>
+      </p:sp>
+      <p:sp>
+        <p:nvSpPr>
           <p:cNvPr id="26" name="Text 24"/>
           <p:cNvSpPr txBox="1"/>
           <p:nvPr/>
@@ -24646,7 +23513,7 @@
               <a:buNone/>
             </a:pPr>
             <a:r>
-              <a:rPr lang="en-US" sz="850" dirty="0">
+              <a:rPr lang="en-US" sz="900" dirty="0">
                 <a:solidFill>
                   <a:srgbClr val="5B6B73"/>
                 </a:solidFill>
@@ -24654,9 +23521,9 @@
                 <a:ea typeface="Calibri" pitchFamily="34" charset="-122"/>
                 <a:cs typeface="Calibri" pitchFamily="34" charset="-120"/>
               </a:rPr>
-              <a:t>700 POB-dia</a:t>
+              <a:t>54 POB</a:t>
             </a:r>
-            <a:endParaRPr lang="en-US" sz="850" dirty="0"/>
+            <a:endParaRPr lang="en-US" sz="900" dirty="0"/>
           </a:p>
         </p:txBody>
       </p:sp>
@@ -24732,7 +23599,7 @@
                 <a:ea typeface="Calibri" pitchFamily="34" charset="-122"/>
                 <a:cs typeface="Calibri" pitchFamily="34" charset="-120"/>
               </a:rPr>
-              <a:t>US$ 2,5 mi</a:t>
+              <a:t>US$ 897,7 mil</a:t>
             </a:r>
             <a:endParaRPr lang="en-US" sz="1100" dirty="0"/>
           </a:p>
@@ -24763,7 +23630,7 @@
               <a:buNone/>
             </a:pPr>
             <a:r>
-              <a:rPr lang="en-US" sz="850" dirty="0">
+              <a:rPr lang="en-US" sz="900" dirty="0">
                 <a:solidFill>
                   <a:srgbClr val="5B6B73"/>
                 </a:solidFill>
@@ -24771,9 +23638,9 @@
                 <a:ea typeface="Calibri" pitchFamily="34" charset="-122"/>
                 <a:cs typeface="Calibri" pitchFamily="34" charset="-120"/>
               </a:rPr>
-              <a:t>2.280 POB-dia</a:t>
+              <a:t>101 POB</a:t>
             </a:r>
-            <a:endParaRPr lang="en-US" sz="850" dirty="0"/>
+            <a:endParaRPr lang="en-US" sz="900" dirty="0"/>
           </a:p>
         </p:txBody>
       </p:sp>
@@ -24900,7 +23767,7 @@
               <a:buNone/>
             </a:pPr>
             <a:r>
-              <a:rPr lang="en-US" sz="850" dirty="0">
+              <a:rPr lang="en-US" sz="900" dirty="0">
                 <a:solidFill>
                   <a:srgbClr val="5B6B73"/>
                 </a:solidFill>
@@ -24908,9 +23775,9 @@
                 <a:ea typeface="Calibri" pitchFamily="34" charset="-122"/>
                 <a:cs typeface="Calibri" pitchFamily="34" charset="-120"/>
               </a:rPr>
-              <a:t>150 POB-dia</a:t>
+              <a:t>5 POB</a:t>
             </a:r>
-            <a:endParaRPr lang="en-US" sz="850" dirty="0"/>
+            <a:endParaRPr lang="en-US" sz="900" dirty="0"/>
           </a:p>
         </p:txBody>
       </p:sp>
@@ -24923,143 +23790,6 @@
         <p:spPr>
           <a:xfrm>
             <a:off x="566928" y="4361688"/>
-            <a:ext cx="2995574" cy="365760"/>
-          </a:xfrm>
-          <a:prstGeom prst="rect">
-            <a:avLst/>
-          </a:prstGeom>
-          <a:noFill/>
-          <a:ln/>
-        </p:spPr>
-        <p:txBody>
-          <a:bodyPr wrap="square" lIns="0" tIns="0" rIns="0" bIns="0" rtlCol="0" anchor="ctr"/>
-          <a:lstStyle/>
-          <a:p>
-            <a:pPr indent="0" marL="0">
-              <a:buNone/>
-            </a:pPr>
-            <a:r>
-              <a:rPr lang="en-US" sz="1100" dirty="0">
-                <a:solidFill>
-                  <a:srgbClr val="1C2B33"/>
-                </a:solidFill>
-                <a:latin typeface="Calibri" pitchFamily="34" charset="0"/>
-                <a:ea typeface="Calibri" pitchFamily="34" charset="-122"/>
-                <a:cs typeface="Calibri" pitchFamily="34" charset="-120"/>
-              </a:rPr>
-              <a:t>P&amp;Q - Processos</a:t>
-            </a:r>
-            <a:endParaRPr lang="en-US" sz="1100" dirty="0"/>
-          </a:p>
-        </p:txBody>
-      </p:sp>
-      <p:sp>
-        <p:nvSpPr>
-          <p:cNvPr id="35" name="Text 33"/>
-          <p:cNvSpPr txBox="1"/>
-          <p:nvPr/>
-        </p:nvSpPr>
-        <p:spPr>
-          <a:xfrm>
-            <a:off x="3452774" y="4361688"/>
-            <a:ext cx="1497787" cy="365760"/>
-          </a:xfrm>
-          <a:prstGeom prst="rect">
-            <a:avLst/>
-          </a:prstGeom>
-          <a:noFill/>
-          <a:ln/>
-        </p:spPr>
-        <p:txBody>
-          <a:bodyPr wrap="square" lIns="0" tIns="0" rIns="0" bIns="0" rtlCol="0" anchor="ctr"/>
-          <a:lstStyle/>
-          <a:p>
-            <a:pPr algn="r" indent="0" marL="0">
-              <a:buNone/>
-            </a:pPr>
-            <a:r>
-              <a:rPr lang="en-US" sz="1100" b="1" dirty="0">
-                <a:solidFill>
-                  <a:srgbClr val="0B2A3D"/>
-                </a:solidFill>
-                <a:latin typeface="Calibri" pitchFamily="34" charset="0"/>
-                <a:ea typeface="Calibri" pitchFamily="34" charset="-122"/>
-                <a:cs typeface="Calibri" pitchFamily="34" charset="-120"/>
-              </a:rPr>
-              <a:t>US$ 150,5 mil</a:t>
-            </a:r>
-            <a:endParaRPr lang="en-US" sz="1100" dirty="0"/>
-          </a:p>
-        </p:txBody>
-      </p:sp>
-      <p:sp>
-        <p:nvSpPr>
-          <p:cNvPr id="36" name="Text 34"/>
-          <p:cNvSpPr txBox="1"/>
-          <p:nvPr/>
-        </p:nvSpPr>
-        <p:spPr>
-          <a:xfrm>
-            <a:off x="4840834" y="4361688"/>
-            <a:ext cx="965606" cy="365760"/>
-          </a:xfrm>
-          <a:prstGeom prst="rect">
-            <a:avLst/>
-          </a:prstGeom>
-          <a:noFill/>
-          <a:ln/>
-        </p:spPr>
-        <p:txBody>
-          <a:bodyPr wrap="square" lIns="0" tIns="0" rIns="0" bIns="0" rtlCol="0" anchor="ctr"/>
-          <a:lstStyle/>
-          <a:p>
-            <a:pPr algn="r" indent="0" marL="0">
-              <a:buNone/>
-            </a:pPr>
-            <a:r>
-              <a:rPr lang="en-US" sz="850" dirty="0">
-                <a:solidFill>
-                  <a:srgbClr val="5B6B73"/>
-                </a:solidFill>
-                <a:latin typeface="Calibri" pitchFamily="34" charset="0"/>
-                <a:ea typeface="Calibri" pitchFamily="34" charset="-122"/>
-                <a:cs typeface="Calibri" pitchFamily="34" charset="-120"/>
-              </a:rPr>
-              <a:t>14 POB-dia</a:t>
-            </a:r>
-            <a:endParaRPr lang="en-US" sz="850" dirty="0"/>
-          </a:p>
-        </p:txBody>
-      </p:sp>
-      <p:sp>
-        <p:nvSpPr>
-          <p:cNvPr id="37" name="Shape 35"/>
-          <p:cNvSpPr/>
-          <p:nvPr/>
-        </p:nvSpPr>
-        <p:spPr>
-          <a:xfrm>
-            <a:off x="457200" y="4727448"/>
-            <a:ext cx="5349240" cy="365760"/>
-          </a:xfrm>
-          <a:prstGeom prst="rect">
-            <a:avLst/>
-          </a:prstGeom>
-          <a:solidFill>
-            <a:srgbClr val="F0F4F5"/>
-          </a:solidFill>
-          <a:ln/>
-        </p:spPr>
-      </p:sp>
-      <p:sp>
-        <p:nvSpPr>
-          <p:cNvPr id="38" name="Text 36"/>
-          <p:cNvSpPr txBox="1"/>
-          <p:nvPr/>
-        </p:nvSpPr>
-        <p:spPr>
-          <a:xfrm>
-            <a:off x="566928" y="4727448"/>
             <a:ext cx="2995574" cy="365760"/>
           </a:xfrm>
           <a:prstGeom prst="rect">
@@ -25092,13 +23822,13 @@
       </p:sp>
       <p:sp>
         <p:nvSpPr>
-          <p:cNvPr id="39" name="Text 37"/>
+          <p:cNvPr id="35" name="Text 33"/>
           <p:cNvSpPr txBox="1"/>
           <p:nvPr/>
         </p:nvSpPr>
         <p:spPr>
           <a:xfrm>
-            <a:off x="3452774" y="4727448"/>
+            <a:off x="3452774" y="4361688"/>
             <a:ext cx="1497787" cy="365760"/>
           </a:xfrm>
           <a:prstGeom prst="rect">
@@ -25123,7 +23853,7 @@
                 <a:ea typeface="Calibri" pitchFamily="34" charset="-122"/>
                 <a:cs typeface="Calibri" pitchFamily="34" charset="-120"/>
               </a:rPr>
-              <a:t>US$ 40,0 mil</a:t>
+              <a:t>US$ 30,0 mil</a:t>
             </a:r>
             <a:endParaRPr lang="en-US" sz="1100" dirty="0"/>
           </a:p>
@@ -25131,13 +23861,13 @@
       </p:sp>
       <p:sp>
         <p:nvSpPr>
-          <p:cNvPr id="40" name="Text 38"/>
+          <p:cNvPr id="36" name="Text 34"/>
           <p:cNvSpPr txBox="1"/>
           <p:nvPr/>
         </p:nvSpPr>
         <p:spPr>
           <a:xfrm>
-            <a:off x="4840834" y="4727448"/>
+            <a:off x="4840834" y="4361688"/>
             <a:ext cx="965606" cy="365760"/>
           </a:xfrm>
           <a:prstGeom prst="rect">
@@ -25154,7 +23884,7 @@
               <a:buNone/>
             </a:pPr>
             <a:r>
-              <a:rPr lang="en-US" sz="850" dirty="0">
+              <a:rPr lang="en-US" sz="900" dirty="0">
                 <a:solidFill>
                   <a:srgbClr val="5B6B73"/>
                 </a:solidFill>
@@ -25162,21 +23892,41 @@
                 <a:ea typeface="Calibri" pitchFamily="34" charset="-122"/>
                 <a:cs typeface="Calibri" pitchFamily="34" charset="-120"/>
               </a:rPr>
-              <a:t>16 POB-dia</a:t>
+              <a:t>2 POB</a:t>
             </a:r>
-            <a:endParaRPr lang="en-US" sz="850" dirty="0"/>
+            <a:endParaRPr lang="en-US" sz="900" dirty="0"/>
           </a:p>
         </p:txBody>
       </p:sp>
       <p:sp>
         <p:nvSpPr>
-          <p:cNvPr id="41" name="Text 39"/>
+          <p:cNvPr id="37" name="Shape 35"/>
+          <p:cNvSpPr/>
+          <p:nvPr/>
+        </p:nvSpPr>
+        <p:spPr>
+          <a:xfrm>
+            <a:off x="457200" y="4727448"/>
+            <a:ext cx="5349240" cy="365760"/>
+          </a:xfrm>
+          <a:prstGeom prst="rect">
+            <a:avLst/>
+          </a:prstGeom>
+          <a:solidFill>
+            <a:srgbClr val="F0F4F5"/>
+          </a:solidFill>
+          <a:ln/>
+        </p:spPr>
+      </p:sp>
+      <p:sp>
+        <p:nvSpPr>
+          <p:cNvPr id="38" name="Text 36"/>
           <p:cNvSpPr txBox="1"/>
           <p:nvPr/>
         </p:nvSpPr>
         <p:spPr>
           <a:xfrm>
-            <a:off x="566928" y="5093208"/>
+            <a:off x="566928" y="4727448"/>
             <a:ext cx="2995574" cy="365760"/>
           </a:xfrm>
           <a:prstGeom prst="rect">
@@ -25209,13 +23959,13 @@
       </p:sp>
       <p:sp>
         <p:nvSpPr>
-          <p:cNvPr id="42" name="Text 40"/>
+          <p:cNvPr id="39" name="Text 37"/>
           <p:cNvSpPr txBox="1"/>
           <p:nvPr/>
         </p:nvSpPr>
         <p:spPr>
           <a:xfrm>
-            <a:off x="3452774" y="5093208"/>
+            <a:off x="3452774" y="4727448"/>
             <a:ext cx="1497787" cy="365760"/>
           </a:xfrm>
           <a:prstGeom prst="rect">
@@ -25248,13 +23998,13 @@
       </p:sp>
       <p:sp>
         <p:nvSpPr>
-          <p:cNvPr id="43" name="Text 41"/>
+          <p:cNvPr id="40" name="Text 38"/>
           <p:cNvSpPr txBox="1"/>
           <p:nvPr/>
         </p:nvSpPr>
         <p:spPr>
           <a:xfrm>
-            <a:off x="4840834" y="5093208"/>
+            <a:off x="4840834" y="4727448"/>
             <a:ext cx="965606" cy="365760"/>
           </a:xfrm>
           <a:prstGeom prst="rect">
@@ -25271,7 +24021,7 @@
               <a:buNone/>
             </a:pPr>
             <a:r>
-              <a:rPr lang="en-US" sz="850" dirty="0">
+              <a:rPr lang="en-US" sz="900" dirty="0">
                 <a:solidFill>
                   <a:srgbClr val="5B6B73"/>
                 </a:solidFill>
@@ -25279,15 +24029,15 @@
                 <a:ea typeface="Calibri" pitchFamily="34" charset="-122"/>
                 <a:cs typeface="Calibri" pitchFamily="34" charset="-120"/>
               </a:rPr>
-              <a:t>0 POB-dia</a:t>
+              <a:t>0 POB</a:t>
             </a:r>
-            <a:endParaRPr lang="en-US" sz="850" dirty="0"/>
+            <a:endParaRPr lang="en-US" sz="900" dirty="0"/>
           </a:p>
         </p:txBody>
       </p:sp>
       <p:sp>
         <p:nvSpPr>
-          <p:cNvPr id="44" name="Text 42"/>
+          <p:cNvPr id="41" name="Text 39"/>
           <p:cNvSpPr txBox="1"/>
           <p:nvPr/>
         </p:nvSpPr>
@@ -25326,7 +24076,7 @@
       </p:sp>
       <p:sp>
         <p:nvSpPr>
-          <p:cNvPr id="45" name="Shape 43"/>
+          <p:cNvPr id="42" name="Shape 40"/>
           <p:cNvSpPr/>
           <p:nvPr/>
         </p:nvSpPr>
@@ -25349,7 +24099,7 @@
       </p:sp>
       <p:sp>
         <p:nvSpPr>
-          <p:cNvPr id="46" name="Text 44"/>
+          <p:cNvPr id="43" name="Text 41"/>
           <p:cNvSpPr txBox="1"/>
           <p:nvPr/>
         </p:nvSpPr>
@@ -25380,7 +24130,7 @@
                 <a:ea typeface="Calibri" pitchFamily="34" charset="-122"/>
                 <a:cs typeface="Calibri" pitchFamily="34" charset="-120"/>
               </a:rPr>
-              <a:t>Desenvolvimento de Produção</a:t>
+              <a:t>Integridade e Regulatório</a:t>
             </a:r>
             <a:endParaRPr lang="en-US" sz="1100" dirty="0"/>
           </a:p>
@@ -25388,7 +24138,7 @@
       </p:sp>
       <p:sp>
         <p:nvSpPr>
-          <p:cNvPr id="47" name="Text 45"/>
+          <p:cNvPr id="44" name="Text 42"/>
           <p:cNvSpPr txBox="1"/>
           <p:nvPr/>
         </p:nvSpPr>
@@ -25419,7 +24169,7 @@
                 <a:ea typeface="Calibri" pitchFamily="34" charset="-122"/>
                 <a:cs typeface="Calibri" pitchFamily="34" charset="-120"/>
               </a:rPr>
-              <a:t>US$ 6,3 mi</a:t>
+              <a:t>US$ 3,5 mi</a:t>
             </a:r>
             <a:endParaRPr lang="en-US" sz="1100" dirty="0"/>
           </a:p>
@@ -25427,7 +24177,7 @@
       </p:sp>
       <p:sp>
         <p:nvSpPr>
-          <p:cNvPr id="48" name="Text 46"/>
+          <p:cNvPr id="45" name="Text 43"/>
           <p:cNvSpPr txBox="1"/>
           <p:nvPr/>
         </p:nvSpPr>
@@ -25450,7 +24200,7 @@
               <a:buNone/>
             </a:pPr>
             <a:r>
-              <a:rPr lang="en-US" sz="850" dirty="0">
+              <a:rPr lang="en-US" sz="900" dirty="0">
                 <a:solidFill>
                   <a:srgbClr val="5B6B73"/>
                 </a:solidFill>
@@ -25458,15 +24208,15 @@
                 <a:ea typeface="Calibri" pitchFamily="34" charset="-122"/>
                 <a:cs typeface="Calibri" pitchFamily="34" charset="-120"/>
               </a:rPr>
-              <a:t>990 POB-dia</a:t>
+              <a:t>20 POB</a:t>
             </a:r>
-            <a:endParaRPr lang="en-US" sz="850" dirty="0"/>
+            <a:endParaRPr lang="en-US" sz="900" dirty="0"/>
           </a:p>
         </p:txBody>
       </p:sp>
       <p:sp>
         <p:nvSpPr>
-          <p:cNvPr id="49" name="Shape 47"/>
+          <p:cNvPr id="46" name="Shape 44"/>
           <p:cNvSpPr/>
           <p:nvPr/>
         </p:nvSpPr>
@@ -25486,7 +24236,7 @@
       </p:sp>
       <p:sp>
         <p:nvSpPr>
-          <p:cNvPr id="50" name="Text 48"/>
+          <p:cNvPr id="47" name="Text 45"/>
           <p:cNvSpPr txBox="1"/>
           <p:nvPr/>
         </p:nvSpPr>
@@ -25525,7 +24275,7 @@
       </p:sp>
       <p:sp>
         <p:nvSpPr>
-          <p:cNvPr id="51" name="Text 49"/>
+          <p:cNvPr id="48" name="Text 46"/>
           <p:cNvSpPr txBox="1"/>
           <p:nvPr/>
         </p:nvSpPr>
@@ -25556,7 +24306,7 @@
                 <a:ea typeface="Calibri" pitchFamily="34" charset="-122"/>
                 <a:cs typeface="Calibri" pitchFamily="34" charset="-120"/>
               </a:rPr>
-              <a:t>US$ 3,7 mi</a:t>
+              <a:t>US$ 2,1 mi</a:t>
             </a:r>
             <a:endParaRPr lang="en-US" sz="1100" dirty="0"/>
           </a:p>
@@ -25564,7 +24314,7 @@
       </p:sp>
       <p:sp>
         <p:nvSpPr>
-          <p:cNvPr id="52" name="Text 50"/>
+          <p:cNvPr id="49" name="Text 47"/>
           <p:cNvSpPr txBox="1"/>
           <p:nvPr/>
         </p:nvSpPr>
@@ -25587,7 +24337,7 @@
               <a:buNone/>
             </a:pPr>
             <a:r>
-              <a:rPr lang="en-US" sz="850" dirty="0">
+              <a:rPr lang="en-US" sz="900" dirty="0">
                 <a:solidFill>
                   <a:srgbClr val="5B6B73"/>
                 </a:solidFill>
@@ -25595,158 +24345,21 @@
                 <a:ea typeface="Calibri" pitchFamily="34" charset="-122"/>
                 <a:cs typeface="Calibri" pitchFamily="34" charset="-120"/>
               </a:rPr>
-              <a:t>2.860 POB-dia</a:t>
+              <a:t>132 POB</a:t>
             </a:r>
-            <a:endParaRPr lang="en-US" sz="850" dirty="0"/>
+            <a:endParaRPr lang="en-US" sz="900" dirty="0"/>
           </a:p>
         </p:txBody>
       </p:sp>
       <p:sp>
         <p:nvSpPr>
-          <p:cNvPr id="53" name="Text 51"/>
+          <p:cNvPr id="50" name="Text 48"/>
           <p:cNvSpPr txBox="1"/>
           <p:nvPr/>
         </p:nvSpPr>
         <p:spPr>
           <a:xfrm>
             <a:off x="6464808" y="3630168"/>
-            <a:ext cx="2995574" cy="365760"/>
-          </a:xfrm>
-          <a:prstGeom prst="rect">
-            <a:avLst/>
-          </a:prstGeom>
-          <a:noFill/>
-          <a:ln/>
-        </p:spPr>
-        <p:txBody>
-          <a:bodyPr wrap="square" lIns="0" tIns="0" rIns="0" bIns="0" rtlCol="0" anchor="ctr"/>
-          <a:lstStyle/>
-          <a:p>
-            <a:pPr indent="0" marL="0">
-              <a:buNone/>
-            </a:pPr>
-            <a:r>
-              <a:rPr lang="en-US" sz="1100" dirty="0">
-                <a:solidFill>
-                  <a:srgbClr val="1C2B33"/>
-                </a:solidFill>
-                <a:latin typeface="Calibri" pitchFamily="34" charset="0"/>
-                <a:ea typeface="Calibri" pitchFamily="34" charset="-122"/>
-                <a:cs typeface="Calibri" pitchFamily="34" charset="-120"/>
-              </a:rPr>
-              <a:t>Integridade e Regulatório</a:t>
-            </a:r>
-            <a:endParaRPr lang="en-US" sz="1100" dirty="0"/>
-          </a:p>
-        </p:txBody>
-      </p:sp>
-      <p:sp>
-        <p:nvSpPr>
-          <p:cNvPr id="54" name="Text 52"/>
-          <p:cNvSpPr txBox="1"/>
-          <p:nvPr/>
-        </p:nvSpPr>
-        <p:spPr>
-          <a:xfrm>
-            <a:off x="9350654" y="3630168"/>
-            <a:ext cx="1497787" cy="365760"/>
-          </a:xfrm>
-          <a:prstGeom prst="rect">
-            <a:avLst/>
-          </a:prstGeom>
-          <a:noFill/>
-          <a:ln/>
-        </p:spPr>
-        <p:txBody>
-          <a:bodyPr wrap="square" lIns="0" tIns="0" rIns="0" bIns="0" rtlCol="0" anchor="ctr"/>
-          <a:lstStyle/>
-          <a:p>
-            <a:pPr algn="r" indent="0" marL="0">
-              <a:buNone/>
-            </a:pPr>
-            <a:r>
-              <a:rPr lang="en-US" sz="1100" b="1" dirty="0">
-                <a:solidFill>
-                  <a:srgbClr val="0B2A3D"/>
-                </a:solidFill>
-                <a:latin typeface="Calibri" pitchFamily="34" charset="0"/>
-                <a:ea typeface="Calibri" pitchFamily="34" charset="-122"/>
-                <a:cs typeface="Calibri" pitchFamily="34" charset="-120"/>
-              </a:rPr>
-              <a:t>US$ 3,5 mi</a:t>
-            </a:r>
-            <a:endParaRPr lang="en-US" sz="1100" dirty="0"/>
-          </a:p>
-        </p:txBody>
-      </p:sp>
-      <p:sp>
-        <p:nvSpPr>
-          <p:cNvPr id="55" name="Text 53"/>
-          <p:cNvSpPr txBox="1"/>
-          <p:nvPr/>
-        </p:nvSpPr>
-        <p:spPr>
-          <a:xfrm>
-            <a:off x="10738714" y="3630168"/>
-            <a:ext cx="965606" cy="365760"/>
-          </a:xfrm>
-          <a:prstGeom prst="rect">
-            <a:avLst/>
-          </a:prstGeom>
-          <a:noFill/>
-          <a:ln/>
-        </p:spPr>
-        <p:txBody>
-          <a:bodyPr wrap="square" lIns="0" tIns="0" rIns="0" bIns="0" rtlCol="0" anchor="ctr"/>
-          <a:lstStyle/>
-          <a:p>
-            <a:pPr algn="r" indent="0" marL="0">
-              <a:buNone/>
-            </a:pPr>
-            <a:r>
-              <a:rPr lang="en-US" sz="850" dirty="0">
-                <a:solidFill>
-                  <a:srgbClr val="5B6B73"/>
-                </a:solidFill>
-                <a:latin typeface="Calibri" pitchFamily="34" charset="0"/>
-                <a:ea typeface="Calibri" pitchFamily="34" charset="-122"/>
-                <a:cs typeface="Calibri" pitchFamily="34" charset="-120"/>
-              </a:rPr>
-              <a:t>700 POB-dia</a:t>
-            </a:r>
-            <a:endParaRPr lang="en-US" sz="850" dirty="0"/>
-          </a:p>
-        </p:txBody>
-      </p:sp>
-      <p:sp>
-        <p:nvSpPr>
-          <p:cNvPr id="56" name="Shape 54"/>
-          <p:cNvSpPr/>
-          <p:nvPr/>
-        </p:nvSpPr>
-        <p:spPr>
-          <a:xfrm>
-            <a:off x="6355080" y="3995928"/>
-            <a:ext cx="5349240" cy="365760"/>
-          </a:xfrm>
-          <a:prstGeom prst="rect">
-            <a:avLst/>
-          </a:prstGeom>
-          <a:solidFill>
-            <a:srgbClr val="F0F4F5"/>
-          </a:solidFill>
-          <a:ln/>
-        </p:spPr>
-      </p:sp>
-      <p:sp>
-        <p:nvSpPr>
-          <p:cNvPr id="57" name="Text 55"/>
-          <p:cNvSpPr txBox="1"/>
-          <p:nvPr/>
-        </p:nvSpPr>
-        <p:spPr>
-          <a:xfrm>
-            <a:off x="6464808" y="3995928"/>
             <a:ext cx="2995574" cy="365760"/>
           </a:xfrm>
           <a:prstGeom prst="rect">
@@ -25779,13 +24392,13 @@
       </p:sp>
       <p:sp>
         <p:nvSpPr>
-          <p:cNvPr id="58" name="Text 56"/>
+          <p:cNvPr id="51" name="Text 49"/>
           <p:cNvSpPr txBox="1"/>
           <p:nvPr/>
         </p:nvSpPr>
         <p:spPr>
           <a:xfrm>
-            <a:off x="9350654" y="3995928"/>
+            <a:off x="9350654" y="3630168"/>
             <a:ext cx="1497787" cy="365760"/>
           </a:xfrm>
           <a:prstGeom prst="rect">
@@ -25818,13 +24431,13 @@
       </p:sp>
       <p:sp>
         <p:nvSpPr>
-          <p:cNvPr id="59" name="Text 57"/>
+          <p:cNvPr id="52" name="Text 50"/>
           <p:cNvSpPr txBox="1"/>
           <p:nvPr/>
         </p:nvSpPr>
         <p:spPr>
           <a:xfrm>
-            <a:off x="10738714" y="3995928"/>
+            <a:off x="10738714" y="3630168"/>
             <a:ext cx="965606" cy="365760"/>
           </a:xfrm>
           <a:prstGeom prst="rect">
@@ -25841,7 +24454,7 @@
               <a:buNone/>
             </a:pPr>
             <a:r>
-              <a:rPr lang="en-US" sz="850" dirty="0">
+              <a:rPr lang="en-US" sz="900" dirty="0">
                 <a:solidFill>
                   <a:srgbClr val="5B6B73"/>
                 </a:solidFill>
@@ -25849,21 +24462,41 @@
                 <a:ea typeface="Calibri" pitchFamily="34" charset="-122"/>
                 <a:cs typeface="Calibri" pitchFamily="34" charset="-120"/>
               </a:rPr>
-              <a:t>116 POB-dia</a:t>
+              <a:t>12 POB</a:t>
             </a:r>
-            <a:endParaRPr lang="en-US" sz="850" dirty="0"/>
+            <a:endParaRPr lang="en-US" sz="900" dirty="0"/>
           </a:p>
         </p:txBody>
       </p:sp>
       <p:sp>
         <p:nvSpPr>
-          <p:cNvPr id="60" name="Text 58"/>
+          <p:cNvPr id="53" name="Shape 51"/>
+          <p:cNvSpPr/>
+          <p:nvPr/>
+        </p:nvSpPr>
+        <p:spPr>
+          <a:xfrm>
+            <a:off x="6355080" y="3995928"/>
+            <a:ext cx="5349240" cy="365760"/>
+          </a:xfrm>
+          <a:prstGeom prst="rect">
+            <a:avLst/>
+          </a:prstGeom>
+          <a:solidFill>
+            <a:srgbClr val="F0F4F5"/>
+          </a:solidFill>
+          <a:ln/>
+        </p:spPr>
+      </p:sp>
+      <p:sp>
+        <p:nvSpPr>
+          <p:cNvPr id="54" name="Text 52"/>
           <p:cNvSpPr txBox="1"/>
           <p:nvPr/>
         </p:nvSpPr>
         <p:spPr>
           <a:xfrm>
-            <a:off x="6464808" y="4361688"/>
+            <a:off x="6464808" y="3995928"/>
             <a:ext cx="2995574" cy="365760"/>
           </a:xfrm>
           <a:prstGeom prst="rect">
@@ -25896,13 +24529,13 @@
       </p:sp>
       <p:sp>
         <p:nvSpPr>
-          <p:cNvPr id="61" name="Text 59"/>
+          <p:cNvPr id="55" name="Text 53"/>
           <p:cNvSpPr txBox="1"/>
           <p:nvPr/>
         </p:nvSpPr>
         <p:spPr>
           <a:xfrm>
-            <a:off x="9350654" y="4361688"/>
+            <a:off x="9350654" y="3995928"/>
             <a:ext cx="1497787" cy="365760"/>
           </a:xfrm>
           <a:prstGeom prst="rect">
@@ -25927,7 +24560,7 @@
                 <a:ea typeface="Calibri" pitchFamily="34" charset="-122"/>
                 <a:cs typeface="Calibri" pitchFamily="34" charset="-120"/>
               </a:rPr>
-              <a:t>US$ 475,5 mil</a:t>
+              <a:t>US$ 465,5 mil</a:t>
             </a:r>
             <a:endParaRPr lang="en-US" sz="1100" dirty="0"/>
           </a:p>
@@ -25935,13 +24568,13 @@
       </p:sp>
       <p:sp>
         <p:nvSpPr>
-          <p:cNvPr id="62" name="Text 60"/>
+          <p:cNvPr id="56" name="Text 54"/>
           <p:cNvSpPr txBox="1"/>
           <p:nvPr/>
         </p:nvSpPr>
         <p:spPr>
           <a:xfrm>
-            <a:off x="10738714" y="4361688"/>
+            <a:off x="10738714" y="3995928"/>
             <a:ext cx="965606" cy="365760"/>
           </a:xfrm>
           <a:prstGeom prst="rect">
@@ -25958,7 +24591,7 @@
               <a:buNone/>
             </a:pPr>
             <a:r>
-              <a:rPr lang="en-US" sz="850" dirty="0">
+              <a:rPr lang="en-US" sz="900" dirty="0">
                 <a:solidFill>
                   <a:srgbClr val="5B6B73"/>
                 </a:solidFill>
@@ -25966,15 +24599,15 @@
                 <a:ea typeface="Calibri" pitchFamily="34" charset="-122"/>
                 <a:cs typeface="Calibri" pitchFamily="34" charset="-120"/>
               </a:rPr>
-              <a:t>426 POB-dia</a:t>
+              <a:t>18 POB</a:t>
             </a:r>
-            <a:endParaRPr lang="en-US" sz="850" dirty="0"/>
+            <a:endParaRPr lang="en-US" sz="900" dirty="0"/>
           </a:p>
         </p:txBody>
       </p:sp>
       <p:sp>
         <p:nvSpPr>
-          <p:cNvPr id="63" name="Text 61"/>
+          <p:cNvPr id="57" name="Text 55"/>
           <p:cNvSpPr txBox="1"/>
           <p:nvPr/>
         </p:nvSpPr>
@@ -26005,7 +24638,7 @@
                 <a:ea typeface="Calibri" pitchFamily="34" charset="-122"/>
                 <a:cs typeface="Calibri" pitchFamily="34" charset="-120"/>
               </a:rPr>
-              <a:t>Metodologia: soma de Custo de Serviço + Custo de Material (Jan–Dez), para itens de Cost Allocation = CAPEX com status 'Contar' ou 'TA'. POB em POB-dia (pessoas a bordo × dias). O total desconsidera a categoria Desenvolvimento de Produção (US$ 6,3 mi, mantida na lista de Categoria apenas para referência).</a:t>
+              <a:t>Metodologia: soma de Custo de Serviço + Custo de Material (Jan–Dez), para itens de Cost Allocation = CAPEX com status 'Contar' ou 'TA'. O total desconsidera a categoria Desenvolvimento de Produção (sem itens para este ativo).</a:t>
             </a:r>
             <a:endParaRPr lang="en-US" sz="850" dirty="0"/>
           </a:p>
@@ -29944,7 +28577,7 @@
                 <a:ea typeface="Calibri" pitchFamily="34" charset="-122"/>
                 <a:cs typeface="Calibri" pitchFamily="34" charset="-120"/>
               </a:rPr>
-              <a:t>Fonte: Plano Integrado · aba 'Geral - Em análise' · coluna 'Valor Total' · itens de Cost Allocation = CAPEX, status 'Contar' + 'TA'. Lista completa disponível na planilha em anexo. Extrato pendente de atualização — pode não somar exatamente ao total da Composição de Custo e POB.</a:t>
+              <a:t>Fonte: Plano Integrado · aba 'Geral - Em análise' · itens de Cost Allocation = CAPEX, status 'Contar' + 'TA'. Lista completa disponível na planilha em anexo.</a:t>
             </a:r>
             <a:endParaRPr lang="en-US" sz="850" dirty="0"/>
           </a:p>

--- a/PRIO_Plano_Trabalho_CAPEX_2027.pptx
+++ b/PRIO_Plano_Trabalho_CAPEX_2027.pptx
@@ -250,16 +250,16 @@
                 <c:formatCode>General</c:formatCode>
                 <c:ptCount val="4"/>
                 <c:pt idx="0">
-                  <c:v>15.98</c:v>
+                  <c:v>18.12</c:v>
                 </c:pt>
                 <c:pt idx="1">
-                  <c:v>7.19</c:v>
+                  <c:v>8.79</c:v>
                 </c:pt>
                 <c:pt idx="2">
-                  <c:v>2.91</c:v>
+                  <c:v>3.45</c:v>
                 </c:pt>
                 <c:pt idx="3">
-                  <c:v>3.44</c:v>
+                  <c:v>4.45</c:v>
                 </c:pt>
               </c:numCache>
             </c:numRef>
@@ -2713,7 +2713,7 @@
                 <a:ea typeface="Cambria" pitchFamily="34" charset="-122"/>
                 <a:cs typeface="Cambria" pitchFamily="34" charset="-120"/>
               </a:rPr>
-              <a:t>Composição de Custo e POB · CAPEX · PLAT B (WHPB)</a:t>
+              <a:t>Composição de Custo · CAPEX · PLAT B (WHPB)</a:t>
             </a:r>
             <a:endParaRPr lang="en-US" sz="2400" dirty="0"/>
           </a:p>
@@ -2766,16 +2766,16 @@
         </p:nvSpPr>
         <p:spPr>
           <a:xfrm>
-            <a:off x="457200" y="1234440"/>
-            <a:ext cx="2615184" cy="960120"/>
+            <a:off x="457200" y="1143000"/>
+            <a:ext cx="3749040" cy="1600200"/>
           </a:xfrm>
           <a:prstGeom prst="roundRect">
             <a:avLst>
-              <a:gd name="adj" fmla="val 7619"/>
+              <a:gd name="adj" fmla="val 5714"/>
             </a:avLst>
           </a:prstGeom>
           <a:solidFill>
-            <a:srgbClr val="F0F4F5"/>
+            <a:srgbClr val="E4EAF0"/>
           </a:solidFill>
           <a:ln/>
         </p:spPr>
@@ -2788,8 +2788,47 @@
         </p:nvSpPr>
         <p:spPr>
           <a:xfrm>
-            <a:off x="621792" y="1353312"/>
-            <a:ext cx="2286000" cy="502920"/>
+            <a:off x="713232" y="1399032"/>
+            <a:ext cx="3236976" cy="658368"/>
+          </a:xfrm>
+          <a:prstGeom prst="rect">
+            <a:avLst/>
+          </a:prstGeom>
+          <a:noFill/>
+          <a:ln/>
+        </p:spPr>
+        <p:txBody>
+          <a:bodyPr wrap="none" lIns="0" tIns="0" rIns="0" bIns="0" rtlCol="0" anchor="ctr"/>
+          <a:lstStyle/>
+          <a:p>
+            <a:pPr indent="0" marL="0">
+              <a:buNone/>
+            </a:pPr>
+            <a:r>
+              <a:rPr lang="en-US" sz="3300" b="1" dirty="0">
+                <a:solidFill>
+                  <a:srgbClr val="0B2A3D"/>
+                </a:solidFill>
+                <a:latin typeface="Cambria" pitchFamily="34" charset="0"/>
+                <a:ea typeface="Cambria" pitchFamily="34" charset="-122"/>
+                <a:cs typeface="Cambria" pitchFamily="34" charset="-120"/>
+              </a:rPr>
+              <a:t>US$ 3,4 mi</a:t>
+            </a:r>
+            <a:endParaRPr lang="en-US" sz="3300" dirty="0"/>
+          </a:p>
+        </p:txBody>
+      </p:sp>
+      <p:sp>
+        <p:nvSpPr>
+          <p:cNvPr id="8" name="Text 6"/>
+          <p:cNvSpPr txBox="1"/>
+          <p:nvPr/>
+        </p:nvSpPr>
+        <p:spPr>
+          <a:xfrm>
+            <a:off x="713232" y="2130552"/>
+            <a:ext cx="3236976" cy="274320"/>
           </a:xfrm>
           <a:prstGeom prst="rect">
             <a:avLst/>
@@ -2805,30 +2844,30 @@
               <a:buNone/>
             </a:pPr>
             <a:r>
-              <a:rPr lang="en-US" sz="2100" b="1" dirty="0">
+              <a:rPr lang="en-US" sz="1200" b="1" spc="100" kern="0" dirty="0">
                 <a:solidFill>
-                  <a:srgbClr val="0B2A3D"/>
+                  <a:srgbClr val="145C68"/>
                 </a:solidFill>
-                <a:latin typeface="Cambria" pitchFamily="34" charset="0"/>
-                <a:ea typeface="Cambria" pitchFamily="34" charset="-122"/>
-                <a:cs typeface="Cambria" pitchFamily="34" charset="-120"/>
+                <a:latin typeface="Calibri" pitchFamily="34" charset="0"/>
+                <a:ea typeface="Calibri" pitchFamily="34" charset="-122"/>
+                <a:cs typeface="Calibri" pitchFamily="34" charset="-120"/>
               </a:rPr>
-              <a:t>US$ 1,7 mi</a:t>
+              <a:t>CAPEX TOTAL 2027</a:t>
             </a:r>
-            <a:endParaRPr lang="en-US" sz="2100" dirty="0"/>
+            <a:endParaRPr lang="en-US" sz="1200" dirty="0"/>
           </a:p>
         </p:txBody>
       </p:sp>
       <p:sp>
         <p:nvSpPr>
-          <p:cNvPr id="8" name="Text 6"/>
+          <p:cNvPr id="9" name="Text 7"/>
           <p:cNvSpPr txBox="1"/>
           <p:nvPr/>
         </p:nvSpPr>
         <p:spPr>
           <a:xfrm>
-            <a:off x="621792" y="1856232"/>
-            <a:ext cx="2286000" cy="274320"/>
+            <a:off x="713232" y="2404872"/>
+            <a:ext cx="3236976" cy="274320"/>
           </a:xfrm>
           <a:prstGeom prst="rect">
             <a:avLst/>
@@ -2844,34 +2883,34 @@
               <a:buNone/>
             </a:pPr>
             <a:r>
-              <a:rPr lang="en-US" sz="850" b="1" spc="50" kern="0" dirty="0">
+              <a:rPr lang="en-US" sz="900" dirty="0">
                 <a:solidFill>
-                  <a:srgbClr val="145C68"/>
+                  <a:srgbClr val="5B6B73"/>
                 </a:solidFill>
                 <a:latin typeface="Calibri" pitchFamily="34" charset="0"/>
                 <a:ea typeface="Calibri" pitchFamily="34" charset="-122"/>
                 <a:cs typeface="Calibri" pitchFamily="34" charset="-120"/>
               </a:rPr>
-              <a:t>SERVIÇO</a:t>
+              <a:t>excl. Desenvolvimento de Produção</a:t>
             </a:r>
-            <a:endParaRPr lang="en-US" sz="850" dirty="0"/>
+            <a:endParaRPr lang="en-US" sz="900" dirty="0"/>
           </a:p>
         </p:txBody>
       </p:sp>
       <p:sp>
         <p:nvSpPr>
-          <p:cNvPr id="9" name="Shape 7"/>
+          <p:cNvPr id="10" name="Shape 8"/>
           <p:cNvSpPr/>
           <p:nvPr/>
         </p:nvSpPr>
         <p:spPr>
           <a:xfrm>
-            <a:off x="3255264" y="1234440"/>
-            <a:ext cx="2615184" cy="960120"/>
+            <a:off x="4434840" y="1143000"/>
+            <a:ext cx="3566160" cy="731520"/>
           </a:xfrm>
           <a:prstGeom prst="roundRect">
             <a:avLst>
-              <a:gd name="adj" fmla="val 7619"/>
+              <a:gd name="adj" fmla="val 10000"/>
             </a:avLst>
           </a:prstGeom>
           <a:solidFill>
@@ -2882,14 +2921,14 @@
       </p:sp>
       <p:sp>
         <p:nvSpPr>
-          <p:cNvPr id="10" name="Text 8"/>
+          <p:cNvPr id="11" name="Text 9"/>
           <p:cNvSpPr txBox="1"/>
           <p:nvPr/>
         </p:nvSpPr>
         <p:spPr>
           <a:xfrm>
-            <a:off x="3419856" y="1353312"/>
-            <a:ext cx="2286000" cy="502920"/>
+            <a:off x="4581144" y="1234440"/>
+            <a:ext cx="3273552" cy="384048"/>
           </a:xfrm>
           <a:prstGeom prst="rect">
             <a:avLst/>
@@ -2905,7 +2944,7 @@
               <a:buNone/>
             </a:pPr>
             <a:r>
-              <a:rPr lang="en-US" sz="2100" b="1" dirty="0">
+              <a:rPr lang="en-US" sz="1800" b="1" dirty="0">
                 <a:solidFill>
                   <a:srgbClr val="0B2A3D"/>
                 </a:solidFill>
@@ -2913,22 +2952,22 @@
                 <a:ea typeface="Cambria" pitchFamily="34" charset="-122"/>
                 <a:cs typeface="Cambria" pitchFamily="34" charset="-120"/>
               </a:rPr>
-              <a:t>US$ 1,2 mi</a:t>
+              <a:t>US$ 2,3 mi</a:t>
             </a:r>
-            <a:endParaRPr lang="en-US" sz="2100" dirty="0"/>
+            <a:endParaRPr lang="en-US" sz="1800" dirty="0"/>
           </a:p>
         </p:txBody>
       </p:sp>
       <p:sp>
         <p:nvSpPr>
-          <p:cNvPr id="11" name="Text 9"/>
+          <p:cNvPr id="12" name="Text 10"/>
           <p:cNvSpPr txBox="1"/>
           <p:nvPr/>
         </p:nvSpPr>
         <p:spPr>
           <a:xfrm>
-            <a:off x="3419856" y="1856232"/>
-            <a:ext cx="2286000" cy="274320"/>
+            <a:off x="4581144" y="1600200"/>
+            <a:ext cx="3273552" cy="237744"/>
           </a:xfrm>
           <a:prstGeom prst="rect">
             <a:avLst/>
@@ -2944,7 +2983,7 @@
               <a:buNone/>
             </a:pPr>
             <a:r>
-              <a:rPr lang="en-US" sz="850" b="1" spc="50" kern="0" dirty="0">
+              <a:rPr lang="en-US" sz="800" b="1" spc="50" kern="0" dirty="0">
                 <a:solidFill>
                   <a:srgbClr val="145C68"/>
                 </a:solidFill>
@@ -2952,26 +2991,26 @@
                 <a:ea typeface="Calibri" pitchFamily="34" charset="-122"/>
                 <a:cs typeface="Calibri" pitchFamily="34" charset="-120"/>
               </a:rPr>
-              <a:t>MATERIAL</a:t>
+              <a:t>CUSTO TOTAL SEM TA</a:t>
             </a:r>
-            <a:endParaRPr lang="en-US" sz="850" dirty="0"/>
+            <a:endParaRPr lang="en-US" sz="800" dirty="0"/>
           </a:p>
         </p:txBody>
       </p:sp>
       <p:sp>
         <p:nvSpPr>
-          <p:cNvPr id="12" name="Shape 10"/>
+          <p:cNvPr id="13" name="Shape 11"/>
           <p:cNvSpPr/>
           <p:nvPr/>
         </p:nvSpPr>
         <p:spPr>
           <a:xfrm>
-            <a:off x="6053328" y="1234440"/>
-            <a:ext cx="2615184" cy="960120"/>
+            <a:off x="8138160" y="1143000"/>
+            <a:ext cx="3566160" cy="731520"/>
           </a:xfrm>
           <a:prstGeom prst="roundRect">
             <a:avLst>
-              <a:gd name="adj" fmla="val 7619"/>
+              <a:gd name="adj" fmla="val 10000"/>
             </a:avLst>
           </a:prstGeom>
           <a:solidFill>
@@ -2982,14 +3021,14 @@
       </p:sp>
       <p:sp>
         <p:nvSpPr>
-          <p:cNvPr id="13" name="Text 11"/>
+          <p:cNvPr id="14" name="Text 12"/>
           <p:cNvSpPr txBox="1"/>
           <p:nvPr/>
         </p:nvSpPr>
         <p:spPr>
           <a:xfrm>
-            <a:off x="6217920" y="1353312"/>
-            <a:ext cx="2286000" cy="502920"/>
+            <a:off x="8284464" y="1234440"/>
+            <a:ext cx="3273552" cy="384048"/>
           </a:xfrm>
           <a:prstGeom prst="rect">
             <a:avLst/>
@@ -3005,7 +3044,7 @@
               <a:buNone/>
             </a:pPr>
             <a:r>
-              <a:rPr lang="en-US" sz="2100" b="1" dirty="0">
+              <a:rPr lang="en-US" sz="1800" b="1" dirty="0">
                 <a:solidFill>
                   <a:srgbClr val="0B2A3D"/>
                 </a:solidFill>
@@ -3013,22 +3052,22 @@
                 <a:ea typeface="Cambria" pitchFamily="34" charset="-122"/>
                 <a:cs typeface="Cambria" pitchFamily="34" charset="-120"/>
               </a:rPr>
-              <a:t>US$ 2,9 mi</a:t>
+              <a:t>US$ 1,1 mi</a:t>
             </a:r>
-            <a:endParaRPr lang="en-US" sz="2100" dirty="0"/>
+            <a:endParaRPr lang="en-US" sz="1800" dirty="0"/>
           </a:p>
         </p:txBody>
       </p:sp>
       <p:sp>
         <p:nvSpPr>
-          <p:cNvPr id="14" name="Text 12"/>
+          <p:cNvPr id="15" name="Text 13"/>
           <p:cNvSpPr txBox="1"/>
           <p:nvPr/>
         </p:nvSpPr>
         <p:spPr>
           <a:xfrm>
-            <a:off x="6217920" y="1856232"/>
-            <a:ext cx="2286000" cy="274320"/>
+            <a:off x="8284464" y="1600200"/>
+            <a:ext cx="3273552" cy="237744"/>
           </a:xfrm>
           <a:prstGeom prst="rect">
             <a:avLst/>
@@ -3044,7 +3083,7 @@
               <a:buNone/>
             </a:pPr>
             <a:r>
-              <a:rPr lang="en-US" sz="850" b="1" spc="50" kern="0" dirty="0">
+              <a:rPr lang="en-US" sz="800" b="1" spc="50" kern="0" dirty="0">
                 <a:solidFill>
                   <a:srgbClr val="145C68"/>
                 </a:solidFill>
@@ -3052,26 +3091,26 @@
                 <a:ea typeface="Calibri" pitchFamily="34" charset="-122"/>
                 <a:cs typeface="Calibri" pitchFamily="34" charset="-120"/>
               </a:rPr>
-              <a:t>TOTAL (EXCL. DESENV. PRODUÇÃO)</a:t>
+              <a:t>CUSTO TA (PARADA PROGRAMADA)</a:t>
             </a:r>
-            <a:endParaRPr lang="en-US" sz="850" dirty="0"/>
+            <a:endParaRPr lang="en-US" sz="800" dirty="0"/>
           </a:p>
         </p:txBody>
       </p:sp>
       <p:sp>
         <p:nvSpPr>
-          <p:cNvPr id="15" name="Shape 13"/>
+          <p:cNvPr id="16" name="Shape 14"/>
           <p:cNvSpPr/>
           <p:nvPr/>
         </p:nvSpPr>
         <p:spPr>
           <a:xfrm>
-            <a:off x="8851392" y="1234440"/>
-            <a:ext cx="2615184" cy="960120"/>
+            <a:off x="4434840" y="2011680"/>
+            <a:ext cx="3566160" cy="731520"/>
           </a:xfrm>
           <a:prstGeom prst="roundRect">
             <a:avLst>
-              <a:gd name="adj" fmla="val 7619"/>
+              <a:gd name="adj" fmla="val 10000"/>
             </a:avLst>
           </a:prstGeom>
           <a:solidFill>
@@ -3082,14 +3121,14 @@
       </p:sp>
       <p:sp>
         <p:nvSpPr>
-          <p:cNvPr id="16" name="Text 14"/>
+          <p:cNvPr id="17" name="Text 15"/>
           <p:cNvSpPr txBox="1"/>
           <p:nvPr/>
         </p:nvSpPr>
         <p:spPr>
           <a:xfrm>
-            <a:off x="9015984" y="1353312"/>
-            <a:ext cx="2286000" cy="502920"/>
+            <a:off x="4581144" y="2103120"/>
+            <a:ext cx="3273552" cy="384048"/>
           </a:xfrm>
           <a:prstGeom prst="rect">
             <a:avLst/>
@@ -3105,7 +3144,7 @@
               <a:buNone/>
             </a:pPr>
             <a:r>
-              <a:rPr lang="en-US" sz="2100" b="1" dirty="0">
+              <a:rPr lang="en-US" sz="1800" b="1" dirty="0">
                 <a:solidFill>
                   <a:srgbClr val="0B2A3D"/>
                 </a:solidFill>
@@ -3113,22 +3152,22 @@
                 <a:ea typeface="Cambria" pitchFamily="34" charset="-122"/>
                 <a:cs typeface="Cambria" pitchFamily="34" charset="-120"/>
               </a:rPr>
-              <a:t>121</a:t>
+              <a:t>US$ 1,7 mi</a:t>
             </a:r>
-            <a:endParaRPr lang="en-US" sz="2100" dirty="0"/>
+            <a:endParaRPr lang="en-US" sz="1800" dirty="0"/>
           </a:p>
         </p:txBody>
       </p:sp>
       <p:sp>
         <p:nvSpPr>
-          <p:cNvPr id="17" name="Text 15"/>
+          <p:cNvPr id="18" name="Text 16"/>
           <p:cNvSpPr txBox="1"/>
           <p:nvPr/>
         </p:nvSpPr>
         <p:spPr>
           <a:xfrm>
-            <a:off x="9015984" y="1856232"/>
-            <a:ext cx="2286000" cy="274320"/>
+            <a:off x="4581144" y="2468880"/>
+            <a:ext cx="3273552" cy="237744"/>
           </a:xfrm>
           <a:prstGeom prst="rect">
             <a:avLst/>
@@ -3144,7 +3183,7 @@
               <a:buNone/>
             </a:pPr>
             <a:r>
-              <a:rPr lang="en-US" sz="850" b="1" spc="50" kern="0" dirty="0">
+              <a:rPr lang="en-US" sz="800" b="1" spc="50" kern="0" dirty="0">
                 <a:solidFill>
                   <a:srgbClr val="145C68"/>
                 </a:solidFill>
@@ -3152,21 +3191,121 @@
                 <a:ea typeface="Calibri" pitchFamily="34" charset="-122"/>
                 <a:cs typeface="Calibri" pitchFamily="34" charset="-120"/>
               </a:rPr>
-              <a:t>POB TOTAL</a:t>
+              <a:t>SERVIÇO</a:t>
             </a:r>
-            <a:endParaRPr lang="en-US" sz="850" dirty="0"/>
+            <a:endParaRPr lang="en-US" sz="800" dirty="0"/>
           </a:p>
         </p:txBody>
       </p:sp>
       <p:sp>
         <p:nvSpPr>
-          <p:cNvPr id="18" name="Text 16"/>
+          <p:cNvPr id="19" name="Shape 17"/>
+          <p:cNvSpPr/>
+          <p:nvPr/>
+        </p:nvSpPr>
+        <p:spPr>
+          <a:xfrm>
+            <a:off x="8138160" y="2011680"/>
+            <a:ext cx="3566160" cy="731520"/>
+          </a:xfrm>
+          <a:prstGeom prst="roundRect">
+            <a:avLst>
+              <a:gd name="adj" fmla="val 10000"/>
+            </a:avLst>
+          </a:prstGeom>
+          <a:solidFill>
+            <a:srgbClr val="F0F4F5"/>
+          </a:solidFill>
+          <a:ln/>
+        </p:spPr>
+      </p:sp>
+      <p:sp>
+        <p:nvSpPr>
+          <p:cNvPr id="20" name="Text 18"/>
           <p:cNvSpPr txBox="1"/>
           <p:nvPr/>
         </p:nvSpPr>
         <p:spPr>
           <a:xfrm>
-            <a:off x="457200" y="2514600"/>
+            <a:off x="8284464" y="2103120"/>
+            <a:ext cx="3273552" cy="384048"/>
+          </a:xfrm>
+          <a:prstGeom prst="rect">
+            <a:avLst/>
+          </a:prstGeom>
+          <a:noFill/>
+          <a:ln/>
+        </p:spPr>
+        <p:txBody>
+          <a:bodyPr wrap="square" lIns="0" tIns="0" rIns="0" bIns="0" rtlCol="0" anchor="ctr"/>
+          <a:lstStyle/>
+          <a:p>
+            <a:pPr indent="0" marL="0">
+              <a:buNone/>
+            </a:pPr>
+            <a:r>
+              <a:rPr lang="en-US" sz="1800" b="1" dirty="0">
+                <a:solidFill>
+                  <a:srgbClr val="0B2A3D"/>
+                </a:solidFill>
+                <a:latin typeface="Cambria" pitchFamily="34" charset="0"/>
+                <a:ea typeface="Cambria" pitchFamily="34" charset="-122"/>
+                <a:cs typeface="Cambria" pitchFamily="34" charset="-120"/>
+              </a:rPr>
+              <a:t>US$ 1,2 mi</a:t>
+            </a:r>
+            <a:endParaRPr lang="en-US" sz="1800" dirty="0"/>
+          </a:p>
+        </p:txBody>
+      </p:sp>
+      <p:sp>
+        <p:nvSpPr>
+          <p:cNvPr id="21" name="Text 19"/>
+          <p:cNvSpPr txBox="1"/>
+          <p:nvPr/>
+        </p:nvSpPr>
+        <p:spPr>
+          <a:xfrm>
+            <a:off x="8284464" y="2468880"/>
+            <a:ext cx="3273552" cy="237744"/>
+          </a:xfrm>
+          <a:prstGeom prst="rect">
+            <a:avLst/>
+          </a:prstGeom>
+          <a:noFill/>
+          <a:ln/>
+        </p:spPr>
+        <p:txBody>
+          <a:bodyPr wrap="square" lIns="0" tIns="0" rIns="0" bIns="0" rtlCol="0" anchor="ctr"/>
+          <a:lstStyle/>
+          <a:p>
+            <a:pPr indent="0" marL="0">
+              <a:buNone/>
+            </a:pPr>
+            <a:r>
+              <a:rPr lang="en-US" sz="800" b="1" spc="50" kern="0" dirty="0">
+                <a:solidFill>
+                  <a:srgbClr val="145C68"/>
+                </a:solidFill>
+                <a:latin typeface="Calibri" pitchFamily="34" charset="0"/>
+                <a:ea typeface="Calibri" pitchFamily="34" charset="-122"/>
+                <a:cs typeface="Calibri" pitchFamily="34" charset="-120"/>
+              </a:rPr>
+              <a:t>MATERIAL</a:t>
+            </a:r>
+            <a:endParaRPr lang="en-US" sz="800" dirty="0"/>
+          </a:p>
+        </p:txBody>
+      </p:sp>
+      <p:sp>
+        <p:nvSpPr>
+          <p:cNvPr id="22" name="Text 20"/>
+          <p:cNvSpPr txBox="1"/>
+          <p:nvPr/>
+        </p:nvSpPr>
+        <p:spPr>
+          <a:xfrm>
+            <a:off x="457200" y="3017520"/>
             <a:ext cx="5349240" cy="274320"/>
           </a:xfrm>
           <a:prstGeom prst="rect">
@@ -3199,13 +3338,13 @@
       </p:sp>
       <p:sp>
         <p:nvSpPr>
-          <p:cNvPr id="19" name="Shape 17"/>
+          <p:cNvPr id="23" name="Shape 21"/>
           <p:cNvSpPr/>
           <p:nvPr/>
         </p:nvSpPr>
         <p:spPr>
           <a:xfrm>
-            <a:off x="457200" y="2807208"/>
+            <a:off x="457200" y="3310128"/>
             <a:ext cx="5349240" cy="0"/>
           </a:xfrm>
           <a:prstGeom prst="line">
@@ -3222,14 +3361,14 @@
       </p:sp>
       <p:sp>
         <p:nvSpPr>
-          <p:cNvPr id="20" name="Text 18"/>
+          <p:cNvPr id="24" name="Text 22"/>
           <p:cNvSpPr txBox="1"/>
           <p:nvPr/>
         </p:nvSpPr>
         <p:spPr>
           <a:xfrm>
-            <a:off x="566928" y="2898648"/>
-            <a:ext cx="2995574" cy="365760"/>
+            <a:off x="566928" y="3401568"/>
+            <a:ext cx="3316529" cy="365760"/>
           </a:xfrm>
           <a:prstGeom prst="rect">
             <a:avLst/>
@@ -3261,14 +3400,14 @@
       </p:sp>
       <p:sp>
         <p:nvSpPr>
-          <p:cNvPr id="21" name="Text 19"/>
+          <p:cNvPr id="25" name="Text 23"/>
           <p:cNvSpPr txBox="1"/>
           <p:nvPr/>
         </p:nvSpPr>
         <p:spPr>
           <a:xfrm>
-            <a:off x="3452774" y="2898648"/>
-            <a:ext cx="1497787" cy="365760"/>
+            <a:off x="3773729" y="3401568"/>
+            <a:ext cx="1815998" cy="365760"/>
           </a:xfrm>
           <a:prstGeom prst="rect">
             <a:avLst/>
@@ -3300,52 +3439,13 @@
       </p:sp>
       <p:sp>
         <p:nvSpPr>
-          <p:cNvPr id="22" name="Text 20"/>
-          <p:cNvSpPr txBox="1"/>
+          <p:cNvPr id="26" name="Shape 24"/>
+          <p:cNvSpPr/>
           <p:nvPr/>
         </p:nvSpPr>
         <p:spPr>
           <a:xfrm>
-            <a:off x="4840834" y="2898648"/>
-            <a:ext cx="965606" cy="365760"/>
-          </a:xfrm>
-          <a:prstGeom prst="rect">
-            <a:avLst/>
-          </a:prstGeom>
-          <a:noFill/>
-          <a:ln/>
-        </p:spPr>
-        <p:txBody>
-          <a:bodyPr wrap="square" lIns="0" tIns="0" rIns="0" bIns="0" rtlCol="0" anchor="ctr"/>
-          <a:lstStyle/>
-          <a:p>
-            <a:pPr algn="r" indent="0" marL="0">
-              <a:buNone/>
-            </a:pPr>
-            <a:r>
-              <a:rPr lang="en-US" sz="900" dirty="0">
-                <a:solidFill>
-                  <a:srgbClr val="5B6B73"/>
-                </a:solidFill>
-                <a:latin typeface="Calibri" pitchFamily="34" charset="0"/>
-                <a:ea typeface="Calibri" pitchFamily="34" charset="-122"/>
-                <a:cs typeface="Calibri" pitchFamily="34" charset="-120"/>
-              </a:rPr>
-              <a:t>51 POB</a:t>
-            </a:r>
-            <a:endParaRPr lang="en-US" sz="900" dirty="0"/>
-          </a:p>
-        </p:txBody>
-      </p:sp>
-      <p:sp>
-        <p:nvSpPr>
-          <p:cNvPr id="23" name="Shape 21"/>
-          <p:cNvSpPr/>
-          <p:nvPr/>
-        </p:nvSpPr>
-        <p:spPr>
-          <a:xfrm>
-            <a:off x="457200" y="3264408"/>
+            <a:off x="457200" y="3767328"/>
             <a:ext cx="5349240" cy="365760"/>
           </a:xfrm>
           <a:prstGeom prst="rect">
@@ -3359,14 +3459,14 @@
       </p:sp>
       <p:sp>
         <p:nvSpPr>
-          <p:cNvPr id="24" name="Text 22"/>
+          <p:cNvPr id="27" name="Text 25"/>
           <p:cNvSpPr txBox="1"/>
           <p:nvPr/>
         </p:nvSpPr>
         <p:spPr>
           <a:xfrm>
-            <a:off x="566928" y="3264408"/>
-            <a:ext cx="2995574" cy="365760"/>
+            <a:off x="566928" y="3767328"/>
+            <a:ext cx="3316529" cy="365760"/>
           </a:xfrm>
           <a:prstGeom prst="rect">
             <a:avLst/>
@@ -3398,14 +3498,14 @@
       </p:sp>
       <p:sp>
         <p:nvSpPr>
-          <p:cNvPr id="25" name="Text 23"/>
+          <p:cNvPr id="28" name="Text 26"/>
           <p:cNvSpPr txBox="1"/>
           <p:nvPr/>
         </p:nvSpPr>
         <p:spPr>
           <a:xfrm>
-            <a:off x="3452774" y="3264408"/>
-            <a:ext cx="1497787" cy="365760"/>
+            <a:off x="3773729" y="3767328"/>
+            <a:ext cx="1815998" cy="365760"/>
           </a:xfrm>
           <a:prstGeom prst="rect">
             <a:avLst/>
@@ -3429,7 +3529,7 @@
                 <a:ea typeface="Calibri" pitchFamily="34" charset="-122"/>
                 <a:cs typeface="Calibri" pitchFamily="34" charset="-120"/>
               </a:rPr>
-              <a:t>US$ 565,1 mil</a:t>
+              <a:t>US$ 1,1 mi</a:t>
             </a:r>
             <a:endParaRPr lang="en-US" sz="1100" dirty="0"/>
           </a:p>
@@ -3437,53 +3537,14 @@
       </p:sp>
       <p:sp>
         <p:nvSpPr>
-          <p:cNvPr id="26" name="Text 24"/>
+          <p:cNvPr id="29" name="Text 27"/>
           <p:cNvSpPr txBox="1"/>
           <p:nvPr/>
         </p:nvSpPr>
         <p:spPr>
           <a:xfrm>
-            <a:off x="4840834" y="3264408"/>
-            <a:ext cx="965606" cy="365760"/>
-          </a:xfrm>
-          <a:prstGeom prst="rect">
-            <a:avLst/>
-          </a:prstGeom>
-          <a:noFill/>
-          <a:ln/>
-        </p:spPr>
-        <p:txBody>
-          <a:bodyPr wrap="square" lIns="0" tIns="0" rIns="0" bIns="0" rtlCol="0" anchor="ctr"/>
-          <a:lstStyle/>
-          <a:p>
-            <a:pPr algn="r" indent="0" marL="0">
-              <a:buNone/>
-            </a:pPr>
-            <a:r>
-              <a:rPr lang="en-US" sz="900" dirty="0">
-                <a:solidFill>
-                  <a:srgbClr val="5B6B73"/>
-                </a:solidFill>
-                <a:latin typeface="Calibri" pitchFamily="34" charset="0"/>
-                <a:ea typeface="Calibri" pitchFamily="34" charset="-122"/>
-                <a:cs typeface="Calibri" pitchFamily="34" charset="-120"/>
-              </a:rPr>
-              <a:t>70 POB</a:t>
-            </a:r>
-            <a:endParaRPr lang="en-US" sz="900" dirty="0"/>
-          </a:p>
-        </p:txBody>
-      </p:sp>
-      <p:sp>
-        <p:nvSpPr>
-          <p:cNvPr id="27" name="Text 25"/>
-          <p:cNvSpPr txBox="1"/>
-          <p:nvPr/>
-        </p:nvSpPr>
-        <p:spPr>
-          <a:xfrm>
-            <a:off x="566928" y="3630168"/>
-            <a:ext cx="2995574" cy="365760"/>
+            <a:off x="566928" y="4133088"/>
+            <a:ext cx="3316529" cy="365760"/>
           </a:xfrm>
           <a:prstGeom prst="rect">
             <a:avLst/>
@@ -3515,14 +3576,14 @@
       </p:sp>
       <p:sp>
         <p:nvSpPr>
-          <p:cNvPr id="28" name="Text 26"/>
+          <p:cNvPr id="30" name="Text 28"/>
           <p:cNvSpPr txBox="1"/>
           <p:nvPr/>
         </p:nvSpPr>
         <p:spPr>
           <a:xfrm>
-            <a:off x="3452774" y="3630168"/>
-            <a:ext cx="1497787" cy="365760"/>
+            <a:off x="3773729" y="4133088"/>
+            <a:ext cx="1815998" cy="365760"/>
           </a:xfrm>
           <a:prstGeom prst="rect">
             <a:avLst/>
@@ -3554,52 +3615,13 @@
       </p:sp>
       <p:sp>
         <p:nvSpPr>
-          <p:cNvPr id="29" name="Text 27"/>
+          <p:cNvPr id="31" name="Text 29"/>
           <p:cNvSpPr txBox="1"/>
           <p:nvPr/>
         </p:nvSpPr>
         <p:spPr>
           <a:xfrm>
-            <a:off x="4840834" y="3630168"/>
-            <a:ext cx="965606" cy="365760"/>
-          </a:xfrm>
-          <a:prstGeom prst="rect">
-            <a:avLst/>
-          </a:prstGeom>
-          <a:noFill/>
-          <a:ln/>
-        </p:spPr>
-        <p:txBody>
-          <a:bodyPr wrap="square" lIns="0" tIns="0" rIns="0" bIns="0" rtlCol="0" anchor="ctr"/>
-          <a:lstStyle/>
-          <a:p>
-            <a:pPr algn="r" indent="0" marL="0">
-              <a:buNone/>
-            </a:pPr>
-            <a:r>
-              <a:rPr lang="en-US" sz="900" dirty="0">
-                <a:solidFill>
-                  <a:srgbClr val="5B6B73"/>
-                </a:solidFill>
-                <a:latin typeface="Calibri" pitchFamily="34" charset="0"/>
-                <a:ea typeface="Calibri" pitchFamily="34" charset="-122"/>
-                <a:cs typeface="Calibri" pitchFamily="34" charset="-120"/>
-              </a:rPr>
-              <a:t>0 POB</a:t>
-            </a:r>
-            <a:endParaRPr lang="en-US" sz="900" dirty="0"/>
-          </a:p>
-        </p:txBody>
-      </p:sp>
-      <p:sp>
-        <p:nvSpPr>
-          <p:cNvPr id="30" name="Text 28"/>
-          <p:cNvSpPr txBox="1"/>
-          <p:nvPr/>
-        </p:nvSpPr>
-        <p:spPr>
-          <a:xfrm>
-            <a:off x="6355080" y="2514600"/>
+            <a:off x="6355080" y="3017520"/>
             <a:ext cx="5349240" cy="274320"/>
           </a:xfrm>
           <a:prstGeom prst="rect">
@@ -3632,13 +3654,13 @@
       </p:sp>
       <p:sp>
         <p:nvSpPr>
-          <p:cNvPr id="31" name="Shape 29"/>
+          <p:cNvPr id="32" name="Shape 30"/>
           <p:cNvSpPr/>
           <p:nvPr/>
         </p:nvSpPr>
         <p:spPr>
           <a:xfrm>
-            <a:off x="6355080" y="2807208"/>
+            <a:off x="6355080" y="3310128"/>
             <a:ext cx="5349240" cy="0"/>
           </a:xfrm>
           <a:prstGeom prst="line">
@@ -3655,14 +3677,14 @@
       </p:sp>
       <p:sp>
         <p:nvSpPr>
-          <p:cNvPr id="32" name="Text 30"/>
+          <p:cNvPr id="33" name="Text 31"/>
           <p:cNvSpPr txBox="1"/>
           <p:nvPr/>
         </p:nvSpPr>
         <p:spPr>
           <a:xfrm>
-            <a:off x="6464808" y="2898648"/>
-            <a:ext cx="2995574" cy="365760"/>
+            <a:off x="6464808" y="3401568"/>
+            <a:ext cx="3316529" cy="365760"/>
           </a:xfrm>
           <a:prstGeom prst="rect">
             <a:avLst/>
@@ -3694,14 +3716,14 @@
       </p:sp>
       <p:sp>
         <p:nvSpPr>
-          <p:cNvPr id="33" name="Text 31"/>
+          <p:cNvPr id="34" name="Text 32"/>
           <p:cNvSpPr txBox="1"/>
           <p:nvPr/>
         </p:nvSpPr>
         <p:spPr>
           <a:xfrm>
-            <a:off x="9350654" y="2898648"/>
-            <a:ext cx="1497787" cy="365760"/>
+            <a:off x="9671609" y="3401568"/>
+            <a:ext cx="1815998" cy="365760"/>
           </a:xfrm>
           <a:prstGeom prst="rect">
             <a:avLst/>
@@ -3733,52 +3755,13 @@
       </p:sp>
       <p:sp>
         <p:nvSpPr>
-          <p:cNvPr id="34" name="Text 32"/>
-          <p:cNvSpPr txBox="1"/>
-          <p:nvPr/>
-        </p:nvSpPr>
-        <p:spPr>
-          <a:xfrm>
-            <a:off x="10738714" y="2898648"/>
-            <a:ext cx="965606" cy="365760"/>
-          </a:xfrm>
-          <a:prstGeom prst="rect">
-            <a:avLst/>
-          </a:prstGeom>
-          <a:noFill/>
-          <a:ln/>
-        </p:spPr>
-        <p:txBody>
-          <a:bodyPr wrap="square" lIns="0" tIns="0" rIns="0" bIns="0" rtlCol="0" anchor="ctr"/>
-          <a:lstStyle/>
-          <a:p>
-            <a:pPr algn="r" indent="0" marL="0">
-              <a:buNone/>
-            </a:pPr>
-            <a:r>
-              <a:rPr lang="en-US" sz="900" dirty="0">
-                <a:solidFill>
-                  <a:srgbClr val="5B6B73"/>
-                </a:solidFill>
-                <a:latin typeface="Calibri" pitchFamily="34" charset="0"/>
-                <a:ea typeface="Calibri" pitchFamily="34" charset="-122"/>
-                <a:cs typeface="Calibri" pitchFamily="34" charset="-120"/>
-              </a:rPr>
-              <a:t>119 POB</a:t>
-            </a:r>
-            <a:endParaRPr lang="en-US" sz="900" dirty="0"/>
-          </a:p>
-        </p:txBody>
-      </p:sp>
-      <p:sp>
-        <p:nvSpPr>
           <p:cNvPr id="35" name="Shape 33"/>
           <p:cNvSpPr/>
           <p:nvPr/>
         </p:nvSpPr>
         <p:spPr>
           <a:xfrm>
-            <a:off x="6355080" y="3264408"/>
+            <a:off x="6355080" y="3767328"/>
             <a:ext cx="5349240" cy="365760"/>
           </a:xfrm>
           <a:prstGeom prst="rect">
@@ -3798,8 +3781,8 @@
         </p:nvSpPr>
         <p:spPr>
           <a:xfrm>
-            <a:off x="6464808" y="3264408"/>
-            <a:ext cx="2995574" cy="365760"/>
+            <a:off x="6464808" y="3767328"/>
+            <a:ext cx="3316529" cy="365760"/>
           </a:xfrm>
           <a:prstGeom prst="rect">
             <a:avLst/>
@@ -3837,8 +3820,8 @@
         </p:nvSpPr>
         <p:spPr>
           <a:xfrm>
-            <a:off x="9350654" y="3264408"/>
-            <a:ext cx="1497787" cy="365760"/>
+            <a:off x="9671609" y="3767328"/>
+            <a:ext cx="1815998" cy="365760"/>
           </a:xfrm>
           <a:prstGeom prst="rect">
             <a:avLst/>
@@ -3876,47 +3859,8 @@
         </p:nvSpPr>
         <p:spPr>
           <a:xfrm>
-            <a:off x="10738714" y="3264408"/>
-            <a:ext cx="965606" cy="365760"/>
-          </a:xfrm>
-          <a:prstGeom prst="rect">
-            <a:avLst/>
-          </a:prstGeom>
-          <a:noFill/>
-          <a:ln/>
-        </p:spPr>
-        <p:txBody>
-          <a:bodyPr wrap="square" lIns="0" tIns="0" rIns="0" bIns="0" rtlCol="0" anchor="ctr"/>
-          <a:lstStyle/>
-          <a:p>
-            <a:pPr algn="r" indent="0" marL="0">
-              <a:buNone/>
-            </a:pPr>
-            <a:r>
-              <a:rPr lang="en-US" sz="900" dirty="0">
-                <a:solidFill>
-                  <a:srgbClr val="5B6B73"/>
-                </a:solidFill>
-                <a:latin typeface="Calibri" pitchFamily="34" charset="0"/>
-                <a:ea typeface="Calibri" pitchFamily="34" charset="-122"/>
-                <a:cs typeface="Calibri" pitchFamily="34" charset="-120"/>
-              </a:rPr>
-              <a:t>2 POB</a:t>
-            </a:r>
-            <a:endParaRPr lang="en-US" sz="900" dirty="0"/>
-          </a:p>
-        </p:txBody>
-      </p:sp>
-      <p:sp>
-        <p:nvSpPr>
-          <p:cNvPr id="39" name="Text 37"/>
-          <p:cNvSpPr txBox="1"/>
-          <p:nvPr/>
-        </p:nvSpPr>
-        <p:spPr>
-          <a:xfrm>
-            <a:off x="6464808" y="3630168"/>
-            <a:ext cx="2995574" cy="365760"/>
+            <a:off x="6464808" y="4133088"/>
+            <a:ext cx="3316529" cy="365760"/>
           </a:xfrm>
           <a:prstGeom prst="rect">
             <a:avLst/>
@@ -3948,14 +3892,14 @@
       </p:sp>
       <p:sp>
         <p:nvSpPr>
-          <p:cNvPr id="40" name="Text 38"/>
+          <p:cNvPr id="39" name="Text 37"/>
           <p:cNvSpPr txBox="1"/>
           <p:nvPr/>
         </p:nvSpPr>
         <p:spPr>
           <a:xfrm>
-            <a:off x="9350654" y="3630168"/>
-            <a:ext cx="1497787" cy="365760"/>
+            <a:off x="9671609" y="4133088"/>
+            <a:ext cx="1815998" cy="365760"/>
           </a:xfrm>
           <a:prstGeom prst="rect">
             <a:avLst/>
@@ -3987,46 +3931,7 @@
       </p:sp>
       <p:sp>
         <p:nvSpPr>
-          <p:cNvPr id="41" name="Text 39"/>
-          <p:cNvSpPr txBox="1"/>
-          <p:nvPr/>
-        </p:nvSpPr>
-        <p:spPr>
-          <a:xfrm>
-            <a:off x="10738714" y="3630168"/>
-            <a:ext cx="965606" cy="365760"/>
-          </a:xfrm>
-          <a:prstGeom prst="rect">
-            <a:avLst/>
-          </a:prstGeom>
-          <a:noFill/>
-          <a:ln/>
-        </p:spPr>
-        <p:txBody>
-          <a:bodyPr wrap="square" lIns="0" tIns="0" rIns="0" bIns="0" rtlCol="0" anchor="ctr"/>
-          <a:lstStyle/>
-          <a:p>
-            <a:pPr algn="r" indent="0" marL="0">
-              <a:buNone/>
-            </a:pPr>
-            <a:r>
-              <a:rPr lang="en-US" sz="900" dirty="0">
-                <a:solidFill>
-                  <a:srgbClr val="5B6B73"/>
-                </a:solidFill>
-                <a:latin typeface="Calibri" pitchFamily="34" charset="0"/>
-                <a:ea typeface="Calibri" pitchFamily="34" charset="-122"/>
-                <a:cs typeface="Calibri" pitchFamily="34" charset="-120"/>
-              </a:rPr>
-              <a:t>0 POB</a:t>
-            </a:r>
-            <a:endParaRPr lang="en-US" sz="900" dirty="0"/>
-          </a:p>
-        </p:txBody>
-      </p:sp>
-      <p:sp>
-        <p:nvSpPr>
-          <p:cNvPr id="42" name="Text 40"/>
+          <p:cNvPr id="40" name="Text 38"/>
           <p:cNvSpPr txBox="1"/>
           <p:nvPr/>
         </p:nvSpPr>
@@ -4057,7 +3962,7 @@
                 <a:ea typeface="Calibri" pitchFamily="34" charset="-122"/>
                 <a:cs typeface="Calibri" pitchFamily="34" charset="-120"/>
               </a:rPr>
-              <a:t>Metodologia: soma de Custo de Serviço + Custo de Material (Jan–Dez), para itens de Cost Allocation = CAPEX com status 'Contar' ou 'TA'. O total desconsidera a categoria Desenvolvimento de Produção (sem itens para este ativo).</a:t>
+              <a:t>Metodologia: soma de Custo de Serviço + Custo de Material (Jan–Dez), para itens de Cost Allocation = CAPEX com status 'Contar' (Custo Total sem TA) e 'TA' (Custo TA, valor de Parada Programada informado pela área). O total desconsidera a categoria Desenvolvimento de Produção (US$ 0, mantida na lista de Categoria apenas para referência).</a:t>
             </a:r>
             <a:endParaRPr lang="en-US" sz="850" dirty="0"/>
           </a:p>
@@ -7996,7 +7901,7 @@
                 <a:ea typeface="Calibri" pitchFamily="34" charset="-122"/>
                 <a:cs typeface="Calibri" pitchFamily="34" charset="-120"/>
               </a:rPr>
-              <a:t>Fonte: Plano Integrado · aba 'Geral - Em análise' · itens de Cost Allocation = CAPEX, status 'Contar' + 'TA'. Lista completa disponível na planilha em anexo.</a:t>
+              <a:t>Fonte: Plano Integrado · aba 'Geral - Em análise' · coluna 'Valor Total' · itens de Cost Allocation = CAPEX, status 'Contar' + 'TA'. Lista completa disponível na planilha em anexo. Extrato pendente de atualização — pode não somar exatamente ao total da Composição de Custo (o valor de TA foi atualizado manualmente).</a:t>
             </a:r>
             <a:endParaRPr lang="en-US" sz="850" dirty="0"/>
           </a:p>
@@ -8383,7 +8288,7 @@
                 <a:ea typeface="Cambria" pitchFamily="34" charset="-122"/>
                 <a:cs typeface="Cambria" pitchFamily="34" charset="-120"/>
               </a:rPr>
-              <a:t>Composição de Custo e POB · CAPEX · PLAT C (WHPC)</a:t>
+              <a:t>Composição de Custo · CAPEX · PLAT C (WHPC)</a:t>
             </a:r>
             <a:endParaRPr lang="en-US" sz="2400" dirty="0"/>
           </a:p>
@@ -8436,16 +8341,16 @@
         </p:nvSpPr>
         <p:spPr>
           <a:xfrm>
-            <a:off x="457200" y="1234440"/>
-            <a:ext cx="2615184" cy="960120"/>
+            <a:off x="457200" y="1143000"/>
+            <a:ext cx="3749040" cy="1600200"/>
           </a:xfrm>
           <a:prstGeom prst="roundRect">
             <a:avLst>
-              <a:gd name="adj" fmla="val 7619"/>
+              <a:gd name="adj" fmla="val 5714"/>
             </a:avLst>
           </a:prstGeom>
           <a:solidFill>
-            <a:srgbClr val="F0F4F5"/>
+            <a:srgbClr val="E4EAF0"/>
           </a:solidFill>
           <a:ln/>
         </p:spPr>
@@ -8458,8 +8363,47 @@
         </p:nvSpPr>
         <p:spPr>
           <a:xfrm>
-            <a:off x="621792" y="1353312"/>
-            <a:ext cx="2286000" cy="502920"/>
+            <a:off x="713232" y="1399032"/>
+            <a:ext cx="3236976" cy="658368"/>
+          </a:xfrm>
+          <a:prstGeom prst="rect">
+            <a:avLst/>
+          </a:prstGeom>
+          <a:noFill/>
+          <a:ln/>
+        </p:spPr>
+        <p:txBody>
+          <a:bodyPr wrap="none" lIns="0" tIns="0" rIns="0" bIns="0" rtlCol="0" anchor="ctr"/>
+          <a:lstStyle/>
+          <a:p>
+            <a:pPr indent="0" marL="0">
+              <a:buNone/>
+            </a:pPr>
+            <a:r>
+              <a:rPr lang="en-US" sz="3300" b="1" dirty="0">
+                <a:solidFill>
+                  <a:srgbClr val="0B2A3D"/>
+                </a:solidFill>
+                <a:latin typeface="Cambria" pitchFamily="34" charset="0"/>
+                <a:ea typeface="Cambria" pitchFamily="34" charset="-122"/>
+                <a:cs typeface="Cambria" pitchFamily="34" charset="-120"/>
+              </a:rPr>
+              <a:t>US$ 4,4 mi</a:t>
+            </a:r>
+            <a:endParaRPr lang="en-US" sz="3300" dirty="0"/>
+          </a:p>
+        </p:txBody>
+      </p:sp>
+      <p:sp>
+        <p:nvSpPr>
+          <p:cNvPr id="8" name="Text 6"/>
+          <p:cNvSpPr txBox="1"/>
+          <p:nvPr/>
+        </p:nvSpPr>
+        <p:spPr>
+          <a:xfrm>
+            <a:off x="713232" y="2130552"/>
+            <a:ext cx="3236976" cy="274320"/>
           </a:xfrm>
           <a:prstGeom prst="rect">
             <a:avLst/>
@@ -8475,30 +8419,30 @@
               <a:buNone/>
             </a:pPr>
             <a:r>
-              <a:rPr lang="en-US" sz="2100" b="1" dirty="0">
+              <a:rPr lang="en-US" sz="1200" b="1" spc="100" kern="0" dirty="0">
                 <a:solidFill>
-                  <a:srgbClr val="0B2A3D"/>
+                  <a:srgbClr val="145C68"/>
                 </a:solidFill>
-                <a:latin typeface="Cambria" pitchFamily="34" charset="0"/>
-                <a:ea typeface="Cambria" pitchFamily="34" charset="-122"/>
-                <a:cs typeface="Cambria" pitchFamily="34" charset="-120"/>
+                <a:latin typeface="Calibri" pitchFamily="34" charset="0"/>
+                <a:ea typeface="Calibri" pitchFamily="34" charset="-122"/>
+                <a:cs typeface="Calibri" pitchFamily="34" charset="-120"/>
               </a:rPr>
-              <a:t>US$ 2,3 mi</a:t>
+              <a:t>CAPEX TOTAL 2027</a:t>
             </a:r>
-            <a:endParaRPr lang="en-US" sz="2100" dirty="0"/>
+            <a:endParaRPr lang="en-US" sz="1200" dirty="0"/>
           </a:p>
         </p:txBody>
       </p:sp>
       <p:sp>
         <p:nvSpPr>
-          <p:cNvPr id="8" name="Text 6"/>
+          <p:cNvPr id="9" name="Text 7"/>
           <p:cNvSpPr txBox="1"/>
           <p:nvPr/>
         </p:nvSpPr>
         <p:spPr>
           <a:xfrm>
-            <a:off x="621792" y="1856232"/>
-            <a:ext cx="2286000" cy="274320"/>
+            <a:off x="713232" y="2404872"/>
+            <a:ext cx="3236976" cy="274320"/>
           </a:xfrm>
           <a:prstGeom prst="rect">
             <a:avLst/>
@@ -8514,34 +8458,34 @@
               <a:buNone/>
             </a:pPr>
             <a:r>
-              <a:rPr lang="en-US" sz="850" b="1" spc="50" kern="0" dirty="0">
+              <a:rPr lang="en-US" sz="900" dirty="0">
                 <a:solidFill>
-                  <a:srgbClr val="145C68"/>
+                  <a:srgbClr val="5B6B73"/>
                 </a:solidFill>
                 <a:latin typeface="Calibri" pitchFamily="34" charset="0"/>
                 <a:ea typeface="Calibri" pitchFamily="34" charset="-122"/>
                 <a:cs typeface="Calibri" pitchFamily="34" charset="-120"/>
               </a:rPr>
-              <a:t>SERVIÇO</a:t>
+              <a:t>excl. Desenvolvimento de Produção</a:t>
             </a:r>
-            <a:endParaRPr lang="en-US" sz="850" dirty="0"/>
+            <a:endParaRPr lang="en-US" sz="900" dirty="0"/>
           </a:p>
         </p:txBody>
       </p:sp>
       <p:sp>
         <p:nvSpPr>
-          <p:cNvPr id="9" name="Shape 7"/>
+          <p:cNvPr id="10" name="Shape 8"/>
           <p:cNvSpPr/>
           <p:nvPr/>
         </p:nvSpPr>
         <p:spPr>
           <a:xfrm>
-            <a:off x="3255264" y="1234440"/>
-            <a:ext cx="2615184" cy="960120"/>
+            <a:off x="4434840" y="1143000"/>
+            <a:ext cx="3566160" cy="731520"/>
           </a:xfrm>
           <a:prstGeom prst="roundRect">
             <a:avLst>
-              <a:gd name="adj" fmla="val 7619"/>
+              <a:gd name="adj" fmla="val 10000"/>
             </a:avLst>
           </a:prstGeom>
           <a:solidFill>
@@ -8552,14 +8496,14 @@
       </p:sp>
       <p:sp>
         <p:nvSpPr>
-          <p:cNvPr id="10" name="Text 8"/>
+          <p:cNvPr id="11" name="Text 9"/>
           <p:cNvSpPr txBox="1"/>
           <p:nvPr/>
         </p:nvSpPr>
         <p:spPr>
           <a:xfrm>
-            <a:off x="3419856" y="1353312"/>
-            <a:ext cx="2286000" cy="502920"/>
+            <a:off x="4581144" y="1234440"/>
+            <a:ext cx="3273552" cy="384048"/>
           </a:xfrm>
           <a:prstGeom prst="rect">
             <a:avLst/>
@@ -8575,7 +8519,7 @@
               <a:buNone/>
             </a:pPr>
             <a:r>
-              <a:rPr lang="en-US" sz="2100" b="1" dirty="0">
+              <a:rPr lang="en-US" sz="1800" b="1" dirty="0">
                 <a:solidFill>
                   <a:srgbClr val="0B2A3D"/>
                 </a:solidFill>
@@ -8583,22 +8527,22 @@
                 <a:ea typeface="Cambria" pitchFamily="34" charset="-122"/>
                 <a:cs typeface="Cambria" pitchFamily="34" charset="-120"/>
               </a:rPr>
-              <a:t>US$ 1,1 mi</a:t>
+              <a:t>US$ 2,5 mi</a:t>
             </a:r>
-            <a:endParaRPr lang="en-US" sz="2100" dirty="0"/>
+            <a:endParaRPr lang="en-US" sz="1800" dirty="0"/>
           </a:p>
         </p:txBody>
       </p:sp>
       <p:sp>
         <p:nvSpPr>
-          <p:cNvPr id="11" name="Text 9"/>
+          <p:cNvPr id="12" name="Text 10"/>
           <p:cNvSpPr txBox="1"/>
           <p:nvPr/>
         </p:nvSpPr>
         <p:spPr>
           <a:xfrm>
-            <a:off x="3419856" y="1856232"/>
-            <a:ext cx="2286000" cy="274320"/>
+            <a:off x="4581144" y="1600200"/>
+            <a:ext cx="3273552" cy="237744"/>
           </a:xfrm>
           <a:prstGeom prst="rect">
             <a:avLst/>
@@ -8614,7 +8558,7 @@
               <a:buNone/>
             </a:pPr>
             <a:r>
-              <a:rPr lang="en-US" sz="850" b="1" spc="50" kern="0" dirty="0">
+              <a:rPr lang="en-US" sz="800" b="1" spc="50" kern="0" dirty="0">
                 <a:solidFill>
                   <a:srgbClr val="145C68"/>
                 </a:solidFill>
@@ -8622,26 +8566,26 @@
                 <a:ea typeface="Calibri" pitchFamily="34" charset="-122"/>
                 <a:cs typeface="Calibri" pitchFamily="34" charset="-120"/>
               </a:rPr>
-              <a:t>MATERIAL</a:t>
+              <a:t>CUSTO TOTAL SEM TA</a:t>
             </a:r>
-            <a:endParaRPr lang="en-US" sz="850" dirty="0"/>
+            <a:endParaRPr lang="en-US" sz="800" dirty="0"/>
           </a:p>
         </p:txBody>
       </p:sp>
       <p:sp>
         <p:nvSpPr>
-          <p:cNvPr id="12" name="Shape 10"/>
+          <p:cNvPr id="13" name="Shape 11"/>
           <p:cNvSpPr/>
           <p:nvPr/>
         </p:nvSpPr>
         <p:spPr>
           <a:xfrm>
-            <a:off x="6053328" y="1234440"/>
-            <a:ext cx="2615184" cy="960120"/>
+            <a:off x="8138160" y="1143000"/>
+            <a:ext cx="3566160" cy="731520"/>
           </a:xfrm>
           <a:prstGeom prst="roundRect">
             <a:avLst>
-              <a:gd name="adj" fmla="val 7619"/>
+              <a:gd name="adj" fmla="val 10000"/>
             </a:avLst>
           </a:prstGeom>
           <a:solidFill>
@@ -8652,14 +8596,14 @@
       </p:sp>
       <p:sp>
         <p:nvSpPr>
-          <p:cNvPr id="13" name="Text 11"/>
+          <p:cNvPr id="14" name="Text 12"/>
           <p:cNvSpPr txBox="1"/>
           <p:nvPr/>
         </p:nvSpPr>
         <p:spPr>
           <a:xfrm>
-            <a:off x="6217920" y="1353312"/>
-            <a:ext cx="2286000" cy="502920"/>
+            <a:off x="8284464" y="1234440"/>
+            <a:ext cx="3273552" cy="384048"/>
           </a:xfrm>
           <a:prstGeom prst="rect">
             <a:avLst/>
@@ -8675,7 +8619,7 @@
               <a:buNone/>
             </a:pPr>
             <a:r>
-              <a:rPr lang="en-US" sz="2100" b="1" dirty="0">
+              <a:rPr lang="en-US" sz="1800" b="1" dirty="0">
                 <a:solidFill>
                   <a:srgbClr val="0B2A3D"/>
                 </a:solidFill>
@@ -8683,22 +8627,22 @@
                 <a:ea typeface="Cambria" pitchFamily="34" charset="-122"/>
                 <a:cs typeface="Cambria" pitchFamily="34" charset="-120"/>
               </a:rPr>
-              <a:t>US$ 3,4 mi</a:t>
+              <a:t>US$ 1,9 mi</a:t>
             </a:r>
-            <a:endParaRPr lang="en-US" sz="2100" dirty="0"/>
+            <a:endParaRPr lang="en-US" sz="1800" dirty="0"/>
           </a:p>
         </p:txBody>
       </p:sp>
       <p:sp>
         <p:nvSpPr>
-          <p:cNvPr id="14" name="Text 12"/>
+          <p:cNvPr id="15" name="Text 13"/>
           <p:cNvSpPr txBox="1"/>
           <p:nvPr/>
         </p:nvSpPr>
         <p:spPr>
           <a:xfrm>
-            <a:off x="6217920" y="1856232"/>
-            <a:ext cx="2286000" cy="274320"/>
+            <a:off x="8284464" y="1600200"/>
+            <a:ext cx="3273552" cy="237744"/>
           </a:xfrm>
           <a:prstGeom prst="rect">
             <a:avLst/>
@@ -8714,7 +8658,7 @@
               <a:buNone/>
             </a:pPr>
             <a:r>
-              <a:rPr lang="en-US" sz="850" b="1" spc="50" kern="0" dirty="0">
+              <a:rPr lang="en-US" sz="800" b="1" spc="50" kern="0" dirty="0">
                 <a:solidFill>
                   <a:srgbClr val="145C68"/>
                 </a:solidFill>
@@ -8722,26 +8666,26 @@
                 <a:ea typeface="Calibri" pitchFamily="34" charset="-122"/>
                 <a:cs typeface="Calibri" pitchFamily="34" charset="-120"/>
               </a:rPr>
-              <a:t>TOTAL (EXCL. DESENV. PRODUÇÃO)</a:t>
+              <a:t>CUSTO TA (PARADA PROGRAMADA)</a:t>
             </a:r>
-            <a:endParaRPr lang="en-US" sz="850" dirty="0"/>
+            <a:endParaRPr lang="en-US" sz="800" dirty="0"/>
           </a:p>
         </p:txBody>
       </p:sp>
       <p:sp>
         <p:nvSpPr>
-          <p:cNvPr id="15" name="Shape 13"/>
+          <p:cNvPr id="16" name="Shape 14"/>
           <p:cNvSpPr/>
           <p:nvPr/>
         </p:nvSpPr>
         <p:spPr>
           <a:xfrm>
-            <a:off x="8851392" y="1234440"/>
-            <a:ext cx="2615184" cy="960120"/>
+            <a:off x="4434840" y="2011680"/>
+            <a:ext cx="3566160" cy="731520"/>
           </a:xfrm>
           <a:prstGeom prst="roundRect">
             <a:avLst>
-              <a:gd name="adj" fmla="val 7619"/>
+              <a:gd name="adj" fmla="val 10000"/>
             </a:avLst>
           </a:prstGeom>
           <a:solidFill>
@@ -8752,14 +8696,14 @@
       </p:sp>
       <p:sp>
         <p:nvSpPr>
-          <p:cNvPr id="16" name="Text 14"/>
+          <p:cNvPr id="17" name="Text 15"/>
           <p:cNvSpPr txBox="1"/>
           <p:nvPr/>
         </p:nvSpPr>
         <p:spPr>
           <a:xfrm>
-            <a:off x="9015984" y="1353312"/>
-            <a:ext cx="2286000" cy="502920"/>
+            <a:off x="4581144" y="2103120"/>
+            <a:ext cx="3273552" cy="384048"/>
           </a:xfrm>
           <a:prstGeom prst="rect">
             <a:avLst/>
@@ -8775,7 +8719,7 @@
               <a:buNone/>
             </a:pPr>
             <a:r>
-              <a:rPr lang="en-US" sz="2100" b="1" dirty="0">
+              <a:rPr lang="en-US" sz="1800" b="1" dirty="0">
                 <a:solidFill>
                   <a:srgbClr val="0B2A3D"/>
                 </a:solidFill>
@@ -8783,22 +8727,22 @@
                 <a:ea typeface="Cambria" pitchFamily="34" charset="-122"/>
                 <a:cs typeface="Cambria" pitchFamily="34" charset="-120"/>
               </a:rPr>
-              <a:t>135</a:t>
+              <a:t>US$ 2,3 mi</a:t>
             </a:r>
-            <a:endParaRPr lang="en-US" sz="2100" dirty="0"/>
+            <a:endParaRPr lang="en-US" sz="1800" dirty="0"/>
           </a:p>
         </p:txBody>
       </p:sp>
       <p:sp>
         <p:nvSpPr>
-          <p:cNvPr id="17" name="Text 15"/>
+          <p:cNvPr id="18" name="Text 16"/>
           <p:cNvSpPr txBox="1"/>
           <p:nvPr/>
         </p:nvSpPr>
         <p:spPr>
           <a:xfrm>
-            <a:off x="9015984" y="1856232"/>
-            <a:ext cx="2286000" cy="274320"/>
+            <a:off x="4581144" y="2468880"/>
+            <a:ext cx="3273552" cy="237744"/>
           </a:xfrm>
           <a:prstGeom prst="rect">
             <a:avLst/>
@@ -8814,7 +8758,7 @@
               <a:buNone/>
             </a:pPr>
             <a:r>
-              <a:rPr lang="en-US" sz="850" b="1" spc="50" kern="0" dirty="0">
+              <a:rPr lang="en-US" sz="800" b="1" spc="50" kern="0" dirty="0">
                 <a:solidFill>
                   <a:srgbClr val="145C68"/>
                 </a:solidFill>
@@ -8822,21 +8766,121 @@
                 <a:ea typeface="Calibri" pitchFamily="34" charset="-122"/>
                 <a:cs typeface="Calibri" pitchFamily="34" charset="-120"/>
               </a:rPr>
-              <a:t>POB TOTAL</a:t>
+              <a:t>SERVIÇO</a:t>
             </a:r>
-            <a:endParaRPr lang="en-US" sz="850" dirty="0"/>
+            <a:endParaRPr lang="en-US" sz="800" dirty="0"/>
           </a:p>
         </p:txBody>
       </p:sp>
       <p:sp>
         <p:nvSpPr>
-          <p:cNvPr id="18" name="Text 16"/>
+          <p:cNvPr id="19" name="Shape 17"/>
+          <p:cNvSpPr/>
+          <p:nvPr/>
+        </p:nvSpPr>
+        <p:spPr>
+          <a:xfrm>
+            <a:off x="8138160" y="2011680"/>
+            <a:ext cx="3566160" cy="731520"/>
+          </a:xfrm>
+          <a:prstGeom prst="roundRect">
+            <a:avLst>
+              <a:gd name="adj" fmla="val 10000"/>
+            </a:avLst>
+          </a:prstGeom>
+          <a:solidFill>
+            <a:srgbClr val="F0F4F5"/>
+          </a:solidFill>
+          <a:ln/>
+        </p:spPr>
+      </p:sp>
+      <p:sp>
+        <p:nvSpPr>
+          <p:cNvPr id="20" name="Text 18"/>
           <p:cNvSpPr txBox="1"/>
           <p:nvPr/>
         </p:nvSpPr>
         <p:spPr>
           <a:xfrm>
-            <a:off x="457200" y="2514600"/>
+            <a:off x="8284464" y="2103120"/>
+            <a:ext cx="3273552" cy="384048"/>
+          </a:xfrm>
+          <a:prstGeom prst="rect">
+            <a:avLst/>
+          </a:prstGeom>
+          <a:noFill/>
+          <a:ln/>
+        </p:spPr>
+        <p:txBody>
+          <a:bodyPr wrap="square" lIns="0" tIns="0" rIns="0" bIns="0" rtlCol="0" anchor="ctr"/>
+          <a:lstStyle/>
+          <a:p>
+            <a:pPr indent="0" marL="0">
+              <a:buNone/>
+            </a:pPr>
+            <a:r>
+              <a:rPr lang="en-US" sz="1800" b="1" dirty="0">
+                <a:solidFill>
+                  <a:srgbClr val="0B2A3D"/>
+                </a:solidFill>
+                <a:latin typeface="Cambria" pitchFamily="34" charset="0"/>
+                <a:ea typeface="Cambria" pitchFamily="34" charset="-122"/>
+                <a:cs typeface="Cambria" pitchFamily="34" charset="-120"/>
+              </a:rPr>
+              <a:t>US$ 1,1 mi</a:t>
+            </a:r>
+            <a:endParaRPr lang="en-US" sz="1800" dirty="0"/>
+          </a:p>
+        </p:txBody>
+      </p:sp>
+      <p:sp>
+        <p:nvSpPr>
+          <p:cNvPr id="21" name="Text 19"/>
+          <p:cNvSpPr txBox="1"/>
+          <p:nvPr/>
+        </p:nvSpPr>
+        <p:spPr>
+          <a:xfrm>
+            <a:off x="8284464" y="2468880"/>
+            <a:ext cx="3273552" cy="237744"/>
+          </a:xfrm>
+          <a:prstGeom prst="rect">
+            <a:avLst/>
+          </a:prstGeom>
+          <a:noFill/>
+          <a:ln/>
+        </p:spPr>
+        <p:txBody>
+          <a:bodyPr wrap="square" lIns="0" tIns="0" rIns="0" bIns="0" rtlCol="0" anchor="ctr"/>
+          <a:lstStyle/>
+          <a:p>
+            <a:pPr indent="0" marL="0">
+              <a:buNone/>
+            </a:pPr>
+            <a:r>
+              <a:rPr lang="en-US" sz="800" b="1" spc="50" kern="0" dirty="0">
+                <a:solidFill>
+                  <a:srgbClr val="145C68"/>
+                </a:solidFill>
+                <a:latin typeface="Calibri" pitchFamily="34" charset="0"/>
+                <a:ea typeface="Calibri" pitchFamily="34" charset="-122"/>
+                <a:cs typeface="Calibri" pitchFamily="34" charset="-120"/>
+              </a:rPr>
+              <a:t>MATERIAL</a:t>
+            </a:r>
+            <a:endParaRPr lang="en-US" sz="800" dirty="0"/>
+          </a:p>
+        </p:txBody>
+      </p:sp>
+      <p:sp>
+        <p:nvSpPr>
+          <p:cNvPr id="22" name="Text 20"/>
+          <p:cNvSpPr txBox="1"/>
+          <p:nvPr/>
+        </p:nvSpPr>
+        <p:spPr>
+          <a:xfrm>
+            <a:off x="457200" y="3017520"/>
             <a:ext cx="5349240" cy="274320"/>
           </a:xfrm>
           <a:prstGeom prst="rect">
@@ -8869,13 +8913,13 @@
       </p:sp>
       <p:sp>
         <p:nvSpPr>
-          <p:cNvPr id="19" name="Shape 17"/>
+          <p:cNvPr id="23" name="Shape 21"/>
           <p:cNvSpPr/>
           <p:nvPr/>
         </p:nvSpPr>
         <p:spPr>
           <a:xfrm>
-            <a:off x="457200" y="2807208"/>
+            <a:off x="457200" y="3310128"/>
             <a:ext cx="5349240" cy="0"/>
           </a:xfrm>
           <a:prstGeom prst="line">
@@ -8892,14 +8936,14 @@
       </p:sp>
       <p:sp>
         <p:nvSpPr>
-          <p:cNvPr id="20" name="Text 18"/>
+          <p:cNvPr id="24" name="Text 22"/>
           <p:cNvSpPr txBox="1"/>
           <p:nvPr/>
         </p:nvSpPr>
         <p:spPr>
           <a:xfrm>
-            <a:off x="566928" y="2898648"/>
-            <a:ext cx="2995574" cy="365760"/>
+            <a:off x="566928" y="3401568"/>
+            <a:ext cx="3316529" cy="365760"/>
           </a:xfrm>
           <a:prstGeom prst="rect">
             <a:avLst/>
@@ -8931,14 +8975,14 @@
       </p:sp>
       <p:sp>
         <p:nvSpPr>
-          <p:cNvPr id="21" name="Text 19"/>
+          <p:cNvPr id="25" name="Text 23"/>
           <p:cNvSpPr txBox="1"/>
           <p:nvPr/>
         </p:nvSpPr>
         <p:spPr>
           <a:xfrm>
-            <a:off x="3452774" y="2898648"/>
-            <a:ext cx="1497787" cy="365760"/>
+            <a:off x="3773729" y="3401568"/>
+            <a:ext cx="1815998" cy="365760"/>
           </a:xfrm>
           <a:prstGeom prst="rect">
             <a:avLst/>
@@ -8970,52 +9014,13 @@
       </p:sp>
       <p:sp>
         <p:nvSpPr>
-          <p:cNvPr id="22" name="Text 20"/>
-          <p:cNvSpPr txBox="1"/>
+          <p:cNvPr id="26" name="Shape 24"/>
+          <p:cNvSpPr/>
           <p:nvPr/>
         </p:nvSpPr>
         <p:spPr>
           <a:xfrm>
-            <a:off x="4840834" y="2898648"/>
-            <a:ext cx="965606" cy="365760"/>
-          </a:xfrm>
-          <a:prstGeom prst="rect">
-            <a:avLst/>
-          </a:prstGeom>
-          <a:noFill/>
-          <a:ln/>
-        </p:spPr>
-        <p:txBody>
-          <a:bodyPr wrap="square" lIns="0" tIns="0" rIns="0" bIns="0" rtlCol="0" anchor="ctr"/>
-          <a:lstStyle/>
-          <a:p>
-            <a:pPr algn="r" indent="0" marL="0">
-              <a:buNone/>
-            </a:pPr>
-            <a:r>
-              <a:rPr lang="en-US" sz="900" dirty="0">
-                <a:solidFill>
-                  <a:srgbClr val="5B6B73"/>
-                </a:solidFill>
-                <a:latin typeface="Calibri" pitchFamily="34" charset="0"/>
-                <a:ea typeface="Calibri" pitchFamily="34" charset="-122"/>
-                <a:cs typeface="Calibri" pitchFamily="34" charset="-120"/>
-              </a:rPr>
-              <a:t>41 POB</a:t>
-            </a:r>
-            <a:endParaRPr lang="en-US" sz="900" dirty="0"/>
-          </a:p>
-        </p:txBody>
-      </p:sp>
-      <p:sp>
-        <p:nvSpPr>
-          <p:cNvPr id="23" name="Shape 21"/>
-          <p:cNvSpPr/>
-          <p:nvPr/>
-        </p:nvSpPr>
-        <p:spPr>
-          <a:xfrm>
-            <a:off x="457200" y="3264408"/>
+            <a:off x="457200" y="3767328"/>
             <a:ext cx="5349240" cy="365760"/>
           </a:xfrm>
           <a:prstGeom prst="rect">
@@ -9029,14 +9034,14 @@
       </p:sp>
       <p:sp>
         <p:nvSpPr>
-          <p:cNvPr id="24" name="Text 22"/>
+          <p:cNvPr id="27" name="Text 25"/>
           <p:cNvSpPr txBox="1"/>
           <p:nvPr/>
         </p:nvSpPr>
         <p:spPr>
           <a:xfrm>
-            <a:off x="566928" y="3264408"/>
-            <a:ext cx="2995574" cy="365760"/>
+            <a:off x="566928" y="3767328"/>
+            <a:ext cx="3316529" cy="365760"/>
           </a:xfrm>
           <a:prstGeom prst="rect">
             <a:avLst/>
@@ -9068,14 +9073,14 @@
       </p:sp>
       <p:sp>
         <p:nvSpPr>
-          <p:cNvPr id="25" name="Text 23"/>
+          <p:cNvPr id="28" name="Text 26"/>
           <p:cNvSpPr txBox="1"/>
           <p:nvPr/>
         </p:nvSpPr>
         <p:spPr>
           <a:xfrm>
-            <a:off x="3452774" y="3264408"/>
-            <a:ext cx="1497787" cy="365760"/>
+            <a:off x="3773729" y="3767328"/>
+            <a:ext cx="1815998" cy="365760"/>
           </a:xfrm>
           <a:prstGeom prst="rect">
             <a:avLst/>
@@ -9099,7 +9104,7 @@
                 <a:ea typeface="Calibri" pitchFamily="34" charset="-122"/>
                 <a:cs typeface="Calibri" pitchFamily="34" charset="-120"/>
               </a:rPr>
-              <a:t>US$ 889,8 mil</a:t>
+              <a:t>US$ 1,9 mi</a:t>
             </a:r>
             <a:endParaRPr lang="en-US" sz="1100" dirty="0"/>
           </a:p>
@@ -9107,53 +9112,14 @@
       </p:sp>
       <p:sp>
         <p:nvSpPr>
-          <p:cNvPr id="26" name="Text 24"/>
+          <p:cNvPr id="29" name="Text 27"/>
           <p:cNvSpPr txBox="1"/>
           <p:nvPr/>
         </p:nvSpPr>
         <p:spPr>
           <a:xfrm>
-            <a:off x="4840834" y="3264408"/>
-            <a:ext cx="965606" cy="365760"/>
-          </a:xfrm>
-          <a:prstGeom prst="rect">
-            <a:avLst/>
-          </a:prstGeom>
-          <a:noFill/>
-          <a:ln/>
-        </p:spPr>
-        <p:txBody>
-          <a:bodyPr wrap="square" lIns="0" tIns="0" rIns="0" bIns="0" rtlCol="0" anchor="ctr"/>
-          <a:lstStyle/>
-          <a:p>
-            <a:pPr algn="r" indent="0" marL="0">
-              <a:buNone/>
-            </a:pPr>
-            <a:r>
-              <a:rPr lang="en-US" sz="900" dirty="0">
-                <a:solidFill>
-                  <a:srgbClr val="5B6B73"/>
-                </a:solidFill>
-                <a:latin typeface="Calibri" pitchFamily="34" charset="0"/>
-                <a:ea typeface="Calibri" pitchFamily="34" charset="-122"/>
-                <a:cs typeface="Calibri" pitchFamily="34" charset="-120"/>
-              </a:rPr>
-              <a:t>90 POB</a:t>
-            </a:r>
-            <a:endParaRPr lang="en-US" sz="900" dirty="0"/>
-          </a:p>
-        </p:txBody>
-      </p:sp>
-      <p:sp>
-        <p:nvSpPr>
-          <p:cNvPr id="27" name="Text 25"/>
-          <p:cNvSpPr txBox="1"/>
-          <p:nvPr/>
-        </p:nvSpPr>
-        <p:spPr>
-          <a:xfrm>
-            <a:off x="566928" y="3630168"/>
-            <a:ext cx="2995574" cy="365760"/>
+            <a:off x="566928" y="4133088"/>
+            <a:ext cx="3316529" cy="365760"/>
           </a:xfrm>
           <a:prstGeom prst="rect">
             <a:avLst/>
@@ -9185,14 +9151,14 @@
       </p:sp>
       <p:sp>
         <p:nvSpPr>
-          <p:cNvPr id="28" name="Text 26"/>
+          <p:cNvPr id="30" name="Text 28"/>
           <p:cNvSpPr txBox="1"/>
           <p:nvPr/>
         </p:nvSpPr>
         <p:spPr>
           <a:xfrm>
-            <a:off x="3452774" y="3630168"/>
-            <a:ext cx="1497787" cy="365760"/>
+            <a:off x="3773729" y="4133088"/>
+            <a:ext cx="1815998" cy="365760"/>
           </a:xfrm>
           <a:prstGeom prst="rect">
             <a:avLst/>
@@ -9224,52 +9190,13 @@
       </p:sp>
       <p:sp>
         <p:nvSpPr>
-          <p:cNvPr id="29" name="Text 27"/>
-          <p:cNvSpPr txBox="1"/>
+          <p:cNvPr id="31" name="Shape 29"/>
+          <p:cNvSpPr/>
           <p:nvPr/>
         </p:nvSpPr>
         <p:spPr>
           <a:xfrm>
-            <a:off x="4840834" y="3630168"/>
-            <a:ext cx="965606" cy="365760"/>
-          </a:xfrm>
-          <a:prstGeom prst="rect">
-            <a:avLst/>
-          </a:prstGeom>
-          <a:noFill/>
-          <a:ln/>
-        </p:spPr>
-        <p:txBody>
-          <a:bodyPr wrap="square" lIns="0" tIns="0" rIns="0" bIns="0" rtlCol="0" anchor="ctr"/>
-          <a:lstStyle/>
-          <a:p>
-            <a:pPr algn="r" indent="0" marL="0">
-              <a:buNone/>
-            </a:pPr>
-            <a:r>
-              <a:rPr lang="en-US" sz="900" dirty="0">
-                <a:solidFill>
-                  <a:srgbClr val="5B6B73"/>
-                </a:solidFill>
-                <a:latin typeface="Calibri" pitchFamily="34" charset="0"/>
-                <a:ea typeface="Calibri" pitchFamily="34" charset="-122"/>
-                <a:cs typeface="Calibri" pitchFamily="34" charset="-120"/>
-              </a:rPr>
-              <a:t>4 POB</a:t>
-            </a:r>
-            <a:endParaRPr lang="en-US" sz="900" dirty="0"/>
-          </a:p>
-        </p:txBody>
-      </p:sp>
-      <p:sp>
-        <p:nvSpPr>
-          <p:cNvPr id="30" name="Shape 28"/>
-          <p:cNvSpPr/>
-          <p:nvPr/>
-        </p:nvSpPr>
-        <p:spPr>
-          <a:xfrm>
-            <a:off x="457200" y="3995928"/>
+            <a:off x="457200" y="4498848"/>
             <a:ext cx="5349240" cy="365760"/>
           </a:xfrm>
           <a:prstGeom prst="rect">
@@ -9283,14 +9210,14 @@
       </p:sp>
       <p:sp>
         <p:nvSpPr>
-          <p:cNvPr id="31" name="Text 29"/>
+          <p:cNvPr id="32" name="Text 30"/>
           <p:cNvSpPr txBox="1"/>
           <p:nvPr/>
         </p:nvSpPr>
         <p:spPr>
           <a:xfrm>
-            <a:off x="566928" y="3995928"/>
-            <a:ext cx="2995574" cy="365760"/>
+            <a:off x="566928" y="4498848"/>
+            <a:ext cx="3316529" cy="365760"/>
           </a:xfrm>
           <a:prstGeom prst="rect">
             <a:avLst/>
@@ -9322,14 +9249,14 @@
       </p:sp>
       <p:sp>
         <p:nvSpPr>
-          <p:cNvPr id="32" name="Text 30"/>
+          <p:cNvPr id="33" name="Text 31"/>
           <p:cNvSpPr txBox="1"/>
           <p:nvPr/>
         </p:nvSpPr>
         <p:spPr>
           <a:xfrm>
-            <a:off x="3452774" y="3995928"/>
-            <a:ext cx="1497787" cy="365760"/>
+            <a:off x="3773729" y="4498848"/>
+            <a:ext cx="1815998" cy="365760"/>
           </a:xfrm>
           <a:prstGeom prst="rect">
             <a:avLst/>
@@ -9361,52 +9288,13 @@
       </p:sp>
       <p:sp>
         <p:nvSpPr>
-          <p:cNvPr id="33" name="Text 31"/>
-          <p:cNvSpPr txBox="1"/>
-          <p:nvPr/>
-        </p:nvSpPr>
-        <p:spPr>
-          <a:xfrm>
-            <a:off x="4840834" y="3995928"/>
-            <a:ext cx="965606" cy="365760"/>
-          </a:xfrm>
-          <a:prstGeom prst="rect">
-            <a:avLst/>
-          </a:prstGeom>
-          <a:noFill/>
-          <a:ln/>
-        </p:spPr>
-        <p:txBody>
-          <a:bodyPr wrap="square" lIns="0" tIns="0" rIns="0" bIns="0" rtlCol="0" anchor="ctr"/>
-          <a:lstStyle/>
-          <a:p>
-            <a:pPr algn="r" indent="0" marL="0">
-              <a:buNone/>
-            </a:pPr>
-            <a:r>
-              <a:rPr lang="en-US" sz="900" dirty="0">
-                <a:solidFill>
-                  <a:srgbClr val="5B6B73"/>
-                </a:solidFill>
-                <a:latin typeface="Calibri" pitchFamily="34" charset="0"/>
-                <a:ea typeface="Calibri" pitchFamily="34" charset="-122"/>
-                <a:cs typeface="Calibri" pitchFamily="34" charset="-120"/>
-              </a:rPr>
-              <a:t>0 POB</a:t>
-            </a:r>
-            <a:endParaRPr lang="en-US" sz="900" dirty="0"/>
-          </a:p>
-        </p:txBody>
-      </p:sp>
-      <p:sp>
-        <p:nvSpPr>
           <p:cNvPr id="34" name="Text 32"/>
           <p:cNvSpPr txBox="1"/>
           <p:nvPr/>
         </p:nvSpPr>
         <p:spPr>
           <a:xfrm>
-            <a:off x="6355080" y="2514600"/>
+            <a:off x="6355080" y="3017520"/>
             <a:ext cx="5349240" cy="274320"/>
           </a:xfrm>
           <a:prstGeom prst="rect">
@@ -9445,7 +9333,7 @@
         </p:nvSpPr>
         <p:spPr>
           <a:xfrm>
-            <a:off x="6355080" y="2807208"/>
+            <a:off x="6355080" y="3310128"/>
             <a:ext cx="5349240" cy="0"/>
           </a:xfrm>
           <a:prstGeom prst="line">
@@ -9468,8 +9356,8 @@
         </p:nvSpPr>
         <p:spPr>
           <a:xfrm>
-            <a:off x="6464808" y="2898648"/>
-            <a:ext cx="2995574" cy="365760"/>
+            <a:off x="6464808" y="3401568"/>
+            <a:ext cx="3316529" cy="365760"/>
           </a:xfrm>
           <a:prstGeom prst="rect">
             <a:avLst/>
@@ -9507,8 +9395,8 @@
         </p:nvSpPr>
         <p:spPr>
           <a:xfrm>
-            <a:off x="9350654" y="2898648"/>
-            <a:ext cx="1497787" cy="365760"/>
+            <a:off x="9671609" y="3401568"/>
+            <a:ext cx="1815998" cy="365760"/>
           </a:xfrm>
           <a:prstGeom prst="rect">
             <a:avLst/>
@@ -9540,52 +9428,13 @@
       </p:sp>
       <p:sp>
         <p:nvSpPr>
-          <p:cNvPr id="38" name="Text 36"/>
-          <p:cNvSpPr txBox="1"/>
+          <p:cNvPr id="38" name="Shape 36"/>
+          <p:cNvSpPr/>
           <p:nvPr/>
         </p:nvSpPr>
         <p:spPr>
           <a:xfrm>
-            <a:off x="10738714" y="2898648"/>
-            <a:ext cx="965606" cy="365760"/>
-          </a:xfrm>
-          <a:prstGeom prst="rect">
-            <a:avLst/>
-          </a:prstGeom>
-          <a:noFill/>
-          <a:ln/>
-        </p:spPr>
-        <p:txBody>
-          <a:bodyPr wrap="square" lIns="0" tIns="0" rIns="0" bIns="0" rtlCol="0" anchor="ctr"/>
-          <a:lstStyle/>
-          <a:p>
-            <a:pPr algn="r" indent="0" marL="0">
-              <a:buNone/>
-            </a:pPr>
-            <a:r>
-              <a:rPr lang="en-US" sz="900" dirty="0">
-                <a:solidFill>
-                  <a:srgbClr val="5B6B73"/>
-                </a:solidFill>
-                <a:latin typeface="Calibri" pitchFamily="34" charset="0"/>
-                <a:ea typeface="Calibri" pitchFamily="34" charset="-122"/>
-                <a:cs typeface="Calibri" pitchFamily="34" charset="-120"/>
-              </a:rPr>
-              <a:t>129 POB</a:t>
-            </a:r>
-            <a:endParaRPr lang="en-US" sz="900" dirty="0"/>
-          </a:p>
-        </p:txBody>
-      </p:sp>
-      <p:sp>
-        <p:nvSpPr>
-          <p:cNvPr id="39" name="Shape 37"/>
-          <p:cNvSpPr/>
-          <p:nvPr/>
-        </p:nvSpPr>
-        <p:spPr>
-          <a:xfrm>
-            <a:off x="6355080" y="3264408"/>
+            <a:off x="6355080" y="3767328"/>
             <a:ext cx="5349240" cy="365760"/>
           </a:xfrm>
           <a:prstGeom prst="rect">
@@ -9599,14 +9448,14 @@
       </p:sp>
       <p:sp>
         <p:nvSpPr>
-          <p:cNvPr id="40" name="Text 38"/>
+          <p:cNvPr id="39" name="Text 37"/>
           <p:cNvSpPr txBox="1"/>
           <p:nvPr/>
         </p:nvSpPr>
         <p:spPr>
           <a:xfrm>
-            <a:off x="6464808" y="3264408"/>
-            <a:ext cx="2995574" cy="365760"/>
+            <a:off x="6464808" y="3767328"/>
+            <a:ext cx="3316529" cy="365760"/>
           </a:xfrm>
           <a:prstGeom prst="rect">
             <a:avLst/>
@@ -9638,14 +9487,14 @@
       </p:sp>
       <p:sp>
         <p:nvSpPr>
-          <p:cNvPr id="41" name="Text 39"/>
+          <p:cNvPr id="40" name="Text 38"/>
           <p:cNvSpPr txBox="1"/>
           <p:nvPr/>
         </p:nvSpPr>
         <p:spPr>
           <a:xfrm>
-            <a:off x="9350654" y="3264408"/>
-            <a:ext cx="1497787" cy="365760"/>
+            <a:off x="9671609" y="3767328"/>
+            <a:ext cx="1815998" cy="365760"/>
           </a:xfrm>
           <a:prstGeom prst="rect">
             <a:avLst/>
@@ -9677,53 +9526,14 @@
       </p:sp>
       <p:sp>
         <p:nvSpPr>
-          <p:cNvPr id="42" name="Text 40"/>
+          <p:cNvPr id="41" name="Text 39"/>
           <p:cNvSpPr txBox="1"/>
           <p:nvPr/>
         </p:nvSpPr>
         <p:spPr>
           <a:xfrm>
-            <a:off x="10738714" y="3264408"/>
-            <a:ext cx="965606" cy="365760"/>
-          </a:xfrm>
-          <a:prstGeom prst="rect">
-            <a:avLst/>
-          </a:prstGeom>
-          <a:noFill/>
-          <a:ln/>
-        </p:spPr>
-        <p:txBody>
-          <a:bodyPr wrap="square" lIns="0" tIns="0" rIns="0" bIns="0" rtlCol="0" anchor="ctr"/>
-          <a:lstStyle/>
-          <a:p>
-            <a:pPr algn="r" indent="0" marL="0">
-              <a:buNone/>
-            </a:pPr>
-            <a:r>
-              <a:rPr lang="en-US" sz="900" dirty="0">
-                <a:solidFill>
-                  <a:srgbClr val="5B6B73"/>
-                </a:solidFill>
-                <a:latin typeface="Calibri" pitchFamily="34" charset="0"/>
-                <a:ea typeface="Calibri" pitchFamily="34" charset="-122"/>
-                <a:cs typeface="Calibri" pitchFamily="34" charset="-120"/>
-              </a:rPr>
-              <a:t>6 POB</a:t>
-            </a:r>
-            <a:endParaRPr lang="en-US" sz="900" dirty="0"/>
-          </a:p>
-        </p:txBody>
-      </p:sp>
-      <p:sp>
-        <p:nvSpPr>
-          <p:cNvPr id="43" name="Text 41"/>
-          <p:cNvSpPr txBox="1"/>
-          <p:nvPr/>
-        </p:nvSpPr>
-        <p:spPr>
-          <a:xfrm>
-            <a:off x="6464808" y="3630168"/>
-            <a:ext cx="2995574" cy="365760"/>
+            <a:off x="6464808" y="4133088"/>
+            <a:ext cx="3316529" cy="365760"/>
           </a:xfrm>
           <a:prstGeom prst="rect">
             <a:avLst/>
@@ -9755,14 +9565,14 @@
       </p:sp>
       <p:sp>
         <p:nvSpPr>
-          <p:cNvPr id="44" name="Text 42"/>
+          <p:cNvPr id="42" name="Text 40"/>
           <p:cNvSpPr txBox="1"/>
           <p:nvPr/>
         </p:nvSpPr>
         <p:spPr>
           <a:xfrm>
-            <a:off x="9350654" y="3630168"/>
-            <a:ext cx="1497787" cy="365760"/>
+            <a:off x="9671609" y="4133088"/>
+            <a:ext cx="1815998" cy="365760"/>
           </a:xfrm>
           <a:prstGeom prst="rect">
             <a:avLst/>
@@ -9794,46 +9604,7 @@
       </p:sp>
       <p:sp>
         <p:nvSpPr>
-          <p:cNvPr id="45" name="Text 43"/>
-          <p:cNvSpPr txBox="1"/>
-          <p:nvPr/>
-        </p:nvSpPr>
-        <p:spPr>
-          <a:xfrm>
-            <a:off x="10738714" y="3630168"/>
-            <a:ext cx="965606" cy="365760"/>
-          </a:xfrm>
-          <a:prstGeom prst="rect">
-            <a:avLst/>
-          </a:prstGeom>
-          <a:noFill/>
-          <a:ln/>
-        </p:spPr>
-        <p:txBody>
-          <a:bodyPr wrap="square" lIns="0" tIns="0" rIns="0" bIns="0" rtlCol="0" anchor="ctr"/>
-          <a:lstStyle/>
-          <a:p>
-            <a:pPr algn="r" indent="0" marL="0">
-              <a:buNone/>
-            </a:pPr>
-            <a:r>
-              <a:rPr lang="en-US" sz="900" dirty="0">
-                <a:solidFill>
-                  <a:srgbClr val="5B6B73"/>
-                </a:solidFill>
-                <a:latin typeface="Calibri" pitchFamily="34" charset="0"/>
-                <a:ea typeface="Calibri" pitchFamily="34" charset="-122"/>
-                <a:cs typeface="Calibri" pitchFamily="34" charset="-120"/>
-              </a:rPr>
-              <a:t>0 POB</a:t>
-            </a:r>
-            <a:endParaRPr lang="en-US" sz="900" dirty="0"/>
-          </a:p>
-        </p:txBody>
-      </p:sp>
-      <p:sp>
-        <p:nvSpPr>
-          <p:cNvPr id="46" name="Text 44"/>
+          <p:cNvPr id="43" name="Text 41"/>
           <p:cNvSpPr txBox="1"/>
           <p:nvPr/>
         </p:nvSpPr>
@@ -9864,7 +9635,7 @@
                 <a:ea typeface="Calibri" pitchFamily="34" charset="-122"/>
                 <a:cs typeface="Calibri" pitchFamily="34" charset="-120"/>
               </a:rPr>
-              <a:t>Metodologia: soma de Custo de Serviço + Custo de Material (Jan–Dez), para itens de Cost Allocation = CAPEX com status 'Contar' ou 'TA'. O total desconsidera a categoria Desenvolvimento de Produção (sem itens para este ativo).</a:t>
+              <a:t>Metodologia: soma de Custo de Serviço + Custo de Material (Jan–Dez), para itens de Cost Allocation = CAPEX com status 'Contar' (Custo Total sem TA) e 'TA' (Custo TA, valor de Parada Programada informado pela área). O total desconsidera a categoria Desenvolvimento de Produção (US$ 0, mantida na lista de Categoria apenas para referência).</a:t>
             </a:r>
             <a:endParaRPr lang="en-US" sz="850" dirty="0"/>
           </a:p>
@@ -13803,7 +13574,7 @@
                 <a:ea typeface="Calibri" pitchFamily="34" charset="-122"/>
                 <a:cs typeface="Calibri" pitchFamily="34" charset="-120"/>
               </a:rPr>
-              <a:t>Fonte: Plano Integrado · aba 'Geral - Em análise' · itens de Cost Allocation = CAPEX, status 'Contar' + 'TA'. Lista completa disponível na planilha em anexo.</a:t>
+              <a:t>Fonte: Plano Integrado · aba 'Geral - Em análise' · coluna 'Valor Total' · itens de Cost Allocation = CAPEX, status 'Contar' + 'TA'. Lista completa disponível na planilha em anexo. Extrato pendente de atualização — pode não somar exatamente ao total da Composição de Custo (o valor de TA foi atualizado manualmente).</a:t>
             </a:r>
             <a:endParaRPr lang="en-US" sz="850" dirty="0"/>
           </a:p>
@@ -13967,7 +13738,7 @@
                 <a:ea typeface="Cambria" pitchFamily="34" charset="-122"/>
                 <a:cs typeface="Cambria" pitchFamily="34" charset="-120"/>
               </a:rPr>
-              <a:t>US$ 29,5 mi</a:t>
+              <a:t>US$ 34,8 mi</a:t>
             </a:r>
             <a:endParaRPr lang="en-US" sz="2600" dirty="0"/>
           </a:p>
@@ -14873,7 +14644,7 @@
                             <a:srgbClr val="1C2B33"/>
                           </a:solidFill>
                         </a:rPr>
-                        <a:t>US$ 16,0 mi</a:t>
+                        <a:t>US$ 18,1 mi</a:t>
                       </a:r>
                       <a:endParaRPr lang="en-US" sz="1050" dirty="0"/>
                     </a:p>
@@ -15119,7 +14890,7 @@
                             <a:srgbClr val="1C2B33"/>
                           </a:solidFill>
                         </a:rPr>
-                        <a:t>US$ 7,2 mi</a:t>
+                        <a:t>US$ 8,8 mi</a:t>
                       </a:r>
                       <a:endParaRPr lang="en-US" sz="1050" dirty="0"/>
                     </a:p>
@@ -15365,7 +15136,7 @@
                             <a:srgbClr val="1C2B33"/>
                           </a:solidFill>
                         </a:rPr>
-                        <a:t>US$ 2,9 mi</a:t>
+                        <a:t>US$ 3,4 mi</a:t>
                       </a:r>
                       <a:endParaRPr lang="en-US" sz="1050" dirty="0"/>
                     </a:p>
@@ -15611,7 +15382,7 @@
                             <a:srgbClr val="1C2B33"/>
                           </a:solidFill>
                         </a:rPr>
-                        <a:t>US$ 3,4 mi</a:t>
+                        <a:t>US$ 4,4 mi</a:t>
                       </a:r>
                       <a:endParaRPr lang="en-US" sz="1050" dirty="0"/>
                     </a:p>
@@ -15857,7 +15628,7 @@
                             <a:srgbClr val="0B2A3D"/>
                           </a:solidFill>
                         </a:rPr>
-                        <a:t>US$ 29,5 mi</a:t>
+                        <a:t>US$ 34,8 mi</a:t>
                       </a:r>
                       <a:endParaRPr lang="en-US" sz="1050" dirty="0"/>
                     </a:p>
@@ -16451,7 +16222,7 @@
                 <a:ea typeface="Cambria" pitchFamily="34" charset="-122"/>
                 <a:cs typeface="Cambria" pitchFamily="34" charset="-120"/>
               </a:rPr>
-              <a:t>Composição de Custo e POB · CAPEX · FPSO Peregrino</a:t>
+              <a:t>Composição de Custo · CAPEX · FPSO Peregrino</a:t>
             </a:r>
             <a:endParaRPr lang="en-US" sz="2400" dirty="0"/>
           </a:p>
@@ -16504,16 +16275,16 @@
         </p:nvSpPr>
         <p:spPr>
           <a:xfrm>
-            <a:off x="457200" y="1234440"/>
-            <a:ext cx="2615184" cy="960120"/>
+            <a:off x="457200" y="1143000"/>
+            <a:ext cx="3749040" cy="1600200"/>
           </a:xfrm>
           <a:prstGeom prst="roundRect">
             <a:avLst>
-              <a:gd name="adj" fmla="val 7619"/>
+              <a:gd name="adj" fmla="val 5714"/>
             </a:avLst>
           </a:prstGeom>
           <a:solidFill>
-            <a:srgbClr val="F0F4F5"/>
+            <a:srgbClr val="E4EAF0"/>
           </a:solidFill>
           <a:ln/>
         </p:spPr>
@@ -16526,8 +16297,47 @@
         </p:nvSpPr>
         <p:spPr>
           <a:xfrm>
-            <a:off x="621792" y="1353312"/>
-            <a:ext cx="2286000" cy="502920"/>
+            <a:off x="713232" y="1399032"/>
+            <a:ext cx="3236976" cy="658368"/>
+          </a:xfrm>
+          <a:prstGeom prst="rect">
+            <a:avLst/>
+          </a:prstGeom>
+          <a:noFill/>
+          <a:ln/>
+        </p:spPr>
+        <p:txBody>
+          <a:bodyPr wrap="none" lIns="0" tIns="0" rIns="0" bIns="0" rtlCol="0" anchor="ctr"/>
+          <a:lstStyle/>
+          <a:p>
+            <a:pPr indent="0" marL="0">
+              <a:buNone/>
+            </a:pPr>
+            <a:r>
+              <a:rPr lang="en-US" sz="3300" b="1" dirty="0">
+                <a:solidFill>
+                  <a:srgbClr val="0B2A3D"/>
+                </a:solidFill>
+                <a:latin typeface="Cambria" pitchFamily="34" charset="0"/>
+                <a:ea typeface="Cambria" pitchFamily="34" charset="-122"/>
+                <a:cs typeface="Cambria" pitchFamily="34" charset="-120"/>
+              </a:rPr>
+              <a:t>US$ 18,1 mi</a:t>
+            </a:r>
+            <a:endParaRPr lang="en-US" sz="3300" dirty="0"/>
+          </a:p>
+        </p:txBody>
+      </p:sp>
+      <p:sp>
+        <p:nvSpPr>
+          <p:cNvPr id="8" name="Text 6"/>
+          <p:cNvSpPr txBox="1"/>
+          <p:nvPr/>
+        </p:nvSpPr>
+        <p:spPr>
+          <a:xfrm>
+            <a:off x="713232" y="2130552"/>
+            <a:ext cx="3236976" cy="274320"/>
           </a:xfrm>
           <a:prstGeom prst="rect">
             <a:avLst/>
@@ -16543,30 +16353,30 @@
               <a:buNone/>
             </a:pPr>
             <a:r>
-              <a:rPr lang="en-US" sz="2100" b="1" dirty="0">
+              <a:rPr lang="en-US" sz="1200" b="1" spc="100" kern="0" dirty="0">
                 <a:solidFill>
-                  <a:srgbClr val="0B2A3D"/>
+                  <a:srgbClr val="145C68"/>
                 </a:solidFill>
-                <a:latin typeface="Cambria" pitchFamily="34" charset="0"/>
-                <a:ea typeface="Cambria" pitchFamily="34" charset="-122"/>
-                <a:cs typeface="Cambria" pitchFamily="34" charset="-120"/>
+                <a:latin typeface="Calibri" pitchFamily="34" charset="0"/>
+                <a:ea typeface="Calibri" pitchFamily="34" charset="-122"/>
+                <a:cs typeface="Calibri" pitchFamily="34" charset="-120"/>
               </a:rPr>
-              <a:t>US$ 6,2 mi</a:t>
+              <a:t>CAPEX TOTAL 2027</a:t>
             </a:r>
-            <a:endParaRPr lang="en-US" sz="2100" dirty="0"/>
+            <a:endParaRPr lang="en-US" sz="1200" dirty="0"/>
           </a:p>
         </p:txBody>
       </p:sp>
       <p:sp>
         <p:nvSpPr>
-          <p:cNvPr id="8" name="Text 6"/>
+          <p:cNvPr id="9" name="Text 7"/>
           <p:cNvSpPr txBox="1"/>
           <p:nvPr/>
         </p:nvSpPr>
         <p:spPr>
           <a:xfrm>
-            <a:off x="621792" y="1856232"/>
-            <a:ext cx="2286000" cy="274320"/>
+            <a:off x="713232" y="2404872"/>
+            <a:ext cx="3236976" cy="274320"/>
           </a:xfrm>
           <a:prstGeom prst="rect">
             <a:avLst/>
@@ -16582,34 +16392,34 @@
               <a:buNone/>
             </a:pPr>
             <a:r>
-              <a:rPr lang="en-US" sz="850" b="1" spc="50" kern="0" dirty="0">
+              <a:rPr lang="en-US" sz="900" dirty="0">
                 <a:solidFill>
-                  <a:srgbClr val="145C68"/>
+                  <a:srgbClr val="5B6B73"/>
                 </a:solidFill>
                 <a:latin typeface="Calibri" pitchFamily="34" charset="0"/>
                 <a:ea typeface="Calibri" pitchFamily="34" charset="-122"/>
                 <a:cs typeface="Calibri" pitchFamily="34" charset="-120"/>
               </a:rPr>
-              <a:t>SERVIÇO</a:t>
+              <a:t>excl. Desenvolvimento de Produção</a:t>
             </a:r>
-            <a:endParaRPr lang="en-US" sz="850" dirty="0"/>
+            <a:endParaRPr lang="en-US" sz="900" dirty="0"/>
           </a:p>
         </p:txBody>
       </p:sp>
       <p:sp>
         <p:nvSpPr>
-          <p:cNvPr id="9" name="Shape 7"/>
+          <p:cNvPr id="10" name="Shape 8"/>
           <p:cNvSpPr/>
           <p:nvPr/>
         </p:nvSpPr>
         <p:spPr>
           <a:xfrm>
-            <a:off x="3255264" y="1234440"/>
-            <a:ext cx="2615184" cy="960120"/>
+            <a:off x="4434840" y="1143000"/>
+            <a:ext cx="3566160" cy="731520"/>
           </a:xfrm>
           <a:prstGeom prst="roundRect">
             <a:avLst>
-              <a:gd name="adj" fmla="val 7619"/>
+              <a:gd name="adj" fmla="val 10000"/>
             </a:avLst>
           </a:prstGeom>
           <a:solidFill>
@@ -16620,14 +16430,14 @@
       </p:sp>
       <p:sp>
         <p:nvSpPr>
-          <p:cNvPr id="10" name="Text 8"/>
+          <p:cNvPr id="11" name="Text 9"/>
           <p:cNvSpPr txBox="1"/>
           <p:nvPr/>
         </p:nvSpPr>
         <p:spPr>
           <a:xfrm>
-            <a:off x="3419856" y="1353312"/>
-            <a:ext cx="2286000" cy="502920"/>
+            <a:off x="4581144" y="1234440"/>
+            <a:ext cx="3273552" cy="384048"/>
           </a:xfrm>
           <a:prstGeom prst="rect">
             <a:avLst/>
@@ -16643,7 +16453,7 @@
               <a:buNone/>
             </a:pPr>
             <a:r>
-              <a:rPr lang="en-US" sz="2100" b="1" dirty="0">
+              <a:rPr lang="en-US" sz="1800" b="1" dirty="0">
                 <a:solidFill>
                   <a:srgbClr val="0B2A3D"/>
                 </a:solidFill>
@@ -16651,22 +16461,22 @@
                 <a:ea typeface="Cambria" pitchFamily="34" charset="-122"/>
                 <a:cs typeface="Cambria" pitchFamily="34" charset="-120"/>
               </a:rPr>
-              <a:t>US$ 9,8 mi</a:t>
+              <a:t>US$ 14,8 mi</a:t>
             </a:r>
-            <a:endParaRPr lang="en-US" sz="2100" dirty="0"/>
+            <a:endParaRPr lang="en-US" sz="1800" dirty="0"/>
           </a:p>
         </p:txBody>
       </p:sp>
       <p:sp>
         <p:nvSpPr>
-          <p:cNvPr id="11" name="Text 9"/>
+          <p:cNvPr id="12" name="Text 10"/>
           <p:cNvSpPr txBox="1"/>
           <p:nvPr/>
         </p:nvSpPr>
         <p:spPr>
           <a:xfrm>
-            <a:off x="3419856" y="1856232"/>
-            <a:ext cx="2286000" cy="274320"/>
+            <a:off x="4581144" y="1600200"/>
+            <a:ext cx="3273552" cy="237744"/>
           </a:xfrm>
           <a:prstGeom prst="rect">
             <a:avLst/>
@@ -16682,7 +16492,7 @@
               <a:buNone/>
             </a:pPr>
             <a:r>
-              <a:rPr lang="en-US" sz="850" b="1" spc="50" kern="0" dirty="0">
+              <a:rPr lang="en-US" sz="800" b="1" spc="50" kern="0" dirty="0">
                 <a:solidFill>
                   <a:srgbClr val="145C68"/>
                 </a:solidFill>
@@ -16690,26 +16500,26 @@
                 <a:ea typeface="Calibri" pitchFamily="34" charset="-122"/>
                 <a:cs typeface="Calibri" pitchFamily="34" charset="-120"/>
               </a:rPr>
-              <a:t>MATERIAL</a:t>
+              <a:t>CUSTO TOTAL SEM TA</a:t>
             </a:r>
-            <a:endParaRPr lang="en-US" sz="850" dirty="0"/>
+            <a:endParaRPr lang="en-US" sz="800" dirty="0"/>
           </a:p>
         </p:txBody>
       </p:sp>
       <p:sp>
         <p:nvSpPr>
-          <p:cNvPr id="12" name="Shape 10"/>
+          <p:cNvPr id="13" name="Shape 11"/>
           <p:cNvSpPr/>
           <p:nvPr/>
         </p:nvSpPr>
         <p:spPr>
           <a:xfrm>
-            <a:off x="6053328" y="1234440"/>
-            <a:ext cx="2615184" cy="960120"/>
+            <a:off x="8138160" y="1143000"/>
+            <a:ext cx="3566160" cy="731520"/>
           </a:xfrm>
           <a:prstGeom prst="roundRect">
             <a:avLst>
-              <a:gd name="adj" fmla="val 7619"/>
+              <a:gd name="adj" fmla="val 10000"/>
             </a:avLst>
           </a:prstGeom>
           <a:solidFill>
@@ -16720,14 +16530,14 @@
       </p:sp>
       <p:sp>
         <p:nvSpPr>
-          <p:cNvPr id="13" name="Text 11"/>
+          <p:cNvPr id="14" name="Text 12"/>
           <p:cNvSpPr txBox="1"/>
           <p:nvPr/>
         </p:nvSpPr>
         <p:spPr>
           <a:xfrm>
-            <a:off x="6217920" y="1353312"/>
-            <a:ext cx="2286000" cy="502920"/>
+            <a:off x="8284464" y="1234440"/>
+            <a:ext cx="3273552" cy="384048"/>
           </a:xfrm>
           <a:prstGeom prst="rect">
             <a:avLst/>
@@ -16743,7 +16553,7 @@
               <a:buNone/>
             </a:pPr>
             <a:r>
-              <a:rPr lang="en-US" sz="2100" b="1" dirty="0">
+              <a:rPr lang="en-US" sz="1800" b="1" dirty="0">
                 <a:solidFill>
                   <a:srgbClr val="0B2A3D"/>
                 </a:solidFill>
@@ -16751,22 +16561,22 @@
                 <a:ea typeface="Cambria" pitchFamily="34" charset="-122"/>
                 <a:cs typeface="Cambria" pitchFamily="34" charset="-120"/>
               </a:rPr>
-              <a:t>US$ 16,0 mi</a:t>
+              <a:t>US$ 3,3 mi</a:t>
             </a:r>
-            <a:endParaRPr lang="en-US" sz="2100" dirty="0"/>
+            <a:endParaRPr lang="en-US" sz="1800" dirty="0"/>
           </a:p>
         </p:txBody>
       </p:sp>
       <p:sp>
         <p:nvSpPr>
-          <p:cNvPr id="14" name="Text 12"/>
+          <p:cNvPr id="15" name="Text 13"/>
           <p:cNvSpPr txBox="1"/>
           <p:nvPr/>
         </p:nvSpPr>
         <p:spPr>
           <a:xfrm>
-            <a:off x="6217920" y="1856232"/>
-            <a:ext cx="2286000" cy="274320"/>
+            <a:off x="8284464" y="1600200"/>
+            <a:ext cx="3273552" cy="237744"/>
           </a:xfrm>
           <a:prstGeom prst="rect">
             <a:avLst/>
@@ -16782,7 +16592,7 @@
               <a:buNone/>
             </a:pPr>
             <a:r>
-              <a:rPr lang="en-US" sz="850" b="1" spc="50" kern="0" dirty="0">
+              <a:rPr lang="en-US" sz="800" b="1" spc="50" kern="0" dirty="0">
                 <a:solidFill>
                   <a:srgbClr val="145C68"/>
                 </a:solidFill>
@@ -16790,26 +16600,26 @@
                 <a:ea typeface="Calibri" pitchFamily="34" charset="-122"/>
                 <a:cs typeface="Calibri" pitchFamily="34" charset="-120"/>
               </a:rPr>
-              <a:t>TOTAL (EXCL. DESENV. PRODUÇÃO)</a:t>
+              <a:t>CUSTO TA (PARADA PROGRAMADA)</a:t>
             </a:r>
-            <a:endParaRPr lang="en-US" sz="850" dirty="0"/>
+            <a:endParaRPr lang="en-US" sz="800" dirty="0"/>
           </a:p>
         </p:txBody>
       </p:sp>
       <p:sp>
         <p:nvSpPr>
-          <p:cNvPr id="15" name="Shape 13"/>
+          <p:cNvPr id="16" name="Shape 14"/>
           <p:cNvSpPr/>
           <p:nvPr/>
         </p:nvSpPr>
         <p:spPr>
           <a:xfrm>
-            <a:off x="8851392" y="1234440"/>
-            <a:ext cx="2615184" cy="960120"/>
+            <a:off x="4434840" y="2011680"/>
+            <a:ext cx="3566160" cy="731520"/>
           </a:xfrm>
           <a:prstGeom prst="roundRect">
             <a:avLst>
-              <a:gd name="adj" fmla="val 7619"/>
+              <a:gd name="adj" fmla="val 10000"/>
             </a:avLst>
           </a:prstGeom>
           <a:solidFill>
@@ -16820,14 +16630,14 @@
       </p:sp>
       <p:sp>
         <p:nvSpPr>
-          <p:cNvPr id="16" name="Text 14"/>
+          <p:cNvPr id="17" name="Text 15"/>
           <p:cNvSpPr txBox="1"/>
           <p:nvPr/>
         </p:nvSpPr>
         <p:spPr>
           <a:xfrm>
-            <a:off x="9015984" y="1353312"/>
-            <a:ext cx="2286000" cy="502920"/>
+            <a:off x="4581144" y="2103120"/>
+            <a:ext cx="3273552" cy="384048"/>
           </a:xfrm>
           <a:prstGeom prst="rect">
             <a:avLst/>
@@ -16843,7 +16653,7 @@
               <a:buNone/>
             </a:pPr>
             <a:r>
-              <a:rPr lang="en-US" sz="2100" b="1" dirty="0">
+              <a:rPr lang="en-US" sz="1800" b="1" dirty="0">
                 <a:solidFill>
                   <a:srgbClr val="0B2A3D"/>
                 </a:solidFill>
@@ -16851,22 +16661,22 @@
                 <a:ea typeface="Cambria" pitchFamily="34" charset="-122"/>
                 <a:cs typeface="Cambria" pitchFamily="34" charset="-120"/>
               </a:rPr>
-              <a:t>268</a:t>
+              <a:t>US$ 6,2 mi</a:t>
             </a:r>
-            <a:endParaRPr lang="en-US" sz="2100" dirty="0"/>
+            <a:endParaRPr lang="en-US" sz="1800" dirty="0"/>
           </a:p>
         </p:txBody>
       </p:sp>
       <p:sp>
         <p:nvSpPr>
-          <p:cNvPr id="17" name="Text 15"/>
+          <p:cNvPr id="18" name="Text 16"/>
           <p:cNvSpPr txBox="1"/>
           <p:nvPr/>
         </p:nvSpPr>
         <p:spPr>
           <a:xfrm>
-            <a:off x="9015984" y="1856232"/>
-            <a:ext cx="2286000" cy="274320"/>
+            <a:off x="4581144" y="2468880"/>
+            <a:ext cx="3273552" cy="237744"/>
           </a:xfrm>
           <a:prstGeom prst="rect">
             <a:avLst/>
@@ -16882,7 +16692,7 @@
               <a:buNone/>
             </a:pPr>
             <a:r>
-              <a:rPr lang="en-US" sz="850" b="1" spc="50" kern="0" dirty="0">
+              <a:rPr lang="en-US" sz="800" b="1" spc="50" kern="0" dirty="0">
                 <a:solidFill>
                   <a:srgbClr val="145C68"/>
                 </a:solidFill>
@@ -16890,21 +16700,121 @@
                 <a:ea typeface="Calibri" pitchFamily="34" charset="-122"/>
                 <a:cs typeface="Calibri" pitchFamily="34" charset="-120"/>
               </a:rPr>
-              <a:t>POB TOTAL</a:t>
+              <a:t>SERVIÇO</a:t>
             </a:r>
-            <a:endParaRPr lang="en-US" sz="850" dirty="0"/>
+            <a:endParaRPr lang="en-US" sz="800" dirty="0"/>
           </a:p>
         </p:txBody>
       </p:sp>
       <p:sp>
         <p:nvSpPr>
-          <p:cNvPr id="18" name="Text 16"/>
+          <p:cNvPr id="19" name="Shape 17"/>
+          <p:cNvSpPr/>
+          <p:nvPr/>
+        </p:nvSpPr>
+        <p:spPr>
+          <a:xfrm>
+            <a:off x="8138160" y="2011680"/>
+            <a:ext cx="3566160" cy="731520"/>
+          </a:xfrm>
+          <a:prstGeom prst="roundRect">
+            <a:avLst>
+              <a:gd name="adj" fmla="val 10000"/>
+            </a:avLst>
+          </a:prstGeom>
+          <a:solidFill>
+            <a:srgbClr val="F0F4F5"/>
+          </a:solidFill>
+          <a:ln/>
+        </p:spPr>
+      </p:sp>
+      <p:sp>
+        <p:nvSpPr>
+          <p:cNvPr id="20" name="Text 18"/>
           <p:cNvSpPr txBox="1"/>
           <p:nvPr/>
         </p:nvSpPr>
         <p:spPr>
           <a:xfrm>
-            <a:off x="457200" y="2514600"/>
+            <a:off x="8284464" y="2103120"/>
+            <a:ext cx="3273552" cy="384048"/>
+          </a:xfrm>
+          <a:prstGeom prst="rect">
+            <a:avLst/>
+          </a:prstGeom>
+          <a:noFill/>
+          <a:ln/>
+        </p:spPr>
+        <p:txBody>
+          <a:bodyPr wrap="square" lIns="0" tIns="0" rIns="0" bIns="0" rtlCol="0" anchor="ctr"/>
+          <a:lstStyle/>
+          <a:p>
+            <a:pPr indent="0" marL="0">
+              <a:buNone/>
+            </a:pPr>
+            <a:r>
+              <a:rPr lang="en-US" sz="1800" b="1" dirty="0">
+                <a:solidFill>
+                  <a:srgbClr val="0B2A3D"/>
+                </a:solidFill>
+                <a:latin typeface="Cambria" pitchFamily="34" charset="0"/>
+                <a:ea typeface="Cambria" pitchFamily="34" charset="-122"/>
+                <a:cs typeface="Cambria" pitchFamily="34" charset="-120"/>
+              </a:rPr>
+              <a:t>US$ 9,8 mi</a:t>
+            </a:r>
+            <a:endParaRPr lang="en-US" sz="1800" dirty="0"/>
+          </a:p>
+        </p:txBody>
+      </p:sp>
+      <p:sp>
+        <p:nvSpPr>
+          <p:cNvPr id="21" name="Text 19"/>
+          <p:cNvSpPr txBox="1"/>
+          <p:nvPr/>
+        </p:nvSpPr>
+        <p:spPr>
+          <a:xfrm>
+            <a:off x="8284464" y="2468880"/>
+            <a:ext cx="3273552" cy="237744"/>
+          </a:xfrm>
+          <a:prstGeom prst="rect">
+            <a:avLst/>
+          </a:prstGeom>
+          <a:noFill/>
+          <a:ln/>
+        </p:spPr>
+        <p:txBody>
+          <a:bodyPr wrap="square" lIns="0" tIns="0" rIns="0" bIns="0" rtlCol="0" anchor="ctr"/>
+          <a:lstStyle/>
+          <a:p>
+            <a:pPr indent="0" marL="0">
+              <a:buNone/>
+            </a:pPr>
+            <a:r>
+              <a:rPr lang="en-US" sz="800" b="1" spc="50" kern="0" dirty="0">
+                <a:solidFill>
+                  <a:srgbClr val="145C68"/>
+                </a:solidFill>
+                <a:latin typeface="Calibri" pitchFamily="34" charset="0"/>
+                <a:ea typeface="Calibri" pitchFamily="34" charset="-122"/>
+                <a:cs typeface="Calibri" pitchFamily="34" charset="-120"/>
+              </a:rPr>
+              <a:t>MATERIAL</a:t>
+            </a:r>
+            <a:endParaRPr lang="en-US" sz="800" dirty="0"/>
+          </a:p>
+        </p:txBody>
+      </p:sp>
+      <p:sp>
+        <p:nvSpPr>
+          <p:cNvPr id="22" name="Text 20"/>
+          <p:cNvSpPr txBox="1"/>
+          <p:nvPr/>
+        </p:nvSpPr>
+        <p:spPr>
+          <a:xfrm>
+            <a:off x="457200" y="3017520"/>
             <a:ext cx="5349240" cy="274320"/>
           </a:xfrm>
           <a:prstGeom prst="rect">
@@ -16937,13 +16847,13 @@
       </p:sp>
       <p:sp>
         <p:nvSpPr>
-          <p:cNvPr id="19" name="Shape 17"/>
+          <p:cNvPr id="23" name="Shape 21"/>
           <p:cNvSpPr/>
           <p:nvPr/>
         </p:nvSpPr>
         <p:spPr>
           <a:xfrm>
-            <a:off x="457200" y="2807208"/>
+            <a:off x="457200" y="3310128"/>
             <a:ext cx="5349240" cy="0"/>
           </a:xfrm>
           <a:prstGeom prst="line">
@@ -16960,14 +16870,14 @@
       </p:sp>
       <p:sp>
         <p:nvSpPr>
-          <p:cNvPr id="20" name="Text 18"/>
+          <p:cNvPr id="24" name="Text 22"/>
           <p:cNvSpPr txBox="1"/>
           <p:nvPr/>
         </p:nvSpPr>
         <p:spPr>
           <a:xfrm>
-            <a:off x="566928" y="2898648"/>
-            <a:ext cx="2995574" cy="365760"/>
+            <a:off x="566928" y="3401568"/>
+            <a:ext cx="3316529" cy="365760"/>
           </a:xfrm>
           <a:prstGeom prst="rect">
             <a:avLst/>
@@ -16999,14 +16909,14 @@
       </p:sp>
       <p:sp>
         <p:nvSpPr>
-          <p:cNvPr id="21" name="Text 19"/>
+          <p:cNvPr id="25" name="Text 23"/>
           <p:cNvSpPr txBox="1"/>
           <p:nvPr/>
         </p:nvSpPr>
         <p:spPr>
           <a:xfrm>
-            <a:off x="3452774" y="2898648"/>
-            <a:ext cx="1497787" cy="365760"/>
+            <a:off x="3773729" y="3401568"/>
+            <a:ext cx="1815998" cy="365760"/>
           </a:xfrm>
           <a:prstGeom prst="rect">
             <a:avLst/>
@@ -17038,52 +16948,13 @@
       </p:sp>
       <p:sp>
         <p:nvSpPr>
-          <p:cNvPr id="22" name="Text 20"/>
-          <p:cNvSpPr txBox="1"/>
+          <p:cNvPr id="26" name="Shape 24"/>
+          <p:cNvSpPr/>
           <p:nvPr/>
         </p:nvSpPr>
         <p:spPr>
           <a:xfrm>
-            <a:off x="4840834" y="2898648"/>
-            <a:ext cx="965606" cy="365760"/>
-          </a:xfrm>
-          <a:prstGeom prst="rect">
-            <a:avLst/>
-          </a:prstGeom>
-          <a:noFill/>
-          <a:ln/>
-        </p:spPr>
-        <p:txBody>
-          <a:bodyPr wrap="square" lIns="0" tIns="0" rIns="0" bIns="0" rtlCol="0" anchor="ctr"/>
-          <a:lstStyle/>
-          <a:p>
-            <a:pPr algn="r" indent="0" marL="0">
-              <a:buNone/>
-            </a:pPr>
-            <a:r>
-              <a:rPr lang="en-US" sz="900" dirty="0">
-                <a:solidFill>
-                  <a:srgbClr val="5B6B73"/>
-                </a:solidFill>
-                <a:latin typeface="Calibri" pitchFamily="34" charset="0"/>
-                <a:ea typeface="Calibri" pitchFamily="34" charset="-122"/>
-                <a:cs typeface="Calibri" pitchFamily="34" charset="-120"/>
-              </a:rPr>
-              <a:t>92 POB</a:t>
-            </a:r>
-            <a:endParaRPr lang="en-US" sz="900" dirty="0"/>
-          </a:p>
-        </p:txBody>
-      </p:sp>
-      <p:sp>
-        <p:nvSpPr>
-          <p:cNvPr id="23" name="Shape 21"/>
-          <p:cNvSpPr/>
-          <p:nvPr/>
-        </p:nvSpPr>
-        <p:spPr>
-          <a:xfrm>
-            <a:off x="457200" y="3264408"/>
+            <a:off x="457200" y="3767328"/>
             <a:ext cx="5349240" cy="365760"/>
           </a:xfrm>
           <a:prstGeom prst="rect">
@@ -17097,14 +16968,14 @@
       </p:sp>
       <p:sp>
         <p:nvSpPr>
-          <p:cNvPr id="24" name="Text 22"/>
+          <p:cNvPr id="27" name="Text 25"/>
           <p:cNvSpPr txBox="1"/>
           <p:nvPr/>
         </p:nvSpPr>
         <p:spPr>
           <a:xfrm>
-            <a:off x="566928" y="3264408"/>
-            <a:ext cx="2995574" cy="365760"/>
+            <a:off x="566928" y="3767328"/>
+            <a:ext cx="3316529" cy="365760"/>
           </a:xfrm>
           <a:prstGeom prst="rect">
             <a:avLst/>
@@ -17136,14 +17007,14 @@
       </p:sp>
       <p:sp>
         <p:nvSpPr>
-          <p:cNvPr id="25" name="Text 23"/>
+          <p:cNvPr id="28" name="Text 26"/>
           <p:cNvSpPr txBox="1"/>
           <p:nvPr/>
         </p:nvSpPr>
         <p:spPr>
           <a:xfrm>
-            <a:off x="3452774" y="3264408"/>
-            <a:ext cx="1497787" cy="365760"/>
+            <a:off x="3773729" y="3767328"/>
+            <a:ext cx="1815998" cy="365760"/>
           </a:xfrm>
           <a:prstGeom prst="rect">
             <a:avLst/>
@@ -17175,53 +17046,14 @@
       </p:sp>
       <p:sp>
         <p:nvSpPr>
-          <p:cNvPr id="26" name="Text 24"/>
+          <p:cNvPr id="29" name="Text 27"/>
           <p:cNvSpPr txBox="1"/>
           <p:nvPr/>
         </p:nvSpPr>
         <p:spPr>
           <a:xfrm>
-            <a:off x="4840834" y="3264408"/>
-            <a:ext cx="965606" cy="365760"/>
-          </a:xfrm>
-          <a:prstGeom prst="rect">
-            <a:avLst/>
-          </a:prstGeom>
-          <a:noFill/>
-          <a:ln/>
-        </p:spPr>
-        <p:txBody>
-          <a:bodyPr wrap="square" lIns="0" tIns="0" rIns="0" bIns="0" rtlCol="0" anchor="ctr"/>
-          <a:lstStyle/>
-          <a:p>
-            <a:pPr algn="r" indent="0" marL="0">
-              <a:buNone/>
-            </a:pPr>
-            <a:r>
-              <a:rPr lang="en-US" sz="900" dirty="0">
-                <a:solidFill>
-                  <a:srgbClr val="5B6B73"/>
-                </a:solidFill>
-                <a:latin typeface="Calibri" pitchFamily="34" charset="0"/>
-                <a:ea typeface="Calibri" pitchFamily="34" charset="-122"/>
-                <a:cs typeface="Calibri" pitchFamily="34" charset="-120"/>
-              </a:rPr>
-              <a:t>16 POB</a:t>
-            </a:r>
-            <a:endParaRPr lang="en-US" sz="900" dirty="0"/>
-          </a:p>
-        </p:txBody>
-      </p:sp>
-      <p:sp>
-        <p:nvSpPr>
-          <p:cNvPr id="27" name="Text 25"/>
-          <p:cNvSpPr txBox="1"/>
-          <p:nvPr/>
-        </p:nvSpPr>
-        <p:spPr>
-          <a:xfrm>
-            <a:off x="566928" y="3630168"/>
-            <a:ext cx="2995574" cy="365760"/>
+            <a:off x="566928" y="4133088"/>
+            <a:ext cx="3316529" cy="365760"/>
           </a:xfrm>
           <a:prstGeom prst="rect">
             <a:avLst/>
@@ -17253,14 +17085,14 @@
       </p:sp>
       <p:sp>
         <p:nvSpPr>
-          <p:cNvPr id="28" name="Text 26"/>
+          <p:cNvPr id="30" name="Text 28"/>
           <p:cNvSpPr txBox="1"/>
           <p:nvPr/>
         </p:nvSpPr>
         <p:spPr>
           <a:xfrm>
-            <a:off x="3452774" y="3630168"/>
-            <a:ext cx="1497787" cy="365760"/>
+            <a:off x="3773729" y="4133088"/>
+            <a:ext cx="1815998" cy="365760"/>
           </a:xfrm>
           <a:prstGeom prst="rect">
             <a:avLst/>
@@ -17292,52 +17124,13 @@
       </p:sp>
       <p:sp>
         <p:nvSpPr>
-          <p:cNvPr id="29" name="Text 27"/>
-          <p:cNvSpPr txBox="1"/>
+          <p:cNvPr id="31" name="Shape 29"/>
+          <p:cNvSpPr/>
           <p:nvPr/>
         </p:nvSpPr>
         <p:spPr>
           <a:xfrm>
-            <a:off x="4840834" y="3630168"/>
-            <a:ext cx="965606" cy="365760"/>
-          </a:xfrm>
-          <a:prstGeom prst="rect">
-            <a:avLst/>
-          </a:prstGeom>
-          <a:noFill/>
-          <a:ln/>
-        </p:spPr>
-        <p:txBody>
-          <a:bodyPr wrap="square" lIns="0" tIns="0" rIns="0" bIns="0" rtlCol="0" anchor="ctr"/>
-          <a:lstStyle/>
-          <a:p>
-            <a:pPr algn="r" indent="0" marL="0">
-              <a:buNone/>
-            </a:pPr>
-            <a:r>
-              <a:rPr lang="en-US" sz="900" dirty="0">
-                <a:solidFill>
-                  <a:srgbClr val="5B6B73"/>
-                </a:solidFill>
-                <a:latin typeface="Calibri" pitchFamily="34" charset="0"/>
-                <a:ea typeface="Calibri" pitchFamily="34" charset="-122"/>
-                <a:cs typeface="Calibri" pitchFamily="34" charset="-120"/>
-              </a:rPr>
-              <a:t>14 POB</a:t>
-            </a:r>
-            <a:endParaRPr lang="en-US" sz="900" dirty="0"/>
-          </a:p>
-        </p:txBody>
-      </p:sp>
-      <p:sp>
-        <p:nvSpPr>
-          <p:cNvPr id="30" name="Shape 28"/>
-          <p:cNvSpPr/>
-          <p:nvPr/>
-        </p:nvSpPr>
-        <p:spPr>
-          <a:xfrm>
-            <a:off x="457200" y="3995928"/>
+            <a:off x="457200" y="4498848"/>
             <a:ext cx="5349240" cy="365760"/>
           </a:xfrm>
           <a:prstGeom prst="rect">
@@ -17351,14 +17144,14 @@
       </p:sp>
       <p:sp>
         <p:nvSpPr>
-          <p:cNvPr id="31" name="Text 29"/>
+          <p:cNvPr id="32" name="Text 30"/>
           <p:cNvSpPr txBox="1"/>
           <p:nvPr/>
         </p:nvSpPr>
         <p:spPr>
           <a:xfrm>
-            <a:off x="566928" y="3995928"/>
-            <a:ext cx="2995574" cy="365760"/>
+            <a:off x="566928" y="4498848"/>
+            <a:ext cx="3316529" cy="365760"/>
           </a:xfrm>
           <a:prstGeom prst="rect">
             <a:avLst/>
@@ -17390,14 +17183,14 @@
       </p:sp>
       <p:sp>
         <p:nvSpPr>
-          <p:cNvPr id="32" name="Text 30"/>
+          <p:cNvPr id="33" name="Text 31"/>
           <p:cNvSpPr txBox="1"/>
           <p:nvPr/>
         </p:nvSpPr>
         <p:spPr>
           <a:xfrm>
-            <a:off x="3452774" y="3995928"/>
-            <a:ext cx="1497787" cy="365760"/>
+            <a:off x="3773729" y="4498848"/>
+            <a:ext cx="1815998" cy="365760"/>
           </a:xfrm>
           <a:prstGeom prst="rect">
             <a:avLst/>
@@ -17421,7 +17214,7 @@
                 <a:ea typeface="Calibri" pitchFamily="34" charset="-122"/>
                 <a:cs typeface="Calibri" pitchFamily="34" charset="-120"/>
               </a:rPr>
-              <a:t>US$ 1,2 mi</a:t>
+              <a:t>US$ 3,3 mi</a:t>
             </a:r>
             <a:endParaRPr lang="en-US" sz="1100" dirty="0"/>
           </a:p>
@@ -17429,53 +17222,14 @@
       </p:sp>
       <p:sp>
         <p:nvSpPr>
-          <p:cNvPr id="33" name="Text 31"/>
-          <p:cNvSpPr txBox="1"/>
-          <p:nvPr/>
-        </p:nvSpPr>
-        <p:spPr>
-          <a:xfrm>
-            <a:off x="4840834" y="3995928"/>
-            <a:ext cx="965606" cy="365760"/>
-          </a:xfrm>
-          <a:prstGeom prst="rect">
-            <a:avLst/>
-          </a:prstGeom>
-          <a:noFill/>
-          <a:ln/>
-        </p:spPr>
-        <p:txBody>
-          <a:bodyPr wrap="square" lIns="0" tIns="0" rIns="0" bIns="0" rtlCol="0" anchor="ctr"/>
-          <a:lstStyle/>
-          <a:p>
-            <a:pPr algn="r" indent="0" marL="0">
-              <a:buNone/>
-            </a:pPr>
-            <a:r>
-              <a:rPr lang="en-US" sz="900" dirty="0">
-                <a:solidFill>
-                  <a:srgbClr val="5B6B73"/>
-                </a:solidFill>
-                <a:latin typeface="Calibri" pitchFamily="34" charset="0"/>
-                <a:ea typeface="Calibri" pitchFamily="34" charset="-122"/>
-                <a:cs typeface="Calibri" pitchFamily="34" charset="-120"/>
-              </a:rPr>
-              <a:t>127 POB</a:t>
-            </a:r>
-            <a:endParaRPr lang="en-US" sz="900" dirty="0"/>
-          </a:p>
-        </p:txBody>
-      </p:sp>
-      <p:sp>
-        <p:nvSpPr>
           <p:cNvPr id="34" name="Text 32"/>
           <p:cNvSpPr txBox="1"/>
           <p:nvPr/>
         </p:nvSpPr>
         <p:spPr>
           <a:xfrm>
-            <a:off x="566928" y="4361688"/>
-            <a:ext cx="2995574" cy="365760"/>
+            <a:off x="566928" y="4864608"/>
+            <a:ext cx="3316529" cy="365760"/>
           </a:xfrm>
           <a:prstGeom prst="rect">
             <a:avLst/>
@@ -17513,8 +17267,8 @@
         </p:nvSpPr>
         <p:spPr>
           <a:xfrm>
-            <a:off x="3452774" y="4361688"/>
-            <a:ext cx="1497787" cy="365760"/>
+            <a:off x="3773729" y="4864608"/>
+            <a:ext cx="1815998" cy="365760"/>
           </a:xfrm>
           <a:prstGeom prst="rect">
             <a:avLst/>
@@ -17546,52 +17300,13 @@
       </p:sp>
       <p:sp>
         <p:nvSpPr>
-          <p:cNvPr id="36" name="Text 34"/>
-          <p:cNvSpPr txBox="1"/>
+          <p:cNvPr id="36" name="Shape 34"/>
+          <p:cNvSpPr/>
           <p:nvPr/>
         </p:nvSpPr>
         <p:spPr>
           <a:xfrm>
-            <a:off x="4840834" y="4361688"/>
-            <a:ext cx="965606" cy="365760"/>
-          </a:xfrm>
-          <a:prstGeom prst="rect">
-            <a:avLst/>
-          </a:prstGeom>
-          <a:noFill/>
-          <a:ln/>
-        </p:spPr>
-        <p:txBody>
-          <a:bodyPr wrap="square" lIns="0" tIns="0" rIns="0" bIns="0" rtlCol="0" anchor="ctr"/>
-          <a:lstStyle/>
-          <a:p>
-            <a:pPr algn="r" indent="0" marL="0">
-              <a:buNone/>
-            </a:pPr>
-            <a:r>
-              <a:rPr lang="en-US" sz="900" dirty="0">
-                <a:solidFill>
-                  <a:srgbClr val="5B6B73"/>
-                </a:solidFill>
-                <a:latin typeface="Calibri" pitchFamily="34" charset="0"/>
-                <a:ea typeface="Calibri" pitchFamily="34" charset="-122"/>
-                <a:cs typeface="Calibri" pitchFamily="34" charset="-120"/>
-              </a:rPr>
-              <a:t>18 POB</a:t>
-            </a:r>
-            <a:endParaRPr lang="en-US" sz="900" dirty="0"/>
-          </a:p>
-        </p:txBody>
-      </p:sp>
-      <p:sp>
-        <p:nvSpPr>
-          <p:cNvPr id="37" name="Shape 35"/>
-          <p:cNvSpPr/>
-          <p:nvPr/>
-        </p:nvSpPr>
-        <p:spPr>
-          <a:xfrm>
-            <a:off x="457200" y="4727448"/>
+            <a:off x="457200" y="5230368"/>
             <a:ext cx="5349240" cy="365760"/>
           </a:xfrm>
           <a:prstGeom prst="rect">
@@ -17605,14 +17320,14 @@
       </p:sp>
       <p:sp>
         <p:nvSpPr>
-          <p:cNvPr id="38" name="Text 36"/>
+          <p:cNvPr id="37" name="Text 35"/>
           <p:cNvSpPr txBox="1"/>
           <p:nvPr/>
         </p:nvSpPr>
         <p:spPr>
           <a:xfrm>
-            <a:off x="566928" y="4727448"/>
-            <a:ext cx="2995574" cy="365760"/>
+            <a:off x="566928" y="5230368"/>
+            <a:ext cx="3316529" cy="365760"/>
           </a:xfrm>
           <a:prstGeom prst="rect">
             <a:avLst/>
@@ -17644,14 +17359,14 @@
       </p:sp>
       <p:sp>
         <p:nvSpPr>
-          <p:cNvPr id="39" name="Text 37"/>
+          <p:cNvPr id="38" name="Text 36"/>
           <p:cNvSpPr txBox="1"/>
           <p:nvPr/>
         </p:nvSpPr>
         <p:spPr>
           <a:xfrm>
-            <a:off x="3452774" y="4727448"/>
-            <a:ext cx="1497787" cy="365760"/>
+            <a:off x="3773729" y="5230368"/>
+            <a:ext cx="1815998" cy="365760"/>
           </a:xfrm>
           <a:prstGeom prst="rect">
             <a:avLst/>
@@ -17683,53 +17398,14 @@
       </p:sp>
       <p:sp>
         <p:nvSpPr>
-          <p:cNvPr id="40" name="Text 38"/>
+          <p:cNvPr id="39" name="Text 37"/>
           <p:cNvSpPr txBox="1"/>
           <p:nvPr/>
         </p:nvSpPr>
         <p:spPr>
           <a:xfrm>
-            <a:off x="4840834" y="4727448"/>
-            <a:ext cx="965606" cy="365760"/>
-          </a:xfrm>
-          <a:prstGeom prst="rect">
-            <a:avLst/>
-          </a:prstGeom>
-          <a:noFill/>
-          <a:ln/>
-        </p:spPr>
-        <p:txBody>
-          <a:bodyPr wrap="square" lIns="0" tIns="0" rIns="0" bIns="0" rtlCol="0" anchor="ctr"/>
-          <a:lstStyle/>
-          <a:p>
-            <a:pPr algn="r" indent="0" marL="0">
-              <a:buNone/>
-            </a:pPr>
-            <a:r>
-              <a:rPr lang="en-US" sz="900" dirty="0">
-                <a:solidFill>
-                  <a:srgbClr val="5B6B73"/>
-                </a:solidFill>
-                <a:latin typeface="Calibri" pitchFamily="34" charset="0"/>
-                <a:ea typeface="Calibri" pitchFamily="34" charset="-122"/>
-                <a:cs typeface="Calibri" pitchFamily="34" charset="-120"/>
-              </a:rPr>
-              <a:t>0 POB</a:t>
-            </a:r>
-            <a:endParaRPr lang="en-US" sz="900" dirty="0"/>
-          </a:p>
-        </p:txBody>
-      </p:sp>
-      <p:sp>
-        <p:nvSpPr>
-          <p:cNvPr id="41" name="Text 39"/>
-          <p:cNvSpPr txBox="1"/>
-          <p:nvPr/>
-        </p:nvSpPr>
-        <p:spPr>
-          <a:xfrm>
-            <a:off x="566928" y="5093208"/>
-            <a:ext cx="2995574" cy="365760"/>
+            <a:off x="566928" y="5596128"/>
+            <a:ext cx="3316529" cy="365760"/>
           </a:xfrm>
           <a:prstGeom prst="rect">
             <a:avLst/>
@@ -17761,14 +17437,14 @@
       </p:sp>
       <p:sp>
         <p:nvSpPr>
-          <p:cNvPr id="42" name="Text 40"/>
+          <p:cNvPr id="40" name="Text 38"/>
           <p:cNvSpPr txBox="1"/>
           <p:nvPr/>
         </p:nvSpPr>
         <p:spPr>
           <a:xfrm>
-            <a:off x="3452774" y="5093208"/>
-            <a:ext cx="1497787" cy="365760"/>
+            <a:off x="3773729" y="5596128"/>
+            <a:ext cx="1815998" cy="365760"/>
           </a:xfrm>
           <a:prstGeom prst="rect">
             <a:avLst/>
@@ -17800,52 +17476,13 @@
       </p:sp>
       <p:sp>
         <p:nvSpPr>
-          <p:cNvPr id="43" name="Text 41"/>
+          <p:cNvPr id="41" name="Text 39"/>
           <p:cNvSpPr txBox="1"/>
           <p:nvPr/>
         </p:nvSpPr>
         <p:spPr>
           <a:xfrm>
-            <a:off x="4840834" y="5093208"/>
-            <a:ext cx="965606" cy="365760"/>
-          </a:xfrm>
-          <a:prstGeom prst="rect">
-            <a:avLst/>
-          </a:prstGeom>
-          <a:noFill/>
-          <a:ln/>
-        </p:spPr>
-        <p:txBody>
-          <a:bodyPr wrap="square" lIns="0" tIns="0" rIns="0" bIns="0" rtlCol="0" anchor="ctr"/>
-          <a:lstStyle/>
-          <a:p>
-            <a:pPr algn="r" indent="0" marL="0">
-              <a:buNone/>
-            </a:pPr>
-            <a:r>
-              <a:rPr lang="en-US" sz="900" dirty="0">
-                <a:solidFill>
-                  <a:srgbClr val="5B6B73"/>
-                </a:solidFill>
-                <a:latin typeface="Calibri" pitchFamily="34" charset="0"/>
-                <a:ea typeface="Calibri" pitchFamily="34" charset="-122"/>
-                <a:cs typeface="Calibri" pitchFamily="34" charset="-120"/>
-              </a:rPr>
-              <a:t>1 POB</a:t>
-            </a:r>
-            <a:endParaRPr lang="en-US" sz="900" dirty="0"/>
-          </a:p>
-        </p:txBody>
-      </p:sp>
-      <p:sp>
-        <p:nvSpPr>
-          <p:cNvPr id="44" name="Text 42"/>
-          <p:cNvSpPr txBox="1"/>
-          <p:nvPr/>
-        </p:nvSpPr>
-        <p:spPr>
-          <a:xfrm>
-            <a:off x="6355080" y="2514600"/>
+            <a:off x="6355080" y="3017520"/>
             <a:ext cx="5349240" cy="274320"/>
           </a:xfrm>
           <a:prstGeom prst="rect">
@@ -17878,13 +17515,13 @@
       </p:sp>
       <p:sp>
         <p:nvSpPr>
-          <p:cNvPr id="45" name="Shape 43"/>
+          <p:cNvPr id="42" name="Shape 40"/>
           <p:cNvSpPr/>
           <p:nvPr/>
         </p:nvSpPr>
         <p:spPr>
           <a:xfrm>
-            <a:off x="6355080" y="2807208"/>
+            <a:off x="6355080" y="3310128"/>
             <a:ext cx="5349240" cy="0"/>
           </a:xfrm>
           <a:prstGeom prst="line">
@@ -17901,14 +17538,14 @@
       </p:sp>
       <p:sp>
         <p:nvSpPr>
-          <p:cNvPr id="46" name="Text 44"/>
+          <p:cNvPr id="43" name="Text 41"/>
           <p:cNvSpPr txBox="1"/>
           <p:nvPr/>
         </p:nvSpPr>
         <p:spPr>
           <a:xfrm>
-            <a:off x="6464808" y="2898648"/>
-            <a:ext cx="2995574" cy="365760"/>
+            <a:off x="6464808" y="3401568"/>
+            <a:ext cx="3316529" cy="365760"/>
           </a:xfrm>
           <a:prstGeom prst="rect">
             <a:avLst/>
@@ -17940,14 +17577,14 @@
       </p:sp>
       <p:sp>
         <p:nvSpPr>
-          <p:cNvPr id="47" name="Text 45"/>
+          <p:cNvPr id="44" name="Text 42"/>
           <p:cNvSpPr txBox="1"/>
           <p:nvPr/>
         </p:nvSpPr>
         <p:spPr>
           <a:xfrm>
-            <a:off x="9350654" y="2898648"/>
-            <a:ext cx="1497787" cy="365760"/>
+            <a:off x="9671609" y="3401568"/>
+            <a:ext cx="1815998" cy="365760"/>
           </a:xfrm>
           <a:prstGeom prst="rect">
             <a:avLst/>
@@ -17979,52 +17616,13 @@
       </p:sp>
       <p:sp>
         <p:nvSpPr>
-          <p:cNvPr id="48" name="Text 46"/>
-          <p:cNvSpPr txBox="1"/>
+          <p:cNvPr id="45" name="Shape 43"/>
+          <p:cNvSpPr/>
           <p:nvPr/>
         </p:nvSpPr>
         <p:spPr>
           <a:xfrm>
-            <a:off x="10738714" y="2898648"/>
-            <a:ext cx="965606" cy="365760"/>
-          </a:xfrm>
-          <a:prstGeom prst="rect">
-            <a:avLst/>
-          </a:prstGeom>
-          <a:noFill/>
-          <a:ln/>
-        </p:spPr>
-        <p:txBody>
-          <a:bodyPr wrap="square" lIns="0" tIns="0" rIns="0" bIns="0" rtlCol="0" anchor="ctr"/>
-          <a:lstStyle/>
-          <a:p>
-            <a:pPr algn="r" indent="0" marL="0">
-              <a:buNone/>
-            </a:pPr>
-            <a:r>
-              <a:rPr lang="en-US" sz="900" dirty="0">
-                <a:solidFill>
-                  <a:srgbClr val="5B6B73"/>
-                </a:solidFill>
-                <a:latin typeface="Calibri" pitchFamily="34" charset="0"/>
-                <a:ea typeface="Calibri" pitchFamily="34" charset="-122"/>
-                <a:cs typeface="Calibri" pitchFamily="34" charset="-120"/>
-              </a:rPr>
-              <a:t>175 POB</a:t>
-            </a:r>
-            <a:endParaRPr lang="en-US" sz="900" dirty="0"/>
-          </a:p>
-        </p:txBody>
-      </p:sp>
-      <p:sp>
-        <p:nvSpPr>
-          <p:cNvPr id="49" name="Shape 47"/>
-          <p:cNvSpPr/>
-          <p:nvPr/>
-        </p:nvSpPr>
-        <p:spPr>
-          <a:xfrm>
-            <a:off x="6355080" y="3264408"/>
+            <a:off x="6355080" y="3767328"/>
             <a:ext cx="5349240" cy="365760"/>
           </a:xfrm>
           <a:prstGeom prst="rect">
@@ -18038,14 +17636,14 @@
       </p:sp>
       <p:sp>
         <p:nvSpPr>
-          <p:cNvPr id="50" name="Text 48"/>
+          <p:cNvPr id="46" name="Text 44"/>
           <p:cNvSpPr txBox="1"/>
           <p:nvPr/>
         </p:nvSpPr>
         <p:spPr>
           <a:xfrm>
-            <a:off x="6464808" y="3264408"/>
-            <a:ext cx="2995574" cy="365760"/>
+            <a:off x="6464808" y="3767328"/>
+            <a:ext cx="3316529" cy="365760"/>
           </a:xfrm>
           <a:prstGeom prst="rect">
             <a:avLst/>
@@ -18077,14 +17675,14 @@
       </p:sp>
       <p:sp>
         <p:nvSpPr>
-          <p:cNvPr id="51" name="Text 49"/>
+          <p:cNvPr id="47" name="Text 45"/>
           <p:cNvSpPr txBox="1"/>
           <p:nvPr/>
         </p:nvSpPr>
         <p:spPr>
           <a:xfrm>
-            <a:off x="9350654" y="3264408"/>
-            <a:ext cx="1497787" cy="365760"/>
+            <a:off x="9671609" y="3767328"/>
+            <a:ext cx="1815998" cy="365760"/>
           </a:xfrm>
           <a:prstGeom prst="rect">
             <a:avLst/>
@@ -18116,53 +17714,14 @@
       </p:sp>
       <p:sp>
         <p:nvSpPr>
-          <p:cNvPr id="52" name="Text 50"/>
+          <p:cNvPr id="48" name="Text 46"/>
           <p:cNvSpPr txBox="1"/>
           <p:nvPr/>
         </p:nvSpPr>
         <p:spPr>
           <a:xfrm>
-            <a:off x="10738714" y="3264408"/>
-            <a:ext cx="965606" cy="365760"/>
-          </a:xfrm>
-          <a:prstGeom prst="rect">
-            <a:avLst/>
-          </a:prstGeom>
-          <a:noFill/>
-          <a:ln/>
-        </p:spPr>
-        <p:txBody>
-          <a:bodyPr wrap="square" lIns="0" tIns="0" rIns="0" bIns="0" rtlCol="0" anchor="ctr"/>
-          <a:lstStyle/>
-          <a:p>
-            <a:pPr algn="r" indent="0" marL="0">
-              <a:buNone/>
-            </a:pPr>
-            <a:r>
-              <a:rPr lang="en-US" sz="900" dirty="0">
-                <a:solidFill>
-                  <a:srgbClr val="5B6B73"/>
-                </a:solidFill>
-                <a:latin typeface="Calibri" pitchFamily="34" charset="0"/>
-                <a:ea typeface="Calibri" pitchFamily="34" charset="-122"/>
-                <a:cs typeface="Calibri" pitchFamily="34" charset="-120"/>
-              </a:rPr>
-              <a:t>38 POB</a:t>
-            </a:r>
-            <a:endParaRPr lang="en-US" sz="900" dirty="0"/>
-          </a:p>
-        </p:txBody>
-      </p:sp>
-      <p:sp>
-        <p:nvSpPr>
-          <p:cNvPr id="53" name="Text 51"/>
-          <p:cNvSpPr txBox="1"/>
-          <p:nvPr/>
-        </p:nvSpPr>
-        <p:spPr>
-          <a:xfrm>
-            <a:off x="6464808" y="3630168"/>
-            <a:ext cx="2995574" cy="365760"/>
+            <a:off x="6464808" y="4133088"/>
+            <a:ext cx="3316529" cy="365760"/>
           </a:xfrm>
           <a:prstGeom prst="rect">
             <a:avLst/>
@@ -18194,14 +17753,14 @@
       </p:sp>
       <p:sp>
         <p:nvSpPr>
-          <p:cNvPr id="54" name="Text 52"/>
+          <p:cNvPr id="49" name="Text 47"/>
           <p:cNvSpPr txBox="1"/>
           <p:nvPr/>
         </p:nvSpPr>
         <p:spPr>
           <a:xfrm>
-            <a:off x="9350654" y="3630168"/>
-            <a:ext cx="1497787" cy="365760"/>
+            <a:off x="9671609" y="4133088"/>
+            <a:ext cx="1815998" cy="365760"/>
           </a:xfrm>
           <a:prstGeom prst="rect">
             <a:avLst/>
@@ -18233,52 +17792,13 @@
       </p:sp>
       <p:sp>
         <p:nvSpPr>
-          <p:cNvPr id="55" name="Text 53"/>
-          <p:cNvSpPr txBox="1"/>
+          <p:cNvPr id="50" name="Shape 48"/>
+          <p:cNvSpPr/>
           <p:nvPr/>
         </p:nvSpPr>
         <p:spPr>
           <a:xfrm>
-            <a:off x="10738714" y="3630168"/>
-            <a:ext cx="965606" cy="365760"/>
-          </a:xfrm>
-          <a:prstGeom prst="rect">
-            <a:avLst/>
-          </a:prstGeom>
-          <a:noFill/>
-          <a:ln/>
-        </p:spPr>
-        <p:txBody>
-          <a:bodyPr wrap="square" lIns="0" tIns="0" rIns="0" bIns="0" rtlCol="0" anchor="ctr"/>
-          <a:lstStyle/>
-          <a:p>
-            <a:pPr algn="r" indent="0" marL="0">
-              <a:buNone/>
-            </a:pPr>
-            <a:r>
-              <a:rPr lang="en-US" sz="900" dirty="0">
-                <a:solidFill>
-                  <a:srgbClr val="5B6B73"/>
-                </a:solidFill>
-                <a:latin typeface="Calibri" pitchFamily="34" charset="0"/>
-                <a:ea typeface="Calibri" pitchFamily="34" charset="-122"/>
-                <a:cs typeface="Calibri" pitchFamily="34" charset="-120"/>
-              </a:rPr>
-              <a:t>32 POB</a:t>
-            </a:r>
-            <a:endParaRPr lang="en-US" sz="900" dirty="0"/>
-          </a:p>
-        </p:txBody>
-      </p:sp>
-      <p:sp>
-        <p:nvSpPr>
-          <p:cNvPr id="56" name="Shape 54"/>
-          <p:cNvSpPr/>
-          <p:nvPr/>
-        </p:nvSpPr>
-        <p:spPr>
-          <a:xfrm>
-            <a:off x="6355080" y="3995928"/>
+            <a:off x="6355080" y="4498848"/>
             <a:ext cx="5349240" cy="365760"/>
           </a:xfrm>
           <a:prstGeom prst="rect">
@@ -18292,14 +17812,14 @@
       </p:sp>
       <p:sp>
         <p:nvSpPr>
-          <p:cNvPr id="57" name="Text 55"/>
+          <p:cNvPr id="51" name="Text 49"/>
           <p:cNvSpPr txBox="1"/>
           <p:nvPr/>
         </p:nvSpPr>
         <p:spPr>
           <a:xfrm>
-            <a:off x="6464808" y="3995928"/>
-            <a:ext cx="2995574" cy="365760"/>
+            <a:off x="6464808" y="4498848"/>
+            <a:ext cx="3316529" cy="365760"/>
           </a:xfrm>
           <a:prstGeom prst="rect">
             <a:avLst/>
@@ -18331,14 +17851,14 @@
       </p:sp>
       <p:sp>
         <p:nvSpPr>
-          <p:cNvPr id="58" name="Text 56"/>
+          <p:cNvPr id="52" name="Text 50"/>
           <p:cNvSpPr txBox="1"/>
           <p:nvPr/>
         </p:nvSpPr>
         <p:spPr>
           <a:xfrm>
-            <a:off x="9350654" y="3995928"/>
-            <a:ext cx="1497787" cy="365760"/>
+            <a:off x="9671609" y="4498848"/>
+            <a:ext cx="1815998" cy="365760"/>
           </a:xfrm>
           <a:prstGeom prst="rect">
             <a:avLst/>
@@ -18370,46 +17890,7 @@
       </p:sp>
       <p:sp>
         <p:nvSpPr>
-          <p:cNvPr id="59" name="Text 57"/>
-          <p:cNvSpPr txBox="1"/>
-          <p:nvPr/>
-        </p:nvSpPr>
-        <p:spPr>
-          <a:xfrm>
-            <a:off x="10738714" y="3995928"/>
-            <a:ext cx="965606" cy="365760"/>
-          </a:xfrm>
-          <a:prstGeom prst="rect">
-            <a:avLst/>
-          </a:prstGeom>
-          <a:noFill/>
-          <a:ln/>
-        </p:spPr>
-        <p:txBody>
-          <a:bodyPr wrap="square" lIns="0" tIns="0" rIns="0" bIns="0" rtlCol="0" anchor="ctr"/>
-          <a:lstStyle/>
-          <a:p>
-            <a:pPr algn="r" indent="0" marL="0">
-              <a:buNone/>
-            </a:pPr>
-            <a:r>
-              <a:rPr lang="en-US" sz="900" dirty="0">
-                <a:solidFill>
-                  <a:srgbClr val="5B6B73"/>
-                </a:solidFill>
-                <a:latin typeface="Calibri" pitchFamily="34" charset="0"/>
-                <a:ea typeface="Calibri" pitchFamily="34" charset="-122"/>
-                <a:cs typeface="Calibri" pitchFamily="34" charset="-120"/>
-              </a:rPr>
-              <a:t>23 POB</a:t>
-            </a:r>
-            <a:endParaRPr lang="en-US" sz="900" dirty="0"/>
-          </a:p>
-        </p:txBody>
-      </p:sp>
-      <p:sp>
-        <p:nvSpPr>
-          <p:cNvPr id="60" name="Text 58"/>
+          <p:cNvPr id="53" name="Text 51"/>
           <p:cNvSpPr txBox="1"/>
           <p:nvPr/>
         </p:nvSpPr>
@@ -18440,7 +17921,7 @@
                 <a:ea typeface="Calibri" pitchFamily="34" charset="-122"/>
                 <a:cs typeface="Calibri" pitchFamily="34" charset="-120"/>
               </a:rPr>
-              <a:t>Metodologia: soma de Custo de Serviço + Custo de Material (Jan–Dez), para itens de Cost Allocation = CAPEX com status 'Contar' ou 'TA'. O total desconsidera a categoria Desenvolvimento de Produção (sem itens para este ativo).</a:t>
+              <a:t>Metodologia: soma de Custo de Serviço + Custo de Material (Jan–Dez), para itens de Cost Allocation = CAPEX com status 'Contar' (Custo Total sem TA) e 'TA' (Custo TA, valor de Parada Programada informado pela área). O total desconsidera a categoria Desenvolvimento de Produção (US$ 0, mantida na lista de Categoria apenas para referência).</a:t>
             </a:r>
             <a:endParaRPr lang="en-US" sz="850" dirty="0"/>
           </a:p>
@@ -22379,7 +21860,7 @@
                 <a:ea typeface="Calibri" pitchFamily="34" charset="-122"/>
                 <a:cs typeface="Calibri" pitchFamily="34" charset="-120"/>
               </a:rPr>
-              <a:t>Fonte: Plano Integrado · aba 'Geral - Em análise' · itens de Cost Allocation = CAPEX, status 'Contar' + 'TA'. Lista completa disponível na planilha em anexo.</a:t>
+              <a:t>Fonte: Plano Integrado · aba 'Geral - Em análise' · coluna 'Valor Total' · itens de Cost Allocation = CAPEX, status 'Contar' + 'TA'. Lista completa disponível na planilha em anexo. Extrato pendente de atualização — pode não somar exatamente ao total da Composição de Custo (o valor de TA foi atualizado manualmente).</a:t>
             </a:r>
             <a:endParaRPr lang="en-US" sz="850" dirty="0"/>
           </a:p>
@@ -22766,7 +22247,7 @@
                 <a:ea typeface="Cambria" pitchFamily="34" charset="-122"/>
                 <a:cs typeface="Cambria" pitchFamily="34" charset="-120"/>
               </a:rPr>
-              <a:t>Composição de Custo e POB · CAPEX · PLAT A (WHPA)</a:t>
+              <a:t>Composição de Custo · CAPEX · PLAT A (WHPA)</a:t>
             </a:r>
             <a:endParaRPr lang="en-US" sz="2400" dirty="0"/>
           </a:p>
@@ -22819,16 +22300,16 @@
         </p:nvSpPr>
         <p:spPr>
           <a:xfrm>
-            <a:off x="457200" y="1234440"/>
-            <a:ext cx="2615184" cy="960120"/>
+            <a:off x="457200" y="1143000"/>
+            <a:ext cx="3749040" cy="1600200"/>
           </a:xfrm>
           <a:prstGeom prst="roundRect">
             <a:avLst>
-              <a:gd name="adj" fmla="val 7619"/>
+              <a:gd name="adj" fmla="val 5714"/>
             </a:avLst>
           </a:prstGeom>
           <a:solidFill>
-            <a:srgbClr val="F0F4F5"/>
+            <a:srgbClr val="E4EAF0"/>
           </a:solidFill>
           <a:ln/>
         </p:spPr>
@@ -22841,8 +22322,47 @@
         </p:nvSpPr>
         <p:spPr>
           <a:xfrm>
-            <a:off x="621792" y="1353312"/>
-            <a:ext cx="2286000" cy="502920"/>
+            <a:off x="713232" y="1399032"/>
+            <a:ext cx="3236976" cy="658368"/>
+          </a:xfrm>
+          <a:prstGeom prst="rect">
+            <a:avLst/>
+          </a:prstGeom>
+          <a:noFill/>
+          <a:ln/>
+        </p:spPr>
+        <p:txBody>
+          <a:bodyPr wrap="none" lIns="0" tIns="0" rIns="0" bIns="0" rtlCol="0" anchor="ctr"/>
+          <a:lstStyle/>
+          <a:p>
+            <a:pPr indent="0" marL="0">
+              <a:buNone/>
+            </a:pPr>
+            <a:r>
+              <a:rPr lang="en-US" sz="3300" b="1" dirty="0">
+                <a:solidFill>
+                  <a:srgbClr val="0B2A3D"/>
+                </a:solidFill>
+                <a:latin typeface="Cambria" pitchFamily="34" charset="0"/>
+                <a:ea typeface="Cambria" pitchFamily="34" charset="-122"/>
+                <a:cs typeface="Cambria" pitchFamily="34" charset="-120"/>
+              </a:rPr>
+              <a:t>US$ 8,8 mi</a:t>
+            </a:r>
+            <a:endParaRPr lang="en-US" sz="3300" dirty="0"/>
+          </a:p>
+        </p:txBody>
+      </p:sp>
+      <p:sp>
+        <p:nvSpPr>
+          <p:cNvPr id="8" name="Text 6"/>
+          <p:cNvSpPr txBox="1"/>
+          <p:nvPr/>
+        </p:nvSpPr>
+        <p:spPr>
+          <a:xfrm>
+            <a:off x="713232" y="2130552"/>
+            <a:ext cx="3236976" cy="274320"/>
           </a:xfrm>
           <a:prstGeom prst="rect">
             <a:avLst/>
@@ -22858,30 +22378,30 @@
               <a:buNone/>
             </a:pPr>
             <a:r>
-              <a:rPr lang="en-US" sz="2100" b="1" dirty="0">
+              <a:rPr lang="en-US" sz="1200" b="1" spc="100" kern="0" dirty="0">
                 <a:solidFill>
-                  <a:srgbClr val="0B2A3D"/>
+                  <a:srgbClr val="145C68"/>
                 </a:solidFill>
-                <a:latin typeface="Cambria" pitchFamily="34" charset="0"/>
-                <a:ea typeface="Cambria" pitchFamily="34" charset="-122"/>
-                <a:cs typeface="Cambria" pitchFamily="34" charset="-120"/>
+                <a:latin typeface="Calibri" pitchFamily="34" charset="0"/>
+                <a:ea typeface="Calibri" pitchFamily="34" charset="-122"/>
+                <a:cs typeface="Calibri" pitchFamily="34" charset="-120"/>
               </a:rPr>
-              <a:t>US$ 5,9 mi</a:t>
+              <a:t>CAPEX TOTAL 2027</a:t>
             </a:r>
-            <a:endParaRPr lang="en-US" sz="2100" dirty="0"/>
+            <a:endParaRPr lang="en-US" sz="1200" dirty="0"/>
           </a:p>
         </p:txBody>
       </p:sp>
       <p:sp>
         <p:nvSpPr>
-          <p:cNvPr id="8" name="Text 6"/>
+          <p:cNvPr id="9" name="Text 7"/>
           <p:cNvSpPr txBox="1"/>
           <p:nvPr/>
         </p:nvSpPr>
         <p:spPr>
           <a:xfrm>
-            <a:off x="621792" y="1856232"/>
-            <a:ext cx="2286000" cy="274320"/>
+            <a:off x="713232" y="2404872"/>
+            <a:ext cx="3236976" cy="274320"/>
           </a:xfrm>
           <a:prstGeom prst="rect">
             <a:avLst/>
@@ -22897,34 +22417,34 @@
               <a:buNone/>
             </a:pPr>
             <a:r>
-              <a:rPr lang="en-US" sz="850" b="1" spc="50" kern="0" dirty="0">
+              <a:rPr lang="en-US" sz="900" dirty="0">
                 <a:solidFill>
-                  <a:srgbClr val="145C68"/>
+                  <a:srgbClr val="5B6B73"/>
                 </a:solidFill>
                 <a:latin typeface="Calibri" pitchFamily="34" charset="0"/>
                 <a:ea typeface="Calibri" pitchFamily="34" charset="-122"/>
                 <a:cs typeface="Calibri" pitchFamily="34" charset="-120"/>
               </a:rPr>
-              <a:t>SERVIÇO</a:t>
+              <a:t>excl. Desenvolvimento de Produção</a:t>
             </a:r>
-            <a:endParaRPr lang="en-US" sz="850" dirty="0"/>
+            <a:endParaRPr lang="en-US" sz="900" dirty="0"/>
           </a:p>
         </p:txBody>
       </p:sp>
       <p:sp>
         <p:nvSpPr>
-          <p:cNvPr id="9" name="Shape 7"/>
+          <p:cNvPr id="10" name="Shape 8"/>
           <p:cNvSpPr/>
           <p:nvPr/>
         </p:nvSpPr>
         <p:spPr>
           <a:xfrm>
-            <a:off x="3255264" y="1234440"/>
-            <a:ext cx="2615184" cy="960120"/>
+            <a:off x="4434840" y="1143000"/>
+            <a:ext cx="3566160" cy="731520"/>
           </a:xfrm>
           <a:prstGeom prst="roundRect">
             <a:avLst>
-              <a:gd name="adj" fmla="val 7619"/>
+              <a:gd name="adj" fmla="val 10000"/>
             </a:avLst>
           </a:prstGeom>
           <a:solidFill>
@@ -22935,14 +22455,14 @@
       </p:sp>
       <p:sp>
         <p:nvSpPr>
-          <p:cNvPr id="10" name="Text 8"/>
+          <p:cNvPr id="11" name="Text 9"/>
           <p:cNvSpPr txBox="1"/>
           <p:nvPr/>
         </p:nvSpPr>
         <p:spPr>
           <a:xfrm>
-            <a:off x="3419856" y="1353312"/>
-            <a:ext cx="2286000" cy="502920"/>
+            <a:off x="4581144" y="1234440"/>
+            <a:ext cx="3273552" cy="384048"/>
           </a:xfrm>
           <a:prstGeom prst="rect">
             <a:avLst/>
@@ -22958,7 +22478,7 @@
               <a:buNone/>
             </a:pPr>
             <a:r>
-              <a:rPr lang="en-US" sz="2100" b="1" dirty="0">
+              <a:rPr lang="en-US" sz="1800" b="1" dirty="0">
                 <a:solidFill>
                   <a:srgbClr val="0B2A3D"/>
                 </a:solidFill>
@@ -22966,22 +22486,22 @@
                 <a:ea typeface="Cambria" pitchFamily="34" charset="-122"/>
                 <a:cs typeface="Cambria" pitchFamily="34" charset="-120"/>
               </a:rPr>
-              <a:t>US$ 1,3 mi</a:t>
+              <a:t>US$ 6,3 mi</a:t>
             </a:r>
-            <a:endParaRPr lang="en-US" sz="2100" dirty="0"/>
+            <a:endParaRPr lang="en-US" sz="1800" dirty="0"/>
           </a:p>
         </p:txBody>
       </p:sp>
       <p:sp>
         <p:nvSpPr>
-          <p:cNvPr id="11" name="Text 9"/>
+          <p:cNvPr id="12" name="Text 10"/>
           <p:cNvSpPr txBox="1"/>
           <p:nvPr/>
         </p:nvSpPr>
         <p:spPr>
           <a:xfrm>
-            <a:off x="3419856" y="1856232"/>
-            <a:ext cx="2286000" cy="274320"/>
+            <a:off x="4581144" y="1600200"/>
+            <a:ext cx="3273552" cy="237744"/>
           </a:xfrm>
           <a:prstGeom prst="rect">
             <a:avLst/>
@@ -22997,7 +22517,7 @@
               <a:buNone/>
             </a:pPr>
             <a:r>
-              <a:rPr lang="en-US" sz="850" b="1" spc="50" kern="0" dirty="0">
+              <a:rPr lang="en-US" sz="800" b="1" spc="50" kern="0" dirty="0">
                 <a:solidFill>
                   <a:srgbClr val="145C68"/>
                 </a:solidFill>
@@ -23005,26 +22525,26 @@
                 <a:ea typeface="Calibri" pitchFamily="34" charset="-122"/>
                 <a:cs typeface="Calibri" pitchFamily="34" charset="-120"/>
               </a:rPr>
-              <a:t>MATERIAL</a:t>
+              <a:t>CUSTO TOTAL SEM TA</a:t>
             </a:r>
-            <a:endParaRPr lang="en-US" sz="850" dirty="0"/>
+            <a:endParaRPr lang="en-US" sz="800" dirty="0"/>
           </a:p>
         </p:txBody>
       </p:sp>
       <p:sp>
         <p:nvSpPr>
-          <p:cNvPr id="12" name="Shape 10"/>
+          <p:cNvPr id="13" name="Shape 11"/>
           <p:cNvSpPr/>
           <p:nvPr/>
         </p:nvSpPr>
         <p:spPr>
           <a:xfrm>
-            <a:off x="6053328" y="1234440"/>
-            <a:ext cx="2615184" cy="960120"/>
+            <a:off x="8138160" y="1143000"/>
+            <a:ext cx="3566160" cy="731520"/>
           </a:xfrm>
           <a:prstGeom prst="roundRect">
             <a:avLst>
-              <a:gd name="adj" fmla="val 7619"/>
+              <a:gd name="adj" fmla="val 10000"/>
             </a:avLst>
           </a:prstGeom>
           <a:solidFill>
@@ -23035,14 +22555,14 @@
       </p:sp>
       <p:sp>
         <p:nvSpPr>
-          <p:cNvPr id="13" name="Text 11"/>
+          <p:cNvPr id="14" name="Text 12"/>
           <p:cNvSpPr txBox="1"/>
           <p:nvPr/>
         </p:nvSpPr>
         <p:spPr>
           <a:xfrm>
-            <a:off x="6217920" y="1353312"/>
-            <a:ext cx="2286000" cy="502920"/>
+            <a:off x="8284464" y="1234440"/>
+            <a:ext cx="3273552" cy="384048"/>
           </a:xfrm>
           <a:prstGeom prst="rect">
             <a:avLst/>
@@ -23058,7 +22578,7 @@
               <a:buNone/>
             </a:pPr>
             <a:r>
-              <a:rPr lang="en-US" sz="2100" b="1" dirty="0">
+              <a:rPr lang="en-US" sz="1800" b="1" dirty="0">
                 <a:solidFill>
                   <a:srgbClr val="0B2A3D"/>
                 </a:solidFill>
@@ -23066,22 +22586,22 @@
                 <a:ea typeface="Cambria" pitchFamily="34" charset="-122"/>
                 <a:cs typeface="Cambria" pitchFamily="34" charset="-120"/>
               </a:rPr>
-              <a:t>US$ 7,2 mi</a:t>
+              <a:t>US$ 2,5 mi</a:t>
             </a:r>
-            <a:endParaRPr lang="en-US" sz="2100" dirty="0"/>
+            <a:endParaRPr lang="en-US" sz="1800" dirty="0"/>
           </a:p>
         </p:txBody>
       </p:sp>
       <p:sp>
         <p:nvSpPr>
-          <p:cNvPr id="14" name="Text 12"/>
+          <p:cNvPr id="15" name="Text 13"/>
           <p:cNvSpPr txBox="1"/>
           <p:nvPr/>
         </p:nvSpPr>
         <p:spPr>
           <a:xfrm>
-            <a:off x="6217920" y="1856232"/>
-            <a:ext cx="2286000" cy="274320"/>
+            <a:off x="8284464" y="1600200"/>
+            <a:ext cx="3273552" cy="237744"/>
           </a:xfrm>
           <a:prstGeom prst="rect">
             <a:avLst/>
@@ -23097,7 +22617,7 @@
               <a:buNone/>
             </a:pPr>
             <a:r>
-              <a:rPr lang="en-US" sz="850" b="1" spc="50" kern="0" dirty="0">
+              <a:rPr lang="en-US" sz="800" b="1" spc="50" kern="0" dirty="0">
                 <a:solidFill>
                   <a:srgbClr val="145C68"/>
                 </a:solidFill>
@@ -23105,26 +22625,26 @@
                 <a:ea typeface="Calibri" pitchFamily="34" charset="-122"/>
                 <a:cs typeface="Calibri" pitchFamily="34" charset="-120"/>
               </a:rPr>
-              <a:t>TOTAL (EXCL. DESENV. PRODUÇÃO)</a:t>
+              <a:t>CUSTO TA (PARADA PROGRAMADA)</a:t>
             </a:r>
-            <a:endParaRPr lang="en-US" sz="850" dirty="0"/>
+            <a:endParaRPr lang="en-US" sz="800" dirty="0"/>
           </a:p>
         </p:txBody>
       </p:sp>
       <p:sp>
         <p:nvSpPr>
-          <p:cNvPr id="15" name="Shape 13"/>
+          <p:cNvPr id="16" name="Shape 14"/>
           <p:cNvSpPr/>
           <p:nvPr/>
         </p:nvSpPr>
         <p:spPr>
           <a:xfrm>
-            <a:off x="8851392" y="1234440"/>
-            <a:ext cx="2615184" cy="960120"/>
+            <a:off x="4434840" y="2011680"/>
+            <a:ext cx="3566160" cy="731520"/>
           </a:xfrm>
           <a:prstGeom prst="roundRect">
             <a:avLst>
-              <a:gd name="adj" fmla="val 7619"/>
+              <a:gd name="adj" fmla="val 10000"/>
             </a:avLst>
           </a:prstGeom>
           <a:solidFill>
@@ -23135,14 +22655,14 @@
       </p:sp>
       <p:sp>
         <p:nvSpPr>
-          <p:cNvPr id="16" name="Text 14"/>
+          <p:cNvPr id="17" name="Text 15"/>
           <p:cNvSpPr txBox="1"/>
           <p:nvPr/>
         </p:nvSpPr>
         <p:spPr>
           <a:xfrm>
-            <a:off x="9015984" y="1353312"/>
-            <a:ext cx="2286000" cy="502920"/>
+            <a:off x="4581144" y="2103120"/>
+            <a:ext cx="3273552" cy="384048"/>
           </a:xfrm>
           <a:prstGeom prst="rect">
             <a:avLst/>
@@ -23158,7 +22678,7 @@
               <a:buNone/>
             </a:pPr>
             <a:r>
-              <a:rPr lang="en-US" sz="2100" b="1" dirty="0">
+              <a:rPr lang="en-US" sz="1800" b="1" dirty="0">
                 <a:solidFill>
                   <a:srgbClr val="0B2A3D"/>
                 </a:solidFill>
@@ -23166,22 +22686,22 @@
                 <a:ea typeface="Cambria" pitchFamily="34" charset="-122"/>
                 <a:cs typeface="Cambria" pitchFamily="34" charset="-120"/>
               </a:rPr>
-              <a:t>182</a:t>
+              <a:t>US$ 5,9 mi</a:t>
             </a:r>
-            <a:endParaRPr lang="en-US" sz="2100" dirty="0"/>
+            <a:endParaRPr lang="en-US" sz="1800" dirty="0"/>
           </a:p>
         </p:txBody>
       </p:sp>
       <p:sp>
         <p:nvSpPr>
-          <p:cNvPr id="17" name="Text 15"/>
+          <p:cNvPr id="18" name="Text 16"/>
           <p:cNvSpPr txBox="1"/>
           <p:nvPr/>
         </p:nvSpPr>
         <p:spPr>
           <a:xfrm>
-            <a:off x="9015984" y="1856232"/>
-            <a:ext cx="2286000" cy="274320"/>
+            <a:off x="4581144" y="2468880"/>
+            <a:ext cx="3273552" cy="237744"/>
           </a:xfrm>
           <a:prstGeom prst="rect">
             <a:avLst/>
@@ -23197,7 +22717,7 @@
               <a:buNone/>
             </a:pPr>
             <a:r>
-              <a:rPr lang="en-US" sz="850" b="1" spc="50" kern="0" dirty="0">
+              <a:rPr lang="en-US" sz="800" b="1" spc="50" kern="0" dirty="0">
                 <a:solidFill>
                   <a:srgbClr val="145C68"/>
                 </a:solidFill>
@@ -23205,21 +22725,121 @@
                 <a:ea typeface="Calibri" pitchFamily="34" charset="-122"/>
                 <a:cs typeface="Calibri" pitchFamily="34" charset="-120"/>
               </a:rPr>
-              <a:t>POB TOTAL</a:t>
+              <a:t>SERVIÇO</a:t>
             </a:r>
-            <a:endParaRPr lang="en-US" sz="850" dirty="0"/>
+            <a:endParaRPr lang="en-US" sz="800" dirty="0"/>
           </a:p>
         </p:txBody>
       </p:sp>
       <p:sp>
         <p:nvSpPr>
-          <p:cNvPr id="18" name="Text 16"/>
+          <p:cNvPr id="19" name="Shape 17"/>
+          <p:cNvSpPr/>
+          <p:nvPr/>
+        </p:nvSpPr>
+        <p:spPr>
+          <a:xfrm>
+            <a:off x="8138160" y="2011680"/>
+            <a:ext cx="3566160" cy="731520"/>
+          </a:xfrm>
+          <a:prstGeom prst="roundRect">
+            <a:avLst>
+              <a:gd name="adj" fmla="val 10000"/>
+            </a:avLst>
+          </a:prstGeom>
+          <a:solidFill>
+            <a:srgbClr val="F0F4F5"/>
+          </a:solidFill>
+          <a:ln/>
+        </p:spPr>
+      </p:sp>
+      <p:sp>
+        <p:nvSpPr>
+          <p:cNvPr id="20" name="Text 18"/>
           <p:cNvSpPr txBox="1"/>
           <p:nvPr/>
         </p:nvSpPr>
         <p:spPr>
           <a:xfrm>
-            <a:off x="457200" y="2514600"/>
+            <a:off x="8284464" y="2103120"/>
+            <a:ext cx="3273552" cy="384048"/>
+          </a:xfrm>
+          <a:prstGeom prst="rect">
+            <a:avLst/>
+          </a:prstGeom>
+          <a:noFill/>
+          <a:ln/>
+        </p:spPr>
+        <p:txBody>
+          <a:bodyPr wrap="square" lIns="0" tIns="0" rIns="0" bIns="0" rtlCol="0" anchor="ctr"/>
+          <a:lstStyle/>
+          <a:p>
+            <a:pPr indent="0" marL="0">
+              <a:buNone/>
+            </a:pPr>
+            <a:r>
+              <a:rPr lang="en-US" sz="1800" b="1" dirty="0">
+                <a:solidFill>
+                  <a:srgbClr val="0B2A3D"/>
+                </a:solidFill>
+                <a:latin typeface="Cambria" pitchFamily="34" charset="0"/>
+                <a:ea typeface="Cambria" pitchFamily="34" charset="-122"/>
+                <a:cs typeface="Cambria" pitchFamily="34" charset="-120"/>
+              </a:rPr>
+              <a:t>US$ 1,3 mi</a:t>
+            </a:r>
+            <a:endParaRPr lang="en-US" sz="1800" dirty="0"/>
+          </a:p>
+        </p:txBody>
+      </p:sp>
+      <p:sp>
+        <p:nvSpPr>
+          <p:cNvPr id="21" name="Text 19"/>
+          <p:cNvSpPr txBox="1"/>
+          <p:nvPr/>
+        </p:nvSpPr>
+        <p:spPr>
+          <a:xfrm>
+            <a:off x="8284464" y="2468880"/>
+            <a:ext cx="3273552" cy="237744"/>
+          </a:xfrm>
+          <a:prstGeom prst="rect">
+            <a:avLst/>
+          </a:prstGeom>
+          <a:noFill/>
+          <a:ln/>
+        </p:spPr>
+        <p:txBody>
+          <a:bodyPr wrap="square" lIns="0" tIns="0" rIns="0" bIns="0" rtlCol="0" anchor="ctr"/>
+          <a:lstStyle/>
+          <a:p>
+            <a:pPr indent="0" marL="0">
+              <a:buNone/>
+            </a:pPr>
+            <a:r>
+              <a:rPr lang="en-US" sz="800" b="1" spc="50" kern="0" dirty="0">
+                <a:solidFill>
+                  <a:srgbClr val="145C68"/>
+                </a:solidFill>
+                <a:latin typeface="Calibri" pitchFamily="34" charset="0"/>
+                <a:ea typeface="Calibri" pitchFamily="34" charset="-122"/>
+                <a:cs typeface="Calibri" pitchFamily="34" charset="-120"/>
+              </a:rPr>
+              <a:t>MATERIAL</a:t>
+            </a:r>
+            <a:endParaRPr lang="en-US" sz="800" dirty="0"/>
+          </a:p>
+        </p:txBody>
+      </p:sp>
+      <p:sp>
+        <p:nvSpPr>
+          <p:cNvPr id="22" name="Text 20"/>
+          <p:cNvSpPr txBox="1"/>
+          <p:nvPr/>
+        </p:nvSpPr>
+        <p:spPr>
+          <a:xfrm>
+            <a:off x="457200" y="3017520"/>
             <a:ext cx="5349240" cy="274320"/>
           </a:xfrm>
           <a:prstGeom prst="rect">
@@ -23252,13 +22872,13 @@
       </p:sp>
       <p:sp>
         <p:nvSpPr>
-          <p:cNvPr id="19" name="Shape 17"/>
+          <p:cNvPr id="23" name="Shape 21"/>
           <p:cNvSpPr/>
           <p:nvPr/>
         </p:nvSpPr>
         <p:spPr>
           <a:xfrm>
-            <a:off x="457200" y="2807208"/>
+            <a:off x="457200" y="3310128"/>
             <a:ext cx="5349240" cy="0"/>
           </a:xfrm>
           <a:prstGeom prst="line">
@@ -23275,14 +22895,14 @@
       </p:sp>
       <p:sp>
         <p:nvSpPr>
-          <p:cNvPr id="20" name="Text 18"/>
+          <p:cNvPr id="24" name="Text 22"/>
           <p:cNvSpPr txBox="1"/>
           <p:nvPr/>
         </p:nvSpPr>
         <p:spPr>
           <a:xfrm>
-            <a:off x="566928" y="2898648"/>
-            <a:ext cx="2995574" cy="365760"/>
+            <a:off x="566928" y="3401568"/>
+            <a:ext cx="3316529" cy="365760"/>
           </a:xfrm>
           <a:prstGeom prst="rect">
             <a:avLst/>
@@ -23314,14 +22934,14 @@
       </p:sp>
       <p:sp>
         <p:nvSpPr>
-          <p:cNvPr id="21" name="Text 19"/>
+          <p:cNvPr id="25" name="Text 23"/>
           <p:cNvSpPr txBox="1"/>
           <p:nvPr/>
         </p:nvSpPr>
         <p:spPr>
           <a:xfrm>
-            <a:off x="3452774" y="2898648"/>
-            <a:ext cx="1497787" cy="365760"/>
+            <a:off x="3773729" y="3401568"/>
+            <a:ext cx="1815998" cy="365760"/>
           </a:xfrm>
           <a:prstGeom prst="rect">
             <a:avLst/>
@@ -23353,52 +22973,13 @@
       </p:sp>
       <p:sp>
         <p:nvSpPr>
-          <p:cNvPr id="22" name="Text 20"/>
-          <p:cNvSpPr txBox="1"/>
+          <p:cNvPr id="26" name="Shape 24"/>
+          <p:cNvSpPr/>
           <p:nvPr/>
         </p:nvSpPr>
         <p:spPr>
           <a:xfrm>
-            <a:off x="4840834" y="2898648"/>
-            <a:ext cx="965606" cy="365760"/>
-          </a:xfrm>
-          <a:prstGeom prst="rect">
-            <a:avLst/>
-          </a:prstGeom>
-          <a:noFill/>
-          <a:ln/>
-        </p:spPr>
-        <p:txBody>
-          <a:bodyPr wrap="square" lIns="0" tIns="0" rIns="0" bIns="0" rtlCol="0" anchor="ctr"/>
-          <a:lstStyle/>
-          <a:p>
-            <a:pPr algn="r" indent="0" marL="0">
-              <a:buNone/>
-            </a:pPr>
-            <a:r>
-              <a:rPr lang="en-US" sz="900" dirty="0">
-                <a:solidFill>
-                  <a:srgbClr val="5B6B73"/>
-                </a:solidFill>
-                <a:latin typeface="Calibri" pitchFamily="34" charset="0"/>
-                <a:ea typeface="Calibri" pitchFamily="34" charset="-122"/>
-                <a:cs typeface="Calibri" pitchFamily="34" charset="-120"/>
-              </a:rPr>
-              <a:t>20 POB</a:t>
-            </a:r>
-            <a:endParaRPr lang="en-US" sz="900" dirty="0"/>
-          </a:p>
-        </p:txBody>
-      </p:sp>
-      <p:sp>
-        <p:nvSpPr>
-          <p:cNvPr id="23" name="Shape 21"/>
-          <p:cNvSpPr/>
-          <p:nvPr/>
-        </p:nvSpPr>
-        <p:spPr>
-          <a:xfrm>
-            <a:off x="457200" y="3264408"/>
+            <a:off x="457200" y="3767328"/>
             <a:ext cx="5349240" cy="365760"/>
           </a:xfrm>
           <a:prstGeom prst="rect">
@@ -23412,14 +22993,14 @@
       </p:sp>
       <p:sp>
         <p:nvSpPr>
-          <p:cNvPr id="24" name="Text 22"/>
+          <p:cNvPr id="27" name="Text 25"/>
           <p:cNvSpPr txBox="1"/>
           <p:nvPr/>
         </p:nvSpPr>
         <p:spPr>
           <a:xfrm>
-            <a:off x="566928" y="3264408"/>
-            <a:ext cx="2995574" cy="365760"/>
+            <a:off x="566928" y="3767328"/>
+            <a:ext cx="3316529" cy="365760"/>
           </a:xfrm>
           <a:prstGeom prst="rect">
             <a:avLst/>
@@ -23451,14 +23032,14 @@
       </p:sp>
       <p:sp>
         <p:nvSpPr>
-          <p:cNvPr id="25" name="Text 23"/>
+          <p:cNvPr id="28" name="Text 26"/>
           <p:cNvSpPr txBox="1"/>
           <p:nvPr/>
         </p:nvSpPr>
         <p:spPr>
           <a:xfrm>
-            <a:off x="3452774" y="3264408"/>
-            <a:ext cx="1497787" cy="365760"/>
+            <a:off x="3773729" y="3767328"/>
+            <a:ext cx="1815998" cy="365760"/>
           </a:xfrm>
           <a:prstGeom prst="rect">
             <a:avLst/>
@@ -23490,53 +23071,14 @@
       </p:sp>
       <p:sp>
         <p:nvSpPr>
-          <p:cNvPr id="26" name="Text 24"/>
+          <p:cNvPr id="29" name="Text 27"/>
           <p:cNvSpPr txBox="1"/>
           <p:nvPr/>
         </p:nvSpPr>
         <p:spPr>
           <a:xfrm>
-            <a:off x="4840834" y="3264408"/>
-            <a:ext cx="965606" cy="365760"/>
-          </a:xfrm>
-          <a:prstGeom prst="rect">
-            <a:avLst/>
-          </a:prstGeom>
-          <a:noFill/>
-          <a:ln/>
-        </p:spPr>
-        <p:txBody>
-          <a:bodyPr wrap="square" lIns="0" tIns="0" rIns="0" bIns="0" rtlCol="0" anchor="ctr"/>
-          <a:lstStyle/>
-          <a:p>
-            <a:pPr algn="r" indent="0" marL="0">
-              <a:buNone/>
-            </a:pPr>
-            <a:r>
-              <a:rPr lang="en-US" sz="900" dirty="0">
-                <a:solidFill>
-                  <a:srgbClr val="5B6B73"/>
-                </a:solidFill>
-                <a:latin typeface="Calibri" pitchFamily="34" charset="0"/>
-                <a:ea typeface="Calibri" pitchFamily="34" charset="-122"/>
-                <a:cs typeface="Calibri" pitchFamily="34" charset="-120"/>
-              </a:rPr>
-              <a:t>54 POB</a:t>
-            </a:r>
-            <a:endParaRPr lang="en-US" sz="900" dirty="0"/>
-          </a:p>
-        </p:txBody>
-      </p:sp>
-      <p:sp>
-        <p:nvSpPr>
-          <p:cNvPr id="27" name="Text 25"/>
-          <p:cNvSpPr txBox="1"/>
-          <p:nvPr/>
-        </p:nvSpPr>
-        <p:spPr>
-          <a:xfrm>
-            <a:off x="566928" y="3630168"/>
-            <a:ext cx="2995574" cy="365760"/>
+            <a:off x="566928" y="4133088"/>
+            <a:ext cx="3316529" cy="365760"/>
           </a:xfrm>
           <a:prstGeom prst="rect">
             <a:avLst/>
@@ -23568,14 +23110,14 @@
       </p:sp>
       <p:sp>
         <p:nvSpPr>
-          <p:cNvPr id="28" name="Text 26"/>
+          <p:cNvPr id="30" name="Text 28"/>
           <p:cNvSpPr txBox="1"/>
           <p:nvPr/>
         </p:nvSpPr>
         <p:spPr>
           <a:xfrm>
-            <a:off x="3452774" y="3630168"/>
-            <a:ext cx="1497787" cy="365760"/>
+            <a:off x="3773729" y="4133088"/>
+            <a:ext cx="1815998" cy="365760"/>
           </a:xfrm>
           <a:prstGeom prst="rect">
             <a:avLst/>
@@ -23599,7 +23141,7 @@
                 <a:ea typeface="Calibri" pitchFamily="34" charset="-122"/>
                 <a:cs typeface="Calibri" pitchFamily="34" charset="-120"/>
               </a:rPr>
-              <a:t>US$ 897,7 mil</a:t>
+              <a:t>US$ 2,5 mi</a:t>
             </a:r>
             <a:endParaRPr lang="en-US" sz="1100" dirty="0"/>
           </a:p>
@@ -23607,52 +23149,13 @@
       </p:sp>
       <p:sp>
         <p:nvSpPr>
-          <p:cNvPr id="29" name="Text 27"/>
-          <p:cNvSpPr txBox="1"/>
+          <p:cNvPr id="31" name="Shape 29"/>
+          <p:cNvSpPr/>
           <p:nvPr/>
         </p:nvSpPr>
         <p:spPr>
           <a:xfrm>
-            <a:off x="4840834" y="3630168"/>
-            <a:ext cx="965606" cy="365760"/>
-          </a:xfrm>
-          <a:prstGeom prst="rect">
-            <a:avLst/>
-          </a:prstGeom>
-          <a:noFill/>
-          <a:ln/>
-        </p:spPr>
-        <p:txBody>
-          <a:bodyPr wrap="square" lIns="0" tIns="0" rIns="0" bIns="0" rtlCol="0" anchor="ctr"/>
-          <a:lstStyle/>
-          <a:p>
-            <a:pPr algn="r" indent="0" marL="0">
-              <a:buNone/>
-            </a:pPr>
-            <a:r>
-              <a:rPr lang="en-US" sz="900" dirty="0">
-                <a:solidFill>
-                  <a:srgbClr val="5B6B73"/>
-                </a:solidFill>
-                <a:latin typeface="Calibri" pitchFamily="34" charset="0"/>
-                <a:ea typeface="Calibri" pitchFamily="34" charset="-122"/>
-                <a:cs typeface="Calibri" pitchFamily="34" charset="-120"/>
-              </a:rPr>
-              <a:t>101 POB</a:t>
-            </a:r>
-            <a:endParaRPr lang="en-US" sz="900" dirty="0"/>
-          </a:p>
-        </p:txBody>
-      </p:sp>
-      <p:sp>
-        <p:nvSpPr>
-          <p:cNvPr id="30" name="Shape 28"/>
-          <p:cNvSpPr/>
-          <p:nvPr/>
-        </p:nvSpPr>
-        <p:spPr>
-          <a:xfrm>
-            <a:off x="457200" y="3995928"/>
+            <a:off x="457200" y="4498848"/>
             <a:ext cx="5349240" cy="365760"/>
           </a:xfrm>
           <a:prstGeom prst="rect">
@@ -23666,14 +23169,14 @@
       </p:sp>
       <p:sp>
         <p:nvSpPr>
-          <p:cNvPr id="31" name="Text 29"/>
+          <p:cNvPr id="32" name="Text 30"/>
           <p:cNvSpPr txBox="1"/>
           <p:nvPr/>
         </p:nvSpPr>
         <p:spPr>
           <a:xfrm>
-            <a:off x="566928" y="3995928"/>
-            <a:ext cx="2995574" cy="365760"/>
+            <a:off x="566928" y="4498848"/>
+            <a:ext cx="3316529" cy="365760"/>
           </a:xfrm>
           <a:prstGeom prst="rect">
             <a:avLst/>
@@ -23705,14 +23208,14 @@
       </p:sp>
       <p:sp>
         <p:nvSpPr>
-          <p:cNvPr id="32" name="Text 30"/>
+          <p:cNvPr id="33" name="Text 31"/>
           <p:cNvSpPr txBox="1"/>
           <p:nvPr/>
         </p:nvSpPr>
         <p:spPr>
           <a:xfrm>
-            <a:off x="3452774" y="3995928"/>
-            <a:ext cx="1497787" cy="365760"/>
+            <a:off x="3773729" y="4498848"/>
+            <a:ext cx="1815998" cy="365760"/>
           </a:xfrm>
           <a:prstGeom prst="rect">
             <a:avLst/>
@@ -23744,53 +23247,14 @@
       </p:sp>
       <p:sp>
         <p:nvSpPr>
-          <p:cNvPr id="33" name="Text 31"/>
-          <p:cNvSpPr txBox="1"/>
-          <p:nvPr/>
-        </p:nvSpPr>
-        <p:spPr>
-          <a:xfrm>
-            <a:off x="4840834" y="3995928"/>
-            <a:ext cx="965606" cy="365760"/>
-          </a:xfrm>
-          <a:prstGeom prst="rect">
-            <a:avLst/>
-          </a:prstGeom>
-          <a:noFill/>
-          <a:ln/>
-        </p:spPr>
-        <p:txBody>
-          <a:bodyPr wrap="square" lIns="0" tIns="0" rIns="0" bIns="0" rtlCol="0" anchor="ctr"/>
-          <a:lstStyle/>
-          <a:p>
-            <a:pPr algn="r" indent="0" marL="0">
-              <a:buNone/>
-            </a:pPr>
-            <a:r>
-              <a:rPr lang="en-US" sz="900" dirty="0">
-                <a:solidFill>
-                  <a:srgbClr val="5B6B73"/>
-                </a:solidFill>
-                <a:latin typeface="Calibri" pitchFamily="34" charset="0"/>
-                <a:ea typeface="Calibri" pitchFamily="34" charset="-122"/>
-                <a:cs typeface="Calibri" pitchFamily="34" charset="-120"/>
-              </a:rPr>
-              <a:t>5 POB</a:t>
-            </a:r>
-            <a:endParaRPr lang="en-US" sz="900" dirty="0"/>
-          </a:p>
-        </p:txBody>
-      </p:sp>
-      <p:sp>
-        <p:nvSpPr>
           <p:cNvPr id="34" name="Text 32"/>
           <p:cNvSpPr txBox="1"/>
           <p:nvPr/>
         </p:nvSpPr>
         <p:spPr>
           <a:xfrm>
-            <a:off x="566928" y="4361688"/>
-            <a:ext cx="2995574" cy="365760"/>
+            <a:off x="566928" y="4864608"/>
+            <a:ext cx="3316529" cy="365760"/>
           </a:xfrm>
           <a:prstGeom prst="rect">
             <a:avLst/>
@@ -23828,8 +23292,8 @@
         </p:nvSpPr>
         <p:spPr>
           <a:xfrm>
-            <a:off x="3452774" y="4361688"/>
-            <a:ext cx="1497787" cy="365760"/>
+            <a:off x="3773729" y="4864608"/>
+            <a:ext cx="1815998" cy="365760"/>
           </a:xfrm>
           <a:prstGeom prst="rect">
             <a:avLst/>
@@ -23861,52 +23325,13 @@
       </p:sp>
       <p:sp>
         <p:nvSpPr>
-          <p:cNvPr id="36" name="Text 34"/>
-          <p:cNvSpPr txBox="1"/>
+          <p:cNvPr id="36" name="Shape 34"/>
+          <p:cNvSpPr/>
           <p:nvPr/>
         </p:nvSpPr>
         <p:spPr>
           <a:xfrm>
-            <a:off x="4840834" y="4361688"/>
-            <a:ext cx="965606" cy="365760"/>
-          </a:xfrm>
-          <a:prstGeom prst="rect">
-            <a:avLst/>
-          </a:prstGeom>
-          <a:noFill/>
-          <a:ln/>
-        </p:spPr>
-        <p:txBody>
-          <a:bodyPr wrap="square" lIns="0" tIns="0" rIns="0" bIns="0" rtlCol="0" anchor="ctr"/>
-          <a:lstStyle/>
-          <a:p>
-            <a:pPr algn="r" indent="0" marL="0">
-              <a:buNone/>
-            </a:pPr>
-            <a:r>
-              <a:rPr lang="en-US" sz="900" dirty="0">
-                <a:solidFill>
-                  <a:srgbClr val="5B6B73"/>
-                </a:solidFill>
-                <a:latin typeface="Calibri" pitchFamily="34" charset="0"/>
-                <a:ea typeface="Calibri" pitchFamily="34" charset="-122"/>
-                <a:cs typeface="Calibri" pitchFamily="34" charset="-120"/>
-              </a:rPr>
-              <a:t>2 POB</a:t>
-            </a:r>
-            <a:endParaRPr lang="en-US" sz="900" dirty="0"/>
-          </a:p>
-        </p:txBody>
-      </p:sp>
-      <p:sp>
-        <p:nvSpPr>
-          <p:cNvPr id="37" name="Shape 35"/>
-          <p:cNvSpPr/>
-          <p:nvPr/>
-        </p:nvSpPr>
-        <p:spPr>
-          <a:xfrm>
-            <a:off x="457200" y="4727448"/>
+            <a:off x="457200" y="5230368"/>
             <a:ext cx="5349240" cy="365760"/>
           </a:xfrm>
           <a:prstGeom prst="rect">
@@ -23920,14 +23345,14 @@
       </p:sp>
       <p:sp>
         <p:nvSpPr>
-          <p:cNvPr id="38" name="Text 36"/>
+          <p:cNvPr id="37" name="Text 35"/>
           <p:cNvSpPr txBox="1"/>
           <p:nvPr/>
         </p:nvSpPr>
         <p:spPr>
           <a:xfrm>
-            <a:off x="566928" y="4727448"/>
-            <a:ext cx="2995574" cy="365760"/>
+            <a:off x="566928" y="5230368"/>
+            <a:ext cx="3316529" cy="365760"/>
           </a:xfrm>
           <a:prstGeom prst="rect">
             <a:avLst/>
@@ -23959,14 +23384,14 @@
       </p:sp>
       <p:sp>
         <p:nvSpPr>
-          <p:cNvPr id="39" name="Text 37"/>
+          <p:cNvPr id="38" name="Text 36"/>
           <p:cNvSpPr txBox="1"/>
           <p:nvPr/>
         </p:nvSpPr>
         <p:spPr>
           <a:xfrm>
-            <a:off x="3452774" y="4727448"/>
-            <a:ext cx="1497787" cy="365760"/>
+            <a:off x="3773729" y="5230368"/>
+            <a:ext cx="1815998" cy="365760"/>
           </a:xfrm>
           <a:prstGeom prst="rect">
             <a:avLst/>
@@ -23998,52 +23423,13 @@
       </p:sp>
       <p:sp>
         <p:nvSpPr>
-          <p:cNvPr id="40" name="Text 38"/>
+          <p:cNvPr id="39" name="Text 37"/>
           <p:cNvSpPr txBox="1"/>
           <p:nvPr/>
         </p:nvSpPr>
         <p:spPr>
           <a:xfrm>
-            <a:off x="4840834" y="4727448"/>
-            <a:ext cx="965606" cy="365760"/>
-          </a:xfrm>
-          <a:prstGeom prst="rect">
-            <a:avLst/>
-          </a:prstGeom>
-          <a:noFill/>
-          <a:ln/>
-        </p:spPr>
-        <p:txBody>
-          <a:bodyPr wrap="square" lIns="0" tIns="0" rIns="0" bIns="0" rtlCol="0" anchor="ctr"/>
-          <a:lstStyle/>
-          <a:p>
-            <a:pPr algn="r" indent="0" marL="0">
-              <a:buNone/>
-            </a:pPr>
-            <a:r>
-              <a:rPr lang="en-US" sz="900" dirty="0">
-                <a:solidFill>
-                  <a:srgbClr val="5B6B73"/>
-                </a:solidFill>
-                <a:latin typeface="Calibri" pitchFamily="34" charset="0"/>
-                <a:ea typeface="Calibri" pitchFamily="34" charset="-122"/>
-                <a:cs typeface="Calibri" pitchFamily="34" charset="-120"/>
-              </a:rPr>
-              <a:t>0 POB</a:t>
-            </a:r>
-            <a:endParaRPr lang="en-US" sz="900" dirty="0"/>
-          </a:p>
-        </p:txBody>
-      </p:sp>
-      <p:sp>
-        <p:nvSpPr>
-          <p:cNvPr id="41" name="Text 39"/>
-          <p:cNvSpPr txBox="1"/>
-          <p:nvPr/>
-        </p:nvSpPr>
-        <p:spPr>
-          <a:xfrm>
-            <a:off x="6355080" y="2514600"/>
+            <a:off x="6355080" y="3017520"/>
             <a:ext cx="5349240" cy="274320"/>
           </a:xfrm>
           <a:prstGeom prst="rect">
@@ -24076,13 +23462,13 @@
       </p:sp>
       <p:sp>
         <p:nvSpPr>
-          <p:cNvPr id="42" name="Shape 40"/>
+          <p:cNvPr id="40" name="Shape 38"/>
           <p:cNvSpPr/>
           <p:nvPr/>
         </p:nvSpPr>
         <p:spPr>
           <a:xfrm>
-            <a:off x="6355080" y="2807208"/>
+            <a:off x="6355080" y="3310128"/>
             <a:ext cx="5349240" cy="0"/>
           </a:xfrm>
           <a:prstGeom prst="line">
@@ -24099,14 +23485,14 @@
       </p:sp>
       <p:sp>
         <p:nvSpPr>
-          <p:cNvPr id="43" name="Text 41"/>
+          <p:cNvPr id="41" name="Text 39"/>
           <p:cNvSpPr txBox="1"/>
           <p:nvPr/>
         </p:nvSpPr>
         <p:spPr>
           <a:xfrm>
-            <a:off x="6464808" y="2898648"/>
-            <a:ext cx="2995574" cy="365760"/>
+            <a:off x="6464808" y="3401568"/>
+            <a:ext cx="3316529" cy="365760"/>
           </a:xfrm>
           <a:prstGeom prst="rect">
             <a:avLst/>
@@ -24138,14 +23524,14 @@
       </p:sp>
       <p:sp>
         <p:nvSpPr>
-          <p:cNvPr id="44" name="Text 42"/>
+          <p:cNvPr id="42" name="Text 40"/>
           <p:cNvSpPr txBox="1"/>
           <p:nvPr/>
         </p:nvSpPr>
         <p:spPr>
           <a:xfrm>
-            <a:off x="9350654" y="2898648"/>
-            <a:ext cx="1497787" cy="365760"/>
+            <a:off x="9671609" y="3401568"/>
+            <a:ext cx="1815998" cy="365760"/>
           </a:xfrm>
           <a:prstGeom prst="rect">
             <a:avLst/>
@@ -24177,52 +23563,13 @@
       </p:sp>
       <p:sp>
         <p:nvSpPr>
-          <p:cNvPr id="45" name="Text 43"/>
-          <p:cNvSpPr txBox="1"/>
+          <p:cNvPr id="43" name="Shape 41"/>
+          <p:cNvSpPr/>
           <p:nvPr/>
         </p:nvSpPr>
         <p:spPr>
           <a:xfrm>
-            <a:off x="10738714" y="2898648"/>
-            <a:ext cx="965606" cy="365760"/>
-          </a:xfrm>
-          <a:prstGeom prst="rect">
-            <a:avLst/>
-          </a:prstGeom>
-          <a:noFill/>
-          <a:ln/>
-        </p:spPr>
-        <p:txBody>
-          <a:bodyPr wrap="square" lIns="0" tIns="0" rIns="0" bIns="0" rtlCol="0" anchor="ctr"/>
-          <a:lstStyle/>
-          <a:p>
-            <a:pPr algn="r" indent="0" marL="0">
-              <a:buNone/>
-            </a:pPr>
-            <a:r>
-              <a:rPr lang="en-US" sz="900" dirty="0">
-                <a:solidFill>
-                  <a:srgbClr val="5B6B73"/>
-                </a:solidFill>
-                <a:latin typeface="Calibri" pitchFamily="34" charset="0"/>
-                <a:ea typeface="Calibri" pitchFamily="34" charset="-122"/>
-                <a:cs typeface="Calibri" pitchFamily="34" charset="-120"/>
-              </a:rPr>
-              <a:t>20 POB</a:t>
-            </a:r>
-            <a:endParaRPr lang="en-US" sz="900" dirty="0"/>
-          </a:p>
-        </p:txBody>
-      </p:sp>
-      <p:sp>
-        <p:nvSpPr>
-          <p:cNvPr id="46" name="Shape 44"/>
-          <p:cNvSpPr/>
-          <p:nvPr/>
-        </p:nvSpPr>
-        <p:spPr>
-          <a:xfrm>
-            <a:off x="6355080" y="3264408"/>
+            <a:off x="6355080" y="3767328"/>
             <a:ext cx="5349240" cy="365760"/>
           </a:xfrm>
           <a:prstGeom prst="rect">
@@ -24236,14 +23583,14 @@
       </p:sp>
       <p:sp>
         <p:nvSpPr>
-          <p:cNvPr id="47" name="Text 45"/>
+          <p:cNvPr id="44" name="Text 42"/>
           <p:cNvSpPr txBox="1"/>
           <p:nvPr/>
         </p:nvSpPr>
         <p:spPr>
           <a:xfrm>
-            <a:off x="6464808" y="3264408"/>
-            <a:ext cx="2995574" cy="365760"/>
+            <a:off x="6464808" y="3767328"/>
+            <a:ext cx="3316529" cy="365760"/>
           </a:xfrm>
           <a:prstGeom prst="rect">
             <a:avLst/>
@@ -24275,14 +23622,14 @@
       </p:sp>
       <p:sp>
         <p:nvSpPr>
-          <p:cNvPr id="48" name="Text 46"/>
+          <p:cNvPr id="45" name="Text 43"/>
           <p:cNvSpPr txBox="1"/>
           <p:nvPr/>
         </p:nvSpPr>
         <p:spPr>
           <a:xfrm>
-            <a:off x="9350654" y="3264408"/>
-            <a:ext cx="1497787" cy="365760"/>
+            <a:off x="9671609" y="3767328"/>
+            <a:ext cx="1815998" cy="365760"/>
           </a:xfrm>
           <a:prstGeom prst="rect">
             <a:avLst/>
@@ -24314,53 +23661,14 @@
       </p:sp>
       <p:sp>
         <p:nvSpPr>
-          <p:cNvPr id="49" name="Text 47"/>
+          <p:cNvPr id="46" name="Text 44"/>
           <p:cNvSpPr txBox="1"/>
           <p:nvPr/>
         </p:nvSpPr>
         <p:spPr>
           <a:xfrm>
-            <a:off x="10738714" y="3264408"/>
-            <a:ext cx="965606" cy="365760"/>
-          </a:xfrm>
-          <a:prstGeom prst="rect">
-            <a:avLst/>
-          </a:prstGeom>
-          <a:noFill/>
-          <a:ln/>
-        </p:spPr>
-        <p:txBody>
-          <a:bodyPr wrap="square" lIns="0" tIns="0" rIns="0" bIns="0" rtlCol="0" anchor="ctr"/>
-          <a:lstStyle/>
-          <a:p>
-            <a:pPr algn="r" indent="0" marL="0">
-              <a:buNone/>
-            </a:pPr>
-            <a:r>
-              <a:rPr lang="en-US" sz="900" dirty="0">
-                <a:solidFill>
-                  <a:srgbClr val="5B6B73"/>
-                </a:solidFill>
-                <a:latin typeface="Calibri" pitchFamily="34" charset="0"/>
-                <a:ea typeface="Calibri" pitchFamily="34" charset="-122"/>
-                <a:cs typeface="Calibri" pitchFamily="34" charset="-120"/>
-              </a:rPr>
-              <a:t>132 POB</a:t>
-            </a:r>
-            <a:endParaRPr lang="en-US" sz="900" dirty="0"/>
-          </a:p>
-        </p:txBody>
-      </p:sp>
-      <p:sp>
-        <p:nvSpPr>
-          <p:cNvPr id="50" name="Text 48"/>
-          <p:cNvSpPr txBox="1"/>
-          <p:nvPr/>
-        </p:nvSpPr>
-        <p:spPr>
-          <a:xfrm>
-            <a:off x="6464808" y="3630168"/>
-            <a:ext cx="2995574" cy="365760"/>
+            <a:off x="6464808" y="4133088"/>
+            <a:ext cx="3316529" cy="365760"/>
           </a:xfrm>
           <a:prstGeom prst="rect">
             <a:avLst/>
@@ -24392,14 +23700,14 @@
       </p:sp>
       <p:sp>
         <p:nvSpPr>
-          <p:cNvPr id="51" name="Text 49"/>
+          <p:cNvPr id="47" name="Text 45"/>
           <p:cNvSpPr txBox="1"/>
           <p:nvPr/>
         </p:nvSpPr>
         <p:spPr>
           <a:xfrm>
-            <a:off x="9350654" y="3630168"/>
-            <a:ext cx="1497787" cy="365760"/>
+            <a:off x="9671609" y="4133088"/>
+            <a:ext cx="1815998" cy="365760"/>
           </a:xfrm>
           <a:prstGeom prst="rect">
             <a:avLst/>
@@ -24431,52 +23739,13 @@
       </p:sp>
       <p:sp>
         <p:nvSpPr>
-          <p:cNvPr id="52" name="Text 50"/>
-          <p:cNvSpPr txBox="1"/>
+          <p:cNvPr id="48" name="Shape 46"/>
+          <p:cNvSpPr/>
           <p:nvPr/>
         </p:nvSpPr>
         <p:spPr>
           <a:xfrm>
-            <a:off x="10738714" y="3630168"/>
-            <a:ext cx="965606" cy="365760"/>
-          </a:xfrm>
-          <a:prstGeom prst="rect">
-            <a:avLst/>
-          </a:prstGeom>
-          <a:noFill/>
-          <a:ln/>
-        </p:spPr>
-        <p:txBody>
-          <a:bodyPr wrap="square" lIns="0" tIns="0" rIns="0" bIns="0" rtlCol="0" anchor="ctr"/>
-          <a:lstStyle/>
-          <a:p>
-            <a:pPr algn="r" indent="0" marL="0">
-              <a:buNone/>
-            </a:pPr>
-            <a:r>
-              <a:rPr lang="en-US" sz="900" dirty="0">
-                <a:solidFill>
-                  <a:srgbClr val="5B6B73"/>
-                </a:solidFill>
-                <a:latin typeface="Calibri" pitchFamily="34" charset="0"/>
-                <a:ea typeface="Calibri" pitchFamily="34" charset="-122"/>
-                <a:cs typeface="Calibri" pitchFamily="34" charset="-120"/>
-              </a:rPr>
-              <a:t>12 POB</a:t>
-            </a:r>
-            <a:endParaRPr lang="en-US" sz="900" dirty="0"/>
-          </a:p>
-        </p:txBody>
-      </p:sp>
-      <p:sp>
-        <p:nvSpPr>
-          <p:cNvPr id="53" name="Shape 51"/>
-          <p:cNvSpPr/>
-          <p:nvPr/>
-        </p:nvSpPr>
-        <p:spPr>
-          <a:xfrm>
-            <a:off x="6355080" y="3995928"/>
+            <a:off x="6355080" y="4498848"/>
             <a:ext cx="5349240" cy="365760"/>
           </a:xfrm>
           <a:prstGeom prst="rect">
@@ -24490,14 +23759,14 @@
       </p:sp>
       <p:sp>
         <p:nvSpPr>
-          <p:cNvPr id="54" name="Text 52"/>
+          <p:cNvPr id="49" name="Text 47"/>
           <p:cNvSpPr txBox="1"/>
           <p:nvPr/>
         </p:nvSpPr>
         <p:spPr>
           <a:xfrm>
-            <a:off x="6464808" y="3995928"/>
-            <a:ext cx="2995574" cy="365760"/>
+            <a:off x="6464808" y="4498848"/>
+            <a:ext cx="3316529" cy="365760"/>
           </a:xfrm>
           <a:prstGeom prst="rect">
             <a:avLst/>
@@ -24529,14 +23798,14 @@
       </p:sp>
       <p:sp>
         <p:nvSpPr>
-          <p:cNvPr id="55" name="Text 53"/>
+          <p:cNvPr id="50" name="Text 48"/>
           <p:cNvSpPr txBox="1"/>
           <p:nvPr/>
         </p:nvSpPr>
         <p:spPr>
           <a:xfrm>
-            <a:off x="9350654" y="3995928"/>
-            <a:ext cx="1497787" cy="365760"/>
+            <a:off x="9671609" y="4498848"/>
+            <a:ext cx="1815998" cy="365760"/>
           </a:xfrm>
           <a:prstGeom prst="rect">
             <a:avLst/>
@@ -24568,46 +23837,7 @@
       </p:sp>
       <p:sp>
         <p:nvSpPr>
-          <p:cNvPr id="56" name="Text 54"/>
-          <p:cNvSpPr txBox="1"/>
-          <p:nvPr/>
-        </p:nvSpPr>
-        <p:spPr>
-          <a:xfrm>
-            <a:off x="10738714" y="3995928"/>
-            <a:ext cx="965606" cy="365760"/>
-          </a:xfrm>
-          <a:prstGeom prst="rect">
-            <a:avLst/>
-          </a:prstGeom>
-          <a:noFill/>
-          <a:ln/>
-        </p:spPr>
-        <p:txBody>
-          <a:bodyPr wrap="square" lIns="0" tIns="0" rIns="0" bIns="0" rtlCol="0" anchor="ctr"/>
-          <a:lstStyle/>
-          <a:p>
-            <a:pPr algn="r" indent="0" marL="0">
-              <a:buNone/>
-            </a:pPr>
-            <a:r>
-              <a:rPr lang="en-US" sz="900" dirty="0">
-                <a:solidFill>
-                  <a:srgbClr val="5B6B73"/>
-                </a:solidFill>
-                <a:latin typeface="Calibri" pitchFamily="34" charset="0"/>
-                <a:ea typeface="Calibri" pitchFamily="34" charset="-122"/>
-                <a:cs typeface="Calibri" pitchFamily="34" charset="-120"/>
-              </a:rPr>
-              <a:t>18 POB</a:t>
-            </a:r>
-            <a:endParaRPr lang="en-US" sz="900" dirty="0"/>
-          </a:p>
-        </p:txBody>
-      </p:sp>
-      <p:sp>
-        <p:nvSpPr>
-          <p:cNvPr id="57" name="Text 55"/>
+          <p:cNvPr id="51" name="Text 49"/>
           <p:cNvSpPr txBox="1"/>
           <p:nvPr/>
         </p:nvSpPr>
@@ -24638,7 +23868,7 @@
                 <a:ea typeface="Calibri" pitchFamily="34" charset="-122"/>
                 <a:cs typeface="Calibri" pitchFamily="34" charset="-120"/>
               </a:rPr>
-              <a:t>Metodologia: soma de Custo de Serviço + Custo de Material (Jan–Dez), para itens de Cost Allocation = CAPEX com status 'Contar' ou 'TA'. O total desconsidera a categoria Desenvolvimento de Produção (sem itens para este ativo).</a:t>
+              <a:t>Metodologia: soma de Custo de Serviço + Custo de Material (Jan–Dez), para itens de Cost Allocation = CAPEX com status 'Contar' (Custo Total sem TA) e 'TA' (Custo TA, valor de Parada Programada informado pela área). O total desconsidera a categoria Desenvolvimento de Produção (US$ 0, mantida na lista de Categoria apenas para referência).</a:t>
             </a:r>
             <a:endParaRPr lang="en-US" sz="850" dirty="0"/>
           </a:p>
@@ -28577,7 +27807,7 @@
                 <a:ea typeface="Calibri" pitchFamily="34" charset="-122"/>
                 <a:cs typeface="Calibri" pitchFamily="34" charset="-120"/>
               </a:rPr>
-              <a:t>Fonte: Plano Integrado · aba 'Geral - Em análise' · itens de Cost Allocation = CAPEX, status 'Contar' + 'TA'. Lista completa disponível na planilha em anexo.</a:t>
+              <a:t>Fonte: Plano Integrado · aba 'Geral - Em análise' · coluna 'Valor Total' · itens de Cost Allocation = CAPEX, status 'Contar' + 'TA'. Lista completa disponível na planilha em anexo. Extrato pendente de atualização — pode não somar exatamente ao total da Composição de Custo (o valor de TA foi atualizado manualmente).</a:t>
             </a:r>
             <a:endParaRPr lang="en-US" sz="850" dirty="0"/>
           </a:p>

--- a/PRIO_Plano_Trabalho_CAPEX_2027.pptx
+++ b/PRIO_Plano_Trabalho_CAPEX_2027.pptx
@@ -250,16 +250,16 @@
                 <c:formatCode>General</c:formatCode>
                 <c:ptCount val="4"/>
                 <c:pt idx="0">
-                  <c:v>18.12</c:v>
+                  <c:v>14.82</c:v>
                 </c:pt>
                 <c:pt idx="1">
-                  <c:v>8.79</c:v>
+                  <c:v>6.29</c:v>
                 </c:pt>
                 <c:pt idx="2">
-                  <c:v>3.45</c:v>
+                  <c:v>2.35</c:v>
                 </c:pt>
                 <c:pt idx="3">
-                  <c:v>4.45</c:v>
+                  <c:v>2.55</c:v>
                 </c:pt>
               </c:numCache>
             </c:numRef>
@@ -2752,7 +2752,7 @@
                 <a:ea typeface="Calibri" pitchFamily="34" charset="-122"/>
                 <a:cs typeface="Calibri" pitchFamily="34" charset="-120"/>
               </a:rPr>
-              <a:t>Ano 2027 · Base: aba 'Geral - Em análise' · status 'Contar' + 'TA'</a:t>
+              <a:t>Ano 2027 · Base: aba 'Geral - Em análise' · status 'Contar'</a:t>
             </a:r>
             <a:endParaRPr lang="en-US" sz="1250" dirty="0"/>
           </a:p>
@@ -2813,7 +2813,7 @@
                 <a:ea typeface="Cambria" pitchFamily="34" charset="-122"/>
                 <a:cs typeface="Cambria" pitchFamily="34" charset="-120"/>
               </a:rPr>
-              <a:t>US$ 3,4 mi</a:t>
+              <a:t>US$ 2,3 mi</a:t>
             </a:r>
             <a:endParaRPr lang="en-US" sz="3300" dirty="0"/>
           </a:p>
@@ -2891,7 +2891,7 @@
                 <a:ea typeface="Calibri" pitchFamily="34" charset="-122"/>
                 <a:cs typeface="Calibri" pitchFamily="34" charset="-120"/>
               </a:rPr>
-              <a:t>excl. Desenvolvimento de Produção</a:t>
+              <a:t>excl. Desenvolvimento de Produção e Parada Programada (TA)</a:t>
             </a:r>
             <a:endParaRPr lang="en-US" sz="900" dirty="0"/>
           </a:p>
@@ -2906,11 +2906,11 @@
         <p:spPr>
           <a:xfrm>
             <a:off x="4434840" y="1143000"/>
-            <a:ext cx="3566160" cy="731520"/>
+            <a:ext cx="3543300" cy="1600200"/>
           </a:xfrm>
           <a:prstGeom prst="roundRect">
             <a:avLst>
-              <a:gd name="adj" fmla="val 10000"/>
+              <a:gd name="adj" fmla="val 5714"/>
             </a:avLst>
           </a:prstGeom>
           <a:solidFill>
@@ -2927,8 +2927,8 @@
         </p:nvSpPr>
         <p:spPr>
           <a:xfrm>
-            <a:off x="4581144" y="1234440"/>
-            <a:ext cx="3273552" cy="384048"/>
+            <a:off x="4636008" y="1600200"/>
+            <a:ext cx="3140964" cy="548640"/>
           </a:xfrm>
           <a:prstGeom prst="rect">
             <a:avLst/>
@@ -2944,7 +2944,7 @@
               <a:buNone/>
             </a:pPr>
             <a:r>
-              <a:rPr lang="en-US" sz="1800" b="1" dirty="0">
+              <a:rPr lang="en-US" sz="2600" b="1" dirty="0">
                 <a:solidFill>
                   <a:srgbClr val="0B2A3D"/>
                 </a:solidFill>
@@ -2952,9 +2952,9 @@
                 <a:ea typeface="Cambria" pitchFamily="34" charset="-122"/>
                 <a:cs typeface="Cambria" pitchFamily="34" charset="-120"/>
               </a:rPr>
-              <a:t>US$ 2,3 mi</a:t>
+              <a:t>US$ 1,2 mi</a:t>
             </a:r>
-            <a:endParaRPr lang="en-US" sz="1800" dirty="0"/>
+            <a:endParaRPr lang="en-US" sz="2600" dirty="0"/>
           </a:p>
         </p:txBody>
       </p:sp>
@@ -2966,8 +2966,8 @@
         </p:nvSpPr>
         <p:spPr>
           <a:xfrm>
-            <a:off x="4581144" y="1600200"/>
-            <a:ext cx="3273552" cy="237744"/>
+            <a:off x="4636008" y="2167128"/>
+            <a:ext cx="3140964" cy="274320"/>
           </a:xfrm>
           <a:prstGeom prst="rect">
             <a:avLst/>
@@ -2983,7 +2983,7 @@
               <a:buNone/>
             </a:pPr>
             <a:r>
-              <a:rPr lang="en-US" sz="800" b="1" spc="50" kern="0" dirty="0">
+              <a:rPr lang="en-US" sz="1000" b="1" spc="100" kern="0" dirty="0">
                 <a:solidFill>
                   <a:srgbClr val="145C68"/>
                 </a:solidFill>
@@ -2991,9 +2991,9 @@
                 <a:ea typeface="Calibri" pitchFamily="34" charset="-122"/>
                 <a:cs typeface="Calibri" pitchFamily="34" charset="-120"/>
               </a:rPr>
-              <a:t>CUSTO TOTAL SEM TA</a:t>
+              <a:t>SERVIÇO</a:t>
             </a:r>
-            <a:endParaRPr lang="en-US" sz="800" dirty="0"/>
+            <a:endParaRPr lang="en-US" sz="1000" dirty="0"/>
           </a:p>
         </p:txBody>
       </p:sp>
@@ -3005,12 +3005,12 @@
         </p:nvSpPr>
         <p:spPr>
           <a:xfrm>
-            <a:off x="8138160" y="1143000"/>
-            <a:ext cx="3566160" cy="731520"/>
+            <a:off x="8161020" y="1143000"/>
+            <a:ext cx="3543300" cy="1600200"/>
           </a:xfrm>
           <a:prstGeom prst="roundRect">
             <a:avLst>
-              <a:gd name="adj" fmla="val 10000"/>
+              <a:gd name="adj" fmla="val 5714"/>
             </a:avLst>
           </a:prstGeom>
           <a:solidFill>
@@ -3027,8 +3027,8 @@
         </p:nvSpPr>
         <p:spPr>
           <a:xfrm>
-            <a:off x="8284464" y="1234440"/>
-            <a:ext cx="3273552" cy="384048"/>
+            <a:off x="8362188" y="1600200"/>
+            <a:ext cx="3140964" cy="548640"/>
           </a:xfrm>
           <a:prstGeom prst="rect">
             <a:avLst/>
@@ -3044,7 +3044,7 @@
               <a:buNone/>
             </a:pPr>
             <a:r>
-              <a:rPr lang="en-US" sz="1800" b="1" dirty="0">
+              <a:rPr lang="en-US" sz="2600" b="1" dirty="0">
                 <a:solidFill>
                   <a:srgbClr val="0B2A3D"/>
                 </a:solidFill>
@@ -3054,7 +3054,7 @@
               </a:rPr>
               <a:t>US$ 1,1 mi</a:t>
             </a:r>
-            <a:endParaRPr lang="en-US" sz="1800" dirty="0"/>
+            <a:endParaRPr lang="en-US" sz="2600" dirty="0"/>
           </a:p>
         </p:txBody>
       </p:sp>
@@ -3066,8 +3066,8 @@
         </p:nvSpPr>
         <p:spPr>
           <a:xfrm>
-            <a:off x="8284464" y="1600200"/>
-            <a:ext cx="3273552" cy="237744"/>
+            <a:off x="8362188" y="2167128"/>
+            <a:ext cx="3140964" cy="274320"/>
           </a:xfrm>
           <a:prstGeom prst="rect">
             <a:avLst/>
@@ -3083,207 +3083,7 @@
               <a:buNone/>
             </a:pPr>
             <a:r>
-              <a:rPr lang="en-US" sz="800" b="1" spc="50" kern="0" dirty="0">
-                <a:solidFill>
-                  <a:srgbClr val="145C68"/>
-                </a:solidFill>
-                <a:latin typeface="Calibri" pitchFamily="34" charset="0"/>
-                <a:ea typeface="Calibri" pitchFamily="34" charset="-122"/>
-                <a:cs typeface="Calibri" pitchFamily="34" charset="-120"/>
-              </a:rPr>
-              <a:t>CUSTO TA (PARADA PROGRAMADA)</a:t>
-            </a:r>
-            <a:endParaRPr lang="en-US" sz="800" dirty="0"/>
-          </a:p>
-        </p:txBody>
-      </p:sp>
-      <p:sp>
-        <p:nvSpPr>
-          <p:cNvPr id="16" name="Shape 14"/>
-          <p:cNvSpPr/>
-          <p:nvPr/>
-        </p:nvSpPr>
-        <p:spPr>
-          <a:xfrm>
-            <a:off x="4434840" y="2011680"/>
-            <a:ext cx="3566160" cy="731520"/>
-          </a:xfrm>
-          <a:prstGeom prst="roundRect">
-            <a:avLst>
-              <a:gd name="adj" fmla="val 10000"/>
-            </a:avLst>
-          </a:prstGeom>
-          <a:solidFill>
-            <a:srgbClr val="F0F4F5"/>
-          </a:solidFill>
-          <a:ln/>
-        </p:spPr>
-      </p:sp>
-      <p:sp>
-        <p:nvSpPr>
-          <p:cNvPr id="17" name="Text 15"/>
-          <p:cNvSpPr txBox="1"/>
-          <p:nvPr/>
-        </p:nvSpPr>
-        <p:spPr>
-          <a:xfrm>
-            <a:off x="4581144" y="2103120"/>
-            <a:ext cx="3273552" cy="384048"/>
-          </a:xfrm>
-          <a:prstGeom prst="rect">
-            <a:avLst/>
-          </a:prstGeom>
-          <a:noFill/>
-          <a:ln/>
-        </p:spPr>
-        <p:txBody>
-          <a:bodyPr wrap="square" lIns="0" tIns="0" rIns="0" bIns="0" rtlCol="0" anchor="ctr"/>
-          <a:lstStyle/>
-          <a:p>
-            <a:pPr indent="0" marL="0">
-              <a:buNone/>
-            </a:pPr>
-            <a:r>
-              <a:rPr lang="en-US" sz="1800" b="1" dirty="0">
-                <a:solidFill>
-                  <a:srgbClr val="0B2A3D"/>
-                </a:solidFill>
-                <a:latin typeface="Cambria" pitchFamily="34" charset="0"/>
-                <a:ea typeface="Cambria" pitchFamily="34" charset="-122"/>
-                <a:cs typeface="Cambria" pitchFamily="34" charset="-120"/>
-              </a:rPr>
-              <a:t>US$ 1,7 mi</a:t>
-            </a:r>
-            <a:endParaRPr lang="en-US" sz="1800" dirty="0"/>
-          </a:p>
-        </p:txBody>
-      </p:sp>
-      <p:sp>
-        <p:nvSpPr>
-          <p:cNvPr id="18" name="Text 16"/>
-          <p:cNvSpPr txBox="1"/>
-          <p:nvPr/>
-        </p:nvSpPr>
-        <p:spPr>
-          <a:xfrm>
-            <a:off x="4581144" y="2468880"/>
-            <a:ext cx="3273552" cy="237744"/>
-          </a:xfrm>
-          <a:prstGeom prst="rect">
-            <a:avLst/>
-          </a:prstGeom>
-          <a:noFill/>
-          <a:ln/>
-        </p:spPr>
-        <p:txBody>
-          <a:bodyPr wrap="square" lIns="0" tIns="0" rIns="0" bIns="0" rtlCol="0" anchor="ctr"/>
-          <a:lstStyle/>
-          <a:p>
-            <a:pPr indent="0" marL="0">
-              <a:buNone/>
-            </a:pPr>
-            <a:r>
-              <a:rPr lang="en-US" sz="800" b="1" spc="50" kern="0" dirty="0">
-                <a:solidFill>
-                  <a:srgbClr val="145C68"/>
-                </a:solidFill>
-                <a:latin typeface="Calibri" pitchFamily="34" charset="0"/>
-                <a:ea typeface="Calibri" pitchFamily="34" charset="-122"/>
-                <a:cs typeface="Calibri" pitchFamily="34" charset="-120"/>
-              </a:rPr>
-              <a:t>SERVIÇO</a:t>
-            </a:r>
-            <a:endParaRPr lang="en-US" sz="800" dirty="0"/>
-          </a:p>
-        </p:txBody>
-      </p:sp>
-      <p:sp>
-        <p:nvSpPr>
-          <p:cNvPr id="19" name="Shape 17"/>
-          <p:cNvSpPr/>
-          <p:nvPr/>
-        </p:nvSpPr>
-        <p:spPr>
-          <a:xfrm>
-            <a:off x="8138160" y="2011680"/>
-            <a:ext cx="3566160" cy="731520"/>
-          </a:xfrm>
-          <a:prstGeom prst="roundRect">
-            <a:avLst>
-              <a:gd name="adj" fmla="val 10000"/>
-            </a:avLst>
-          </a:prstGeom>
-          <a:solidFill>
-            <a:srgbClr val="F0F4F5"/>
-          </a:solidFill>
-          <a:ln/>
-        </p:spPr>
-      </p:sp>
-      <p:sp>
-        <p:nvSpPr>
-          <p:cNvPr id="20" name="Text 18"/>
-          <p:cNvSpPr txBox="1"/>
-          <p:nvPr/>
-        </p:nvSpPr>
-        <p:spPr>
-          <a:xfrm>
-            <a:off x="8284464" y="2103120"/>
-            <a:ext cx="3273552" cy="384048"/>
-          </a:xfrm>
-          <a:prstGeom prst="rect">
-            <a:avLst/>
-          </a:prstGeom>
-          <a:noFill/>
-          <a:ln/>
-        </p:spPr>
-        <p:txBody>
-          <a:bodyPr wrap="square" lIns="0" tIns="0" rIns="0" bIns="0" rtlCol="0" anchor="ctr"/>
-          <a:lstStyle/>
-          <a:p>
-            <a:pPr indent="0" marL="0">
-              <a:buNone/>
-            </a:pPr>
-            <a:r>
-              <a:rPr lang="en-US" sz="1800" b="1" dirty="0">
-                <a:solidFill>
-                  <a:srgbClr val="0B2A3D"/>
-                </a:solidFill>
-                <a:latin typeface="Cambria" pitchFamily="34" charset="0"/>
-                <a:ea typeface="Cambria" pitchFamily="34" charset="-122"/>
-                <a:cs typeface="Cambria" pitchFamily="34" charset="-120"/>
-              </a:rPr>
-              <a:t>US$ 1,2 mi</a:t>
-            </a:r>
-            <a:endParaRPr lang="en-US" sz="1800" dirty="0"/>
-          </a:p>
-        </p:txBody>
-      </p:sp>
-      <p:sp>
-        <p:nvSpPr>
-          <p:cNvPr id="21" name="Text 19"/>
-          <p:cNvSpPr txBox="1"/>
-          <p:nvPr/>
-        </p:nvSpPr>
-        <p:spPr>
-          <a:xfrm>
-            <a:off x="8284464" y="2468880"/>
-            <a:ext cx="3273552" cy="237744"/>
-          </a:xfrm>
-          <a:prstGeom prst="rect">
-            <a:avLst/>
-          </a:prstGeom>
-          <a:noFill/>
-          <a:ln/>
-        </p:spPr>
-        <p:txBody>
-          <a:bodyPr wrap="square" lIns="0" tIns="0" rIns="0" bIns="0" rtlCol="0" anchor="ctr"/>
-          <a:lstStyle/>
-          <a:p>
-            <a:pPr indent="0" marL="0">
-              <a:buNone/>
-            </a:pPr>
-            <a:r>
-              <a:rPr lang="en-US" sz="800" b="1" spc="50" kern="0" dirty="0">
+              <a:rPr lang="en-US" sz="1000" b="1" spc="100" kern="0" dirty="0">
                 <a:solidFill>
                   <a:srgbClr val="145C68"/>
                 </a:solidFill>
@@ -3293,13 +3093,13 @@
               </a:rPr>
               <a:t>MATERIAL</a:t>
             </a:r>
-            <a:endParaRPr lang="en-US" sz="800" dirty="0"/>
+            <a:endParaRPr lang="en-US" sz="1000" dirty="0"/>
           </a:p>
         </p:txBody>
       </p:sp>
       <p:sp>
         <p:nvSpPr>
-          <p:cNvPr id="22" name="Text 20"/>
+          <p:cNvPr id="16" name="Text 14"/>
           <p:cNvSpPr txBox="1"/>
           <p:nvPr/>
         </p:nvSpPr>
@@ -3338,7 +3138,7 @@
       </p:sp>
       <p:sp>
         <p:nvSpPr>
-          <p:cNvPr id="23" name="Shape 21"/>
+          <p:cNvPr id="17" name="Shape 15"/>
           <p:cNvSpPr/>
           <p:nvPr/>
         </p:nvSpPr>
@@ -3361,7 +3161,7 @@
       </p:sp>
       <p:sp>
         <p:nvSpPr>
-          <p:cNvPr id="24" name="Text 22"/>
+          <p:cNvPr id="18" name="Text 16"/>
           <p:cNvSpPr txBox="1"/>
           <p:nvPr/>
         </p:nvSpPr>
@@ -3400,7 +3200,7 @@
       </p:sp>
       <p:sp>
         <p:nvSpPr>
-          <p:cNvPr id="25" name="Text 23"/>
+          <p:cNvPr id="19" name="Text 17"/>
           <p:cNvSpPr txBox="1"/>
           <p:nvPr/>
         </p:nvSpPr>
@@ -3439,7 +3239,7 @@
       </p:sp>
       <p:sp>
         <p:nvSpPr>
-          <p:cNvPr id="26" name="Shape 24"/>
+          <p:cNvPr id="20" name="Shape 18"/>
           <p:cNvSpPr/>
           <p:nvPr/>
         </p:nvSpPr>
@@ -3459,91 +3259,13 @@
       </p:sp>
       <p:sp>
         <p:nvSpPr>
-          <p:cNvPr id="27" name="Text 25"/>
+          <p:cNvPr id="21" name="Text 19"/>
           <p:cNvSpPr txBox="1"/>
           <p:nvPr/>
         </p:nvSpPr>
         <p:spPr>
           <a:xfrm>
             <a:off x="566928" y="3767328"/>
-            <a:ext cx="3316529" cy="365760"/>
-          </a:xfrm>
-          <a:prstGeom prst="rect">
-            <a:avLst/>
-          </a:prstGeom>
-          <a:noFill/>
-          <a:ln/>
-        </p:spPr>
-        <p:txBody>
-          <a:bodyPr wrap="square" lIns="0" tIns="0" rIns="0" bIns="0" rtlCol="0" anchor="ctr"/>
-          <a:lstStyle/>
-          <a:p>
-            <a:pPr indent="0" marL="0">
-              <a:buNone/>
-            </a:pPr>
-            <a:r>
-              <a:rPr lang="en-US" sz="1100" dirty="0">
-                <a:solidFill>
-                  <a:srgbClr val="1C2B33"/>
-                </a:solidFill>
-                <a:latin typeface="Calibri" pitchFamily="34" charset="0"/>
-                <a:ea typeface="Calibri" pitchFamily="34" charset="-122"/>
-                <a:cs typeface="Calibri" pitchFamily="34" charset="-120"/>
-              </a:rPr>
-              <a:t>TA - Parada Programada</a:t>
-            </a:r>
-            <a:endParaRPr lang="en-US" sz="1100" dirty="0"/>
-          </a:p>
-        </p:txBody>
-      </p:sp>
-      <p:sp>
-        <p:nvSpPr>
-          <p:cNvPr id="28" name="Text 26"/>
-          <p:cNvSpPr txBox="1"/>
-          <p:nvPr/>
-        </p:nvSpPr>
-        <p:spPr>
-          <a:xfrm>
-            <a:off x="3773729" y="3767328"/>
-            <a:ext cx="1815998" cy="365760"/>
-          </a:xfrm>
-          <a:prstGeom prst="rect">
-            <a:avLst/>
-          </a:prstGeom>
-          <a:noFill/>
-          <a:ln/>
-        </p:spPr>
-        <p:txBody>
-          <a:bodyPr wrap="square" lIns="0" tIns="0" rIns="0" bIns="0" rtlCol="0" anchor="ctr"/>
-          <a:lstStyle/>
-          <a:p>
-            <a:pPr algn="r" indent="0" marL="0">
-              <a:buNone/>
-            </a:pPr>
-            <a:r>
-              <a:rPr lang="en-US" sz="1100" b="1" dirty="0">
-                <a:solidFill>
-                  <a:srgbClr val="0B2A3D"/>
-                </a:solidFill>
-                <a:latin typeface="Calibri" pitchFamily="34" charset="0"/>
-                <a:ea typeface="Calibri" pitchFamily="34" charset="-122"/>
-                <a:cs typeface="Calibri" pitchFamily="34" charset="-120"/>
-              </a:rPr>
-              <a:t>US$ 1,1 mi</a:t>
-            </a:r>
-            <a:endParaRPr lang="en-US" sz="1100" dirty="0"/>
-          </a:p>
-        </p:txBody>
-      </p:sp>
-      <p:sp>
-        <p:nvSpPr>
-          <p:cNvPr id="29" name="Text 27"/>
-          <p:cNvSpPr txBox="1"/>
-          <p:nvPr/>
-        </p:nvSpPr>
-        <p:spPr>
-          <a:xfrm>
-            <a:off x="566928" y="4133088"/>
             <a:ext cx="3316529" cy="365760"/>
           </a:xfrm>
           <a:prstGeom prst="rect">
@@ -3576,13 +3298,13 @@
       </p:sp>
       <p:sp>
         <p:nvSpPr>
-          <p:cNvPr id="30" name="Text 28"/>
+          <p:cNvPr id="22" name="Text 20"/>
           <p:cNvSpPr txBox="1"/>
           <p:nvPr/>
         </p:nvSpPr>
         <p:spPr>
           <a:xfrm>
-            <a:off x="3773729" y="4133088"/>
+            <a:off x="3773729" y="3767328"/>
             <a:ext cx="1815998" cy="365760"/>
           </a:xfrm>
           <a:prstGeom prst="rect">
@@ -3615,7 +3337,7 @@
       </p:sp>
       <p:sp>
         <p:nvSpPr>
-          <p:cNvPr id="31" name="Text 29"/>
+          <p:cNvPr id="23" name="Text 21"/>
           <p:cNvSpPr txBox="1"/>
           <p:nvPr/>
         </p:nvSpPr>
@@ -3654,7 +3376,7 @@
       </p:sp>
       <p:sp>
         <p:nvSpPr>
-          <p:cNvPr id="32" name="Shape 30"/>
+          <p:cNvPr id="24" name="Shape 22"/>
           <p:cNvSpPr/>
           <p:nvPr/>
         </p:nvSpPr>
@@ -3677,7 +3399,7 @@
       </p:sp>
       <p:sp>
         <p:nvSpPr>
-          <p:cNvPr id="33" name="Text 31"/>
+          <p:cNvPr id="25" name="Text 23"/>
           <p:cNvSpPr txBox="1"/>
           <p:nvPr/>
         </p:nvSpPr>
@@ -3716,7 +3438,7 @@
       </p:sp>
       <p:sp>
         <p:nvSpPr>
-          <p:cNvPr id="34" name="Text 32"/>
+          <p:cNvPr id="26" name="Text 24"/>
           <p:cNvSpPr txBox="1"/>
           <p:nvPr/>
         </p:nvSpPr>
@@ -3747,7 +3469,7 @@
                 <a:ea typeface="Calibri" pitchFamily="34" charset="-122"/>
                 <a:cs typeface="Calibri" pitchFamily="34" charset="-120"/>
               </a:rPr>
-              <a:t>US$ 2,3 mi</a:t>
+              <a:t>US$ 1,7 mi</a:t>
             </a:r>
             <a:endParaRPr lang="en-US" sz="1100" dirty="0"/>
           </a:p>
@@ -3755,7 +3477,7 @@
       </p:sp>
       <p:sp>
         <p:nvSpPr>
-          <p:cNvPr id="35" name="Shape 33"/>
+          <p:cNvPr id="27" name="Shape 25"/>
           <p:cNvSpPr/>
           <p:nvPr/>
         </p:nvSpPr>
@@ -3775,7 +3497,7 @@
       </p:sp>
       <p:sp>
         <p:nvSpPr>
-          <p:cNvPr id="36" name="Text 34"/>
+          <p:cNvPr id="28" name="Text 26"/>
           <p:cNvSpPr txBox="1"/>
           <p:nvPr/>
         </p:nvSpPr>
@@ -3814,7 +3536,7 @@
       </p:sp>
       <p:sp>
         <p:nvSpPr>
-          <p:cNvPr id="37" name="Text 35"/>
+          <p:cNvPr id="29" name="Text 27"/>
           <p:cNvSpPr txBox="1"/>
           <p:nvPr/>
         </p:nvSpPr>
@@ -3853,7 +3575,7 @@
       </p:sp>
       <p:sp>
         <p:nvSpPr>
-          <p:cNvPr id="38" name="Text 36"/>
+          <p:cNvPr id="30" name="Text 28"/>
           <p:cNvSpPr txBox="1"/>
           <p:nvPr/>
         </p:nvSpPr>
@@ -3892,7 +3614,7 @@
       </p:sp>
       <p:sp>
         <p:nvSpPr>
-          <p:cNvPr id="39" name="Text 37"/>
+          <p:cNvPr id="31" name="Text 29"/>
           <p:cNvSpPr txBox="1"/>
           <p:nvPr/>
         </p:nvSpPr>
@@ -3931,7 +3653,7 @@
       </p:sp>
       <p:sp>
         <p:nvSpPr>
-          <p:cNvPr id="40" name="Text 38"/>
+          <p:cNvPr id="32" name="Text 30"/>
           <p:cNvSpPr txBox="1"/>
           <p:nvPr/>
         </p:nvSpPr>
@@ -3962,7 +3684,7 @@
                 <a:ea typeface="Calibri" pitchFamily="34" charset="-122"/>
                 <a:cs typeface="Calibri" pitchFamily="34" charset="-120"/>
               </a:rPr>
-              <a:t>Metodologia: soma de Custo de Serviço + Custo de Material (Jan–Dez), para itens de Cost Allocation = CAPEX com status 'Contar' (Custo Total sem TA) e 'TA' (Custo TA, valor de Parada Programada informado pela área). O total desconsidera a categoria Desenvolvimento de Produção (US$ 0, mantida na lista de Categoria apenas para referência).</a:t>
+              <a:t>Metodologia: soma de Custo de Serviço + Custo de Material (Jan–Dez), para itens de Cost Allocation = CAPEX com status 'Contar'. Não inclui itens de Parada Programada (status 'TA') nem a categoria Desenvolvimento de Produção (US$ 0, mantida na lista de Categoria apenas para referência).</a:t>
             </a:r>
             <a:endParaRPr lang="en-US" sz="850" dirty="0"/>
           </a:p>
@@ -4124,7 +3846,7 @@
                 <a:ea typeface="Calibri" pitchFamily="34" charset="-122"/>
                 <a:cs typeface="Calibri" pitchFamily="34" charset="-120"/>
               </a:rPr>
-              <a:t>Principais escopos por valor · 25 itens no total</a:t>
+              <a:t>Principais escopos por valor · 7 itens no total</a:t>
             </a:r>
             <a:endParaRPr lang="en-US" sz="1250" dirty="0"/>
           </a:p>
@@ -6094,7 +5816,7 @@
                           <a:ea typeface="Calibri" pitchFamily="34" charset="-122"/>
                           <a:cs typeface="Calibri" pitchFamily="34" charset="-120"/>
                         </a:rPr>
-                        <a:t>TA - Caldeiraria</a:t>
+                        <a:t>Implementação do BRAlarm</a:t>
                       </a:r>
                       <a:endParaRPr lang="en-US" sz="1000" dirty="0">
                         <a:latin typeface="Calibri" charset="0"/>
@@ -6162,7 +5884,7 @@
                           <a:ea typeface="Calibri" pitchFamily="34" charset="-122"/>
                           <a:cs typeface="Calibri" pitchFamily="34" charset="-120"/>
                         </a:rPr>
-                        <a:t>Eficiência de Produção</a:t>
+                        <a:t>Bem Estar/Segurança</a:t>
                       </a:r>
                       <a:endParaRPr lang="en-US" sz="950" dirty="0">
                         <a:latin typeface="Calibri" charset="0"/>
@@ -6230,7 +5952,7 @@
                           <a:ea typeface="Calibri" pitchFamily="34" charset="-122"/>
                           <a:cs typeface="Calibri" pitchFamily="34" charset="-120"/>
                         </a:rPr>
-                        <a:t>TA - Parada Programada</a:t>
+                        <a:t>Segurança de Processos</a:t>
                       </a:r>
                       <a:endParaRPr lang="en-US" sz="950" dirty="0">
                         <a:latin typeface="Calibri" charset="0"/>
@@ -6298,7 +6020,7 @@
                           <a:ea typeface="Calibri" pitchFamily="34" charset="-122"/>
                           <a:cs typeface="Calibri" pitchFamily="34" charset="-120"/>
                         </a:rPr>
-                        <a:t>US$ 130,0 mil</a:t>
+                        <a:t>US$ 4,0 mil</a:t>
                       </a:r>
                       <a:endParaRPr lang="en-US" sz="1000" dirty="0">
                         <a:latin typeface="Calibri" charset="0"/>
@@ -6346,1520 +6068,6 @@
                     </a:lnB>
                     <a:solidFill>
                       <a:srgbClr val="FFFFFF"/>
-                    </a:solidFill>
-                  </a:tcPr>
-                </a:tc>
-              </a:tr>
-              <a:tr h="288036">
-                <a:tc>
-                  <a:txBody>
-                    <a:bodyPr/>
-                    <a:lstStyle/>
-                    <a:p>
-                      <a:pPr indent="0" marL="0">
-                        <a:buNone/>
-                      </a:pPr>
-                      <a:r>
-                        <a:rPr lang="en-US" sz="1000" dirty="0">
-                          <a:solidFill>
-                            <a:srgbClr val="1C2B33"/>
-                          </a:solidFill>
-                          <a:latin typeface="Calibri" pitchFamily="34" charset="0"/>
-                          <a:ea typeface="Calibri" pitchFamily="34" charset="-122"/>
-                          <a:cs typeface="Calibri" pitchFamily="34" charset="-120"/>
-                        </a:rPr>
-                        <a:t>PRÉ TA - Andaime</a:t>
-                      </a:r>
-                      <a:endParaRPr lang="en-US" sz="1000" dirty="0">
-                        <a:latin typeface="Calibri" charset="0"/>
-                        <a:ea typeface="Calibri" charset="0"/>
-                        <a:cs typeface="Calibri" charset="0"/>
-                      </a:endParaRPr>
-                    </a:p>
-                  </a:txBody>
-                  <a:tcPr marL="91440" marR="91440" marT="45720" marB="45720" anchor="ctr">
-                    <a:lnL w="6350" cap="flat" cmpd="sng" algn="ctr">
-                      <a:solidFill>
-                        <a:srgbClr val="E3E8E9"/>
-                      </a:solidFill>
-                      <a:prstDash val="solid"/>
-                      <a:round/>
-                      <a:headEnd type="none" w="med" len="med"/>
-                      <a:tailEnd type="none" w="med" len="med"/>
-                    </a:lnL>
-                    <a:lnR w="6350" cap="flat" cmpd="sng" algn="ctr">
-                      <a:solidFill>
-                        <a:srgbClr val="E3E8E9"/>
-                      </a:solidFill>
-                      <a:prstDash val="solid"/>
-                      <a:round/>
-                      <a:headEnd type="none" w="med" len="med"/>
-                      <a:tailEnd type="none" w="med" len="med"/>
-                    </a:lnR>
-                    <a:lnT w="6350" cap="flat" cmpd="sng" algn="ctr">
-                      <a:solidFill>
-                        <a:srgbClr val="E3E8E9"/>
-                      </a:solidFill>
-                      <a:prstDash val="solid"/>
-                      <a:round/>
-                      <a:headEnd type="none" w="med" len="med"/>
-                      <a:tailEnd type="none" w="med" len="med"/>
-                    </a:lnT>
-                    <a:lnB w="6350" cap="flat" cmpd="sng" algn="ctr">
-                      <a:solidFill>
-                        <a:srgbClr val="E3E8E9"/>
-                      </a:solidFill>
-                      <a:prstDash val="solid"/>
-                      <a:round/>
-                      <a:headEnd type="none" w="med" len="med"/>
-                      <a:tailEnd type="none" w="med" len="med"/>
-                    </a:lnB>
-                    <a:solidFill>
-                      <a:srgbClr val="F0F4F5"/>
-                    </a:solidFill>
-                  </a:tcPr>
-                </a:tc>
-                <a:tc>
-                  <a:txBody>
-                    <a:bodyPr/>
-                    <a:lstStyle/>
-                    <a:p>
-                      <a:pPr indent="0" marL="0">
-                        <a:buNone/>
-                      </a:pPr>
-                      <a:r>
-                        <a:rPr lang="en-US" sz="950" dirty="0">
-                          <a:solidFill>
-                            <a:srgbClr val="5B6B73"/>
-                          </a:solidFill>
-                          <a:latin typeface="Calibri" pitchFamily="34" charset="0"/>
-                          <a:ea typeface="Calibri" pitchFamily="34" charset="-122"/>
-                          <a:cs typeface="Calibri" pitchFamily="34" charset="-120"/>
-                        </a:rPr>
-                        <a:t>Eficiência de Produção</a:t>
-                      </a:r>
-                      <a:endParaRPr lang="en-US" sz="950" dirty="0">
-                        <a:latin typeface="Calibri" charset="0"/>
-                        <a:ea typeface="Calibri" charset="0"/>
-                        <a:cs typeface="Calibri" charset="0"/>
-                      </a:endParaRPr>
-                    </a:p>
-                  </a:txBody>
-                  <a:tcPr marL="91440" marR="91440" marT="45720" marB="45720" anchor="ctr">
-                    <a:lnL w="6350" cap="flat" cmpd="sng" algn="ctr">
-                      <a:solidFill>
-                        <a:srgbClr val="E3E8E9"/>
-                      </a:solidFill>
-                      <a:prstDash val="solid"/>
-                      <a:round/>
-                      <a:headEnd type="none" w="med" len="med"/>
-                      <a:tailEnd type="none" w="med" len="med"/>
-                    </a:lnL>
-                    <a:lnR w="6350" cap="flat" cmpd="sng" algn="ctr">
-                      <a:solidFill>
-                        <a:srgbClr val="E3E8E9"/>
-                      </a:solidFill>
-                      <a:prstDash val="solid"/>
-                      <a:round/>
-                      <a:headEnd type="none" w="med" len="med"/>
-                      <a:tailEnd type="none" w="med" len="med"/>
-                    </a:lnR>
-                    <a:lnT w="6350" cap="flat" cmpd="sng" algn="ctr">
-                      <a:solidFill>
-                        <a:srgbClr val="E3E8E9"/>
-                      </a:solidFill>
-                      <a:prstDash val="solid"/>
-                      <a:round/>
-                      <a:headEnd type="none" w="med" len="med"/>
-                      <a:tailEnd type="none" w="med" len="med"/>
-                    </a:lnT>
-                    <a:lnB w="6350" cap="flat" cmpd="sng" algn="ctr">
-                      <a:solidFill>
-                        <a:srgbClr val="E3E8E9"/>
-                      </a:solidFill>
-                      <a:prstDash val="solid"/>
-                      <a:round/>
-                      <a:headEnd type="none" w="med" len="med"/>
-                      <a:tailEnd type="none" w="med" len="med"/>
-                    </a:lnB>
-                    <a:solidFill>
-                      <a:srgbClr val="F0F4F5"/>
-                    </a:solidFill>
-                  </a:tcPr>
-                </a:tc>
-                <a:tc>
-                  <a:txBody>
-                    <a:bodyPr/>
-                    <a:lstStyle/>
-                    <a:p>
-                      <a:pPr indent="0" marL="0">
-                        <a:buNone/>
-                      </a:pPr>
-                      <a:r>
-                        <a:rPr lang="en-US" sz="950" dirty="0">
-                          <a:solidFill>
-                            <a:srgbClr val="5B6B73"/>
-                          </a:solidFill>
-                          <a:latin typeface="Calibri" pitchFamily="34" charset="0"/>
-                          <a:ea typeface="Calibri" pitchFamily="34" charset="-122"/>
-                          <a:cs typeface="Calibri" pitchFamily="34" charset="-120"/>
-                        </a:rPr>
-                        <a:t>TA - Parada Programada</a:t>
-                      </a:r>
-                      <a:endParaRPr lang="en-US" sz="950" dirty="0">
-                        <a:latin typeface="Calibri" charset="0"/>
-                        <a:ea typeface="Calibri" charset="0"/>
-                        <a:cs typeface="Calibri" charset="0"/>
-                      </a:endParaRPr>
-                    </a:p>
-                  </a:txBody>
-                  <a:tcPr marL="91440" marR="91440" marT="45720" marB="45720" anchor="ctr">
-                    <a:lnL w="6350" cap="flat" cmpd="sng" algn="ctr">
-                      <a:solidFill>
-                        <a:srgbClr val="E3E8E9"/>
-                      </a:solidFill>
-                      <a:prstDash val="solid"/>
-                      <a:round/>
-                      <a:headEnd type="none" w="med" len="med"/>
-                      <a:tailEnd type="none" w="med" len="med"/>
-                    </a:lnL>
-                    <a:lnR w="6350" cap="flat" cmpd="sng" algn="ctr">
-                      <a:solidFill>
-                        <a:srgbClr val="E3E8E9"/>
-                      </a:solidFill>
-                      <a:prstDash val="solid"/>
-                      <a:round/>
-                      <a:headEnd type="none" w="med" len="med"/>
-                      <a:tailEnd type="none" w="med" len="med"/>
-                    </a:lnR>
-                    <a:lnT w="6350" cap="flat" cmpd="sng" algn="ctr">
-                      <a:solidFill>
-                        <a:srgbClr val="E3E8E9"/>
-                      </a:solidFill>
-                      <a:prstDash val="solid"/>
-                      <a:round/>
-                      <a:headEnd type="none" w="med" len="med"/>
-                      <a:tailEnd type="none" w="med" len="med"/>
-                    </a:lnT>
-                    <a:lnB w="6350" cap="flat" cmpd="sng" algn="ctr">
-                      <a:solidFill>
-                        <a:srgbClr val="E3E8E9"/>
-                      </a:solidFill>
-                      <a:prstDash val="solid"/>
-                      <a:round/>
-                      <a:headEnd type="none" w="med" len="med"/>
-                      <a:tailEnd type="none" w="med" len="med"/>
-                    </a:lnB>
-                    <a:solidFill>
-                      <a:srgbClr val="F0F4F5"/>
-                    </a:solidFill>
-                  </a:tcPr>
-                </a:tc>
-                <a:tc>
-                  <a:txBody>
-                    <a:bodyPr/>
-                    <a:lstStyle/>
-                    <a:p>
-                      <a:pPr algn="r" indent="0" marL="0">
-                        <a:buNone/>
-                      </a:pPr>
-                      <a:r>
-                        <a:rPr lang="en-US" sz="1000" b="1" dirty="0">
-                          <a:solidFill>
-                            <a:srgbClr val="0B2A3D"/>
-                          </a:solidFill>
-                          <a:latin typeface="Calibri" pitchFamily="34" charset="0"/>
-                          <a:ea typeface="Calibri" pitchFamily="34" charset="-122"/>
-                          <a:cs typeface="Calibri" pitchFamily="34" charset="-120"/>
-                        </a:rPr>
-                        <a:t>US$ 102,1 mil</a:t>
-                      </a:r>
-                      <a:endParaRPr lang="en-US" sz="1000" dirty="0">
-                        <a:latin typeface="Calibri" charset="0"/>
-                        <a:ea typeface="Calibri" charset="0"/>
-                        <a:cs typeface="Calibri" charset="0"/>
-                      </a:endParaRPr>
-                    </a:p>
-                  </a:txBody>
-                  <a:tcPr marL="91440" marR="91440" marT="45720" marB="45720" anchor="ctr">
-                    <a:lnL w="6350" cap="flat" cmpd="sng" algn="ctr">
-                      <a:solidFill>
-                        <a:srgbClr val="E3E8E9"/>
-                      </a:solidFill>
-                      <a:prstDash val="solid"/>
-                      <a:round/>
-                      <a:headEnd type="none" w="med" len="med"/>
-                      <a:tailEnd type="none" w="med" len="med"/>
-                    </a:lnL>
-                    <a:lnR w="6350" cap="flat" cmpd="sng" algn="ctr">
-                      <a:solidFill>
-                        <a:srgbClr val="E3E8E9"/>
-                      </a:solidFill>
-                      <a:prstDash val="solid"/>
-                      <a:round/>
-                      <a:headEnd type="none" w="med" len="med"/>
-                      <a:tailEnd type="none" w="med" len="med"/>
-                    </a:lnR>
-                    <a:lnT w="6350" cap="flat" cmpd="sng" algn="ctr">
-                      <a:solidFill>
-                        <a:srgbClr val="E3E8E9"/>
-                      </a:solidFill>
-                      <a:prstDash val="solid"/>
-                      <a:round/>
-                      <a:headEnd type="none" w="med" len="med"/>
-                      <a:tailEnd type="none" w="med" len="med"/>
-                    </a:lnT>
-                    <a:lnB w="6350" cap="flat" cmpd="sng" algn="ctr">
-                      <a:solidFill>
-                        <a:srgbClr val="E3E8E9"/>
-                      </a:solidFill>
-                      <a:prstDash val="solid"/>
-                      <a:round/>
-                      <a:headEnd type="none" w="med" len="med"/>
-                      <a:tailEnd type="none" w="med" len="med"/>
-                    </a:lnB>
-                    <a:solidFill>
-                      <a:srgbClr val="F0F4F5"/>
-                    </a:solidFill>
-                  </a:tcPr>
-                </a:tc>
-              </a:tr>
-              <a:tr h="288036">
-                <a:tc>
-                  <a:txBody>
-                    <a:bodyPr/>
-                    <a:lstStyle/>
-                    <a:p>
-                      <a:pPr indent="0" marL="0">
-                        <a:buNone/>
-                      </a:pPr>
-                      <a:r>
-                        <a:rPr lang="en-US" sz="1000" dirty="0">
-                          <a:solidFill>
-                            <a:srgbClr val="1C2B33"/>
-                          </a:solidFill>
-                          <a:latin typeface="Calibri" pitchFamily="34" charset="0"/>
-                          <a:ea typeface="Calibri" pitchFamily="34" charset="-122"/>
-                          <a:cs typeface="Calibri" pitchFamily="34" charset="-120"/>
-                        </a:rPr>
-                        <a:t>TA - Andaime</a:t>
-                      </a:r>
-                      <a:endParaRPr lang="en-US" sz="1000" dirty="0">
-                        <a:latin typeface="Calibri" charset="0"/>
-                        <a:ea typeface="Calibri" charset="0"/>
-                        <a:cs typeface="Calibri" charset="0"/>
-                      </a:endParaRPr>
-                    </a:p>
-                  </a:txBody>
-                  <a:tcPr marL="91440" marR="91440" marT="45720" marB="45720" anchor="ctr">
-                    <a:lnL w="6350" cap="flat" cmpd="sng" algn="ctr">
-                      <a:solidFill>
-                        <a:srgbClr val="E3E8E9"/>
-                      </a:solidFill>
-                      <a:prstDash val="solid"/>
-                      <a:round/>
-                      <a:headEnd type="none" w="med" len="med"/>
-                      <a:tailEnd type="none" w="med" len="med"/>
-                    </a:lnL>
-                    <a:lnR w="6350" cap="flat" cmpd="sng" algn="ctr">
-                      <a:solidFill>
-                        <a:srgbClr val="E3E8E9"/>
-                      </a:solidFill>
-                      <a:prstDash val="solid"/>
-                      <a:round/>
-                      <a:headEnd type="none" w="med" len="med"/>
-                      <a:tailEnd type="none" w="med" len="med"/>
-                    </a:lnR>
-                    <a:lnT w="6350" cap="flat" cmpd="sng" algn="ctr">
-                      <a:solidFill>
-                        <a:srgbClr val="E3E8E9"/>
-                      </a:solidFill>
-                      <a:prstDash val="solid"/>
-                      <a:round/>
-                      <a:headEnd type="none" w="med" len="med"/>
-                      <a:tailEnd type="none" w="med" len="med"/>
-                    </a:lnT>
-                    <a:lnB w="6350" cap="flat" cmpd="sng" algn="ctr">
-                      <a:solidFill>
-                        <a:srgbClr val="E3E8E9"/>
-                      </a:solidFill>
-                      <a:prstDash val="solid"/>
-                      <a:round/>
-                      <a:headEnd type="none" w="med" len="med"/>
-                      <a:tailEnd type="none" w="med" len="med"/>
-                    </a:lnB>
-                    <a:solidFill>
-                      <a:srgbClr val="FFFFFF"/>
-                    </a:solidFill>
-                  </a:tcPr>
-                </a:tc>
-                <a:tc>
-                  <a:txBody>
-                    <a:bodyPr/>
-                    <a:lstStyle/>
-                    <a:p>
-                      <a:pPr indent="0" marL="0">
-                        <a:buNone/>
-                      </a:pPr>
-                      <a:r>
-                        <a:rPr lang="en-US" sz="950" dirty="0">
-                          <a:solidFill>
-                            <a:srgbClr val="5B6B73"/>
-                          </a:solidFill>
-                          <a:latin typeface="Calibri" pitchFamily="34" charset="0"/>
-                          <a:ea typeface="Calibri" pitchFamily="34" charset="-122"/>
-                          <a:cs typeface="Calibri" pitchFamily="34" charset="-120"/>
-                        </a:rPr>
-                        <a:t>Eficiência de Produção</a:t>
-                      </a:r>
-                      <a:endParaRPr lang="en-US" sz="950" dirty="0">
-                        <a:latin typeface="Calibri" charset="0"/>
-                        <a:ea typeface="Calibri" charset="0"/>
-                        <a:cs typeface="Calibri" charset="0"/>
-                      </a:endParaRPr>
-                    </a:p>
-                  </a:txBody>
-                  <a:tcPr marL="91440" marR="91440" marT="45720" marB="45720" anchor="ctr">
-                    <a:lnL w="6350" cap="flat" cmpd="sng" algn="ctr">
-                      <a:solidFill>
-                        <a:srgbClr val="E3E8E9"/>
-                      </a:solidFill>
-                      <a:prstDash val="solid"/>
-                      <a:round/>
-                      <a:headEnd type="none" w="med" len="med"/>
-                      <a:tailEnd type="none" w="med" len="med"/>
-                    </a:lnL>
-                    <a:lnR w="6350" cap="flat" cmpd="sng" algn="ctr">
-                      <a:solidFill>
-                        <a:srgbClr val="E3E8E9"/>
-                      </a:solidFill>
-                      <a:prstDash val="solid"/>
-                      <a:round/>
-                      <a:headEnd type="none" w="med" len="med"/>
-                      <a:tailEnd type="none" w="med" len="med"/>
-                    </a:lnR>
-                    <a:lnT w="6350" cap="flat" cmpd="sng" algn="ctr">
-                      <a:solidFill>
-                        <a:srgbClr val="E3E8E9"/>
-                      </a:solidFill>
-                      <a:prstDash val="solid"/>
-                      <a:round/>
-                      <a:headEnd type="none" w="med" len="med"/>
-                      <a:tailEnd type="none" w="med" len="med"/>
-                    </a:lnT>
-                    <a:lnB w="6350" cap="flat" cmpd="sng" algn="ctr">
-                      <a:solidFill>
-                        <a:srgbClr val="E3E8E9"/>
-                      </a:solidFill>
-                      <a:prstDash val="solid"/>
-                      <a:round/>
-                      <a:headEnd type="none" w="med" len="med"/>
-                      <a:tailEnd type="none" w="med" len="med"/>
-                    </a:lnB>
-                    <a:solidFill>
-                      <a:srgbClr val="FFFFFF"/>
-                    </a:solidFill>
-                  </a:tcPr>
-                </a:tc>
-                <a:tc>
-                  <a:txBody>
-                    <a:bodyPr/>
-                    <a:lstStyle/>
-                    <a:p>
-                      <a:pPr indent="0" marL="0">
-                        <a:buNone/>
-                      </a:pPr>
-                      <a:r>
-                        <a:rPr lang="en-US" sz="950" dirty="0">
-                          <a:solidFill>
-                            <a:srgbClr val="5B6B73"/>
-                          </a:solidFill>
-                          <a:latin typeface="Calibri" pitchFamily="34" charset="0"/>
-                          <a:ea typeface="Calibri" pitchFamily="34" charset="-122"/>
-                          <a:cs typeface="Calibri" pitchFamily="34" charset="-120"/>
-                        </a:rPr>
-                        <a:t>TA - Parada Programada</a:t>
-                      </a:r>
-                      <a:endParaRPr lang="en-US" sz="950" dirty="0">
-                        <a:latin typeface="Calibri" charset="0"/>
-                        <a:ea typeface="Calibri" charset="0"/>
-                        <a:cs typeface="Calibri" charset="0"/>
-                      </a:endParaRPr>
-                    </a:p>
-                  </a:txBody>
-                  <a:tcPr marL="91440" marR="91440" marT="45720" marB="45720" anchor="ctr">
-                    <a:lnL w="6350" cap="flat" cmpd="sng" algn="ctr">
-                      <a:solidFill>
-                        <a:srgbClr val="E3E8E9"/>
-                      </a:solidFill>
-                      <a:prstDash val="solid"/>
-                      <a:round/>
-                      <a:headEnd type="none" w="med" len="med"/>
-                      <a:tailEnd type="none" w="med" len="med"/>
-                    </a:lnL>
-                    <a:lnR w="6350" cap="flat" cmpd="sng" algn="ctr">
-                      <a:solidFill>
-                        <a:srgbClr val="E3E8E9"/>
-                      </a:solidFill>
-                      <a:prstDash val="solid"/>
-                      <a:round/>
-                      <a:headEnd type="none" w="med" len="med"/>
-                      <a:tailEnd type="none" w="med" len="med"/>
-                    </a:lnR>
-                    <a:lnT w="6350" cap="flat" cmpd="sng" algn="ctr">
-                      <a:solidFill>
-                        <a:srgbClr val="E3E8E9"/>
-                      </a:solidFill>
-                      <a:prstDash val="solid"/>
-                      <a:round/>
-                      <a:headEnd type="none" w="med" len="med"/>
-                      <a:tailEnd type="none" w="med" len="med"/>
-                    </a:lnT>
-                    <a:lnB w="6350" cap="flat" cmpd="sng" algn="ctr">
-                      <a:solidFill>
-                        <a:srgbClr val="E3E8E9"/>
-                      </a:solidFill>
-                      <a:prstDash val="solid"/>
-                      <a:round/>
-                      <a:headEnd type="none" w="med" len="med"/>
-                      <a:tailEnd type="none" w="med" len="med"/>
-                    </a:lnB>
-                    <a:solidFill>
-                      <a:srgbClr val="FFFFFF"/>
-                    </a:solidFill>
-                  </a:tcPr>
-                </a:tc>
-                <a:tc>
-                  <a:txBody>
-                    <a:bodyPr/>
-                    <a:lstStyle/>
-                    <a:p>
-                      <a:pPr algn="r" indent="0" marL="0">
-                        <a:buNone/>
-                      </a:pPr>
-                      <a:r>
-                        <a:rPr lang="en-US" sz="1000" b="1" dirty="0">
-                          <a:solidFill>
-                            <a:srgbClr val="0B2A3D"/>
-                          </a:solidFill>
-                          <a:latin typeface="Calibri" pitchFamily="34" charset="0"/>
-                          <a:ea typeface="Calibri" pitchFamily="34" charset="-122"/>
-                          <a:cs typeface="Calibri" pitchFamily="34" charset="-120"/>
-                        </a:rPr>
-                        <a:t>US$ 65,4 mil</a:t>
-                      </a:r>
-                      <a:endParaRPr lang="en-US" sz="1000" dirty="0">
-                        <a:latin typeface="Calibri" charset="0"/>
-                        <a:ea typeface="Calibri" charset="0"/>
-                        <a:cs typeface="Calibri" charset="0"/>
-                      </a:endParaRPr>
-                    </a:p>
-                  </a:txBody>
-                  <a:tcPr marL="91440" marR="91440" marT="45720" marB="45720" anchor="ctr">
-                    <a:lnL w="6350" cap="flat" cmpd="sng" algn="ctr">
-                      <a:solidFill>
-                        <a:srgbClr val="E3E8E9"/>
-                      </a:solidFill>
-                      <a:prstDash val="solid"/>
-                      <a:round/>
-                      <a:headEnd type="none" w="med" len="med"/>
-                      <a:tailEnd type="none" w="med" len="med"/>
-                    </a:lnL>
-                    <a:lnR w="6350" cap="flat" cmpd="sng" algn="ctr">
-                      <a:solidFill>
-                        <a:srgbClr val="E3E8E9"/>
-                      </a:solidFill>
-                      <a:prstDash val="solid"/>
-                      <a:round/>
-                      <a:headEnd type="none" w="med" len="med"/>
-                      <a:tailEnd type="none" w="med" len="med"/>
-                    </a:lnR>
-                    <a:lnT w="6350" cap="flat" cmpd="sng" algn="ctr">
-                      <a:solidFill>
-                        <a:srgbClr val="E3E8E9"/>
-                      </a:solidFill>
-                      <a:prstDash val="solid"/>
-                      <a:round/>
-                      <a:headEnd type="none" w="med" len="med"/>
-                      <a:tailEnd type="none" w="med" len="med"/>
-                    </a:lnT>
-                    <a:lnB w="6350" cap="flat" cmpd="sng" algn="ctr">
-                      <a:solidFill>
-                        <a:srgbClr val="E3E8E9"/>
-                      </a:solidFill>
-                      <a:prstDash val="solid"/>
-                      <a:round/>
-                      <a:headEnd type="none" w="med" len="med"/>
-                      <a:tailEnd type="none" w="med" len="med"/>
-                    </a:lnB>
-                    <a:solidFill>
-                      <a:srgbClr val="FFFFFF"/>
-                    </a:solidFill>
-                  </a:tcPr>
-                </a:tc>
-              </a:tr>
-              <a:tr h="288036">
-                <a:tc>
-                  <a:txBody>
-                    <a:bodyPr/>
-                    <a:lstStyle/>
-                    <a:p>
-                      <a:pPr indent="0" marL="0">
-                        <a:buNone/>
-                      </a:pPr>
-                      <a:r>
-                        <a:rPr lang="en-US" sz="1000" dirty="0">
-                          <a:solidFill>
-                            <a:srgbClr val="1C2B33"/>
-                          </a:solidFill>
-                          <a:latin typeface="Calibri" pitchFamily="34" charset="0"/>
-                          <a:ea typeface="Calibri" pitchFamily="34" charset="-122"/>
-                          <a:cs typeface="Calibri" pitchFamily="34" charset="-120"/>
-                        </a:rPr>
-                        <a:t>PÓS TA - Andaime</a:t>
-                      </a:r>
-                      <a:endParaRPr lang="en-US" sz="1000" dirty="0">
-                        <a:latin typeface="Calibri" charset="0"/>
-                        <a:ea typeface="Calibri" charset="0"/>
-                        <a:cs typeface="Calibri" charset="0"/>
-                      </a:endParaRPr>
-                    </a:p>
-                  </a:txBody>
-                  <a:tcPr marL="91440" marR="91440" marT="45720" marB="45720" anchor="ctr">
-                    <a:lnL w="6350" cap="flat" cmpd="sng" algn="ctr">
-                      <a:solidFill>
-                        <a:srgbClr val="E3E8E9"/>
-                      </a:solidFill>
-                      <a:prstDash val="solid"/>
-                      <a:round/>
-                      <a:headEnd type="none" w="med" len="med"/>
-                      <a:tailEnd type="none" w="med" len="med"/>
-                    </a:lnL>
-                    <a:lnR w="6350" cap="flat" cmpd="sng" algn="ctr">
-                      <a:solidFill>
-                        <a:srgbClr val="E3E8E9"/>
-                      </a:solidFill>
-                      <a:prstDash val="solid"/>
-                      <a:round/>
-                      <a:headEnd type="none" w="med" len="med"/>
-                      <a:tailEnd type="none" w="med" len="med"/>
-                    </a:lnR>
-                    <a:lnT w="6350" cap="flat" cmpd="sng" algn="ctr">
-                      <a:solidFill>
-                        <a:srgbClr val="E3E8E9"/>
-                      </a:solidFill>
-                      <a:prstDash val="solid"/>
-                      <a:round/>
-                      <a:headEnd type="none" w="med" len="med"/>
-                      <a:tailEnd type="none" w="med" len="med"/>
-                    </a:lnT>
-                    <a:lnB w="6350" cap="flat" cmpd="sng" algn="ctr">
-                      <a:solidFill>
-                        <a:srgbClr val="E3E8E9"/>
-                      </a:solidFill>
-                      <a:prstDash val="solid"/>
-                      <a:round/>
-                      <a:headEnd type="none" w="med" len="med"/>
-                      <a:tailEnd type="none" w="med" len="med"/>
-                    </a:lnB>
-                    <a:solidFill>
-                      <a:srgbClr val="F0F4F5"/>
-                    </a:solidFill>
-                  </a:tcPr>
-                </a:tc>
-                <a:tc>
-                  <a:txBody>
-                    <a:bodyPr/>
-                    <a:lstStyle/>
-                    <a:p>
-                      <a:pPr indent="0" marL="0">
-                        <a:buNone/>
-                      </a:pPr>
-                      <a:r>
-                        <a:rPr lang="en-US" sz="950" dirty="0">
-                          <a:solidFill>
-                            <a:srgbClr val="5B6B73"/>
-                          </a:solidFill>
-                          <a:latin typeface="Calibri" pitchFamily="34" charset="0"/>
-                          <a:ea typeface="Calibri" pitchFamily="34" charset="-122"/>
-                          <a:cs typeface="Calibri" pitchFamily="34" charset="-120"/>
-                        </a:rPr>
-                        <a:t>Eficiência de Produção</a:t>
-                      </a:r>
-                      <a:endParaRPr lang="en-US" sz="950" dirty="0">
-                        <a:latin typeface="Calibri" charset="0"/>
-                        <a:ea typeface="Calibri" charset="0"/>
-                        <a:cs typeface="Calibri" charset="0"/>
-                      </a:endParaRPr>
-                    </a:p>
-                  </a:txBody>
-                  <a:tcPr marL="91440" marR="91440" marT="45720" marB="45720" anchor="ctr">
-                    <a:lnL w="6350" cap="flat" cmpd="sng" algn="ctr">
-                      <a:solidFill>
-                        <a:srgbClr val="E3E8E9"/>
-                      </a:solidFill>
-                      <a:prstDash val="solid"/>
-                      <a:round/>
-                      <a:headEnd type="none" w="med" len="med"/>
-                      <a:tailEnd type="none" w="med" len="med"/>
-                    </a:lnL>
-                    <a:lnR w="6350" cap="flat" cmpd="sng" algn="ctr">
-                      <a:solidFill>
-                        <a:srgbClr val="E3E8E9"/>
-                      </a:solidFill>
-                      <a:prstDash val="solid"/>
-                      <a:round/>
-                      <a:headEnd type="none" w="med" len="med"/>
-                      <a:tailEnd type="none" w="med" len="med"/>
-                    </a:lnR>
-                    <a:lnT w="6350" cap="flat" cmpd="sng" algn="ctr">
-                      <a:solidFill>
-                        <a:srgbClr val="E3E8E9"/>
-                      </a:solidFill>
-                      <a:prstDash val="solid"/>
-                      <a:round/>
-                      <a:headEnd type="none" w="med" len="med"/>
-                      <a:tailEnd type="none" w="med" len="med"/>
-                    </a:lnT>
-                    <a:lnB w="6350" cap="flat" cmpd="sng" algn="ctr">
-                      <a:solidFill>
-                        <a:srgbClr val="E3E8E9"/>
-                      </a:solidFill>
-                      <a:prstDash val="solid"/>
-                      <a:round/>
-                      <a:headEnd type="none" w="med" len="med"/>
-                      <a:tailEnd type="none" w="med" len="med"/>
-                    </a:lnB>
-                    <a:solidFill>
-                      <a:srgbClr val="F0F4F5"/>
-                    </a:solidFill>
-                  </a:tcPr>
-                </a:tc>
-                <a:tc>
-                  <a:txBody>
-                    <a:bodyPr/>
-                    <a:lstStyle/>
-                    <a:p>
-                      <a:pPr indent="0" marL="0">
-                        <a:buNone/>
-                      </a:pPr>
-                      <a:r>
-                        <a:rPr lang="en-US" sz="950" dirty="0">
-                          <a:solidFill>
-                            <a:srgbClr val="5B6B73"/>
-                          </a:solidFill>
-                          <a:latin typeface="Calibri" pitchFamily="34" charset="0"/>
-                          <a:ea typeface="Calibri" pitchFamily="34" charset="-122"/>
-                          <a:cs typeface="Calibri" pitchFamily="34" charset="-120"/>
-                        </a:rPr>
-                        <a:t>TA - Parada Programada</a:t>
-                      </a:r>
-                      <a:endParaRPr lang="en-US" sz="950" dirty="0">
-                        <a:latin typeface="Calibri" charset="0"/>
-                        <a:ea typeface="Calibri" charset="0"/>
-                        <a:cs typeface="Calibri" charset="0"/>
-                      </a:endParaRPr>
-                    </a:p>
-                  </a:txBody>
-                  <a:tcPr marL="91440" marR="91440" marT="45720" marB="45720" anchor="ctr">
-                    <a:lnL w="6350" cap="flat" cmpd="sng" algn="ctr">
-                      <a:solidFill>
-                        <a:srgbClr val="E3E8E9"/>
-                      </a:solidFill>
-                      <a:prstDash val="solid"/>
-                      <a:round/>
-                      <a:headEnd type="none" w="med" len="med"/>
-                      <a:tailEnd type="none" w="med" len="med"/>
-                    </a:lnL>
-                    <a:lnR w="6350" cap="flat" cmpd="sng" algn="ctr">
-                      <a:solidFill>
-                        <a:srgbClr val="E3E8E9"/>
-                      </a:solidFill>
-                      <a:prstDash val="solid"/>
-                      <a:round/>
-                      <a:headEnd type="none" w="med" len="med"/>
-                      <a:tailEnd type="none" w="med" len="med"/>
-                    </a:lnR>
-                    <a:lnT w="6350" cap="flat" cmpd="sng" algn="ctr">
-                      <a:solidFill>
-                        <a:srgbClr val="E3E8E9"/>
-                      </a:solidFill>
-                      <a:prstDash val="solid"/>
-                      <a:round/>
-                      <a:headEnd type="none" w="med" len="med"/>
-                      <a:tailEnd type="none" w="med" len="med"/>
-                    </a:lnT>
-                    <a:lnB w="6350" cap="flat" cmpd="sng" algn="ctr">
-                      <a:solidFill>
-                        <a:srgbClr val="E3E8E9"/>
-                      </a:solidFill>
-                      <a:prstDash val="solid"/>
-                      <a:round/>
-                      <a:headEnd type="none" w="med" len="med"/>
-                      <a:tailEnd type="none" w="med" len="med"/>
-                    </a:lnB>
-                    <a:solidFill>
-                      <a:srgbClr val="F0F4F5"/>
-                    </a:solidFill>
-                  </a:tcPr>
-                </a:tc>
-                <a:tc>
-                  <a:txBody>
-                    <a:bodyPr/>
-                    <a:lstStyle/>
-                    <a:p>
-                      <a:pPr algn="r" indent="0" marL="0">
-                        <a:buNone/>
-                      </a:pPr>
-                      <a:r>
-                        <a:rPr lang="en-US" sz="1000" b="1" dirty="0">
-                          <a:solidFill>
-                            <a:srgbClr val="0B2A3D"/>
-                          </a:solidFill>
-                          <a:latin typeface="Calibri" pitchFamily="34" charset="0"/>
-                          <a:ea typeface="Calibri" pitchFamily="34" charset="-122"/>
-                          <a:cs typeface="Calibri" pitchFamily="34" charset="-120"/>
-                        </a:rPr>
-                        <a:t>US$ 34,0 mil</a:t>
-                      </a:r>
-                      <a:endParaRPr lang="en-US" sz="1000" dirty="0">
-                        <a:latin typeface="Calibri" charset="0"/>
-                        <a:ea typeface="Calibri" charset="0"/>
-                        <a:cs typeface="Calibri" charset="0"/>
-                      </a:endParaRPr>
-                    </a:p>
-                  </a:txBody>
-                  <a:tcPr marL="91440" marR="91440" marT="45720" marB="45720" anchor="ctr">
-                    <a:lnL w="6350" cap="flat" cmpd="sng" algn="ctr">
-                      <a:solidFill>
-                        <a:srgbClr val="E3E8E9"/>
-                      </a:solidFill>
-                      <a:prstDash val="solid"/>
-                      <a:round/>
-                      <a:headEnd type="none" w="med" len="med"/>
-                      <a:tailEnd type="none" w="med" len="med"/>
-                    </a:lnL>
-                    <a:lnR w="6350" cap="flat" cmpd="sng" algn="ctr">
-                      <a:solidFill>
-                        <a:srgbClr val="E3E8E9"/>
-                      </a:solidFill>
-                      <a:prstDash val="solid"/>
-                      <a:round/>
-                      <a:headEnd type="none" w="med" len="med"/>
-                      <a:tailEnd type="none" w="med" len="med"/>
-                    </a:lnR>
-                    <a:lnT w="6350" cap="flat" cmpd="sng" algn="ctr">
-                      <a:solidFill>
-                        <a:srgbClr val="E3E8E9"/>
-                      </a:solidFill>
-                      <a:prstDash val="solid"/>
-                      <a:round/>
-                      <a:headEnd type="none" w="med" len="med"/>
-                      <a:tailEnd type="none" w="med" len="med"/>
-                    </a:lnT>
-                    <a:lnB w="6350" cap="flat" cmpd="sng" algn="ctr">
-                      <a:solidFill>
-                        <a:srgbClr val="E3E8E9"/>
-                      </a:solidFill>
-                      <a:prstDash val="solid"/>
-                      <a:round/>
-                      <a:headEnd type="none" w="med" len="med"/>
-                      <a:tailEnd type="none" w="med" len="med"/>
-                    </a:lnB>
-                    <a:solidFill>
-                      <a:srgbClr val="F0F4F5"/>
-                    </a:solidFill>
-                  </a:tcPr>
-                </a:tc>
-              </a:tr>
-              <a:tr h="288036">
-                <a:tc>
-                  <a:txBody>
-                    <a:bodyPr/>
-                    <a:lstStyle/>
-                    <a:p>
-                      <a:pPr indent="0" marL="0">
-                        <a:buNone/>
-                      </a:pPr>
-                      <a:r>
-                        <a:rPr lang="en-US" sz="1000" dirty="0">
-                          <a:solidFill>
-                            <a:srgbClr val="1C2B33"/>
-                          </a:solidFill>
-                          <a:latin typeface="Calibri" pitchFamily="34" charset="0"/>
-                          <a:ea typeface="Calibri" pitchFamily="34" charset="-122"/>
-                          <a:cs typeface="Calibri" pitchFamily="34" charset="-120"/>
-                        </a:rPr>
-                        <a:t>PÓS TA - Elétrica</a:t>
-                      </a:r>
-                      <a:endParaRPr lang="en-US" sz="1000" dirty="0">
-                        <a:latin typeface="Calibri" charset="0"/>
-                        <a:ea typeface="Calibri" charset="0"/>
-                        <a:cs typeface="Calibri" charset="0"/>
-                      </a:endParaRPr>
-                    </a:p>
-                  </a:txBody>
-                  <a:tcPr marL="91440" marR="91440" marT="45720" marB="45720" anchor="ctr">
-                    <a:lnL w="6350" cap="flat" cmpd="sng" algn="ctr">
-                      <a:solidFill>
-                        <a:srgbClr val="E3E8E9"/>
-                      </a:solidFill>
-                      <a:prstDash val="solid"/>
-                      <a:round/>
-                      <a:headEnd type="none" w="med" len="med"/>
-                      <a:tailEnd type="none" w="med" len="med"/>
-                    </a:lnL>
-                    <a:lnR w="6350" cap="flat" cmpd="sng" algn="ctr">
-                      <a:solidFill>
-                        <a:srgbClr val="E3E8E9"/>
-                      </a:solidFill>
-                      <a:prstDash val="solid"/>
-                      <a:round/>
-                      <a:headEnd type="none" w="med" len="med"/>
-                      <a:tailEnd type="none" w="med" len="med"/>
-                    </a:lnR>
-                    <a:lnT w="6350" cap="flat" cmpd="sng" algn="ctr">
-                      <a:solidFill>
-                        <a:srgbClr val="E3E8E9"/>
-                      </a:solidFill>
-                      <a:prstDash val="solid"/>
-                      <a:round/>
-                      <a:headEnd type="none" w="med" len="med"/>
-                      <a:tailEnd type="none" w="med" len="med"/>
-                    </a:lnT>
-                    <a:lnB w="6350" cap="flat" cmpd="sng" algn="ctr">
-                      <a:solidFill>
-                        <a:srgbClr val="E3E8E9"/>
-                      </a:solidFill>
-                      <a:prstDash val="solid"/>
-                      <a:round/>
-                      <a:headEnd type="none" w="med" len="med"/>
-                      <a:tailEnd type="none" w="med" len="med"/>
-                    </a:lnB>
-                    <a:solidFill>
-                      <a:srgbClr val="FFFFFF"/>
-                    </a:solidFill>
-                  </a:tcPr>
-                </a:tc>
-                <a:tc>
-                  <a:txBody>
-                    <a:bodyPr/>
-                    <a:lstStyle/>
-                    <a:p>
-                      <a:pPr indent="0" marL="0">
-                        <a:buNone/>
-                      </a:pPr>
-                      <a:r>
-                        <a:rPr lang="en-US" sz="950" dirty="0">
-                          <a:solidFill>
-                            <a:srgbClr val="5B6B73"/>
-                          </a:solidFill>
-                          <a:latin typeface="Calibri" pitchFamily="34" charset="0"/>
-                          <a:ea typeface="Calibri" pitchFamily="34" charset="-122"/>
-                          <a:cs typeface="Calibri" pitchFamily="34" charset="-120"/>
-                        </a:rPr>
-                        <a:t>Eficiência de Produção</a:t>
-                      </a:r>
-                      <a:endParaRPr lang="en-US" sz="950" dirty="0">
-                        <a:latin typeface="Calibri" charset="0"/>
-                        <a:ea typeface="Calibri" charset="0"/>
-                        <a:cs typeface="Calibri" charset="0"/>
-                      </a:endParaRPr>
-                    </a:p>
-                  </a:txBody>
-                  <a:tcPr marL="91440" marR="91440" marT="45720" marB="45720" anchor="ctr">
-                    <a:lnL w="6350" cap="flat" cmpd="sng" algn="ctr">
-                      <a:solidFill>
-                        <a:srgbClr val="E3E8E9"/>
-                      </a:solidFill>
-                      <a:prstDash val="solid"/>
-                      <a:round/>
-                      <a:headEnd type="none" w="med" len="med"/>
-                      <a:tailEnd type="none" w="med" len="med"/>
-                    </a:lnL>
-                    <a:lnR w="6350" cap="flat" cmpd="sng" algn="ctr">
-                      <a:solidFill>
-                        <a:srgbClr val="E3E8E9"/>
-                      </a:solidFill>
-                      <a:prstDash val="solid"/>
-                      <a:round/>
-                      <a:headEnd type="none" w="med" len="med"/>
-                      <a:tailEnd type="none" w="med" len="med"/>
-                    </a:lnR>
-                    <a:lnT w="6350" cap="flat" cmpd="sng" algn="ctr">
-                      <a:solidFill>
-                        <a:srgbClr val="E3E8E9"/>
-                      </a:solidFill>
-                      <a:prstDash val="solid"/>
-                      <a:round/>
-                      <a:headEnd type="none" w="med" len="med"/>
-                      <a:tailEnd type="none" w="med" len="med"/>
-                    </a:lnT>
-                    <a:lnB w="6350" cap="flat" cmpd="sng" algn="ctr">
-                      <a:solidFill>
-                        <a:srgbClr val="E3E8E9"/>
-                      </a:solidFill>
-                      <a:prstDash val="solid"/>
-                      <a:round/>
-                      <a:headEnd type="none" w="med" len="med"/>
-                      <a:tailEnd type="none" w="med" len="med"/>
-                    </a:lnB>
-                    <a:solidFill>
-                      <a:srgbClr val="FFFFFF"/>
-                    </a:solidFill>
-                  </a:tcPr>
-                </a:tc>
-                <a:tc>
-                  <a:txBody>
-                    <a:bodyPr/>
-                    <a:lstStyle/>
-                    <a:p>
-                      <a:pPr indent="0" marL="0">
-                        <a:buNone/>
-                      </a:pPr>
-                      <a:r>
-                        <a:rPr lang="en-US" sz="950" dirty="0">
-                          <a:solidFill>
-                            <a:srgbClr val="5B6B73"/>
-                          </a:solidFill>
-                          <a:latin typeface="Calibri" pitchFamily="34" charset="0"/>
-                          <a:ea typeface="Calibri" pitchFamily="34" charset="-122"/>
-                          <a:cs typeface="Calibri" pitchFamily="34" charset="-120"/>
-                        </a:rPr>
-                        <a:t>TA - Parada Programada</a:t>
-                      </a:r>
-                      <a:endParaRPr lang="en-US" sz="950" dirty="0">
-                        <a:latin typeface="Calibri" charset="0"/>
-                        <a:ea typeface="Calibri" charset="0"/>
-                        <a:cs typeface="Calibri" charset="0"/>
-                      </a:endParaRPr>
-                    </a:p>
-                  </a:txBody>
-                  <a:tcPr marL="91440" marR="91440" marT="45720" marB="45720" anchor="ctr">
-                    <a:lnL w="6350" cap="flat" cmpd="sng" algn="ctr">
-                      <a:solidFill>
-                        <a:srgbClr val="E3E8E9"/>
-                      </a:solidFill>
-                      <a:prstDash val="solid"/>
-                      <a:round/>
-                      <a:headEnd type="none" w="med" len="med"/>
-                      <a:tailEnd type="none" w="med" len="med"/>
-                    </a:lnL>
-                    <a:lnR w="6350" cap="flat" cmpd="sng" algn="ctr">
-                      <a:solidFill>
-                        <a:srgbClr val="E3E8E9"/>
-                      </a:solidFill>
-                      <a:prstDash val="solid"/>
-                      <a:round/>
-                      <a:headEnd type="none" w="med" len="med"/>
-                      <a:tailEnd type="none" w="med" len="med"/>
-                    </a:lnR>
-                    <a:lnT w="6350" cap="flat" cmpd="sng" algn="ctr">
-                      <a:solidFill>
-                        <a:srgbClr val="E3E8E9"/>
-                      </a:solidFill>
-                      <a:prstDash val="solid"/>
-                      <a:round/>
-                      <a:headEnd type="none" w="med" len="med"/>
-                      <a:tailEnd type="none" w="med" len="med"/>
-                    </a:lnT>
-                    <a:lnB w="6350" cap="flat" cmpd="sng" algn="ctr">
-                      <a:solidFill>
-                        <a:srgbClr val="E3E8E9"/>
-                      </a:solidFill>
-                      <a:prstDash val="solid"/>
-                      <a:round/>
-                      <a:headEnd type="none" w="med" len="med"/>
-                      <a:tailEnd type="none" w="med" len="med"/>
-                    </a:lnB>
-                    <a:solidFill>
-                      <a:srgbClr val="FFFFFF"/>
-                    </a:solidFill>
-                  </a:tcPr>
-                </a:tc>
-                <a:tc>
-                  <a:txBody>
-                    <a:bodyPr/>
-                    <a:lstStyle/>
-                    <a:p>
-                      <a:pPr algn="r" indent="0" marL="0">
-                        <a:buNone/>
-                      </a:pPr>
-                      <a:r>
-                        <a:rPr lang="en-US" sz="1000" b="1" dirty="0">
-                          <a:solidFill>
-                            <a:srgbClr val="0B2A3D"/>
-                          </a:solidFill>
-                          <a:latin typeface="Calibri" pitchFamily="34" charset="0"/>
-                          <a:ea typeface="Calibri" pitchFamily="34" charset="-122"/>
-                          <a:cs typeface="Calibri" pitchFamily="34" charset="-120"/>
-                        </a:rPr>
-                        <a:t>US$ 26,5 mil</a:t>
-                      </a:r>
-                      <a:endParaRPr lang="en-US" sz="1000" dirty="0">
-                        <a:latin typeface="Calibri" charset="0"/>
-                        <a:ea typeface="Calibri" charset="0"/>
-                        <a:cs typeface="Calibri" charset="0"/>
-                      </a:endParaRPr>
-                    </a:p>
-                  </a:txBody>
-                  <a:tcPr marL="91440" marR="91440" marT="45720" marB="45720" anchor="ctr">
-                    <a:lnL w="6350" cap="flat" cmpd="sng" algn="ctr">
-                      <a:solidFill>
-                        <a:srgbClr val="E3E8E9"/>
-                      </a:solidFill>
-                      <a:prstDash val="solid"/>
-                      <a:round/>
-                      <a:headEnd type="none" w="med" len="med"/>
-                      <a:tailEnd type="none" w="med" len="med"/>
-                    </a:lnL>
-                    <a:lnR w="6350" cap="flat" cmpd="sng" algn="ctr">
-                      <a:solidFill>
-                        <a:srgbClr val="E3E8E9"/>
-                      </a:solidFill>
-                      <a:prstDash val="solid"/>
-                      <a:round/>
-                      <a:headEnd type="none" w="med" len="med"/>
-                      <a:tailEnd type="none" w="med" len="med"/>
-                    </a:lnR>
-                    <a:lnT w="6350" cap="flat" cmpd="sng" algn="ctr">
-                      <a:solidFill>
-                        <a:srgbClr val="E3E8E9"/>
-                      </a:solidFill>
-                      <a:prstDash val="solid"/>
-                      <a:round/>
-                      <a:headEnd type="none" w="med" len="med"/>
-                      <a:tailEnd type="none" w="med" len="med"/>
-                    </a:lnT>
-                    <a:lnB w="6350" cap="flat" cmpd="sng" algn="ctr">
-                      <a:solidFill>
-                        <a:srgbClr val="E3E8E9"/>
-                      </a:solidFill>
-                      <a:prstDash val="solid"/>
-                      <a:round/>
-                      <a:headEnd type="none" w="med" len="med"/>
-                      <a:tailEnd type="none" w="med" len="med"/>
-                    </a:lnB>
-                    <a:solidFill>
-                      <a:srgbClr val="FFFFFF"/>
-                    </a:solidFill>
-                  </a:tcPr>
-                </a:tc>
-              </a:tr>
-              <a:tr h="288036">
-                <a:tc>
-                  <a:txBody>
-                    <a:bodyPr/>
-                    <a:lstStyle/>
-                    <a:p>
-                      <a:pPr indent="0" marL="0">
-                        <a:buNone/>
-                      </a:pPr>
-                      <a:r>
-                        <a:rPr lang="en-US" sz="1000" dirty="0">
-                          <a:solidFill>
-                            <a:srgbClr val="1C2B33"/>
-                          </a:solidFill>
-                          <a:latin typeface="Calibri" pitchFamily="34" charset="0"/>
-                          <a:ea typeface="Calibri" pitchFamily="34" charset="-122"/>
-                          <a:cs typeface="Calibri" pitchFamily="34" charset="-120"/>
-                        </a:rPr>
-                        <a:t>PRÉ TA - Elétrica</a:t>
-                      </a:r>
-                      <a:endParaRPr lang="en-US" sz="1000" dirty="0">
-                        <a:latin typeface="Calibri" charset="0"/>
-                        <a:ea typeface="Calibri" charset="0"/>
-                        <a:cs typeface="Calibri" charset="0"/>
-                      </a:endParaRPr>
-                    </a:p>
-                  </a:txBody>
-                  <a:tcPr marL="91440" marR="91440" marT="45720" marB="45720" anchor="ctr">
-                    <a:lnL w="6350" cap="flat" cmpd="sng" algn="ctr">
-                      <a:solidFill>
-                        <a:srgbClr val="E3E8E9"/>
-                      </a:solidFill>
-                      <a:prstDash val="solid"/>
-                      <a:round/>
-                      <a:headEnd type="none" w="med" len="med"/>
-                      <a:tailEnd type="none" w="med" len="med"/>
-                    </a:lnL>
-                    <a:lnR w="6350" cap="flat" cmpd="sng" algn="ctr">
-                      <a:solidFill>
-                        <a:srgbClr val="E3E8E9"/>
-                      </a:solidFill>
-                      <a:prstDash val="solid"/>
-                      <a:round/>
-                      <a:headEnd type="none" w="med" len="med"/>
-                      <a:tailEnd type="none" w="med" len="med"/>
-                    </a:lnR>
-                    <a:lnT w="6350" cap="flat" cmpd="sng" algn="ctr">
-                      <a:solidFill>
-                        <a:srgbClr val="E3E8E9"/>
-                      </a:solidFill>
-                      <a:prstDash val="solid"/>
-                      <a:round/>
-                      <a:headEnd type="none" w="med" len="med"/>
-                      <a:tailEnd type="none" w="med" len="med"/>
-                    </a:lnT>
-                    <a:lnB w="6350" cap="flat" cmpd="sng" algn="ctr">
-                      <a:solidFill>
-                        <a:srgbClr val="E3E8E9"/>
-                      </a:solidFill>
-                      <a:prstDash val="solid"/>
-                      <a:round/>
-                      <a:headEnd type="none" w="med" len="med"/>
-                      <a:tailEnd type="none" w="med" len="med"/>
-                    </a:lnB>
-                    <a:solidFill>
-                      <a:srgbClr val="F0F4F5"/>
-                    </a:solidFill>
-                  </a:tcPr>
-                </a:tc>
-                <a:tc>
-                  <a:txBody>
-                    <a:bodyPr/>
-                    <a:lstStyle/>
-                    <a:p>
-                      <a:pPr indent="0" marL="0">
-                        <a:buNone/>
-                      </a:pPr>
-                      <a:r>
-                        <a:rPr lang="en-US" sz="950" dirty="0">
-                          <a:solidFill>
-                            <a:srgbClr val="5B6B73"/>
-                          </a:solidFill>
-                          <a:latin typeface="Calibri" pitchFamily="34" charset="0"/>
-                          <a:ea typeface="Calibri" pitchFamily="34" charset="-122"/>
-                          <a:cs typeface="Calibri" pitchFamily="34" charset="-120"/>
-                        </a:rPr>
-                        <a:t>Eficiência de Produção</a:t>
-                      </a:r>
-                      <a:endParaRPr lang="en-US" sz="950" dirty="0">
-                        <a:latin typeface="Calibri" charset="0"/>
-                        <a:ea typeface="Calibri" charset="0"/>
-                        <a:cs typeface="Calibri" charset="0"/>
-                      </a:endParaRPr>
-                    </a:p>
-                  </a:txBody>
-                  <a:tcPr marL="91440" marR="91440" marT="45720" marB="45720" anchor="ctr">
-                    <a:lnL w="6350" cap="flat" cmpd="sng" algn="ctr">
-                      <a:solidFill>
-                        <a:srgbClr val="E3E8E9"/>
-                      </a:solidFill>
-                      <a:prstDash val="solid"/>
-                      <a:round/>
-                      <a:headEnd type="none" w="med" len="med"/>
-                      <a:tailEnd type="none" w="med" len="med"/>
-                    </a:lnL>
-                    <a:lnR w="6350" cap="flat" cmpd="sng" algn="ctr">
-                      <a:solidFill>
-                        <a:srgbClr val="E3E8E9"/>
-                      </a:solidFill>
-                      <a:prstDash val="solid"/>
-                      <a:round/>
-                      <a:headEnd type="none" w="med" len="med"/>
-                      <a:tailEnd type="none" w="med" len="med"/>
-                    </a:lnR>
-                    <a:lnT w="6350" cap="flat" cmpd="sng" algn="ctr">
-                      <a:solidFill>
-                        <a:srgbClr val="E3E8E9"/>
-                      </a:solidFill>
-                      <a:prstDash val="solid"/>
-                      <a:round/>
-                      <a:headEnd type="none" w="med" len="med"/>
-                      <a:tailEnd type="none" w="med" len="med"/>
-                    </a:lnT>
-                    <a:lnB w="6350" cap="flat" cmpd="sng" algn="ctr">
-                      <a:solidFill>
-                        <a:srgbClr val="E3E8E9"/>
-                      </a:solidFill>
-                      <a:prstDash val="solid"/>
-                      <a:round/>
-                      <a:headEnd type="none" w="med" len="med"/>
-                      <a:tailEnd type="none" w="med" len="med"/>
-                    </a:lnB>
-                    <a:solidFill>
-                      <a:srgbClr val="F0F4F5"/>
-                    </a:solidFill>
-                  </a:tcPr>
-                </a:tc>
-                <a:tc>
-                  <a:txBody>
-                    <a:bodyPr/>
-                    <a:lstStyle/>
-                    <a:p>
-                      <a:pPr indent="0" marL="0">
-                        <a:buNone/>
-                      </a:pPr>
-                      <a:r>
-                        <a:rPr lang="en-US" sz="950" dirty="0">
-                          <a:solidFill>
-                            <a:srgbClr val="5B6B73"/>
-                          </a:solidFill>
-                          <a:latin typeface="Calibri" pitchFamily="34" charset="0"/>
-                          <a:ea typeface="Calibri" pitchFamily="34" charset="-122"/>
-                          <a:cs typeface="Calibri" pitchFamily="34" charset="-120"/>
-                        </a:rPr>
-                        <a:t>TA - Parada Programada</a:t>
-                      </a:r>
-                      <a:endParaRPr lang="en-US" sz="950" dirty="0">
-                        <a:latin typeface="Calibri" charset="0"/>
-                        <a:ea typeface="Calibri" charset="0"/>
-                        <a:cs typeface="Calibri" charset="0"/>
-                      </a:endParaRPr>
-                    </a:p>
-                  </a:txBody>
-                  <a:tcPr marL="91440" marR="91440" marT="45720" marB="45720" anchor="ctr">
-                    <a:lnL w="6350" cap="flat" cmpd="sng" algn="ctr">
-                      <a:solidFill>
-                        <a:srgbClr val="E3E8E9"/>
-                      </a:solidFill>
-                      <a:prstDash val="solid"/>
-                      <a:round/>
-                      <a:headEnd type="none" w="med" len="med"/>
-                      <a:tailEnd type="none" w="med" len="med"/>
-                    </a:lnL>
-                    <a:lnR w="6350" cap="flat" cmpd="sng" algn="ctr">
-                      <a:solidFill>
-                        <a:srgbClr val="E3E8E9"/>
-                      </a:solidFill>
-                      <a:prstDash val="solid"/>
-                      <a:round/>
-                      <a:headEnd type="none" w="med" len="med"/>
-                      <a:tailEnd type="none" w="med" len="med"/>
-                    </a:lnR>
-                    <a:lnT w="6350" cap="flat" cmpd="sng" algn="ctr">
-                      <a:solidFill>
-                        <a:srgbClr val="E3E8E9"/>
-                      </a:solidFill>
-                      <a:prstDash val="solid"/>
-                      <a:round/>
-                      <a:headEnd type="none" w="med" len="med"/>
-                      <a:tailEnd type="none" w="med" len="med"/>
-                    </a:lnT>
-                    <a:lnB w="6350" cap="flat" cmpd="sng" algn="ctr">
-                      <a:solidFill>
-                        <a:srgbClr val="E3E8E9"/>
-                      </a:solidFill>
-                      <a:prstDash val="solid"/>
-                      <a:round/>
-                      <a:headEnd type="none" w="med" len="med"/>
-                      <a:tailEnd type="none" w="med" len="med"/>
-                    </a:lnB>
-                    <a:solidFill>
-                      <a:srgbClr val="F0F4F5"/>
-                    </a:solidFill>
-                  </a:tcPr>
-                </a:tc>
-                <a:tc>
-                  <a:txBody>
-                    <a:bodyPr/>
-                    <a:lstStyle/>
-                    <a:p>
-                      <a:pPr algn="r" indent="0" marL="0">
-                        <a:buNone/>
-                      </a:pPr>
-                      <a:r>
-                        <a:rPr lang="en-US" sz="1000" b="1" dirty="0">
-                          <a:solidFill>
-                            <a:srgbClr val="0B2A3D"/>
-                          </a:solidFill>
-                          <a:latin typeface="Calibri" pitchFamily="34" charset="0"/>
-                          <a:ea typeface="Calibri" pitchFamily="34" charset="-122"/>
-                          <a:cs typeface="Calibri" pitchFamily="34" charset="-120"/>
-                        </a:rPr>
-                        <a:t>US$ 26,5 mil</a:t>
-                      </a:r>
-                      <a:endParaRPr lang="en-US" sz="1000" dirty="0">
-                        <a:latin typeface="Calibri" charset="0"/>
-                        <a:ea typeface="Calibri" charset="0"/>
-                        <a:cs typeface="Calibri" charset="0"/>
-                      </a:endParaRPr>
-                    </a:p>
-                  </a:txBody>
-                  <a:tcPr marL="91440" marR="91440" marT="45720" marB="45720" anchor="ctr">
-                    <a:lnL w="6350" cap="flat" cmpd="sng" algn="ctr">
-                      <a:solidFill>
-                        <a:srgbClr val="E3E8E9"/>
-                      </a:solidFill>
-                      <a:prstDash val="solid"/>
-                      <a:round/>
-                      <a:headEnd type="none" w="med" len="med"/>
-                      <a:tailEnd type="none" w="med" len="med"/>
-                    </a:lnL>
-                    <a:lnR w="6350" cap="flat" cmpd="sng" algn="ctr">
-                      <a:solidFill>
-                        <a:srgbClr val="E3E8E9"/>
-                      </a:solidFill>
-                      <a:prstDash val="solid"/>
-                      <a:round/>
-                      <a:headEnd type="none" w="med" len="med"/>
-                      <a:tailEnd type="none" w="med" len="med"/>
-                    </a:lnR>
-                    <a:lnT w="6350" cap="flat" cmpd="sng" algn="ctr">
-                      <a:solidFill>
-                        <a:srgbClr val="E3E8E9"/>
-                      </a:solidFill>
-                      <a:prstDash val="solid"/>
-                      <a:round/>
-                      <a:headEnd type="none" w="med" len="med"/>
-                      <a:tailEnd type="none" w="med" len="med"/>
-                    </a:lnT>
-                    <a:lnB w="6350" cap="flat" cmpd="sng" algn="ctr">
-                      <a:solidFill>
-                        <a:srgbClr val="E3E8E9"/>
-                      </a:solidFill>
-                      <a:prstDash val="solid"/>
-                      <a:round/>
-                      <a:headEnd type="none" w="med" len="med"/>
-                      <a:tailEnd type="none" w="med" len="med"/>
-                    </a:lnB>
-                    <a:solidFill>
-                      <a:srgbClr val="F0F4F5"/>
-                    </a:solidFill>
-                  </a:tcPr>
-                </a:tc>
-              </a:tr>
-              <a:tr h="288036">
-                <a:tc gridSpan="3">
-                  <a:txBody>
-                    <a:bodyPr/>
-                    <a:lstStyle/>
-                    <a:p>
-                      <a:pPr indent="0" marL="0">
-                        <a:buNone/>
-                      </a:pPr>
-                      <a:r>
-                        <a:rPr lang="en-US" sz="950" i="1" dirty="0">
-                          <a:solidFill>
-                            <a:srgbClr val="145C68"/>
-                          </a:solidFill>
-                          <a:latin typeface="Calibri" pitchFamily="34" charset="0"/>
-                          <a:ea typeface="Calibri" pitchFamily="34" charset="-122"/>
-                          <a:cs typeface="Calibri" pitchFamily="34" charset="-120"/>
-                        </a:rPr>
-                        <a:t>Outros 13 escopos (itens de menor valor individual)</a:t>
-                      </a:r>
-                      <a:endParaRPr lang="en-US" sz="950" dirty="0">
-                        <a:latin typeface="Calibri" charset="0"/>
-                        <a:ea typeface="Calibri" charset="0"/>
-                        <a:cs typeface="Calibri" charset="0"/>
-                      </a:endParaRPr>
-                    </a:p>
-                  </a:txBody>
-                  <a:tcPr marL="91440" marR="91440" marT="45720" marB="45720" anchor="ctr">
-                    <a:lnL w="6350" cap="flat" cmpd="sng" algn="ctr">
-                      <a:solidFill>
-                        <a:srgbClr val="E3E8E9"/>
-                      </a:solidFill>
-                      <a:prstDash val="solid"/>
-                      <a:round/>
-                      <a:headEnd type="none" w="med" len="med"/>
-                      <a:tailEnd type="none" w="med" len="med"/>
-                    </a:lnL>
-                    <a:lnR w="6350" cap="flat" cmpd="sng" algn="ctr">
-                      <a:solidFill>
-                        <a:srgbClr val="E3E8E9"/>
-                      </a:solidFill>
-                      <a:prstDash val="solid"/>
-                      <a:round/>
-                      <a:headEnd type="none" w="med" len="med"/>
-                      <a:tailEnd type="none" w="med" len="med"/>
-                    </a:lnR>
-                    <a:lnT w="6350" cap="flat" cmpd="sng" algn="ctr">
-                      <a:solidFill>
-                        <a:srgbClr val="E3E8E9"/>
-                      </a:solidFill>
-                      <a:prstDash val="solid"/>
-                      <a:round/>
-                      <a:headEnd type="none" w="med" len="med"/>
-                      <a:tailEnd type="none" w="med" len="med"/>
-                    </a:lnT>
-                    <a:lnB w="6350" cap="flat" cmpd="sng" algn="ctr">
-                      <a:solidFill>
-                        <a:srgbClr val="E3E8E9"/>
-                      </a:solidFill>
-                      <a:prstDash val="solid"/>
-                      <a:round/>
-                      <a:headEnd type="none" w="med" len="med"/>
-                      <a:tailEnd type="none" w="med" len="med"/>
-                    </a:lnB>
-                    <a:solidFill>
-                      <a:srgbClr val="DCE8E2"/>
-                    </a:solidFill>
-                  </a:tcPr>
-                </a:tc>
-                <a:tc hMerge="1">
-                  <a:tcPr/>
-                </a:tc>
-                <a:tc hMerge="1">
-                  <a:tcPr/>
-                </a:tc>
-                <a:tc>
-                  <a:txBody>
-                    <a:bodyPr/>
-                    <a:lstStyle/>
-                    <a:p>
-                      <a:pPr algn="r" indent="0" marL="0">
-                        <a:buNone/>
-                      </a:pPr>
-                      <a:r>
-                        <a:rPr lang="en-US" sz="1000" b="1" i="1" dirty="0">
-                          <a:solidFill>
-                            <a:srgbClr val="0B2A3D"/>
-                          </a:solidFill>
-                          <a:latin typeface="Calibri" pitchFamily="34" charset="0"/>
-                          <a:ea typeface="Calibri" pitchFamily="34" charset="-122"/>
-                          <a:cs typeface="Calibri" pitchFamily="34" charset="-120"/>
-                        </a:rPr>
-                        <a:t>US$ 184,6 mil</a:t>
-                      </a:r>
-                      <a:endParaRPr lang="en-US" sz="1000" dirty="0">
-                        <a:latin typeface="Calibri" charset="0"/>
-                        <a:ea typeface="Calibri" charset="0"/>
-                        <a:cs typeface="Calibri" charset="0"/>
-                      </a:endParaRPr>
-                    </a:p>
-                  </a:txBody>
-                  <a:tcPr marL="91440" marR="91440" marT="45720" marB="45720" anchor="ctr">
-                    <a:lnL w="6350" cap="flat" cmpd="sng" algn="ctr">
-                      <a:solidFill>
-                        <a:srgbClr val="E3E8E9"/>
-                      </a:solidFill>
-                      <a:prstDash val="solid"/>
-                      <a:round/>
-                      <a:headEnd type="none" w="med" len="med"/>
-                      <a:tailEnd type="none" w="med" len="med"/>
-                    </a:lnL>
-                    <a:lnR w="6350" cap="flat" cmpd="sng" algn="ctr">
-                      <a:solidFill>
-                        <a:srgbClr val="E3E8E9"/>
-                      </a:solidFill>
-                      <a:prstDash val="solid"/>
-                      <a:round/>
-                      <a:headEnd type="none" w="med" len="med"/>
-                      <a:tailEnd type="none" w="med" len="med"/>
-                    </a:lnR>
-                    <a:lnT w="6350" cap="flat" cmpd="sng" algn="ctr">
-                      <a:solidFill>
-                        <a:srgbClr val="E3E8E9"/>
-                      </a:solidFill>
-                      <a:prstDash val="solid"/>
-                      <a:round/>
-                      <a:headEnd type="none" w="med" len="med"/>
-                      <a:tailEnd type="none" w="med" len="med"/>
-                    </a:lnT>
-                    <a:lnB w="6350" cap="flat" cmpd="sng" algn="ctr">
-                      <a:solidFill>
-                        <a:srgbClr val="E3E8E9"/>
-                      </a:solidFill>
-                      <a:prstDash val="solid"/>
-                      <a:round/>
-                      <a:headEnd type="none" w="med" len="med"/>
-                      <a:tailEnd type="none" w="med" len="med"/>
-                    </a:lnB>
-                    <a:solidFill>
-                      <a:srgbClr val="DCE8E2"/>
                     </a:solidFill>
                   </a:tcPr>
                 </a:tc>
@@ -7901,7 +6109,7 @@
                 <a:ea typeface="Calibri" pitchFamily="34" charset="-122"/>
                 <a:cs typeface="Calibri" pitchFamily="34" charset="-120"/>
               </a:rPr>
-              <a:t>Fonte: Plano Integrado · aba 'Geral - Em análise' · coluna 'Valor Total' · itens de Cost Allocation = CAPEX, status 'Contar' + 'TA'. Lista completa disponível na planilha em anexo. Extrato pendente de atualização — pode não somar exatamente ao total da Composição de Custo (o valor de TA foi atualizado manualmente).</a:t>
+              <a:t>Fonte: Plano Integrado · aba 'Geral - Em análise' · coluna 'Valor Total' · itens de Cost Allocation = CAPEX, status 'Contar' (não inclui Parada Programada, status 'TA'). Lista completa disponível na planilha em anexo.</a:t>
             </a:r>
             <a:endParaRPr lang="en-US" sz="850" dirty="0"/>
           </a:p>
@@ -8327,7 +6535,7 @@
                 <a:ea typeface="Calibri" pitchFamily="34" charset="-122"/>
                 <a:cs typeface="Calibri" pitchFamily="34" charset="-120"/>
               </a:rPr>
-              <a:t>Ano 2027 · Base: aba 'Geral - Em análise' · status 'Contar' + 'TA'</a:t>
+              <a:t>Ano 2027 · Base: aba 'Geral - Em análise' · status 'Contar'</a:t>
             </a:r>
             <a:endParaRPr lang="en-US" sz="1250" dirty="0"/>
           </a:p>
@@ -8388,7 +6596,7 @@
                 <a:ea typeface="Cambria" pitchFamily="34" charset="-122"/>
                 <a:cs typeface="Cambria" pitchFamily="34" charset="-120"/>
               </a:rPr>
-              <a:t>US$ 4,4 mi</a:t>
+              <a:t>US$ 2,5 mi</a:t>
             </a:r>
             <a:endParaRPr lang="en-US" sz="3300" dirty="0"/>
           </a:p>
@@ -8466,7 +6674,7 @@
                 <a:ea typeface="Calibri" pitchFamily="34" charset="-122"/>
                 <a:cs typeface="Calibri" pitchFamily="34" charset="-120"/>
               </a:rPr>
-              <a:t>excl. Desenvolvimento de Produção</a:t>
+              <a:t>excl. Desenvolvimento de Produção e Parada Programada (TA)</a:t>
             </a:r>
             <a:endParaRPr lang="en-US" sz="900" dirty="0"/>
           </a:p>
@@ -8481,11 +6689,11 @@
         <p:spPr>
           <a:xfrm>
             <a:off x="4434840" y="1143000"/>
-            <a:ext cx="3566160" cy="731520"/>
+            <a:ext cx="3543300" cy="1600200"/>
           </a:xfrm>
           <a:prstGeom prst="roundRect">
             <a:avLst>
-              <a:gd name="adj" fmla="val 10000"/>
+              <a:gd name="adj" fmla="val 5714"/>
             </a:avLst>
           </a:prstGeom>
           <a:solidFill>
@@ -8502,8 +6710,8 @@
         </p:nvSpPr>
         <p:spPr>
           <a:xfrm>
-            <a:off x="4581144" y="1234440"/>
-            <a:ext cx="3273552" cy="384048"/>
+            <a:off x="4636008" y="1600200"/>
+            <a:ext cx="3140964" cy="548640"/>
           </a:xfrm>
           <a:prstGeom prst="rect">
             <a:avLst/>
@@ -8519,7 +6727,7 @@
               <a:buNone/>
             </a:pPr>
             <a:r>
-              <a:rPr lang="en-US" sz="1800" b="1" dirty="0">
+              <a:rPr lang="en-US" sz="2600" b="1" dirty="0">
                 <a:solidFill>
                   <a:srgbClr val="0B2A3D"/>
                 </a:solidFill>
@@ -8527,9 +6735,9 @@
                 <a:ea typeface="Cambria" pitchFamily="34" charset="-122"/>
                 <a:cs typeface="Cambria" pitchFamily="34" charset="-120"/>
               </a:rPr>
-              <a:t>US$ 2,5 mi</a:t>
+              <a:t>US$ 1,5 mi</a:t>
             </a:r>
-            <a:endParaRPr lang="en-US" sz="1800" dirty="0"/>
+            <a:endParaRPr lang="en-US" sz="2600" dirty="0"/>
           </a:p>
         </p:txBody>
       </p:sp>
@@ -8541,8 +6749,8 @@
         </p:nvSpPr>
         <p:spPr>
           <a:xfrm>
-            <a:off x="4581144" y="1600200"/>
-            <a:ext cx="3273552" cy="237744"/>
+            <a:off x="4636008" y="2167128"/>
+            <a:ext cx="3140964" cy="274320"/>
           </a:xfrm>
           <a:prstGeom prst="rect">
             <a:avLst/>
@@ -8558,7 +6766,7 @@
               <a:buNone/>
             </a:pPr>
             <a:r>
-              <a:rPr lang="en-US" sz="800" b="1" spc="50" kern="0" dirty="0">
+              <a:rPr lang="en-US" sz="1000" b="1" spc="100" kern="0" dirty="0">
                 <a:solidFill>
                   <a:srgbClr val="145C68"/>
                 </a:solidFill>
@@ -8566,9 +6774,9 @@
                 <a:ea typeface="Calibri" pitchFamily="34" charset="-122"/>
                 <a:cs typeface="Calibri" pitchFamily="34" charset="-120"/>
               </a:rPr>
-              <a:t>CUSTO TOTAL SEM TA</a:t>
+              <a:t>SERVIÇO</a:t>
             </a:r>
-            <a:endParaRPr lang="en-US" sz="800" dirty="0"/>
+            <a:endParaRPr lang="en-US" sz="1000" dirty="0"/>
           </a:p>
         </p:txBody>
       </p:sp>
@@ -8580,12 +6788,12 @@
         </p:nvSpPr>
         <p:spPr>
           <a:xfrm>
-            <a:off x="8138160" y="1143000"/>
-            <a:ext cx="3566160" cy="731520"/>
+            <a:off x="8161020" y="1143000"/>
+            <a:ext cx="3543300" cy="1600200"/>
           </a:xfrm>
           <a:prstGeom prst="roundRect">
             <a:avLst>
-              <a:gd name="adj" fmla="val 10000"/>
+              <a:gd name="adj" fmla="val 5714"/>
             </a:avLst>
           </a:prstGeom>
           <a:solidFill>
@@ -8602,8 +6810,8 @@
         </p:nvSpPr>
         <p:spPr>
           <a:xfrm>
-            <a:off x="8284464" y="1234440"/>
-            <a:ext cx="3273552" cy="384048"/>
+            <a:off x="8362188" y="1600200"/>
+            <a:ext cx="3140964" cy="548640"/>
           </a:xfrm>
           <a:prstGeom prst="rect">
             <a:avLst/>
@@ -8619,7 +6827,7 @@
               <a:buNone/>
             </a:pPr>
             <a:r>
-              <a:rPr lang="en-US" sz="1800" b="1" dirty="0">
+              <a:rPr lang="en-US" sz="2600" b="1" dirty="0">
                 <a:solidFill>
                   <a:srgbClr val="0B2A3D"/>
                 </a:solidFill>
@@ -8627,9 +6835,9 @@
                 <a:ea typeface="Cambria" pitchFamily="34" charset="-122"/>
                 <a:cs typeface="Cambria" pitchFamily="34" charset="-120"/>
               </a:rPr>
-              <a:t>US$ 1,9 mi</a:t>
+              <a:t>US$ 1,0 mi</a:t>
             </a:r>
-            <a:endParaRPr lang="en-US" sz="1800" dirty="0"/>
+            <a:endParaRPr lang="en-US" sz="2600" dirty="0"/>
           </a:p>
         </p:txBody>
       </p:sp>
@@ -8641,8 +6849,8 @@
         </p:nvSpPr>
         <p:spPr>
           <a:xfrm>
-            <a:off x="8284464" y="1600200"/>
-            <a:ext cx="3273552" cy="237744"/>
+            <a:off x="8362188" y="2167128"/>
+            <a:ext cx="3140964" cy="274320"/>
           </a:xfrm>
           <a:prstGeom prst="rect">
             <a:avLst/>
@@ -8658,207 +6866,7 @@
               <a:buNone/>
             </a:pPr>
             <a:r>
-              <a:rPr lang="en-US" sz="800" b="1" spc="50" kern="0" dirty="0">
-                <a:solidFill>
-                  <a:srgbClr val="145C68"/>
-                </a:solidFill>
-                <a:latin typeface="Calibri" pitchFamily="34" charset="0"/>
-                <a:ea typeface="Calibri" pitchFamily="34" charset="-122"/>
-                <a:cs typeface="Calibri" pitchFamily="34" charset="-120"/>
-              </a:rPr>
-              <a:t>CUSTO TA (PARADA PROGRAMADA)</a:t>
-            </a:r>
-            <a:endParaRPr lang="en-US" sz="800" dirty="0"/>
-          </a:p>
-        </p:txBody>
-      </p:sp>
-      <p:sp>
-        <p:nvSpPr>
-          <p:cNvPr id="16" name="Shape 14"/>
-          <p:cNvSpPr/>
-          <p:nvPr/>
-        </p:nvSpPr>
-        <p:spPr>
-          <a:xfrm>
-            <a:off x="4434840" y="2011680"/>
-            <a:ext cx="3566160" cy="731520"/>
-          </a:xfrm>
-          <a:prstGeom prst="roundRect">
-            <a:avLst>
-              <a:gd name="adj" fmla="val 10000"/>
-            </a:avLst>
-          </a:prstGeom>
-          <a:solidFill>
-            <a:srgbClr val="F0F4F5"/>
-          </a:solidFill>
-          <a:ln/>
-        </p:spPr>
-      </p:sp>
-      <p:sp>
-        <p:nvSpPr>
-          <p:cNvPr id="17" name="Text 15"/>
-          <p:cNvSpPr txBox="1"/>
-          <p:nvPr/>
-        </p:nvSpPr>
-        <p:spPr>
-          <a:xfrm>
-            <a:off x="4581144" y="2103120"/>
-            <a:ext cx="3273552" cy="384048"/>
-          </a:xfrm>
-          <a:prstGeom prst="rect">
-            <a:avLst/>
-          </a:prstGeom>
-          <a:noFill/>
-          <a:ln/>
-        </p:spPr>
-        <p:txBody>
-          <a:bodyPr wrap="square" lIns="0" tIns="0" rIns="0" bIns="0" rtlCol="0" anchor="ctr"/>
-          <a:lstStyle/>
-          <a:p>
-            <a:pPr indent="0" marL="0">
-              <a:buNone/>
-            </a:pPr>
-            <a:r>
-              <a:rPr lang="en-US" sz="1800" b="1" dirty="0">
-                <a:solidFill>
-                  <a:srgbClr val="0B2A3D"/>
-                </a:solidFill>
-                <a:latin typeface="Cambria" pitchFamily="34" charset="0"/>
-                <a:ea typeface="Cambria" pitchFamily="34" charset="-122"/>
-                <a:cs typeface="Cambria" pitchFamily="34" charset="-120"/>
-              </a:rPr>
-              <a:t>US$ 2,3 mi</a:t>
-            </a:r>
-            <a:endParaRPr lang="en-US" sz="1800" dirty="0"/>
-          </a:p>
-        </p:txBody>
-      </p:sp>
-      <p:sp>
-        <p:nvSpPr>
-          <p:cNvPr id="18" name="Text 16"/>
-          <p:cNvSpPr txBox="1"/>
-          <p:nvPr/>
-        </p:nvSpPr>
-        <p:spPr>
-          <a:xfrm>
-            <a:off x="4581144" y="2468880"/>
-            <a:ext cx="3273552" cy="237744"/>
-          </a:xfrm>
-          <a:prstGeom prst="rect">
-            <a:avLst/>
-          </a:prstGeom>
-          <a:noFill/>
-          <a:ln/>
-        </p:spPr>
-        <p:txBody>
-          <a:bodyPr wrap="square" lIns="0" tIns="0" rIns="0" bIns="0" rtlCol="0" anchor="ctr"/>
-          <a:lstStyle/>
-          <a:p>
-            <a:pPr indent="0" marL="0">
-              <a:buNone/>
-            </a:pPr>
-            <a:r>
-              <a:rPr lang="en-US" sz="800" b="1" spc="50" kern="0" dirty="0">
-                <a:solidFill>
-                  <a:srgbClr val="145C68"/>
-                </a:solidFill>
-                <a:latin typeface="Calibri" pitchFamily="34" charset="0"/>
-                <a:ea typeface="Calibri" pitchFamily="34" charset="-122"/>
-                <a:cs typeface="Calibri" pitchFamily="34" charset="-120"/>
-              </a:rPr>
-              <a:t>SERVIÇO</a:t>
-            </a:r>
-            <a:endParaRPr lang="en-US" sz="800" dirty="0"/>
-          </a:p>
-        </p:txBody>
-      </p:sp>
-      <p:sp>
-        <p:nvSpPr>
-          <p:cNvPr id="19" name="Shape 17"/>
-          <p:cNvSpPr/>
-          <p:nvPr/>
-        </p:nvSpPr>
-        <p:spPr>
-          <a:xfrm>
-            <a:off x="8138160" y="2011680"/>
-            <a:ext cx="3566160" cy="731520"/>
-          </a:xfrm>
-          <a:prstGeom prst="roundRect">
-            <a:avLst>
-              <a:gd name="adj" fmla="val 10000"/>
-            </a:avLst>
-          </a:prstGeom>
-          <a:solidFill>
-            <a:srgbClr val="F0F4F5"/>
-          </a:solidFill>
-          <a:ln/>
-        </p:spPr>
-      </p:sp>
-      <p:sp>
-        <p:nvSpPr>
-          <p:cNvPr id="20" name="Text 18"/>
-          <p:cNvSpPr txBox="1"/>
-          <p:nvPr/>
-        </p:nvSpPr>
-        <p:spPr>
-          <a:xfrm>
-            <a:off x="8284464" y="2103120"/>
-            <a:ext cx="3273552" cy="384048"/>
-          </a:xfrm>
-          <a:prstGeom prst="rect">
-            <a:avLst/>
-          </a:prstGeom>
-          <a:noFill/>
-          <a:ln/>
-        </p:spPr>
-        <p:txBody>
-          <a:bodyPr wrap="square" lIns="0" tIns="0" rIns="0" bIns="0" rtlCol="0" anchor="ctr"/>
-          <a:lstStyle/>
-          <a:p>
-            <a:pPr indent="0" marL="0">
-              <a:buNone/>
-            </a:pPr>
-            <a:r>
-              <a:rPr lang="en-US" sz="1800" b="1" dirty="0">
-                <a:solidFill>
-                  <a:srgbClr val="0B2A3D"/>
-                </a:solidFill>
-                <a:latin typeface="Cambria" pitchFamily="34" charset="0"/>
-                <a:ea typeface="Cambria" pitchFamily="34" charset="-122"/>
-                <a:cs typeface="Cambria" pitchFamily="34" charset="-120"/>
-              </a:rPr>
-              <a:t>US$ 1,1 mi</a:t>
-            </a:r>
-            <a:endParaRPr lang="en-US" sz="1800" dirty="0"/>
-          </a:p>
-        </p:txBody>
-      </p:sp>
-      <p:sp>
-        <p:nvSpPr>
-          <p:cNvPr id="21" name="Text 19"/>
-          <p:cNvSpPr txBox="1"/>
-          <p:nvPr/>
-        </p:nvSpPr>
-        <p:spPr>
-          <a:xfrm>
-            <a:off x="8284464" y="2468880"/>
-            <a:ext cx="3273552" cy="237744"/>
-          </a:xfrm>
-          <a:prstGeom prst="rect">
-            <a:avLst/>
-          </a:prstGeom>
-          <a:noFill/>
-          <a:ln/>
-        </p:spPr>
-        <p:txBody>
-          <a:bodyPr wrap="square" lIns="0" tIns="0" rIns="0" bIns="0" rtlCol="0" anchor="ctr"/>
-          <a:lstStyle/>
-          <a:p>
-            <a:pPr indent="0" marL="0">
-              <a:buNone/>
-            </a:pPr>
-            <a:r>
-              <a:rPr lang="en-US" sz="800" b="1" spc="50" kern="0" dirty="0">
+              <a:rPr lang="en-US" sz="1000" b="1" spc="100" kern="0" dirty="0">
                 <a:solidFill>
                   <a:srgbClr val="145C68"/>
                 </a:solidFill>
@@ -8868,13 +6876,13 @@
               </a:rPr>
               <a:t>MATERIAL</a:t>
             </a:r>
-            <a:endParaRPr lang="en-US" sz="800" dirty="0"/>
+            <a:endParaRPr lang="en-US" sz="1000" dirty="0"/>
           </a:p>
         </p:txBody>
       </p:sp>
       <p:sp>
         <p:nvSpPr>
-          <p:cNvPr id="22" name="Text 20"/>
+          <p:cNvPr id="16" name="Text 14"/>
           <p:cNvSpPr txBox="1"/>
           <p:nvPr/>
         </p:nvSpPr>
@@ -8913,7 +6921,7 @@
       </p:sp>
       <p:sp>
         <p:nvSpPr>
-          <p:cNvPr id="23" name="Shape 21"/>
+          <p:cNvPr id="17" name="Shape 15"/>
           <p:cNvSpPr/>
           <p:nvPr/>
         </p:nvSpPr>
@@ -8936,7 +6944,7 @@
       </p:sp>
       <p:sp>
         <p:nvSpPr>
-          <p:cNvPr id="24" name="Text 22"/>
+          <p:cNvPr id="18" name="Text 16"/>
           <p:cNvSpPr txBox="1"/>
           <p:nvPr/>
         </p:nvSpPr>
@@ -8975,7 +6983,7 @@
       </p:sp>
       <p:sp>
         <p:nvSpPr>
-          <p:cNvPr id="25" name="Text 23"/>
+          <p:cNvPr id="19" name="Text 17"/>
           <p:cNvSpPr txBox="1"/>
           <p:nvPr/>
         </p:nvSpPr>
@@ -9014,7 +7022,7 @@
       </p:sp>
       <p:sp>
         <p:nvSpPr>
-          <p:cNvPr id="26" name="Shape 24"/>
+          <p:cNvPr id="20" name="Shape 18"/>
           <p:cNvSpPr/>
           <p:nvPr/>
         </p:nvSpPr>
@@ -9034,91 +7042,13 @@
       </p:sp>
       <p:sp>
         <p:nvSpPr>
-          <p:cNvPr id="27" name="Text 25"/>
+          <p:cNvPr id="21" name="Text 19"/>
           <p:cNvSpPr txBox="1"/>
           <p:nvPr/>
         </p:nvSpPr>
         <p:spPr>
           <a:xfrm>
             <a:off x="566928" y="3767328"/>
-            <a:ext cx="3316529" cy="365760"/>
-          </a:xfrm>
-          <a:prstGeom prst="rect">
-            <a:avLst/>
-          </a:prstGeom>
-          <a:noFill/>
-          <a:ln/>
-        </p:spPr>
-        <p:txBody>
-          <a:bodyPr wrap="square" lIns="0" tIns="0" rIns="0" bIns="0" rtlCol="0" anchor="ctr"/>
-          <a:lstStyle/>
-          <a:p>
-            <a:pPr indent="0" marL="0">
-              <a:buNone/>
-            </a:pPr>
-            <a:r>
-              <a:rPr lang="en-US" sz="1100" dirty="0">
-                <a:solidFill>
-                  <a:srgbClr val="1C2B33"/>
-                </a:solidFill>
-                <a:latin typeface="Calibri" pitchFamily="34" charset="0"/>
-                <a:ea typeface="Calibri" pitchFamily="34" charset="-122"/>
-                <a:cs typeface="Calibri" pitchFamily="34" charset="-120"/>
-              </a:rPr>
-              <a:t>TA - Parada Programada</a:t>
-            </a:r>
-            <a:endParaRPr lang="en-US" sz="1100" dirty="0"/>
-          </a:p>
-        </p:txBody>
-      </p:sp>
-      <p:sp>
-        <p:nvSpPr>
-          <p:cNvPr id="28" name="Text 26"/>
-          <p:cNvSpPr txBox="1"/>
-          <p:nvPr/>
-        </p:nvSpPr>
-        <p:spPr>
-          <a:xfrm>
-            <a:off x="3773729" y="3767328"/>
-            <a:ext cx="1815998" cy="365760"/>
-          </a:xfrm>
-          <a:prstGeom prst="rect">
-            <a:avLst/>
-          </a:prstGeom>
-          <a:noFill/>
-          <a:ln/>
-        </p:spPr>
-        <p:txBody>
-          <a:bodyPr wrap="square" lIns="0" tIns="0" rIns="0" bIns="0" rtlCol="0" anchor="ctr"/>
-          <a:lstStyle/>
-          <a:p>
-            <a:pPr algn="r" indent="0" marL="0">
-              <a:buNone/>
-            </a:pPr>
-            <a:r>
-              <a:rPr lang="en-US" sz="1100" b="1" dirty="0">
-                <a:solidFill>
-                  <a:srgbClr val="0B2A3D"/>
-                </a:solidFill>
-                <a:latin typeface="Calibri" pitchFamily="34" charset="0"/>
-                <a:ea typeface="Calibri" pitchFamily="34" charset="-122"/>
-                <a:cs typeface="Calibri" pitchFamily="34" charset="-120"/>
-              </a:rPr>
-              <a:t>US$ 1,9 mi</a:t>
-            </a:r>
-            <a:endParaRPr lang="en-US" sz="1100" dirty="0"/>
-          </a:p>
-        </p:txBody>
-      </p:sp>
-      <p:sp>
-        <p:nvSpPr>
-          <p:cNvPr id="29" name="Text 27"/>
-          <p:cNvSpPr txBox="1"/>
-          <p:nvPr/>
-        </p:nvSpPr>
-        <p:spPr>
-          <a:xfrm>
-            <a:off x="566928" y="4133088"/>
             <a:ext cx="3316529" cy="365760"/>
           </a:xfrm>
           <a:prstGeom prst="rect">
@@ -9151,13 +7081,13 @@
       </p:sp>
       <p:sp>
         <p:nvSpPr>
-          <p:cNvPr id="30" name="Text 28"/>
+          <p:cNvPr id="22" name="Text 20"/>
           <p:cNvSpPr txBox="1"/>
           <p:nvPr/>
         </p:nvSpPr>
         <p:spPr>
           <a:xfrm>
-            <a:off x="3773729" y="4133088"/>
+            <a:off x="3773729" y="3767328"/>
             <a:ext cx="1815998" cy="365760"/>
           </a:xfrm>
           <a:prstGeom prst="rect">
@@ -9190,33 +7120,13 @@
       </p:sp>
       <p:sp>
         <p:nvSpPr>
-          <p:cNvPr id="31" name="Shape 29"/>
-          <p:cNvSpPr/>
+          <p:cNvPr id="23" name="Text 21"/>
+          <p:cNvSpPr txBox="1"/>
           <p:nvPr/>
         </p:nvSpPr>
         <p:spPr>
           <a:xfrm>
-            <a:off x="457200" y="4498848"/>
-            <a:ext cx="5349240" cy="365760"/>
-          </a:xfrm>
-          <a:prstGeom prst="rect">
-            <a:avLst/>
-          </a:prstGeom>
-          <a:solidFill>
-            <a:srgbClr val="F0F4F5"/>
-          </a:solidFill>
-          <a:ln/>
-        </p:spPr>
-      </p:sp>
-      <p:sp>
-        <p:nvSpPr>
-          <p:cNvPr id="32" name="Text 30"/>
-          <p:cNvSpPr txBox="1"/>
-          <p:nvPr/>
-        </p:nvSpPr>
-        <p:spPr>
-          <a:xfrm>
-            <a:off x="566928" y="4498848"/>
+            <a:off x="566928" y="4133088"/>
             <a:ext cx="3316529" cy="365760"/>
           </a:xfrm>
           <a:prstGeom prst="rect">
@@ -9249,13 +7159,13 @@
       </p:sp>
       <p:sp>
         <p:nvSpPr>
-          <p:cNvPr id="33" name="Text 31"/>
+          <p:cNvPr id="24" name="Text 22"/>
           <p:cNvSpPr txBox="1"/>
           <p:nvPr/>
         </p:nvSpPr>
         <p:spPr>
           <a:xfrm>
-            <a:off x="3773729" y="4498848"/>
+            <a:off x="3773729" y="4133088"/>
             <a:ext cx="1815998" cy="365760"/>
           </a:xfrm>
           <a:prstGeom prst="rect">
@@ -9288,7 +7198,7 @@
       </p:sp>
       <p:sp>
         <p:nvSpPr>
-          <p:cNvPr id="34" name="Text 32"/>
+          <p:cNvPr id="25" name="Text 23"/>
           <p:cNvSpPr txBox="1"/>
           <p:nvPr/>
         </p:nvSpPr>
@@ -9327,7 +7237,7 @@
       </p:sp>
       <p:sp>
         <p:nvSpPr>
-          <p:cNvPr id="35" name="Shape 33"/>
+          <p:cNvPr id="26" name="Shape 24"/>
           <p:cNvSpPr/>
           <p:nvPr/>
         </p:nvSpPr>
@@ -9350,7 +7260,7 @@
       </p:sp>
       <p:sp>
         <p:nvSpPr>
-          <p:cNvPr id="36" name="Text 34"/>
+          <p:cNvPr id="27" name="Text 25"/>
           <p:cNvSpPr txBox="1"/>
           <p:nvPr/>
         </p:nvSpPr>
@@ -9389,7 +7299,7 @@
       </p:sp>
       <p:sp>
         <p:nvSpPr>
-          <p:cNvPr id="37" name="Text 35"/>
+          <p:cNvPr id="28" name="Text 26"/>
           <p:cNvSpPr txBox="1"/>
           <p:nvPr/>
         </p:nvSpPr>
@@ -9420,7 +7330,7 @@
                 <a:ea typeface="Calibri" pitchFamily="34" charset="-122"/>
                 <a:cs typeface="Calibri" pitchFamily="34" charset="-120"/>
               </a:rPr>
-              <a:t>US$ 2,8 mi</a:t>
+              <a:t>US$ 1,9 mi</a:t>
             </a:r>
             <a:endParaRPr lang="en-US" sz="1100" dirty="0"/>
           </a:p>
@@ -9428,7 +7338,7 @@
       </p:sp>
       <p:sp>
         <p:nvSpPr>
-          <p:cNvPr id="38" name="Shape 36"/>
+          <p:cNvPr id="29" name="Shape 27"/>
           <p:cNvSpPr/>
           <p:nvPr/>
         </p:nvSpPr>
@@ -9448,7 +7358,7 @@
       </p:sp>
       <p:sp>
         <p:nvSpPr>
-          <p:cNvPr id="39" name="Text 37"/>
+          <p:cNvPr id="30" name="Text 28"/>
           <p:cNvSpPr txBox="1"/>
           <p:nvPr/>
         </p:nvSpPr>
@@ -9487,7 +7397,7 @@
       </p:sp>
       <p:sp>
         <p:nvSpPr>
-          <p:cNvPr id="40" name="Text 38"/>
+          <p:cNvPr id="31" name="Text 29"/>
           <p:cNvSpPr txBox="1"/>
           <p:nvPr/>
         </p:nvSpPr>
@@ -9526,7 +7436,7 @@
       </p:sp>
       <p:sp>
         <p:nvSpPr>
-          <p:cNvPr id="41" name="Text 39"/>
+          <p:cNvPr id="32" name="Text 30"/>
           <p:cNvSpPr txBox="1"/>
           <p:nvPr/>
         </p:nvSpPr>
@@ -9565,7 +7475,7 @@
       </p:sp>
       <p:sp>
         <p:nvSpPr>
-          <p:cNvPr id="42" name="Text 40"/>
+          <p:cNvPr id="33" name="Text 31"/>
           <p:cNvSpPr txBox="1"/>
           <p:nvPr/>
         </p:nvSpPr>
@@ -9604,7 +7514,7 @@
       </p:sp>
       <p:sp>
         <p:nvSpPr>
-          <p:cNvPr id="43" name="Text 41"/>
+          <p:cNvPr id="34" name="Text 32"/>
           <p:cNvSpPr txBox="1"/>
           <p:nvPr/>
         </p:nvSpPr>
@@ -9635,7 +7545,7 @@
                 <a:ea typeface="Calibri" pitchFamily="34" charset="-122"/>
                 <a:cs typeface="Calibri" pitchFamily="34" charset="-120"/>
               </a:rPr>
-              <a:t>Metodologia: soma de Custo de Serviço + Custo de Material (Jan–Dez), para itens de Cost Allocation = CAPEX com status 'Contar' (Custo Total sem TA) e 'TA' (Custo TA, valor de Parada Programada informado pela área). O total desconsidera a categoria Desenvolvimento de Produção (US$ 0, mantida na lista de Categoria apenas para referência).</a:t>
+              <a:t>Metodologia: soma de Custo de Serviço + Custo de Material (Jan–Dez), para itens de Cost Allocation = CAPEX com status 'Contar'. Não inclui itens de Parada Programada (status 'TA') nem a categoria Desenvolvimento de Produção (US$ 0, mantida na lista de Categoria apenas para referência).</a:t>
             </a:r>
             <a:endParaRPr lang="en-US" sz="850" dirty="0"/>
           </a:p>
@@ -9797,7 +7707,7 @@
                 <a:ea typeface="Calibri" pitchFamily="34" charset="-122"/>
                 <a:cs typeface="Calibri" pitchFamily="34" charset="-120"/>
               </a:rPr>
-              <a:t>Principais escopos por valor · 26 itens no total</a:t>
+              <a:t>Principais escopos por valor · 8 itens no total</a:t>
             </a:r>
             <a:endParaRPr lang="en-US" sz="1250" dirty="0"/>
           </a:p>
@@ -11493,7 +9403,7 @@
                           <a:ea typeface="Calibri" pitchFamily="34" charset="-122"/>
                           <a:cs typeface="Calibri" pitchFamily="34" charset="-120"/>
                         </a:rPr>
-                        <a:t>TA - Caldeiraria</a:t>
+                        <a:t>ESTUDO DE ENGENHARIA</a:t>
                       </a:r>
                       <a:endParaRPr lang="en-US" sz="1000" dirty="0">
                         <a:latin typeface="Calibri" charset="0"/>
@@ -11629,280 +9539,6 @@
                           <a:ea typeface="Calibri" pitchFamily="34" charset="-122"/>
                           <a:cs typeface="Calibri" pitchFamily="34" charset="-120"/>
                         </a:rPr>
-                        <a:t>TA - Parada Programada</a:t>
-                      </a:r>
-                      <a:endParaRPr lang="en-US" sz="950" dirty="0">
-                        <a:latin typeface="Calibri" charset="0"/>
-                        <a:ea typeface="Calibri" charset="0"/>
-                        <a:cs typeface="Calibri" charset="0"/>
-                      </a:endParaRPr>
-                    </a:p>
-                  </a:txBody>
-                  <a:tcPr marL="91440" marR="91440" marT="45720" marB="45720" anchor="ctr">
-                    <a:lnL w="6350" cap="flat" cmpd="sng" algn="ctr">
-                      <a:solidFill>
-                        <a:srgbClr val="E3E8E9"/>
-                      </a:solidFill>
-                      <a:prstDash val="solid"/>
-                      <a:round/>
-                      <a:headEnd type="none" w="med" len="med"/>
-                      <a:tailEnd type="none" w="med" len="med"/>
-                    </a:lnL>
-                    <a:lnR w="6350" cap="flat" cmpd="sng" algn="ctr">
-                      <a:solidFill>
-                        <a:srgbClr val="E3E8E9"/>
-                      </a:solidFill>
-                      <a:prstDash val="solid"/>
-                      <a:round/>
-                      <a:headEnd type="none" w="med" len="med"/>
-                      <a:tailEnd type="none" w="med" len="med"/>
-                    </a:lnR>
-                    <a:lnT w="6350" cap="flat" cmpd="sng" algn="ctr">
-                      <a:solidFill>
-                        <a:srgbClr val="E3E8E9"/>
-                      </a:solidFill>
-                      <a:prstDash val="solid"/>
-                      <a:round/>
-                      <a:headEnd type="none" w="med" len="med"/>
-                      <a:tailEnd type="none" w="med" len="med"/>
-                    </a:lnT>
-                    <a:lnB w="6350" cap="flat" cmpd="sng" algn="ctr">
-                      <a:solidFill>
-                        <a:srgbClr val="E3E8E9"/>
-                      </a:solidFill>
-                      <a:prstDash val="solid"/>
-                      <a:round/>
-                      <a:headEnd type="none" w="med" len="med"/>
-                      <a:tailEnd type="none" w="med" len="med"/>
-                    </a:lnB>
-                    <a:solidFill>
-                      <a:srgbClr val="F0F4F5"/>
-                    </a:solidFill>
-                  </a:tcPr>
-                </a:tc>
-                <a:tc>
-                  <a:txBody>
-                    <a:bodyPr/>
-                    <a:lstStyle/>
-                    <a:p>
-                      <a:pPr algn="r" indent="0" marL="0">
-                        <a:buNone/>
-                      </a:pPr>
-                      <a:r>
-                        <a:rPr lang="en-US" sz="1000" b="1" dirty="0">
-                          <a:solidFill>
-                            <a:srgbClr val="0B2A3D"/>
-                          </a:solidFill>
-                          <a:latin typeface="Calibri" pitchFamily="34" charset="0"/>
-                          <a:ea typeface="Calibri" pitchFamily="34" charset="-122"/>
-                          <a:cs typeface="Calibri" pitchFamily="34" charset="-120"/>
-                        </a:rPr>
-                        <a:t>US$ 198,4 mil</a:t>
-                      </a:r>
-                      <a:endParaRPr lang="en-US" sz="1000" dirty="0">
-                        <a:latin typeface="Calibri" charset="0"/>
-                        <a:ea typeface="Calibri" charset="0"/>
-                        <a:cs typeface="Calibri" charset="0"/>
-                      </a:endParaRPr>
-                    </a:p>
-                  </a:txBody>
-                  <a:tcPr marL="91440" marR="91440" marT="45720" marB="45720" anchor="ctr">
-                    <a:lnL w="6350" cap="flat" cmpd="sng" algn="ctr">
-                      <a:solidFill>
-                        <a:srgbClr val="E3E8E9"/>
-                      </a:solidFill>
-                      <a:prstDash val="solid"/>
-                      <a:round/>
-                      <a:headEnd type="none" w="med" len="med"/>
-                      <a:tailEnd type="none" w="med" len="med"/>
-                    </a:lnL>
-                    <a:lnR w="6350" cap="flat" cmpd="sng" algn="ctr">
-                      <a:solidFill>
-                        <a:srgbClr val="E3E8E9"/>
-                      </a:solidFill>
-                      <a:prstDash val="solid"/>
-                      <a:round/>
-                      <a:headEnd type="none" w="med" len="med"/>
-                      <a:tailEnd type="none" w="med" len="med"/>
-                    </a:lnR>
-                    <a:lnT w="6350" cap="flat" cmpd="sng" algn="ctr">
-                      <a:solidFill>
-                        <a:srgbClr val="E3E8E9"/>
-                      </a:solidFill>
-                      <a:prstDash val="solid"/>
-                      <a:round/>
-                      <a:headEnd type="none" w="med" len="med"/>
-                      <a:tailEnd type="none" w="med" len="med"/>
-                    </a:lnT>
-                    <a:lnB w="6350" cap="flat" cmpd="sng" algn="ctr">
-                      <a:solidFill>
-                        <a:srgbClr val="E3E8E9"/>
-                      </a:solidFill>
-                      <a:prstDash val="solid"/>
-                      <a:round/>
-                      <a:headEnd type="none" w="med" len="med"/>
-                      <a:tailEnd type="none" w="med" len="med"/>
-                    </a:lnB>
-                    <a:solidFill>
-                      <a:srgbClr val="F0F4F5"/>
-                    </a:solidFill>
-                  </a:tcPr>
-                </a:tc>
-              </a:tr>
-              <a:tr h="288036">
-                <a:tc>
-                  <a:txBody>
-                    <a:bodyPr/>
-                    <a:lstStyle/>
-                    <a:p>
-                      <a:pPr indent="0" marL="0">
-                        <a:buNone/>
-                      </a:pPr>
-                      <a:r>
-                        <a:rPr lang="en-US" sz="1000" dirty="0">
-                          <a:solidFill>
-                            <a:srgbClr val="1C2B33"/>
-                          </a:solidFill>
-                          <a:latin typeface="Calibri" pitchFamily="34" charset="0"/>
-                          <a:ea typeface="Calibri" pitchFamily="34" charset="-122"/>
-                          <a:cs typeface="Calibri" pitchFamily="34" charset="-120"/>
-                        </a:rPr>
-                        <a:t>ESTUDO DE ENGENHARIA</a:t>
-                      </a:r>
-                      <a:endParaRPr lang="en-US" sz="1000" dirty="0">
-                        <a:latin typeface="Calibri" charset="0"/>
-                        <a:ea typeface="Calibri" charset="0"/>
-                        <a:cs typeface="Calibri" charset="0"/>
-                      </a:endParaRPr>
-                    </a:p>
-                  </a:txBody>
-                  <a:tcPr marL="91440" marR="91440" marT="45720" marB="45720" anchor="ctr">
-                    <a:lnL w="6350" cap="flat" cmpd="sng" algn="ctr">
-                      <a:solidFill>
-                        <a:srgbClr val="E3E8E9"/>
-                      </a:solidFill>
-                      <a:prstDash val="solid"/>
-                      <a:round/>
-                      <a:headEnd type="none" w="med" len="med"/>
-                      <a:tailEnd type="none" w="med" len="med"/>
-                    </a:lnL>
-                    <a:lnR w="6350" cap="flat" cmpd="sng" algn="ctr">
-                      <a:solidFill>
-                        <a:srgbClr val="E3E8E9"/>
-                      </a:solidFill>
-                      <a:prstDash val="solid"/>
-                      <a:round/>
-                      <a:headEnd type="none" w="med" len="med"/>
-                      <a:tailEnd type="none" w="med" len="med"/>
-                    </a:lnR>
-                    <a:lnT w="6350" cap="flat" cmpd="sng" algn="ctr">
-                      <a:solidFill>
-                        <a:srgbClr val="E3E8E9"/>
-                      </a:solidFill>
-                      <a:prstDash val="solid"/>
-                      <a:round/>
-                      <a:headEnd type="none" w="med" len="med"/>
-                      <a:tailEnd type="none" w="med" len="med"/>
-                    </a:lnT>
-                    <a:lnB w="6350" cap="flat" cmpd="sng" algn="ctr">
-                      <a:solidFill>
-                        <a:srgbClr val="E3E8E9"/>
-                      </a:solidFill>
-                      <a:prstDash val="solid"/>
-                      <a:round/>
-                      <a:headEnd type="none" w="med" len="med"/>
-                      <a:tailEnd type="none" w="med" len="med"/>
-                    </a:lnB>
-                    <a:solidFill>
-                      <a:srgbClr val="FFFFFF"/>
-                    </a:solidFill>
-                  </a:tcPr>
-                </a:tc>
-                <a:tc>
-                  <a:txBody>
-                    <a:bodyPr/>
-                    <a:lstStyle/>
-                    <a:p>
-                      <a:pPr indent="0" marL="0">
-                        <a:buNone/>
-                      </a:pPr>
-                      <a:r>
-                        <a:rPr lang="en-US" sz="950" dirty="0">
-                          <a:solidFill>
-                            <a:srgbClr val="5B6B73"/>
-                          </a:solidFill>
-                          <a:latin typeface="Calibri" pitchFamily="34" charset="0"/>
-                          <a:ea typeface="Calibri" pitchFamily="34" charset="-122"/>
-                          <a:cs typeface="Calibri" pitchFamily="34" charset="-120"/>
-                        </a:rPr>
-                        <a:t>Eficiência de Produção</a:t>
-                      </a:r>
-                      <a:endParaRPr lang="en-US" sz="950" dirty="0">
-                        <a:latin typeface="Calibri" charset="0"/>
-                        <a:ea typeface="Calibri" charset="0"/>
-                        <a:cs typeface="Calibri" charset="0"/>
-                      </a:endParaRPr>
-                    </a:p>
-                  </a:txBody>
-                  <a:tcPr marL="91440" marR="91440" marT="45720" marB="45720" anchor="ctr">
-                    <a:lnL w="6350" cap="flat" cmpd="sng" algn="ctr">
-                      <a:solidFill>
-                        <a:srgbClr val="E3E8E9"/>
-                      </a:solidFill>
-                      <a:prstDash val="solid"/>
-                      <a:round/>
-                      <a:headEnd type="none" w="med" len="med"/>
-                      <a:tailEnd type="none" w="med" len="med"/>
-                    </a:lnL>
-                    <a:lnR w="6350" cap="flat" cmpd="sng" algn="ctr">
-                      <a:solidFill>
-                        <a:srgbClr val="E3E8E9"/>
-                      </a:solidFill>
-                      <a:prstDash val="solid"/>
-                      <a:round/>
-                      <a:headEnd type="none" w="med" len="med"/>
-                      <a:tailEnd type="none" w="med" len="med"/>
-                    </a:lnR>
-                    <a:lnT w="6350" cap="flat" cmpd="sng" algn="ctr">
-                      <a:solidFill>
-                        <a:srgbClr val="E3E8E9"/>
-                      </a:solidFill>
-                      <a:prstDash val="solid"/>
-                      <a:round/>
-                      <a:headEnd type="none" w="med" len="med"/>
-                      <a:tailEnd type="none" w="med" len="med"/>
-                    </a:lnT>
-                    <a:lnB w="6350" cap="flat" cmpd="sng" algn="ctr">
-                      <a:solidFill>
-                        <a:srgbClr val="E3E8E9"/>
-                      </a:solidFill>
-                      <a:prstDash val="solid"/>
-                      <a:round/>
-                      <a:headEnd type="none" w="med" len="med"/>
-                      <a:tailEnd type="none" w="med" len="med"/>
-                    </a:lnB>
-                    <a:solidFill>
-                      <a:srgbClr val="FFFFFF"/>
-                    </a:solidFill>
-                  </a:tcPr>
-                </a:tc>
-                <a:tc>
-                  <a:txBody>
-                    <a:bodyPr/>
-                    <a:lstStyle/>
-                    <a:p>
-                      <a:pPr indent="0" marL="0">
-                        <a:buNone/>
-                      </a:pPr>
-                      <a:r>
-                        <a:rPr lang="en-US" sz="950" dirty="0">
-                          <a:solidFill>
-                            <a:srgbClr val="5B6B73"/>
-                          </a:solidFill>
-                          <a:latin typeface="Calibri" pitchFamily="34" charset="0"/>
-                          <a:ea typeface="Calibri" pitchFamily="34" charset="-122"/>
-                          <a:cs typeface="Calibri" pitchFamily="34" charset="-120"/>
-                        </a:rPr>
                         <a:t>Projetos</a:t>
                       </a:r>
                       <a:endParaRPr lang="en-US" sz="950" dirty="0">
@@ -11950,7 +9586,7 @@
                       <a:tailEnd type="none" w="med" len="med"/>
                     </a:lnB>
                     <a:solidFill>
-                      <a:srgbClr val="FFFFFF"/>
+                      <a:srgbClr val="F0F4F5"/>
                     </a:solidFill>
                   </a:tcPr>
                 </a:tc>
@@ -12018,6 +9654,280 @@
                       <a:tailEnd type="none" w="med" len="med"/>
                     </a:lnB>
                     <a:solidFill>
+                      <a:srgbClr val="F0F4F5"/>
+                    </a:solidFill>
+                  </a:tcPr>
+                </a:tc>
+              </a:tr>
+              <a:tr h="288036">
+                <a:tc>
+                  <a:txBody>
+                    <a:bodyPr/>
+                    <a:lstStyle/>
+                    <a:p>
+                      <a:pPr indent="0" marL="0">
+                        <a:buNone/>
+                      </a:pPr>
+                      <a:r>
+                        <a:rPr lang="en-US" sz="1000" dirty="0">
+                          <a:solidFill>
+                            <a:srgbClr val="1C2B33"/>
+                          </a:solidFill>
+                          <a:latin typeface="Calibri" pitchFamily="34" charset="0"/>
+                          <a:ea typeface="Calibri" pitchFamily="34" charset="-122"/>
+                          <a:cs typeface="Calibri" pitchFamily="34" charset="-120"/>
+                        </a:rPr>
+                        <a:t>Implementação do BRAlarm</a:t>
+                      </a:r>
+                      <a:endParaRPr lang="en-US" sz="1000" dirty="0">
+                        <a:latin typeface="Calibri" charset="0"/>
+                        <a:ea typeface="Calibri" charset="0"/>
+                        <a:cs typeface="Calibri" charset="0"/>
+                      </a:endParaRPr>
+                    </a:p>
+                  </a:txBody>
+                  <a:tcPr marL="91440" marR="91440" marT="45720" marB="45720" anchor="ctr">
+                    <a:lnL w="6350" cap="flat" cmpd="sng" algn="ctr">
+                      <a:solidFill>
+                        <a:srgbClr val="E3E8E9"/>
+                      </a:solidFill>
+                      <a:prstDash val="solid"/>
+                      <a:round/>
+                      <a:headEnd type="none" w="med" len="med"/>
+                      <a:tailEnd type="none" w="med" len="med"/>
+                    </a:lnL>
+                    <a:lnR w="6350" cap="flat" cmpd="sng" algn="ctr">
+                      <a:solidFill>
+                        <a:srgbClr val="E3E8E9"/>
+                      </a:solidFill>
+                      <a:prstDash val="solid"/>
+                      <a:round/>
+                      <a:headEnd type="none" w="med" len="med"/>
+                      <a:tailEnd type="none" w="med" len="med"/>
+                    </a:lnR>
+                    <a:lnT w="6350" cap="flat" cmpd="sng" algn="ctr">
+                      <a:solidFill>
+                        <a:srgbClr val="E3E8E9"/>
+                      </a:solidFill>
+                      <a:prstDash val="solid"/>
+                      <a:round/>
+                      <a:headEnd type="none" w="med" len="med"/>
+                      <a:tailEnd type="none" w="med" len="med"/>
+                    </a:lnT>
+                    <a:lnB w="6350" cap="flat" cmpd="sng" algn="ctr">
+                      <a:solidFill>
+                        <a:srgbClr val="E3E8E9"/>
+                      </a:solidFill>
+                      <a:prstDash val="solid"/>
+                      <a:round/>
+                      <a:headEnd type="none" w="med" len="med"/>
+                      <a:tailEnd type="none" w="med" len="med"/>
+                    </a:lnB>
+                    <a:solidFill>
+                      <a:srgbClr val="FFFFFF"/>
+                    </a:solidFill>
+                  </a:tcPr>
+                </a:tc>
+                <a:tc>
+                  <a:txBody>
+                    <a:bodyPr/>
+                    <a:lstStyle/>
+                    <a:p>
+                      <a:pPr indent="0" marL="0">
+                        <a:buNone/>
+                      </a:pPr>
+                      <a:r>
+                        <a:rPr lang="en-US" sz="950" dirty="0">
+                          <a:solidFill>
+                            <a:srgbClr val="5B6B73"/>
+                          </a:solidFill>
+                          <a:latin typeface="Calibri" pitchFamily="34" charset="0"/>
+                          <a:ea typeface="Calibri" pitchFamily="34" charset="-122"/>
+                          <a:cs typeface="Calibri" pitchFamily="34" charset="-120"/>
+                        </a:rPr>
+                        <a:t>Bem Estar/Segurança</a:t>
+                      </a:r>
+                      <a:endParaRPr lang="en-US" sz="950" dirty="0">
+                        <a:latin typeface="Calibri" charset="0"/>
+                        <a:ea typeface="Calibri" charset="0"/>
+                        <a:cs typeface="Calibri" charset="0"/>
+                      </a:endParaRPr>
+                    </a:p>
+                  </a:txBody>
+                  <a:tcPr marL="91440" marR="91440" marT="45720" marB="45720" anchor="ctr">
+                    <a:lnL w="6350" cap="flat" cmpd="sng" algn="ctr">
+                      <a:solidFill>
+                        <a:srgbClr val="E3E8E9"/>
+                      </a:solidFill>
+                      <a:prstDash val="solid"/>
+                      <a:round/>
+                      <a:headEnd type="none" w="med" len="med"/>
+                      <a:tailEnd type="none" w="med" len="med"/>
+                    </a:lnL>
+                    <a:lnR w="6350" cap="flat" cmpd="sng" algn="ctr">
+                      <a:solidFill>
+                        <a:srgbClr val="E3E8E9"/>
+                      </a:solidFill>
+                      <a:prstDash val="solid"/>
+                      <a:round/>
+                      <a:headEnd type="none" w="med" len="med"/>
+                      <a:tailEnd type="none" w="med" len="med"/>
+                    </a:lnR>
+                    <a:lnT w="6350" cap="flat" cmpd="sng" algn="ctr">
+                      <a:solidFill>
+                        <a:srgbClr val="E3E8E9"/>
+                      </a:solidFill>
+                      <a:prstDash val="solid"/>
+                      <a:round/>
+                      <a:headEnd type="none" w="med" len="med"/>
+                      <a:tailEnd type="none" w="med" len="med"/>
+                    </a:lnT>
+                    <a:lnB w="6350" cap="flat" cmpd="sng" algn="ctr">
+                      <a:solidFill>
+                        <a:srgbClr val="E3E8E9"/>
+                      </a:solidFill>
+                      <a:prstDash val="solid"/>
+                      <a:round/>
+                      <a:headEnd type="none" w="med" len="med"/>
+                      <a:tailEnd type="none" w="med" len="med"/>
+                    </a:lnB>
+                    <a:solidFill>
+                      <a:srgbClr val="FFFFFF"/>
+                    </a:solidFill>
+                  </a:tcPr>
+                </a:tc>
+                <a:tc>
+                  <a:txBody>
+                    <a:bodyPr/>
+                    <a:lstStyle/>
+                    <a:p>
+                      <a:pPr indent="0" marL="0">
+                        <a:buNone/>
+                      </a:pPr>
+                      <a:r>
+                        <a:rPr lang="en-US" sz="950" dirty="0">
+                          <a:solidFill>
+                            <a:srgbClr val="5B6B73"/>
+                          </a:solidFill>
+                          <a:latin typeface="Calibri" pitchFamily="34" charset="0"/>
+                          <a:ea typeface="Calibri" pitchFamily="34" charset="-122"/>
+                          <a:cs typeface="Calibri" pitchFamily="34" charset="-120"/>
+                        </a:rPr>
+                        <a:t>Segurança de Processos</a:t>
+                      </a:r>
+                      <a:endParaRPr lang="en-US" sz="950" dirty="0">
+                        <a:latin typeface="Calibri" charset="0"/>
+                        <a:ea typeface="Calibri" charset="0"/>
+                        <a:cs typeface="Calibri" charset="0"/>
+                      </a:endParaRPr>
+                    </a:p>
+                  </a:txBody>
+                  <a:tcPr marL="91440" marR="91440" marT="45720" marB="45720" anchor="ctr">
+                    <a:lnL w="6350" cap="flat" cmpd="sng" algn="ctr">
+                      <a:solidFill>
+                        <a:srgbClr val="E3E8E9"/>
+                      </a:solidFill>
+                      <a:prstDash val="solid"/>
+                      <a:round/>
+                      <a:headEnd type="none" w="med" len="med"/>
+                      <a:tailEnd type="none" w="med" len="med"/>
+                    </a:lnL>
+                    <a:lnR w="6350" cap="flat" cmpd="sng" algn="ctr">
+                      <a:solidFill>
+                        <a:srgbClr val="E3E8E9"/>
+                      </a:solidFill>
+                      <a:prstDash val="solid"/>
+                      <a:round/>
+                      <a:headEnd type="none" w="med" len="med"/>
+                      <a:tailEnd type="none" w="med" len="med"/>
+                    </a:lnR>
+                    <a:lnT w="6350" cap="flat" cmpd="sng" algn="ctr">
+                      <a:solidFill>
+                        <a:srgbClr val="E3E8E9"/>
+                      </a:solidFill>
+                      <a:prstDash val="solid"/>
+                      <a:round/>
+                      <a:headEnd type="none" w="med" len="med"/>
+                      <a:tailEnd type="none" w="med" len="med"/>
+                    </a:lnT>
+                    <a:lnB w="6350" cap="flat" cmpd="sng" algn="ctr">
+                      <a:solidFill>
+                        <a:srgbClr val="E3E8E9"/>
+                      </a:solidFill>
+                      <a:prstDash val="solid"/>
+                      <a:round/>
+                      <a:headEnd type="none" w="med" len="med"/>
+                      <a:tailEnd type="none" w="med" len="med"/>
+                    </a:lnB>
+                    <a:solidFill>
+                      <a:srgbClr val="FFFFFF"/>
+                    </a:solidFill>
+                  </a:tcPr>
+                </a:tc>
+                <a:tc>
+                  <a:txBody>
+                    <a:bodyPr/>
+                    <a:lstStyle/>
+                    <a:p>
+                      <a:pPr algn="r" indent="0" marL="0">
+                        <a:buNone/>
+                      </a:pPr>
+                      <a:r>
+                        <a:rPr lang="en-US" sz="1000" b="1" dirty="0">
+                          <a:solidFill>
+                            <a:srgbClr val="0B2A3D"/>
+                          </a:solidFill>
+                          <a:latin typeface="Calibri" pitchFamily="34" charset="0"/>
+                          <a:ea typeface="Calibri" pitchFamily="34" charset="-122"/>
+                          <a:cs typeface="Calibri" pitchFamily="34" charset="-120"/>
+                        </a:rPr>
+                        <a:t>US$ 4,0 mil</a:t>
+                      </a:r>
+                      <a:endParaRPr lang="en-US" sz="1000" dirty="0">
+                        <a:latin typeface="Calibri" charset="0"/>
+                        <a:ea typeface="Calibri" charset="0"/>
+                        <a:cs typeface="Calibri" charset="0"/>
+                      </a:endParaRPr>
+                    </a:p>
+                  </a:txBody>
+                  <a:tcPr marL="91440" marR="91440" marT="45720" marB="45720" anchor="ctr">
+                    <a:lnL w="6350" cap="flat" cmpd="sng" algn="ctr">
+                      <a:solidFill>
+                        <a:srgbClr val="E3E8E9"/>
+                      </a:solidFill>
+                      <a:prstDash val="solid"/>
+                      <a:round/>
+                      <a:headEnd type="none" w="med" len="med"/>
+                      <a:tailEnd type="none" w="med" len="med"/>
+                    </a:lnL>
+                    <a:lnR w="6350" cap="flat" cmpd="sng" algn="ctr">
+                      <a:solidFill>
+                        <a:srgbClr val="E3E8E9"/>
+                      </a:solidFill>
+                      <a:prstDash val="solid"/>
+                      <a:round/>
+                      <a:headEnd type="none" w="med" len="med"/>
+                      <a:tailEnd type="none" w="med" len="med"/>
+                    </a:lnR>
+                    <a:lnT w="6350" cap="flat" cmpd="sng" algn="ctr">
+                      <a:solidFill>
+                        <a:srgbClr val="E3E8E9"/>
+                      </a:solidFill>
+                      <a:prstDash val="solid"/>
+                      <a:round/>
+                      <a:headEnd type="none" w="med" len="med"/>
+                      <a:tailEnd type="none" w="med" len="med"/>
+                    </a:lnT>
+                    <a:lnB w="6350" cap="flat" cmpd="sng" algn="ctr">
+                      <a:solidFill>
+                        <a:srgbClr val="E3E8E9"/>
+                      </a:solidFill>
+                      <a:prstDash val="solid"/>
+                      <a:round/>
+                      <a:headEnd type="none" w="med" len="med"/>
+                      <a:tailEnd type="none" w="med" len="med"/>
+                    </a:lnB>
+                    <a:solidFill>
                       <a:srgbClr val="FFFFFF"/>
                     </a:solidFill>
                   </a:tcPr>
@@ -12041,7 +9951,7 @@
                           <a:ea typeface="Calibri" pitchFamily="34" charset="-122"/>
                           <a:cs typeface="Calibri" pitchFamily="34" charset="-120"/>
                         </a:rPr>
-                        <a:t>PRÉ TA - Andaime</a:t>
+                        <a:t>Sistema de Injeção de Sequestrante de H2S - WHPC</a:t>
                       </a:r>
                       <a:endParaRPr lang="en-US" sz="1000" dirty="0">
                         <a:latin typeface="Calibri" charset="0"/>
@@ -12177,7 +10087,7 @@
                           <a:ea typeface="Calibri" pitchFamily="34" charset="-122"/>
                           <a:cs typeface="Calibri" pitchFamily="34" charset="-120"/>
                         </a:rPr>
-                        <a:t>TA - Parada Programada</a:t>
+                        <a:t>Projetos</a:t>
                       </a:r>
                       <a:endParaRPr lang="en-US" sz="950" dirty="0">
                         <a:latin typeface="Calibri" charset="0"/>
@@ -12245,7 +10155,7 @@
                           <a:ea typeface="Calibri" pitchFamily="34" charset="-122"/>
                           <a:cs typeface="Calibri" pitchFamily="34" charset="-120"/>
                         </a:rPr>
-                        <a:t>US$ 153,0 mil</a:t>
+                        <a:t>US$ 0</a:t>
                       </a:r>
                       <a:endParaRPr lang="en-US" sz="1000" dirty="0">
                         <a:latin typeface="Calibri" charset="0"/>
@@ -12293,1246 +10203,6 @@
                     </a:lnB>
                     <a:solidFill>
                       <a:srgbClr val="F0F4F5"/>
-                    </a:solidFill>
-                  </a:tcPr>
-                </a:tc>
-              </a:tr>
-              <a:tr h="288036">
-                <a:tc>
-                  <a:txBody>
-                    <a:bodyPr/>
-                    <a:lstStyle/>
-                    <a:p>
-                      <a:pPr indent="0" marL="0">
-                        <a:buNone/>
-                      </a:pPr>
-                      <a:r>
-                        <a:rPr lang="en-US" sz="1000" dirty="0">
-                          <a:solidFill>
-                            <a:srgbClr val="1C2B33"/>
-                          </a:solidFill>
-                          <a:latin typeface="Calibri" pitchFamily="34" charset="0"/>
-                          <a:ea typeface="Calibri" pitchFamily="34" charset="-122"/>
-                          <a:cs typeface="Calibri" pitchFamily="34" charset="-120"/>
-                        </a:rPr>
-                        <a:t>TA - Elétrica</a:t>
-                      </a:r>
-                      <a:endParaRPr lang="en-US" sz="1000" dirty="0">
-                        <a:latin typeface="Calibri" charset="0"/>
-                        <a:ea typeface="Calibri" charset="0"/>
-                        <a:cs typeface="Calibri" charset="0"/>
-                      </a:endParaRPr>
-                    </a:p>
-                  </a:txBody>
-                  <a:tcPr marL="91440" marR="91440" marT="45720" marB="45720" anchor="ctr">
-                    <a:lnL w="6350" cap="flat" cmpd="sng" algn="ctr">
-                      <a:solidFill>
-                        <a:srgbClr val="E3E8E9"/>
-                      </a:solidFill>
-                      <a:prstDash val="solid"/>
-                      <a:round/>
-                      <a:headEnd type="none" w="med" len="med"/>
-                      <a:tailEnd type="none" w="med" len="med"/>
-                    </a:lnL>
-                    <a:lnR w="6350" cap="flat" cmpd="sng" algn="ctr">
-                      <a:solidFill>
-                        <a:srgbClr val="E3E8E9"/>
-                      </a:solidFill>
-                      <a:prstDash val="solid"/>
-                      <a:round/>
-                      <a:headEnd type="none" w="med" len="med"/>
-                      <a:tailEnd type="none" w="med" len="med"/>
-                    </a:lnR>
-                    <a:lnT w="6350" cap="flat" cmpd="sng" algn="ctr">
-                      <a:solidFill>
-                        <a:srgbClr val="E3E8E9"/>
-                      </a:solidFill>
-                      <a:prstDash val="solid"/>
-                      <a:round/>
-                      <a:headEnd type="none" w="med" len="med"/>
-                      <a:tailEnd type="none" w="med" len="med"/>
-                    </a:lnT>
-                    <a:lnB w="6350" cap="flat" cmpd="sng" algn="ctr">
-                      <a:solidFill>
-                        <a:srgbClr val="E3E8E9"/>
-                      </a:solidFill>
-                      <a:prstDash val="solid"/>
-                      <a:round/>
-                      <a:headEnd type="none" w="med" len="med"/>
-                      <a:tailEnd type="none" w="med" len="med"/>
-                    </a:lnB>
-                    <a:solidFill>
-                      <a:srgbClr val="FFFFFF"/>
-                    </a:solidFill>
-                  </a:tcPr>
-                </a:tc>
-                <a:tc>
-                  <a:txBody>
-                    <a:bodyPr/>
-                    <a:lstStyle/>
-                    <a:p>
-                      <a:pPr indent="0" marL="0">
-                        <a:buNone/>
-                      </a:pPr>
-                      <a:r>
-                        <a:rPr lang="en-US" sz="950" dirty="0">
-                          <a:solidFill>
-                            <a:srgbClr val="5B6B73"/>
-                          </a:solidFill>
-                          <a:latin typeface="Calibri" pitchFamily="34" charset="0"/>
-                          <a:ea typeface="Calibri" pitchFamily="34" charset="-122"/>
-                          <a:cs typeface="Calibri" pitchFamily="34" charset="-120"/>
-                        </a:rPr>
-                        <a:t>Eficiência de Produção</a:t>
-                      </a:r>
-                      <a:endParaRPr lang="en-US" sz="950" dirty="0">
-                        <a:latin typeface="Calibri" charset="0"/>
-                        <a:ea typeface="Calibri" charset="0"/>
-                        <a:cs typeface="Calibri" charset="0"/>
-                      </a:endParaRPr>
-                    </a:p>
-                  </a:txBody>
-                  <a:tcPr marL="91440" marR="91440" marT="45720" marB="45720" anchor="ctr">
-                    <a:lnL w="6350" cap="flat" cmpd="sng" algn="ctr">
-                      <a:solidFill>
-                        <a:srgbClr val="E3E8E9"/>
-                      </a:solidFill>
-                      <a:prstDash val="solid"/>
-                      <a:round/>
-                      <a:headEnd type="none" w="med" len="med"/>
-                      <a:tailEnd type="none" w="med" len="med"/>
-                    </a:lnL>
-                    <a:lnR w="6350" cap="flat" cmpd="sng" algn="ctr">
-                      <a:solidFill>
-                        <a:srgbClr val="E3E8E9"/>
-                      </a:solidFill>
-                      <a:prstDash val="solid"/>
-                      <a:round/>
-                      <a:headEnd type="none" w="med" len="med"/>
-                      <a:tailEnd type="none" w="med" len="med"/>
-                    </a:lnR>
-                    <a:lnT w="6350" cap="flat" cmpd="sng" algn="ctr">
-                      <a:solidFill>
-                        <a:srgbClr val="E3E8E9"/>
-                      </a:solidFill>
-                      <a:prstDash val="solid"/>
-                      <a:round/>
-                      <a:headEnd type="none" w="med" len="med"/>
-                      <a:tailEnd type="none" w="med" len="med"/>
-                    </a:lnT>
-                    <a:lnB w="6350" cap="flat" cmpd="sng" algn="ctr">
-                      <a:solidFill>
-                        <a:srgbClr val="E3E8E9"/>
-                      </a:solidFill>
-                      <a:prstDash val="solid"/>
-                      <a:round/>
-                      <a:headEnd type="none" w="med" len="med"/>
-                      <a:tailEnd type="none" w="med" len="med"/>
-                    </a:lnB>
-                    <a:solidFill>
-                      <a:srgbClr val="FFFFFF"/>
-                    </a:solidFill>
-                  </a:tcPr>
-                </a:tc>
-                <a:tc>
-                  <a:txBody>
-                    <a:bodyPr/>
-                    <a:lstStyle/>
-                    <a:p>
-                      <a:pPr indent="0" marL="0">
-                        <a:buNone/>
-                      </a:pPr>
-                      <a:r>
-                        <a:rPr lang="en-US" sz="950" dirty="0">
-                          <a:solidFill>
-                            <a:srgbClr val="5B6B73"/>
-                          </a:solidFill>
-                          <a:latin typeface="Calibri" pitchFamily="34" charset="0"/>
-                          <a:ea typeface="Calibri" pitchFamily="34" charset="-122"/>
-                          <a:cs typeface="Calibri" pitchFamily="34" charset="-120"/>
-                        </a:rPr>
-                        <a:t>TA - Parada Programada</a:t>
-                      </a:r>
-                      <a:endParaRPr lang="en-US" sz="950" dirty="0">
-                        <a:latin typeface="Calibri" charset="0"/>
-                        <a:ea typeface="Calibri" charset="0"/>
-                        <a:cs typeface="Calibri" charset="0"/>
-                      </a:endParaRPr>
-                    </a:p>
-                  </a:txBody>
-                  <a:tcPr marL="91440" marR="91440" marT="45720" marB="45720" anchor="ctr">
-                    <a:lnL w="6350" cap="flat" cmpd="sng" algn="ctr">
-                      <a:solidFill>
-                        <a:srgbClr val="E3E8E9"/>
-                      </a:solidFill>
-                      <a:prstDash val="solid"/>
-                      <a:round/>
-                      <a:headEnd type="none" w="med" len="med"/>
-                      <a:tailEnd type="none" w="med" len="med"/>
-                    </a:lnL>
-                    <a:lnR w="6350" cap="flat" cmpd="sng" algn="ctr">
-                      <a:solidFill>
-                        <a:srgbClr val="E3E8E9"/>
-                      </a:solidFill>
-                      <a:prstDash val="solid"/>
-                      <a:round/>
-                      <a:headEnd type="none" w="med" len="med"/>
-                      <a:tailEnd type="none" w="med" len="med"/>
-                    </a:lnR>
-                    <a:lnT w="6350" cap="flat" cmpd="sng" algn="ctr">
-                      <a:solidFill>
-                        <a:srgbClr val="E3E8E9"/>
-                      </a:solidFill>
-                      <a:prstDash val="solid"/>
-                      <a:round/>
-                      <a:headEnd type="none" w="med" len="med"/>
-                      <a:tailEnd type="none" w="med" len="med"/>
-                    </a:lnT>
-                    <a:lnB w="6350" cap="flat" cmpd="sng" algn="ctr">
-                      <a:solidFill>
-                        <a:srgbClr val="E3E8E9"/>
-                      </a:solidFill>
-                      <a:prstDash val="solid"/>
-                      <a:round/>
-                      <a:headEnd type="none" w="med" len="med"/>
-                      <a:tailEnd type="none" w="med" len="med"/>
-                    </a:lnB>
-                    <a:solidFill>
-                      <a:srgbClr val="FFFFFF"/>
-                    </a:solidFill>
-                  </a:tcPr>
-                </a:tc>
-                <a:tc>
-                  <a:txBody>
-                    <a:bodyPr/>
-                    <a:lstStyle/>
-                    <a:p>
-                      <a:pPr algn="r" indent="0" marL="0">
-                        <a:buNone/>
-                      </a:pPr>
-                      <a:r>
-                        <a:rPr lang="en-US" sz="1000" b="1" dirty="0">
-                          <a:solidFill>
-                            <a:srgbClr val="0B2A3D"/>
-                          </a:solidFill>
-                          <a:latin typeface="Calibri" pitchFamily="34" charset="0"/>
-                          <a:ea typeface="Calibri" pitchFamily="34" charset="-122"/>
-                          <a:cs typeface="Calibri" pitchFamily="34" charset="-120"/>
-                        </a:rPr>
-                        <a:t>US$ 79,4 mil</a:t>
-                      </a:r>
-                      <a:endParaRPr lang="en-US" sz="1000" dirty="0">
-                        <a:latin typeface="Calibri" charset="0"/>
-                        <a:ea typeface="Calibri" charset="0"/>
-                        <a:cs typeface="Calibri" charset="0"/>
-                      </a:endParaRPr>
-                    </a:p>
-                  </a:txBody>
-                  <a:tcPr marL="91440" marR="91440" marT="45720" marB="45720" anchor="ctr">
-                    <a:lnL w="6350" cap="flat" cmpd="sng" algn="ctr">
-                      <a:solidFill>
-                        <a:srgbClr val="E3E8E9"/>
-                      </a:solidFill>
-                      <a:prstDash val="solid"/>
-                      <a:round/>
-                      <a:headEnd type="none" w="med" len="med"/>
-                      <a:tailEnd type="none" w="med" len="med"/>
-                    </a:lnL>
-                    <a:lnR w="6350" cap="flat" cmpd="sng" algn="ctr">
-                      <a:solidFill>
-                        <a:srgbClr val="E3E8E9"/>
-                      </a:solidFill>
-                      <a:prstDash val="solid"/>
-                      <a:round/>
-                      <a:headEnd type="none" w="med" len="med"/>
-                      <a:tailEnd type="none" w="med" len="med"/>
-                    </a:lnR>
-                    <a:lnT w="6350" cap="flat" cmpd="sng" algn="ctr">
-                      <a:solidFill>
-                        <a:srgbClr val="E3E8E9"/>
-                      </a:solidFill>
-                      <a:prstDash val="solid"/>
-                      <a:round/>
-                      <a:headEnd type="none" w="med" len="med"/>
-                      <a:tailEnd type="none" w="med" len="med"/>
-                    </a:lnT>
-                    <a:lnB w="6350" cap="flat" cmpd="sng" algn="ctr">
-                      <a:solidFill>
-                        <a:srgbClr val="E3E8E9"/>
-                      </a:solidFill>
-                      <a:prstDash val="solid"/>
-                      <a:round/>
-                      <a:headEnd type="none" w="med" len="med"/>
-                      <a:tailEnd type="none" w="med" len="med"/>
-                    </a:lnB>
-                    <a:solidFill>
-                      <a:srgbClr val="FFFFFF"/>
-                    </a:solidFill>
-                  </a:tcPr>
-                </a:tc>
-              </a:tr>
-              <a:tr h="288036">
-                <a:tc>
-                  <a:txBody>
-                    <a:bodyPr/>
-                    <a:lstStyle/>
-                    <a:p>
-                      <a:pPr indent="0" marL="0">
-                        <a:buNone/>
-                      </a:pPr>
-                      <a:r>
-                        <a:rPr lang="en-US" sz="1000" dirty="0">
-                          <a:solidFill>
-                            <a:srgbClr val="1C2B33"/>
-                          </a:solidFill>
-                          <a:latin typeface="Calibri" pitchFamily="34" charset="0"/>
-                          <a:ea typeface="Calibri" pitchFamily="34" charset="-122"/>
-                          <a:cs typeface="Calibri" pitchFamily="34" charset="-120"/>
-                        </a:rPr>
-                        <a:t>TA - Andaime</a:t>
-                      </a:r>
-                      <a:endParaRPr lang="en-US" sz="1000" dirty="0">
-                        <a:latin typeface="Calibri" charset="0"/>
-                        <a:ea typeface="Calibri" charset="0"/>
-                        <a:cs typeface="Calibri" charset="0"/>
-                      </a:endParaRPr>
-                    </a:p>
-                  </a:txBody>
-                  <a:tcPr marL="91440" marR="91440" marT="45720" marB="45720" anchor="ctr">
-                    <a:lnL w="6350" cap="flat" cmpd="sng" algn="ctr">
-                      <a:solidFill>
-                        <a:srgbClr val="E3E8E9"/>
-                      </a:solidFill>
-                      <a:prstDash val="solid"/>
-                      <a:round/>
-                      <a:headEnd type="none" w="med" len="med"/>
-                      <a:tailEnd type="none" w="med" len="med"/>
-                    </a:lnL>
-                    <a:lnR w="6350" cap="flat" cmpd="sng" algn="ctr">
-                      <a:solidFill>
-                        <a:srgbClr val="E3E8E9"/>
-                      </a:solidFill>
-                      <a:prstDash val="solid"/>
-                      <a:round/>
-                      <a:headEnd type="none" w="med" len="med"/>
-                      <a:tailEnd type="none" w="med" len="med"/>
-                    </a:lnR>
-                    <a:lnT w="6350" cap="flat" cmpd="sng" algn="ctr">
-                      <a:solidFill>
-                        <a:srgbClr val="E3E8E9"/>
-                      </a:solidFill>
-                      <a:prstDash val="solid"/>
-                      <a:round/>
-                      <a:headEnd type="none" w="med" len="med"/>
-                      <a:tailEnd type="none" w="med" len="med"/>
-                    </a:lnT>
-                    <a:lnB w="6350" cap="flat" cmpd="sng" algn="ctr">
-                      <a:solidFill>
-                        <a:srgbClr val="E3E8E9"/>
-                      </a:solidFill>
-                      <a:prstDash val="solid"/>
-                      <a:round/>
-                      <a:headEnd type="none" w="med" len="med"/>
-                      <a:tailEnd type="none" w="med" len="med"/>
-                    </a:lnB>
-                    <a:solidFill>
-                      <a:srgbClr val="F0F4F5"/>
-                    </a:solidFill>
-                  </a:tcPr>
-                </a:tc>
-                <a:tc>
-                  <a:txBody>
-                    <a:bodyPr/>
-                    <a:lstStyle/>
-                    <a:p>
-                      <a:pPr indent="0" marL="0">
-                        <a:buNone/>
-                      </a:pPr>
-                      <a:r>
-                        <a:rPr lang="en-US" sz="950" dirty="0">
-                          <a:solidFill>
-                            <a:srgbClr val="5B6B73"/>
-                          </a:solidFill>
-                          <a:latin typeface="Calibri" pitchFamily="34" charset="0"/>
-                          <a:ea typeface="Calibri" pitchFamily="34" charset="-122"/>
-                          <a:cs typeface="Calibri" pitchFamily="34" charset="-120"/>
-                        </a:rPr>
-                        <a:t>Eficiência de Produção</a:t>
-                      </a:r>
-                      <a:endParaRPr lang="en-US" sz="950" dirty="0">
-                        <a:latin typeface="Calibri" charset="0"/>
-                        <a:ea typeface="Calibri" charset="0"/>
-                        <a:cs typeface="Calibri" charset="0"/>
-                      </a:endParaRPr>
-                    </a:p>
-                  </a:txBody>
-                  <a:tcPr marL="91440" marR="91440" marT="45720" marB="45720" anchor="ctr">
-                    <a:lnL w="6350" cap="flat" cmpd="sng" algn="ctr">
-                      <a:solidFill>
-                        <a:srgbClr val="E3E8E9"/>
-                      </a:solidFill>
-                      <a:prstDash val="solid"/>
-                      <a:round/>
-                      <a:headEnd type="none" w="med" len="med"/>
-                      <a:tailEnd type="none" w="med" len="med"/>
-                    </a:lnL>
-                    <a:lnR w="6350" cap="flat" cmpd="sng" algn="ctr">
-                      <a:solidFill>
-                        <a:srgbClr val="E3E8E9"/>
-                      </a:solidFill>
-                      <a:prstDash val="solid"/>
-                      <a:round/>
-                      <a:headEnd type="none" w="med" len="med"/>
-                      <a:tailEnd type="none" w="med" len="med"/>
-                    </a:lnR>
-                    <a:lnT w="6350" cap="flat" cmpd="sng" algn="ctr">
-                      <a:solidFill>
-                        <a:srgbClr val="E3E8E9"/>
-                      </a:solidFill>
-                      <a:prstDash val="solid"/>
-                      <a:round/>
-                      <a:headEnd type="none" w="med" len="med"/>
-                      <a:tailEnd type="none" w="med" len="med"/>
-                    </a:lnT>
-                    <a:lnB w="6350" cap="flat" cmpd="sng" algn="ctr">
-                      <a:solidFill>
-                        <a:srgbClr val="E3E8E9"/>
-                      </a:solidFill>
-                      <a:prstDash val="solid"/>
-                      <a:round/>
-                      <a:headEnd type="none" w="med" len="med"/>
-                      <a:tailEnd type="none" w="med" len="med"/>
-                    </a:lnB>
-                    <a:solidFill>
-                      <a:srgbClr val="F0F4F5"/>
-                    </a:solidFill>
-                  </a:tcPr>
-                </a:tc>
-                <a:tc>
-                  <a:txBody>
-                    <a:bodyPr/>
-                    <a:lstStyle/>
-                    <a:p>
-                      <a:pPr indent="0" marL="0">
-                        <a:buNone/>
-                      </a:pPr>
-                      <a:r>
-                        <a:rPr lang="en-US" sz="950" dirty="0">
-                          <a:solidFill>
-                            <a:srgbClr val="5B6B73"/>
-                          </a:solidFill>
-                          <a:latin typeface="Calibri" pitchFamily="34" charset="0"/>
-                          <a:ea typeface="Calibri" pitchFamily="34" charset="-122"/>
-                          <a:cs typeface="Calibri" pitchFamily="34" charset="-120"/>
-                        </a:rPr>
-                        <a:t>TA - Parada Programada</a:t>
-                      </a:r>
-                      <a:endParaRPr lang="en-US" sz="950" dirty="0">
-                        <a:latin typeface="Calibri" charset="0"/>
-                        <a:ea typeface="Calibri" charset="0"/>
-                        <a:cs typeface="Calibri" charset="0"/>
-                      </a:endParaRPr>
-                    </a:p>
-                  </a:txBody>
-                  <a:tcPr marL="91440" marR="91440" marT="45720" marB="45720" anchor="ctr">
-                    <a:lnL w="6350" cap="flat" cmpd="sng" algn="ctr">
-                      <a:solidFill>
-                        <a:srgbClr val="E3E8E9"/>
-                      </a:solidFill>
-                      <a:prstDash val="solid"/>
-                      <a:round/>
-                      <a:headEnd type="none" w="med" len="med"/>
-                      <a:tailEnd type="none" w="med" len="med"/>
-                    </a:lnL>
-                    <a:lnR w="6350" cap="flat" cmpd="sng" algn="ctr">
-                      <a:solidFill>
-                        <a:srgbClr val="E3E8E9"/>
-                      </a:solidFill>
-                      <a:prstDash val="solid"/>
-                      <a:round/>
-                      <a:headEnd type="none" w="med" len="med"/>
-                      <a:tailEnd type="none" w="med" len="med"/>
-                    </a:lnR>
-                    <a:lnT w="6350" cap="flat" cmpd="sng" algn="ctr">
-                      <a:solidFill>
-                        <a:srgbClr val="E3E8E9"/>
-                      </a:solidFill>
-                      <a:prstDash val="solid"/>
-                      <a:round/>
-                      <a:headEnd type="none" w="med" len="med"/>
-                      <a:tailEnd type="none" w="med" len="med"/>
-                    </a:lnT>
-                    <a:lnB w="6350" cap="flat" cmpd="sng" algn="ctr">
-                      <a:solidFill>
-                        <a:srgbClr val="E3E8E9"/>
-                      </a:solidFill>
-                      <a:prstDash val="solid"/>
-                      <a:round/>
-                      <a:headEnd type="none" w="med" len="med"/>
-                      <a:tailEnd type="none" w="med" len="med"/>
-                    </a:lnB>
-                    <a:solidFill>
-                      <a:srgbClr val="F0F4F5"/>
-                    </a:solidFill>
-                  </a:tcPr>
-                </a:tc>
-                <a:tc>
-                  <a:txBody>
-                    <a:bodyPr/>
-                    <a:lstStyle/>
-                    <a:p>
-                      <a:pPr algn="r" indent="0" marL="0">
-                        <a:buNone/>
-                      </a:pPr>
-                      <a:r>
-                        <a:rPr lang="en-US" sz="1000" b="1" dirty="0">
-                          <a:solidFill>
-                            <a:srgbClr val="0B2A3D"/>
-                          </a:solidFill>
-                          <a:latin typeface="Calibri" pitchFamily="34" charset="0"/>
-                          <a:ea typeface="Calibri" pitchFamily="34" charset="-122"/>
-                          <a:cs typeface="Calibri" pitchFamily="34" charset="-120"/>
-                        </a:rPr>
-                        <a:t>US$ 57,9 mil</a:t>
-                      </a:r>
-                      <a:endParaRPr lang="en-US" sz="1000" dirty="0">
-                        <a:latin typeface="Calibri" charset="0"/>
-                        <a:ea typeface="Calibri" charset="0"/>
-                        <a:cs typeface="Calibri" charset="0"/>
-                      </a:endParaRPr>
-                    </a:p>
-                  </a:txBody>
-                  <a:tcPr marL="91440" marR="91440" marT="45720" marB="45720" anchor="ctr">
-                    <a:lnL w="6350" cap="flat" cmpd="sng" algn="ctr">
-                      <a:solidFill>
-                        <a:srgbClr val="E3E8E9"/>
-                      </a:solidFill>
-                      <a:prstDash val="solid"/>
-                      <a:round/>
-                      <a:headEnd type="none" w="med" len="med"/>
-                      <a:tailEnd type="none" w="med" len="med"/>
-                    </a:lnL>
-                    <a:lnR w="6350" cap="flat" cmpd="sng" algn="ctr">
-                      <a:solidFill>
-                        <a:srgbClr val="E3E8E9"/>
-                      </a:solidFill>
-                      <a:prstDash val="solid"/>
-                      <a:round/>
-                      <a:headEnd type="none" w="med" len="med"/>
-                      <a:tailEnd type="none" w="med" len="med"/>
-                    </a:lnR>
-                    <a:lnT w="6350" cap="flat" cmpd="sng" algn="ctr">
-                      <a:solidFill>
-                        <a:srgbClr val="E3E8E9"/>
-                      </a:solidFill>
-                      <a:prstDash val="solid"/>
-                      <a:round/>
-                      <a:headEnd type="none" w="med" len="med"/>
-                      <a:tailEnd type="none" w="med" len="med"/>
-                    </a:lnT>
-                    <a:lnB w="6350" cap="flat" cmpd="sng" algn="ctr">
-                      <a:solidFill>
-                        <a:srgbClr val="E3E8E9"/>
-                      </a:solidFill>
-                      <a:prstDash val="solid"/>
-                      <a:round/>
-                      <a:headEnd type="none" w="med" len="med"/>
-                      <a:tailEnd type="none" w="med" len="med"/>
-                    </a:lnB>
-                    <a:solidFill>
-                      <a:srgbClr val="F0F4F5"/>
-                    </a:solidFill>
-                  </a:tcPr>
-                </a:tc>
-              </a:tr>
-              <a:tr h="288036">
-                <a:tc>
-                  <a:txBody>
-                    <a:bodyPr/>
-                    <a:lstStyle/>
-                    <a:p>
-                      <a:pPr indent="0" marL="0">
-                        <a:buNone/>
-                      </a:pPr>
-                      <a:r>
-                        <a:rPr lang="en-US" sz="1000" dirty="0">
-                          <a:solidFill>
-                            <a:srgbClr val="1C2B33"/>
-                          </a:solidFill>
-                          <a:latin typeface="Calibri" pitchFamily="34" charset="0"/>
-                          <a:ea typeface="Calibri" pitchFamily="34" charset="-122"/>
-                          <a:cs typeface="Calibri" pitchFamily="34" charset="-120"/>
-                        </a:rPr>
-                        <a:t>PÓS TA - Elétrica</a:t>
-                      </a:r>
-                      <a:endParaRPr lang="en-US" sz="1000" dirty="0">
-                        <a:latin typeface="Calibri" charset="0"/>
-                        <a:ea typeface="Calibri" charset="0"/>
-                        <a:cs typeface="Calibri" charset="0"/>
-                      </a:endParaRPr>
-                    </a:p>
-                  </a:txBody>
-                  <a:tcPr marL="91440" marR="91440" marT="45720" marB="45720" anchor="ctr">
-                    <a:lnL w="6350" cap="flat" cmpd="sng" algn="ctr">
-                      <a:solidFill>
-                        <a:srgbClr val="E3E8E9"/>
-                      </a:solidFill>
-                      <a:prstDash val="solid"/>
-                      <a:round/>
-                      <a:headEnd type="none" w="med" len="med"/>
-                      <a:tailEnd type="none" w="med" len="med"/>
-                    </a:lnL>
-                    <a:lnR w="6350" cap="flat" cmpd="sng" algn="ctr">
-                      <a:solidFill>
-                        <a:srgbClr val="E3E8E9"/>
-                      </a:solidFill>
-                      <a:prstDash val="solid"/>
-                      <a:round/>
-                      <a:headEnd type="none" w="med" len="med"/>
-                      <a:tailEnd type="none" w="med" len="med"/>
-                    </a:lnR>
-                    <a:lnT w="6350" cap="flat" cmpd="sng" algn="ctr">
-                      <a:solidFill>
-                        <a:srgbClr val="E3E8E9"/>
-                      </a:solidFill>
-                      <a:prstDash val="solid"/>
-                      <a:round/>
-                      <a:headEnd type="none" w="med" len="med"/>
-                      <a:tailEnd type="none" w="med" len="med"/>
-                    </a:lnT>
-                    <a:lnB w="6350" cap="flat" cmpd="sng" algn="ctr">
-                      <a:solidFill>
-                        <a:srgbClr val="E3E8E9"/>
-                      </a:solidFill>
-                      <a:prstDash val="solid"/>
-                      <a:round/>
-                      <a:headEnd type="none" w="med" len="med"/>
-                      <a:tailEnd type="none" w="med" len="med"/>
-                    </a:lnB>
-                    <a:solidFill>
-                      <a:srgbClr val="FFFFFF"/>
-                    </a:solidFill>
-                  </a:tcPr>
-                </a:tc>
-                <a:tc>
-                  <a:txBody>
-                    <a:bodyPr/>
-                    <a:lstStyle/>
-                    <a:p>
-                      <a:pPr indent="0" marL="0">
-                        <a:buNone/>
-                      </a:pPr>
-                      <a:r>
-                        <a:rPr lang="en-US" sz="950" dirty="0">
-                          <a:solidFill>
-                            <a:srgbClr val="5B6B73"/>
-                          </a:solidFill>
-                          <a:latin typeface="Calibri" pitchFamily="34" charset="0"/>
-                          <a:ea typeface="Calibri" pitchFamily="34" charset="-122"/>
-                          <a:cs typeface="Calibri" pitchFamily="34" charset="-120"/>
-                        </a:rPr>
-                        <a:t>Eficiência de Produção</a:t>
-                      </a:r>
-                      <a:endParaRPr lang="en-US" sz="950" dirty="0">
-                        <a:latin typeface="Calibri" charset="0"/>
-                        <a:ea typeface="Calibri" charset="0"/>
-                        <a:cs typeface="Calibri" charset="0"/>
-                      </a:endParaRPr>
-                    </a:p>
-                  </a:txBody>
-                  <a:tcPr marL="91440" marR="91440" marT="45720" marB="45720" anchor="ctr">
-                    <a:lnL w="6350" cap="flat" cmpd="sng" algn="ctr">
-                      <a:solidFill>
-                        <a:srgbClr val="E3E8E9"/>
-                      </a:solidFill>
-                      <a:prstDash val="solid"/>
-                      <a:round/>
-                      <a:headEnd type="none" w="med" len="med"/>
-                      <a:tailEnd type="none" w="med" len="med"/>
-                    </a:lnL>
-                    <a:lnR w="6350" cap="flat" cmpd="sng" algn="ctr">
-                      <a:solidFill>
-                        <a:srgbClr val="E3E8E9"/>
-                      </a:solidFill>
-                      <a:prstDash val="solid"/>
-                      <a:round/>
-                      <a:headEnd type="none" w="med" len="med"/>
-                      <a:tailEnd type="none" w="med" len="med"/>
-                    </a:lnR>
-                    <a:lnT w="6350" cap="flat" cmpd="sng" algn="ctr">
-                      <a:solidFill>
-                        <a:srgbClr val="E3E8E9"/>
-                      </a:solidFill>
-                      <a:prstDash val="solid"/>
-                      <a:round/>
-                      <a:headEnd type="none" w="med" len="med"/>
-                      <a:tailEnd type="none" w="med" len="med"/>
-                    </a:lnT>
-                    <a:lnB w="6350" cap="flat" cmpd="sng" algn="ctr">
-                      <a:solidFill>
-                        <a:srgbClr val="E3E8E9"/>
-                      </a:solidFill>
-                      <a:prstDash val="solid"/>
-                      <a:round/>
-                      <a:headEnd type="none" w="med" len="med"/>
-                      <a:tailEnd type="none" w="med" len="med"/>
-                    </a:lnB>
-                    <a:solidFill>
-                      <a:srgbClr val="FFFFFF"/>
-                    </a:solidFill>
-                  </a:tcPr>
-                </a:tc>
-                <a:tc>
-                  <a:txBody>
-                    <a:bodyPr/>
-                    <a:lstStyle/>
-                    <a:p>
-                      <a:pPr indent="0" marL="0">
-                        <a:buNone/>
-                      </a:pPr>
-                      <a:r>
-                        <a:rPr lang="en-US" sz="950" dirty="0">
-                          <a:solidFill>
-                            <a:srgbClr val="5B6B73"/>
-                          </a:solidFill>
-                          <a:latin typeface="Calibri" pitchFamily="34" charset="0"/>
-                          <a:ea typeface="Calibri" pitchFamily="34" charset="-122"/>
-                          <a:cs typeface="Calibri" pitchFamily="34" charset="-120"/>
-                        </a:rPr>
-                        <a:t>TA - Parada Programada</a:t>
-                      </a:r>
-                      <a:endParaRPr lang="en-US" sz="950" dirty="0">
-                        <a:latin typeface="Calibri" charset="0"/>
-                        <a:ea typeface="Calibri" charset="0"/>
-                        <a:cs typeface="Calibri" charset="0"/>
-                      </a:endParaRPr>
-                    </a:p>
-                  </a:txBody>
-                  <a:tcPr marL="91440" marR="91440" marT="45720" marB="45720" anchor="ctr">
-                    <a:lnL w="6350" cap="flat" cmpd="sng" algn="ctr">
-                      <a:solidFill>
-                        <a:srgbClr val="E3E8E9"/>
-                      </a:solidFill>
-                      <a:prstDash val="solid"/>
-                      <a:round/>
-                      <a:headEnd type="none" w="med" len="med"/>
-                      <a:tailEnd type="none" w="med" len="med"/>
-                    </a:lnL>
-                    <a:lnR w="6350" cap="flat" cmpd="sng" algn="ctr">
-                      <a:solidFill>
-                        <a:srgbClr val="E3E8E9"/>
-                      </a:solidFill>
-                      <a:prstDash val="solid"/>
-                      <a:round/>
-                      <a:headEnd type="none" w="med" len="med"/>
-                      <a:tailEnd type="none" w="med" len="med"/>
-                    </a:lnR>
-                    <a:lnT w="6350" cap="flat" cmpd="sng" algn="ctr">
-                      <a:solidFill>
-                        <a:srgbClr val="E3E8E9"/>
-                      </a:solidFill>
-                      <a:prstDash val="solid"/>
-                      <a:round/>
-                      <a:headEnd type="none" w="med" len="med"/>
-                      <a:tailEnd type="none" w="med" len="med"/>
-                    </a:lnT>
-                    <a:lnB w="6350" cap="flat" cmpd="sng" algn="ctr">
-                      <a:solidFill>
-                        <a:srgbClr val="E3E8E9"/>
-                      </a:solidFill>
-                      <a:prstDash val="solid"/>
-                      <a:round/>
-                      <a:headEnd type="none" w="med" len="med"/>
-                      <a:tailEnd type="none" w="med" len="med"/>
-                    </a:lnB>
-                    <a:solidFill>
-                      <a:srgbClr val="FFFFFF"/>
-                    </a:solidFill>
-                  </a:tcPr>
-                </a:tc>
-                <a:tc>
-                  <a:txBody>
-                    <a:bodyPr/>
-                    <a:lstStyle/>
-                    <a:p>
-                      <a:pPr algn="r" indent="0" marL="0">
-                        <a:buNone/>
-                      </a:pPr>
-                      <a:r>
-                        <a:rPr lang="en-US" sz="1000" b="1" dirty="0">
-                          <a:solidFill>
-                            <a:srgbClr val="0B2A3D"/>
-                          </a:solidFill>
-                          <a:latin typeface="Calibri" pitchFamily="34" charset="0"/>
-                          <a:ea typeface="Calibri" pitchFamily="34" charset="-122"/>
-                          <a:cs typeface="Calibri" pitchFamily="34" charset="-120"/>
-                        </a:rPr>
-                        <a:t>US$ 52,9 mil</a:t>
-                      </a:r>
-                      <a:endParaRPr lang="en-US" sz="1000" dirty="0">
-                        <a:latin typeface="Calibri" charset="0"/>
-                        <a:ea typeface="Calibri" charset="0"/>
-                        <a:cs typeface="Calibri" charset="0"/>
-                      </a:endParaRPr>
-                    </a:p>
-                  </a:txBody>
-                  <a:tcPr marL="91440" marR="91440" marT="45720" marB="45720" anchor="ctr">
-                    <a:lnL w="6350" cap="flat" cmpd="sng" algn="ctr">
-                      <a:solidFill>
-                        <a:srgbClr val="E3E8E9"/>
-                      </a:solidFill>
-                      <a:prstDash val="solid"/>
-                      <a:round/>
-                      <a:headEnd type="none" w="med" len="med"/>
-                      <a:tailEnd type="none" w="med" len="med"/>
-                    </a:lnL>
-                    <a:lnR w="6350" cap="flat" cmpd="sng" algn="ctr">
-                      <a:solidFill>
-                        <a:srgbClr val="E3E8E9"/>
-                      </a:solidFill>
-                      <a:prstDash val="solid"/>
-                      <a:round/>
-                      <a:headEnd type="none" w="med" len="med"/>
-                      <a:tailEnd type="none" w="med" len="med"/>
-                    </a:lnR>
-                    <a:lnT w="6350" cap="flat" cmpd="sng" algn="ctr">
-                      <a:solidFill>
-                        <a:srgbClr val="E3E8E9"/>
-                      </a:solidFill>
-                      <a:prstDash val="solid"/>
-                      <a:round/>
-                      <a:headEnd type="none" w="med" len="med"/>
-                      <a:tailEnd type="none" w="med" len="med"/>
-                    </a:lnT>
-                    <a:lnB w="6350" cap="flat" cmpd="sng" algn="ctr">
-                      <a:solidFill>
-                        <a:srgbClr val="E3E8E9"/>
-                      </a:solidFill>
-                      <a:prstDash val="solid"/>
-                      <a:round/>
-                      <a:headEnd type="none" w="med" len="med"/>
-                      <a:tailEnd type="none" w="med" len="med"/>
-                    </a:lnB>
-                    <a:solidFill>
-                      <a:srgbClr val="FFFFFF"/>
-                    </a:solidFill>
-                  </a:tcPr>
-                </a:tc>
-              </a:tr>
-              <a:tr h="288036">
-                <a:tc>
-                  <a:txBody>
-                    <a:bodyPr/>
-                    <a:lstStyle/>
-                    <a:p>
-                      <a:pPr indent="0" marL="0">
-                        <a:buNone/>
-                      </a:pPr>
-                      <a:r>
-                        <a:rPr lang="en-US" sz="1000" dirty="0">
-                          <a:solidFill>
-                            <a:srgbClr val="1C2B33"/>
-                          </a:solidFill>
-                          <a:latin typeface="Calibri" pitchFamily="34" charset="0"/>
-                          <a:ea typeface="Calibri" pitchFamily="34" charset="-122"/>
-                          <a:cs typeface="Calibri" pitchFamily="34" charset="-120"/>
-                        </a:rPr>
-                        <a:t>PRÉ TA - Elétrica</a:t>
-                      </a:r>
-                      <a:endParaRPr lang="en-US" sz="1000" dirty="0">
-                        <a:latin typeface="Calibri" charset="0"/>
-                        <a:ea typeface="Calibri" charset="0"/>
-                        <a:cs typeface="Calibri" charset="0"/>
-                      </a:endParaRPr>
-                    </a:p>
-                  </a:txBody>
-                  <a:tcPr marL="91440" marR="91440" marT="45720" marB="45720" anchor="ctr">
-                    <a:lnL w="6350" cap="flat" cmpd="sng" algn="ctr">
-                      <a:solidFill>
-                        <a:srgbClr val="E3E8E9"/>
-                      </a:solidFill>
-                      <a:prstDash val="solid"/>
-                      <a:round/>
-                      <a:headEnd type="none" w="med" len="med"/>
-                      <a:tailEnd type="none" w="med" len="med"/>
-                    </a:lnL>
-                    <a:lnR w="6350" cap="flat" cmpd="sng" algn="ctr">
-                      <a:solidFill>
-                        <a:srgbClr val="E3E8E9"/>
-                      </a:solidFill>
-                      <a:prstDash val="solid"/>
-                      <a:round/>
-                      <a:headEnd type="none" w="med" len="med"/>
-                      <a:tailEnd type="none" w="med" len="med"/>
-                    </a:lnR>
-                    <a:lnT w="6350" cap="flat" cmpd="sng" algn="ctr">
-                      <a:solidFill>
-                        <a:srgbClr val="E3E8E9"/>
-                      </a:solidFill>
-                      <a:prstDash val="solid"/>
-                      <a:round/>
-                      <a:headEnd type="none" w="med" len="med"/>
-                      <a:tailEnd type="none" w="med" len="med"/>
-                    </a:lnT>
-                    <a:lnB w="6350" cap="flat" cmpd="sng" algn="ctr">
-                      <a:solidFill>
-                        <a:srgbClr val="E3E8E9"/>
-                      </a:solidFill>
-                      <a:prstDash val="solid"/>
-                      <a:round/>
-                      <a:headEnd type="none" w="med" len="med"/>
-                      <a:tailEnd type="none" w="med" len="med"/>
-                    </a:lnB>
-                    <a:solidFill>
-                      <a:srgbClr val="F0F4F5"/>
-                    </a:solidFill>
-                  </a:tcPr>
-                </a:tc>
-                <a:tc>
-                  <a:txBody>
-                    <a:bodyPr/>
-                    <a:lstStyle/>
-                    <a:p>
-                      <a:pPr indent="0" marL="0">
-                        <a:buNone/>
-                      </a:pPr>
-                      <a:r>
-                        <a:rPr lang="en-US" sz="950" dirty="0">
-                          <a:solidFill>
-                            <a:srgbClr val="5B6B73"/>
-                          </a:solidFill>
-                          <a:latin typeface="Calibri" pitchFamily="34" charset="0"/>
-                          <a:ea typeface="Calibri" pitchFamily="34" charset="-122"/>
-                          <a:cs typeface="Calibri" pitchFamily="34" charset="-120"/>
-                        </a:rPr>
-                        <a:t>Eficiência de Produção</a:t>
-                      </a:r>
-                      <a:endParaRPr lang="en-US" sz="950" dirty="0">
-                        <a:latin typeface="Calibri" charset="0"/>
-                        <a:ea typeface="Calibri" charset="0"/>
-                        <a:cs typeface="Calibri" charset="0"/>
-                      </a:endParaRPr>
-                    </a:p>
-                  </a:txBody>
-                  <a:tcPr marL="91440" marR="91440" marT="45720" marB="45720" anchor="ctr">
-                    <a:lnL w="6350" cap="flat" cmpd="sng" algn="ctr">
-                      <a:solidFill>
-                        <a:srgbClr val="E3E8E9"/>
-                      </a:solidFill>
-                      <a:prstDash val="solid"/>
-                      <a:round/>
-                      <a:headEnd type="none" w="med" len="med"/>
-                      <a:tailEnd type="none" w="med" len="med"/>
-                    </a:lnL>
-                    <a:lnR w="6350" cap="flat" cmpd="sng" algn="ctr">
-                      <a:solidFill>
-                        <a:srgbClr val="E3E8E9"/>
-                      </a:solidFill>
-                      <a:prstDash val="solid"/>
-                      <a:round/>
-                      <a:headEnd type="none" w="med" len="med"/>
-                      <a:tailEnd type="none" w="med" len="med"/>
-                    </a:lnR>
-                    <a:lnT w="6350" cap="flat" cmpd="sng" algn="ctr">
-                      <a:solidFill>
-                        <a:srgbClr val="E3E8E9"/>
-                      </a:solidFill>
-                      <a:prstDash val="solid"/>
-                      <a:round/>
-                      <a:headEnd type="none" w="med" len="med"/>
-                      <a:tailEnd type="none" w="med" len="med"/>
-                    </a:lnT>
-                    <a:lnB w="6350" cap="flat" cmpd="sng" algn="ctr">
-                      <a:solidFill>
-                        <a:srgbClr val="E3E8E9"/>
-                      </a:solidFill>
-                      <a:prstDash val="solid"/>
-                      <a:round/>
-                      <a:headEnd type="none" w="med" len="med"/>
-                      <a:tailEnd type="none" w="med" len="med"/>
-                    </a:lnB>
-                    <a:solidFill>
-                      <a:srgbClr val="F0F4F5"/>
-                    </a:solidFill>
-                  </a:tcPr>
-                </a:tc>
-                <a:tc>
-                  <a:txBody>
-                    <a:bodyPr/>
-                    <a:lstStyle/>
-                    <a:p>
-                      <a:pPr indent="0" marL="0">
-                        <a:buNone/>
-                      </a:pPr>
-                      <a:r>
-                        <a:rPr lang="en-US" sz="950" dirty="0">
-                          <a:solidFill>
-                            <a:srgbClr val="5B6B73"/>
-                          </a:solidFill>
-                          <a:latin typeface="Calibri" pitchFamily="34" charset="0"/>
-                          <a:ea typeface="Calibri" pitchFamily="34" charset="-122"/>
-                          <a:cs typeface="Calibri" pitchFamily="34" charset="-120"/>
-                        </a:rPr>
-                        <a:t>TA - Parada Programada</a:t>
-                      </a:r>
-                      <a:endParaRPr lang="en-US" sz="950" dirty="0">
-                        <a:latin typeface="Calibri" charset="0"/>
-                        <a:ea typeface="Calibri" charset="0"/>
-                        <a:cs typeface="Calibri" charset="0"/>
-                      </a:endParaRPr>
-                    </a:p>
-                  </a:txBody>
-                  <a:tcPr marL="91440" marR="91440" marT="45720" marB="45720" anchor="ctr">
-                    <a:lnL w="6350" cap="flat" cmpd="sng" algn="ctr">
-                      <a:solidFill>
-                        <a:srgbClr val="E3E8E9"/>
-                      </a:solidFill>
-                      <a:prstDash val="solid"/>
-                      <a:round/>
-                      <a:headEnd type="none" w="med" len="med"/>
-                      <a:tailEnd type="none" w="med" len="med"/>
-                    </a:lnL>
-                    <a:lnR w="6350" cap="flat" cmpd="sng" algn="ctr">
-                      <a:solidFill>
-                        <a:srgbClr val="E3E8E9"/>
-                      </a:solidFill>
-                      <a:prstDash val="solid"/>
-                      <a:round/>
-                      <a:headEnd type="none" w="med" len="med"/>
-                      <a:tailEnd type="none" w="med" len="med"/>
-                    </a:lnR>
-                    <a:lnT w="6350" cap="flat" cmpd="sng" algn="ctr">
-                      <a:solidFill>
-                        <a:srgbClr val="E3E8E9"/>
-                      </a:solidFill>
-                      <a:prstDash val="solid"/>
-                      <a:round/>
-                      <a:headEnd type="none" w="med" len="med"/>
-                      <a:tailEnd type="none" w="med" len="med"/>
-                    </a:lnT>
-                    <a:lnB w="6350" cap="flat" cmpd="sng" algn="ctr">
-                      <a:solidFill>
-                        <a:srgbClr val="E3E8E9"/>
-                      </a:solidFill>
-                      <a:prstDash val="solid"/>
-                      <a:round/>
-                      <a:headEnd type="none" w="med" len="med"/>
-                      <a:tailEnd type="none" w="med" len="med"/>
-                    </a:lnB>
-                    <a:solidFill>
-                      <a:srgbClr val="F0F4F5"/>
-                    </a:solidFill>
-                  </a:tcPr>
-                </a:tc>
-                <a:tc>
-                  <a:txBody>
-                    <a:bodyPr/>
-                    <a:lstStyle/>
-                    <a:p>
-                      <a:pPr algn="r" indent="0" marL="0">
-                        <a:buNone/>
-                      </a:pPr>
-                      <a:r>
-                        <a:rPr lang="en-US" sz="1000" b="1" dirty="0">
-                          <a:solidFill>
-                            <a:srgbClr val="0B2A3D"/>
-                          </a:solidFill>
-                          <a:latin typeface="Calibri" pitchFamily="34" charset="0"/>
-                          <a:ea typeface="Calibri" pitchFamily="34" charset="-122"/>
-                          <a:cs typeface="Calibri" pitchFamily="34" charset="-120"/>
-                        </a:rPr>
-                        <a:t>US$ 52,9 mil</a:t>
-                      </a:r>
-                      <a:endParaRPr lang="en-US" sz="1000" dirty="0">
-                        <a:latin typeface="Calibri" charset="0"/>
-                        <a:ea typeface="Calibri" charset="0"/>
-                        <a:cs typeface="Calibri" charset="0"/>
-                      </a:endParaRPr>
-                    </a:p>
-                  </a:txBody>
-                  <a:tcPr marL="91440" marR="91440" marT="45720" marB="45720" anchor="ctr">
-                    <a:lnL w="6350" cap="flat" cmpd="sng" algn="ctr">
-                      <a:solidFill>
-                        <a:srgbClr val="E3E8E9"/>
-                      </a:solidFill>
-                      <a:prstDash val="solid"/>
-                      <a:round/>
-                      <a:headEnd type="none" w="med" len="med"/>
-                      <a:tailEnd type="none" w="med" len="med"/>
-                    </a:lnL>
-                    <a:lnR w="6350" cap="flat" cmpd="sng" algn="ctr">
-                      <a:solidFill>
-                        <a:srgbClr val="E3E8E9"/>
-                      </a:solidFill>
-                      <a:prstDash val="solid"/>
-                      <a:round/>
-                      <a:headEnd type="none" w="med" len="med"/>
-                      <a:tailEnd type="none" w="med" len="med"/>
-                    </a:lnR>
-                    <a:lnT w="6350" cap="flat" cmpd="sng" algn="ctr">
-                      <a:solidFill>
-                        <a:srgbClr val="E3E8E9"/>
-                      </a:solidFill>
-                      <a:prstDash val="solid"/>
-                      <a:round/>
-                      <a:headEnd type="none" w="med" len="med"/>
-                      <a:tailEnd type="none" w="med" len="med"/>
-                    </a:lnT>
-                    <a:lnB w="6350" cap="flat" cmpd="sng" algn="ctr">
-                      <a:solidFill>
-                        <a:srgbClr val="E3E8E9"/>
-                      </a:solidFill>
-                      <a:prstDash val="solid"/>
-                      <a:round/>
-                      <a:headEnd type="none" w="med" len="med"/>
-                      <a:tailEnd type="none" w="med" len="med"/>
-                    </a:lnB>
-                    <a:solidFill>
-                      <a:srgbClr val="F0F4F5"/>
-                    </a:solidFill>
-                  </a:tcPr>
-                </a:tc>
-              </a:tr>
-              <a:tr h="288036">
-                <a:tc gridSpan="3">
-                  <a:txBody>
-                    <a:bodyPr/>
-                    <a:lstStyle/>
-                    <a:p>
-                      <a:pPr indent="0" marL="0">
-                        <a:buNone/>
-                      </a:pPr>
-                      <a:r>
-                        <a:rPr lang="en-US" sz="950" i="1" dirty="0">
-                          <a:solidFill>
-                            <a:srgbClr val="145C68"/>
-                          </a:solidFill>
-                          <a:latin typeface="Calibri" pitchFamily="34" charset="0"/>
-                          <a:ea typeface="Calibri" pitchFamily="34" charset="-122"/>
-                          <a:cs typeface="Calibri" pitchFamily="34" charset="-120"/>
-                        </a:rPr>
-                        <a:t>Outros 14 escopos (itens de menor valor individual)</a:t>
-                      </a:r>
-                      <a:endParaRPr lang="en-US" sz="950" dirty="0">
-                        <a:latin typeface="Calibri" charset="0"/>
-                        <a:ea typeface="Calibri" charset="0"/>
-                        <a:cs typeface="Calibri" charset="0"/>
-                      </a:endParaRPr>
-                    </a:p>
-                  </a:txBody>
-                  <a:tcPr marL="91440" marR="91440" marT="45720" marB="45720" anchor="ctr">
-                    <a:lnL w="6350" cap="flat" cmpd="sng" algn="ctr">
-                      <a:solidFill>
-                        <a:srgbClr val="E3E8E9"/>
-                      </a:solidFill>
-                      <a:prstDash val="solid"/>
-                      <a:round/>
-                      <a:headEnd type="none" w="med" len="med"/>
-                      <a:tailEnd type="none" w="med" len="med"/>
-                    </a:lnL>
-                    <a:lnR w="6350" cap="flat" cmpd="sng" algn="ctr">
-                      <a:solidFill>
-                        <a:srgbClr val="E3E8E9"/>
-                      </a:solidFill>
-                      <a:prstDash val="solid"/>
-                      <a:round/>
-                      <a:headEnd type="none" w="med" len="med"/>
-                      <a:tailEnd type="none" w="med" len="med"/>
-                    </a:lnR>
-                    <a:lnT w="6350" cap="flat" cmpd="sng" algn="ctr">
-                      <a:solidFill>
-                        <a:srgbClr val="E3E8E9"/>
-                      </a:solidFill>
-                      <a:prstDash val="solid"/>
-                      <a:round/>
-                      <a:headEnd type="none" w="med" len="med"/>
-                      <a:tailEnd type="none" w="med" len="med"/>
-                    </a:lnT>
-                    <a:lnB w="6350" cap="flat" cmpd="sng" algn="ctr">
-                      <a:solidFill>
-                        <a:srgbClr val="E3E8E9"/>
-                      </a:solidFill>
-                      <a:prstDash val="solid"/>
-                      <a:round/>
-                      <a:headEnd type="none" w="med" len="med"/>
-                      <a:tailEnd type="none" w="med" len="med"/>
-                    </a:lnB>
-                    <a:solidFill>
-                      <a:srgbClr val="DCE8E2"/>
-                    </a:solidFill>
-                  </a:tcPr>
-                </a:tc>
-                <a:tc hMerge="1">
-                  <a:tcPr/>
-                </a:tc>
-                <a:tc hMerge="1">
-                  <a:tcPr/>
-                </a:tc>
-                <a:tc>
-                  <a:txBody>
-                    <a:bodyPr/>
-                    <a:lstStyle/>
-                    <a:p>
-                      <a:pPr algn="r" indent="0" marL="0">
-                        <a:buNone/>
-                      </a:pPr>
-                      <a:r>
-                        <a:rPr lang="en-US" sz="1000" b="1" i="1" dirty="0">
-                          <a:solidFill>
-                            <a:srgbClr val="0B2A3D"/>
-                          </a:solidFill>
-                          <a:latin typeface="Calibri" pitchFamily="34" charset="0"/>
-                          <a:ea typeface="Calibri" pitchFamily="34" charset="-122"/>
-                          <a:cs typeface="Calibri" pitchFamily="34" charset="-120"/>
-                        </a:rPr>
-                        <a:t>US$ 299,4 mil</a:t>
-                      </a:r>
-                      <a:endParaRPr lang="en-US" sz="1000" dirty="0">
-                        <a:latin typeface="Calibri" charset="0"/>
-                        <a:ea typeface="Calibri" charset="0"/>
-                        <a:cs typeface="Calibri" charset="0"/>
-                      </a:endParaRPr>
-                    </a:p>
-                  </a:txBody>
-                  <a:tcPr marL="91440" marR="91440" marT="45720" marB="45720" anchor="ctr">
-                    <a:lnL w="6350" cap="flat" cmpd="sng" algn="ctr">
-                      <a:solidFill>
-                        <a:srgbClr val="E3E8E9"/>
-                      </a:solidFill>
-                      <a:prstDash val="solid"/>
-                      <a:round/>
-                      <a:headEnd type="none" w="med" len="med"/>
-                      <a:tailEnd type="none" w="med" len="med"/>
-                    </a:lnL>
-                    <a:lnR w="6350" cap="flat" cmpd="sng" algn="ctr">
-                      <a:solidFill>
-                        <a:srgbClr val="E3E8E9"/>
-                      </a:solidFill>
-                      <a:prstDash val="solid"/>
-                      <a:round/>
-                      <a:headEnd type="none" w="med" len="med"/>
-                      <a:tailEnd type="none" w="med" len="med"/>
-                    </a:lnR>
-                    <a:lnT w="6350" cap="flat" cmpd="sng" algn="ctr">
-                      <a:solidFill>
-                        <a:srgbClr val="E3E8E9"/>
-                      </a:solidFill>
-                      <a:prstDash val="solid"/>
-                      <a:round/>
-                      <a:headEnd type="none" w="med" len="med"/>
-                      <a:tailEnd type="none" w="med" len="med"/>
-                    </a:lnT>
-                    <a:lnB w="6350" cap="flat" cmpd="sng" algn="ctr">
-                      <a:solidFill>
-                        <a:srgbClr val="E3E8E9"/>
-                      </a:solidFill>
-                      <a:prstDash val="solid"/>
-                      <a:round/>
-                      <a:headEnd type="none" w="med" len="med"/>
-                      <a:tailEnd type="none" w="med" len="med"/>
-                    </a:lnB>
-                    <a:solidFill>
-                      <a:srgbClr val="DCE8E2"/>
                     </a:solidFill>
                   </a:tcPr>
                 </a:tc>
@@ -13574,7 +10244,7 @@
                 <a:ea typeface="Calibri" pitchFamily="34" charset="-122"/>
                 <a:cs typeface="Calibri" pitchFamily="34" charset="-120"/>
               </a:rPr>
-              <a:t>Fonte: Plano Integrado · aba 'Geral - Em análise' · coluna 'Valor Total' · itens de Cost Allocation = CAPEX, status 'Contar' + 'TA'. Lista completa disponível na planilha em anexo. Extrato pendente de atualização — pode não somar exatamente ao total da Composição de Custo (o valor de TA foi atualizado manualmente).</a:t>
+              <a:t>Fonte: Plano Integrado · aba 'Geral - Em análise' · coluna 'Valor Total' · itens de Cost Allocation = CAPEX, status 'Contar' (não inclui Parada Programada, status 'TA'). Lista completa disponível na planilha em anexo.</a:t>
             </a:r>
             <a:endParaRPr lang="en-US" sz="850" dirty="0"/>
           </a:p>
@@ -13738,7 +10408,7 @@
                 <a:ea typeface="Cambria" pitchFamily="34" charset="-122"/>
                 <a:cs typeface="Cambria" pitchFamily="34" charset="-120"/>
               </a:rPr>
-              <a:t>US$ 34,8 mi</a:t>
+              <a:t>US$ 26,0 mi</a:t>
             </a:r>
             <a:endParaRPr lang="en-US" sz="2600" dirty="0"/>
           </a:p>
@@ -13877,7 +10547,7 @@
                 <a:ea typeface="Cambria" pitchFamily="34" charset="-122"/>
                 <a:cs typeface="Cambria" pitchFamily="34" charset="-120"/>
               </a:rPr>
-              <a:t>706</a:t>
+              <a:t>318</a:t>
             </a:r>
             <a:endParaRPr lang="en-US" sz="2600" dirty="0"/>
           </a:p>
@@ -14016,7 +10686,7 @@
                 <a:ea typeface="Cambria" pitchFamily="34" charset="-122"/>
                 <a:cs typeface="Cambria" pitchFamily="34" charset="-120"/>
               </a:rPr>
-              <a:t>120</a:t>
+              <a:t>48</a:t>
             </a:r>
             <a:endParaRPr lang="en-US" sz="2600" dirty="0"/>
           </a:p>
@@ -14644,7 +11314,7 @@
                             <a:srgbClr val="1C2B33"/>
                           </a:solidFill>
                         </a:rPr>
-                        <a:t>US$ 18,1 mi</a:t>
+                        <a:t>US$ 14,8 mi</a:t>
                       </a:r>
                       <a:endParaRPr lang="en-US" sz="1050" dirty="0"/>
                     </a:p>
@@ -14705,7 +11375,7 @@
                             <a:srgbClr val="1C2B33"/>
                           </a:solidFill>
                         </a:rPr>
-                        <a:t>268</a:t>
+                        <a:t>141</a:t>
                       </a:r>
                       <a:endParaRPr lang="en-US" sz="1050" dirty="0"/>
                     </a:p>
@@ -14766,7 +11436,7 @@
                             <a:srgbClr val="1C2B33"/>
                           </a:solidFill>
                         </a:rPr>
-                        <a:t>41</a:t>
+                        <a:t>23</a:t>
                       </a:r>
                       <a:endParaRPr lang="en-US" sz="1050" dirty="0"/>
                     </a:p>
@@ -14890,7 +11560,7 @@
                             <a:srgbClr val="1C2B33"/>
                           </a:solidFill>
                         </a:rPr>
-                        <a:t>US$ 8,8 mi</a:t>
+                        <a:t>US$ 6,3 mi</a:t>
                       </a:r>
                       <a:endParaRPr lang="en-US" sz="1050" dirty="0"/>
                     </a:p>
@@ -14951,7 +11621,7 @@
                             <a:srgbClr val="1C2B33"/>
                           </a:solidFill>
                         </a:rPr>
-                        <a:t>182</a:t>
+                        <a:t>81</a:t>
                       </a:r>
                       <a:endParaRPr lang="en-US" sz="1050" dirty="0"/>
                     </a:p>
@@ -15012,7 +11682,7 @@
                             <a:srgbClr val="1C2B33"/>
                           </a:solidFill>
                         </a:rPr>
-                        <a:t>28</a:t>
+                        <a:t>10</a:t>
                       </a:r>
                       <a:endParaRPr lang="en-US" sz="1050" dirty="0"/>
                     </a:p>
@@ -15136,7 +11806,7 @@
                             <a:srgbClr val="1C2B33"/>
                           </a:solidFill>
                         </a:rPr>
-                        <a:t>US$ 3,4 mi</a:t>
+                        <a:t>US$ 2,3 mi</a:t>
                       </a:r>
                       <a:endParaRPr lang="en-US" sz="1050" dirty="0"/>
                     </a:p>
@@ -15197,7 +11867,7 @@
                             <a:srgbClr val="1C2B33"/>
                           </a:solidFill>
                         </a:rPr>
-                        <a:t>121</a:t>
+                        <a:t>51</a:t>
                       </a:r>
                       <a:endParaRPr lang="en-US" sz="1050" dirty="0"/>
                     </a:p>
@@ -15258,7 +11928,7 @@
                             <a:srgbClr val="1C2B33"/>
                           </a:solidFill>
                         </a:rPr>
-                        <a:t>25</a:t>
+                        <a:t>7</a:t>
                       </a:r>
                       <a:endParaRPr lang="en-US" sz="1050" dirty="0"/>
                     </a:p>
@@ -15382,7 +12052,7 @@
                             <a:srgbClr val="1C2B33"/>
                           </a:solidFill>
                         </a:rPr>
-                        <a:t>US$ 4,4 mi</a:t>
+                        <a:t>US$ 2,5 mi</a:t>
                       </a:r>
                       <a:endParaRPr lang="en-US" sz="1050" dirty="0"/>
                     </a:p>
@@ -15443,7 +12113,7 @@
                             <a:srgbClr val="1C2B33"/>
                           </a:solidFill>
                         </a:rPr>
-                        <a:t>135</a:t>
+                        <a:t>45</a:t>
                       </a:r>
                       <a:endParaRPr lang="en-US" sz="1050" dirty="0"/>
                     </a:p>
@@ -15504,7 +12174,7 @@
                             <a:srgbClr val="1C2B33"/>
                           </a:solidFill>
                         </a:rPr>
-                        <a:t>26</a:t>
+                        <a:t>8</a:t>
                       </a:r>
                       <a:endParaRPr lang="en-US" sz="1050" dirty="0"/>
                     </a:p>
@@ -15628,7 +12298,7 @@
                             <a:srgbClr val="0B2A3D"/>
                           </a:solidFill>
                         </a:rPr>
-                        <a:t>US$ 34,8 mi</a:t>
+                        <a:t>US$ 26,0 mi</a:t>
                       </a:r>
                       <a:endParaRPr lang="en-US" sz="1050" dirty="0"/>
                     </a:p>
@@ -15689,7 +12359,7 @@
                             <a:srgbClr val="0B2A3D"/>
                           </a:solidFill>
                         </a:rPr>
-                        <a:t>706</a:t>
+                        <a:t>318</a:t>
                       </a:r>
                       <a:endParaRPr lang="en-US" sz="1050" dirty="0"/>
                     </a:p>
@@ -15750,7 +12420,7 @@
                             <a:srgbClr val="0B2A3D"/>
                           </a:solidFill>
                         </a:rPr>
-                        <a:t>120</a:t>
+                        <a:t>48</a:t>
                       </a:r>
                       <a:endParaRPr lang="en-US" sz="1050" dirty="0"/>
                     </a:p>
@@ -15835,7 +12505,7 @@
                 <a:ea typeface="Calibri" pitchFamily="34" charset="-122"/>
                 <a:cs typeface="Calibri" pitchFamily="34" charset="-120"/>
               </a:rPr>
-              <a:t>Metodologia: base 'Geral - Em análise' (aba do arquivo Plano Integrado), somando itens com status 'Contar' e 'TA' (exclui 'Não Contar'). O custo da categoria Desenvolvimento de Produção é desconsiderado no somatório total.</a:t>
+              <a:t>Metodologia: base 'Geral - Em análise' (aba do arquivo Plano Integrado), somando itens com status 'Contar'. Não inclui itens de Parada Programada (status 'TA') nem o custo da categoria Desenvolvimento de Produção.</a:t>
             </a:r>
             <a:endParaRPr lang="en-US" sz="850" dirty="0"/>
           </a:p>
@@ -16261,7 +12931,7 @@
                 <a:ea typeface="Calibri" pitchFamily="34" charset="-122"/>
                 <a:cs typeface="Calibri" pitchFamily="34" charset="-120"/>
               </a:rPr>
-              <a:t>Ano 2027 · Base: aba 'Geral - Em análise' · status 'Contar' + 'TA'</a:t>
+              <a:t>Ano 2027 · Base: aba 'Geral - Em análise' · status 'Contar'</a:t>
             </a:r>
             <a:endParaRPr lang="en-US" sz="1250" dirty="0"/>
           </a:p>
@@ -16322,7 +12992,7 @@
                 <a:ea typeface="Cambria" pitchFamily="34" charset="-122"/>
                 <a:cs typeface="Cambria" pitchFamily="34" charset="-120"/>
               </a:rPr>
-              <a:t>US$ 18,1 mi</a:t>
+              <a:t>US$ 14,8 mi</a:t>
             </a:r>
             <a:endParaRPr lang="en-US" sz="3300" dirty="0"/>
           </a:p>
@@ -16400,7 +13070,7 @@
                 <a:ea typeface="Calibri" pitchFamily="34" charset="-122"/>
                 <a:cs typeface="Calibri" pitchFamily="34" charset="-120"/>
               </a:rPr>
-              <a:t>excl. Desenvolvimento de Produção</a:t>
+              <a:t>excl. Desenvolvimento de Produção e Parada Programada (TA)</a:t>
             </a:r>
             <a:endParaRPr lang="en-US" sz="900" dirty="0"/>
           </a:p>
@@ -16415,11 +13085,11 @@
         <p:spPr>
           <a:xfrm>
             <a:off x="4434840" y="1143000"/>
-            <a:ext cx="3566160" cy="731520"/>
+            <a:ext cx="3543300" cy="1600200"/>
           </a:xfrm>
           <a:prstGeom prst="roundRect">
             <a:avLst>
-              <a:gd name="adj" fmla="val 10000"/>
+              <a:gd name="adj" fmla="val 5714"/>
             </a:avLst>
           </a:prstGeom>
           <a:solidFill>
@@ -16436,8 +13106,8 @@
         </p:nvSpPr>
         <p:spPr>
           <a:xfrm>
-            <a:off x="4581144" y="1234440"/>
-            <a:ext cx="3273552" cy="384048"/>
+            <a:off x="4636008" y="1600200"/>
+            <a:ext cx="3140964" cy="548640"/>
           </a:xfrm>
           <a:prstGeom prst="rect">
             <a:avLst/>
@@ -16453,7 +13123,7 @@
               <a:buNone/>
             </a:pPr>
             <a:r>
-              <a:rPr lang="en-US" sz="1800" b="1" dirty="0">
+              <a:rPr lang="en-US" sz="2600" b="1" dirty="0">
                 <a:solidFill>
                   <a:srgbClr val="0B2A3D"/>
                 </a:solidFill>
@@ -16461,9 +13131,9 @@
                 <a:ea typeface="Cambria" pitchFamily="34" charset="-122"/>
                 <a:cs typeface="Cambria" pitchFamily="34" charset="-120"/>
               </a:rPr>
-              <a:t>US$ 14,8 mi</a:t>
+              <a:t>US$ 5,1 mi</a:t>
             </a:r>
-            <a:endParaRPr lang="en-US" sz="1800" dirty="0"/>
+            <a:endParaRPr lang="en-US" sz="2600" dirty="0"/>
           </a:p>
         </p:txBody>
       </p:sp>
@@ -16475,8 +13145,8 @@
         </p:nvSpPr>
         <p:spPr>
           <a:xfrm>
-            <a:off x="4581144" y="1600200"/>
-            <a:ext cx="3273552" cy="237744"/>
+            <a:off x="4636008" y="2167128"/>
+            <a:ext cx="3140964" cy="274320"/>
           </a:xfrm>
           <a:prstGeom prst="rect">
             <a:avLst/>
@@ -16492,7 +13162,7 @@
               <a:buNone/>
             </a:pPr>
             <a:r>
-              <a:rPr lang="en-US" sz="800" b="1" spc="50" kern="0" dirty="0">
+              <a:rPr lang="en-US" sz="1000" b="1" spc="100" kern="0" dirty="0">
                 <a:solidFill>
                   <a:srgbClr val="145C68"/>
                 </a:solidFill>
@@ -16500,9 +13170,9 @@
                 <a:ea typeface="Calibri" pitchFamily="34" charset="-122"/>
                 <a:cs typeface="Calibri" pitchFamily="34" charset="-120"/>
               </a:rPr>
-              <a:t>CUSTO TOTAL SEM TA</a:t>
+              <a:t>SERVIÇO</a:t>
             </a:r>
-            <a:endParaRPr lang="en-US" sz="800" dirty="0"/>
+            <a:endParaRPr lang="en-US" sz="1000" dirty="0"/>
           </a:p>
         </p:txBody>
       </p:sp>
@@ -16514,12 +13184,12 @@
         </p:nvSpPr>
         <p:spPr>
           <a:xfrm>
-            <a:off x="8138160" y="1143000"/>
-            <a:ext cx="3566160" cy="731520"/>
+            <a:off x="8161020" y="1143000"/>
+            <a:ext cx="3543300" cy="1600200"/>
           </a:xfrm>
           <a:prstGeom prst="roundRect">
             <a:avLst>
-              <a:gd name="adj" fmla="val 10000"/>
+              <a:gd name="adj" fmla="val 5714"/>
             </a:avLst>
           </a:prstGeom>
           <a:solidFill>
@@ -16536,8 +13206,8 @@
         </p:nvSpPr>
         <p:spPr>
           <a:xfrm>
-            <a:off x="8284464" y="1234440"/>
-            <a:ext cx="3273552" cy="384048"/>
+            <a:off x="8362188" y="1600200"/>
+            <a:ext cx="3140964" cy="548640"/>
           </a:xfrm>
           <a:prstGeom prst="rect">
             <a:avLst/>
@@ -16553,7 +13223,7 @@
               <a:buNone/>
             </a:pPr>
             <a:r>
-              <a:rPr lang="en-US" sz="1800" b="1" dirty="0">
+              <a:rPr lang="en-US" sz="2600" b="1" dirty="0">
                 <a:solidFill>
                   <a:srgbClr val="0B2A3D"/>
                 </a:solidFill>
@@ -16561,9 +13231,9 @@
                 <a:ea typeface="Cambria" pitchFamily="34" charset="-122"/>
                 <a:cs typeface="Cambria" pitchFamily="34" charset="-120"/>
               </a:rPr>
-              <a:t>US$ 3,3 mi</a:t>
+              <a:t>US$ 9,7 mi</a:t>
             </a:r>
-            <a:endParaRPr lang="en-US" sz="1800" dirty="0"/>
+            <a:endParaRPr lang="en-US" sz="2600" dirty="0"/>
           </a:p>
         </p:txBody>
       </p:sp>
@@ -16575,8 +13245,8 @@
         </p:nvSpPr>
         <p:spPr>
           <a:xfrm>
-            <a:off x="8284464" y="1600200"/>
-            <a:ext cx="3273552" cy="237744"/>
+            <a:off x="8362188" y="2167128"/>
+            <a:ext cx="3140964" cy="274320"/>
           </a:xfrm>
           <a:prstGeom prst="rect">
             <a:avLst/>
@@ -16592,207 +13262,7 @@
               <a:buNone/>
             </a:pPr>
             <a:r>
-              <a:rPr lang="en-US" sz="800" b="1" spc="50" kern="0" dirty="0">
-                <a:solidFill>
-                  <a:srgbClr val="145C68"/>
-                </a:solidFill>
-                <a:latin typeface="Calibri" pitchFamily="34" charset="0"/>
-                <a:ea typeface="Calibri" pitchFamily="34" charset="-122"/>
-                <a:cs typeface="Calibri" pitchFamily="34" charset="-120"/>
-              </a:rPr>
-              <a:t>CUSTO TA (PARADA PROGRAMADA)</a:t>
-            </a:r>
-            <a:endParaRPr lang="en-US" sz="800" dirty="0"/>
-          </a:p>
-        </p:txBody>
-      </p:sp>
-      <p:sp>
-        <p:nvSpPr>
-          <p:cNvPr id="16" name="Shape 14"/>
-          <p:cNvSpPr/>
-          <p:nvPr/>
-        </p:nvSpPr>
-        <p:spPr>
-          <a:xfrm>
-            <a:off x="4434840" y="2011680"/>
-            <a:ext cx="3566160" cy="731520"/>
-          </a:xfrm>
-          <a:prstGeom prst="roundRect">
-            <a:avLst>
-              <a:gd name="adj" fmla="val 10000"/>
-            </a:avLst>
-          </a:prstGeom>
-          <a:solidFill>
-            <a:srgbClr val="F0F4F5"/>
-          </a:solidFill>
-          <a:ln/>
-        </p:spPr>
-      </p:sp>
-      <p:sp>
-        <p:nvSpPr>
-          <p:cNvPr id="17" name="Text 15"/>
-          <p:cNvSpPr txBox="1"/>
-          <p:nvPr/>
-        </p:nvSpPr>
-        <p:spPr>
-          <a:xfrm>
-            <a:off x="4581144" y="2103120"/>
-            <a:ext cx="3273552" cy="384048"/>
-          </a:xfrm>
-          <a:prstGeom prst="rect">
-            <a:avLst/>
-          </a:prstGeom>
-          <a:noFill/>
-          <a:ln/>
-        </p:spPr>
-        <p:txBody>
-          <a:bodyPr wrap="square" lIns="0" tIns="0" rIns="0" bIns="0" rtlCol="0" anchor="ctr"/>
-          <a:lstStyle/>
-          <a:p>
-            <a:pPr indent="0" marL="0">
-              <a:buNone/>
-            </a:pPr>
-            <a:r>
-              <a:rPr lang="en-US" sz="1800" b="1" dirty="0">
-                <a:solidFill>
-                  <a:srgbClr val="0B2A3D"/>
-                </a:solidFill>
-                <a:latin typeface="Cambria" pitchFamily="34" charset="0"/>
-                <a:ea typeface="Cambria" pitchFamily="34" charset="-122"/>
-                <a:cs typeface="Cambria" pitchFamily="34" charset="-120"/>
-              </a:rPr>
-              <a:t>US$ 6,2 mi</a:t>
-            </a:r>
-            <a:endParaRPr lang="en-US" sz="1800" dirty="0"/>
-          </a:p>
-        </p:txBody>
-      </p:sp>
-      <p:sp>
-        <p:nvSpPr>
-          <p:cNvPr id="18" name="Text 16"/>
-          <p:cNvSpPr txBox="1"/>
-          <p:nvPr/>
-        </p:nvSpPr>
-        <p:spPr>
-          <a:xfrm>
-            <a:off x="4581144" y="2468880"/>
-            <a:ext cx="3273552" cy="237744"/>
-          </a:xfrm>
-          <a:prstGeom prst="rect">
-            <a:avLst/>
-          </a:prstGeom>
-          <a:noFill/>
-          <a:ln/>
-        </p:spPr>
-        <p:txBody>
-          <a:bodyPr wrap="square" lIns="0" tIns="0" rIns="0" bIns="0" rtlCol="0" anchor="ctr"/>
-          <a:lstStyle/>
-          <a:p>
-            <a:pPr indent="0" marL="0">
-              <a:buNone/>
-            </a:pPr>
-            <a:r>
-              <a:rPr lang="en-US" sz="800" b="1" spc="50" kern="0" dirty="0">
-                <a:solidFill>
-                  <a:srgbClr val="145C68"/>
-                </a:solidFill>
-                <a:latin typeface="Calibri" pitchFamily="34" charset="0"/>
-                <a:ea typeface="Calibri" pitchFamily="34" charset="-122"/>
-                <a:cs typeface="Calibri" pitchFamily="34" charset="-120"/>
-              </a:rPr>
-              <a:t>SERVIÇO</a:t>
-            </a:r>
-            <a:endParaRPr lang="en-US" sz="800" dirty="0"/>
-          </a:p>
-        </p:txBody>
-      </p:sp>
-      <p:sp>
-        <p:nvSpPr>
-          <p:cNvPr id="19" name="Shape 17"/>
-          <p:cNvSpPr/>
-          <p:nvPr/>
-        </p:nvSpPr>
-        <p:spPr>
-          <a:xfrm>
-            <a:off x="8138160" y="2011680"/>
-            <a:ext cx="3566160" cy="731520"/>
-          </a:xfrm>
-          <a:prstGeom prst="roundRect">
-            <a:avLst>
-              <a:gd name="adj" fmla="val 10000"/>
-            </a:avLst>
-          </a:prstGeom>
-          <a:solidFill>
-            <a:srgbClr val="F0F4F5"/>
-          </a:solidFill>
-          <a:ln/>
-        </p:spPr>
-      </p:sp>
-      <p:sp>
-        <p:nvSpPr>
-          <p:cNvPr id="20" name="Text 18"/>
-          <p:cNvSpPr txBox="1"/>
-          <p:nvPr/>
-        </p:nvSpPr>
-        <p:spPr>
-          <a:xfrm>
-            <a:off x="8284464" y="2103120"/>
-            <a:ext cx="3273552" cy="384048"/>
-          </a:xfrm>
-          <a:prstGeom prst="rect">
-            <a:avLst/>
-          </a:prstGeom>
-          <a:noFill/>
-          <a:ln/>
-        </p:spPr>
-        <p:txBody>
-          <a:bodyPr wrap="square" lIns="0" tIns="0" rIns="0" bIns="0" rtlCol="0" anchor="ctr"/>
-          <a:lstStyle/>
-          <a:p>
-            <a:pPr indent="0" marL="0">
-              <a:buNone/>
-            </a:pPr>
-            <a:r>
-              <a:rPr lang="en-US" sz="1800" b="1" dirty="0">
-                <a:solidFill>
-                  <a:srgbClr val="0B2A3D"/>
-                </a:solidFill>
-                <a:latin typeface="Cambria" pitchFamily="34" charset="0"/>
-                <a:ea typeface="Cambria" pitchFamily="34" charset="-122"/>
-                <a:cs typeface="Cambria" pitchFamily="34" charset="-120"/>
-              </a:rPr>
-              <a:t>US$ 9,8 mi</a:t>
-            </a:r>
-            <a:endParaRPr lang="en-US" sz="1800" dirty="0"/>
-          </a:p>
-        </p:txBody>
-      </p:sp>
-      <p:sp>
-        <p:nvSpPr>
-          <p:cNvPr id="21" name="Text 19"/>
-          <p:cNvSpPr txBox="1"/>
-          <p:nvPr/>
-        </p:nvSpPr>
-        <p:spPr>
-          <a:xfrm>
-            <a:off x="8284464" y="2468880"/>
-            <a:ext cx="3273552" cy="237744"/>
-          </a:xfrm>
-          <a:prstGeom prst="rect">
-            <a:avLst/>
-          </a:prstGeom>
-          <a:noFill/>
-          <a:ln/>
-        </p:spPr>
-        <p:txBody>
-          <a:bodyPr wrap="square" lIns="0" tIns="0" rIns="0" bIns="0" rtlCol="0" anchor="ctr"/>
-          <a:lstStyle/>
-          <a:p>
-            <a:pPr indent="0" marL="0">
-              <a:buNone/>
-            </a:pPr>
-            <a:r>
-              <a:rPr lang="en-US" sz="800" b="1" spc="50" kern="0" dirty="0">
+              <a:rPr lang="en-US" sz="1000" b="1" spc="100" kern="0" dirty="0">
                 <a:solidFill>
                   <a:srgbClr val="145C68"/>
                 </a:solidFill>
@@ -16802,13 +13272,13 @@
               </a:rPr>
               <a:t>MATERIAL</a:t>
             </a:r>
-            <a:endParaRPr lang="en-US" sz="800" dirty="0"/>
+            <a:endParaRPr lang="en-US" sz="1000" dirty="0"/>
           </a:p>
         </p:txBody>
       </p:sp>
       <p:sp>
         <p:nvSpPr>
-          <p:cNvPr id="22" name="Text 20"/>
+          <p:cNvPr id="16" name="Text 14"/>
           <p:cNvSpPr txBox="1"/>
           <p:nvPr/>
         </p:nvSpPr>
@@ -16847,7 +13317,7 @@
       </p:sp>
       <p:sp>
         <p:nvSpPr>
-          <p:cNvPr id="23" name="Shape 21"/>
+          <p:cNvPr id="17" name="Shape 15"/>
           <p:cNvSpPr/>
           <p:nvPr/>
         </p:nvSpPr>
@@ -16870,7 +13340,7 @@
       </p:sp>
       <p:sp>
         <p:nvSpPr>
-          <p:cNvPr id="24" name="Text 22"/>
+          <p:cNvPr id="18" name="Text 16"/>
           <p:cNvSpPr txBox="1"/>
           <p:nvPr/>
         </p:nvSpPr>
@@ -16909,7 +13379,7 @@
       </p:sp>
       <p:sp>
         <p:nvSpPr>
-          <p:cNvPr id="25" name="Text 23"/>
+          <p:cNvPr id="19" name="Text 17"/>
           <p:cNvSpPr txBox="1"/>
           <p:nvPr/>
         </p:nvSpPr>
@@ -16948,7 +13418,7 @@
       </p:sp>
       <p:sp>
         <p:nvSpPr>
-          <p:cNvPr id="26" name="Shape 24"/>
+          <p:cNvPr id="20" name="Shape 18"/>
           <p:cNvSpPr/>
           <p:nvPr/>
         </p:nvSpPr>
@@ -16968,7 +13438,7 @@
       </p:sp>
       <p:sp>
         <p:nvSpPr>
-          <p:cNvPr id="27" name="Text 25"/>
+          <p:cNvPr id="21" name="Text 19"/>
           <p:cNvSpPr txBox="1"/>
           <p:nvPr/>
         </p:nvSpPr>
@@ -17007,7 +13477,7 @@
       </p:sp>
       <p:sp>
         <p:nvSpPr>
-          <p:cNvPr id="28" name="Text 26"/>
+          <p:cNvPr id="22" name="Text 20"/>
           <p:cNvSpPr txBox="1"/>
           <p:nvPr/>
         </p:nvSpPr>
@@ -17046,7 +13516,7 @@
       </p:sp>
       <p:sp>
         <p:nvSpPr>
-          <p:cNvPr id="29" name="Text 27"/>
+          <p:cNvPr id="23" name="Text 21"/>
           <p:cNvSpPr txBox="1"/>
           <p:nvPr/>
         </p:nvSpPr>
@@ -17085,7 +13555,7 @@
       </p:sp>
       <p:sp>
         <p:nvSpPr>
-          <p:cNvPr id="30" name="Text 28"/>
+          <p:cNvPr id="24" name="Text 22"/>
           <p:cNvSpPr txBox="1"/>
           <p:nvPr/>
         </p:nvSpPr>
@@ -17124,7 +13594,7 @@
       </p:sp>
       <p:sp>
         <p:nvSpPr>
-          <p:cNvPr id="31" name="Shape 29"/>
+          <p:cNvPr id="25" name="Shape 23"/>
           <p:cNvSpPr/>
           <p:nvPr/>
         </p:nvSpPr>
@@ -17144,91 +13614,13 @@
       </p:sp>
       <p:sp>
         <p:nvSpPr>
-          <p:cNvPr id="32" name="Text 30"/>
+          <p:cNvPr id="26" name="Text 24"/>
           <p:cNvSpPr txBox="1"/>
           <p:nvPr/>
         </p:nvSpPr>
         <p:spPr>
           <a:xfrm>
             <a:off x="566928" y="4498848"/>
-            <a:ext cx="3316529" cy="365760"/>
-          </a:xfrm>
-          <a:prstGeom prst="rect">
-            <a:avLst/>
-          </a:prstGeom>
-          <a:noFill/>
-          <a:ln/>
-        </p:spPr>
-        <p:txBody>
-          <a:bodyPr wrap="square" lIns="0" tIns="0" rIns="0" bIns="0" rtlCol="0" anchor="ctr"/>
-          <a:lstStyle/>
-          <a:p>
-            <a:pPr indent="0" marL="0">
-              <a:buNone/>
-            </a:pPr>
-            <a:r>
-              <a:rPr lang="en-US" sz="1100" dirty="0">
-                <a:solidFill>
-                  <a:srgbClr val="1C2B33"/>
-                </a:solidFill>
-                <a:latin typeface="Calibri" pitchFamily="34" charset="0"/>
-                <a:ea typeface="Calibri" pitchFamily="34" charset="-122"/>
-                <a:cs typeface="Calibri" pitchFamily="34" charset="-120"/>
-              </a:rPr>
-              <a:t>TA - Parada Programada</a:t>
-            </a:r>
-            <a:endParaRPr lang="en-US" sz="1100" dirty="0"/>
-          </a:p>
-        </p:txBody>
-      </p:sp>
-      <p:sp>
-        <p:nvSpPr>
-          <p:cNvPr id="33" name="Text 31"/>
-          <p:cNvSpPr txBox="1"/>
-          <p:nvPr/>
-        </p:nvSpPr>
-        <p:spPr>
-          <a:xfrm>
-            <a:off x="3773729" y="4498848"/>
-            <a:ext cx="1815998" cy="365760"/>
-          </a:xfrm>
-          <a:prstGeom prst="rect">
-            <a:avLst/>
-          </a:prstGeom>
-          <a:noFill/>
-          <a:ln/>
-        </p:spPr>
-        <p:txBody>
-          <a:bodyPr wrap="square" lIns="0" tIns="0" rIns="0" bIns="0" rtlCol="0" anchor="ctr"/>
-          <a:lstStyle/>
-          <a:p>
-            <a:pPr algn="r" indent="0" marL="0">
-              <a:buNone/>
-            </a:pPr>
-            <a:r>
-              <a:rPr lang="en-US" sz="1100" b="1" dirty="0">
-                <a:solidFill>
-                  <a:srgbClr val="0B2A3D"/>
-                </a:solidFill>
-                <a:latin typeface="Calibri" pitchFamily="34" charset="0"/>
-                <a:ea typeface="Calibri" pitchFamily="34" charset="-122"/>
-                <a:cs typeface="Calibri" pitchFamily="34" charset="-120"/>
-              </a:rPr>
-              <a:t>US$ 3,3 mi</a:t>
-            </a:r>
-            <a:endParaRPr lang="en-US" sz="1100" dirty="0"/>
-          </a:p>
-        </p:txBody>
-      </p:sp>
-      <p:sp>
-        <p:nvSpPr>
-          <p:cNvPr id="34" name="Text 32"/>
-          <p:cNvSpPr txBox="1"/>
-          <p:nvPr/>
-        </p:nvSpPr>
-        <p:spPr>
-          <a:xfrm>
-            <a:off x="566928" y="4864608"/>
             <a:ext cx="3316529" cy="365760"/>
           </a:xfrm>
           <a:prstGeom prst="rect">
@@ -17261,13 +13653,13 @@
       </p:sp>
       <p:sp>
         <p:nvSpPr>
-          <p:cNvPr id="35" name="Text 33"/>
+          <p:cNvPr id="27" name="Text 25"/>
           <p:cNvSpPr txBox="1"/>
           <p:nvPr/>
         </p:nvSpPr>
         <p:spPr>
           <a:xfrm>
-            <a:off x="3773729" y="4864608"/>
+            <a:off x="3773729" y="4498848"/>
             <a:ext cx="1815998" cy="365760"/>
           </a:xfrm>
           <a:prstGeom prst="rect">
@@ -17300,33 +13692,13 @@
       </p:sp>
       <p:sp>
         <p:nvSpPr>
-          <p:cNvPr id="36" name="Shape 34"/>
-          <p:cNvSpPr/>
+          <p:cNvPr id="28" name="Text 26"/>
+          <p:cNvSpPr txBox="1"/>
           <p:nvPr/>
         </p:nvSpPr>
         <p:spPr>
           <a:xfrm>
-            <a:off x="457200" y="5230368"/>
-            <a:ext cx="5349240" cy="365760"/>
-          </a:xfrm>
-          <a:prstGeom prst="rect">
-            <a:avLst/>
-          </a:prstGeom>
-          <a:solidFill>
-            <a:srgbClr val="F0F4F5"/>
-          </a:solidFill>
-          <a:ln/>
-        </p:spPr>
-      </p:sp>
-      <p:sp>
-        <p:nvSpPr>
-          <p:cNvPr id="37" name="Text 35"/>
-          <p:cNvSpPr txBox="1"/>
-          <p:nvPr/>
-        </p:nvSpPr>
-        <p:spPr>
-          <a:xfrm>
-            <a:off x="566928" y="5230368"/>
+            <a:off x="566928" y="4864608"/>
             <a:ext cx="3316529" cy="365760"/>
           </a:xfrm>
           <a:prstGeom prst="rect">
@@ -17359,13 +13731,13 @@
       </p:sp>
       <p:sp>
         <p:nvSpPr>
-          <p:cNvPr id="38" name="Text 36"/>
+          <p:cNvPr id="29" name="Text 27"/>
           <p:cNvSpPr txBox="1"/>
           <p:nvPr/>
         </p:nvSpPr>
         <p:spPr>
           <a:xfrm>
-            <a:off x="3773729" y="5230368"/>
+            <a:off x="3773729" y="4864608"/>
             <a:ext cx="1815998" cy="365760"/>
           </a:xfrm>
           <a:prstGeom prst="rect">
@@ -17398,13 +13770,33 @@
       </p:sp>
       <p:sp>
         <p:nvSpPr>
-          <p:cNvPr id="39" name="Text 37"/>
+          <p:cNvPr id="30" name="Shape 28"/>
+          <p:cNvSpPr/>
+          <p:nvPr/>
+        </p:nvSpPr>
+        <p:spPr>
+          <a:xfrm>
+            <a:off x="457200" y="5230368"/>
+            <a:ext cx="5349240" cy="365760"/>
+          </a:xfrm>
+          <a:prstGeom prst="rect">
+            <a:avLst/>
+          </a:prstGeom>
+          <a:solidFill>
+            <a:srgbClr val="F0F4F5"/>
+          </a:solidFill>
+          <a:ln/>
+        </p:spPr>
+      </p:sp>
+      <p:sp>
+        <p:nvSpPr>
+          <p:cNvPr id="31" name="Text 29"/>
           <p:cNvSpPr txBox="1"/>
           <p:nvPr/>
         </p:nvSpPr>
         <p:spPr>
           <a:xfrm>
-            <a:off x="566928" y="5596128"/>
+            <a:off x="566928" y="5230368"/>
             <a:ext cx="3316529" cy="365760"/>
           </a:xfrm>
           <a:prstGeom prst="rect">
@@ -17437,13 +13829,13 @@
       </p:sp>
       <p:sp>
         <p:nvSpPr>
-          <p:cNvPr id="40" name="Text 38"/>
+          <p:cNvPr id="32" name="Text 30"/>
           <p:cNvSpPr txBox="1"/>
           <p:nvPr/>
         </p:nvSpPr>
         <p:spPr>
           <a:xfrm>
-            <a:off x="3773729" y="5596128"/>
+            <a:off x="3773729" y="5230368"/>
             <a:ext cx="1815998" cy="365760"/>
           </a:xfrm>
           <a:prstGeom prst="rect">
@@ -17476,7 +13868,7 @@
       </p:sp>
       <p:sp>
         <p:nvSpPr>
-          <p:cNvPr id="41" name="Text 39"/>
+          <p:cNvPr id="33" name="Text 31"/>
           <p:cNvSpPr txBox="1"/>
           <p:nvPr/>
         </p:nvSpPr>
@@ -17515,7 +13907,7 @@
       </p:sp>
       <p:sp>
         <p:nvSpPr>
-          <p:cNvPr id="42" name="Shape 40"/>
+          <p:cNvPr id="34" name="Shape 32"/>
           <p:cNvSpPr/>
           <p:nvPr/>
         </p:nvSpPr>
@@ -17538,7 +13930,7 @@
       </p:sp>
       <p:sp>
         <p:nvSpPr>
-          <p:cNvPr id="43" name="Text 41"/>
+          <p:cNvPr id="35" name="Text 33"/>
           <p:cNvSpPr txBox="1"/>
           <p:nvPr/>
         </p:nvSpPr>
@@ -17577,7 +13969,7 @@
       </p:sp>
       <p:sp>
         <p:nvSpPr>
-          <p:cNvPr id="44" name="Text 42"/>
+          <p:cNvPr id="36" name="Text 34"/>
           <p:cNvSpPr txBox="1"/>
           <p:nvPr/>
         </p:nvSpPr>
@@ -17608,7 +14000,7 @@
                 <a:ea typeface="Calibri" pitchFamily="34" charset="-122"/>
                 <a:cs typeface="Calibri" pitchFamily="34" charset="-120"/>
               </a:rPr>
-              <a:t>US$ 7,0 mi</a:t>
+              <a:t>US$ 5,9 mi</a:t>
             </a:r>
             <a:endParaRPr lang="en-US" sz="1100" dirty="0"/>
           </a:p>
@@ -17616,7 +14008,7 @@
       </p:sp>
       <p:sp>
         <p:nvSpPr>
-          <p:cNvPr id="45" name="Shape 43"/>
+          <p:cNvPr id="37" name="Shape 35"/>
           <p:cNvSpPr/>
           <p:nvPr/>
         </p:nvSpPr>
@@ -17636,7 +14028,7 @@
       </p:sp>
       <p:sp>
         <p:nvSpPr>
-          <p:cNvPr id="46" name="Text 44"/>
+          <p:cNvPr id="38" name="Text 36"/>
           <p:cNvSpPr txBox="1"/>
           <p:nvPr/>
         </p:nvSpPr>
@@ -17675,7 +14067,7 @@
       </p:sp>
       <p:sp>
         <p:nvSpPr>
-          <p:cNvPr id="47" name="Text 45"/>
+          <p:cNvPr id="39" name="Text 37"/>
           <p:cNvSpPr txBox="1"/>
           <p:nvPr/>
         </p:nvSpPr>
@@ -17714,7 +14106,7 @@
       </p:sp>
       <p:sp>
         <p:nvSpPr>
-          <p:cNvPr id="48" name="Text 46"/>
+          <p:cNvPr id="40" name="Text 38"/>
           <p:cNvSpPr txBox="1"/>
           <p:nvPr/>
         </p:nvSpPr>
@@ -17753,7 +14145,7 @@
       </p:sp>
       <p:sp>
         <p:nvSpPr>
-          <p:cNvPr id="49" name="Text 47"/>
+          <p:cNvPr id="41" name="Text 39"/>
           <p:cNvSpPr txBox="1"/>
           <p:nvPr/>
         </p:nvSpPr>
@@ -17792,7 +14184,7 @@
       </p:sp>
       <p:sp>
         <p:nvSpPr>
-          <p:cNvPr id="50" name="Shape 48"/>
+          <p:cNvPr id="42" name="Shape 40"/>
           <p:cNvSpPr/>
           <p:nvPr/>
         </p:nvSpPr>
@@ -17812,7 +14204,7 @@
       </p:sp>
       <p:sp>
         <p:nvSpPr>
-          <p:cNvPr id="51" name="Text 49"/>
+          <p:cNvPr id="43" name="Text 41"/>
           <p:cNvSpPr txBox="1"/>
           <p:nvPr/>
         </p:nvSpPr>
@@ -17851,7 +14243,7 @@
       </p:sp>
       <p:sp>
         <p:nvSpPr>
-          <p:cNvPr id="52" name="Text 50"/>
+          <p:cNvPr id="44" name="Text 42"/>
           <p:cNvSpPr txBox="1"/>
           <p:nvPr/>
         </p:nvSpPr>
@@ -17890,7 +14282,7 @@
       </p:sp>
       <p:sp>
         <p:nvSpPr>
-          <p:cNvPr id="53" name="Text 51"/>
+          <p:cNvPr id="45" name="Text 43"/>
           <p:cNvSpPr txBox="1"/>
           <p:nvPr/>
         </p:nvSpPr>
@@ -17921,7 +14313,7 @@
                 <a:ea typeface="Calibri" pitchFamily="34" charset="-122"/>
                 <a:cs typeface="Calibri" pitchFamily="34" charset="-120"/>
               </a:rPr>
-              <a:t>Metodologia: soma de Custo de Serviço + Custo de Material (Jan–Dez), para itens de Cost Allocation = CAPEX com status 'Contar' (Custo Total sem TA) e 'TA' (Custo TA, valor de Parada Programada informado pela área). O total desconsidera a categoria Desenvolvimento de Produção (US$ 0, mantida na lista de Categoria apenas para referência).</a:t>
+              <a:t>Metodologia: soma de Custo de Serviço + Custo de Material (Jan–Dez), para itens de Cost Allocation = CAPEX com status 'Contar'. Não inclui itens de Parada Programada (status 'TA') nem a categoria Desenvolvimento de Produção (US$ 0, mantida na lista de Categoria apenas para referência).</a:t>
             </a:r>
             <a:endParaRPr lang="en-US" sz="850" dirty="0"/>
           </a:p>
@@ -18083,7 +14475,7 @@
                 <a:ea typeface="Calibri" pitchFamily="34" charset="-122"/>
                 <a:cs typeface="Calibri" pitchFamily="34" charset="-120"/>
               </a:rPr>
-              <a:t>Principais escopos por valor · 41 itens no total</a:t>
+              <a:t>Principais escopos por valor · 23 itens no total</a:t>
             </a:r>
             <a:endParaRPr lang="en-US" sz="1250" dirty="0"/>
           </a:p>
@@ -21697,7 +18089,7 @@
                           <a:ea typeface="Calibri" pitchFamily="34" charset="-122"/>
                           <a:cs typeface="Calibri" pitchFamily="34" charset="-120"/>
                         </a:rPr>
-                        <a:t>Outros 29 escopos (itens de menor valor individual)</a:t>
+                        <a:t>Outros 11 escopos (itens de menor valor individual)</a:t>
                       </a:r>
                       <a:endParaRPr lang="en-US" sz="950" dirty="0">
                         <a:latin typeface="Calibri" charset="0"/>
@@ -21771,7 +18163,7 @@
                           <a:ea typeface="Calibri" pitchFamily="34" charset="-122"/>
                           <a:cs typeface="Calibri" pitchFamily="34" charset="-120"/>
                         </a:rPr>
-                        <a:t>US$ 3,1 mi</a:t>
+                        <a:t>US$ 1,9 mi</a:t>
                       </a:r>
                       <a:endParaRPr lang="en-US" sz="1000" dirty="0">
                         <a:latin typeface="Calibri" charset="0"/>
@@ -21860,7 +18252,7 @@
                 <a:ea typeface="Calibri" pitchFamily="34" charset="-122"/>
                 <a:cs typeface="Calibri" pitchFamily="34" charset="-120"/>
               </a:rPr>
-              <a:t>Fonte: Plano Integrado · aba 'Geral - Em análise' · coluna 'Valor Total' · itens de Cost Allocation = CAPEX, status 'Contar' + 'TA'. Lista completa disponível na planilha em anexo. Extrato pendente de atualização — pode não somar exatamente ao total da Composição de Custo (o valor de TA foi atualizado manualmente).</a:t>
+              <a:t>Fonte: Plano Integrado · aba 'Geral - Em análise' · coluna 'Valor Total' · itens de Cost Allocation = CAPEX, status 'Contar' (não inclui Parada Programada, status 'TA'). Lista completa disponível na planilha em anexo.</a:t>
             </a:r>
             <a:endParaRPr lang="en-US" sz="850" dirty="0"/>
           </a:p>
@@ -22286,7 +18678,7 @@
                 <a:ea typeface="Calibri" pitchFamily="34" charset="-122"/>
                 <a:cs typeface="Calibri" pitchFamily="34" charset="-120"/>
               </a:rPr>
-              <a:t>Ano 2027 · Base: aba 'Geral - Em análise' · status 'Contar' + 'TA'</a:t>
+              <a:t>Ano 2027 · Base: aba 'Geral - Em análise' · status 'Contar'</a:t>
             </a:r>
             <a:endParaRPr lang="en-US" sz="1250" dirty="0"/>
           </a:p>
@@ -22347,7 +18739,7 @@
                 <a:ea typeface="Cambria" pitchFamily="34" charset="-122"/>
                 <a:cs typeface="Cambria" pitchFamily="34" charset="-120"/>
               </a:rPr>
-              <a:t>US$ 8,8 mi</a:t>
+              <a:t>US$ 6,3 mi</a:t>
             </a:r>
             <a:endParaRPr lang="en-US" sz="3300" dirty="0"/>
           </a:p>
@@ -22425,7 +18817,7 @@
                 <a:ea typeface="Calibri" pitchFamily="34" charset="-122"/>
                 <a:cs typeface="Calibri" pitchFamily="34" charset="-120"/>
               </a:rPr>
-              <a:t>excl. Desenvolvimento de Produção</a:t>
+              <a:t>excl. Desenvolvimento de Produção e Parada Programada (TA)</a:t>
             </a:r>
             <a:endParaRPr lang="en-US" sz="900" dirty="0"/>
           </a:p>
@@ -22440,11 +18832,11 @@
         <p:spPr>
           <a:xfrm>
             <a:off x="4434840" y="1143000"/>
-            <a:ext cx="3566160" cy="731520"/>
+            <a:ext cx="3543300" cy="1600200"/>
           </a:xfrm>
           <a:prstGeom prst="roundRect">
             <a:avLst>
-              <a:gd name="adj" fmla="val 10000"/>
+              <a:gd name="adj" fmla="val 5714"/>
             </a:avLst>
           </a:prstGeom>
           <a:solidFill>
@@ -22461,8 +18853,8 @@
         </p:nvSpPr>
         <p:spPr>
           <a:xfrm>
-            <a:off x="4581144" y="1234440"/>
-            <a:ext cx="3273552" cy="384048"/>
+            <a:off x="4636008" y="1600200"/>
+            <a:ext cx="3140964" cy="548640"/>
           </a:xfrm>
           <a:prstGeom prst="rect">
             <a:avLst/>
@@ -22478,7 +18870,7 @@
               <a:buNone/>
             </a:pPr>
             <a:r>
-              <a:rPr lang="en-US" sz="1800" b="1" dirty="0">
+              <a:rPr lang="en-US" sz="2600" b="1" dirty="0">
                 <a:solidFill>
                   <a:srgbClr val="0B2A3D"/>
                 </a:solidFill>
@@ -22486,9 +18878,9 @@
                 <a:ea typeface="Cambria" pitchFamily="34" charset="-122"/>
                 <a:cs typeface="Cambria" pitchFamily="34" charset="-120"/>
               </a:rPr>
-              <a:t>US$ 6,3 mi</a:t>
+              <a:t>US$ 5,1 mi</a:t>
             </a:r>
-            <a:endParaRPr lang="en-US" sz="1800" dirty="0"/>
+            <a:endParaRPr lang="en-US" sz="2600" dirty="0"/>
           </a:p>
         </p:txBody>
       </p:sp>
@@ -22500,8 +18892,8 @@
         </p:nvSpPr>
         <p:spPr>
           <a:xfrm>
-            <a:off x="4581144" y="1600200"/>
-            <a:ext cx="3273552" cy="237744"/>
+            <a:off x="4636008" y="2167128"/>
+            <a:ext cx="3140964" cy="274320"/>
           </a:xfrm>
           <a:prstGeom prst="rect">
             <a:avLst/>
@@ -22517,7 +18909,7 @@
               <a:buNone/>
             </a:pPr>
             <a:r>
-              <a:rPr lang="en-US" sz="800" b="1" spc="50" kern="0" dirty="0">
+              <a:rPr lang="en-US" sz="1000" b="1" spc="100" kern="0" dirty="0">
                 <a:solidFill>
                   <a:srgbClr val="145C68"/>
                 </a:solidFill>
@@ -22525,9 +18917,9 @@
                 <a:ea typeface="Calibri" pitchFamily="34" charset="-122"/>
                 <a:cs typeface="Calibri" pitchFamily="34" charset="-120"/>
               </a:rPr>
-              <a:t>CUSTO TOTAL SEM TA</a:t>
+              <a:t>SERVIÇO</a:t>
             </a:r>
-            <a:endParaRPr lang="en-US" sz="800" dirty="0"/>
+            <a:endParaRPr lang="en-US" sz="1000" dirty="0"/>
           </a:p>
         </p:txBody>
       </p:sp>
@@ -22539,12 +18931,12 @@
         </p:nvSpPr>
         <p:spPr>
           <a:xfrm>
-            <a:off x="8138160" y="1143000"/>
-            <a:ext cx="3566160" cy="731520"/>
+            <a:off x="8161020" y="1143000"/>
+            <a:ext cx="3543300" cy="1600200"/>
           </a:xfrm>
           <a:prstGeom prst="roundRect">
             <a:avLst>
-              <a:gd name="adj" fmla="val 10000"/>
+              <a:gd name="adj" fmla="val 5714"/>
             </a:avLst>
           </a:prstGeom>
           <a:solidFill>
@@ -22561,8 +18953,8 @@
         </p:nvSpPr>
         <p:spPr>
           <a:xfrm>
-            <a:off x="8284464" y="1234440"/>
-            <a:ext cx="3273552" cy="384048"/>
+            <a:off x="8362188" y="1600200"/>
+            <a:ext cx="3140964" cy="548640"/>
           </a:xfrm>
           <a:prstGeom prst="rect">
             <a:avLst/>
@@ -22578,7 +18970,7 @@
               <a:buNone/>
             </a:pPr>
             <a:r>
-              <a:rPr lang="en-US" sz="1800" b="1" dirty="0">
+              <a:rPr lang="en-US" sz="2600" b="1" dirty="0">
                 <a:solidFill>
                   <a:srgbClr val="0B2A3D"/>
                 </a:solidFill>
@@ -22586,9 +18978,9 @@
                 <a:ea typeface="Cambria" pitchFamily="34" charset="-122"/>
                 <a:cs typeface="Cambria" pitchFamily="34" charset="-120"/>
               </a:rPr>
-              <a:t>US$ 2,5 mi</a:t>
+              <a:t>US$ 1,2 mi</a:t>
             </a:r>
-            <a:endParaRPr lang="en-US" sz="1800" dirty="0"/>
+            <a:endParaRPr lang="en-US" sz="2600" dirty="0"/>
           </a:p>
         </p:txBody>
       </p:sp>
@@ -22600,8 +18992,8 @@
         </p:nvSpPr>
         <p:spPr>
           <a:xfrm>
-            <a:off x="8284464" y="1600200"/>
-            <a:ext cx="3273552" cy="237744"/>
+            <a:off x="8362188" y="2167128"/>
+            <a:ext cx="3140964" cy="274320"/>
           </a:xfrm>
           <a:prstGeom prst="rect">
             <a:avLst/>
@@ -22617,207 +19009,7 @@
               <a:buNone/>
             </a:pPr>
             <a:r>
-              <a:rPr lang="en-US" sz="800" b="1" spc="50" kern="0" dirty="0">
-                <a:solidFill>
-                  <a:srgbClr val="145C68"/>
-                </a:solidFill>
-                <a:latin typeface="Calibri" pitchFamily="34" charset="0"/>
-                <a:ea typeface="Calibri" pitchFamily="34" charset="-122"/>
-                <a:cs typeface="Calibri" pitchFamily="34" charset="-120"/>
-              </a:rPr>
-              <a:t>CUSTO TA (PARADA PROGRAMADA)</a:t>
-            </a:r>
-            <a:endParaRPr lang="en-US" sz="800" dirty="0"/>
-          </a:p>
-        </p:txBody>
-      </p:sp>
-      <p:sp>
-        <p:nvSpPr>
-          <p:cNvPr id="16" name="Shape 14"/>
-          <p:cNvSpPr/>
-          <p:nvPr/>
-        </p:nvSpPr>
-        <p:spPr>
-          <a:xfrm>
-            <a:off x="4434840" y="2011680"/>
-            <a:ext cx="3566160" cy="731520"/>
-          </a:xfrm>
-          <a:prstGeom prst="roundRect">
-            <a:avLst>
-              <a:gd name="adj" fmla="val 10000"/>
-            </a:avLst>
-          </a:prstGeom>
-          <a:solidFill>
-            <a:srgbClr val="F0F4F5"/>
-          </a:solidFill>
-          <a:ln/>
-        </p:spPr>
-      </p:sp>
-      <p:sp>
-        <p:nvSpPr>
-          <p:cNvPr id="17" name="Text 15"/>
-          <p:cNvSpPr txBox="1"/>
-          <p:nvPr/>
-        </p:nvSpPr>
-        <p:spPr>
-          <a:xfrm>
-            <a:off x="4581144" y="2103120"/>
-            <a:ext cx="3273552" cy="384048"/>
-          </a:xfrm>
-          <a:prstGeom prst="rect">
-            <a:avLst/>
-          </a:prstGeom>
-          <a:noFill/>
-          <a:ln/>
-        </p:spPr>
-        <p:txBody>
-          <a:bodyPr wrap="square" lIns="0" tIns="0" rIns="0" bIns="0" rtlCol="0" anchor="ctr"/>
-          <a:lstStyle/>
-          <a:p>
-            <a:pPr indent="0" marL="0">
-              <a:buNone/>
-            </a:pPr>
-            <a:r>
-              <a:rPr lang="en-US" sz="1800" b="1" dirty="0">
-                <a:solidFill>
-                  <a:srgbClr val="0B2A3D"/>
-                </a:solidFill>
-                <a:latin typeface="Cambria" pitchFamily="34" charset="0"/>
-                <a:ea typeface="Cambria" pitchFamily="34" charset="-122"/>
-                <a:cs typeface="Cambria" pitchFamily="34" charset="-120"/>
-              </a:rPr>
-              <a:t>US$ 5,9 mi</a:t>
-            </a:r>
-            <a:endParaRPr lang="en-US" sz="1800" dirty="0"/>
-          </a:p>
-        </p:txBody>
-      </p:sp>
-      <p:sp>
-        <p:nvSpPr>
-          <p:cNvPr id="18" name="Text 16"/>
-          <p:cNvSpPr txBox="1"/>
-          <p:nvPr/>
-        </p:nvSpPr>
-        <p:spPr>
-          <a:xfrm>
-            <a:off x="4581144" y="2468880"/>
-            <a:ext cx="3273552" cy="237744"/>
-          </a:xfrm>
-          <a:prstGeom prst="rect">
-            <a:avLst/>
-          </a:prstGeom>
-          <a:noFill/>
-          <a:ln/>
-        </p:spPr>
-        <p:txBody>
-          <a:bodyPr wrap="square" lIns="0" tIns="0" rIns="0" bIns="0" rtlCol="0" anchor="ctr"/>
-          <a:lstStyle/>
-          <a:p>
-            <a:pPr indent="0" marL="0">
-              <a:buNone/>
-            </a:pPr>
-            <a:r>
-              <a:rPr lang="en-US" sz="800" b="1" spc="50" kern="0" dirty="0">
-                <a:solidFill>
-                  <a:srgbClr val="145C68"/>
-                </a:solidFill>
-                <a:latin typeface="Calibri" pitchFamily="34" charset="0"/>
-                <a:ea typeface="Calibri" pitchFamily="34" charset="-122"/>
-                <a:cs typeface="Calibri" pitchFamily="34" charset="-120"/>
-              </a:rPr>
-              <a:t>SERVIÇO</a:t>
-            </a:r>
-            <a:endParaRPr lang="en-US" sz="800" dirty="0"/>
-          </a:p>
-        </p:txBody>
-      </p:sp>
-      <p:sp>
-        <p:nvSpPr>
-          <p:cNvPr id="19" name="Shape 17"/>
-          <p:cNvSpPr/>
-          <p:nvPr/>
-        </p:nvSpPr>
-        <p:spPr>
-          <a:xfrm>
-            <a:off x="8138160" y="2011680"/>
-            <a:ext cx="3566160" cy="731520"/>
-          </a:xfrm>
-          <a:prstGeom prst="roundRect">
-            <a:avLst>
-              <a:gd name="adj" fmla="val 10000"/>
-            </a:avLst>
-          </a:prstGeom>
-          <a:solidFill>
-            <a:srgbClr val="F0F4F5"/>
-          </a:solidFill>
-          <a:ln/>
-        </p:spPr>
-      </p:sp>
-      <p:sp>
-        <p:nvSpPr>
-          <p:cNvPr id="20" name="Text 18"/>
-          <p:cNvSpPr txBox="1"/>
-          <p:nvPr/>
-        </p:nvSpPr>
-        <p:spPr>
-          <a:xfrm>
-            <a:off x="8284464" y="2103120"/>
-            <a:ext cx="3273552" cy="384048"/>
-          </a:xfrm>
-          <a:prstGeom prst="rect">
-            <a:avLst/>
-          </a:prstGeom>
-          <a:noFill/>
-          <a:ln/>
-        </p:spPr>
-        <p:txBody>
-          <a:bodyPr wrap="square" lIns="0" tIns="0" rIns="0" bIns="0" rtlCol="0" anchor="ctr"/>
-          <a:lstStyle/>
-          <a:p>
-            <a:pPr indent="0" marL="0">
-              <a:buNone/>
-            </a:pPr>
-            <a:r>
-              <a:rPr lang="en-US" sz="1800" b="1" dirty="0">
-                <a:solidFill>
-                  <a:srgbClr val="0B2A3D"/>
-                </a:solidFill>
-                <a:latin typeface="Cambria" pitchFamily="34" charset="0"/>
-                <a:ea typeface="Cambria" pitchFamily="34" charset="-122"/>
-                <a:cs typeface="Cambria" pitchFamily="34" charset="-120"/>
-              </a:rPr>
-              <a:t>US$ 1,3 mi</a:t>
-            </a:r>
-            <a:endParaRPr lang="en-US" sz="1800" dirty="0"/>
-          </a:p>
-        </p:txBody>
-      </p:sp>
-      <p:sp>
-        <p:nvSpPr>
-          <p:cNvPr id="21" name="Text 19"/>
-          <p:cNvSpPr txBox="1"/>
-          <p:nvPr/>
-        </p:nvSpPr>
-        <p:spPr>
-          <a:xfrm>
-            <a:off x="8284464" y="2468880"/>
-            <a:ext cx="3273552" cy="237744"/>
-          </a:xfrm>
-          <a:prstGeom prst="rect">
-            <a:avLst/>
-          </a:prstGeom>
-          <a:noFill/>
-          <a:ln/>
-        </p:spPr>
-        <p:txBody>
-          <a:bodyPr wrap="square" lIns="0" tIns="0" rIns="0" bIns="0" rtlCol="0" anchor="ctr"/>
-          <a:lstStyle/>
-          <a:p>
-            <a:pPr indent="0" marL="0">
-              <a:buNone/>
-            </a:pPr>
-            <a:r>
-              <a:rPr lang="en-US" sz="800" b="1" spc="50" kern="0" dirty="0">
+              <a:rPr lang="en-US" sz="1000" b="1" spc="100" kern="0" dirty="0">
                 <a:solidFill>
                   <a:srgbClr val="145C68"/>
                 </a:solidFill>
@@ -22827,13 +19019,13 @@
               </a:rPr>
               <a:t>MATERIAL</a:t>
             </a:r>
-            <a:endParaRPr lang="en-US" sz="800" dirty="0"/>
+            <a:endParaRPr lang="en-US" sz="1000" dirty="0"/>
           </a:p>
         </p:txBody>
       </p:sp>
       <p:sp>
         <p:nvSpPr>
-          <p:cNvPr id="22" name="Text 20"/>
+          <p:cNvPr id="16" name="Text 14"/>
           <p:cNvSpPr txBox="1"/>
           <p:nvPr/>
         </p:nvSpPr>
@@ -22872,7 +19064,7 @@
       </p:sp>
       <p:sp>
         <p:nvSpPr>
-          <p:cNvPr id="23" name="Shape 21"/>
+          <p:cNvPr id="17" name="Shape 15"/>
           <p:cNvSpPr/>
           <p:nvPr/>
         </p:nvSpPr>
@@ -22895,7 +19087,7 @@
       </p:sp>
       <p:sp>
         <p:nvSpPr>
-          <p:cNvPr id="24" name="Text 22"/>
+          <p:cNvPr id="18" name="Text 16"/>
           <p:cNvSpPr txBox="1"/>
           <p:nvPr/>
         </p:nvSpPr>
@@ -22934,7 +19126,7 @@
       </p:sp>
       <p:sp>
         <p:nvSpPr>
-          <p:cNvPr id="25" name="Text 23"/>
+          <p:cNvPr id="19" name="Text 17"/>
           <p:cNvSpPr txBox="1"/>
           <p:nvPr/>
         </p:nvSpPr>
@@ -22973,7 +19165,7 @@
       </p:sp>
       <p:sp>
         <p:nvSpPr>
-          <p:cNvPr id="26" name="Shape 24"/>
+          <p:cNvPr id="20" name="Shape 18"/>
           <p:cNvSpPr/>
           <p:nvPr/>
         </p:nvSpPr>
@@ -22993,7 +19185,7 @@
       </p:sp>
       <p:sp>
         <p:nvSpPr>
-          <p:cNvPr id="27" name="Text 25"/>
+          <p:cNvPr id="21" name="Text 19"/>
           <p:cNvSpPr txBox="1"/>
           <p:nvPr/>
         </p:nvSpPr>
@@ -23032,7 +19224,7 @@
       </p:sp>
       <p:sp>
         <p:nvSpPr>
-          <p:cNvPr id="28" name="Text 26"/>
+          <p:cNvPr id="22" name="Text 20"/>
           <p:cNvSpPr txBox="1"/>
           <p:nvPr/>
         </p:nvSpPr>
@@ -23071,111 +19263,13 @@
       </p:sp>
       <p:sp>
         <p:nvSpPr>
-          <p:cNvPr id="29" name="Text 27"/>
+          <p:cNvPr id="23" name="Text 21"/>
           <p:cNvSpPr txBox="1"/>
           <p:nvPr/>
         </p:nvSpPr>
         <p:spPr>
           <a:xfrm>
             <a:off x="566928" y="4133088"/>
-            <a:ext cx="3316529" cy="365760"/>
-          </a:xfrm>
-          <a:prstGeom prst="rect">
-            <a:avLst/>
-          </a:prstGeom>
-          <a:noFill/>
-          <a:ln/>
-        </p:spPr>
-        <p:txBody>
-          <a:bodyPr wrap="square" lIns="0" tIns="0" rIns="0" bIns="0" rtlCol="0" anchor="ctr"/>
-          <a:lstStyle/>
-          <a:p>
-            <a:pPr indent="0" marL="0">
-              <a:buNone/>
-            </a:pPr>
-            <a:r>
-              <a:rPr lang="en-US" sz="1100" dirty="0">
-                <a:solidFill>
-                  <a:srgbClr val="1C2B33"/>
-                </a:solidFill>
-                <a:latin typeface="Calibri" pitchFamily="34" charset="0"/>
-                <a:ea typeface="Calibri" pitchFamily="34" charset="-122"/>
-                <a:cs typeface="Calibri" pitchFamily="34" charset="-120"/>
-              </a:rPr>
-              <a:t>TA - Parada Programada</a:t>
-            </a:r>
-            <a:endParaRPr lang="en-US" sz="1100" dirty="0"/>
-          </a:p>
-        </p:txBody>
-      </p:sp>
-      <p:sp>
-        <p:nvSpPr>
-          <p:cNvPr id="30" name="Text 28"/>
-          <p:cNvSpPr txBox="1"/>
-          <p:nvPr/>
-        </p:nvSpPr>
-        <p:spPr>
-          <a:xfrm>
-            <a:off x="3773729" y="4133088"/>
-            <a:ext cx="1815998" cy="365760"/>
-          </a:xfrm>
-          <a:prstGeom prst="rect">
-            <a:avLst/>
-          </a:prstGeom>
-          <a:noFill/>
-          <a:ln/>
-        </p:spPr>
-        <p:txBody>
-          <a:bodyPr wrap="square" lIns="0" tIns="0" rIns="0" bIns="0" rtlCol="0" anchor="ctr"/>
-          <a:lstStyle/>
-          <a:p>
-            <a:pPr algn="r" indent="0" marL="0">
-              <a:buNone/>
-            </a:pPr>
-            <a:r>
-              <a:rPr lang="en-US" sz="1100" b="1" dirty="0">
-                <a:solidFill>
-                  <a:srgbClr val="0B2A3D"/>
-                </a:solidFill>
-                <a:latin typeface="Calibri" pitchFamily="34" charset="0"/>
-                <a:ea typeface="Calibri" pitchFamily="34" charset="-122"/>
-                <a:cs typeface="Calibri" pitchFamily="34" charset="-120"/>
-              </a:rPr>
-              <a:t>US$ 2,5 mi</a:t>
-            </a:r>
-            <a:endParaRPr lang="en-US" sz="1100" dirty="0"/>
-          </a:p>
-        </p:txBody>
-      </p:sp>
-      <p:sp>
-        <p:nvSpPr>
-          <p:cNvPr id="31" name="Shape 29"/>
-          <p:cNvSpPr/>
-          <p:nvPr/>
-        </p:nvSpPr>
-        <p:spPr>
-          <a:xfrm>
-            <a:off x="457200" y="4498848"/>
-            <a:ext cx="5349240" cy="365760"/>
-          </a:xfrm>
-          <a:prstGeom prst="rect">
-            <a:avLst/>
-          </a:prstGeom>
-          <a:solidFill>
-            <a:srgbClr val="F0F4F5"/>
-          </a:solidFill>
-          <a:ln/>
-        </p:spPr>
-      </p:sp>
-      <p:sp>
-        <p:nvSpPr>
-          <p:cNvPr id="32" name="Text 30"/>
-          <p:cNvSpPr txBox="1"/>
-          <p:nvPr/>
-        </p:nvSpPr>
-        <p:spPr>
-          <a:xfrm>
-            <a:off x="566928" y="4498848"/>
             <a:ext cx="3316529" cy="365760"/>
           </a:xfrm>
           <a:prstGeom prst="rect">
@@ -23208,13 +19302,13 @@
       </p:sp>
       <p:sp>
         <p:nvSpPr>
-          <p:cNvPr id="33" name="Text 31"/>
+          <p:cNvPr id="24" name="Text 22"/>
           <p:cNvSpPr txBox="1"/>
           <p:nvPr/>
         </p:nvSpPr>
         <p:spPr>
           <a:xfrm>
-            <a:off x="3773729" y="4498848"/>
+            <a:off x="3773729" y="4133088"/>
             <a:ext cx="1815998" cy="365760"/>
           </a:xfrm>
           <a:prstGeom prst="rect">
@@ -23247,13 +19341,33 @@
       </p:sp>
       <p:sp>
         <p:nvSpPr>
-          <p:cNvPr id="34" name="Text 32"/>
+          <p:cNvPr id="25" name="Shape 23"/>
+          <p:cNvSpPr/>
+          <p:nvPr/>
+        </p:nvSpPr>
+        <p:spPr>
+          <a:xfrm>
+            <a:off x="457200" y="4498848"/>
+            <a:ext cx="5349240" cy="365760"/>
+          </a:xfrm>
+          <a:prstGeom prst="rect">
+            <a:avLst/>
+          </a:prstGeom>
+          <a:solidFill>
+            <a:srgbClr val="F0F4F5"/>
+          </a:solidFill>
+          <a:ln/>
+        </p:spPr>
+      </p:sp>
+      <p:sp>
+        <p:nvSpPr>
+          <p:cNvPr id="26" name="Text 24"/>
           <p:cNvSpPr txBox="1"/>
           <p:nvPr/>
         </p:nvSpPr>
         <p:spPr>
           <a:xfrm>
-            <a:off x="566928" y="4864608"/>
+            <a:off x="566928" y="4498848"/>
             <a:ext cx="3316529" cy="365760"/>
           </a:xfrm>
           <a:prstGeom prst="rect">
@@ -23286,13 +19400,13 @@
       </p:sp>
       <p:sp>
         <p:nvSpPr>
-          <p:cNvPr id="35" name="Text 33"/>
+          <p:cNvPr id="27" name="Text 25"/>
           <p:cNvSpPr txBox="1"/>
           <p:nvPr/>
         </p:nvSpPr>
         <p:spPr>
           <a:xfrm>
-            <a:off x="3773729" y="4864608"/>
+            <a:off x="3773729" y="4498848"/>
             <a:ext cx="1815998" cy="365760"/>
           </a:xfrm>
           <a:prstGeom prst="rect">
@@ -23325,33 +19439,13 @@
       </p:sp>
       <p:sp>
         <p:nvSpPr>
-          <p:cNvPr id="36" name="Shape 34"/>
-          <p:cNvSpPr/>
+          <p:cNvPr id="28" name="Text 26"/>
+          <p:cNvSpPr txBox="1"/>
           <p:nvPr/>
         </p:nvSpPr>
         <p:spPr>
           <a:xfrm>
-            <a:off x="457200" y="5230368"/>
-            <a:ext cx="5349240" cy="365760"/>
-          </a:xfrm>
-          <a:prstGeom prst="rect">
-            <a:avLst/>
-          </a:prstGeom>
-          <a:solidFill>
-            <a:srgbClr val="F0F4F5"/>
-          </a:solidFill>
-          <a:ln/>
-        </p:spPr>
-      </p:sp>
-      <p:sp>
-        <p:nvSpPr>
-          <p:cNvPr id="37" name="Text 35"/>
-          <p:cNvSpPr txBox="1"/>
-          <p:nvPr/>
-        </p:nvSpPr>
-        <p:spPr>
-          <a:xfrm>
-            <a:off x="566928" y="5230368"/>
+            <a:off x="566928" y="4864608"/>
             <a:ext cx="3316529" cy="365760"/>
           </a:xfrm>
           <a:prstGeom prst="rect">
@@ -23384,13 +19478,13 @@
       </p:sp>
       <p:sp>
         <p:nvSpPr>
-          <p:cNvPr id="38" name="Text 36"/>
+          <p:cNvPr id="29" name="Text 27"/>
           <p:cNvSpPr txBox="1"/>
           <p:nvPr/>
         </p:nvSpPr>
         <p:spPr>
           <a:xfrm>
-            <a:off x="3773729" y="5230368"/>
+            <a:off x="3773729" y="4864608"/>
             <a:ext cx="1815998" cy="365760"/>
           </a:xfrm>
           <a:prstGeom prst="rect">
@@ -23423,7 +19517,7 @@
       </p:sp>
       <p:sp>
         <p:nvSpPr>
-          <p:cNvPr id="39" name="Text 37"/>
+          <p:cNvPr id="30" name="Text 28"/>
           <p:cNvSpPr txBox="1"/>
           <p:nvPr/>
         </p:nvSpPr>
@@ -23462,7 +19556,7 @@
       </p:sp>
       <p:sp>
         <p:nvSpPr>
-          <p:cNvPr id="40" name="Shape 38"/>
+          <p:cNvPr id="31" name="Shape 29"/>
           <p:cNvSpPr/>
           <p:nvPr/>
         </p:nvSpPr>
@@ -23485,7 +19579,7 @@
       </p:sp>
       <p:sp>
         <p:nvSpPr>
-          <p:cNvPr id="41" name="Text 39"/>
+          <p:cNvPr id="32" name="Text 30"/>
           <p:cNvSpPr txBox="1"/>
           <p:nvPr/>
         </p:nvSpPr>
@@ -23524,7 +19618,7 @@
       </p:sp>
       <p:sp>
         <p:nvSpPr>
-          <p:cNvPr id="42" name="Text 40"/>
+          <p:cNvPr id="33" name="Text 31"/>
           <p:cNvSpPr txBox="1"/>
           <p:nvPr/>
         </p:nvSpPr>
@@ -23563,7 +19657,7 @@
       </p:sp>
       <p:sp>
         <p:nvSpPr>
-          <p:cNvPr id="43" name="Shape 41"/>
+          <p:cNvPr id="34" name="Shape 32"/>
           <p:cNvSpPr/>
           <p:nvPr/>
         </p:nvSpPr>
@@ -23583,7 +19677,7 @@
       </p:sp>
       <p:sp>
         <p:nvSpPr>
-          <p:cNvPr id="44" name="Text 42"/>
+          <p:cNvPr id="35" name="Text 33"/>
           <p:cNvSpPr txBox="1"/>
           <p:nvPr/>
         </p:nvSpPr>
@@ -23622,7 +19716,7 @@
       </p:sp>
       <p:sp>
         <p:nvSpPr>
-          <p:cNvPr id="45" name="Text 43"/>
+          <p:cNvPr id="36" name="Text 34"/>
           <p:cNvSpPr txBox="1"/>
           <p:nvPr/>
         </p:nvSpPr>
@@ -23653,7 +19747,7 @@
                 <a:ea typeface="Calibri" pitchFamily="34" charset="-122"/>
                 <a:cs typeface="Calibri" pitchFamily="34" charset="-120"/>
               </a:rPr>
-              <a:t>US$ 2,1 mi</a:t>
+              <a:t>US$ 1,2 mi</a:t>
             </a:r>
             <a:endParaRPr lang="en-US" sz="1100" dirty="0"/>
           </a:p>
@@ -23661,7 +19755,7 @@
       </p:sp>
       <p:sp>
         <p:nvSpPr>
-          <p:cNvPr id="46" name="Text 44"/>
+          <p:cNvPr id="37" name="Text 35"/>
           <p:cNvSpPr txBox="1"/>
           <p:nvPr/>
         </p:nvSpPr>
@@ -23700,7 +19794,7 @@
       </p:sp>
       <p:sp>
         <p:nvSpPr>
-          <p:cNvPr id="47" name="Text 45"/>
+          <p:cNvPr id="38" name="Text 36"/>
           <p:cNvSpPr txBox="1"/>
           <p:nvPr/>
         </p:nvSpPr>
@@ -23739,7 +19833,7 @@
       </p:sp>
       <p:sp>
         <p:nvSpPr>
-          <p:cNvPr id="48" name="Shape 46"/>
+          <p:cNvPr id="39" name="Shape 37"/>
           <p:cNvSpPr/>
           <p:nvPr/>
         </p:nvSpPr>
@@ -23759,7 +19853,7 @@
       </p:sp>
       <p:sp>
         <p:nvSpPr>
-          <p:cNvPr id="49" name="Text 47"/>
+          <p:cNvPr id="40" name="Text 38"/>
           <p:cNvSpPr txBox="1"/>
           <p:nvPr/>
         </p:nvSpPr>
@@ -23798,7 +19892,7 @@
       </p:sp>
       <p:sp>
         <p:nvSpPr>
-          <p:cNvPr id="50" name="Text 48"/>
+          <p:cNvPr id="41" name="Text 39"/>
           <p:cNvSpPr txBox="1"/>
           <p:nvPr/>
         </p:nvSpPr>
@@ -23837,7 +19931,7 @@
       </p:sp>
       <p:sp>
         <p:nvSpPr>
-          <p:cNvPr id="51" name="Text 49"/>
+          <p:cNvPr id="42" name="Text 40"/>
           <p:cNvSpPr txBox="1"/>
           <p:nvPr/>
         </p:nvSpPr>
@@ -23868,7 +19962,7 @@
                 <a:ea typeface="Calibri" pitchFamily="34" charset="-122"/>
                 <a:cs typeface="Calibri" pitchFamily="34" charset="-120"/>
               </a:rPr>
-              <a:t>Metodologia: soma de Custo de Serviço + Custo de Material (Jan–Dez), para itens de Cost Allocation = CAPEX com status 'Contar' (Custo Total sem TA) e 'TA' (Custo TA, valor de Parada Programada informado pela área). O total desconsidera a categoria Desenvolvimento de Produção (US$ 0, mantida na lista de Categoria apenas para referência).</a:t>
+              <a:t>Metodologia: soma de Custo de Serviço + Custo de Material (Jan–Dez), para itens de Cost Allocation = CAPEX com status 'Contar'. Não inclui itens de Parada Programada (status 'TA') nem a categoria Desenvolvimento de Produção (US$ 0, mantida na lista de Categoria apenas para referência).</a:t>
             </a:r>
             <a:endParaRPr lang="en-US" sz="850" dirty="0"/>
           </a:p>
@@ -24030,7 +20124,7 @@
                 <a:ea typeface="Calibri" pitchFamily="34" charset="-122"/>
                 <a:cs typeface="Calibri" pitchFamily="34" charset="-120"/>
               </a:rPr>
-              <a:t>Principais escopos por valor · 28 itens no total</a:t>
+              <a:t>Principais escopos por valor · 10 itens no total</a:t>
             </a:r>
             <a:endParaRPr lang="en-US" sz="1250" dirty="0"/>
           </a:p>
@@ -26274,7 +22368,7 @@
                           <a:ea typeface="Calibri" pitchFamily="34" charset="-122"/>
                           <a:cs typeface="Calibri" pitchFamily="34" charset="-120"/>
                         </a:rPr>
-                        <a:t>TA - Caldeiraria</a:t>
+                        <a:t>ESTUDO DE ENGENHARIA</a:t>
                       </a:r>
                       <a:endParaRPr lang="en-US" sz="1000" dirty="0">
                         <a:latin typeface="Calibri" charset="0"/>
@@ -26410,7 +22504,7 @@
                           <a:ea typeface="Calibri" pitchFamily="34" charset="-122"/>
                           <a:cs typeface="Calibri" pitchFamily="34" charset="-120"/>
                         </a:rPr>
-                        <a:t>TA - Parada Programada</a:t>
+                        <a:t>Projetos</a:t>
                       </a:r>
                       <a:endParaRPr lang="en-US" sz="950" dirty="0">
                         <a:latin typeface="Calibri" charset="0"/>
@@ -26478,7 +22572,7 @@
                           <a:ea typeface="Calibri" pitchFamily="34" charset="-122"/>
                           <a:cs typeface="Calibri" pitchFamily="34" charset="-120"/>
                         </a:rPr>
-                        <a:t>US$ 198,4 mil</a:t>
+                        <a:t>US$ 169,5 mil</a:t>
                       </a:r>
                       <a:endParaRPr lang="en-US" sz="1000" dirty="0">
                         <a:latin typeface="Calibri" charset="0"/>
@@ -26548,7 +22642,7 @@
                           <a:ea typeface="Calibri" pitchFamily="34" charset="-122"/>
                           <a:cs typeface="Calibri" pitchFamily="34" charset="-120"/>
                         </a:rPr>
-                        <a:t>ESTUDO DE ENGENHARIA</a:t>
+                        <a:t>Implementação metodologia offshore para medição residual de polímero na água produzida </a:t>
                       </a:r>
                       <a:endParaRPr lang="en-US" sz="1000" dirty="0">
                         <a:latin typeface="Calibri" charset="0"/>
@@ -26684,7 +22778,7 @@
                           <a:ea typeface="Calibri" pitchFamily="34" charset="-122"/>
                           <a:cs typeface="Calibri" pitchFamily="34" charset="-120"/>
                         </a:rPr>
-                        <a:t>Projetos</a:t>
+                        <a:t>P&amp;Q - Químicos</a:t>
                       </a:r>
                       <a:endParaRPr lang="en-US" sz="950" dirty="0">
                         <a:latin typeface="Calibri" charset="0"/>
@@ -26752,7 +22846,7 @@
                           <a:ea typeface="Calibri" pitchFamily="34" charset="-122"/>
                           <a:cs typeface="Calibri" pitchFamily="34" charset="-120"/>
                         </a:rPr>
-                        <a:t>US$ 169,5 mil</a:t>
+                        <a:t>US$ 30,0 mil</a:t>
                       </a:r>
                       <a:endParaRPr lang="en-US" sz="1000" dirty="0">
                         <a:latin typeface="Calibri" charset="0"/>
@@ -26822,7 +22916,7 @@
                           <a:ea typeface="Calibri" pitchFamily="34" charset="-122"/>
                           <a:cs typeface="Calibri" pitchFamily="34" charset="-120"/>
                         </a:rPr>
-                        <a:t>PRÉ TA - Andaime</a:t>
+                        <a:t>Implementação do BRAlarm</a:t>
                       </a:r>
                       <a:endParaRPr lang="en-US" sz="1000" dirty="0">
                         <a:latin typeface="Calibri" charset="0"/>
@@ -26890,7 +22984,7 @@
                           <a:ea typeface="Calibri" pitchFamily="34" charset="-122"/>
                           <a:cs typeface="Calibri" pitchFamily="34" charset="-120"/>
                         </a:rPr>
-                        <a:t>Eficiência de Produção</a:t>
+                        <a:t>Bem Estar/Segurança</a:t>
                       </a:r>
                       <a:endParaRPr lang="en-US" sz="950" dirty="0">
                         <a:latin typeface="Calibri" charset="0"/>
@@ -26958,7 +23052,7 @@
                           <a:ea typeface="Calibri" pitchFamily="34" charset="-122"/>
                           <a:cs typeface="Calibri" pitchFamily="34" charset="-120"/>
                         </a:rPr>
-                        <a:t>TA - Parada Programada</a:t>
+                        <a:t>Segurança de Processos</a:t>
                       </a:r>
                       <a:endParaRPr lang="en-US" sz="950" dirty="0">
                         <a:latin typeface="Calibri" charset="0"/>
@@ -27026,7 +23120,7 @@
                           <a:ea typeface="Calibri" pitchFamily="34" charset="-122"/>
                           <a:cs typeface="Calibri" pitchFamily="34" charset="-120"/>
                         </a:rPr>
-                        <a:t>US$ 123,0 mil</a:t>
+                        <a:t>US$ 4,0 mil</a:t>
                       </a:r>
                       <a:endParaRPr lang="en-US" sz="1000" dirty="0">
                         <a:latin typeface="Calibri" charset="0"/>
@@ -27074,698 +23168,6 @@
                     </a:lnB>
                     <a:solidFill>
                       <a:srgbClr val="F0F4F5"/>
-                    </a:solidFill>
-                  </a:tcPr>
-                </a:tc>
-              </a:tr>
-              <a:tr h="288036">
-                <a:tc>
-                  <a:txBody>
-                    <a:bodyPr/>
-                    <a:lstStyle/>
-                    <a:p>
-                      <a:pPr indent="0" marL="0">
-                        <a:buNone/>
-                      </a:pPr>
-                      <a:r>
-                        <a:rPr lang="en-US" sz="1000" dirty="0">
-                          <a:solidFill>
-                            <a:srgbClr val="1C2B33"/>
-                          </a:solidFill>
-                          <a:latin typeface="Calibri" pitchFamily="34" charset="0"/>
-                          <a:ea typeface="Calibri" pitchFamily="34" charset="-122"/>
-                          <a:cs typeface="Calibri" pitchFamily="34" charset="-120"/>
-                        </a:rPr>
-                        <a:t>TA - Elétrica</a:t>
-                      </a:r>
-                      <a:endParaRPr lang="en-US" sz="1000" dirty="0">
-                        <a:latin typeface="Calibri" charset="0"/>
-                        <a:ea typeface="Calibri" charset="0"/>
-                        <a:cs typeface="Calibri" charset="0"/>
-                      </a:endParaRPr>
-                    </a:p>
-                  </a:txBody>
-                  <a:tcPr marL="91440" marR="91440" marT="45720" marB="45720" anchor="ctr">
-                    <a:lnL w="6350" cap="flat" cmpd="sng" algn="ctr">
-                      <a:solidFill>
-                        <a:srgbClr val="E3E8E9"/>
-                      </a:solidFill>
-                      <a:prstDash val="solid"/>
-                      <a:round/>
-                      <a:headEnd type="none" w="med" len="med"/>
-                      <a:tailEnd type="none" w="med" len="med"/>
-                    </a:lnL>
-                    <a:lnR w="6350" cap="flat" cmpd="sng" algn="ctr">
-                      <a:solidFill>
-                        <a:srgbClr val="E3E8E9"/>
-                      </a:solidFill>
-                      <a:prstDash val="solid"/>
-                      <a:round/>
-                      <a:headEnd type="none" w="med" len="med"/>
-                      <a:tailEnd type="none" w="med" len="med"/>
-                    </a:lnR>
-                    <a:lnT w="6350" cap="flat" cmpd="sng" algn="ctr">
-                      <a:solidFill>
-                        <a:srgbClr val="E3E8E9"/>
-                      </a:solidFill>
-                      <a:prstDash val="solid"/>
-                      <a:round/>
-                      <a:headEnd type="none" w="med" len="med"/>
-                      <a:tailEnd type="none" w="med" len="med"/>
-                    </a:lnT>
-                    <a:lnB w="6350" cap="flat" cmpd="sng" algn="ctr">
-                      <a:solidFill>
-                        <a:srgbClr val="E3E8E9"/>
-                      </a:solidFill>
-                      <a:prstDash val="solid"/>
-                      <a:round/>
-                      <a:headEnd type="none" w="med" len="med"/>
-                      <a:tailEnd type="none" w="med" len="med"/>
-                    </a:lnB>
-                    <a:solidFill>
-                      <a:srgbClr val="FFFFFF"/>
-                    </a:solidFill>
-                  </a:tcPr>
-                </a:tc>
-                <a:tc>
-                  <a:txBody>
-                    <a:bodyPr/>
-                    <a:lstStyle/>
-                    <a:p>
-                      <a:pPr indent="0" marL="0">
-                        <a:buNone/>
-                      </a:pPr>
-                      <a:r>
-                        <a:rPr lang="en-US" sz="950" dirty="0">
-                          <a:solidFill>
-                            <a:srgbClr val="5B6B73"/>
-                          </a:solidFill>
-                          <a:latin typeface="Calibri" pitchFamily="34" charset="0"/>
-                          <a:ea typeface="Calibri" pitchFamily="34" charset="-122"/>
-                          <a:cs typeface="Calibri" pitchFamily="34" charset="-120"/>
-                        </a:rPr>
-                        <a:t>Eficiência de Produção</a:t>
-                      </a:r>
-                      <a:endParaRPr lang="en-US" sz="950" dirty="0">
-                        <a:latin typeface="Calibri" charset="0"/>
-                        <a:ea typeface="Calibri" charset="0"/>
-                        <a:cs typeface="Calibri" charset="0"/>
-                      </a:endParaRPr>
-                    </a:p>
-                  </a:txBody>
-                  <a:tcPr marL="91440" marR="91440" marT="45720" marB="45720" anchor="ctr">
-                    <a:lnL w="6350" cap="flat" cmpd="sng" algn="ctr">
-                      <a:solidFill>
-                        <a:srgbClr val="E3E8E9"/>
-                      </a:solidFill>
-                      <a:prstDash val="solid"/>
-                      <a:round/>
-                      <a:headEnd type="none" w="med" len="med"/>
-                      <a:tailEnd type="none" w="med" len="med"/>
-                    </a:lnL>
-                    <a:lnR w="6350" cap="flat" cmpd="sng" algn="ctr">
-                      <a:solidFill>
-                        <a:srgbClr val="E3E8E9"/>
-                      </a:solidFill>
-                      <a:prstDash val="solid"/>
-                      <a:round/>
-                      <a:headEnd type="none" w="med" len="med"/>
-                      <a:tailEnd type="none" w="med" len="med"/>
-                    </a:lnR>
-                    <a:lnT w="6350" cap="flat" cmpd="sng" algn="ctr">
-                      <a:solidFill>
-                        <a:srgbClr val="E3E8E9"/>
-                      </a:solidFill>
-                      <a:prstDash val="solid"/>
-                      <a:round/>
-                      <a:headEnd type="none" w="med" len="med"/>
-                      <a:tailEnd type="none" w="med" len="med"/>
-                    </a:lnT>
-                    <a:lnB w="6350" cap="flat" cmpd="sng" algn="ctr">
-                      <a:solidFill>
-                        <a:srgbClr val="E3E8E9"/>
-                      </a:solidFill>
-                      <a:prstDash val="solid"/>
-                      <a:round/>
-                      <a:headEnd type="none" w="med" len="med"/>
-                      <a:tailEnd type="none" w="med" len="med"/>
-                    </a:lnB>
-                    <a:solidFill>
-                      <a:srgbClr val="FFFFFF"/>
-                    </a:solidFill>
-                  </a:tcPr>
-                </a:tc>
-                <a:tc>
-                  <a:txBody>
-                    <a:bodyPr/>
-                    <a:lstStyle/>
-                    <a:p>
-                      <a:pPr indent="0" marL="0">
-                        <a:buNone/>
-                      </a:pPr>
-                      <a:r>
-                        <a:rPr lang="en-US" sz="950" dirty="0">
-                          <a:solidFill>
-                            <a:srgbClr val="5B6B73"/>
-                          </a:solidFill>
-                          <a:latin typeface="Calibri" pitchFamily="34" charset="0"/>
-                          <a:ea typeface="Calibri" pitchFamily="34" charset="-122"/>
-                          <a:cs typeface="Calibri" pitchFamily="34" charset="-120"/>
-                        </a:rPr>
-                        <a:t>TA - Parada Programada</a:t>
-                      </a:r>
-                      <a:endParaRPr lang="en-US" sz="950" dirty="0">
-                        <a:latin typeface="Calibri" charset="0"/>
-                        <a:ea typeface="Calibri" charset="0"/>
-                        <a:cs typeface="Calibri" charset="0"/>
-                      </a:endParaRPr>
-                    </a:p>
-                  </a:txBody>
-                  <a:tcPr marL="91440" marR="91440" marT="45720" marB="45720" anchor="ctr">
-                    <a:lnL w="6350" cap="flat" cmpd="sng" algn="ctr">
-                      <a:solidFill>
-                        <a:srgbClr val="E3E8E9"/>
-                      </a:solidFill>
-                      <a:prstDash val="solid"/>
-                      <a:round/>
-                      <a:headEnd type="none" w="med" len="med"/>
-                      <a:tailEnd type="none" w="med" len="med"/>
-                    </a:lnL>
-                    <a:lnR w="6350" cap="flat" cmpd="sng" algn="ctr">
-                      <a:solidFill>
-                        <a:srgbClr val="E3E8E9"/>
-                      </a:solidFill>
-                      <a:prstDash val="solid"/>
-                      <a:round/>
-                      <a:headEnd type="none" w="med" len="med"/>
-                      <a:tailEnd type="none" w="med" len="med"/>
-                    </a:lnR>
-                    <a:lnT w="6350" cap="flat" cmpd="sng" algn="ctr">
-                      <a:solidFill>
-                        <a:srgbClr val="E3E8E9"/>
-                      </a:solidFill>
-                      <a:prstDash val="solid"/>
-                      <a:round/>
-                      <a:headEnd type="none" w="med" len="med"/>
-                      <a:tailEnd type="none" w="med" len="med"/>
-                    </a:lnT>
-                    <a:lnB w="6350" cap="flat" cmpd="sng" algn="ctr">
-                      <a:solidFill>
-                        <a:srgbClr val="E3E8E9"/>
-                      </a:solidFill>
-                      <a:prstDash val="solid"/>
-                      <a:round/>
-                      <a:headEnd type="none" w="med" len="med"/>
-                      <a:tailEnd type="none" w="med" len="med"/>
-                    </a:lnB>
-                    <a:solidFill>
-                      <a:srgbClr val="FFFFFF"/>
-                    </a:solidFill>
-                  </a:tcPr>
-                </a:tc>
-                <a:tc>
-                  <a:txBody>
-                    <a:bodyPr/>
-                    <a:lstStyle/>
-                    <a:p>
-                      <a:pPr algn="r" indent="0" marL="0">
-                        <a:buNone/>
-                      </a:pPr>
-                      <a:r>
-                        <a:rPr lang="en-US" sz="1000" b="1" dirty="0">
-                          <a:solidFill>
-                            <a:srgbClr val="0B2A3D"/>
-                          </a:solidFill>
-                          <a:latin typeface="Calibri" pitchFamily="34" charset="0"/>
-                          <a:ea typeface="Calibri" pitchFamily="34" charset="-122"/>
-                          <a:cs typeface="Calibri" pitchFamily="34" charset="-120"/>
-                        </a:rPr>
-                        <a:t>US$ 79,4 mil</a:t>
-                      </a:r>
-                      <a:endParaRPr lang="en-US" sz="1000" dirty="0">
-                        <a:latin typeface="Calibri" charset="0"/>
-                        <a:ea typeface="Calibri" charset="0"/>
-                        <a:cs typeface="Calibri" charset="0"/>
-                      </a:endParaRPr>
-                    </a:p>
-                  </a:txBody>
-                  <a:tcPr marL="91440" marR="91440" marT="45720" marB="45720" anchor="ctr">
-                    <a:lnL w="6350" cap="flat" cmpd="sng" algn="ctr">
-                      <a:solidFill>
-                        <a:srgbClr val="E3E8E9"/>
-                      </a:solidFill>
-                      <a:prstDash val="solid"/>
-                      <a:round/>
-                      <a:headEnd type="none" w="med" len="med"/>
-                      <a:tailEnd type="none" w="med" len="med"/>
-                    </a:lnL>
-                    <a:lnR w="6350" cap="flat" cmpd="sng" algn="ctr">
-                      <a:solidFill>
-                        <a:srgbClr val="E3E8E9"/>
-                      </a:solidFill>
-                      <a:prstDash val="solid"/>
-                      <a:round/>
-                      <a:headEnd type="none" w="med" len="med"/>
-                      <a:tailEnd type="none" w="med" len="med"/>
-                    </a:lnR>
-                    <a:lnT w="6350" cap="flat" cmpd="sng" algn="ctr">
-                      <a:solidFill>
-                        <a:srgbClr val="E3E8E9"/>
-                      </a:solidFill>
-                      <a:prstDash val="solid"/>
-                      <a:round/>
-                      <a:headEnd type="none" w="med" len="med"/>
-                      <a:tailEnd type="none" w="med" len="med"/>
-                    </a:lnT>
-                    <a:lnB w="6350" cap="flat" cmpd="sng" algn="ctr">
-                      <a:solidFill>
-                        <a:srgbClr val="E3E8E9"/>
-                      </a:solidFill>
-                      <a:prstDash val="solid"/>
-                      <a:round/>
-                      <a:headEnd type="none" w="med" len="med"/>
-                      <a:tailEnd type="none" w="med" len="med"/>
-                    </a:lnB>
-                    <a:solidFill>
-                      <a:srgbClr val="FFFFFF"/>
-                    </a:solidFill>
-                  </a:tcPr>
-                </a:tc>
-              </a:tr>
-              <a:tr h="288036">
-                <a:tc>
-                  <a:txBody>
-                    <a:bodyPr/>
-                    <a:lstStyle/>
-                    <a:p>
-                      <a:pPr indent="0" marL="0">
-                        <a:buNone/>
-                      </a:pPr>
-                      <a:r>
-                        <a:rPr lang="en-US" sz="1000" dirty="0">
-                          <a:solidFill>
-                            <a:srgbClr val="1C2B33"/>
-                          </a:solidFill>
-                          <a:latin typeface="Calibri" pitchFamily="34" charset="0"/>
-                          <a:ea typeface="Calibri" pitchFamily="34" charset="-122"/>
-                          <a:cs typeface="Calibri" pitchFamily="34" charset="-120"/>
-                        </a:rPr>
-                        <a:t>PÓS TA - Andaime</a:t>
-                      </a:r>
-                      <a:endParaRPr lang="en-US" sz="1000" dirty="0">
-                        <a:latin typeface="Calibri" charset="0"/>
-                        <a:ea typeface="Calibri" charset="0"/>
-                        <a:cs typeface="Calibri" charset="0"/>
-                      </a:endParaRPr>
-                    </a:p>
-                  </a:txBody>
-                  <a:tcPr marL="91440" marR="91440" marT="45720" marB="45720" anchor="ctr">
-                    <a:lnL w="6350" cap="flat" cmpd="sng" algn="ctr">
-                      <a:solidFill>
-                        <a:srgbClr val="E3E8E9"/>
-                      </a:solidFill>
-                      <a:prstDash val="solid"/>
-                      <a:round/>
-                      <a:headEnd type="none" w="med" len="med"/>
-                      <a:tailEnd type="none" w="med" len="med"/>
-                    </a:lnL>
-                    <a:lnR w="6350" cap="flat" cmpd="sng" algn="ctr">
-                      <a:solidFill>
-                        <a:srgbClr val="E3E8E9"/>
-                      </a:solidFill>
-                      <a:prstDash val="solid"/>
-                      <a:round/>
-                      <a:headEnd type="none" w="med" len="med"/>
-                      <a:tailEnd type="none" w="med" len="med"/>
-                    </a:lnR>
-                    <a:lnT w="6350" cap="flat" cmpd="sng" algn="ctr">
-                      <a:solidFill>
-                        <a:srgbClr val="E3E8E9"/>
-                      </a:solidFill>
-                      <a:prstDash val="solid"/>
-                      <a:round/>
-                      <a:headEnd type="none" w="med" len="med"/>
-                      <a:tailEnd type="none" w="med" len="med"/>
-                    </a:lnT>
-                    <a:lnB w="6350" cap="flat" cmpd="sng" algn="ctr">
-                      <a:solidFill>
-                        <a:srgbClr val="E3E8E9"/>
-                      </a:solidFill>
-                      <a:prstDash val="solid"/>
-                      <a:round/>
-                      <a:headEnd type="none" w="med" len="med"/>
-                      <a:tailEnd type="none" w="med" len="med"/>
-                    </a:lnB>
-                    <a:solidFill>
-                      <a:srgbClr val="F0F4F5"/>
-                    </a:solidFill>
-                  </a:tcPr>
-                </a:tc>
-                <a:tc>
-                  <a:txBody>
-                    <a:bodyPr/>
-                    <a:lstStyle/>
-                    <a:p>
-                      <a:pPr indent="0" marL="0">
-                        <a:buNone/>
-                      </a:pPr>
-                      <a:r>
-                        <a:rPr lang="en-US" sz="950" dirty="0">
-                          <a:solidFill>
-                            <a:srgbClr val="5B6B73"/>
-                          </a:solidFill>
-                          <a:latin typeface="Calibri" pitchFamily="34" charset="0"/>
-                          <a:ea typeface="Calibri" pitchFamily="34" charset="-122"/>
-                          <a:cs typeface="Calibri" pitchFamily="34" charset="-120"/>
-                        </a:rPr>
-                        <a:t>Eficiência de Produção</a:t>
-                      </a:r>
-                      <a:endParaRPr lang="en-US" sz="950" dirty="0">
-                        <a:latin typeface="Calibri" charset="0"/>
-                        <a:ea typeface="Calibri" charset="0"/>
-                        <a:cs typeface="Calibri" charset="0"/>
-                      </a:endParaRPr>
-                    </a:p>
-                  </a:txBody>
-                  <a:tcPr marL="91440" marR="91440" marT="45720" marB="45720" anchor="ctr">
-                    <a:lnL w="6350" cap="flat" cmpd="sng" algn="ctr">
-                      <a:solidFill>
-                        <a:srgbClr val="E3E8E9"/>
-                      </a:solidFill>
-                      <a:prstDash val="solid"/>
-                      <a:round/>
-                      <a:headEnd type="none" w="med" len="med"/>
-                      <a:tailEnd type="none" w="med" len="med"/>
-                    </a:lnL>
-                    <a:lnR w="6350" cap="flat" cmpd="sng" algn="ctr">
-                      <a:solidFill>
-                        <a:srgbClr val="E3E8E9"/>
-                      </a:solidFill>
-                      <a:prstDash val="solid"/>
-                      <a:round/>
-                      <a:headEnd type="none" w="med" len="med"/>
-                      <a:tailEnd type="none" w="med" len="med"/>
-                    </a:lnR>
-                    <a:lnT w="6350" cap="flat" cmpd="sng" algn="ctr">
-                      <a:solidFill>
-                        <a:srgbClr val="E3E8E9"/>
-                      </a:solidFill>
-                      <a:prstDash val="solid"/>
-                      <a:round/>
-                      <a:headEnd type="none" w="med" len="med"/>
-                      <a:tailEnd type="none" w="med" len="med"/>
-                    </a:lnT>
-                    <a:lnB w="6350" cap="flat" cmpd="sng" algn="ctr">
-                      <a:solidFill>
-                        <a:srgbClr val="E3E8E9"/>
-                      </a:solidFill>
-                      <a:prstDash val="solid"/>
-                      <a:round/>
-                      <a:headEnd type="none" w="med" len="med"/>
-                      <a:tailEnd type="none" w="med" len="med"/>
-                    </a:lnB>
-                    <a:solidFill>
-                      <a:srgbClr val="F0F4F5"/>
-                    </a:solidFill>
-                  </a:tcPr>
-                </a:tc>
-                <a:tc>
-                  <a:txBody>
-                    <a:bodyPr/>
-                    <a:lstStyle/>
-                    <a:p>
-                      <a:pPr indent="0" marL="0">
-                        <a:buNone/>
-                      </a:pPr>
-                      <a:r>
-                        <a:rPr lang="en-US" sz="950" dirty="0">
-                          <a:solidFill>
-                            <a:srgbClr val="5B6B73"/>
-                          </a:solidFill>
-                          <a:latin typeface="Calibri" pitchFamily="34" charset="0"/>
-                          <a:ea typeface="Calibri" pitchFamily="34" charset="-122"/>
-                          <a:cs typeface="Calibri" pitchFamily="34" charset="-120"/>
-                        </a:rPr>
-                        <a:t>TA - Parada Programada</a:t>
-                      </a:r>
-                      <a:endParaRPr lang="en-US" sz="950" dirty="0">
-                        <a:latin typeface="Calibri" charset="0"/>
-                        <a:ea typeface="Calibri" charset="0"/>
-                        <a:cs typeface="Calibri" charset="0"/>
-                      </a:endParaRPr>
-                    </a:p>
-                  </a:txBody>
-                  <a:tcPr marL="91440" marR="91440" marT="45720" marB="45720" anchor="ctr">
-                    <a:lnL w="6350" cap="flat" cmpd="sng" algn="ctr">
-                      <a:solidFill>
-                        <a:srgbClr val="E3E8E9"/>
-                      </a:solidFill>
-                      <a:prstDash val="solid"/>
-                      <a:round/>
-                      <a:headEnd type="none" w="med" len="med"/>
-                      <a:tailEnd type="none" w="med" len="med"/>
-                    </a:lnL>
-                    <a:lnR w="6350" cap="flat" cmpd="sng" algn="ctr">
-                      <a:solidFill>
-                        <a:srgbClr val="E3E8E9"/>
-                      </a:solidFill>
-                      <a:prstDash val="solid"/>
-                      <a:round/>
-                      <a:headEnd type="none" w="med" len="med"/>
-                      <a:tailEnd type="none" w="med" len="med"/>
-                    </a:lnR>
-                    <a:lnT w="6350" cap="flat" cmpd="sng" algn="ctr">
-                      <a:solidFill>
-                        <a:srgbClr val="E3E8E9"/>
-                      </a:solidFill>
-                      <a:prstDash val="solid"/>
-                      <a:round/>
-                      <a:headEnd type="none" w="med" len="med"/>
-                      <a:tailEnd type="none" w="med" len="med"/>
-                    </a:lnT>
-                    <a:lnB w="6350" cap="flat" cmpd="sng" algn="ctr">
-                      <a:solidFill>
-                        <a:srgbClr val="E3E8E9"/>
-                      </a:solidFill>
-                      <a:prstDash val="solid"/>
-                      <a:round/>
-                      <a:headEnd type="none" w="med" len="med"/>
-                      <a:tailEnd type="none" w="med" len="med"/>
-                    </a:lnB>
-                    <a:solidFill>
-                      <a:srgbClr val="F0F4F5"/>
-                    </a:solidFill>
-                  </a:tcPr>
-                </a:tc>
-                <a:tc>
-                  <a:txBody>
-                    <a:bodyPr/>
-                    <a:lstStyle/>
-                    <a:p>
-                      <a:pPr algn="r" indent="0" marL="0">
-                        <a:buNone/>
-                      </a:pPr>
-                      <a:r>
-                        <a:rPr lang="en-US" sz="1000" b="1" dirty="0">
-                          <a:solidFill>
-                            <a:srgbClr val="0B2A3D"/>
-                          </a:solidFill>
-                          <a:latin typeface="Calibri" pitchFamily="34" charset="0"/>
-                          <a:ea typeface="Calibri" pitchFamily="34" charset="-122"/>
-                          <a:cs typeface="Calibri" pitchFamily="34" charset="-120"/>
-                        </a:rPr>
-                        <a:t>US$ 57,9 mil</a:t>
-                      </a:r>
-                      <a:endParaRPr lang="en-US" sz="1000" dirty="0">
-                        <a:latin typeface="Calibri" charset="0"/>
-                        <a:ea typeface="Calibri" charset="0"/>
-                        <a:cs typeface="Calibri" charset="0"/>
-                      </a:endParaRPr>
-                    </a:p>
-                  </a:txBody>
-                  <a:tcPr marL="91440" marR="91440" marT="45720" marB="45720" anchor="ctr">
-                    <a:lnL w="6350" cap="flat" cmpd="sng" algn="ctr">
-                      <a:solidFill>
-                        <a:srgbClr val="E3E8E9"/>
-                      </a:solidFill>
-                      <a:prstDash val="solid"/>
-                      <a:round/>
-                      <a:headEnd type="none" w="med" len="med"/>
-                      <a:tailEnd type="none" w="med" len="med"/>
-                    </a:lnL>
-                    <a:lnR w="6350" cap="flat" cmpd="sng" algn="ctr">
-                      <a:solidFill>
-                        <a:srgbClr val="E3E8E9"/>
-                      </a:solidFill>
-                      <a:prstDash val="solid"/>
-                      <a:round/>
-                      <a:headEnd type="none" w="med" len="med"/>
-                      <a:tailEnd type="none" w="med" len="med"/>
-                    </a:lnR>
-                    <a:lnT w="6350" cap="flat" cmpd="sng" algn="ctr">
-                      <a:solidFill>
-                        <a:srgbClr val="E3E8E9"/>
-                      </a:solidFill>
-                      <a:prstDash val="solid"/>
-                      <a:round/>
-                      <a:headEnd type="none" w="med" len="med"/>
-                      <a:tailEnd type="none" w="med" len="med"/>
-                    </a:lnT>
-                    <a:lnB w="6350" cap="flat" cmpd="sng" algn="ctr">
-                      <a:solidFill>
-                        <a:srgbClr val="E3E8E9"/>
-                      </a:solidFill>
-                      <a:prstDash val="solid"/>
-                      <a:round/>
-                      <a:headEnd type="none" w="med" len="med"/>
-                      <a:tailEnd type="none" w="med" len="med"/>
-                    </a:lnB>
-                    <a:solidFill>
-                      <a:srgbClr val="F0F4F5"/>
-                    </a:solidFill>
-                  </a:tcPr>
-                </a:tc>
-              </a:tr>
-              <a:tr h="288036">
-                <a:tc gridSpan="3">
-                  <a:txBody>
-                    <a:bodyPr/>
-                    <a:lstStyle/>
-                    <a:p>
-                      <a:pPr indent="0" marL="0">
-                        <a:buNone/>
-                      </a:pPr>
-                      <a:r>
-                        <a:rPr lang="en-US" sz="950" i="1" dirty="0">
-                          <a:solidFill>
-                            <a:srgbClr val="145C68"/>
-                          </a:solidFill>
-                          <a:latin typeface="Calibri" pitchFamily="34" charset="0"/>
-                          <a:ea typeface="Calibri" pitchFamily="34" charset="-122"/>
-                          <a:cs typeface="Calibri" pitchFamily="34" charset="-120"/>
-                        </a:rPr>
-                        <a:t>Outros 16 escopos (itens de menor valor individual)</a:t>
-                      </a:r>
-                      <a:endParaRPr lang="en-US" sz="950" dirty="0">
-                        <a:latin typeface="Calibri" charset="0"/>
-                        <a:ea typeface="Calibri" charset="0"/>
-                        <a:cs typeface="Calibri" charset="0"/>
-                      </a:endParaRPr>
-                    </a:p>
-                  </a:txBody>
-                  <a:tcPr marL="91440" marR="91440" marT="45720" marB="45720" anchor="ctr">
-                    <a:lnL w="6350" cap="flat" cmpd="sng" algn="ctr">
-                      <a:solidFill>
-                        <a:srgbClr val="E3E8E9"/>
-                      </a:solidFill>
-                      <a:prstDash val="solid"/>
-                      <a:round/>
-                      <a:headEnd type="none" w="med" len="med"/>
-                      <a:tailEnd type="none" w="med" len="med"/>
-                    </a:lnL>
-                    <a:lnR w="6350" cap="flat" cmpd="sng" algn="ctr">
-                      <a:solidFill>
-                        <a:srgbClr val="E3E8E9"/>
-                      </a:solidFill>
-                      <a:prstDash val="solid"/>
-                      <a:round/>
-                      <a:headEnd type="none" w="med" len="med"/>
-                      <a:tailEnd type="none" w="med" len="med"/>
-                    </a:lnR>
-                    <a:lnT w="6350" cap="flat" cmpd="sng" algn="ctr">
-                      <a:solidFill>
-                        <a:srgbClr val="E3E8E9"/>
-                      </a:solidFill>
-                      <a:prstDash val="solid"/>
-                      <a:round/>
-                      <a:headEnd type="none" w="med" len="med"/>
-                      <a:tailEnd type="none" w="med" len="med"/>
-                    </a:lnT>
-                    <a:lnB w="6350" cap="flat" cmpd="sng" algn="ctr">
-                      <a:solidFill>
-                        <a:srgbClr val="E3E8E9"/>
-                      </a:solidFill>
-                      <a:prstDash val="solid"/>
-                      <a:round/>
-                      <a:headEnd type="none" w="med" len="med"/>
-                      <a:tailEnd type="none" w="med" len="med"/>
-                    </a:lnB>
-                    <a:solidFill>
-                      <a:srgbClr val="DCE8E2"/>
-                    </a:solidFill>
-                  </a:tcPr>
-                </a:tc>
-                <a:tc hMerge="1">
-                  <a:tcPr/>
-                </a:tc>
-                <a:tc hMerge="1">
-                  <a:tcPr/>
-                </a:tc>
-                <a:tc>
-                  <a:txBody>
-                    <a:bodyPr/>
-                    <a:lstStyle/>
-                    <a:p>
-                      <a:pPr algn="r" indent="0" marL="0">
-                        <a:buNone/>
-                      </a:pPr>
-                      <a:r>
-                        <a:rPr lang="en-US" sz="1000" b="1" i="1" dirty="0">
-                          <a:solidFill>
-                            <a:srgbClr val="0B2A3D"/>
-                          </a:solidFill>
-                          <a:latin typeface="Calibri" pitchFamily="34" charset="0"/>
-                          <a:ea typeface="Calibri" pitchFamily="34" charset="-122"/>
-                          <a:cs typeface="Calibri" pitchFamily="34" charset="-120"/>
-                        </a:rPr>
-                        <a:t>US$ 473,0 mil</a:t>
-                      </a:r>
-                      <a:endParaRPr lang="en-US" sz="1000" dirty="0">
-                        <a:latin typeface="Calibri" charset="0"/>
-                        <a:ea typeface="Calibri" charset="0"/>
-                        <a:cs typeface="Calibri" charset="0"/>
-                      </a:endParaRPr>
-                    </a:p>
-                  </a:txBody>
-                  <a:tcPr marL="91440" marR="91440" marT="45720" marB="45720" anchor="ctr">
-                    <a:lnL w="6350" cap="flat" cmpd="sng" algn="ctr">
-                      <a:solidFill>
-                        <a:srgbClr val="E3E8E9"/>
-                      </a:solidFill>
-                      <a:prstDash val="solid"/>
-                      <a:round/>
-                      <a:headEnd type="none" w="med" len="med"/>
-                      <a:tailEnd type="none" w="med" len="med"/>
-                    </a:lnL>
-                    <a:lnR w="6350" cap="flat" cmpd="sng" algn="ctr">
-                      <a:solidFill>
-                        <a:srgbClr val="E3E8E9"/>
-                      </a:solidFill>
-                      <a:prstDash val="solid"/>
-                      <a:round/>
-                      <a:headEnd type="none" w="med" len="med"/>
-                      <a:tailEnd type="none" w="med" len="med"/>
-                    </a:lnR>
-                    <a:lnT w="6350" cap="flat" cmpd="sng" algn="ctr">
-                      <a:solidFill>
-                        <a:srgbClr val="E3E8E9"/>
-                      </a:solidFill>
-                      <a:prstDash val="solid"/>
-                      <a:round/>
-                      <a:headEnd type="none" w="med" len="med"/>
-                      <a:tailEnd type="none" w="med" len="med"/>
-                    </a:lnT>
-                    <a:lnB w="6350" cap="flat" cmpd="sng" algn="ctr">
-                      <a:solidFill>
-                        <a:srgbClr val="E3E8E9"/>
-                      </a:solidFill>
-                      <a:prstDash val="solid"/>
-                      <a:round/>
-                      <a:headEnd type="none" w="med" len="med"/>
-                      <a:tailEnd type="none" w="med" len="med"/>
-                    </a:lnB>
-                    <a:solidFill>
-                      <a:srgbClr val="DCE8E2"/>
                     </a:solidFill>
                   </a:tcPr>
                 </a:tc>
@@ -27807,7 +23209,7 @@
                 <a:ea typeface="Calibri" pitchFamily="34" charset="-122"/>
                 <a:cs typeface="Calibri" pitchFamily="34" charset="-120"/>
               </a:rPr>
-              <a:t>Fonte: Plano Integrado · aba 'Geral - Em análise' · coluna 'Valor Total' · itens de Cost Allocation = CAPEX, status 'Contar' + 'TA'. Lista completa disponível na planilha em anexo. Extrato pendente de atualização — pode não somar exatamente ao total da Composição de Custo (o valor de TA foi atualizado manualmente).</a:t>
+              <a:t>Fonte: Plano Integrado · aba 'Geral - Em análise' · coluna 'Valor Total' · itens de Cost Allocation = CAPEX, status 'Contar' (não inclui Parada Programada, status 'TA'). Lista completa disponível na planilha em anexo.</a:t>
             </a:r>
             <a:endParaRPr lang="en-US" sz="850" dirty="0"/>
           </a:p>

--- a/PRIO_Plano_Trabalho_CAPEX_2027.pptx
+++ b/PRIO_Plano_Trabalho_CAPEX_2027.pptx
@@ -10362,7 +10362,7 @@
         <p:spPr>
           <a:xfrm>
             <a:off x="457200" y="1417320"/>
-            <a:ext cx="2615184" cy="1234440"/>
+            <a:ext cx="3627120" cy="1234440"/>
           </a:xfrm>
           <a:prstGeom prst="roundRect">
             <a:avLst>
@@ -10384,7 +10384,7 @@
         <p:spPr>
           <a:xfrm>
             <a:off x="621792" y="1563624"/>
-            <a:ext cx="2286000" cy="548640"/>
+            <a:ext cx="3297936" cy="548640"/>
           </a:xfrm>
           <a:prstGeom prst="rect">
             <a:avLst/>
@@ -10423,7 +10423,7 @@
         <p:spPr>
           <a:xfrm>
             <a:off x="621792" y="2093976"/>
-            <a:ext cx="2286000" cy="228600"/>
+            <a:ext cx="3297936" cy="228600"/>
           </a:xfrm>
           <a:prstGeom prst="rect">
             <a:avLst/>
@@ -10462,7 +10462,7 @@
         <p:spPr>
           <a:xfrm>
             <a:off x="621792" y="2313432"/>
-            <a:ext cx="2286000" cy="274320"/>
+            <a:ext cx="3297936" cy="274320"/>
           </a:xfrm>
           <a:prstGeom prst="rect">
             <a:avLst/>
@@ -10486,7 +10486,7 @@
                 <a:ea typeface="Calibri" pitchFamily="34" charset="-122"/>
                 <a:cs typeface="Calibri" pitchFamily="34" charset="-120"/>
               </a:rPr>
-              <a:t>excl. Desenvolvimento de Produção</a:t>
+              <a:t>excl. Desenvolvimento de Produção e TA</a:t>
             </a:r>
             <a:endParaRPr lang="en-US" sz="850" dirty="0"/>
           </a:p>
@@ -10500,8 +10500,8 @@
         </p:nvSpPr>
         <p:spPr>
           <a:xfrm>
-            <a:off x="3255264" y="1417320"/>
-            <a:ext cx="2615184" cy="1234440"/>
+            <a:off x="4267200" y="1417320"/>
+            <a:ext cx="3627120" cy="1234440"/>
           </a:xfrm>
           <a:prstGeom prst="roundRect">
             <a:avLst>
@@ -10522,147 +10522,8 @@
         </p:nvSpPr>
         <p:spPr>
           <a:xfrm>
-            <a:off x="3419856" y="1563624"/>
-            <a:ext cx="2286000" cy="548640"/>
-          </a:xfrm>
-          <a:prstGeom prst="rect">
-            <a:avLst/>
-          </a:prstGeom>
-          <a:noFill/>
-          <a:ln/>
-        </p:spPr>
-        <p:txBody>
-          <a:bodyPr wrap="square" lIns="0" tIns="0" rIns="0" bIns="0" rtlCol="0" anchor="ctr"/>
-          <a:lstStyle/>
-          <a:p>
-            <a:pPr indent="0" marL="0">
-              <a:buNone/>
-            </a:pPr>
-            <a:r>
-              <a:rPr lang="en-US" sz="2600" b="1" dirty="0">
-                <a:solidFill>
-                  <a:srgbClr val="0B2A3D"/>
-                </a:solidFill>
-                <a:latin typeface="Cambria" pitchFamily="34" charset="0"/>
-                <a:ea typeface="Cambria" pitchFamily="34" charset="-122"/>
-                <a:cs typeface="Cambria" pitchFamily="34" charset="-120"/>
-              </a:rPr>
-              <a:t>318</a:t>
-            </a:r>
-            <a:endParaRPr lang="en-US" sz="2600" dirty="0"/>
-          </a:p>
-        </p:txBody>
-      </p:sp>
-      <p:sp>
-        <p:nvSpPr>
-          <p:cNvPr id="10" name="Text 8"/>
-          <p:cNvSpPr txBox="1"/>
-          <p:nvPr/>
-        </p:nvSpPr>
-        <p:spPr>
-          <a:xfrm>
-            <a:off x="3419856" y="2093976"/>
-            <a:ext cx="2286000" cy="228600"/>
-          </a:xfrm>
-          <a:prstGeom prst="rect">
-            <a:avLst/>
-          </a:prstGeom>
-          <a:noFill/>
-          <a:ln/>
-        </p:spPr>
-        <p:txBody>
-          <a:bodyPr wrap="square" lIns="0" tIns="0" rIns="0" bIns="0" rtlCol="0" anchor="ctr"/>
-          <a:lstStyle/>
-          <a:p>
-            <a:pPr indent="0" marL="0">
-              <a:buNone/>
-            </a:pPr>
-            <a:r>
-              <a:rPr lang="en-US" sz="950" b="1" spc="100" kern="0" dirty="0">
-                <a:solidFill>
-                  <a:srgbClr val="145C68"/>
-                </a:solidFill>
-                <a:latin typeface="Calibri" pitchFamily="34" charset="0"/>
-                <a:ea typeface="Calibri" pitchFamily="34" charset="-122"/>
-                <a:cs typeface="Calibri" pitchFamily="34" charset="-120"/>
-              </a:rPr>
-              <a:t>POB TOTAL</a:t>
-            </a:r>
-            <a:endParaRPr lang="en-US" sz="950" dirty="0"/>
-          </a:p>
-        </p:txBody>
-      </p:sp>
-      <p:sp>
-        <p:nvSpPr>
-          <p:cNvPr id="11" name="Text 9"/>
-          <p:cNvSpPr txBox="1"/>
-          <p:nvPr/>
-        </p:nvSpPr>
-        <p:spPr>
-          <a:xfrm>
-            <a:off x="3419856" y="2313432"/>
-            <a:ext cx="2286000" cy="274320"/>
-          </a:xfrm>
-          <a:prstGeom prst="rect">
-            <a:avLst/>
-          </a:prstGeom>
-          <a:noFill/>
-          <a:ln/>
-        </p:spPr>
-        <p:txBody>
-          <a:bodyPr wrap="square" lIns="0" tIns="0" rIns="0" bIns="0" rtlCol="0" anchor="ctr"/>
-          <a:lstStyle/>
-          <a:p>
-            <a:pPr indent="0" marL="0">
-              <a:buNone/>
-            </a:pPr>
-            <a:r>
-              <a:rPr lang="en-US" sz="850" dirty="0">
-                <a:solidFill>
-                  <a:srgbClr val="5B6B73"/>
-                </a:solidFill>
-                <a:latin typeface="Calibri" pitchFamily="34" charset="0"/>
-                <a:ea typeface="Calibri" pitchFamily="34" charset="-122"/>
-                <a:cs typeface="Calibri" pitchFamily="34" charset="-120"/>
-              </a:rPr>
-              <a:t>pessoas a bordo alocadas</a:t>
-            </a:r>
-            <a:endParaRPr lang="en-US" sz="850" dirty="0"/>
-          </a:p>
-        </p:txBody>
-      </p:sp>
-      <p:sp>
-        <p:nvSpPr>
-          <p:cNvPr id="12" name="Shape 10"/>
-          <p:cNvSpPr/>
-          <p:nvPr/>
-        </p:nvSpPr>
-        <p:spPr>
-          <a:xfrm>
-            <a:off x="6053328" y="1417320"/>
-            <a:ext cx="2615184" cy="1234440"/>
-          </a:xfrm>
-          <a:prstGeom prst="roundRect">
-            <a:avLst>
-              <a:gd name="adj" fmla="val 5926"/>
-            </a:avLst>
-          </a:prstGeom>
-          <a:solidFill>
-            <a:srgbClr val="F0F4F5"/>
-          </a:solidFill>
-          <a:ln/>
-        </p:spPr>
-      </p:sp>
-      <p:sp>
-        <p:nvSpPr>
-          <p:cNvPr id="13" name="Text 11"/>
-          <p:cNvSpPr txBox="1"/>
-          <p:nvPr/>
-        </p:nvSpPr>
-        <p:spPr>
-          <a:xfrm>
-            <a:off x="6217920" y="1563624"/>
-            <a:ext cx="2286000" cy="548640"/>
+            <a:off x="4431792" y="1563624"/>
+            <a:ext cx="3297936" cy="548640"/>
           </a:xfrm>
           <a:prstGeom prst="rect">
             <a:avLst/>
@@ -10694,14 +10555,14 @@
       </p:sp>
       <p:sp>
         <p:nvSpPr>
-          <p:cNvPr id="14" name="Text 12"/>
+          <p:cNvPr id="10" name="Text 8"/>
           <p:cNvSpPr txBox="1"/>
           <p:nvPr/>
         </p:nvSpPr>
         <p:spPr>
           <a:xfrm>
-            <a:off x="6217920" y="2093976"/>
-            <a:ext cx="2286000" cy="228600"/>
+            <a:off x="4431792" y="2093976"/>
+            <a:ext cx="3297936" cy="228600"/>
           </a:xfrm>
           <a:prstGeom prst="rect">
             <a:avLst/>
@@ -10733,14 +10594,14 @@
       </p:sp>
       <p:sp>
         <p:nvSpPr>
-          <p:cNvPr id="15" name="Text 13"/>
+          <p:cNvPr id="11" name="Text 9"/>
           <p:cNvSpPr txBox="1"/>
           <p:nvPr/>
         </p:nvSpPr>
         <p:spPr>
           <a:xfrm>
-            <a:off x="6217920" y="2313432"/>
-            <a:ext cx="2286000" cy="274320"/>
+            <a:off x="4431792" y="2313432"/>
+            <a:ext cx="3297936" cy="274320"/>
           </a:xfrm>
           <a:prstGeom prst="rect">
             <a:avLst/>
@@ -10772,14 +10633,14 @@
       </p:sp>
       <p:sp>
         <p:nvSpPr>
-          <p:cNvPr id="16" name="Shape 14"/>
+          <p:cNvPr id="12" name="Shape 10"/>
           <p:cNvSpPr/>
           <p:nvPr/>
         </p:nvSpPr>
         <p:spPr>
           <a:xfrm>
-            <a:off x="8851392" y="1417320"/>
-            <a:ext cx="2615184" cy="1234440"/>
+            <a:off x="8077200" y="1417320"/>
+            <a:ext cx="3627120" cy="1234440"/>
           </a:xfrm>
           <a:prstGeom prst="roundRect">
             <a:avLst>
@@ -10794,14 +10655,14 @@
       </p:sp>
       <p:sp>
         <p:nvSpPr>
-          <p:cNvPr id="17" name="Text 15"/>
+          <p:cNvPr id="13" name="Text 11"/>
           <p:cNvSpPr txBox="1"/>
           <p:nvPr/>
         </p:nvSpPr>
         <p:spPr>
           <a:xfrm>
-            <a:off x="9015984" y="1563624"/>
-            <a:ext cx="2286000" cy="548640"/>
+            <a:off x="8241792" y="1563624"/>
+            <a:ext cx="3297936" cy="548640"/>
           </a:xfrm>
           <a:prstGeom prst="rect">
             <a:avLst/>
@@ -10833,14 +10694,14 @@
       </p:sp>
       <p:sp>
         <p:nvSpPr>
-          <p:cNvPr id="18" name="Text 16"/>
+          <p:cNvPr id="14" name="Text 12"/>
           <p:cNvSpPr txBox="1"/>
           <p:nvPr/>
         </p:nvSpPr>
         <p:spPr>
           <a:xfrm>
-            <a:off x="9015984" y="2093976"/>
-            <a:ext cx="2286000" cy="228600"/>
+            <a:off x="8241792" y="2093976"/>
+            <a:ext cx="3297936" cy="228600"/>
           </a:xfrm>
           <a:prstGeom prst="rect">
             <a:avLst/>
@@ -10872,14 +10733,14 @@
       </p:sp>
       <p:sp>
         <p:nvSpPr>
-          <p:cNvPr id="19" name="Text 17"/>
+          <p:cNvPr id="15" name="Text 13"/>
           <p:cNvSpPr txBox="1"/>
           <p:nvPr/>
         </p:nvSpPr>
         <p:spPr>
           <a:xfrm>
-            <a:off x="9015984" y="2313432"/>
-            <a:ext cx="2286000" cy="274320"/>
+            <a:off x="8241792" y="2313432"/>
+            <a:ext cx="3297936" cy="274320"/>
           </a:xfrm>
           <a:prstGeom prst="rect">
             <a:avLst/>
@@ -10911,7 +10772,7 @@
       </p:sp>
       <p:sp>
         <p:nvSpPr>
-          <p:cNvPr id="20" name="Text 18"/>
+          <p:cNvPr id="16" name="Text 14"/>
           <p:cNvSpPr txBox="1"/>
           <p:nvPr/>
         </p:nvSpPr>
@@ -10950,7 +10811,7 @@
       </p:sp>
       <p:graphicFrame>
         <p:nvGraphicFramePr>
-          <p:cNvPr id="21" name="Chart 0" descr=""/>
+          <p:cNvPr id="17" name="Chart 0" descr=""/>
           <p:cNvGraphicFramePr/>
           <p:nvPr/>
         </p:nvGraphicFramePr>
@@ -10987,10 +10848,9 @@
             <a:tbl>
               <a:tblPr/>
               <a:tblGrid>
-                <a:gridCol w="1797912"/>
+                <a:gridCol w="2220950"/>
+                <a:gridCol w="1692152"/>
                 <a:gridCol w="1374874"/>
-                <a:gridCol w="1057595"/>
-                <a:gridCol w="1057595"/>
               </a:tblGrid>
               <a:tr h="329184">
                 <a:tc>
@@ -11069,67 +10929,6 @@
                           </a:solidFill>
                         </a:rPr>
                         <a:t>CAPEX</a:t>
-                      </a:r>
-                      <a:endParaRPr lang="en-US" sz="1000" dirty="0"/>
-                    </a:p>
-                  </a:txBody>
-                  <a:tcPr marL="91440" marR="91440" marT="45720" marB="45720" anchor="ctr">
-                    <a:lnL w="6350" cap="flat" cmpd="sng" algn="ctr">
-                      <a:solidFill>
-                        <a:srgbClr val="E3E8E9"/>
-                      </a:solidFill>
-                      <a:prstDash val="solid"/>
-                      <a:round/>
-                      <a:headEnd type="none" w="med" len="med"/>
-                      <a:tailEnd type="none" w="med" len="med"/>
-                    </a:lnL>
-                    <a:lnR w="6350" cap="flat" cmpd="sng" algn="ctr">
-                      <a:solidFill>
-                        <a:srgbClr val="E3E8E9"/>
-                      </a:solidFill>
-                      <a:prstDash val="solid"/>
-                      <a:round/>
-                      <a:headEnd type="none" w="med" len="med"/>
-                      <a:tailEnd type="none" w="med" len="med"/>
-                    </a:lnR>
-                    <a:lnT w="6350" cap="flat" cmpd="sng" algn="ctr">
-                      <a:solidFill>
-                        <a:srgbClr val="E3E8E9"/>
-                      </a:solidFill>
-                      <a:prstDash val="solid"/>
-                      <a:round/>
-                      <a:headEnd type="none" w="med" len="med"/>
-                      <a:tailEnd type="none" w="med" len="med"/>
-                    </a:lnT>
-                    <a:lnB w="6350" cap="flat" cmpd="sng" algn="ctr">
-                      <a:solidFill>
-                        <a:srgbClr val="E3E8E9"/>
-                      </a:solidFill>
-                      <a:prstDash val="solid"/>
-                      <a:round/>
-                      <a:headEnd type="none" w="med" len="med"/>
-                      <a:tailEnd type="none" w="med" len="med"/>
-                    </a:lnB>
-                    <a:solidFill>
-                      <a:srgbClr val="0B2A3D"/>
-                    </a:solidFill>
-                  </a:tcPr>
-                </a:tc>
-                <a:tc>
-                  <a:txBody>
-                    <a:bodyPr/>
-                    <a:lstStyle/>
-                    <a:p>
-                      <a:pPr algn="r" indent="0" marL="0">
-                        <a:buNone/>
-                      </a:pPr>
-                      <a:r>
-                        <a:rPr lang="en-US" sz="1000" b="1" dirty="0">
-                          <a:solidFill>
-                            <a:srgbClr val="FFFFFF"/>
-                          </a:solidFill>
-                        </a:rPr>
-                        <a:t>POB</a:t>
                       </a:r>
                       <a:endParaRPr lang="en-US" sz="1000" dirty="0"/>
                     </a:p>
@@ -11375,67 +11174,6 @@
                             <a:srgbClr val="1C2B33"/>
                           </a:solidFill>
                         </a:rPr>
-                        <a:t>141</a:t>
-                      </a:r>
-                      <a:endParaRPr lang="en-US" sz="1050" dirty="0"/>
-                    </a:p>
-                  </a:txBody>
-                  <a:tcPr marL="91440" marR="91440" marT="45720" marB="45720" anchor="ctr">
-                    <a:lnL w="6350" cap="flat" cmpd="sng" algn="ctr">
-                      <a:solidFill>
-                        <a:srgbClr val="E3E8E9"/>
-                      </a:solidFill>
-                      <a:prstDash val="solid"/>
-                      <a:round/>
-                      <a:headEnd type="none" w="med" len="med"/>
-                      <a:tailEnd type="none" w="med" len="med"/>
-                    </a:lnL>
-                    <a:lnR w="6350" cap="flat" cmpd="sng" algn="ctr">
-                      <a:solidFill>
-                        <a:srgbClr val="E3E8E9"/>
-                      </a:solidFill>
-                      <a:prstDash val="solid"/>
-                      <a:round/>
-                      <a:headEnd type="none" w="med" len="med"/>
-                      <a:tailEnd type="none" w="med" len="med"/>
-                    </a:lnR>
-                    <a:lnT w="6350" cap="flat" cmpd="sng" algn="ctr">
-                      <a:solidFill>
-                        <a:srgbClr val="E3E8E9"/>
-                      </a:solidFill>
-                      <a:prstDash val="solid"/>
-                      <a:round/>
-                      <a:headEnd type="none" w="med" len="med"/>
-                      <a:tailEnd type="none" w="med" len="med"/>
-                    </a:lnT>
-                    <a:lnB w="6350" cap="flat" cmpd="sng" algn="ctr">
-                      <a:solidFill>
-                        <a:srgbClr val="E3E8E9"/>
-                      </a:solidFill>
-                      <a:prstDash val="solid"/>
-                      <a:round/>
-                      <a:headEnd type="none" w="med" len="med"/>
-                      <a:tailEnd type="none" w="med" len="med"/>
-                    </a:lnB>
-                    <a:solidFill>
-                      <a:srgbClr val="FFFFFF"/>
-                    </a:solidFill>
-                  </a:tcPr>
-                </a:tc>
-                <a:tc>
-                  <a:txBody>
-                    <a:bodyPr/>
-                    <a:lstStyle/>
-                    <a:p>
-                      <a:pPr algn="r" indent="0" marL="0">
-                        <a:buNone/>
-                      </a:pPr>
-                      <a:r>
-                        <a:rPr lang="en-US" sz="1050" dirty="0">
-                          <a:solidFill>
-                            <a:srgbClr val="1C2B33"/>
-                          </a:solidFill>
-                        </a:rPr>
                         <a:t>23</a:t>
                       </a:r>
                       <a:endParaRPr lang="en-US" sz="1050" dirty="0"/>
@@ -11621,67 +11359,6 @@
                             <a:srgbClr val="1C2B33"/>
                           </a:solidFill>
                         </a:rPr>
-                        <a:t>81</a:t>
-                      </a:r>
-                      <a:endParaRPr lang="en-US" sz="1050" dirty="0"/>
-                    </a:p>
-                  </a:txBody>
-                  <a:tcPr marL="91440" marR="91440" marT="45720" marB="45720" anchor="ctr">
-                    <a:lnL w="6350" cap="flat" cmpd="sng" algn="ctr">
-                      <a:solidFill>
-                        <a:srgbClr val="E3E8E9"/>
-                      </a:solidFill>
-                      <a:prstDash val="solid"/>
-                      <a:round/>
-                      <a:headEnd type="none" w="med" len="med"/>
-                      <a:tailEnd type="none" w="med" len="med"/>
-                    </a:lnL>
-                    <a:lnR w="6350" cap="flat" cmpd="sng" algn="ctr">
-                      <a:solidFill>
-                        <a:srgbClr val="E3E8E9"/>
-                      </a:solidFill>
-                      <a:prstDash val="solid"/>
-                      <a:round/>
-                      <a:headEnd type="none" w="med" len="med"/>
-                      <a:tailEnd type="none" w="med" len="med"/>
-                    </a:lnR>
-                    <a:lnT w="6350" cap="flat" cmpd="sng" algn="ctr">
-                      <a:solidFill>
-                        <a:srgbClr val="E3E8E9"/>
-                      </a:solidFill>
-                      <a:prstDash val="solid"/>
-                      <a:round/>
-                      <a:headEnd type="none" w="med" len="med"/>
-                      <a:tailEnd type="none" w="med" len="med"/>
-                    </a:lnT>
-                    <a:lnB w="6350" cap="flat" cmpd="sng" algn="ctr">
-                      <a:solidFill>
-                        <a:srgbClr val="E3E8E9"/>
-                      </a:solidFill>
-                      <a:prstDash val="solid"/>
-                      <a:round/>
-                      <a:headEnd type="none" w="med" len="med"/>
-                      <a:tailEnd type="none" w="med" len="med"/>
-                    </a:lnB>
-                    <a:solidFill>
-                      <a:srgbClr val="F0F4F5"/>
-                    </a:solidFill>
-                  </a:tcPr>
-                </a:tc>
-                <a:tc>
-                  <a:txBody>
-                    <a:bodyPr/>
-                    <a:lstStyle/>
-                    <a:p>
-                      <a:pPr algn="r" indent="0" marL="0">
-                        <a:buNone/>
-                      </a:pPr>
-                      <a:r>
-                        <a:rPr lang="en-US" sz="1050" dirty="0">
-                          <a:solidFill>
-                            <a:srgbClr val="1C2B33"/>
-                          </a:solidFill>
-                        </a:rPr>
                         <a:t>10</a:t>
                       </a:r>
                       <a:endParaRPr lang="en-US" sz="1050" dirty="0"/>
@@ -11867,67 +11544,6 @@
                             <a:srgbClr val="1C2B33"/>
                           </a:solidFill>
                         </a:rPr>
-                        <a:t>51</a:t>
-                      </a:r>
-                      <a:endParaRPr lang="en-US" sz="1050" dirty="0"/>
-                    </a:p>
-                  </a:txBody>
-                  <a:tcPr marL="91440" marR="91440" marT="45720" marB="45720" anchor="ctr">
-                    <a:lnL w="6350" cap="flat" cmpd="sng" algn="ctr">
-                      <a:solidFill>
-                        <a:srgbClr val="E3E8E9"/>
-                      </a:solidFill>
-                      <a:prstDash val="solid"/>
-                      <a:round/>
-                      <a:headEnd type="none" w="med" len="med"/>
-                      <a:tailEnd type="none" w="med" len="med"/>
-                    </a:lnL>
-                    <a:lnR w="6350" cap="flat" cmpd="sng" algn="ctr">
-                      <a:solidFill>
-                        <a:srgbClr val="E3E8E9"/>
-                      </a:solidFill>
-                      <a:prstDash val="solid"/>
-                      <a:round/>
-                      <a:headEnd type="none" w="med" len="med"/>
-                      <a:tailEnd type="none" w="med" len="med"/>
-                    </a:lnR>
-                    <a:lnT w="6350" cap="flat" cmpd="sng" algn="ctr">
-                      <a:solidFill>
-                        <a:srgbClr val="E3E8E9"/>
-                      </a:solidFill>
-                      <a:prstDash val="solid"/>
-                      <a:round/>
-                      <a:headEnd type="none" w="med" len="med"/>
-                      <a:tailEnd type="none" w="med" len="med"/>
-                    </a:lnT>
-                    <a:lnB w="6350" cap="flat" cmpd="sng" algn="ctr">
-                      <a:solidFill>
-                        <a:srgbClr val="E3E8E9"/>
-                      </a:solidFill>
-                      <a:prstDash val="solid"/>
-                      <a:round/>
-                      <a:headEnd type="none" w="med" len="med"/>
-                      <a:tailEnd type="none" w="med" len="med"/>
-                    </a:lnB>
-                    <a:solidFill>
-                      <a:srgbClr val="FFFFFF"/>
-                    </a:solidFill>
-                  </a:tcPr>
-                </a:tc>
-                <a:tc>
-                  <a:txBody>
-                    <a:bodyPr/>
-                    <a:lstStyle/>
-                    <a:p>
-                      <a:pPr algn="r" indent="0" marL="0">
-                        <a:buNone/>
-                      </a:pPr>
-                      <a:r>
-                        <a:rPr lang="en-US" sz="1050" dirty="0">
-                          <a:solidFill>
-                            <a:srgbClr val="1C2B33"/>
-                          </a:solidFill>
-                        </a:rPr>
                         <a:t>7</a:t>
                       </a:r>
                       <a:endParaRPr lang="en-US" sz="1050" dirty="0"/>
@@ -12113,67 +11729,6 @@
                             <a:srgbClr val="1C2B33"/>
                           </a:solidFill>
                         </a:rPr>
-                        <a:t>45</a:t>
-                      </a:r>
-                      <a:endParaRPr lang="en-US" sz="1050" dirty="0"/>
-                    </a:p>
-                  </a:txBody>
-                  <a:tcPr marL="91440" marR="91440" marT="45720" marB="45720" anchor="ctr">
-                    <a:lnL w="6350" cap="flat" cmpd="sng" algn="ctr">
-                      <a:solidFill>
-                        <a:srgbClr val="E3E8E9"/>
-                      </a:solidFill>
-                      <a:prstDash val="solid"/>
-                      <a:round/>
-                      <a:headEnd type="none" w="med" len="med"/>
-                      <a:tailEnd type="none" w="med" len="med"/>
-                    </a:lnL>
-                    <a:lnR w="6350" cap="flat" cmpd="sng" algn="ctr">
-                      <a:solidFill>
-                        <a:srgbClr val="E3E8E9"/>
-                      </a:solidFill>
-                      <a:prstDash val="solid"/>
-                      <a:round/>
-                      <a:headEnd type="none" w="med" len="med"/>
-                      <a:tailEnd type="none" w="med" len="med"/>
-                    </a:lnR>
-                    <a:lnT w="6350" cap="flat" cmpd="sng" algn="ctr">
-                      <a:solidFill>
-                        <a:srgbClr val="E3E8E9"/>
-                      </a:solidFill>
-                      <a:prstDash val="solid"/>
-                      <a:round/>
-                      <a:headEnd type="none" w="med" len="med"/>
-                      <a:tailEnd type="none" w="med" len="med"/>
-                    </a:lnT>
-                    <a:lnB w="6350" cap="flat" cmpd="sng" algn="ctr">
-                      <a:solidFill>
-                        <a:srgbClr val="E3E8E9"/>
-                      </a:solidFill>
-                      <a:prstDash val="solid"/>
-                      <a:round/>
-                      <a:headEnd type="none" w="med" len="med"/>
-                      <a:tailEnd type="none" w="med" len="med"/>
-                    </a:lnB>
-                    <a:solidFill>
-                      <a:srgbClr val="F0F4F5"/>
-                    </a:solidFill>
-                  </a:tcPr>
-                </a:tc>
-                <a:tc>
-                  <a:txBody>
-                    <a:bodyPr/>
-                    <a:lstStyle/>
-                    <a:p>
-                      <a:pPr algn="r" indent="0" marL="0">
-                        <a:buNone/>
-                      </a:pPr>
-                      <a:r>
-                        <a:rPr lang="en-US" sz="1050" dirty="0">
-                          <a:solidFill>
-                            <a:srgbClr val="1C2B33"/>
-                          </a:solidFill>
-                        </a:rPr>
                         <a:t>8</a:t>
                       </a:r>
                       <a:endParaRPr lang="en-US" sz="1050" dirty="0"/>
@@ -12359,67 +11914,6 @@
                             <a:srgbClr val="0B2A3D"/>
                           </a:solidFill>
                         </a:rPr>
-                        <a:t>318</a:t>
-                      </a:r>
-                      <a:endParaRPr lang="en-US" sz="1050" dirty="0"/>
-                    </a:p>
-                  </a:txBody>
-                  <a:tcPr marL="91440" marR="91440" marT="45720" marB="45720" anchor="ctr">
-                    <a:lnL w="6350" cap="flat" cmpd="sng" algn="ctr">
-                      <a:solidFill>
-                        <a:srgbClr val="E3E8E9"/>
-                      </a:solidFill>
-                      <a:prstDash val="solid"/>
-                      <a:round/>
-                      <a:headEnd type="none" w="med" len="med"/>
-                      <a:tailEnd type="none" w="med" len="med"/>
-                    </a:lnL>
-                    <a:lnR w="6350" cap="flat" cmpd="sng" algn="ctr">
-                      <a:solidFill>
-                        <a:srgbClr val="E3E8E9"/>
-                      </a:solidFill>
-                      <a:prstDash val="solid"/>
-                      <a:round/>
-                      <a:headEnd type="none" w="med" len="med"/>
-                      <a:tailEnd type="none" w="med" len="med"/>
-                    </a:lnR>
-                    <a:lnT w="6350" cap="flat" cmpd="sng" algn="ctr">
-                      <a:solidFill>
-                        <a:srgbClr val="E3E8E9"/>
-                      </a:solidFill>
-                      <a:prstDash val="solid"/>
-                      <a:round/>
-                      <a:headEnd type="none" w="med" len="med"/>
-                      <a:tailEnd type="none" w="med" len="med"/>
-                    </a:lnT>
-                    <a:lnB w="6350" cap="flat" cmpd="sng" algn="ctr">
-                      <a:solidFill>
-                        <a:srgbClr val="E3E8E9"/>
-                      </a:solidFill>
-                      <a:prstDash val="solid"/>
-                      <a:round/>
-                      <a:headEnd type="none" w="med" len="med"/>
-                      <a:tailEnd type="none" w="med" len="med"/>
-                    </a:lnB>
-                    <a:solidFill>
-                      <a:srgbClr val="DCE8E2"/>
-                    </a:solidFill>
-                  </a:tcPr>
-                </a:tc>
-                <a:tc>
-                  <a:txBody>
-                    <a:bodyPr/>
-                    <a:lstStyle/>
-                    <a:p>
-                      <a:pPr algn="r" indent="0" marL="0">
-                        <a:buNone/>
-                      </a:pPr>
-                      <a:r>
-                        <a:rPr lang="en-US" sz="1050" b="1" dirty="0">
-                          <a:solidFill>
-                            <a:srgbClr val="0B2A3D"/>
-                          </a:solidFill>
-                        </a:rPr>
                         <a:t>48</a:t>
                       </a:r>
                       <a:endParaRPr lang="en-US" sz="1050" dirty="0"/>
@@ -12474,7 +11968,7 @@
       </p:graphicFrame>
       <p:sp>
         <p:nvSpPr>
-          <p:cNvPr id="23" name="Text 19"/>
+          <p:cNvPr id="19" name="Text 15"/>
           <p:cNvSpPr txBox="1"/>
           <p:nvPr/>
         </p:nvSpPr>

--- a/PRIO_Plano_Trabalho_CAPEX_2027.pptx
+++ b/PRIO_Plano_Trabalho_CAPEX_2027.pptx
@@ -3057,7 +3057,7 @@
                 <a:ea typeface="Calibri" pitchFamily="34" charset="-122"/>
                 <a:cs typeface="Calibri" pitchFamily="34" charset="-120"/>
               </a:rPr>
-              <a:t>Campo Peregrino · Cluster Sul  ·  FPSO Peregrino · PLAT A · PLAT B · PLAT C · FPSO Bravo · Polvo A</a:t>
+              <a:t>Campo Peregrino &amp; Cluster Sul  ·  FPSO Peregrino · PLAT A (WHPA) · PLAT B (WHPB) · PLAT C (WHPC) · FPSO Bravo · Polvo A</a:t>
             </a:r>
             <a:endParaRPr lang="en-US" sz="1500" dirty="0"/>
           </a:p>

--- a/PRIO_Plano_Trabalho_CAPEX_2027.pptx
+++ b/PRIO_Plano_Trabalho_CAPEX_2027.pptx
@@ -25,9 +25,12 @@
     <p:sldId id="273" r:id="rId19"/>
     <p:sldId id="274" r:id="rId20"/>
     <p:sldId id="275" r:id="rId21"/>
+    <p:sldId id="276" r:id="rId22"/>
+    <p:sldId id="277" r:id="rId23"/>
+    <p:sldId id="278" r:id="rId24"/>
   </p:sldIdLst>
   <p:notesMasterIdLst>
-    <p:notesMasterId r:id="rId22"/>
+    <p:notesMasterId r:id="rId25"/>
   </p:notesMasterIdLst>
   <p:sldSz cx="12192000" cy="6858000"/>
   <p:notesSz cx="6858000" cy="12192000"/>
@@ -249,11 +252,22 @@
               <a:effectLst/>
             </c:spPr>
           </c:dPt>
+          <c:dPt>
+            <c:idx val="6"/>
+            <c:invertIfNegative val="0"/>
+            <c:bubble3D val="0"/>
+            <c:spPr>
+              <a:solidFill>
+                <a:srgbClr val="7A2E2E"/>
+              </a:solidFill>
+              <a:effectLst/>
+            </c:spPr>
+          </c:dPt>
           <c:cat>
             <c:multiLvlStrRef>
-              <c:f>Sheet1!$A$2:$A$7</c:f>
+              <c:f>Sheet1!$A$2:$A$8</c:f>
               <c:multiLvlStrCache>
-                <c:ptCount val="6"/>
+                <c:ptCount val="7"/>
                 <c:lvl>
                   <c:pt idx="0">
                     <c:v>FPSO Peregrino</c:v>
@@ -273,16 +287,19 @@
                   <c:pt idx="5">
                     <c:v>Polvo A</c:v>
                   </c:pt>
+                  <c:pt idx="6">
+                    <c:v>FPSO Frade</c:v>
+                  </c:pt>
                 </c:lvl>
               </c:multiLvlStrCache>
             </c:multiLvlStrRef>
           </c:cat>
           <c:val>
             <c:numRef>
-              <c:f>Sheet1!$B$2:$B$7</c:f>
+              <c:f>Sheet1!$B$2:$B$8</c:f>
               <c:numCache>
                 <c:formatCode>General</c:formatCode>
-                <c:ptCount val="6"/>
+                <c:ptCount val="7"/>
                 <c:pt idx="0">
                   <c:v>14.82</c:v>
                 </c:pt>
@@ -300,6 +317,9 @@
                 </c:pt>
                 <c:pt idx="5">
                   <c:v>4.28</c:v>
+                </c:pt>
+                <c:pt idx="6">
+                  <c:v>82.16</c:v>
                 </c:pt>
               </c:numCache>
             </c:numRef>
@@ -1925,6 +1945,270 @@
             <a:fld id="{F7021451-1387-4CA6-816F-3879F97B5CBC}" type="slidenum">
               <a:rPr lang="en-US"/>
               <a:t>20</a:t>
+            </a:fld>
+            <a:endParaRPr lang="en-US"/>
+          </a:p>
+        </p:txBody>
+      </p:sp>
+    </p:spTree>
+    <p:extLst>
+      <p:ext uri="{BB962C8B-B14F-4D97-AF65-F5344CB8AC3E}">
+        <p14:creationId xmlns:p14="http://schemas.microsoft.com/office/powerpoint/2010/main" val="1024086991"/>
+      </p:ext>
+    </p:extLst>
+  </p:cSld>
+  <p:clrMapOvr>
+    <a:masterClrMapping/>
+  </p:clrMapOvr>
+</p:notes>
+</file>
+
+<file path=ppt/notesSlides/notesSlide21.xml><?xml version="1.0" encoding="utf-8"?>
+<p:notes xmlns:a="http://schemas.openxmlformats.org/drawingml/2006/main" xmlns:r="http://schemas.openxmlformats.org/officeDocument/2006/relationships" xmlns:p="http://schemas.openxmlformats.org/presentationml/2006/main">
+  <p:cSld>
+    <p:spTree>
+      <p:nvGrpSpPr>
+        <p:cNvPr id="1" name=""/>
+        <p:cNvGrpSpPr/>
+        <p:nvPr/>
+      </p:nvGrpSpPr>
+      <p:grpSpPr>
+        <a:xfrm>
+          <a:off x="0" y="0"/>
+          <a:ext cx="0" cy="0"/>
+          <a:chOff x="0" y="0"/>
+          <a:chExt cx="0" cy="0"/>
+        </a:xfrm>
+      </p:grpSpPr>
+      <p:sp>
+        <p:nvSpPr>
+          <p:cNvPr id="2" name="Slide Image Placeholder 1"/>
+          <p:cNvSpPr>
+            <a:spLocks noGrp="1" noRot="1" noChangeAspect="1"/>
+          </p:cNvSpPr>
+          <p:nvPr>
+            <p:ph type="sldImg"/>
+          </p:nvPr>
+        </p:nvSpPr>
+        <p:spPr/>
+      </p:sp>
+      <p:sp>
+        <p:nvSpPr>
+          <p:cNvPr id="3" name="Notes Placeholder 2"/>
+          <p:cNvSpPr>
+            <a:spLocks noGrp="1"/>
+          </p:cNvSpPr>
+          <p:nvPr>
+            <p:ph type="body" idx="1"/>
+          </p:nvPr>
+        </p:nvSpPr>
+        <p:spPr/>
+        <p:txBody>
+          <a:bodyPr/>
+          <a:lstStyle/>
+          <a:p>
+            <a:r>
+              <a:rPr lang="en-US" dirty="0"/>
+              <a:t/>
+            </a:r>
+            <a:endParaRPr lang="en-US" dirty="0"/>
+          </a:p>
+        </p:txBody>
+      </p:sp>
+      <p:sp>
+        <p:nvSpPr>
+          <p:cNvPr id="4" name="Slide Number Placeholder 3"/>
+          <p:cNvSpPr>
+            <a:spLocks noGrp="1"/>
+          </p:cNvSpPr>
+          <p:nvPr>
+            <p:ph type="sldNum" sz="quarter" idx="10"/>
+          </p:nvPr>
+        </p:nvSpPr>
+        <p:spPr/>
+        <p:txBody>
+          <a:bodyPr/>
+          <a:lstStyle/>
+          <a:p>
+            <a:fld id="{F7021451-1387-4CA6-816F-3879F97B5CBC}" type="slidenum">
+              <a:rPr lang="en-US"/>
+              <a:t>21</a:t>
+            </a:fld>
+            <a:endParaRPr lang="en-US"/>
+          </a:p>
+        </p:txBody>
+      </p:sp>
+    </p:spTree>
+    <p:extLst>
+      <p:ext uri="{BB962C8B-B14F-4D97-AF65-F5344CB8AC3E}">
+        <p14:creationId xmlns:p14="http://schemas.microsoft.com/office/powerpoint/2010/main" val="1024086991"/>
+      </p:ext>
+    </p:extLst>
+  </p:cSld>
+  <p:clrMapOvr>
+    <a:masterClrMapping/>
+  </p:clrMapOvr>
+</p:notes>
+</file>
+
+<file path=ppt/notesSlides/notesSlide22.xml><?xml version="1.0" encoding="utf-8"?>
+<p:notes xmlns:a="http://schemas.openxmlformats.org/drawingml/2006/main" xmlns:r="http://schemas.openxmlformats.org/officeDocument/2006/relationships" xmlns:p="http://schemas.openxmlformats.org/presentationml/2006/main">
+  <p:cSld>
+    <p:spTree>
+      <p:nvGrpSpPr>
+        <p:cNvPr id="1" name=""/>
+        <p:cNvGrpSpPr/>
+        <p:nvPr/>
+      </p:nvGrpSpPr>
+      <p:grpSpPr>
+        <a:xfrm>
+          <a:off x="0" y="0"/>
+          <a:ext cx="0" cy="0"/>
+          <a:chOff x="0" y="0"/>
+          <a:chExt cx="0" cy="0"/>
+        </a:xfrm>
+      </p:grpSpPr>
+      <p:sp>
+        <p:nvSpPr>
+          <p:cNvPr id="2" name="Slide Image Placeholder 1"/>
+          <p:cNvSpPr>
+            <a:spLocks noGrp="1" noRot="1" noChangeAspect="1"/>
+          </p:cNvSpPr>
+          <p:nvPr>
+            <p:ph type="sldImg"/>
+          </p:nvPr>
+        </p:nvSpPr>
+        <p:spPr/>
+      </p:sp>
+      <p:sp>
+        <p:nvSpPr>
+          <p:cNvPr id="3" name="Notes Placeholder 2"/>
+          <p:cNvSpPr>
+            <a:spLocks noGrp="1"/>
+          </p:cNvSpPr>
+          <p:nvPr>
+            <p:ph type="body" idx="1"/>
+          </p:nvPr>
+        </p:nvSpPr>
+        <p:spPr/>
+        <p:txBody>
+          <a:bodyPr/>
+          <a:lstStyle/>
+          <a:p>
+            <a:r>
+              <a:rPr lang="en-US" dirty="0"/>
+              <a:t/>
+            </a:r>
+            <a:endParaRPr lang="en-US" dirty="0"/>
+          </a:p>
+        </p:txBody>
+      </p:sp>
+      <p:sp>
+        <p:nvSpPr>
+          <p:cNvPr id="4" name="Slide Number Placeholder 3"/>
+          <p:cNvSpPr>
+            <a:spLocks noGrp="1"/>
+          </p:cNvSpPr>
+          <p:nvPr>
+            <p:ph type="sldNum" sz="quarter" idx="10"/>
+          </p:nvPr>
+        </p:nvSpPr>
+        <p:spPr/>
+        <p:txBody>
+          <a:bodyPr/>
+          <a:lstStyle/>
+          <a:p>
+            <a:fld id="{F7021451-1387-4CA6-816F-3879F97B5CBC}" type="slidenum">
+              <a:rPr lang="en-US"/>
+              <a:t>22</a:t>
+            </a:fld>
+            <a:endParaRPr lang="en-US"/>
+          </a:p>
+        </p:txBody>
+      </p:sp>
+    </p:spTree>
+    <p:extLst>
+      <p:ext uri="{BB962C8B-B14F-4D97-AF65-F5344CB8AC3E}">
+        <p14:creationId xmlns:p14="http://schemas.microsoft.com/office/powerpoint/2010/main" val="1024086991"/>
+      </p:ext>
+    </p:extLst>
+  </p:cSld>
+  <p:clrMapOvr>
+    <a:masterClrMapping/>
+  </p:clrMapOvr>
+</p:notes>
+</file>
+
+<file path=ppt/notesSlides/notesSlide23.xml><?xml version="1.0" encoding="utf-8"?>
+<p:notes xmlns:a="http://schemas.openxmlformats.org/drawingml/2006/main" xmlns:r="http://schemas.openxmlformats.org/officeDocument/2006/relationships" xmlns:p="http://schemas.openxmlformats.org/presentationml/2006/main">
+  <p:cSld>
+    <p:spTree>
+      <p:nvGrpSpPr>
+        <p:cNvPr id="1" name=""/>
+        <p:cNvGrpSpPr/>
+        <p:nvPr/>
+      </p:nvGrpSpPr>
+      <p:grpSpPr>
+        <a:xfrm>
+          <a:off x="0" y="0"/>
+          <a:ext cx="0" cy="0"/>
+          <a:chOff x="0" y="0"/>
+          <a:chExt cx="0" cy="0"/>
+        </a:xfrm>
+      </p:grpSpPr>
+      <p:sp>
+        <p:nvSpPr>
+          <p:cNvPr id="2" name="Slide Image Placeholder 1"/>
+          <p:cNvSpPr>
+            <a:spLocks noGrp="1" noRot="1" noChangeAspect="1"/>
+          </p:cNvSpPr>
+          <p:nvPr>
+            <p:ph type="sldImg"/>
+          </p:nvPr>
+        </p:nvSpPr>
+        <p:spPr/>
+      </p:sp>
+      <p:sp>
+        <p:nvSpPr>
+          <p:cNvPr id="3" name="Notes Placeholder 2"/>
+          <p:cNvSpPr>
+            <a:spLocks noGrp="1"/>
+          </p:cNvSpPr>
+          <p:nvPr>
+            <p:ph type="body" idx="1"/>
+          </p:nvPr>
+        </p:nvSpPr>
+        <p:spPr/>
+        <p:txBody>
+          <a:bodyPr/>
+          <a:lstStyle/>
+          <a:p>
+            <a:r>
+              <a:rPr lang="en-US" dirty="0"/>
+              <a:t/>
+            </a:r>
+            <a:endParaRPr lang="en-US" dirty="0"/>
+          </a:p>
+        </p:txBody>
+      </p:sp>
+      <p:sp>
+        <p:nvSpPr>
+          <p:cNvPr id="4" name="Slide Number Placeholder 3"/>
+          <p:cNvSpPr>
+            <a:spLocks noGrp="1"/>
+          </p:cNvSpPr>
+          <p:nvPr>
+            <p:ph type="sldNum" sz="quarter" idx="10"/>
+          </p:nvPr>
+        </p:nvSpPr>
+        <p:spPr/>
+        <p:txBody>
+          <a:bodyPr/>
+          <a:lstStyle/>
+          <a:p>
+            <a:fld id="{F7021451-1387-4CA6-816F-3879F97B5CBC}" type="slidenum">
+              <a:rPr lang="en-US"/>
+              <a:t>23</a:t>
             </a:fld>
             <a:endParaRPr lang="en-US"/>
           </a:p>
@@ -3057,7 +3341,7 @@
                 <a:ea typeface="Calibri" pitchFamily="34" charset="-122"/>
                 <a:cs typeface="Calibri" pitchFamily="34" charset="-120"/>
               </a:rPr>
-              <a:t>Campo Peregrino &amp; Cluster Sul  ·  FPSO Peregrino · PLAT A (WHPA) · PLAT B (WHPB) · PLAT C (WHPC) · FPSO Bravo · Polvo A</a:t>
+              <a:t>Campo Peregrino, Cluster Sul &amp; FPSO Frade  ·  FPSO Peregrino · PLAT A (WHPA) · PLAT B (WHPB) · PLAT C (WHPC) · FPSO Bravo · Polvo A · FPSO Frade</a:t>
             </a:r>
             <a:endParaRPr lang="en-US" sz="1500" dirty="0"/>
           </a:p>
@@ -18674,7 +18958,7 @@
                 <a:ea typeface="Cambria" pitchFamily="34" charset="-122"/>
                 <a:cs typeface="Cambria" pitchFamily="34" charset="-120"/>
               </a:rPr>
-              <a:t>Consolidado · Campo Peregrino &amp; Cluster Sul 2027</a:t>
+              <a:t>Consolidado · Campo Peregrino, Cluster Sul &amp; FPSO Frade 2027</a:t>
             </a:r>
             <a:endParaRPr lang="en-US" sz="2700" dirty="0"/>
           </a:p>
@@ -18735,7 +19019,7 @@
                 <a:ea typeface="Cambria" pitchFamily="34" charset="-122"/>
                 <a:cs typeface="Cambria" pitchFamily="34" charset="-120"/>
               </a:rPr>
-              <a:t>US$ 44,3 mi</a:t>
+              <a:t>US$ 126,4 mi</a:t>
             </a:r>
             <a:endParaRPr lang="en-US" sz="2600" dirty="0"/>
           </a:p>
@@ -18874,7 +19158,7 @@
                 <a:ea typeface="Cambria" pitchFamily="34" charset="-122"/>
                 <a:cs typeface="Cambria" pitchFamily="34" charset="-120"/>
               </a:rPr>
-              <a:t>142</a:t>
+              <a:t>230</a:t>
             </a:r>
             <a:endParaRPr lang="en-US" sz="2600" dirty="0"/>
           </a:p>
@@ -19013,7 +19297,7 @@
                 <a:ea typeface="Cambria" pitchFamily="34" charset="-122"/>
                 <a:cs typeface="Cambria" pitchFamily="34" charset="-120"/>
               </a:rPr>
-              <a:t>115</a:t>
+              <a:t>130</a:t>
             </a:r>
             <a:endParaRPr lang="en-US" sz="2600" dirty="0"/>
           </a:p>
@@ -19091,7 +19375,7 @@
                 <a:ea typeface="Calibri" pitchFamily="34" charset="-122"/>
                 <a:cs typeface="Calibri" pitchFamily="34" charset="-120"/>
               </a:rPr>
-              <a:t>6 ativos · 5 frentes</a:t>
+              <a:t>7 ativos · 5 frentes</a:t>
             </a:r>
             <a:endParaRPr lang="en-US" sz="850" dirty="0"/>
           </a:p>
@@ -20486,6 +20770,191 @@
                       <a:r>
                         <a:rPr lang="en-US" sz="1050" b="1" dirty="0">
                           <a:solidFill>
+                            <a:srgbClr val="1C2B33"/>
+                          </a:solidFill>
+                        </a:rPr>
+                        <a:t>FPSO Frade</a:t>
+                      </a:r>
+                      <a:endParaRPr lang="en-US" sz="1050" dirty="0"/>
+                    </a:p>
+                  </a:txBody>
+                  <a:tcPr marL="91440" marR="91440" marT="45720" marB="45720" anchor="ctr">
+                    <a:lnL w="6350" cap="flat" cmpd="sng" algn="ctr">
+                      <a:solidFill>
+                        <a:srgbClr val="E3E8E9"/>
+                      </a:solidFill>
+                      <a:prstDash val="solid"/>
+                      <a:round/>
+                      <a:headEnd type="none" w="med" len="med"/>
+                      <a:tailEnd type="none" w="med" len="med"/>
+                    </a:lnL>
+                    <a:lnR w="6350" cap="flat" cmpd="sng" algn="ctr">
+                      <a:solidFill>
+                        <a:srgbClr val="E3E8E9"/>
+                      </a:solidFill>
+                      <a:prstDash val="solid"/>
+                      <a:round/>
+                      <a:headEnd type="none" w="med" len="med"/>
+                      <a:tailEnd type="none" w="med" len="med"/>
+                    </a:lnR>
+                    <a:lnT w="6350" cap="flat" cmpd="sng" algn="ctr">
+                      <a:solidFill>
+                        <a:srgbClr val="E3E8E9"/>
+                      </a:solidFill>
+                      <a:prstDash val="solid"/>
+                      <a:round/>
+                      <a:headEnd type="none" w="med" len="med"/>
+                      <a:tailEnd type="none" w="med" len="med"/>
+                    </a:lnT>
+                    <a:lnB w="6350" cap="flat" cmpd="sng" algn="ctr">
+                      <a:solidFill>
+                        <a:srgbClr val="E3E8E9"/>
+                      </a:solidFill>
+                      <a:prstDash val="solid"/>
+                      <a:round/>
+                      <a:headEnd type="none" w="med" len="med"/>
+                      <a:tailEnd type="none" w="med" len="med"/>
+                    </a:lnB>
+                    <a:solidFill>
+                      <a:srgbClr val="FFFFFF"/>
+                    </a:solidFill>
+                  </a:tcPr>
+                </a:tc>
+                <a:tc>
+                  <a:txBody>
+                    <a:bodyPr/>
+                    <a:lstStyle/>
+                    <a:p>
+                      <a:pPr algn="r" indent="0" marL="0">
+                        <a:buNone/>
+                      </a:pPr>
+                      <a:r>
+                        <a:rPr lang="en-US" sz="1050" dirty="0">
+                          <a:solidFill>
+                            <a:srgbClr val="1C2B33"/>
+                          </a:solidFill>
+                        </a:rPr>
+                        <a:t>US$ 82,2 mi</a:t>
+                      </a:r>
+                      <a:endParaRPr lang="en-US" sz="1050" dirty="0"/>
+                    </a:p>
+                  </a:txBody>
+                  <a:tcPr marL="91440" marR="91440" marT="45720" marB="45720" anchor="ctr">
+                    <a:lnL w="6350" cap="flat" cmpd="sng" algn="ctr">
+                      <a:solidFill>
+                        <a:srgbClr val="E3E8E9"/>
+                      </a:solidFill>
+                      <a:prstDash val="solid"/>
+                      <a:round/>
+                      <a:headEnd type="none" w="med" len="med"/>
+                      <a:tailEnd type="none" w="med" len="med"/>
+                    </a:lnL>
+                    <a:lnR w="6350" cap="flat" cmpd="sng" algn="ctr">
+                      <a:solidFill>
+                        <a:srgbClr val="E3E8E9"/>
+                      </a:solidFill>
+                      <a:prstDash val="solid"/>
+                      <a:round/>
+                      <a:headEnd type="none" w="med" len="med"/>
+                      <a:tailEnd type="none" w="med" len="med"/>
+                    </a:lnR>
+                    <a:lnT w="6350" cap="flat" cmpd="sng" algn="ctr">
+                      <a:solidFill>
+                        <a:srgbClr val="E3E8E9"/>
+                      </a:solidFill>
+                      <a:prstDash val="solid"/>
+                      <a:round/>
+                      <a:headEnd type="none" w="med" len="med"/>
+                      <a:tailEnd type="none" w="med" len="med"/>
+                    </a:lnT>
+                    <a:lnB w="6350" cap="flat" cmpd="sng" algn="ctr">
+                      <a:solidFill>
+                        <a:srgbClr val="E3E8E9"/>
+                      </a:solidFill>
+                      <a:prstDash val="solid"/>
+                      <a:round/>
+                      <a:headEnd type="none" w="med" len="med"/>
+                      <a:tailEnd type="none" w="med" len="med"/>
+                    </a:lnB>
+                    <a:solidFill>
+                      <a:srgbClr val="FFFFFF"/>
+                    </a:solidFill>
+                  </a:tcPr>
+                </a:tc>
+                <a:tc>
+                  <a:txBody>
+                    <a:bodyPr/>
+                    <a:lstStyle/>
+                    <a:p>
+                      <a:pPr algn="r" indent="0" marL="0">
+                        <a:buNone/>
+                      </a:pPr>
+                      <a:r>
+                        <a:rPr lang="en-US" sz="1050" dirty="0">
+                          <a:solidFill>
+                            <a:srgbClr val="1C2B33"/>
+                          </a:solidFill>
+                        </a:rPr>
+                        <a:t>88</a:t>
+                      </a:r>
+                      <a:endParaRPr lang="en-US" sz="1050" dirty="0"/>
+                    </a:p>
+                  </a:txBody>
+                  <a:tcPr marL="91440" marR="91440" marT="45720" marB="45720" anchor="ctr">
+                    <a:lnL w="6350" cap="flat" cmpd="sng" algn="ctr">
+                      <a:solidFill>
+                        <a:srgbClr val="E3E8E9"/>
+                      </a:solidFill>
+                      <a:prstDash val="solid"/>
+                      <a:round/>
+                      <a:headEnd type="none" w="med" len="med"/>
+                      <a:tailEnd type="none" w="med" len="med"/>
+                    </a:lnL>
+                    <a:lnR w="6350" cap="flat" cmpd="sng" algn="ctr">
+                      <a:solidFill>
+                        <a:srgbClr val="E3E8E9"/>
+                      </a:solidFill>
+                      <a:prstDash val="solid"/>
+                      <a:round/>
+                      <a:headEnd type="none" w="med" len="med"/>
+                      <a:tailEnd type="none" w="med" len="med"/>
+                    </a:lnR>
+                    <a:lnT w="6350" cap="flat" cmpd="sng" algn="ctr">
+                      <a:solidFill>
+                        <a:srgbClr val="E3E8E9"/>
+                      </a:solidFill>
+                      <a:prstDash val="solid"/>
+                      <a:round/>
+                      <a:headEnd type="none" w="med" len="med"/>
+                      <a:tailEnd type="none" w="med" len="med"/>
+                    </a:lnT>
+                    <a:lnB w="6350" cap="flat" cmpd="sng" algn="ctr">
+                      <a:solidFill>
+                        <a:srgbClr val="E3E8E9"/>
+                      </a:solidFill>
+                      <a:prstDash val="solid"/>
+                      <a:round/>
+                      <a:headEnd type="none" w="med" len="med"/>
+                      <a:tailEnd type="none" w="med" len="med"/>
+                    </a:lnB>
+                    <a:solidFill>
+                      <a:srgbClr val="FFFFFF"/>
+                    </a:solidFill>
+                  </a:tcPr>
+                </a:tc>
+              </a:tr>
+              <a:tr h="329184">
+                <a:tc>
+                  <a:txBody>
+                    <a:bodyPr/>
+                    <a:lstStyle/>
+                    <a:p>
+                      <a:pPr indent="0" marL="0">
+                        <a:buNone/>
+                      </a:pPr>
+                      <a:r>
+                        <a:rPr lang="en-US" sz="1050" b="1" dirty="0">
+                          <a:solidFill>
                             <a:srgbClr val="0B2A3D"/>
                           </a:solidFill>
                         </a:rPr>
@@ -20550,7 +21019,7 @@
                             <a:srgbClr val="0B2A3D"/>
                           </a:solidFill>
                         </a:rPr>
-                        <a:t>US$ 44,3 mi</a:t>
+                        <a:t>US$ 126,4 mi</a:t>
                       </a:r>
                       <a:endParaRPr lang="en-US" sz="1050" dirty="0"/>
                     </a:p>
@@ -20611,7 +21080,7 @@
                             <a:srgbClr val="0B2A3D"/>
                           </a:solidFill>
                         </a:rPr>
-                        <a:t>142</a:t>
+                        <a:t>230</a:t>
                       </a:r>
                       <a:endParaRPr lang="en-US" sz="1050" dirty="0"/>
                     </a:p>
@@ -24636,6 +25105,6105 @@
                 <a:cs typeface="Calibri" pitchFamily="34" charset="-120"/>
               </a:rPr>
               <a:t>Fonte: Plano Integrado · aba 'Geral - Em análise' · coluna 'Valor Total' · itens de Cost Allocation = CAPEX, status 'Contar' + 'TA' (inclui Parada Programada). Lista completa disponível na planilha em anexo.</a:t>
+            </a:r>
+            <a:endParaRPr lang="en-US" sz="850" dirty="0"/>
+          </a:p>
+        </p:txBody>
+      </p:sp>
+    </p:spTree>
+  </p:cSld>
+  <p:clrMapOvr>
+    <a:masterClrMapping/>
+  </p:clrMapOvr>
+</p:sld>
+</file>
+
+<file path=ppt/slides/slide21.xml><?xml version="1.0" encoding="utf-8"?>
+<p:sld xmlns:a="http://schemas.openxmlformats.org/drawingml/2006/main" xmlns:r="http://schemas.openxmlformats.org/officeDocument/2006/relationships" xmlns:p="http://schemas.openxmlformats.org/presentationml/2006/main">
+  <p:cSld name="Slide 21">
+    <p:spTree>
+      <p:nvGrpSpPr>
+        <p:cNvPr id="1" name=""/>
+        <p:cNvGrpSpPr/>
+        <p:nvPr/>
+      </p:nvGrpSpPr>
+      <p:grpSpPr>
+        <a:xfrm>
+          <a:off x="0" y="0"/>
+          <a:ext cx="0" cy="0"/>
+          <a:chOff x="0" y="0"/>
+          <a:chExt cx="0" cy="0"/>
+        </a:xfrm>
+      </p:grpSpPr>
+      <p:sp>
+        <p:nvSpPr>
+          <p:cNvPr id="2" name="Shape 0"/>
+          <p:cNvSpPr/>
+          <p:nvPr/>
+        </p:nvSpPr>
+        <p:spPr>
+          <a:xfrm>
+            <a:off x="457200" y="384048"/>
+            <a:ext cx="566928" cy="566928"/>
+          </a:xfrm>
+          <a:prstGeom prst="ellipse">
+            <a:avLst/>
+          </a:prstGeom>
+          <a:solidFill>
+            <a:srgbClr val="7A2E2E"/>
+          </a:solidFill>
+          <a:ln/>
+        </p:spPr>
+      </p:sp>
+      <p:sp>
+        <p:nvSpPr>
+          <p:cNvPr id="3" name="Text 1"/>
+          <p:cNvSpPr txBox="1"/>
+          <p:nvPr/>
+        </p:nvSpPr>
+        <p:spPr>
+          <a:xfrm>
+            <a:off x="457200" y="384048"/>
+            <a:ext cx="566928" cy="566928"/>
+          </a:xfrm>
+          <a:prstGeom prst="rect">
+            <a:avLst/>
+          </a:prstGeom>
+          <a:noFill/>
+          <a:ln/>
+        </p:spPr>
+        <p:txBody>
+          <a:bodyPr wrap="square" lIns="0" tIns="0" rIns="0" bIns="0" rtlCol="0" anchor="ctr"/>
+          <a:lstStyle/>
+          <a:p>
+            <a:pPr algn="ctr" indent="0" marL="0">
+              <a:buNone/>
+            </a:pPr>
+            <a:r>
+              <a:rPr lang="en-US" sz="1500" b="1" dirty="0">
+                <a:solidFill>
+                  <a:srgbClr val="FFFFFF"/>
+                </a:solidFill>
+                <a:latin typeface="Calibri" pitchFamily="34" charset="0"/>
+                <a:ea typeface="Calibri" pitchFamily="34" charset="-122"/>
+                <a:cs typeface="Calibri" pitchFamily="34" charset="-120"/>
+              </a:rPr>
+              <a:t>FF</a:t>
+            </a:r>
+            <a:endParaRPr lang="en-US" sz="1500" dirty="0"/>
+          </a:p>
+        </p:txBody>
+      </p:sp>
+      <p:sp>
+        <p:nvSpPr>
+          <p:cNvPr id="4" name="Text 2"/>
+          <p:cNvSpPr txBox="1"/>
+          <p:nvPr/>
+        </p:nvSpPr>
+        <p:spPr>
+          <a:xfrm>
+            <a:off x="1170432" y="329184"/>
+            <a:ext cx="10515600" cy="411480"/>
+          </a:xfrm>
+          <a:prstGeom prst="rect">
+            <a:avLst/>
+          </a:prstGeom>
+          <a:noFill/>
+          <a:ln/>
+        </p:spPr>
+        <p:txBody>
+          <a:bodyPr wrap="square" lIns="0" tIns="0" rIns="0" bIns="0" rtlCol="0" anchor="ctr"/>
+          <a:lstStyle/>
+          <a:p>
+            <a:pPr indent="0" marL="0">
+              <a:buNone/>
+            </a:pPr>
+            <a:r>
+              <a:rPr lang="en-US" sz="2400" b="1" dirty="0">
+                <a:solidFill>
+                  <a:srgbClr val="0B2A3D"/>
+                </a:solidFill>
+                <a:latin typeface="Cambria" pitchFamily="34" charset="0"/>
+                <a:ea typeface="Cambria" pitchFamily="34" charset="-122"/>
+                <a:cs typeface="Cambria" pitchFamily="34" charset="-120"/>
+              </a:rPr>
+              <a:t>Plano de Trabalho Core · FPSO Frade</a:t>
+            </a:r>
+            <a:endParaRPr lang="en-US" sz="2400" dirty="0"/>
+          </a:p>
+        </p:txBody>
+      </p:sp>
+      <p:sp>
+        <p:nvSpPr>
+          <p:cNvPr id="5" name="Text 3"/>
+          <p:cNvSpPr txBox="1"/>
+          <p:nvPr/>
+        </p:nvSpPr>
+        <p:spPr>
+          <a:xfrm>
+            <a:off x="1170432" y="731520"/>
+            <a:ext cx="10515600" cy="274320"/>
+          </a:xfrm>
+          <a:prstGeom prst="rect">
+            <a:avLst/>
+          </a:prstGeom>
+          <a:noFill/>
+          <a:ln/>
+        </p:spPr>
+        <p:txBody>
+          <a:bodyPr wrap="square" lIns="0" tIns="0" rIns="0" bIns="0" rtlCol="0" anchor="ctr"/>
+          <a:lstStyle/>
+          <a:p>
+            <a:pPr indent="0" marL="0">
+              <a:buNone/>
+            </a:pPr>
+            <a:r>
+              <a:rPr lang="en-US" sz="1250" dirty="0">
+                <a:solidFill>
+                  <a:srgbClr val="5B6B73"/>
+                </a:solidFill>
+                <a:latin typeface="Calibri" pitchFamily="34" charset="0"/>
+                <a:ea typeface="Calibri" pitchFamily="34" charset="-122"/>
+                <a:cs typeface="Calibri" pitchFamily="34" charset="-120"/>
+              </a:rPr>
+              <a:t>2027 · 15 atividades distribuídas em 5 frentes estratégicas · Horizonte 1T27 – 4T27</a:t>
+            </a:r>
+            <a:endParaRPr lang="en-US" sz="1250" dirty="0"/>
+          </a:p>
+        </p:txBody>
+      </p:sp>
+      <p:pic>
+        <p:nvPicPr>
+          <p:cNvPr id="6" name="Image 0" descr="frade_timeline.png">    </p:cNvPr>
+          <p:cNvPicPr>
+            <a:picLocks noChangeAspect="1"/>
+          </p:cNvPicPr>
+          <p:nvPr/>
+        </p:nvPicPr>
+        <p:blipFill>
+          <a:blip r:embed="rId1"/>
+          <a:stretch>
+            <a:fillRect/>
+          </a:stretch>
+        </p:blipFill>
+        <p:spPr>
+          <a:xfrm>
+            <a:off x="472288" y="1143000"/>
+            <a:ext cx="11247120" cy="4292667"/>
+          </a:xfrm>
+          <a:prstGeom prst="rect">
+            <a:avLst/>
+          </a:prstGeom>
+        </p:spPr>
+      </p:pic>
+      <p:sp>
+        <p:nvSpPr>
+          <p:cNvPr id="7" name="Text 4"/>
+          <p:cNvSpPr txBox="1"/>
+          <p:nvPr/>
+        </p:nvSpPr>
+        <p:spPr>
+          <a:xfrm>
+            <a:off x="457200" y="6565392"/>
+            <a:ext cx="5486400" cy="228600"/>
+          </a:xfrm>
+          <a:prstGeom prst="rect">
+            <a:avLst/>
+          </a:prstGeom>
+          <a:noFill/>
+          <a:ln/>
+        </p:spPr>
+        <p:txBody>
+          <a:bodyPr wrap="square" lIns="0" tIns="0" rIns="0" bIns="0" rtlCol="0" anchor="ctr"/>
+          <a:lstStyle/>
+          <a:p>
+            <a:pPr indent="0" marL="0">
+              <a:buNone/>
+            </a:pPr>
+            <a:r>
+              <a:rPr lang="en-US" sz="800" spc="100" kern="0" dirty="0">
+                <a:solidFill>
+                  <a:srgbClr val="8A979D"/>
+                </a:solidFill>
+                <a:latin typeface="Calibri" pitchFamily="34" charset="0"/>
+                <a:ea typeface="Calibri" pitchFamily="34" charset="-122"/>
+                <a:cs typeface="Calibri" pitchFamily="34" charset="-120"/>
+              </a:rPr>
+              <a:t>PRIO · CAMPO PEREGRINO</a:t>
+            </a:r>
+            <a:endParaRPr lang="en-US" sz="800" dirty="0"/>
+          </a:p>
+        </p:txBody>
+      </p:sp>
+      <p:sp>
+        <p:nvSpPr>
+          <p:cNvPr id="8" name="Text 5"/>
+          <p:cNvSpPr txBox="1"/>
+          <p:nvPr/>
+        </p:nvSpPr>
+        <p:spPr>
+          <a:xfrm>
+            <a:off x="6248095" y="6565392"/>
+            <a:ext cx="5486400" cy="228600"/>
+          </a:xfrm>
+          <a:prstGeom prst="rect">
+            <a:avLst/>
+          </a:prstGeom>
+          <a:noFill/>
+          <a:ln/>
+        </p:spPr>
+        <p:txBody>
+          <a:bodyPr wrap="square" lIns="0" tIns="0" rIns="0" bIns="0" rtlCol="0" anchor="ctr"/>
+          <a:lstStyle/>
+          <a:p>
+            <a:pPr algn="r" indent="0" marL="0">
+              <a:buNone/>
+            </a:pPr>
+            <a:r>
+              <a:rPr lang="en-US" sz="800" dirty="0">
+                <a:solidFill>
+                  <a:srgbClr val="8A979D"/>
+                </a:solidFill>
+                <a:latin typeface="Calibri" pitchFamily="34" charset="0"/>
+                <a:ea typeface="Calibri" pitchFamily="34" charset="-122"/>
+                <a:cs typeface="Calibri" pitchFamily="34" charset="-120"/>
+              </a:rPr>
+              <a:t>Plano de Trabalho 2027 · Confidencial - Uso Interno</a:t>
+            </a:r>
+            <a:endParaRPr lang="en-US" sz="800" dirty="0"/>
+          </a:p>
+        </p:txBody>
+      </p:sp>
+    </p:spTree>
+  </p:cSld>
+  <p:clrMapOvr>
+    <a:masterClrMapping/>
+  </p:clrMapOvr>
+</p:sld>
+</file>
+
+<file path=ppt/slides/slide22.xml><?xml version="1.0" encoding="utf-8"?>
+<p:sld xmlns:a="http://schemas.openxmlformats.org/drawingml/2006/main" xmlns:r="http://schemas.openxmlformats.org/officeDocument/2006/relationships" xmlns:p="http://schemas.openxmlformats.org/presentationml/2006/main">
+  <p:cSld name="Slide 22">
+    <p:spTree>
+      <p:nvGrpSpPr>
+        <p:cNvPr id="1" name=""/>
+        <p:cNvGrpSpPr/>
+        <p:nvPr/>
+      </p:nvGrpSpPr>
+      <p:grpSpPr>
+        <a:xfrm>
+          <a:off x="0" y="0"/>
+          <a:ext cx="0" cy="0"/>
+          <a:chOff x="0" y="0"/>
+          <a:chExt cx="0" cy="0"/>
+        </a:xfrm>
+      </p:grpSpPr>
+      <p:sp>
+        <p:nvSpPr>
+          <p:cNvPr id="2" name="Shape 0"/>
+          <p:cNvSpPr/>
+          <p:nvPr/>
+        </p:nvSpPr>
+        <p:spPr>
+          <a:xfrm>
+            <a:off x="457200" y="384048"/>
+            <a:ext cx="566928" cy="566928"/>
+          </a:xfrm>
+          <a:prstGeom prst="ellipse">
+            <a:avLst/>
+          </a:prstGeom>
+          <a:solidFill>
+            <a:srgbClr val="7A2E2E"/>
+          </a:solidFill>
+          <a:ln/>
+        </p:spPr>
+      </p:sp>
+      <p:sp>
+        <p:nvSpPr>
+          <p:cNvPr id="3" name="Text 1"/>
+          <p:cNvSpPr txBox="1"/>
+          <p:nvPr/>
+        </p:nvSpPr>
+        <p:spPr>
+          <a:xfrm>
+            <a:off x="457200" y="384048"/>
+            <a:ext cx="566928" cy="566928"/>
+          </a:xfrm>
+          <a:prstGeom prst="rect">
+            <a:avLst/>
+          </a:prstGeom>
+          <a:noFill/>
+          <a:ln/>
+        </p:spPr>
+        <p:txBody>
+          <a:bodyPr wrap="square" lIns="0" tIns="0" rIns="0" bIns="0" rtlCol="0" anchor="ctr"/>
+          <a:lstStyle/>
+          <a:p>
+            <a:pPr algn="ctr" indent="0" marL="0">
+              <a:buNone/>
+            </a:pPr>
+            <a:r>
+              <a:rPr lang="en-US" sz="1500" b="1" dirty="0">
+                <a:solidFill>
+                  <a:srgbClr val="FFFFFF"/>
+                </a:solidFill>
+                <a:latin typeface="Calibri" pitchFamily="34" charset="0"/>
+                <a:ea typeface="Calibri" pitchFamily="34" charset="-122"/>
+                <a:cs typeface="Calibri" pitchFamily="34" charset="-120"/>
+              </a:rPr>
+              <a:t>FF</a:t>
+            </a:r>
+            <a:endParaRPr lang="en-US" sz="1500" dirty="0"/>
+          </a:p>
+        </p:txBody>
+      </p:sp>
+      <p:sp>
+        <p:nvSpPr>
+          <p:cNvPr id="4" name="Text 2"/>
+          <p:cNvSpPr txBox="1"/>
+          <p:nvPr/>
+        </p:nvSpPr>
+        <p:spPr>
+          <a:xfrm>
+            <a:off x="1170432" y="329184"/>
+            <a:ext cx="10515600" cy="411480"/>
+          </a:xfrm>
+          <a:prstGeom prst="rect">
+            <a:avLst/>
+          </a:prstGeom>
+          <a:noFill/>
+          <a:ln/>
+        </p:spPr>
+        <p:txBody>
+          <a:bodyPr wrap="square" lIns="0" tIns="0" rIns="0" bIns="0" rtlCol="0" anchor="ctr"/>
+          <a:lstStyle/>
+          <a:p>
+            <a:pPr indent="0" marL="0">
+              <a:buNone/>
+            </a:pPr>
+            <a:r>
+              <a:rPr lang="en-US" sz="2400" b="1" dirty="0">
+                <a:solidFill>
+                  <a:srgbClr val="0B2A3D"/>
+                </a:solidFill>
+                <a:latin typeface="Cambria" pitchFamily="34" charset="0"/>
+                <a:ea typeface="Cambria" pitchFamily="34" charset="-122"/>
+                <a:cs typeface="Cambria" pitchFamily="34" charset="-120"/>
+              </a:rPr>
+              <a:t>Composição de Custo · CAPEX · FPSO Frade</a:t>
+            </a:r>
+            <a:endParaRPr lang="en-US" sz="2400" dirty="0"/>
+          </a:p>
+        </p:txBody>
+      </p:sp>
+      <p:sp>
+        <p:nvSpPr>
+          <p:cNvPr id="5" name="Text 3"/>
+          <p:cNvSpPr txBox="1"/>
+          <p:nvPr/>
+        </p:nvSpPr>
+        <p:spPr>
+          <a:xfrm>
+            <a:off x="1170432" y="731520"/>
+            <a:ext cx="10515600" cy="274320"/>
+          </a:xfrm>
+          <a:prstGeom prst="rect">
+            <a:avLst/>
+          </a:prstGeom>
+          <a:noFill/>
+          <a:ln/>
+        </p:spPr>
+        <p:txBody>
+          <a:bodyPr wrap="square" lIns="0" tIns="0" rIns="0" bIns="0" rtlCol="0" anchor="ctr"/>
+          <a:lstStyle/>
+          <a:p>
+            <a:pPr indent="0" marL="0">
+              <a:buNone/>
+            </a:pPr>
+            <a:r>
+              <a:rPr lang="en-US" sz="1250" dirty="0">
+                <a:solidFill>
+                  <a:srgbClr val="5B6B73"/>
+                </a:solidFill>
+                <a:latin typeface="Calibri" pitchFamily="34" charset="0"/>
+                <a:ea typeface="Calibri" pitchFamily="34" charset="-122"/>
+                <a:cs typeface="Calibri" pitchFamily="34" charset="-120"/>
+              </a:rPr>
+              <a:t>Ano 2027 · Base: aba 'Geral - Em análise' · status 'Contar'</a:t>
+            </a:r>
+            <a:endParaRPr lang="en-US" sz="1250" dirty="0"/>
+          </a:p>
+        </p:txBody>
+      </p:sp>
+      <p:sp>
+        <p:nvSpPr>
+          <p:cNvPr id="6" name="Shape 4"/>
+          <p:cNvSpPr/>
+          <p:nvPr/>
+        </p:nvSpPr>
+        <p:spPr>
+          <a:xfrm>
+            <a:off x="457200" y="1143000"/>
+            <a:ext cx="3749040" cy="1600200"/>
+          </a:xfrm>
+          <a:prstGeom prst="roundRect">
+            <a:avLst>
+              <a:gd name="adj" fmla="val 5714"/>
+            </a:avLst>
+          </a:prstGeom>
+          <a:solidFill>
+            <a:srgbClr val="E4EAF0"/>
+          </a:solidFill>
+          <a:ln/>
+        </p:spPr>
+      </p:sp>
+      <p:sp>
+        <p:nvSpPr>
+          <p:cNvPr id="7" name="Text 5"/>
+          <p:cNvSpPr txBox="1"/>
+          <p:nvPr/>
+        </p:nvSpPr>
+        <p:spPr>
+          <a:xfrm>
+            <a:off x="713232" y="1399032"/>
+            <a:ext cx="3236976" cy="658368"/>
+          </a:xfrm>
+          <a:prstGeom prst="rect">
+            <a:avLst/>
+          </a:prstGeom>
+          <a:noFill/>
+          <a:ln/>
+        </p:spPr>
+        <p:txBody>
+          <a:bodyPr wrap="none" lIns="0" tIns="0" rIns="0" bIns="0" rtlCol="0" anchor="ctr"/>
+          <a:lstStyle/>
+          <a:p>
+            <a:pPr indent="0" marL="0">
+              <a:buNone/>
+            </a:pPr>
+            <a:r>
+              <a:rPr lang="en-US" sz="3300" b="1" dirty="0">
+                <a:solidFill>
+                  <a:srgbClr val="0B2A3D"/>
+                </a:solidFill>
+                <a:latin typeface="Cambria" pitchFamily="34" charset="0"/>
+                <a:ea typeface="Cambria" pitchFamily="34" charset="-122"/>
+                <a:cs typeface="Cambria" pitchFamily="34" charset="-120"/>
+              </a:rPr>
+              <a:t>US$ 82,2 mi</a:t>
+            </a:r>
+            <a:endParaRPr lang="en-US" sz="3300" dirty="0"/>
+          </a:p>
+        </p:txBody>
+      </p:sp>
+      <p:sp>
+        <p:nvSpPr>
+          <p:cNvPr id="8" name="Text 6"/>
+          <p:cNvSpPr txBox="1"/>
+          <p:nvPr/>
+        </p:nvSpPr>
+        <p:spPr>
+          <a:xfrm>
+            <a:off x="713232" y="2130552"/>
+            <a:ext cx="3236976" cy="274320"/>
+          </a:xfrm>
+          <a:prstGeom prst="rect">
+            <a:avLst/>
+          </a:prstGeom>
+          <a:noFill/>
+          <a:ln/>
+        </p:spPr>
+        <p:txBody>
+          <a:bodyPr wrap="square" lIns="0" tIns="0" rIns="0" bIns="0" rtlCol="0" anchor="ctr"/>
+          <a:lstStyle/>
+          <a:p>
+            <a:pPr indent="0" marL="0">
+              <a:buNone/>
+            </a:pPr>
+            <a:r>
+              <a:rPr lang="en-US" sz="1200" b="1" spc="100" kern="0" dirty="0">
+                <a:solidFill>
+                  <a:srgbClr val="145C68"/>
+                </a:solidFill>
+                <a:latin typeface="Calibri" pitchFamily="34" charset="0"/>
+                <a:ea typeface="Calibri" pitchFamily="34" charset="-122"/>
+                <a:cs typeface="Calibri" pitchFamily="34" charset="-120"/>
+              </a:rPr>
+              <a:t>CAPEX TOTAL 2027</a:t>
+            </a:r>
+            <a:endParaRPr lang="en-US" sz="1200" dirty="0"/>
+          </a:p>
+        </p:txBody>
+      </p:sp>
+      <p:sp>
+        <p:nvSpPr>
+          <p:cNvPr id="9" name="Text 7"/>
+          <p:cNvSpPr txBox="1"/>
+          <p:nvPr/>
+        </p:nvSpPr>
+        <p:spPr>
+          <a:xfrm>
+            <a:off x="713232" y="2404872"/>
+            <a:ext cx="3236976" cy="274320"/>
+          </a:xfrm>
+          <a:prstGeom prst="rect">
+            <a:avLst/>
+          </a:prstGeom>
+          <a:noFill/>
+          <a:ln/>
+        </p:spPr>
+        <p:txBody>
+          <a:bodyPr wrap="square" lIns="0" tIns="0" rIns="0" bIns="0" rtlCol="0" anchor="ctr"/>
+          <a:lstStyle/>
+          <a:p>
+            <a:pPr indent="0" marL="0">
+              <a:buNone/>
+            </a:pPr>
+            <a:r>
+              <a:rPr lang="en-US" sz="900" dirty="0">
+                <a:solidFill>
+                  <a:srgbClr val="5B6B73"/>
+                </a:solidFill>
+                <a:latin typeface="Calibri" pitchFamily="34" charset="0"/>
+                <a:ea typeface="Calibri" pitchFamily="34" charset="-122"/>
+                <a:cs typeface="Calibri" pitchFamily="34" charset="-120"/>
+              </a:rPr>
+              <a:t>excl. Desenvolvimento de Produção e Parada Programada (TA)</a:t>
+            </a:r>
+            <a:endParaRPr lang="en-US" sz="900" dirty="0"/>
+          </a:p>
+        </p:txBody>
+      </p:sp>
+      <p:sp>
+        <p:nvSpPr>
+          <p:cNvPr id="10" name="Shape 8"/>
+          <p:cNvSpPr/>
+          <p:nvPr/>
+        </p:nvSpPr>
+        <p:spPr>
+          <a:xfrm>
+            <a:off x="4434840" y="1143000"/>
+            <a:ext cx="3566160" cy="1600200"/>
+          </a:xfrm>
+          <a:prstGeom prst="roundRect">
+            <a:avLst>
+              <a:gd name="adj" fmla="val 4571"/>
+            </a:avLst>
+          </a:prstGeom>
+          <a:solidFill>
+            <a:srgbClr val="F0F4F5"/>
+          </a:solidFill>
+          <a:ln/>
+        </p:spPr>
+      </p:sp>
+      <p:sp>
+        <p:nvSpPr>
+          <p:cNvPr id="11" name="Text 9"/>
+          <p:cNvSpPr txBox="1"/>
+          <p:nvPr/>
+        </p:nvSpPr>
+        <p:spPr>
+          <a:xfrm>
+            <a:off x="4599432" y="1600200"/>
+            <a:ext cx="3236976" cy="411480"/>
+          </a:xfrm>
+          <a:prstGeom prst="rect">
+            <a:avLst/>
+          </a:prstGeom>
+          <a:noFill/>
+          <a:ln/>
+        </p:spPr>
+        <p:txBody>
+          <a:bodyPr wrap="none" lIns="0" tIns="0" rIns="0" bIns="0" rtlCol="0" anchor="ctr"/>
+          <a:lstStyle/>
+          <a:p>
+            <a:pPr indent="0" marL="0">
+              <a:buNone/>
+            </a:pPr>
+            <a:r>
+              <a:rPr lang="en-US" sz="2600" b="1" dirty="0">
+                <a:solidFill>
+                  <a:srgbClr val="0B2A3D"/>
+                </a:solidFill>
+                <a:latin typeface="Cambria" pitchFamily="34" charset="0"/>
+                <a:ea typeface="Cambria" pitchFamily="34" charset="-122"/>
+                <a:cs typeface="Cambria" pitchFamily="34" charset="-120"/>
+              </a:rPr>
+              <a:t>US$ 35,3 mi</a:t>
+            </a:r>
+            <a:endParaRPr lang="en-US" sz="2600" dirty="0"/>
+          </a:p>
+        </p:txBody>
+      </p:sp>
+      <p:sp>
+        <p:nvSpPr>
+          <p:cNvPr id="12" name="Text 10"/>
+          <p:cNvSpPr txBox="1"/>
+          <p:nvPr/>
+        </p:nvSpPr>
+        <p:spPr>
+          <a:xfrm>
+            <a:off x="4599432" y="2167128"/>
+            <a:ext cx="3236976" cy="274320"/>
+          </a:xfrm>
+          <a:prstGeom prst="rect">
+            <a:avLst/>
+          </a:prstGeom>
+          <a:noFill/>
+          <a:ln/>
+        </p:spPr>
+        <p:txBody>
+          <a:bodyPr wrap="square" lIns="0" tIns="0" rIns="0" bIns="0" rtlCol="0" anchor="ctr"/>
+          <a:lstStyle/>
+          <a:p>
+            <a:pPr indent="0" marL="0">
+              <a:buNone/>
+            </a:pPr>
+            <a:r>
+              <a:rPr lang="en-US" sz="1000" b="1" spc="50" kern="0" dirty="0">
+                <a:solidFill>
+                  <a:srgbClr val="145C68"/>
+                </a:solidFill>
+                <a:latin typeface="Calibri" pitchFamily="34" charset="0"/>
+                <a:ea typeface="Calibri" pitchFamily="34" charset="-122"/>
+                <a:cs typeface="Calibri" pitchFamily="34" charset="-120"/>
+              </a:rPr>
+              <a:t>SERVIÇO</a:t>
+            </a:r>
+            <a:endParaRPr lang="en-US" sz="1000" dirty="0"/>
+          </a:p>
+        </p:txBody>
+      </p:sp>
+      <p:sp>
+        <p:nvSpPr>
+          <p:cNvPr id="13" name="Shape 11"/>
+          <p:cNvSpPr/>
+          <p:nvPr/>
+        </p:nvSpPr>
+        <p:spPr>
+          <a:xfrm>
+            <a:off x="8138160" y="1143000"/>
+            <a:ext cx="3566160" cy="1600200"/>
+          </a:xfrm>
+          <a:prstGeom prst="roundRect">
+            <a:avLst>
+              <a:gd name="adj" fmla="val 4571"/>
+            </a:avLst>
+          </a:prstGeom>
+          <a:solidFill>
+            <a:srgbClr val="F0F4F5"/>
+          </a:solidFill>
+          <a:ln/>
+        </p:spPr>
+      </p:sp>
+      <p:sp>
+        <p:nvSpPr>
+          <p:cNvPr id="14" name="Text 12"/>
+          <p:cNvSpPr txBox="1"/>
+          <p:nvPr/>
+        </p:nvSpPr>
+        <p:spPr>
+          <a:xfrm>
+            <a:off x="8302752" y="1600200"/>
+            <a:ext cx="3236976" cy="411480"/>
+          </a:xfrm>
+          <a:prstGeom prst="rect">
+            <a:avLst/>
+          </a:prstGeom>
+          <a:noFill/>
+          <a:ln/>
+        </p:spPr>
+        <p:txBody>
+          <a:bodyPr wrap="none" lIns="0" tIns="0" rIns="0" bIns="0" rtlCol="0" anchor="ctr"/>
+          <a:lstStyle/>
+          <a:p>
+            <a:pPr indent="0" marL="0">
+              <a:buNone/>
+            </a:pPr>
+            <a:r>
+              <a:rPr lang="en-US" sz="2600" b="1" dirty="0">
+                <a:solidFill>
+                  <a:srgbClr val="0B2A3D"/>
+                </a:solidFill>
+                <a:latin typeface="Cambria" pitchFamily="34" charset="0"/>
+                <a:ea typeface="Cambria" pitchFamily="34" charset="-122"/>
+                <a:cs typeface="Cambria" pitchFamily="34" charset="-120"/>
+              </a:rPr>
+              <a:t>US$ 46,8 mi</a:t>
+            </a:r>
+            <a:endParaRPr lang="en-US" sz="2600" dirty="0"/>
+          </a:p>
+        </p:txBody>
+      </p:sp>
+      <p:sp>
+        <p:nvSpPr>
+          <p:cNvPr id="15" name="Text 13"/>
+          <p:cNvSpPr txBox="1"/>
+          <p:nvPr/>
+        </p:nvSpPr>
+        <p:spPr>
+          <a:xfrm>
+            <a:off x="8302752" y="2167128"/>
+            <a:ext cx="3236976" cy="274320"/>
+          </a:xfrm>
+          <a:prstGeom prst="rect">
+            <a:avLst/>
+          </a:prstGeom>
+          <a:noFill/>
+          <a:ln/>
+        </p:spPr>
+        <p:txBody>
+          <a:bodyPr wrap="square" lIns="0" tIns="0" rIns="0" bIns="0" rtlCol="0" anchor="ctr"/>
+          <a:lstStyle/>
+          <a:p>
+            <a:pPr indent="0" marL="0">
+              <a:buNone/>
+            </a:pPr>
+            <a:r>
+              <a:rPr lang="en-US" sz="1000" b="1" spc="50" kern="0" dirty="0">
+                <a:solidFill>
+                  <a:srgbClr val="145C68"/>
+                </a:solidFill>
+                <a:latin typeface="Calibri" pitchFamily="34" charset="0"/>
+                <a:ea typeface="Calibri" pitchFamily="34" charset="-122"/>
+                <a:cs typeface="Calibri" pitchFamily="34" charset="-120"/>
+              </a:rPr>
+              <a:t>MATERIAL</a:t>
+            </a:r>
+            <a:endParaRPr lang="en-US" sz="1000" dirty="0"/>
+          </a:p>
+        </p:txBody>
+      </p:sp>
+      <p:sp>
+        <p:nvSpPr>
+          <p:cNvPr id="16" name="Text 14"/>
+          <p:cNvSpPr txBox="1"/>
+          <p:nvPr/>
+        </p:nvSpPr>
+        <p:spPr>
+          <a:xfrm>
+            <a:off x="457200" y="3017520"/>
+            <a:ext cx="5349240" cy="274320"/>
+          </a:xfrm>
+          <a:prstGeom prst="rect">
+            <a:avLst/>
+          </a:prstGeom>
+          <a:noFill/>
+          <a:ln/>
+        </p:spPr>
+        <p:txBody>
+          <a:bodyPr wrap="square" lIns="0" tIns="0" rIns="0" bIns="0" rtlCol="0" anchor="ctr"/>
+          <a:lstStyle/>
+          <a:p>
+            <a:pPr indent="0" marL="0">
+              <a:buNone/>
+            </a:pPr>
+            <a:r>
+              <a:rPr lang="en-US" sz="1100" b="1" spc="120" kern="0" dirty="0">
+                <a:solidFill>
+                  <a:srgbClr val="0B2A3D"/>
+                </a:solidFill>
+                <a:latin typeface="Calibri" pitchFamily="34" charset="0"/>
+                <a:ea typeface="Calibri" pitchFamily="34" charset="-122"/>
+                <a:cs typeface="Calibri" pitchFamily="34" charset="-120"/>
+              </a:rPr>
+              <a:t>ÁREA REQUISITANTE</a:t>
+            </a:r>
+            <a:endParaRPr lang="en-US" sz="1100" dirty="0"/>
+          </a:p>
+        </p:txBody>
+      </p:sp>
+      <p:sp>
+        <p:nvSpPr>
+          <p:cNvPr id="17" name="Shape 15"/>
+          <p:cNvSpPr/>
+          <p:nvPr/>
+        </p:nvSpPr>
+        <p:spPr>
+          <a:xfrm>
+            <a:off x="457200" y="3310128"/>
+            <a:ext cx="5349240" cy="0"/>
+          </a:xfrm>
+          <a:prstGeom prst="line">
+            <a:avLst/>
+          </a:prstGeom>
+          <a:noFill/>
+          <a:ln w="12700">
+            <a:solidFill>
+              <a:srgbClr val="E3E8E9"/>
+            </a:solidFill>
+            <a:prstDash val="solid"/>
+          </a:ln>
+        </p:spPr>
+      </p:sp>
+      <p:sp>
+        <p:nvSpPr>
+          <p:cNvPr id="18" name="Text 16"/>
+          <p:cNvSpPr txBox="1"/>
+          <p:nvPr/>
+        </p:nvSpPr>
+        <p:spPr>
+          <a:xfrm>
+            <a:off x="566928" y="3401568"/>
+            <a:ext cx="3316529" cy="281635"/>
+          </a:xfrm>
+          <a:prstGeom prst="rect">
+            <a:avLst/>
+          </a:prstGeom>
+          <a:noFill/>
+          <a:ln/>
+        </p:spPr>
+        <p:txBody>
+          <a:bodyPr wrap="square" lIns="0" tIns="0" rIns="0" bIns="0" rtlCol="0" anchor="ctr"/>
+          <a:lstStyle/>
+          <a:p>
+            <a:pPr indent="0" marL="0">
+              <a:buNone/>
+            </a:pPr>
+            <a:r>
+              <a:rPr lang="en-US" sz="950" dirty="0">
+                <a:solidFill>
+                  <a:srgbClr val="1C2B33"/>
+                </a:solidFill>
+                <a:latin typeface="Calibri" pitchFamily="34" charset="0"/>
+                <a:ea typeface="Calibri" pitchFamily="34" charset="-122"/>
+                <a:cs typeface="Calibri" pitchFamily="34" charset="-120"/>
+              </a:rPr>
+              <a:t>Projetos</a:t>
+            </a:r>
+            <a:endParaRPr lang="en-US" sz="950" dirty="0"/>
+          </a:p>
+        </p:txBody>
+      </p:sp>
+      <p:sp>
+        <p:nvSpPr>
+          <p:cNvPr id="19" name="Text 17"/>
+          <p:cNvSpPr txBox="1"/>
+          <p:nvPr/>
+        </p:nvSpPr>
+        <p:spPr>
+          <a:xfrm>
+            <a:off x="3773729" y="3401568"/>
+            <a:ext cx="1815998" cy="281635"/>
+          </a:xfrm>
+          <a:prstGeom prst="rect">
+            <a:avLst/>
+          </a:prstGeom>
+          <a:noFill/>
+          <a:ln/>
+        </p:spPr>
+        <p:txBody>
+          <a:bodyPr wrap="square" lIns="0" tIns="0" rIns="0" bIns="0" rtlCol="0" anchor="ctr"/>
+          <a:lstStyle/>
+          <a:p>
+            <a:pPr algn="r" indent="0" marL="0">
+              <a:buNone/>
+            </a:pPr>
+            <a:r>
+              <a:rPr lang="en-US" sz="950" b="1" dirty="0">
+                <a:solidFill>
+                  <a:srgbClr val="0B2A3D"/>
+                </a:solidFill>
+                <a:latin typeface="Calibri" pitchFamily="34" charset="0"/>
+                <a:ea typeface="Calibri" pitchFamily="34" charset="-122"/>
+                <a:cs typeface="Calibri" pitchFamily="34" charset="-120"/>
+              </a:rPr>
+              <a:t>US$ 29,9 mi</a:t>
+            </a:r>
+            <a:endParaRPr lang="en-US" sz="950" dirty="0"/>
+          </a:p>
+        </p:txBody>
+      </p:sp>
+      <p:sp>
+        <p:nvSpPr>
+          <p:cNvPr id="20" name="Shape 18"/>
+          <p:cNvSpPr/>
+          <p:nvPr/>
+        </p:nvSpPr>
+        <p:spPr>
+          <a:xfrm>
+            <a:off x="457200" y="3683203"/>
+            <a:ext cx="5349240" cy="281635"/>
+          </a:xfrm>
+          <a:prstGeom prst="rect">
+            <a:avLst/>
+          </a:prstGeom>
+          <a:solidFill>
+            <a:srgbClr val="F0F4F5"/>
+          </a:solidFill>
+          <a:ln/>
+        </p:spPr>
+      </p:sp>
+      <p:sp>
+        <p:nvSpPr>
+          <p:cNvPr id="21" name="Text 19"/>
+          <p:cNvSpPr txBox="1"/>
+          <p:nvPr/>
+        </p:nvSpPr>
+        <p:spPr>
+          <a:xfrm>
+            <a:off x="566928" y="3683203"/>
+            <a:ext cx="3316529" cy="281635"/>
+          </a:xfrm>
+          <a:prstGeom prst="rect">
+            <a:avLst/>
+          </a:prstGeom>
+          <a:noFill/>
+          <a:ln/>
+        </p:spPr>
+        <p:txBody>
+          <a:bodyPr wrap="square" lIns="0" tIns="0" rIns="0" bIns="0" rtlCol="0" anchor="ctr"/>
+          <a:lstStyle/>
+          <a:p>
+            <a:pPr indent="0" marL="0">
+              <a:buNone/>
+            </a:pPr>
+            <a:r>
+              <a:rPr lang="en-US" sz="950" dirty="0">
+                <a:solidFill>
+                  <a:srgbClr val="1C2B33"/>
+                </a:solidFill>
+                <a:latin typeface="Calibri" pitchFamily="34" charset="0"/>
+                <a:ea typeface="Calibri" pitchFamily="34" charset="-122"/>
+                <a:cs typeface="Calibri" pitchFamily="34" charset="-120"/>
+              </a:rPr>
+              <a:t>NAV - Naval</a:t>
+            </a:r>
+            <a:endParaRPr lang="en-US" sz="950" dirty="0"/>
+          </a:p>
+        </p:txBody>
+      </p:sp>
+      <p:sp>
+        <p:nvSpPr>
+          <p:cNvPr id="22" name="Text 20"/>
+          <p:cNvSpPr txBox="1"/>
+          <p:nvPr/>
+        </p:nvSpPr>
+        <p:spPr>
+          <a:xfrm>
+            <a:off x="3773729" y="3683203"/>
+            <a:ext cx="1815998" cy="281635"/>
+          </a:xfrm>
+          <a:prstGeom prst="rect">
+            <a:avLst/>
+          </a:prstGeom>
+          <a:noFill/>
+          <a:ln/>
+        </p:spPr>
+        <p:txBody>
+          <a:bodyPr wrap="square" lIns="0" tIns="0" rIns="0" bIns="0" rtlCol="0" anchor="ctr"/>
+          <a:lstStyle/>
+          <a:p>
+            <a:pPr algn="r" indent="0" marL="0">
+              <a:buNone/>
+            </a:pPr>
+            <a:r>
+              <a:rPr lang="en-US" sz="950" b="1" dirty="0">
+                <a:solidFill>
+                  <a:srgbClr val="0B2A3D"/>
+                </a:solidFill>
+                <a:latin typeface="Calibri" pitchFamily="34" charset="0"/>
+                <a:ea typeface="Calibri" pitchFamily="34" charset="-122"/>
+                <a:cs typeface="Calibri" pitchFamily="34" charset="-120"/>
+              </a:rPr>
+              <a:t>US$ 21,7 mi</a:t>
+            </a:r>
+            <a:endParaRPr lang="en-US" sz="950" dirty="0"/>
+          </a:p>
+        </p:txBody>
+      </p:sp>
+      <p:sp>
+        <p:nvSpPr>
+          <p:cNvPr id="23" name="Text 21"/>
+          <p:cNvSpPr txBox="1"/>
+          <p:nvPr/>
+        </p:nvSpPr>
+        <p:spPr>
+          <a:xfrm>
+            <a:off x="566928" y="3964838"/>
+            <a:ext cx="3316529" cy="281635"/>
+          </a:xfrm>
+          <a:prstGeom prst="rect">
+            <a:avLst/>
+          </a:prstGeom>
+          <a:noFill/>
+          <a:ln/>
+        </p:spPr>
+        <p:txBody>
+          <a:bodyPr wrap="square" lIns="0" tIns="0" rIns="0" bIns="0" rtlCol="0" anchor="ctr"/>
+          <a:lstStyle/>
+          <a:p>
+            <a:pPr indent="0" marL="0">
+              <a:buNone/>
+            </a:pPr>
+            <a:r>
+              <a:rPr lang="en-US" sz="950" dirty="0">
+                <a:solidFill>
+                  <a:srgbClr val="1C2B33"/>
+                </a:solidFill>
+                <a:latin typeface="Calibri" pitchFamily="34" charset="0"/>
+                <a:ea typeface="Calibri" pitchFamily="34" charset="-122"/>
+                <a:cs typeface="Calibri" pitchFamily="34" charset="-120"/>
+              </a:rPr>
+              <a:t>MNT – Manutenção</a:t>
+            </a:r>
+            <a:endParaRPr lang="en-US" sz="950" dirty="0"/>
+          </a:p>
+        </p:txBody>
+      </p:sp>
+      <p:sp>
+        <p:nvSpPr>
+          <p:cNvPr id="24" name="Text 22"/>
+          <p:cNvSpPr txBox="1"/>
+          <p:nvPr/>
+        </p:nvSpPr>
+        <p:spPr>
+          <a:xfrm>
+            <a:off x="3773729" y="3964838"/>
+            <a:ext cx="1815998" cy="281635"/>
+          </a:xfrm>
+          <a:prstGeom prst="rect">
+            <a:avLst/>
+          </a:prstGeom>
+          <a:noFill/>
+          <a:ln/>
+        </p:spPr>
+        <p:txBody>
+          <a:bodyPr wrap="square" lIns="0" tIns="0" rIns="0" bIns="0" rtlCol="0" anchor="ctr"/>
+          <a:lstStyle/>
+          <a:p>
+            <a:pPr algn="r" indent="0" marL="0">
+              <a:buNone/>
+            </a:pPr>
+            <a:r>
+              <a:rPr lang="en-US" sz="950" b="1" dirty="0">
+                <a:solidFill>
+                  <a:srgbClr val="0B2A3D"/>
+                </a:solidFill>
+                <a:latin typeface="Calibri" pitchFamily="34" charset="0"/>
+                <a:ea typeface="Calibri" pitchFamily="34" charset="-122"/>
+                <a:cs typeface="Calibri" pitchFamily="34" charset="-120"/>
+              </a:rPr>
+              <a:t>US$ 18,0 mi</a:t>
+            </a:r>
+            <a:endParaRPr lang="en-US" sz="950" dirty="0"/>
+          </a:p>
+        </p:txBody>
+      </p:sp>
+      <p:sp>
+        <p:nvSpPr>
+          <p:cNvPr id="25" name="Shape 23"/>
+          <p:cNvSpPr/>
+          <p:nvPr/>
+        </p:nvSpPr>
+        <p:spPr>
+          <a:xfrm>
+            <a:off x="457200" y="4246474"/>
+            <a:ext cx="5349240" cy="281635"/>
+          </a:xfrm>
+          <a:prstGeom prst="rect">
+            <a:avLst/>
+          </a:prstGeom>
+          <a:solidFill>
+            <a:srgbClr val="F0F4F5"/>
+          </a:solidFill>
+          <a:ln/>
+        </p:spPr>
+      </p:sp>
+      <p:sp>
+        <p:nvSpPr>
+          <p:cNvPr id="26" name="Text 24"/>
+          <p:cNvSpPr txBox="1"/>
+          <p:nvPr/>
+        </p:nvSpPr>
+        <p:spPr>
+          <a:xfrm>
+            <a:off x="566928" y="4246474"/>
+            <a:ext cx="3316529" cy="281635"/>
+          </a:xfrm>
+          <a:prstGeom prst="rect">
+            <a:avLst/>
+          </a:prstGeom>
+          <a:noFill/>
+          <a:ln/>
+        </p:spPr>
+        <p:txBody>
+          <a:bodyPr wrap="square" lIns="0" tIns="0" rIns="0" bIns="0" rtlCol="0" anchor="ctr"/>
+          <a:lstStyle/>
+          <a:p>
+            <a:pPr indent="0" marL="0">
+              <a:buNone/>
+            </a:pPr>
+            <a:r>
+              <a:rPr lang="en-US" sz="950" dirty="0">
+                <a:solidFill>
+                  <a:srgbClr val="1C2B33"/>
+                </a:solidFill>
+                <a:latin typeface="Calibri" pitchFamily="34" charset="0"/>
+                <a:ea typeface="Calibri" pitchFamily="34" charset="-122"/>
+                <a:cs typeface="Calibri" pitchFamily="34" charset="-120"/>
+              </a:rPr>
+              <a:t>Saúde e Segurança Ocupacional</a:t>
+            </a:r>
+            <a:endParaRPr lang="en-US" sz="950" dirty="0"/>
+          </a:p>
+        </p:txBody>
+      </p:sp>
+      <p:sp>
+        <p:nvSpPr>
+          <p:cNvPr id="27" name="Text 25"/>
+          <p:cNvSpPr txBox="1"/>
+          <p:nvPr/>
+        </p:nvSpPr>
+        <p:spPr>
+          <a:xfrm>
+            <a:off x="3773729" y="4246474"/>
+            <a:ext cx="1815998" cy="281635"/>
+          </a:xfrm>
+          <a:prstGeom prst="rect">
+            <a:avLst/>
+          </a:prstGeom>
+          <a:noFill/>
+          <a:ln/>
+        </p:spPr>
+        <p:txBody>
+          <a:bodyPr wrap="square" lIns="0" tIns="0" rIns="0" bIns="0" rtlCol="0" anchor="ctr"/>
+          <a:lstStyle/>
+          <a:p>
+            <a:pPr algn="r" indent="0" marL="0">
+              <a:buNone/>
+            </a:pPr>
+            <a:r>
+              <a:rPr lang="en-US" sz="950" b="1" dirty="0">
+                <a:solidFill>
+                  <a:srgbClr val="0B2A3D"/>
+                </a:solidFill>
+                <a:latin typeface="Calibri" pitchFamily="34" charset="0"/>
+                <a:ea typeface="Calibri" pitchFamily="34" charset="-122"/>
+                <a:cs typeface="Calibri" pitchFamily="34" charset="-120"/>
+              </a:rPr>
+              <a:t>US$ 3,8 mi</a:t>
+            </a:r>
+            <a:endParaRPr lang="en-US" sz="950" dirty="0"/>
+          </a:p>
+        </p:txBody>
+      </p:sp>
+      <p:sp>
+        <p:nvSpPr>
+          <p:cNvPr id="28" name="Text 26"/>
+          <p:cNvSpPr txBox="1"/>
+          <p:nvPr/>
+        </p:nvSpPr>
+        <p:spPr>
+          <a:xfrm>
+            <a:off x="566928" y="4528109"/>
+            <a:ext cx="3316529" cy="281635"/>
+          </a:xfrm>
+          <a:prstGeom prst="rect">
+            <a:avLst/>
+          </a:prstGeom>
+          <a:noFill/>
+          <a:ln/>
+        </p:spPr>
+        <p:txBody>
+          <a:bodyPr wrap="square" lIns="0" tIns="0" rIns="0" bIns="0" rtlCol="0" anchor="ctr"/>
+          <a:lstStyle/>
+          <a:p>
+            <a:pPr indent="0" marL="0">
+              <a:buNone/>
+            </a:pPr>
+            <a:r>
+              <a:rPr lang="en-US" sz="950" dirty="0">
+                <a:solidFill>
+                  <a:srgbClr val="1C2B33"/>
+                </a:solidFill>
+                <a:latin typeface="Calibri" pitchFamily="34" charset="0"/>
+                <a:ea typeface="Calibri" pitchFamily="34" charset="-122"/>
+                <a:cs typeface="Calibri" pitchFamily="34" charset="-120"/>
+              </a:rPr>
+              <a:t>ADM - Administrativo</a:t>
+            </a:r>
+            <a:endParaRPr lang="en-US" sz="950" dirty="0"/>
+          </a:p>
+        </p:txBody>
+      </p:sp>
+      <p:sp>
+        <p:nvSpPr>
+          <p:cNvPr id="29" name="Text 27"/>
+          <p:cNvSpPr txBox="1"/>
+          <p:nvPr/>
+        </p:nvSpPr>
+        <p:spPr>
+          <a:xfrm>
+            <a:off x="3773729" y="4528109"/>
+            <a:ext cx="1815998" cy="281635"/>
+          </a:xfrm>
+          <a:prstGeom prst="rect">
+            <a:avLst/>
+          </a:prstGeom>
+          <a:noFill/>
+          <a:ln/>
+        </p:spPr>
+        <p:txBody>
+          <a:bodyPr wrap="square" lIns="0" tIns="0" rIns="0" bIns="0" rtlCol="0" anchor="ctr"/>
+          <a:lstStyle/>
+          <a:p>
+            <a:pPr algn="r" indent="0" marL="0">
+              <a:buNone/>
+            </a:pPr>
+            <a:r>
+              <a:rPr lang="en-US" sz="950" b="1" dirty="0">
+                <a:solidFill>
+                  <a:srgbClr val="0B2A3D"/>
+                </a:solidFill>
+                <a:latin typeface="Calibri" pitchFamily="34" charset="0"/>
+                <a:ea typeface="Calibri" pitchFamily="34" charset="-122"/>
+                <a:cs typeface="Calibri" pitchFamily="34" charset="-120"/>
+              </a:rPr>
+              <a:t>US$ 2,9 mi</a:t>
+            </a:r>
+            <a:endParaRPr lang="en-US" sz="950" dirty="0"/>
+          </a:p>
+        </p:txBody>
+      </p:sp>
+      <p:sp>
+        <p:nvSpPr>
+          <p:cNvPr id="30" name="Shape 28"/>
+          <p:cNvSpPr/>
+          <p:nvPr/>
+        </p:nvSpPr>
+        <p:spPr>
+          <a:xfrm>
+            <a:off x="457200" y="4809744"/>
+            <a:ext cx="5349240" cy="281635"/>
+          </a:xfrm>
+          <a:prstGeom prst="rect">
+            <a:avLst/>
+          </a:prstGeom>
+          <a:solidFill>
+            <a:srgbClr val="F0F4F5"/>
+          </a:solidFill>
+          <a:ln/>
+        </p:spPr>
+      </p:sp>
+      <p:sp>
+        <p:nvSpPr>
+          <p:cNvPr id="31" name="Text 29"/>
+          <p:cNvSpPr txBox="1"/>
+          <p:nvPr/>
+        </p:nvSpPr>
+        <p:spPr>
+          <a:xfrm>
+            <a:off x="566928" y="4809744"/>
+            <a:ext cx="3316529" cy="281635"/>
+          </a:xfrm>
+          <a:prstGeom prst="rect">
+            <a:avLst/>
+          </a:prstGeom>
+          <a:noFill/>
+          <a:ln/>
+        </p:spPr>
+        <p:txBody>
+          <a:bodyPr wrap="square" lIns="0" tIns="0" rIns="0" bIns="0" rtlCol="0" anchor="ctr"/>
+          <a:lstStyle/>
+          <a:p>
+            <a:pPr indent="0" marL="0">
+              <a:buNone/>
+            </a:pPr>
+            <a:r>
+              <a:rPr lang="en-US" sz="950" dirty="0">
+                <a:solidFill>
+                  <a:srgbClr val="1C2B33"/>
+                </a:solidFill>
+                <a:latin typeface="Calibri" pitchFamily="34" charset="0"/>
+                <a:ea typeface="Calibri" pitchFamily="34" charset="-122"/>
+                <a:cs typeface="Calibri" pitchFamily="34" charset="-120"/>
+              </a:rPr>
+              <a:t>INT - Integridade</a:t>
+            </a:r>
+            <a:endParaRPr lang="en-US" sz="950" dirty="0"/>
+          </a:p>
+        </p:txBody>
+      </p:sp>
+      <p:sp>
+        <p:nvSpPr>
+          <p:cNvPr id="32" name="Text 30"/>
+          <p:cNvSpPr txBox="1"/>
+          <p:nvPr/>
+        </p:nvSpPr>
+        <p:spPr>
+          <a:xfrm>
+            <a:off x="3773729" y="4809744"/>
+            <a:ext cx="1815998" cy="281635"/>
+          </a:xfrm>
+          <a:prstGeom prst="rect">
+            <a:avLst/>
+          </a:prstGeom>
+          <a:noFill/>
+          <a:ln/>
+        </p:spPr>
+        <p:txBody>
+          <a:bodyPr wrap="square" lIns="0" tIns="0" rIns="0" bIns="0" rtlCol="0" anchor="ctr"/>
+          <a:lstStyle/>
+          <a:p>
+            <a:pPr algn="r" indent="0" marL="0">
+              <a:buNone/>
+            </a:pPr>
+            <a:r>
+              <a:rPr lang="en-US" sz="950" b="1" dirty="0">
+                <a:solidFill>
+                  <a:srgbClr val="0B2A3D"/>
+                </a:solidFill>
+                <a:latin typeface="Calibri" pitchFamily="34" charset="0"/>
+                <a:ea typeface="Calibri" pitchFamily="34" charset="-122"/>
+                <a:cs typeface="Calibri" pitchFamily="34" charset="-120"/>
+              </a:rPr>
+              <a:t>US$ 2,1 mi</a:t>
+            </a:r>
+            <a:endParaRPr lang="en-US" sz="950" dirty="0"/>
+          </a:p>
+        </p:txBody>
+      </p:sp>
+      <p:sp>
+        <p:nvSpPr>
+          <p:cNvPr id="33" name="Text 31"/>
+          <p:cNvSpPr txBox="1"/>
+          <p:nvPr/>
+        </p:nvSpPr>
+        <p:spPr>
+          <a:xfrm>
+            <a:off x="566928" y="5091379"/>
+            <a:ext cx="3316529" cy="281635"/>
+          </a:xfrm>
+          <a:prstGeom prst="rect">
+            <a:avLst/>
+          </a:prstGeom>
+          <a:noFill/>
+          <a:ln/>
+        </p:spPr>
+        <p:txBody>
+          <a:bodyPr wrap="square" lIns="0" tIns="0" rIns="0" bIns="0" rtlCol="0" anchor="ctr"/>
+          <a:lstStyle/>
+          <a:p>
+            <a:pPr indent="0" marL="0">
+              <a:buNone/>
+            </a:pPr>
+            <a:r>
+              <a:rPr lang="en-US" sz="950" dirty="0">
+                <a:solidFill>
+                  <a:srgbClr val="1C2B33"/>
+                </a:solidFill>
+                <a:latin typeface="Calibri" pitchFamily="34" charset="0"/>
+                <a:ea typeface="Calibri" pitchFamily="34" charset="-122"/>
+                <a:cs typeface="Calibri" pitchFamily="34" charset="-120"/>
+              </a:rPr>
+              <a:t>P&amp;Q - Processos</a:t>
+            </a:r>
+            <a:endParaRPr lang="en-US" sz="950" dirty="0"/>
+          </a:p>
+        </p:txBody>
+      </p:sp>
+      <p:sp>
+        <p:nvSpPr>
+          <p:cNvPr id="34" name="Text 32"/>
+          <p:cNvSpPr txBox="1"/>
+          <p:nvPr/>
+        </p:nvSpPr>
+        <p:spPr>
+          <a:xfrm>
+            <a:off x="3773729" y="5091379"/>
+            <a:ext cx="1815998" cy="281635"/>
+          </a:xfrm>
+          <a:prstGeom prst="rect">
+            <a:avLst/>
+          </a:prstGeom>
+          <a:noFill/>
+          <a:ln/>
+        </p:spPr>
+        <p:txBody>
+          <a:bodyPr wrap="square" lIns="0" tIns="0" rIns="0" bIns="0" rtlCol="0" anchor="ctr"/>
+          <a:lstStyle/>
+          <a:p>
+            <a:pPr algn="r" indent="0" marL="0">
+              <a:buNone/>
+            </a:pPr>
+            <a:r>
+              <a:rPr lang="en-US" sz="950" b="1" dirty="0">
+                <a:solidFill>
+                  <a:srgbClr val="0B2A3D"/>
+                </a:solidFill>
+                <a:latin typeface="Calibri" pitchFamily="34" charset="0"/>
+                <a:ea typeface="Calibri" pitchFamily="34" charset="-122"/>
+                <a:cs typeface="Calibri" pitchFamily="34" charset="-120"/>
+              </a:rPr>
+              <a:t>US$ 1,8 mi</a:t>
+            </a:r>
+            <a:endParaRPr lang="en-US" sz="950" dirty="0"/>
+          </a:p>
+        </p:txBody>
+      </p:sp>
+      <p:sp>
+        <p:nvSpPr>
+          <p:cNvPr id="35" name="Shape 33"/>
+          <p:cNvSpPr/>
+          <p:nvPr/>
+        </p:nvSpPr>
+        <p:spPr>
+          <a:xfrm>
+            <a:off x="457200" y="5373014"/>
+            <a:ext cx="5349240" cy="281635"/>
+          </a:xfrm>
+          <a:prstGeom prst="rect">
+            <a:avLst/>
+          </a:prstGeom>
+          <a:solidFill>
+            <a:srgbClr val="F0F4F5"/>
+          </a:solidFill>
+          <a:ln/>
+        </p:spPr>
+      </p:sp>
+      <p:sp>
+        <p:nvSpPr>
+          <p:cNvPr id="36" name="Text 34"/>
+          <p:cNvSpPr txBox="1"/>
+          <p:nvPr/>
+        </p:nvSpPr>
+        <p:spPr>
+          <a:xfrm>
+            <a:off x="566928" y="5373014"/>
+            <a:ext cx="3316529" cy="281635"/>
+          </a:xfrm>
+          <a:prstGeom prst="rect">
+            <a:avLst/>
+          </a:prstGeom>
+          <a:noFill/>
+          <a:ln/>
+        </p:spPr>
+        <p:txBody>
+          <a:bodyPr wrap="square" lIns="0" tIns="0" rIns="0" bIns="0" rtlCol="0" anchor="ctr"/>
+          <a:lstStyle/>
+          <a:p>
+            <a:pPr indent="0" marL="0">
+              <a:buNone/>
+            </a:pPr>
+            <a:r>
+              <a:rPr lang="en-US" sz="950" dirty="0">
+                <a:solidFill>
+                  <a:srgbClr val="1C2B33"/>
+                </a:solidFill>
+                <a:latin typeface="Calibri" pitchFamily="34" charset="0"/>
+                <a:ea typeface="Calibri" pitchFamily="34" charset="-122"/>
+                <a:cs typeface="Calibri" pitchFamily="34" charset="-120"/>
+              </a:rPr>
+              <a:t>P&amp;Q - Químicos</a:t>
+            </a:r>
+            <a:endParaRPr lang="en-US" sz="950" dirty="0"/>
+          </a:p>
+        </p:txBody>
+      </p:sp>
+      <p:sp>
+        <p:nvSpPr>
+          <p:cNvPr id="37" name="Text 35"/>
+          <p:cNvSpPr txBox="1"/>
+          <p:nvPr/>
+        </p:nvSpPr>
+        <p:spPr>
+          <a:xfrm>
+            <a:off x="3773729" y="5373014"/>
+            <a:ext cx="1815998" cy="281635"/>
+          </a:xfrm>
+          <a:prstGeom prst="rect">
+            <a:avLst/>
+          </a:prstGeom>
+          <a:noFill/>
+          <a:ln/>
+        </p:spPr>
+        <p:txBody>
+          <a:bodyPr wrap="square" lIns="0" tIns="0" rIns="0" bIns="0" rtlCol="0" anchor="ctr"/>
+          <a:lstStyle/>
+          <a:p>
+            <a:pPr algn="r" indent="0" marL="0">
+              <a:buNone/>
+            </a:pPr>
+            <a:r>
+              <a:rPr lang="en-US" sz="950" b="1" dirty="0">
+                <a:solidFill>
+                  <a:srgbClr val="0B2A3D"/>
+                </a:solidFill>
+                <a:latin typeface="Calibri" pitchFamily="34" charset="0"/>
+                <a:ea typeface="Calibri" pitchFamily="34" charset="-122"/>
+                <a:cs typeface="Calibri" pitchFamily="34" charset="-120"/>
+              </a:rPr>
+              <a:t>US$ 1,1 mi</a:t>
+            </a:r>
+            <a:endParaRPr lang="en-US" sz="950" dirty="0"/>
+          </a:p>
+        </p:txBody>
+      </p:sp>
+      <p:sp>
+        <p:nvSpPr>
+          <p:cNvPr id="38" name="Text 36"/>
+          <p:cNvSpPr txBox="1"/>
+          <p:nvPr/>
+        </p:nvSpPr>
+        <p:spPr>
+          <a:xfrm>
+            <a:off x="566928" y="5654650"/>
+            <a:ext cx="3316529" cy="281635"/>
+          </a:xfrm>
+          <a:prstGeom prst="rect">
+            <a:avLst/>
+          </a:prstGeom>
+          <a:noFill/>
+          <a:ln/>
+        </p:spPr>
+        <p:txBody>
+          <a:bodyPr wrap="square" lIns="0" tIns="0" rIns="0" bIns="0" rtlCol="0" anchor="ctr"/>
+          <a:lstStyle/>
+          <a:p>
+            <a:pPr indent="0" marL="0">
+              <a:buNone/>
+            </a:pPr>
+            <a:r>
+              <a:rPr lang="en-US" sz="950" dirty="0">
+                <a:solidFill>
+                  <a:srgbClr val="1C2B33"/>
+                </a:solidFill>
+                <a:latin typeface="Calibri" pitchFamily="34" charset="0"/>
+                <a:ea typeface="Calibri" pitchFamily="34" charset="-122"/>
+                <a:cs typeface="Calibri" pitchFamily="34" charset="-120"/>
+              </a:rPr>
+              <a:t>MET – Medição</a:t>
+            </a:r>
+            <a:endParaRPr lang="en-US" sz="950" dirty="0"/>
+          </a:p>
+        </p:txBody>
+      </p:sp>
+      <p:sp>
+        <p:nvSpPr>
+          <p:cNvPr id="39" name="Text 37"/>
+          <p:cNvSpPr txBox="1"/>
+          <p:nvPr/>
+        </p:nvSpPr>
+        <p:spPr>
+          <a:xfrm>
+            <a:off x="3773729" y="5654650"/>
+            <a:ext cx="1815998" cy="281635"/>
+          </a:xfrm>
+          <a:prstGeom prst="rect">
+            <a:avLst/>
+          </a:prstGeom>
+          <a:noFill/>
+          <a:ln/>
+        </p:spPr>
+        <p:txBody>
+          <a:bodyPr wrap="square" lIns="0" tIns="0" rIns="0" bIns="0" rtlCol="0" anchor="ctr"/>
+          <a:lstStyle/>
+          <a:p>
+            <a:pPr algn="r" indent="0" marL="0">
+              <a:buNone/>
+            </a:pPr>
+            <a:r>
+              <a:rPr lang="en-US" sz="950" b="1" dirty="0">
+                <a:solidFill>
+                  <a:srgbClr val="0B2A3D"/>
+                </a:solidFill>
+                <a:latin typeface="Calibri" pitchFamily="34" charset="0"/>
+                <a:ea typeface="Calibri" pitchFamily="34" charset="-122"/>
+                <a:cs typeface="Calibri" pitchFamily="34" charset="-120"/>
+              </a:rPr>
+              <a:t>US$ 822,3 mil</a:t>
+            </a:r>
+            <a:endParaRPr lang="en-US" sz="950" dirty="0"/>
+          </a:p>
+        </p:txBody>
+      </p:sp>
+      <p:sp>
+        <p:nvSpPr>
+          <p:cNvPr id="40" name="Shape 38"/>
+          <p:cNvSpPr/>
+          <p:nvPr/>
+        </p:nvSpPr>
+        <p:spPr>
+          <a:xfrm>
+            <a:off x="457200" y="5936285"/>
+            <a:ext cx="5349240" cy="281635"/>
+          </a:xfrm>
+          <a:prstGeom prst="rect">
+            <a:avLst/>
+          </a:prstGeom>
+          <a:solidFill>
+            <a:srgbClr val="F0F4F5"/>
+          </a:solidFill>
+          <a:ln/>
+        </p:spPr>
+      </p:sp>
+      <p:sp>
+        <p:nvSpPr>
+          <p:cNvPr id="41" name="Text 39"/>
+          <p:cNvSpPr txBox="1"/>
+          <p:nvPr/>
+        </p:nvSpPr>
+        <p:spPr>
+          <a:xfrm>
+            <a:off x="566928" y="5936285"/>
+            <a:ext cx="3316529" cy="281635"/>
+          </a:xfrm>
+          <a:prstGeom prst="rect">
+            <a:avLst/>
+          </a:prstGeom>
+          <a:noFill/>
+          <a:ln/>
+        </p:spPr>
+        <p:txBody>
+          <a:bodyPr wrap="square" lIns="0" tIns="0" rIns="0" bIns="0" rtlCol="0" anchor="ctr"/>
+          <a:lstStyle/>
+          <a:p>
+            <a:pPr indent="0" marL="0">
+              <a:buNone/>
+            </a:pPr>
+            <a:r>
+              <a:rPr lang="en-US" sz="950" dirty="0">
+                <a:solidFill>
+                  <a:srgbClr val="1C2B33"/>
+                </a:solidFill>
+                <a:latin typeface="Calibri" pitchFamily="34" charset="0"/>
+                <a:ea typeface="Calibri" pitchFamily="34" charset="-122"/>
+                <a:cs typeface="Calibri" pitchFamily="34" charset="-120"/>
+              </a:rPr>
+              <a:t>Segurança de Processos</a:t>
+            </a:r>
+            <a:endParaRPr lang="en-US" sz="950" dirty="0"/>
+          </a:p>
+        </p:txBody>
+      </p:sp>
+      <p:sp>
+        <p:nvSpPr>
+          <p:cNvPr id="42" name="Text 40"/>
+          <p:cNvSpPr txBox="1"/>
+          <p:nvPr/>
+        </p:nvSpPr>
+        <p:spPr>
+          <a:xfrm>
+            <a:off x="3773729" y="5936285"/>
+            <a:ext cx="1815998" cy="281635"/>
+          </a:xfrm>
+          <a:prstGeom prst="rect">
+            <a:avLst/>
+          </a:prstGeom>
+          <a:noFill/>
+          <a:ln/>
+        </p:spPr>
+        <p:txBody>
+          <a:bodyPr wrap="square" lIns="0" tIns="0" rIns="0" bIns="0" rtlCol="0" anchor="ctr"/>
+          <a:lstStyle/>
+          <a:p>
+            <a:pPr algn="r" indent="0" marL="0">
+              <a:buNone/>
+            </a:pPr>
+            <a:r>
+              <a:rPr lang="en-US" sz="950" b="1" dirty="0">
+                <a:solidFill>
+                  <a:srgbClr val="0B2A3D"/>
+                </a:solidFill>
+                <a:latin typeface="Calibri" pitchFamily="34" charset="0"/>
+                <a:ea typeface="Calibri" pitchFamily="34" charset="-122"/>
+                <a:cs typeface="Calibri" pitchFamily="34" charset="-120"/>
+              </a:rPr>
+              <a:t>US$ 75,1 mil</a:t>
+            </a:r>
+            <a:endParaRPr lang="en-US" sz="950" dirty="0"/>
+          </a:p>
+        </p:txBody>
+      </p:sp>
+      <p:sp>
+        <p:nvSpPr>
+          <p:cNvPr id="43" name="Text 41"/>
+          <p:cNvSpPr txBox="1"/>
+          <p:nvPr/>
+        </p:nvSpPr>
+        <p:spPr>
+          <a:xfrm>
+            <a:off x="6355080" y="3017520"/>
+            <a:ext cx="5349240" cy="274320"/>
+          </a:xfrm>
+          <a:prstGeom prst="rect">
+            <a:avLst/>
+          </a:prstGeom>
+          <a:noFill/>
+          <a:ln/>
+        </p:spPr>
+        <p:txBody>
+          <a:bodyPr wrap="square" lIns="0" tIns="0" rIns="0" bIns="0" rtlCol="0" anchor="ctr"/>
+          <a:lstStyle/>
+          <a:p>
+            <a:pPr indent="0" marL="0">
+              <a:buNone/>
+            </a:pPr>
+            <a:r>
+              <a:rPr lang="en-US" sz="1100" b="1" spc="120" kern="0" dirty="0">
+                <a:solidFill>
+                  <a:srgbClr val="0B2A3D"/>
+                </a:solidFill>
+                <a:latin typeface="Calibri" pitchFamily="34" charset="0"/>
+                <a:ea typeface="Calibri" pitchFamily="34" charset="-122"/>
+                <a:cs typeface="Calibri" pitchFamily="34" charset="-120"/>
+              </a:rPr>
+              <a:t>CATEGORIA</a:t>
+            </a:r>
+            <a:endParaRPr lang="en-US" sz="1100" dirty="0"/>
+          </a:p>
+        </p:txBody>
+      </p:sp>
+      <p:sp>
+        <p:nvSpPr>
+          <p:cNvPr id="44" name="Shape 42"/>
+          <p:cNvSpPr/>
+          <p:nvPr/>
+        </p:nvSpPr>
+        <p:spPr>
+          <a:xfrm>
+            <a:off x="6355080" y="3310128"/>
+            <a:ext cx="5349240" cy="0"/>
+          </a:xfrm>
+          <a:prstGeom prst="line">
+            <a:avLst/>
+          </a:prstGeom>
+          <a:noFill/>
+          <a:ln w="12700">
+            <a:solidFill>
+              <a:srgbClr val="E3E8E9"/>
+            </a:solidFill>
+            <a:prstDash val="solid"/>
+          </a:ln>
+        </p:spPr>
+      </p:sp>
+      <p:sp>
+        <p:nvSpPr>
+          <p:cNvPr id="45" name="Text 43"/>
+          <p:cNvSpPr txBox="1"/>
+          <p:nvPr/>
+        </p:nvSpPr>
+        <p:spPr>
+          <a:xfrm>
+            <a:off x="6464808" y="3401568"/>
+            <a:ext cx="3316529" cy="281635"/>
+          </a:xfrm>
+          <a:prstGeom prst="rect">
+            <a:avLst/>
+          </a:prstGeom>
+          <a:noFill/>
+          <a:ln/>
+        </p:spPr>
+        <p:txBody>
+          <a:bodyPr wrap="square" lIns="0" tIns="0" rIns="0" bIns="0" rtlCol="0" anchor="ctr"/>
+          <a:lstStyle/>
+          <a:p>
+            <a:pPr indent="0" marL="0">
+              <a:buNone/>
+            </a:pPr>
+            <a:r>
+              <a:rPr lang="en-US" sz="950" dirty="0">
+                <a:solidFill>
+                  <a:srgbClr val="1C2B33"/>
+                </a:solidFill>
+                <a:latin typeface="Calibri" pitchFamily="34" charset="0"/>
+                <a:ea typeface="Calibri" pitchFamily="34" charset="-122"/>
+                <a:cs typeface="Calibri" pitchFamily="34" charset="-120"/>
+              </a:rPr>
+              <a:t>Rotina Operacional</a:t>
+            </a:r>
+            <a:endParaRPr lang="en-US" sz="950" dirty="0"/>
+          </a:p>
+        </p:txBody>
+      </p:sp>
+      <p:sp>
+        <p:nvSpPr>
+          <p:cNvPr id="46" name="Text 44"/>
+          <p:cNvSpPr txBox="1"/>
+          <p:nvPr/>
+        </p:nvSpPr>
+        <p:spPr>
+          <a:xfrm>
+            <a:off x="9671609" y="3401568"/>
+            <a:ext cx="1815998" cy="281635"/>
+          </a:xfrm>
+          <a:prstGeom prst="rect">
+            <a:avLst/>
+          </a:prstGeom>
+          <a:noFill/>
+          <a:ln/>
+        </p:spPr>
+        <p:txBody>
+          <a:bodyPr wrap="square" lIns="0" tIns="0" rIns="0" bIns="0" rtlCol="0" anchor="ctr"/>
+          <a:lstStyle/>
+          <a:p>
+            <a:pPr algn="r" indent="0" marL="0">
+              <a:buNone/>
+            </a:pPr>
+            <a:r>
+              <a:rPr lang="en-US" sz="950" b="1" dirty="0">
+                <a:solidFill>
+                  <a:srgbClr val="0B2A3D"/>
+                </a:solidFill>
+                <a:latin typeface="Calibri" pitchFamily="34" charset="0"/>
+                <a:ea typeface="Calibri" pitchFamily="34" charset="-122"/>
+                <a:cs typeface="Calibri" pitchFamily="34" charset="-120"/>
+              </a:rPr>
+              <a:t>US$ 24,8 mi</a:t>
+            </a:r>
+            <a:endParaRPr lang="en-US" sz="950" dirty="0"/>
+          </a:p>
+        </p:txBody>
+      </p:sp>
+      <p:sp>
+        <p:nvSpPr>
+          <p:cNvPr id="47" name="Shape 45"/>
+          <p:cNvSpPr/>
+          <p:nvPr/>
+        </p:nvSpPr>
+        <p:spPr>
+          <a:xfrm>
+            <a:off x="6355080" y="3683203"/>
+            <a:ext cx="5349240" cy="281635"/>
+          </a:xfrm>
+          <a:prstGeom prst="rect">
+            <a:avLst/>
+          </a:prstGeom>
+          <a:solidFill>
+            <a:srgbClr val="F0F4F5"/>
+          </a:solidFill>
+          <a:ln/>
+        </p:spPr>
+      </p:sp>
+      <p:sp>
+        <p:nvSpPr>
+          <p:cNvPr id="48" name="Text 46"/>
+          <p:cNvSpPr txBox="1"/>
+          <p:nvPr/>
+        </p:nvSpPr>
+        <p:spPr>
+          <a:xfrm>
+            <a:off x="6464808" y="3683203"/>
+            <a:ext cx="3316529" cy="281635"/>
+          </a:xfrm>
+          <a:prstGeom prst="rect">
+            <a:avLst/>
+          </a:prstGeom>
+          <a:noFill/>
+          <a:ln/>
+        </p:spPr>
+        <p:txBody>
+          <a:bodyPr wrap="square" lIns="0" tIns="0" rIns="0" bIns="0" rtlCol="0" anchor="ctr"/>
+          <a:lstStyle/>
+          <a:p>
+            <a:pPr indent="0" marL="0">
+              <a:buNone/>
+            </a:pPr>
+            <a:r>
+              <a:rPr lang="en-US" sz="950" dirty="0">
+                <a:solidFill>
+                  <a:srgbClr val="1C2B33"/>
+                </a:solidFill>
+                <a:latin typeface="Calibri" pitchFamily="34" charset="0"/>
+                <a:ea typeface="Calibri" pitchFamily="34" charset="-122"/>
+                <a:cs typeface="Calibri" pitchFamily="34" charset="-120"/>
+              </a:rPr>
+              <a:t>Bem Estar/Segurança</a:t>
+            </a:r>
+            <a:endParaRPr lang="en-US" sz="950" dirty="0"/>
+          </a:p>
+        </p:txBody>
+      </p:sp>
+      <p:sp>
+        <p:nvSpPr>
+          <p:cNvPr id="49" name="Text 47"/>
+          <p:cNvSpPr txBox="1"/>
+          <p:nvPr/>
+        </p:nvSpPr>
+        <p:spPr>
+          <a:xfrm>
+            <a:off x="9671609" y="3683203"/>
+            <a:ext cx="1815998" cy="281635"/>
+          </a:xfrm>
+          <a:prstGeom prst="rect">
+            <a:avLst/>
+          </a:prstGeom>
+          <a:noFill/>
+          <a:ln/>
+        </p:spPr>
+        <p:txBody>
+          <a:bodyPr wrap="square" lIns="0" tIns="0" rIns="0" bIns="0" rtlCol="0" anchor="ctr"/>
+          <a:lstStyle/>
+          <a:p>
+            <a:pPr algn="r" indent="0" marL="0">
+              <a:buNone/>
+            </a:pPr>
+            <a:r>
+              <a:rPr lang="en-US" sz="950" b="1" dirty="0">
+                <a:solidFill>
+                  <a:srgbClr val="0B2A3D"/>
+                </a:solidFill>
+                <a:latin typeface="Calibri" pitchFamily="34" charset="0"/>
+                <a:ea typeface="Calibri" pitchFamily="34" charset="-122"/>
+                <a:cs typeface="Calibri" pitchFamily="34" charset="-120"/>
+              </a:rPr>
+              <a:t>US$ 23,5 mi</a:t>
+            </a:r>
+            <a:endParaRPr lang="en-US" sz="950" dirty="0"/>
+          </a:p>
+        </p:txBody>
+      </p:sp>
+      <p:sp>
+        <p:nvSpPr>
+          <p:cNvPr id="50" name="Text 48"/>
+          <p:cNvSpPr txBox="1"/>
+          <p:nvPr/>
+        </p:nvSpPr>
+        <p:spPr>
+          <a:xfrm>
+            <a:off x="6464808" y="3964838"/>
+            <a:ext cx="3316529" cy="281635"/>
+          </a:xfrm>
+          <a:prstGeom prst="rect">
+            <a:avLst/>
+          </a:prstGeom>
+          <a:noFill/>
+          <a:ln/>
+        </p:spPr>
+        <p:txBody>
+          <a:bodyPr wrap="square" lIns="0" tIns="0" rIns="0" bIns="0" rtlCol="0" anchor="ctr"/>
+          <a:lstStyle/>
+          <a:p>
+            <a:pPr indent="0" marL="0">
+              <a:buNone/>
+            </a:pPr>
+            <a:r>
+              <a:rPr lang="en-US" sz="950" dirty="0">
+                <a:solidFill>
+                  <a:srgbClr val="1C2B33"/>
+                </a:solidFill>
+                <a:latin typeface="Calibri" pitchFamily="34" charset="0"/>
+                <a:ea typeface="Calibri" pitchFamily="34" charset="-122"/>
+                <a:cs typeface="Calibri" pitchFamily="34" charset="-120"/>
+              </a:rPr>
+              <a:t>Integridade e Regulatório</a:t>
+            </a:r>
+            <a:endParaRPr lang="en-US" sz="950" dirty="0"/>
+          </a:p>
+        </p:txBody>
+      </p:sp>
+      <p:sp>
+        <p:nvSpPr>
+          <p:cNvPr id="51" name="Text 49"/>
+          <p:cNvSpPr txBox="1"/>
+          <p:nvPr/>
+        </p:nvSpPr>
+        <p:spPr>
+          <a:xfrm>
+            <a:off x="9671609" y="3964838"/>
+            <a:ext cx="1815998" cy="281635"/>
+          </a:xfrm>
+          <a:prstGeom prst="rect">
+            <a:avLst/>
+          </a:prstGeom>
+          <a:noFill/>
+          <a:ln/>
+        </p:spPr>
+        <p:txBody>
+          <a:bodyPr wrap="square" lIns="0" tIns="0" rIns="0" bIns="0" rtlCol="0" anchor="ctr"/>
+          <a:lstStyle/>
+          <a:p>
+            <a:pPr algn="r" indent="0" marL="0">
+              <a:buNone/>
+            </a:pPr>
+            <a:r>
+              <a:rPr lang="en-US" sz="950" b="1" dirty="0">
+                <a:solidFill>
+                  <a:srgbClr val="0B2A3D"/>
+                </a:solidFill>
+                <a:latin typeface="Calibri" pitchFamily="34" charset="0"/>
+                <a:ea typeface="Calibri" pitchFamily="34" charset="-122"/>
+                <a:cs typeface="Calibri" pitchFamily="34" charset="-120"/>
+              </a:rPr>
+              <a:t>US$ 17,8 mi</a:t>
+            </a:r>
+            <a:endParaRPr lang="en-US" sz="950" dirty="0"/>
+          </a:p>
+        </p:txBody>
+      </p:sp>
+      <p:sp>
+        <p:nvSpPr>
+          <p:cNvPr id="52" name="Shape 50"/>
+          <p:cNvSpPr/>
+          <p:nvPr/>
+        </p:nvSpPr>
+        <p:spPr>
+          <a:xfrm>
+            <a:off x="6355080" y="4246474"/>
+            <a:ext cx="5349240" cy="281635"/>
+          </a:xfrm>
+          <a:prstGeom prst="rect">
+            <a:avLst/>
+          </a:prstGeom>
+          <a:solidFill>
+            <a:srgbClr val="F0F4F5"/>
+          </a:solidFill>
+          <a:ln/>
+        </p:spPr>
+      </p:sp>
+      <p:sp>
+        <p:nvSpPr>
+          <p:cNvPr id="53" name="Text 51"/>
+          <p:cNvSpPr txBox="1"/>
+          <p:nvPr/>
+        </p:nvSpPr>
+        <p:spPr>
+          <a:xfrm>
+            <a:off x="6464808" y="4246474"/>
+            <a:ext cx="3316529" cy="281635"/>
+          </a:xfrm>
+          <a:prstGeom prst="rect">
+            <a:avLst/>
+          </a:prstGeom>
+          <a:noFill/>
+          <a:ln/>
+        </p:spPr>
+        <p:txBody>
+          <a:bodyPr wrap="square" lIns="0" tIns="0" rIns="0" bIns="0" rtlCol="0" anchor="ctr"/>
+          <a:lstStyle/>
+          <a:p>
+            <a:pPr indent="0" marL="0">
+              <a:buNone/>
+            </a:pPr>
+            <a:r>
+              <a:rPr lang="en-US" sz="950" dirty="0">
+                <a:solidFill>
+                  <a:srgbClr val="1C2B33"/>
+                </a:solidFill>
+                <a:latin typeface="Calibri" pitchFamily="34" charset="0"/>
+                <a:ea typeface="Calibri" pitchFamily="34" charset="-122"/>
+                <a:cs typeface="Calibri" pitchFamily="34" charset="-120"/>
+              </a:rPr>
+              <a:t>Eficiência de Produção</a:t>
+            </a:r>
+            <a:endParaRPr lang="en-US" sz="950" dirty="0"/>
+          </a:p>
+        </p:txBody>
+      </p:sp>
+      <p:sp>
+        <p:nvSpPr>
+          <p:cNvPr id="54" name="Text 52"/>
+          <p:cNvSpPr txBox="1"/>
+          <p:nvPr/>
+        </p:nvSpPr>
+        <p:spPr>
+          <a:xfrm>
+            <a:off x="9671609" y="4246474"/>
+            <a:ext cx="1815998" cy="281635"/>
+          </a:xfrm>
+          <a:prstGeom prst="rect">
+            <a:avLst/>
+          </a:prstGeom>
+          <a:noFill/>
+          <a:ln/>
+        </p:spPr>
+        <p:txBody>
+          <a:bodyPr wrap="square" lIns="0" tIns="0" rIns="0" bIns="0" rtlCol="0" anchor="ctr"/>
+          <a:lstStyle/>
+          <a:p>
+            <a:pPr algn="r" indent="0" marL="0">
+              <a:buNone/>
+            </a:pPr>
+            <a:r>
+              <a:rPr lang="en-US" sz="950" b="1" dirty="0">
+                <a:solidFill>
+                  <a:srgbClr val="0B2A3D"/>
+                </a:solidFill>
+                <a:latin typeface="Calibri" pitchFamily="34" charset="0"/>
+                <a:ea typeface="Calibri" pitchFamily="34" charset="-122"/>
+                <a:cs typeface="Calibri" pitchFamily="34" charset="-120"/>
+              </a:rPr>
+              <a:t>US$ 16,1 mi</a:t>
+            </a:r>
+            <a:endParaRPr lang="en-US" sz="950" dirty="0"/>
+          </a:p>
+        </p:txBody>
+      </p:sp>
+      <p:sp>
+        <p:nvSpPr>
+          <p:cNvPr id="55" name="Text 53"/>
+          <p:cNvSpPr txBox="1"/>
+          <p:nvPr/>
+        </p:nvSpPr>
+        <p:spPr>
+          <a:xfrm>
+            <a:off x="457200" y="6355080"/>
+            <a:ext cx="11247120" cy="411480"/>
+          </a:xfrm>
+          <a:prstGeom prst="rect">
+            <a:avLst/>
+          </a:prstGeom>
+          <a:noFill/>
+          <a:ln/>
+        </p:spPr>
+        <p:txBody>
+          <a:bodyPr wrap="square" lIns="0" tIns="0" rIns="0" bIns="0" rtlCol="0" anchor="ctr"/>
+          <a:lstStyle/>
+          <a:p>
+            <a:pPr indent="0" marL="0">
+              <a:buNone/>
+            </a:pPr>
+            <a:r>
+              <a:rPr lang="en-US" sz="850" i="1" dirty="0">
+                <a:solidFill>
+                  <a:srgbClr val="8A979D"/>
+                </a:solidFill>
+                <a:latin typeface="Calibri" pitchFamily="34" charset="0"/>
+                <a:ea typeface="Calibri" pitchFamily="34" charset="-122"/>
+                <a:cs typeface="Calibri" pitchFamily="34" charset="-120"/>
+              </a:rPr>
+              <a:t>Metodologia: soma de Custo de Serviço + Custo de Material (Jan–Dez), para itens de Cost Allocation = CAPEX com status 'Contar'. Não inclui itens de Parada Programada (status 'TA') nem a categoria Desenvolvimento de Produção (US$ 0, mantida na lista de Categoria apenas para referência).</a:t>
+            </a:r>
+            <a:endParaRPr lang="en-US" sz="850" dirty="0"/>
+          </a:p>
+        </p:txBody>
+      </p:sp>
+    </p:spTree>
+  </p:cSld>
+  <p:clrMapOvr>
+    <a:masterClrMapping/>
+  </p:clrMapOvr>
+</p:sld>
+</file>
+
+<file path=ppt/slides/slide23.xml><?xml version="1.0" encoding="utf-8"?>
+<p:sld xmlns:a="http://schemas.openxmlformats.org/drawingml/2006/main" xmlns:r="http://schemas.openxmlformats.org/officeDocument/2006/relationships" xmlns:p="http://schemas.openxmlformats.org/presentationml/2006/main">
+  <p:cSld name="Slide 23">
+    <p:spTree>
+      <p:nvGrpSpPr>
+        <p:cNvPr id="1" name=""/>
+        <p:cNvGrpSpPr/>
+        <p:nvPr/>
+      </p:nvGrpSpPr>
+      <p:grpSpPr>
+        <a:xfrm>
+          <a:off x="0" y="0"/>
+          <a:ext cx="0" cy="0"/>
+          <a:chOff x="0" y="0"/>
+          <a:chExt cx="0" cy="0"/>
+        </a:xfrm>
+      </p:grpSpPr>
+      <p:sp>
+        <p:nvSpPr>
+          <p:cNvPr id="2" name="Shape 0"/>
+          <p:cNvSpPr/>
+          <p:nvPr/>
+        </p:nvSpPr>
+        <p:spPr>
+          <a:xfrm>
+            <a:off x="457200" y="384048"/>
+            <a:ext cx="566928" cy="566928"/>
+          </a:xfrm>
+          <a:prstGeom prst="ellipse">
+            <a:avLst/>
+          </a:prstGeom>
+          <a:solidFill>
+            <a:srgbClr val="7A2E2E"/>
+          </a:solidFill>
+          <a:ln/>
+        </p:spPr>
+      </p:sp>
+      <p:sp>
+        <p:nvSpPr>
+          <p:cNvPr id="3" name="Text 1"/>
+          <p:cNvSpPr txBox="1"/>
+          <p:nvPr/>
+        </p:nvSpPr>
+        <p:spPr>
+          <a:xfrm>
+            <a:off x="457200" y="384048"/>
+            <a:ext cx="566928" cy="566928"/>
+          </a:xfrm>
+          <a:prstGeom prst="rect">
+            <a:avLst/>
+          </a:prstGeom>
+          <a:noFill/>
+          <a:ln/>
+        </p:spPr>
+        <p:txBody>
+          <a:bodyPr wrap="square" lIns="0" tIns="0" rIns="0" bIns="0" rtlCol="0" anchor="ctr"/>
+          <a:lstStyle/>
+          <a:p>
+            <a:pPr algn="ctr" indent="0" marL="0">
+              <a:buNone/>
+            </a:pPr>
+            <a:r>
+              <a:rPr lang="en-US" sz="1500" b="1" dirty="0">
+                <a:solidFill>
+                  <a:srgbClr val="FFFFFF"/>
+                </a:solidFill>
+                <a:latin typeface="Calibri" pitchFamily="34" charset="0"/>
+                <a:ea typeface="Calibri" pitchFamily="34" charset="-122"/>
+                <a:cs typeface="Calibri" pitchFamily="34" charset="-120"/>
+              </a:rPr>
+              <a:t>FF</a:t>
+            </a:r>
+            <a:endParaRPr lang="en-US" sz="1500" dirty="0"/>
+          </a:p>
+        </p:txBody>
+      </p:sp>
+      <p:sp>
+        <p:nvSpPr>
+          <p:cNvPr id="4" name="Text 2"/>
+          <p:cNvSpPr txBox="1"/>
+          <p:nvPr/>
+        </p:nvSpPr>
+        <p:spPr>
+          <a:xfrm>
+            <a:off x="1170432" y="329184"/>
+            <a:ext cx="10515600" cy="411480"/>
+          </a:xfrm>
+          <a:prstGeom prst="rect">
+            <a:avLst/>
+          </a:prstGeom>
+          <a:noFill/>
+          <a:ln/>
+        </p:spPr>
+        <p:txBody>
+          <a:bodyPr wrap="square" lIns="0" tIns="0" rIns="0" bIns="0" rtlCol="0" anchor="ctr"/>
+          <a:lstStyle/>
+          <a:p>
+            <a:pPr indent="0" marL="0">
+              <a:buNone/>
+            </a:pPr>
+            <a:r>
+              <a:rPr lang="en-US" sz="2400" b="1" dirty="0">
+                <a:solidFill>
+                  <a:srgbClr val="0B2A3D"/>
+                </a:solidFill>
+                <a:latin typeface="Cambria" pitchFamily="34" charset="0"/>
+                <a:ea typeface="Cambria" pitchFamily="34" charset="-122"/>
+                <a:cs typeface="Cambria" pitchFamily="34" charset="-120"/>
+              </a:rPr>
+              <a:t>Escopos que Compõem o CAPEX · FPSO Frade</a:t>
+            </a:r>
+            <a:endParaRPr lang="en-US" sz="2400" dirty="0"/>
+          </a:p>
+        </p:txBody>
+      </p:sp>
+      <p:sp>
+        <p:nvSpPr>
+          <p:cNvPr id="5" name="Text 3"/>
+          <p:cNvSpPr txBox="1"/>
+          <p:nvPr/>
+        </p:nvSpPr>
+        <p:spPr>
+          <a:xfrm>
+            <a:off x="1170432" y="731520"/>
+            <a:ext cx="10515600" cy="274320"/>
+          </a:xfrm>
+          <a:prstGeom prst="rect">
+            <a:avLst/>
+          </a:prstGeom>
+          <a:noFill/>
+          <a:ln/>
+        </p:spPr>
+        <p:txBody>
+          <a:bodyPr wrap="square" lIns="0" tIns="0" rIns="0" bIns="0" rtlCol="0" anchor="ctr"/>
+          <a:lstStyle/>
+          <a:p>
+            <a:pPr indent="0" marL="0">
+              <a:buNone/>
+            </a:pPr>
+            <a:r>
+              <a:rPr lang="en-US" sz="1250" dirty="0">
+                <a:solidFill>
+                  <a:srgbClr val="5B6B73"/>
+                </a:solidFill>
+                <a:latin typeface="Calibri" pitchFamily="34" charset="0"/>
+                <a:ea typeface="Calibri" pitchFamily="34" charset="-122"/>
+                <a:cs typeface="Calibri" pitchFamily="34" charset="-120"/>
+              </a:rPr>
+              <a:t>Principais escopos por valor · 88 itens no total</a:t>
+            </a:r>
+            <a:endParaRPr lang="en-US" sz="1250" dirty="0"/>
+          </a:p>
+        </p:txBody>
+      </p:sp>
+      <p:graphicFrame>
+        <p:nvGraphicFramePr>
+          <p:cNvPr id="24" name="Table 0"/>
+          <p:cNvGraphicFramePr>
+            <a:graphicFrameLocks noGrp="1"/>
+          </p:cNvGraphicFramePr>
+          <p:nvPr>
+            <p:extLst>
+              <p:ext uri="{D42A27DB-BD31-4B8C-83A1-F6EECF244321}">
+                <p14:modId xmlns:p14="http://schemas.microsoft.com/office/powerpoint/2010/main" val="1579011935"/>
+              </p:ext>
+            </p:extLst>
+          </p:nvPr>
+        </p:nvGraphicFramePr>
+        <p:xfrm>
+          <a:off x="457200" y="1188720"/>
+          <a:ext cx="11247120" cy="914400"/>
+        </p:xfrm>
+        <a:graphic>
+          <a:graphicData uri="http://schemas.openxmlformats.org/drawingml/2006/table">
+            <a:tbl>
+              <a:tblPr/>
+              <a:tblGrid>
+                <a:gridCol w="4723790"/>
+                <a:gridCol w="2249424"/>
+                <a:gridCol w="2474366"/>
+                <a:gridCol w="1799539"/>
+              </a:tblGrid>
+              <a:tr h="288036">
+                <a:tc>
+                  <a:txBody>
+                    <a:bodyPr/>
+                    <a:lstStyle/>
+                    <a:p>
+                      <a:pPr indent="0" marL="0">
+                        <a:buNone/>
+                      </a:pPr>
+                      <a:r>
+                        <a:rPr lang="en-US" sz="1000" b="1" dirty="0">
+                          <a:solidFill>
+                            <a:srgbClr val="FFFFFF"/>
+                          </a:solidFill>
+                          <a:latin typeface="Calibri" pitchFamily="34" charset="0"/>
+                          <a:ea typeface="Calibri" pitchFamily="34" charset="-122"/>
+                          <a:cs typeface="Calibri" pitchFamily="34" charset="-120"/>
+                        </a:rPr>
+                        <a:t>DESCRIÇÃO DO ESCOPO</a:t>
+                      </a:r>
+                      <a:endParaRPr lang="en-US" sz="1000" dirty="0">
+                        <a:latin typeface="Calibri" charset="0"/>
+                        <a:ea typeface="Calibri" charset="0"/>
+                        <a:cs typeface="Calibri" charset="0"/>
+                      </a:endParaRPr>
+                    </a:p>
+                  </a:txBody>
+                  <a:tcPr marL="91440" marR="91440" marT="45720" marB="45720" anchor="ctr">
+                    <a:lnL w="6350" cap="flat" cmpd="sng" algn="ctr">
+                      <a:solidFill>
+                        <a:srgbClr val="E3E8E9"/>
+                      </a:solidFill>
+                      <a:prstDash val="solid"/>
+                      <a:round/>
+                      <a:headEnd type="none" w="med" len="med"/>
+                      <a:tailEnd type="none" w="med" len="med"/>
+                    </a:lnL>
+                    <a:lnR w="6350" cap="flat" cmpd="sng" algn="ctr">
+                      <a:solidFill>
+                        <a:srgbClr val="E3E8E9"/>
+                      </a:solidFill>
+                      <a:prstDash val="solid"/>
+                      <a:round/>
+                      <a:headEnd type="none" w="med" len="med"/>
+                      <a:tailEnd type="none" w="med" len="med"/>
+                    </a:lnR>
+                    <a:lnT w="6350" cap="flat" cmpd="sng" algn="ctr">
+                      <a:solidFill>
+                        <a:srgbClr val="E3E8E9"/>
+                      </a:solidFill>
+                      <a:prstDash val="solid"/>
+                      <a:round/>
+                      <a:headEnd type="none" w="med" len="med"/>
+                      <a:tailEnd type="none" w="med" len="med"/>
+                    </a:lnT>
+                    <a:lnB w="6350" cap="flat" cmpd="sng" algn="ctr">
+                      <a:solidFill>
+                        <a:srgbClr val="E3E8E9"/>
+                      </a:solidFill>
+                      <a:prstDash val="solid"/>
+                      <a:round/>
+                      <a:headEnd type="none" w="med" len="med"/>
+                      <a:tailEnd type="none" w="med" len="med"/>
+                    </a:lnB>
+                    <a:solidFill>
+                      <a:srgbClr val="0B2A3D"/>
+                    </a:solidFill>
+                  </a:tcPr>
+                </a:tc>
+                <a:tc>
+                  <a:txBody>
+                    <a:bodyPr/>
+                    <a:lstStyle/>
+                    <a:p>
+                      <a:pPr indent="0" marL="0">
+                        <a:buNone/>
+                      </a:pPr>
+                      <a:r>
+                        <a:rPr lang="en-US" sz="1000" b="1" dirty="0">
+                          <a:solidFill>
+                            <a:srgbClr val="FFFFFF"/>
+                          </a:solidFill>
+                          <a:latin typeface="Calibri" pitchFamily="34" charset="0"/>
+                          <a:ea typeface="Calibri" pitchFamily="34" charset="-122"/>
+                          <a:cs typeface="Calibri" pitchFamily="34" charset="-120"/>
+                        </a:rPr>
+                        <a:t>CATEGORIA</a:t>
+                      </a:r>
+                      <a:endParaRPr lang="en-US" sz="1000" dirty="0">
+                        <a:latin typeface="Calibri" charset="0"/>
+                        <a:ea typeface="Calibri" charset="0"/>
+                        <a:cs typeface="Calibri" charset="0"/>
+                      </a:endParaRPr>
+                    </a:p>
+                  </a:txBody>
+                  <a:tcPr marL="91440" marR="91440" marT="45720" marB="45720" anchor="ctr">
+                    <a:lnL w="6350" cap="flat" cmpd="sng" algn="ctr">
+                      <a:solidFill>
+                        <a:srgbClr val="E3E8E9"/>
+                      </a:solidFill>
+                      <a:prstDash val="solid"/>
+                      <a:round/>
+                      <a:headEnd type="none" w="med" len="med"/>
+                      <a:tailEnd type="none" w="med" len="med"/>
+                    </a:lnL>
+                    <a:lnR w="6350" cap="flat" cmpd="sng" algn="ctr">
+                      <a:solidFill>
+                        <a:srgbClr val="E3E8E9"/>
+                      </a:solidFill>
+                      <a:prstDash val="solid"/>
+                      <a:round/>
+                      <a:headEnd type="none" w="med" len="med"/>
+                      <a:tailEnd type="none" w="med" len="med"/>
+                    </a:lnR>
+                    <a:lnT w="6350" cap="flat" cmpd="sng" algn="ctr">
+                      <a:solidFill>
+                        <a:srgbClr val="E3E8E9"/>
+                      </a:solidFill>
+                      <a:prstDash val="solid"/>
+                      <a:round/>
+                      <a:headEnd type="none" w="med" len="med"/>
+                      <a:tailEnd type="none" w="med" len="med"/>
+                    </a:lnT>
+                    <a:lnB w="6350" cap="flat" cmpd="sng" algn="ctr">
+                      <a:solidFill>
+                        <a:srgbClr val="E3E8E9"/>
+                      </a:solidFill>
+                      <a:prstDash val="solid"/>
+                      <a:round/>
+                      <a:headEnd type="none" w="med" len="med"/>
+                      <a:tailEnd type="none" w="med" len="med"/>
+                    </a:lnB>
+                    <a:solidFill>
+                      <a:srgbClr val="0B2A3D"/>
+                    </a:solidFill>
+                  </a:tcPr>
+                </a:tc>
+                <a:tc>
+                  <a:txBody>
+                    <a:bodyPr/>
+                    <a:lstStyle/>
+                    <a:p>
+                      <a:pPr indent="0" marL="0">
+                        <a:buNone/>
+                      </a:pPr>
+                      <a:r>
+                        <a:rPr lang="en-US" sz="1000" b="1" dirty="0">
+                          <a:solidFill>
+                            <a:srgbClr val="FFFFFF"/>
+                          </a:solidFill>
+                          <a:latin typeface="Calibri" pitchFamily="34" charset="0"/>
+                          <a:ea typeface="Calibri" pitchFamily="34" charset="-122"/>
+                          <a:cs typeface="Calibri" pitchFamily="34" charset="-120"/>
+                        </a:rPr>
+                        <a:t>ÁREA REQUISITANTE</a:t>
+                      </a:r>
+                      <a:endParaRPr lang="en-US" sz="1000" dirty="0">
+                        <a:latin typeface="Calibri" charset="0"/>
+                        <a:ea typeface="Calibri" charset="0"/>
+                        <a:cs typeface="Calibri" charset="0"/>
+                      </a:endParaRPr>
+                    </a:p>
+                  </a:txBody>
+                  <a:tcPr marL="91440" marR="91440" marT="45720" marB="45720" anchor="ctr">
+                    <a:lnL w="6350" cap="flat" cmpd="sng" algn="ctr">
+                      <a:solidFill>
+                        <a:srgbClr val="E3E8E9"/>
+                      </a:solidFill>
+                      <a:prstDash val="solid"/>
+                      <a:round/>
+                      <a:headEnd type="none" w="med" len="med"/>
+                      <a:tailEnd type="none" w="med" len="med"/>
+                    </a:lnL>
+                    <a:lnR w="6350" cap="flat" cmpd="sng" algn="ctr">
+                      <a:solidFill>
+                        <a:srgbClr val="E3E8E9"/>
+                      </a:solidFill>
+                      <a:prstDash val="solid"/>
+                      <a:round/>
+                      <a:headEnd type="none" w="med" len="med"/>
+                      <a:tailEnd type="none" w="med" len="med"/>
+                    </a:lnR>
+                    <a:lnT w="6350" cap="flat" cmpd="sng" algn="ctr">
+                      <a:solidFill>
+                        <a:srgbClr val="E3E8E9"/>
+                      </a:solidFill>
+                      <a:prstDash val="solid"/>
+                      <a:round/>
+                      <a:headEnd type="none" w="med" len="med"/>
+                      <a:tailEnd type="none" w="med" len="med"/>
+                    </a:lnT>
+                    <a:lnB w="6350" cap="flat" cmpd="sng" algn="ctr">
+                      <a:solidFill>
+                        <a:srgbClr val="E3E8E9"/>
+                      </a:solidFill>
+                      <a:prstDash val="solid"/>
+                      <a:round/>
+                      <a:headEnd type="none" w="med" len="med"/>
+                      <a:tailEnd type="none" w="med" len="med"/>
+                    </a:lnB>
+                    <a:solidFill>
+                      <a:srgbClr val="0B2A3D"/>
+                    </a:solidFill>
+                  </a:tcPr>
+                </a:tc>
+                <a:tc>
+                  <a:txBody>
+                    <a:bodyPr/>
+                    <a:lstStyle/>
+                    <a:p>
+                      <a:pPr algn="r" indent="0" marL="0">
+                        <a:buNone/>
+                      </a:pPr>
+                      <a:r>
+                        <a:rPr lang="en-US" sz="1000" b="1" dirty="0">
+                          <a:solidFill>
+                            <a:srgbClr val="FFFFFF"/>
+                          </a:solidFill>
+                          <a:latin typeface="Calibri" pitchFamily="34" charset="0"/>
+                          <a:ea typeface="Calibri" pitchFamily="34" charset="-122"/>
+                          <a:cs typeface="Calibri" pitchFamily="34" charset="-120"/>
+                        </a:rPr>
+                        <a:t>VALOR TOTAL</a:t>
+                      </a:r>
+                      <a:endParaRPr lang="en-US" sz="1000" dirty="0">
+                        <a:latin typeface="Calibri" charset="0"/>
+                        <a:ea typeface="Calibri" charset="0"/>
+                        <a:cs typeface="Calibri" charset="0"/>
+                      </a:endParaRPr>
+                    </a:p>
+                  </a:txBody>
+                  <a:tcPr marL="91440" marR="91440" marT="45720" marB="45720" anchor="ctr">
+                    <a:lnL w="6350" cap="flat" cmpd="sng" algn="ctr">
+                      <a:solidFill>
+                        <a:srgbClr val="E3E8E9"/>
+                      </a:solidFill>
+                      <a:prstDash val="solid"/>
+                      <a:round/>
+                      <a:headEnd type="none" w="med" len="med"/>
+                      <a:tailEnd type="none" w="med" len="med"/>
+                    </a:lnL>
+                    <a:lnR w="6350" cap="flat" cmpd="sng" algn="ctr">
+                      <a:solidFill>
+                        <a:srgbClr val="E3E8E9"/>
+                      </a:solidFill>
+                      <a:prstDash val="solid"/>
+                      <a:round/>
+                      <a:headEnd type="none" w="med" len="med"/>
+                      <a:tailEnd type="none" w="med" len="med"/>
+                    </a:lnR>
+                    <a:lnT w="6350" cap="flat" cmpd="sng" algn="ctr">
+                      <a:solidFill>
+                        <a:srgbClr val="E3E8E9"/>
+                      </a:solidFill>
+                      <a:prstDash val="solid"/>
+                      <a:round/>
+                      <a:headEnd type="none" w="med" len="med"/>
+                      <a:tailEnd type="none" w="med" len="med"/>
+                    </a:lnT>
+                    <a:lnB w="6350" cap="flat" cmpd="sng" algn="ctr">
+                      <a:solidFill>
+                        <a:srgbClr val="E3E8E9"/>
+                      </a:solidFill>
+                      <a:prstDash val="solid"/>
+                      <a:round/>
+                      <a:headEnd type="none" w="med" len="med"/>
+                      <a:tailEnd type="none" w="med" len="med"/>
+                    </a:lnB>
+                    <a:solidFill>
+                      <a:srgbClr val="0B2A3D"/>
+                    </a:solidFill>
+                  </a:tcPr>
+                </a:tc>
+              </a:tr>
+              <a:tr h="288036">
+                <a:tc>
+                  <a:txBody>
+                    <a:bodyPr/>
+                    <a:lstStyle/>
+                    <a:p>
+                      <a:pPr indent="0" marL="0">
+                        <a:buNone/>
+                      </a:pPr>
+                      <a:r>
+                        <a:rPr lang="en-US" sz="1000" dirty="0">
+                          <a:solidFill>
+                            <a:srgbClr val="1C2B33"/>
+                          </a:solidFill>
+                          <a:latin typeface="Calibri" pitchFamily="34" charset="0"/>
+                          <a:ea typeface="Calibri" pitchFamily="34" charset="-122"/>
+                          <a:cs typeface="Calibri" pitchFamily="34" charset="-120"/>
+                        </a:rPr>
+                        <a:t>Guincho de Pull In + Reforma do Turret</a:t>
+                      </a:r>
+                      <a:endParaRPr lang="en-US" sz="1000" dirty="0">
+                        <a:latin typeface="Calibri" charset="0"/>
+                        <a:ea typeface="Calibri" charset="0"/>
+                        <a:cs typeface="Calibri" charset="0"/>
+                      </a:endParaRPr>
+                    </a:p>
+                  </a:txBody>
+                  <a:tcPr marL="91440" marR="91440" marT="45720" marB="45720" anchor="ctr">
+                    <a:lnL w="6350" cap="flat" cmpd="sng" algn="ctr">
+                      <a:solidFill>
+                        <a:srgbClr val="E3E8E9"/>
+                      </a:solidFill>
+                      <a:prstDash val="solid"/>
+                      <a:round/>
+                      <a:headEnd type="none" w="med" len="med"/>
+                      <a:tailEnd type="none" w="med" len="med"/>
+                    </a:lnL>
+                    <a:lnR w="6350" cap="flat" cmpd="sng" algn="ctr">
+                      <a:solidFill>
+                        <a:srgbClr val="E3E8E9"/>
+                      </a:solidFill>
+                      <a:prstDash val="solid"/>
+                      <a:round/>
+                      <a:headEnd type="none" w="med" len="med"/>
+                      <a:tailEnd type="none" w="med" len="med"/>
+                    </a:lnR>
+                    <a:lnT w="6350" cap="flat" cmpd="sng" algn="ctr">
+                      <a:solidFill>
+                        <a:srgbClr val="E3E8E9"/>
+                      </a:solidFill>
+                      <a:prstDash val="solid"/>
+                      <a:round/>
+                      <a:headEnd type="none" w="med" len="med"/>
+                      <a:tailEnd type="none" w="med" len="med"/>
+                    </a:lnT>
+                    <a:lnB w="6350" cap="flat" cmpd="sng" algn="ctr">
+                      <a:solidFill>
+                        <a:srgbClr val="E3E8E9"/>
+                      </a:solidFill>
+                      <a:prstDash val="solid"/>
+                      <a:round/>
+                      <a:headEnd type="none" w="med" len="med"/>
+                      <a:tailEnd type="none" w="med" len="med"/>
+                    </a:lnB>
+                    <a:solidFill>
+                      <a:srgbClr val="FFFFFF"/>
+                    </a:solidFill>
+                  </a:tcPr>
+                </a:tc>
+                <a:tc>
+                  <a:txBody>
+                    <a:bodyPr/>
+                    <a:lstStyle/>
+                    <a:p>
+                      <a:pPr indent="0" marL="0">
+                        <a:buNone/>
+                      </a:pPr>
+                      <a:r>
+                        <a:rPr lang="en-US" sz="950" dirty="0">
+                          <a:solidFill>
+                            <a:srgbClr val="5B6B73"/>
+                          </a:solidFill>
+                          <a:latin typeface="Calibri" pitchFamily="34" charset="0"/>
+                          <a:ea typeface="Calibri" pitchFamily="34" charset="-122"/>
+                          <a:cs typeface="Calibri" pitchFamily="34" charset="-120"/>
+                        </a:rPr>
+                        <a:t>Bem Estar/Segurança</a:t>
+                      </a:r>
+                      <a:endParaRPr lang="en-US" sz="950" dirty="0">
+                        <a:latin typeface="Calibri" charset="0"/>
+                        <a:ea typeface="Calibri" charset="0"/>
+                        <a:cs typeface="Calibri" charset="0"/>
+                      </a:endParaRPr>
+                    </a:p>
+                  </a:txBody>
+                  <a:tcPr marL="91440" marR="91440" marT="45720" marB="45720" anchor="ctr">
+                    <a:lnL w="6350" cap="flat" cmpd="sng" algn="ctr">
+                      <a:solidFill>
+                        <a:srgbClr val="E3E8E9"/>
+                      </a:solidFill>
+                      <a:prstDash val="solid"/>
+                      <a:round/>
+                      <a:headEnd type="none" w="med" len="med"/>
+                      <a:tailEnd type="none" w="med" len="med"/>
+                    </a:lnL>
+                    <a:lnR w="6350" cap="flat" cmpd="sng" algn="ctr">
+                      <a:solidFill>
+                        <a:srgbClr val="E3E8E9"/>
+                      </a:solidFill>
+                      <a:prstDash val="solid"/>
+                      <a:round/>
+                      <a:headEnd type="none" w="med" len="med"/>
+                      <a:tailEnd type="none" w="med" len="med"/>
+                    </a:lnR>
+                    <a:lnT w="6350" cap="flat" cmpd="sng" algn="ctr">
+                      <a:solidFill>
+                        <a:srgbClr val="E3E8E9"/>
+                      </a:solidFill>
+                      <a:prstDash val="solid"/>
+                      <a:round/>
+                      <a:headEnd type="none" w="med" len="med"/>
+                      <a:tailEnd type="none" w="med" len="med"/>
+                    </a:lnT>
+                    <a:lnB w="6350" cap="flat" cmpd="sng" algn="ctr">
+                      <a:solidFill>
+                        <a:srgbClr val="E3E8E9"/>
+                      </a:solidFill>
+                      <a:prstDash val="solid"/>
+                      <a:round/>
+                      <a:headEnd type="none" w="med" len="med"/>
+                      <a:tailEnd type="none" w="med" len="med"/>
+                    </a:lnB>
+                    <a:solidFill>
+                      <a:srgbClr val="FFFFFF"/>
+                    </a:solidFill>
+                  </a:tcPr>
+                </a:tc>
+                <a:tc>
+                  <a:txBody>
+                    <a:bodyPr/>
+                    <a:lstStyle/>
+                    <a:p>
+                      <a:pPr indent="0" marL="0">
+                        <a:buNone/>
+                      </a:pPr>
+                      <a:r>
+                        <a:rPr lang="en-US" sz="950" dirty="0">
+                          <a:solidFill>
+                            <a:srgbClr val="5B6B73"/>
+                          </a:solidFill>
+                          <a:latin typeface="Calibri" pitchFamily="34" charset="0"/>
+                          <a:ea typeface="Calibri" pitchFamily="34" charset="-122"/>
+                          <a:cs typeface="Calibri" pitchFamily="34" charset="-120"/>
+                        </a:rPr>
+                        <a:t>Projetos</a:t>
+                      </a:r>
+                      <a:endParaRPr lang="en-US" sz="950" dirty="0">
+                        <a:latin typeface="Calibri" charset="0"/>
+                        <a:ea typeface="Calibri" charset="0"/>
+                        <a:cs typeface="Calibri" charset="0"/>
+                      </a:endParaRPr>
+                    </a:p>
+                  </a:txBody>
+                  <a:tcPr marL="91440" marR="91440" marT="45720" marB="45720" anchor="ctr">
+                    <a:lnL w="6350" cap="flat" cmpd="sng" algn="ctr">
+                      <a:solidFill>
+                        <a:srgbClr val="E3E8E9"/>
+                      </a:solidFill>
+                      <a:prstDash val="solid"/>
+                      <a:round/>
+                      <a:headEnd type="none" w="med" len="med"/>
+                      <a:tailEnd type="none" w="med" len="med"/>
+                    </a:lnL>
+                    <a:lnR w="6350" cap="flat" cmpd="sng" algn="ctr">
+                      <a:solidFill>
+                        <a:srgbClr val="E3E8E9"/>
+                      </a:solidFill>
+                      <a:prstDash val="solid"/>
+                      <a:round/>
+                      <a:headEnd type="none" w="med" len="med"/>
+                      <a:tailEnd type="none" w="med" len="med"/>
+                    </a:lnR>
+                    <a:lnT w="6350" cap="flat" cmpd="sng" algn="ctr">
+                      <a:solidFill>
+                        <a:srgbClr val="E3E8E9"/>
+                      </a:solidFill>
+                      <a:prstDash val="solid"/>
+                      <a:round/>
+                      <a:headEnd type="none" w="med" len="med"/>
+                      <a:tailEnd type="none" w="med" len="med"/>
+                    </a:lnT>
+                    <a:lnB w="6350" cap="flat" cmpd="sng" algn="ctr">
+                      <a:solidFill>
+                        <a:srgbClr val="E3E8E9"/>
+                      </a:solidFill>
+                      <a:prstDash val="solid"/>
+                      <a:round/>
+                      <a:headEnd type="none" w="med" len="med"/>
+                      <a:tailEnd type="none" w="med" len="med"/>
+                    </a:lnB>
+                    <a:solidFill>
+                      <a:srgbClr val="FFFFFF"/>
+                    </a:solidFill>
+                  </a:tcPr>
+                </a:tc>
+                <a:tc>
+                  <a:txBody>
+                    <a:bodyPr/>
+                    <a:lstStyle/>
+                    <a:p>
+                      <a:pPr algn="r" indent="0" marL="0">
+                        <a:buNone/>
+                      </a:pPr>
+                      <a:r>
+                        <a:rPr lang="en-US" sz="1000" b="1" dirty="0">
+                          <a:solidFill>
+                            <a:srgbClr val="0B2A3D"/>
+                          </a:solidFill>
+                          <a:latin typeface="Calibri" pitchFamily="34" charset="0"/>
+                          <a:ea typeface="Calibri" pitchFamily="34" charset="-122"/>
+                          <a:cs typeface="Calibri" pitchFamily="34" charset="-120"/>
+                        </a:rPr>
+                        <a:t>US$ 11,6 mi</a:t>
+                      </a:r>
+                      <a:endParaRPr lang="en-US" sz="1000" dirty="0">
+                        <a:latin typeface="Calibri" charset="0"/>
+                        <a:ea typeface="Calibri" charset="0"/>
+                        <a:cs typeface="Calibri" charset="0"/>
+                      </a:endParaRPr>
+                    </a:p>
+                  </a:txBody>
+                  <a:tcPr marL="91440" marR="91440" marT="45720" marB="45720" anchor="ctr">
+                    <a:lnL w="6350" cap="flat" cmpd="sng" algn="ctr">
+                      <a:solidFill>
+                        <a:srgbClr val="E3E8E9"/>
+                      </a:solidFill>
+                      <a:prstDash val="solid"/>
+                      <a:round/>
+                      <a:headEnd type="none" w="med" len="med"/>
+                      <a:tailEnd type="none" w="med" len="med"/>
+                    </a:lnL>
+                    <a:lnR w="6350" cap="flat" cmpd="sng" algn="ctr">
+                      <a:solidFill>
+                        <a:srgbClr val="E3E8E9"/>
+                      </a:solidFill>
+                      <a:prstDash val="solid"/>
+                      <a:round/>
+                      <a:headEnd type="none" w="med" len="med"/>
+                      <a:tailEnd type="none" w="med" len="med"/>
+                    </a:lnR>
+                    <a:lnT w="6350" cap="flat" cmpd="sng" algn="ctr">
+                      <a:solidFill>
+                        <a:srgbClr val="E3E8E9"/>
+                      </a:solidFill>
+                      <a:prstDash val="solid"/>
+                      <a:round/>
+                      <a:headEnd type="none" w="med" len="med"/>
+                      <a:tailEnd type="none" w="med" len="med"/>
+                    </a:lnT>
+                    <a:lnB w="6350" cap="flat" cmpd="sng" algn="ctr">
+                      <a:solidFill>
+                        <a:srgbClr val="E3E8E9"/>
+                      </a:solidFill>
+                      <a:prstDash val="solid"/>
+                      <a:round/>
+                      <a:headEnd type="none" w="med" len="med"/>
+                      <a:tailEnd type="none" w="med" len="med"/>
+                    </a:lnB>
+                    <a:solidFill>
+                      <a:srgbClr val="FFFFFF"/>
+                    </a:solidFill>
+                  </a:tcPr>
+                </a:tc>
+              </a:tr>
+              <a:tr h="288036">
+                <a:tc>
+                  <a:txBody>
+                    <a:bodyPr/>
+                    <a:lstStyle/>
+                    <a:p>
+                      <a:pPr indent="0" marL="0">
+                        <a:buNone/>
+                      </a:pPr>
+                      <a:r>
+                        <a:rPr lang="en-US" sz="1000" dirty="0">
+                          <a:solidFill>
+                            <a:srgbClr val="1C2B33"/>
+                          </a:solidFill>
+                          <a:latin typeface="Calibri" pitchFamily="34" charset="0"/>
+                          <a:ea typeface="Calibri" pitchFamily="34" charset="-122"/>
+                          <a:cs typeface="Calibri" pitchFamily="34" charset="-120"/>
+                        </a:rPr>
+                        <a:t>SUBSTITUIÇÃO DOS BOOGIES DO TURRET</a:t>
+                      </a:r>
+                      <a:endParaRPr lang="en-US" sz="1000" dirty="0">
+                        <a:latin typeface="Calibri" charset="0"/>
+                        <a:ea typeface="Calibri" charset="0"/>
+                        <a:cs typeface="Calibri" charset="0"/>
+                      </a:endParaRPr>
+                    </a:p>
+                  </a:txBody>
+                  <a:tcPr marL="91440" marR="91440" marT="45720" marB="45720" anchor="ctr">
+                    <a:lnL w="6350" cap="flat" cmpd="sng" algn="ctr">
+                      <a:solidFill>
+                        <a:srgbClr val="E3E8E9"/>
+                      </a:solidFill>
+                      <a:prstDash val="solid"/>
+                      <a:round/>
+                      <a:headEnd type="none" w="med" len="med"/>
+                      <a:tailEnd type="none" w="med" len="med"/>
+                    </a:lnL>
+                    <a:lnR w="6350" cap="flat" cmpd="sng" algn="ctr">
+                      <a:solidFill>
+                        <a:srgbClr val="E3E8E9"/>
+                      </a:solidFill>
+                      <a:prstDash val="solid"/>
+                      <a:round/>
+                      <a:headEnd type="none" w="med" len="med"/>
+                      <a:tailEnd type="none" w="med" len="med"/>
+                    </a:lnR>
+                    <a:lnT w="6350" cap="flat" cmpd="sng" algn="ctr">
+                      <a:solidFill>
+                        <a:srgbClr val="E3E8E9"/>
+                      </a:solidFill>
+                      <a:prstDash val="solid"/>
+                      <a:round/>
+                      <a:headEnd type="none" w="med" len="med"/>
+                      <a:tailEnd type="none" w="med" len="med"/>
+                    </a:lnT>
+                    <a:lnB w="6350" cap="flat" cmpd="sng" algn="ctr">
+                      <a:solidFill>
+                        <a:srgbClr val="E3E8E9"/>
+                      </a:solidFill>
+                      <a:prstDash val="solid"/>
+                      <a:round/>
+                      <a:headEnd type="none" w="med" len="med"/>
+                      <a:tailEnd type="none" w="med" len="med"/>
+                    </a:lnB>
+                    <a:solidFill>
+                      <a:srgbClr val="F0F4F5"/>
+                    </a:solidFill>
+                  </a:tcPr>
+                </a:tc>
+                <a:tc>
+                  <a:txBody>
+                    <a:bodyPr/>
+                    <a:lstStyle/>
+                    <a:p>
+                      <a:pPr indent="0" marL="0">
+                        <a:buNone/>
+                      </a:pPr>
+                      <a:r>
+                        <a:rPr lang="en-US" sz="950" dirty="0">
+                          <a:solidFill>
+                            <a:srgbClr val="5B6B73"/>
+                          </a:solidFill>
+                          <a:latin typeface="Calibri" pitchFamily="34" charset="0"/>
+                          <a:ea typeface="Calibri" pitchFamily="34" charset="-122"/>
+                          <a:cs typeface="Calibri" pitchFamily="34" charset="-120"/>
+                        </a:rPr>
+                        <a:t>Integridade e Regulatório</a:t>
+                      </a:r>
+                      <a:endParaRPr lang="en-US" sz="950" dirty="0">
+                        <a:latin typeface="Calibri" charset="0"/>
+                        <a:ea typeface="Calibri" charset="0"/>
+                        <a:cs typeface="Calibri" charset="0"/>
+                      </a:endParaRPr>
+                    </a:p>
+                  </a:txBody>
+                  <a:tcPr marL="91440" marR="91440" marT="45720" marB="45720" anchor="ctr">
+                    <a:lnL w="6350" cap="flat" cmpd="sng" algn="ctr">
+                      <a:solidFill>
+                        <a:srgbClr val="E3E8E9"/>
+                      </a:solidFill>
+                      <a:prstDash val="solid"/>
+                      <a:round/>
+                      <a:headEnd type="none" w="med" len="med"/>
+                      <a:tailEnd type="none" w="med" len="med"/>
+                    </a:lnL>
+                    <a:lnR w="6350" cap="flat" cmpd="sng" algn="ctr">
+                      <a:solidFill>
+                        <a:srgbClr val="E3E8E9"/>
+                      </a:solidFill>
+                      <a:prstDash val="solid"/>
+                      <a:round/>
+                      <a:headEnd type="none" w="med" len="med"/>
+                      <a:tailEnd type="none" w="med" len="med"/>
+                    </a:lnR>
+                    <a:lnT w="6350" cap="flat" cmpd="sng" algn="ctr">
+                      <a:solidFill>
+                        <a:srgbClr val="E3E8E9"/>
+                      </a:solidFill>
+                      <a:prstDash val="solid"/>
+                      <a:round/>
+                      <a:headEnd type="none" w="med" len="med"/>
+                      <a:tailEnd type="none" w="med" len="med"/>
+                    </a:lnT>
+                    <a:lnB w="6350" cap="flat" cmpd="sng" algn="ctr">
+                      <a:solidFill>
+                        <a:srgbClr val="E3E8E9"/>
+                      </a:solidFill>
+                      <a:prstDash val="solid"/>
+                      <a:round/>
+                      <a:headEnd type="none" w="med" len="med"/>
+                      <a:tailEnd type="none" w="med" len="med"/>
+                    </a:lnB>
+                    <a:solidFill>
+                      <a:srgbClr val="F0F4F5"/>
+                    </a:solidFill>
+                  </a:tcPr>
+                </a:tc>
+                <a:tc>
+                  <a:txBody>
+                    <a:bodyPr/>
+                    <a:lstStyle/>
+                    <a:p>
+                      <a:pPr indent="0" marL="0">
+                        <a:buNone/>
+                      </a:pPr>
+                      <a:r>
+                        <a:rPr lang="en-US" sz="950" dirty="0">
+                          <a:solidFill>
+                            <a:srgbClr val="5B6B73"/>
+                          </a:solidFill>
+                          <a:latin typeface="Calibri" pitchFamily="34" charset="0"/>
+                          <a:ea typeface="Calibri" pitchFamily="34" charset="-122"/>
+                          <a:cs typeface="Calibri" pitchFamily="34" charset="-120"/>
+                        </a:rPr>
+                        <a:t>NAV - Naval</a:t>
+                      </a:r>
+                      <a:endParaRPr lang="en-US" sz="950" dirty="0">
+                        <a:latin typeface="Calibri" charset="0"/>
+                        <a:ea typeface="Calibri" charset="0"/>
+                        <a:cs typeface="Calibri" charset="0"/>
+                      </a:endParaRPr>
+                    </a:p>
+                  </a:txBody>
+                  <a:tcPr marL="91440" marR="91440" marT="45720" marB="45720" anchor="ctr">
+                    <a:lnL w="6350" cap="flat" cmpd="sng" algn="ctr">
+                      <a:solidFill>
+                        <a:srgbClr val="E3E8E9"/>
+                      </a:solidFill>
+                      <a:prstDash val="solid"/>
+                      <a:round/>
+                      <a:headEnd type="none" w="med" len="med"/>
+                      <a:tailEnd type="none" w="med" len="med"/>
+                    </a:lnL>
+                    <a:lnR w="6350" cap="flat" cmpd="sng" algn="ctr">
+                      <a:solidFill>
+                        <a:srgbClr val="E3E8E9"/>
+                      </a:solidFill>
+                      <a:prstDash val="solid"/>
+                      <a:round/>
+                      <a:headEnd type="none" w="med" len="med"/>
+                      <a:tailEnd type="none" w="med" len="med"/>
+                    </a:lnR>
+                    <a:lnT w="6350" cap="flat" cmpd="sng" algn="ctr">
+                      <a:solidFill>
+                        <a:srgbClr val="E3E8E9"/>
+                      </a:solidFill>
+                      <a:prstDash val="solid"/>
+                      <a:round/>
+                      <a:headEnd type="none" w="med" len="med"/>
+                      <a:tailEnd type="none" w="med" len="med"/>
+                    </a:lnT>
+                    <a:lnB w="6350" cap="flat" cmpd="sng" algn="ctr">
+                      <a:solidFill>
+                        <a:srgbClr val="E3E8E9"/>
+                      </a:solidFill>
+                      <a:prstDash val="solid"/>
+                      <a:round/>
+                      <a:headEnd type="none" w="med" len="med"/>
+                      <a:tailEnd type="none" w="med" len="med"/>
+                    </a:lnB>
+                    <a:solidFill>
+                      <a:srgbClr val="F0F4F5"/>
+                    </a:solidFill>
+                  </a:tcPr>
+                </a:tc>
+                <a:tc>
+                  <a:txBody>
+                    <a:bodyPr/>
+                    <a:lstStyle/>
+                    <a:p>
+                      <a:pPr algn="r" indent="0" marL="0">
+                        <a:buNone/>
+                      </a:pPr>
+                      <a:r>
+                        <a:rPr lang="en-US" sz="1000" b="1" dirty="0">
+                          <a:solidFill>
+                            <a:srgbClr val="0B2A3D"/>
+                          </a:solidFill>
+                          <a:latin typeface="Calibri" pitchFamily="34" charset="0"/>
+                          <a:ea typeface="Calibri" pitchFamily="34" charset="-122"/>
+                          <a:cs typeface="Calibri" pitchFamily="34" charset="-120"/>
+                        </a:rPr>
+                        <a:t>US$ 11,4 mi</a:t>
+                      </a:r>
+                      <a:endParaRPr lang="en-US" sz="1000" dirty="0">
+                        <a:latin typeface="Calibri" charset="0"/>
+                        <a:ea typeface="Calibri" charset="0"/>
+                        <a:cs typeface="Calibri" charset="0"/>
+                      </a:endParaRPr>
+                    </a:p>
+                  </a:txBody>
+                  <a:tcPr marL="91440" marR="91440" marT="45720" marB="45720" anchor="ctr">
+                    <a:lnL w="6350" cap="flat" cmpd="sng" algn="ctr">
+                      <a:solidFill>
+                        <a:srgbClr val="E3E8E9"/>
+                      </a:solidFill>
+                      <a:prstDash val="solid"/>
+                      <a:round/>
+                      <a:headEnd type="none" w="med" len="med"/>
+                      <a:tailEnd type="none" w="med" len="med"/>
+                    </a:lnL>
+                    <a:lnR w="6350" cap="flat" cmpd="sng" algn="ctr">
+                      <a:solidFill>
+                        <a:srgbClr val="E3E8E9"/>
+                      </a:solidFill>
+                      <a:prstDash val="solid"/>
+                      <a:round/>
+                      <a:headEnd type="none" w="med" len="med"/>
+                      <a:tailEnd type="none" w="med" len="med"/>
+                    </a:lnR>
+                    <a:lnT w="6350" cap="flat" cmpd="sng" algn="ctr">
+                      <a:solidFill>
+                        <a:srgbClr val="E3E8E9"/>
+                      </a:solidFill>
+                      <a:prstDash val="solid"/>
+                      <a:round/>
+                      <a:headEnd type="none" w="med" len="med"/>
+                      <a:tailEnd type="none" w="med" len="med"/>
+                    </a:lnT>
+                    <a:lnB w="6350" cap="flat" cmpd="sng" algn="ctr">
+                      <a:solidFill>
+                        <a:srgbClr val="E3E8E9"/>
+                      </a:solidFill>
+                      <a:prstDash val="solid"/>
+                      <a:round/>
+                      <a:headEnd type="none" w="med" len="med"/>
+                      <a:tailEnd type="none" w="med" len="med"/>
+                    </a:lnB>
+                    <a:solidFill>
+                      <a:srgbClr val="F0F4F5"/>
+                    </a:solidFill>
+                  </a:tcPr>
+                </a:tc>
+              </a:tr>
+              <a:tr h="288036">
+                <a:tc>
+                  <a:txBody>
+                    <a:bodyPr/>
+                    <a:lstStyle/>
+                    <a:p>
+                      <a:pPr indent="0" marL="0">
+                        <a:buNone/>
+                      </a:pPr>
+                      <a:r>
+                        <a:rPr lang="en-US" sz="1000" dirty="0">
+                          <a:solidFill>
+                            <a:srgbClr val="1C2B33"/>
+                          </a:solidFill>
+                          <a:latin typeface="Calibri" pitchFamily="34" charset="0"/>
+                          <a:ea typeface="Calibri" pitchFamily="34" charset="-122"/>
+                          <a:cs typeface="Calibri" pitchFamily="34" charset="-120"/>
+                        </a:rPr>
+                        <a:t>SPARE PARTS RECONDICIONAMENTO DOS BOOGIES</a:t>
+                      </a:r>
+                      <a:endParaRPr lang="en-US" sz="1000" dirty="0">
+                        <a:latin typeface="Calibri" charset="0"/>
+                        <a:ea typeface="Calibri" charset="0"/>
+                        <a:cs typeface="Calibri" charset="0"/>
+                      </a:endParaRPr>
+                    </a:p>
+                  </a:txBody>
+                  <a:tcPr marL="91440" marR="91440" marT="45720" marB="45720" anchor="ctr">
+                    <a:lnL w="6350" cap="flat" cmpd="sng" algn="ctr">
+                      <a:solidFill>
+                        <a:srgbClr val="E3E8E9"/>
+                      </a:solidFill>
+                      <a:prstDash val="solid"/>
+                      <a:round/>
+                      <a:headEnd type="none" w="med" len="med"/>
+                      <a:tailEnd type="none" w="med" len="med"/>
+                    </a:lnL>
+                    <a:lnR w="6350" cap="flat" cmpd="sng" algn="ctr">
+                      <a:solidFill>
+                        <a:srgbClr val="E3E8E9"/>
+                      </a:solidFill>
+                      <a:prstDash val="solid"/>
+                      <a:round/>
+                      <a:headEnd type="none" w="med" len="med"/>
+                      <a:tailEnd type="none" w="med" len="med"/>
+                    </a:lnR>
+                    <a:lnT w="6350" cap="flat" cmpd="sng" algn="ctr">
+                      <a:solidFill>
+                        <a:srgbClr val="E3E8E9"/>
+                      </a:solidFill>
+                      <a:prstDash val="solid"/>
+                      <a:round/>
+                      <a:headEnd type="none" w="med" len="med"/>
+                      <a:tailEnd type="none" w="med" len="med"/>
+                    </a:lnT>
+                    <a:lnB w="6350" cap="flat" cmpd="sng" algn="ctr">
+                      <a:solidFill>
+                        <a:srgbClr val="E3E8E9"/>
+                      </a:solidFill>
+                      <a:prstDash val="solid"/>
+                      <a:round/>
+                      <a:headEnd type="none" w="med" len="med"/>
+                      <a:tailEnd type="none" w="med" len="med"/>
+                    </a:lnB>
+                    <a:solidFill>
+                      <a:srgbClr val="FFFFFF"/>
+                    </a:solidFill>
+                  </a:tcPr>
+                </a:tc>
+                <a:tc>
+                  <a:txBody>
+                    <a:bodyPr/>
+                    <a:lstStyle/>
+                    <a:p>
+                      <a:pPr indent="0" marL="0">
+                        <a:buNone/>
+                      </a:pPr>
+                      <a:r>
+                        <a:rPr lang="en-US" sz="950" dirty="0">
+                          <a:solidFill>
+                            <a:srgbClr val="5B6B73"/>
+                          </a:solidFill>
+                          <a:latin typeface="Calibri" pitchFamily="34" charset="0"/>
+                          <a:ea typeface="Calibri" pitchFamily="34" charset="-122"/>
+                          <a:cs typeface="Calibri" pitchFamily="34" charset="-120"/>
+                        </a:rPr>
+                        <a:t>Rotina Operacional</a:t>
+                      </a:r>
+                      <a:endParaRPr lang="en-US" sz="950" dirty="0">
+                        <a:latin typeface="Calibri" charset="0"/>
+                        <a:ea typeface="Calibri" charset="0"/>
+                        <a:cs typeface="Calibri" charset="0"/>
+                      </a:endParaRPr>
+                    </a:p>
+                  </a:txBody>
+                  <a:tcPr marL="91440" marR="91440" marT="45720" marB="45720" anchor="ctr">
+                    <a:lnL w="6350" cap="flat" cmpd="sng" algn="ctr">
+                      <a:solidFill>
+                        <a:srgbClr val="E3E8E9"/>
+                      </a:solidFill>
+                      <a:prstDash val="solid"/>
+                      <a:round/>
+                      <a:headEnd type="none" w="med" len="med"/>
+                      <a:tailEnd type="none" w="med" len="med"/>
+                    </a:lnL>
+                    <a:lnR w="6350" cap="flat" cmpd="sng" algn="ctr">
+                      <a:solidFill>
+                        <a:srgbClr val="E3E8E9"/>
+                      </a:solidFill>
+                      <a:prstDash val="solid"/>
+                      <a:round/>
+                      <a:headEnd type="none" w="med" len="med"/>
+                      <a:tailEnd type="none" w="med" len="med"/>
+                    </a:lnR>
+                    <a:lnT w="6350" cap="flat" cmpd="sng" algn="ctr">
+                      <a:solidFill>
+                        <a:srgbClr val="E3E8E9"/>
+                      </a:solidFill>
+                      <a:prstDash val="solid"/>
+                      <a:round/>
+                      <a:headEnd type="none" w="med" len="med"/>
+                      <a:tailEnd type="none" w="med" len="med"/>
+                    </a:lnT>
+                    <a:lnB w="6350" cap="flat" cmpd="sng" algn="ctr">
+                      <a:solidFill>
+                        <a:srgbClr val="E3E8E9"/>
+                      </a:solidFill>
+                      <a:prstDash val="solid"/>
+                      <a:round/>
+                      <a:headEnd type="none" w="med" len="med"/>
+                      <a:tailEnd type="none" w="med" len="med"/>
+                    </a:lnB>
+                    <a:solidFill>
+                      <a:srgbClr val="FFFFFF"/>
+                    </a:solidFill>
+                  </a:tcPr>
+                </a:tc>
+                <a:tc>
+                  <a:txBody>
+                    <a:bodyPr/>
+                    <a:lstStyle/>
+                    <a:p>
+                      <a:pPr indent="0" marL="0">
+                        <a:buNone/>
+                      </a:pPr>
+                      <a:r>
+                        <a:rPr lang="en-US" sz="950" dirty="0">
+                          <a:solidFill>
+                            <a:srgbClr val="5B6B73"/>
+                          </a:solidFill>
+                          <a:latin typeface="Calibri" pitchFamily="34" charset="0"/>
+                          <a:ea typeface="Calibri" pitchFamily="34" charset="-122"/>
+                          <a:cs typeface="Calibri" pitchFamily="34" charset="-120"/>
+                        </a:rPr>
+                        <a:t>NAV - Naval</a:t>
+                      </a:r>
+                      <a:endParaRPr lang="en-US" sz="950" dirty="0">
+                        <a:latin typeface="Calibri" charset="0"/>
+                        <a:ea typeface="Calibri" charset="0"/>
+                        <a:cs typeface="Calibri" charset="0"/>
+                      </a:endParaRPr>
+                    </a:p>
+                  </a:txBody>
+                  <a:tcPr marL="91440" marR="91440" marT="45720" marB="45720" anchor="ctr">
+                    <a:lnL w="6350" cap="flat" cmpd="sng" algn="ctr">
+                      <a:solidFill>
+                        <a:srgbClr val="E3E8E9"/>
+                      </a:solidFill>
+                      <a:prstDash val="solid"/>
+                      <a:round/>
+                      <a:headEnd type="none" w="med" len="med"/>
+                      <a:tailEnd type="none" w="med" len="med"/>
+                    </a:lnL>
+                    <a:lnR w="6350" cap="flat" cmpd="sng" algn="ctr">
+                      <a:solidFill>
+                        <a:srgbClr val="E3E8E9"/>
+                      </a:solidFill>
+                      <a:prstDash val="solid"/>
+                      <a:round/>
+                      <a:headEnd type="none" w="med" len="med"/>
+                      <a:tailEnd type="none" w="med" len="med"/>
+                    </a:lnR>
+                    <a:lnT w="6350" cap="flat" cmpd="sng" algn="ctr">
+                      <a:solidFill>
+                        <a:srgbClr val="E3E8E9"/>
+                      </a:solidFill>
+                      <a:prstDash val="solid"/>
+                      <a:round/>
+                      <a:headEnd type="none" w="med" len="med"/>
+                      <a:tailEnd type="none" w="med" len="med"/>
+                    </a:lnT>
+                    <a:lnB w="6350" cap="flat" cmpd="sng" algn="ctr">
+                      <a:solidFill>
+                        <a:srgbClr val="E3E8E9"/>
+                      </a:solidFill>
+                      <a:prstDash val="solid"/>
+                      <a:round/>
+                      <a:headEnd type="none" w="med" len="med"/>
+                      <a:tailEnd type="none" w="med" len="med"/>
+                    </a:lnB>
+                    <a:solidFill>
+                      <a:srgbClr val="FFFFFF"/>
+                    </a:solidFill>
+                  </a:tcPr>
+                </a:tc>
+                <a:tc>
+                  <a:txBody>
+                    <a:bodyPr/>
+                    <a:lstStyle/>
+                    <a:p>
+                      <a:pPr algn="r" indent="0" marL="0">
+                        <a:buNone/>
+                      </a:pPr>
+                      <a:r>
+                        <a:rPr lang="en-US" sz="1000" b="1" dirty="0">
+                          <a:solidFill>
+                            <a:srgbClr val="0B2A3D"/>
+                          </a:solidFill>
+                          <a:latin typeface="Calibri" pitchFamily="34" charset="0"/>
+                          <a:ea typeface="Calibri" pitchFamily="34" charset="-122"/>
+                          <a:cs typeface="Calibri" pitchFamily="34" charset="-120"/>
+                        </a:rPr>
+                        <a:t>US$ 6,3 mi</a:t>
+                      </a:r>
+                      <a:endParaRPr lang="en-US" sz="1000" dirty="0">
+                        <a:latin typeface="Calibri" charset="0"/>
+                        <a:ea typeface="Calibri" charset="0"/>
+                        <a:cs typeface="Calibri" charset="0"/>
+                      </a:endParaRPr>
+                    </a:p>
+                  </a:txBody>
+                  <a:tcPr marL="91440" marR="91440" marT="45720" marB="45720" anchor="ctr">
+                    <a:lnL w="6350" cap="flat" cmpd="sng" algn="ctr">
+                      <a:solidFill>
+                        <a:srgbClr val="E3E8E9"/>
+                      </a:solidFill>
+                      <a:prstDash val="solid"/>
+                      <a:round/>
+                      <a:headEnd type="none" w="med" len="med"/>
+                      <a:tailEnd type="none" w="med" len="med"/>
+                    </a:lnL>
+                    <a:lnR w="6350" cap="flat" cmpd="sng" algn="ctr">
+                      <a:solidFill>
+                        <a:srgbClr val="E3E8E9"/>
+                      </a:solidFill>
+                      <a:prstDash val="solid"/>
+                      <a:round/>
+                      <a:headEnd type="none" w="med" len="med"/>
+                      <a:tailEnd type="none" w="med" len="med"/>
+                    </a:lnR>
+                    <a:lnT w="6350" cap="flat" cmpd="sng" algn="ctr">
+                      <a:solidFill>
+                        <a:srgbClr val="E3E8E9"/>
+                      </a:solidFill>
+                      <a:prstDash val="solid"/>
+                      <a:round/>
+                      <a:headEnd type="none" w="med" len="med"/>
+                      <a:tailEnd type="none" w="med" len="med"/>
+                    </a:lnT>
+                    <a:lnB w="6350" cap="flat" cmpd="sng" algn="ctr">
+                      <a:solidFill>
+                        <a:srgbClr val="E3E8E9"/>
+                      </a:solidFill>
+                      <a:prstDash val="solid"/>
+                      <a:round/>
+                      <a:headEnd type="none" w="med" len="med"/>
+                      <a:tailEnd type="none" w="med" len="med"/>
+                    </a:lnB>
+                    <a:solidFill>
+                      <a:srgbClr val="FFFFFF"/>
+                    </a:solidFill>
+                  </a:tcPr>
+                </a:tc>
+              </a:tr>
+              <a:tr h="288036">
+                <a:tc>
+                  <a:txBody>
+                    <a:bodyPr/>
+                    <a:lstStyle/>
+                    <a:p>
+                      <a:pPr indent="0" marL="0">
+                        <a:buNone/>
+                      </a:pPr>
+                      <a:r>
+                        <a:rPr lang="en-US" sz="1000" dirty="0">
+                          <a:solidFill>
+                            <a:srgbClr val="1C2B33"/>
+                          </a:solidFill>
+                          <a:latin typeface="Calibri" pitchFamily="34" charset="0"/>
+                          <a:ea typeface="Calibri" pitchFamily="34" charset="-122"/>
+                          <a:cs typeface="Calibri" pitchFamily="34" charset="-120"/>
+                        </a:rPr>
+                        <a:t>L3 - TURBINA</a:t>
+                      </a:r>
+                      <a:endParaRPr lang="en-US" sz="1000" dirty="0">
+                        <a:latin typeface="Calibri" charset="0"/>
+                        <a:ea typeface="Calibri" charset="0"/>
+                        <a:cs typeface="Calibri" charset="0"/>
+                      </a:endParaRPr>
+                    </a:p>
+                  </a:txBody>
+                  <a:tcPr marL="91440" marR="91440" marT="45720" marB="45720" anchor="ctr">
+                    <a:lnL w="6350" cap="flat" cmpd="sng" algn="ctr">
+                      <a:solidFill>
+                        <a:srgbClr val="E3E8E9"/>
+                      </a:solidFill>
+                      <a:prstDash val="solid"/>
+                      <a:round/>
+                      <a:headEnd type="none" w="med" len="med"/>
+                      <a:tailEnd type="none" w="med" len="med"/>
+                    </a:lnL>
+                    <a:lnR w="6350" cap="flat" cmpd="sng" algn="ctr">
+                      <a:solidFill>
+                        <a:srgbClr val="E3E8E9"/>
+                      </a:solidFill>
+                      <a:prstDash val="solid"/>
+                      <a:round/>
+                      <a:headEnd type="none" w="med" len="med"/>
+                      <a:tailEnd type="none" w="med" len="med"/>
+                    </a:lnR>
+                    <a:lnT w="6350" cap="flat" cmpd="sng" algn="ctr">
+                      <a:solidFill>
+                        <a:srgbClr val="E3E8E9"/>
+                      </a:solidFill>
+                      <a:prstDash val="solid"/>
+                      <a:round/>
+                      <a:headEnd type="none" w="med" len="med"/>
+                      <a:tailEnd type="none" w="med" len="med"/>
+                    </a:lnT>
+                    <a:lnB w="6350" cap="flat" cmpd="sng" algn="ctr">
+                      <a:solidFill>
+                        <a:srgbClr val="E3E8E9"/>
+                      </a:solidFill>
+                      <a:prstDash val="solid"/>
+                      <a:round/>
+                      <a:headEnd type="none" w="med" len="med"/>
+                      <a:tailEnd type="none" w="med" len="med"/>
+                    </a:lnB>
+                    <a:solidFill>
+                      <a:srgbClr val="F0F4F5"/>
+                    </a:solidFill>
+                  </a:tcPr>
+                </a:tc>
+                <a:tc>
+                  <a:txBody>
+                    <a:bodyPr/>
+                    <a:lstStyle/>
+                    <a:p>
+                      <a:pPr indent="0" marL="0">
+                        <a:buNone/>
+                      </a:pPr>
+                      <a:r>
+                        <a:rPr lang="en-US" sz="950" dirty="0">
+                          <a:solidFill>
+                            <a:srgbClr val="5B6B73"/>
+                          </a:solidFill>
+                          <a:latin typeface="Calibri" pitchFamily="34" charset="0"/>
+                          <a:ea typeface="Calibri" pitchFamily="34" charset="-122"/>
+                          <a:cs typeface="Calibri" pitchFamily="34" charset="-120"/>
+                        </a:rPr>
+                        <a:t>Rotina Operacional</a:t>
+                      </a:r>
+                      <a:endParaRPr lang="en-US" sz="950" dirty="0">
+                        <a:latin typeface="Calibri" charset="0"/>
+                        <a:ea typeface="Calibri" charset="0"/>
+                        <a:cs typeface="Calibri" charset="0"/>
+                      </a:endParaRPr>
+                    </a:p>
+                  </a:txBody>
+                  <a:tcPr marL="91440" marR="91440" marT="45720" marB="45720" anchor="ctr">
+                    <a:lnL w="6350" cap="flat" cmpd="sng" algn="ctr">
+                      <a:solidFill>
+                        <a:srgbClr val="E3E8E9"/>
+                      </a:solidFill>
+                      <a:prstDash val="solid"/>
+                      <a:round/>
+                      <a:headEnd type="none" w="med" len="med"/>
+                      <a:tailEnd type="none" w="med" len="med"/>
+                    </a:lnL>
+                    <a:lnR w="6350" cap="flat" cmpd="sng" algn="ctr">
+                      <a:solidFill>
+                        <a:srgbClr val="E3E8E9"/>
+                      </a:solidFill>
+                      <a:prstDash val="solid"/>
+                      <a:round/>
+                      <a:headEnd type="none" w="med" len="med"/>
+                      <a:tailEnd type="none" w="med" len="med"/>
+                    </a:lnR>
+                    <a:lnT w="6350" cap="flat" cmpd="sng" algn="ctr">
+                      <a:solidFill>
+                        <a:srgbClr val="E3E8E9"/>
+                      </a:solidFill>
+                      <a:prstDash val="solid"/>
+                      <a:round/>
+                      <a:headEnd type="none" w="med" len="med"/>
+                      <a:tailEnd type="none" w="med" len="med"/>
+                    </a:lnT>
+                    <a:lnB w="6350" cap="flat" cmpd="sng" algn="ctr">
+                      <a:solidFill>
+                        <a:srgbClr val="E3E8E9"/>
+                      </a:solidFill>
+                      <a:prstDash val="solid"/>
+                      <a:round/>
+                      <a:headEnd type="none" w="med" len="med"/>
+                      <a:tailEnd type="none" w="med" len="med"/>
+                    </a:lnB>
+                    <a:solidFill>
+                      <a:srgbClr val="F0F4F5"/>
+                    </a:solidFill>
+                  </a:tcPr>
+                </a:tc>
+                <a:tc>
+                  <a:txBody>
+                    <a:bodyPr/>
+                    <a:lstStyle/>
+                    <a:p>
+                      <a:pPr indent="0" marL="0">
+                        <a:buNone/>
+                      </a:pPr>
+                      <a:r>
+                        <a:rPr lang="en-US" sz="950" dirty="0">
+                          <a:solidFill>
+                            <a:srgbClr val="5B6B73"/>
+                          </a:solidFill>
+                          <a:latin typeface="Calibri" pitchFamily="34" charset="0"/>
+                          <a:ea typeface="Calibri" pitchFamily="34" charset="-122"/>
+                          <a:cs typeface="Calibri" pitchFamily="34" charset="-120"/>
+                        </a:rPr>
+                        <a:t>MNT – Manutenção</a:t>
+                      </a:r>
+                      <a:endParaRPr lang="en-US" sz="950" dirty="0">
+                        <a:latin typeface="Calibri" charset="0"/>
+                        <a:ea typeface="Calibri" charset="0"/>
+                        <a:cs typeface="Calibri" charset="0"/>
+                      </a:endParaRPr>
+                    </a:p>
+                  </a:txBody>
+                  <a:tcPr marL="91440" marR="91440" marT="45720" marB="45720" anchor="ctr">
+                    <a:lnL w="6350" cap="flat" cmpd="sng" algn="ctr">
+                      <a:solidFill>
+                        <a:srgbClr val="E3E8E9"/>
+                      </a:solidFill>
+                      <a:prstDash val="solid"/>
+                      <a:round/>
+                      <a:headEnd type="none" w="med" len="med"/>
+                      <a:tailEnd type="none" w="med" len="med"/>
+                    </a:lnL>
+                    <a:lnR w="6350" cap="flat" cmpd="sng" algn="ctr">
+                      <a:solidFill>
+                        <a:srgbClr val="E3E8E9"/>
+                      </a:solidFill>
+                      <a:prstDash val="solid"/>
+                      <a:round/>
+                      <a:headEnd type="none" w="med" len="med"/>
+                      <a:tailEnd type="none" w="med" len="med"/>
+                    </a:lnR>
+                    <a:lnT w="6350" cap="flat" cmpd="sng" algn="ctr">
+                      <a:solidFill>
+                        <a:srgbClr val="E3E8E9"/>
+                      </a:solidFill>
+                      <a:prstDash val="solid"/>
+                      <a:round/>
+                      <a:headEnd type="none" w="med" len="med"/>
+                      <a:tailEnd type="none" w="med" len="med"/>
+                    </a:lnT>
+                    <a:lnB w="6350" cap="flat" cmpd="sng" algn="ctr">
+                      <a:solidFill>
+                        <a:srgbClr val="E3E8E9"/>
+                      </a:solidFill>
+                      <a:prstDash val="solid"/>
+                      <a:round/>
+                      <a:headEnd type="none" w="med" len="med"/>
+                      <a:tailEnd type="none" w="med" len="med"/>
+                    </a:lnB>
+                    <a:solidFill>
+                      <a:srgbClr val="F0F4F5"/>
+                    </a:solidFill>
+                  </a:tcPr>
+                </a:tc>
+                <a:tc>
+                  <a:txBody>
+                    <a:bodyPr/>
+                    <a:lstStyle/>
+                    <a:p>
+                      <a:pPr algn="r" indent="0" marL="0">
+                        <a:buNone/>
+                      </a:pPr>
+                      <a:r>
+                        <a:rPr lang="en-US" sz="1000" b="1" dirty="0">
+                          <a:solidFill>
+                            <a:srgbClr val="0B2A3D"/>
+                          </a:solidFill>
+                          <a:latin typeface="Calibri" pitchFamily="34" charset="0"/>
+                          <a:ea typeface="Calibri" pitchFamily="34" charset="-122"/>
+                          <a:cs typeface="Calibri" pitchFamily="34" charset="-120"/>
+                        </a:rPr>
+                        <a:t>US$ 6,0 mi</a:t>
+                      </a:r>
+                      <a:endParaRPr lang="en-US" sz="1000" dirty="0">
+                        <a:latin typeface="Calibri" charset="0"/>
+                        <a:ea typeface="Calibri" charset="0"/>
+                        <a:cs typeface="Calibri" charset="0"/>
+                      </a:endParaRPr>
+                    </a:p>
+                  </a:txBody>
+                  <a:tcPr marL="91440" marR="91440" marT="45720" marB="45720" anchor="ctr">
+                    <a:lnL w="6350" cap="flat" cmpd="sng" algn="ctr">
+                      <a:solidFill>
+                        <a:srgbClr val="E3E8E9"/>
+                      </a:solidFill>
+                      <a:prstDash val="solid"/>
+                      <a:round/>
+                      <a:headEnd type="none" w="med" len="med"/>
+                      <a:tailEnd type="none" w="med" len="med"/>
+                    </a:lnL>
+                    <a:lnR w="6350" cap="flat" cmpd="sng" algn="ctr">
+                      <a:solidFill>
+                        <a:srgbClr val="E3E8E9"/>
+                      </a:solidFill>
+                      <a:prstDash val="solid"/>
+                      <a:round/>
+                      <a:headEnd type="none" w="med" len="med"/>
+                      <a:tailEnd type="none" w="med" len="med"/>
+                    </a:lnR>
+                    <a:lnT w="6350" cap="flat" cmpd="sng" algn="ctr">
+                      <a:solidFill>
+                        <a:srgbClr val="E3E8E9"/>
+                      </a:solidFill>
+                      <a:prstDash val="solid"/>
+                      <a:round/>
+                      <a:headEnd type="none" w="med" len="med"/>
+                      <a:tailEnd type="none" w="med" len="med"/>
+                    </a:lnT>
+                    <a:lnB w="6350" cap="flat" cmpd="sng" algn="ctr">
+                      <a:solidFill>
+                        <a:srgbClr val="E3E8E9"/>
+                      </a:solidFill>
+                      <a:prstDash val="solid"/>
+                      <a:round/>
+                      <a:headEnd type="none" w="med" len="med"/>
+                      <a:tailEnd type="none" w="med" len="med"/>
+                    </a:lnB>
+                    <a:solidFill>
+                      <a:srgbClr val="F0F4F5"/>
+                    </a:solidFill>
+                  </a:tcPr>
+                </a:tc>
+              </a:tr>
+              <a:tr h="288036">
+                <a:tc>
+                  <a:txBody>
+                    <a:bodyPr/>
+                    <a:lstStyle/>
+                    <a:p>
+                      <a:pPr indent="0" marL="0">
+                        <a:buNone/>
+                      </a:pPr>
+                      <a:r>
+                        <a:rPr lang="en-US" sz="1000" dirty="0">
+                          <a:solidFill>
+                            <a:srgbClr val="1C2B33"/>
+                          </a:solidFill>
+                          <a:latin typeface="Calibri" pitchFamily="34" charset="0"/>
+                          <a:ea typeface="Calibri" pitchFamily="34" charset="-122"/>
+                          <a:cs typeface="Calibri" pitchFamily="34" charset="-120"/>
+                        </a:rPr>
+                        <a:t>Frade 100K (Fase 2)</a:t>
+                      </a:r>
+                      <a:endParaRPr lang="en-US" sz="1000" dirty="0">
+                        <a:latin typeface="Calibri" charset="0"/>
+                        <a:ea typeface="Calibri" charset="0"/>
+                        <a:cs typeface="Calibri" charset="0"/>
+                      </a:endParaRPr>
+                    </a:p>
+                  </a:txBody>
+                  <a:tcPr marL="91440" marR="91440" marT="45720" marB="45720" anchor="ctr">
+                    <a:lnL w="6350" cap="flat" cmpd="sng" algn="ctr">
+                      <a:solidFill>
+                        <a:srgbClr val="E3E8E9"/>
+                      </a:solidFill>
+                      <a:prstDash val="solid"/>
+                      <a:round/>
+                      <a:headEnd type="none" w="med" len="med"/>
+                      <a:tailEnd type="none" w="med" len="med"/>
+                    </a:lnL>
+                    <a:lnR w="6350" cap="flat" cmpd="sng" algn="ctr">
+                      <a:solidFill>
+                        <a:srgbClr val="E3E8E9"/>
+                      </a:solidFill>
+                      <a:prstDash val="solid"/>
+                      <a:round/>
+                      <a:headEnd type="none" w="med" len="med"/>
+                      <a:tailEnd type="none" w="med" len="med"/>
+                    </a:lnR>
+                    <a:lnT w="6350" cap="flat" cmpd="sng" algn="ctr">
+                      <a:solidFill>
+                        <a:srgbClr val="E3E8E9"/>
+                      </a:solidFill>
+                      <a:prstDash val="solid"/>
+                      <a:round/>
+                      <a:headEnd type="none" w="med" len="med"/>
+                      <a:tailEnd type="none" w="med" len="med"/>
+                    </a:lnT>
+                    <a:lnB w="6350" cap="flat" cmpd="sng" algn="ctr">
+                      <a:solidFill>
+                        <a:srgbClr val="E3E8E9"/>
+                      </a:solidFill>
+                      <a:prstDash val="solid"/>
+                      <a:round/>
+                      <a:headEnd type="none" w="med" len="med"/>
+                      <a:tailEnd type="none" w="med" len="med"/>
+                    </a:lnB>
+                    <a:solidFill>
+                      <a:srgbClr val="FFFFFF"/>
+                    </a:solidFill>
+                  </a:tcPr>
+                </a:tc>
+                <a:tc>
+                  <a:txBody>
+                    <a:bodyPr/>
+                    <a:lstStyle/>
+                    <a:p>
+                      <a:pPr indent="0" marL="0">
+                        <a:buNone/>
+                      </a:pPr>
+                      <a:r>
+                        <a:rPr lang="en-US" sz="950" dirty="0">
+                          <a:solidFill>
+                            <a:srgbClr val="5B6B73"/>
+                          </a:solidFill>
+                          <a:latin typeface="Calibri" pitchFamily="34" charset="0"/>
+                          <a:ea typeface="Calibri" pitchFamily="34" charset="-122"/>
+                          <a:cs typeface="Calibri" pitchFamily="34" charset="-120"/>
+                        </a:rPr>
+                        <a:t>Eficiência de Produção</a:t>
+                      </a:r>
+                      <a:endParaRPr lang="en-US" sz="950" dirty="0">
+                        <a:latin typeface="Calibri" charset="0"/>
+                        <a:ea typeface="Calibri" charset="0"/>
+                        <a:cs typeface="Calibri" charset="0"/>
+                      </a:endParaRPr>
+                    </a:p>
+                  </a:txBody>
+                  <a:tcPr marL="91440" marR="91440" marT="45720" marB="45720" anchor="ctr">
+                    <a:lnL w="6350" cap="flat" cmpd="sng" algn="ctr">
+                      <a:solidFill>
+                        <a:srgbClr val="E3E8E9"/>
+                      </a:solidFill>
+                      <a:prstDash val="solid"/>
+                      <a:round/>
+                      <a:headEnd type="none" w="med" len="med"/>
+                      <a:tailEnd type="none" w="med" len="med"/>
+                    </a:lnL>
+                    <a:lnR w="6350" cap="flat" cmpd="sng" algn="ctr">
+                      <a:solidFill>
+                        <a:srgbClr val="E3E8E9"/>
+                      </a:solidFill>
+                      <a:prstDash val="solid"/>
+                      <a:round/>
+                      <a:headEnd type="none" w="med" len="med"/>
+                      <a:tailEnd type="none" w="med" len="med"/>
+                    </a:lnR>
+                    <a:lnT w="6350" cap="flat" cmpd="sng" algn="ctr">
+                      <a:solidFill>
+                        <a:srgbClr val="E3E8E9"/>
+                      </a:solidFill>
+                      <a:prstDash val="solid"/>
+                      <a:round/>
+                      <a:headEnd type="none" w="med" len="med"/>
+                      <a:tailEnd type="none" w="med" len="med"/>
+                    </a:lnT>
+                    <a:lnB w="6350" cap="flat" cmpd="sng" algn="ctr">
+                      <a:solidFill>
+                        <a:srgbClr val="E3E8E9"/>
+                      </a:solidFill>
+                      <a:prstDash val="solid"/>
+                      <a:round/>
+                      <a:headEnd type="none" w="med" len="med"/>
+                      <a:tailEnd type="none" w="med" len="med"/>
+                    </a:lnB>
+                    <a:solidFill>
+                      <a:srgbClr val="FFFFFF"/>
+                    </a:solidFill>
+                  </a:tcPr>
+                </a:tc>
+                <a:tc>
+                  <a:txBody>
+                    <a:bodyPr/>
+                    <a:lstStyle/>
+                    <a:p>
+                      <a:pPr indent="0" marL="0">
+                        <a:buNone/>
+                      </a:pPr>
+                      <a:r>
+                        <a:rPr lang="en-US" sz="950" dirty="0">
+                          <a:solidFill>
+                            <a:srgbClr val="5B6B73"/>
+                          </a:solidFill>
+                          <a:latin typeface="Calibri" pitchFamily="34" charset="0"/>
+                          <a:ea typeface="Calibri" pitchFamily="34" charset="-122"/>
+                          <a:cs typeface="Calibri" pitchFamily="34" charset="-120"/>
+                        </a:rPr>
+                        <a:t>Projetos</a:t>
+                      </a:r>
+                      <a:endParaRPr lang="en-US" sz="950" dirty="0">
+                        <a:latin typeface="Calibri" charset="0"/>
+                        <a:ea typeface="Calibri" charset="0"/>
+                        <a:cs typeface="Calibri" charset="0"/>
+                      </a:endParaRPr>
+                    </a:p>
+                  </a:txBody>
+                  <a:tcPr marL="91440" marR="91440" marT="45720" marB="45720" anchor="ctr">
+                    <a:lnL w="6350" cap="flat" cmpd="sng" algn="ctr">
+                      <a:solidFill>
+                        <a:srgbClr val="E3E8E9"/>
+                      </a:solidFill>
+                      <a:prstDash val="solid"/>
+                      <a:round/>
+                      <a:headEnd type="none" w="med" len="med"/>
+                      <a:tailEnd type="none" w="med" len="med"/>
+                    </a:lnL>
+                    <a:lnR w="6350" cap="flat" cmpd="sng" algn="ctr">
+                      <a:solidFill>
+                        <a:srgbClr val="E3E8E9"/>
+                      </a:solidFill>
+                      <a:prstDash val="solid"/>
+                      <a:round/>
+                      <a:headEnd type="none" w="med" len="med"/>
+                      <a:tailEnd type="none" w="med" len="med"/>
+                    </a:lnR>
+                    <a:lnT w="6350" cap="flat" cmpd="sng" algn="ctr">
+                      <a:solidFill>
+                        <a:srgbClr val="E3E8E9"/>
+                      </a:solidFill>
+                      <a:prstDash val="solid"/>
+                      <a:round/>
+                      <a:headEnd type="none" w="med" len="med"/>
+                      <a:tailEnd type="none" w="med" len="med"/>
+                    </a:lnT>
+                    <a:lnB w="6350" cap="flat" cmpd="sng" algn="ctr">
+                      <a:solidFill>
+                        <a:srgbClr val="E3E8E9"/>
+                      </a:solidFill>
+                      <a:prstDash val="solid"/>
+                      <a:round/>
+                      <a:headEnd type="none" w="med" len="med"/>
+                      <a:tailEnd type="none" w="med" len="med"/>
+                    </a:lnB>
+                    <a:solidFill>
+                      <a:srgbClr val="FFFFFF"/>
+                    </a:solidFill>
+                  </a:tcPr>
+                </a:tc>
+                <a:tc>
+                  <a:txBody>
+                    <a:bodyPr/>
+                    <a:lstStyle/>
+                    <a:p>
+                      <a:pPr algn="r" indent="0" marL="0">
+                        <a:buNone/>
+                      </a:pPr>
+                      <a:r>
+                        <a:rPr lang="en-US" sz="1000" b="1" dirty="0">
+                          <a:solidFill>
+                            <a:srgbClr val="0B2A3D"/>
+                          </a:solidFill>
+                          <a:latin typeface="Calibri" pitchFamily="34" charset="0"/>
+                          <a:ea typeface="Calibri" pitchFamily="34" charset="-122"/>
+                          <a:cs typeface="Calibri" pitchFamily="34" charset="-120"/>
+                        </a:rPr>
+                        <a:t>US$ 5,4 mi</a:t>
+                      </a:r>
+                      <a:endParaRPr lang="en-US" sz="1000" dirty="0">
+                        <a:latin typeface="Calibri" charset="0"/>
+                        <a:ea typeface="Calibri" charset="0"/>
+                        <a:cs typeface="Calibri" charset="0"/>
+                      </a:endParaRPr>
+                    </a:p>
+                  </a:txBody>
+                  <a:tcPr marL="91440" marR="91440" marT="45720" marB="45720" anchor="ctr">
+                    <a:lnL w="6350" cap="flat" cmpd="sng" algn="ctr">
+                      <a:solidFill>
+                        <a:srgbClr val="E3E8E9"/>
+                      </a:solidFill>
+                      <a:prstDash val="solid"/>
+                      <a:round/>
+                      <a:headEnd type="none" w="med" len="med"/>
+                      <a:tailEnd type="none" w="med" len="med"/>
+                    </a:lnL>
+                    <a:lnR w="6350" cap="flat" cmpd="sng" algn="ctr">
+                      <a:solidFill>
+                        <a:srgbClr val="E3E8E9"/>
+                      </a:solidFill>
+                      <a:prstDash val="solid"/>
+                      <a:round/>
+                      <a:headEnd type="none" w="med" len="med"/>
+                      <a:tailEnd type="none" w="med" len="med"/>
+                    </a:lnR>
+                    <a:lnT w="6350" cap="flat" cmpd="sng" algn="ctr">
+                      <a:solidFill>
+                        <a:srgbClr val="E3E8E9"/>
+                      </a:solidFill>
+                      <a:prstDash val="solid"/>
+                      <a:round/>
+                      <a:headEnd type="none" w="med" len="med"/>
+                      <a:tailEnd type="none" w="med" len="med"/>
+                    </a:lnT>
+                    <a:lnB w="6350" cap="flat" cmpd="sng" algn="ctr">
+                      <a:solidFill>
+                        <a:srgbClr val="E3E8E9"/>
+                      </a:solidFill>
+                      <a:prstDash val="solid"/>
+                      <a:round/>
+                      <a:headEnd type="none" w="med" len="med"/>
+                      <a:tailEnd type="none" w="med" len="med"/>
+                    </a:lnB>
+                    <a:solidFill>
+                      <a:srgbClr val="FFFFFF"/>
+                    </a:solidFill>
+                  </a:tcPr>
+                </a:tc>
+              </a:tr>
+              <a:tr h="288036">
+                <a:tc>
+                  <a:txBody>
+                    <a:bodyPr/>
+                    <a:lstStyle/>
+                    <a:p>
+                      <a:pPr indent="0" marL="0">
+                        <a:buNone/>
+                      </a:pPr>
+                      <a:r>
+                        <a:rPr lang="en-US" sz="1000" dirty="0">
+                          <a:solidFill>
+                            <a:srgbClr val="1C2B33"/>
+                          </a:solidFill>
+                          <a:latin typeface="Calibri" pitchFamily="34" charset="0"/>
+                          <a:ea typeface="Calibri" pitchFamily="34" charset="-122"/>
+                          <a:cs typeface="Calibri" pitchFamily="34" charset="-120"/>
+                        </a:rPr>
+                        <a:t>Atualização Tecnológica das GTGs</a:t>
+                      </a:r>
+                      <a:endParaRPr lang="en-US" sz="1000" dirty="0">
+                        <a:latin typeface="Calibri" charset="0"/>
+                        <a:ea typeface="Calibri" charset="0"/>
+                        <a:cs typeface="Calibri" charset="0"/>
+                      </a:endParaRPr>
+                    </a:p>
+                  </a:txBody>
+                  <a:tcPr marL="91440" marR="91440" marT="45720" marB="45720" anchor="ctr">
+                    <a:lnL w="6350" cap="flat" cmpd="sng" algn="ctr">
+                      <a:solidFill>
+                        <a:srgbClr val="E3E8E9"/>
+                      </a:solidFill>
+                      <a:prstDash val="solid"/>
+                      <a:round/>
+                      <a:headEnd type="none" w="med" len="med"/>
+                      <a:tailEnd type="none" w="med" len="med"/>
+                    </a:lnL>
+                    <a:lnR w="6350" cap="flat" cmpd="sng" algn="ctr">
+                      <a:solidFill>
+                        <a:srgbClr val="E3E8E9"/>
+                      </a:solidFill>
+                      <a:prstDash val="solid"/>
+                      <a:round/>
+                      <a:headEnd type="none" w="med" len="med"/>
+                      <a:tailEnd type="none" w="med" len="med"/>
+                    </a:lnR>
+                    <a:lnT w="6350" cap="flat" cmpd="sng" algn="ctr">
+                      <a:solidFill>
+                        <a:srgbClr val="E3E8E9"/>
+                      </a:solidFill>
+                      <a:prstDash val="solid"/>
+                      <a:round/>
+                      <a:headEnd type="none" w="med" len="med"/>
+                      <a:tailEnd type="none" w="med" len="med"/>
+                    </a:lnT>
+                    <a:lnB w="6350" cap="flat" cmpd="sng" algn="ctr">
+                      <a:solidFill>
+                        <a:srgbClr val="E3E8E9"/>
+                      </a:solidFill>
+                      <a:prstDash val="solid"/>
+                      <a:round/>
+                      <a:headEnd type="none" w="med" len="med"/>
+                      <a:tailEnd type="none" w="med" len="med"/>
+                    </a:lnB>
+                    <a:solidFill>
+                      <a:srgbClr val="F0F4F5"/>
+                    </a:solidFill>
+                  </a:tcPr>
+                </a:tc>
+                <a:tc>
+                  <a:txBody>
+                    <a:bodyPr/>
+                    <a:lstStyle/>
+                    <a:p>
+                      <a:pPr indent="0" marL="0">
+                        <a:buNone/>
+                      </a:pPr>
+                      <a:r>
+                        <a:rPr lang="en-US" sz="950" dirty="0">
+                          <a:solidFill>
+                            <a:srgbClr val="5B6B73"/>
+                          </a:solidFill>
+                          <a:latin typeface="Calibri" pitchFamily="34" charset="0"/>
+                          <a:ea typeface="Calibri" pitchFamily="34" charset="-122"/>
+                          <a:cs typeface="Calibri" pitchFamily="34" charset="-120"/>
+                        </a:rPr>
+                        <a:t>Eficiência de Produção</a:t>
+                      </a:r>
+                      <a:endParaRPr lang="en-US" sz="950" dirty="0">
+                        <a:latin typeface="Calibri" charset="0"/>
+                        <a:ea typeface="Calibri" charset="0"/>
+                        <a:cs typeface="Calibri" charset="0"/>
+                      </a:endParaRPr>
+                    </a:p>
+                  </a:txBody>
+                  <a:tcPr marL="91440" marR="91440" marT="45720" marB="45720" anchor="ctr">
+                    <a:lnL w="6350" cap="flat" cmpd="sng" algn="ctr">
+                      <a:solidFill>
+                        <a:srgbClr val="E3E8E9"/>
+                      </a:solidFill>
+                      <a:prstDash val="solid"/>
+                      <a:round/>
+                      <a:headEnd type="none" w="med" len="med"/>
+                      <a:tailEnd type="none" w="med" len="med"/>
+                    </a:lnL>
+                    <a:lnR w="6350" cap="flat" cmpd="sng" algn="ctr">
+                      <a:solidFill>
+                        <a:srgbClr val="E3E8E9"/>
+                      </a:solidFill>
+                      <a:prstDash val="solid"/>
+                      <a:round/>
+                      <a:headEnd type="none" w="med" len="med"/>
+                      <a:tailEnd type="none" w="med" len="med"/>
+                    </a:lnR>
+                    <a:lnT w="6350" cap="flat" cmpd="sng" algn="ctr">
+                      <a:solidFill>
+                        <a:srgbClr val="E3E8E9"/>
+                      </a:solidFill>
+                      <a:prstDash val="solid"/>
+                      <a:round/>
+                      <a:headEnd type="none" w="med" len="med"/>
+                      <a:tailEnd type="none" w="med" len="med"/>
+                    </a:lnT>
+                    <a:lnB w="6350" cap="flat" cmpd="sng" algn="ctr">
+                      <a:solidFill>
+                        <a:srgbClr val="E3E8E9"/>
+                      </a:solidFill>
+                      <a:prstDash val="solid"/>
+                      <a:round/>
+                      <a:headEnd type="none" w="med" len="med"/>
+                      <a:tailEnd type="none" w="med" len="med"/>
+                    </a:lnB>
+                    <a:solidFill>
+                      <a:srgbClr val="F0F4F5"/>
+                    </a:solidFill>
+                  </a:tcPr>
+                </a:tc>
+                <a:tc>
+                  <a:txBody>
+                    <a:bodyPr/>
+                    <a:lstStyle/>
+                    <a:p>
+                      <a:pPr indent="0" marL="0">
+                        <a:buNone/>
+                      </a:pPr>
+                      <a:r>
+                        <a:rPr lang="en-US" sz="950" dirty="0">
+                          <a:solidFill>
+                            <a:srgbClr val="5B6B73"/>
+                          </a:solidFill>
+                          <a:latin typeface="Calibri" pitchFamily="34" charset="0"/>
+                          <a:ea typeface="Calibri" pitchFamily="34" charset="-122"/>
+                          <a:cs typeface="Calibri" pitchFamily="34" charset="-120"/>
+                        </a:rPr>
+                        <a:t>Projetos</a:t>
+                      </a:r>
+                      <a:endParaRPr lang="en-US" sz="950" dirty="0">
+                        <a:latin typeface="Calibri" charset="0"/>
+                        <a:ea typeface="Calibri" charset="0"/>
+                        <a:cs typeface="Calibri" charset="0"/>
+                      </a:endParaRPr>
+                    </a:p>
+                  </a:txBody>
+                  <a:tcPr marL="91440" marR="91440" marT="45720" marB="45720" anchor="ctr">
+                    <a:lnL w="6350" cap="flat" cmpd="sng" algn="ctr">
+                      <a:solidFill>
+                        <a:srgbClr val="E3E8E9"/>
+                      </a:solidFill>
+                      <a:prstDash val="solid"/>
+                      <a:round/>
+                      <a:headEnd type="none" w="med" len="med"/>
+                      <a:tailEnd type="none" w="med" len="med"/>
+                    </a:lnL>
+                    <a:lnR w="6350" cap="flat" cmpd="sng" algn="ctr">
+                      <a:solidFill>
+                        <a:srgbClr val="E3E8E9"/>
+                      </a:solidFill>
+                      <a:prstDash val="solid"/>
+                      <a:round/>
+                      <a:headEnd type="none" w="med" len="med"/>
+                      <a:tailEnd type="none" w="med" len="med"/>
+                    </a:lnR>
+                    <a:lnT w="6350" cap="flat" cmpd="sng" algn="ctr">
+                      <a:solidFill>
+                        <a:srgbClr val="E3E8E9"/>
+                      </a:solidFill>
+                      <a:prstDash val="solid"/>
+                      <a:round/>
+                      <a:headEnd type="none" w="med" len="med"/>
+                      <a:tailEnd type="none" w="med" len="med"/>
+                    </a:lnT>
+                    <a:lnB w="6350" cap="flat" cmpd="sng" algn="ctr">
+                      <a:solidFill>
+                        <a:srgbClr val="E3E8E9"/>
+                      </a:solidFill>
+                      <a:prstDash val="solid"/>
+                      <a:round/>
+                      <a:headEnd type="none" w="med" len="med"/>
+                      <a:tailEnd type="none" w="med" len="med"/>
+                    </a:lnB>
+                    <a:solidFill>
+                      <a:srgbClr val="F0F4F5"/>
+                    </a:solidFill>
+                  </a:tcPr>
+                </a:tc>
+                <a:tc>
+                  <a:txBody>
+                    <a:bodyPr/>
+                    <a:lstStyle/>
+                    <a:p>
+                      <a:pPr algn="r" indent="0" marL="0">
+                        <a:buNone/>
+                      </a:pPr>
+                      <a:r>
+                        <a:rPr lang="en-US" sz="1000" b="1" dirty="0">
+                          <a:solidFill>
+                            <a:srgbClr val="0B2A3D"/>
+                          </a:solidFill>
+                          <a:latin typeface="Calibri" pitchFamily="34" charset="0"/>
+                          <a:ea typeface="Calibri" pitchFamily="34" charset="-122"/>
+                          <a:cs typeface="Calibri" pitchFamily="34" charset="-120"/>
+                        </a:rPr>
+                        <a:t>US$ 3,6 mi</a:t>
+                      </a:r>
+                      <a:endParaRPr lang="en-US" sz="1000" dirty="0">
+                        <a:latin typeface="Calibri" charset="0"/>
+                        <a:ea typeface="Calibri" charset="0"/>
+                        <a:cs typeface="Calibri" charset="0"/>
+                      </a:endParaRPr>
+                    </a:p>
+                  </a:txBody>
+                  <a:tcPr marL="91440" marR="91440" marT="45720" marB="45720" anchor="ctr">
+                    <a:lnL w="6350" cap="flat" cmpd="sng" algn="ctr">
+                      <a:solidFill>
+                        <a:srgbClr val="E3E8E9"/>
+                      </a:solidFill>
+                      <a:prstDash val="solid"/>
+                      <a:round/>
+                      <a:headEnd type="none" w="med" len="med"/>
+                      <a:tailEnd type="none" w="med" len="med"/>
+                    </a:lnL>
+                    <a:lnR w="6350" cap="flat" cmpd="sng" algn="ctr">
+                      <a:solidFill>
+                        <a:srgbClr val="E3E8E9"/>
+                      </a:solidFill>
+                      <a:prstDash val="solid"/>
+                      <a:round/>
+                      <a:headEnd type="none" w="med" len="med"/>
+                      <a:tailEnd type="none" w="med" len="med"/>
+                    </a:lnR>
+                    <a:lnT w="6350" cap="flat" cmpd="sng" algn="ctr">
+                      <a:solidFill>
+                        <a:srgbClr val="E3E8E9"/>
+                      </a:solidFill>
+                      <a:prstDash val="solid"/>
+                      <a:round/>
+                      <a:headEnd type="none" w="med" len="med"/>
+                      <a:tailEnd type="none" w="med" len="med"/>
+                    </a:lnT>
+                    <a:lnB w="6350" cap="flat" cmpd="sng" algn="ctr">
+                      <a:solidFill>
+                        <a:srgbClr val="E3E8E9"/>
+                      </a:solidFill>
+                      <a:prstDash val="solid"/>
+                      <a:round/>
+                      <a:headEnd type="none" w="med" len="med"/>
+                      <a:tailEnd type="none" w="med" len="med"/>
+                    </a:lnB>
+                    <a:solidFill>
+                      <a:srgbClr val="F0F4F5"/>
+                    </a:solidFill>
+                  </a:tcPr>
+                </a:tc>
+              </a:tr>
+              <a:tr h="288036">
+                <a:tc>
+                  <a:txBody>
+                    <a:bodyPr/>
+                    <a:lstStyle/>
+                    <a:p>
+                      <a:pPr indent="0" marL="0">
+                        <a:buNone/>
+                      </a:pPr>
+                      <a:r>
+                        <a:rPr lang="en-US" sz="1000" dirty="0">
+                          <a:solidFill>
+                            <a:srgbClr val="1C2B33"/>
+                          </a:solidFill>
+                          <a:latin typeface="Calibri" pitchFamily="34" charset="0"/>
+                          <a:ea typeface="Calibri" pitchFamily="34" charset="-122"/>
+                          <a:cs typeface="Calibri" pitchFamily="34" charset="-120"/>
+                        </a:rPr>
+                        <a:t>REVAMP IGG</a:t>
+                      </a:r>
+                      <a:endParaRPr lang="en-US" sz="1000" dirty="0">
+                        <a:latin typeface="Calibri" charset="0"/>
+                        <a:ea typeface="Calibri" charset="0"/>
+                        <a:cs typeface="Calibri" charset="0"/>
+                      </a:endParaRPr>
+                    </a:p>
+                  </a:txBody>
+                  <a:tcPr marL="91440" marR="91440" marT="45720" marB="45720" anchor="ctr">
+                    <a:lnL w="6350" cap="flat" cmpd="sng" algn="ctr">
+                      <a:solidFill>
+                        <a:srgbClr val="E3E8E9"/>
+                      </a:solidFill>
+                      <a:prstDash val="solid"/>
+                      <a:round/>
+                      <a:headEnd type="none" w="med" len="med"/>
+                      <a:tailEnd type="none" w="med" len="med"/>
+                    </a:lnL>
+                    <a:lnR w="6350" cap="flat" cmpd="sng" algn="ctr">
+                      <a:solidFill>
+                        <a:srgbClr val="E3E8E9"/>
+                      </a:solidFill>
+                      <a:prstDash val="solid"/>
+                      <a:round/>
+                      <a:headEnd type="none" w="med" len="med"/>
+                      <a:tailEnd type="none" w="med" len="med"/>
+                    </a:lnR>
+                    <a:lnT w="6350" cap="flat" cmpd="sng" algn="ctr">
+                      <a:solidFill>
+                        <a:srgbClr val="E3E8E9"/>
+                      </a:solidFill>
+                      <a:prstDash val="solid"/>
+                      <a:round/>
+                      <a:headEnd type="none" w="med" len="med"/>
+                      <a:tailEnd type="none" w="med" len="med"/>
+                    </a:lnT>
+                    <a:lnB w="6350" cap="flat" cmpd="sng" algn="ctr">
+                      <a:solidFill>
+                        <a:srgbClr val="E3E8E9"/>
+                      </a:solidFill>
+                      <a:prstDash val="solid"/>
+                      <a:round/>
+                      <a:headEnd type="none" w="med" len="med"/>
+                      <a:tailEnd type="none" w="med" len="med"/>
+                    </a:lnB>
+                    <a:solidFill>
+                      <a:srgbClr val="FFFFFF"/>
+                    </a:solidFill>
+                  </a:tcPr>
+                </a:tc>
+                <a:tc>
+                  <a:txBody>
+                    <a:bodyPr/>
+                    <a:lstStyle/>
+                    <a:p>
+                      <a:pPr indent="0" marL="0">
+                        <a:buNone/>
+                      </a:pPr>
+                      <a:r>
+                        <a:rPr lang="en-US" sz="950" dirty="0">
+                          <a:solidFill>
+                            <a:srgbClr val="5B6B73"/>
+                          </a:solidFill>
+                          <a:latin typeface="Calibri" pitchFamily="34" charset="0"/>
+                          <a:ea typeface="Calibri" pitchFamily="34" charset="-122"/>
+                          <a:cs typeface="Calibri" pitchFamily="34" charset="-120"/>
+                        </a:rPr>
+                        <a:t>Rotina Operacional</a:t>
+                      </a:r>
+                      <a:endParaRPr lang="en-US" sz="950" dirty="0">
+                        <a:latin typeface="Calibri" charset="0"/>
+                        <a:ea typeface="Calibri" charset="0"/>
+                        <a:cs typeface="Calibri" charset="0"/>
+                      </a:endParaRPr>
+                    </a:p>
+                  </a:txBody>
+                  <a:tcPr marL="91440" marR="91440" marT="45720" marB="45720" anchor="ctr">
+                    <a:lnL w="6350" cap="flat" cmpd="sng" algn="ctr">
+                      <a:solidFill>
+                        <a:srgbClr val="E3E8E9"/>
+                      </a:solidFill>
+                      <a:prstDash val="solid"/>
+                      <a:round/>
+                      <a:headEnd type="none" w="med" len="med"/>
+                      <a:tailEnd type="none" w="med" len="med"/>
+                    </a:lnL>
+                    <a:lnR w="6350" cap="flat" cmpd="sng" algn="ctr">
+                      <a:solidFill>
+                        <a:srgbClr val="E3E8E9"/>
+                      </a:solidFill>
+                      <a:prstDash val="solid"/>
+                      <a:round/>
+                      <a:headEnd type="none" w="med" len="med"/>
+                      <a:tailEnd type="none" w="med" len="med"/>
+                    </a:lnR>
+                    <a:lnT w="6350" cap="flat" cmpd="sng" algn="ctr">
+                      <a:solidFill>
+                        <a:srgbClr val="E3E8E9"/>
+                      </a:solidFill>
+                      <a:prstDash val="solid"/>
+                      <a:round/>
+                      <a:headEnd type="none" w="med" len="med"/>
+                      <a:tailEnd type="none" w="med" len="med"/>
+                    </a:lnT>
+                    <a:lnB w="6350" cap="flat" cmpd="sng" algn="ctr">
+                      <a:solidFill>
+                        <a:srgbClr val="E3E8E9"/>
+                      </a:solidFill>
+                      <a:prstDash val="solid"/>
+                      <a:round/>
+                      <a:headEnd type="none" w="med" len="med"/>
+                      <a:tailEnd type="none" w="med" len="med"/>
+                    </a:lnB>
+                    <a:solidFill>
+                      <a:srgbClr val="FFFFFF"/>
+                    </a:solidFill>
+                  </a:tcPr>
+                </a:tc>
+                <a:tc>
+                  <a:txBody>
+                    <a:bodyPr/>
+                    <a:lstStyle/>
+                    <a:p>
+                      <a:pPr indent="0" marL="0">
+                        <a:buNone/>
+                      </a:pPr>
+                      <a:r>
+                        <a:rPr lang="en-US" sz="950" dirty="0">
+                          <a:solidFill>
+                            <a:srgbClr val="5B6B73"/>
+                          </a:solidFill>
+                          <a:latin typeface="Calibri" pitchFamily="34" charset="0"/>
+                          <a:ea typeface="Calibri" pitchFamily="34" charset="-122"/>
+                          <a:cs typeface="Calibri" pitchFamily="34" charset="-120"/>
+                        </a:rPr>
+                        <a:t>MNT – Manutenção</a:t>
+                      </a:r>
+                      <a:endParaRPr lang="en-US" sz="950" dirty="0">
+                        <a:latin typeface="Calibri" charset="0"/>
+                        <a:ea typeface="Calibri" charset="0"/>
+                        <a:cs typeface="Calibri" charset="0"/>
+                      </a:endParaRPr>
+                    </a:p>
+                  </a:txBody>
+                  <a:tcPr marL="91440" marR="91440" marT="45720" marB="45720" anchor="ctr">
+                    <a:lnL w="6350" cap="flat" cmpd="sng" algn="ctr">
+                      <a:solidFill>
+                        <a:srgbClr val="E3E8E9"/>
+                      </a:solidFill>
+                      <a:prstDash val="solid"/>
+                      <a:round/>
+                      <a:headEnd type="none" w="med" len="med"/>
+                      <a:tailEnd type="none" w="med" len="med"/>
+                    </a:lnL>
+                    <a:lnR w="6350" cap="flat" cmpd="sng" algn="ctr">
+                      <a:solidFill>
+                        <a:srgbClr val="E3E8E9"/>
+                      </a:solidFill>
+                      <a:prstDash val="solid"/>
+                      <a:round/>
+                      <a:headEnd type="none" w="med" len="med"/>
+                      <a:tailEnd type="none" w="med" len="med"/>
+                    </a:lnR>
+                    <a:lnT w="6350" cap="flat" cmpd="sng" algn="ctr">
+                      <a:solidFill>
+                        <a:srgbClr val="E3E8E9"/>
+                      </a:solidFill>
+                      <a:prstDash val="solid"/>
+                      <a:round/>
+                      <a:headEnd type="none" w="med" len="med"/>
+                      <a:tailEnd type="none" w="med" len="med"/>
+                    </a:lnT>
+                    <a:lnB w="6350" cap="flat" cmpd="sng" algn="ctr">
+                      <a:solidFill>
+                        <a:srgbClr val="E3E8E9"/>
+                      </a:solidFill>
+                      <a:prstDash val="solid"/>
+                      <a:round/>
+                      <a:headEnd type="none" w="med" len="med"/>
+                      <a:tailEnd type="none" w="med" len="med"/>
+                    </a:lnB>
+                    <a:solidFill>
+                      <a:srgbClr val="FFFFFF"/>
+                    </a:solidFill>
+                  </a:tcPr>
+                </a:tc>
+                <a:tc>
+                  <a:txBody>
+                    <a:bodyPr/>
+                    <a:lstStyle/>
+                    <a:p>
+                      <a:pPr algn="r" indent="0" marL="0">
+                        <a:buNone/>
+                      </a:pPr>
+                      <a:r>
+                        <a:rPr lang="en-US" sz="1000" b="1" dirty="0">
+                          <a:solidFill>
+                            <a:srgbClr val="0B2A3D"/>
+                          </a:solidFill>
+                          <a:latin typeface="Calibri" pitchFamily="34" charset="0"/>
+                          <a:ea typeface="Calibri" pitchFamily="34" charset="-122"/>
+                          <a:cs typeface="Calibri" pitchFamily="34" charset="-120"/>
+                        </a:rPr>
+                        <a:t>US$ 3,6 mi</a:t>
+                      </a:r>
+                      <a:endParaRPr lang="en-US" sz="1000" dirty="0">
+                        <a:latin typeface="Calibri" charset="0"/>
+                        <a:ea typeface="Calibri" charset="0"/>
+                        <a:cs typeface="Calibri" charset="0"/>
+                      </a:endParaRPr>
+                    </a:p>
+                  </a:txBody>
+                  <a:tcPr marL="91440" marR="91440" marT="45720" marB="45720" anchor="ctr">
+                    <a:lnL w="6350" cap="flat" cmpd="sng" algn="ctr">
+                      <a:solidFill>
+                        <a:srgbClr val="E3E8E9"/>
+                      </a:solidFill>
+                      <a:prstDash val="solid"/>
+                      <a:round/>
+                      <a:headEnd type="none" w="med" len="med"/>
+                      <a:tailEnd type="none" w="med" len="med"/>
+                    </a:lnL>
+                    <a:lnR w="6350" cap="flat" cmpd="sng" algn="ctr">
+                      <a:solidFill>
+                        <a:srgbClr val="E3E8E9"/>
+                      </a:solidFill>
+                      <a:prstDash val="solid"/>
+                      <a:round/>
+                      <a:headEnd type="none" w="med" len="med"/>
+                      <a:tailEnd type="none" w="med" len="med"/>
+                    </a:lnR>
+                    <a:lnT w="6350" cap="flat" cmpd="sng" algn="ctr">
+                      <a:solidFill>
+                        <a:srgbClr val="E3E8E9"/>
+                      </a:solidFill>
+                      <a:prstDash val="solid"/>
+                      <a:round/>
+                      <a:headEnd type="none" w="med" len="med"/>
+                      <a:tailEnd type="none" w="med" len="med"/>
+                    </a:lnT>
+                    <a:lnB w="6350" cap="flat" cmpd="sng" algn="ctr">
+                      <a:solidFill>
+                        <a:srgbClr val="E3E8E9"/>
+                      </a:solidFill>
+                      <a:prstDash val="solid"/>
+                      <a:round/>
+                      <a:headEnd type="none" w="med" len="med"/>
+                      <a:tailEnd type="none" w="med" len="med"/>
+                    </a:lnB>
+                    <a:solidFill>
+                      <a:srgbClr val="FFFFFF"/>
+                    </a:solidFill>
+                  </a:tcPr>
+                </a:tc>
+              </a:tr>
+              <a:tr h="288036">
+                <a:tc>
+                  <a:txBody>
+                    <a:bodyPr/>
+                    <a:lstStyle/>
+                    <a:p>
+                      <a:pPr indent="0" marL="0">
+                        <a:buNone/>
+                      </a:pPr>
+                      <a:r>
+                        <a:rPr lang="en-US" sz="1000" dirty="0">
+                          <a:solidFill>
+                            <a:srgbClr val="1C2B33"/>
+                          </a:solidFill>
+                          <a:latin typeface="Calibri" pitchFamily="34" charset="0"/>
+                          <a:ea typeface="Calibri" pitchFamily="34" charset="-122"/>
+                          <a:cs typeface="Calibri" pitchFamily="34" charset="-120"/>
+                        </a:rPr>
+                        <a:t>Reforma do Casario - Acomodação</a:t>
+                      </a:r>
+                      <a:endParaRPr lang="en-US" sz="1000" dirty="0">
+                        <a:latin typeface="Calibri" charset="0"/>
+                        <a:ea typeface="Calibri" charset="0"/>
+                        <a:cs typeface="Calibri" charset="0"/>
+                      </a:endParaRPr>
+                    </a:p>
+                  </a:txBody>
+                  <a:tcPr marL="91440" marR="91440" marT="45720" marB="45720" anchor="ctr">
+                    <a:lnL w="6350" cap="flat" cmpd="sng" algn="ctr">
+                      <a:solidFill>
+                        <a:srgbClr val="E3E8E9"/>
+                      </a:solidFill>
+                      <a:prstDash val="solid"/>
+                      <a:round/>
+                      <a:headEnd type="none" w="med" len="med"/>
+                      <a:tailEnd type="none" w="med" len="med"/>
+                    </a:lnL>
+                    <a:lnR w="6350" cap="flat" cmpd="sng" algn="ctr">
+                      <a:solidFill>
+                        <a:srgbClr val="E3E8E9"/>
+                      </a:solidFill>
+                      <a:prstDash val="solid"/>
+                      <a:round/>
+                      <a:headEnd type="none" w="med" len="med"/>
+                      <a:tailEnd type="none" w="med" len="med"/>
+                    </a:lnR>
+                    <a:lnT w="6350" cap="flat" cmpd="sng" algn="ctr">
+                      <a:solidFill>
+                        <a:srgbClr val="E3E8E9"/>
+                      </a:solidFill>
+                      <a:prstDash val="solid"/>
+                      <a:round/>
+                      <a:headEnd type="none" w="med" len="med"/>
+                      <a:tailEnd type="none" w="med" len="med"/>
+                    </a:lnT>
+                    <a:lnB w="6350" cap="flat" cmpd="sng" algn="ctr">
+                      <a:solidFill>
+                        <a:srgbClr val="E3E8E9"/>
+                      </a:solidFill>
+                      <a:prstDash val="solid"/>
+                      <a:round/>
+                      <a:headEnd type="none" w="med" len="med"/>
+                      <a:tailEnd type="none" w="med" len="med"/>
+                    </a:lnB>
+                    <a:solidFill>
+                      <a:srgbClr val="F0F4F5"/>
+                    </a:solidFill>
+                  </a:tcPr>
+                </a:tc>
+                <a:tc>
+                  <a:txBody>
+                    <a:bodyPr/>
+                    <a:lstStyle/>
+                    <a:p>
+                      <a:pPr indent="0" marL="0">
+                        <a:buNone/>
+                      </a:pPr>
+                      <a:r>
+                        <a:rPr lang="en-US" sz="950" dirty="0">
+                          <a:solidFill>
+                            <a:srgbClr val="5B6B73"/>
+                          </a:solidFill>
+                          <a:latin typeface="Calibri" pitchFamily="34" charset="0"/>
+                          <a:ea typeface="Calibri" pitchFamily="34" charset="-122"/>
+                          <a:cs typeface="Calibri" pitchFamily="34" charset="-120"/>
+                        </a:rPr>
+                        <a:t>Bem Estar/Segurança</a:t>
+                      </a:r>
+                      <a:endParaRPr lang="en-US" sz="950" dirty="0">
+                        <a:latin typeface="Calibri" charset="0"/>
+                        <a:ea typeface="Calibri" charset="0"/>
+                        <a:cs typeface="Calibri" charset="0"/>
+                      </a:endParaRPr>
+                    </a:p>
+                  </a:txBody>
+                  <a:tcPr marL="91440" marR="91440" marT="45720" marB="45720" anchor="ctr">
+                    <a:lnL w="6350" cap="flat" cmpd="sng" algn="ctr">
+                      <a:solidFill>
+                        <a:srgbClr val="E3E8E9"/>
+                      </a:solidFill>
+                      <a:prstDash val="solid"/>
+                      <a:round/>
+                      <a:headEnd type="none" w="med" len="med"/>
+                      <a:tailEnd type="none" w="med" len="med"/>
+                    </a:lnL>
+                    <a:lnR w="6350" cap="flat" cmpd="sng" algn="ctr">
+                      <a:solidFill>
+                        <a:srgbClr val="E3E8E9"/>
+                      </a:solidFill>
+                      <a:prstDash val="solid"/>
+                      <a:round/>
+                      <a:headEnd type="none" w="med" len="med"/>
+                      <a:tailEnd type="none" w="med" len="med"/>
+                    </a:lnR>
+                    <a:lnT w="6350" cap="flat" cmpd="sng" algn="ctr">
+                      <a:solidFill>
+                        <a:srgbClr val="E3E8E9"/>
+                      </a:solidFill>
+                      <a:prstDash val="solid"/>
+                      <a:round/>
+                      <a:headEnd type="none" w="med" len="med"/>
+                      <a:tailEnd type="none" w="med" len="med"/>
+                    </a:lnT>
+                    <a:lnB w="6350" cap="flat" cmpd="sng" algn="ctr">
+                      <a:solidFill>
+                        <a:srgbClr val="E3E8E9"/>
+                      </a:solidFill>
+                      <a:prstDash val="solid"/>
+                      <a:round/>
+                      <a:headEnd type="none" w="med" len="med"/>
+                      <a:tailEnd type="none" w="med" len="med"/>
+                    </a:lnB>
+                    <a:solidFill>
+                      <a:srgbClr val="F0F4F5"/>
+                    </a:solidFill>
+                  </a:tcPr>
+                </a:tc>
+                <a:tc>
+                  <a:txBody>
+                    <a:bodyPr/>
+                    <a:lstStyle/>
+                    <a:p>
+                      <a:pPr indent="0" marL="0">
+                        <a:buNone/>
+                      </a:pPr>
+                      <a:r>
+                        <a:rPr lang="en-US" sz="950" dirty="0">
+                          <a:solidFill>
+                            <a:srgbClr val="5B6B73"/>
+                          </a:solidFill>
+                          <a:latin typeface="Calibri" pitchFamily="34" charset="0"/>
+                          <a:ea typeface="Calibri" pitchFamily="34" charset="-122"/>
+                          <a:cs typeface="Calibri" pitchFamily="34" charset="-120"/>
+                        </a:rPr>
+                        <a:t>ADM - Administrativo</a:t>
+                      </a:r>
+                      <a:endParaRPr lang="en-US" sz="950" dirty="0">
+                        <a:latin typeface="Calibri" charset="0"/>
+                        <a:ea typeface="Calibri" charset="0"/>
+                        <a:cs typeface="Calibri" charset="0"/>
+                      </a:endParaRPr>
+                    </a:p>
+                  </a:txBody>
+                  <a:tcPr marL="91440" marR="91440" marT="45720" marB="45720" anchor="ctr">
+                    <a:lnL w="6350" cap="flat" cmpd="sng" algn="ctr">
+                      <a:solidFill>
+                        <a:srgbClr val="E3E8E9"/>
+                      </a:solidFill>
+                      <a:prstDash val="solid"/>
+                      <a:round/>
+                      <a:headEnd type="none" w="med" len="med"/>
+                      <a:tailEnd type="none" w="med" len="med"/>
+                    </a:lnL>
+                    <a:lnR w="6350" cap="flat" cmpd="sng" algn="ctr">
+                      <a:solidFill>
+                        <a:srgbClr val="E3E8E9"/>
+                      </a:solidFill>
+                      <a:prstDash val="solid"/>
+                      <a:round/>
+                      <a:headEnd type="none" w="med" len="med"/>
+                      <a:tailEnd type="none" w="med" len="med"/>
+                    </a:lnR>
+                    <a:lnT w="6350" cap="flat" cmpd="sng" algn="ctr">
+                      <a:solidFill>
+                        <a:srgbClr val="E3E8E9"/>
+                      </a:solidFill>
+                      <a:prstDash val="solid"/>
+                      <a:round/>
+                      <a:headEnd type="none" w="med" len="med"/>
+                      <a:tailEnd type="none" w="med" len="med"/>
+                    </a:lnT>
+                    <a:lnB w="6350" cap="flat" cmpd="sng" algn="ctr">
+                      <a:solidFill>
+                        <a:srgbClr val="E3E8E9"/>
+                      </a:solidFill>
+                      <a:prstDash val="solid"/>
+                      <a:round/>
+                      <a:headEnd type="none" w="med" len="med"/>
+                      <a:tailEnd type="none" w="med" len="med"/>
+                    </a:lnB>
+                    <a:solidFill>
+                      <a:srgbClr val="F0F4F5"/>
+                    </a:solidFill>
+                  </a:tcPr>
+                </a:tc>
+                <a:tc>
+                  <a:txBody>
+                    <a:bodyPr/>
+                    <a:lstStyle/>
+                    <a:p>
+                      <a:pPr algn="r" indent="0" marL="0">
+                        <a:buNone/>
+                      </a:pPr>
+                      <a:r>
+                        <a:rPr lang="en-US" sz="1000" b="1" dirty="0">
+                          <a:solidFill>
+                            <a:srgbClr val="0B2A3D"/>
+                          </a:solidFill>
+                          <a:latin typeface="Calibri" pitchFamily="34" charset="0"/>
+                          <a:ea typeface="Calibri" pitchFamily="34" charset="-122"/>
+                          <a:cs typeface="Calibri" pitchFamily="34" charset="-120"/>
+                        </a:rPr>
+                        <a:t>US$ 2,9 mi</a:t>
+                      </a:r>
+                      <a:endParaRPr lang="en-US" sz="1000" dirty="0">
+                        <a:latin typeface="Calibri" charset="0"/>
+                        <a:ea typeface="Calibri" charset="0"/>
+                        <a:cs typeface="Calibri" charset="0"/>
+                      </a:endParaRPr>
+                    </a:p>
+                  </a:txBody>
+                  <a:tcPr marL="91440" marR="91440" marT="45720" marB="45720" anchor="ctr">
+                    <a:lnL w="6350" cap="flat" cmpd="sng" algn="ctr">
+                      <a:solidFill>
+                        <a:srgbClr val="E3E8E9"/>
+                      </a:solidFill>
+                      <a:prstDash val="solid"/>
+                      <a:round/>
+                      <a:headEnd type="none" w="med" len="med"/>
+                      <a:tailEnd type="none" w="med" len="med"/>
+                    </a:lnL>
+                    <a:lnR w="6350" cap="flat" cmpd="sng" algn="ctr">
+                      <a:solidFill>
+                        <a:srgbClr val="E3E8E9"/>
+                      </a:solidFill>
+                      <a:prstDash val="solid"/>
+                      <a:round/>
+                      <a:headEnd type="none" w="med" len="med"/>
+                      <a:tailEnd type="none" w="med" len="med"/>
+                    </a:lnR>
+                    <a:lnT w="6350" cap="flat" cmpd="sng" algn="ctr">
+                      <a:solidFill>
+                        <a:srgbClr val="E3E8E9"/>
+                      </a:solidFill>
+                      <a:prstDash val="solid"/>
+                      <a:round/>
+                      <a:headEnd type="none" w="med" len="med"/>
+                      <a:tailEnd type="none" w="med" len="med"/>
+                    </a:lnT>
+                    <a:lnB w="6350" cap="flat" cmpd="sng" algn="ctr">
+                      <a:solidFill>
+                        <a:srgbClr val="E3E8E9"/>
+                      </a:solidFill>
+                      <a:prstDash val="solid"/>
+                      <a:round/>
+                      <a:headEnd type="none" w="med" len="med"/>
+                      <a:tailEnd type="none" w="med" len="med"/>
+                    </a:lnB>
+                    <a:solidFill>
+                      <a:srgbClr val="F0F4F5"/>
+                    </a:solidFill>
+                  </a:tcPr>
+                </a:tc>
+              </a:tr>
+              <a:tr h="288036">
+                <a:tc>
+                  <a:txBody>
+                    <a:bodyPr/>
+                    <a:lstStyle/>
+                    <a:p>
+                      <a:pPr indent="0" marL="0">
+                        <a:buNone/>
+                      </a:pPr>
+                      <a:r>
+                        <a:rPr lang="en-US" sz="1000" dirty="0">
+                          <a:solidFill>
+                            <a:srgbClr val="1C2B33"/>
+                          </a:solidFill>
+                          <a:latin typeface="Calibri" pitchFamily="34" charset="0"/>
+                          <a:ea typeface="Calibri" pitchFamily="34" charset="-122"/>
+                          <a:cs typeface="Calibri" pitchFamily="34" charset="-120"/>
+                        </a:rPr>
+                        <a:t>SUBSTITUIÇÃO DA AMARRA 06</a:t>
+                      </a:r>
+                      <a:endParaRPr lang="en-US" sz="1000" dirty="0">
+                        <a:latin typeface="Calibri" charset="0"/>
+                        <a:ea typeface="Calibri" charset="0"/>
+                        <a:cs typeface="Calibri" charset="0"/>
+                      </a:endParaRPr>
+                    </a:p>
+                  </a:txBody>
+                  <a:tcPr marL="91440" marR="91440" marT="45720" marB="45720" anchor="ctr">
+                    <a:lnL w="6350" cap="flat" cmpd="sng" algn="ctr">
+                      <a:solidFill>
+                        <a:srgbClr val="E3E8E9"/>
+                      </a:solidFill>
+                      <a:prstDash val="solid"/>
+                      <a:round/>
+                      <a:headEnd type="none" w="med" len="med"/>
+                      <a:tailEnd type="none" w="med" len="med"/>
+                    </a:lnL>
+                    <a:lnR w="6350" cap="flat" cmpd="sng" algn="ctr">
+                      <a:solidFill>
+                        <a:srgbClr val="E3E8E9"/>
+                      </a:solidFill>
+                      <a:prstDash val="solid"/>
+                      <a:round/>
+                      <a:headEnd type="none" w="med" len="med"/>
+                      <a:tailEnd type="none" w="med" len="med"/>
+                    </a:lnR>
+                    <a:lnT w="6350" cap="flat" cmpd="sng" algn="ctr">
+                      <a:solidFill>
+                        <a:srgbClr val="E3E8E9"/>
+                      </a:solidFill>
+                      <a:prstDash val="solid"/>
+                      <a:round/>
+                      <a:headEnd type="none" w="med" len="med"/>
+                      <a:tailEnd type="none" w="med" len="med"/>
+                    </a:lnT>
+                    <a:lnB w="6350" cap="flat" cmpd="sng" algn="ctr">
+                      <a:solidFill>
+                        <a:srgbClr val="E3E8E9"/>
+                      </a:solidFill>
+                      <a:prstDash val="solid"/>
+                      <a:round/>
+                      <a:headEnd type="none" w="med" len="med"/>
+                      <a:tailEnd type="none" w="med" len="med"/>
+                    </a:lnB>
+                    <a:solidFill>
+                      <a:srgbClr val="FFFFFF"/>
+                    </a:solidFill>
+                  </a:tcPr>
+                </a:tc>
+                <a:tc>
+                  <a:txBody>
+                    <a:bodyPr/>
+                    <a:lstStyle/>
+                    <a:p>
+                      <a:pPr indent="0" marL="0">
+                        <a:buNone/>
+                      </a:pPr>
+                      <a:r>
+                        <a:rPr lang="en-US" sz="950" dirty="0">
+                          <a:solidFill>
+                            <a:srgbClr val="5B6B73"/>
+                          </a:solidFill>
+                          <a:latin typeface="Calibri" pitchFamily="34" charset="0"/>
+                          <a:ea typeface="Calibri" pitchFamily="34" charset="-122"/>
+                          <a:cs typeface="Calibri" pitchFamily="34" charset="-120"/>
+                        </a:rPr>
+                        <a:t>Integridade e Regulatório</a:t>
+                      </a:r>
+                      <a:endParaRPr lang="en-US" sz="950" dirty="0">
+                        <a:latin typeface="Calibri" charset="0"/>
+                        <a:ea typeface="Calibri" charset="0"/>
+                        <a:cs typeface="Calibri" charset="0"/>
+                      </a:endParaRPr>
+                    </a:p>
+                  </a:txBody>
+                  <a:tcPr marL="91440" marR="91440" marT="45720" marB="45720" anchor="ctr">
+                    <a:lnL w="6350" cap="flat" cmpd="sng" algn="ctr">
+                      <a:solidFill>
+                        <a:srgbClr val="E3E8E9"/>
+                      </a:solidFill>
+                      <a:prstDash val="solid"/>
+                      <a:round/>
+                      <a:headEnd type="none" w="med" len="med"/>
+                      <a:tailEnd type="none" w="med" len="med"/>
+                    </a:lnL>
+                    <a:lnR w="6350" cap="flat" cmpd="sng" algn="ctr">
+                      <a:solidFill>
+                        <a:srgbClr val="E3E8E9"/>
+                      </a:solidFill>
+                      <a:prstDash val="solid"/>
+                      <a:round/>
+                      <a:headEnd type="none" w="med" len="med"/>
+                      <a:tailEnd type="none" w="med" len="med"/>
+                    </a:lnR>
+                    <a:lnT w="6350" cap="flat" cmpd="sng" algn="ctr">
+                      <a:solidFill>
+                        <a:srgbClr val="E3E8E9"/>
+                      </a:solidFill>
+                      <a:prstDash val="solid"/>
+                      <a:round/>
+                      <a:headEnd type="none" w="med" len="med"/>
+                      <a:tailEnd type="none" w="med" len="med"/>
+                    </a:lnT>
+                    <a:lnB w="6350" cap="flat" cmpd="sng" algn="ctr">
+                      <a:solidFill>
+                        <a:srgbClr val="E3E8E9"/>
+                      </a:solidFill>
+                      <a:prstDash val="solid"/>
+                      <a:round/>
+                      <a:headEnd type="none" w="med" len="med"/>
+                      <a:tailEnd type="none" w="med" len="med"/>
+                    </a:lnB>
+                    <a:solidFill>
+                      <a:srgbClr val="FFFFFF"/>
+                    </a:solidFill>
+                  </a:tcPr>
+                </a:tc>
+                <a:tc>
+                  <a:txBody>
+                    <a:bodyPr/>
+                    <a:lstStyle/>
+                    <a:p>
+                      <a:pPr indent="0" marL="0">
+                        <a:buNone/>
+                      </a:pPr>
+                      <a:r>
+                        <a:rPr lang="en-US" sz="950" dirty="0">
+                          <a:solidFill>
+                            <a:srgbClr val="5B6B73"/>
+                          </a:solidFill>
+                          <a:latin typeface="Calibri" pitchFamily="34" charset="0"/>
+                          <a:ea typeface="Calibri" pitchFamily="34" charset="-122"/>
+                          <a:cs typeface="Calibri" pitchFamily="34" charset="-120"/>
+                        </a:rPr>
+                        <a:t>NAV - Naval</a:t>
+                      </a:r>
+                      <a:endParaRPr lang="en-US" sz="950" dirty="0">
+                        <a:latin typeface="Calibri" charset="0"/>
+                        <a:ea typeface="Calibri" charset="0"/>
+                        <a:cs typeface="Calibri" charset="0"/>
+                      </a:endParaRPr>
+                    </a:p>
+                  </a:txBody>
+                  <a:tcPr marL="91440" marR="91440" marT="45720" marB="45720" anchor="ctr">
+                    <a:lnL w="6350" cap="flat" cmpd="sng" algn="ctr">
+                      <a:solidFill>
+                        <a:srgbClr val="E3E8E9"/>
+                      </a:solidFill>
+                      <a:prstDash val="solid"/>
+                      <a:round/>
+                      <a:headEnd type="none" w="med" len="med"/>
+                      <a:tailEnd type="none" w="med" len="med"/>
+                    </a:lnL>
+                    <a:lnR w="6350" cap="flat" cmpd="sng" algn="ctr">
+                      <a:solidFill>
+                        <a:srgbClr val="E3E8E9"/>
+                      </a:solidFill>
+                      <a:prstDash val="solid"/>
+                      <a:round/>
+                      <a:headEnd type="none" w="med" len="med"/>
+                      <a:tailEnd type="none" w="med" len="med"/>
+                    </a:lnR>
+                    <a:lnT w="6350" cap="flat" cmpd="sng" algn="ctr">
+                      <a:solidFill>
+                        <a:srgbClr val="E3E8E9"/>
+                      </a:solidFill>
+                      <a:prstDash val="solid"/>
+                      <a:round/>
+                      <a:headEnd type="none" w="med" len="med"/>
+                      <a:tailEnd type="none" w="med" len="med"/>
+                    </a:lnT>
+                    <a:lnB w="6350" cap="flat" cmpd="sng" algn="ctr">
+                      <a:solidFill>
+                        <a:srgbClr val="E3E8E9"/>
+                      </a:solidFill>
+                      <a:prstDash val="solid"/>
+                      <a:round/>
+                      <a:headEnd type="none" w="med" len="med"/>
+                      <a:tailEnd type="none" w="med" len="med"/>
+                    </a:lnB>
+                    <a:solidFill>
+                      <a:srgbClr val="FFFFFF"/>
+                    </a:solidFill>
+                  </a:tcPr>
+                </a:tc>
+                <a:tc>
+                  <a:txBody>
+                    <a:bodyPr/>
+                    <a:lstStyle/>
+                    <a:p>
+                      <a:pPr algn="r" indent="0" marL="0">
+                        <a:buNone/>
+                      </a:pPr>
+                      <a:r>
+                        <a:rPr lang="en-US" sz="1000" b="1" dirty="0">
+                          <a:solidFill>
+                            <a:srgbClr val="0B2A3D"/>
+                          </a:solidFill>
+                          <a:latin typeface="Calibri" pitchFamily="34" charset="0"/>
+                          <a:ea typeface="Calibri" pitchFamily="34" charset="-122"/>
+                          <a:cs typeface="Calibri" pitchFamily="34" charset="-120"/>
+                        </a:rPr>
+                        <a:t>US$ 2,8 mi</a:t>
+                      </a:r>
+                      <a:endParaRPr lang="en-US" sz="1000" dirty="0">
+                        <a:latin typeface="Calibri" charset="0"/>
+                        <a:ea typeface="Calibri" charset="0"/>
+                        <a:cs typeface="Calibri" charset="0"/>
+                      </a:endParaRPr>
+                    </a:p>
+                  </a:txBody>
+                  <a:tcPr marL="91440" marR="91440" marT="45720" marB="45720" anchor="ctr">
+                    <a:lnL w="6350" cap="flat" cmpd="sng" algn="ctr">
+                      <a:solidFill>
+                        <a:srgbClr val="E3E8E9"/>
+                      </a:solidFill>
+                      <a:prstDash val="solid"/>
+                      <a:round/>
+                      <a:headEnd type="none" w="med" len="med"/>
+                      <a:tailEnd type="none" w="med" len="med"/>
+                    </a:lnL>
+                    <a:lnR w="6350" cap="flat" cmpd="sng" algn="ctr">
+                      <a:solidFill>
+                        <a:srgbClr val="E3E8E9"/>
+                      </a:solidFill>
+                      <a:prstDash val="solid"/>
+                      <a:round/>
+                      <a:headEnd type="none" w="med" len="med"/>
+                      <a:tailEnd type="none" w="med" len="med"/>
+                    </a:lnR>
+                    <a:lnT w="6350" cap="flat" cmpd="sng" algn="ctr">
+                      <a:solidFill>
+                        <a:srgbClr val="E3E8E9"/>
+                      </a:solidFill>
+                      <a:prstDash val="solid"/>
+                      <a:round/>
+                      <a:headEnd type="none" w="med" len="med"/>
+                      <a:tailEnd type="none" w="med" len="med"/>
+                    </a:lnT>
+                    <a:lnB w="6350" cap="flat" cmpd="sng" algn="ctr">
+                      <a:solidFill>
+                        <a:srgbClr val="E3E8E9"/>
+                      </a:solidFill>
+                      <a:prstDash val="solid"/>
+                      <a:round/>
+                      <a:headEnd type="none" w="med" len="med"/>
+                      <a:tailEnd type="none" w="med" len="med"/>
+                    </a:lnB>
+                    <a:solidFill>
+                      <a:srgbClr val="FFFFFF"/>
+                    </a:solidFill>
+                  </a:tcPr>
+                </a:tc>
+              </a:tr>
+              <a:tr h="288036">
+                <a:tc>
+                  <a:txBody>
+                    <a:bodyPr/>
+                    <a:lstStyle/>
+                    <a:p>
+                      <a:pPr indent="0" marL="0">
+                        <a:buNone/>
+                      </a:pPr>
+                      <a:r>
+                        <a:rPr lang="en-US" sz="1000" dirty="0">
+                          <a:solidFill>
+                            <a:srgbClr val="1C2B33"/>
+                          </a:solidFill>
+                          <a:latin typeface="Calibri" pitchFamily="34" charset="0"/>
+                          <a:ea typeface="Calibri" pitchFamily="34" charset="-122"/>
+                          <a:cs typeface="Calibri" pitchFamily="34" charset="-120"/>
+                        </a:rPr>
+                        <a:t>Instalação linha offloading </a:t>
+                      </a:r>
+                      <a:endParaRPr lang="en-US" sz="1000" dirty="0">
+                        <a:latin typeface="Calibri" charset="0"/>
+                        <a:ea typeface="Calibri" charset="0"/>
+                        <a:cs typeface="Calibri" charset="0"/>
+                      </a:endParaRPr>
+                    </a:p>
+                  </a:txBody>
+                  <a:tcPr marL="91440" marR="91440" marT="45720" marB="45720" anchor="ctr">
+                    <a:lnL w="6350" cap="flat" cmpd="sng" algn="ctr">
+                      <a:solidFill>
+                        <a:srgbClr val="E3E8E9"/>
+                      </a:solidFill>
+                      <a:prstDash val="solid"/>
+                      <a:round/>
+                      <a:headEnd type="none" w="med" len="med"/>
+                      <a:tailEnd type="none" w="med" len="med"/>
+                    </a:lnL>
+                    <a:lnR w="6350" cap="flat" cmpd="sng" algn="ctr">
+                      <a:solidFill>
+                        <a:srgbClr val="E3E8E9"/>
+                      </a:solidFill>
+                      <a:prstDash val="solid"/>
+                      <a:round/>
+                      <a:headEnd type="none" w="med" len="med"/>
+                      <a:tailEnd type="none" w="med" len="med"/>
+                    </a:lnR>
+                    <a:lnT w="6350" cap="flat" cmpd="sng" algn="ctr">
+                      <a:solidFill>
+                        <a:srgbClr val="E3E8E9"/>
+                      </a:solidFill>
+                      <a:prstDash val="solid"/>
+                      <a:round/>
+                      <a:headEnd type="none" w="med" len="med"/>
+                      <a:tailEnd type="none" w="med" len="med"/>
+                    </a:lnT>
+                    <a:lnB w="6350" cap="flat" cmpd="sng" algn="ctr">
+                      <a:solidFill>
+                        <a:srgbClr val="E3E8E9"/>
+                      </a:solidFill>
+                      <a:prstDash val="solid"/>
+                      <a:round/>
+                      <a:headEnd type="none" w="med" len="med"/>
+                      <a:tailEnd type="none" w="med" len="med"/>
+                    </a:lnB>
+                    <a:solidFill>
+                      <a:srgbClr val="F0F4F5"/>
+                    </a:solidFill>
+                  </a:tcPr>
+                </a:tc>
+                <a:tc>
+                  <a:txBody>
+                    <a:bodyPr/>
+                    <a:lstStyle/>
+                    <a:p>
+                      <a:pPr indent="0" marL="0">
+                        <a:buNone/>
+                      </a:pPr>
+                      <a:r>
+                        <a:rPr lang="en-US" sz="950" dirty="0">
+                          <a:solidFill>
+                            <a:srgbClr val="5B6B73"/>
+                          </a:solidFill>
+                          <a:latin typeface="Calibri" pitchFamily="34" charset="0"/>
+                          <a:ea typeface="Calibri" pitchFamily="34" charset="-122"/>
+                          <a:cs typeface="Calibri" pitchFamily="34" charset="-120"/>
+                        </a:rPr>
+                        <a:t>Integridade e Regulatório</a:t>
+                      </a:r>
+                      <a:endParaRPr lang="en-US" sz="950" dirty="0">
+                        <a:latin typeface="Calibri" charset="0"/>
+                        <a:ea typeface="Calibri" charset="0"/>
+                        <a:cs typeface="Calibri" charset="0"/>
+                      </a:endParaRPr>
+                    </a:p>
+                  </a:txBody>
+                  <a:tcPr marL="91440" marR="91440" marT="45720" marB="45720" anchor="ctr">
+                    <a:lnL w="6350" cap="flat" cmpd="sng" algn="ctr">
+                      <a:solidFill>
+                        <a:srgbClr val="E3E8E9"/>
+                      </a:solidFill>
+                      <a:prstDash val="solid"/>
+                      <a:round/>
+                      <a:headEnd type="none" w="med" len="med"/>
+                      <a:tailEnd type="none" w="med" len="med"/>
+                    </a:lnL>
+                    <a:lnR w="6350" cap="flat" cmpd="sng" algn="ctr">
+                      <a:solidFill>
+                        <a:srgbClr val="E3E8E9"/>
+                      </a:solidFill>
+                      <a:prstDash val="solid"/>
+                      <a:round/>
+                      <a:headEnd type="none" w="med" len="med"/>
+                      <a:tailEnd type="none" w="med" len="med"/>
+                    </a:lnR>
+                    <a:lnT w="6350" cap="flat" cmpd="sng" algn="ctr">
+                      <a:solidFill>
+                        <a:srgbClr val="E3E8E9"/>
+                      </a:solidFill>
+                      <a:prstDash val="solid"/>
+                      <a:round/>
+                      <a:headEnd type="none" w="med" len="med"/>
+                      <a:tailEnd type="none" w="med" len="med"/>
+                    </a:lnT>
+                    <a:lnB w="6350" cap="flat" cmpd="sng" algn="ctr">
+                      <a:solidFill>
+                        <a:srgbClr val="E3E8E9"/>
+                      </a:solidFill>
+                      <a:prstDash val="solid"/>
+                      <a:round/>
+                      <a:headEnd type="none" w="med" len="med"/>
+                      <a:tailEnd type="none" w="med" len="med"/>
+                    </a:lnB>
+                    <a:solidFill>
+                      <a:srgbClr val="F0F4F5"/>
+                    </a:solidFill>
+                  </a:tcPr>
+                </a:tc>
+                <a:tc>
+                  <a:txBody>
+                    <a:bodyPr/>
+                    <a:lstStyle/>
+                    <a:p>
+                      <a:pPr indent="0" marL="0">
+                        <a:buNone/>
+                      </a:pPr>
+                      <a:r>
+                        <a:rPr lang="en-US" sz="950" dirty="0">
+                          <a:solidFill>
+                            <a:srgbClr val="5B6B73"/>
+                          </a:solidFill>
+                          <a:latin typeface="Calibri" pitchFamily="34" charset="0"/>
+                          <a:ea typeface="Calibri" pitchFamily="34" charset="-122"/>
+                          <a:cs typeface="Calibri" pitchFamily="34" charset="-120"/>
+                        </a:rPr>
+                        <a:t>INT - Integridade</a:t>
+                      </a:r>
+                      <a:endParaRPr lang="en-US" sz="950" dirty="0">
+                        <a:latin typeface="Calibri" charset="0"/>
+                        <a:ea typeface="Calibri" charset="0"/>
+                        <a:cs typeface="Calibri" charset="0"/>
+                      </a:endParaRPr>
+                    </a:p>
+                  </a:txBody>
+                  <a:tcPr marL="91440" marR="91440" marT="45720" marB="45720" anchor="ctr">
+                    <a:lnL w="6350" cap="flat" cmpd="sng" algn="ctr">
+                      <a:solidFill>
+                        <a:srgbClr val="E3E8E9"/>
+                      </a:solidFill>
+                      <a:prstDash val="solid"/>
+                      <a:round/>
+                      <a:headEnd type="none" w="med" len="med"/>
+                      <a:tailEnd type="none" w="med" len="med"/>
+                    </a:lnL>
+                    <a:lnR w="6350" cap="flat" cmpd="sng" algn="ctr">
+                      <a:solidFill>
+                        <a:srgbClr val="E3E8E9"/>
+                      </a:solidFill>
+                      <a:prstDash val="solid"/>
+                      <a:round/>
+                      <a:headEnd type="none" w="med" len="med"/>
+                      <a:tailEnd type="none" w="med" len="med"/>
+                    </a:lnR>
+                    <a:lnT w="6350" cap="flat" cmpd="sng" algn="ctr">
+                      <a:solidFill>
+                        <a:srgbClr val="E3E8E9"/>
+                      </a:solidFill>
+                      <a:prstDash val="solid"/>
+                      <a:round/>
+                      <a:headEnd type="none" w="med" len="med"/>
+                      <a:tailEnd type="none" w="med" len="med"/>
+                    </a:lnT>
+                    <a:lnB w="6350" cap="flat" cmpd="sng" algn="ctr">
+                      <a:solidFill>
+                        <a:srgbClr val="E3E8E9"/>
+                      </a:solidFill>
+                      <a:prstDash val="solid"/>
+                      <a:round/>
+                      <a:headEnd type="none" w="med" len="med"/>
+                      <a:tailEnd type="none" w="med" len="med"/>
+                    </a:lnB>
+                    <a:solidFill>
+                      <a:srgbClr val="F0F4F5"/>
+                    </a:solidFill>
+                  </a:tcPr>
+                </a:tc>
+                <a:tc>
+                  <a:txBody>
+                    <a:bodyPr/>
+                    <a:lstStyle/>
+                    <a:p>
+                      <a:pPr algn="r" indent="0" marL="0">
+                        <a:buNone/>
+                      </a:pPr>
+                      <a:r>
+                        <a:rPr lang="en-US" sz="1000" b="1" dirty="0">
+                          <a:solidFill>
+                            <a:srgbClr val="0B2A3D"/>
+                          </a:solidFill>
+                          <a:latin typeface="Calibri" pitchFamily="34" charset="0"/>
+                          <a:ea typeface="Calibri" pitchFamily="34" charset="-122"/>
+                          <a:cs typeface="Calibri" pitchFamily="34" charset="-120"/>
+                        </a:rPr>
+                        <a:t>US$ 1,7 mi</a:t>
+                      </a:r>
+                      <a:endParaRPr lang="en-US" sz="1000" dirty="0">
+                        <a:latin typeface="Calibri" charset="0"/>
+                        <a:ea typeface="Calibri" charset="0"/>
+                        <a:cs typeface="Calibri" charset="0"/>
+                      </a:endParaRPr>
+                    </a:p>
+                  </a:txBody>
+                  <a:tcPr marL="91440" marR="91440" marT="45720" marB="45720" anchor="ctr">
+                    <a:lnL w="6350" cap="flat" cmpd="sng" algn="ctr">
+                      <a:solidFill>
+                        <a:srgbClr val="E3E8E9"/>
+                      </a:solidFill>
+                      <a:prstDash val="solid"/>
+                      <a:round/>
+                      <a:headEnd type="none" w="med" len="med"/>
+                      <a:tailEnd type="none" w="med" len="med"/>
+                    </a:lnL>
+                    <a:lnR w="6350" cap="flat" cmpd="sng" algn="ctr">
+                      <a:solidFill>
+                        <a:srgbClr val="E3E8E9"/>
+                      </a:solidFill>
+                      <a:prstDash val="solid"/>
+                      <a:round/>
+                      <a:headEnd type="none" w="med" len="med"/>
+                      <a:tailEnd type="none" w="med" len="med"/>
+                    </a:lnR>
+                    <a:lnT w="6350" cap="flat" cmpd="sng" algn="ctr">
+                      <a:solidFill>
+                        <a:srgbClr val="E3E8E9"/>
+                      </a:solidFill>
+                      <a:prstDash val="solid"/>
+                      <a:round/>
+                      <a:headEnd type="none" w="med" len="med"/>
+                      <a:tailEnd type="none" w="med" len="med"/>
+                    </a:lnT>
+                    <a:lnB w="6350" cap="flat" cmpd="sng" algn="ctr">
+                      <a:solidFill>
+                        <a:srgbClr val="E3E8E9"/>
+                      </a:solidFill>
+                      <a:prstDash val="solid"/>
+                      <a:round/>
+                      <a:headEnd type="none" w="med" len="med"/>
+                      <a:tailEnd type="none" w="med" len="med"/>
+                    </a:lnB>
+                    <a:solidFill>
+                      <a:srgbClr val="F0F4F5"/>
+                    </a:solidFill>
+                  </a:tcPr>
+                </a:tc>
+              </a:tr>
+              <a:tr h="288036">
+                <a:tc>
+                  <a:txBody>
+                    <a:bodyPr/>
+                    <a:lstStyle/>
+                    <a:p>
+                      <a:pPr indent="0" marL="0">
+                        <a:buNone/>
+                      </a:pPr>
+                      <a:r>
+                        <a:rPr lang="en-US" sz="1000" dirty="0">
+                          <a:solidFill>
+                            <a:srgbClr val="1C2B33"/>
+                          </a:solidFill>
+                          <a:latin typeface="Calibri" pitchFamily="34" charset="0"/>
+                          <a:ea typeface="Calibri" pitchFamily="34" charset="-122"/>
+                          <a:cs typeface="Calibri" pitchFamily="34" charset="-120"/>
+                        </a:rPr>
+                        <a:t>Substituição Gerador de Nitrogênio</a:t>
+                      </a:r>
+                      <a:endParaRPr lang="en-US" sz="1000" dirty="0">
+                        <a:latin typeface="Calibri" charset="0"/>
+                        <a:ea typeface="Calibri" charset="0"/>
+                        <a:cs typeface="Calibri" charset="0"/>
+                      </a:endParaRPr>
+                    </a:p>
+                  </a:txBody>
+                  <a:tcPr marL="91440" marR="91440" marT="45720" marB="45720" anchor="ctr">
+                    <a:lnL w="6350" cap="flat" cmpd="sng" algn="ctr">
+                      <a:solidFill>
+                        <a:srgbClr val="E3E8E9"/>
+                      </a:solidFill>
+                      <a:prstDash val="solid"/>
+                      <a:round/>
+                      <a:headEnd type="none" w="med" len="med"/>
+                      <a:tailEnd type="none" w="med" len="med"/>
+                    </a:lnL>
+                    <a:lnR w="6350" cap="flat" cmpd="sng" algn="ctr">
+                      <a:solidFill>
+                        <a:srgbClr val="E3E8E9"/>
+                      </a:solidFill>
+                      <a:prstDash val="solid"/>
+                      <a:round/>
+                      <a:headEnd type="none" w="med" len="med"/>
+                      <a:tailEnd type="none" w="med" len="med"/>
+                    </a:lnR>
+                    <a:lnT w="6350" cap="flat" cmpd="sng" algn="ctr">
+                      <a:solidFill>
+                        <a:srgbClr val="E3E8E9"/>
+                      </a:solidFill>
+                      <a:prstDash val="solid"/>
+                      <a:round/>
+                      <a:headEnd type="none" w="med" len="med"/>
+                      <a:tailEnd type="none" w="med" len="med"/>
+                    </a:lnT>
+                    <a:lnB w="6350" cap="flat" cmpd="sng" algn="ctr">
+                      <a:solidFill>
+                        <a:srgbClr val="E3E8E9"/>
+                      </a:solidFill>
+                      <a:prstDash val="solid"/>
+                      <a:round/>
+                      <a:headEnd type="none" w="med" len="med"/>
+                      <a:tailEnd type="none" w="med" len="med"/>
+                    </a:lnB>
+                    <a:solidFill>
+                      <a:srgbClr val="FFFFFF"/>
+                    </a:solidFill>
+                  </a:tcPr>
+                </a:tc>
+                <a:tc>
+                  <a:txBody>
+                    <a:bodyPr/>
+                    <a:lstStyle/>
+                    <a:p>
+                      <a:pPr indent="0" marL="0">
+                        <a:buNone/>
+                      </a:pPr>
+                      <a:r>
+                        <a:rPr lang="en-US" sz="950" dirty="0">
+                          <a:solidFill>
+                            <a:srgbClr val="5B6B73"/>
+                          </a:solidFill>
+                          <a:latin typeface="Calibri" pitchFamily="34" charset="0"/>
+                          <a:ea typeface="Calibri" pitchFamily="34" charset="-122"/>
+                          <a:cs typeface="Calibri" pitchFamily="34" charset="-120"/>
+                        </a:rPr>
+                        <a:t>Eficiência de Produção</a:t>
+                      </a:r>
+                      <a:endParaRPr lang="en-US" sz="950" dirty="0">
+                        <a:latin typeface="Calibri" charset="0"/>
+                        <a:ea typeface="Calibri" charset="0"/>
+                        <a:cs typeface="Calibri" charset="0"/>
+                      </a:endParaRPr>
+                    </a:p>
+                  </a:txBody>
+                  <a:tcPr marL="91440" marR="91440" marT="45720" marB="45720" anchor="ctr">
+                    <a:lnL w="6350" cap="flat" cmpd="sng" algn="ctr">
+                      <a:solidFill>
+                        <a:srgbClr val="E3E8E9"/>
+                      </a:solidFill>
+                      <a:prstDash val="solid"/>
+                      <a:round/>
+                      <a:headEnd type="none" w="med" len="med"/>
+                      <a:tailEnd type="none" w="med" len="med"/>
+                    </a:lnL>
+                    <a:lnR w="6350" cap="flat" cmpd="sng" algn="ctr">
+                      <a:solidFill>
+                        <a:srgbClr val="E3E8E9"/>
+                      </a:solidFill>
+                      <a:prstDash val="solid"/>
+                      <a:round/>
+                      <a:headEnd type="none" w="med" len="med"/>
+                      <a:tailEnd type="none" w="med" len="med"/>
+                    </a:lnR>
+                    <a:lnT w="6350" cap="flat" cmpd="sng" algn="ctr">
+                      <a:solidFill>
+                        <a:srgbClr val="E3E8E9"/>
+                      </a:solidFill>
+                      <a:prstDash val="solid"/>
+                      <a:round/>
+                      <a:headEnd type="none" w="med" len="med"/>
+                      <a:tailEnd type="none" w="med" len="med"/>
+                    </a:lnT>
+                    <a:lnB w="6350" cap="flat" cmpd="sng" algn="ctr">
+                      <a:solidFill>
+                        <a:srgbClr val="E3E8E9"/>
+                      </a:solidFill>
+                      <a:prstDash val="solid"/>
+                      <a:round/>
+                      <a:headEnd type="none" w="med" len="med"/>
+                      <a:tailEnd type="none" w="med" len="med"/>
+                    </a:lnB>
+                    <a:solidFill>
+                      <a:srgbClr val="FFFFFF"/>
+                    </a:solidFill>
+                  </a:tcPr>
+                </a:tc>
+                <a:tc>
+                  <a:txBody>
+                    <a:bodyPr/>
+                    <a:lstStyle/>
+                    <a:p>
+                      <a:pPr indent="0" marL="0">
+                        <a:buNone/>
+                      </a:pPr>
+                      <a:r>
+                        <a:rPr lang="en-US" sz="950" dirty="0">
+                          <a:solidFill>
+                            <a:srgbClr val="5B6B73"/>
+                          </a:solidFill>
+                          <a:latin typeface="Calibri" pitchFamily="34" charset="0"/>
+                          <a:ea typeface="Calibri" pitchFamily="34" charset="-122"/>
+                          <a:cs typeface="Calibri" pitchFamily="34" charset="-120"/>
+                        </a:rPr>
+                        <a:t>Projetos</a:t>
+                      </a:r>
+                      <a:endParaRPr lang="en-US" sz="950" dirty="0">
+                        <a:latin typeface="Calibri" charset="0"/>
+                        <a:ea typeface="Calibri" charset="0"/>
+                        <a:cs typeface="Calibri" charset="0"/>
+                      </a:endParaRPr>
+                    </a:p>
+                  </a:txBody>
+                  <a:tcPr marL="91440" marR="91440" marT="45720" marB="45720" anchor="ctr">
+                    <a:lnL w="6350" cap="flat" cmpd="sng" algn="ctr">
+                      <a:solidFill>
+                        <a:srgbClr val="E3E8E9"/>
+                      </a:solidFill>
+                      <a:prstDash val="solid"/>
+                      <a:round/>
+                      <a:headEnd type="none" w="med" len="med"/>
+                      <a:tailEnd type="none" w="med" len="med"/>
+                    </a:lnL>
+                    <a:lnR w="6350" cap="flat" cmpd="sng" algn="ctr">
+                      <a:solidFill>
+                        <a:srgbClr val="E3E8E9"/>
+                      </a:solidFill>
+                      <a:prstDash val="solid"/>
+                      <a:round/>
+                      <a:headEnd type="none" w="med" len="med"/>
+                      <a:tailEnd type="none" w="med" len="med"/>
+                    </a:lnR>
+                    <a:lnT w="6350" cap="flat" cmpd="sng" algn="ctr">
+                      <a:solidFill>
+                        <a:srgbClr val="E3E8E9"/>
+                      </a:solidFill>
+                      <a:prstDash val="solid"/>
+                      <a:round/>
+                      <a:headEnd type="none" w="med" len="med"/>
+                      <a:tailEnd type="none" w="med" len="med"/>
+                    </a:lnT>
+                    <a:lnB w="6350" cap="flat" cmpd="sng" algn="ctr">
+                      <a:solidFill>
+                        <a:srgbClr val="E3E8E9"/>
+                      </a:solidFill>
+                      <a:prstDash val="solid"/>
+                      <a:round/>
+                      <a:headEnd type="none" w="med" len="med"/>
+                      <a:tailEnd type="none" w="med" len="med"/>
+                    </a:lnB>
+                    <a:solidFill>
+                      <a:srgbClr val="FFFFFF"/>
+                    </a:solidFill>
+                  </a:tcPr>
+                </a:tc>
+                <a:tc>
+                  <a:txBody>
+                    <a:bodyPr/>
+                    <a:lstStyle/>
+                    <a:p>
+                      <a:pPr algn="r" indent="0" marL="0">
+                        <a:buNone/>
+                      </a:pPr>
+                      <a:r>
+                        <a:rPr lang="en-US" sz="1000" b="1" dirty="0">
+                          <a:solidFill>
+                            <a:srgbClr val="0B2A3D"/>
+                          </a:solidFill>
+                          <a:latin typeface="Calibri" pitchFamily="34" charset="0"/>
+                          <a:ea typeface="Calibri" pitchFamily="34" charset="-122"/>
+                          <a:cs typeface="Calibri" pitchFamily="34" charset="-120"/>
+                        </a:rPr>
+                        <a:t>US$ 1,6 mi</a:t>
+                      </a:r>
+                      <a:endParaRPr lang="en-US" sz="1000" dirty="0">
+                        <a:latin typeface="Calibri" charset="0"/>
+                        <a:ea typeface="Calibri" charset="0"/>
+                        <a:cs typeface="Calibri" charset="0"/>
+                      </a:endParaRPr>
+                    </a:p>
+                  </a:txBody>
+                  <a:tcPr marL="91440" marR="91440" marT="45720" marB="45720" anchor="ctr">
+                    <a:lnL w="6350" cap="flat" cmpd="sng" algn="ctr">
+                      <a:solidFill>
+                        <a:srgbClr val="E3E8E9"/>
+                      </a:solidFill>
+                      <a:prstDash val="solid"/>
+                      <a:round/>
+                      <a:headEnd type="none" w="med" len="med"/>
+                      <a:tailEnd type="none" w="med" len="med"/>
+                    </a:lnL>
+                    <a:lnR w="6350" cap="flat" cmpd="sng" algn="ctr">
+                      <a:solidFill>
+                        <a:srgbClr val="E3E8E9"/>
+                      </a:solidFill>
+                      <a:prstDash val="solid"/>
+                      <a:round/>
+                      <a:headEnd type="none" w="med" len="med"/>
+                      <a:tailEnd type="none" w="med" len="med"/>
+                    </a:lnR>
+                    <a:lnT w="6350" cap="flat" cmpd="sng" algn="ctr">
+                      <a:solidFill>
+                        <a:srgbClr val="E3E8E9"/>
+                      </a:solidFill>
+                      <a:prstDash val="solid"/>
+                      <a:round/>
+                      <a:headEnd type="none" w="med" len="med"/>
+                      <a:tailEnd type="none" w="med" len="med"/>
+                    </a:lnT>
+                    <a:lnB w="6350" cap="flat" cmpd="sng" algn="ctr">
+                      <a:solidFill>
+                        <a:srgbClr val="E3E8E9"/>
+                      </a:solidFill>
+                      <a:prstDash val="solid"/>
+                      <a:round/>
+                      <a:headEnd type="none" w="med" len="med"/>
+                      <a:tailEnd type="none" w="med" len="med"/>
+                    </a:lnB>
+                    <a:solidFill>
+                      <a:srgbClr val="FFFFFF"/>
+                    </a:solidFill>
+                  </a:tcPr>
+                </a:tc>
+              </a:tr>
+              <a:tr h="288036">
+                <a:tc>
+                  <a:txBody>
+                    <a:bodyPr/>
+                    <a:lstStyle/>
+                    <a:p>
+                      <a:pPr indent="0" marL="0">
+                        <a:buNone/>
+                      </a:pPr>
+                      <a:r>
+                        <a:rPr lang="en-US" sz="1000" dirty="0">
+                          <a:solidFill>
+                            <a:srgbClr val="1C2B33"/>
+                          </a:solidFill>
+                          <a:latin typeface="Calibri" pitchFamily="34" charset="0"/>
+                          <a:ea typeface="Calibri" pitchFamily="34" charset="-122"/>
+                          <a:cs typeface="Calibri" pitchFamily="34" charset="-120"/>
+                        </a:rPr>
+                        <a:t>REPARO E INSTALAÇÃO DA PIGGING PUMP</a:t>
+                      </a:r>
+                      <a:endParaRPr lang="en-US" sz="1000" dirty="0">
+                        <a:latin typeface="Calibri" charset="0"/>
+                        <a:ea typeface="Calibri" charset="0"/>
+                        <a:cs typeface="Calibri" charset="0"/>
+                      </a:endParaRPr>
+                    </a:p>
+                  </a:txBody>
+                  <a:tcPr marL="91440" marR="91440" marT="45720" marB="45720" anchor="ctr">
+                    <a:lnL w="6350" cap="flat" cmpd="sng" algn="ctr">
+                      <a:solidFill>
+                        <a:srgbClr val="E3E8E9"/>
+                      </a:solidFill>
+                      <a:prstDash val="solid"/>
+                      <a:round/>
+                      <a:headEnd type="none" w="med" len="med"/>
+                      <a:tailEnd type="none" w="med" len="med"/>
+                    </a:lnL>
+                    <a:lnR w="6350" cap="flat" cmpd="sng" algn="ctr">
+                      <a:solidFill>
+                        <a:srgbClr val="E3E8E9"/>
+                      </a:solidFill>
+                      <a:prstDash val="solid"/>
+                      <a:round/>
+                      <a:headEnd type="none" w="med" len="med"/>
+                      <a:tailEnd type="none" w="med" len="med"/>
+                    </a:lnR>
+                    <a:lnT w="6350" cap="flat" cmpd="sng" algn="ctr">
+                      <a:solidFill>
+                        <a:srgbClr val="E3E8E9"/>
+                      </a:solidFill>
+                      <a:prstDash val="solid"/>
+                      <a:round/>
+                      <a:headEnd type="none" w="med" len="med"/>
+                      <a:tailEnd type="none" w="med" len="med"/>
+                    </a:lnT>
+                    <a:lnB w="6350" cap="flat" cmpd="sng" algn="ctr">
+                      <a:solidFill>
+                        <a:srgbClr val="E3E8E9"/>
+                      </a:solidFill>
+                      <a:prstDash val="solid"/>
+                      <a:round/>
+                      <a:headEnd type="none" w="med" len="med"/>
+                      <a:tailEnd type="none" w="med" len="med"/>
+                    </a:lnB>
+                    <a:solidFill>
+                      <a:srgbClr val="F0F4F5"/>
+                    </a:solidFill>
+                  </a:tcPr>
+                </a:tc>
+                <a:tc>
+                  <a:txBody>
+                    <a:bodyPr/>
+                    <a:lstStyle/>
+                    <a:p>
+                      <a:pPr indent="0" marL="0">
+                        <a:buNone/>
+                      </a:pPr>
+                      <a:r>
+                        <a:rPr lang="en-US" sz="950" dirty="0">
+                          <a:solidFill>
+                            <a:srgbClr val="5B6B73"/>
+                          </a:solidFill>
+                          <a:latin typeface="Calibri" pitchFamily="34" charset="0"/>
+                          <a:ea typeface="Calibri" pitchFamily="34" charset="-122"/>
+                          <a:cs typeface="Calibri" pitchFamily="34" charset="-120"/>
+                        </a:rPr>
+                        <a:t>Eficiência de Produção</a:t>
+                      </a:r>
+                      <a:endParaRPr lang="en-US" sz="950" dirty="0">
+                        <a:latin typeface="Calibri" charset="0"/>
+                        <a:ea typeface="Calibri" charset="0"/>
+                        <a:cs typeface="Calibri" charset="0"/>
+                      </a:endParaRPr>
+                    </a:p>
+                  </a:txBody>
+                  <a:tcPr marL="91440" marR="91440" marT="45720" marB="45720" anchor="ctr">
+                    <a:lnL w="6350" cap="flat" cmpd="sng" algn="ctr">
+                      <a:solidFill>
+                        <a:srgbClr val="E3E8E9"/>
+                      </a:solidFill>
+                      <a:prstDash val="solid"/>
+                      <a:round/>
+                      <a:headEnd type="none" w="med" len="med"/>
+                      <a:tailEnd type="none" w="med" len="med"/>
+                    </a:lnL>
+                    <a:lnR w="6350" cap="flat" cmpd="sng" algn="ctr">
+                      <a:solidFill>
+                        <a:srgbClr val="E3E8E9"/>
+                      </a:solidFill>
+                      <a:prstDash val="solid"/>
+                      <a:round/>
+                      <a:headEnd type="none" w="med" len="med"/>
+                      <a:tailEnd type="none" w="med" len="med"/>
+                    </a:lnR>
+                    <a:lnT w="6350" cap="flat" cmpd="sng" algn="ctr">
+                      <a:solidFill>
+                        <a:srgbClr val="E3E8E9"/>
+                      </a:solidFill>
+                      <a:prstDash val="solid"/>
+                      <a:round/>
+                      <a:headEnd type="none" w="med" len="med"/>
+                      <a:tailEnd type="none" w="med" len="med"/>
+                    </a:lnT>
+                    <a:lnB w="6350" cap="flat" cmpd="sng" algn="ctr">
+                      <a:solidFill>
+                        <a:srgbClr val="E3E8E9"/>
+                      </a:solidFill>
+                      <a:prstDash val="solid"/>
+                      <a:round/>
+                      <a:headEnd type="none" w="med" len="med"/>
+                      <a:tailEnd type="none" w="med" len="med"/>
+                    </a:lnB>
+                    <a:solidFill>
+                      <a:srgbClr val="F0F4F5"/>
+                    </a:solidFill>
+                  </a:tcPr>
+                </a:tc>
+                <a:tc>
+                  <a:txBody>
+                    <a:bodyPr/>
+                    <a:lstStyle/>
+                    <a:p>
+                      <a:pPr indent="0" marL="0">
+                        <a:buNone/>
+                      </a:pPr>
+                      <a:r>
+                        <a:rPr lang="en-US" sz="950" dirty="0">
+                          <a:solidFill>
+                            <a:srgbClr val="5B6B73"/>
+                          </a:solidFill>
+                          <a:latin typeface="Calibri" pitchFamily="34" charset="0"/>
+                          <a:ea typeface="Calibri" pitchFamily="34" charset="-122"/>
+                          <a:cs typeface="Calibri" pitchFamily="34" charset="-120"/>
+                        </a:rPr>
+                        <a:t>MNT – Manutenção</a:t>
+                      </a:r>
+                      <a:endParaRPr lang="en-US" sz="950" dirty="0">
+                        <a:latin typeface="Calibri" charset="0"/>
+                        <a:ea typeface="Calibri" charset="0"/>
+                        <a:cs typeface="Calibri" charset="0"/>
+                      </a:endParaRPr>
+                    </a:p>
+                  </a:txBody>
+                  <a:tcPr marL="91440" marR="91440" marT="45720" marB="45720" anchor="ctr">
+                    <a:lnL w="6350" cap="flat" cmpd="sng" algn="ctr">
+                      <a:solidFill>
+                        <a:srgbClr val="E3E8E9"/>
+                      </a:solidFill>
+                      <a:prstDash val="solid"/>
+                      <a:round/>
+                      <a:headEnd type="none" w="med" len="med"/>
+                      <a:tailEnd type="none" w="med" len="med"/>
+                    </a:lnL>
+                    <a:lnR w="6350" cap="flat" cmpd="sng" algn="ctr">
+                      <a:solidFill>
+                        <a:srgbClr val="E3E8E9"/>
+                      </a:solidFill>
+                      <a:prstDash val="solid"/>
+                      <a:round/>
+                      <a:headEnd type="none" w="med" len="med"/>
+                      <a:tailEnd type="none" w="med" len="med"/>
+                    </a:lnR>
+                    <a:lnT w="6350" cap="flat" cmpd="sng" algn="ctr">
+                      <a:solidFill>
+                        <a:srgbClr val="E3E8E9"/>
+                      </a:solidFill>
+                      <a:prstDash val="solid"/>
+                      <a:round/>
+                      <a:headEnd type="none" w="med" len="med"/>
+                      <a:tailEnd type="none" w="med" len="med"/>
+                    </a:lnT>
+                    <a:lnB w="6350" cap="flat" cmpd="sng" algn="ctr">
+                      <a:solidFill>
+                        <a:srgbClr val="E3E8E9"/>
+                      </a:solidFill>
+                      <a:prstDash val="solid"/>
+                      <a:round/>
+                      <a:headEnd type="none" w="med" len="med"/>
+                      <a:tailEnd type="none" w="med" len="med"/>
+                    </a:lnB>
+                    <a:solidFill>
+                      <a:srgbClr val="F0F4F5"/>
+                    </a:solidFill>
+                  </a:tcPr>
+                </a:tc>
+                <a:tc>
+                  <a:txBody>
+                    <a:bodyPr/>
+                    <a:lstStyle/>
+                    <a:p>
+                      <a:pPr algn="r" indent="0" marL="0">
+                        <a:buNone/>
+                      </a:pPr>
+                      <a:r>
+                        <a:rPr lang="en-US" sz="1000" b="1" dirty="0">
+                          <a:solidFill>
+                            <a:srgbClr val="0B2A3D"/>
+                          </a:solidFill>
+                          <a:latin typeface="Calibri" pitchFamily="34" charset="0"/>
+                          <a:ea typeface="Calibri" pitchFamily="34" charset="-122"/>
+                          <a:cs typeface="Calibri" pitchFamily="34" charset="-120"/>
+                        </a:rPr>
+                        <a:t>US$ 1,5 mi</a:t>
+                      </a:r>
+                      <a:endParaRPr lang="en-US" sz="1000" dirty="0">
+                        <a:latin typeface="Calibri" charset="0"/>
+                        <a:ea typeface="Calibri" charset="0"/>
+                        <a:cs typeface="Calibri" charset="0"/>
+                      </a:endParaRPr>
+                    </a:p>
+                  </a:txBody>
+                  <a:tcPr marL="91440" marR="91440" marT="45720" marB="45720" anchor="ctr">
+                    <a:lnL w="6350" cap="flat" cmpd="sng" algn="ctr">
+                      <a:solidFill>
+                        <a:srgbClr val="E3E8E9"/>
+                      </a:solidFill>
+                      <a:prstDash val="solid"/>
+                      <a:round/>
+                      <a:headEnd type="none" w="med" len="med"/>
+                      <a:tailEnd type="none" w="med" len="med"/>
+                    </a:lnL>
+                    <a:lnR w="6350" cap="flat" cmpd="sng" algn="ctr">
+                      <a:solidFill>
+                        <a:srgbClr val="E3E8E9"/>
+                      </a:solidFill>
+                      <a:prstDash val="solid"/>
+                      <a:round/>
+                      <a:headEnd type="none" w="med" len="med"/>
+                      <a:tailEnd type="none" w="med" len="med"/>
+                    </a:lnR>
+                    <a:lnT w="6350" cap="flat" cmpd="sng" algn="ctr">
+                      <a:solidFill>
+                        <a:srgbClr val="E3E8E9"/>
+                      </a:solidFill>
+                      <a:prstDash val="solid"/>
+                      <a:round/>
+                      <a:headEnd type="none" w="med" len="med"/>
+                      <a:tailEnd type="none" w="med" len="med"/>
+                    </a:lnT>
+                    <a:lnB w="6350" cap="flat" cmpd="sng" algn="ctr">
+                      <a:solidFill>
+                        <a:srgbClr val="E3E8E9"/>
+                      </a:solidFill>
+                      <a:prstDash val="solid"/>
+                      <a:round/>
+                      <a:headEnd type="none" w="med" len="med"/>
+                      <a:tailEnd type="none" w="med" len="med"/>
+                    </a:lnB>
+                    <a:solidFill>
+                      <a:srgbClr val="F0F4F5"/>
+                    </a:solidFill>
+                  </a:tcPr>
+                </a:tc>
+              </a:tr>
+              <a:tr h="288036">
+                <a:tc gridSpan="3">
+                  <a:txBody>
+                    <a:bodyPr/>
+                    <a:lstStyle/>
+                    <a:p>
+                      <a:pPr indent="0" marL="0">
+                        <a:buNone/>
+                      </a:pPr>
+                      <a:r>
+                        <a:rPr lang="en-US" sz="950" i="1" dirty="0">
+                          <a:solidFill>
+                            <a:srgbClr val="145C68"/>
+                          </a:solidFill>
+                          <a:latin typeface="Calibri" pitchFamily="34" charset="0"/>
+                          <a:ea typeface="Calibri" pitchFamily="34" charset="-122"/>
+                          <a:cs typeface="Calibri" pitchFamily="34" charset="-120"/>
+                        </a:rPr>
+                        <a:t>Outros 76 escopos (itens de menor valor individual)</a:t>
+                      </a:r>
+                      <a:endParaRPr lang="en-US" sz="950" dirty="0">
+                        <a:latin typeface="Calibri" charset="0"/>
+                        <a:ea typeface="Calibri" charset="0"/>
+                        <a:cs typeface="Calibri" charset="0"/>
+                      </a:endParaRPr>
+                    </a:p>
+                  </a:txBody>
+                  <a:tcPr marL="91440" marR="91440" marT="45720" marB="45720" anchor="ctr">
+                    <a:lnL w="6350" cap="flat" cmpd="sng" algn="ctr">
+                      <a:solidFill>
+                        <a:srgbClr val="E3E8E9"/>
+                      </a:solidFill>
+                      <a:prstDash val="solid"/>
+                      <a:round/>
+                      <a:headEnd type="none" w="med" len="med"/>
+                      <a:tailEnd type="none" w="med" len="med"/>
+                    </a:lnL>
+                    <a:lnR w="6350" cap="flat" cmpd="sng" algn="ctr">
+                      <a:solidFill>
+                        <a:srgbClr val="E3E8E9"/>
+                      </a:solidFill>
+                      <a:prstDash val="solid"/>
+                      <a:round/>
+                      <a:headEnd type="none" w="med" len="med"/>
+                      <a:tailEnd type="none" w="med" len="med"/>
+                    </a:lnR>
+                    <a:lnT w="6350" cap="flat" cmpd="sng" algn="ctr">
+                      <a:solidFill>
+                        <a:srgbClr val="E3E8E9"/>
+                      </a:solidFill>
+                      <a:prstDash val="solid"/>
+                      <a:round/>
+                      <a:headEnd type="none" w="med" len="med"/>
+                      <a:tailEnd type="none" w="med" len="med"/>
+                    </a:lnT>
+                    <a:lnB w="6350" cap="flat" cmpd="sng" algn="ctr">
+                      <a:solidFill>
+                        <a:srgbClr val="E3E8E9"/>
+                      </a:solidFill>
+                      <a:prstDash val="solid"/>
+                      <a:round/>
+                      <a:headEnd type="none" w="med" len="med"/>
+                      <a:tailEnd type="none" w="med" len="med"/>
+                    </a:lnB>
+                    <a:solidFill>
+                      <a:srgbClr val="DCE8E2"/>
+                    </a:solidFill>
+                  </a:tcPr>
+                </a:tc>
+                <a:tc hMerge="1">
+                  <a:tcPr/>
+                </a:tc>
+                <a:tc hMerge="1">
+                  <a:tcPr/>
+                </a:tc>
+                <a:tc>
+                  <a:txBody>
+                    <a:bodyPr/>
+                    <a:lstStyle/>
+                    <a:p>
+                      <a:pPr algn="r" indent="0" marL="0">
+                        <a:buNone/>
+                      </a:pPr>
+                      <a:r>
+                        <a:rPr lang="en-US" sz="1000" b="1" i="1" dirty="0">
+                          <a:solidFill>
+                            <a:srgbClr val="0B2A3D"/>
+                          </a:solidFill>
+                          <a:latin typeface="Calibri" pitchFamily="34" charset="0"/>
+                          <a:ea typeface="Calibri" pitchFamily="34" charset="-122"/>
+                          <a:cs typeface="Calibri" pitchFamily="34" charset="-120"/>
+                        </a:rPr>
+                        <a:t>US$ 23,7 mi</a:t>
+                      </a:r>
+                      <a:endParaRPr lang="en-US" sz="1000" dirty="0">
+                        <a:latin typeface="Calibri" charset="0"/>
+                        <a:ea typeface="Calibri" charset="0"/>
+                        <a:cs typeface="Calibri" charset="0"/>
+                      </a:endParaRPr>
+                    </a:p>
+                  </a:txBody>
+                  <a:tcPr marL="91440" marR="91440" marT="45720" marB="45720" anchor="ctr">
+                    <a:lnL w="6350" cap="flat" cmpd="sng" algn="ctr">
+                      <a:solidFill>
+                        <a:srgbClr val="E3E8E9"/>
+                      </a:solidFill>
+                      <a:prstDash val="solid"/>
+                      <a:round/>
+                      <a:headEnd type="none" w="med" len="med"/>
+                      <a:tailEnd type="none" w="med" len="med"/>
+                    </a:lnL>
+                    <a:lnR w="6350" cap="flat" cmpd="sng" algn="ctr">
+                      <a:solidFill>
+                        <a:srgbClr val="E3E8E9"/>
+                      </a:solidFill>
+                      <a:prstDash val="solid"/>
+                      <a:round/>
+                      <a:headEnd type="none" w="med" len="med"/>
+                      <a:tailEnd type="none" w="med" len="med"/>
+                    </a:lnR>
+                    <a:lnT w="6350" cap="flat" cmpd="sng" algn="ctr">
+                      <a:solidFill>
+                        <a:srgbClr val="E3E8E9"/>
+                      </a:solidFill>
+                      <a:prstDash val="solid"/>
+                      <a:round/>
+                      <a:headEnd type="none" w="med" len="med"/>
+                      <a:tailEnd type="none" w="med" len="med"/>
+                    </a:lnT>
+                    <a:lnB w="6350" cap="flat" cmpd="sng" algn="ctr">
+                      <a:solidFill>
+                        <a:srgbClr val="E3E8E9"/>
+                      </a:solidFill>
+                      <a:prstDash val="solid"/>
+                      <a:round/>
+                      <a:headEnd type="none" w="med" len="med"/>
+                      <a:tailEnd type="none" w="med" len="med"/>
+                    </a:lnB>
+                    <a:solidFill>
+                      <a:srgbClr val="DCE8E2"/>
+                    </a:solidFill>
+                  </a:tcPr>
+                </a:tc>
+              </a:tr>
+            </a:tbl>
+          </a:graphicData>
+        </a:graphic>
+      </p:graphicFrame>
+      <p:sp>
+        <p:nvSpPr>
+          <p:cNvPr id="7" name="Text 4"/>
+          <p:cNvSpPr txBox="1"/>
+          <p:nvPr/>
+        </p:nvSpPr>
+        <p:spPr>
+          <a:xfrm>
+            <a:off x="457200" y="6355080"/>
+            <a:ext cx="11247120" cy="365760"/>
+          </a:xfrm>
+          <a:prstGeom prst="rect">
+            <a:avLst/>
+          </a:prstGeom>
+          <a:noFill/>
+          <a:ln/>
+        </p:spPr>
+        <p:txBody>
+          <a:bodyPr wrap="square" lIns="0" tIns="0" rIns="0" bIns="0" rtlCol="0" anchor="ctr"/>
+          <a:lstStyle/>
+          <a:p>
+            <a:pPr indent="0" marL="0">
+              <a:buNone/>
+            </a:pPr>
+            <a:r>
+              <a:rPr lang="en-US" sz="850" i="1" dirty="0">
+                <a:solidFill>
+                  <a:srgbClr val="8A979D"/>
+                </a:solidFill>
+                <a:latin typeface="Calibri" pitchFamily="34" charset="0"/>
+                <a:ea typeface="Calibri" pitchFamily="34" charset="-122"/>
+                <a:cs typeface="Calibri" pitchFamily="34" charset="-120"/>
+              </a:rPr>
+              <a:t>Fonte: Plano Integrado · aba 'Geral - Em análise' · coluna 'Valor Total' · itens de Cost Allocation = CAPEX, status 'Contar' (não inclui Parada Programada, status 'TA'). Lista completa disponível na planilha em anexo.</a:t>
             </a:r>
             <a:endParaRPr lang="en-US" sz="850" dirty="0"/>
           </a:p>

--- a/PRIO_Plano_Trabalho_CAPEX_2027.pptx
+++ b/PRIO_Plano_Trabalho_CAPEX_2027.pptx
@@ -319,7 +319,7 @@
                   <c:v>4.28</c:v>
                 </c:pt>
                 <c:pt idx="6">
-                  <c:v>82.16</c:v>
+                  <c:v>66.26</c:v>
                 </c:pt>
               </c:numCache>
             </c:numRef>
@@ -19019,7 +19019,7 @@
                 <a:ea typeface="Cambria" pitchFamily="34" charset="-122"/>
                 <a:cs typeface="Cambria" pitchFamily="34" charset="-120"/>
               </a:rPr>
-              <a:t>US$ 126,4 mi</a:t>
+              <a:t>US$ 110,5 mi</a:t>
             </a:r>
             <a:endParaRPr lang="en-US" sz="2600" dirty="0"/>
           </a:p>
@@ -19158,7 +19158,7 @@
                 <a:ea typeface="Cambria" pitchFamily="34" charset="-122"/>
                 <a:cs typeface="Cambria" pitchFamily="34" charset="-120"/>
               </a:rPr>
-              <a:t>230</a:t>
+              <a:t>231</a:t>
             </a:r>
             <a:endParaRPr lang="en-US" sz="2600" dirty="0"/>
           </a:p>
@@ -20834,7 +20834,7 @@
                             <a:srgbClr val="1C2B33"/>
                           </a:solidFill>
                         </a:rPr>
-                        <a:t>US$ 82,2 mi</a:t>
+                        <a:t>US$ 66,3 mi</a:t>
                       </a:r>
                       <a:endParaRPr lang="en-US" sz="1050" dirty="0"/>
                     </a:p>
@@ -20895,7 +20895,7 @@
                             <a:srgbClr val="1C2B33"/>
                           </a:solidFill>
                         </a:rPr>
-                        <a:t>88</a:t>
+                        <a:t>89</a:t>
                       </a:r>
                       <a:endParaRPr lang="en-US" sz="1050" dirty="0"/>
                     </a:p>
@@ -21019,7 +21019,7 @@
                             <a:srgbClr val="0B2A3D"/>
                           </a:solidFill>
                         </a:rPr>
-                        <a:t>US$ 126,4 mi</a:t>
+                        <a:t>US$ 110,5 mi</a:t>
                       </a:r>
                       <a:endParaRPr lang="en-US" sz="1050" dirty="0"/>
                     </a:p>
@@ -21080,7 +21080,7 @@
                             <a:srgbClr val="0B2A3D"/>
                           </a:solidFill>
                         </a:rPr>
-                        <a:t>230</a:t>
+                        <a:t>231</a:t>
                       </a:r>
                       <a:endParaRPr lang="en-US" sz="1050" dirty="0"/>
                     </a:p>
@@ -25591,7 +25591,7 @@
                 <a:ea typeface="Cambria" pitchFamily="34" charset="-122"/>
                 <a:cs typeface="Cambria" pitchFamily="34" charset="-120"/>
               </a:rPr>
-              <a:t>US$ 82,2 mi</a:t>
+              <a:t>US$ 66,3 mi</a:t>
             </a:r>
             <a:endParaRPr lang="en-US" sz="3300" dirty="0"/>
           </a:p>
@@ -25730,7 +25730,7 @@
                 <a:ea typeface="Cambria" pitchFamily="34" charset="-122"/>
                 <a:cs typeface="Cambria" pitchFamily="34" charset="-120"/>
               </a:rPr>
-              <a:t>US$ 35,3 mi</a:t>
+              <a:t>US$ 30,4 mi</a:t>
             </a:r>
             <a:endParaRPr lang="en-US" sz="2600" dirty="0"/>
           </a:p>
@@ -25830,7 +25830,7 @@
                 <a:ea typeface="Cambria" pitchFamily="34" charset="-122"/>
                 <a:cs typeface="Cambria" pitchFamily="34" charset="-120"/>
               </a:rPr>
-              <a:t>US$ 46,8 mi</a:t>
+              <a:t>US$ 35,9 mi</a:t>
             </a:r>
             <a:endParaRPr lang="en-US" sz="2600" dirty="0"/>
           </a:p>
@@ -26009,7 +26009,7 @@
                 <a:ea typeface="Calibri" pitchFamily="34" charset="-122"/>
                 <a:cs typeface="Calibri" pitchFamily="34" charset="-120"/>
               </a:rPr>
-              <a:t>US$ 29,9 mi</a:t>
+              <a:t>US$ 24,9 mi</a:t>
             </a:r>
             <a:endParaRPr lang="en-US" sz="950" dirty="0"/>
           </a:p>
@@ -26107,7 +26107,7 @@
                 <a:ea typeface="Calibri" pitchFamily="34" charset="-122"/>
                 <a:cs typeface="Calibri" pitchFamily="34" charset="-120"/>
               </a:rPr>
-              <a:t>US$ 21,7 mi</a:t>
+              <a:t>US$ 15,7 mi</a:t>
             </a:r>
             <a:endParaRPr lang="en-US" sz="950" dirty="0"/>
           </a:p>
@@ -26185,7 +26185,7 @@
                 <a:ea typeface="Calibri" pitchFamily="34" charset="-122"/>
                 <a:cs typeface="Calibri" pitchFamily="34" charset="-120"/>
               </a:rPr>
-              <a:t>US$ 18,0 mi</a:t>
+              <a:t>US$ 13,6 mi</a:t>
             </a:r>
             <a:endParaRPr lang="en-US" sz="950" dirty="0"/>
           </a:p>
@@ -26322,7 +26322,7 @@
                 <a:ea typeface="Calibri" pitchFamily="34" charset="-122"/>
                 <a:cs typeface="Calibri" pitchFamily="34" charset="-120"/>
               </a:rPr>
-              <a:t>ADM - Administrativo</a:t>
+              <a:t>INT - Integridade</a:t>
             </a:r>
             <a:endParaRPr lang="en-US" sz="950" dirty="0"/>
           </a:p>
@@ -26361,7 +26361,7 @@
                 <a:ea typeface="Calibri" pitchFamily="34" charset="-122"/>
                 <a:cs typeface="Calibri" pitchFamily="34" charset="-120"/>
               </a:rPr>
-              <a:t>US$ 2,9 mi</a:t>
+              <a:t>US$ 2,1 mi</a:t>
             </a:r>
             <a:endParaRPr lang="en-US" sz="950" dirty="0"/>
           </a:p>
@@ -26420,7 +26420,7 @@
                 <a:ea typeface="Calibri" pitchFamily="34" charset="-122"/>
                 <a:cs typeface="Calibri" pitchFamily="34" charset="-120"/>
               </a:rPr>
-              <a:t>INT - Integridade</a:t>
+              <a:t>ADM - Administrativo</a:t>
             </a:r>
             <a:endParaRPr lang="en-US" sz="950" dirty="0"/>
           </a:p>
@@ -26537,7 +26537,7 @@
                 <a:ea typeface="Calibri" pitchFamily="34" charset="-122"/>
                 <a:cs typeface="Calibri" pitchFamily="34" charset="-120"/>
               </a:rPr>
-              <a:t>US$ 1,8 mi</a:t>
+              <a:t>US$ 2,0 mi</a:t>
             </a:r>
             <a:endParaRPr lang="en-US" sz="950" dirty="0"/>
           </a:p>
@@ -26912,7 +26912,7 @@
                 <a:ea typeface="Calibri" pitchFamily="34" charset="-122"/>
                 <a:cs typeface="Calibri" pitchFamily="34" charset="-120"/>
               </a:rPr>
-              <a:t>Rotina Operacional</a:t>
+              <a:t>Bem Estar/Segurança</a:t>
             </a:r>
             <a:endParaRPr lang="en-US" sz="950" dirty="0"/>
           </a:p>
@@ -26951,7 +26951,7 @@
                 <a:ea typeface="Calibri" pitchFamily="34" charset="-122"/>
                 <a:cs typeface="Calibri" pitchFamily="34" charset="-120"/>
               </a:rPr>
-              <a:t>US$ 24,8 mi</a:t>
+              <a:t>US$ 22,7 mi</a:t>
             </a:r>
             <a:endParaRPr lang="en-US" sz="950" dirty="0"/>
           </a:p>
@@ -27010,7 +27010,7 @@
                 <a:ea typeface="Calibri" pitchFamily="34" charset="-122"/>
                 <a:cs typeface="Calibri" pitchFamily="34" charset="-120"/>
               </a:rPr>
-              <a:t>Bem Estar/Segurança</a:t>
+              <a:t>Rotina Operacional</a:t>
             </a:r>
             <a:endParaRPr lang="en-US" sz="950" dirty="0"/>
           </a:p>
@@ -27049,7 +27049,7 @@
                 <a:ea typeface="Calibri" pitchFamily="34" charset="-122"/>
                 <a:cs typeface="Calibri" pitchFamily="34" charset="-120"/>
               </a:rPr>
-              <a:t>US$ 23,5 mi</a:t>
+              <a:t>US$ 17,4 mi</a:t>
             </a:r>
             <a:endParaRPr lang="en-US" sz="950" dirty="0"/>
           </a:p>
@@ -27127,7 +27127,7 @@
                 <a:ea typeface="Calibri" pitchFamily="34" charset="-122"/>
                 <a:cs typeface="Calibri" pitchFamily="34" charset="-120"/>
               </a:rPr>
-              <a:t>US$ 17,8 mi</a:t>
+              <a:t>US$ 15,0 mi</a:t>
             </a:r>
             <a:endParaRPr lang="en-US" sz="950" dirty="0"/>
           </a:p>
@@ -27225,7 +27225,7 @@
                 <a:ea typeface="Calibri" pitchFamily="34" charset="-122"/>
                 <a:cs typeface="Calibri" pitchFamily="34" charset="-120"/>
               </a:rPr>
-              <a:t>US$ 16,1 mi</a:t>
+              <a:t>US$ 11,2 mi</a:t>
             </a:r>
             <a:endParaRPr lang="en-US" sz="950" dirty="0"/>
           </a:p>
@@ -27426,7 +27426,7 @@
                 <a:ea typeface="Calibri" pitchFamily="34" charset="-122"/>
                 <a:cs typeface="Calibri" pitchFamily="34" charset="-120"/>
               </a:rPr>
-              <a:t>Principais escopos por valor · 88 itens no total</a:t>
+              <a:t>Principais escopos por valor · 89 itens no total</a:t>
             </a:r>
             <a:endParaRPr lang="en-US" sz="1250" dirty="0"/>
           </a:p>
@@ -28300,7 +28300,7 @@
                           <a:ea typeface="Calibri" pitchFamily="34" charset="-122"/>
                           <a:cs typeface="Calibri" pitchFamily="34" charset="-120"/>
                         </a:rPr>
-                        <a:t>SPARE PARTS RECONDICIONAMENTO DOS BOOGIES</a:t>
+                        <a:t>L3 - TURBINA</a:t>
                       </a:r>
                       <a:endParaRPr lang="en-US" sz="1000" dirty="0">
                         <a:latin typeface="Calibri" charset="0"/>
@@ -28436,280 +28436,6 @@
                           <a:ea typeface="Calibri" pitchFamily="34" charset="-122"/>
                           <a:cs typeface="Calibri" pitchFamily="34" charset="-120"/>
                         </a:rPr>
-                        <a:t>NAV - Naval</a:t>
-                      </a:r>
-                      <a:endParaRPr lang="en-US" sz="950" dirty="0">
-                        <a:latin typeface="Calibri" charset="0"/>
-                        <a:ea typeface="Calibri" charset="0"/>
-                        <a:cs typeface="Calibri" charset="0"/>
-                      </a:endParaRPr>
-                    </a:p>
-                  </a:txBody>
-                  <a:tcPr marL="91440" marR="91440" marT="45720" marB="45720" anchor="ctr">
-                    <a:lnL w="6350" cap="flat" cmpd="sng" algn="ctr">
-                      <a:solidFill>
-                        <a:srgbClr val="E3E8E9"/>
-                      </a:solidFill>
-                      <a:prstDash val="solid"/>
-                      <a:round/>
-                      <a:headEnd type="none" w="med" len="med"/>
-                      <a:tailEnd type="none" w="med" len="med"/>
-                    </a:lnL>
-                    <a:lnR w="6350" cap="flat" cmpd="sng" algn="ctr">
-                      <a:solidFill>
-                        <a:srgbClr val="E3E8E9"/>
-                      </a:solidFill>
-                      <a:prstDash val="solid"/>
-                      <a:round/>
-                      <a:headEnd type="none" w="med" len="med"/>
-                      <a:tailEnd type="none" w="med" len="med"/>
-                    </a:lnR>
-                    <a:lnT w="6350" cap="flat" cmpd="sng" algn="ctr">
-                      <a:solidFill>
-                        <a:srgbClr val="E3E8E9"/>
-                      </a:solidFill>
-                      <a:prstDash val="solid"/>
-                      <a:round/>
-                      <a:headEnd type="none" w="med" len="med"/>
-                      <a:tailEnd type="none" w="med" len="med"/>
-                    </a:lnT>
-                    <a:lnB w="6350" cap="flat" cmpd="sng" algn="ctr">
-                      <a:solidFill>
-                        <a:srgbClr val="E3E8E9"/>
-                      </a:solidFill>
-                      <a:prstDash val="solid"/>
-                      <a:round/>
-                      <a:headEnd type="none" w="med" len="med"/>
-                      <a:tailEnd type="none" w="med" len="med"/>
-                    </a:lnB>
-                    <a:solidFill>
-                      <a:srgbClr val="FFFFFF"/>
-                    </a:solidFill>
-                  </a:tcPr>
-                </a:tc>
-                <a:tc>
-                  <a:txBody>
-                    <a:bodyPr/>
-                    <a:lstStyle/>
-                    <a:p>
-                      <a:pPr algn="r" indent="0" marL="0">
-                        <a:buNone/>
-                      </a:pPr>
-                      <a:r>
-                        <a:rPr lang="en-US" sz="1000" b="1" dirty="0">
-                          <a:solidFill>
-                            <a:srgbClr val="0B2A3D"/>
-                          </a:solidFill>
-                          <a:latin typeface="Calibri" pitchFamily="34" charset="0"/>
-                          <a:ea typeface="Calibri" pitchFamily="34" charset="-122"/>
-                          <a:cs typeface="Calibri" pitchFamily="34" charset="-120"/>
-                        </a:rPr>
-                        <a:t>US$ 6,3 mi</a:t>
-                      </a:r>
-                      <a:endParaRPr lang="en-US" sz="1000" dirty="0">
-                        <a:latin typeface="Calibri" charset="0"/>
-                        <a:ea typeface="Calibri" charset="0"/>
-                        <a:cs typeface="Calibri" charset="0"/>
-                      </a:endParaRPr>
-                    </a:p>
-                  </a:txBody>
-                  <a:tcPr marL="91440" marR="91440" marT="45720" marB="45720" anchor="ctr">
-                    <a:lnL w="6350" cap="flat" cmpd="sng" algn="ctr">
-                      <a:solidFill>
-                        <a:srgbClr val="E3E8E9"/>
-                      </a:solidFill>
-                      <a:prstDash val="solid"/>
-                      <a:round/>
-                      <a:headEnd type="none" w="med" len="med"/>
-                      <a:tailEnd type="none" w="med" len="med"/>
-                    </a:lnL>
-                    <a:lnR w="6350" cap="flat" cmpd="sng" algn="ctr">
-                      <a:solidFill>
-                        <a:srgbClr val="E3E8E9"/>
-                      </a:solidFill>
-                      <a:prstDash val="solid"/>
-                      <a:round/>
-                      <a:headEnd type="none" w="med" len="med"/>
-                      <a:tailEnd type="none" w="med" len="med"/>
-                    </a:lnR>
-                    <a:lnT w="6350" cap="flat" cmpd="sng" algn="ctr">
-                      <a:solidFill>
-                        <a:srgbClr val="E3E8E9"/>
-                      </a:solidFill>
-                      <a:prstDash val="solid"/>
-                      <a:round/>
-                      <a:headEnd type="none" w="med" len="med"/>
-                      <a:tailEnd type="none" w="med" len="med"/>
-                    </a:lnT>
-                    <a:lnB w="6350" cap="flat" cmpd="sng" algn="ctr">
-                      <a:solidFill>
-                        <a:srgbClr val="E3E8E9"/>
-                      </a:solidFill>
-                      <a:prstDash val="solid"/>
-                      <a:round/>
-                      <a:headEnd type="none" w="med" len="med"/>
-                      <a:tailEnd type="none" w="med" len="med"/>
-                    </a:lnB>
-                    <a:solidFill>
-                      <a:srgbClr val="FFFFFF"/>
-                    </a:solidFill>
-                  </a:tcPr>
-                </a:tc>
-              </a:tr>
-              <a:tr h="288036">
-                <a:tc>
-                  <a:txBody>
-                    <a:bodyPr/>
-                    <a:lstStyle/>
-                    <a:p>
-                      <a:pPr indent="0" marL="0">
-                        <a:buNone/>
-                      </a:pPr>
-                      <a:r>
-                        <a:rPr lang="en-US" sz="1000" dirty="0">
-                          <a:solidFill>
-                            <a:srgbClr val="1C2B33"/>
-                          </a:solidFill>
-                          <a:latin typeface="Calibri" pitchFamily="34" charset="0"/>
-                          <a:ea typeface="Calibri" pitchFamily="34" charset="-122"/>
-                          <a:cs typeface="Calibri" pitchFamily="34" charset="-120"/>
-                        </a:rPr>
-                        <a:t>L3 - TURBINA</a:t>
-                      </a:r>
-                      <a:endParaRPr lang="en-US" sz="1000" dirty="0">
-                        <a:latin typeface="Calibri" charset="0"/>
-                        <a:ea typeface="Calibri" charset="0"/>
-                        <a:cs typeface="Calibri" charset="0"/>
-                      </a:endParaRPr>
-                    </a:p>
-                  </a:txBody>
-                  <a:tcPr marL="91440" marR="91440" marT="45720" marB="45720" anchor="ctr">
-                    <a:lnL w="6350" cap="flat" cmpd="sng" algn="ctr">
-                      <a:solidFill>
-                        <a:srgbClr val="E3E8E9"/>
-                      </a:solidFill>
-                      <a:prstDash val="solid"/>
-                      <a:round/>
-                      <a:headEnd type="none" w="med" len="med"/>
-                      <a:tailEnd type="none" w="med" len="med"/>
-                    </a:lnL>
-                    <a:lnR w="6350" cap="flat" cmpd="sng" algn="ctr">
-                      <a:solidFill>
-                        <a:srgbClr val="E3E8E9"/>
-                      </a:solidFill>
-                      <a:prstDash val="solid"/>
-                      <a:round/>
-                      <a:headEnd type="none" w="med" len="med"/>
-                      <a:tailEnd type="none" w="med" len="med"/>
-                    </a:lnR>
-                    <a:lnT w="6350" cap="flat" cmpd="sng" algn="ctr">
-                      <a:solidFill>
-                        <a:srgbClr val="E3E8E9"/>
-                      </a:solidFill>
-                      <a:prstDash val="solid"/>
-                      <a:round/>
-                      <a:headEnd type="none" w="med" len="med"/>
-                      <a:tailEnd type="none" w="med" len="med"/>
-                    </a:lnT>
-                    <a:lnB w="6350" cap="flat" cmpd="sng" algn="ctr">
-                      <a:solidFill>
-                        <a:srgbClr val="E3E8E9"/>
-                      </a:solidFill>
-                      <a:prstDash val="solid"/>
-                      <a:round/>
-                      <a:headEnd type="none" w="med" len="med"/>
-                      <a:tailEnd type="none" w="med" len="med"/>
-                    </a:lnB>
-                    <a:solidFill>
-                      <a:srgbClr val="F0F4F5"/>
-                    </a:solidFill>
-                  </a:tcPr>
-                </a:tc>
-                <a:tc>
-                  <a:txBody>
-                    <a:bodyPr/>
-                    <a:lstStyle/>
-                    <a:p>
-                      <a:pPr indent="0" marL="0">
-                        <a:buNone/>
-                      </a:pPr>
-                      <a:r>
-                        <a:rPr lang="en-US" sz="950" dirty="0">
-                          <a:solidFill>
-                            <a:srgbClr val="5B6B73"/>
-                          </a:solidFill>
-                          <a:latin typeface="Calibri" pitchFamily="34" charset="0"/>
-                          <a:ea typeface="Calibri" pitchFamily="34" charset="-122"/>
-                          <a:cs typeface="Calibri" pitchFamily="34" charset="-120"/>
-                        </a:rPr>
-                        <a:t>Rotina Operacional</a:t>
-                      </a:r>
-                      <a:endParaRPr lang="en-US" sz="950" dirty="0">
-                        <a:latin typeface="Calibri" charset="0"/>
-                        <a:ea typeface="Calibri" charset="0"/>
-                        <a:cs typeface="Calibri" charset="0"/>
-                      </a:endParaRPr>
-                    </a:p>
-                  </a:txBody>
-                  <a:tcPr marL="91440" marR="91440" marT="45720" marB="45720" anchor="ctr">
-                    <a:lnL w="6350" cap="flat" cmpd="sng" algn="ctr">
-                      <a:solidFill>
-                        <a:srgbClr val="E3E8E9"/>
-                      </a:solidFill>
-                      <a:prstDash val="solid"/>
-                      <a:round/>
-                      <a:headEnd type="none" w="med" len="med"/>
-                      <a:tailEnd type="none" w="med" len="med"/>
-                    </a:lnL>
-                    <a:lnR w="6350" cap="flat" cmpd="sng" algn="ctr">
-                      <a:solidFill>
-                        <a:srgbClr val="E3E8E9"/>
-                      </a:solidFill>
-                      <a:prstDash val="solid"/>
-                      <a:round/>
-                      <a:headEnd type="none" w="med" len="med"/>
-                      <a:tailEnd type="none" w="med" len="med"/>
-                    </a:lnR>
-                    <a:lnT w="6350" cap="flat" cmpd="sng" algn="ctr">
-                      <a:solidFill>
-                        <a:srgbClr val="E3E8E9"/>
-                      </a:solidFill>
-                      <a:prstDash val="solid"/>
-                      <a:round/>
-                      <a:headEnd type="none" w="med" len="med"/>
-                      <a:tailEnd type="none" w="med" len="med"/>
-                    </a:lnT>
-                    <a:lnB w="6350" cap="flat" cmpd="sng" algn="ctr">
-                      <a:solidFill>
-                        <a:srgbClr val="E3E8E9"/>
-                      </a:solidFill>
-                      <a:prstDash val="solid"/>
-                      <a:round/>
-                      <a:headEnd type="none" w="med" len="med"/>
-                      <a:tailEnd type="none" w="med" len="med"/>
-                    </a:lnB>
-                    <a:solidFill>
-                      <a:srgbClr val="F0F4F5"/>
-                    </a:solidFill>
-                  </a:tcPr>
-                </a:tc>
-                <a:tc>
-                  <a:txBody>
-                    <a:bodyPr/>
-                    <a:lstStyle/>
-                    <a:p>
-                      <a:pPr indent="0" marL="0">
-                        <a:buNone/>
-                      </a:pPr>
-                      <a:r>
-                        <a:rPr lang="en-US" sz="950" dirty="0">
-                          <a:solidFill>
-                            <a:srgbClr val="5B6B73"/>
-                          </a:solidFill>
-                          <a:latin typeface="Calibri" pitchFamily="34" charset="0"/>
-                          <a:ea typeface="Calibri" pitchFamily="34" charset="-122"/>
-                          <a:cs typeface="Calibri" pitchFamily="34" charset="-120"/>
-                        </a:rPr>
                         <a:t>MNT – Manutenção</a:t>
                       </a:r>
                       <a:endParaRPr lang="en-US" sz="950" dirty="0">
@@ -28757,7 +28483,7 @@
                       <a:tailEnd type="none" w="med" len="med"/>
                     </a:lnB>
                     <a:solidFill>
-                      <a:srgbClr val="F0F4F5"/>
+                      <a:srgbClr val="FFFFFF"/>
                     </a:solidFill>
                   </a:tcPr>
                 </a:tc>
@@ -28825,7 +28551,7 @@
                       <a:tailEnd type="none" w="med" len="med"/>
                     </a:lnB>
                     <a:solidFill>
-                      <a:srgbClr val="F0F4F5"/>
+                      <a:srgbClr val="FFFFFF"/>
                     </a:solidFill>
                   </a:tcPr>
                 </a:tc>
@@ -28849,280 +28575,6 @@
                           <a:cs typeface="Calibri" pitchFamily="34" charset="-120"/>
                         </a:rPr>
                         <a:t>Frade 100K (Fase 2)</a:t>
-                      </a:r>
-                      <a:endParaRPr lang="en-US" sz="1000" dirty="0">
-                        <a:latin typeface="Calibri" charset="0"/>
-                        <a:ea typeface="Calibri" charset="0"/>
-                        <a:cs typeface="Calibri" charset="0"/>
-                      </a:endParaRPr>
-                    </a:p>
-                  </a:txBody>
-                  <a:tcPr marL="91440" marR="91440" marT="45720" marB="45720" anchor="ctr">
-                    <a:lnL w="6350" cap="flat" cmpd="sng" algn="ctr">
-                      <a:solidFill>
-                        <a:srgbClr val="E3E8E9"/>
-                      </a:solidFill>
-                      <a:prstDash val="solid"/>
-                      <a:round/>
-                      <a:headEnd type="none" w="med" len="med"/>
-                      <a:tailEnd type="none" w="med" len="med"/>
-                    </a:lnL>
-                    <a:lnR w="6350" cap="flat" cmpd="sng" algn="ctr">
-                      <a:solidFill>
-                        <a:srgbClr val="E3E8E9"/>
-                      </a:solidFill>
-                      <a:prstDash val="solid"/>
-                      <a:round/>
-                      <a:headEnd type="none" w="med" len="med"/>
-                      <a:tailEnd type="none" w="med" len="med"/>
-                    </a:lnR>
-                    <a:lnT w="6350" cap="flat" cmpd="sng" algn="ctr">
-                      <a:solidFill>
-                        <a:srgbClr val="E3E8E9"/>
-                      </a:solidFill>
-                      <a:prstDash val="solid"/>
-                      <a:round/>
-                      <a:headEnd type="none" w="med" len="med"/>
-                      <a:tailEnd type="none" w="med" len="med"/>
-                    </a:lnT>
-                    <a:lnB w="6350" cap="flat" cmpd="sng" algn="ctr">
-                      <a:solidFill>
-                        <a:srgbClr val="E3E8E9"/>
-                      </a:solidFill>
-                      <a:prstDash val="solid"/>
-                      <a:round/>
-                      <a:headEnd type="none" w="med" len="med"/>
-                      <a:tailEnd type="none" w="med" len="med"/>
-                    </a:lnB>
-                    <a:solidFill>
-                      <a:srgbClr val="FFFFFF"/>
-                    </a:solidFill>
-                  </a:tcPr>
-                </a:tc>
-                <a:tc>
-                  <a:txBody>
-                    <a:bodyPr/>
-                    <a:lstStyle/>
-                    <a:p>
-                      <a:pPr indent="0" marL="0">
-                        <a:buNone/>
-                      </a:pPr>
-                      <a:r>
-                        <a:rPr lang="en-US" sz="950" dirty="0">
-                          <a:solidFill>
-                            <a:srgbClr val="5B6B73"/>
-                          </a:solidFill>
-                          <a:latin typeface="Calibri" pitchFamily="34" charset="0"/>
-                          <a:ea typeface="Calibri" pitchFamily="34" charset="-122"/>
-                          <a:cs typeface="Calibri" pitchFamily="34" charset="-120"/>
-                        </a:rPr>
-                        <a:t>Eficiência de Produção</a:t>
-                      </a:r>
-                      <a:endParaRPr lang="en-US" sz="950" dirty="0">
-                        <a:latin typeface="Calibri" charset="0"/>
-                        <a:ea typeface="Calibri" charset="0"/>
-                        <a:cs typeface="Calibri" charset="0"/>
-                      </a:endParaRPr>
-                    </a:p>
-                  </a:txBody>
-                  <a:tcPr marL="91440" marR="91440" marT="45720" marB="45720" anchor="ctr">
-                    <a:lnL w="6350" cap="flat" cmpd="sng" algn="ctr">
-                      <a:solidFill>
-                        <a:srgbClr val="E3E8E9"/>
-                      </a:solidFill>
-                      <a:prstDash val="solid"/>
-                      <a:round/>
-                      <a:headEnd type="none" w="med" len="med"/>
-                      <a:tailEnd type="none" w="med" len="med"/>
-                    </a:lnL>
-                    <a:lnR w="6350" cap="flat" cmpd="sng" algn="ctr">
-                      <a:solidFill>
-                        <a:srgbClr val="E3E8E9"/>
-                      </a:solidFill>
-                      <a:prstDash val="solid"/>
-                      <a:round/>
-                      <a:headEnd type="none" w="med" len="med"/>
-                      <a:tailEnd type="none" w="med" len="med"/>
-                    </a:lnR>
-                    <a:lnT w="6350" cap="flat" cmpd="sng" algn="ctr">
-                      <a:solidFill>
-                        <a:srgbClr val="E3E8E9"/>
-                      </a:solidFill>
-                      <a:prstDash val="solid"/>
-                      <a:round/>
-                      <a:headEnd type="none" w="med" len="med"/>
-                      <a:tailEnd type="none" w="med" len="med"/>
-                    </a:lnT>
-                    <a:lnB w="6350" cap="flat" cmpd="sng" algn="ctr">
-                      <a:solidFill>
-                        <a:srgbClr val="E3E8E9"/>
-                      </a:solidFill>
-                      <a:prstDash val="solid"/>
-                      <a:round/>
-                      <a:headEnd type="none" w="med" len="med"/>
-                      <a:tailEnd type="none" w="med" len="med"/>
-                    </a:lnB>
-                    <a:solidFill>
-                      <a:srgbClr val="FFFFFF"/>
-                    </a:solidFill>
-                  </a:tcPr>
-                </a:tc>
-                <a:tc>
-                  <a:txBody>
-                    <a:bodyPr/>
-                    <a:lstStyle/>
-                    <a:p>
-                      <a:pPr indent="0" marL="0">
-                        <a:buNone/>
-                      </a:pPr>
-                      <a:r>
-                        <a:rPr lang="en-US" sz="950" dirty="0">
-                          <a:solidFill>
-                            <a:srgbClr val="5B6B73"/>
-                          </a:solidFill>
-                          <a:latin typeface="Calibri" pitchFamily="34" charset="0"/>
-                          <a:ea typeface="Calibri" pitchFamily="34" charset="-122"/>
-                          <a:cs typeface="Calibri" pitchFamily="34" charset="-120"/>
-                        </a:rPr>
-                        <a:t>Projetos</a:t>
-                      </a:r>
-                      <a:endParaRPr lang="en-US" sz="950" dirty="0">
-                        <a:latin typeface="Calibri" charset="0"/>
-                        <a:ea typeface="Calibri" charset="0"/>
-                        <a:cs typeface="Calibri" charset="0"/>
-                      </a:endParaRPr>
-                    </a:p>
-                  </a:txBody>
-                  <a:tcPr marL="91440" marR="91440" marT="45720" marB="45720" anchor="ctr">
-                    <a:lnL w="6350" cap="flat" cmpd="sng" algn="ctr">
-                      <a:solidFill>
-                        <a:srgbClr val="E3E8E9"/>
-                      </a:solidFill>
-                      <a:prstDash val="solid"/>
-                      <a:round/>
-                      <a:headEnd type="none" w="med" len="med"/>
-                      <a:tailEnd type="none" w="med" len="med"/>
-                    </a:lnL>
-                    <a:lnR w="6350" cap="flat" cmpd="sng" algn="ctr">
-                      <a:solidFill>
-                        <a:srgbClr val="E3E8E9"/>
-                      </a:solidFill>
-                      <a:prstDash val="solid"/>
-                      <a:round/>
-                      <a:headEnd type="none" w="med" len="med"/>
-                      <a:tailEnd type="none" w="med" len="med"/>
-                    </a:lnR>
-                    <a:lnT w="6350" cap="flat" cmpd="sng" algn="ctr">
-                      <a:solidFill>
-                        <a:srgbClr val="E3E8E9"/>
-                      </a:solidFill>
-                      <a:prstDash val="solid"/>
-                      <a:round/>
-                      <a:headEnd type="none" w="med" len="med"/>
-                      <a:tailEnd type="none" w="med" len="med"/>
-                    </a:lnT>
-                    <a:lnB w="6350" cap="flat" cmpd="sng" algn="ctr">
-                      <a:solidFill>
-                        <a:srgbClr val="E3E8E9"/>
-                      </a:solidFill>
-                      <a:prstDash val="solid"/>
-                      <a:round/>
-                      <a:headEnd type="none" w="med" len="med"/>
-                      <a:tailEnd type="none" w="med" len="med"/>
-                    </a:lnB>
-                    <a:solidFill>
-                      <a:srgbClr val="FFFFFF"/>
-                    </a:solidFill>
-                  </a:tcPr>
-                </a:tc>
-                <a:tc>
-                  <a:txBody>
-                    <a:bodyPr/>
-                    <a:lstStyle/>
-                    <a:p>
-                      <a:pPr algn="r" indent="0" marL="0">
-                        <a:buNone/>
-                      </a:pPr>
-                      <a:r>
-                        <a:rPr lang="en-US" sz="1000" b="1" dirty="0">
-                          <a:solidFill>
-                            <a:srgbClr val="0B2A3D"/>
-                          </a:solidFill>
-                          <a:latin typeface="Calibri" pitchFamily="34" charset="0"/>
-                          <a:ea typeface="Calibri" pitchFamily="34" charset="-122"/>
-                          <a:cs typeface="Calibri" pitchFamily="34" charset="-120"/>
-                        </a:rPr>
-                        <a:t>US$ 5,4 mi</a:t>
-                      </a:r>
-                      <a:endParaRPr lang="en-US" sz="1000" dirty="0">
-                        <a:latin typeface="Calibri" charset="0"/>
-                        <a:ea typeface="Calibri" charset="0"/>
-                        <a:cs typeface="Calibri" charset="0"/>
-                      </a:endParaRPr>
-                    </a:p>
-                  </a:txBody>
-                  <a:tcPr marL="91440" marR="91440" marT="45720" marB="45720" anchor="ctr">
-                    <a:lnL w="6350" cap="flat" cmpd="sng" algn="ctr">
-                      <a:solidFill>
-                        <a:srgbClr val="E3E8E9"/>
-                      </a:solidFill>
-                      <a:prstDash val="solid"/>
-                      <a:round/>
-                      <a:headEnd type="none" w="med" len="med"/>
-                      <a:tailEnd type="none" w="med" len="med"/>
-                    </a:lnL>
-                    <a:lnR w="6350" cap="flat" cmpd="sng" algn="ctr">
-                      <a:solidFill>
-                        <a:srgbClr val="E3E8E9"/>
-                      </a:solidFill>
-                      <a:prstDash val="solid"/>
-                      <a:round/>
-                      <a:headEnd type="none" w="med" len="med"/>
-                      <a:tailEnd type="none" w="med" len="med"/>
-                    </a:lnR>
-                    <a:lnT w="6350" cap="flat" cmpd="sng" algn="ctr">
-                      <a:solidFill>
-                        <a:srgbClr val="E3E8E9"/>
-                      </a:solidFill>
-                      <a:prstDash val="solid"/>
-                      <a:round/>
-                      <a:headEnd type="none" w="med" len="med"/>
-                      <a:tailEnd type="none" w="med" len="med"/>
-                    </a:lnT>
-                    <a:lnB w="6350" cap="flat" cmpd="sng" algn="ctr">
-                      <a:solidFill>
-                        <a:srgbClr val="E3E8E9"/>
-                      </a:solidFill>
-                      <a:prstDash val="solid"/>
-                      <a:round/>
-                      <a:headEnd type="none" w="med" len="med"/>
-                      <a:tailEnd type="none" w="med" len="med"/>
-                    </a:lnB>
-                    <a:solidFill>
-                      <a:srgbClr val="FFFFFF"/>
-                    </a:solidFill>
-                  </a:tcPr>
-                </a:tc>
-              </a:tr>
-              <a:tr h="288036">
-                <a:tc>
-                  <a:txBody>
-                    <a:bodyPr/>
-                    <a:lstStyle/>
-                    <a:p>
-                      <a:pPr indent="0" marL="0">
-                        <a:buNone/>
-                      </a:pPr>
-                      <a:r>
-                        <a:rPr lang="en-US" sz="1000" dirty="0">
-                          <a:solidFill>
-                            <a:srgbClr val="1C2B33"/>
-                          </a:solidFill>
-                          <a:latin typeface="Calibri" pitchFamily="34" charset="0"/>
-                          <a:ea typeface="Calibri" pitchFamily="34" charset="-122"/>
-                          <a:cs typeface="Calibri" pitchFamily="34" charset="-120"/>
-                        </a:rPr>
-                        <a:t>Atualização Tecnológica das GTGs</a:t>
                       </a:r>
                       <a:endParaRPr lang="en-US" sz="1000" dirty="0">
                         <a:latin typeface="Calibri" charset="0"/>
@@ -29326,7 +28778,7 @@
                           <a:ea typeface="Calibri" pitchFamily="34" charset="-122"/>
                           <a:cs typeface="Calibri" pitchFamily="34" charset="-120"/>
                         </a:rPr>
-                        <a:t>US$ 3,6 mi</a:t>
+                        <a:t>US$ 5,4 mi</a:t>
                       </a:r>
                       <a:endParaRPr lang="en-US" sz="1000" dirty="0">
                         <a:latin typeface="Calibri" charset="0"/>
@@ -29396,7 +28848,7 @@
                           <a:ea typeface="Calibri" pitchFamily="34" charset="-122"/>
                           <a:cs typeface="Calibri" pitchFamily="34" charset="-120"/>
                         </a:rPr>
-                        <a:t>REVAMP IGG</a:t>
+                        <a:t>SPARE PARTS RECONDICIONAMENTO DOS BOOGIES</a:t>
                       </a:r>
                       <a:endParaRPr lang="en-US" sz="1000" dirty="0">
                         <a:latin typeface="Calibri" charset="0"/>
@@ -29532,7 +28984,7 @@
                           <a:ea typeface="Calibri" pitchFamily="34" charset="-122"/>
                           <a:cs typeface="Calibri" pitchFamily="34" charset="-120"/>
                         </a:rPr>
-                        <a:t>MNT – Manutenção</a:t>
+                        <a:t>NAV - Naval</a:t>
                       </a:r>
                       <a:endParaRPr lang="en-US" sz="950" dirty="0">
                         <a:latin typeface="Calibri" charset="0"/>
@@ -29600,7 +29052,7 @@
                           <a:ea typeface="Calibri" pitchFamily="34" charset="-122"/>
                           <a:cs typeface="Calibri" pitchFamily="34" charset="-120"/>
                         </a:rPr>
-                        <a:t>US$ 3,6 mi</a:t>
+                        <a:t>US$ 3,2 mi</a:t>
                       </a:r>
                       <a:endParaRPr lang="en-US" sz="1000" dirty="0">
                         <a:latin typeface="Calibri" charset="0"/>
@@ -29874,7 +29326,7 @@
                           <a:ea typeface="Calibri" pitchFamily="34" charset="-122"/>
                           <a:cs typeface="Calibri" pitchFamily="34" charset="-120"/>
                         </a:rPr>
-                        <a:t>US$ 2,9 mi</a:t>
+                        <a:t>US$ 2,1 mi</a:t>
                       </a:r>
                       <a:endParaRPr lang="en-US" sz="1000" dirty="0">
                         <a:latin typeface="Calibri" charset="0"/>
@@ -29944,7 +29396,7 @@
                           <a:ea typeface="Calibri" pitchFamily="34" charset="-122"/>
                           <a:cs typeface="Calibri" pitchFamily="34" charset="-120"/>
                         </a:rPr>
-                        <a:t>SUBSTITUIÇÃO DA AMARRA 06</a:t>
+                        <a:t>Instalação linha offloading </a:t>
                       </a:r>
                       <a:endParaRPr lang="en-US" sz="1000" dirty="0">
                         <a:latin typeface="Calibri" charset="0"/>
@@ -30080,7 +29532,7 @@
                           <a:ea typeface="Calibri" pitchFamily="34" charset="-122"/>
                           <a:cs typeface="Calibri" pitchFamily="34" charset="-120"/>
                         </a:rPr>
-                        <a:t>NAV - Naval</a:t>
+                        <a:t>INT - Integridade</a:t>
                       </a:r>
                       <a:endParaRPr lang="en-US" sz="950" dirty="0">
                         <a:latin typeface="Calibri" charset="0"/>
@@ -30148,7 +29600,7 @@
                           <a:ea typeface="Calibri" pitchFamily="34" charset="-122"/>
                           <a:cs typeface="Calibri" pitchFamily="34" charset="-120"/>
                         </a:rPr>
-                        <a:t>US$ 2,8 mi</a:t>
+                        <a:t>US$ 1,7 mi</a:t>
                       </a:r>
                       <a:endParaRPr lang="en-US" sz="1000" dirty="0">
                         <a:latin typeface="Calibri" charset="0"/>
@@ -30218,7 +29670,7 @@
                           <a:ea typeface="Calibri" pitchFamily="34" charset="-122"/>
                           <a:cs typeface="Calibri" pitchFamily="34" charset="-120"/>
                         </a:rPr>
-                        <a:t>Instalação linha offloading </a:t>
+                        <a:t>REVAMP IGG</a:t>
                       </a:r>
                       <a:endParaRPr lang="en-US" sz="1000" dirty="0">
                         <a:latin typeface="Calibri" charset="0"/>
@@ -30286,7 +29738,7 @@
                           <a:ea typeface="Calibri" pitchFamily="34" charset="-122"/>
                           <a:cs typeface="Calibri" pitchFamily="34" charset="-120"/>
                         </a:rPr>
-                        <a:t>Integridade e Regulatório</a:t>
+                        <a:t>Rotina Operacional</a:t>
                       </a:r>
                       <a:endParaRPr lang="en-US" sz="950" dirty="0">
                         <a:latin typeface="Calibri" charset="0"/>
@@ -30354,7 +29806,7 @@
                           <a:ea typeface="Calibri" pitchFamily="34" charset="-122"/>
                           <a:cs typeface="Calibri" pitchFamily="34" charset="-120"/>
                         </a:rPr>
-                        <a:t>INT - Integridade</a:t>
+                        <a:t>MNT – Manutenção</a:t>
                       </a:r>
                       <a:endParaRPr lang="en-US" sz="950" dirty="0">
                         <a:latin typeface="Calibri" charset="0"/>
@@ -30422,7 +29874,7 @@
                           <a:ea typeface="Calibri" pitchFamily="34" charset="-122"/>
                           <a:cs typeface="Calibri" pitchFamily="34" charset="-120"/>
                         </a:rPr>
-                        <a:t>US$ 1,7 mi</a:t>
+                        <a:t>US$ 1,6 mi</a:t>
                       </a:r>
                       <a:endParaRPr lang="en-US" sz="1000" dirty="0">
                         <a:latin typeface="Calibri" charset="0"/>
@@ -30766,7 +30218,7 @@
                           <a:ea typeface="Calibri" pitchFamily="34" charset="-122"/>
                           <a:cs typeface="Calibri" pitchFamily="34" charset="-120"/>
                         </a:rPr>
-                        <a:t>REPARO E INSTALAÇÃO DA PIGGING PUMP</a:t>
+                        <a:t>Sensores de H2S</a:t>
                       </a:r>
                       <a:endParaRPr lang="en-US" sz="1000" dirty="0">
                         <a:latin typeface="Calibri" charset="0"/>
@@ -30834,7 +30286,7 @@
                           <a:ea typeface="Calibri" pitchFamily="34" charset="-122"/>
                           <a:cs typeface="Calibri" pitchFamily="34" charset="-120"/>
                         </a:rPr>
-                        <a:t>Eficiência de Produção</a:t>
+                        <a:t>Bem Estar/Segurança</a:t>
                       </a:r>
                       <a:endParaRPr lang="en-US" sz="950" dirty="0">
                         <a:latin typeface="Calibri" charset="0"/>
@@ -30902,7 +30354,7 @@
                           <a:ea typeface="Calibri" pitchFamily="34" charset="-122"/>
                           <a:cs typeface="Calibri" pitchFamily="34" charset="-120"/>
                         </a:rPr>
-                        <a:t>MNT – Manutenção</a:t>
+                        <a:t>Projetos</a:t>
                       </a:r>
                       <a:endParaRPr lang="en-US" sz="950" dirty="0">
                         <a:latin typeface="Calibri" charset="0"/>
@@ -30970,7 +30422,555 @@
                           <a:ea typeface="Calibri" pitchFamily="34" charset="-122"/>
                           <a:cs typeface="Calibri" pitchFamily="34" charset="-120"/>
                         </a:rPr>
-                        <a:t>US$ 1,5 mi</a:t>
+                        <a:t>US$ 1,4 mi</a:t>
+                      </a:r>
+                      <a:endParaRPr lang="en-US" sz="1000" dirty="0">
+                        <a:latin typeface="Calibri" charset="0"/>
+                        <a:ea typeface="Calibri" charset="0"/>
+                        <a:cs typeface="Calibri" charset="0"/>
+                      </a:endParaRPr>
+                    </a:p>
+                  </a:txBody>
+                  <a:tcPr marL="91440" marR="91440" marT="45720" marB="45720" anchor="ctr">
+                    <a:lnL w="6350" cap="flat" cmpd="sng" algn="ctr">
+                      <a:solidFill>
+                        <a:srgbClr val="E3E8E9"/>
+                      </a:solidFill>
+                      <a:prstDash val="solid"/>
+                      <a:round/>
+                      <a:headEnd type="none" w="med" len="med"/>
+                      <a:tailEnd type="none" w="med" len="med"/>
+                    </a:lnL>
+                    <a:lnR w="6350" cap="flat" cmpd="sng" algn="ctr">
+                      <a:solidFill>
+                        <a:srgbClr val="E3E8E9"/>
+                      </a:solidFill>
+                      <a:prstDash val="solid"/>
+                      <a:round/>
+                      <a:headEnd type="none" w="med" len="med"/>
+                      <a:tailEnd type="none" w="med" len="med"/>
+                    </a:lnR>
+                    <a:lnT w="6350" cap="flat" cmpd="sng" algn="ctr">
+                      <a:solidFill>
+                        <a:srgbClr val="E3E8E9"/>
+                      </a:solidFill>
+                      <a:prstDash val="solid"/>
+                      <a:round/>
+                      <a:headEnd type="none" w="med" len="med"/>
+                      <a:tailEnd type="none" w="med" len="med"/>
+                    </a:lnT>
+                    <a:lnB w="6350" cap="flat" cmpd="sng" algn="ctr">
+                      <a:solidFill>
+                        <a:srgbClr val="E3E8E9"/>
+                      </a:solidFill>
+                      <a:prstDash val="solid"/>
+                      <a:round/>
+                      <a:headEnd type="none" w="med" len="med"/>
+                      <a:tailEnd type="none" w="med" len="med"/>
+                    </a:lnB>
+                    <a:solidFill>
+                      <a:srgbClr val="F0F4F5"/>
+                    </a:solidFill>
+                  </a:tcPr>
+                </a:tc>
+              </a:tr>
+              <a:tr h="288036">
+                <a:tc>
+                  <a:txBody>
+                    <a:bodyPr/>
+                    <a:lstStyle/>
+                    <a:p>
+                      <a:pPr indent="0" marL="0">
+                        <a:buNone/>
+                      </a:pPr>
+                      <a:r>
+                        <a:rPr lang="en-US" sz="1000" dirty="0">
+                          <a:solidFill>
+                            <a:srgbClr val="1C2B33"/>
+                          </a:solidFill>
+                          <a:latin typeface="Calibri" pitchFamily="34" charset="0"/>
+                          <a:ea typeface="Calibri" pitchFamily="34" charset="-122"/>
+                          <a:cs typeface="Calibri" pitchFamily="34" charset="-120"/>
+                        </a:rPr>
+                        <a:t>Skids de Dilúvio</a:t>
+                      </a:r>
+                      <a:endParaRPr lang="en-US" sz="1000" dirty="0">
+                        <a:latin typeface="Calibri" charset="0"/>
+                        <a:ea typeface="Calibri" charset="0"/>
+                        <a:cs typeface="Calibri" charset="0"/>
+                      </a:endParaRPr>
+                    </a:p>
+                  </a:txBody>
+                  <a:tcPr marL="91440" marR="91440" marT="45720" marB="45720" anchor="ctr">
+                    <a:lnL w="6350" cap="flat" cmpd="sng" algn="ctr">
+                      <a:solidFill>
+                        <a:srgbClr val="E3E8E9"/>
+                      </a:solidFill>
+                      <a:prstDash val="solid"/>
+                      <a:round/>
+                      <a:headEnd type="none" w="med" len="med"/>
+                      <a:tailEnd type="none" w="med" len="med"/>
+                    </a:lnL>
+                    <a:lnR w="6350" cap="flat" cmpd="sng" algn="ctr">
+                      <a:solidFill>
+                        <a:srgbClr val="E3E8E9"/>
+                      </a:solidFill>
+                      <a:prstDash val="solid"/>
+                      <a:round/>
+                      <a:headEnd type="none" w="med" len="med"/>
+                      <a:tailEnd type="none" w="med" len="med"/>
+                    </a:lnR>
+                    <a:lnT w="6350" cap="flat" cmpd="sng" algn="ctr">
+                      <a:solidFill>
+                        <a:srgbClr val="E3E8E9"/>
+                      </a:solidFill>
+                      <a:prstDash val="solid"/>
+                      <a:round/>
+                      <a:headEnd type="none" w="med" len="med"/>
+                      <a:tailEnd type="none" w="med" len="med"/>
+                    </a:lnT>
+                    <a:lnB w="6350" cap="flat" cmpd="sng" algn="ctr">
+                      <a:solidFill>
+                        <a:srgbClr val="E3E8E9"/>
+                      </a:solidFill>
+                      <a:prstDash val="solid"/>
+                      <a:round/>
+                      <a:headEnd type="none" w="med" len="med"/>
+                      <a:tailEnd type="none" w="med" len="med"/>
+                    </a:lnB>
+                    <a:solidFill>
+                      <a:srgbClr val="FFFFFF"/>
+                    </a:solidFill>
+                  </a:tcPr>
+                </a:tc>
+                <a:tc>
+                  <a:txBody>
+                    <a:bodyPr/>
+                    <a:lstStyle/>
+                    <a:p>
+                      <a:pPr indent="0" marL="0">
+                        <a:buNone/>
+                      </a:pPr>
+                      <a:r>
+                        <a:rPr lang="en-US" sz="950" dirty="0">
+                          <a:solidFill>
+                            <a:srgbClr val="5B6B73"/>
+                          </a:solidFill>
+                          <a:latin typeface="Calibri" pitchFamily="34" charset="0"/>
+                          <a:ea typeface="Calibri" pitchFamily="34" charset="-122"/>
+                          <a:cs typeface="Calibri" pitchFamily="34" charset="-120"/>
+                        </a:rPr>
+                        <a:t>Bem Estar/Segurança</a:t>
+                      </a:r>
+                      <a:endParaRPr lang="en-US" sz="950" dirty="0">
+                        <a:latin typeface="Calibri" charset="0"/>
+                        <a:ea typeface="Calibri" charset="0"/>
+                        <a:cs typeface="Calibri" charset="0"/>
+                      </a:endParaRPr>
+                    </a:p>
+                  </a:txBody>
+                  <a:tcPr marL="91440" marR="91440" marT="45720" marB="45720" anchor="ctr">
+                    <a:lnL w="6350" cap="flat" cmpd="sng" algn="ctr">
+                      <a:solidFill>
+                        <a:srgbClr val="E3E8E9"/>
+                      </a:solidFill>
+                      <a:prstDash val="solid"/>
+                      <a:round/>
+                      <a:headEnd type="none" w="med" len="med"/>
+                      <a:tailEnd type="none" w="med" len="med"/>
+                    </a:lnL>
+                    <a:lnR w="6350" cap="flat" cmpd="sng" algn="ctr">
+                      <a:solidFill>
+                        <a:srgbClr val="E3E8E9"/>
+                      </a:solidFill>
+                      <a:prstDash val="solid"/>
+                      <a:round/>
+                      <a:headEnd type="none" w="med" len="med"/>
+                      <a:tailEnd type="none" w="med" len="med"/>
+                    </a:lnR>
+                    <a:lnT w="6350" cap="flat" cmpd="sng" algn="ctr">
+                      <a:solidFill>
+                        <a:srgbClr val="E3E8E9"/>
+                      </a:solidFill>
+                      <a:prstDash val="solid"/>
+                      <a:round/>
+                      <a:headEnd type="none" w="med" len="med"/>
+                      <a:tailEnd type="none" w="med" len="med"/>
+                    </a:lnT>
+                    <a:lnB w="6350" cap="flat" cmpd="sng" algn="ctr">
+                      <a:solidFill>
+                        <a:srgbClr val="E3E8E9"/>
+                      </a:solidFill>
+                      <a:prstDash val="solid"/>
+                      <a:round/>
+                      <a:headEnd type="none" w="med" len="med"/>
+                      <a:tailEnd type="none" w="med" len="med"/>
+                    </a:lnB>
+                    <a:solidFill>
+                      <a:srgbClr val="FFFFFF"/>
+                    </a:solidFill>
+                  </a:tcPr>
+                </a:tc>
+                <a:tc>
+                  <a:txBody>
+                    <a:bodyPr/>
+                    <a:lstStyle/>
+                    <a:p>
+                      <a:pPr indent="0" marL="0">
+                        <a:buNone/>
+                      </a:pPr>
+                      <a:r>
+                        <a:rPr lang="en-US" sz="950" dirty="0">
+                          <a:solidFill>
+                            <a:srgbClr val="5B6B73"/>
+                          </a:solidFill>
+                          <a:latin typeface="Calibri" pitchFamily="34" charset="0"/>
+                          <a:ea typeface="Calibri" pitchFamily="34" charset="-122"/>
+                          <a:cs typeface="Calibri" pitchFamily="34" charset="-120"/>
+                        </a:rPr>
+                        <a:t>Projetos</a:t>
+                      </a:r>
+                      <a:endParaRPr lang="en-US" sz="950" dirty="0">
+                        <a:latin typeface="Calibri" charset="0"/>
+                        <a:ea typeface="Calibri" charset="0"/>
+                        <a:cs typeface="Calibri" charset="0"/>
+                      </a:endParaRPr>
+                    </a:p>
+                  </a:txBody>
+                  <a:tcPr marL="91440" marR="91440" marT="45720" marB="45720" anchor="ctr">
+                    <a:lnL w="6350" cap="flat" cmpd="sng" algn="ctr">
+                      <a:solidFill>
+                        <a:srgbClr val="E3E8E9"/>
+                      </a:solidFill>
+                      <a:prstDash val="solid"/>
+                      <a:round/>
+                      <a:headEnd type="none" w="med" len="med"/>
+                      <a:tailEnd type="none" w="med" len="med"/>
+                    </a:lnL>
+                    <a:lnR w="6350" cap="flat" cmpd="sng" algn="ctr">
+                      <a:solidFill>
+                        <a:srgbClr val="E3E8E9"/>
+                      </a:solidFill>
+                      <a:prstDash val="solid"/>
+                      <a:round/>
+                      <a:headEnd type="none" w="med" len="med"/>
+                      <a:tailEnd type="none" w="med" len="med"/>
+                    </a:lnR>
+                    <a:lnT w="6350" cap="flat" cmpd="sng" algn="ctr">
+                      <a:solidFill>
+                        <a:srgbClr val="E3E8E9"/>
+                      </a:solidFill>
+                      <a:prstDash val="solid"/>
+                      <a:round/>
+                      <a:headEnd type="none" w="med" len="med"/>
+                      <a:tailEnd type="none" w="med" len="med"/>
+                    </a:lnT>
+                    <a:lnB w="6350" cap="flat" cmpd="sng" algn="ctr">
+                      <a:solidFill>
+                        <a:srgbClr val="E3E8E9"/>
+                      </a:solidFill>
+                      <a:prstDash val="solid"/>
+                      <a:round/>
+                      <a:headEnd type="none" w="med" len="med"/>
+                      <a:tailEnd type="none" w="med" len="med"/>
+                    </a:lnB>
+                    <a:solidFill>
+                      <a:srgbClr val="FFFFFF"/>
+                    </a:solidFill>
+                  </a:tcPr>
+                </a:tc>
+                <a:tc>
+                  <a:txBody>
+                    <a:bodyPr/>
+                    <a:lstStyle/>
+                    <a:p>
+                      <a:pPr algn="r" indent="0" marL="0">
+                        <a:buNone/>
+                      </a:pPr>
+                      <a:r>
+                        <a:rPr lang="en-US" sz="1000" b="1" dirty="0">
+                          <a:solidFill>
+                            <a:srgbClr val="0B2A3D"/>
+                          </a:solidFill>
+                          <a:latin typeface="Calibri" pitchFamily="34" charset="0"/>
+                          <a:ea typeface="Calibri" pitchFamily="34" charset="-122"/>
+                          <a:cs typeface="Calibri" pitchFamily="34" charset="-120"/>
+                        </a:rPr>
+                        <a:t>US$ 1,3 mi</a:t>
+                      </a:r>
+                      <a:endParaRPr lang="en-US" sz="1000" dirty="0">
+                        <a:latin typeface="Calibri" charset="0"/>
+                        <a:ea typeface="Calibri" charset="0"/>
+                        <a:cs typeface="Calibri" charset="0"/>
+                      </a:endParaRPr>
+                    </a:p>
+                  </a:txBody>
+                  <a:tcPr marL="91440" marR="91440" marT="45720" marB="45720" anchor="ctr">
+                    <a:lnL w="6350" cap="flat" cmpd="sng" algn="ctr">
+                      <a:solidFill>
+                        <a:srgbClr val="E3E8E9"/>
+                      </a:solidFill>
+                      <a:prstDash val="solid"/>
+                      <a:round/>
+                      <a:headEnd type="none" w="med" len="med"/>
+                      <a:tailEnd type="none" w="med" len="med"/>
+                    </a:lnL>
+                    <a:lnR w="6350" cap="flat" cmpd="sng" algn="ctr">
+                      <a:solidFill>
+                        <a:srgbClr val="E3E8E9"/>
+                      </a:solidFill>
+                      <a:prstDash val="solid"/>
+                      <a:round/>
+                      <a:headEnd type="none" w="med" len="med"/>
+                      <a:tailEnd type="none" w="med" len="med"/>
+                    </a:lnR>
+                    <a:lnT w="6350" cap="flat" cmpd="sng" algn="ctr">
+                      <a:solidFill>
+                        <a:srgbClr val="E3E8E9"/>
+                      </a:solidFill>
+                      <a:prstDash val="solid"/>
+                      <a:round/>
+                      <a:headEnd type="none" w="med" len="med"/>
+                      <a:tailEnd type="none" w="med" len="med"/>
+                    </a:lnT>
+                    <a:lnB w="6350" cap="flat" cmpd="sng" algn="ctr">
+                      <a:solidFill>
+                        <a:srgbClr val="E3E8E9"/>
+                      </a:solidFill>
+                      <a:prstDash val="solid"/>
+                      <a:round/>
+                      <a:headEnd type="none" w="med" len="med"/>
+                      <a:tailEnd type="none" w="med" len="med"/>
+                    </a:lnB>
+                    <a:solidFill>
+                      <a:srgbClr val="FFFFFF"/>
+                    </a:solidFill>
+                  </a:tcPr>
+                </a:tc>
+              </a:tr>
+              <a:tr h="288036">
+                <a:tc>
+                  <a:txBody>
+                    <a:bodyPr/>
+                    <a:lstStyle/>
+                    <a:p>
+                      <a:pPr indent="0" marL="0">
+                        <a:buNone/>
+                      </a:pPr>
+                      <a:r>
+                        <a:rPr lang="en-US" sz="1000" dirty="0">
+                          <a:solidFill>
+                            <a:srgbClr val="1C2B33"/>
+                          </a:solidFill>
+                          <a:latin typeface="Calibri" pitchFamily="34" charset="0"/>
+                          <a:ea typeface="Calibri" pitchFamily="34" charset="-122"/>
+                          <a:cs typeface="Calibri" pitchFamily="34" charset="-120"/>
+                        </a:rPr>
+                        <a:t>Combate a Incêndio - Compra e Instalação de Cabines de Dilúvio</a:t>
+                      </a:r>
+                      <a:endParaRPr lang="en-US" sz="1000" dirty="0">
+                        <a:latin typeface="Calibri" charset="0"/>
+                        <a:ea typeface="Calibri" charset="0"/>
+                        <a:cs typeface="Calibri" charset="0"/>
+                      </a:endParaRPr>
+                    </a:p>
+                  </a:txBody>
+                  <a:tcPr marL="91440" marR="91440" marT="45720" marB="45720" anchor="ctr">
+                    <a:lnL w="6350" cap="flat" cmpd="sng" algn="ctr">
+                      <a:solidFill>
+                        <a:srgbClr val="E3E8E9"/>
+                      </a:solidFill>
+                      <a:prstDash val="solid"/>
+                      <a:round/>
+                      <a:headEnd type="none" w="med" len="med"/>
+                      <a:tailEnd type="none" w="med" len="med"/>
+                    </a:lnL>
+                    <a:lnR w="6350" cap="flat" cmpd="sng" algn="ctr">
+                      <a:solidFill>
+                        <a:srgbClr val="E3E8E9"/>
+                      </a:solidFill>
+                      <a:prstDash val="solid"/>
+                      <a:round/>
+                      <a:headEnd type="none" w="med" len="med"/>
+                      <a:tailEnd type="none" w="med" len="med"/>
+                    </a:lnR>
+                    <a:lnT w="6350" cap="flat" cmpd="sng" algn="ctr">
+                      <a:solidFill>
+                        <a:srgbClr val="E3E8E9"/>
+                      </a:solidFill>
+                      <a:prstDash val="solid"/>
+                      <a:round/>
+                      <a:headEnd type="none" w="med" len="med"/>
+                      <a:tailEnd type="none" w="med" len="med"/>
+                    </a:lnT>
+                    <a:lnB w="6350" cap="flat" cmpd="sng" algn="ctr">
+                      <a:solidFill>
+                        <a:srgbClr val="E3E8E9"/>
+                      </a:solidFill>
+                      <a:prstDash val="solid"/>
+                      <a:round/>
+                      <a:headEnd type="none" w="med" len="med"/>
+                      <a:tailEnd type="none" w="med" len="med"/>
+                    </a:lnB>
+                    <a:solidFill>
+                      <a:srgbClr val="F0F4F5"/>
+                    </a:solidFill>
+                  </a:tcPr>
+                </a:tc>
+                <a:tc>
+                  <a:txBody>
+                    <a:bodyPr/>
+                    <a:lstStyle/>
+                    <a:p>
+                      <a:pPr indent="0" marL="0">
+                        <a:buNone/>
+                      </a:pPr>
+                      <a:r>
+                        <a:rPr lang="en-US" sz="950" dirty="0">
+                          <a:solidFill>
+                            <a:srgbClr val="5B6B73"/>
+                          </a:solidFill>
+                          <a:latin typeface="Calibri" pitchFamily="34" charset="0"/>
+                          <a:ea typeface="Calibri" pitchFamily="34" charset="-122"/>
+                          <a:cs typeface="Calibri" pitchFamily="34" charset="-120"/>
+                        </a:rPr>
+                        <a:t>Bem Estar/Segurança</a:t>
+                      </a:r>
+                      <a:endParaRPr lang="en-US" sz="950" dirty="0">
+                        <a:latin typeface="Calibri" charset="0"/>
+                        <a:ea typeface="Calibri" charset="0"/>
+                        <a:cs typeface="Calibri" charset="0"/>
+                      </a:endParaRPr>
+                    </a:p>
+                  </a:txBody>
+                  <a:tcPr marL="91440" marR="91440" marT="45720" marB="45720" anchor="ctr">
+                    <a:lnL w="6350" cap="flat" cmpd="sng" algn="ctr">
+                      <a:solidFill>
+                        <a:srgbClr val="E3E8E9"/>
+                      </a:solidFill>
+                      <a:prstDash val="solid"/>
+                      <a:round/>
+                      <a:headEnd type="none" w="med" len="med"/>
+                      <a:tailEnd type="none" w="med" len="med"/>
+                    </a:lnL>
+                    <a:lnR w="6350" cap="flat" cmpd="sng" algn="ctr">
+                      <a:solidFill>
+                        <a:srgbClr val="E3E8E9"/>
+                      </a:solidFill>
+                      <a:prstDash val="solid"/>
+                      <a:round/>
+                      <a:headEnd type="none" w="med" len="med"/>
+                      <a:tailEnd type="none" w="med" len="med"/>
+                    </a:lnR>
+                    <a:lnT w="6350" cap="flat" cmpd="sng" algn="ctr">
+                      <a:solidFill>
+                        <a:srgbClr val="E3E8E9"/>
+                      </a:solidFill>
+                      <a:prstDash val="solid"/>
+                      <a:round/>
+                      <a:headEnd type="none" w="med" len="med"/>
+                      <a:tailEnd type="none" w="med" len="med"/>
+                    </a:lnT>
+                    <a:lnB w="6350" cap="flat" cmpd="sng" algn="ctr">
+                      <a:solidFill>
+                        <a:srgbClr val="E3E8E9"/>
+                      </a:solidFill>
+                      <a:prstDash val="solid"/>
+                      <a:round/>
+                      <a:headEnd type="none" w="med" len="med"/>
+                      <a:tailEnd type="none" w="med" len="med"/>
+                    </a:lnB>
+                    <a:solidFill>
+                      <a:srgbClr val="F0F4F5"/>
+                    </a:solidFill>
+                  </a:tcPr>
+                </a:tc>
+                <a:tc>
+                  <a:txBody>
+                    <a:bodyPr/>
+                    <a:lstStyle/>
+                    <a:p>
+                      <a:pPr indent="0" marL="0">
+                        <a:buNone/>
+                      </a:pPr>
+                      <a:r>
+                        <a:rPr lang="en-US" sz="950" dirty="0">
+                          <a:solidFill>
+                            <a:srgbClr val="5B6B73"/>
+                          </a:solidFill>
+                          <a:latin typeface="Calibri" pitchFamily="34" charset="0"/>
+                          <a:ea typeface="Calibri" pitchFamily="34" charset="-122"/>
+                          <a:cs typeface="Calibri" pitchFamily="34" charset="-120"/>
+                        </a:rPr>
+                        <a:t>Saúde e Segurança Ocupacional</a:t>
+                      </a:r>
+                      <a:endParaRPr lang="en-US" sz="950" dirty="0">
+                        <a:latin typeface="Calibri" charset="0"/>
+                        <a:ea typeface="Calibri" charset="0"/>
+                        <a:cs typeface="Calibri" charset="0"/>
+                      </a:endParaRPr>
+                    </a:p>
+                  </a:txBody>
+                  <a:tcPr marL="91440" marR="91440" marT="45720" marB="45720" anchor="ctr">
+                    <a:lnL w="6350" cap="flat" cmpd="sng" algn="ctr">
+                      <a:solidFill>
+                        <a:srgbClr val="E3E8E9"/>
+                      </a:solidFill>
+                      <a:prstDash val="solid"/>
+                      <a:round/>
+                      <a:headEnd type="none" w="med" len="med"/>
+                      <a:tailEnd type="none" w="med" len="med"/>
+                    </a:lnL>
+                    <a:lnR w="6350" cap="flat" cmpd="sng" algn="ctr">
+                      <a:solidFill>
+                        <a:srgbClr val="E3E8E9"/>
+                      </a:solidFill>
+                      <a:prstDash val="solid"/>
+                      <a:round/>
+                      <a:headEnd type="none" w="med" len="med"/>
+                      <a:tailEnd type="none" w="med" len="med"/>
+                    </a:lnR>
+                    <a:lnT w="6350" cap="flat" cmpd="sng" algn="ctr">
+                      <a:solidFill>
+                        <a:srgbClr val="E3E8E9"/>
+                      </a:solidFill>
+                      <a:prstDash val="solid"/>
+                      <a:round/>
+                      <a:headEnd type="none" w="med" len="med"/>
+                      <a:tailEnd type="none" w="med" len="med"/>
+                    </a:lnT>
+                    <a:lnB w="6350" cap="flat" cmpd="sng" algn="ctr">
+                      <a:solidFill>
+                        <a:srgbClr val="E3E8E9"/>
+                      </a:solidFill>
+                      <a:prstDash val="solid"/>
+                      <a:round/>
+                      <a:headEnd type="none" w="med" len="med"/>
+                      <a:tailEnd type="none" w="med" len="med"/>
+                    </a:lnB>
+                    <a:solidFill>
+                      <a:srgbClr val="F0F4F5"/>
+                    </a:solidFill>
+                  </a:tcPr>
+                </a:tc>
+                <a:tc>
+                  <a:txBody>
+                    <a:bodyPr/>
+                    <a:lstStyle/>
+                    <a:p>
+                      <a:pPr algn="r" indent="0" marL="0">
+                        <a:buNone/>
+                      </a:pPr>
+                      <a:r>
+                        <a:rPr lang="en-US" sz="1000" b="1" dirty="0">
+                          <a:solidFill>
+                            <a:srgbClr val="0B2A3D"/>
+                          </a:solidFill>
+                          <a:latin typeface="Calibri" pitchFamily="34" charset="0"/>
+                          <a:ea typeface="Calibri" pitchFamily="34" charset="-122"/>
+                          <a:cs typeface="Calibri" pitchFamily="34" charset="-120"/>
+                        </a:rPr>
+                        <a:t>US$ 1,1 mi</a:t>
                       </a:r>
                       <a:endParaRPr lang="en-US" sz="1000" dirty="0">
                         <a:latin typeface="Calibri" charset="0"/>
@@ -31040,7 +31040,7 @@
                           <a:ea typeface="Calibri" pitchFamily="34" charset="-122"/>
                           <a:cs typeface="Calibri" pitchFamily="34" charset="-120"/>
                         </a:rPr>
-                        <a:t>Outros 76 escopos (itens de menor valor individual)</a:t>
+                        <a:t>Outros 77 escopos (itens de menor valor individual)</a:t>
                       </a:r>
                       <a:endParaRPr lang="en-US" sz="950" dirty="0">
                         <a:latin typeface="Calibri" charset="0"/>
@@ -31114,7 +31114,7 @@
                           <a:ea typeface="Calibri" pitchFamily="34" charset="-122"/>
                           <a:cs typeface="Calibri" pitchFamily="34" charset="-120"/>
                         </a:rPr>
-                        <a:t>US$ 23,7 mi</a:t>
+                        <a:t>US$ 17,9 mi</a:t>
                       </a:r>
                       <a:endParaRPr lang="en-US" sz="1000" dirty="0">
                         <a:latin typeface="Calibri" charset="0"/>

--- a/PRIO_Plano_Trabalho_CAPEX_2027.pptx
+++ b/PRIO_Plano_Trabalho_CAPEX_2027.pptx
@@ -28,9 +28,10 @@
     <p:sldId id="276" r:id="rId22"/>
     <p:sldId id="277" r:id="rId23"/>
     <p:sldId id="278" r:id="rId24"/>
+    <p:sldId id="279" r:id="rId25"/>
   </p:sldIdLst>
   <p:notesMasterIdLst>
-    <p:notesMasterId r:id="rId25"/>
+    <p:notesMasterId r:id="rId26"/>
   </p:notesMasterIdLst>
   <p:sldSz cx="12192000" cy="6858000"/>
   <p:notesSz cx="6858000" cy="12192000"/>
@@ -2227,6 +2228,94 @@
 </p:notes>
 </file>
 
+<file path=ppt/notesSlides/notesSlide24.xml><?xml version="1.0" encoding="utf-8"?>
+<p:notes xmlns:a="http://schemas.openxmlformats.org/drawingml/2006/main" xmlns:r="http://schemas.openxmlformats.org/officeDocument/2006/relationships" xmlns:p="http://schemas.openxmlformats.org/presentationml/2006/main">
+  <p:cSld>
+    <p:spTree>
+      <p:nvGrpSpPr>
+        <p:cNvPr id="1" name=""/>
+        <p:cNvGrpSpPr/>
+        <p:nvPr/>
+      </p:nvGrpSpPr>
+      <p:grpSpPr>
+        <a:xfrm>
+          <a:off x="0" y="0"/>
+          <a:ext cx="0" cy="0"/>
+          <a:chOff x="0" y="0"/>
+          <a:chExt cx="0" cy="0"/>
+        </a:xfrm>
+      </p:grpSpPr>
+      <p:sp>
+        <p:nvSpPr>
+          <p:cNvPr id="2" name="Slide Image Placeholder 1"/>
+          <p:cNvSpPr>
+            <a:spLocks noGrp="1" noRot="1" noChangeAspect="1"/>
+          </p:cNvSpPr>
+          <p:nvPr>
+            <p:ph type="sldImg"/>
+          </p:nvPr>
+        </p:nvSpPr>
+        <p:spPr/>
+      </p:sp>
+      <p:sp>
+        <p:nvSpPr>
+          <p:cNvPr id="3" name="Notes Placeholder 2"/>
+          <p:cNvSpPr>
+            <a:spLocks noGrp="1"/>
+          </p:cNvSpPr>
+          <p:nvPr>
+            <p:ph type="body" idx="1"/>
+          </p:nvPr>
+        </p:nvSpPr>
+        <p:spPr/>
+        <p:txBody>
+          <a:bodyPr/>
+          <a:lstStyle/>
+          <a:p>
+            <a:r>
+              <a:rPr lang="en-US" dirty="0"/>
+              <a:t/>
+            </a:r>
+            <a:endParaRPr lang="en-US" dirty="0"/>
+          </a:p>
+        </p:txBody>
+      </p:sp>
+      <p:sp>
+        <p:nvSpPr>
+          <p:cNvPr id="4" name="Slide Number Placeholder 3"/>
+          <p:cNvSpPr>
+            <a:spLocks noGrp="1"/>
+          </p:cNvSpPr>
+          <p:nvPr>
+            <p:ph type="sldNum" sz="quarter" idx="10"/>
+          </p:nvPr>
+        </p:nvSpPr>
+        <p:spPr/>
+        <p:txBody>
+          <a:bodyPr/>
+          <a:lstStyle/>
+          <a:p>
+            <a:fld id="{F7021451-1387-4CA6-816F-3879F97B5CBC}" type="slidenum">
+              <a:rPr lang="en-US"/>
+              <a:t>24</a:t>
+            </a:fld>
+            <a:endParaRPr lang="en-US"/>
+          </a:p>
+        </p:txBody>
+      </p:sp>
+    </p:spTree>
+    <p:extLst>
+      <p:ext uri="{BB962C8B-B14F-4D97-AF65-F5344CB8AC3E}">
+        <p14:creationId xmlns:p14="http://schemas.microsoft.com/office/powerpoint/2010/main" val="1024086991"/>
+      </p:ext>
+    </p:extLst>
+  </p:cSld>
+  <p:clrMapOvr>
+    <a:masterClrMapping/>
+  </p:clrMapOvr>
+</p:notes>
+</file>
+
 <file path=ppt/notesSlides/notesSlide3.xml><?xml version="1.0" encoding="utf-8"?>
 <p:notes xmlns:a="http://schemas.openxmlformats.org/drawingml/2006/main" xmlns:r="http://schemas.openxmlformats.org/officeDocument/2006/relationships" xmlns:p="http://schemas.openxmlformats.org/presentationml/2006/main">
   <p:cSld>
@@ -31217,6 +31306,4767 @@
 </p:sld>
 </file>
 
+<file path=ppt/slides/slide24.xml><?xml version="1.0" encoding="utf-8"?>
+<p:sld xmlns:a="http://schemas.openxmlformats.org/drawingml/2006/main" xmlns:r="http://schemas.openxmlformats.org/officeDocument/2006/relationships" xmlns:p="http://schemas.openxmlformats.org/presentationml/2006/main">
+  <p:cSld name="Slide 24">
+    <p:spTree>
+      <p:nvGrpSpPr>
+        <p:cNvPr id="1" name=""/>
+        <p:cNvGrpSpPr/>
+        <p:nvPr/>
+      </p:nvGrpSpPr>
+      <p:grpSpPr>
+        <a:xfrm>
+          <a:off x="0" y="0"/>
+          <a:ext cx="0" cy="0"/>
+          <a:chOff x="0" y="0"/>
+          <a:chExt cx="0" cy="0"/>
+        </a:xfrm>
+      </p:grpSpPr>
+      <p:sp>
+        <p:nvSpPr>
+          <p:cNvPr id="2" name="Shape 0"/>
+          <p:cNvSpPr/>
+          <p:nvPr/>
+        </p:nvSpPr>
+        <p:spPr>
+          <a:xfrm>
+            <a:off x="457200" y="384048"/>
+            <a:ext cx="566928" cy="566928"/>
+          </a:xfrm>
+          <a:prstGeom prst="ellipse">
+            <a:avLst/>
+          </a:prstGeom>
+          <a:solidFill>
+            <a:srgbClr val="7A2E2E"/>
+          </a:solidFill>
+          <a:ln/>
+        </p:spPr>
+      </p:sp>
+      <p:sp>
+        <p:nvSpPr>
+          <p:cNvPr id="3" name="Text 1"/>
+          <p:cNvSpPr txBox="1"/>
+          <p:nvPr/>
+        </p:nvSpPr>
+        <p:spPr>
+          <a:xfrm>
+            <a:off x="457200" y="384048"/>
+            <a:ext cx="566928" cy="566928"/>
+          </a:xfrm>
+          <a:prstGeom prst="rect">
+            <a:avLst/>
+          </a:prstGeom>
+          <a:noFill/>
+          <a:ln/>
+        </p:spPr>
+        <p:txBody>
+          <a:bodyPr wrap="square" lIns="0" tIns="0" rIns="0" bIns="0" rtlCol="0" anchor="ctr"/>
+          <a:lstStyle/>
+          <a:p>
+            <a:pPr algn="ctr" indent="0" marL="0">
+              <a:buNone/>
+            </a:pPr>
+            <a:r>
+              <a:rPr lang="en-US" sz="1500" b="1" dirty="0">
+                <a:solidFill>
+                  <a:srgbClr val="FFFFFF"/>
+                </a:solidFill>
+                <a:latin typeface="Calibri" pitchFamily="34" charset="0"/>
+                <a:ea typeface="Calibri" pitchFamily="34" charset="-122"/>
+                <a:cs typeface="Calibri" pitchFamily="34" charset="-120"/>
+              </a:rPr>
+              <a:t>FF</a:t>
+            </a:r>
+            <a:endParaRPr lang="en-US" sz="1500" dirty="0"/>
+          </a:p>
+        </p:txBody>
+      </p:sp>
+      <p:sp>
+        <p:nvSpPr>
+          <p:cNvPr id="4" name="Text 2"/>
+          <p:cNvSpPr txBox="1"/>
+          <p:nvPr/>
+        </p:nvSpPr>
+        <p:spPr>
+          <a:xfrm>
+            <a:off x="1170432" y="329184"/>
+            <a:ext cx="10515600" cy="411480"/>
+          </a:xfrm>
+          <a:prstGeom prst="rect">
+            <a:avLst/>
+          </a:prstGeom>
+          <a:noFill/>
+          <a:ln/>
+        </p:spPr>
+        <p:txBody>
+          <a:bodyPr wrap="square" lIns="0" tIns="0" rIns="0" bIns="0" rtlCol="0" anchor="ctr"/>
+          <a:lstStyle/>
+          <a:p>
+            <a:pPr indent="0" marL="0">
+              <a:buNone/>
+            </a:pPr>
+            <a:r>
+              <a:rPr lang="en-US" sz="2400" b="1" dirty="0">
+                <a:solidFill>
+                  <a:srgbClr val="0B2A3D"/>
+                </a:solidFill>
+                <a:latin typeface="Cambria" pitchFamily="34" charset="0"/>
+                <a:ea typeface="Cambria" pitchFamily="34" charset="-122"/>
+                <a:cs typeface="Cambria" pitchFamily="34" charset="-120"/>
+              </a:rPr>
+              <a:t>Escopos que Compõem o CAPEX · FPSO Frade</a:t>
+            </a:r>
+            <a:endParaRPr lang="en-US" sz="2400" dirty="0"/>
+          </a:p>
+        </p:txBody>
+      </p:sp>
+      <p:sp>
+        <p:nvSpPr>
+          <p:cNvPr id="5" name="Text 3"/>
+          <p:cNvSpPr txBox="1"/>
+          <p:nvPr/>
+        </p:nvSpPr>
+        <p:spPr>
+          <a:xfrm>
+            <a:off x="1170432" y="731520"/>
+            <a:ext cx="10515600" cy="274320"/>
+          </a:xfrm>
+          <a:prstGeom prst="rect">
+            <a:avLst/>
+          </a:prstGeom>
+          <a:noFill/>
+          <a:ln/>
+        </p:spPr>
+        <p:txBody>
+          <a:bodyPr wrap="square" lIns="0" tIns="0" rIns="0" bIns="0" rtlCol="0" anchor="ctr"/>
+          <a:lstStyle/>
+          <a:p>
+            <a:pPr indent="0" marL="0">
+              <a:buNone/>
+            </a:pPr>
+            <a:r>
+              <a:rPr lang="en-US" sz="1250" dirty="0">
+                <a:solidFill>
+                  <a:srgbClr val="5B6B73"/>
+                </a:solidFill>
+                <a:latin typeface="Calibri" pitchFamily="34" charset="0"/>
+                <a:ea typeface="Calibri" pitchFamily="34" charset="-122"/>
+                <a:cs typeface="Calibri" pitchFamily="34" charset="-120"/>
+              </a:rPr>
+              <a:t>Continuação · próximos escopos por valor (parte 2)</a:t>
+            </a:r>
+            <a:endParaRPr lang="en-US" sz="1250" dirty="0"/>
+          </a:p>
+        </p:txBody>
+      </p:sp>
+      <p:graphicFrame>
+        <p:nvGraphicFramePr>
+          <p:cNvPr id="25" name="Table 0"/>
+          <p:cNvGraphicFramePr>
+            <a:graphicFrameLocks noGrp="1"/>
+          </p:cNvGraphicFramePr>
+          <p:nvPr>
+            <p:extLst>
+              <p:ext uri="{D42A27DB-BD31-4B8C-83A1-F6EECF244321}">
+                <p14:modId xmlns:p14="http://schemas.microsoft.com/office/powerpoint/2010/main" val="1579011935"/>
+              </p:ext>
+            </p:extLst>
+          </p:nvPr>
+        </p:nvGraphicFramePr>
+        <p:xfrm>
+          <a:off x="457200" y="1188720"/>
+          <a:ext cx="11247120" cy="914400"/>
+        </p:xfrm>
+        <a:graphic>
+          <a:graphicData uri="http://schemas.openxmlformats.org/drawingml/2006/table">
+            <a:tbl>
+              <a:tblPr/>
+              <a:tblGrid>
+                <a:gridCol w="4723790"/>
+                <a:gridCol w="2249424"/>
+                <a:gridCol w="2474366"/>
+                <a:gridCol w="1799539"/>
+              </a:tblGrid>
+              <a:tr h="288036">
+                <a:tc>
+                  <a:txBody>
+                    <a:bodyPr/>
+                    <a:lstStyle/>
+                    <a:p>
+                      <a:pPr indent="0" marL="0">
+                        <a:buNone/>
+                      </a:pPr>
+                      <a:r>
+                        <a:rPr lang="en-US" sz="1000" b="1" dirty="0">
+                          <a:solidFill>
+                            <a:srgbClr val="FFFFFF"/>
+                          </a:solidFill>
+                          <a:latin typeface="Calibri" pitchFamily="34" charset="0"/>
+                          <a:ea typeface="Calibri" pitchFamily="34" charset="-122"/>
+                          <a:cs typeface="Calibri" pitchFamily="34" charset="-120"/>
+                        </a:rPr>
+                        <a:t>DESCRIÇÃO DO ESCOPO</a:t>
+                      </a:r>
+                      <a:endParaRPr lang="en-US" sz="1000" dirty="0">
+                        <a:latin typeface="Calibri" charset="0"/>
+                        <a:ea typeface="Calibri" charset="0"/>
+                        <a:cs typeface="Calibri" charset="0"/>
+                      </a:endParaRPr>
+                    </a:p>
+                  </a:txBody>
+                  <a:tcPr marL="91440" marR="91440" marT="45720" marB="45720" anchor="ctr">
+                    <a:lnL w="6350" cap="flat" cmpd="sng" algn="ctr">
+                      <a:solidFill>
+                        <a:srgbClr val="E3E8E9"/>
+                      </a:solidFill>
+                      <a:prstDash val="solid"/>
+                      <a:round/>
+                      <a:headEnd type="none" w="med" len="med"/>
+                      <a:tailEnd type="none" w="med" len="med"/>
+                    </a:lnL>
+                    <a:lnR w="6350" cap="flat" cmpd="sng" algn="ctr">
+                      <a:solidFill>
+                        <a:srgbClr val="E3E8E9"/>
+                      </a:solidFill>
+                      <a:prstDash val="solid"/>
+                      <a:round/>
+                      <a:headEnd type="none" w="med" len="med"/>
+                      <a:tailEnd type="none" w="med" len="med"/>
+                    </a:lnR>
+                    <a:lnT w="6350" cap="flat" cmpd="sng" algn="ctr">
+                      <a:solidFill>
+                        <a:srgbClr val="E3E8E9"/>
+                      </a:solidFill>
+                      <a:prstDash val="solid"/>
+                      <a:round/>
+                      <a:headEnd type="none" w="med" len="med"/>
+                      <a:tailEnd type="none" w="med" len="med"/>
+                    </a:lnT>
+                    <a:lnB w="6350" cap="flat" cmpd="sng" algn="ctr">
+                      <a:solidFill>
+                        <a:srgbClr val="E3E8E9"/>
+                      </a:solidFill>
+                      <a:prstDash val="solid"/>
+                      <a:round/>
+                      <a:headEnd type="none" w="med" len="med"/>
+                      <a:tailEnd type="none" w="med" len="med"/>
+                    </a:lnB>
+                    <a:solidFill>
+                      <a:srgbClr val="0B2A3D"/>
+                    </a:solidFill>
+                  </a:tcPr>
+                </a:tc>
+                <a:tc>
+                  <a:txBody>
+                    <a:bodyPr/>
+                    <a:lstStyle/>
+                    <a:p>
+                      <a:pPr indent="0" marL="0">
+                        <a:buNone/>
+                      </a:pPr>
+                      <a:r>
+                        <a:rPr lang="en-US" sz="1000" b="1" dirty="0">
+                          <a:solidFill>
+                            <a:srgbClr val="FFFFFF"/>
+                          </a:solidFill>
+                          <a:latin typeface="Calibri" pitchFamily="34" charset="0"/>
+                          <a:ea typeface="Calibri" pitchFamily="34" charset="-122"/>
+                          <a:cs typeface="Calibri" pitchFamily="34" charset="-120"/>
+                        </a:rPr>
+                        <a:t>CATEGORIA</a:t>
+                      </a:r>
+                      <a:endParaRPr lang="en-US" sz="1000" dirty="0">
+                        <a:latin typeface="Calibri" charset="0"/>
+                        <a:ea typeface="Calibri" charset="0"/>
+                        <a:cs typeface="Calibri" charset="0"/>
+                      </a:endParaRPr>
+                    </a:p>
+                  </a:txBody>
+                  <a:tcPr marL="91440" marR="91440" marT="45720" marB="45720" anchor="ctr">
+                    <a:lnL w="6350" cap="flat" cmpd="sng" algn="ctr">
+                      <a:solidFill>
+                        <a:srgbClr val="E3E8E9"/>
+                      </a:solidFill>
+                      <a:prstDash val="solid"/>
+                      <a:round/>
+                      <a:headEnd type="none" w="med" len="med"/>
+                      <a:tailEnd type="none" w="med" len="med"/>
+                    </a:lnL>
+                    <a:lnR w="6350" cap="flat" cmpd="sng" algn="ctr">
+                      <a:solidFill>
+                        <a:srgbClr val="E3E8E9"/>
+                      </a:solidFill>
+                      <a:prstDash val="solid"/>
+                      <a:round/>
+                      <a:headEnd type="none" w="med" len="med"/>
+                      <a:tailEnd type="none" w="med" len="med"/>
+                    </a:lnR>
+                    <a:lnT w="6350" cap="flat" cmpd="sng" algn="ctr">
+                      <a:solidFill>
+                        <a:srgbClr val="E3E8E9"/>
+                      </a:solidFill>
+                      <a:prstDash val="solid"/>
+                      <a:round/>
+                      <a:headEnd type="none" w="med" len="med"/>
+                      <a:tailEnd type="none" w="med" len="med"/>
+                    </a:lnT>
+                    <a:lnB w="6350" cap="flat" cmpd="sng" algn="ctr">
+                      <a:solidFill>
+                        <a:srgbClr val="E3E8E9"/>
+                      </a:solidFill>
+                      <a:prstDash val="solid"/>
+                      <a:round/>
+                      <a:headEnd type="none" w="med" len="med"/>
+                      <a:tailEnd type="none" w="med" len="med"/>
+                    </a:lnB>
+                    <a:solidFill>
+                      <a:srgbClr val="0B2A3D"/>
+                    </a:solidFill>
+                  </a:tcPr>
+                </a:tc>
+                <a:tc>
+                  <a:txBody>
+                    <a:bodyPr/>
+                    <a:lstStyle/>
+                    <a:p>
+                      <a:pPr indent="0" marL="0">
+                        <a:buNone/>
+                      </a:pPr>
+                      <a:r>
+                        <a:rPr lang="en-US" sz="1000" b="1" dirty="0">
+                          <a:solidFill>
+                            <a:srgbClr val="FFFFFF"/>
+                          </a:solidFill>
+                          <a:latin typeface="Calibri" pitchFamily="34" charset="0"/>
+                          <a:ea typeface="Calibri" pitchFamily="34" charset="-122"/>
+                          <a:cs typeface="Calibri" pitchFamily="34" charset="-120"/>
+                        </a:rPr>
+                        <a:t>ÁREA REQUISITANTE</a:t>
+                      </a:r>
+                      <a:endParaRPr lang="en-US" sz="1000" dirty="0">
+                        <a:latin typeface="Calibri" charset="0"/>
+                        <a:ea typeface="Calibri" charset="0"/>
+                        <a:cs typeface="Calibri" charset="0"/>
+                      </a:endParaRPr>
+                    </a:p>
+                  </a:txBody>
+                  <a:tcPr marL="91440" marR="91440" marT="45720" marB="45720" anchor="ctr">
+                    <a:lnL w="6350" cap="flat" cmpd="sng" algn="ctr">
+                      <a:solidFill>
+                        <a:srgbClr val="E3E8E9"/>
+                      </a:solidFill>
+                      <a:prstDash val="solid"/>
+                      <a:round/>
+                      <a:headEnd type="none" w="med" len="med"/>
+                      <a:tailEnd type="none" w="med" len="med"/>
+                    </a:lnL>
+                    <a:lnR w="6350" cap="flat" cmpd="sng" algn="ctr">
+                      <a:solidFill>
+                        <a:srgbClr val="E3E8E9"/>
+                      </a:solidFill>
+                      <a:prstDash val="solid"/>
+                      <a:round/>
+                      <a:headEnd type="none" w="med" len="med"/>
+                      <a:tailEnd type="none" w="med" len="med"/>
+                    </a:lnR>
+                    <a:lnT w="6350" cap="flat" cmpd="sng" algn="ctr">
+                      <a:solidFill>
+                        <a:srgbClr val="E3E8E9"/>
+                      </a:solidFill>
+                      <a:prstDash val="solid"/>
+                      <a:round/>
+                      <a:headEnd type="none" w="med" len="med"/>
+                      <a:tailEnd type="none" w="med" len="med"/>
+                    </a:lnT>
+                    <a:lnB w="6350" cap="flat" cmpd="sng" algn="ctr">
+                      <a:solidFill>
+                        <a:srgbClr val="E3E8E9"/>
+                      </a:solidFill>
+                      <a:prstDash val="solid"/>
+                      <a:round/>
+                      <a:headEnd type="none" w="med" len="med"/>
+                      <a:tailEnd type="none" w="med" len="med"/>
+                    </a:lnB>
+                    <a:solidFill>
+                      <a:srgbClr val="0B2A3D"/>
+                    </a:solidFill>
+                  </a:tcPr>
+                </a:tc>
+                <a:tc>
+                  <a:txBody>
+                    <a:bodyPr/>
+                    <a:lstStyle/>
+                    <a:p>
+                      <a:pPr algn="r" indent="0" marL="0">
+                        <a:buNone/>
+                      </a:pPr>
+                      <a:r>
+                        <a:rPr lang="en-US" sz="1000" b="1" dirty="0">
+                          <a:solidFill>
+                            <a:srgbClr val="FFFFFF"/>
+                          </a:solidFill>
+                          <a:latin typeface="Calibri" pitchFamily="34" charset="0"/>
+                          <a:ea typeface="Calibri" pitchFamily="34" charset="-122"/>
+                          <a:cs typeface="Calibri" pitchFamily="34" charset="-120"/>
+                        </a:rPr>
+                        <a:t>VALOR TOTAL</a:t>
+                      </a:r>
+                      <a:endParaRPr lang="en-US" sz="1000" dirty="0">
+                        <a:latin typeface="Calibri" charset="0"/>
+                        <a:ea typeface="Calibri" charset="0"/>
+                        <a:cs typeface="Calibri" charset="0"/>
+                      </a:endParaRPr>
+                    </a:p>
+                  </a:txBody>
+                  <a:tcPr marL="91440" marR="91440" marT="45720" marB="45720" anchor="ctr">
+                    <a:lnL w="6350" cap="flat" cmpd="sng" algn="ctr">
+                      <a:solidFill>
+                        <a:srgbClr val="E3E8E9"/>
+                      </a:solidFill>
+                      <a:prstDash val="solid"/>
+                      <a:round/>
+                      <a:headEnd type="none" w="med" len="med"/>
+                      <a:tailEnd type="none" w="med" len="med"/>
+                    </a:lnL>
+                    <a:lnR w="6350" cap="flat" cmpd="sng" algn="ctr">
+                      <a:solidFill>
+                        <a:srgbClr val="E3E8E9"/>
+                      </a:solidFill>
+                      <a:prstDash val="solid"/>
+                      <a:round/>
+                      <a:headEnd type="none" w="med" len="med"/>
+                      <a:tailEnd type="none" w="med" len="med"/>
+                    </a:lnR>
+                    <a:lnT w="6350" cap="flat" cmpd="sng" algn="ctr">
+                      <a:solidFill>
+                        <a:srgbClr val="E3E8E9"/>
+                      </a:solidFill>
+                      <a:prstDash val="solid"/>
+                      <a:round/>
+                      <a:headEnd type="none" w="med" len="med"/>
+                      <a:tailEnd type="none" w="med" len="med"/>
+                    </a:lnT>
+                    <a:lnB w="6350" cap="flat" cmpd="sng" algn="ctr">
+                      <a:solidFill>
+                        <a:srgbClr val="E3E8E9"/>
+                      </a:solidFill>
+                      <a:prstDash val="solid"/>
+                      <a:round/>
+                      <a:headEnd type="none" w="med" len="med"/>
+                      <a:tailEnd type="none" w="med" len="med"/>
+                    </a:lnB>
+                    <a:solidFill>
+                      <a:srgbClr val="0B2A3D"/>
+                    </a:solidFill>
+                  </a:tcPr>
+                </a:tc>
+              </a:tr>
+              <a:tr h="288036">
+                <a:tc>
+                  <a:txBody>
+                    <a:bodyPr/>
+                    <a:lstStyle/>
+                    <a:p>
+                      <a:pPr indent="0" marL="0">
+                        <a:buNone/>
+                      </a:pPr>
+                      <a:r>
+                        <a:rPr lang="en-US" sz="1000" dirty="0">
+                          <a:solidFill>
+                            <a:srgbClr val="1C2B33"/>
+                          </a:solidFill>
+                          <a:latin typeface="Calibri" pitchFamily="34" charset="0"/>
+                          <a:ea typeface="Calibri" pitchFamily="34" charset="-122"/>
+                          <a:cs typeface="Calibri" pitchFamily="34" charset="-120"/>
+                        </a:rPr>
+                        <a:t>TROCADOR DE CALOR DO GERADOR - GT4</a:t>
+                      </a:r>
+                      <a:endParaRPr lang="en-US" sz="1000" dirty="0">
+                        <a:latin typeface="Calibri" charset="0"/>
+                        <a:ea typeface="Calibri" charset="0"/>
+                        <a:cs typeface="Calibri" charset="0"/>
+                      </a:endParaRPr>
+                    </a:p>
+                  </a:txBody>
+                  <a:tcPr marL="91440" marR="91440" marT="45720" marB="45720" anchor="ctr">
+                    <a:lnL w="6350" cap="flat" cmpd="sng" algn="ctr">
+                      <a:solidFill>
+                        <a:srgbClr val="E3E8E9"/>
+                      </a:solidFill>
+                      <a:prstDash val="solid"/>
+                      <a:round/>
+                      <a:headEnd type="none" w="med" len="med"/>
+                      <a:tailEnd type="none" w="med" len="med"/>
+                    </a:lnL>
+                    <a:lnR w="6350" cap="flat" cmpd="sng" algn="ctr">
+                      <a:solidFill>
+                        <a:srgbClr val="E3E8E9"/>
+                      </a:solidFill>
+                      <a:prstDash val="solid"/>
+                      <a:round/>
+                      <a:headEnd type="none" w="med" len="med"/>
+                      <a:tailEnd type="none" w="med" len="med"/>
+                    </a:lnR>
+                    <a:lnT w="6350" cap="flat" cmpd="sng" algn="ctr">
+                      <a:solidFill>
+                        <a:srgbClr val="E3E8E9"/>
+                      </a:solidFill>
+                      <a:prstDash val="solid"/>
+                      <a:round/>
+                      <a:headEnd type="none" w="med" len="med"/>
+                      <a:tailEnd type="none" w="med" len="med"/>
+                    </a:lnT>
+                    <a:lnB w="6350" cap="flat" cmpd="sng" algn="ctr">
+                      <a:solidFill>
+                        <a:srgbClr val="E3E8E9"/>
+                      </a:solidFill>
+                      <a:prstDash val="solid"/>
+                      <a:round/>
+                      <a:headEnd type="none" w="med" len="med"/>
+                      <a:tailEnd type="none" w="med" len="med"/>
+                    </a:lnB>
+                    <a:solidFill>
+                      <a:srgbClr val="FFFFFF"/>
+                    </a:solidFill>
+                  </a:tcPr>
+                </a:tc>
+                <a:tc>
+                  <a:txBody>
+                    <a:bodyPr/>
+                    <a:lstStyle/>
+                    <a:p>
+                      <a:pPr indent="0" marL="0">
+                        <a:buNone/>
+                      </a:pPr>
+                      <a:r>
+                        <a:rPr lang="en-US" sz="950" dirty="0">
+                          <a:solidFill>
+                            <a:srgbClr val="5B6B73"/>
+                          </a:solidFill>
+                          <a:latin typeface="Calibri" pitchFamily="34" charset="0"/>
+                          <a:ea typeface="Calibri" pitchFamily="34" charset="-122"/>
+                          <a:cs typeface="Calibri" pitchFamily="34" charset="-120"/>
+                        </a:rPr>
+                        <a:t>Rotina Operacional</a:t>
+                      </a:r>
+                      <a:endParaRPr lang="en-US" sz="950" dirty="0">
+                        <a:latin typeface="Calibri" charset="0"/>
+                        <a:ea typeface="Calibri" charset="0"/>
+                        <a:cs typeface="Calibri" charset="0"/>
+                      </a:endParaRPr>
+                    </a:p>
+                  </a:txBody>
+                  <a:tcPr marL="91440" marR="91440" marT="45720" marB="45720" anchor="ctr">
+                    <a:lnL w="6350" cap="flat" cmpd="sng" algn="ctr">
+                      <a:solidFill>
+                        <a:srgbClr val="E3E8E9"/>
+                      </a:solidFill>
+                      <a:prstDash val="solid"/>
+                      <a:round/>
+                      <a:headEnd type="none" w="med" len="med"/>
+                      <a:tailEnd type="none" w="med" len="med"/>
+                    </a:lnL>
+                    <a:lnR w="6350" cap="flat" cmpd="sng" algn="ctr">
+                      <a:solidFill>
+                        <a:srgbClr val="E3E8E9"/>
+                      </a:solidFill>
+                      <a:prstDash val="solid"/>
+                      <a:round/>
+                      <a:headEnd type="none" w="med" len="med"/>
+                      <a:tailEnd type="none" w="med" len="med"/>
+                    </a:lnR>
+                    <a:lnT w="6350" cap="flat" cmpd="sng" algn="ctr">
+                      <a:solidFill>
+                        <a:srgbClr val="E3E8E9"/>
+                      </a:solidFill>
+                      <a:prstDash val="solid"/>
+                      <a:round/>
+                      <a:headEnd type="none" w="med" len="med"/>
+                      <a:tailEnd type="none" w="med" len="med"/>
+                    </a:lnT>
+                    <a:lnB w="6350" cap="flat" cmpd="sng" algn="ctr">
+                      <a:solidFill>
+                        <a:srgbClr val="E3E8E9"/>
+                      </a:solidFill>
+                      <a:prstDash val="solid"/>
+                      <a:round/>
+                      <a:headEnd type="none" w="med" len="med"/>
+                      <a:tailEnd type="none" w="med" len="med"/>
+                    </a:lnB>
+                    <a:solidFill>
+                      <a:srgbClr val="FFFFFF"/>
+                    </a:solidFill>
+                  </a:tcPr>
+                </a:tc>
+                <a:tc>
+                  <a:txBody>
+                    <a:bodyPr/>
+                    <a:lstStyle/>
+                    <a:p>
+                      <a:pPr indent="0" marL="0">
+                        <a:buNone/>
+                      </a:pPr>
+                      <a:r>
+                        <a:rPr lang="en-US" sz="950" dirty="0">
+                          <a:solidFill>
+                            <a:srgbClr val="5B6B73"/>
+                          </a:solidFill>
+                          <a:latin typeface="Calibri" pitchFamily="34" charset="0"/>
+                          <a:ea typeface="Calibri" pitchFamily="34" charset="-122"/>
+                          <a:cs typeface="Calibri" pitchFamily="34" charset="-120"/>
+                        </a:rPr>
+                        <a:t>MNT – Manutenção</a:t>
+                      </a:r>
+                      <a:endParaRPr lang="en-US" sz="950" dirty="0">
+                        <a:latin typeface="Calibri" charset="0"/>
+                        <a:ea typeface="Calibri" charset="0"/>
+                        <a:cs typeface="Calibri" charset="0"/>
+                      </a:endParaRPr>
+                    </a:p>
+                  </a:txBody>
+                  <a:tcPr marL="91440" marR="91440" marT="45720" marB="45720" anchor="ctr">
+                    <a:lnL w="6350" cap="flat" cmpd="sng" algn="ctr">
+                      <a:solidFill>
+                        <a:srgbClr val="E3E8E9"/>
+                      </a:solidFill>
+                      <a:prstDash val="solid"/>
+                      <a:round/>
+                      <a:headEnd type="none" w="med" len="med"/>
+                      <a:tailEnd type="none" w="med" len="med"/>
+                    </a:lnL>
+                    <a:lnR w="6350" cap="flat" cmpd="sng" algn="ctr">
+                      <a:solidFill>
+                        <a:srgbClr val="E3E8E9"/>
+                      </a:solidFill>
+                      <a:prstDash val="solid"/>
+                      <a:round/>
+                      <a:headEnd type="none" w="med" len="med"/>
+                      <a:tailEnd type="none" w="med" len="med"/>
+                    </a:lnR>
+                    <a:lnT w="6350" cap="flat" cmpd="sng" algn="ctr">
+                      <a:solidFill>
+                        <a:srgbClr val="E3E8E9"/>
+                      </a:solidFill>
+                      <a:prstDash val="solid"/>
+                      <a:round/>
+                      <a:headEnd type="none" w="med" len="med"/>
+                      <a:tailEnd type="none" w="med" len="med"/>
+                    </a:lnT>
+                    <a:lnB w="6350" cap="flat" cmpd="sng" algn="ctr">
+                      <a:solidFill>
+                        <a:srgbClr val="E3E8E9"/>
+                      </a:solidFill>
+                      <a:prstDash val="solid"/>
+                      <a:round/>
+                      <a:headEnd type="none" w="med" len="med"/>
+                      <a:tailEnd type="none" w="med" len="med"/>
+                    </a:lnB>
+                    <a:solidFill>
+                      <a:srgbClr val="FFFFFF"/>
+                    </a:solidFill>
+                  </a:tcPr>
+                </a:tc>
+                <a:tc>
+                  <a:txBody>
+                    <a:bodyPr/>
+                    <a:lstStyle/>
+                    <a:p>
+                      <a:pPr algn="r" indent="0" marL="0">
+                        <a:buNone/>
+                      </a:pPr>
+                      <a:r>
+                        <a:rPr lang="en-US" sz="1000" b="1" dirty="0">
+                          <a:solidFill>
+                            <a:srgbClr val="0B2A3D"/>
+                          </a:solidFill>
+                          <a:latin typeface="Calibri" pitchFamily="34" charset="0"/>
+                          <a:ea typeface="Calibri" pitchFamily="34" charset="-122"/>
+                          <a:cs typeface="Calibri" pitchFamily="34" charset="-120"/>
+                        </a:rPr>
+                        <a:t>US$ 1,1 mi</a:t>
+                      </a:r>
+                      <a:endParaRPr lang="en-US" sz="1000" dirty="0">
+                        <a:latin typeface="Calibri" charset="0"/>
+                        <a:ea typeface="Calibri" charset="0"/>
+                        <a:cs typeface="Calibri" charset="0"/>
+                      </a:endParaRPr>
+                    </a:p>
+                  </a:txBody>
+                  <a:tcPr marL="91440" marR="91440" marT="45720" marB="45720" anchor="ctr">
+                    <a:lnL w="6350" cap="flat" cmpd="sng" algn="ctr">
+                      <a:solidFill>
+                        <a:srgbClr val="E3E8E9"/>
+                      </a:solidFill>
+                      <a:prstDash val="solid"/>
+                      <a:round/>
+                      <a:headEnd type="none" w="med" len="med"/>
+                      <a:tailEnd type="none" w="med" len="med"/>
+                    </a:lnL>
+                    <a:lnR w="6350" cap="flat" cmpd="sng" algn="ctr">
+                      <a:solidFill>
+                        <a:srgbClr val="E3E8E9"/>
+                      </a:solidFill>
+                      <a:prstDash val="solid"/>
+                      <a:round/>
+                      <a:headEnd type="none" w="med" len="med"/>
+                      <a:tailEnd type="none" w="med" len="med"/>
+                    </a:lnR>
+                    <a:lnT w="6350" cap="flat" cmpd="sng" algn="ctr">
+                      <a:solidFill>
+                        <a:srgbClr val="E3E8E9"/>
+                      </a:solidFill>
+                      <a:prstDash val="solid"/>
+                      <a:round/>
+                      <a:headEnd type="none" w="med" len="med"/>
+                      <a:tailEnd type="none" w="med" len="med"/>
+                    </a:lnT>
+                    <a:lnB w="6350" cap="flat" cmpd="sng" algn="ctr">
+                      <a:solidFill>
+                        <a:srgbClr val="E3E8E9"/>
+                      </a:solidFill>
+                      <a:prstDash val="solid"/>
+                      <a:round/>
+                      <a:headEnd type="none" w="med" len="med"/>
+                      <a:tailEnd type="none" w="med" len="med"/>
+                    </a:lnB>
+                    <a:solidFill>
+                      <a:srgbClr val="FFFFFF"/>
+                    </a:solidFill>
+                  </a:tcPr>
+                </a:tc>
+              </a:tr>
+              <a:tr h="288036">
+                <a:tc>
+                  <a:txBody>
+                    <a:bodyPr/>
+                    <a:lstStyle/>
+                    <a:p>
+                      <a:pPr indent="0" marL="0">
+                        <a:buNone/>
+                      </a:pPr>
+                      <a:r>
+                        <a:rPr lang="en-US" sz="1000" dirty="0">
+                          <a:solidFill>
+                            <a:srgbClr val="1C2B33"/>
+                          </a:solidFill>
+                          <a:latin typeface="Calibri" pitchFamily="34" charset="0"/>
+                          <a:ea typeface="Calibri" pitchFamily="34" charset="-122"/>
+                          <a:cs typeface="Calibri" pitchFamily="34" charset="-120"/>
+                        </a:rPr>
+                        <a:t>RO</a:t>
+                      </a:r>
+                      <a:endParaRPr lang="en-US" sz="1000" dirty="0">
+                        <a:latin typeface="Calibri" charset="0"/>
+                        <a:ea typeface="Calibri" charset="0"/>
+                        <a:cs typeface="Calibri" charset="0"/>
+                      </a:endParaRPr>
+                    </a:p>
+                  </a:txBody>
+                  <a:tcPr marL="91440" marR="91440" marT="45720" marB="45720" anchor="ctr">
+                    <a:lnL w="6350" cap="flat" cmpd="sng" algn="ctr">
+                      <a:solidFill>
+                        <a:srgbClr val="E3E8E9"/>
+                      </a:solidFill>
+                      <a:prstDash val="solid"/>
+                      <a:round/>
+                      <a:headEnd type="none" w="med" len="med"/>
+                      <a:tailEnd type="none" w="med" len="med"/>
+                    </a:lnL>
+                    <a:lnR w="6350" cap="flat" cmpd="sng" algn="ctr">
+                      <a:solidFill>
+                        <a:srgbClr val="E3E8E9"/>
+                      </a:solidFill>
+                      <a:prstDash val="solid"/>
+                      <a:round/>
+                      <a:headEnd type="none" w="med" len="med"/>
+                      <a:tailEnd type="none" w="med" len="med"/>
+                    </a:lnR>
+                    <a:lnT w="6350" cap="flat" cmpd="sng" algn="ctr">
+                      <a:solidFill>
+                        <a:srgbClr val="E3E8E9"/>
+                      </a:solidFill>
+                      <a:prstDash val="solid"/>
+                      <a:round/>
+                      <a:headEnd type="none" w="med" len="med"/>
+                      <a:tailEnd type="none" w="med" len="med"/>
+                    </a:lnT>
+                    <a:lnB w="6350" cap="flat" cmpd="sng" algn="ctr">
+                      <a:solidFill>
+                        <a:srgbClr val="E3E8E9"/>
+                      </a:solidFill>
+                      <a:prstDash val="solid"/>
+                      <a:round/>
+                      <a:headEnd type="none" w="med" len="med"/>
+                      <a:tailEnd type="none" w="med" len="med"/>
+                    </a:lnB>
+                    <a:solidFill>
+                      <a:srgbClr val="F0F4F5"/>
+                    </a:solidFill>
+                  </a:tcPr>
+                </a:tc>
+                <a:tc>
+                  <a:txBody>
+                    <a:bodyPr/>
+                    <a:lstStyle/>
+                    <a:p>
+                      <a:pPr indent="0" marL="0">
+                        <a:buNone/>
+                      </a:pPr>
+                      <a:r>
+                        <a:rPr lang="en-US" sz="950" dirty="0">
+                          <a:solidFill>
+                            <a:srgbClr val="5B6B73"/>
+                          </a:solidFill>
+                          <a:latin typeface="Calibri" pitchFamily="34" charset="0"/>
+                          <a:ea typeface="Calibri" pitchFamily="34" charset="-122"/>
+                          <a:cs typeface="Calibri" pitchFamily="34" charset="-120"/>
+                        </a:rPr>
+                        <a:t>Bem Estar/Segurança</a:t>
+                      </a:r>
+                      <a:endParaRPr lang="en-US" sz="950" dirty="0">
+                        <a:latin typeface="Calibri" charset="0"/>
+                        <a:ea typeface="Calibri" charset="0"/>
+                        <a:cs typeface="Calibri" charset="0"/>
+                      </a:endParaRPr>
+                    </a:p>
+                  </a:txBody>
+                  <a:tcPr marL="91440" marR="91440" marT="45720" marB="45720" anchor="ctr">
+                    <a:lnL w="6350" cap="flat" cmpd="sng" algn="ctr">
+                      <a:solidFill>
+                        <a:srgbClr val="E3E8E9"/>
+                      </a:solidFill>
+                      <a:prstDash val="solid"/>
+                      <a:round/>
+                      <a:headEnd type="none" w="med" len="med"/>
+                      <a:tailEnd type="none" w="med" len="med"/>
+                    </a:lnL>
+                    <a:lnR w="6350" cap="flat" cmpd="sng" algn="ctr">
+                      <a:solidFill>
+                        <a:srgbClr val="E3E8E9"/>
+                      </a:solidFill>
+                      <a:prstDash val="solid"/>
+                      <a:round/>
+                      <a:headEnd type="none" w="med" len="med"/>
+                      <a:tailEnd type="none" w="med" len="med"/>
+                    </a:lnR>
+                    <a:lnT w="6350" cap="flat" cmpd="sng" algn="ctr">
+                      <a:solidFill>
+                        <a:srgbClr val="E3E8E9"/>
+                      </a:solidFill>
+                      <a:prstDash val="solid"/>
+                      <a:round/>
+                      <a:headEnd type="none" w="med" len="med"/>
+                      <a:tailEnd type="none" w="med" len="med"/>
+                    </a:lnT>
+                    <a:lnB w="6350" cap="flat" cmpd="sng" algn="ctr">
+                      <a:solidFill>
+                        <a:srgbClr val="E3E8E9"/>
+                      </a:solidFill>
+                      <a:prstDash val="solid"/>
+                      <a:round/>
+                      <a:headEnd type="none" w="med" len="med"/>
+                      <a:tailEnd type="none" w="med" len="med"/>
+                    </a:lnB>
+                    <a:solidFill>
+                      <a:srgbClr val="F0F4F5"/>
+                    </a:solidFill>
+                  </a:tcPr>
+                </a:tc>
+                <a:tc>
+                  <a:txBody>
+                    <a:bodyPr/>
+                    <a:lstStyle/>
+                    <a:p>
+                      <a:pPr indent="0" marL="0">
+                        <a:buNone/>
+                      </a:pPr>
+                      <a:r>
+                        <a:rPr lang="en-US" sz="950" dirty="0">
+                          <a:solidFill>
+                            <a:srgbClr val="5B6B73"/>
+                          </a:solidFill>
+                          <a:latin typeface="Calibri" pitchFamily="34" charset="0"/>
+                          <a:ea typeface="Calibri" pitchFamily="34" charset="-122"/>
+                          <a:cs typeface="Calibri" pitchFamily="34" charset="-120"/>
+                        </a:rPr>
+                        <a:t>Projetos</a:t>
+                      </a:r>
+                      <a:endParaRPr lang="en-US" sz="950" dirty="0">
+                        <a:latin typeface="Calibri" charset="0"/>
+                        <a:ea typeface="Calibri" charset="0"/>
+                        <a:cs typeface="Calibri" charset="0"/>
+                      </a:endParaRPr>
+                    </a:p>
+                  </a:txBody>
+                  <a:tcPr marL="91440" marR="91440" marT="45720" marB="45720" anchor="ctr">
+                    <a:lnL w="6350" cap="flat" cmpd="sng" algn="ctr">
+                      <a:solidFill>
+                        <a:srgbClr val="E3E8E9"/>
+                      </a:solidFill>
+                      <a:prstDash val="solid"/>
+                      <a:round/>
+                      <a:headEnd type="none" w="med" len="med"/>
+                      <a:tailEnd type="none" w="med" len="med"/>
+                    </a:lnL>
+                    <a:lnR w="6350" cap="flat" cmpd="sng" algn="ctr">
+                      <a:solidFill>
+                        <a:srgbClr val="E3E8E9"/>
+                      </a:solidFill>
+                      <a:prstDash val="solid"/>
+                      <a:round/>
+                      <a:headEnd type="none" w="med" len="med"/>
+                      <a:tailEnd type="none" w="med" len="med"/>
+                    </a:lnR>
+                    <a:lnT w="6350" cap="flat" cmpd="sng" algn="ctr">
+                      <a:solidFill>
+                        <a:srgbClr val="E3E8E9"/>
+                      </a:solidFill>
+                      <a:prstDash val="solid"/>
+                      <a:round/>
+                      <a:headEnd type="none" w="med" len="med"/>
+                      <a:tailEnd type="none" w="med" len="med"/>
+                    </a:lnT>
+                    <a:lnB w="6350" cap="flat" cmpd="sng" algn="ctr">
+                      <a:solidFill>
+                        <a:srgbClr val="E3E8E9"/>
+                      </a:solidFill>
+                      <a:prstDash val="solid"/>
+                      <a:round/>
+                      <a:headEnd type="none" w="med" len="med"/>
+                      <a:tailEnd type="none" w="med" len="med"/>
+                    </a:lnB>
+                    <a:solidFill>
+                      <a:srgbClr val="F0F4F5"/>
+                    </a:solidFill>
+                  </a:tcPr>
+                </a:tc>
+                <a:tc>
+                  <a:txBody>
+                    <a:bodyPr/>
+                    <a:lstStyle/>
+                    <a:p>
+                      <a:pPr algn="r" indent="0" marL="0">
+                        <a:buNone/>
+                      </a:pPr>
+                      <a:r>
+                        <a:rPr lang="en-US" sz="1000" b="1" dirty="0">
+                          <a:solidFill>
+                            <a:srgbClr val="0B2A3D"/>
+                          </a:solidFill>
+                          <a:latin typeface="Calibri" pitchFamily="34" charset="0"/>
+                          <a:ea typeface="Calibri" pitchFamily="34" charset="-122"/>
+                          <a:cs typeface="Calibri" pitchFamily="34" charset="-120"/>
+                        </a:rPr>
+                        <a:t>US$ 876,9 mil</a:t>
+                      </a:r>
+                      <a:endParaRPr lang="en-US" sz="1000" dirty="0">
+                        <a:latin typeface="Calibri" charset="0"/>
+                        <a:ea typeface="Calibri" charset="0"/>
+                        <a:cs typeface="Calibri" charset="0"/>
+                      </a:endParaRPr>
+                    </a:p>
+                  </a:txBody>
+                  <a:tcPr marL="91440" marR="91440" marT="45720" marB="45720" anchor="ctr">
+                    <a:lnL w="6350" cap="flat" cmpd="sng" algn="ctr">
+                      <a:solidFill>
+                        <a:srgbClr val="E3E8E9"/>
+                      </a:solidFill>
+                      <a:prstDash val="solid"/>
+                      <a:round/>
+                      <a:headEnd type="none" w="med" len="med"/>
+                      <a:tailEnd type="none" w="med" len="med"/>
+                    </a:lnL>
+                    <a:lnR w="6350" cap="flat" cmpd="sng" algn="ctr">
+                      <a:solidFill>
+                        <a:srgbClr val="E3E8E9"/>
+                      </a:solidFill>
+                      <a:prstDash val="solid"/>
+                      <a:round/>
+                      <a:headEnd type="none" w="med" len="med"/>
+                      <a:tailEnd type="none" w="med" len="med"/>
+                    </a:lnR>
+                    <a:lnT w="6350" cap="flat" cmpd="sng" algn="ctr">
+                      <a:solidFill>
+                        <a:srgbClr val="E3E8E9"/>
+                      </a:solidFill>
+                      <a:prstDash val="solid"/>
+                      <a:round/>
+                      <a:headEnd type="none" w="med" len="med"/>
+                      <a:tailEnd type="none" w="med" len="med"/>
+                    </a:lnT>
+                    <a:lnB w="6350" cap="flat" cmpd="sng" algn="ctr">
+                      <a:solidFill>
+                        <a:srgbClr val="E3E8E9"/>
+                      </a:solidFill>
+                      <a:prstDash val="solid"/>
+                      <a:round/>
+                      <a:headEnd type="none" w="med" len="med"/>
+                      <a:tailEnd type="none" w="med" len="med"/>
+                    </a:lnB>
+                    <a:solidFill>
+                      <a:srgbClr val="F0F4F5"/>
+                    </a:solidFill>
+                  </a:tcPr>
+                </a:tc>
+              </a:tr>
+              <a:tr h="288036">
+                <a:tc>
+                  <a:txBody>
+                    <a:bodyPr/>
+                    <a:lstStyle/>
+                    <a:p>
+                      <a:pPr indent="0" marL="0">
+                        <a:buNone/>
+                      </a:pPr>
+                      <a:r>
+                        <a:rPr lang="en-US" sz="1000" dirty="0">
+                          <a:solidFill>
+                            <a:srgbClr val="1C2B33"/>
+                          </a:solidFill>
+                          <a:latin typeface="Calibri" pitchFamily="34" charset="0"/>
+                          <a:ea typeface="Calibri" pitchFamily="34" charset="-122"/>
+                          <a:cs typeface="Calibri" pitchFamily="34" charset="-120"/>
+                        </a:rPr>
+                        <a:t>Detectores de Chama</a:t>
+                      </a:r>
+                      <a:endParaRPr lang="en-US" sz="1000" dirty="0">
+                        <a:latin typeface="Calibri" charset="0"/>
+                        <a:ea typeface="Calibri" charset="0"/>
+                        <a:cs typeface="Calibri" charset="0"/>
+                      </a:endParaRPr>
+                    </a:p>
+                  </a:txBody>
+                  <a:tcPr marL="91440" marR="91440" marT="45720" marB="45720" anchor="ctr">
+                    <a:lnL w="6350" cap="flat" cmpd="sng" algn="ctr">
+                      <a:solidFill>
+                        <a:srgbClr val="E3E8E9"/>
+                      </a:solidFill>
+                      <a:prstDash val="solid"/>
+                      <a:round/>
+                      <a:headEnd type="none" w="med" len="med"/>
+                      <a:tailEnd type="none" w="med" len="med"/>
+                    </a:lnL>
+                    <a:lnR w="6350" cap="flat" cmpd="sng" algn="ctr">
+                      <a:solidFill>
+                        <a:srgbClr val="E3E8E9"/>
+                      </a:solidFill>
+                      <a:prstDash val="solid"/>
+                      <a:round/>
+                      <a:headEnd type="none" w="med" len="med"/>
+                      <a:tailEnd type="none" w="med" len="med"/>
+                    </a:lnR>
+                    <a:lnT w="6350" cap="flat" cmpd="sng" algn="ctr">
+                      <a:solidFill>
+                        <a:srgbClr val="E3E8E9"/>
+                      </a:solidFill>
+                      <a:prstDash val="solid"/>
+                      <a:round/>
+                      <a:headEnd type="none" w="med" len="med"/>
+                      <a:tailEnd type="none" w="med" len="med"/>
+                    </a:lnT>
+                    <a:lnB w="6350" cap="flat" cmpd="sng" algn="ctr">
+                      <a:solidFill>
+                        <a:srgbClr val="E3E8E9"/>
+                      </a:solidFill>
+                      <a:prstDash val="solid"/>
+                      <a:round/>
+                      <a:headEnd type="none" w="med" len="med"/>
+                      <a:tailEnd type="none" w="med" len="med"/>
+                    </a:lnB>
+                    <a:solidFill>
+                      <a:srgbClr val="FFFFFF"/>
+                    </a:solidFill>
+                  </a:tcPr>
+                </a:tc>
+                <a:tc>
+                  <a:txBody>
+                    <a:bodyPr/>
+                    <a:lstStyle/>
+                    <a:p>
+                      <a:pPr indent="0" marL="0">
+                        <a:buNone/>
+                      </a:pPr>
+                      <a:r>
+                        <a:rPr lang="en-US" sz="950" dirty="0">
+                          <a:solidFill>
+                            <a:srgbClr val="5B6B73"/>
+                          </a:solidFill>
+                          <a:latin typeface="Calibri" pitchFamily="34" charset="0"/>
+                          <a:ea typeface="Calibri" pitchFamily="34" charset="-122"/>
+                          <a:cs typeface="Calibri" pitchFamily="34" charset="-120"/>
+                        </a:rPr>
+                        <a:t>Bem Estar/Segurança</a:t>
+                      </a:r>
+                      <a:endParaRPr lang="en-US" sz="950" dirty="0">
+                        <a:latin typeface="Calibri" charset="0"/>
+                        <a:ea typeface="Calibri" charset="0"/>
+                        <a:cs typeface="Calibri" charset="0"/>
+                      </a:endParaRPr>
+                    </a:p>
+                  </a:txBody>
+                  <a:tcPr marL="91440" marR="91440" marT="45720" marB="45720" anchor="ctr">
+                    <a:lnL w="6350" cap="flat" cmpd="sng" algn="ctr">
+                      <a:solidFill>
+                        <a:srgbClr val="E3E8E9"/>
+                      </a:solidFill>
+                      <a:prstDash val="solid"/>
+                      <a:round/>
+                      <a:headEnd type="none" w="med" len="med"/>
+                      <a:tailEnd type="none" w="med" len="med"/>
+                    </a:lnL>
+                    <a:lnR w="6350" cap="flat" cmpd="sng" algn="ctr">
+                      <a:solidFill>
+                        <a:srgbClr val="E3E8E9"/>
+                      </a:solidFill>
+                      <a:prstDash val="solid"/>
+                      <a:round/>
+                      <a:headEnd type="none" w="med" len="med"/>
+                      <a:tailEnd type="none" w="med" len="med"/>
+                    </a:lnR>
+                    <a:lnT w="6350" cap="flat" cmpd="sng" algn="ctr">
+                      <a:solidFill>
+                        <a:srgbClr val="E3E8E9"/>
+                      </a:solidFill>
+                      <a:prstDash val="solid"/>
+                      <a:round/>
+                      <a:headEnd type="none" w="med" len="med"/>
+                      <a:tailEnd type="none" w="med" len="med"/>
+                    </a:lnT>
+                    <a:lnB w="6350" cap="flat" cmpd="sng" algn="ctr">
+                      <a:solidFill>
+                        <a:srgbClr val="E3E8E9"/>
+                      </a:solidFill>
+                      <a:prstDash val="solid"/>
+                      <a:round/>
+                      <a:headEnd type="none" w="med" len="med"/>
+                      <a:tailEnd type="none" w="med" len="med"/>
+                    </a:lnB>
+                    <a:solidFill>
+                      <a:srgbClr val="FFFFFF"/>
+                    </a:solidFill>
+                  </a:tcPr>
+                </a:tc>
+                <a:tc>
+                  <a:txBody>
+                    <a:bodyPr/>
+                    <a:lstStyle/>
+                    <a:p>
+                      <a:pPr indent="0" marL="0">
+                        <a:buNone/>
+                      </a:pPr>
+                      <a:r>
+                        <a:rPr lang="en-US" sz="950" dirty="0">
+                          <a:solidFill>
+                            <a:srgbClr val="5B6B73"/>
+                          </a:solidFill>
+                          <a:latin typeface="Calibri" pitchFamily="34" charset="0"/>
+                          <a:ea typeface="Calibri" pitchFamily="34" charset="-122"/>
+                          <a:cs typeface="Calibri" pitchFamily="34" charset="-120"/>
+                        </a:rPr>
+                        <a:t>Projetos</a:t>
+                      </a:r>
+                      <a:endParaRPr lang="en-US" sz="950" dirty="0">
+                        <a:latin typeface="Calibri" charset="0"/>
+                        <a:ea typeface="Calibri" charset="0"/>
+                        <a:cs typeface="Calibri" charset="0"/>
+                      </a:endParaRPr>
+                    </a:p>
+                  </a:txBody>
+                  <a:tcPr marL="91440" marR="91440" marT="45720" marB="45720" anchor="ctr">
+                    <a:lnL w="6350" cap="flat" cmpd="sng" algn="ctr">
+                      <a:solidFill>
+                        <a:srgbClr val="E3E8E9"/>
+                      </a:solidFill>
+                      <a:prstDash val="solid"/>
+                      <a:round/>
+                      <a:headEnd type="none" w="med" len="med"/>
+                      <a:tailEnd type="none" w="med" len="med"/>
+                    </a:lnL>
+                    <a:lnR w="6350" cap="flat" cmpd="sng" algn="ctr">
+                      <a:solidFill>
+                        <a:srgbClr val="E3E8E9"/>
+                      </a:solidFill>
+                      <a:prstDash val="solid"/>
+                      <a:round/>
+                      <a:headEnd type="none" w="med" len="med"/>
+                      <a:tailEnd type="none" w="med" len="med"/>
+                    </a:lnR>
+                    <a:lnT w="6350" cap="flat" cmpd="sng" algn="ctr">
+                      <a:solidFill>
+                        <a:srgbClr val="E3E8E9"/>
+                      </a:solidFill>
+                      <a:prstDash val="solid"/>
+                      <a:round/>
+                      <a:headEnd type="none" w="med" len="med"/>
+                      <a:tailEnd type="none" w="med" len="med"/>
+                    </a:lnT>
+                    <a:lnB w="6350" cap="flat" cmpd="sng" algn="ctr">
+                      <a:solidFill>
+                        <a:srgbClr val="E3E8E9"/>
+                      </a:solidFill>
+                      <a:prstDash val="solid"/>
+                      <a:round/>
+                      <a:headEnd type="none" w="med" len="med"/>
+                      <a:tailEnd type="none" w="med" len="med"/>
+                    </a:lnB>
+                    <a:solidFill>
+                      <a:srgbClr val="FFFFFF"/>
+                    </a:solidFill>
+                  </a:tcPr>
+                </a:tc>
+                <a:tc>
+                  <a:txBody>
+                    <a:bodyPr/>
+                    <a:lstStyle/>
+                    <a:p>
+                      <a:pPr algn="r" indent="0" marL="0">
+                        <a:buNone/>
+                      </a:pPr>
+                      <a:r>
+                        <a:rPr lang="en-US" sz="1000" b="1" dirty="0">
+                          <a:solidFill>
+                            <a:srgbClr val="0B2A3D"/>
+                          </a:solidFill>
+                          <a:latin typeface="Calibri" pitchFamily="34" charset="0"/>
+                          <a:ea typeface="Calibri" pitchFamily="34" charset="-122"/>
+                          <a:cs typeface="Calibri" pitchFamily="34" charset="-120"/>
+                        </a:rPr>
+                        <a:t>US$ 826,2 mil</a:t>
+                      </a:r>
+                      <a:endParaRPr lang="en-US" sz="1000" dirty="0">
+                        <a:latin typeface="Calibri" charset="0"/>
+                        <a:ea typeface="Calibri" charset="0"/>
+                        <a:cs typeface="Calibri" charset="0"/>
+                      </a:endParaRPr>
+                    </a:p>
+                  </a:txBody>
+                  <a:tcPr marL="91440" marR="91440" marT="45720" marB="45720" anchor="ctr">
+                    <a:lnL w="6350" cap="flat" cmpd="sng" algn="ctr">
+                      <a:solidFill>
+                        <a:srgbClr val="E3E8E9"/>
+                      </a:solidFill>
+                      <a:prstDash val="solid"/>
+                      <a:round/>
+                      <a:headEnd type="none" w="med" len="med"/>
+                      <a:tailEnd type="none" w="med" len="med"/>
+                    </a:lnL>
+                    <a:lnR w="6350" cap="flat" cmpd="sng" algn="ctr">
+                      <a:solidFill>
+                        <a:srgbClr val="E3E8E9"/>
+                      </a:solidFill>
+                      <a:prstDash val="solid"/>
+                      <a:round/>
+                      <a:headEnd type="none" w="med" len="med"/>
+                      <a:tailEnd type="none" w="med" len="med"/>
+                    </a:lnR>
+                    <a:lnT w="6350" cap="flat" cmpd="sng" algn="ctr">
+                      <a:solidFill>
+                        <a:srgbClr val="E3E8E9"/>
+                      </a:solidFill>
+                      <a:prstDash val="solid"/>
+                      <a:round/>
+                      <a:headEnd type="none" w="med" len="med"/>
+                      <a:tailEnd type="none" w="med" len="med"/>
+                    </a:lnT>
+                    <a:lnB w="6350" cap="flat" cmpd="sng" algn="ctr">
+                      <a:solidFill>
+                        <a:srgbClr val="E3E8E9"/>
+                      </a:solidFill>
+                      <a:prstDash val="solid"/>
+                      <a:round/>
+                      <a:headEnd type="none" w="med" len="med"/>
+                      <a:tailEnd type="none" w="med" len="med"/>
+                    </a:lnB>
+                    <a:solidFill>
+                      <a:srgbClr val="FFFFFF"/>
+                    </a:solidFill>
+                  </a:tcPr>
+                </a:tc>
+              </a:tr>
+              <a:tr h="288036">
+                <a:tc>
+                  <a:txBody>
+                    <a:bodyPr/>
+                    <a:lstStyle/>
+                    <a:p>
+                      <a:pPr indent="0" marL="0">
+                        <a:buNone/>
+                      </a:pPr>
+                      <a:r>
+                        <a:rPr lang="en-US" sz="1000" dirty="0">
+                          <a:solidFill>
+                            <a:srgbClr val="1C2B33"/>
+                          </a:solidFill>
+                          <a:latin typeface="Calibri" pitchFamily="34" charset="0"/>
+                          <a:ea typeface="Calibri" pitchFamily="34" charset="-122"/>
+                          <a:cs typeface="Calibri" pitchFamily="34" charset="-120"/>
+                        </a:rPr>
+                        <a:t>REPARO E INSTALAÇÃO DA PIGGING PUMP</a:t>
+                      </a:r>
+                      <a:endParaRPr lang="en-US" sz="1000" dirty="0">
+                        <a:latin typeface="Calibri" charset="0"/>
+                        <a:ea typeface="Calibri" charset="0"/>
+                        <a:cs typeface="Calibri" charset="0"/>
+                      </a:endParaRPr>
+                    </a:p>
+                  </a:txBody>
+                  <a:tcPr marL="91440" marR="91440" marT="45720" marB="45720" anchor="ctr">
+                    <a:lnL w="6350" cap="flat" cmpd="sng" algn="ctr">
+                      <a:solidFill>
+                        <a:srgbClr val="E3E8E9"/>
+                      </a:solidFill>
+                      <a:prstDash val="solid"/>
+                      <a:round/>
+                      <a:headEnd type="none" w="med" len="med"/>
+                      <a:tailEnd type="none" w="med" len="med"/>
+                    </a:lnL>
+                    <a:lnR w="6350" cap="flat" cmpd="sng" algn="ctr">
+                      <a:solidFill>
+                        <a:srgbClr val="E3E8E9"/>
+                      </a:solidFill>
+                      <a:prstDash val="solid"/>
+                      <a:round/>
+                      <a:headEnd type="none" w="med" len="med"/>
+                      <a:tailEnd type="none" w="med" len="med"/>
+                    </a:lnR>
+                    <a:lnT w="6350" cap="flat" cmpd="sng" algn="ctr">
+                      <a:solidFill>
+                        <a:srgbClr val="E3E8E9"/>
+                      </a:solidFill>
+                      <a:prstDash val="solid"/>
+                      <a:round/>
+                      <a:headEnd type="none" w="med" len="med"/>
+                      <a:tailEnd type="none" w="med" len="med"/>
+                    </a:lnT>
+                    <a:lnB w="6350" cap="flat" cmpd="sng" algn="ctr">
+                      <a:solidFill>
+                        <a:srgbClr val="E3E8E9"/>
+                      </a:solidFill>
+                      <a:prstDash val="solid"/>
+                      <a:round/>
+                      <a:headEnd type="none" w="med" len="med"/>
+                      <a:tailEnd type="none" w="med" len="med"/>
+                    </a:lnB>
+                    <a:solidFill>
+                      <a:srgbClr val="F0F4F5"/>
+                    </a:solidFill>
+                  </a:tcPr>
+                </a:tc>
+                <a:tc>
+                  <a:txBody>
+                    <a:bodyPr/>
+                    <a:lstStyle/>
+                    <a:p>
+                      <a:pPr indent="0" marL="0">
+                        <a:buNone/>
+                      </a:pPr>
+                      <a:r>
+                        <a:rPr lang="en-US" sz="950" dirty="0">
+                          <a:solidFill>
+                            <a:srgbClr val="5B6B73"/>
+                          </a:solidFill>
+                          <a:latin typeface="Calibri" pitchFamily="34" charset="0"/>
+                          <a:ea typeface="Calibri" pitchFamily="34" charset="-122"/>
+                          <a:cs typeface="Calibri" pitchFamily="34" charset="-120"/>
+                        </a:rPr>
+                        <a:t>Eficiência de Produção</a:t>
+                      </a:r>
+                      <a:endParaRPr lang="en-US" sz="950" dirty="0">
+                        <a:latin typeface="Calibri" charset="0"/>
+                        <a:ea typeface="Calibri" charset="0"/>
+                        <a:cs typeface="Calibri" charset="0"/>
+                      </a:endParaRPr>
+                    </a:p>
+                  </a:txBody>
+                  <a:tcPr marL="91440" marR="91440" marT="45720" marB="45720" anchor="ctr">
+                    <a:lnL w="6350" cap="flat" cmpd="sng" algn="ctr">
+                      <a:solidFill>
+                        <a:srgbClr val="E3E8E9"/>
+                      </a:solidFill>
+                      <a:prstDash val="solid"/>
+                      <a:round/>
+                      <a:headEnd type="none" w="med" len="med"/>
+                      <a:tailEnd type="none" w="med" len="med"/>
+                    </a:lnL>
+                    <a:lnR w="6350" cap="flat" cmpd="sng" algn="ctr">
+                      <a:solidFill>
+                        <a:srgbClr val="E3E8E9"/>
+                      </a:solidFill>
+                      <a:prstDash val="solid"/>
+                      <a:round/>
+                      <a:headEnd type="none" w="med" len="med"/>
+                      <a:tailEnd type="none" w="med" len="med"/>
+                    </a:lnR>
+                    <a:lnT w="6350" cap="flat" cmpd="sng" algn="ctr">
+                      <a:solidFill>
+                        <a:srgbClr val="E3E8E9"/>
+                      </a:solidFill>
+                      <a:prstDash val="solid"/>
+                      <a:round/>
+                      <a:headEnd type="none" w="med" len="med"/>
+                      <a:tailEnd type="none" w="med" len="med"/>
+                    </a:lnT>
+                    <a:lnB w="6350" cap="flat" cmpd="sng" algn="ctr">
+                      <a:solidFill>
+                        <a:srgbClr val="E3E8E9"/>
+                      </a:solidFill>
+                      <a:prstDash val="solid"/>
+                      <a:round/>
+                      <a:headEnd type="none" w="med" len="med"/>
+                      <a:tailEnd type="none" w="med" len="med"/>
+                    </a:lnB>
+                    <a:solidFill>
+                      <a:srgbClr val="F0F4F5"/>
+                    </a:solidFill>
+                  </a:tcPr>
+                </a:tc>
+                <a:tc>
+                  <a:txBody>
+                    <a:bodyPr/>
+                    <a:lstStyle/>
+                    <a:p>
+                      <a:pPr indent="0" marL="0">
+                        <a:buNone/>
+                      </a:pPr>
+                      <a:r>
+                        <a:rPr lang="en-US" sz="950" dirty="0">
+                          <a:solidFill>
+                            <a:srgbClr val="5B6B73"/>
+                          </a:solidFill>
+                          <a:latin typeface="Calibri" pitchFamily="34" charset="0"/>
+                          <a:ea typeface="Calibri" pitchFamily="34" charset="-122"/>
+                          <a:cs typeface="Calibri" pitchFamily="34" charset="-120"/>
+                        </a:rPr>
+                        <a:t>MNT – Manutenção</a:t>
+                      </a:r>
+                      <a:endParaRPr lang="en-US" sz="950" dirty="0">
+                        <a:latin typeface="Calibri" charset="0"/>
+                        <a:ea typeface="Calibri" charset="0"/>
+                        <a:cs typeface="Calibri" charset="0"/>
+                      </a:endParaRPr>
+                    </a:p>
+                  </a:txBody>
+                  <a:tcPr marL="91440" marR="91440" marT="45720" marB="45720" anchor="ctr">
+                    <a:lnL w="6350" cap="flat" cmpd="sng" algn="ctr">
+                      <a:solidFill>
+                        <a:srgbClr val="E3E8E9"/>
+                      </a:solidFill>
+                      <a:prstDash val="solid"/>
+                      <a:round/>
+                      <a:headEnd type="none" w="med" len="med"/>
+                      <a:tailEnd type="none" w="med" len="med"/>
+                    </a:lnL>
+                    <a:lnR w="6350" cap="flat" cmpd="sng" algn="ctr">
+                      <a:solidFill>
+                        <a:srgbClr val="E3E8E9"/>
+                      </a:solidFill>
+                      <a:prstDash val="solid"/>
+                      <a:round/>
+                      <a:headEnd type="none" w="med" len="med"/>
+                      <a:tailEnd type="none" w="med" len="med"/>
+                    </a:lnR>
+                    <a:lnT w="6350" cap="flat" cmpd="sng" algn="ctr">
+                      <a:solidFill>
+                        <a:srgbClr val="E3E8E9"/>
+                      </a:solidFill>
+                      <a:prstDash val="solid"/>
+                      <a:round/>
+                      <a:headEnd type="none" w="med" len="med"/>
+                      <a:tailEnd type="none" w="med" len="med"/>
+                    </a:lnT>
+                    <a:lnB w="6350" cap="flat" cmpd="sng" algn="ctr">
+                      <a:solidFill>
+                        <a:srgbClr val="E3E8E9"/>
+                      </a:solidFill>
+                      <a:prstDash val="solid"/>
+                      <a:round/>
+                      <a:headEnd type="none" w="med" len="med"/>
+                      <a:tailEnd type="none" w="med" len="med"/>
+                    </a:lnB>
+                    <a:solidFill>
+                      <a:srgbClr val="F0F4F5"/>
+                    </a:solidFill>
+                  </a:tcPr>
+                </a:tc>
+                <a:tc>
+                  <a:txBody>
+                    <a:bodyPr/>
+                    <a:lstStyle/>
+                    <a:p>
+                      <a:pPr algn="r" indent="0" marL="0">
+                        <a:buNone/>
+                      </a:pPr>
+                      <a:r>
+                        <a:rPr lang="en-US" sz="1000" b="1" dirty="0">
+                          <a:solidFill>
+                            <a:srgbClr val="0B2A3D"/>
+                          </a:solidFill>
+                          <a:latin typeface="Calibri" pitchFamily="34" charset="0"/>
+                          <a:ea typeface="Calibri" pitchFamily="34" charset="-122"/>
+                          <a:cs typeface="Calibri" pitchFamily="34" charset="-120"/>
+                        </a:rPr>
+                        <a:t>US$ 773,5 mil</a:t>
+                      </a:r>
+                      <a:endParaRPr lang="en-US" sz="1000" dirty="0">
+                        <a:latin typeface="Calibri" charset="0"/>
+                        <a:ea typeface="Calibri" charset="0"/>
+                        <a:cs typeface="Calibri" charset="0"/>
+                      </a:endParaRPr>
+                    </a:p>
+                  </a:txBody>
+                  <a:tcPr marL="91440" marR="91440" marT="45720" marB="45720" anchor="ctr">
+                    <a:lnL w="6350" cap="flat" cmpd="sng" algn="ctr">
+                      <a:solidFill>
+                        <a:srgbClr val="E3E8E9"/>
+                      </a:solidFill>
+                      <a:prstDash val="solid"/>
+                      <a:round/>
+                      <a:headEnd type="none" w="med" len="med"/>
+                      <a:tailEnd type="none" w="med" len="med"/>
+                    </a:lnL>
+                    <a:lnR w="6350" cap="flat" cmpd="sng" algn="ctr">
+                      <a:solidFill>
+                        <a:srgbClr val="E3E8E9"/>
+                      </a:solidFill>
+                      <a:prstDash val="solid"/>
+                      <a:round/>
+                      <a:headEnd type="none" w="med" len="med"/>
+                      <a:tailEnd type="none" w="med" len="med"/>
+                    </a:lnR>
+                    <a:lnT w="6350" cap="flat" cmpd="sng" algn="ctr">
+                      <a:solidFill>
+                        <a:srgbClr val="E3E8E9"/>
+                      </a:solidFill>
+                      <a:prstDash val="solid"/>
+                      <a:round/>
+                      <a:headEnd type="none" w="med" len="med"/>
+                      <a:tailEnd type="none" w="med" len="med"/>
+                    </a:lnT>
+                    <a:lnB w="6350" cap="flat" cmpd="sng" algn="ctr">
+                      <a:solidFill>
+                        <a:srgbClr val="E3E8E9"/>
+                      </a:solidFill>
+                      <a:prstDash val="solid"/>
+                      <a:round/>
+                      <a:headEnd type="none" w="med" len="med"/>
+                      <a:tailEnd type="none" w="med" len="med"/>
+                    </a:lnB>
+                    <a:solidFill>
+                      <a:srgbClr val="F0F4F5"/>
+                    </a:solidFill>
+                  </a:tcPr>
+                </a:tc>
+              </a:tr>
+              <a:tr h="288036">
+                <a:tc>
+                  <a:txBody>
+                    <a:bodyPr/>
+                    <a:lstStyle/>
+                    <a:p>
+                      <a:pPr indent="0" marL="0">
+                        <a:buNone/>
+                      </a:pPr>
+                      <a:r>
+                        <a:rPr lang="en-US" sz="1000" dirty="0">
+                          <a:solidFill>
+                            <a:srgbClr val="1C2B33"/>
+                          </a:solidFill>
+                          <a:latin typeface="Calibri" pitchFamily="34" charset="0"/>
+                          <a:ea typeface="Calibri" pitchFamily="34" charset="-122"/>
+                          <a:cs typeface="Calibri" pitchFamily="34" charset="-120"/>
+                        </a:rPr>
+                        <a:t>Combate a Incêndio - Retrofit do sistema fixo de CO2</a:t>
+                      </a:r>
+                      <a:endParaRPr lang="en-US" sz="1000" dirty="0">
+                        <a:latin typeface="Calibri" charset="0"/>
+                        <a:ea typeface="Calibri" charset="0"/>
+                        <a:cs typeface="Calibri" charset="0"/>
+                      </a:endParaRPr>
+                    </a:p>
+                  </a:txBody>
+                  <a:tcPr marL="91440" marR="91440" marT="45720" marB="45720" anchor="ctr">
+                    <a:lnL w="6350" cap="flat" cmpd="sng" algn="ctr">
+                      <a:solidFill>
+                        <a:srgbClr val="E3E8E9"/>
+                      </a:solidFill>
+                      <a:prstDash val="solid"/>
+                      <a:round/>
+                      <a:headEnd type="none" w="med" len="med"/>
+                      <a:tailEnd type="none" w="med" len="med"/>
+                    </a:lnL>
+                    <a:lnR w="6350" cap="flat" cmpd="sng" algn="ctr">
+                      <a:solidFill>
+                        <a:srgbClr val="E3E8E9"/>
+                      </a:solidFill>
+                      <a:prstDash val="solid"/>
+                      <a:round/>
+                      <a:headEnd type="none" w="med" len="med"/>
+                      <a:tailEnd type="none" w="med" len="med"/>
+                    </a:lnR>
+                    <a:lnT w="6350" cap="flat" cmpd="sng" algn="ctr">
+                      <a:solidFill>
+                        <a:srgbClr val="E3E8E9"/>
+                      </a:solidFill>
+                      <a:prstDash val="solid"/>
+                      <a:round/>
+                      <a:headEnd type="none" w="med" len="med"/>
+                      <a:tailEnd type="none" w="med" len="med"/>
+                    </a:lnT>
+                    <a:lnB w="6350" cap="flat" cmpd="sng" algn="ctr">
+                      <a:solidFill>
+                        <a:srgbClr val="E3E8E9"/>
+                      </a:solidFill>
+                      <a:prstDash val="solid"/>
+                      <a:round/>
+                      <a:headEnd type="none" w="med" len="med"/>
+                      <a:tailEnd type="none" w="med" len="med"/>
+                    </a:lnB>
+                    <a:solidFill>
+                      <a:srgbClr val="FFFFFF"/>
+                    </a:solidFill>
+                  </a:tcPr>
+                </a:tc>
+                <a:tc>
+                  <a:txBody>
+                    <a:bodyPr/>
+                    <a:lstStyle/>
+                    <a:p>
+                      <a:pPr indent="0" marL="0">
+                        <a:buNone/>
+                      </a:pPr>
+                      <a:r>
+                        <a:rPr lang="en-US" sz="950" dirty="0">
+                          <a:solidFill>
+                            <a:srgbClr val="5B6B73"/>
+                          </a:solidFill>
+                          <a:latin typeface="Calibri" pitchFamily="34" charset="0"/>
+                          <a:ea typeface="Calibri" pitchFamily="34" charset="-122"/>
+                          <a:cs typeface="Calibri" pitchFamily="34" charset="-120"/>
+                        </a:rPr>
+                        <a:t>Bem Estar/Segurança</a:t>
+                      </a:r>
+                      <a:endParaRPr lang="en-US" sz="950" dirty="0">
+                        <a:latin typeface="Calibri" charset="0"/>
+                        <a:ea typeface="Calibri" charset="0"/>
+                        <a:cs typeface="Calibri" charset="0"/>
+                      </a:endParaRPr>
+                    </a:p>
+                  </a:txBody>
+                  <a:tcPr marL="91440" marR="91440" marT="45720" marB="45720" anchor="ctr">
+                    <a:lnL w="6350" cap="flat" cmpd="sng" algn="ctr">
+                      <a:solidFill>
+                        <a:srgbClr val="E3E8E9"/>
+                      </a:solidFill>
+                      <a:prstDash val="solid"/>
+                      <a:round/>
+                      <a:headEnd type="none" w="med" len="med"/>
+                      <a:tailEnd type="none" w="med" len="med"/>
+                    </a:lnL>
+                    <a:lnR w="6350" cap="flat" cmpd="sng" algn="ctr">
+                      <a:solidFill>
+                        <a:srgbClr val="E3E8E9"/>
+                      </a:solidFill>
+                      <a:prstDash val="solid"/>
+                      <a:round/>
+                      <a:headEnd type="none" w="med" len="med"/>
+                      <a:tailEnd type="none" w="med" len="med"/>
+                    </a:lnR>
+                    <a:lnT w="6350" cap="flat" cmpd="sng" algn="ctr">
+                      <a:solidFill>
+                        <a:srgbClr val="E3E8E9"/>
+                      </a:solidFill>
+                      <a:prstDash val="solid"/>
+                      <a:round/>
+                      <a:headEnd type="none" w="med" len="med"/>
+                      <a:tailEnd type="none" w="med" len="med"/>
+                    </a:lnT>
+                    <a:lnB w="6350" cap="flat" cmpd="sng" algn="ctr">
+                      <a:solidFill>
+                        <a:srgbClr val="E3E8E9"/>
+                      </a:solidFill>
+                      <a:prstDash val="solid"/>
+                      <a:round/>
+                      <a:headEnd type="none" w="med" len="med"/>
+                      <a:tailEnd type="none" w="med" len="med"/>
+                    </a:lnB>
+                    <a:solidFill>
+                      <a:srgbClr val="FFFFFF"/>
+                    </a:solidFill>
+                  </a:tcPr>
+                </a:tc>
+                <a:tc>
+                  <a:txBody>
+                    <a:bodyPr/>
+                    <a:lstStyle/>
+                    <a:p>
+                      <a:pPr indent="0" marL="0">
+                        <a:buNone/>
+                      </a:pPr>
+                      <a:r>
+                        <a:rPr lang="en-US" sz="950" dirty="0">
+                          <a:solidFill>
+                            <a:srgbClr val="5B6B73"/>
+                          </a:solidFill>
+                          <a:latin typeface="Calibri" pitchFamily="34" charset="0"/>
+                          <a:ea typeface="Calibri" pitchFamily="34" charset="-122"/>
+                          <a:cs typeface="Calibri" pitchFamily="34" charset="-120"/>
+                        </a:rPr>
+                        <a:t>Saúde e Segurança Ocupacional</a:t>
+                      </a:r>
+                      <a:endParaRPr lang="en-US" sz="950" dirty="0">
+                        <a:latin typeface="Calibri" charset="0"/>
+                        <a:ea typeface="Calibri" charset="0"/>
+                        <a:cs typeface="Calibri" charset="0"/>
+                      </a:endParaRPr>
+                    </a:p>
+                  </a:txBody>
+                  <a:tcPr marL="91440" marR="91440" marT="45720" marB="45720" anchor="ctr">
+                    <a:lnL w="6350" cap="flat" cmpd="sng" algn="ctr">
+                      <a:solidFill>
+                        <a:srgbClr val="E3E8E9"/>
+                      </a:solidFill>
+                      <a:prstDash val="solid"/>
+                      <a:round/>
+                      <a:headEnd type="none" w="med" len="med"/>
+                      <a:tailEnd type="none" w="med" len="med"/>
+                    </a:lnL>
+                    <a:lnR w="6350" cap="flat" cmpd="sng" algn="ctr">
+                      <a:solidFill>
+                        <a:srgbClr val="E3E8E9"/>
+                      </a:solidFill>
+                      <a:prstDash val="solid"/>
+                      <a:round/>
+                      <a:headEnd type="none" w="med" len="med"/>
+                      <a:tailEnd type="none" w="med" len="med"/>
+                    </a:lnR>
+                    <a:lnT w="6350" cap="flat" cmpd="sng" algn="ctr">
+                      <a:solidFill>
+                        <a:srgbClr val="E3E8E9"/>
+                      </a:solidFill>
+                      <a:prstDash val="solid"/>
+                      <a:round/>
+                      <a:headEnd type="none" w="med" len="med"/>
+                      <a:tailEnd type="none" w="med" len="med"/>
+                    </a:lnT>
+                    <a:lnB w="6350" cap="flat" cmpd="sng" algn="ctr">
+                      <a:solidFill>
+                        <a:srgbClr val="E3E8E9"/>
+                      </a:solidFill>
+                      <a:prstDash val="solid"/>
+                      <a:round/>
+                      <a:headEnd type="none" w="med" len="med"/>
+                      <a:tailEnd type="none" w="med" len="med"/>
+                    </a:lnB>
+                    <a:solidFill>
+                      <a:srgbClr val="FFFFFF"/>
+                    </a:solidFill>
+                  </a:tcPr>
+                </a:tc>
+                <a:tc>
+                  <a:txBody>
+                    <a:bodyPr/>
+                    <a:lstStyle/>
+                    <a:p>
+                      <a:pPr algn="r" indent="0" marL="0">
+                        <a:buNone/>
+                      </a:pPr>
+                      <a:r>
+                        <a:rPr lang="en-US" sz="1000" b="1" dirty="0">
+                          <a:solidFill>
+                            <a:srgbClr val="0B2A3D"/>
+                          </a:solidFill>
+                          <a:latin typeface="Calibri" pitchFamily="34" charset="0"/>
+                          <a:ea typeface="Calibri" pitchFamily="34" charset="-122"/>
+                          <a:cs typeface="Calibri" pitchFamily="34" charset="-120"/>
+                        </a:rPr>
+                        <a:t>US$ 600,0 mil</a:t>
+                      </a:r>
+                      <a:endParaRPr lang="en-US" sz="1000" dirty="0">
+                        <a:latin typeface="Calibri" charset="0"/>
+                        <a:ea typeface="Calibri" charset="0"/>
+                        <a:cs typeface="Calibri" charset="0"/>
+                      </a:endParaRPr>
+                    </a:p>
+                  </a:txBody>
+                  <a:tcPr marL="91440" marR="91440" marT="45720" marB="45720" anchor="ctr">
+                    <a:lnL w="6350" cap="flat" cmpd="sng" algn="ctr">
+                      <a:solidFill>
+                        <a:srgbClr val="E3E8E9"/>
+                      </a:solidFill>
+                      <a:prstDash val="solid"/>
+                      <a:round/>
+                      <a:headEnd type="none" w="med" len="med"/>
+                      <a:tailEnd type="none" w="med" len="med"/>
+                    </a:lnL>
+                    <a:lnR w="6350" cap="flat" cmpd="sng" algn="ctr">
+                      <a:solidFill>
+                        <a:srgbClr val="E3E8E9"/>
+                      </a:solidFill>
+                      <a:prstDash val="solid"/>
+                      <a:round/>
+                      <a:headEnd type="none" w="med" len="med"/>
+                      <a:tailEnd type="none" w="med" len="med"/>
+                    </a:lnR>
+                    <a:lnT w="6350" cap="flat" cmpd="sng" algn="ctr">
+                      <a:solidFill>
+                        <a:srgbClr val="E3E8E9"/>
+                      </a:solidFill>
+                      <a:prstDash val="solid"/>
+                      <a:round/>
+                      <a:headEnd type="none" w="med" len="med"/>
+                      <a:tailEnd type="none" w="med" len="med"/>
+                    </a:lnT>
+                    <a:lnB w="6350" cap="flat" cmpd="sng" algn="ctr">
+                      <a:solidFill>
+                        <a:srgbClr val="E3E8E9"/>
+                      </a:solidFill>
+                      <a:prstDash val="solid"/>
+                      <a:round/>
+                      <a:headEnd type="none" w="med" len="med"/>
+                      <a:tailEnd type="none" w="med" len="med"/>
+                    </a:lnB>
+                    <a:solidFill>
+                      <a:srgbClr val="FFFFFF"/>
+                    </a:solidFill>
+                  </a:tcPr>
+                </a:tc>
+              </a:tr>
+              <a:tr h="288036">
+                <a:tc>
+                  <a:txBody>
+                    <a:bodyPr/>
+                    <a:lstStyle/>
+                    <a:p>
+                      <a:pPr indent="0" marL="0">
+                        <a:buNone/>
+                      </a:pPr>
+                      <a:r>
+                        <a:rPr lang="en-US" sz="1000" dirty="0">
+                          <a:solidFill>
+                            <a:srgbClr val="1C2B33"/>
+                          </a:solidFill>
+                          <a:latin typeface="Calibri" pitchFamily="34" charset="0"/>
+                          <a:ea typeface="Calibri" pitchFamily="34" charset="-122"/>
+                          <a:cs typeface="Calibri" pitchFamily="34" charset="-120"/>
+                        </a:rPr>
+                        <a:t>COMPRA BOMBA DE AMINA</a:t>
+                      </a:r>
+                      <a:endParaRPr lang="en-US" sz="1000" dirty="0">
+                        <a:latin typeface="Calibri" charset="0"/>
+                        <a:ea typeface="Calibri" charset="0"/>
+                        <a:cs typeface="Calibri" charset="0"/>
+                      </a:endParaRPr>
+                    </a:p>
+                  </a:txBody>
+                  <a:tcPr marL="91440" marR="91440" marT="45720" marB="45720" anchor="ctr">
+                    <a:lnL w="6350" cap="flat" cmpd="sng" algn="ctr">
+                      <a:solidFill>
+                        <a:srgbClr val="E3E8E9"/>
+                      </a:solidFill>
+                      <a:prstDash val="solid"/>
+                      <a:round/>
+                      <a:headEnd type="none" w="med" len="med"/>
+                      <a:tailEnd type="none" w="med" len="med"/>
+                    </a:lnL>
+                    <a:lnR w="6350" cap="flat" cmpd="sng" algn="ctr">
+                      <a:solidFill>
+                        <a:srgbClr val="E3E8E9"/>
+                      </a:solidFill>
+                      <a:prstDash val="solid"/>
+                      <a:round/>
+                      <a:headEnd type="none" w="med" len="med"/>
+                      <a:tailEnd type="none" w="med" len="med"/>
+                    </a:lnR>
+                    <a:lnT w="6350" cap="flat" cmpd="sng" algn="ctr">
+                      <a:solidFill>
+                        <a:srgbClr val="E3E8E9"/>
+                      </a:solidFill>
+                      <a:prstDash val="solid"/>
+                      <a:round/>
+                      <a:headEnd type="none" w="med" len="med"/>
+                      <a:tailEnd type="none" w="med" len="med"/>
+                    </a:lnT>
+                    <a:lnB w="6350" cap="flat" cmpd="sng" algn="ctr">
+                      <a:solidFill>
+                        <a:srgbClr val="E3E8E9"/>
+                      </a:solidFill>
+                      <a:prstDash val="solid"/>
+                      <a:round/>
+                      <a:headEnd type="none" w="med" len="med"/>
+                      <a:tailEnd type="none" w="med" len="med"/>
+                    </a:lnB>
+                    <a:solidFill>
+                      <a:srgbClr val="F0F4F5"/>
+                    </a:solidFill>
+                  </a:tcPr>
+                </a:tc>
+                <a:tc>
+                  <a:txBody>
+                    <a:bodyPr/>
+                    <a:lstStyle/>
+                    <a:p>
+                      <a:pPr indent="0" marL="0">
+                        <a:buNone/>
+                      </a:pPr>
+                      <a:r>
+                        <a:rPr lang="en-US" sz="950" dirty="0">
+                          <a:solidFill>
+                            <a:srgbClr val="5B6B73"/>
+                          </a:solidFill>
+                          <a:latin typeface="Calibri" pitchFamily="34" charset="0"/>
+                          <a:ea typeface="Calibri" pitchFamily="34" charset="-122"/>
+                          <a:cs typeface="Calibri" pitchFamily="34" charset="-120"/>
+                        </a:rPr>
+                        <a:t>Rotina Operacional</a:t>
+                      </a:r>
+                      <a:endParaRPr lang="en-US" sz="950" dirty="0">
+                        <a:latin typeface="Calibri" charset="0"/>
+                        <a:ea typeface="Calibri" charset="0"/>
+                        <a:cs typeface="Calibri" charset="0"/>
+                      </a:endParaRPr>
+                    </a:p>
+                  </a:txBody>
+                  <a:tcPr marL="91440" marR="91440" marT="45720" marB="45720" anchor="ctr">
+                    <a:lnL w="6350" cap="flat" cmpd="sng" algn="ctr">
+                      <a:solidFill>
+                        <a:srgbClr val="E3E8E9"/>
+                      </a:solidFill>
+                      <a:prstDash val="solid"/>
+                      <a:round/>
+                      <a:headEnd type="none" w="med" len="med"/>
+                      <a:tailEnd type="none" w="med" len="med"/>
+                    </a:lnL>
+                    <a:lnR w="6350" cap="flat" cmpd="sng" algn="ctr">
+                      <a:solidFill>
+                        <a:srgbClr val="E3E8E9"/>
+                      </a:solidFill>
+                      <a:prstDash val="solid"/>
+                      <a:round/>
+                      <a:headEnd type="none" w="med" len="med"/>
+                      <a:tailEnd type="none" w="med" len="med"/>
+                    </a:lnR>
+                    <a:lnT w="6350" cap="flat" cmpd="sng" algn="ctr">
+                      <a:solidFill>
+                        <a:srgbClr val="E3E8E9"/>
+                      </a:solidFill>
+                      <a:prstDash val="solid"/>
+                      <a:round/>
+                      <a:headEnd type="none" w="med" len="med"/>
+                      <a:tailEnd type="none" w="med" len="med"/>
+                    </a:lnT>
+                    <a:lnB w="6350" cap="flat" cmpd="sng" algn="ctr">
+                      <a:solidFill>
+                        <a:srgbClr val="E3E8E9"/>
+                      </a:solidFill>
+                      <a:prstDash val="solid"/>
+                      <a:round/>
+                      <a:headEnd type="none" w="med" len="med"/>
+                      <a:tailEnd type="none" w="med" len="med"/>
+                    </a:lnB>
+                    <a:solidFill>
+                      <a:srgbClr val="F0F4F5"/>
+                    </a:solidFill>
+                  </a:tcPr>
+                </a:tc>
+                <a:tc>
+                  <a:txBody>
+                    <a:bodyPr/>
+                    <a:lstStyle/>
+                    <a:p>
+                      <a:pPr indent="0" marL="0">
+                        <a:buNone/>
+                      </a:pPr>
+                      <a:r>
+                        <a:rPr lang="en-US" sz="950" dirty="0">
+                          <a:solidFill>
+                            <a:srgbClr val="5B6B73"/>
+                          </a:solidFill>
+                          <a:latin typeface="Calibri" pitchFamily="34" charset="0"/>
+                          <a:ea typeface="Calibri" pitchFamily="34" charset="-122"/>
+                          <a:cs typeface="Calibri" pitchFamily="34" charset="-120"/>
+                        </a:rPr>
+                        <a:t>MNT – Manutenção</a:t>
+                      </a:r>
+                      <a:endParaRPr lang="en-US" sz="950" dirty="0">
+                        <a:latin typeface="Calibri" charset="0"/>
+                        <a:ea typeface="Calibri" charset="0"/>
+                        <a:cs typeface="Calibri" charset="0"/>
+                      </a:endParaRPr>
+                    </a:p>
+                  </a:txBody>
+                  <a:tcPr marL="91440" marR="91440" marT="45720" marB="45720" anchor="ctr">
+                    <a:lnL w="6350" cap="flat" cmpd="sng" algn="ctr">
+                      <a:solidFill>
+                        <a:srgbClr val="E3E8E9"/>
+                      </a:solidFill>
+                      <a:prstDash val="solid"/>
+                      <a:round/>
+                      <a:headEnd type="none" w="med" len="med"/>
+                      <a:tailEnd type="none" w="med" len="med"/>
+                    </a:lnL>
+                    <a:lnR w="6350" cap="flat" cmpd="sng" algn="ctr">
+                      <a:solidFill>
+                        <a:srgbClr val="E3E8E9"/>
+                      </a:solidFill>
+                      <a:prstDash val="solid"/>
+                      <a:round/>
+                      <a:headEnd type="none" w="med" len="med"/>
+                      <a:tailEnd type="none" w="med" len="med"/>
+                    </a:lnR>
+                    <a:lnT w="6350" cap="flat" cmpd="sng" algn="ctr">
+                      <a:solidFill>
+                        <a:srgbClr val="E3E8E9"/>
+                      </a:solidFill>
+                      <a:prstDash val="solid"/>
+                      <a:round/>
+                      <a:headEnd type="none" w="med" len="med"/>
+                      <a:tailEnd type="none" w="med" len="med"/>
+                    </a:lnT>
+                    <a:lnB w="6350" cap="flat" cmpd="sng" algn="ctr">
+                      <a:solidFill>
+                        <a:srgbClr val="E3E8E9"/>
+                      </a:solidFill>
+                      <a:prstDash val="solid"/>
+                      <a:round/>
+                      <a:headEnd type="none" w="med" len="med"/>
+                      <a:tailEnd type="none" w="med" len="med"/>
+                    </a:lnB>
+                    <a:solidFill>
+                      <a:srgbClr val="F0F4F5"/>
+                    </a:solidFill>
+                  </a:tcPr>
+                </a:tc>
+                <a:tc>
+                  <a:txBody>
+                    <a:bodyPr/>
+                    <a:lstStyle/>
+                    <a:p>
+                      <a:pPr algn="r" indent="0" marL="0">
+                        <a:buNone/>
+                      </a:pPr>
+                      <a:r>
+                        <a:rPr lang="en-US" sz="1000" b="1" dirty="0">
+                          <a:solidFill>
+                            <a:srgbClr val="0B2A3D"/>
+                          </a:solidFill>
+                          <a:latin typeface="Calibri" pitchFamily="34" charset="0"/>
+                          <a:ea typeface="Calibri" pitchFamily="34" charset="-122"/>
+                          <a:cs typeface="Calibri" pitchFamily="34" charset="-120"/>
+                        </a:rPr>
+                        <a:t>US$ 600,0 mil</a:t>
+                      </a:r>
+                      <a:endParaRPr lang="en-US" sz="1000" dirty="0">
+                        <a:latin typeface="Calibri" charset="0"/>
+                        <a:ea typeface="Calibri" charset="0"/>
+                        <a:cs typeface="Calibri" charset="0"/>
+                      </a:endParaRPr>
+                    </a:p>
+                  </a:txBody>
+                  <a:tcPr marL="91440" marR="91440" marT="45720" marB="45720" anchor="ctr">
+                    <a:lnL w="6350" cap="flat" cmpd="sng" algn="ctr">
+                      <a:solidFill>
+                        <a:srgbClr val="E3E8E9"/>
+                      </a:solidFill>
+                      <a:prstDash val="solid"/>
+                      <a:round/>
+                      <a:headEnd type="none" w="med" len="med"/>
+                      <a:tailEnd type="none" w="med" len="med"/>
+                    </a:lnL>
+                    <a:lnR w="6350" cap="flat" cmpd="sng" algn="ctr">
+                      <a:solidFill>
+                        <a:srgbClr val="E3E8E9"/>
+                      </a:solidFill>
+                      <a:prstDash val="solid"/>
+                      <a:round/>
+                      <a:headEnd type="none" w="med" len="med"/>
+                      <a:tailEnd type="none" w="med" len="med"/>
+                    </a:lnR>
+                    <a:lnT w="6350" cap="flat" cmpd="sng" algn="ctr">
+                      <a:solidFill>
+                        <a:srgbClr val="E3E8E9"/>
+                      </a:solidFill>
+                      <a:prstDash val="solid"/>
+                      <a:round/>
+                      <a:headEnd type="none" w="med" len="med"/>
+                      <a:tailEnd type="none" w="med" len="med"/>
+                    </a:lnT>
+                    <a:lnB w="6350" cap="flat" cmpd="sng" algn="ctr">
+                      <a:solidFill>
+                        <a:srgbClr val="E3E8E9"/>
+                      </a:solidFill>
+                      <a:prstDash val="solid"/>
+                      <a:round/>
+                      <a:headEnd type="none" w="med" len="med"/>
+                      <a:tailEnd type="none" w="med" len="med"/>
+                    </a:lnB>
+                    <a:solidFill>
+                      <a:srgbClr val="F0F4F5"/>
+                    </a:solidFill>
+                  </a:tcPr>
+                </a:tc>
+              </a:tr>
+              <a:tr h="288036">
+                <a:tc>
+                  <a:txBody>
+                    <a:bodyPr/>
+                    <a:lstStyle/>
+                    <a:p>
+                      <a:pPr indent="0" marL="0">
+                        <a:buNone/>
+                      </a:pPr>
+                      <a:r>
+                        <a:rPr lang="en-US" sz="1000" dirty="0">
+                          <a:solidFill>
+                            <a:srgbClr val="1C2B33"/>
+                          </a:solidFill>
+                          <a:latin typeface="Calibri" pitchFamily="34" charset="0"/>
+                          <a:ea typeface="Calibri" pitchFamily="34" charset="-122"/>
+                          <a:cs typeface="Calibri" pitchFamily="34" charset="-120"/>
+                        </a:rPr>
+                        <a:t>Revamp SWRO A: Recuperação do sistema de WW</a:t>
+                      </a:r>
+                      <a:endParaRPr lang="en-US" sz="1000" dirty="0">
+                        <a:latin typeface="Calibri" charset="0"/>
+                        <a:ea typeface="Calibri" charset="0"/>
+                        <a:cs typeface="Calibri" charset="0"/>
+                      </a:endParaRPr>
+                    </a:p>
+                  </a:txBody>
+                  <a:tcPr marL="91440" marR="91440" marT="45720" marB="45720" anchor="ctr">
+                    <a:lnL w="6350" cap="flat" cmpd="sng" algn="ctr">
+                      <a:solidFill>
+                        <a:srgbClr val="E3E8E9"/>
+                      </a:solidFill>
+                      <a:prstDash val="solid"/>
+                      <a:round/>
+                      <a:headEnd type="none" w="med" len="med"/>
+                      <a:tailEnd type="none" w="med" len="med"/>
+                    </a:lnL>
+                    <a:lnR w="6350" cap="flat" cmpd="sng" algn="ctr">
+                      <a:solidFill>
+                        <a:srgbClr val="E3E8E9"/>
+                      </a:solidFill>
+                      <a:prstDash val="solid"/>
+                      <a:round/>
+                      <a:headEnd type="none" w="med" len="med"/>
+                      <a:tailEnd type="none" w="med" len="med"/>
+                    </a:lnR>
+                    <a:lnT w="6350" cap="flat" cmpd="sng" algn="ctr">
+                      <a:solidFill>
+                        <a:srgbClr val="E3E8E9"/>
+                      </a:solidFill>
+                      <a:prstDash val="solid"/>
+                      <a:round/>
+                      <a:headEnd type="none" w="med" len="med"/>
+                      <a:tailEnd type="none" w="med" len="med"/>
+                    </a:lnT>
+                    <a:lnB w="6350" cap="flat" cmpd="sng" algn="ctr">
+                      <a:solidFill>
+                        <a:srgbClr val="E3E8E9"/>
+                      </a:solidFill>
+                      <a:prstDash val="solid"/>
+                      <a:round/>
+                      <a:headEnd type="none" w="med" len="med"/>
+                      <a:tailEnd type="none" w="med" len="med"/>
+                    </a:lnB>
+                    <a:solidFill>
+                      <a:srgbClr val="FFFFFF"/>
+                    </a:solidFill>
+                  </a:tcPr>
+                </a:tc>
+                <a:tc>
+                  <a:txBody>
+                    <a:bodyPr/>
+                    <a:lstStyle/>
+                    <a:p>
+                      <a:pPr indent="0" marL="0">
+                        <a:buNone/>
+                      </a:pPr>
+                      <a:r>
+                        <a:rPr lang="en-US" sz="950" dirty="0">
+                          <a:solidFill>
+                            <a:srgbClr val="5B6B73"/>
+                          </a:solidFill>
+                          <a:latin typeface="Calibri" pitchFamily="34" charset="0"/>
+                          <a:ea typeface="Calibri" pitchFamily="34" charset="-122"/>
+                          <a:cs typeface="Calibri" pitchFamily="34" charset="-120"/>
+                        </a:rPr>
+                        <a:t>Eficiência de Produção</a:t>
+                      </a:r>
+                      <a:endParaRPr lang="en-US" sz="950" dirty="0">
+                        <a:latin typeface="Calibri" charset="0"/>
+                        <a:ea typeface="Calibri" charset="0"/>
+                        <a:cs typeface="Calibri" charset="0"/>
+                      </a:endParaRPr>
+                    </a:p>
+                  </a:txBody>
+                  <a:tcPr marL="91440" marR="91440" marT="45720" marB="45720" anchor="ctr">
+                    <a:lnL w="6350" cap="flat" cmpd="sng" algn="ctr">
+                      <a:solidFill>
+                        <a:srgbClr val="E3E8E9"/>
+                      </a:solidFill>
+                      <a:prstDash val="solid"/>
+                      <a:round/>
+                      <a:headEnd type="none" w="med" len="med"/>
+                      <a:tailEnd type="none" w="med" len="med"/>
+                    </a:lnL>
+                    <a:lnR w="6350" cap="flat" cmpd="sng" algn="ctr">
+                      <a:solidFill>
+                        <a:srgbClr val="E3E8E9"/>
+                      </a:solidFill>
+                      <a:prstDash val="solid"/>
+                      <a:round/>
+                      <a:headEnd type="none" w="med" len="med"/>
+                      <a:tailEnd type="none" w="med" len="med"/>
+                    </a:lnR>
+                    <a:lnT w="6350" cap="flat" cmpd="sng" algn="ctr">
+                      <a:solidFill>
+                        <a:srgbClr val="E3E8E9"/>
+                      </a:solidFill>
+                      <a:prstDash val="solid"/>
+                      <a:round/>
+                      <a:headEnd type="none" w="med" len="med"/>
+                      <a:tailEnd type="none" w="med" len="med"/>
+                    </a:lnT>
+                    <a:lnB w="6350" cap="flat" cmpd="sng" algn="ctr">
+                      <a:solidFill>
+                        <a:srgbClr val="E3E8E9"/>
+                      </a:solidFill>
+                      <a:prstDash val="solid"/>
+                      <a:round/>
+                      <a:headEnd type="none" w="med" len="med"/>
+                      <a:tailEnd type="none" w="med" len="med"/>
+                    </a:lnB>
+                    <a:solidFill>
+                      <a:srgbClr val="FFFFFF"/>
+                    </a:solidFill>
+                  </a:tcPr>
+                </a:tc>
+                <a:tc>
+                  <a:txBody>
+                    <a:bodyPr/>
+                    <a:lstStyle/>
+                    <a:p>
+                      <a:pPr indent="0" marL="0">
+                        <a:buNone/>
+                      </a:pPr>
+                      <a:r>
+                        <a:rPr lang="en-US" sz="950" dirty="0">
+                          <a:solidFill>
+                            <a:srgbClr val="5B6B73"/>
+                          </a:solidFill>
+                          <a:latin typeface="Calibri" pitchFamily="34" charset="0"/>
+                          <a:ea typeface="Calibri" pitchFamily="34" charset="-122"/>
+                          <a:cs typeface="Calibri" pitchFamily="34" charset="-120"/>
+                        </a:rPr>
+                        <a:t>P&amp;Q - Processos</a:t>
+                      </a:r>
+                      <a:endParaRPr lang="en-US" sz="950" dirty="0">
+                        <a:latin typeface="Calibri" charset="0"/>
+                        <a:ea typeface="Calibri" charset="0"/>
+                        <a:cs typeface="Calibri" charset="0"/>
+                      </a:endParaRPr>
+                    </a:p>
+                  </a:txBody>
+                  <a:tcPr marL="91440" marR="91440" marT="45720" marB="45720" anchor="ctr">
+                    <a:lnL w="6350" cap="flat" cmpd="sng" algn="ctr">
+                      <a:solidFill>
+                        <a:srgbClr val="E3E8E9"/>
+                      </a:solidFill>
+                      <a:prstDash val="solid"/>
+                      <a:round/>
+                      <a:headEnd type="none" w="med" len="med"/>
+                      <a:tailEnd type="none" w="med" len="med"/>
+                    </a:lnL>
+                    <a:lnR w="6350" cap="flat" cmpd="sng" algn="ctr">
+                      <a:solidFill>
+                        <a:srgbClr val="E3E8E9"/>
+                      </a:solidFill>
+                      <a:prstDash val="solid"/>
+                      <a:round/>
+                      <a:headEnd type="none" w="med" len="med"/>
+                      <a:tailEnd type="none" w="med" len="med"/>
+                    </a:lnR>
+                    <a:lnT w="6350" cap="flat" cmpd="sng" algn="ctr">
+                      <a:solidFill>
+                        <a:srgbClr val="E3E8E9"/>
+                      </a:solidFill>
+                      <a:prstDash val="solid"/>
+                      <a:round/>
+                      <a:headEnd type="none" w="med" len="med"/>
+                      <a:tailEnd type="none" w="med" len="med"/>
+                    </a:lnT>
+                    <a:lnB w="6350" cap="flat" cmpd="sng" algn="ctr">
+                      <a:solidFill>
+                        <a:srgbClr val="E3E8E9"/>
+                      </a:solidFill>
+                      <a:prstDash val="solid"/>
+                      <a:round/>
+                      <a:headEnd type="none" w="med" len="med"/>
+                      <a:tailEnd type="none" w="med" len="med"/>
+                    </a:lnB>
+                    <a:solidFill>
+                      <a:srgbClr val="FFFFFF"/>
+                    </a:solidFill>
+                  </a:tcPr>
+                </a:tc>
+                <a:tc>
+                  <a:txBody>
+                    <a:bodyPr/>
+                    <a:lstStyle/>
+                    <a:p>
+                      <a:pPr algn="r" indent="0" marL="0">
+                        <a:buNone/>
+                      </a:pPr>
+                      <a:r>
+                        <a:rPr lang="en-US" sz="1000" b="1" dirty="0">
+                          <a:solidFill>
+                            <a:srgbClr val="0B2A3D"/>
+                          </a:solidFill>
+                          <a:latin typeface="Calibri" pitchFamily="34" charset="0"/>
+                          <a:ea typeface="Calibri" pitchFamily="34" charset="-122"/>
+                          <a:cs typeface="Calibri" pitchFamily="34" charset="-120"/>
+                        </a:rPr>
+                        <a:t>US$ 571,9 mil</a:t>
+                      </a:r>
+                      <a:endParaRPr lang="en-US" sz="1000" dirty="0">
+                        <a:latin typeface="Calibri" charset="0"/>
+                        <a:ea typeface="Calibri" charset="0"/>
+                        <a:cs typeface="Calibri" charset="0"/>
+                      </a:endParaRPr>
+                    </a:p>
+                  </a:txBody>
+                  <a:tcPr marL="91440" marR="91440" marT="45720" marB="45720" anchor="ctr">
+                    <a:lnL w="6350" cap="flat" cmpd="sng" algn="ctr">
+                      <a:solidFill>
+                        <a:srgbClr val="E3E8E9"/>
+                      </a:solidFill>
+                      <a:prstDash val="solid"/>
+                      <a:round/>
+                      <a:headEnd type="none" w="med" len="med"/>
+                      <a:tailEnd type="none" w="med" len="med"/>
+                    </a:lnL>
+                    <a:lnR w="6350" cap="flat" cmpd="sng" algn="ctr">
+                      <a:solidFill>
+                        <a:srgbClr val="E3E8E9"/>
+                      </a:solidFill>
+                      <a:prstDash val="solid"/>
+                      <a:round/>
+                      <a:headEnd type="none" w="med" len="med"/>
+                      <a:tailEnd type="none" w="med" len="med"/>
+                    </a:lnR>
+                    <a:lnT w="6350" cap="flat" cmpd="sng" algn="ctr">
+                      <a:solidFill>
+                        <a:srgbClr val="E3E8E9"/>
+                      </a:solidFill>
+                      <a:prstDash val="solid"/>
+                      <a:round/>
+                      <a:headEnd type="none" w="med" len="med"/>
+                      <a:tailEnd type="none" w="med" len="med"/>
+                    </a:lnT>
+                    <a:lnB w="6350" cap="flat" cmpd="sng" algn="ctr">
+                      <a:solidFill>
+                        <a:srgbClr val="E3E8E9"/>
+                      </a:solidFill>
+                      <a:prstDash val="solid"/>
+                      <a:round/>
+                      <a:headEnd type="none" w="med" len="med"/>
+                      <a:tailEnd type="none" w="med" len="med"/>
+                    </a:lnB>
+                    <a:solidFill>
+                      <a:srgbClr val="FFFFFF"/>
+                    </a:solidFill>
+                  </a:tcPr>
+                </a:tc>
+              </a:tr>
+              <a:tr h="288036">
+                <a:tc>
+                  <a:txBody>
+                    <a:bodyPr/>
+                    <a:lstStyle/>
+                    <a:p>
+                      <a:pPr indent="0" marL="0">
+                        <a:buNone/>
+                      </a:pPr>
+                      <a:r>
+                        <a:rPr lang="en-US" sz="1000" dirty="0">
+                          <a:solidFill>
+                            <a:srgbClr val="1C2B33"/>
+                          </a:solidFill>
+                          <a:latin typeface="Calibri" pitchFamily="34" charset="0"/>
+                          <a:ea typeface="Calibri" pitchFamily="34" charset="-122"/>
+                          <a:cs typeface="Calibri" pitchFamily="34" charset="-120"/>
+                        </a:rPr>
+                        <a:t>TBM - Junta de expansão exhaust - TURBINAS</a:t>
+                      </a:r>
+                      <a:endParaRPr lang="en-US" sz="1000" dirty="0">
+                        <a:latin typeface="Calibri" charset="0"/>
+                        <a:ea typeface="Calibri" charset="0"/>
+                        <a:cs typeface="Calibri" charset="0"/>
+                      </a:endParaRPr>
+                    </a:p>
+                  </a:txBody>
+                  <a:tcPr marL="91440" marR="91440" marT="45720" marB="45720" anchor="ctr">
+                    <a:lnL w="6350" cap="flat" cmpd="sng" algn="ctr">
+                      <a:solidFill>
+                        <a:srgbClr val="E3E8E9"/>
+                      </a:solidFill>
+                      <a:prstDash val="solid"/>
+                      <a:round/>
+                      <a:headEnd type="none" w="med" len="med"/>
+                      <a:tailEnd type="none" w="med" len="med"/>
+                    </a:lnL>
+                    <a:lnR w="6350" cap="flat" cmpd="sng" algn="ctr">
+                      <a:solidFill>
+                        <a:srgbClr val="E3E8E9"/>
+                      </a:solidFill>
+                      <a:prstDash val="solid"/>
+                      <a:round/>
+                      <a:headEnd type="none" w="med" len="med"/>
+                      <a:tailEnd type="none" w="med" len="med"/>
+                    </a:lnR>
+                    <a:lnT w="6350" cap="flat" cmpd="sng" algn="ctr">
+                      <a:solidFill>
+                        <a:srgbClr val="E3E8E9"/>
+                      </a:solidFill>
+                      <a:prstDash val="solid"/>
+                      <a:round/>
+                      <a:headEnd type="none" w="med" len="med"/>
+                      <a:tailEnd type="none" w="med" len="med"/>
+                    </a:lnT>
+                    <a:lnB w="6350" cap="flat" cmpd="sng" algn="ctr">
+                      <a:solidFill>
+                        <a:srgbClr val="E3E8E9"/>
+                      </a:solidFill>
+                      <a:prstDash val="solid"/>
+                      <a:round/>
+                      <a:headEnd type="none" w="med" len="med"/>
+                      <a:tailEnd type="none" w="med" len="med"/>
+                    </a:lnB>
+                    <a:solidFill>
+                      <a:srgbClr val="F0F4F5"/>
+                    </a:solidFill>
+                  </a:tcPr>
+                </a:tc>
+                <a:tc>
+                  <a:txBody>
+                    <a:bodyPr/>
+                    <a:lstStyle/>
+                    <a:p>
+                      <a:pPr indent="0" marL="0">
+                        <a:buNone/>
+                      </a:pPr>
+                      <a:r>
+                        <a:rPr lang="en-US" sz="950" dirty="0">
+                          <a:solidFill>
+                            <a:srgbClr val="5B6B73"/>
+                          </a:solidFill>
+                          <a:latin typeface="Calibri" pitchFamily="34" charset="0"/>
+                          <a:ea typeface="Calibri" pitchFamily="34" charset="-122"/>
+                          <a:cs typeface="Calibri" pitchFamily="34" charset="-120"/>
+                        </a:rPr>
+                        <a:t>Rotina Operacional</a:t>
+                      </a:r>
+                      <a:endParaRPr lang="en-US" sz="950" dirty="0">
+                        <a:latin typeface="Calibri" charset="0"/>
+                        <a:ea typeface="Calibri" charset="0"/>
+                        <a:cs typeface="Calibri" charset="0"/>
+                      </a:endParaRPr>
+                    </a:p>
+                  </a:txBody>
+                  <a:tcPr marL="91440" marR="91440" marT="45720" marB="45720" anchor="ctr">
+                    <a:lnL w="6350" cap="flat" cmpd="sng" algn="ctr">
+                      <a:solidFill>
+                        <a:srgbClr val="E3E8E9"/>
+                      </a:solidFill>
+                      <a:prstDash val="solid"/>
+                      <a:round/>
+                      <a:headEnd type="none" w="med" len="med"/>
+                      <a:tailEnd type="none" w="med" len="med"/>
+                    </a:lnL>
+                    <a:lnR w="6350" cap="flat" cmpd="sng" algn="ctr">
+                      <a:solidFill>
+                        <a:srgbClr val="E3E8E9"/>
+                      </a:solidFill>
+                      <a:prstDash val="solid"/>
+                      <a:round/>
+                      <a:headEnd type="none" w="med" len="med"/>
+                      <a:tailEnd type="none" w="med" len="med"/>
+                    </a:lnR>
+                    <a:lnT w="6350" cap="flat" cmpd="sng" algn="ctr">
+                      <a:solidFill>
+                        <a:srgbClr val="E3E8E9"/>
+                      </a:solidFill>
+                      <a:prstDash val="solid"/>
+                      <a:round/>
+                      <a:headEnd type="none" w="med" len="med"/>
+                      <a:tailEnd type="none" w="med" len="med"/>
+                    </a:lnT>
+                    <a:lnB w="6350" cap="flat" cmpd="sng" algn="ctr">
+                      <a:solidFill>
+                        <a:srgbClr val="E3E8E9"/>
+                      </a:solidFill>
+                      <a:prstDash val="solid"/>
+                      <a:round/>
+                      <a:headEnd type="none" w="med" len="med"/>
+                      <a:tailEnd type="none" w="med" len="med"/>
+                    </a:lnB>
+                    <a:solidFill>
+                      <a:srgbClr val="F0F4F5"/>
+                    </a:solidFill>
+                  </a:tcPr>
+                </a:tc>
+                <a:tc>
+                  <a:txBody>
+                    <a:bodyPr/>
+                    <a:lstStyle/>
+                    <a:p>
+                      <a:pPr indent="0" marL="0">
+                        <a:buNone/>
+                      </a:pPr>
+                      <a:r>
+                        <a:rPr lang="en-US" sz="950" dirty="0">
+                          <a:solidFill>
+                            <a:srgbClr val="5B6B73"/>
+                          </a:solidFill>
+                          <a:latin typeface="Calibri" pitchFamily="34" charset="0"/>
+                          <a:ea typeface="Calibri" pitchFamily="34" charset="-122"/>
+                          <a:cs typeface="Calibri" pitchFamily="34" charset="-120"/>
+                        </a:rPr>
+                        <a:t>MNT – Manutenção</a:t>
+                      </a:r>
+                      <a:endParaRPr lang="en-US" sz="950" dirty="0">
+                        <a:latin typeface="Calibri" charset="0"/>
+                        <a:ea typeface="Calibri" charset="0"/>
+                        <a:cs typeface="Calibri" charset="0"/>
+                      </a:endParaRPr>
+                    </a:p>
+                  </a:txBody>
+                  <a:tcPr marL="91440" marR="91440" marT="45720" marB="45720" anchor="ctr">
+                    <a:lnL w="6350" cap="flat" cmpd="sng" algn="ctr">
+                      <a:solidFill>
+                        <a:srgbClr val="E3E8E9"/>
+                      </a:solidFill>
+                      <a:prstDash val="solid"/>
+                      <a:round/>
+                      <a:headEnd type="none" w="med" len="med"/>
+                      <a:tailEnd type="none" w="med" len="med"/>
+                    </a:lnL>
+                    <a:lnR w="6350" cap="flat" cmpd="sng" algn="ctr">
+                      <a:solidFill>
+                        <a:srgbClr val="E3E8E9"/>
+                      </a:solidFill>
+                      <a:prstDash val="solid"/>
+                      <a:round/>
+                      <a:headEnd type="none" w="med" len="med"/>
+                      <a:tailEnd type="none" w="med" len="med"/>
+                    </a:lnR>
+                    <a:lnT w="6350" cap="flat" cmpd="sng" algn="ctr">
+                      <a:solidFill>
+                        <a:srgbClr val="E3E8E9"/>
+                      </a:solidFill>
+                      <a:prstDash val="solid"/>
+                      <a:round/>
+                      <a:headEnd type="none" w="med" len="med"/>
+                      <a:tailEnd type="none" w="med" len="med"/>
+                    </a:lnT>
+                    <a:lnB w="6350" cap="flat" cmpd="sng" algn="ctr">
+                      <a:solidFill>
+                        <a:srgbClr val="E3E8E9"/>
+                      </a:solidFill>
+                      <a:prstDash val="solid"/>
+                      <a:round/>
+                      <a:headEnd type="none" w="med" len="med"/>
+                      <a:tailEnd type="none" w="med" len="med"/>
+                    </a:lnB>
+                    <a:solidFill>
+                      <a:srgbClr val="F0F4F5"/>
+                    </a:solidFill>
+                  </a:tcPr>
+                </a:tc>
+                <a:tc>
+                  <a:txBody>
+                    <a:bodyPr/>
+                    <a:lstStyle/>
+                    <a:p>
+                      <a:pPr algn="r" indent="0" marL="0">
+                        <a:buNone/>
+                      </a:pPr>
+                      <a:r>
+                        <a:rPr lang="en-US" sz="1000" b="1" dirty="0">
+                          <a:solidFill>
+                            <a:srgbClr val="0B2A3D"/>
+                          </a:solidFill>
+                          <a:latin typeface="Calibri" pitchFamily="34" charset="0"/>
+                          <a:ea typeface="Calibri" pitchFamily="34" charset="-122"/>
+                          <a:cs typeface="Calibri" pitchFamily="34" charset="-120"/>
+                        </a:rPr>
+                        <a:t>US$ 560,7 mil</a:t>
+                      </a:r>
+                      <a:endParaRPr lang="en-US" sz="1000" dirty="0">
+                        <a:latin typeface="Calibri" charset="0"/>
+                        <a:ea typeface="Calibri" charset="0"/>
+                        <a:cs typeface="Calibri" charset="0"/>
+                      </a:endParaRPr>
+                    </a:p>
+                  </a:txBody>
+                  <a:tcPr marL="91440" marR="91440" marT="45720" marB="45720" anchor="ctr">
+                    <a:lnL w="6350" cap="flat" cmpd="sng" algn="ctr">
+                      <a:solidFill>
+                        <a:srgbClr val="E3E8E9"/>
+                      </a:solidFill>
+                      <a:prstDash val="solid"/>
+                      <a:round/>
+                      <a:headEnd type="none" w="med" len="med"/>
+                      <a:tailEnd type="none" w="med" len="med"/>
+                    </a:lnL>
+                    <a:lnR w="6350" cap="flat" cmpd="sng" algn="ctr">
+                      <a:solidFill>
+                        <a:srgbClr val="E3E8E9"/>
+                      </a:solidFill>
+                      <a:prstDash val="solid"/>
+                      <a:round/>
+                      <a:headEnd type="none" w="med" len="med"/>
+                      <a:tailEnd type="none" w="med" len="med"/>
+                    </a:lnR>
+                    <a:lnT w="6350" cap="flat" cmpd="sng" algn="ctr">
+                      <a:solidFill>
+                        <a:srgbClr val="E3E8E9"/>
+                      </a:solidFill>
+                      <a:prstDash val="solid"/>
+                      <a:round/>
+                      <a:headEnd type="none" w="med" len="med"/>
+                      <a:tailEnd type="none" w="med" len="med"/>
+                    </a:lnT>
+                    <a:lnB w="6350" cap="flat" cmpd="sng" algn="ctr">
+                      <a:solidFill>
+                        <a:srgbClr val="E3E8E9"/>
+                      </a:solidFill>
+                      <a:prstDash val="solid"/>
+                      <a:round/>
+                      <a:headEnd type="none" w="med" len="med"/>
+                      <a:tailEnd type="none" w="med" len="med"/>
+                    </a:lnB>
+                    <a:solidFill>
+                      <a:srgbClr val="F0F4F5"/>
+                    </a:solidFill>
+                  </a:tcPr>
+                </a:tc>
+              </a:tr>
+              <a:tr h="288036">
+                <a:tc>
+                  <a:txBody>
+                    <a:bodyPr/>
+                    <a:lstStyle/>
+                    <a:p>
+                      <a:pPr indent="0" marL="0">
+                        <a:buNone/>
+                      </a:pPr>
+                      <a:r>
+                        <a:rPr lang="en-US" sz="1000" dirty="0">
+                          <a:solidFill>
+                            <a:srgbClr val="1C2B33"/>
+                          </a:solidFill>
+                          <a:latin typeface="Calibri" pitchFamily="34" charset="0"/>
+                          <a:ea typeface="Calibri" pitchFamily="34" charset="-122"/>
+                          <a:cs typeface="Calibri" pitchFamily="34" charset="-120"/>
+                        </a:rPr>
+                        <a:t>Combate a Incêndio - Revamp das cabines de water mist</a:t>
+                      </a:r>
+                      <a:endParaRPr lang="en-US" sz="1000" dirty="0">
+                        <a:latin typeface="Calibri" charset="0"/>
+                        <a:ea typeface="Calibri" charset="0"/>
+                        <a:cs typeface="Calibri" charset="0"/>
+                      </a:endParaRPr>
+                    </a:p>
+                  </a:txBody>
+                  <a:tcPr marL="91440" marR="91440" marT="45720" marB="45720" anchor="ctr">
+                    <a:lnL w="6350" cap="flat" cmpd="sng" algn="ctr">
+                      <a:solidFill>
+                        <a:srgbClr val="E3E8E9"/>
+                      </a:solidFill>
+                      <a:prstDash val="solid"/>
+                      <a:round/>
+                      <a:headEnd type="none" w="med" len="med"/>
+                      <a:tailEnd type="none" w="med" len="med"/>
+                    </a:lnL>
+                    <a:lnR w="6350" cap="flat" cmpd="sng" algn="ctr">
+                      <a:solidFill>
+                        <a:srgbClr val="E3E8E9"/>
+                      </a:solidFill>
+                      <a:prstDash val="solid"/>
+                      <a:round/>
+                      <a:headEnd type="none" w="med" len="med"/>
+                      <a:tailEnd type="none" w="med" len="med"/>
+                    </a:lnR>
+                    <a:lnT w="6350" cap="flat" cmpd="sng" algn="ctr">
+                      <a:solidFill>
+                        <a:srgbClr val="E3E8E9"/>
+                      </a:solidFill>
+                      <a:prstDash val="solid"/>
+                      <a:round/>
+                      <a:headEnd type="none" w="med" len="med"/>
+                      <a:tailEnd type="none" w="med" len="med"/>
+                    </a:lnT>
+                    <a:lnB w="6350" cap="flat" cmpd="sng" algn="ctr">
+                      <a:solidFill>
+                        <a:srgbClr val="E3E8E9"/>
+                      </a:solidFill>
+                      <a:prstDash val="solid"/>
+                      <a:round/>
+                      <a:headEnd type="none" w="med" len="med"/>
+                      <a:tailEnd type="none" w="med" len="med"/>
+                    </a:lnB>
+                    <a:solidFill>
+                      <a:srgbClr val="FFFFFF"/>
+                    </a:solidFill>
+                  </a:tcPr>
+                </a:tc>
+                <a:tc>
+                  <a:txBody>
+                    <a:bodyPr/>
+                    <a:lstStyle/>
+                    <a:p>
+                      <a:pPr indent="0" marL="0">
+                        <a:buNone/>
+                      </a:pPr>
+                      <a:r>
+                        <a:rPr lang="en-US" sz="950" dirty="0">
+                          <a:solidFill>
+                            <a:srgbClr val="5B6B73"/>
+                          </a:solidFill>
+                          <a:latin typeface="Calibri" pitchFamily="34" charset="0"/>
+                          <a:ea typeface="Calibri" pitchFamily="34" charset="-122"/>
+                          <a:cs typeface="Calibri" pitchFamily="34" charset="-120"/>
+                        </a:rPr>
+                        <a:t>Bem Estar/Segurança</a:t>
+                      </a:r>
+                      <a:endParaRPr lang="en-US" sz="950" dirty="0">
+                        <a:latin typeface="Calibri" charset="0"/>
+                        <a:ea typeface="Calibri" charset="0"/>
+                        <a:cs typeface="Calibri" charset="0"/>
+                      </a:endParaRPr>
+                    </a:p>
+                  </a:txBody>
+                  <a:tcPr marL="91440" marR="91440" marT="45720" marB="45720" anchor="ctr">
+                    <a:lnL w="6350" cap="flat" cmpd="sng" algn="ctr">
+                      <a:solidFill>
+                        <a:srgbClr val="E3E8E9"/>
+                      </a:solidFill>
+                      <a:prstDash val="solid"/>
+                      <a:round/>
+                      <a:headEnd type="none" w="med" len="med"/>
+                      <a:tailEnd type="none" w="med" len="med"/>
+                    </a:lnL>
+                    <a:lnR w="6350" cap="flat" cmpd="sng" algn="ctr">
+                      <a:solidFill>
+                        <a:srgbClr val="E3E8E9"/>
+                      </a:solidFill>
+                      <a:prstDash val="solid"/>
+                      <a:round/>
+                      <a:headEnd type="none" w="med" len="med"/>
+                      <a:tailEnd type="none" w="med" len="med"/>
+                    </a:lnR>
+                    <a:lnT w="6350" cap="flat" cmpd="sng" algn="ctr">
+                      <a:solidFill>
+                        <a:srgbClr val="E3E8E9"/>
+                      </a:solidFill>
+                      <a:prstDash val="solid"/>
+                      <a:round/>
+                      <a:headEnd type="none" w="med" len="med"/>
+                      <a:tailEnd type="none" w="med" len="med"/>
+                    </a:lnT>
+                    <a:lnB w="6350" cap="flat" cmpd="sng" algn="ctr">
+                      <a:solidFill>
+                        <a:srgbClr val="E3E8E9"/>
+                      </a:solidFill>
+                      <a:prstDash val="solid"/>
+                      <a:round/>
+                      <a:headEnd type="none" w="med" len="med"/>
+                      <a:tailEnd type="none" w="med" len="med"/>
+                    </a:lnB>
+                    <a:solidFill>
+                      <a:srgbClr val="FFFFFF"/>
+                    </a:solidFill>
+                  </a:tcPr>
+                </a:tc>
+                <a:tc>
+                  <a:txBody>
+                    <a:bodyPr/>
+                    <a:lstStyle/>
+                    <a:p>
+                      <a:pPr indent="0" marL="0">
+                        <a:buNone/>
+                      </a:pPr>
+                      <a:r>
+                        <a:rPr lang="en-US" sz="950" dirty="0">
+                          <a:solidFill>
+                            <a:srgbClr val="5B6B73"/>
+                          </a:solidFill>
+                          <a:latin typeface="Calibri" pitchFamily="34" charset="0"/>
+                          <a:ea typeface="Calibri" pitchFamily="34" charset="-122"/>
+                          <a:cs typeface="Calibri" pitchFamily="34" charset="-120"/>
+                        </a:rPr>
+                        <a:t>Saúde e Segurança Ocupacional</a:t>
+                      </a:r>
+                      <a:endParaRPr lang="en-US" sz="950" dirty="0">
+                        <a:latin typeface="Calibri" charset="0"/>
+                        <a:ea typeface="Calibri" charset="0"/>
+                        <a:cs typeface="Calibri" charset="0"/>
+                      </a:endParaRPr>
+                    </a:p>
+                  </a:txBody>
+                  <a:tcPr marL="91440" marR="91440" marT="45720" marB="45720" anchor="ctr">
+                    <a:lnL w="6350" cap="flat" cmpd="sng" algn="ctr">
+                      <a:solidFill>
+                        <a:srgbClr val="E3E8E9"/>
+                      </a:solidFill>
+                      <a:prstDash val="solid"/>
+                      <a:round/>
+                      <a:headEnd type="none" w="med" len="med"/>
+                      <a:tailEnd type="none" w="med" len="med"/>
+                    </a:lnL>
+                    <a:lnR w="6350" cap="flat" cmpd="sng" algn="ctr">
+                      <a:solidFill>
+                        <a:srgbClr val="E3E8E9"/>
+                      </a:solidFill>
+                      <a:prstDash val="solid"/>
+                      <a:round/>
+                      <a:headEnd type="none" w="med" len="med"/>
+                      <a:tailEnd type="none" w="med" len="med"/>
+                    </a:lnR>
+                    <a:lnT w="6350" cap="flat" cmpd="sng" algn="ctr">
+                      <a:solidFill>
+                        <a:srgbClr val="E3E8E9"/>
+                      </a:solidFill>
+                      <a:prstDash val="solid"/>
+                      <a:round/>
+                      <a:headEnd type="none" w="med" len="med"/>
+                      <a:tailEnd type="none" w="med" len="med"/>
+                    </a:lnT>
+                    <a:lnB w="6350" cap="flat" cmpd="sng" algn="ctr">
+                      <a:solidFill>
+                        <a:srgbClr val="E3E8E9"/>
+                      </a:solidFill>
+                      <a:prstDash val="solid"/>
+                      <a:round/>
+                      <a:headEnd type="none" w="med" len="med"/>
+                      <a:tailEnd type="none" w="med" len="med"/>
+                    </a:lnB>
+                    <a:solidFill>
+                      <a:srgbClr val="FFFFFF"/>
+                    </a:solidFill>
+                  </a:tcPr>
+                </a:tc>
+                <a:tc>
+                  <a:txBody>
+                    <a:bodyPr/>
+                    <a:lstStyle/>
+                    <a:p>
+                      <a:pPr algn="r" indent="0" marL="0">
+                        <a:buNone/>
+                      </a:pPr>
+                      <a:r>
+                        <a:rPr lang="en-US" sz="1000" b="1" dirty="0">
+                          <a:solidFill>
+                            <a:srgbClr val="0B2A3D"/>
+                          </a:solidFill>
+                          <a:latin typeface="Calibri" pitchFamily="34" charset="0"/>
+                          <a:ea typeface="Calibri" pitchFamily="34" charset="-122"/>
+                          <a:cs typeface="Calibri" pitchFamily="34" charset="-120"/>
+                        </a:rPr>
+                        <a:t>US$ 500,0 mil</a:t>
+                      </a:r>
+                      <a:endParaRPr lang="en-US" sz="1000" dirty="0">
+                        <a:latin typeface="Calibri" charset="0"/>
+                        <a:ea typeface="Calibri" charset="0"/>
+                        <a:cs typeface="Calibri" charset="0"/>
+                      </a:endParaRPr>
+                    </a:p>
+                  </a:txBody>
+                  <a:tcPr marL="91440" marR="91440" marT="45720" marB="45720" anchor="ctr">
+                    <a:lnL w="6350" cap="flat" cmpd="sng" algn="ctr">
+                      <a:solidFill>
+                        <a:srgbClr val="E3E8E9"/>
+                      </a:solidFill>
+                      <a:prstDash val="solid"/>
+                      <a:round/>
+                      <a:headEnd type="none" w="med" len="med"/>
+                      <a:tailEnd type="none" w="med" len="med"/>
+                    </a:lnL>
+                    <a:lnR w="6350" cap="flat" cmpd="sng" algn="ctr">
+                      <a:solidFill>
+                        <a:srgbClr val="E3E8E9"/>
+                      </a:solidFill>
+                      <a:prstDash val="solid"/>
+                      <a:round/>
+                      <a:headEnd type="none" w="med" len="med"/>
+                      <a:tailEnd type="none" w="med" len="med"/>
+                    </a:lnR>
+                    <a:lnT w="6350" cap="flat" cmpd="sng" algn="ctr">
+                      <a:solidFill>
+                        <a:srgbClr val="E3E8E9"/>
+                      </a:solidFill>
+                      <a:prstDash val="solid"/>
+                      <a:round/>
+                      <a:headEnd type="none" w="med" len="med"/>
+                      <a:tailEnd type="none" w="med" len="med"/>
+                    </a:lnT>
+                    <a:lnB w="6350" cap="flat" cmpd="sng" algn="ctr">
+                      <a:solidFill>
+                        <a:srgbClr val="E3E8E9"/>
+                      </a:solidFill>
+                      <a:prstDash val="solid"/>
+                      <a:round/>
+                      <a:headEnd type="none" w="med" len="med"/>
+                      <a:tailEnd type="none" w="med" len="med"/>
+                    </a:lnB>
+                    <a:solidFill>
+                      <a:srgbClr val="FFFFFF"/>
+                    </a:solidFill>
+                  </a:tcPr>
+                </a:tc>
+              </a:tr>
+              <a:tr h="288036">
+                <a:tc>
+                  <a:txBody>
+                    <a:bodyPr/>
+                    <a:lstStyle/>
+                    <a:p>
+                      <a:pPr indent="0" marL="0">
+                        <a:buNone/>
+                      </a:pPr>
+                      <a:r>
+                        <a:rPr lang="en-US" sz="1000" dirty="0">
+                          <a:solidFill>
+                            <a:srgbClr val="1C2B33"/>
+                          </a:solidFill>
+                          <a:latin typeface="Calibri" pitchFamily="34" charset="0"/>
+                          <a:ea typeface="Calibri" pitchFamily="34" charset="-122"/>
+                          <a:cs typeface="Calibri" pitchFamily="34" charset="-120"/>
+                        </a:rPr>
+                        <a:t>Water Mist</a:t>
+                      </a:r>
+                      <a:endParaRPr lang="en-US" sz="1000" dirty="0">
+                        <a:latin typeface="Calibri" charset="0"/>
+                        <a:ea typeface="Calibri" charset="0"/>
+                        <a:cs typeface="Calibri" charset="0"/>
+                      </a:endParaRPr>
+                    </a:p>
+                  </a:txBody>
+                  <a:tcPr marL="91440" marR="91440" marT="45720" marB="45720" anchor="ctr">
+                    <a:lnL w="6350" cap="flat" cmpd="sng" algn="ctr">
+                      <a:solidFill>
+                        <a:srgbClr val="E3E8E9"/>
+                      </a:solidFill>
+                      <a:prstDash val="solid"/>
+                      <a:round/>
+                      <a:headEnd type="none" w="med" len="med"/>
+                      <a:tailEnd type="none" w="med" len="med"/>
+                    </a:lnL>
+                    <a:lnR w="6350" cap="flat" cmpd="sng" algn="ctr">
+                      <a:solidFill>
+                        <a:srgbClr val="E3E8E9"/>
+                      </a:solidFill>
+                      <a:prstDash val="solid"/>
+                      <a:round/>
+                      <a:headEnd type="none" w="med" len="med"/>
+                      <a:tailEnd type="none" w="med" len="med"/>
+                    </a:lnR>
+                    <a:lnT w="6350" cap="flat" cmpd="sng" algn="ctr">
+                      <a:solidFill>
+                        <a:srgbClr val="E3E8E9"/>
+                      </a:solidFill>
+                      <a:prstDash val="solid"/>
+                      <a:round/>
+                      <a:headEnd type="none" w="med" len="med"/>
+                      <a:tailEnd type="none" w="med" len="med"/>
+                    </a:lnT>
+                    <a:lnB w="6350" cap="flat" cmpd="sng" algn="ctr">
+                      <a:solidFill>
+                        <a:srgbClr val="E3E8E9"/>
+                      </a:solidFill>
+                      <a:prstDash val="solid"/>
+                      <a:round/>
+                      <a:headEnd type="none" w="med" len="med"/>
+                      <a:tailEnd type="none" w="med" len="med"/>
+                    </a:lnB>
+                    <a:solidFill>
+                      <a:srgbClr val="F0F4F5"/>
+                    </a:solidFill>
+                  </a:tcPr>
+                </a:tc>
+                <a:tc>
+                  <a:txBody>
+                    <a:bodyPr/>
+                    <a:lstStyle/>
+                    <a:p>
+                      <a:pPr indent="0" marL="0">
+                        <a:buNone/>
+                      </a:pPr>
+                      <a:r>
+                        <a:rPr lang="en-US" sz="950" dirty="0">
+                          <a:solidFill>
+                            <a:srgbClr val="5B6B73"/>
+                          </a:solidFill>
+                          <a:latin typeface="Calibri" pitchFamily="34" charset="0"/>
+                          <a:ea typeface="Calibri" pitchFamily="34" charset="-122"/>
+                          <a:cs typeface="Calibri" pitchFamily="34" charset="-120"/>
+                        </a:rPr>
+                        <a:t>Bem Estar/Segurança</a:t>
+                      </a:r>
+                      <a:endParaRPr lang="en-US" sz="950" dirty="0">
+                        <a:latin typeface="Calibri" charset="0"/>
+                        <a:ea typeface="Calibri" charset="0"/>
+                        <a:cs typeface="Calibri" charset="0"/>
+                      </a:endParaRPr>
+                    </a:p>
+                  </a:txBody>
+                  <a:tcPr marL="91440" marR="91440" marT="45720" marB="45720" anchor="ctr">
+                    <a:lnL w="6350" cap="flat" cmpd="sng" algn="ctr">
+                      <a:solidFill>
+                        <a:srgbClr val="E3E8E9"/>
+                      </a:solidFill>
+                      <a:prstDash val="solid"/>
+                      <a:round/>
+                      <a:headEnd type="none" w="med" len="med"/>
+                      <a:tailEnd type="none" w="med" len="med"/>
+                    </a:lnL>
+                    <a:lnR w="6350" cap="flat" cmpd="sng" algn="ctr">
+                      <a:solidFill>
+                        <a:srgbClr val="E3E8E9"/>
+                      </a:solidFill>
+                      <a:prstDash val="solid"/>
+                      <a:round/>
+                      <a:headEnd type="none" w="med" len="med"/>
+                      <a:tailEnd type="none" w="med" len="med"/>
+                    </a:lnR>
+                    <a:lnT w="6350" cap="flat" cmpd="sng" algn="ctr">
+                      <a:solidFill>
+                        <a:srgbClr val="E3E8E9"/>
+                      </a:solidFill>
+                      <a:prstDash val="solid"/>
+                      <a:round/>
+                      <a:headEnd type="none" w="med" len="med"/>
+                      <a:tailEnd type="none" w="med" len="med"/>
+                    </a:lnT>
+                    <a:lnB w="6350" cap="flat" cmpd="sng" algn="ctr">
+                      <a:solidFill>
+                        <a:srgbClr val="E3E8E9"/>
+                      </a:solidFill>
+                      <a:prstDash val="solid"/>
+                      <a:round/>
+                      <a:headEnd type="none" w="med" len="med"/>
+                      <a:tailEnd type="none" w="med" len="med"/>
+                    </a:lnB>
+                    <a:solidFill>
+                      <a:srgbClr val="F0F4F5"/>
+                    </a:solidFill>
+                  </a:tcPr>
+                </a:tc>
+                <a:tc>
+                  <a:txBody>
+                    <a:bodyPr/>
+                    <a:lstStyle/>
+                    <a:p>
+                      <a:pPr indent="0" marL="0">
+                        <a:buNone/>
+                      </a:pPr>
+                      <a:r>
+                        <a:rPr lang="en-US" sz="950" dirty="0">
+                          <a:solidFill>
+                            <a:srgbClr val="5B6B73"/>
+                          </a:solidFill>
+                          <a:latin typeface="Calibri" pitchFamily="34" charset="0"/>
+                          <a:ea typeface="Calibri" pitchFamily="34" charset="-122"/>
+                          <a:cs typeface="Calibri" pitchFamily="34" charset="-120"/>
+                        </a:rPr>
+                        <a:t>Projetos</a:t>
+                      </a:r>
+                      <a:endParaRPr lang="en-US" sz="950" dirty="0">
+                        <a:latin typeface="Calibri" charset="0"/>
+                        <a:ea typeface="Calibri" charset="0"/>
+                        <a:cs typeface="Calibri" charset="0"/>
+                      </a:endParaRPr>
+                    </a:p>
+                  </a:txBody>
+                  <a:tcPr marL="91440" marR="91440" marT="45720" marB="45720" anchor="ctr">
+                    <a:lnL w="6350" cap="flat" cmpd="sng" algn="ctr">
+                      <a:solidFill>
+                        <a:srgbClr val="E3E8E9"/>
+                      </a:solidFill>
+                      <a:prstDash val="solid"/>
+                      <a:round/>
+                      <a:headEnd type="none" w="med" len="med"/>
+                      <a:tailEnd type="none" w="med" len="med"/>
+                    </a:lnL>
+                    <a:lnR w="6350" cap="flat" cmpd="sng" algn="ctr">
+                      <a:solidFill>
+                        <a:srgbClr val="E3E8E9"/>
+                      </a:solidFill>
+                      <a:prstDash val="solid"/>
+                      <a:round/>
+                      <a:headEnd type="none" w="med" len="med"/>
+                      <a:tailEnd type="none" w="med" len="med"/>
+                    </a:lnR>
+                    <a:lnT w="6350" cap="flat" cmpd="sng" algn="ctr">
+                      <a:solidFill>
+                        <a:srgbClr val="E3E8E9"/>
+                      </a:solidFill>
+                      <a:prstDash val="solid"/>
+                      <a:round/>
+                      <a:headEnd type="none" w="med" len="med"/>
+                      <a:tailEnd type="none" w="med" len="med"/>
+                    </a:lnT>
+                    <a:lnB w="6350" cap="flat" cmpd="sng" algn="ctr">
+                      <a:solidFill>
+                        <a:srgbClr val="E3E8E9"/>
+                      </a:solidFill>
+                      <a:prstDash val="solid"/>
+                      <a:round/>
+                      <a:headEnd type="none" w="med" len="med"/>
+                      <a:tailEnd type="none" w="med" len="med"/>
+                    </a:lnB>
+                    <a:solidFill>
+                      <a:srgbClr val="F0F4F5"/>
+                    </a:solidFill>
+                  </a:tcPr>
+                </a:tc>
+                <a:tc>
+                  <a:txBody>
+                    <a:bodyPr/>
+                    <a:lstStyle/>
+                    <a:p>
+                      <a:pPr algn="r" indent="0" marL="0">
+                        <a:buNone/>
+                      </a:pPr>
+                      <a:r>
+                        <a:rPr lang="en-US" sz="1000" b="1" dirty="0">
+                          <a:solidFill>
+                            <a:srgbClr val="0B2A3D"/>
+                          </a:solidFill>
+                          <a:latin typeface="Calibri" pitchFamily="34" charset="0"/>
+                          <a:ea typeface="Calibri" pitchFamily="34" charset="-122"/>
+                          <a:cs typeface="Calibri" pitchFamily="34" charset="-120"/>
+                        </a:rPr>
+                        <a:t>US$ 500,0 mil</a:t>
+                      </a:r>
+                      <a:endParaRPr lang="en-US" sz="1000" dirty="0">
+                        <a:latin typeface="Calibri" charset="0"/>
+                        <a:ea typeface="Calibri" charset="0"/>
+                        <a:cs typeface="Calibri" charset="0"/>
+                      </a:endParaRPr>
+                    </a:p>
+                  </a:txBody>
+                  <a:tcPr marL="91440" marR="91440" marT="45720" marB="45720" anchor="ctr">
+                    <a:lnL w="6350" cap="flat" cmpd="sng" algn="ctr">
+                      <a:solidFill>
+                        <a:srgbClr val="E3E8E9"/>
+                      </a:solidFill>
+                      <a:prstDash val="solid"/>
+                      <a:round/>
+                      <a:headEnd type="none" w="med" len="med"/>
+                      <a:tailEnd type="none" w="med" len="med"/>
+                    </a:lnL>
+                    <a:lnR w="6350" cap="flat" cmpd="sng" algn="ctr">
+                      <a:solidFill>
+                        <a:srgbClr val="E3E8E9"/>
+                      </a:solidFill>
+                      <a:prstDash val="solid"/>
+                      <a:round/>
+                      <a:headEnd type="none" w="med" len="med"/>
+                      <a:tailEnd type="none" w="med" len="med"/>
+                    </a:lnR>
+                    <a:lnT w="6350" cap="flat" cmpd="sng" algn="ctr">
+                      <a:solidFill>
+                        <a:srgbClr val="E3E8E9"/>
+                      </a:solidFill>
+                      <a:prstDash val="solid"/>
+                      <a:round/>
+                      <a:headEnd type="none" w="med" len="med"/>
+                      <a:tailEnd type="none" w="med" len="med"/>
+                    </a:lnT>
+                    <a:lnB w="6350" cap="flat" cmpd="sng" algn="ctr">
+                      <a:solidFill>
+                        <a:srgbClr val="E3E8E9"/>
+                      </a:solidFill>
+                      <a:prstDash val="solid"/>
+                      <a:round/>
+                      <a:headEnd type="none" w="med" len="med"/>
+                      <a:tailEnd type="none" w="med" len="med"/>
+                    </a:lnB>
+                    <a:solidFill>
+                      <a:srgbClr val="F0F4F5"/>
+                    </a:solidFill>
+                  </a:tcPr>
+                </a:tc>
+              </a:tr>
+              <a:tr h="288036">
+                <a:tc>
+                  <a:txBody>
+                    <a:bodyPr/>
+                    <a:lstStyle/>
+                    <a:p>
+                      <a:pPr indent="0" marL="0">
+                        <a:buNone/>
+                      </a:pPr>
+                      <a:r>
+                        <a:rPr lang="en-US" sz="1000" dirty="0">
+                          <a:solidFill>
+                            <a:srgbClr val="1C2B33"/>
+                          </a:solidFill>
+                          <a:latin typeface="Calibri" pitchFamily="34" charset="0"/>
+                          <a:ea typeface="Calibri" pitchFamily="34" charset="-122"/>
+                          <a:cs typeface="Calibri" pitchFamily="34" charset="-120"/>
+                        </a:rPr>
+                        <a:t>Troca dos trocadores HBG 1040. (Material)</a:t>
+                      </a:r>
+                      <a:endParaRPr lang="en-US" sz="1000" dirty="0">
+                        <a:latin typeface="Calibri" charset="0"/>
+                        <a:ea typeface="Calibri" charset="0"/>
+                        <a:cs typeface="Calibri" charset="0"/>
+                      </a:endParaRPr>
+                    </a:p>
+                  </a:txBody>
+                  <a:tcPr marL="91440" marR="91440" marT="45720" marB="45720" anchor="ctr">
+                    <a:lnL w="6350" cap="flat" cmpd="sng" algn="ctr">
+                      <a:solidFill>
+                        <a:srgbClr val="E3E8E9"/>
+                      </a:solidFill>
+                      <a:prstDash val="solid"/>
+                      <a:round/>
+                      <a:headEnd type="none" w="med" len="med"/>
+                      <a:tailEnd type="none" w="med" len="med"/>
+                    </a:lnL>
+                    <a:lnR w="6350" cap="flat" cmpd="sng" algn="ctr">
+                      <a:solidFill>
+                        <a:srgbClr val="E3E8E9"/>
+                      </a:solidFill>
+                      <a:prstDash val="solid"/>
+                      <a:round/>
+                      <a:headEnd type="none" w="med" len="med"/>
+                      <a:tailEnd type="none" w="med" len="med"/>
+                    </a:lnR>
+                    <a:lnT w="6350" cap="flat" cmpd="sng" algn="ctr">
+                      <a:solidFill>
+                        <a:srgbClr val="E3E8E9"/>
+                      </a:solidFill>
+                      <a:prstDash val="solid"/>
+                      <a:round/>
+                      <a:headEnd type="none" w="med" len="med"/>
+                      <a:tailEnd type="none" w="med" len="med"/>
+                    </a:lnT>
+                    <a:lnB w="6350" cap="flat" cmpd="sng" algn="ctr">
+                      <a:solidFill>
+                        <a:srgbClr val="E3E8E9"/>
+                      </a:solidFill>
+                      <a:prstDash val="solid"/>
+                      <a:round/>
+                      <a:headEnd type="none" w="med" len="med"/>
+                      <a:tailEnd type="none" w="med" len="med"/>
+                    </a:lnB>
+                    <a:solidFill>
+                      <a:srgbClr val="FFFFFF"/>
+                    </a:solidFill>
+                  </a:tcPr>
+                </a:tc>
+                <a:tc>
+                  <a:txBody>
+                    <a:bodyPr/>
+                    <a:lstStyle/>
+                    <a:p>
+                      <a:pPr indent="0" marL="0">
+                        <a:buNone/>
+                      </a:pPr>
+                      <a:r>
+                        <a:rPr lang="en-US" sz="950" dirty="0">
+                          <a:solidFill>
+                            <a:srgbClr val="5B6B73"/>
+                          </a:solidFill>
+                          <a:latin typeface="Calibri" pitchFamily="34" charset="0"/>
+                          <a:ea typeface="Calibri" pitchFamily="34" charset="-122"/>
+                          <a:cs typeface="Calibri" pitchFamily="34" charset="-120"/>
+                        </a:rPr>
+                        <a:t>Eficiência de Produção</a:t>
+                      </a:r>
+                      <a:endParaRPr lang="en-US" sz="950" dirty="0">
+                        <a:latin typeface="Calibri" charset="0"/>
+                        <a:ea typeface="Calibri" charset="0"/>
+                        <a:cs typeface="Calibri" charset="0"/>
+                      </a:endParaRPr>
+                    </a:p>
+                  </a:txBody>
+                  <a:tcPr marL="91440" marR="91440" marT="45720" marB="45720" anchor="ctr">
+                    <a:lnL w="6350" cap="flat" cmpd="sng" algn="ctr">
+                      <a:solidFill>
+                        <a:srgbClr val="E3E8E9"/>
+                      </a:solidFill>
+                      <a:prstDash val="solid"/>
+                      <a:round/>
+                      <a:headEnd type="none" w="med" len="med"/>
+                      <a:tailEnd type="none" w="med" len="med"/>
+                    </a:lnL>
+                    <a:lnR w="6350" cap="flat" cmpd="sng" algn="ctr">
+                      <a:solidFill>
+                        <a:srgbClr val="E3E8E9"/>
+                      </a:solidFill>
+                      <a:prstDash val="solid"/>
+                      <a:round/>
+                      <a:headEnd type="none" w="med" len="med"/>
+                      <a:tailEnd type="none" w="med" len="med"/>
+                    </a:lnR>
+                    <a:lnT w="6350" cap="flat" cmpd="sng" algn="ctr">
+                      <a:solidFill>
+                        <a:srgbClr val="E3E8E9"/>
+                      </a:solidFill>
+                      <a:prstDash val="solid"/>
+                      <a:round/>
+                      <a:headEnd type="none" w="med" len="med"/>
+                      <a:tailEnd type="none" w="med" len="med"/>
+                    </a:lnT>
+                    <a:lnB w="6350" cap="flat" cmpd="sng" algn="ctr">
+                      <a:solidFill>
+                        <a:srgbClr val="E3E8E9"/>
+                      </a:solidFill>
+                      <a:prstDash val="solid"/>
+                      <a:round/>
+                      <a:headEnd type="none" w="med" len="med"/>
+                      <a:tailEnd type="none" w="med" len="med"/>
+                    </a:lnB>
+                    <a:solidFill>
+                      <a:srgbClr val="FFFFFF"/>
+                    </a:solidFill>
+                  </a:tcPr>
+                </a:tc>
+                <a:tc>
+                  <a:txBody>
+                    <a:bodyPr/>
+                    <a:lstStyle/>
+                    <a:p>
+                      <a:pPr indent="0" marL="0">
+                        <a:buNone/>
+                      </a:pPr>
+                      <a:r>
+                        <a:rPr lang="en-US" sz="950" dirty="0">
+                          <a:solidFill>
+                            <a:srgbClr val="5B6B73"/>
+                          </a:solidFill>
+                          <a:latin typeface="Calibri" pitchFamily="34" charset="0"/>
+                          <a:ea typeface="Calibri" pitchFamily="34" charset="-122"/>
+                          <a:cs typeface="Calibri" pitchFamily="34" charset="-120"/>
+                        </a:rPr>
+                        <a:t>P&amp;Q - Processos</a:t>
+                      </a:r>
+                      <a:endParaRPr lang="en-US" sz="950" dirty="0">
+                        <a:latin typeface="Calibri" charset="0"/>
+                        <a:ea typeface="Calibri" charset="0"/>
+                        <a:cs typeface="Calibri" charset="0"/>
+                      </a:endParaRPr>
+                    </a:p>
+                  </a:txBody>
+                  <a:tcPr marL="91440" marR="91440" marT="45720" marB="45720" anchor="ctr">
+                    <a:lnL w="6350" cap="flat" cmpd="sng" algn="ctr">
+                      <a:solidFill>
+                        <a:srgbClr val="E3E8E9"/>
+                      </a:solidFill>
+                      <a:prstDash val="solid"/>
+                      <a:round/>
+                      <a:headEnd type="none" w="med" len="med"/>
+                      <a:tailEnd type="none" w="med" len="med"/>
+                    </a:lnL>
+                    <a:lnR w="6350" cap="flat" cmpd="sng" algn="ctr">
+                      <a:solidFill>
+                        <a:srgbClr val="E3E8E9"/>
+                      </a:solidFill>
+                      <a:prstDash val="solid"/>
+                      <a:round/>
+                      <a:headEnd type="none" w="med" len="med"/>
+                      <a:tailEnd type="none" w="med" len="med"/>
+                    </a:lnR>
+                    <a:lnT w="6350" cap="flat" cmpd="sng" algn="ctr">
+                      <a:solidFill>
+                        <a:srgbClr val="E3E8E9"/>
+                      </a:solidFill>
+                      <a:prstDash val="solid"/>
+                      <a:round/>
+                      <a:headEnd type="none" w="med" len="med"/>
+                      <a:tailEnd type="none" w="med" len="med"/>
+                    </a:lnT>
+                    <a:lnB w="6350" cap="flat" cmpd="sng" algn="ctr">
+                      <a:solidFill>
+                        <a:srgbClr val="E3E8E9"/>
+                      </a:solidFill>
+                      <a:prstDash val="solid"/>
+                      <a:round/>
+                      <a:headEnd type="none" w="med" len="med"/>
+                      <a:tailEnd type="none" w="med" len="med"/>
+                    </a:lnB>
+                    <a:solidFill>
+                      <a:srgbClr val="FFFFFF"/>
+                    </a:solidFill>
+                  </a:tcPr>
+                </a:tc>
+                <a:tc>
+                  <a:txBody>
+                    <a:bodyPr/>
+                    <a:lstStyle/>
+                    <a:p>
+                      <a:pPr algn="r" indent="0" marL="0">
+                        <a:buNone/>
+                      </a:pPr>
+                      <a:r>
+                        <a:rPr lang="en-US" sz="1000" b="1" dirty="0">
+                          <a:solidFill>
+                            <a:srgbClr val="0B2A3D"/>
+                          </a:solidFill>
+                          <a:latin typeface="Calibri" pitchFamily="34" charset="0"/>
+                          <a:ea typeface="Calibri" pitchFamily="34" charset="-122"/>
+                          <a:cs typeface="Calibri" pitchFamily="34" charset="-120"/>
+                        </a:rPr>
+                        <a:t>US$ 470,4 mil</a:t>
+                      </a:r>
+                      <a:endParaRPr lang="en-US" sz="1000" dirty="0">
+                        <a:latin typeface="Calibri" charset="0"/>
+                        <a:ea typeface="Calibri" charset="0"/>
+                        <a:cs typeface="Calibri" charset="0"/>
+                      </a:endParaRPr>
+                    </a:p>
+                  </a:txBody>
+                  <a:tcPr marL="91440" marR="91440" marT="45720" marB="45720" anchor="ctr">
+                    <a:lnL w="6350" cap="flat" cmpd="sng" algn="ctr">
+                      <a:solidFill>
+                        <a:srgbClr val="E3E8E9"/>
+                      </a:solidFill>
+                      <a:prstDash val="solid"/>
+                      <a:round/>
+                      <a:headEnd type="none" w="med" len="med"/>
+                      <a:tailEnd type="none" w="med" len="med"/>
+                    </a:lnL>
+                    <a:lnR w="6350" cap="flat" cmpd="sng" algn="ctr">
+                      <a:solidFill>
+                        <a:srgbClr val="E3E8E9"/>
+                      </a:solidFill>
+                      <a:prstDash val="solid"/>
+                      <a:round/>
+                      <a:headEnd type="none" w="med" len="med"/>
+                      <a:tailEnd type="none" w="med" len="med"/>
+                    </a:lnR>
+                    <a:lnT w="6350" cap="flat" cmpd="sng" algn="ctr">
+                      <a:solidFill>
+                        <a:srgbClr val="E3E8E9"/>
+                      </a:solidFill>
+                      <a:prstDash val="solid"/>
+                      <a:round/>
+                      <a:headEnd type="none" w="med" len="med"/>
+                      <a:tailEnd type="none" w="med" len="med"/>
+                    </a:lnT>
+                    <a:lnB w="6350" cap="flat" cmpd="sng" algn="ctr">
+                      <a:solidFill>
+                        <a:srgbClr val="E3E8E9"/>
+                      </a:solidFill>
+                      <a:prstDash val="solid"/>
+                      <a:round/>
+                      <a:headEnd type="none" w="med" len="med"/>
+                      <a:tailEnd type="none" w="med" len="med"/>
+                    </a:lnB>
+                    <a:solidFill>
+                      <a:srgbClr val="FFFFFF"/>
+                    </a:solidFill>
+                  </a:tcPr>
+                </a:tc>
+              </a:tr>
+              <a:tr h="288036">
+                <a:tc>
+                  <a:txBody>
+                    <a:bodyPr/>
+                    <a:lstStyle/>
+                    <a:p>
+                      <a:pPr indent="0" marL="0">
+                        <a:buNone/>
+                      </a:pPr>
+                      <a:r>
+                        <a:rPr lang="en-US" sz="1000" dirty="0">
+                          <a:solidFill>
+                            <a:srgbClr val="1C2B33"/>
+                          </a:solidFill>
+                          <a:latin typeface="Calibri" pitchFamily="34" charset="0"/>
+                          <a:ea typeface="Calibri" pitchFamily="34" charset="-122"/>
+                          <a:cs typeface="Calibri" pitchFamily="34" charset="-120"/>
+                        </a:rPr>
+                        <a:t>R&amp;R - REPARO DE SELOS DGS</a:t>
+                      </a:r>
+                      <a:endParaRPr lang="en-US" sz="1000" dirty="0">
+                        <a:latin typeface="Calibri" charset="0"/>
+                        <a:ea typeface="Calibri" charset="0"/>
+                        <a:cs typeface="Calibri" charset="0"/>
+                      </a:endParaRPr>
+                    </a:p>
+                  </a:txBody>
+                  <a:tcPr marL="91440" marR="91440" marT="45720" marB="45720" anchor="ctr">
+                    <a:lnL w="6350" cap="flat" cmpd="sng" algn="ctr">
+                      <a:solidFill>
+                        <a:srgbClr val="E3E8E9"/>
+                      </a:solidFill>
+                      <a:prstDash val="solid"/>
+                      <a:round/>
+                      <a:headEnd type="none" w="med" len="med"/>
+                      <a:tailEnd type="none" w="med" len="med"/>
+                    </a:lnL>
+                    <a:lnR w="6350" cap="flat" cmpd="sng" algn="ctr">
+                      <a:solidFill>
+                        <a:srgbClr val="E3E8E9"/>
+                      </a:solidFill>
+                      <a:prstDash val="solid"/>
+                      <a:round/>
+                      <a:headEnd type="none" w="med" len="med"/>
+                      <a:tailEnd type="none" w="med" len="med"/>
+                    </a:lnR>
+                    <a:lnT w="6350" cap="flat" cmpd="sng" algn="ctr">
+                      <a:solidFill>
+                        <a:srgbClr val="E3E8E9"/>
+                      </a:solidFill>
+                      <a:prstDash val="solid"/>
+                      <a:round/>
+                      <a:headEnd type="none" w="med" len="med"/>
+                      <a:tailEnd type="none" w="med" len="med"/>
+                    </a:lnT>
+                    <a:lnB w="6350" cap="flat" cmpd="sng" algn="ctr">
+                      <a:solidFill>
+                        <a:srgbClr val="E3E8E9"/>
+                      </a:solidFill>
+                      <a:prstDash val="solid"/>
+                      <a:round/>
+                      <a:headEnd type="none" w="med" len="med"/>
+                      <a:tailEnd type="none" w="med" len="med"/>
+                    </a:lnB>
+                    <a:solidFill>
+                      <a:srgbClr val="F0F4F5"/>
+                    </a:solidFill>
+                  </a:tcPr>
+                </a:tc>
+                <a:tc>
+                  <a:txBody>
+                    <a:bodyPr/>
+                    <a:lstStyle/>
+                    <a:p>
+                      <a:pPr indent="0" marL="0">
+                        <a:buNone/>
+                      </a:pPr>
+                      <a:r>
+                        <a:rPr lang="en-US" sz="950" dirty="0">
+                          <a:solidFill>
+                            <a:srgbClr val="5B6B73"/>
+                          </a:solidFill>
+                          <a:latin typeface="Calibri" pitchFamily="34" charset="0"/>
+                          <a:ea typeface="Calibri" pitchFamily="34" charset="-122"/>
+                          <a:cs typeface="Calibri" pitchFamily="34" charset="-120"/>
+                        </a:rPr>
+                        <a:t>Rotina Operacional</a:t>
+                      </a:r>
+                      <a:endParaRPr lang="en-US" sz="950" dirty="0">
+                        <a:latin typeface="Calibri" charset="0"/>
+                        <a:ea typeface="Calibri" charset="0"/>
+                        <a:cs typeface="Calibri" charset="0"/>
+                      </a:endParaRPr>
+                    </a:p>
+                  </a:txBody>
+                  <a:tcPr marL="91440" marR="91440" marT="45720" marB="45720" anchor="ctr">
+                    <a:lnL w="6350" cap="flat" cmpd="sng" algn="ctr">
+                      <a:solidFill>
+                        <a:srgbClr val="E3E8E9"/>
+                      </a:solidFill>
+                      <a:prstDash val="solid"/>
+                      <a:round/>
+                      <a:headEnd type="none" w="med" len="med"/>
+                      <a:tailEnd type="none" w="med" len="med"/>
+                    </a:lnL>
+                    <a:lnR w="6350" cap="flat" cmpd="sng" algn="ctr">
+                      <a:solidFill>
+                        <a:srgbClr val="E3E8E9"/>
+                      </a:solidFill>
+                      <a:prstDash val="solid"/>
+                      <a:round/>
+                      <a:headEnd type="none" w="med" len="med"/>
+                      <a:tailEnd type="none" w="med" len="med"/>
+                    </a:lnR>
+                    <a:lnT w="6350" cap="flat" cmpd="sng" algn="ctr">
+                      <a:solidFill>
+                        <a:srgbClr val="E3E8E9"/>
+                      </a:solidFill>
+                      <a:prstDash val="solid"/>
+                      <a:round/>
+                      <a:headEnd type="none" w="med" len="med"/>
+                      <a:tailEnd type="none" w="med" len="med"/>
+                    </a:lnT>
+                    <a:lnB w="6350" cap="flat" cmpd="sng" algn="ctr">
+                      <a:solidFill>
+                        <a:srgbClr val="E3E8E9"/>
+                      </a:solidFill>
+                      <a:prstDash val="solid"/>
+                      <a:round/>
+                      <a:headEnd type="none" w="med" len="med"/>
+                      <a:tailEnd type="none" w="med" len="med"/>
+                    </a:lnB>
+                    <a:solidFill>
+                      <a:srgbClr val="F0F4F5"/>
+                    </a:solidFill>
+                  </a:tcPr>
+                </a:tc>
+                <a:tc>
+                  <a:txBody>
+                    <a:bodyPr/>
+                    <a:lstStyle/>
+                    <a:p>
+                      <a:pPr indent="0" marL="0">
+                        <a:buNone/>
+                      </a:pPr>
+                      <a:r>
+                        <a:rPr lang="en-US" sz="950" dirty="0">
+                          <a:solidFill>
+                            <a:srgbClr val="5B6B73"/>
+                          </a:solidFill>
+                          <a:latin typeface="Calibri" pitchFamily="34" charset="0"/>
+                          <a:ea typeface="Calibri" pitchFamily="34" charset="-122"/>
+                          <a:cs typeface="Calibri" pitchFamily="34" charset="-120"/>
+                        </a:rPr>
+                        <a:t>MNT – Manutenção</a:t>
+                      </a:r>
+                      <a:endParaRPr lang="en-US" sz="950" dirty="0">
+                        <a:latin typeface="Calibri" charset="0"/>
+                        <a:ea typeface="Calibri" charset="0"/>
+                        <a:cs typeface="Calibri" charset="0"/>
+                      </a:endParaRPr>
+                    </a:p>
+                  </a:txBody>
+                  <a:tcPr marL="91440" marR="91440" marT="45720" marB="45720" anchor="ctr">
+                    <a:lnL w="6350" cap="flat" cmpd="sng" algn="ctr">
+                      <a:solidFill>
+                        <a:srgbClr val="E3E8E9"/>
+                      </a:solidFill>
+                      <a:prstDash val="solid"/>
+                      <a:round/>
+                      <a:headEnd type="none" w="med" len="med"/>
+                      <a:tailEnd type="none" w="med" len="med"/>
+                    </a:lnL>
+                    <a:lnR w="6350" cap="flat" cmpd="sng" algn="ctr">
+                      <a:solidFill>
+                        <a:srgbClr val="E3E8E9"/>
+                      </a:solidFill>
+                      <a:prstDash val="solid"/>
+                      <a:round/>
+                      <a:headEnd type="none" w="med" len="med"/>
+                      <a:tailEnd type="none" w="med" len="med"/>
+                    </a:lnR>
+                    <a:lnT w="6350" cap="flat" cmpd="sng" algn="ctr">
+                      <a:solidFill>
+                        <a:srgbClr val="E3E8E9"/>
+                      </a:solidFill>
+                      <a:prstDash val="solid"/>
+                      <a:round/>
+                      <a:headEnd type="none" w="med" len="med"/>
+                      <a:tailEnd type="none" w="med" len="med"/>
+                    </a:lnT>
+                    <a:lnB w="6350" cap="flat" cmpd="sng" algn="ctr">
+                      <a:solidFill>
+                        <a:srgbClr val="E3E8E9"/>
+                      </a:solidFill>
+                      <a:prstDash val="solid"/>
+                      <a:round/>
+                      <a:headEnd type="none" w="med" len="med"/>
+                      <a:tailEnd type="none" w="med" len="med"/>
+                    </a:lnB>
+                    <a:solidFill>
+                      <a:srgbClr val="F0F4F5"/>
+                    </a:solidFill>
+                  </a:tcPr>
+                </a:tc>
+                <a:tc>
+                  <a:txBody>
+                    <a:bodyPr/>
+                    <a:lstStyle/>
+                    <a:p>
+                      <a:pPr algn="r" indent="0" marL="0">
+                        <a:buNone/>
+                      </a:pPr>
+                      <a:r>
+                        <a:rPr lang="en-US" sz="1000" b="1" dirty="0">
+                          <a:solidFill>
+                            <a:srgbClr val="0B2A3D"/>
+                          </a:solidFill>
+                          <a:latin typeface="Calibri" pitchFamily="34" charset="0"/>
+                          <a:ea typeface="Calibri" pitchFamily="34" charset="-122"/>
+                          <a:cs typeface="Calibri" pitchFamily="34" charset="-120"/>
+                        </a:rPr>
+                        <a:t>US$ 463,5 mil</a:t>
+                      </a:r>
+                      <a:endParaRPr lang="en-US" sz="1000" dirty="0">
+                        <a:latin typeface="Calibri" charset="0"/>
+                        <a:ea typeface="Calibri" charset="0"/>
+                        <a:cs typeface="Calibri" charset="0"/>
+                      </a:endParaRPr>
+                    </a:p>
+                  </a:txBody>
+                  <a:tcPr marL="91440" marR="91440" marT="45720" marB="45720" anchor="ctr">
+                    <a:lnL w="6350" cap="flat" cmpd="sng" algn="ctr">
+                      <a:solidFill>
+                        <a:srgbClr val="E3E8E9"/>
+                      </a:solidFill>
+                      <a:prstDash val="solid"/>
+                      <a:round/>
+                      <a:headEnd type="none" w="med" len="med"/>
+                      <a:tailEnd type="none" w="med" len="med"/>
+                    </a:lnL>
+                    <a:lnR w="6350" cap="flat" cmpd="sng" algn="ctr">
+                      <a:solidFill>
+                        <a:srgbClr val="E3E8E9"/>
+                      </a:solidFill>
+                      <a:prstDash val="solid"/>
+                      <a:round/>
+                      <a:headEnd type="none" w="med" len="med"/>
+                      <a:tailEnd type="none" w="med" len="med"/>
+                    </a:lnR>
+                    <a:lnT w="6350" cap="flat" cmpd="sng" algn="ctr">
+                      <a:solidFill>
+                        <a:srgbClr val="E3E8E9"/>
+                      </a:solidFill>
+                      <a:prstDash val="solid"/>
+                      <a:round/>
+                      <a:headEnd type="none" w="med" len="med"/>
+                      <a:tailEnd type="none" w="med" len="med"/>
+                    </a:lnT>
+                    <a:lnB w="6350" cap="flat" cmpd="sng" algn="ctr">
+                      <a:solidFill>
+                        <a:srgbClr val="E3E8E9"/>
+                      </a:solidFill>
+                      <a:prstDash val="solid"/>
+                      <a:round/>
+                      <a:headEnd type="none" w="med" len="med"/>
+                      <a:tailEnd type="none" w="med" len="med"/>
+                    </a:lnB>
+                    <a:solidFill>
+                      <a:srgbClr val="F0F4F5"/>
+                    </a:solidFill>
+                  </a:tcPr>
+                </a:tc>
+              </a:tr>
+              <a:tr h="288036">
+                <a:tc>
+                  <a:txBody>
+                    <a:bodyPr/>
+                    <a:lstStyle/>
+                    <a:p>
+                      <a:pPr indent="0" marL="0">
+                        <a:buNone/>
+                      </a:pPr>
+                      <a:r>
+                        <a:rPr lang="en-US" sz="1000" dirty="0">
+                          <a:solidFill>
+                            <a:srgbClr val="1C2B33"/>
+                          </a:solidFill>
+                          <a:latin typeface="Calibri" pitchFamily="34" charset="0"/>
+                          <a:ea typeface="Calibri" pitchFamily="34" charset="-122"/>
+                          <a:cs typeface="Calibri" pitchFamily="34" charset="-120"/>
+                        </a:rPr>
+                        <a:t>18- Aquisição de transformadores de melhor tecnologia dos tratadores eletrostáticos (Óleo - 1º TRI)</a:t>
+                      </a:r>
+                      <a:endParaRPr lang="en-US" sz="1000" dirty="0">
+                        <a:latin typeface="Calibri" charset="0"/>
+                        <a:ea typeface="Calibri" charset="0"/>
+                        <a:cs typeface="Calibri" charset="0"/>
+                      </a:endParaRPr>
+                    </a:p>
+                  </a:txBody>
+                  <a:tcPr marL="91440" marR="91440" marT="45720" marB="45720" anchor="ctr">
+                    <a:lnL w="6350" cap="flat" cmpd="sng" algn="ctr">
+                      <a:solidFill>
+                        <a:srgbClr val="E3E8E9"/>
+                      </a:solidFill>
+                      <a:prstDash val="solid"/>
+                      <a:round/>
+                      <a:headEnd type="none" w="med" len="med"/>
+                      <a:tailEnd type="none" w="med" len="med"/>
+                    </a:lnL>
+                    <a:lnR w="6350" cap="flat" cmpd="sng" algn="ctr">
+                      <a:solidFill>
+                        <a:srgbClr val="E3E8E9"/>
+                      </a:solidFill>
+                      <a:prstDash val="solid"/>
+                      <a:round/>
+                      <a:headEnd type="none" w="med" len="med"/>
+                      <a:tailEnd type="none" w="med" len="med"/>
+                    </a:lnR>
+                    <a:lnT w="6350" cap="flat" cmpd="sng" algn="ctr">
+                      <a:solidFill>
+                        <a:srgbClr val="E3E8E9"/>
+                      </a:solidFill>
+                      <a:prstDash val="solid"/>
+                      <a:round/>
+                      <a:headEnd type="none" w="med" len="med"/>
+                      <a:tailEnd type="none" w="med" len="med"/>
+                    </a:lnT>
+                    <a:lnB w="6350" cap="flat" cmpd="sng" algn="ctr">
+                      <a:solidFill>
+                        <a:srgbClr val="E3E8E9"/>
+                      </a:solidFill>
+                      <a:prstDash val="solid"/>
+                      <a:round/>
+                      <a:headEnd type="none" w="med" len="med"/>
+                      <a:tailEnd type="none" w="med" len="med"/>
+                    </a:lnB>
+                    <a:solidFill>
+                      <a:srgbClr val="FFFFFF"/>
+                    </a:solidFill>
+                  </a:tcPr>
+                </a:tc>
+                <a:tc>
+                  <a:txBody>
+                    <a:bodyPr/>
+                    <a:lstStyle/>
+                    <a:p>
+                      <a:pPr indent="0" marL="0">
+                        <a:buNone/>
+                      </a:pPr>
+                      <a:r>
+                        <a:rPr lang="en-US" sz="950" dirty="0">
+                          <a:solidFill>
+                            <a:srgbClr val="5B6B73"/>
+                          </a:solidFill>
+                          <a:latin typeface="Calibri" pitchFamily="34" charset="0"/>
+                          <a:ea typeface="Calibri" pitchFamily="34" charset="-122"/>
+                          <a:cs typeface="Calibri" pitchFamily="34" charset="-120"/>
+                        </a:rPr>
+                        <a:t>Eficiência de Produção</a:t>
+                      </a:r>
+                      <a:endParaRPr lang="en-US" sz="950" dirty="0">
+                        <a:latin typeface="Calibri" charset="0"/>
+                        <a:ea typeface="Calibri" charset="0"/>
+                        <a:cs typeface="Calibri" charset="0"/>
+                      </a:endParaRPr>
+                    </a:p>
+                  </a:txBody>
+                  <a:tcPr marL="91440" marR="91440" marT="45720" marB="45720" anchor="ctr">
+                    <a:lnL w="6350" cap="flat" cmpd="sng" algn="ctr">
+                      <a:solidFill>
+                        <a:srgbClr val="E3E8E9"/>
+                      </a:solidFill>
+                      <a:prstDash val="solid"/>
+                      <a:round/>
+                      <a:headEnd type="none" w="med" len="med"/>
+                      <a:tailEnd type="none" w="med" len="med"/>
+                    </a:lnL>
+                    <a:lnR w="6350" cap="flat" cmpd="sng" algn="ctr">
+                      <a:solidFill>
+                        <a:srgbClr val="E3E8E9"/>
+                      </a:solidFill>
+                      <a:prstDash val="solid"/>
+                      <a:round/>
+                      <a:headEnd type="none" w="med" len="med"/>
+                      <a:tailEnd type="none" w="med" len="med"/>
+                    </a:lnR>
+                    <a:lnT w="6350" cap="flat" cmpd="sng" algn="ctr">
+                      <a:solidFill>
+                        <a:srgbClr val="E3E8E9"/>
+                      </a:solidFill>
+                      <a:prstDash val="solid"/>
+                      <a:round/>
+                      <a:headEnd type="none" w="med" len="med"/>
+                      <a:tailEnd type="none" w="med" len="med"/>
+                    </a:lnT>
+                    <a:lnB w="6350" cap="flat" cmpd="sng" algn="ctr">
+                      <a:solidFill>
+                        <a:srgbClr val="E3E8E9"/>
+                      </a:solidFill>
+                      <a:prstDash val="solid"/>
+                      <a:round/>
+                      <a:headEnd type="none" w="med" len="med"/>
+                      <a:tailEnd type="none" w="med" len="med"/>
+                    </a:lnB>
+                    <a:solidFill>
+                      <a:srgbClr val="FFFFFF"/>
+                    </a:solidFill>
+                  </a:tcPr>
+                </a:tc>
+                <a:tc>
+                  <a:txBody>
+                    <a:bodyPr/>
+                    <a:lstStyle/>
+                    <a:p>
+                      <a:pPr indent="0" marL="0">
+                        <a:buNone/>
+                      </a:pPr>
+                      <a:r>
+                        <a:rPr lang="en-US" sz="950" dirty="0">
+                          <a:solidFill>
+                            <a:srgbClr val="5B6B73"/>
+                          </a:solidFill>
+                          <a:latin typeface="Calibri" pitchFamily="34" charset="0"/>
+                          <a:ea typeface="Calibri" pitchFamily="34" charset="-122"/>
+                          <a:cs typeface="Calibri" pitchFamily="34" charset="-120"/>
+                        </a:rPr>
+                        <a:t>P&amp;Q - Processos</a:t>
+                      </a:r>
+                      <a:endParaRPr lang="en-US" sz="950" dirty="0">
+                        <a:latin typeface="Calibri" charset="0"/>
+                        <a:ea typeface="Calibri" charset="0"/>
+                        <a:cs typeface="Calibri" charset="0"/>
+                      </a:endParaRPr>
+                    </a:p>
+                  </a:txBody>
+                  <a:tcPr marL="91440" marR="91440" marT="45720" marB="45720" anchor="ctr">
+                    <a:lnL w="6350" cap="flat" cmpd="sng" algn="ctr">
+                      <a:solidFill>
+                        <a:srgbClr val="E3E8E9"/>
+                      </a:solidFill>
+                      <a:prstDash val="solid"/>
+                      <a:round/>
+                      <a:headEnd type="none" w="med" len="med"/>
+                      <a:tailEnd type="none" w="med" len="med"/>
+                    </a:lnL>
+                    <a:lnR w="6350" cap="flat" cmpd="sng" algn="ctr">
+                      <a:solidFill>
+                        <a:srgbClr val="E3E8E9"/>
+                      </a:solidFill>
+                      <a:prstDash val="solid"/>
+                      <a:round/>
+                      <a:headEnd type="none" w="med" len="med"/>
+                      <a:tailEnd type="none" w="med" len="med"/>
+                    </a:lnR>
+                    <a:lnT w="6350" cap="flat" cmpd="sng" algn="ctr">
+                      <a:solidFill>
+                        <a:srgbClr val="E3E8E9"/>
+                      </a:solidFill>
+                      <a:prstDash val="solid"/>
+                      <a:round/>
+                      <a:headEnd type="none" w="med" len="med"/>
+                      <a:tailEnd type="none" w="med" len="med"/>
+                    </a:lnT>
+                    <a:lnB w="6350" cap="flat" cmpd="sng" algn="ctr">
+                      <a:solidFill>
+                        <a:srgbClr val="E3E8E9"/>
+                      </a:solidFill>
+                      <a:prstDash val="solid"/>
+                      <a:round/>
+                      <a:headEnd type="none" w="med" len="med"/>
+                      <a:tailEnd type="none" w="med" len="med"/>
+                    </a:lnB>
+                    <a:solidFill>
+                      <a:srgbClr val="FFFFFF"/>
+                    </a:solidFill>
+                  </a:tcPr>
+                </a:tc>
+                <a:tc>
+                  <a:txBody>
+                    <a:bodyPr/>
+                    <a:lstStyle/>
+                    <a:p>
+                      <a:pPr algn="r" indent="0" marL="0">
+                        <a:buNone/>
+                      </a:pPr>
+                      <a:r>
+                        <a:rPr lang="en-US" sz="1000" b="1" dirty="0">
+                          <a:solidFill>
+                            <a:srgbClr val="0B2A3D"/>
+                          </a:solidFill>
+                          <a:latin typeface="Calibri" pitchFamily="34" charset="0"/>
+                          <a:ea typeface="Calibri" pitchFamily="34" charset="-122"/>
+                          <a:cs typeface="Calibri" pitchFamily="34" charset="-120"/>
+                        </a:rPr>
+                        <a:t>US$ 460,2 mil</a:t>
+                      </a:r>
+                      <a:endParaRPr lang="en-US" sz="1000" dirty="0">
+                        <a:latin typeface="Calibri" charset="0"/>
+                        <a:ea typeface="Calibri" charset="0"/>
+                        <a:cs typeface="Calibri" charset="0"/>
+                      </a:endParaRPr>
+                    </a:p>
+                  </a:txBody>
+                  <a:tcPr marL="91440" marR="91440" marT="45720" marB="45720" anchor="ctr">
+                    <a:lnL w="6350" cap="flat" cmpd="sng" algn="ctr">
+                      <a:solidFill>
+                        <a:srgbClr val="E3E8E9"/>
+                      </a:solidFill>
+                      <a:prstDash val="solid"/>
+                      <a:round/>
+                      <a:headEnd type="none" w="med" len="med"/>
+                      <a:tailEnd type="none" w="med" len="med"/>
+                    </a:lnL>
+                    <a:lnR w="6350" cap="flat" cmpd="sng" algn="ctr">
+                      <a:solidFill>
+                        <a:srgbClr val="E3E8E9"/>
+                      </a:solidFill>
+                      <a:prstDash val="solid"/>
+                      <a:round/>
+                      <a:headEnd type="none" w="med" len="med"/>
+                      <a:tailEnd type="none" w="med" len="med"/>
+                    </a:lnR>
+                    <a:lnT w="6350" cap="flat" cmpd="sng" algn="ctr">
+                      <a:solidFill>
+                        <a:srgbClr val="E3E8E9"/>
+                      </a:solidFill>
+                      <a:prstDash val="solid"/>
+                      <a:round/>
+                      <a:headEnd type="none" w="med" len="med"/>
+                      <a:tailEnd type="none" w="med" len="med"/>
+                    </a:lnT>
+                    <a:lnB w="6350" cap="flat" cmpd="sng" algn="ctr">
+                      <a:solidFill>
+                        <a:srgbClr val="E3E8E9"/>
+                      </a:solidFill>
+                      <a:prstDash val="solid"/>
+                      <a:round/>
+                      <a:headEnd type="none" w="med" len="med"/>
+                      <a:tailEnd type="none" w="med" len="med"/>
+                    </a:lnB>
+                    <a:solidFill>
+                      <a:srgbClr val="FFFFFF"/>
+                    </a:solidFill>
+                  </a:tcPr>
+                </a:tc>
+              </a:tr>
+              <a:tr h="288036">
+                <a:tc>
+                  <a:txBody>
+                    <a:bodyPr/>
+                    <a:lstStyle/>
+                    <a:p>
+                      <a:pPr indent="0" marL="0">
+                        <a:buNone/>
+                      </a:pPr>
+                      <a:r>
+                        <a:rPr lang="en-US" sz="1000" dirty="0">
+                          <a:solidFill>
+                            <a:srgbClr val="1C2B33"/>
+                          </a:solidFill>
+                          <a:latin typeface="Calibri" pitchFamily="34" charset="0"/>
+                          <a:ea typeface="Calibri" pitchFamily="34" charset="-122"/>
+                          <a:cs typeface="Calibri" pitchFamily="34" charset="-120"/>
+                        </a:rPr>
+                        <a:t>ESTUDOS DE ENGENHARIA</a:t>
+                      </a:r>
+                      <a:endParaRPr lang="en-US" sz="1000" dirty="0">
+                        <a:latin typeface="Calibri" charset="0"/>
+                        <a:ea typeface="Calibri" charset="0"/>
+                        <a:cs typeface="Calibri" charset="0"/>
+                      </a:endParaRPr>
+                    </a:p>
+                  </a:txBody>
+                  <a:tcPr marL="91440" marR="91440" marT="45720" marB="45720" anchor="ctr">
+                    <a:lnL w="6350" cap="flat" cmpd="sng" algn="ctr">
+                      <a:solidFill>
+                        <a:srgbClr val="E3E8E9"/>
+                      </a:solidFill>
+                      <a:prstDash val="solid"/>
+                      <a:round/>
+                      <a:headEnd type="none" w="med" len="med"/>
+                      <a:tailEnd type="none" w="med" len="med"/>
+                    </a:lnL>
+                    <a:lnR w="6350" cap="flat" cmpd="sng" algn="ctr">
+                      <a:solidFill>
+                        <a:srgbClr val="E3E8E9"/>
+                      </a:solidFill>
+                      <a:prstDash val="solid"/>
+                      <a:round/>
+                      <a:headEnd type="none" w="med" len="med"/>
+                      <a:tailEnd type="none" w="med" len="med"/>
+                    </a:lnR>
+                    <a:lnT w="6350" cap="flat" cmpd="sng" algn="ctr">
+                      <a:solidFill>
+                        <a:srgbClr val="E3E8E9"/>
+                      </a:solidFill>
+                      <a:prstDash val="solid"/>
+                      <a:round/>
+                      <a:headEnd type="none" w="med" len="med"/>
+                      <a:tailEnd type="none" w="med" len="med"/>
+                    </a:lnT>
+                    <a:lnB w="6350" cap="flat" cmpd="sng" algn="ctr">
+                      <a:solidFill>
+                        <a:srgbClr val="E3E8E9"/>
+                      </a:solidFill>
+                      <a:prstDash val="solid"/>
+                      <a:round/>
+                      <a:headEnd type="none" w="med" len="med"/>
+                      <a:tailEnd type="none" w="med" len="med"/>
+                    </a:lnB>
+                    <a:solidFill>
+                      <a:srgbClr val="F0F4F5"/>
+                    </a:solidFill>
+                  </a:tcPr>
+                </a:tc>
+                <a:tc>
+                  <a:txBody>
+                    <a:bodyPr/>
+                    <a:lstStyle/>
+                    <a:p>
+                      <a:pPr indent="0" marL="0">
+                        <a:buNone/>
+                      </a:pPr>
+                      <a:r>
+                        <a:rPr lang="en-US" sz="950" dirty="0">
+                          <a:solidFill>
+                            <a:srgbClr val="5B6B73"/>
+                          </a:solidFill>
+                          <a:latin typeface="Calibri" pitchFamily="34" charset="0"/>
+                          <a:ea typeface="Calibri" pitchFamily="34" charset="-122"/>
+                          <a:cs typeface="Calibri" pitchFamily="34" charset="-120"/>
+                        </a:rPr>
+                        <a:t>Eficiência de Produção</a:t>
+                      </a:r>
+                      <a:endParaRPr lang="en-US" sz="950" dirty="0">
+                        <a:latin typeface="Calibri" charset="0"/>
+                        <a:ea typeface="Calibri" charset="0"/>
+                        <a:cs typeface="Calibri" charset="0"/>
+                      </a:endParaRPr>
+                    </a:p>
+                  </a:txBody>
+                  <a:tcPr marL="91440" marR="91440" marT="45720" marB="45720" anchor="ctr">
+                    <a:lnL w="6350" cap="flat" cmpd="sng" algn="ctr">
+                      <a:solidFill>
+                        <a:srgbClr val="E3E8E9"/>
+                      </a:solidFill>
+                      <a:prstDash val="solid"/>
+                      <a:round/>
+                      <a:headEnd type="none" w="med" len="med"/>
+                      <a:tailEnd type="none" w="med" len="med"/>
+                    </a:lnL>
+                    <a:lnR w="6350" cap="flat" cmpd="sng" algn="ctr">
+                      <a:solidFill>
+                        <a:srgbClr val="E3E8E9"/>
+                      </a:solidFill>
+                      <a:prstDash val="solid"/>
+                      <a:round/>
+                      <a:headEnd type="none" w="med" len="med"/>
+                      <a:tailEnd type="none" w="med" len="med"/>
+                    </a:lnR>
+                    <a:lnT w="6350" cap="flat" cmpd="sng" algn="ctr">
+                      <a:solidFill>
+                        <a:srgbClr val="E3E8E9"/>
+                      </a:solidFill>
+                      <a:prstDash val="solid"/>
+                      <a:round/>
+                      <a:headEnd type="none" w="med" len="med"/>
+                      <a:tailEnd type="none" w="med" len="med"/>
+                    </a:lnT>
+                    <a:lnB w="6350" cap="flat" cmpd="sng" algn="ctr">
+                      <a:solidFill>
+                        <a:srgbClr val="E3E8E9"/>
+                      </a:solidFill>
+                      <a:prstDash val="solid"/>
+                      <a:round/>
+                      <a:headEnd type="none" w="med" len="med"/>
+                      <a:tailEnd type="none" w="med" len="med"/>
+                    </a:lnB>
+                    <a:solidFill>
+                      <a:srgbClr val="F0F4F5"/>
+                    </a:solidFill>
+                  </a:tcPr>
+                </a:tc>
+                <a:tc>
+                  <a:txBody>
+                    <a:bodyPr/>
+                    <a:lstStyle/>
+                    <a:p>
+                      <a:pPr indent="0" marL="0">
+                        <a:buNone/>
+                      </a:pPr>
+                      <a:r>
+                        <a:rPr lang="en-US" sz="950" dirty="0">
+                          <a:solidFill>
+                            <a:srgbClr val="5B6B73"/>
+                          </a:solidFill>
+                          <a:latin typeface="Calibri" pitchFamily="34" charset="0"/>
+                          <a:ea typeface="Calibri" pitchFamily="34" charset="-122"/>
+                          <a:cs typeface="Calibri" pitchFamily="34" charset="-120"/>
+                        </a:rPr>
+                        <a:t>Projetos</a:t>
+                      </a:r>
+                      <a:endParaRPr lang="en-US" sz="950" dirty="0">
+                        <a:latin typeface="Calibri" charset="0"/>
+                        <a:ea typeface="Calibri" charset="0"/>
+                        <a:cs typeface="Calibri" charset="0"/>
+                      </a:endParaRPr>
+                    </a:p>
+                  </a:txBody>
+                  <a:tcPr marL="91440" marR="91440" marT="45720" marB="45720" anchor="ctr">
+                    <a:lnL w="6350" cap="flat" cmpd="sng" algn="ctr">
+                      <a:solidFill>
+                        <a:srgbClr val="E3E8E9"/>
+                      </a:solidFill>
+                      <a:prstDash val="solid"/>
+                      <a:round/>
+                      <a:headEnd type="none" w="med" len="med"/>
+                      <a:tailEnd type="none" w="med" len="med"/>
+                    </a:lnL>
+                    <a:lnR w="6350" cap="flat" cmpd="sng" algn="ctr">
+                      <a:solidFill>
+                        <a:srgbClr val="E3E8E9"/>
+                      </a:solidFill>
+                      <a:prstDash val="solid"/>
+                      <a:round/>
+                      <a:headEnd type="none" w="med" len="med"/>
+                      <a:tailEnd type="none" w="med" len="med"/>
+                    </a:lnR>
+                    <a:lnT w="6350" cap="flat" cmpd="sng" algn="ctr">
+                      <a:solidFill>
+                        <a:srgbClr val="E3E8E9"/>
+                      </a:solidFill>
+                      <a:prstDash val="solid"/>
+                      <a:round/>
+                      <a:headEnd type="none" w="med" len="med"/>
+                      <a:tailEnd type="none" w="med" len="med"/>
+                    </a:lnT>
+                    <a:lnB w="6350" cap="flat" cmpd="sng" algn="ctr">
+                      <a:solidFill>
+                        <a:srgbClr val="E3E8E9"/>
+                      </a:solidFill>
+                      <a:prstDash val="solid"/>
+                      <a:round/>
+                      <a:headEnd type="none" w="med" len="med"/>
+                      <a:tailEnd type="none" w="med" len="med"/>
+                    </a:lnB>
+                    <a:solidFill>
+                      <a:srgbClr val="F0F4F5"/>
+                    </a:solidFill>
+                  </a:tcPr>
+                </a:tc>
+                <a:tc>
+                  <a:txBody>
+                    <a:bodyPr/>
+                    <a:lstStyle/>
+                    <a:p>
+                      <a:pPr algn="r" indent="0" marL="0">
+                        <a:buNone/>
+                      </a:pPr>
+                      <a:r>
+                        <a:rPr lang="en-US" sz="1000" b="1" dirty="0">
+                          <a:solidFill>
+                            <a:srgbClr val="0B2A3D"/>
+                          </a:solidFill>
+                          <a:latin typeface="Calibri" pitchFamily="34" charset="0"/>
+                          <a:ea typeface="Calibri" pitchFamily="34" charset="-122"/>
+                          <a:cs typeface="Calibri" pitchFamily="34" charset="-120"/>
+                        </a:rPr>
+                        <a:t>US$ 430,5 mil</a:t>
+                      </a:r>
+                      <a:endParaRPr lang="en-US" sz="1000" dirty="0">
+                        <a:latin typeface="Calibri" charset="0"/>
+                        <a:ea typeface="Calibri" charset="0"/>
+                        <a:cs typeface="Calibri" charset="0"/>
+                      </a:endParaRPr>
+                    </a:p>
+                  </a:txBody>
+                  <a:tcPr marL="91440" marR="91440" marT="45720" marB="45720" anchor="ctr">
+                    <a:lnL w="6350" cap="flat" cmpd="sng" algn="ctr">
+                      <a:solidFill>
+                        <a:srgbClr val="E3E8E9"/>
+                      </a:solidFill>
+                      <a:prstDash val="solid"/>
+                      <a:round/>
+                      <a:headEnd type="none" w="med" len="med"/>
+                      <a:tailEnd type="none" w="med" len="med"/>
+                    </a:lnL>
+                    <a:lnR w="6350" cap="flat" cmpd="sng" algn="ctr">
+                      <a:solidFill>
+                        <a:srgbClr val="E3E8E9"/>
+                      </a:solidFill>
+                      <a:prstDash val="solid"/>
+                      <a:round/>
+                      <a:headEnd type="none" w="med" len="med"/>
+                      <a:tailEnd type="none" w="med" len="med"/>
+                    </a:lnR>
+                    <a:lnT w="6350" cap="flat" cmpd="sng" algn="ctr">
+                      <a:solidFill>
+                        <a:srgbClr val="E3E8E9"/>
+                      </a:solidFill>
+                      <a:prstDash val="solid"/>
+                      <a:round/>
+                      <a:headEnd type="none" w="med" len="med"/>
+                      <a:tailEnd type="none" w="med" len="med"/>
+                    </a:lnT>
+                    <a:lnB w="6350" cap="flat" cmpd="sng" algn="ctr">
+                      <a:solidFill>
+                        <a:srgbClr val="E3E8E9"/>
+                      </a:solidFill>
+                      <a:prstDash val="solid"/>
+                      <a:round/>
+                      <a:headEnd type="none" w="med" len="med"/>
+                      <a:tailEnd type="none" w="med" len="med"/>
+                    </a:lnB>
+                    <a:solidFill>
+                      <a:srgbClr val="F0F4F5"/>
+                    </a:solidFill>
+                  </a:tcPr>
+                </a:tc>
+              </a:tr>
+              <a:tr h="288036">
+                <a:tc>
+                  <a:txBody>
+                    <a:bodyPr/>
+                    <a:lstStyle/>
+                    <a:p>
+                      <a:pPr indent="0" marL="0">
+                        <a:buNone/>
+                      </a:pPr>
+                      <a:r>
+                        <a:rPr lang="en-US" sz="1000" dirty="0">
+                          <a:solidFill>
+                            <a:srgbClr val="1C2B33"/>
+                          </a:solidFill>
+                          <a:latin typeface="Calibri" pitchFamily="34" charset="0"/>
+                          <a:ea typeface="Calibri" pitchFamily="34" charset="-122"/>
+                          <a:cs typeface="Calibri" pitchFamily="34" charset="-120"/>
+                        </a:rPr>
+                        <a:t>SUBSTITUIÇÃO CABO SANSO - HAWSER WINCH</a:t>
+                      </a:r>
+                      <a:endParaRPr lang="en-US" sz="1000" dirty="0">
+                        <a:latin typeface="Calibri" charset="0"/>
+                        <a:ea typeface="Calibri" charset="0"/>
+                        <a:cs typeface="Calibri" charset="0"/>
+                      </a:endParaRPr>
+                    </a:p>
+                  </a:txBody>
+                  <a:tcPr marL="91440" marR="91440" marT="45720" marB="45720" anchor="ctr">
+                    <a:lnL w="6350" cap="flat" cmpd="sng" algn="ctr">
+                      <a:solidFill>
+                        <a:srgbClr val="E3E8E9"/>
+                      </a:solidFill>
+                      <a:prstDash val="solid"/>
+                      <a:round/>
+                      <a:headEnd type="none" w="med" len="med"/>
+                      <a:tailEnd type="none" w="med" len="med"/>
+                    </a:lnL>
+                    <a:lnR w="6350" cap="flat" cmpd="sng" algn="ctr">
+                      <a:solidFill>
+                        <a:srgbClr val="E3E8E9"/>
+                      </a:solidFill>
+                      <a:prstDash val="solid"/>
+                      <a:round/>
+                      <a:headEnd type="none" w="med" len="med"/>
+                      <a:tailEnd type="none" w="med" len="med"/>
+                    </a:lnR>
+                    <a:lnT w="6350" cap="flat" cmpd="sng" algn="ctr">
+                      <a:solidFill>
+                        <a:srgbClr val="E3E8E9"/>
+                      </a:solidFill>
+                      <a:prstDash val="solid"/>
+                      <a:round/>
+                      <a:headEnd type="none" w="med" len="med"/>
+                      <a:tailEnd type="none" w="med" len="med"/>
+                    </a:lnT>
+                    <a:lnB w="6350" cap="flat" cmpd="sng" algn="ctr">
+                      <a:solidFill>
+                        <a:srgbClr val="E3E8E9"/>
+                      </a:solidFill>
+                      <a:prstDash val="solid"/>
+                      <a:round/>
+                      <a:headEnd type="none" w="med" len="med"/>
+                      <a:tailEnd type="none" w="med" len="med"/>
+                    </a:lnB>
+                    <a:solidFill>
+                      <a:srgbClr val="FFFFFF"/>
+                    </a:solidFill>
+                  </a:tcPr>
+                </a:tc>
+                <a:tc>
+                  <a:txBody>
+                    <a:bodyPr/>
+                    <a:lstStyle/>
+                    <a:p>
+                      <a:pPr indent="0" marL="0">
+                        <a:buNone/>
+                      </a:pPr>
+                      <a:r>
+                        <a:rPr lang="en-US" sz="950" dirty="0">
+                          <a:solidFill>
+                            <a:srgbClr val="5B6B73"/>
+                          </a:solidFill>
+                          <a:latin typeface="Calibri" pitchFamily="34" charset="0"/>
+                          <a:ea typeface="Calibri" pitchFamily="34" charset="-122"/>
+                          <a:cs typeface="Calibri" pitchFamily="34" charset="-120"/>
+                        </a:rPr>
+                        <a:t>Rotina Operacional</a:t>
+                      </a:r>
+                      <a:endParaRPr lang="en-US" sz="950" dirty="0">
+                        <a:latin typeface="Calibri" charset="0"/>
+                        <a:ea typeface="Calibri" charset="0"/>
+                        <a:cs typeface="Calibri" charset="0"/>
+                      </a:endParaRPr>
+                    </a:p>
+                  </a:txBody>
+                  <a:tcPr marL="91440" marR="91440" marT="45720" marB="45720" anchor="ctr">
+                    <a:lnL w="6350" cap="flat" cmpd="sng" algn="ctr">
+                      <a:solidFill>
+                        <a:srgbClr val="E3E8E9"/>
+                      </a:solidFill>
+                      <a:prstDash val="solid"/>
+                      <a:round/>
+                      <a:headEnd type="none" w="med" len="med"/>
+                      <a:tailEnd type="none" w="med" len="med"/>
+                    </a:lnL>
+                    <a:lnR w="6350" cap="flat" cmpd="sng" algn="ctr">
+                      <a:solidFill>
+                        <a:srgbClr val="E3E8E9"/>
+                      </a:solidFill>
+                      <a:prstDash val="solid"/>
+                      <a:round/>
+                      <a:headEnd type="none" w="med" len="med"/>
+                      <a:tailEnd type="none" w="med" len="med"/>
+                    </a:lnR>
+                    <a:lnT w="6350" cap="flat" cmpd="sng" algn="ctr">
+                      <a:solidFill>
+                        <a:srgbClr val="E3E8E9"/>
+                      </a:solidFill>
+                      <a:prstDash val="solid"/>
+                      <a:round/>
+                      <a:headEnd type="none" w="med" len="med"/>
+                      <a:tailEnd type="none" w="med" len="med"/>
+                    </a:lnT>
+                    <a:lnB w="6350" cap="flat" cmpd="sng" algn="ctr">
+                      <a:solidFill>
+                        <a:srgbClr val="E3E8E9"/>
+                      </a:solidFill>
+                      <a:prstDash val="solid"/>
+                      <a:round/>
+                      <a:headEnd type="none" w="med" len="med"/>
+                      <a:tailEnd type="none" w="med" len="med"/>
+                    </a:lnB>
+                    <a:solidFill>
+                      <a:srgbClr val="FFFFFF"/>
+                    </a:solidFill>
+                  </a:tcPr>
+                </a:tc>
+                <a:tc>
+                  <a:txBody>
+                    <a:bodyPr/>
+                    <a:lstStyle/>
+                    <a:p>
+                      <a:pPr indent="0" marL="0">
+                        <a:buNone/>
+                      </a:pPr>
+                      <a:r>
+                        <a:rPr lang="en-US" sz="950" dirty="0">
+                          <a:solidFill>
+                            <a:srgbClr val="5B6B73"/>
+                          </a:solidFill>
+                          <a:latin typeface="Calibri" pitchFamily="34" charset="0"/>
+                          <a:ea typeface="Calibri" pitchFamily="34" charset="-122"/>
+                          <a:cs typeface="Calibri" pitchFamily="34" charset="-120"/>
+                        </a:rPr>
+                        <a:t>NAV - Naval</a:t>
+                      </a:r>
+                      <a:endParaRPr lang="en-US" sz="950" dirty="0">
+                        <a:latin typeface="Calibri" charset="0"/>
+                        <a:ea typeface="Calibri" charset="0"/>
+                        <a:cs typeface="Calibri" charset="0"/>
+                      </a:endParaRPr>
+                    </a:p>
+                  </a:txBody>
+                  <a:tcPr marL="91440" marR="91440" marT="45720" marB="45720" anchor="ctr">
+                    <a:lnL w="6350" cap="flat" cmpd="sng" algn="ctr">
+                      <a:solidFill>
+                        <a:srgbClr val="E3E8E9"/>
+                      </a:solidFill>
+                      <a:prstDash val="solid"/>
+                      <a:round/>
+                      <a:headEnd type="none" w="med" len="med"/>
+                      <a:tailEnd type="none" w="med" len="med"/>
+                    </a:lnL>
+                    <a:lnR w="6350" cap="flat" cmpd="sng" algn="ctr">
+                      <a:solidFill>
+                        <a:srgbClr val="E3E8E9"/>
+                      </a:solidFill>
+                      <a:prstDash val="solid"/>
+                      <a:round/>
+                      <a:headEnd type="none" w="med" len="med"/>
+                      <a:tailEnd type="none" w="med" len="med"/>
+                    </a:lnR>
+                    <a:lnT w="6350" cap="flat" cmpd="sng" algn="ctr">
+                      <a:solidFill>
+                        <a:srgbClr val="E3E8E9"/>
+                      </a:solidFill>
+                      <a:prstDash val="solid"/>
+                      <a:round/>
+                      <a:headEnd type="none" w="med" len="med"/>
+                      <a:tailEnd type="none" w="med" len="med"/>
+                    </a:lnT>
+                    <a:lnB w="6350" cap="flat" cmpd="sng" algn="ctr">
+                      <a:solidFill>
+                        <a:srgbClr val="E3E8E9"/>
+                      </a:solidFill>
+                      <a:prstDash val="solid"/>
+                      <a:round/>
+                      <a:headEnd type="none" w="med" len="med"/>
+                      <a:tailEnd type="none" w="med" len="med"/>
+                    </a:lnB>
+                    <a:solidFill>
+                      <a:srgbClr val="FFFFFF"/>
+                    </a:solidFill>
+                  </a:tcPr>
+                </a:tc>
+                <a:tc>
+                  <a:txBody>
+                    <a:bodyPr/>
+                    <a:lstStyle/>
+                    <a:p>
+                      <a:pPr algn="r" indent="0" marL="0">
+                        <a:buNone/>
+                      </a:pPr>
+                      <a:r>
+                        <a:rPr lang="en-US" sz="1000" b="1" dirty="0">
+                          <a:solidFill>
+                            <a:srgbClr val="0B2A3D"/>
+                          </a:solidFill>
+                          <a:latin typeface="Calibri" pitchFamily="34" charset="0"/>
+                          <a:ea typeface="Calibri" pitchFamily="34" charset="-122"/>
+                          <a:cs typeface="Calibri" pitchFamily="34" charset="-120"/>
+                        </a:rPr>
+                        <a:t>US$ 429,7 mil</a:t>
+                      </a:r>
+                      <a:endParaRPr lang="en-US" sz="1000" dirty="0">
+                        <a:latin typeface="Calibri" charset="0"/>
+                        <a:ea typeface="Calibri" charset="0"/>
+                        <a:cs typeface="Calibri" charset="0"/>
+                      </a:endParaRPr>
+                    </a:p>
+                  </a:txBody>
+                  <a:tcPr marL="91440" marR="91440" marT="45720" marB="45720" anchor="ctr">
+                    <a:lnL w="6350" cap="flat" cmpd="sng" algn="ctr">
+                      <a:solidFill>
+                        <a:srgbClr val="E3E8E9"/>
+                      </a:solidFill>
+                      <a:prstDash val="solid"/>
+                      <a:round/>
+                      <a:headEnd type="none" w="med" len="med"/>
+                      <a:tailEnd type="none" w="med" len="med"/>
+                    </a:lnL>
+                    <a:lnR w="6350" cap="flat" cmpd="sng" algn="ctr">
+                      <a:solidFill>
+                        <a:srgbClr val="E3E8E9"/>
+                      </a:solidFill>
+                      <a:prstDash val="solid"/>
+                      <a:round/>
+                      <a:headEnd type="none" w="med" len="med"/>
+                      <a:tailEnd type="none" w="med" len="med"/>
+                    </a:lnR>
+                    <a:lnT w="6350" cap="flat" cmpd="sng" algn="ctr">
+                      <a:solidFill>
+                        <a:srgbClr val="E3E8E9"/>
+                      </a:solidFill>
+                      <a:prstDash val="solid"/>
+                      <a:round/>
+                      <a:headEnd type="none" w="med" len="med"/>
+                      <a:tailEnd type="none" w="med" len="med"/>
+                    </a:lnT>
+                    <a:lnB w="6350" cap="flat" cmpd="sng" algn="ctr">
+                      <a:solidFill>
+                        <a:srgbClr val="E3E8E9"/>
+                      </a:solidFill>
+                      <a:prstDash val="solid"/>
+                      <a:round/>
+                      <a:headEnd type="none" w="med" len="med"/>
+                      <a:tailEnd type="none" w="med" len="med"/>
+                    </a:lnB>
+                    <a:solidFill>
+                      <a:srgbClr val="FFFFFF"/>
+                    </a:solidFill>
+                  </a:tcPr>
+                </a:tc>
+              </a:tr>
+              <a:tr h="288036">
+                <a:tc gridSpan="3">
+                  <a:txBody>
+                    <a:bodyPr/>
+                    <a:lstStyle/>
+                    <a:p>
+                      <a:pPr indent="0" marL="0">
+                        <a:buNone/>
+                      </a:pPr>
+                      <a:r>
+                        <a:rPr lang="en-US" sz="950" i="1" dirty="0">
+                          <a:solidFill>
+                            <a:srgbClr val="145C68"/>
+                          </a:solidFill>
+                          <a:latin typeface="Calibri" pitchFamily="34" charset="0"/>
+                          <a:ea typeface="Calibri" pitchFamily="34" charset="-122"/>
+                          <a:cs typeface="Calibri" pitchFamily="34" charset="-120"/>
+                        </a:rPr>
+                        <a:t>Outros 62 escopos (itens de menor valor individual)</a:t>
+                      </a:r>
+                      <a:endParaRPr lang="en-US" sz="950" dirty="0">
+                        <a:latin typeface="Calibri" charset="0"/>
+                        <a:ea typeface="Calibri" charset="0"/>
+                        <a:cs typeface="Calibri" charset="0"/>
+                      </a:endParaRPr>
+                    </a:p>
+                  </a:txBody>
+                  <a:tcPr marL="91440" marR="91440" marT="45720" marB="45720" anchor="ctr">
+                    <a:lnL w="6350" cap="flat" cmpd="sng" algn="ctr">
+                      <a:solidFill>
+                        <a:srgbClr val="E3E8E9"/>
+                      </a:solidFill>
+                      <a:prstDash val="solid"/>
+                      <a:round/>
+                      <a:headEnd type="none" w="med" len="med"/>
+                      <a:tailEnd type="none" w="med" len="med"/>
+                    </a:lnL>
+                    <a:lnR w="6350" cap="flat" cmpd="sng" algn="ctr">
+                      <a:solidFill>
+                        <a:srgbClr val="E3E8E9"/>
+                      </a:solidFill>
+                      <a:prstDash val="solid"/>
+                      <a:round/>
+                      <a:headEnd type="none" w="med" len="med"/>
+                      <a:tailEnd type="none" w="med" len="med"/>
+                    </a:lnR>
+                    <a:lnT w="6350" cap="flat" cmpd="sng" algn="ctr">
+                      <a:solidFill>
+                        <a:srgbClr val="E3E8E9"/>
+                      </a:solidFill>
+                      <a:prstDash val="solid"/>
+                      <a:round/>
+                      <a:headEnd type="none" w="med" len="med"/>
+                      <a:tailEnd type="none" w="med" len="med"/>
+                    </a:lnT>
+                    <a:lnB w="6350" cap="flat" cmpd="sng" algn="ctr">
+                      <a:solidFill>
+                        <a:srgbClr val="E3E8E9"/>
+                      </a:solidFill>
+                      <a:prstDash val="solid"/>
+                      <a:round/>
+                      <a:headEnd type="none" w="med" len="med"/>
+                      <a:tailEnd type="none" w="med" len="med"/>
+                    </a:lnB>
+                    <a:solidFill>
+                      <a:srgbClr val="DCE8E2"/>
+                    </a:solidFill>
+                  </a:tcPr>
+                </a:tc>
+                <a:tc hMerge="1">
+                  <a:tcPr/>
+                </a:tc>
+                <a:tc hMerge="1">
+                  <a:tcPr/>
+                </a:tc>
+                <a:tc>
+                  <a:txBody>
+                    <a:bodyPr/>
+                    <a:lstStyle/>
+                    <a:p>
+                      <a:pPr algn="r" indent="0" marL="0">
+                        <a:buNone/>
+                      </a:pPr>
+                      <a:r>
+                        <a:rPr lang="en-US" sz="1000" b="1" i="1" dirty="0">
+                          <a:solidFill>
+                            <a:srgbClr val="0B2A3D"/>
+                          </a:solidFill>
+                          <a:latin typeface="Calibri" pitchFamily="34" charset="0"/>
+                          <a:ea typeface="Calibri" pitchFamily="34" charset="-122"/>
+                          <a:cs typeface="Calibri" pitchFamily="34" charset="-120"/>
+                        </a:rPr>
+                        <a:t>US$ 8,7 mi</a:t>
+                      </a:r>
+                      <a:endParaRPr lang="en-US" sz="1000" dirty="0">
+                        <a:latin typeface="Calibri" charset="0"/>
+                        <a:ea typeface="Calibri" charset="0"/>
+                        <a:cs typeface="Calibri" charset="0"/>
+                      </a:endParaRPr>
+                    </a:p>
+                  </a:txBody>
+                  <a:tcPr marL="91440" marR="91440" marT="45720" marB="45720" anchor="ctr">
+                    <a:lnL w="6350" cap="flat" cmpd="sng" algn="ctr">
+                      <a:solidFill>
+                        <a:srgbClr val="E3E8E9"/>
+                      </a:solidFill>
+                      <a:prstDash val="solid"/>
+                      <a:round/>
+                      <a:headEnd type="none" w="med" len="med"/>
+                      <a:tailEnd type="none" w="med" len="med"/>
+                    </a:lnL>
+                    <a:lnR w="6350" cap="flat" cmpd="sng" algn="ctr">
+                      <a:solidFill>
+                        <a:srgbClr val="E3E8E9"/>
+                      </a:solidFill>
+                      <a:prstDash val="solid"/>
+                      <a:round/>
+                      <a:headEnd type="none" w="med" len="med"/>
+                      <a:tailEnd type="none" w="med" len="med"/>
+                    </a:lnR>
+                    <a:lnT w="6350" cap="flat" cmpd="sng" algn="ctr">
+                      <a:solidFill>
+                        <a:srgbClr val="E3E8E9"/>
+                      </a:solidFill>
+                      <a:prstDash val="solid"/>
+                      <a:round/>
+                      <a:headEnd type="none" w="med" len="med"/>
+                      <a:tailEnd type="none" w="med" len="med"/>
+                    </a:lnT>
+                    <a:lnB w="6350" cap="flat" cmpd="sng" algn="ctr">
+                      <a:solidFill>
+                        <a:srgbClr val="E3E8E9"/>
+                      </a:solidFill>
+                      <a:prstDash val="solid"/>
+                      <a:round/>
+                      <a:headEnd type="none" w="med" len="med"/>
+                      <a:tailEnd type="none" w="med" len="med"/>
+                    </a:lnB>
+                    <a:solidFill>
+                      <a:srgbClr val="DCE8E2"/>
+                    </a:solidFill>
+                  </a:tcPr>
+                </a:tc>
+              </a:tr>
+            </a:tbl>
+          </a:graphicData>
+        </a:graphic>
+      </p:graphicFrame>
+      <p:sp>
+        <p:nvSpPr>
+          <p:cNvPr id="7" name="Text 4"/>
+          <p:cNvSpPr txBox="1"/>
+          <p:nvPr/>
+        </p:nvSpPr>
+        <p:spPr>
+          <a:xfrm>
+            <a:off x="457200" y="6355080"/>
+            <a:ext cx="11247120" cy="365760"/>
+          </a:xfrm>
+          <a:prstGeom prst="rect">
+            <a:avLst/>
+          </a:prstGeom>
+          <a:noFill/>
+          <a:ln/>
+        </p:spPr>
+        <p:txBody>
+          <a:bodyPr wrap="square" lIns="0" tIns="0" rIns="0" bIns="0" rtlCol="0" anchor="ctr"/>
+          <a:lstStyle/>
+          <a:p>
+            <a:pPr indent="0" marL="0">
+              <a:buNone/>
+            </a:pPr>
+            <a:r>
+              <a:rPr lang="en-US" sz="850" i="1" dirty="0">
+                <a:solidFill>
+                  <a:srgbClr val="8A979D"/>
+                </a:solidFill>
+                <a:latin typeface="Calibri" pitchFamily="34" charset="0"/>
+                <a:ea typeface="Calibri" pitchFamily="34" charset="-122"/>
+                <a:cs typeface="Calibri" pitchFamily="34" charset="-120"/>
+              </a:rPr>
+              <a:t>Fonte: Plano Integrado · aba 'Geral - Em análise' · coluna 'Valor Total' · itens de Cost Allocation = CAPEX, status 'Contar' (não inclui Parada Programada, status 'TA'). Lista completa disponível na planilha em anexo.</a:t>
+            </a:r>
+            <a:endParaRPr lang="en-US" sz="850" dirty="0"/>
+          </a:p>
+        </p:txBody>
+      </p:sp>
+    </p:spTree>
+  </p:cSld>
+  <p:clrMapOvr>
+    <a:masterClrMapping/>
+  </p:clrMapOvr>
+</p:sld>
+</file>
+
 <file path=ppt/slides/slide3.xml><?xml version="1.0" encoding="utf-8"?>
 <p:sld xmlns:a="http://schemas.openxmlformats.org/drawingml/2006/main" xmlns:r="http://schemas.openxmlformats.org/officeDocument/2006/relationships" xmlns:p="http://schemas.openxmlformats.org/presentationml/2006/main">
   <p:cSld name="Slide 3">

--- a/PRIO_Plano_Trabalho_CAPEX_2027.pptx
+++ b/PRIO_Plano_Trabalho_CAPEX_2027.pptx
@@ -314,10 +314,10 @@
                   <c:v>2.55</c:v>
                 </c:pt>
                 <c:pt idx="4">
-                  <c:v>13.98</c:v>
+                  <c:v>19.05</c:v>
                 </c:pt>
                 <c:pt idx="5">
-                  <c:v>4.28</c:v>
+                  <c:v>3.64</c:v>
                 </c:pt>
                 <c:pt idx="6">
                   <c:v>66.26</c:v>
@@ -11672,7 +11672,7 @@
                 <a:ea typeface="Cambria" pitchFamily="34" charset="-122"/>
                 <a:cs typeface="Cambria" pitchFamily="34" charset="-120"/>
               </a:rPr>
-              <a:t>US$ 14,0 mi</a:t>
+              <a:t>US$ 19,1 mi</a:t>
             </a:r>
             <a:endParaRPr lang="en-US" sz="3300" dirty="0"/>
           </a:p>
@@ -11811,7 +11811,7 @@
                 <a:ea typeface="Cambria" pitchFamily="34" charset="-122"/>
                 <a:cs typeface="Cambria" pitchFamily="34" charset="-120"/>
               </a:rPr>
-              <a:t>US$ 9,0 mi</a:t>
+              <a:t>US$ 14,0 mi</a:t>
             </a:r>
             <a:endParaRPr lang="en-US" sz="1800" dirty="0"/>
           </a:p>
@@ -12011,7 +12011,7 @@
                 <a:ea typeface="Cambria" pitchFamily="34" charset="-122"/>
                 <a:cs typeface="Cambria" pitchFamily="34" charset="-120"/>
               </a:rPr>
-              <a:t>US$ 3,8 mi</a:t>
+              <a:t>US$ 6,0 mi</a:t>
             </a:r>
             <a:endParaRPr lang="en-US" sz="1800" dirty="0"/>
           </a:p>
@@ -12111,7 +12111,7 @@
                 <a:ea typeface="Cambria" pitchFamily="34" charset="-122"/>
                 <a:cs typeface="Cambria" pitchFamily="34" charset="-120"/>
               </a:rPr>
-              <a:t>US$ 10,2 mi</a:t>
+              <a:t>US$ 13,1 mi</a:t>
             </a:r>
             <a:endParaRPr lang="en-US" sz="1800" dirty="0"/>
           </a:p>
@@ -12290,7 +12290,7 @@
                 <a:ea typeface="Calibri" pitchFamily="34" charset="-122"/>
                 <a:cs typeface="Calibri" pitchFamily="34" charset="-120"/>
               </a:rPr>
-              <a:t>US$ 5,6 mi</a:t>
+              <a:t>US$ 8,6 mi</a:t>
             </a:r>
             <a:endParaRPr lang="en-US" sz="1100" dirty="0"/>
           </a:p>
@@ -12427,6 +12427,104 @@
                 <a:ea typeface="Calibri" pitchFamily="34" charset="-122"/>
                 <a:cs typeface="Calibri" pitchFamily="34" charset="-120"/>
               </a:rPr>
+              <a:t>P&amp;Q - Processos</a:t>
+            </a:r>
+            <a:endParaRPr lang="en-US" sz="1100" dirty="0"/>
+          </a:p>
+        </p:txBody>
+      </p:sp>
+      <p:sp>
+        <p:nvSpPr>
+          <p:cNvPr id="30" name="Text 28"/>
+          <p:cNvSpPr txBox="1"/>
+          <p:nvPr/>
+        </p:nvSpPr>
+        <p:spPr>
+          <a:xfrm>
+            <a:off x="3773729" y="4133088"/>
+            <a:ext cx="1815998" cy="365760"/>
+          </a:xfrm>
+          <a:prstGeom prst="rect">
+            <a:avLst/>
+          </a:prstGeom>
+          <a:noFill/>
+          <a:ln/>
+        </p:spPr>
+        <p:txBody>
+          <a:bodyPr wrap="square" lIns="0" tIns="0" rIns="0" bIns="0" rtlCol="0" anchor="ctr"/>
+          <a:lstStyle/>
+          <a:p>
+            <a:pPr algn="r" indent="0" marL="0">
+              <a:buNone/>
+            </a:pPr>
+            <a:r>
+              <a:rPr lang="en-US" sz="1100" b="1" dirty="0">
+                <a:solidFill>
+                  <a:srgbClr val="0B2A3D"/>
+                </a:solidFill>
+                <a:latin typeface="Calibri" pitchFamily="34" charset="0"/>
+                <a:ea typeface="Calibri" pitchFamily="34" charset="-122"/>
+                <a:cs typeface="Calibri" pitchFamily="34" charset="-120"/>
+              </a:rPr>
+              <a:t>US$ 2,1 mi</a:t>
+            </a:r>
+            <a:endParaRPr lang="en-US" sz="1100" dirty="0"/>
+          </a:p>
+        </p:txBody>
+      </p:sp>
+      <p:sp>
+        <p:nvSpPr>
+          <p:cNvPr id="31" name="Shape 29"/>
+          <p:cNvSpPr/>
+          <p:nvPr/>
+        </p:nvSpPr>
+        <p:spPr>
+          <a:xfrm>
+            <a:off x="457200" y="4498848"/>
+            <a:ext cx="5349240" cy="365760"/>
+          </a:xfrm>
+          <a:prstGeom prst="rect">
+            <a:avLst/>
+          </a:prstGeom>
+          <a:solidFill>
+            <a:srgbClr val="F0F4F5"/>
+          </a:solidFill>
+          <a:ln/>
+        </p:spPr>
+      </p:sp>
+      <p:sp>
+        <p:nvSpPr>
+          <p:cNvPr id="32" name="Text 30"/>
+          <p:cNvSpPr txBox="1"/>
+          <p:nvPr/>
+        </p:nvSpPr>
+        <p:spPr>
+          <a:xfrm>
+            <a:off x="566928" y="4498848"/>
+            <a:ext cx="3316529" cy="365760"/>
+          </a:xfrm>
+          <a:prstGeom prst="rect">
+            <a:avLst/>
+          </a:prstGeom>
+          <a:noFill/>
+          <a:ln/>
+        </p:spPr>
+        <p:txBody>
+          <a:bodyPr wrap="square" lIns="0" tIns="0" rIns="0" bIns="0" rtlCol="0" anchor="ctr"/>
+          <a:lstStyle/>
+          <a:p>
+            <a:pPr indent="0" marL="0">
+              <a:buNone/>
+            </a:pPr>
+            <a:r>
+              <a:rPr lang="en-US" sz="1100" dirty="0">
+                <a:solidFill>
+                  <a:srgbClr val="1C2B33"/>
+                </a:solidFill>
+                <a:latin typeface="Calibri" pitchFamily="34" charset="0"/>
+                <a:ea typeface="Calibri" pitchFamily="34" charset="-122"/>
+                <a:cs typeface="Calibri" pitchFamily="34" charset="-120"/>
+              </a:rPr>
               <a:t>Projetos</a:t>
             </a:r>
             <a:endParaRPr lang="en-US" sz="1100" dirty="0"/>
@@ -12435,13 +12533,13 @@
       </p:sp>
       <p:sp>
         <p:nvSpPr>
-          <p:cNvPr id="30" name="Text 28"/>
+          <p:cNvPr id="33" name="Text 31"/>
           <p:cNvSpPr txBox="1"/>
           <p:nvPr/>
         </p:nvSpPr>
         <p:spPr>
           <a:xfrm>
-            <a:off x="3773729" y="4133088"/>
+            <a:off x="3773729" y="4498848"/>
             <a:ext cx="1815998" cy="365760"/>
           </a:xfrm>
           <a:prstGeom prst="rect">
@@ -12474,33 +12572,13 @@
       </p:sp>
       <p:sp>
         <p:nvSpPr>
-          <p:cNvPr id="31" name="Shape 29"/>
-          <p:cNvSpPr/>
+          <p:cNvPr id="34" name="Text 32"/>
+          <p:cNvSpPr txBox="1"/>
           <p:nvPr/>
         </p:nvSpPr>
         <p:spPr>
           <a:xfrm>
-            <a:off x="457200" y="4498848"/>
-            <a:ext cx="5349240" cy="365760"/>
-          </a:xfrm>
-          <a:prstGeom prst="rect">
-            <a:avLst/>
-          </a:prstGeom>
-          <a:solidFill>
-            <a:srgbClr val="F0F4F5"/>
-          </a:solidFill>
-          <a:ln/>
-        </p:spPr>
-      </p:sp>
-      <p:sp>
-        <p:nvSpPr>
-          <p:cNvPr id="32" name="Text 30"/>
-          <p:cNvSpPr txBox="1"/>
-          <p:nvPr/>
-        </p:nvSpPr>
-        <p:spPr>
-          <a:xfrm>
-            <a:off x="566928" y="4498848"/>
+            <a:off x="566928" y="4864608"/>
             <a:ext cx="3316529" cy="365760"/>
           </a:xfrm>
           <a:prstGeom prst="rect">
@@ -12533,13 +12611,13 @@
       </p:sp>
       <p:sp>
         <p:nvSpPr>
-          <p:cNvPr id="33" name="Text 31"/>
+          <p:cNvPr id="35" name="Text 33"/>
           <p:cNvSpPr txBox="1"/>
           <p:nvPr/>
         </p:nvSpPr>
         <p:spPr>
           <a:xfrm>
-            <a:off x="3773729" y="4498848"/>
+            <a:off x="3773729" y="4864608"/>
             <a:ext cx="1815998" cy="365760"/>
           </a:xfrm>
           <a:prstGeom prst="rect">
@@ -12572,13 +12650,33 @@
       </p:sp>
       <p:sp>
         <p:nvSpPr>
-          <p:cNvPr id="34" name="Text 32"/>
+          <p:cNvPr id="36" name="Shape 34"/>
+          <p:cNvSpPr/>
+          <p:nvPr/>
+        </p:nvSpPr>
+        <p:spPr>
+          <a:xfrm>
+            <a:off x="457200" y="5230368"/>
+            <a:ext cx="5349240" cy="365760"/>
+          </a:xfrm>
+          <a:prstGeom prst="rect">
+            <a:avLst/>
+          </a:prstGeom>
+          <a:solidFill>
+            <a:srgbClr val="F0F4F5"/>
+          </a:solidFill>
+          <a:ln/>
+        </p:spPr>
+      </p:sp>
+      <p:sp>
+        <p:nvSpPr>
+          <p:cNvPr id="37" name="Text 35"/>
           <p:cNvSpPr txBox="1"/>
           <p:nvPr/>
         </p:nvSpPr>
         <p:spPr>
           <a:xfrm>
-            <a:off x="566928" y="4864608"/>
+            <a:off x="566928" y="5230368"/>
             <a:ext cx="3316529" cy="365760"/>
           </a:xfrm>
           <a:prstGeom prst="rect">
@@ -12611,13 +12709,13 @@
       </p:sp>
       <p:sp>
         <p:nvSpPr>
-          <p:cNvPr id="35" name="Text 33"/>
+          <p:cNvPr id="38" name="Text 36"/>
           <p:cNvSpPr txBox="1"/>
           <p:nvPr/>
         </p:nvSpPr>
         <p:spPr>
           <a:xfrm>
-            <a:off x="3773729" y="4864608"/>
+            <a:off x="3773729" y="5230368"/>
             <a:ext cx="1815998" cy="365760"/>
           </a:xfrm>
           <a:prstGeom prst="rect">
@@ -12650,33 +12748,13 @@
       </p:sp>
       <p:sp>
         <p:nvSpPr>
-          <p:cNvPr id="36" name="Shape 34"/>
-          <p:cNvSpPr/>
+          <p:cNvPr id="39" name="Text 37"/>
+          <p:cNvSpPr txBox="1"/>
           <p:nvPr/>
         </p:nvSpPr>
         <p:spPr>
           <a:xfrm>
-            <a:off x="457200" y="5230368"/>
-            <a:ext cx="5349240" cy="365760"/>
-          </a:xfrm>
-          <a:prstGeom prst="rect">
-            <a:avLst/>
-          </a:prstGeom>
-          <a:solidFill>
-            <a:srgbClr val="F0F4F5"/>
-          </a:solidFill>
-          <a:ln/>
-        </p:spPr>
-      </p:sp>
-      <p:sp>
-        <p:nvSpPr>
-          <p:cNvPr id="37" name="Text 35"/>
-          <p:cNvSpPr txBox="1"/>
-          <p:nvPr/>
-        </p:nvSpPr>
-        <p:spPr>
-          <a:xfrm>
-            <a:off x="566928" y="5230368"/>
+            <a:off x="566928" y="5596128"/>
             <a:ext cx="3316529" cy="365760"/>
           </a:xfrm>
           <a:prstGeom prst="rect">
@@ -12709,84 +12787,6 @@
       </p:sp>
       <p:sp>
         <p:nvSpPr>
-          <p:cNvPr id="38" name="Text 36"/>
-          <p:cNvSpPr txBox="1"/>
-          <p:nvPr/>
-        </p:nvSpPr>
-        <p:spPr>
-          <a:xfrm>
-            <a:off x="3773729" y="5230368"/>
-            <a:ext cx="1815998" cy="365760"/>
-          </a:xfrm>
-          <a:prstGeom prst="rect">
-            <a:avLst/>
-          </a:prstGeom>
-          <a:noFill/>
-          <a:ln/>
-        </p:spPr>
-        <p:txBody>
-          <a:bodyPr wrap="square" lIns="0" tIns="0" rIns="0" bIns="0" rtlCol="0" anchor="ctr"/>
-          <a:lstStyle/>
-          <a:p>
-            <a:pPr algn="r" indent="0" marL="0">
-              <a:buNone/>
-            </a:pPr>
-            <a:r>
-              <a:rPr lang="en-US" sz="1100" b="1" dirty="0">
-                <a:solidFill>
-                  <a:srgbClr val="0B2A3D"/>
-                </a:solidFill>
-                <a:latin typeface="Calibri" pitchFamily="34" charset="0"/>
-                <a:ea typeface="Calibri" pitchFamily="34" charset="-122"/>
-                <a:cs typeface="Calibri" pitchFamily="34" charset="-120"/>
-              </a:rPr>
-              <a:t>US$ 192,5 mil</a:t>
-            </a:r>
-            <a:endParaRPr lang="en-US" sz="1100" dirty="0"/>
-          </a:p>
-        </p:txBody>
-      </p:sp>
-      <p:sp>
-        <p:nvSpPr>
-          <p:cNvPr id="39" name="Text 37"/>
-          <p:cNvSpPr txBox="1"/>
-          <p:nvPr/>
-        </p:nvSpPr>
-        <p:spPr>
-          <a:xfrm>
-            <a:off x="566928" y="5596128"/>
-            <a:ext cx="3316529" cy="365760"/>
-          </a:xfrm>
-          <a:prstGeom prst="rect">
-            <a:avLst/>
-          </a:prstGeom>
-          <a:noFill/>
-          <a:ln/>
-        </p:spPr>
-        <p:txBody>
-          <a:bodyPr wrap="square" lIns="0" tIns="0" rIns="0" bIns="0" rtlCol="0" anchor="ctr"/>
-          <a:lstStyle/>
-          <a:p>
-            <a:pPr indent="0" marL="0">
-              <a:buNone/>
-            </a:pPr>
-            <a:r>
-              <a:rPr lang="en-US" sz="1100" dirty="0">
-                <a:solidFill>
-                  <a:srgbClr val="1C2B33"/>
-                </a:solidFill>
-                <a:latin typeface="Calibri" pitchFamily="34" charset="0"/>
-                <a:ea typeface="Calibri" pitchFamily="34" charset="-122"/>
-                <a:cs typeface="Calibri" pitchFamily="34" charset="-120"/>
-              </a:rPr>
-              <a:t>P&amp;Q - Processos</a:t>
-            </a:r>
-            <a:endParaRPr lang="en-US" sz="1100" dirty="0"/>
-          </a:p>
-        </p:txBody>
-      </p:sp>
-      <p:sp>
-        <p:nvSpPr>
           <p:cNvPr id="40" name="Text 38"/>
           <p:cNvSpPr txBox="1"/>
           <p:nvPr/>
@@ -12818,7 +12818,7 @@
                 <a:ea typeface="Calibri" pitchFamily="34" charset="-122"/>
                 <a:cs typeface="Calibri" pitchFamily="34" charset="-120"/>
               </a:rPr>
-              <a:t>US$ 113,7 mil</a:t>
+              <a:t>US$ 192,5 mil</a:t>
             </a:r>
             <a:endParaRPr lang="en-US" sz="1100" dirty="0"/>
           </a:p>
@@ -12919,7 +12919,7 @@
                 <a:ea typeface="Calibri" pitchFamily="34" charset="-122"/>
                 <a:cs typeface="Calibri" pitchFamily="34" charset="-120"/>
               </a:rPr>
-              <a:t>Eficiência de Produção</a:t>
+              <a:t>Rotina Operacional</a:t>
             </a:r>
             <a:endParaRPr lang="en-US" sz="1100" dirty="0"/>
           </a:p>
@@ -12958,7 +12958,7 @@
                 <a:ea typeface="Calibri" pitchFamily="34" charset="-122"/>
                 <a:cs typeface="Calibri" pitchFamily="34" charset="-120"/>
               </a:rPr>
-              <a:t>US$ 6,0 mi</a:t>
+              <a:t>US$ 8,5 mi</a:t>
             </a:r>
             <a:endParaRPr lang="en-US" sz="1100" dirty="0"/>
           </a:p>
@@ -13017,7 +13017,7 @@
                 <a:ea typeface="Calibri" pitchFamily="34" charset="-122"/>
                 <a:cs typeface="Calibri" pitchFamily="34" charset="-120"/>
               </a:rPr>
-              <a:t>Rotina Operacional</a:t>
+              <a:t>Eficiência de Produção</a:t>
             </a:r>
             <a:endParaRPr lang="en-US" sz="1100" dirty="0"/>
           </a:p>
@@ -13056,7 +13056,7 @@
                 <a:ea typeface="Calibri" pitchFamily="34" charset="-122"/>
                 <a:cs typeface="Calibri" pitchFamily="34" charset="-120"/>
               </a:rPr>
-              <a:t>US$ 5,6 mi</a:t>
+              <a:t>US$ 6,1 mi</a:t>
             </a:r>
             <a:endParaRPr lang="en-US" sz="1100" dirty="0"/>
           </a:p>
@@ -13134,7 +13134,7 @@
                 <a:ea typeface="Calibri" pitchFamily="34" charset="-122"/>
                 <a:cs typeface="Calibri" pitchFamily="34" charset="-120"/>
               </a:rPr>
-              <a:t>US$ 1,3 mi</a:t>
+              <a:t>US$ 3,3 mi</a:t>
             </a:r>
             <a:endParaRPr lang="en-US" sz="1100" dirty="0"/>
           </a:p>
@@ -13433,7 +13433,7 @@
                 <a:ea typeface="Calibri" pitchFamily="34" charset="-122"/>
                 <a:cs typeface="Calibri" pitchFamily="34" charset="-120"/>
               </a:rPr>
-              <a:t>Principais escopos por valor · 59 itens no total</a:t>
+              <a:t>Principais escopos por valor · 70 itens no total</a:t>
             </a:r>
             <a:endParaRPr lang="en-US" sz="1250" dirty="0"/>
           </a:p>
@@ -14033,6 +14033,280 @@
                           <a:ea typeface="Calibri" pitchFamily="34" charset="-122"/>
                           <a:cs typeface="Calibri" pitchFamily="34" charset="-120"/>
                         </a:rPr>
+                        <a:t>Upgrade metering de gás e Diesel- GTGs</a:t>
+                      </a:r>
+                      <a:endParaRPr lang="en-US" sz="1000" dirty="0">
+                        <a:latin typeface="Calibri" charset="0"/>
+                        <a:ea typeface="Calibri" charset="0"/>
+                        <a:cs typeface="Calibri" charset="0"/>
+                      </a:endParaRPr>
+                    </a:p>
+                  </a:txBody>
+                  <a:tcPr marL="91440" marR="91440" marT="45720" marB="45720" anchor="ctr">
+                    <a:lnL w="6350" cap="flat" cmpd="sng" algn="ctr">
+                      <a:solidFill>
+                        <a:srgbClr val="E3E8E9"/>
+                      </a:solidFill>
+                      <a:prstDash val="solid"/>
+                      <a:round/>
+                      <a:headEnd type="none" w="med" len="med"/>
+                      <a:tailEnd type="none" w="med" len="med"/>
+                    </a:lnL>
+                    <a:lnR w="6350" cap="flat" cmpd="sng" algn="ctr">
+                      <a:solidFill>
+                        <a:srgbClr val="E3E8E9"/>
+                      </a:solidFill>
+                      <a:prstDash val="solid"/>
+                      <a:round/>
+                      <a:headEnd type="none" w="med" len="med"/>
+                      <a:tailEnd type="none" w="med" len="med"/>
+                    </a:lnR>
+                    <a:lnT w="6350" cap="flat" cmpd="sng" algn="ctr">
+                      <a:solidFill>
+                        <a:srgbClr val="E3E8E9"/>
+                      </a:solidFill>
+                      <a:prstDash val="solid"/>
+                      <a:round/>
+                      <a:headEnd type="none" w="med" len="med"/>
+                      <a:tailEnd type="none" w="med" len="med"/>
+                    </a:lnT>
+                    <a:lnB w="6350" cap="flat" cmpd="sng" algn="ctr">
+                      <a:solidFill>
+                        <a:srgbClr val="E3E8E9"/>
+                      </a:solidFill>
+                      <a:prstDash val="solid"/>
+                      <a:round/>
+                      <a:headEnd type="none" w="med" len="med"/>
+                      <a:tailEnd type="none" w="med" len="med"/>
+                    </a:lnB>
+                    <a:solidFill>
+                      <a:srgbClr val="F0F4F5"/>
+                    </a:solidFill>
+                  </a:tcPr>
+                </a:tc>
+                <a:tc>
+                  <a:txBody>
+                    <a:bodyPr/>
+                    <a:lstStyle/>
+                    <a:p>
+                      <a:pPr indent="0" marL="0">
+                        <a:buNone/>
+                      </a:pPr>
+                      <a:r>
+                        <a:rPr lang="en-US" sz="950" dirty="0">
+                          <a:solidFill>
+                            <a:srgbClr val="5B6B73"/>
+                          </a:solidFill>
+                          <a:latin typeface="Calibri" pitchFamily="34" charset="0"/>
+                          <a:ea typeface="Calibri" pitchFamily="34" charset="-122"/>
+                          <a:cs typeface="Calibri" pitchFamily="34" charset="-120"/>
+                        </a:rPr>
+                        <a:t>Rotina Operacional</a:t>
+                      </a:r>
+                      <a:endParaRPr lang="en-US" sz="950" dirty="0">
+                        <a:latin typeface="Calibri" charset="0"/>
+                        <a:ea typeface="Calibri" charset="0"/>
+                        <a:cs typeface="Calibri" charset="0"/>
+                      </a:endParaRPr>
+                    </a:p>
+                  </a:txBody>
+                  <a:tcPr marL="91440" marR="91440" marT="45720" marB="45720" anchor="ctr">
+                    <a:lnL w="6350" cap="flat" cmpd="sng" algn="ctr">
+                      <a:solidFill>
+                        <a:srgbClr val="E3E8E9"/>
+                      </a:solidFill>
+                      <a:prstDash val="solid"/>
+                      <a:round/>
+                      <a:headEnd type="none" w="med" len="med"/>
+                      <a:tailEnd type="none" w="med" len="med"/>
+                    </a:lnL>
+                    <a:lnR w="6350" cap="flat" cmpd="sng" algn="ctr">
+                      <a:solidFill>
+                        <a:srgbClr val="E3E8E9"/>
+                      </a:solidFill>
+                      <a:prstDash val="solid"/>
+                      <a:round/>
+                      <a:headEnd type="none" w="med" len="med"/>
+                      <a:tailEnd type="none" w="med" len="med"/>
+                    </a:lnR>
+                    <a:lnT w="6350" cap="flat" cmpd="sng" algn="ctr">
+                      <a:solidFill>
+                        <a:srgbClr val="E3E8E9"/>
+                      </a:solidFill>
+                      <a:prstDash val="solid"/>
+                      <a:round/>
+                      <a:headEnd type="none" w="med" len="med"/>
+                      <a:tailEnd type="none" w="med" len="med"/>
+                    </a:lnT>
+                    <a:lnB w="6350" cap="flat" cmpd="sng" algn="ctr">
+                      <a:solidFill>
+                        <a:srgbClr val="E3E8E9"/>
+                      </a:solidFill>
+                      <a:prstDash val="solid"/>
+                      <a:round/>
+                      <a:headEnd type="none" w="med" len="med"/>
+                      <a:tailEnd type="none" w="med" len="med"/>
+                    </a:lnB>
+                    <a:solidFill>
+                      <a:srgbClr val="F0F4F5"/>
+                    </a:solidFill>
+                  </a:tcPr>
+                </a:tc>
+                <a:tc>
+                  <a:txBody>
+                    <a:bodyPr/>
+                    <a:lstStyle/>
+                    <a:p>
+                      <a:pPr indent="0" marL="0">
+                        <a:buNone/>
+                      </a:pPr>
+                      <a:r>
+                        <a:rPr lang="en-US" sz="950" dirty="0">
+                          <a:solidFill>
+                            <a:srgbClr val="5B6B73"/>
+                          </a:solidFill>
+                          <a:latin typeface="Calibri" pitchFamily="34" charset="0"/>
+                          <a:ea typeface="Calibri" pitchFamily="34" charset="-122"/>
+                          <a:cs typeface="Calibri" pitchFamily="34" charset="-120"/>
+                        </a:rPr>
+                        <a:t>EIM - Manutenção &amp; Integridade</a:t>
+                      </a:r>
+                      <a:endParaRPr lang="en-US" sz="950" dirty="0">
+                        <a:latin typeface="Calibri" charset="0"/>
+                        <a:ea typeface="Calibri" charset="0"/>
+                        <a:cs typeface="Calibri" charset="0"/>
+                      </a:endParaRPr>
+                    </a:p>
+                  </a:txBody>
+                  <a:tcPr marL="91440" marR="91440" marT="45720" marB="45720" anchor="ctr">
+                    <a:lnL w="6350" cap="flat" cmpd="sng" algn="ctr">
+                      <a:solidFill>
+                        <a:srgbClr val="E3E8E9"/>
+                      </a:solidFill>
+                      <a:prstDash val="solid"/>
+                      <a:round/>
+                      <a:headEnd type="none" w="med" len="med"/>
+                      <a:tailEnd type="none" w="med" len="med"/>
+                    </a:lnL>
+                    <a:lnR w="6350" cap="flat" cmpd="sng" algn="ctr">
+                      <a:solidFill>
+                        <a:srgbClr val="E3E8E9"/>
+                      </a:solidFill>
+                      <a:prstDash val="solid"/>
+                      <a:round/>
+                      <a:headEnd type="none" w="med" len="med"/>
+                      <a:tailEnd type="none" w="med" len="med"/>
+                    </a:lnR>
+                    <a:lnT w="6350" cap="flat" cmpd="sng" algn="ctr">
+                      <a:solidFill>
+                        <a:srgbClr val="E3E8E9"/>
+                      </a:solidFill>
+                      <a:prstDash val="solid"/>
+                      <a:round/>
+                      <a:headEnd type="none" w="med" len="med"/>
+                      <a:tailEnd type="none" w="med" len="med"/>
+                    </a:lnT>
+                    <a:lnB w="6350" cap="flat" cmpd="sng" algn="ctr">
+                      <a:solidFill>
+                        <a:srgbClr val="E3E8E9"/>
+                      </a:solidFill>
+                      <a:prstDash val="solid"/>
+                      <a:round/>
+                      <a:headEnd type="none" w="med" len="med"/>
+                      <a:tailEnd type="none" w="med" len="med"/>
+                    </a:lnB>
+                    <a:solidFill>
+                      <a:srgbClr val="F0F4F5"/>
+                    </a:solidFill>
+                  </a:tcPr>
+                </a:tc>
+                <a:tc>
+                  <a:txBody>
+                    <a:bodyPr/>
+                    <a:lstStyle/>
+                    <a:p>
+                      <a:pPr algn="r" indent="0" marL="0">
+                        <a:buNone/>
+                      </a:pPr>
+                      <a:r>
+                        <a:rPr lang="en-US" sz="1000" b="1" dirty="0">
+                          <a:solidFill>
+                            <a:srgbClr val="0B2A3D"/>
+                          </a:solidFill>
+                          <a:latin typeface="Calibri" pitchFamily="34" charset="0"/>
+                          <a:ea typeface="Calibri" pitchFamily="34" charset="-122"/>
+                          <a:cs typeface="Calibri" pitchFamily="34" charset="-120"/>
+                        </a:rPr>
+                        <a:t>US$ 1,7 mi</a:t>
+                      </a:r>
+                      <a:endParaRPr lang="en-US" sz="1000" dirty="0">
+                        <a:latin typeface="Calibri" charset="0"/>
+                        <a:ea typeface="Calibri" charset="0"/>
+                        <a:cs typeface="Calibri" charset="0"/>
+                      </a:endParaRPr>
+                    </a:p>
+                  </a:txBody>
+                  <a:tcPr marL="91440" marR="91440" marT="45720" marB="45720" anchor="ctr">
+                    <a:lnL w="6350" cap="flat" cmpd="sng" algn="ctr">
+                      <a:solidFill>
+                        <a:srgbClr val="E3E8E9"/>
+                      </a:solidFill>
+                      <a:prstDash val="solid"/>
+                      <a:round/>
+                      <a:headEnd type="none" w="med" len="med"/>
+                      <a:tailEnd type="none" w="med" len="med"/>
+                    </a:lnL>
+                    <a:lnR w="6350" cap="flat" cmpd="sng" algn="ctr">
+                      <a:solidFill>
+                        <a:srgbClr val="E3E8E9"/>
+                      </a:solidFill>
+                      <a:prstDash val="solid"/>
+                      <a:round/>
+                      <a:headEnd type="none" w="med" len="med"/>
+                      <a:tailEnd type="none" w="med" len="med"/>
+                    </a:lnR>
+                    <a:lnT w="6350" cap="flat" cmpd="sng" algn="ctr">
+                      <a:solidFill>
+                        <a:srgbClr val="E3E8E9"/>
+                      </a:solidFill>
+                      <a:prstDash val="solid"/>
+                      <a:round/>
+                      <a:headEnd type="none" w="med" len="med"/>
+                      <a:tailEnd type="none" w="med" len="med"/>
+                    </a:lnT>
+                    <a:lnB w="6350" cap="flat" cmpd="sng" algn="ctr">
+                      <a:solidFill>
+                        <a:srgbClr val="E3E8E9"/>
+                      </a:solidFill>
+                      <a:prstDash val="solid"/>
+                      <a:round/>
+                      <a:headEnd type="none" w="med" len="med"/>
+                      <a:tailEnd type="none" w="med" len="med"/>
+                    </a:lnB>
+                    <a:solidFill>
+                      <a:srgbClr val="F0F4F5"/>
+                    </a:solidFill>
+                  </a:tcPr>
+                </a:tc>
+              </a:tr>
+              <a:tr h="288036">
+                <a:tc>
+                  <a:txBody>
+                    <a:bodyPr/>
+                    <a:lstStyle/>
+                    <a:p>
+                      <a:pPr indent="0" marL="0">
+                        <a:buNone/>
+                      </a:pPr>
+                      <a:r>
+                        <a:rPr lang="en-US" sz="1000" dirty="0">
+                          <a:solidFill>
+                            <a:srgbClr val="1C2B33"/>
+                          </a:solidFill>
+                          <a:latin typeface="Calibri" pitchFamily="34" charset="0"/>
+                          <a:ea typeface="Calibri" pitchFamily="34" charset="-122"/>
+                          <a:cs typeface="Calibri" pitchFamily="34" charset="-120"/>
+                        </a:rPr>
                         <a:t>TA - Mecânica</a:t>
                       </a:r>
                       <a:endParaRPr lang="en-US" sz="1000" dirty="0">
@@ -14080,7 +14354,7 @@
                       <a:tailEnd type="none" w="med" len="med"/>
                     </a:lnB>
                     <a:solidFill>
-                      <a:srgbClr val="F0F4F5"/>
+                      <a:srgbClr val="FFFFFF"/>
                     </a:solidFill>
                   </a:tcPr>
                 </a:tc>
@@ -14148,7 +14422,7 @@
                       <a:tailEnd type="none" w="med" len="med"/>
                     </a:lnB>
                     <a:solidFill>
-                      <a:srgbClr val="F0F4F5"/>
+                      <a:srgbClr val="FFFFFF"/>
                     </a:solidFill>
                   </a:tcPr>
                 </a:tc>
@@ -14216,6 +14490,280 @@
                       <a:tailEnd type="none" w="med" len="med"/>
                     </a:lnB>
                     <a:solidFill>
+                      <a:srgbClr val="FFFFFF"/>
+                    </a:solidFill>
+                  </a:tcPr>
+                </a:tc>
+                <a:tc>
+                  <a:txBody>
+                    <a:bodyPr/>
+                    <a:lstStyle/>
+                    <a:p>
+                      <a:pPr algn="r" indent="0" marL="0">
+                        <a:buNone/>
+                      </a:pPr>
+                      <a:r>
+                        <a:rPr lang="en-US" sz="1000" b="1" dirty="0">
+                          <a:solidFill>
+                            <a:srgbClr val="0B2A3D"/>
+                          </a:solidFill>
+                          <a:latin typeface="Calibri" pitchFamily="34" charset="0"/>
+                          <a:ea typeface="Calibri" pitchFamily="34" charset="-122"/>
+                          <a:cs typeface="Calibri" pitchFamily="34" charset="-120"/>
+                        </a:rPr>
+                        <a:t>US$ 1,5 mi</a:t>
+                      </a:r>
+                      <a:endParaRPr lang="en-US" sz="1000" dirty="0">
+                        <a:latin typeface="Calibri" charset="0"/>
+                        <a:ea typeface="Calibri" charset="0"/>
+                        <a:cs typeface="Calibri" charset="0"/>
+                      </a:endParaRPr>
+                    </a:p>
+                  </a:txBody>
+                  <a:tcPr marL="91440" marR="91440" marT="45720" marB="45720" anchor="ctr">
+                    <a:lnL w="6350" cap="flat" cmpd="sng" algn="ctr">
+                      <a:solidFill>
+                        <a:srgbClr val="E3E8E9"/>
+                      </a:solidFill>
+                      <a:prstDash val="solid"/>
+                      <a:round/>
+                      <a:headEnd type="none" w="med" len="med"/>
+                      <a:tailEnd type="none" w="med" len="med"/>
+                    </a:lnL>
+                    <a:lnR w="6350" cap="flat" cmpd="sng" algn="ctr">
+                      <a:solidFill>
+                        <a:srgbClr val="E3E8E9"/>
+                      </a:solidFill>
+                      <a:prstDash val="solid"/>
+                      <a:round/>
+                      <a:headEnd type="none" w="med" len="med"/>
+                      <a:tailEnd type="none" w="med" len="med"/>
+                    </a:lnR>
+                    <a:lnT w="6350" cap="flat" cmpd="sng" algn="ctr">
+                      <a:solidFill>
+                        <a:srgbClr val="E3E8E9"/>
+                      </a:solidFill>
+                      <a:prstDash val="solid"/>
+                      <a:round/>
+                      <a:headEnd type="none" w="med" len="med"/>
+                      <a:tailEnd type="none" w="med" len="med"/>
+                    </a:lnT>
+                    <a:lnB w="6350" cap="flat" cmpd="sng" algn="ctr">
+                      <a:solidFill>
+                        <a:srgbClr val="E3E8E9"/>
+                      </a:solidFill>
+                      <a:prstDash val="solid"/>
+                      <a:round/>
+                      <a:headEnd type="none" w="med" len="med"/>
+                      <a:tailEnd type="none" w="med" len="med"/>
+                    </a:lnB>
+                    <a:solidFill>
+                      <a:srgbClr val="FFFFFF"/>
+                    </a:solidFill>
+                  </a:tcPr>
+                </a:tc>
+              </a:tr>
+              <a:tr h="288036">
+                <a:tc>
+                  <a:txBody>
+                    <a:bodyPr/>
+                    <a:lstStyle/>
+                    <a:p>
+                      <a:pPr indent="0" marL="0">
+                        <a:buNone/>
+                      </a:pPr>
+                      <a:r>
+                        <a:rPr lang="en-US" sz="1000" dirty="0">
+                          <a:solidFill>
+                            <a:srgbClr val="1C2B33"/>
+                          </a:solidFill>
+                          <a:latin typeface="Calibri" pitchFamily="34" charset="0"/>
+                          <a:ea typeface="Calibri" pitchFamily="34" charset="-122"/>
+                          <a:cs typeface="Calibri" pitchFamily="34" charset="-120"/>
+                        </a:rPr>
+                        <a:t>TA - Swivel - Pacote Hidráulico (OneSubsea)</a:t>
+                      </a:r>
+                      <a:endParaRPr lang="en-US" sz="1000" dirty="0">
+                        <a:latin typeface="Calibri" charset="0"/>
+                        <a:ea typeface="Calibri" charset="0"/>
+                        <a:cs typeface="Calibri" charset="0"/>
+                      </a:endParaRPr>
+                    </a:p>
+                  </a:txBody>
+                  <a:tcPr marL="91440" marR="91440" marT="45720" marB="45720" anchor="ctr">
+                    <a:lnL w="6350" cap="flat" cmpd="sng" algn="ctr">
+                      <a:solidFill>
+                        <a:srgbClr val="E3E8E9"/>
+                      </a:solidFill>
+                      <a:prstDash val="solid"/>
+                      <a:round/>
+                      <a:headEnd type="none" w="med" len="med"/>
+                      <a:tailEnd type="none" w="med" len="med"/>
+                    </a:lnL>
+                    <a:lnR w="6350" cap="flat" cmpd="sng" algn="ctr">
+                      <a:solidFill>
+                        <a:srgbClr val="E3E8E9"/>
+                      </a:solidFill>
+                      <a:prstDash val="solid"/>
+                      <a:round/>
+                      <a:headEnd type="none" w="med" len="med"/>
+                      <a:tailEnd type="none" w="med" len="med"/>
+                    </a:lnR>
+                    <a:lnT w="6350" cap="flat" cmpd="sng" algn="ctr">
+                      <a:solidFill>
+                        <a:srgbClr val="E3E8E9"/>
+                      </a:solidFill>
+                      <a:prstDash val="solid"/>
+                      <a:round/>
+                      <a:headEnd type="none" w="med" len="med"/>
+                      <a:tailEnd type="none" w="med" len="med"/>
+                    </a:lnT>
+                    <a:lnB w="6350" cap="flat" cmpd="sng" algn="ctr">
+                      <a:solidFill>
+                        <a:srgbClr val="E3E8E9"/>
+                      </a:solidFill>
+                      <a:prstDash val="solid"/>
+                      <a:round/>
+                      <a:headEnd type="none" w="med" len="med"/>
+                      <a:tailEnd type="none" w="med" len="med"/>
+                    </a:lnB>
+                    <a:solidFill>
+                      <a:srgbClr val="F0F4F5"/>
+                    </a:solidFill>
+                  </a:tcPr>
+                </a:tc>
+                <a:tc>
+                  <a:txBody>
+                    <a:bodyPr/>
+                    <a:lstStyle/>
+                    <a:p>
+                      <a:pPr indent="0" marL="0">
+                        <a:buNone/>
+                      </a:pPr>
+                      <a:r>
+                        <a:rPr lang="en-US" sz="950" dirty="0">
+                          <a:solidFill>
+                            <a:srgbClr val="5B6B73"/>
+                          </a:solidFill>
+                          <a:latin typeface="Calibri" pitchFamily="34" charset="0"/>
+                          <a:ea typeface="Calibri" pitchFamily="34" charset="-122"/>
+                          <a:cs typeface="Calibri" pitchFamily="34" charset="-120"/>
+                        </a:rPr>
+                        <a:t>Integridade e Regulatório</a:t>
+                      </a:r>
+                      <a:endParaRPr lang="en-US" sz="950" dirty="0">
+                        <a:latin typeface="Calibri" charset="0"/>
+                        <a:ea typeface="Calibri" charset="0"/>
+                        <a:cs typeface="Calibri" charset="0"/>
+                      </a:endParaRPr>
+                    </a:p>
+                  </a:txBody>
+                  <a:tcPr marL="91440" marR="91440" marT="45720" marB="45720" anchor="ctr">
+                    <a:lnL w="6350" cap="flat" cmpd="sng" algn="ctr">
+                      <a:solidFill>
+                        <a:srgbClr val="E3E8E9"/>
+                      </a:solidFill>
+                      <a:prstDash val="solid"/>
+                      <a:round/>
+                      <a:headEnd type="none" w="med" len="med"/>
+                      <a:tailEnd type="none" w="med" len="med"/>
+                    </a:lnL>
+                    <a:lnR w="6350" cap="flat" cmpd="sng" algn="ctr">
+                      <a:solidFill>
+                        <a:srgbClr val="E3E8E9"/>
+                      </a:solidFill>
+                      <a:prstDash val="solid"/>
+                      <a:round/>
+                      <a:headEnd type="none" w="med" len="med"/>
+                      <a:tailEnd type="none" w="med" len="med"/>
+                    </a:lnR>
+                    <a:lnT w="6350" cap="flat" cmpd="sng" algn="ctr">
+                      <a:solidFill>
+                        <a:srgbClr val="E3E8E9"/>
+                      </a:solidFill>
+                      <a:prstDash val="solid"/>
+                      <a:round/>
+                      <a:headEnd type="none" w="med" len="med"/>
+                      <a:tailEnd type="none" w="med" len="med"/>
+                    </a:lnT>
+                    <a:lnB w="6350" cap="flat" cmpd="sng" algn="ctr">
+                      <a:solidFill>
+                        <a:srgbClr val="E3E8E9"/>
+                      </a:solidFill>
+                      <a:prstDash val="solid"/>
+                      <a:round/>
+                      <a:headEnd type="none" w="med" len="med"/>
+                      <a:tailEnd type="none" w="med" len="med"/>
+                    </a:lnB>
+                    <a:solidFill>
+                      <a:srgbClr val="F0F4F5"/>
+                    </a:solidFill>
+                  </a:tcPr>
+                </a:tc>
+                <a:tc>
+                  <a:txBody>
+                    <a:bodyPr/>
+                    <a:lstStyle/>
+                    <a:p>
+                      <a:pPr indent="0" marL="0">
+                        <a:buNone/>
+                      </a:pPr>
+                      <a:r>
+                        <a:rPr lang="en-US" sz="950" dirty="0">
+                          <a:solidFill>
+                            <a:srgbClr val="5B6B73"/>
+                          </a:solidFill>
+                          <a:latin typeface="Calibri" pitchFamily="34" charset="0"/>
+                          <a:ea typeface="Calibri" pitchFamily="34" charset="-122"/>
+                          <a:cs typeface="Calibri" pitchFamily="34" charset="-120"/>
+                        </a:rPr>
+                        <a:t>P&amp;Q - Processos</a:t>
+                      </a:r>
+                      <a:endParaRPr lang="en-US" sz="950" dirty="0">
+                        <a:latin typeface="Calibri" charset="0"/>
+                        <a:ea typeface="Calibri" charset="0"/>
+                        <a:cs typeface="Calibri" charset="0"/>
+                      </a:endParaRPr>
+                    </a:p>
+                  </a:txBody>
+                  <a:tcPr marL="91440" marR="91440" marT="45720" marB="45720" anchor="ctr">
+                    <a:lnL w="6350" cap="flat" cmpd="sng" algn="ctr">
+                      <a:solidFill>
+                        <a:srgbClr val="E3E8E9"/>
+                      </a:solidFill>
+                      <a:prstDash val="solid"/>
+                      <a:round/>
+                      <a:headEnd type="none" w="med" len="med"/>
+                      <a:tailEnd type="none" w="med" len="med"/>
+                    </a:lnL>
+                    <a:lnR w="6350" cap="flat" cmpd="sng" algn="ctr">
+                      <a:solidFill>
+                        <a:srgbClr val="E3E8E9"/>
+                      </a:solidFill>
+                      <a:prstDash val="solid"/>
+                      <a:round/>
+                      <a:headEnd type="none" w="med" len="med"/>
+                      <a:tailEnd type="none" w="med" len="med"/>
+                    </a:lnR>
+                    <a:lnT w="6350" cap="flat" cmpd="sng" algn="ctr">
+                      <a:solidFill>
+                        <a:srgbClr val="E3E8E9"/>
+                      </a:solidFill>
+                      <a:prstDash val="solid"/>
+                      <a:round/>
+                      <a:headEnd type="none" w="med" len="med"/>
+                      <a:tailEnd type="none" w="med" len="med"/>
+                    </a:lnT>
+                    <a:lnB w="6350" cap="flat" cmpd="sng" algn="ctr">
+                      <a:solidFill>
+                        <a:srgbClr val="E3E8E9"/>
+                      </a:solidFill>
+                      <a:prstDash val="solid"/>
+                      <a:round/>
+                      <a:headEnd type="none" w="med" len="med"/>
+                      <a:tailEnd type="none" w="med" len="med"/>
+                    </a:lnB>
+                    <a:solidFill>
                       <a:srgbClr val="F0F4F5"/>
                     </a:solidFill>
                   </a:tcPr>
@@ -14237,7 +14785,7 @@
                           <a:ea typeface="Calibri" pitchFamily="34" charset="-122"/>
                           <a:cs typeface="Calibri" pitchFamily="34" charset="-120"/>
                         </a:rPr>
-                        <a:t>US$ 1,5 mi</a:t>
+                        <a:t>US$ 1,4 mi</a:t>
                       </a:r>
                       <a:endParaRPr lang="en-US" sz="1000" dirty="0">
                         <a:latin typeface="Calibri" charset="0"/>
@@ -14855,7 +15403,7 @@
                           <a:ea typeface="Calibri" pitchFamily="34" charset="-122"/>
                           <a:cs typeface="Calibri" pitchFamily="34" charset="-120"/>
                         </a:rPr>
-                        <a:t>INSTALAÇÃO DA CARGO PUMP</a:t>
+                        <a:t>REVAMP CARGO PUMP - Nº 2</a:t>
                       </a:r>
                       <a:endParaRPr lang="en-US" sz="1000" dirty="0">
                         <a:latin typeface="Calibri" charset="0"/>
@@ -15677,6 +16225,554 @@
                           <a:ea typeface="Calibri" pitchFamily="34" charset="-122"/>
                           <a:cs typeface="Calibri" pitchFamily="34" charset="-120"/>
                         </a:rPr>
+                        <a:t>TA - Ignitor do Flare</a:t>
+                      </a:r>
+                      <a:endParaRPr lang="en-US" sz="1000" dirty="0">
+                        <a:latin typeface="Calibri" charset="0"/>
+                        <a:ea typeface="Calibri" charset="0"/>
+                        <a:cs typeface="Calibri" charset="0"/>
+                      </a:endParaRPr>
+                    </a:p>
+                  </a:txBody>
+                  <a:tcPr marL="91440" marR="91440" marT="45720" marB="45720" anchor="ctr">
+                    <a:lnL w="6350" cap="flat" cmpd="sng" algn="ctr">
+                      <a:solidFill>
+                        <a:srgbClr val="E3E8E9"/>
+                      </a:solidFill>
+                      <a:prstDash val="solid"/>
+                      <a:round/>
+                      <a:headEnd type="none" w="med" len="med"/>
+                      <a:tailEnd type="none" w="med" len="med"/>
+                    </a:lnL>
+                    <a:lnR w="6350" cap="flat" cmpd="sng" algn="ctr">
+                      <a:solidFill>
+                        <a:srgbClr val="E3E8E9"/>
+                      </a:solidFill>
+                      <a:prstDash val="solid"/>
+                      <a:round/>
+                      <a:headEnd type="none" w="med" len="med"/>
+                      <a:tailEnd type="none" w="med" len="med"/>
+                    </a:lnR>
+                    <a:lnT w="6350" cap="flat" cmpd="sng" algn="ctr">
+                      <a:solidFill>
+                        <a:srgbClr val="E3E8E9"/>
+                      </a:solidFill>
+                      <a:prstDash val="solid"/>
+                      <a:round/>
+                      <a:headEnd type="none" w="med" len="med"/>
+                      <a:tailEnd type="none" w="med" len="med"/>
+                    </a:lnT>
+                    <a:lnB w="6350" cap="flat" cmpd="sng" algn="ctr">
+                      <a:solidFill>
+                        <a:srgbClr val="E3E8E9"/>
+                      </a:solidFill>
+                      <a:prstDash val="solid"/>
+                      <a:round/>
+                      <a:headEnd type="none" w="med" len="med"/>
+                      <a:tailEnd type="none" w="med" len="med"/>
+                    </a:lnB>
+                    <a:solidFill>
+                      <a:srgbClr val="F0F4F5"/>
+                    </a:solidFill>
+                  </a:tcPr>
+                </a:tc>
+                <a:tc>
+                  <a:txBody>
+                    <a:bodyPr/>
+                    <a:lstStyle/>
+                    <a:p>
+                      <a:pPr indent="0" marL="0">
+                        <a:buNone/>
+                      </a:pPr>
+                      <a:r>
+                        <a:rPr lang="en-US" sz="950" dirty="0">
+                          <a:solidFill>
+                            <a:srgbClr val="5B6B73"/>
+                          </a:solidFill>
+                          <a:latin typeface="Calibri" pitchFamily="34" charset="0"/>
+                          <a:ea typeface="Calibri" pitchFamily="34" charset="-122"/>
+                          <a:cs typeface="Calibri" pitchFamily="34" charset="-120"/>
+                        </a:rPr>
+                        <a:t>Integridade e Regulatório</a:t>
+                      </a:r>
+                      <a:endParaRPr lang="en-US" sz="950" dirty="0">
+                        <a:latin typeface="Calibri" charset="0"/>
+                        <a:ea typeface="Calibri" charset="0"/>
+                        <a:cs typeface="Calibri" charset="0"/>
+                      </a:endParaRPr>
+                    </a:p>
+                  </a:txBody>
+                  <a:tcPr marL="91440" marR="91440" marT="45720" marB="45720" anchor="ctr">
+                    <a:lnL w="6350" cap="flat" cmpd="sng" algn="ctr">
+                      <a:solidFill>
+                        <a:srgbClr val="E3E8E9"/>
+                      </a:solidFill>
+                      <a:prstDash val="solid"/>
+                      <a:round/>
+                      <a:headEnd type="none" w="med" len="med"/>
+                      <a:tailEnd type="none" w="med" len="med"/>
+                    </a:lnL>
+                    <a:lnR w="6350" cap="flat" cmpd="sng" algn="ctr">
+                      <a:solidFill>
+                        <a:srgbClr val="E3E8E9"/>
+                      </a:solidFill>
+                      <a:prstDash val="solid"/>
+                      <a:round/>
+                      <a:headEnd type="none" w="med" len="med"/>
+                      <a:tailEnd type="none" w="med" len="med"/>
+                    </a:lnR>
+                    <a:lnT w="6350" cap="flat" cmpd="sng" algn="ctr">
+                      <a:solidFill>
+                        <a:srgbClr val="E3E8E9"/>
+                      </a:solidFill>
+                      <a:prstDash val="solid"/>
+                      <a:round/>
+                      <a:headEnd type="none" w="med" len="med"/>
+                      <a:tailEnd type="none" w="med" len="med"/>
+                    </a:lnT>
+                    <a:lnB w="6350" cap="flat" cmpd="sng" algn="ctr">
+                      <a:solidFill>
+                        <a:srgbClr val="E3E8E9"/>
+                      </a:solidFill>
+                      <a:prstDash val="solid"/>
+                      <a:round/>
+                      <a:headEnd type="none" w="med" len="med"/>
+                      <a:tailEnd type="none" w="med" len="med"/>
+                    </a:lnB>
+                    <a:solidFill>
+                      <a:srgbClr val="F0F4F5"/>
+                    </a:solidFill>
+                  </a:tcPr>
+                </a:tc>
+                <a:tc>
+                  <a:txBody>
+                    <a:bodyPr/>
+                    <a:lstStyle/>
+                    <a:p>
+                      <a:pPr indent="0" marL="0">
+                        <a:buNone/>
+                      </a:pPr>
+                      <a:r>
+                        <a:rPr lang="en-US" sz="950" dirty="0">
+                          <a:solidFill>
+                            <a:srgbClr val="5B6B73"/>
+                          </a:solidFill>
+                          <a:latin typeface="Calibri" pitchFamily="34" charset="0"/>
+                          <a:ea typeface="Calibri" pitchFamily="34" charset="-122"/>
+                          <a:cs typeface="Calibri" pitchFamily="34" charset="-120"/>
+                        </a:rPr>
+                        <a:t>P&amp;Q - Processos</a:t>
+                      </a:r>
+                      <a:endParaRPr lang="en-US" sz="950" dirty="0">
+                        <a:latin typeface="Calibri" charset="0"/>
+                        <a:ea typeface="Calibri" charset="0"/>
+                        <a:cs typeface="Calibri" charset="0"/>
+                      </a:endParaRPr>
+                    </a:p>
+                  </a:txBody>
+                  <a:tcPr marL="91440" marR="91440" marT="45720" marB="45720" anchor="ctr">
+                    <a:lnL w="6350" cap="flat" cmpd="sng" algn="ctr">
+                      <a:solidFill>
+                        <a:srgbClr val="E3E8E9"/>
+                      </a:solidFill>
+                      <a:prstDash val="solid"/>
+                      <a:round/>
+                      <a:headEnd type="none" w="med" len="med"/>
+                      <a:tailEnd type="none" w="med" len="med"/>
+                    </a:lnL>
+                    <a:lnR w="6350" cap="flat" cmpd="sng" algn="ctr">
+                      <a:solidFill>
+                        <a:srgbClr val="E3E8E9"/>
+                      </a:solidFill>
+                      <a:prstDash val="solid"/>
+                      <a:round/>
+                      <a:headEnd type="none" w="med" len="med"/>
+                      <a:tailEnd type="none" w="med" len="med"/>
+                    </a:lnR>
+                    <a:lnT w="6350" cap="flat" cmpd="sng" algn="ctr">
+                      <a:solidFill>
+                        <a:srgbClr val="E3E8E9"/>
+                      </a:solidFill>
+                      <a:prstDash val="solid"/>
+                      <a:round/>
+                      <a:headEnd type="none" w="med" len="med"/>
+                      <a:tailEnd type="none" w="med" len="med"/>
+                    </a:lnT>
+                    <a:lnB w="6350" cap="flat" cmpd="sng" algn="ctr">
+                      <a:solidFill>
+                        <a:srgbClr val="E3E8E9"/>
+                      </a:solidFill>
+                      <a:prstDash val="solid"/>
+                      <a:round/>
+                      <a:headEnd type="none" w="med" len="med"/>
+                      <a:tailEnd type="none" w="med" len="med"/>
+                    </a:lnB>
+                    <a:solidFill>
+                      <a:srgbClr val="F0F4F5"/>
+                    </a:solidFill>
+                  </a:tcPr>
+                </a:tc>
+                <a:tc>
+                  <a:txBody>
+                    <a:bodyPr/>
+                    <a:lstStyle/>
+                    <a:p>
+                      <a:pPr algn="r" indent="0" marL="0">
+                        <a:buNone/>
+                      </a:pPr>
+                      <a:r>
+                        <a:rPr lang="en-US" sz="1000" b="1" dirty="0">
+                          <a:solidFill>
+                            <a:srgbClr val="0B2A3D"/>
+                          </a:solidFill>
+                          <a:latin typeface="Calibri" pitchFamily="34" charset="0"/>
+                          <a:ea typeface="Calibri" pitchFamily="34" charset="-122"/>
+                          <a:cs typeface="Calibri" pitchFamily="34" charset="-120"/>
+                        </a:rPr>
+                        <a:t>US$ 616,8 mil</a:t>
+                      </a:r>
+                      <a:endParaRPr lang="en-US" sz="1000" dirty="0">
+                        <a:latin typeface="Calibri" charset="0"/>
+                        <a:ea typeface="Calibri" charset="0"/>
+                        <a:cs typeface="Calibri" charset="0"/>
+                      </a:endParaRPr>
+                    </a:p>
+                  </a:txBody>
+                  <a:tcPr marL="91440" marR="91440" marT="45720" marB="45720" anchor="ctr">
+                    <a:lnL w="6350" cap="flat" cmpd="sng" algn="ctr">
+                      <a:solidFill>
+                        <a:srgbClr val="E3E8E9"/>
+                      </a:solidFill>
+                      <a:prstDash val="solid"/>
+                      <a:round/>
+                      <a:headEnd type="none" w="med" len="med"/>
+                      <a:tailEnd type="none" w="med" len="med"/>
+                    </a:lnL>
+                    <a:lnR w="6350" cap="flat" cmpd="sng" algn="ctr">
+                      <a:solidFill>
+                        <a:srgbClr val="E3E8E9"/>
+                      </a:solidFill>
+                      <a:prstDash val="solid"/>
+                      <a:round/>
+                      <a:headEnd type="none" w="med" len="med"/>
+                      <a:tailEnd type="none" w="med" len="med"/>
+                    </a:lnR>
+                    <a:lnT w="6350" cap="flat" cmpd="sng" algn="ctr">
+                      <a:solidFill>
+                        <a:srgbClr val="E3E8E9"/>
+                      </a:solidFill>
+                      <a:prstDash val="solid"/>
+                      <a:round/>
+                      <a:headEnd type="none" w="med" len="med"/>
+                      <a:tailEnd type="none" w="med" len="med"/>
+                    </a:lnT>
+                    <a:lnB w="6350" cap="flat" cmpd="sng" algn="ctr">
+                      <a:solidFill>
+                        <a:srgbClr val="E3E8E9"/>
+                      </a:solidFill>
+                      <a:prstDash val="solid"/>
+                      <a:round/>
+                      <a:headEnd type="none" w="med" len="med"/>
+                      <a:tailEnd type="none" w="med" len="med"/>
+                    </a:lnB>
+                    <a:solidFill>
+                      <a:srgbClr val="F0F4F5"/>
+                    </a:solidFill>
+                  </a:tcPr>
+                </a:tc>
+              </a:tr>
+              <a:tr h="288036">
+                <a:tc>
+                  <a:txBody>
+                    <a:bodyPr/>
+                    <a:lstStyle/>
+                    <a:p>
+                      <a:pPr indent="0" marL="0">
+                        <a:buNone/>
+                      </a:pPr>
+                      <a:r>
+                        <a:rPr lang="en-US" sz="1000" dirty="0">
+                          <a:solidFill>
+                            <a:srgbClr val="1C2B33"/>
+                          </a:solidFill>
+                          <a:latin typeface="Calibri" pitchFamily="34" charset="0"/>
+                          <a:ea typeface="Calibri" pitchFamily="34" charset="-122"/>
+                          <a:cs typeface="Calibri" pitchFamily="34" charset="-120"/>
+                        </a:rPr>
+                        <a:t>TA - Manutenção no Swivel elétrico</a:t>
+                      </a:r>
+                      <a:endParaRPr lang="en-US" sz="1000" dirty="0">
+                        <a:latin typeface="Calibri" charset="0"/>
+                        <a:ea typeface="Calibri" charset="0"/>
+                        <a:cs typeface="Calibri" charset="0"/>
+                      </a:endParaRPr>
+                    </a:p>
+                  </a:txBody>
+                  <a:tcPr marL="91440" marR="91440" marT="45720" marB="45720" anchor="ctr">
+                    <a:lnL w="6350" cap="flat" cmpd="sng" algn="ctr">
+                      <a:solidFill>
+                        <a:srgbClr val="E3E8E9"/>
+                      </a:solidFill>
+                      <a:prstDash val="solid"/>
+                      <a:round/>
+                      <a:headEnd type="none" w="med" len="med"/>
+                      <a:tailEnd type="none" w="med" len="med"/>
+                    </a:lnL>
+                    <a:lnR w="6350" cap="flat" cmpd="sng" algn="ctr">
+                      <a:solidFill>
+                        <a:srgbClr val="E3E8E9"/>
+                      </a:solidFill>
+                      <a:prstDash val="solid"/>
+                      <a:round/>
+                      <a:headEnd type="none" w="med" len="med"/>
+                      <a:tailEnd type="none" w="med" len="med"/>
+                    </a:lnR>
+                    <a:lnT w="6350" cap="flat" cmpd="sng" algn="ctr">
+                      <a:solidFill>
+                        <a:srgbClr val="E3E8E9"/>
+                      </a:solidFill>
+                      <a:prstDash val="solid"/>
+                      <a:round/>
+                      <a:headEnd type="none" w="med" len="med"/>
+                      <a:tailEnd type="none" w="med" len="med"/>
+                    </a:lnT>
+                    <a:lnB w="6350" cap="flat" cmpd="sng" algn="ctr">
+                      <a:solidFill>
+                        <a:srgbClr val="E3E8E9"/>
+                      </a:solidFill>
+                      <a:prstDash val="solid"/>
+                      <a:round/>
+                      <a:headEnd type="none" w="med" len="med"/>
+                      <a:tailEnd type="none" w="med" len="med"/>
+                    </a:lnB>
+                    <a:solidFill>
+                      <a:srgbClr val="FFFFFF"/>
+                    </a:solidFill>
+                  </a:tcPr>
+                </a:tc>
+                <a:tc>
+                  <a:txBody>
+                    <a:bodyPr/>
+                    <a:lstStyle/>
+                    <a:p>
+                      <a:pPr indent="0" marL="0">
+                        <a:buNone/>
+                      </a:pPr>
+                      <a:r>
+                        <a:rPr lang="en-US" sz="950" dirty="0">
+                          <a:solidFill>
+                            <a:srgbClr val="5B6B73"/>
+                          </a:solidFill>
+                          <a:latin typeface="Calibri" pitchFamily="34" charset="0"/>
+                          <a:ea typeface="Calibri" pitchFamily="34" charset="-122"/>
+                          <a:cs typeface="Calibri" pitchFamily="34" charset="-120"/>
+                        </a:rPr>
+                        <a:t>Rotina Operacional</a:t>
+                      </a:r>
+                      <a:endParaRPr lang="en-US" sz="950" dirty="0">
+                        <a:latin typeface="Calibri" charset="0"/>
+                        <a:ea typeface="Calibri" charset="0"/>
+                        <a:cs typeface="Calibri" charset="0"/>
+                      </a:endParaRPr>
+                    </a:p>
+                  </a:txBody>
+                  <a:tcPr marL="91440" marR="91440" marT="45720" marB="45720" anchor="ctr">
+                    <a:lnL w="6350" cap="flat" cmpd="sng" algn="ctr">
+                      <a:solidFill>
+                        <a:srgbClr val="E3E8E9"/>
+                      </a:solidFill>
+                      <a:prstDash val="solid"/>
+                      <a:round/>
+                      <a:headEnd type="none" w="med" len="med"/>
+                      <a:tailEnd type="none" w="med" len="med"/>
+                    </a:lnL>
+                    <a:lnR w="6350" cap="flat" cmpd="sng" algn="ctr">
+                      <a:solidFill>
+                        <a:srgbClr val="E3E8E9"/>
+                      </a:solidFill>
+                      <a:prstDash val="solid"/>
+                      <a:round/>
+                      <a:headEnd type="none" w="med" len="med"/>
+                      <a:tailEnd type="none" w="med" len="med"/>
+                    </a:lnR>
+                    <a:lnT w="6350" cap="flat" cmpd="sng" algn="ctr">
+                      <a:solidFill>
+                        <a:srgbClr val="E3E8E9"/>
+                      </a:solidFill>
+                      <a:prstDash val="solid"/>
+                      <a:round/>
+                      <a:headEnd type="none" w="med" len="med"/>
+                      <a:tailEnd type="none" w="med" len="med"/>
+                    </a:lnT>
+                    <a:lnB w="6350" cap="flat" cmpd="sng" algn="ctr">
+                      <a:solidFill>
+                        <a:srgbClr val="E3E8E9"/>
+                      </a:solidFill>
+                      <a:prstDash val="solid"/>
+                      <a:round/>
+                      <a:headEnd type="none" w="med" len="med"/>
+                      <a:tailEnd type="none" w="med" len="med"/>
+                    </a:lnB>
+                    <a:solidFill>
+                      <a:srgbClr val="FFFFFF"/>
+                    </a:solidFill>
+                  </a:tcPr>
+                </a:tc>
+                <a:tc>
+                  <a:txBody>
+                    <a:bodyPr/>
+                    <a:lstStyle/>
+                    <a:p>
+                      <a:pPr indent="0" marL="0">
+                        <a:buNone/>
+                      </a:pPr>
+                      <a:r>
+                        <a:rPr lang="en-US" sz="950" dirty="0">
+                          <a:solidFill>
+                            <a:srgbClr val="5B6B73"/>
+                          </a:solidFill>
+                          <a:latin typeface="Calibri" pitchFamily="34" charset="0"/>
+                          <a:ea typeface="Calibri" pitchFamily="34" charset="-122"/>
+                          <a:cs typeface="Calibri" pitchFamily="34" charset="-120"/>
+                        </a:rPr>
+                        <a:t>EIM - Manutenção &amp; Integridade</a:t>
+                      </a:r>
+                      <a:endParaRPr lang="en-US" sz="950" dirty="0">
+                        <a:latin typeface="Calibri" charset="0"/>
+                        <a:ea typeface="Calibri" charset="0"/>
+                        <a:cs typeface="Calibri" charset="0"/>
+                      </a:endParaRPr>
+                    </a:p>
+                  </a:txBody>
+                  <a:tcPr marL="91440" marR="91440" marT="45720" marB="45720" anchor="ctr">
+                    <a:lnL w="6350" cap="flat" cmpd="sng" algn="ctr">
+                      <a:solidFill>
+                        <a:srgbClr val="E3E8E9"/>
+                      </a:solidFill>
+                      <a:prstDash val="solid"/>
+                      <a:round/>
+                      <a:headEnd type="none" w="med" len="med"/>
+                      <a:tailEnd type="none" w="med" len="med"/>
+                    </a:lnL>
+                    <a:lnR w="6350" cap="flat" cmpd="sng" algn="ctr">
+                      <a:solidFill>
+                        <a:srgbClr val="E3E8E9"/>
+                      </a:solidFill>
+                      <a:prstDash val="solid"/>
+                      <a:round/>
+                      <a:headEnd type="none" w="med" len="med"/>
+                      <a:tailEnd type="none" w="med" len="med"/>
+                    </a:lnR>
+                    <a:lnT w="6350" cap="flat" cmpd="sng" algn="ctr">
+                      <a:solidFill>
+                        <a:srgbClr val="E3E8E9"/>
+                      </a:solidFill>
+                      <a:prstDash val="solid"/>
+                      <a:round/>
+                      <a:headEnd type="none" w="med" len="med"/>
+                      <a:tailEnd type="none" w="med" len="med"/>
+                    </a:lnT>
+                    <a:lnB w="6350" cap="flat" cmpd="sng" algn="ctr">
+                      <a:solidFill>
+                        <a:srgbClr val="E3E8E9"/>
+                      </a:solidFill>
+                      <a:prstDash val="solid"/>
+                      <a:round/>
+                      <a:headEnd type="none" w="med" len="med"/>
+                      <a:tailEnd type="none" w="med" len="med"/>
+                    </a:lnB>
+                    <a:solidFill>
+                      <a:srgbClr val="FFFFFF"/>
+                    </a:solidFill>
+                  </a:tcPr>
+                </a:tc>
+                <a:tc>
+                  <a:txBody>
+                    <a:bodyPr/>
+                    <a:lstStyle/>
+                    <a:p>
+                      <a:pPr algn="r" indent="0" marL="0">
+                        <a:buNone/>
+                      </a:pPr>
+                      <a:r>
+                        <a:rPr lang="en-US" sz="1000" b="1" dirty="0">
+                          <a:solidFill>
+                            <a:srgbClr val="0B2A3D"/>
+                          </a:solidFill>
+                          <a:latin typeface="Calibri" pitchFamily="34" charset="0"/>
+                          <a:ea typeface="Calibri" pitchFamily="34" charset="-122"/>
+                          <a:cs typeface="Calibri" pitchFamily="34" charset="-120"/>
+                        </a:rPr>
+                        <a:t>US$ 414,5 mil</a:t>
+                      </a:r>
+                      <a:endParaRPr lang="en-US" sz="1000" dirty="0">
+                        <a:latin typeface="Calibri" charset="0"/>
+                        <a:ea typeface="Calibri" charset="0"/>
+                        <a:cs typeface="Calibri" charset="0"/>
+                      </a:endParaRPr>
+                    </a:p>
+                  </a:txBody>
+                  <a:tcPr marL="91440" marR="91440" marT="45720" marB="45720" anchor="ctr">
+                    <a:lnL w="6350" cap="flat" cmpd="sng" algn="ctr">
+                      <a:solidFill>
+                        <a:srgbClr val="E3E8E9"/>
+                      </a:solidFill>
+                      <a:prstDash val="solid"/>
+                      <a:round/>
+                      <a:headEnd type="none" w="med" len="med"/>
+                      <a:tailEnd type="none" w="med" len="med"/>
+                    </a:lnL>
+                    <a:lnR w="6350" cap="flat" cmpd="sng" algn="ctr">
+                      <a:solidFill>
+                        <a:srgbClr val="E3E8E9"/>
+                      </a:solidFill>
+                      <a:prstDash val="solid"/>
+                      <a:round/>
+                      <a:headEnd type="none" w="med" len="med"/>
+                      <a:tailEnd type="none" w="med" len="med"/>
+                    </a:lnR>
+                    <a:lnT w="6350" cap="flat" cmpd="sng" algn="ctr">
+                      <a:solidFill>
+                        <a:srgbClr val="E3E8E9"/>
+                      </a:solidFill>
+                      <a:prstDash val="solid"/>
+                      <a:round/>
+                      <a:headEnd type="none" w="med" len="med"/>
+                      <a:tailEnd type="none" w="med" len="med"/>
+                    </a:lnT>
+                    <a:lnB w="6350" cap="flat" cmpd="sng" algn="ctr">
+                      <a:solidFill>
+                        <a:srgbClr val="E3E8E9"/>
+                      </a:solidFill>
+                      <a:prstDash val="solid"/>
+                      <a:round/>
+                      <a:headEnd type="none" w="med" len="med"/>
+                      <a:tailEnd type="none" w="med" len="med"/>
+                    </a:lnB>
+                    <a:solidFill>
+                      <a:srgbClr val="FFFFFF"/>
+                    </a:solidFill>
+                  </a:tcPr>
+                </a:tc>
+              </a:tr>
+              <a:tr h="288036">
+                <a:tc>
+                  <a:txBody>
+                    <a:bodyPr/>
+                    <a:lstStyle/>
+                    <a:p>
+                      <a:pPr indent="0" marL="0">
+                        <a:buNone/>
+                      </a:pPr>
+                      <a:r>
+                        <a:rPr lang="en-US" sz="1000" dirty="0">
+                          <a:solidFill>
+                            <a:srgbClr val="1C2B33"/>
+                          </a:solidFill>
+                          <a:latin typeface="Calibri" pitchFamily="34" charset="0"/>
+                          <a:ea typeface="Calibri" pitchFamily="34" charset="-122"/>
+                          <a:cs typeface="Calibri" pitchFamily="34" charset="-120"/>
+                        </a:rPr>
                         <a:t>Novas Destiladoras</a:t>
                       </a:r>
                       <a:endParaRPr lang="en-US" sz="1000" dirty="0">
@@ -15934,1102 +17030,6 @@
                 </a:tc>
               </a:tr>
               <a:tr h="288036">
-                <a:tc>
-                  <a:txBody>
-                    <a:bodyPr/>
-                    <a:lstStyle/>
-                    <a:p>
-                      <a:pPr indent="0" marL="0">
-                        <a:buNone/>
-                      </a:pPr>
-                      <a:r>
-                        <a:rPr lang="en-US" sz="1000" dirty="0">
-                          <a:solidFill>
-                            <a:srgbClr val="1C2B33"/>
-                          </a:solidFill>
-                          <a:latin typeface="Calibri" pitchFamily="34" charset="0"/>
-                          <a:ea typeface="Calibri" pitchFamily="34" charset="-122"/>
-                          <a:cs typeface="Calibri" pitchFamily="34" charset="-120"/>
-                        </a:rPr>
-                        <a:t>Instalação de Sensores de Hidrogênio nas Salas de Baterias</a:t>
-                      </a:r>
-                      <a:endParaRPr lang="en-US" sz="1000" dirty="0">
-                        <a:latin typeface="Calibri" charset="0"/>
-                        <a:ea typeface="Calibri" charset="0"/>
-                        <a:cs typeface="Calibri" charset="0"/>
-                      </a:endParaRPr>
-                    </a:p>
-                  </a:txBody>
-                  <a:tcPr marL="91440" marR="91440" marT="45720" marB="45720" anchor="ctr">
-                    <a:lnL w="6350" cap="flat" cmpd="sng" algn="ctr">
-                      <a:solidFill>
-                        <a:srgbClr val="E3E8E9"/>
-                      </a:solidFill>
-                      <a:prstDash val="solid"/>
-                      <a:round/>
-                      <a:headEnd type="none" w="med" len="med"/>
-                      <a:tailEnd type="none" w="med" len="med"/>
-                    </a:lnL>
-                    <a:lnR w="6350" cap="flat" cmpd="sng" algn="ctr">
-                      <a:solidFill>
-                        <a:srgbClr val="E3E8E9"/>
-                      </a:solidFill>
-                      <a:prstDash val="solid"/>
-                      <a:round/>
-                      <a:headEnd type="none" w="med" len="med"/>
-                      <a:tailEnd type="none" w="med" len="med"/>
-                    </a:lnR>
-                    <a:lnT w="6350" cap="flat" cmpd="sng" algn="ctr">
-                      <a:solidFill>
-                        <a:srgbClr val="E3E8E9"/>
-                      </a:solidFill>
-                      <a:prstDash val="solid"/>
-                      <a:round/>
-                      <a:headEnd type="none" w="med" len="med"/>
-                      <a:tailEnd type="none" w="med" len="med"/>
-                    </a:lnT>
-                    <a:lnB w="6350" cap="flat" cmpd="sng" algn="ctr">
-                      <a:solidFill>
-                        <a:srgbClr val="E3E8E9"/>
-                      </a:solidFill>
-                      <a:prstDash val="solid"/>
-                      <a:round/>
-                      <a:headEnd type="none" w="med" len="med"/>
-                      <a:tailEnd type="none" w="med" len="med"/>
-                    </a:lnB>
-                    <a:solidFill>
-                      <a:srgbClr val="FFFFFF"/>
-                    </a:solidFill>
-                  </a:tcPr>
-                </a:tc>
-                <a:tc>
-                  <a:txBody>
-                    <a:bodyPr/>
-                    <a:lstStyle/>
-                    <a:p>
-                      <a:pPr indent="0" marL="0">
-                        <a:buNone/>
-                      </a:pPr>
-                      <a:r>
-                        <a:rPr lang="en-US" sz="950" dirty="0">
-                          <a:solidFill>
-                            <a:srgbClr val="5B6B73"/>
-                          </a:solidFill>
-                          <a:latin typeface="Calibri" pitchFamily="34" charset="0"/>
-                          <a:ea typeface="Calibri" pitchFamily="34" charset="-122"/>
-                          <a:cs typeface="Calibri" pitchFamily="34" charset="-120"/>
-                        </a:rPr>
-                        <a:t>Integridade e Regulatório</a:t>
-                      </a:r>
-                      <a:endParaRPr lang="en-US" sz="950" dirty="0">
-                        <a:latin typeface="Calibri" charset="0"/>
-                        <a:ea typeface="Calibri" charset="0"/>
-                        <a:cs typeface="Calibri" charset="0"/>
-                      </a:endParaRPr>
-                    </a:p>
-                  </a:txBody>
-                  <a:tcPr marL="91440" marR="91440" marT="45720" marB="45720" anchor="ctr">
-                    <a:lnL w="6350" cap="flat" cmpd="sng" algn="ctr">
-                      <a:solidFill>
-                        <a:srgbClr val="E3E8E9"/>
-                      </a:solidFill>
-                      <a:prstDash val="solid"/>
-                      <a:round/>
-                      <a:headEnd type="none" w="med" len="med"/>
-                      <a:tailEnd type="none" w="med" len="med"/>
-                    </a:lnL>
-                    <a:lnR w="6350" cap="flat" cmpd="sng" algn="ctr">
-                      <a:solidFill>
-                        <a:srgbClr val="E3E8E9"/>
-                      </a:solidFill>
-                      <a:prstDash val="solid"/>
-                      <a:round/>
-                      <a:headEnd type="none" w="med" len="med"/>
-                      <a:tailEnd type="none" w="med" len="med"/>
-                    </a:lnR>
-                    <a:lnT w="6350" cap="flat" cmpd="sng" algn="ctr">
-                      <a:solidFill>
-                        <a:srgbClr val="E3E8E9"/>
-                      </a:solidFill>
-                      <a:prstDash val="solid"/>
-                      <a:round/>
-                      <a:headEnd type="none" w="med" len="med"/>
-                      <a:tailEnd type="none" w="med" len="med"/>
-                    </a:lnT>
-                    <a:lnB w="6350" cap="flat" cmpd="sng" algn="ctr">
-                      <a:solidFill>
-                        <a:srgbClr val="E3E8E9"/>
-                      </a:solidFill>
-                      <a:prstDash val="solid"/>
-                      <a:round/>
-                      <a:headEnd type="none" w="med" len="med"/>
-                      <a:tailEnd type="none" w="med" len="med"/>
-                    </a:lnB>
-                    <a:solidFill>
-                      <a:srgbClr val="FFFFFF"/>
-                    </a:solidFill>
-                  </a:tcPr>
-                </a:tc>
-                <a:tc>
-                  <a:txBody>
-                    <a:bodyPr/>
-                    <a:lstStyle/>
-                    <a:p>
-                      <a:pPr indent="0" marL="0">
-                        <a:buNone/>
-                      </a:pPr>
-                      <a:r>
-                        <a:rPr lang="en-US" sz="950" dirty="0">
-                          <a:solidFill>
-                            <a:srgbClr val="5B6B73"/>
-                          </a:solidFill>
-                          <a:latin typeface="Calibri" pitchFamily="34" charset="0"/>
-                          <a:ea typeface="Calibri" pitchFamily="34" charset="-122"/>
-                          <a:cs typeface="Calibri" pitchFamily="34" charset="-120"/>
-                        </a:rPr>
-                        <a:t>Projetos</a:t>
-                      </a:r>
-                      <a:endParaRPr lang="en-US" sz="950" dirty="0">
-                        <a:latin typeface="Calibri" charset="0"/>
-                        <a:ea typeface="Calibri" charset="0"/>
-                        <a:cs typeface="Calibri" charset="0"/>
-                      </a:endParaRPr>
-                    </a:p>
-                  </a:txBody>
-                  <a:tcPr marL="91440" marR="91440" marT="45720" marB="45720" anchor="ctr">
-                    <a:lnL w="6350" cap="flat" cmpd="sng" algn="ctr">
-                      <a:solidFill>
-                        <a:srgbClr val="E3E8E9"/>
-                      </a:solidFill>
-                      <a:prstDash val="solid"/>
-                      <a:round/>
-                      <a:headEnd type="none" w="med" len="med"/>
-                      <a:tailEnd type="none" w="med" len="med"/>
-                    </a:lnL>
-                    <a:lnR w="6350" cap="flat" cmpd="sng" algn="ctr">
-                      <a:solidFill>
-                        <a:srgbClr val="E3E8E9"/>
-                      </a:solidFill>
-                      <a:prstDash val="solid"/>
-                      <a:round/>
-                      <a:headEnd type="none" w="med" len="med"/>
-                      <a:tailEnd type="none" w="med" len="med"/>
-                    </a:lnR>
-                    <a:lnT w="6350" cap="flat" cmpd="sng" algn="ctr">
-                      <a:solidFill>
-                        <a:srgbClr val="E3E8E9"/>
-                      </a:solidFill>
-                      <a:prstDash val="solid"/>
-                      <a:round/>
-                      <a:headEnd type="none" w="med" len="med"/>
-                      <a:tailEnd type="none" w="med" len="med"/>
-                    </a:lnT>
-                    <a:lnB w="6350" cap="flat" cmpd="sng" algn="ctr">
-                      <a:solidFill>
-                        <a:srgbClr val="E3E8E9"/>
-                      </a:solidFill>
-                      <a:prstDash val="solid"/>
-                      <a:round/>
-                      <a:headEnd type="none" w="med" len="med"/>
-                      <a:tailEnd type="none" w="med" len="med"/>
-                    </a:lnB>
-                    <a:solidFill>
-                      <a:srgbClr val="FFFFFF"/>
-                    </a:solidFill>
-                  </a:tcPr>
-                </a:tc>
-                <a:tc>
-                  <a:txBody>
-                    <a:bodyPr/>
-                    <a:lstStyle/>
-                    <a:p>
-                      <a:pPr algn="r" indent="0" marL="0">
-                        <a:buNone/>
-                      </a:pPr>
-                      <a:r>
-                        <a:rPr lang="en-US" sz="1000" b="1" dirty="0">
-                          <a:solidFill>
-                            <a:srgbClr val="0B2A3D"/>
-                          </a:solidFill>
-                          <a:latin typeface="Calibri" pitchFamily="34" charset="0"/>
-                          <a:ea typeface="Calibri" pitchFamily="34" charset="-122"/>
-                          <a:cs typeface="Calibri" pitchFamily="34" charset="-120"/>
-                        </a:rPr>
-                        <a:t>US$ 281,8 mil</a:t>
-                      </a:r>
-                      <a:endParaRPr lang="en-US" sz="1000" dirty="0">
-                        <a:latin typeface="Calibri" charset="0"/>
-                        <a:ea typeface="Calibri" charset="0"/>
-                        <a:cs typeface="Calibri" charset="0"/>
-                      </a:endParaRPr>
-                    </a:p>
-                  </a:txBody>
-                  <a:tcPr marL="91440" marR="91440" marT="45720" marB="45720" anchor="ctr">
-                    <a:lnL w="6350" cap="flat" cmpd="sng" algn="ctr">
-                      <a:solidFill>
-                        <a:srgbClr val="E3E8E9"/>
-                      </a:solidFill>
-                      <a:prstDash val="solid"/>
-                      <a:round/>
-                      <a:headEnd type="none" w="med" len="med"/>
-                      <a:tailEnd type="none" w="med" len="med"/>
-                    </a:lnL>
-                    <a:lnR w="6350" cap="flat" cmpd="sng" algn="ctr">
-                      <a:solidFill>
-                        <a:srgbClr val="E3E8E9"/>
-                      </a:solidFill>
-                      <a:prstDash val="solid"/>
-                      <a:round/>
-                      <a:headEnd type="none" w="med" len="med"/>
-                      <a:tailEnd type="none" w="med" len="med"/>
-                    </a:lnR>
-                    <a:lnT w="6350" cap="flat" cmpd="sng" algn="ctr">
-                      <a:solidFill>
-                        <a:srgbClr val="E3E8E9"/>
-                      </a:solidFill>
-                      <a:prstDash val="solid"/>
-                      <a:round/>
-                      <a:headEnd type="none" w="med" len="med"/>
-                      <a:tailEnd type="none" w="med" len="med"/>
-                    </a:lnT>
-                    <a:lnB w="6350" cap="flat" cmpd="sng" algn="ctr">
-                      <a:solidFill>
-                        <a:srgbClr val="E3E8E9"/>
-                      </a:solidFill>
-                      <a:prstDash val="solid"/>
-                      <a:round/>
-                      <a:headEnd type="none" w="med" len="med"/>
-                      <a:tailEnd type="none" w="med" len="med"/>
-                    </a:lnB>
-                    <a:solidFill>
-                      <a:srgbClr val="FFFFFF"/>
-                    </a:solidFill>
-                  </a:tcPr>
-                </a:tc>
-              </a:tr>
-              <a:tr h="288036">
-                <a:tc>
-                  <a:txBody>
-                    <a:bodyPr/>
-                    <a:lstStyle/>
-                    <a:p>
-                      <a:pPr indent="0" marL="0">
-                        <a:buNone/>
-                      </a:pPr>
-                      <a:r>
-                        <a:rPr lang="en-US" sz="1000" dirty="0">
-                          <a:solidFill>
-                            <a:srgbClr val="1C2B33"/>
-                          </a:solidFill>
-                          <a:latin typeface="Calibri" pitchFamily="34" charset="0"/>
-                          <a:ea typeface="Calibri" pitchFamily="34" charset="-122"/>
-                          <a:cs typeface="Calibri" pitchFamily="34" charset="-120"/>
-                        </a:rPr>
-                        <a:t>Desmobilização TA</a:t>
-                      </a:r>
-                      <a:endParaRPr lang="en-US" sz="1000" dirty="0">
-                        <a:latin typeface="Calibri" charset="0"/>
-                        <a:ea typeface="Calibri" charset="0"/>
-                        <a:cs typeface="Calibri" charset="0"/>
-                      </a:endParaRPr>
-                    </a:p>
-                  </a:txBody>
-                  <a:tcPr marL="91440" marR="91440" marT="45720" marB="45720" anchor="ctr">
-                    <a:lnL w="6350" cap="flat" cmpd="sng" algn="ctr">
-                      <a:solidFill>
-                        <a:srgbClr val="E3E8E9"/>
-                      </a:solidFill>
-                      <a:prstDash val="solid"/>
-                      <a:round/>
-                      <a:headEnd type="none" w="med" len="med"/>
-                      <a:tailEnd type="none" w="med" len="med"/>
-                    </a:lnL>
-                    <a:lnR w="6350" cap="flat" cmpd="sng" algn="ctr">
-                      <a:solidFill>
-                        <a:srgbClr val="E3E8E9"/>
-                      </a:solidFill>
-                      <a:prstDash val="solid"/>
-                      <a:round/>
-                      <a:headEnd type="none" w="med" len="med"/>
-                      <a:tailEnd type="none" w="med" len="med"/>
-                    </a:lnR>
-                    <a:lnT w="6350" cap="flat" cmpd="sng" algn="ctr">
-                      <a:solidFill>
-                        <a:srgbClr val="E3E8E9"/>
-                      </a:solidFill>
-                      <a:prstDash val="solid"/>
-                      <a:round/>
-                      <a:headEnd type="none" w="med" len="med"/>
-                      <a:tailEnd type="none" w="med" len="med"/>
-                    </a:lnT>
-                    <a:lnB w="6350" cap="flat" cmpd="sng" algn="ctr">
-                      <a:solidFill>
-                        <a:srgbClr val="E3E8E9"/>
-                      </a:solidFill>
-                      <a:prstDash val="solid"/>
-                      <a:round/>
-                      <a:headEnd type="none" w="med" len="med"/>
-                      <a:tailEnd type="none" w="med" len="med"/>
-                    </a:lnB>
-                    <a:solidFill>
-                      <a:srgbClr val="F0F4F5"/>
-                    </a:solidFill>
-                  </a:tcPr>
-                </a:tc>
-                <a:tc>
-                  <a:txBody>
-                    <a:bodyPr/>
-                    <a:lstStyle/>
-                    <a:p>
-                      <a:pPr indent="0" marL="0">
-                        <a:buNone/>
-                      </a:pPr>
-                      <a:r>
-                        <a:rPr lang="en-US" sz="950" dirty="0">
-                          <a:solidFill>
-                            <a:srgbClr val="5B6B73"/>
-                          </a:solidFill>
-                          <a:latin typeface="Calibri" pitchFamily="34" charset="0"/>
-                          <a:ea typeface="Calibri" pitchFamily="34" charset="-122"/>
-                          <a:cs typeface="Calibri" pitchFamily="34" charset="-120"/>
-                        </a:rPr>
-                        <a:t>Eficiência de Produção</a:t>
-                      </a:r>
-                      <a:endParaRPr lang="en-US" sz="950" dirty="0">
-                        <a:latin typeface="Calibri" charset="0"/>
-                        <a:ea typeface="Calibri" charset="0"/>
-                        <a:cs typeface="Calibri" charset="0"/>
-                      </a:endParaRPr>
-                    </a:p>
-                  </a:txBody>
-                  <a:tcPr marL="91440" marR="91440" marT="45720" marB="45720" anchor="ctr">
-                    <a:lnL w="6350" cap="flat" cmpd="sng" algn="ctr">
-                      <a:solidFill>
-                        <a:srgbClr val="E3E8E9"/>
-                      </a:solidFill>
-                      <a:prstDash val="solid"/>
-                      <a:round/>
-                      <a:headEnd type="none" w="med" len="med"/>
-                      <a:tailEnd type="none" w="med" len="med"/>
-                    </a:lnL>
-                    <a:lnR w="6350" cap="flat" cmpd="sng" algn="ctr">
-                      <a:solidFill>
-                        <a:srgbClr val="E3E8E9"/>
-                      </a:solidFill>
-                      <a:prstDash val="solid"/>
-                      <a:round/>
-                      <a:headEnd type="none" w="med" len="med"/>
-                      <a:tailEnd type="none" w="med" len="med"/>
-                    </a:lnR>
-                    <a:lnT w="6350" cap="flat" cmpd="sng" algn="ctr">
-                      <a:solidFill>
-                        <a:srgbClr val="E3E8E9"/>
-                      </a:solidFill>
-                      <a:prstDash val="solid"/>
-                      <a:round/>
-                      <a:headEnd type="none" w="med" len="med"/>
-                      <a:tailEnd type="none" w="med" len="med"/>
-                    </a:lnT>
-                    <a:lnB w="6350" cap="flat" cmpd="sng" algn="ctr">
-                      <a:solidFill>
-                        <a:srgbClr val="E3E8E9"/>
-                      </a:solidFill>
-                      <a:prstDash val="solid"/>
-                      <a:round/>
-                      <a:headEnd type="none" w="med" len="med"/>
-                      <a:tailEnd type="none" w="med" len="med"/>
-                    </a:lnB>
-                    <a:solidFill>
-                      <a:srgbClr val="F0F4F5"/>
-                    </a:solidFill>
-                  </a:tcPr>
-                </a:tc>
-                <a:tc>
-                  <a:txBody>
-                    <a:bodyPr/>
-                    <a:lstStyle/>
-                    <a:p>
-                      <a:pPr indent="0" marL="0">
-                        <a:buNone/>
-                      </a:pPr>
-                      <a:r>
-                        <a:rPr lang="en-US" sz="950" dirty="0">
-                          <a:solidFill>
-                            <a:srgbClr val="5B6B73"/>
-                          </a:solidFill>
-                          <a:latin typeface="Calibri" pitchFamily="34" charset="0"/>
-                          <a:ea typeface="Calibri" pitchFamily="34" charset="-122"/>
-                          <a:cs typeface="Calibri" pitchFamily="34" charset="-120"/>
-                        </a:rPr>
-                        <a:t>TA - Parada Programada</a:t>
-                      </a:r>
-                      <a:endParaRPr lang="en-US" sz="950" dirty="0">
-                        <a:latin typeface="Calibri" charset="0"/>
-                        <a:ea typeface="Calibri" charset="0"/>
-                        <a:cs typeface="Calibri" charset="0"/>
-                      </a:endParaRPr>
-                    </a:p>
-                  </a:txBody>
-                  <a:tcPr marL="91440" marR="91440" marT="45720" marB="45720" anchor="ctr">
-                    <a:lnL w="6350" cap="flat" cmpd="sng" algn="ctr">
-                      <a:solidFill>
-                        <a:srgbClr val="E3E8E9"/>
-                      </a:solidFill>
-                      <a:prstDash val="solid"/>
-                      <a:round/>
-                      <a:headEnd type="none" w="med" len="med"/>
-                      <a:tailEnd type="none" w="med" len="med"/>
-                    </a:lnL>
-                    <a:lnR w="6350" cap="flat" cmpd="sng" algn="ctr">
-                      <a:solidFill>
-                        <a:srgbClr val="E3E8E9"/>
-                      </a:solidFill>
-                      <a:prstDash val="solid"/>
-                      <a:round/>
-                      <a:headEnd type="none" w="med" len="med"/>
-                      <a:tailEnd type="none" w="med" len="med"/>
-                    </a:lnR>
-                    <a:lnT w="6350" cap="flat" cmpd="sng" algn="ctr">
-                      <a:solidFill>
-                        <a:srgbClr val="E3E8E9"/>
-                      </a:solidFill>
-                      <a:prstDash val="solid"/>
-                      <a:round/>
-                      <a:headEnd type="none" w="med" len="med"/>
-                      <a:tailEnd type="none" w="med" len="med"/>
-                    </a:lnT>
-                    <a:lnB w="6350" cap="flat" cmpd="sng" algn="ctr">
-                      <a:solidFill>
-                        <a:srgbClr val="E3E8E9"/>
-                      </a:solidFill>
-                      <a:prstDash val="solid"/>
-                      <a:round/>
-                      <a:headEnd type="none" w="med" len="med"/>
-                      <a:tailEnd type="none" w="med" len="med"/>
-                    </a:lnB>
-                    <a:solidFill>
-                      <a:srgbClr val="F0F4F5"/>
-                    </a:solidFill>
-                  </a:tcPr>
-                </a:tc>
-                <a:tc>
-                  <a:txBody>
-                    <a:bodyPr/>
-                    <a:lstStyle/>
-                    <a:p>
-                      <a:pPr algn="r" indent="0" marL="0">
-                        <a:buNone/>
-                      </a:pPr>
-                      <a:r>
-                        <a:rPr lang="en-US" sz="1000" b="1" dirty="0">
-                          <a:solidFill>
-                            <a:srgbClr val="0B2A3D"/>
-                          </a:solidFill>
-                          <a:latin typeface="Calibri" pitchFamily="34" charset="0"/>
-                          <a:ea typeface="Calibri" pitchFamily="34" charset="-122"/>
-                          <a:cs typeface="Calibri" pitchFamily="34" charset="-120"/>
-                        </a:rPr>
-                        <a:t>US$ 247,6 mil</a:t>
-                      </a:r>
-                      <a:endParaRPr lang="en-US" sz="1000" dirty="0">
-                        <a:latin typeface="Calibri" charset="0"/>
-                        <a:ea typeface="Calibri" charset="0"/>
-                        <a:cs typeface="Calibri" charset="0"/>
-                      </a:endParaRPr>
-                    </a:p>
-                  </a:txBody>
-                  <a:tcPr marL="91440" marR="91440" marT="45720" marB="45720" anchor="ctr">
-                    <a:lnL w="6350" cap="flat" cmpd="sng" algn="ctr">
-                      <a:solidFill>
-                        <a:srgbClr val="E3E8E9"/>
-                      </a:solidFill>
-                      <a:prstDash val="solid"/>
-                      <a:round/>
-                      <a:headEnd type="none" w="med" len="med"/>
-                      <a:tailEnd type="none" w="med" len="med"/>
-                    </a:lnL>
-                    <a:lnR w="6350" cap="flat" cmpd="sng" algn="ctr">
-                      <a:solidFill>
-                        <a:srgbClr val="E3E8E9"/>
-                      </a:solidFill>
-                      <a:prstDash val="solid"/>
-                      <a:round/>
-                      <a:headEnd type="none" w="med" len="med"/>
-                      <a:tailEnd type="none" w="med" len="med"/>
-                    </a:lnR>
-                    <a:lnT w="6350" cap="flat" cmpd="sng" algn="ctr">
-                      <a:solidFill>
-                        <a:srgbClr val="E3E8E9"/>
-                      </a:solidFill>
-                      <a:prstDash val="solid"/>
-                      <a:round/>
-                      <a:headEnd type="none" w="med" len="med"/>
-                      <a:tailEnd type="none" w="med" len="med"/>
-                    </a:lnT>
-                    <a:lnB w="6350" cap="flat" cmpd="sng" algn="ctr">
-                      <a:solidFill>
-                        <a:srgbClr val="E3E8E9"/>
-                      </a:solidFill>
-                      <a:prstDash val="solid"/>
-                      <a:round/>
-                      <a:headEnd type="none" w="med" len="med"/>
-                      <a:tailEnd type="none" w="med" len="med"/>
-                    </a:lnB>
-                    <a:solidFill>
-                      <a:srgbClr val="F0F4F5"/>
-                    </a:solidFill>
-                  </a:tcPr>
-                </a:tc>
-              </a:tr>
-              <a:tr h="288036">
-                <a:tc>
-                  <a:txBody>
-                    <a:bodyPr/>
-                    <a:lstStyle/>
-                    <a:p>
-                      <a:pPr indent="0" marL="0">
-                        <a:buNone/>
-                      </a:pPr>
-                      <a:r>
-                        <a:rPr lang="en-US" sz="1000" dirty="0">
-                          <a:solidFill>
-                            <a:srgbClr val="1C2B33"/>
-                          </a:solidFill>
-                          <a:latin typeface="Calibri" pitchFamily="34" charset="0"/>
-                          <a:ea typeface="Calibri" pitchFamily="34" charset="-122"/>
-                          <a:cs typeface="Calibri" pitchFamily="34" charset="-120"/>
-                        </a:rPr>
-                        <a:t>Mobilização TA</a:t>
-                      </a:r>
-                      <a:endParaRPr lang="en-US" sz="1000" dirty="0">
-                        <a:latin typeface="Calibri" charset="0"/>
-                        <a:ea typeface="Calibri" charset="0"/>
-                        <a:cs typeface="Calibri" charset="0"/>
-                      </a:endParaRPr>
-                    </a:p>
-                  </a:txBody>
-                  <a:tcPr marL="91440" marR="91440" marT="45720" marB="45720" anchor="ctr">
-                    <a:lnL w="6350" cap="flat" cmpd="sng" algn="ctr">
-                      <a:solidFill>
-                        <a:srgbClr val="E3E8E9"/>
-                      </a:solidFill>
-                      <a:prstDash val="solid"/>
-                      <a:round/>
-                      <a:headEnd type="none" w="med" len="med"/>
-                      <a:tailEnd type="none" w="med" len="med"/>
-                    </a:lnL>
-                    <a:lnR w="6350" cap="flat" cmpd="sng" algn="ctr">
-                      <a:solidFill>
-                        <a:srgbClr val="E3E8E9"/>
-                      </a:solidFill>
-                      <a:prstDash val="solid"/>
-                      <a:round/>
-                      <a:headEnd type="none" w="med" len="med"/>
-                      <a:tailEnd type="none" w="med" len="med"/>
-                    </a:lnR>
-                    <a:lnT w="6350" cap="flat" cmpd="sng" algn="ctr">
-                      <a:solidFill>
-                        <a:srgbClr val="E3E8E9"/>
-                      </a:solidFill>
-                      <a:prstDash val="solid"/>
-                      <a:round/>
-                      <a:headEnd type="none" w="med" len="med"/>
-                      <a:tailEnd type="none" w="med" len="med"/>
-                    </a:lnT>
-                    <a:lnB w="6350" cap="flat" cmpd="sng" algn="ctr">
-                      <a:solidFill>
-                        <a:srgbClr val="E3E8E9"/>
-                      </a:solidFill>
-                      <a:prstDash val="solid"/>
-                      <a:round/>
-                      <a:headEnd type="none" w="med" len="med"/>
-                      <a:tailEnd type="none" w="med" len="med"/>
-                    </a:lnB>
-                    <a:solidFill>
-                      <a:srgbClr val="FFFFFF"/>
-                    </a:solidFill>
-                  </a:tcPr>
-                </a:tc>
-                <a:tc>
-                  <a:txBody>
-                    <a:bodyPr/>
-                    <a:lstStyle/>
-                    <a:p>
-                      <a:pPr indent="0" marL="0">
-                        <a:buNone/>
-                      </a:pPr>
-                      <a:r>
-                        <a:rPr lang="en-US" sz="950" dirty="0">
-                          <a:solidFill>
-                            <a:srgbClr val="5B6B73"/>
-                          </a:solidFill>
-                          <a:latin typeface="Calibri" pitchFamily="34" charset="0"/>
-                          <a:ea typeface="Calibri" pitchFamily="34" charset="-122"/>
-                          <a:cs typeface="Calibri" pitchFamily="34" charset="-120"/>
-                        </a:rPr>
-                        <a:t>Eficiência de Produção</a:t>
-                      </a:r>
-                      <a:endParaRPr lang="en-US" sz="950" dirty="0">
-                        <a:latin typeface="Calibri" charset="0"/>
-                        <a:ea typeface="Calibri" charset="0"/>
-                        <a:cs typeface="Calibri" charset="0"/>
-                      </a:endParaRPr>
-                    </a:p>
-                  </a:txBody>
-                  <a:tcPr marL="91440" marR="91440" marT="45720" marB="45720" anchor="ctr">
-                    <a:lnL w="6350" cap="flat" cmpd="sng" algn="ctr">
-                      <a:solidFill>
-                        <a:srgbClr val="E3E8E9"/>
-                      </a:solidFill>
-                      <a:prstDash val="solid"/>
-                      <a:round/>
-                      <a:headEnd type="none" w="med" len="med"/>
-                      <a:tailEnd type="none" w="med" len="med"/>
-                    </a:lnL>
-                    <a:lnR w="6350" cap="flat" cmpd="sng" algn="ctr">
-                      <a:solidFill>
-                        <a:srgbClr val="E3E8E9"/>
-                      </a:solidFill>
-                      <a:prstDash val="solid"/>
-                      <a:round/>
-                      <a:headEnd type="none" w="med" len="med"/>
-                      <a:tailEnd type="none" w="med" len="med"/>
-                    </a:lnR>
-                    <a:lnT w="6350" cap="flat" cmpd="sng" algn="ctr">
-                      <a:solidFill>
-                        <a:srgbClr val="E3E8E9"/>
-                      </a:solidFill>
-                      <a:prstDash val="solid"/>
-                      <a:round/>
-                      <a:headEnd type="none" w="med" len="med"/>
-                      <a:tailEnd type="none" w="med" len="med"/>
-                    </a:lnT>
-                    <a:lnB w="6350" cap="flat" cmpd="sng" algn="ctr">
-                      <a:solidFill>
-                        <a:srgbClr val="E3E8E9"/>
-                      </a:solidFill>
-                      <a:prstDash val="solid"/>
-                      <a:round/>
-                      <a:headEnd type="none" w="med" len="med"/>
-                      <a:tailEnd type="none" w="med" len="med"/>
-                    </a:lnB>
-                    <a:solidFill>
-                      <a:srgbClr val="FFFFFF"/>
-                    </a:solidFill>
-                  </a:tcPr>
-                </a:tc>
-                <a:tc>
-                  <a:txBody>
-                    <a:bodyPr/>
-                    <a:lstStyle/>
-                    <a:p>
-                      <a:pPr indent="0" marL="0">
-                        <a:buNone/>
-                      </a:pPr>
-                      <a:r>
-                        <a:rPr lang="en-US" sz="950" dirty="0">
-                          <a:solidFill>
-                            <a:srgbClr val="5B6B73"/>
-                          </a:solidFill>
-                          <a:latin typeface="Calibri" pitchFamily="34" charset="0"/>
-                          <a:ea typeface="Calibri" pitchFamily="34" charset="-122"/>
-                          <a:cs typeface="Calibri" pitchFamily="34" charset="-120"/>
-                        </a:rPr>
-                        <a:t>TA - Parada Programada</a:t>
-                      </a:r>
-                      <a:endParaRPr lang="en-US" sz="950" dirty="0">
-                        <a:latin typeface="Calibri" charset="0"/>
-                        <a:ea typeface="Calibri" charset="0"/>
-                        <a:cs typeface="Calibri" charset="0"/>
-                      </a:endParaRPr>
-                    </a:p>
-                  </a:txBody>
-                  <a:tcPr marL="91440" marR="91440" marT="45720" marB="45720" anchor="ctr">
-                    <a:lnL w="6350" cap="flat" cmpd="sng" algn="ctr">
-                      <a:solidFill>
-                        <a:srgbClr val="E3E8E9"/>
-                      </a:solidFill>
-                      <a:prstDash val="solid"/>
-                      <a:round/>
-                      <a:headEnd type="none" w="med" len="med"/>
-                      <a:tailEnd type="none" w="med" len="med"/>
-                    </a:lnL>
-                    <a:lnR w="6350" cap="flat" cmpd="sng" algn="ctr">
-                      <a:solidFill>
-                        <a:srgbClr val="E3E8E9"/>
-                      </a:solidFill>
-                      <a:prstDash val="solid"/>
-                      <a:round/>
-                      <a:headEnd type="none" w="med" len="med"/>
-                      <a:tailEnd type="none" w="med" len="med"/>
-                    </a:lnR>
-                    <a:lnT w="6350" cap="flat" cmpd="sng" algn="ctr">
-                      <a:solidFill>
-                        <a:srgbClr val="E3E8E9"/>
-                      </a:solidFill>
-                      <a:prstDash val="solid"/>
-                      <a:round/>
-                      <a:headEnd type="none" w="med" len="med"/>
-                      <a:tailEnd type="none" w="med" len="med"/>
-                    </a:lnT>
-                    <a:lnB w="6350" cap="flat" cmpd="sng" algn="ctr">
-                      <a:solidFill>
-                        <a:srgbClr val="E3E8E9"/>
-                      </a:solidFill>
-                      <a:prstDash val="solid"/>
-                      <a:round/>
-                      <a:headEnd type="none" w="med" len="med"/>
-                      <a:tailEnd type="none" w="med" len="med"/>
-                    </a:lnB>
-                    <a:solidFill>
-                      <a:srgbClr val="FFFFFF"/>
-                    </a:solidFill>
-                  </a:tcPr>
-                </a:tc>
-                <a:tc>
-                  <a:txBody>
-                    <a:bodyPr/>
-                    <a:lstStyle/>
-                    <a:p>
-                      <a:pPr algn="r" indent="0" marL="0">
-                        <a:buNone/>
-                      </a:pPr>
-                      <a:r>
-                        <a:rPr lang="en-US" sz="1000" b="1" dirty="0">
-                          <a:solidFill>
-                            <a:srgbClr val="0B2A3D"/>
-                          </a:solidFill>
-                          <a:latin typeface="Calibri" pitchFamily="34" charset="0"/>
-                          <a:ea typeface="Calibri" pitchFamily="34" charset="-122"/>
-                          <a:cs typeface="Calibri" pitchFamily="34" charset="-120"/>
-                        </a:rPr>
-                        <a:t>US$ 247,6 mil</a:t>
-                      </a:r>
-                      <a:endParaRPr lang="en-US" sz="1000" dirty="0">
-                        <a:latin typeface="Calibri" charset="0"/>
-                        <a:ea typeface="Calibri" charset="0"/>
-                        <a:cs typeface="Calibri" charset="0"/>
-                      </a:endParaRPr>
-                    </a:p>
-                  </a:txBody>
-                  <a:tcPr marL="91440" marR="91440" marT="45720" marB="45720" anchor="ctr">
-                    <a:lnL w="6350" cap="flat" cmpd="sng" algn="ctr">
-                      <a:solidFill>
-                        <a:srgbClr val="E3E8E9"/>
-                      </a:solidFill>
-                      <a:prstDash val="solid"/>
-                      <a:round/>
-                      <a:headEnd type="none" w="med" len="med"/>
-                      <a:tailEnd type="none" w="med" len="med"/>
-                    </a:lnL>
-                    <a:lnR w="6350" cap="flat" cmpd="sng" algn="ctr">
-                      <a:solidFill>
-                        <a:srgbClr val="E3E8E9"/>
-                      </a:solidFill>
-                      <a:prstDash val="solid"/>
-                      <a:round/>
-                      <a:headEnd type="none" w="med" len="med"/>
-                      <a:tailEnd type="none" w="med" len="med"/>
-                    </a:lnR>
-                    <a:lnT w="6350" cap="flat" cmpd="sng" algn="ctr">
-                      <a:solidFill>
-                        <a:srgbClr val="E3E8E9"/>
-                      </a:solidFill>
-                      <a:prstDash val="solid"/>
-                      <a:round/>
-                      <a:headEnd type="none" w="med" len="med"/>
-                      <a:tailEnd type="none" w="med" len="med"/>
-                    </a:lnT>
-                    <a:lnB w="6350" cap="flat" cmpd="sng" algn="ctr">
-                      <a:solidFill>
-                        <a:srgbClr val="E3E8E9"/>
-                      </a:solidFill>
-                      <a:prstDash val="solid"/>
-                      <a:round/>
-                      <a:headEnd type="none" w="med" len="med"/>
-                      <a:tailEnd type="none" w="med" len="med"/>
-                    </a:lnB>
-                    <a:solidFill>
-                      <a:srgbClr val="FFFFFF"/>
-                    </a:solidFill>
-                  </a:tcPr>
-                </a:tc>
-              </a:tr>
-              <a:tr h="288036">
-                <a:tc>
-                  <a:txBody>
-                    <a:bodyPr/>
-                    <a:lstStyle/>
-                    <a:p>
-                      <a:pPr indent="0" marL="0">
-                        <a:buNone/>
-                      </a:pPr>
-                      <a:r>
-                        <a:rPr lang="en-US" sz="1000" dirty="0">
-                          <a:solidFill>
-                            <a:srgbClr val="1C2B33"/>
-                          </a:solidFill>
-                          <a:latin typeface="Calibri" pitchFamily="34" charset="0"/>
-                          <a:ea typeface="Calibri" pitchFamily="34" charset="-122"/>
-                          <a:cs typeface="Calibri" pitchFamily="34" charset="-120"/>
-                        </a:rPr>
-                        <a:t>Comutação tanques de diesel (tanque e sedimentação e serviço)</a:t>
-                      </a:r>
-                      <a:endParaRPr lang="en-US" sz="1000" dirty="0">
-                        <a:latin typeface="Calibri" charset="0"/>
-                        <a:ea typeface="Calibri" charset="0"/>
-                        <a:cs typeface="Calibri" charset="0"/>
-                      </a:endParaRPr>
-                    </a:p>
-                  </a:txBody>
-                  <a:tcPr marL="91440" marR="91440" marT="45720" marB="45720" anchor="ctr">
-                    <a:lnL w="6350" cap="flat" cmpd="sng" algn="ctr">
-                      <a:solidFill>
-                        <a:srgbClr val="E3E8E9"/>
-                      </a:solidFill>
-                      <a:prstDash val="solid"/>
-                      <a:round/>
-                      <a:headEnd type="none" w="med" len="med"/>
-                      <a:tailEnd type="none" w="med" len="med"/>
-                    </a:lnL>
-                    <a:lnR w="6350" cap="flat" cmpd="sng" algn="ctr">
-                      <a:solidFill>
-                        <a:srgbClr val="E3E8E9"/>
-                      </a:solidFill>
-                      <a:prstDash val="solid"/>
-                      <a:round/>
-                      <a:headEnd type="none" w="med" len="med"/>
-                      <a:tailEnd type="none" w="med" len="med"/>
-                    </a:lnR>
-                    <a:lnT w="6350" cap="flat" cmpd="sng" algn="ctr">
-                      <a:solidFill>
-                        <a:srgbClr val="E3E8E9"/>
-                      </a:solidFill>
-                      <a:prstDash val="solid"/>
-                      <a:round/>
-                      <a:headEnd type="none" w="med" len="med"/>
-                      <a:tailEnd type="none" w="med" len="med"/>
-                    </a:lnT>
-                    <a:lnB w="6350" cap="flat" cmpd="sng" algn="ctr">
-                      <a:solidFill>
-                        <a:srgbClr val="E3E8E9"/>
-                      </a:solidFill>
-                      <a:prstDash val="solid"/>
-                      <a:round/>
-                      <a:headEnd type="none" w="med" len="med"/>
-                      <a:tailEnd type="none" w="med" len="med"/>
-                    </a:lnB>
-                    <a:solidFill>
-                      <a:srgbClr val="F0F4F5"/>
-                    </a:solidFill>
-                  </a:tcPr>
-                </a:tc>
-                <a:tc>
-                  <a:txBody>
-                    <a:bodyPr/>
-                    <a:lstStyle/>
-                    <a:p>
-                      <a:pPr indent="0" marL="0">
-                        <a:buNone/>
-                      </a:pPr>
-                      <a:r>
-                        <a:rPr lang="en-US" sz="950" dirty="0">
-                          <a:solidFill>
-                            <a:srgbClr val="5B6B73"/>
-                          </a:solidFill>
-                          <a:latin typeface="Calibri" pitchFamily="34" charset="0"/>
-                          <a:ea typeface="Calibri" pitchFamily="34" charset="-122"/>
-                          <a:cs typeface="Calibri" pitchFamily="34" charset="-120"/>
-                        </a:rPr>
-                        <a:t>Eficiência de Produção</a:t>
-                      </a:r>
-                      <a:endParaRPr lang="en-US" sz="950" dirty="0">
-                        <a:latin typeface="Calibri" charset="0"/>
-                        <a:ea typeface="Calibri" charset="0"/>
-                        <a:cs typeface="Calibri" charset="0"/>
-                      </a:endParaRPr>
-                    </a:p>
-                  </a:txBody>
-                  <a:tcPr marL="91440" marR="91440" marT="45720" marB="45720" anchor="ctr">
-                    <a:lnL w="6350" cap="flat" cmpd="sng" algn="ctr">
-                      <a:solidFill>
-                        <a:srgbClr val="E3E8E9"/>
-                      </a:solidFill>
-                      <a:prstDash val="solid"/>
-                      <a:round/>
-                      <a:headEnd type="none" w="med" len="med"/>
-                      <a:tailEnd type="none" w="med" len="med"/>
-                    </a:lnL>
-                    <a:lnR w="6350" cap="flat" cmpd="sng" algn="ctr">
-                      <a:solidFill>
-                        <a:srgbClr val="E3E8E9"/>
-                      </a:solidFill>
-                      <a:prstDash val="solid"/>
-                      <a:round/>
-                      <a:headEnd type="none" w="med" len="med"/>
-                      <a:tailEnd type="none" w="med" len="med"/>
-                    </a:lnR>
-                    <a:lnT w="6350" cap="flat" cmpd="sng" algn="ctr">
-                      <a:solidFill>
-                        <a:srgbClr val="E3E8E9"/>
-                      </a:solidFill>
-                      <a:prstDash val="solid"/>
-                      <a:round/>
-                      <a:headEnd type="none" w="med" len="med"/>
-                      <a:tailEnd type="none" w="med" len="med"/>
-                    </a:lnT>
-                    <a:lnB w="6350" cap="flat" cmpd="sng" algn="ctr">
-                      <a:solidFill>
-                        <a:srgbClr val="E3E8E9"/>
-                      </a:solidFill>
-                      <a:prstDash val="solid"/>
-                      <a:round/>
-                      <a:headEnd type="none" w="med" len="med"/>
-                      <a:tailEnd type="none" w="med" len="med"/>
-                    </a:lnB>
-                    <a:solidFill>
-                      <a:srgbClr val="F0F4F5"/>
-                    </a:solidFill>
-                  </a:tcPr>
-                </a:tc>
-                <a:tc>
-                  <a:txBody>
-                    <a:bodyPr/>
-                    <a:lstStyle/>
-                    <a:p>
-                      <a:pPr indent="0" marL="0">
-                        <a:buNone/>
-                      </a:pPr>
-                      <a:r>
-                        <a:rPr lang="en-US" sz="950" dirty="0">
-                          <a:solidFill>
-                            <a:srgbClr val="5B6B73"/>
-                          </a:solidFill>
-                          <a:latin typeface="Calibri" pitchFamily="34" charset="0"/>
-                          <a:ea typeface="Calibri" pitchFamily="34" charset="-122"/>
-                          <a:cs typeface="Calibri" pitchFamily="34" charset="-120"/>
-                        </a:rPr>
-                        <a:t>Projetos</a:t>
-                      </a:r>
-                      <a:endParaRPr lang="en-US" sz="950" dirty="0">
-                        <a:latin typeface="Calibri" charset="0"/>
-                        <a:ea typeface="Calibri" charset="0"/>
-                        <a:cs typeface="Calibri" charset="0"/>
-                      </a:endParaRPr>
-                    </a:p>
-                  </a:txBody>
-                  <a:tcPr marL="91440" marR="91440" marT="45720" marB="45720" anchor="ctr">
-                    <a:lnL w="6350" cap="flat" cmpd="sng" algn="ctr">
-                      <a:solidFill>
-                        <a:srgbClr val="E3E8E9"/>
-                      </a:solidFill>
-                      <a:prstDash val="solid"/>
-                      <a:round/>
-                      <a:headEnd type="none" w="med" len="med"/>
-                      <a:tailEnd type="none" w="med" len="med"/>
-                    </a:lnL>
-                    <a:lnR w="6350" cap="flat" cmpd="sng" algn="ctr">
-                      <a:solidFill>
-                        <a:srgbClr val="E3E8E9"/>
-                      </a:solidFill>
-                      <a:prstDash val="solid"/>
-                      <a:round/>
-                      <a:headEnd type="none" w="med" len="med"/>
-                      <a:tailEnd type="none" w="med" len="med"/>
-                    </a:lnR>
-                    <a:lnT w="6350" cap="flat" cmpd="sng" algn="ctr">
-                      <a:solidFill>
-                        <a:srgbClr val="E3E8E9"/>
-                      </a:solidFill>
-                      <a:prstDash val="solid"/>
-                      <a:round/>
-                      <a:headEnd type="none" w="med" len="med"/>
-                      <a:tailEnd type="none" w="med" len="med"/>
-                    </a:lnT>
-                    <a:lnB w="6350" cap="flat" cmpd="sng" algn="ctr">
-                      <a:solidFill>
-                        <a:srgbClr val="E3E8E9"/>
-                      </a:solidFill>
-                      <a:prstDash val="solid"/>
-                      <a:round/>
-                      <a:headEnd type="none" w="med" len="med"/>
-                      <a:tailEnd type="none" w="med" len="med"/>
-                    </a:lnB>
-                    <a:solidFill>
-                      <a:srgbClr val="F0F4F5"/>
-                    </a:solidFill>
-                  </a:tcPr>
-                </a:tc>
-                <a:tc>
-                  <a:txBody>
-                    <a:bodyPr/>
-                    <a:lstStyle/>
-                    <a:p>
-                      <a:pPr algn="r" indent="0" marL="0">
-                        <a:buNone/>
-                      </a:pPr>
-                      <a:r>
-                        <a:rPr lang="en-US" sz="1000" b="1" dirty="0">
-                          <a:solidFill>
-                            <a:srgbClr val="0B2A3D"/>
-                          </a:solidFill>
-                          <a:latin typeface="Calibri" pitchFamily="34" charset="0"/>
-                          <a:ea typeface="Calibri" pitchFamily="34" charset="-122"/>
-                          <a:cs typeface="Calibri" pitchFamily="34" charset="-120"/>
-                        </a:rPr>
-                        <a:t>US$ 236,6 mil</a:t>
-                      </a:r>
-                      <a:endParaRPr lang="en-US" sz="1000" dirty="0">
-                        <a:latin typeface="Calibri" charset="0"/>
-                        <a:ea typeface="Calibri" charset="0"/>
-                        <a:cs typeface="Calibri" charset="0"/>
-                      </a:endParaRPr>
-                    </a:p>
-                  </a:txBody>
-                  <a:tcPr marL="91440" marR="91440" marT="45720" marB="45720" anchor="ctr">
-                    <a:lnL w="6350" cap="flat" cmpd="sng" algn="ctr">
-                      <a:solidFill>
-                        <a:srgbClr val="E3E8E9"/>
-                      </a:solidFill>
-                      <a:prstDash val="solid"/>
-                      <a:round/>
-                      <a:headEnd type="none" w="med" len="med"/>
-                      <a:tailEnd type="none" w="med" len="med"/>
-                    </a:lnL>
-                    <a:lnR w="6350" cap="flat" cmpd="sng" algn="ctr">
-                      <a:solidFill>
-                        <a:srgbClr val="E3E8E9"/>
-                      </a:solidFill>
-                      <a:prstDash val="solid"/>
-                      <a:round/>
-                      <a:headEnd type="none" w="med" len="med"/>
-                      <a:tailEnd type="none" w="med" len="med"/>
-                    </a:lnR>
-                    <a:lnT w="6350" cap="flat" cmpd="sng" algn="ctr">
-                      <a:solidFill>
-                        <a:srgbClr val="E3E8E9"/>
-                      </a:solidFill>
-                      <a:prstDash val="solid"/>
-                      <a:round/>
-                      <a:headEnd type="none" w="med" len="med"/>
-                      <a:tailEnd type="none" w="med" len="med"/>
-                    </a:lnT>
-                    <a:lnB w="6350" cap="flat" cmpd="sng" algn="ctr">
-                      <a:solidFill>
-                        <a:srgbClr val="E3E8E9"/>
-                      </a:solidFill>
-                      <a:prstDash val="solid"/>
-                      <a:round/>
-                      <a:headEnd type="none" w="med" len="med"/>
-                      <a:tailEnd type="none" w="med" len="med"/>
-                    </a:lnB>
-                    <a:solidFill>
-                      <a:srgbClr val="F0F4F5"/>
-                    </a:solidFill>
-                  </a:tcPr>
-                </a:tc>
-              </a:tr>
-              <a:tr h="288036">
                 <a:tc gridSpan="3">
                   <a:txBody>
                     <a:bodyPr/>
@@ -17047,7 +17047,7 @@
                           <a:ea typeface="Calibri" pitchFamily="34" charset="-122"/>
                           <a:cs typeface="Calibri" pitchFamily="34" charset="-120"/>
                         </a:rPr>
-                        <a:t>Outros 47 escopos (itens de menor valor individual)</a:t>
+                        <a:t>Outros 58 escopos (itens de menor valor individual)</a:t>
                       </a:r>
                       <a:endParaRPr lang="en-US" sz="950" dirty="0">
                         <a:latin typeface="Calibri" charset="0"/>
@@ -17121,7 +17121,7 @@
                           <a:ea typeface="Calibri" pitchFamily="34" charset="-122"/>
                           <a:cs typeface="Calibri" pitchFamily="34" charset="-120"/>
                         </a:rPr>
-                        <a:t>US$ 2,4 mi</a:t>
+                        <a:t>US$ 4,3 mi</a:t>
                       </a:r>
                       <a:endParaRPr lang="en-US" sz="1000" dirty="0">
                         <a:latin typeface="Calibri" charset="0"/>
@@ -17697,7 +17697,7 @@
                 <a:ea typeface="Cambria" pitchFamily="34" charset="-122"/>
                 <a:cs typeface="Cambria" pitchFamily="34" charset="-120"/>
               </a:rPr>
-              <a:t>US$ 4,3 mi</a:t>
+              <a:t>US$ 3,6 mi</a:t>
             </a:r>
             <a:endParaRPr lang="en-US" sz="3300" dirty="0"/>
           </a:p>
@@ -17836,7 +17836,7 @@
                 <a:ea typeface="Cambria" pitchFamily="34" charset="-122"/>
                 <a:cs typeface="Cambria" pitchFamily="34" charset="-120"/>
               </a:rPr>
-              <a:t>US$ 2,7 mi</a:t>
+              <a:t>US$ 3,0 mi</a:t>
             </a:r>
             <a:endParaRPr lang="en-US" sz="1800" dirty="0"/>
           </a:p>
@@ -17936,7 +17936,7 @@
                 <a:ea typeface="Cambria" pitchFamily="34" charset="-122"/>
                 <a:cs typeface="Cambria" pitchFamily="34" charset="-120"/>
               </a:rPr>
-              <a:t>US$ 1,6 mi</a:t>
+              <a:t>US$ 592,3 mil</a:t>
             </a:r>
             <a:endParaRPr lang="en-US" sz="1800" dirty="0"/>
           </a:p>
@@ -18036,7 +18036,7 @@
                 <a:ea typeface="Cambria" pitchFamily="34" charset="-122"/>
                 <a:cs typeface="Cambria" pitchFamily="34" charset="-120"/>
               </a:rPr>
-              <a:t>US$ 2,3 mi</a:t>
+              <a:t>US$ 2,5 mi</a:t>
             </a:r>
             <a:endParaRPr lang="en-US" sz="1800" dirty="0"/>
           </a:p>
@@ -18136,7 +18136,7 @@
                 <a:ea typeface="Cambria" pitchFamily="34" charset="-122"/>
                 <a:cs typeface="Cambria" pitchFamily="34" charset="-120"/>
               </a:rPr>
-              <a:t>US$ 2,0 mi</a:t>
+              <a:t>US$ 1,1 mi</a:t>
             </a:r>
             <a:endParaRPr lang="en-US" sz="1800" dirty="0"/>
           </a:p>
@@ -18315,7 +18315,7 @@
                 <a:ea typeface="Calibri" pitchFamily="34" charset="-122"/>
                 <a:cs typeface="Calibri" pitchFamily="34" charset="-120"/>
               </a:rPr>
-              <a:t>US$ 2,4 mi</a:t>
+              <a:t>US$ 2,2 mi</a:t>
             </a:r>
             <a:endParaRPr lang="en-US" sz="1100" dirty="0"/>
           </a:p>
@@ -18413,7 +18413,7 @@
                 <a:ea typeface="Calibri" pitchFamily="34" charset="-122"/>
                 <a:cs typeface="Calibri" pitchFamily="34" charset="-120"/>
               </a:rPr>
-              <a:t>US$ 1,6 mi</a:t>
+              <a:t>US$ 592,3 mil</a:t>
             </a:r>
             <a:endParaRPr lang="en-US" sz="1100" dirty="0"/>
           </a:p>
@@ -18428,6 +18428,104 @@
         <p:spPr>
           <a:xfrm>
             <a:off x="566928" y="4133088"/>
+            <a:ext cx="3316529" cy="365760"/>
+          </a:xfrm>
+          <a:prstGeom prst="rect">
+            <a:avLst/>
+          </a:prstGeom>
+          <a:noFill/>
+          <a:ln/>
+        </p:spPr>
+        <p:txBody>
+          <a:bodyPr wrap="square" lIns="0" tIns="0" rIns="0" bIns="0" rtlCol="0" anchor="ctr"/>
+          <a:lstStyle/>
+          <a:p>
+            <a:pPr indent="0" marL="0">
+              <a:buNone/>
+            </a:pPr>
+            <a:r>
+              <a:rPr lang="en-US" sz="1100" dirty="0">
+                <a:solidFill>
+                  <a:srgbClr val="1C2B33"/>
+                </a:solidFill>
+                <a:latin typeface="Calibri" pitchFamily="34" charset="0"/>
+                <a:ea typeface="Calibri" pitchFamily="34" charset="-122"/>
+                <a:cs typeface="Calibri" pitchFamily="34" charset="-120"/>
+              </a:rPr>
+              <a:t>EIM - Manutenção &amp; Integridade</a:t>
+            </a:r>
+            <a:endParaRPr lang="en-US" sz="1100" dirty="0"/>
+          </a:p>
+        </p:txBody>
+      </p:sp>
+      <p:sp>
+        <p:nvSpPr>
+          <p:cNvPr id="30" name="Text 28"/>
+          <p:cNvSpPr txBox="1"/>
+          <p:nvPr/>
+        </p:nvSpPr>
+        <p:spPr>
+          <a:xfrm>
+            <a:off x="3773729" y="4133088"/>
+            <a:ext cx="1815998" cy="365760"/>
+          </a:xfrm>
+          <a:prstGeom prst="rect">
+            <a:avLst/>
+          </a:prstGeom>
+          <a:noFill/>
+          <a:ln/>
+        </p:spPr>
+        <p:txBody>
+          <a:bodyPr wrap="square" lIns="0" tIns="0" rIns="0" bIns="0" rtlCol="0" anchor="ctr"/>
+          <a:lstStyle/>
+          <a:p>
+            <a:pPr algn="r" indent="0" marL="0">
+              <a:buNone/>
+            </a:pPr>
+            <a:r>
+              <a:rPr lang="en-US" sz="1100" b="1" dirty="0">
+                <a:solidFill>
+                  <a:srgbClr val="0B2A3D"/>
+                </a:solidFill>
+                <a:latin typeface="Calibri" pitchFamily="34" charset="0"/>
+                <a:ea typeface="Calibri" pitchFamily="34" charset="-122"/>
+                <a:cs typeface="Calibri" pitchFamily="34" charset="-120"/>
+              </a:rPr>
+              <a:t>US$ 519,2 mil</a:t>
+            </a:r>
+            <a:endParaRPr lang="en-US" sz="1100" dirty="0"/>
+          </a:p>
+        </p:txBody>
+      </p:sp>
+      <p:sp>
+        <p:nvSpPr>
+          <p:cNvPr id="31" name="Shape 29"/>
+          <p:cNvSpPr/>
+          <p:nvPr/>
+        </p:nvSpPr>
+        <p:spPr>
+          <a:xfrm>
+            <a:off x="457200" y="4498848"/>
+            <a:ext cx="5349240" cy="365760"/>
+          </a:xfrm>
+          <a:prstGeom prst="rect">
+            <a:avLst/>
+          </a:prstGeom>
+          <a:solidFill>
+            <a:srgbClr val="F0F4F5"/>
+          </a:solidFill>
+          <a:ln/>
+        </p:spPr>
+      </p:sp>
+      <p:sp>
+        <p:nvSpPr>
+          <p:cNvPr id="32" name="Text 30"/>
+          <p:cNvSpPr txBox="1"/>
+          <p:nvPr/>
+        </p:nvSpPr>
+        <p:spPr>
+          <a:xfrm>
+            <a:off x="566928" y="4498848"/>
             <a:ext cx="3316529" cy="365760"/>
           </a:xfrm>
           <a:prstGeom prst="rect">
@@ -18460,13 +18558,13 @@
       </p:sp>
       <p:sp>
         <p:nvSpPr>
-          <p:cNvPr id="30" name="Text 28"/>
+          <p:cNvPr id="33" name="Text 31"/>
           <p:cNvSpPr txBox="1"/>
           <p:nvPr/>
         </p:nvSpPr>
         <p:spPr>
           <a:xfrm>
-            <a:off x="3773729" y="4133088"/>
+            <a:off x="3773729" y="4498848"/>
             <a:ext cx="1815998" cy="365760"/>
           </a:xfrm>
           <a:prstGeom prst="rect">
@@ -18499,33 +18597,13 @@
       </p:sp>
       <p:sp>
         <p:nvSpPr>
-          <p:cNvPr id="31" name="Shape 29"/>
-          <p:cNvSpPr/>
+          <p:cNvPr id="34" name="Text 32"/>
+          <p:cNvSpPr txBox="1"/>
           <p:nvPr/>
         </p:nvSpPr>
         <p:spPr>
           <a:xfrm>
-            <a:off x="457200" y="4498848"/>
-            <a:ext cx="5349240" cy="365760"/>
-          </a:xfrm>
-          <a:prstGeom prst="rect">
-            <a:avLst/>
-          </a:prstGeom>
-          <a:solidFill>
-            <a:srgbClr val="F0F4F5"/>
-          </a:solidFill>
-          <a:ln/>
-        </p:spPr>
-      </p:sp>
-      <p:sp>
-        <p:nvSpPr>
-          <p:cNvPr id="32" name="Text 30"/>
-          <p:cNvSpPr txBox="1"/>
-          <p:nvPr/>
-        </p:nvSpPr>
-        <p:spPr>
-          <a:xfrm>
-            <a:off x="566928" y="4498848"/>
+            <a:off x="566928" y="4864608"/>
             <a:ext cx="3316529" cy="365760"/>
           </a:xfrm>
           <a:prstGeom prst="rect">
@@ -18558,13 +18636,13 @@
       </p:sp>
       <p:sp>
         <p:nvSpPr>
-          <p:cNvPr id="33" name="Text 31"/>
+          <p:cNvPr id="35" name="Text 33"/>
           <p:cNvSpPr txBox="1"/>
           <p:nvPr/>
         </p:nvSpPr>
         <p:spPr>
           <a:xfrm>
-            <a:off x="3773729" y="4498848"/>
+            <a:off x="3773729" y="4864608"/>
             <a:ext cx="1815998" cy="365760"/>
           </a:xfrm>
           <a:prstGeom prst="rect">
@@ -18597,7 +18675,7 @@
       </p:sp>
       <p:sp>
         <p:nvSpPr>
-          <p:cNvPr id="34" name="Text 32"/>
+          <p:cNvPr id="36" name="Text 34"/>
           <p:cNvSpPr txBox="1"/>
           <p:nvPr/>
         </p:nvSpPr>
@@ -18636,7 +18714,7 @@
       </p:sp>
       <p:sp>
         <p:nvSpPr>
-          <p:cNvPr id="35" name="Shape 33"/>
+          <p:cNvPr id="37" name="Shape 35"/>
           <p:cNvSpPr/>
           <p:nvPr/>
         </p:nvSpPr>
@@ -18659,7 +18737,7 @@
       </p:sp>
       <p:sp>
         <p:nvSpPr>
-          <p:cNvPr id="36" name="Text 34"/>
+          <p:cNvPr id="38" name="Text 36"/>
           <p:cNvSpPr txBox="1"/>
           <p:nvPr/>
         </p:nvSpPr>
@@ -18698,7 +18776,7 @@
       </p:sp>
       <p:sp>
         <p:nvSpPr>
-          <p:cNvPr id="37" name="Text 35"/>
+          <p:cNvPr id="39" name="Text 37"/>
           <p:cNvSpPr txBox="1"/>
           <p:nvPr/>
         </p:nvSpPr>
@@ -18729,7 +18807,7 @@
                 <a:ea typeface="Calibri" pitchFamily="34" charset="-122"/>
                 <a:cs typeface="Calibri" pitchFamily="34" charset="-120"/>
               </a:rPr>
-              <a:t>US$ 2,5 mi</a:t>
+              <a:t>US$ 1,5 mi</a:t>
             </a:r>
             <a:endParaRPr lang="en-US" sz="1100" dirty="0"/>
           </a:p>
@@ -18737,7 +18815,7 @@
       </p:sp>
       <p:sp>
         <p:nvSpPr>
-          <p:cNvPr id="38" name="Shape 36"/>
+          <p:cNvPr id="40" name="Shape 38"/>
           <p:cNvSpPr/>
           <p:nvPr/>
         </p:nvSpPr>
@@ -18757,7 +18835,7 @@
       </p:sp>
       <p:sp>
         <p:nvSpPr>
-          <p:cNvPr id="39" name="Text 37"/>
+          <p:cNvPr id="41" name="Text 39"/>
           <p:cNvSpPr txBox="1"/>
           <p:nvPr/>
         </p:nvSpPr>
@@ -18796,7 +18874,7 @@
       </p:sp>
       <p:sp>
         <p:nvSpPr>
-          <p:cNvPr id="40" name="Text 38"/>
+          <p:cNvPr id="42" name="Text 40"/>
           <p:cNvSpPr txBox="1"/>
           <p:nvPr/>
         </p:nvSpPr>
@@ -18827,7 +18905,7 @@
                 <a:ea typeface="Calibri" pitchFamily="34" charset="-122"/>
                 <a:cs typeface="Calibri" pitchFamily="34" charset="-120"/>
               </a:rPr>
-              <a:t>US$ 1,6 mi</a:t>
+              <a:t>US$ 1,4 mi</a:t>
             </a:r>
             <a:endParaRPr lang="en-US" sz="1100" dirty="0"/>
           </a:p>
@@ -18835,13 +18913,111 @@
       </p:sp>
       <p:sp>
         <p:nvSpPr>
-          <p:cNvPr id="41" name="Text 39"/>
+          <p:cNvPr id="43" name="Text 41"/>
           <p:cNvSpPr txBox="1"/>
           <p:nvPr/>
         </p:nvSpPr>
         <p:spPr>
           <a:xfrm>
             <a:off x="6464808" y="4133088"/>
+            <a:ext cx="3316529" cy="365760"/>
+          </a:xfrm>
+          <a:prstGeom prst="rect">
+            <a:avLst/>
+          </a:prstGeom>
+          <a:noFill/>
+          <a:ln/>
+        </p:spPr>
+        <p:txBody>
+          <a:bodyPr wrap="square" lIns="0" tIns="0" rIns="0" bIns="0" rtlCol="0" anchor="ctr"/>
+          <a:lstStyle/>
+          <a:p>
+            <a:pPr indent="0" marL="0">
+              <a:buNone/>
+            </a:pPr>
+            <a:r>
+              <a:rPr lang="en-US" sz="1100" dirty="0">
+                <a:solidFill>
+                  <a:srgbClr val="1C2B33"/>
+                </a:solidFill>
+                <a:latin typeface="Calibri" pitchFamily="34" charset="0"/>
+                <a:ea typeface="Calibri" pitchFamily="34" charset="-122"/>
+                <a:cs typeface="Calibri" pitchFamily="34" charset="-120"/>
+              </a:rPr>
+              <a:t>Rotina Operacional</a:t>
+            </a:r>
+            <a:endParaRPr lang="en-US" sz="1100" dirty="0"/>
+          </a:p>
+        </p:txBody>
+      </p:sp>
+      <p:sp>
+        <p:nvSpPr>
+          <p:cNvPr id="44" name="Text 42"/>
+          <p:cNvSpPr txBox="1"/>
+          <p:nvPr/>
+        </p:nvSpPr>
+        <p:spPr>
+          <a:xfrm>
+            <a:off x="9671609" y="4133088"/>
+            <a:ext cx="1815998" cy="365760"/>
+          </a:xfrm>
+          <a:prstGeom prst="rect">
+            <a:avLst/>
+          </a:prstGeom>
+          <a:noFill/>
+          <a:ln/>
+        </p:spPr>
+        <p:txBody>
+          <a:bodyPr wrap="square" lIns="0" tIns="0" rIns="0" bIns="0" rtlCol="0" anchor="ctr"/>
+          <a:lstStyle/>
+          <a:p>
+            <a:pPr algn="r" indent="0" marL="0">
+              <a:buNone/>
+            </a:pPr>
+            <a:r>
+              <a:rPr lang="en-US" sz="1100" b="1" dirty="0">
+                <a:solidFill>
+                  <a:srgbClr val="0B2A3D"/>
+                </a:solidFill>
+                <a:latin typeface="Calibri" pitchFamily="34" charset="0"/>
+                <a:ea typeface="Calibri" pitchFamily="34" charset="-122"/>
+                <a:cs typeface="Calibri" pitchFamily="34" charset="-120"/>
+              </a:rPr>
+              <a:t>US$ 519,2 mil</a:t>
+            </a:r>
+            <a:endParaRPr lang="en-US" sz="1100" dirty="0"/>
+          </a:p>
+        </p:txBody>
+      </p:sp>
+      <p:sp>
+        <p:nvSpPr>
+          <p:cNvPr id="45" name="Shape 43"/>
+          <p:cNvSpPr/>
+          <p:nvPr/>
+        </p:nvSpPr>
+        <p:spPr>
+          <a:xfrm>
+            <a:off x="6355080" y="4498848"/>
+            <a:ext cx="5349240" cy="365760"/>
+          </a:xfrm>
+          <a:prstGeom prst="rect">
+            <a:avLst/>
+          </a:prstGeom>
+          <a:solidFill>
+            <a:srgbClr val="F0F4F5"/>
+          </a:solidFill>
+          <a:ln/>
+        </p:spPr>
+      </p:sp>
+      <p:sp>
+        <p:nvSpPr>
+          <p:cNvPr id="46" name="Text 44"/>
+          <p:cNvSpPr txBox="1"/>
+          <p:nvPr/>
+        </p:nvSpPr>
+        <p:spPr>
+          <a:xfrm>
+            <a:off x="6464808" y="4498848"/>
             <a:ext cx="3316529" cy="365760"/>
           </a:xfrm>
           <a:prstGeom prst="rect">
@@ -18874,13 +19050,13 @@
       </p:sp>
       <p:sp>
         <p:nvSpPr>
-          <p:cNvPr id="42" name="Text 40"/>
+          <p:cNvPr id="47" name="Text 45"/>
           <p:cNvSpPr txBox="1"/>
           <p:nvPr/>
         </p:nvSpPr>
         <p:spPr>
           <a:xfrm>
-            <a:off x="9671609" y="4133088"/>
+            <a:off x="9671609" y="4498848"/>
             <a:ext cx="1815998" cy="365760"/>
           </a:xfrm>
           <a:prstGeom prst="rect">
@@ -18913,7 +19089,7 @@
       </p:sp>
       <p:sp>
         <p:nvSpPr>
-          <p:cNvPr id="43" name="Text 41"/>
+          <p:cNvPr id="48" name="Text 46"/>
           <p:cNvSpPr txBox="1"/>
           <p:nvPr/>
         </p:nvSpPr>
@@ -19108,7 +19284,7 @@
                 <a:ea typeface="Cambria" pitchFamily="34" charset="-122"/>
                 <a:cs typeface="Cambria" pitchFamily="34" charset="-120"/>
               </a:rPr>
-              <a:t>US$ 110,5 mi</a:t>
+              <a:t>US$ 115,0 mi</a:t>
             </a:r>
             <a:endParaRPr lang="en-US" sz="2600" dirty="0"/>
           </a:p>
@@ -19247,7 +19423,7 @@
                 <a:ea typeface="Cambria" pitchFamily="34" charset="-122"/>
                 <a:cs typeface="Cambria" pitchFamily="34" charset="-120"/>
               </a:rPr>
-              <a:t>231</a:t>
+              <a:t>234</a:t>
             </a:r>
             <a:endParaRPr lang="en-US" sz="2600" dirty="0"/>
           </a:p>
@@ -20553,7 +20729,7 @@
                             <a:srgbClr val="1C2B33"/>
                           </a:solidFill>
                         </a:rPr>
-                        <a:t>US$ 14,0 mi</a:t>
+                        <a:t>US$ 19,1 mi</a:t>
                       </a:r>
                       <a:endParaRPr lang="en-US" sz="1050" dirty="0"/>
                     </a:p>
@@ -20614,7 +20790,7 @@
                             <a:srgbClr val="1C2B33"/>
                           </a:solidFill>
                         </a:rPr>
-                        <a:t>59</a:t>
+                        <a:t>70</a:t>
                       </a:r>
                       <a:endParaRPr lang="en-US" sz="1050" dirty="0"/>
                     </a:p>
@@ -20738,7 +20914,7 @@
                             <a:srgbClr val="1C2B33"/>
                           </a:solidFill>
                         </a:rPr>
-                        <a:t>US$ 4,3 mi</a:t>
+                        <a:t>US$ 3,6 mi</a:t>
                       </a:r>
                       <a:endParaRPr lang="en-US" sz="1050" dirty="0"/>
                     </a:p>
@@ -20799,7 +20975,7 @@
                             <a:srgbClr val="1C2B33"/>
                           </a:solidFill>
                         </a:rPr>
-                        <a:t>35</a:t>
+                        <a:t>27</a:t>
                       </a:r>
                       <a:endParaRPr lang="en-US" sz="1050" dirty="0"/>
                     </a:p>
@@ -21108,7 +21284,7 @@
                             <a:srgbClr val="0B2A3D"/>
                           </a:solidFill>
                         </a:rPr>
-                        <a:t>US$ 110,5 mi</a:t>
+                        <a:t>US$ 115,0 mi</a:t>
                       </a:r>
                       <a:endParaRPr lang="en-US" sz="1050" dirty="0"/>
                     </a:p>
@@ -21169,7 +21345,7 @@
                             <a:srgbClr val="0B2A3D"/>
                           </a:solidFill>
                         </a:rPr>
-                        <a:t>231</a:t>
+                        <a:t>234</a:t>
                       </a:r>
                       <a:endParaRPr lang="en-US" sz="1050" dirty="0"/>
                     </a:p>
@@ -21416,7 +21592,7 @@
                 <a:ea typeface="Calibri" pitchFamily="34" charset="-122"/>
                 <a:cs typeface="Calibri" pitchFamily="34" charset="-120"/>
               </a:rPr>
-              <a:t>Principais escopos por valor · 35 itens no total</a:t>
+              <a:t>Principais escopos por valor · 27 itens no total</a:t>
             </a:r>
             <a:endParaRPr lang="en-US" sz="1250" dirty="0"/>
           </a:p>
@@ -22290,7 +22466,7 @@
                           <a:ea typeface="Calibri" pitchFamily="34" charset="-122"/>
                           <a:cs typeface="Calibri" pitchFamily="34" charset="-120"/>
                         </a:rPr>
-                        <a:t>TA - Caldeiraria</a:t>
+                        <a:t>MPP - Adequação do sistema de Selagem Multifásica</a:t>
                       </a:r>
                       <a:endParaRPr lang="en-US" sz="1000" dirty="0">
                         <a:latin typeface="Calibri" charset="0"/>
@@ -22358,7 +22534,7 @@
                           <a:ea typeface="Calibri" pitchFamily="34" charset="-122"/>
                           <a:cs typeface="Calibri" pitchFamily="34" charset="-120"/>
                         </a:rPr>
-                        <a:t>Eficiência de Produção</a:t>
+                        <a:t>Rotina Operacional</a:t>
                       </a:r>
                       <a:endParaRPr lang="en-US" sz="950" dirty="0">
                         <a:latin typeface="Calibri" charset="0"/>
@@ -22426,7 +22602,7 @@
                           <a:ea typeface="Calibri" pitchFamily="34" charset="-122"/>
                           <a:cs typeface="Calibri" pitchFamily="34" charset="-120"/>
                         </a:rPr>
-                        <a:t>TA - Parada Programada</a:t>
+                        <a:t>EIM - Manutenção &amp; Integridade</a:t>
                       </a:r>
                       <a:endParaRPr lang="en-US" sz="950" dirty="0">
                         <a:latin typeface="Calibri" charset="0"/>
@@ -22494,7 +22670,7 @@
                           <a:ea typeface="Calibri" pitchFamily="34" charset="-122"/>
                           <a:cs typeface="Calibri" pitchFamily="34" charset="-120"/>
                         </a:rPr>
-                        <a:t>US$ 484,9 mil</a:t>
+                        <a:t>US$ 519,2 mil</a:t>
                       </a:r>
                       <a:endParaRPr lang="en-US" sz="1000" dirty="0">
                         <a:latin typeface="Calibri" charset="0"/>
@@ -23112,7 +23288,7 @@
                           <a:ea typeface="Calibri" pitchFamily="34" charset="-122"/>
                           <a:cs typeface="Calibri" pitchFamily="34" charset="-120"/>
                         </a:rPr>
-                        <a:t>TA - NR13</a:t>
+                        <a:t>Mobilização TA</a:t>
                       </a:r>
                       <a:endParaRPr lang="en-US" sz="1000" dirty="0">
                         <a:latin typeface="Calibri" charset="0"/>
@@ -23316,7 +23492,7 @@
                           <a:ea typeface="Calibri" pitchFamily="34" charset="-122"/>
                           <a:cs typeface="Calibri" pitchFamily="34" charset="-120"/>
                         </a:rPr>
-                        <a:t>US$ 173,2 mil</a:t>
+                        <a:t>US$ 162,1 mil</a:t>
                       </a:r>
                       <a:endParaRPr lang="en-US" sz="1000" dirty="0">
                         <a:latin typeface="Calibri" charset="0"/>
@@ -23386,7 +23562,7 @@
                           <a:ea typeface="Calibri" pitchFamily="34" charset="-122"/>
                           <a:cs typeface="Calibri" pitchFamily="34" charset="-120"/>
                         </a:rPr>
-                        <a:t>Troca da Estação Meteorológica</a:t>
+                        <a:t>Implantação do projeto 'Muster Digital'</a:t>
                       </a:r>
                       <a:endParaRPr lang="en-US" sz="1000" dirty="0">
                         <a:latin typeface="Calibri" charset="0"/>
@@ -23454,7 +23630,7 @@
                           <a:ea typeface="Calibri" pitchFamily="34" charset="-122"/>
                           <a:cs typeface="Calibri" pitchFamily="34" charset="-120"/>
                         </a:rPr>
-                        <a:t>Integridade e Regulatório</a:t>
+                        <a:t>Bem Estar/Segurança</a:t>
                       </a:r>
                       <a:endParaRPr lang="en-US" sz="950" dirty="0">
                         <a:latin typeface="Calibri" charset="0"/>
@@ -23522,7 +23698,7 @@
                           <a:ea typeface="Calibri" pitchFamily="34" charset="-122"/>
                           <a:cs typeface="Calibri" pitchFamily="34" charset="-120"/>
                         </a:rPr>
-                        <a:t>Projetos</a:t>
+                        <a:t>Saúde e Segurança Ocupacional</a:t>
                       </a:r>
                       <a:endParaRPr lang="en-US" sz="950" dirty="0">
                         <a:latin typeface="Calibri" charset="0"/>
@@ -23590,7 +23766,7 @@
                           <a:ea typeface="Calibri" pitchFamily="34" charset="-122"/>
                           <a:cs typeface="Calibri" pitchFamily="34" charset="-120"/>
                         </a:rPr>
-                        <a:t>US$ 169,1 mil</a:t>
+                        <a:t>US$ 150,0 mil</a:t>
                       </a:r>
                       <a:endParaRPr lang="en-US" sz="1000" dirty="0">
                         <a:latin typeface="Calibri" charset="0"/>
@@ -23660,7 +23836,7 @@
                           <a:ea typeface="Calibri" pitchFamily="34" charset="-122"/>
                           <a:cs typeface="Calibri" pitchFamily="34" charset="-120"/>
                         </a:rPr>
-                        <a:t>Desmobilização TA</a:t>
+                        <a:t>PÓS TA - NR13</a:t>
                       </a:r>
                       <a:endParaRPr lang="en-US" sz="1000" dirty="0">
                         <a:latin typeface="Calibri" charset="0"/>
@@ -23864,7 +24040,7 @@
                           <a:ea typeface="Calibri" pitchFamily="34" charset="-122"/>
                           <a:cs typeface="Calibri" pitchFamily="34" charset="-120"/>
                         </a:rPr>
-                        <a:t>US$ 162,1 mil</a:t>
+                        <a:t>US$ 135,6 mil</a:t>
                       </a:r>
                       <a:endParaRPr lang="en-US" sz="1000" dirty="0">
                         <a:latin typeface="Calibri" charset="0"/>
@@ -23934,7 +24110,7 @@
                           <a:ea typeface="Calibri" pitchFamily="34" charset="-122"/>
                           <a:cs typeface="Calibri" pitchFamily="34" charset="-120"/>
                         </a:rPr>
-                        <a:t>Mobilização TA</a:t>
+                        <a:t>PRÉ TA - Caldeiraria</a:t>
                       </a:r>
                       <a:endParaRPr lang="en-US" sz="1000" dirty="0">
                         <a:latin typeface="Calibri" charset="0"/>
@@ -24138,7 +24314,7 @@
                           <a:ea typeface="Calibri" pitchFamily="34" charset="-122"/>
                           <a:cs typeface="Calibri" pitchFamily="34" charset="-120"/>
                         </a:rPr>
-                        <a:t>US$ 162,1 mil</a:t>
+                        <a:t>US$ 132,9 mil</a:t>
                       </a:r>
                       <a:endParaRPr lang="en-US" sz="1000" dirty="0">
                         <a:latin typeface="Calibri" charset="0"/>
@@ -24208,7 +24384,7 @@
                           <a:ea typeface="Calibri" pitchFamily="34" charset="-122"/>
                           <a:cs typeface="Calibri" pitchFamily="34" charset="-120"/>
                         </a:rPr>
-                        <a:t>Implantação do projeto 'Muster Digital'</a:t>
+                        <a:t>ESTUDO DE ENGENHARIA</a:t>
                       </a:r>
                       <a:endParaRPr lang="en-US" sz="1000" dirty="0">
                         <a:latin typeface="Calibri" charset="0"/>
@@ -24276,7 +24452,7 @@
                           <a:ea typeface="Calibri" pitchFamily="34" charset="-122"/>
                           <a:cs typeface="Calibri" pitchFamily="34" charset="-120"/>
                         </a:rPr>
-                        <a:t>Bem Estar/Segurança</a:t>
+                        <a:t>Eficiência de Produção</a:t>
                       </a:r>
                       <a:endParaRPr lang="en-US" sz="950" dirty="0">
                         <a:latin typeface="Calibri" charset="0"/>
@@ -24344,7 +24520,7 @@
                           <a:ea typeface="Calibri" pitchFamily="34" charset="-122"/>
                           <a:cs typeface="Calibri" pitchFamily="34" charset="-120"/>
                         </a:rPr>
-                        <a:t>Saúde e Segurança Ocupacional</a:t>
+                        <a:t>Projetos</a:t>
                       </a:r>
                       <a:endParaRPr lang="en-US" sz="950" dirty="0">
                         <a:latin typeface="Calibri" charset="0"/>
@@ -24412,7 +24588,7 @@
                           <a:ea typeface="Calibri" pitchFamily="34" charset="-122"/>
                           <a:cs typeface="Calibri" pitchFamily="34" charset="-120"/>
                         </a:rPr>
-                        <a:t>US$ 150,0 mil</a:t>
+                        <a:t>US$ 120,0 mil</a:t>
                       </a:r>
                       <a:endParaRPr lang="en-US" sz="1000" dirty="0">
                         <a:latin typeface="Calibri" charset="0"/>
@@ -24482,7 +24658,7 @@
                           <a:ea typeface="Calibri" pitchFamily="34" charset="-122"/>
                           <a:cs typeface="Calibri" pitchFamily="34" charset="-120"/>
                         </a:rPr>
-                        <a:t>PÓS TA - NR13</a:t>
+                        <a:t>PRÉ TA - NR13</a:t>
                       </a:r>
                       <a:endParaRPr lang="en-US" sz="1000" dirty="0">
                         <a:latin typeface="Calibri" charset="0"/>
@@ -24686,7 +24862,7 @@
                           <a:ea typeface="Calibri" pitchFamily="34" charset="-122"/>
                           <a:cs typeface="Calibri" pitchFamily="34" charset="-120"/>
                         </a:rPr>
-                        <a:t>US$ 135,6 mil</a:t>
+                        <a:t>US$ 65,1 mil</a:t>
                       </a:r>
                       <a:endParaRPr lang="en-US" sz="1000" dirty="0">
                         <a:latin typeface="Calibri" charset="0"/>
@@ -24756,7 +24932,7 @@
                           <a:ea typeface="Calibri" pitchFamily="34" charset="-122"/>
                           <a:cs typeface="Calibri" pitchFamily="34" charset="-120"/>
                         </a:rPr>
-                        <a:t>PRÉ TA - Caldeiraria</a:t>
+                        <a:t>Obstrução Sistema de Águas Cinzas</a:t>
                       </a:r>
                       <a:endParaRPr lang="en-US" sz="1000" dirty="0">
                         <a:latin typeface="Calibri" charset="0"/>
@@ -24824,7 +25000,7 @@
                           <a:ea typeface="Calibri" pitchFamily="34" charset="-122"/>
                           <a:cs typeface="Calibri" pitchFamily="34" charset="-120"/>
                         </a:rPr>
-                        <a:t>Eficiência de Produção</a:t>
+                        <a:t>Integridade e Regulatório</a:t>
                       </a:r>
                       <a:endParaRPr lang="en-US" sz="950" dirty="0">
                         <a:latin typeface="Calibri" charset="0"/>
@@ -24892,7 +25068,7 @@
                           <a:ea typeface="Calibri" pitchFamily="34" charset="-122"/>
                           <a:cs typeface="Calibri" pitchFamily="34" charset="-120"/>
                         </a:rPr>
-                        <a:t>TA - Parada Programada</a:t>
+                        <a:t>Projetos</a:t>
                       </a:r>
                       <a:endParaRPr lang="en-US" sz="950" dirty="0">
                         <a:latin typeface="Calibri" charset="0"/>
@@ -24960,7 +25136,7 @@
                           <a:ea typeface="Calibri" pitchFamily="34" charset="-122"/>
                           <a:cs typeface="Calibri" pitchFamily="34" charset="-120"/>
                         </a:rPr>
-                        <a:t>US$ 132,9 mil</a:t>
+                        <a:t>US$ 50,9 mil</a:t>
                       </a:r>
                       <a:endParaRPr lang="en-US" sz="1000" dirty="0">
                         <a:latin typeface="Calibri" charset="0"/>
@@ -25030,7 +25206,7 @@
                           <a:ea typeface="Calibri" pitchFamily="34" charset="-122"/>
                           <a:cs typeface="Calibri" pitchFamily="34" charset="-120"/>
                         </a:rPr>
-                        <a:t>Outros 23 escopos (itens de menor valor individual)</a:t>
+                        <a:t>Outros 15 escopos (itens de menor valor individual)</a:t>
                       </a:r>
                       <a:endParaRPr lang="en-US" sz="950" dirty="0">
                         <a:latin typeface="Calibri" charset="0"/>
@@ -25104,7 +25280,7 @@
                           <a:ea typeface="Calibri" pitchFamily="34" charset="-122"/>
                           <a:cs typeface="Calibri" pitchFamily="34" charset="-120"/>
                         </a:rPr>
-                        <a:t>US$ 640,4 mil</a:t>
+                        <a:t>US$ 228,0 mil</a:t>
                       </a:r>
                       <a:endParaRPr lang="en-US" sz="1000" dirty="0">
                         <a:latin typeface="Calibri" charset="0"/>

--- a/PRIO_Plano_Trabalho_CAPEX_2027.pptx
+++ b/PRIO_Plano_Trabalho_CAPEX_2027.pptx
@@ -314,10 +314,10 @@
                   <c:v>2.55</c:v>
                 </c:pt>
                 <c:pt idx="4">
-                  <c:v>19.05</c:v>
+                  <c:v>18.82</c:v>
                 </c:pt>
                 <c:pt idx="5">
-                  <c:v>3.64</c:v>
+                  <c:v>5.12</c:v>
                 </c:pt>
                 <c:pt idx="6">
                   <c:v>66.26</c:v>
@@ -11672,7 +11672,7 @@
                 <a:ea typeface="Cambria" pitchFamily="34" charset="-122"/>
                 <a:cs typeface="Cambria" pitchFamily="34" charset="-120"/>
               </a:rPr>
-              <a:t>US$ 19,1 mi</a:t>
+              <a:t>US$ 18,8 mi</a:t>
             </a:r>
             <a:endParaRPr lang="en-US" sz="3300" dirty="0"/>
           </a:p>
@@ -11811,7 +11811,7 @@
                 <a:ea typeface="Cambria" pitchFamily="34" charset="-122"/>
                 <a:cs typeface="Cambria" pitchFamily="34" charset="-120"/>
               </a:rPr>
-              <a:t>US$ 14,0 mi</a:t>
+              <a:t>US$ 13,8 mi</a:t>
             </a:r>
             <a:endParaRPr lang="en-US" sz="1800" dirty="0"/>
           </a:p>
@@ -12011,7 +12011,7 @@
                 <a:ea typeface="Cambria" pitchFamily="34" charset="-122"/>
                 <a:cs typeface="Cambria" pitchFamily="34" charset="-120"/>
               </a:rPr>
-              <a:t>US$ 6,0 mi</a:t>
+              <a:t>US$ 5,8 mi</a:t>
             </a:r>
             <a:endParaRPr lang="en-US" sz="1800" dirty="0"/>
           </a:p>
@@ -12111,7 +12111,7 @@
                 <a:ea typeface="Cambria" pitchFamily="34" charset="-122"/>
                 <a:cs typeface="Cambria" pitchFamily="34" charset="-120"/>
               </a:rPr>
-              <a:t>US$ 13,1 mi</a:t>
+              <a:t>US$ 13,0 mi</a:t>
             </a:r>
             <a:endParaRPr lang="en-US" sz="1800" dirty="0"/>
           </a:p>
@@ -12525,84 +12525,6 @@
                 <a:ea typeface="Calibri" pitchFamily="34" charset="-122"/>
                 <a:cs typeface="Calibri" pitchFamily="34" charset="-120"/>
               </a:rPr>
-              <a:t>Projetos</a:t>
-            </a:r>
-            <a:endParaRPr lang="en-US" sz="1100" dirty="0"/>
-          </a:p>
-        </p:txBody>
-      </p:sp>
-      <p:sp>
-        <p:nvSpPr>
-          <p:cNvPr id="33" name="Text 31"/>
-          <p:cNvSpPr txBox="1"/>
-          <p:nvPr/>
-        </p:nvSpPr>
-        <p:spPr>
-          <a:xfrm>
-            <a:off x="3773729" y="4498848"/>
-            <a:ext cx="1815998" cy="365760"/>
-          </a:xfrm>
-          <a:prstGeom prst="rect">
-            <a:avLst/>
-          </a:prstGeom>
-          <a:noFill/>
-          <a:ln/>
-        </p:spPr>
-        <p:txBody>
-          <a:bodyPr wrap="square" lIns="0" tIns="0" rIns="0" bIns="0" rtlCol="0" anchor="ctr"/>
-          <a:lstStyle/>
-          <a:p>
-            <a:pPr algn="r" indent="0" marL="0">
-              <a:buNone/>
-            </a:pPr>
-            <a:r>
-              <a:rPr lang="en-US" sz="1100" b="1" dirty="0">
-                <a:solidFill>
-                  <a:srgbClr val="0B2A3D"/>
-                </a:solidFill>
-                <a:latin typeface="Calibri" pitchFamily="34" charset="0"/>
-                <a:ea typeface="Calibri" pitchFamily="34" charset="-122"/>
-                <a:cs typeface="Calibri" pitchFamily="34" charset="-120"/>
-              </a:rPr>
-              <a:t>US$ 1,2 mi</a:t>
-            </a:r>
-            <a:endParaRPr lang="en-US" sz="1100" dirty="0"/>
-          </a:p>
-        </p:txBody>
-      </p:sp>
-      <p:sp>
-        <p:nvSpPr>
-          <p:cNvPr id="34" name="Text 32"/>
-          <p:cNvSpPr txBox="1"/>
-          <p:nvPr/>
-        </p:nvSpPr>
-        <p:spPr>
-          <a:xfrm>
-            <a:off x="566928" y="4864608"/>
-            <a:ext cx="3316529" cy="365760"/>
-          </a:xfrm>
-          <a:prstGeom prst="rect">
-            <a:avLst/>
-          </a:prstGeom>
-          <a:noFill/>
-          <a:ln/>
-        </p:spPr>
-        <p:txBody>
-          <a:bodyPr wrap="square" lIns="0" tIns="0" rIns="0" bIns="0" rtlCol="0" anchor="ctr"/>
-          <a:lstStyle/>
-          <a:p>
-            <a:pPr indent="0" marL="0">
-              <a:buNone/>
-            </a:pPr>
-            <a:r>
-              <a:rPr lang="en-US" sz="1100" dirty="0">
-                <a:solidFill>
-                  <a:srgbClr val="1C2B33"/>
-                </a:solidFill>
-                <a:latin typeface="Calibri" pitchFamily="34" charset="0"/>
-                <a:ea typeface="Calibri" pitchFamily="34" charset="-122"/>
-                <a:cs typeface="Calibri" pitchFamily="34" charset="-120"/>
-              </a:rPr>
               <a:t>Saúde e Segurança Ocupacional</a:t>
             </a:r>
             <a:endParaRPr lang="en-US" sz="1100" dirty="0"/>
@@ -12611,13 +12533,13 @@
       </p:sp>
       <p:sp>
         <p:nvSpPr>
-          <p:cNvPr id="35" name="Text 33"/>
+          <p:cNvPr id="33" name="Text 31"/>
           <p:cNvSpPr txBox="1"/>
           <p:nvPr/>
         </p:nvSpPr>
         <p:spPr>
           <a:xfrm>
-            <a:off x="3773729" y="4864608"/>
+            <a:off x="3773729" y="4498848"/>
             <a:ext cx="1815998" cy="365760"/>
           </a:xfrm>
           <a:prstGeom prst="rect">
@@ -12650,33 +12572,13 @@
       </p:sp>
       <p:sp>
         <p:nvSpPr>
-          <p:cNvPr id="36" name="Shape 34"/>
-          <p:cNvSpPr/>
+          <p:cNvPr id="34" name="Text 32"/>
+          <p:cNvSpPr txBox="1"/>
           <p:nvPr/>
         </p:nvSpPr>
         <p:spPr>
           <a:xfrm>
-            <a:off x="457200" y="5230368"/>
-            <a:ext cx="5349240" cy="365760"/>
-          </a:xfrm>
-          <a:prstGeom prst="rect">
-            <a:avLst/>
-          </a:prstGeom>
-          <a:solidFill>
-            <a:srgbClr val="F0F4F5"/>
-          </a:solidFill>
-          <a:ln/>
-        </p:spPr>
-      </p:sp>
-      <p:sp>
-        <p:nvSpPr>
-          <p:cNvPr id="37" name="Text 35"/>
-          <p:cNvSpPr txBox="1"/>
-          <p:nvPr/>
-        </p:nvSpPr>
-        <p:spPr>
-          <a:xfrm>
-            <a:off x="566928" y="5230368"/>
+            <a:off x="566928" y="4864608"/>
             <a:ext cx="3316529" cy="365760"/>
           </a:xfrm>
           <a:prstGeom prst="rect">
@@ -12709,6 +12611,104 @@
       </p:sp>
       <p:sp>
         <p:nvSpPr>
+          <p:cNvPr id="35" name="Text 33"/>
+          <p:cNvSpPr txBox="1"/>
+          <p:nvPr/>
+        </p:nvSpPr>
+        <p:spPr>
+          <a:xfrm>
+            <a:off x="3773729" y="4864608"/>
+            <a:ext cx="1815998" cy="365760"/>
+          </a:xfrm>
+          <a:prstGeom prst="rect">
+            <a:avLst/>
+          </a:prstGeom>
+          <a:noFill/>
+          <a:ln/>
+        </p:spPr>
+        <p:txBody>
+          <a:bodyPr wrap="square" lIns="0" tIns="0" rIns="0" bIns="0" rtlCol="0" anchor="ctr"/>
+          <a:lstStyle/>
+          <a:p>
+            <a:pPr algn="r" indent="0" marL="0">
+              <a:buNone/>
+            </a:pPr>
+            <a:r>
+              <a:rPr lang="en-US" sz="1100" b="1" dirty="0">
+                <a:solidFill>
+                  <a:srgbClr val="0B2A3D"/>
+                </a:solidFill>
+                <a:latin typeface="Calibri" pitchFamily="34" charset="0"/>
+                <a:ea typeface="Calibri" pitchFamily="34" charset="-122"/>
+                <a:cs typeface="Calibri" pitchFamily="34" charset="-120"/>
+              </a:rPr>
+              <a:t>US$ 955,5 mil</a:t>
+            </a:r>
+            <a:endParaRPr lang="en-US" sz="1100" dirty="0"/>
+          </a:p>
+        </p:txBody>
+      </p:sp>
+      <p:sp>
+        <p:nvSpPr>
+          <p:cNvPr id="36" name="Shape 34"/>
+          <p:cNvSpPr/>
+          <p:nvPr/>
+        </p:nvSpPr>
+        <p:spPr>
+          <a:xfrm>
+            <a:off x="457200" y="5230368"/>
+            <a:ext cx="5349240" cy="365760"/>
+          </a:xfrm>
+          <a:prstGeom prst="rect">
+            <a:avLst/>
+          </a:prstGeom>
+          <a:solidFill>
+            <a:srgbClr val="F0F4F5"/>
+          </a:solidFill>
+          <a:ln/>
+        </p:spPr>
+      </p:sp>
+      <p:sp>
+        <p:nvSpPr>
+          <p:cNvPr id="37" name="Text 35"/>
+          <p:cNvSpPr txBox="1"/>
+          <p:nvPr/>
+        </p:nvSpPr>
+        <p:spPr>
+          <a:xfrm>
+            <a:off x="566928" y="5230368"/>
+            <a:ext cx="3316529" cy="365760"/>
+          </a:xfrm>
+          <a:prstGeom prst="rect">
+            <a:avLst/>
+          </a:prstGeom>
+          <a:noFill/>
+          <a:ln/>
+        </p:spPr>
+        <p:txBody>
+          <a:bodyPr wrap="square" lIns="0" tIns="0" rIns="0" bIns="0" rtlCol="0" anchor="ctr"/>
+          <a:lstStyle/>
+          <a:p>
+            <a:pPr indent="0" marL="0">
+              <a:buNone/>
+            </a:pPr>
+            <a:r>
+              <a:rPr lang="en-US" sz="1100" dirty="0">
+                <a:solidFill>
+                  <a:srgbClr val="1C2B33"/>
+                </a:solidFill>
+                <a:latin typeface="Calibri" pitchFamily="34" charset="0"/>
+                <a:ea typeface="Calibri" pitchFamily="34" charset="-122"/>
+                <a:cs typeface="Calibri" pitchFamily="34" charset="-120"/>
+              </a:rPr>
+              <a:t>Projetos</a:t>
+            </a:r>
+            <a:endParaRPr lang="en-US" sz="1100" dirty="0"/>
+          </a:p>
+        </p:txBody>
+      </p:sp>
+      <p:sp>
+        <p:nvSpPr>
           <p:cNvPr id="38" name="Text 36"/>
           <p:cNvSpPr txBox="1"/>
           <p:nvPr/>
@@ -12740,7 +12740,7 @@
                 <a:ea typeface="Calibri" pitchFamily="34" charset="-122"/>
                 <a:cs typeface="Calibri" pitchFamily="34" charset="-120"/>
               </a:rPr>
-              <a:t>US$ 955,5 mil</a:t>
+              <a:t>US$ 926,4 mil</a:t>
             </a:r>
             <a:endParaRPr lang="en-US" sz="1100" dirty="0"/>
           </a:p>
@@ -13056,7 +13056,7 @@
                 <a:ea typeface="Calibri" pitchFamily="34" charset="-122"/>
                 <a:cs typeface="Calibri" pitchFamily="34" charset="-120"/>
               </a:rPr>
-              <a:t>US$ 6,1 mi</a:t>
+              <a:t>US$ 5,9 mi</a:t>
             </a:r>
             <a:endParaRPr lang="en-US" sz="1100" dirty="0"/>
           </a:p>
@@ -13433,7 +13433,7 @@
                 <a:ea typeface="Calibri" pitchFamily="34" charset="-122"/>
                 <a:cs typeface="Calibri" pitchFamily="34" charset="-120"/>
               </a:rPr>
-              <a:t>Principais escopos por valor · 70 itens no total</a:t>
+              <a:t>Principais escopos por valor · 69 itens no total</a:t>
             </a:r>
             <a:endParaRPr lang="en-US" sz="1250" dirty="0"/>
           </a:p>
@@ -17047,7 +17047,7 @@
                           <a:ea typeface="Calibri" pitchFamily="34" charset="-122"/>
                           <a:cs typeface="Calibri" pitchFamily="34" charset="-120"/>
                         </a:rPr>
-                        <a:t>Outros 58 escopos (itens de menor valor individual)</a:t>
+                        <a:t>Outros 57 escopos (itens de menor valor individual)</a:t>
                       </a:r>
                       <a:endParaRPr lang="en-US" sz="950" dirty="0">
                         <a:latin typeface="Calibri" charset="0"/>
@@ -17121,7 +17121,7 @@
                           <a:ea typeface="Calibri" pitchFamily="34" charset="-122"/>
                           <a:cs typeface="Calibri" pitchFamily="34" charset="-120"/>
                         </a:rPr>
-                        <a:t>US$ 4,3 mi</a:t>
+                        <a:t>US$ 4,1 mi</a:t>
                       </a:r>
                       <a:endParaRPr lang="en-US" sz="1000" dirty="0">
                         <a:latin typeface="Calibri" charset="0"/>
@@ -17697,7 +17697,7 @@
                 <a:ea typeface="Cambria" pitchFamily="34" charset="-122"/>
                 <a:cs typeface="Cambria" pitchFamily="34" charset="-120"/>
               </a:rPr>
-              <a:t>US$ 3,6 mi</a:t>
+              <a:t>US$ 5,1 mi</a:t>
             </a:r>
             <a:endParaRPr lang="en-US" sz="3300" dirty="0"/>
           </a:p>
@@ -17836,7 +17836,7 @@
                 <a:ea typeface="Cambria" pitchFamily="34" charset="-122"/>
                 <a:cs typeface="Cambria" pitchFamily="34" charset="-120"/>
               </a:rPr>
-              <a:t>US$ 3,0 mi</a:t>
+              <a:t>US$ 3,5 mi</a:t>
             </a:r>
             <a:endParaRPr lang="en-US" sz="1800" dirty="0"/>
           </a:p>
@@ -17936,7 +17936,7 @@
                 <a:ea typeface="Cambria" pitchFamily="34" charset="-122"/>
                 <a:cs typeface="Cambria" pitchFamily="34" charset="-120"/>
               </a:rPr>
-              <a:t>US$ 592,3 mil</a:t>
+              <a:t>US$ 1,6 mi</a:t>
             </a:r>
             <a:endParaRPr lang="en-US" sz="1800" dirty="0"/>
           </a:p>
@@ -18036,7 +18036,7 @@
                 <a:ea typeface="Cambria" pitchFamily="34" charset="-122"/>
                 <a:cs typeface="Cambria" pitchFamily="34" charset="-120"/>
               </a:rPr>
-              <a:t>US$ 2,5 mi</a:t>
+              <a:t>US$ 3,1 mi</a:t>
             </a:r>
             <a:endParaRPr lang="en-US" sz="1800" dirty="0"/>
           </a:p>
@@ -18136,7 +18136,7 @@
                 <a:ea typeface="Cambria" pitchFamily="34" charset="-122"/>
                 <a:cs typeface="Cambria" pitchFamily="34" charset="-120"/>
               </a:rPr>
-              <a:t>US$ 1,1 mi</a:t>
+              <a:t>US$ 2,0 mi</a:t>
             </a:r>
             <a:endParaRPr lang="en-US" sz="1800" dirty="0"/>
           </a:p>
@@ -18315,7 +18315,7 @@
                 <a:ea typeface="Calibri" pitchFamily="34" charset="-122"/>
                 <a:cs typeface="Calibri" pitchFamily="34" charset="-120"/>
               </a:rPr>
-              <a:t>US$ 2,2 mi</a:t>
+              <a:t>US$ 2,4 mi</a:t>
             </a:r>
             <a:endParaRPr lang="en-US" sz="1100" dirty="0"/>
           </a:p>
@@ -18413,7 +18413,7 @@
                 <a:ea typeface="Calibri" pitchFamily="34" charset="-122"/>
                 <a:cs typeface="Calibri" pitchFamily="34" charset="-120"/>
               </a:rPr>
-              <a:t>US$ 592,3 mil</a:t>
+              <a:t>US$ 1,6 mi</a:t>
             </a:r>
             <a:endParaRPr lang="en-US" sz="1100" dirty="0"/>
           </a:p>
@@ -18491,7 +18491,7 @@
                 <a:ea typeface="Calibri" pitchFamily="34" charset="-122"/>
                 <a:cs typeface="Calibri" pitchFamily="34" charset="-120"/>
               </a:rPr>
-              <a:t>US$ 519,2 mil</a:t>
+              <a:t>US$ 634,0 mil</a:t>
             </a:r>
             <a:endParaRPr lang="en-US" sz="1100" dirty="0"/>
           </a:p>
@@ -18526,6 +18526,84 @@
         <p:spPr>
           <a:xfrm>
             <a:off x="566928" y="4498848"/>
+            <a:ext cx="3316529" cy="365760"/>
+          </a:xfrm>
+          <a:prstGeom prst="rect">
+            <a:avLst/>
+          </a:prstGeom>
+          <a:noFill/>
+          <a:ln/>
+        </p:spPr>
+        <p:txBody>
+          <a:bodyPr wrap="square" lIns="0" tIns="0" rIns="0" bIns="0" rtlCol="0" anchor="ctr"/>
+          <a:lstStyle/>
+          <a:p>
+            <a:pPr indent="0" marL="0">
+              <a:buNone/>
+            </a:pPr>
+            <a:r>
+              <a:rPr lang="en-US" sz="1100" dirty="0">
+                <a:solidFill>
+                  <a:srgbClr val="1C2B33"/>
+                </a:solidFill>
+                <a:latin typeface="Calibri" pitchFamily="34" charset="0"/>
+                <a:ea typeface="Calibri" pitchFamily="34" charset="-122"/>
+                <a:cs typeface="Calibri" pitchFamily="34" charset="-120"/>
+              </a:rPr>
+              <a:t>P&amp;Q - Processos</a:t>
+            </a:r>
+            <a:endParaRPr lang="en-US" sz="1100" dirty="0"/>
+          </a:p>
+        </p:txBody>
+      </p:sp>
+      <p:sp>
+        <p:nvSpPr>
+          <p:cNvPr id="33" name="Text 31"/>
+          <p:cNvSpPr txBox="1"/>
+          <p:nvPr/>
+        </p:nvSpPr>
+        <p:spPr>
+          <a:xfrm>
+            <a:off x="3773729" y="4498848"/>
+            <a:ext cx="1815998" cy="365760"/>
+          </a:xfrm>
+          <a:prstGeom prst="rect">
+            <a:avLst/>
+          </a:prstGeom>
+          <a:noFill/>
+          <a:ln/>
+        </p:spPr>
+        <p:txBody>
+          <a:bodyPr wrap="square" lIns="0" tIns="0" rIns="0" bIns="0" rtlCol="0" anchor="ctr"/>
+          <a:lstStyle/>
+          <a:p>
+            <a:pPr algn="r" indent="0" marL="0">
+              <a:buNone/>
+            </a:pPr>
+            <a:r>
+              <a:rPr lang="en-US" sz="1100" b="1" dirty="0">
+                <a:solidFill>
+                  <a:srgbClr val="0B2A3D"/>
+                </a:solidFill>
+                <a:latin typeface="Calibri" pitchFamily="34" charset="0"/>
+                <a:ea typeface="Calibri" pitchFamily="34" charset="-122"/>
+                <a:cs typeface="Calibri" pitchFamily="34" charset="-120"/>
+              </a:rPr>
+              <a:t>US$ 206,8 mil</a:t>
+            </a:r>
+            <a:endParaRPr lang="en-US" sz="1100" dirty="0"/>
+          </a:p>
+        </p:txBody>
+      </p:sp>
+      <p:sp>
+        <p:nvSpPr>
+          <p:cNvPr id="34" name="Text 32"/>
+          <p:cNvSpPr txBox="1"/>
+          <p:nvPr/>
+        </p:nvSpPr>
+        <p:spPr>
+          <a:xfrm>
+            <a:off x="566928" y="4864608"/>
             <a:ext cx="3316529" cy="365760"/>
           </a:xfrm>
           <a:prstGeom prst="rect">
@@ -18558,13 +18636,13 @@
       </p:sp>
       <p:sp>
         <p:nvSpPr>
-          <p:cNvPr id="33" name="Text 31"/>
+          <p:cNvPr id="35" name="Text 33"/>
           <p:cNvSpPr txBox="1"/>
           <p:nvPr/>
         </p:nvSpPr>
         <p:spPr>
           <a:xfrm>
-            <a:off x="3773729" y="4498848"/>
+            <a:off x="3773729" y="4864608"/>
             <a:ext cx="1815998" cy="365760"/>
           </a:xfrm>
           <a:prstGeom prst="rect">
@@ -18597,13 +18675,33 @@
       </p:sp>
       <p:sp>
         <p:nvSpPr>
-          <p:cNvPr id="34" name="Text 32"/>
+          <p:cNvPr id="36" name="Shape 34"/>
+          <p:cNvSpPr/>
+          <p:nvPr/>
+        </p:nvSpPr>
+        <p:spPr>
+          <a:xfrm>
+            <a:off x="457200" y="5230368"/>
+            <a:ext cx="5349240" cy="365760"/>
+          </a:xfrm>
+          <a:prstGeom prst="rect">
+            <a:avLst/>
+          </a:prstGeom>
+          <a:solidFill>
+            <a:srgbClr val="F0F4F5"/>
+          </a:solidFill>
+          <a:ln/>
+        </p:spPr>
+      </p:sp>
+      <p:sp>
+        <p:nvSpPr>
+          <p:cNvPr id="37" name="Text 35"/>
           <p:cNvSpPr txBox="1"/>
           <p:nvPr/>
         </p:nvSpPr>
         <p:spPr>
           <a:xfrm>
-            <a:off x="566928" y="4864608"/>
+            <a:off x="566928" y="5230368"/>
             <a:ext cx="3316529" cy="365760"/>
           </a:xfrm>
           <a:prstGeom prst="rect">
@@ -18636,13 +18734,13 @@
       </p:sp>
       <p:sp>
         <p:nvSpPr>
-          <p:cNvPr id="35" name="Text 33"/>
+          <p:cNvPr id="38" name="Text 36"/>
           <p:cNvSpPr txBox="1"/>
           <p:nvPr/>
         </p:nvSpPr>
         <p:spPr>
           <a:xfrm>
-            <a:off x="3773729" y="4864608"/>
+            <a:off x="3773729" y="5230368"/>
             <a:ext cx="1815998" cy="365760"/>
           </a:xfrm>
           <a:prstGeom prst="rect">
@@ -18675,7 +18773,7 @@
       </p:sp>
       <p:sp>
         <p:nvSpPr>
-          <p:cNvPr id="36" name="Text 34"/>
+          <p:cNvPr id="39" name="Text 37"/>
           <p:cNvSpPr txBox="1"/>
           <p:nvPr/>
         </p:nvSpPr>
@@ -18714,7 +18812,7 @@
       </p:sp>
       <p:sp>
         <p:nvSpPr>
-          <p:cNvPr id="37" name="Shape 35"/>
+          <p:cNvPr id="40" name="Shape 38"/>
           <p:cNvSpPr/>
           <p:nvPr/>
         </p:nvSpPr>
@@ -18737,7 +18835,7 @@
       </p:sp>
       <p:sp>
         <p:nvSpPr>
-          <p:cNvPr id="38" name="Text 36"/>
+          <p:cNvPr id="41" name="Text 39"/>
           <p:cNvSpPr txBox="1"/>
           <p:nvPr/>
         </p:nvSpPr>
@@ -18776,7 +18874,7 @@
       </p:sp>
       <p:sp>
         <p:nvSpPr>
-          <p:cNvPr id="39" name="Text 37"/>
+          <p:cNvPr id="42" name="Text 40"/>
           <p:cNvSpPr txBox="1"/>
           <p:nvPr/>
         </p:nvSpPr>
@@ -18807,7 +18905,7 @@
                 <a:ea typeface="Calibri" pitchFamily="34" charset="-122"/>
                 <a:cs typeface="Calibri" pitchFamily="34" charset="-120"/>
               </a:rPr>
-              <a:t>US$ 1,5 mi</a:t>
+              <a:t>US$ 2,5 mi</a:t>
             </a:r>
             <a:endParaRPr lang="en-US" sz="1100" dirty="0"/>
           </a:p>
@@ -18815,7 +18913,7 @@
       </p:sp>
       <p:sp>
         <p:nvSpPr>
-          <p:cNvPr id="40" name="Shape 38"/>
+          <p:cNvPr id="43" name="Shape 41"/>
           <p:cNvSpPr/>
           <p:nvPr/>
         </p:nvSpPr>
@@ -18835,7 +18933,7 @@
       </p:sp>
       <p:sp>
         <p:nvSpPr>
-          <p:cNvPr id="41" name="Text 39"/>
+          <p:cNvPr id="44" name="Text 42"/>
           <p:cNvSpPr txBox="1"/>
           <p:nvPr/>
         </p:nvSpPr>
@@ -18874,7 +18972,7 @@
       </p:sp>
       <p:sp>
         <p:nvSpPr>
-          <p:cNvPr id="42" name="Text 40"/>
+          <p:cNvPr id="45" name="Text 43"/>
           <p:cNvSpPr txBox="1"/>
           <p:nvPr/>
         </p:nvSpPr>
@@ -18905,7 +19003,7 @@
                 <a:ea typeface="Calibri" pitchFamily="34" charset="-122"/>
                 <a:cs typeface="Calibri" pitchFamily="34" charset="-120"/>
               </a:rPr>
-              <a:t>US$ 1,4 mi</a:t>
+              <a:t>US$ 1,8 mi</a:t>
             </a:r>
             <a:endParaRPr lang="en-US" sz="1100" dirty="0"/>
           </a:p>
@@ -18913,7 +19011,7 @@
       </p:sp>
       <p:sp>
         <p:nvSpPr>
-          <p:cNvPr id="43" name="Text 41"/>
+          <p:cNvPr id="46" name="Text 44"/>
           <p:cNvSpPr txBox="1"/>
           <p:nvPr/>
         </p:nvSpPr>
@@ -18952,7 +19050,7 @@
       </p:sp>
       <p:sp>
         <p:nvSpPr>
-          <p:cNvPr id="44" name="Text 42"/>
+          <p:cNvPr id="47" name="Text 45"/>
           <p:cNvSpPr txBox="1"/>
           <p:nvPr/>
         </p:nvSpPr>
@@ -18983,7 +19081,7 @@
                 <a:ea typeface="Calibri" pitchFamily="34" charset="-122"/>
                 <a:cs typeface="Calibri" pitchFamily="34" charset="-120"/>
               </a:rPr>
-              <a:t>US$ 519,2 mil</a:t>
+              <a:t>US$ 634,0 mil</a:t>
             </a:r>
             <a:endParaRPr lang="en-US" sz="1100" dirty="0"/>
           </a:p>
@@ -18991,7 +19089,7 @@
       </p:sp>
       <p:sp>
         <p:nvSpPr>
-          <p:cNvPr id="45" name="Shape 43"/>
+          <p:cNvPr id="48" name="Shape 46"/>
           <p:cNvSpPr/>
           <p:nvPr/>
         </p:nvSpPr>
@@ -19011,7 +19109,7 @@
       </p:sp>
       <p:sp>
         <p:nvSpPr>
-          <p:cNvPr id="46" name="Text 44"/>
+          <p:cNvPr id="49" name="Text 47"/>
           <p:cNvSpPr txBox="1"/>
           <p:nvPr/>
         </p:nvSpPr>
@@ -19050,7 +19148,7 @@
       </p:sp>
       <p:sp>
         <p:nvSpPr>
-          <p:cNvPr id="47" name="Text 45"/>
+          <p:cNvPr id="50" name="Text 48"/>
           <p:cNvSpPr txBox="1"/>
           <p:nvPr/>
         </p:nvSpPr>
@@ -19089,7 +19187,7 @@
       </p:sp>
       <p:sp>
         <p:nvSpPr>
-          <p:cNvPr id="48" name="Text 46"/>
+          <p:cNvPr id="51" name="Text 49"/>
           <p:cNvSpPr txBox="1"/>
           <p:nvPr/>
         </p:nvSpPr>
@@ -19284,7 +19382,7 @@
                 <a:ea typeface="Cambria" pitchFamily="34" charset="-122"/>
                 <a:cs typeface="Cambria" pitchFamily="34" charset="-120"/>
               </a:rPr>
-              <a:t>US$ 115,0 mi</a:t>
+              <a:t>US$ 116,2 mi</a:t>
             </a:r>
             <a:endParaRPr lang="en-US" sz="2600" dirty="0"/>
           </a:p>
@@ -19423,7 +19521,7 @@
                 <a:ea typeface="Cambria" pitchFamily="34" charset="-122"/>
                 <a:cs typeface="Cambria" pitchFamily="34" charset="-120"/>
               </a:rPr>
-              <a:t>234</a:t>
+              <a:t>244</a:t>
             </a:r>
             <a:endParaRPr lang="en-US" sz="2600" dirty="0"/>
           </a:p>
@@ -20729,7 +20827,7 @@
                             <a:srgbClr val="1C2B33"/>
                           </a:solidFill>
                         </a:rPr>
-                        <a:t>US$ 19,1 mi</a:t>
+                        <a:t>US$ 18,8 mi</a:t>
                       </a:r>
                       <a:endParaRPr lang="en-US" sz="1050" dirty="0"/>
                     </a:p>
@@ -20790,7 +20888,7 @@
                             <a:srgbClr val="1C2B33"/>
                           </a:solidFill>
                         </a:rPr>
-                        <a:t>70</a:t>
+                        <a:t>69</a:t>
                       </a:r>
                       <a:endParaRPr lang="en-US" sz="1050" dirty="0"/>
                     </a:p>
@@ -20914,7 +21012,7 @@
                             <a:srgbClr val="1C2B33"/>
                           </a:solidFill>
                         </a:rPr>
-                        <a:t>US$ 3,6 mi</a:t>
+                        <a:t>US$ 5,1 mi</a:t>
                       </a:r>
                       <a:endParaRPr lang="en-US" sz="1050" dirty="0"/>
                     </a:p>
@@ -20975,7 +21073,7 @@
                             <a:srgbClr val="1C2B33"/>
                           </a:solidFill>
                         </a:rPr>
-                        <a:t>27</a:t>
+                        <a:t>38</a:t>
                       </a:r>
                       <a:endParaRPr lang="en-US" sz="1050" dirty="0"/>
                     </a:p>
@@ -21284,7 +21382,7 @@
                             <a:srgbClr val="0B2A3D"/>
                           </a:solidFill>
                         </a:rPr>
-                        <a:t>US$ 115,0 mi</a:t>
+                        <a:t>US$ 116,2 mi</a:t>
                       </a:r>
                       <a:endParaRPr lang="en-US" sz="1050" dirty="0"/>
                     </a:p>
@@ -21345,7 +21443,7 @@
                             <a:srgbClr val="0B2A3D"/>
                           </a:solidFill>
                         </a:rPr>
-                        <a:t>234</a:t>
+                        <a:t>244</a:t>
                       </a:r>
                       <a:endParaRPr lang="en-US" sz="1050" dirty="0"/>
                     </a:p>
@@ -21592,7 +21690,7 @@
                 <a:ea typeface="Calibri" pitchFamily="34" charset="-122"/>
                 <a:cs typeface="Calibri" pitchFamily="34" charset="-120"/>
               </a:rPr>
-              <a:t>Principais escopos por valor · 27 itens no total</a:t>
+              <a:t>Principais escopos por valor · 38 itens no total</a:t>
             </a:r>
             <a:endParaRPr lang="en-US" sz="1250" dirty="0"/>
           </a:p>
@@ -22740,7 +22838,7 @@
                           <a:ea typeface="Calibri" pitchFamily="34" charset="-122"/>
                           <a:cs typeface="Calibri" pitchFamily="34" charset="-120"/>
                         </a:rPr>
-                        <a:t>Instalação de novos Detectores de Gás</a:t>
+                        <a:t>TA - Caldeiraria</a:t>
                       </a:r>
                       <a:endParaRPr lang="en-US" sz="1000" dirty="0">
                         <a:latin typeface="Calibri" charset="0"/>
@@ -22808,7 +22906,555 @@
                           <a:ea typeface="Calibri" pitchFamily="34" charset="-122"/>
                           <a:cs typeface="Calibri" pitchFamily="34" charset="-120"/>
                         </a:rPr>
+                        <a:t>Eficiência de Produção</a:t>
+                      </a:r>
+                      <a:endParaRPr lang="en-US" sz="950" dirty="0">
+                        <a:latin typeface="Calibri" charset="0"/>
+                        <a:ea typeface="Calibri" charset="0"/>
+                        <a:cs typeface="Calibri" charset="0"/>
+                      </a:endParaRPr>
+                    </a:p>
+                  </a:txBody>
+                  <a:tcPr marL="91440" marR="91440" marT="45720" marB="45720" anchor="ctr">
+                    <a:lnL w="6350" cap="flat" cmpd="sng" algn="ctr">
+                      <a:solidFill>
+                        <a:srgbClr val="E3E8E9"/>
+                      </a:solidFill>
+                      <a:prstDash val="solid"/>
+                      <a:round/>
+                      <a:headEnd type="none" w="med" len="med"/>
+                      <a:tailEnd type="none" w="med" len="med"/>
+                    </a:lnL>
+                    <a:lnR w="6350" cap="flat" cmpd="sng" algn="ctr">
+                      <a:solidFill>
+                        <a:srgbClr val="E3E8E9"/>
+                      </a:solidFill>
+                      <a:prstDash val="solid"/>
+                      <a:round/>
+                      <a:headEnd type="none" w="med" len="med"/>
+                      <a:tailEnd type="none" w="med" len="med"/>
+                    </a:lnR>
+                    <a:lnT w="6350" cap="flat" cmpd="sng" algn="ctr">
+                      <a:solidFill>
+                        <a:srgbClr val="E3E8E9"/>
+                      </a:solidFill>
+                      <a:prstDash val="solid"/>
+                      <a:round/>
+                      <a:headEnd type="none" w="med" len="med"/>
+                      <a:tailEnd type="none" w="med" len="med"/>
+                    </a:lnT>
+                    <a:lnB w="6350" cap="flat" cmpd="sng" algn="ctr">
+                      <a:solidFill>
+                        <a:srgbClr val="E3E8E9"/>
+                      </a:solidFill>
+                      <a:prstDash val="solid"/>
+                      <a:round/>
+                      <a:headEnd type="none" w="med" len="med"/>
+                      <a:tailEnd type="none" w="med" len="med"/>
+                    </a:lnB>
+                    <a:solidFill>
+                      <a:srgbClr val="F0F4F5"/>
+                    </a:solidFill>
+                  </a:tcPr>
+                </a:tc>
+                <a:tc>
+                  <a:txBody>
+                    <a:bodyPr/>
+                    <a:lstStyle/>
+                    <a:p>
+                      <a:pPr indent="0" marL="0">
+                        <a:buNone/>
+                      </a:pPr>
+                      <a:r>
+                        <a:rPr lang="en-US" sz="950" dirty="0">
+                          <a:solidFill>
+                            <a:srgbClr val="5B6B73"/>
+                          </a:solidFill>
+                          <a:latin typeface="Calibri" pitchFamily="34" charset="0"/>
+                          <a:ea typeface="Calibri" pitchFamily="34" charset="-122"/>
+                          <a:cs typeface="Calibri" pitchFamily="34" charset="-120"/>
+                        </a:rPr>
+                        <a:t>TA - Parada Programada</a:t>
+                      </a:r>
+                      <a:endParaRPr lang="en-US" sz="950" dirty="0">
+                        <a:latin typeface="Calibri" charset="0"/>
+                        <a:ea typeface="Calibri" charset="0"/>
+                        <a:cs typeface="Calibri" charset="0"/>
+                      </a:endParaRPr>
+                    </a:p>
+                  </a:txBody>
+                  <a:tcPr marL="91440" marR="91440" marT="45720" marB="45720" anchor="ctr">
+                    <a:lnL w="6350" cap="flat" cmpd="sng" algn="ctr">
+                      <a:solidFill>
+                        <a:srgbClr val="E3E8E9"/>
+                      </a:solidFill>
+                      <a:prstDash val="solid"/>
+                      <a:round/>
+                      <a:headEnd type="none" w="med" len="med"/>
+                      <a:tailEnd type="none" w="med" len="med"/>
+                    </a:lnL>
+                    <a:lnR w="6350" cap="flat" cmpd="sng" algn="ctr">
+                      <a:solidFill>
+                        <a:srgbClr val="E3E8E9"/>
+                      </a:solidFill>
+                      <a:prstDash val="solid"/>
+                      <a:round/>
+                      <a:headEnd type="none" w="med" len="med"/>
+                      <a:tailEnd type="none" w="med" len="med"/>
+                    </a:lnR>
+                    <a:lnT w="6350" cap="flat" cmpd="sng" algn="ctr">
+                      <a:solidFill>
+                        <a:srgbClr val="E3E8E9"/>
+                      </a:solidFill>
+                      <a:prstDash val="solid"/>
+                      <a:round/>
+                      <a:headEnd type="none" w="med" len="med"/>
+                      <a:tailEnd type="none" w="med" len="med"/>
+                    </a:lnT>
+                    <a:lnB w="6350" cap="flat" cmpd="sng" algn="ctr">
+                      <a:solidFill>
+                        <a:srgbClr val="E3E8E9"/>
+                      </a:solidFill>
+                      <a:prstDash val="solid"/>
+                      <a:round/>
+                      <a:headEnd type="none" w="med" len="med"/>
+                      <a:tailEnd type="none" w="med" len="med"/>
+                    </a:lnB>
+                    <a:solidFill>
+                      <a:srgbClr val="F0F4F5"/>
+                    </a:solidFill>
+                  </a:tcPr>
+                </a:tc>
+                <a:tc>
+                  <a:txBody>
+                    <a:bodyPr/>
+                    <a:lstStyle/>
+                    <a:p>
+                      <a:pPr algn="r" indent="0" marL="0">
+                        <a:buNone/>
+                      </a:pPr>
+                      <a:r>
+                        <a:rPr lang="en-US" sz="1000" b="1" dirty="0">
+                          <a:solidFill>
+                            <a:srgbClr val="0B2A3D"/>
+                          </a:solidFill>
+                          <a:latin typeface="Calibri" pitchFamily="34" charset="0"/>
+                          <a:ea typeface="Calibri" pitchFamily="34" charset="-122"/>
+                          <a:cs typeface="Calibri" pitchFamily="34" charset="-120"/>
+                        </a:rPr>
+                        <a:t>US$ 484,9 mil</a:t>
+                      </a:r>
+                      <a:endParaRPr lang="en-US" sz="1000" dirty="0">
+                        <a:latin typeface="Calibri" charset="0"/>
+                        <a:ea typeface="Calibri" charset="0"/>
+                        <a:cs typeface="Calibri" charset="0"/>
+                      </a:endParaRPr>
+                    </a:p>
+                  </a:txBody>
+                  <a:tcPr marL="91440" marR="91440" marT="45720" marB="45720" anchor="ctr">
+                    <a:lnL w="6350" cap="flat" cmpd="sng" algn="ctr">
+                      <a:solidFill>
+                        <a:srgbClr val="E3E8E9"/>
+                      </a:solidFill>
+                      <a:prstDash val="solid"/>
+                      <a:round/>
+                      <a:headEnd type="none" w="med" len="med"/>
+                      <a:tailEnd type="none" w="med" len="med"/>
+                    </a:lnL>
+                    <a:lnR w="6350" cap="flat" cmpd="sng" algn="ctr">
+                      <a:solidFill>
+                        <a:srgbClr val="E3E8E9"/>
+                      </a:solidFill>
+                      <a:prstDash val="solid"/>
+                      <a:round/>
+                      <a:headEnd type="none" w="med" len="med"/>
+                      <a:tailEnd type="none" w="med" len="med"/>
+                    </a:lnR>
+                    <a:lnT w="6350" cap="flat" cmpd="sng" algn="ctr">
+                      <a:solidFill>
+                        <a:srgbClr val="E3E8E9"/>
+                      </a:solidFill>
+                      <a:prstDash val="solid"/>
+                      <a:round/>
+                      <a:headEnd type="none" w="med" len="med"/>
+                      <a:tailEnd type="none" w="med" len="med"/>
+                    </a:lnT>
+                    <a:lnB w="6350" cap="flat" cmpd="sng" algn="ctr">
+                      <a:solidFill>
+                        <a:srgbClr val="E3E8E9"/>
+                      </a:solidFill>
+                      <a:prstDash val="solid"/>
+                      <a:round/>
+                      <a:headEnd type="none" w="med" len="med"/>
+                      <a:tailEnd type="none" w="med" len="med"/>
+                    </a:lnB>
+                    <a:solidFill>
+                      <a:srgbClr val="F0F4F5"/>
+                    </a:solidFill>
+                  </a:tcPr>
+                </a:tc>
+              </a:tr>
+              <a:tr h="288036">
+                <a:tc>
+                  <a:txBody>
+                    <a:bodyPr/>
+                    <a:lstStyle/>
+                    <a:p>
+                      <a:pPr indent="0" marL="0">
+                        <a:buNone/>
+                      </a:pPr>
+                      <a:r>
+                        <a:rPr lang="en-US" sz="1000" dirty="0">
+                          <a:solidFill>
+                            <a:srgbClr val="1C2B33"/>
+                          </a:solidFill>
+                          <a:latin typeface="Calibri" pitchFamily="34" charset="0"/>
+                          <a:ea typeface="Calibri" pitchFamily="34" charset="-122"/>
+                          <a:cs typeface="Calibri" pitchFamily="34" charset="-120"/>
+                        </a:rPr>
+                        <a:t>Instalação de novos Detectores de Gás</a:t>
+                      </a:r>
+                      <a:endParaRPr lang="en-US" sz="1000" dirty="0">
+                        <a:latin typeface="Calibri" charset="0"/>
+                        <a:ea typeface="Calibri" charset="0"/>
+                        <a:cs typeface="Calibri" charset="0"/>
+                      </a:endParaRPr>
+                    </a:p>
+                  </a:txBody>
+                  <a:tcPr marL="91440" marR="91440" marT="45720" marB="45720" anchor="ctr">
+                    <a:lnL w="6350" cap="flat" cmpd="sng" algn="ctr">
+                      <a:solidFill>
+                        <a:srgbClr val="E3E8E9"/>
+                      </a:solidFill>
+                      <a:prstDash val="solid"/>
+                      <a:round/>
+                      <a:headEnd type="none" w="med" len="med"/>
+                      <a:tailEnd type="none" w="med" len="med"/>
+                    </a:lnL>
+                    <a:lnR w="6350" cap="flat" cmpd="sng" algn="ctr">
+                      <a:solidFill>
+                        <a:srgbClr val="E3E8E9"/>
+                      </a:solidFill>
+                      <a:prstDash val="solid"/>
+                      <a:round/>
+                      <a:headEnd type="none" w="med" len="med"/>
+                      <a:tailEnd type="none" w="med" len="med"/>
+                    </a:lnR>
+                    <a:lnT w="6350" cap="flat" cmpd="sng" algn="ctr">
+                      <a:solidFill>
+                        <a:srgbClr val="E3E8E9"/>
+                      </a:solidFill>
+                      <a:prstDash val="solid"/>
+                      <a:round/>
+                      <a:headEnd type="none" w="med" len="med"/>
+                      <a:tailEnd type="none" w="med" len="med"/>
+                    </a:lnT>
+                    <a:lnB w="6350" cap="flat" cmpd="sng" algn="ctr">
+                      <a:solidFill>
+                        <a:srgbClr val="E3E8E9"/>
+                      </a:solidFill>
+                      <a:prstDash val="solid"/>
+                      <a:round/>
+                      <a:headEnd type="none" w="med" len="med"/>
+                      <a:tailEnd type="none" w="med" len="med"/>
+                    </a:lnB>
+                    <a:solidFill>
+                      <a:srgbClr val="FFFFFF"/>
+                    </a:solidFill>
+                  </a:tcPr>
+                </a:tc>
+                <a:tc>
+                  <a:txBody>
+                    <a:bodyPr/>
+                    <a:lstStyle/>
+                    <a:p>
+                      <a:pPr indent="0" marL="0">
+                        <a:buNone/>
+                      </a:pPr>
+                      <a:r>
+                        <a:rPr lang="en-US" sz="950" dirty="0">
+                          <a:solidFill>
+                            <a:srgbClr val="5B6B73"/>
+                          </a:solidFill>
+                          <a:latin typeface="Calibri" pitchFamily="34" charset="0"/>
+                          <a:ea typeface="Calibri" pitchFamily="34" charset="-122"/>
+                          <a:cs typeface="Calibri" pitchFamily="34" charset="-120"/>
+                        </a:rPr>
                         <a:t>Integridade e Regulatório</a:t>
+                      </a:r>
+                      <a:endParaRPr lang="en-US" sz="950" dirty="0">
+                        <a:latin typeface="Calibri" charset="0"/>
+                        <a:ea typeface="Calibri" charset="0"/>
+                        <a:cs typeface="Calibri" charset="0"/>
+                      </a:endParaRPr>
+                    </a:p>
+                  </a:txBody>
+                  <a:tcPr marL="91440" marR="91440" marT="45720" marB="45720" anchor="ctr">
+                    <a:lnL w="6350" cap="flat" cmpd="sng" algn="ctr">
+                      <a:solidFill>
+                        <a:srgbClr val="E3E8E9"/>
+                      </a:solidFill>
+                      <a:prstDash val="solid"/>
+                      <a:round/>
+                      <a:headEnd type="none" w="med" len="med"/>
+                      <a:tailEnd type="none" w="med" len="med"/>
+                    </a:lnL>
+                    <a:lnR w="6350" cap="flat" cmpd="sng" algn="ctr">
+                      <a:solidFill>
+                        <a:srgbClr val="E3E8E9"/>
+                      </a:solidFill>
+                      <a:prstDash val="solid"/>
+                      <a:round/>
+                      <a:headEnd type="none" w="med" len="med"/>
+                      <a:tailEnd type="none" w="med" len="med"/>
+                    </a:lnR>
+                    <a:lnT w="6350" cap="flat" cmpd="sng" algn="ctr">
+                      <a:solidFill>
+                        <a:srgbClr val="E3E8E9"/>
+                      </a:solidFill>
+                      <a:prstDash val="solid"/>
+                      <a:round/>
+                      <a:headEnd type="none" w="med" len="med"/>
+                      <a:tailEnd type="none" w="med" len="med"/>
+                    </a:lnT>
+                    <a:lnB w="6350" cap="flat" cmpd="sng" algn="ctr">
+                      <a:solidFill>
+                        <a:srgbClr val="E3E8E9"/>
+                      </a:solidFill>
+                      <a:prstDash val="solid"/>
+                      <a:round/>
+                      <a:headEnd type="none" w="med" len="med"/>
+                      <a:tailEnd type="none" w="med" len="med"/>
+                    </a:lnB>
+                    <a:solidFill>
+                      <a:srgbClr val="FFFFFF"/>
+                    </a:solidFill>
+                  </a:tcPr>
+                </a:tc>
+                <a:tc>
+                  <a:txBody>
+                    <a:bodyPr/>
+                    <a:lstStyle/>
+                    <a:p>
+                      <a:pPr indent="0" marL="0">
+                        <a:buNone/>
+                      </a:pPr>
+                      <a:r>
+                        <a:rPr lang="en-US" sz="950" dirty="0">
+                          <a:solidFill>
+                            <a:srgbClr val="5B6B73"/>
+                          </a:solidFill>
+                          <a:latin typeface="Calibri" pitchFamily="34" charset="0"/>
+                          <a:ea typeface="Calibri" pitchFamily="34" charset="-122"/>
+                          <a:cs typeface="Calibri" pitchFamily="34" charset="-120"/>
+                        </a:rPr>
+                        <a:t>Projetos</a:t>
+                      </a:r>
+                      <a:endParaRPr lang="en-US" sz="950" dirty="0">
+                        <a:latin typeface="Calibri" charset="0"/>
+                        <a:ea typeface="Calibri" charset="0"/>
+                        <a:cs typeface="Calibri" charset="0"/>
+                      </a:endParaRPr>
+                    </a:p>
+                  </a:txBody>
+                  <a:tcPr marL="91440" marR="91440" marT="45720" marB="45720" anchor="ctr">
+                    <a:lnL w="6350" cap="flat" cmpd="sng" algn="ctr">
+                      <a:solidFill>
+                        <a:srgbClr val="E3E8E9"/>
+                      </a:solidFill>
+                      <a:prstDash val="solid"/>
+                      <a:round/>
+                      <a:headEnd type="none" w="med" len="med"/>
+                      <a:tailEnd type="none" w="med" len="med"/>
+                    </a:lnL>
+                    <a:lnR w="6350" cap="flat" cmpd="sng" algn="ctr">
+                      <a:solidFill>
+                        <a:srgbClr val="E3E8E9"/>
+                      </a:solidFill>
+                      <a:prstDash val="solid"/>
+                      <a:round/>
+                      <a:headEnd type="none" w="med" len="med"/>
+                      <a:tailEnd type="none" w="med" len="med"/>
+                    </a:lnR>
+                    <a:lnT w="6350" cap="flat" cmpd="sng" algn="ctr">
+                      <a:solidFill>
+                        <a:srgbClr val="E3E8E9"/>
+                      </a:solidFill>
+                      <a:prstDash val="solid"/>
+                      <a:round/>
+                      <a:headEnd type="none" w="med" len="med"/>
+                      <a:tailEnd type="none" w="med" len="med"/>
+                    </a:lnT>
+                    <a:lnB w="6350" cap="flat" cmpd="sng" algn="ctr">
+                      <a:solidFill>
+                        <a:srgbClr val="E3E8E9"/>
+                      </a:solidFill>
+                      <a:prstDash val="solid"/>
+                      <a:round/>
+                      <a:headEnd type="none" w="med" len="med"/>
+                      <a:tailEnd type="none" w="med" len="med"/>
+                    </a:lnB>
+                    <a:solidFill>
+                      <a:srgbClr val="FFFFFF"/>
+                    </a:solidFill>
+                  </a:tcPr>
+                </a:tc>
+                <a:tc>
+                  <a:txBody>
+                    <a:bodyPr/>
+                    <a:lstStyle/>
+                    <a:p>
+                      <a:pPr algn="r" indent="0" marL="0">
+                        <a:buNone/>
+                      </a:pPr>
+                      <a:r>
+                        <a:rPr lang="en-US" sz="1000" b="1" dirty="0">
+                          <a:solidFill>
+                            <a:srgbClr val="0B2A3D"/>
+                          </a:solidFill>
+                          <a:latin typeface="Calibri" pitchFamily="34" charset="0"/>
+                          <a:ea typeface="Calibri" pitchFamily="34" charset="-122"/>
+                          <a:cs typeface="Calibri" pitchFamily="34" charset="-120"/>
+                        </a:rPr>
+                        <a:t>US$ 447,3 mil</a:t>
+                      </a:r>
+                      <a:endParaRPr lang="en-US" sz="1000" dirty="0">
+                        <a:latin typeface="Calibri" charset="0"/>
+                        <a:ea typeface="Calibri" charset="0"/>
+                        <a:cs typeface="Calibri" charset="0"/>
+                      </a:endParaRPr>
+                    </a:p>
+                  </a:txBody>
+                  <a:tcPr marL="91440" marR="91440" marT="45720" marB="45720" anchor="ctr">
+                    <a:lnL w="6350" cap="flat" cmpd="sng" algn="ctr">
+                      <a:solidFill>
+                        <a:srgbClr val="E3E8E9"/>
+                      </a:solidFill>
+                      <a:prstDash val="solid"/>
+                      <a:round/>
+                      <a:headEnd type="none" w="med" len="med"/>
+                      <a:tailEnd type="none" w="med" len="med"/>
+                    </a:lnL>
+                    <a:lnR w="6350" cap="flat" cmpd="sng" algn="ctr">
+                      <a:solidFill>
+                        <a:srgbClr val="E3E8E9"/>
+                      </a:solidFill>
+                      <a:prstDash val="solid"/>
+                      <a:round/>
+                      <a:headEnd type="none" w="med" len="med"/>
+                      <a:tailEnd type="none" w="med" len="med"/>
+                    </a:lnR>
+                    <a:lnT w="6350" cap="flat" cmpd="sng" algn="ctr">
+                      <a:solidFill>
+                        <a:srgbClr val="E3E8E9"/>
+                      </a:solidFill>
+                      <a:prstDash val="solid"/>
+                      <a:round/>
+                      <a:headEnd type="none" w="med" len="med"/>
+                      <a:tailEnd type="none" w="med" len="med"/>
+                    </a:lnT>
+                    <a:lnB w="6350" cap="flat" cmpd="sng" algn="ctr">
+                      <a:solidFill>
+                        <a:srgbClr val="E3E8E9"/>
+                      </a:solidFill>
+                      <a:prstDash val="solid"/>
+                      <a:round/>
+                      <a:headEnd type="none" w="med" len="med"/>
+                      <a:tailEnd type="none" w="med" len="med"/>
+                    </a:lnB>
+                    <a:solidFill>
+                      <a:srgbClr val="FFFFFF"/>
+                    </a:solidFill>
+                  </a:tcPr>
+                </a:tc>
+              </a:tr>
+              <a:tr h="288036">
+                <a:tc>
+                  <a:txBody>
+                    <a:bodyPr/>
+                    <a:lstStyle/>
+                    <a:p>
+                      <a:pPr indent="0" marL="0">
+                        <a:buNone/>
+                      </a:pPr>
+                      <a:r>
+                        <a:rPr lang="en-US" sz="1000" dirty="0">
+                          <a:solidFill>
+                            <a:srgbClr val="1C2B33"/>
+                          </a:solidFill>
+                          <a:latin typeface="Calibri" pitchFamily="34" charset="0"/>
+                          <a:ea typeface="Calibri" pitchFamily="34" charset="-122"/>
+                          <a:cs typeface="Calibri" pitchFamily="34" charset="-120"/>
+                        </a:rPr>
+                        <a:t>Repetidoras de Rádio</a:t>
+                      </a:r>
+                      <a:endParaRPr lang="en-US" sz="1000" dirty="0">
+                        <a:latin typeface="Calibri" charset="0"/>
+                        <a:ea typeface="Calibri" charset="0"/>
+                        <a:cs typeface="Calibri" charset="0"/>
+                      </a:endParaRPr>
+                    </a:p>
+                  </a:txBody>
+                  <a:tcPr marL="91440" marR="91440" marT="45720" marB="45720" anchor="ctr">
+                    <a:lnL w="6350" cap="flat" cmpd="sng" algn="ctr">
+                      <a:solidFill>
+                        <a:srgbClr val="E3E8E9"/>
+                      </a:solidFill>
+                      <a:prstDash val="solid"/>
+                      <a:round/>
+                      <a:headEnd type="none" w="med" len="med"/>
+                      <a:tailEnd type="none" w="med" len="med"/>
+                    </a:lnL>
+                    <a:lnR w="6350" cap="flat" cmpd="sng" algn="ctr">
+                      <a:solidFill>
+                        <a:srgbClr val="E3E8E9"/>
+                      </a:solidFill>
+                      <a:prstDash val="solid"/>
+                      <a:round/>
+                      <a:headEnd type="none" w="med" len="med"/>
+                      <a:tailEnd type="none" w="med" len="med"/>
+                    </a:lnR>
+                    <a:lnT w="6350" cap="flat" cmpd="sng" algn="ctr">
+                      <a:solidFill>
+                        <a:srgbClr val="E3E8E9"/>
+                      </a:solidFill>
+                      <a:prstDash val="solid"/>
+                      <a:round/>
+                      <a:headEnd type="none" w="med" len="med"/>
+                      <a:tailEnd type="none" w="med" len="med"/>
+                    </a:lnT>
+                    <a:lnB w="6350" cap="flat" cmpd="sng" algn="ctr">
+                      <a:solidFill>
+                        <a:srgbClr val="E3E8E9"/>
+                      </a:solidFill>
+                      <a:prstDash val="solid"/>
+                      <a:round/>
+                      <a:headEnd type="none" w="med" len="med"/>
+                      <a:tailEnd type="none" w="med" len="med"/>
+                    </a:lnB>
+                    <a:solidFill>
+                      <a:srgbClr val="F0F4F5"/>
+                    </a:solidFill>
+                  </a:tcPr>
+                </a:tc>
+                <a:tc>
+                  <a:txBody>
+                    <a:bodyPr/>
+                    <a:lstStyle/>
+                    <a:p>
+                      <a:pPr indent="0" marL="0">
+                        <a:buNone/>
+                      </a:pPr>
+                      <a:r>
+                        <a:rPr lang="en-US" sz="950" dirty="0">
+                          <a:solidFill>
+                            <a:srgbClr val="5B6B73"/>
+                          </a:solidFill>
+                          <a:latin typeface="Calibri" pitchFamily="34" charset="0"/>
+                          <a:ea typeface="Calibri" pitchFamily="34" charset="-122"/>
+                          <a:cs typeface="Calibri" pitchFamily="34" charset="-120"/>
+                        </a:rPr>
+                        <a:t>Eficiência de Produção</a:t>
                       </a:r>
                       <a:endParaRPr lang="en-US" sz="950" dirty="0">
                         <a:latin typeface="Calibri" charset="0"/>
@@ -22944,7 +23590,7 @@
                           <a:ea typeface="Calibri" pitchFamily="34" charset="-122"/>
                           <a:cs typeface="Calibri" pitchFamily="34" charset="-120"/>
                         </a:rPr>
-                        <a:t>US$ 447,3 mil</a:t>
+                        <a:t>US$ 217,9 mil</a:t>
                       </a:r>
                       <a:endParaRPr lang="en-US" sz="1000" dirty="0">
                         <a:latin typeface="Calibri" charset="0"/>
@@ -23014,7 +23660,7 @@
                           <a:ea typeface="Calibri" pitchFamily="34" charset="-122"/>
                           <a:cs typeface="Calibri" pitchFamily="34" charset="-120"/>
                         </a:rPr>
-                        <a:t>Repetidoras de Rádio</a:t>
+                        <a:t>TA - Flowline - Passagem de PIG</a:t>
                       </a:r>
                       <a:endParaRPr lang="en-US" sz="1000" dirty="0">
                         <a:latin typeface="Calibri" charset="0"/>
@@ -23082,7 +23728,555 @@
                           <a:ea typeface="Calibri" pitchFamily="34" charset="-122"/>
                           <a:cs typeface="Calibri" pitchFamily="34" charset="-120"/>
                         </a:rPr>
+                        <a:t>Integridade e Regulatório</a:t>
+                      </a:r>
+                      <a:endParaRPr lang="en-US" sz="950" dirty="0">
+                        <a:latin typeface="Calibri" charset="0"/>
+                        <a:ea typeface="Calibri" charset="0"/>
+                        <a:cs typeface="Calibri" charset="0"/>
+                      </a:endParaRPr>
+                    </a:p>
+                  </a:txBody>
+                  <a:tcPr marL="91440" marR="91440" marT="45720" marB="45720" anchor="ctr">
+                    <a:lnL w="6350" cap="flat" cmpd="sng" algn="ctr">
+                      <a:solidFill>
+                        <a:srgbClr val="E3E8E9"/>
+                      </a:solidFill>
+                      <a:prstDash val="solid"/>
+                      <a:round/>
+                      <a:headEnd type="none" w="med" len="med"/>
+                      <a:tailEnd type="none" w="med" len="med"/>
+                    </a:lnL>
+                    <a:lnR w="6350" cap="flat" cmpd="sng" algn="ctr">
+                      <a:solidFill>
+                        <a:srgbClr val="E3E8E9"/>
+                      </a:solidFill>
+                      <a:prstDash val="solid"/>
+                      <a:round/>
+                      <a:headEnd type="none" w="med" len="med"/>
+                      <a:tailEnd type="none" w="med" len="med"/>
+                    </a:lnR>
+                    <a:lnT w="6350" cap="flat" cmpd="sng" algn="ctr">
+                      <a:solidFill>
+                        <a:srgbClr val="E3E8E9"/>
+                      </a:solidFill>
+                      <a:prstDash val="solid"/>
+                      <a:round/>
+                      <a:headEnd type="none" w="med" len="med"/>
+                      <a:tailEnd type="none" w="med" len="med"/>
+                    </a:lnT>
+                    <a:lnB w="6350" cap="flat" cmpd="sng" algn="ctr">
+                      <a:solidFill>
+                        <a:srgbClr val="E3E8E9"/>
+                      </a:solidFill>
+                      <a:prstDash val="solid"/>
+                      <a:round/>
+                      <a:headEnd type="none" w="med" len="med"/>
+                      <a:tailEnd type="none" w="med" len="med"/>
+                    </a:lnB>
+                    <a:solidFill>
+                      <a:srgbClr val="FFFFFF"/>
+                    </a:solidFill>
+                  </a:tcPr>
+                </a:tc>
+                <a:tc>
+                  <a:txBody>
+                    <a:bodyPr/>
+                    <a:lstStyle/>
+                    <a:p>
+                      <a:pPr indent="0" marL="0">
+                        <a:buNone/>
+                      </a:pPr>
+                      <a:r>
+                        <a:rPr lang="en-US" sz="950" dirty="0">
+                          <a:solidFill>
+                            <a:srgbClr val="5B6B73"/>
+                          </a:solidFill>
+                          <a:latin typeface="Calibri" pitchFamily="34" charset="0"/>
+                          <a:ea typeface="Calibri" pitchFamily="34" charset="-122"/>
+                          <a:cs typeface="Calibri" pitchFamily="34" charset="-120"/>
+                        </a:rPr>
+                        <a:t>P&amp;Q - Processos</a:t>
+                      </a:r>
+                      <a:endParaRPr lang="en-US" sz="950" dirty="0">
+                        <a:latin typeface="Calibri" charset="0"/>
+                        <a:ea typeface="Calibri" charset="0"/>
+                        <a:cs typeface="Calibri" charset="0"/>
+                      </a:endParaRPr>
+                    </a:p>
+                  </a:txBody>
+                  <a:tcPr marL="91440" marR="91440" marT="45720" marB="45720" anchor="ctr">
+                    <a:lnL w="6350" cap="flat" cmpd="sng" algn="ctr">
+                      <a:solidFill>
+                        <a:srgbClr val="E3E8E9"/>
+                      </a:solidFill>
+                      <a:prstDash val="solid"/>
+                      <a:round/>
+                      <a:headEnd type="none" w="med" len="med"/>
+                      <a:tailEnd type="none" w="med" len="med"/>
+                    </a:lnL>
+                    <a:lnR w="6350" cap="flat" cmpd="sng" algn="ctr">
+                      <a:solidFill>
+                        <a:srgbClr val="E3E8E9"/>
+                      </a:solidFill>
+                      <a:prstDash val="solid"/>
+                      <a:round/>
+                      <a:headEnd type="none" w="med" len="med"/>
+                      <a:tailEnd type="none" w="med" len="med"/>
+                    </a:lnR>
+                    <a:lnT w="6350" cap="flat" cmpd="sng" algn="ctr">
+                      <a:solidFill>
+                        <a:srgbClr val="E3E8E9"/>
+                      </a:solidFill>
+                      <a:prstDash val="solid"/>
+                      <a:round/>
+                      <a:headEnd type="none" w="med" len="med"/>
+                      <a:tailEnd type="none" w="med" len="med"/>
+                    </a:lnT>
+                    <a:lnB w="6350" cap="flat" cmpd="sng" algn="ctr">
+                      <a:solidFill>
+                        <a:srgbClr val="E3E8E9"/>
+                      </a:solidFill>
+                      <a:prstDash val="solid"/>
+                      <a:round/>
+                      <a:headEnd type="none" w="med" len="med"/>
+                      <a:tailEnd type="none" w="med" len="med"/>
+                    </a:lnB>
+                    <a:solidFill>
+                      <a:srgbClr val="FFFFFF"/>
+                    </a:solidFill>
+                  </a:tcPr>
+                </a:tc>
+                <a:tc>
+                  <a:txBody>
+                    <a:bodyPr/>
+                    <a:lstStyle/>
+                    <a:p>
+                      <a:pPr algn="r" indent="0" marL="0">
+                        <a:buNone/>
+                      </a:pPr>
+                      <a:r>
+                        <a:rPr lang="en-US" sz="1000" b="1" dirty="0">
+                          <a:solidFill>
+                            <a:srgbClr val="0B2A3D"/>
+                          </a:solidFill>
+                          <a:latin typeface="Calibri" pitchFamily="34" charset="0"/>
+                          <a:ea typeface="Calibri" pitchFamily="34" charset="-122"/>
+                          <a:cs typeface="Calibri" pitchFamily="34" charset="-120"/>
+                        </a:rPr>
+                        <a:t>US$ 206,8 mil</a:t>
+                      </a:r>
+                      <a:endParaRPr lang="en-US" sz="1000" dirty="0">
+                        <a:latin typeface="Calibri" charset="0"/>
+                        <a:ea typeface="Calibri" charset="0"/>
+                        <a:cs typeface="Calibri" charset="0"/>
+                      </a:endParaRPr>
+                    </a:p>
+                  </a:txBody>
+                  <a:tcPr marL="91440" marR="91440" marT="45720" marB="45720" anchor="ctr">
+                    <a:lnL w="6350" cap="flat" cmpd="sng" algn="ctr">
+                      <a:solidFill>
+                        <a:srgbClr val="E3E8E9"/>
+                      </a:solidFill>
+                      <a:prstDash val="solid"/>
+                      <a:round/>
+                      <a:headEnd type="none" w="med" len="med"/>
+                      <a:tailEnd type="none" w="med" len="med"/>
+                    </a:lnL>
+                    <a:lnR w="6350" cap="flat" cmpd="sng" algn="ctr">
+                      <a:solidFill>
+                        <a:srgbClr val="E3E8E9"/>
+                      </a:solidFill>
+                      <a:prstDash val="solid"/>
+                      <a:round/>
+                      <a:headEnd type="none" w="med" len="med"/>
+                      <a:tailEnd type="none" w="med" len="med"/>
+                    </a:lnR>
+                    <a:lnT w="6350" cap="flat" cmpd="sng" algn="ctr">
+                      <a:solidFill>
+                        <a:srgbClr val="E3E8E9"/>
+                      </a:solidFill>
+                      <a:prstDash val="solid"/>
+                      <a:round/>
+                      <a:headEnd type="none" w="med" len="med"/>
+                      <a:tailEnd type="none" w="med" len="med"/>
+                    </a:lnT>
+                    <a:lnB w="6350" cap="flat" cmpd="sng" algn="ctr">
+                      <a:solidFill>
+                        <a:srgbClr val="E3E8E9"/>
+                      </a:solidFill>
+                      <a:prstDash val="solid"/>
+                      <a:round/>
+                      <a:headEnd type="none" w="med" len="med"/>
+                      <a:tailEnd type="none" w="med" len="med"/>
+                    </a:lnB>
+                    <a:solidFill>
+                      <a:srgbClr val="FFFFFF"/>
+                    </a:solidFill>
+                  </a:tcPr>
+                </a:tc>
+              </a:tr>
+              <a:tr h="288036">
+                <a:tc>
+                  <a:txBody>
+                    <a:bodyPr/>
+                    <a:lstStyle/>
+                    <a:p>
+                      <a:pPr indent="0" marL="0">
+                        <a:buNone/>
+                      </a:pPr>
+                      <a:r>
+                        <a:rPr lang="en-US" sz="1000" dirty="0">
+                          <a:solidFill>
+                            <a:srgbClr val="1C2B33"/>
+                          </a:solidFill>
+                          <a:latin typeface="Calibri" pitchFamily="34" charset="0"/>
+                          <a:ea typeface="Calibri" pitchFamily="34" charset="-122"/>
+                          <a:cs typeface="Calibri" pitchFamily="34" charset="-120"/>
+                        </a:rPr>
+                        <a:t>TA - NR13</a:t>
+                      </a:r>
+                      <a:endParaRPr lang="en-US" sz="1000" dirty="0">
+                        <a:latin typeface="Calibri" charset="0"/>
+                        <a:ea typeface="Calibri" charset="0"/>
+                        <a:cs typeface="Calibri" charset="0"/>
+                      </a:endParaRPr>
+                    </a:p>
+                  </a:txBody>
+                  <a:tcPr marL="91440" marR="91440" marT="45720" marB="45720" anchor="ctr">
+                    <a:lnL w="6350" cap="flat" cmpd="sng" algn="ctr">
+                      <a:solidFill>
+                        <a:srgbClr val="E3E8E9"/>
+                      </a:solidFill>
+                      <a:prstDash val="solid"/>
+                      <a:round/>
+                      <a:headEnd type="none" w="med" len="med"/>
+                      <a:tailEnd type="none" w="med" len="med"/>
+                    </a:lnL>
+                    <a:lnR w="6350" cap="flat" cmpd="sng" algn="ctr">
+                      <a:solidFill>
+                        <a:srgbClr val="E3E8E9"/>
+                      </a:solidFill>
+                      <a:prstDash val="solid"/>
+                      <a:round/>
+                      <a:headEnd type="none" w="med" len="med"/>
+                      <a:tailEnd type="none" w="med" len="med"/>
+                    </a:lnR>
+                    <a:lnT w="6350" cap="flat" cmpd="sng" algn="ctr">
+                      <a:solidFill>
+                        <a:srgbClr val="E3E8E9"/>
+                      </a:solidFill>
+                      <a:prstDash val="solid"/>
+                      <a:round/>
+                      <a:headEnd type="none" w="med" len="med"/>
+                      <a:tailEnd type="none" w="med" len="med"/>
+                    </a:lnT>
+                    <a:lnB w="6350" cap="flat" cmpd="sng" algn="ctr">
+                      <a:solidFill>
+                        <a:srgbClr val="E3E8E9"/>
+                      </a:solidFill>
+                      <a:prstDash val="solid"/>
+                      <a:round/>
+                      <a:headEnd type="none" w="med" len="med"/>
+                      <a:tailEnd type="none" w="med" len="med"/>
+                    </a:lnB>
+                    <a:solidFill>
+                      <a:srgbClr val="F0F4F5"/>
+                    </a:solidFill>
+                  </a:tcPr>
+                </a:tc>
+                <a:tc>
+                  <a:txBody>
+                    <a:bodyPr/>
+                    <a:lstStyle/>
+                    <a:p>
+                      <a:pPr indent="0" marL="0">
+                        <a:buNone/>
+                      </a:pPr>
+                      <a:r>
+                        <a:rPr lang="en-US" sz="950" dirty="0">
+                          <a:solidFill>
+                            <a:srgbClr val="5B6B73"/>
+                          </a:solidFill>
+                          <a:latin typeface="Calibri" pitchFamily="34" charset="0"/>
+                          <a:ea typeface="Calibri" pitchFamily="34" charset="-122"/>
+                          <a:cs typeface="Calibri" pitchFamily="34" charset="-120"/>
+                        </a:rPr>
                         <a:t>Eficiência de Produção</a:t>
+                      </a:r>
+                      <a:endParaRPr lang="en-US" sz="950" dirty="0">
+                        <a:latin typeface="Calibri" charset="0"/>
+                        <a:ea typeface="Calibri" charset="0"/>
+                        <a:cs typeface="Calibri" charset="0"/>
+                      </a:endParaRPr>
+                    </a:p>
+                  </a:txBody>
+                  <a:tcPr marL="91440" marR="91440" marT="45720" marB="45720" anchor="ctr">
+                    <a:lnL w="6350" cap="flat" cmpd="sng" algn="ctr">
+                      <a:solidFill>
+                        <a:srgbClr val="E3E8E9"/>
+                      </a:solidFill>
+                      <a:prstDash val="solid"/>
+                      <a:round/>
+                      <a:headEnd type="none" w="med" len="med"/>
+                      <a:tailEnd type="none" w="med" len="med"/>
+                    </a:lnL>
+                    <a:lnR w="6350" cap="flat" cmpd="sng" algn="ctr">
+                      <a:solidFill>
+                        <a:srgbClr val="E3E8E9"/>
+                      </a:solidFill>
+                      <a:prstDash val="solid"/>
+                      <a:round/>
+                      <a:headEnd type="none" w="med" len="med"/>
+                      <a:tailEnd type="none" w="med" len="med"/>
+                    </a:lnR>
+                    <a:lnT w="6350" cap="flat" cmpd="sng" algn="ctr">
+                      <a:solidFill>
+                        <a:srgbClr val="E3E8E9"/>
+                      </a:solidFill>
+                      <a:prstDash val="solid"/>
+                      <a:round/>
+                      <a:headEnd type="none" w="med" len="med"/>
+                      <a:tailEnd type="none" w="med" len="med"/>
+                    </a:lnT>
+                    <a:lnB w="6350" cap="flat" cmpd="sng" algn="ctr">
+                      <a:solidFill>
+                        <a:srgbClr val="E3E8E9"/>
+                      </a:solidFill>
+                      <a:prstDash val="solid"/>
+                      <a:round/>
+                      <a:headEnd type="none" w="med" len="med"/>
+                      <a:tailEnd type="none" w="med" len="med"/>
+                    </a:lnB>
+                    <a:solidFill>
+                      <a:srgbClr val="F0F4F5"/>
+                    </a:solidFill>
+                  </a:tcPr>
+                </a:tc>
+                <a:tc>
+                  <a:txBody>
+                    <a:bodyPr/>
+                    <a:lstStyle/>
+                    <a:p>
+                      <a:pPr indent="0" marL="0">
+                        <a:buNone/>
+                      </a:pPr>
+                      <a:r>
+                        <a:rPr lang="en-US" sz="950" dirty="0">
+                          <a:solidFill>
+                            <a:srgbClr val="5B6B73"/>
+                          </a:solidFill>
+                          <a:latin typeface="Calibri" pitchFamily="34" charset="0"/>
+                          <a:ea typeface="Calibri" pitchFamily="34" charset="-122"/>
+                          <a:cs typeface="Calibri" pitchFamily="34" charset="-120"/>
+                        </a:rPr>
+                        <a:t>TA - Parada Programada</a:t>
+                      </a:r>
+                      <a:endParaRPr lang="en-US" sz="950" dirty="0">
+                        <a:latin typeface="Calibri" charset="0"/>
+                        <a:ea typeface="Calibri" charset="0"/>
+                        <a:cs typeface="Calibri" charset="0"/>
+                      </a:endParaRPr>
+                    </a:p>
+                  </a:txBody>
+                  <a:tcPr marL="91440" marR="91440" marT="45720" marB="45720" anchor="ctr">
+                    <a:lnL w="6350" cap="flat" cmpd="sng" algn="ctr">
+                      <a:solidFill>
+                        <a:srgbClr val="E3E8E9"/>
+                      </a:solidFill>
+                      <a:prstDash val="solid"/>
+                      <a:round/>
+                      <a:headEnd type="none" w="med" len="med"/>
+                      <a:tailEnd type="none" w="med" len="med"/>
+                    </a:lnL>
+                    <a:lnR w="6350" cap="flat" cmpd="sng" algn="ctr">
+                      <a:solidFill>
+                        <a:srgbClr val="E3E8E9"/>
+                      </a:solidFill>
+                      <a:prstDash val="solid"/>
+                      <a:round/>
+                      <a:headEnd type="none" w="med" len="med"/>
+                      <a:tailEnd type="none" w="med" len="med"/>
+                    </a:lnR>
+                    <a:lnT w="6350" cap="flat" cmpd="sng" algn="ctr">
+                      <a:solidFill>
+                        <a:srgbClr val="E3E8E9"/>
+                      </a:solidFill>
+                      <a:prstDash val="solid"/>
+                      <a:round/>
+                      <a:headEnd type="none" w="med" len="med"/>
+                      <a:tailEnd type="none" w="med" len="med"/>
+                    </a:lnT>
+                    <a:lnB w="6350" cap="flat" cmpd="sng" algn="ctr">
+                      <a:solidFill>
+                        <a:srgbClr val="E3E8E9"/>
+                      </a:solidFill>
+                      <a:prstDash val="solid"/>
+                      <a:round/>
+                      <a:headEnd type="none" w="med" len="med"/>
+                      <a:tailEnd type="none" w="med" len="med"/>
+                    </a:lnB>
+                    <a:solidFill>
+                      <a:srgbClr val="F0F4F5"/>
+                    </a:solidFill>
+                  </a:tcPr>
+                </a:tc>
+                <a:tc>
+                  <a:txBody>
+                    <a:bodyPr/>
+                    <a:lstStyle/>
+                    <a:p>
+                      <a:pPr algn="r" indent="0" marL="0">
+                        <a:buNone/>
+                      </a:pPr>
+                      <a:r>
+                        <a:rPr lang="en-US" sz="1000" b="1" dirty="0">
+                          <a:solidFill>
+                            <a:srgbClr val="0B2A3D"/>
+                          </a:solidFill>
+                          <a:latin typeface="Calibri" pitchFamily="34" charset="0"/>
+                          <a:ea typeface="Calibri" pitchFamily="34" charset="-122"/>
+                          <a:cs typeface="Calibri" pitchFamily="34" charset="-120"/>
+                        </a:rPr>
+                        <a:t>US$ 173,2 mil</a:t>
+                      </a:r>
+                      <a:endParaRPr lang="en-US" sz="1000" dirty="0">
+                        <a:latin typeface="Calibri" charset="0"/>
+                        <a:ea typeface="Calibri" charset="0"/>
+                        <a:cs typeface="Calibri" charset="0"/>
+                      </a:endParaRPr>
+                    </a:p>
+                  </a:txBody>
+                  <a:tcPr marL="91440" marR="91440" marT="45720" marB="45720" anchor="ctr">
+                    <a:lnL w="6350" cap="flat" cmpd="sng" algn="ctr">
+                      <a:solidFill>
+                        <a:srgbClr val="E3E8E9"/>
+                      </a:solidFill>
+                      <a:prstDash val="solid"/>
+                      <a:round/>
+                      <a:headEnd type="none" w="med" len="med"/>
+                      <a:tailEnd type="none" w="med" len="med"/>
+                    </a:lnL>
+                    <a:lnR w="6350" cap="flat" cmpd="sng" algn="ctr">
+                      <a:solidFill>
+                        <a:srgbClr val="E3E8E9"/>
+                      </a:solidFill>
+                      <a:prstDash val="solid"/>
+                      <a:round/>
+                      <a:headEnd type="none" w="med" len="med"/>
+                      <a:tailEnd type="none" w="med" len="med"/>
+                    </a:lnR>
+                    <a:lnT w="6350" cap="flat" cmpd="sng" algn="ctr">
+                      <a:solidFill>
+                        <a:srgbClr val="E3E8E9"/>
+                      </a:solidFill>
+                      <a:prstDash val="solid"/>
+                      <a:round/>
+                      <a:headEnd type="none" w="med" len="med"/>
+                      <a:tailEnd type="none" w="med" len="med"/>
+                    </a:lnT>
+                    <a:lnB w="6350" cap="flat" cmpd="sng" algn="ctr">
+                      <a:solidFill>
+                        <a:srgbClr val="E3E8E9"/>
+                      </a:solidFill>
+                      <a:prstDash val="solid"/>
+                      <a:round/>
+                      <a:headEnd type="none" w="med" len="med"/>
+                      <a:tailEnd type="none" w="med" len="med"/>
+                    </a:lnB>
+                    <a:solidFill>
+                      <a:srgbClr val="F0F4F5"/>
+                    </a:solidFill>
+                  </a:tcPr>
+                </a:tc>
+              </a:tr>
+              <a:tr h="288036">
+                <a:tc>
+                  <a:txBody>
+                    <a:bodyPr/>
+                    <a:lstStyle/>
+                    <a:p>
+                      <a:pPr indent="0" marL="0">
+                        <a:buNone/>
+                      </a:pPr>
+                      <a:r>
+                        <a:rPr lang="en-US" sz="1000" dirty="0">
+                          <a:solidFill>
+                            <a:srgbClr val="1C2B33"/>
+                          </a:solidFill>
+                          <a:latin typeface="Calibri" pitchFamily="34" charset="0"/>
+                          <a:ea typeface="Calibri" pitchFamily="34" charset="-122"/>
+                          <a:cs typeface="Calibri" pitchFamily="34" charset="-120"/>
+                        </a:rPr>
+                        <a:t>Troca da Estação Meteorológica</a:t>
+                      </a:r>
+                      <a:endParaRPr lang="en-US" sz="1000" dirty="0">
+                        <a:latin typeface="Calibri" charset="0"/>
+                        <a:ea typeface="Calibri" charset="0"/>
+                        <a:cs typeface="Calibri" charset="0"/>
+                      </a:endParaRPr>
+                    </a:p>
+                  </a:txBody>
+                  <a:tcPr marL="91440" marR="91440" marT="45720" marB="45720" anchor="ctr">
+                    <a:lnL w="6350" cap="flat" cmpd="sng" algn="ctr">
+                      <a:solidFill>
+                        <a:srgbClr val="E3E8E9"/>
+                      </a:solidFill>
+                      <a:prstDash val="solid"/>
+                      <a:round/>
+                      <a:headEnd type="none" w="med" len="med"/>
+                      <a:tailEnd type="none" w="med" len="med"/>
+                    </a:lnL>
+                    <a:lnR w="6350" cap="flat" cmpd="sng" algn="ctr">
+                      <a:solidFill>
+                        <a:srgbClr val="E3E8E9"/>
+                      </a:solidFill>
+                      <a:prstDash val="solid"/>
+                      <a:round/>
+                      <a:headEnd type="none" w="med" len="med"/>
+                      <a:tailEnd type="none" w="med" len="med"/>
+                    </a:lnR>
+                    <a:lnT w="6350" cap="flat" cmpd="sng" algn="ctr">
+                      <a:solidFill>
+                        <a:srgbClr val="E3E8E9"/>
+                      </a:solidFill>
+                      <a:prstDash val="solid"/>
+                      <a:round/>
+                      <a:headEnd type="none" w="med" len="med"/>
+                      <a:tailEnd type="none" w="med" len="med"/>
+                    </a:lnT>
+                    <a:lnB w="6350" cap="flat" cmpd="sng" algn="ctr">
+                      <a:solidFill>
+                        <a:srgbClr val="E3E8E9"/>
+                      </a:solidFill>
+                      <a:prstDash val="solid"/>
+                      <a:round/>
+                      <a:headEnd type="none" w="med" len="med"/>
+                      <a:tailEnd type="none" w="med" len="med"/>
+                    </a:lnB>
+                    <a:solidFill>
+                      <a:srgbClr val="FFFFFF"/>
+                    </a:solidFill>
+                  </a:tcPr>
+                </a:tc>
+                <a:tc>
+                  <a:txBody>
+                    <a:bodyPr/>
+                    <a:lstStyle/>
+                    <a:p>
+                      <a:pPr indent="0" marL="0">
+                        <a:buNone/>
+                      </a:pPr>
+                      <a:r>
+                        <a:rPr lang="en-US" sz="950" dirty="0">
+                          <a:solidFill>
+                            <a:srgbClr val="5B6B73"/>
+                          </a:solidFill>
+                          <a:latin typeface="Calibri" pitchFamily="34" charset="0"/>
+                          <a:ea typeface="Calibri" pitchFamily="34" charset="-122"/>
+                          <a:cs typeface="Calibri" pitchFamily="34" charset="-120"/>
+                        </a:rPr>
+                        <a:t>Integridade e Regulatório</a:t>
                       </a:r>
                       <a:endParaRPr lang="en-US" sz="950" dirty="0">
                         <a:latin typeface="Calibri" charset="0"/>
@@ -23218,7 +24412,7 @@
                           <a:ea typeface="Calibri" pitchFamily="34" charset="-122"/>
                           <a:cs typeface="Calibri" pitchFamily="34" charset="-120"/>
                         </a:rPr>
-                        <a:t>US$ 217,9 mil</a:t>
+                        <a:t>US$ 169,1 mil</a:t>
                       </a:r>
                       <a:endParaRPr lang="en-US" sz="1000" dirty="0">
                         <a:latin typeface="Calibri" charset="0"/>
@@ -23562,555 +24756,7 @@
                           <a:ea typeface="Calibri" pitchFamily="34" charset="-122"/>
                           <a:cs typeface="Calibri" pitchFamily="34" charset="-120"/>
                         </a:rPr>
-                        <a:t>Implantação do projeto 'Muster Digital'</a:t>
-                      </a:r>
-                      <a:endParaRPr lang="en-US" sz="1000" dirty="0">
-                        <a:latin typeface="Calibri" charset="0"/>
-                        <a:ea typeface="Calibri" charset="0"/>
-                        <a:cs typeface="Calibri" charset="0"/>
-                      </a:endParaRPr>
-                    </a:p>
-                  </a:txBody>
-                  <a:tcPr marL="91440" marR="91440" marT="45720" marB="45720" anchor="ctr">
-                    <a:lnL w="6350" cap="flat" cmpd="sng" algn="ctr">
-                      <a:solidFill>
-                        <a:srgbClr val="E3E8E9"/>
-                      </a:solidFill>
-                      <a:prstDash val="solid"/>
-                      <a:round/>
-                      <a:headEnd type="none" w="med" len="med"/>
-                      <a:tailEnd type="none" w="med" len="med"/>
-                    </a:lnL>
-                    <a:lnR w="6350" cap="flat" cmpd="sng" algn="ctr">
-                      <a:solidFill>
-                        <a:srgbClr val="E3E8E9"/>
-                      </a:solidFill>
-                      <a:prstDash val="solid"/>
-                      <a:round/>
-                      <a:headEnd type="none" w="med" len="med"/>
-                      <a:tailEnd type="none" w="med" len="med"/>
-                    </a:lnR>
-                    <a:lnT w="6350" cap="flat" cmpd="sng" algn="ctr">
-                      <a:solidFill>
-                        <a:srgbClr val="E3E8E9"/>
-                      </a:solidFill>
-                      <a:prstDash val="solid"/>
-                      <a:round/>
-                      <a:headEnd type="none" w="med" len="med"/>
-                      <a:tailEnd type="none" w="med" len="med"/>
-                    </a:lnT>
-                    <a:lnB w="6350" cap="flat" cmpd="sng" algn="ctr">
-                      <a:solidFill>
-                        <a:srgbClr val="E3E8E9"/>
-                      </a:solidFill>
-                      <a:prstDash val="solid"/>
-                      <a:round/>
-                      <a:headEnd type="none" w="med" len="med"/>
-                      <a:tailEnd type="none" w="med" len="med"/>
-                    </a:lnB>
-                    <a:solidFill>
-                      <a:srgbClr val="FFFFFF"/>
-                    </a:solidFill>
-                  </a:tcPr>
-                </a:tc>
-                <a:tc>
-                  <a:txBody>
-                    <a:bodyPr/>
-                    <a:lstStyle/>
-                    <a:p>
-                      <a:pPr indent="0" marL="0">
-                        <a:buNone/>
-                      </a:pPr>
-                      <a:r>
-                        <a:rPr lang="en-US" sz="950" dirty="0">
-                          <a:solidFill>
-                            <a:srgbClr val="5B6B73"/>
-                          </a:solidFill>
-                          <a:latin typeface="Calibri" pitchFamily="34" charset="0"/>
-                          <a:ea typeface="Calibri" pitchFamily="34" charset="-122"/>
-                          <a:cs typeface="Calibri" pitchFamily="34" charset="-120"/>
-                        </a:rPr>
-                        <a:t>Bem Estar/Segurança</a:t>
-                      </a:r>
-                      <a:endParaRPr lang="en-US" sz="950" dirty="0">
-                        <a:latin typeface="Calibri" charset="0"/>
-                        <a:ea typeface="Calibri" charset="0"/>
-                        <a:cs typeface="Calibri" charset="0"/>
-                      </a:endParaRPr>
-                    </a:p>
-                  </a:txBody>
-                  <a:tcPr marL="91440" marR="91440" marT="45720" marB="45720" anchor="ctr">
-                    <a:lnL w="6350" cap="flat" cmpd="sng" algn="ctr">
-                      <a:solidFill>
-                        <a:srgbClr val="E3E8E9"/>
-                      </a:solidFill>
-                      <a:prstDash val="solid"/>
-                      <a:round/>
-                      <a:headEnd type="none" w="med" len="med"/>
-                      <a:tailEnd type="none" w="med" len="med"/>
-                    </a:lnL>
-                    <a:lnR w="6350" cap="flat" cmpd="sng" algn="ctr">
-                      <a:solidFill>
-                        <a:srgbClr val="E3E8E9"/>
-                      </a:solidFill>
-                      <a:prstDash val="solid"/>
-                      <a:round/>
-                      <a:headEnd type="none" w="med" len="med"/>
-                      <a:tailEnd type="none" w="med" len="med"/>
-                    </a:lnR>
-                    <a:lnT w="6350" cap="flat" cmpd="sng" algn="ctr">
-                      <a:solidFill>
-                        <a:srgbClr val="E3E8E9"/>
-                      </a:solidFill>
-                      <a:prstDash val="solid"/>
-                      <a:round/>
-                      <a:headEnd type="none" w="med" len="med"/>
-                      <a:tailEnd type="none" w="med" len="med"/>
-                    </a:lnT>
-                    <a:lnB w="6350" cap="flat" cmpd="sng" algn="ctr">
-                      <a:solidFill>
-                        <a:srgbClr val="E3E8E9"/>
-                      </a:solidFill>
-                      <a:prstDash val="solid"/>
-                      <a:round/>
-                      <a:headEnd type="none" w="med" len="med"/>
-                      <a:tailEnd type="none" w="med" len="med"/>
-                    </a:lnB>
-                    <a:solidFill>
-                      <a:srgbClr val="FFFFFF"/>
-                    </a:solidFill>
-                  </a:tcPr>
-                </a:tc>
-                <a:tc>
-                  <a:txBody>
-                    <a:bodyPr/>
-                    <a:lstStyle/>
-                    <a:p>
-                      <a:pPr indent="0" marL="0">
-                        <a:buNone/>
-                      </a:pPr>
-                      <a:r>
-                        <a:rPr lang="en-US" sz="950" dirty="0">
-                          <a:solidFill>
-                            <a:srgbClr val="5B6B73"/>
-                          </a:solidFill>
-                          <a:latin typeface="Calibri" pitchFamily="34" charset="0"/>
-                          <a:ea typeface="Calibri" pitchFamily="34" charset="-122"/>
-                          <a:cs typeface="Calibri" pitchFamily="34" charset="-120"/>
-                        </a:rPr>
-                        <a:t>Saúde e Segurança Ocupacional</a:t>
-                      </a:r>
-                      <a:endParaRPr lang="en-US" sz="950" dirty="0">
-                        <a:latin typeface="Calibri" charset="0"/>
-                        <a:ea typeface="Calibri" charset="0"/>
-                        <a:cs typeface="Calibri" charset="0"/>
-                      </a:endParaRPr>
-                    </a:p>
-                  </a:txBody>
-                  <a:tcPr marL="91440" marR="91440" marT="45720" marB="45720" anchor="ctr">
-                    <a:lnL w="6350" cap="flat" cmpd="sng" algn="ctr">
-                      <a:solidFill>
-                        <a:srgbClr val="E3E8E9"/>
-                      </a:solidFill>
-                      <a:prstDash val="solid"/>
-                      <a:round/>
-                      <a:headEnd type="none" w="med" len="med"/>
-                      <a:tailEnd type="none" w="med" len="med"/>
-                    </a:lnL>
-                    <a:lnR w="6350" cap="flat" cmpd="sng" algn="ctr">
-                      <a:solidFill>
-                        <a:srgbClr val="E3E8E9"/>
-                      </a:solidFill>
-                      <a:prstDash val="solid"/>
-                      <a:round/>
-                      <a:headEnd type="none" w="med" len="med"/>
-                      <a:tailEnd type="none" w="med" len="med"/>
-                    </a:lnR>
-                    <a:lnT w="6350" cap="flat" cmpd="sng" algn="ctr">
-                      <a:solidFill>
-                        <a:srgbClr val="E3E8E9"/>
-                      </a:solidFill>
-                      <a:prstDash val="solid"/>
-                      <a:round/>
-                      <a:headEnd type="none" w="med" len="med"/>
-                      <a:tailEnd type="none" w="med" len="med"/>
-                    </a:lnT>
-                    <a:lnB w="6350" cap="flat" cmpd="sng" algn="ctr">
-                      <a:solidFill>
-                        <a:srgbClr val="E3E8E9"/>
-                      </a:solidFill>
-                      <a:prstDash val="solid"/>
-                      <a:round/>
-                      <a:headEnd type="none" w="med" len="med"/>
-                      <a:tailEnd type="none" w="med" len="med"/>
-                    </a:lnB>
-                    <a:solidFill>
-                      <a:srgbClr val="FFFFFF"/>
-                    </a:solidFill>
-                  </a:tcPr>
-                </a:tc>
-                <a:tc>
-                  <a:txBody>
-                    <a:bodyPr/>
-                    <a:lstStyle/>
-                    <a:p>
-                      <a:pPr algn="r" indent="0" marL="0">
-                        <a:buNone/>
-                      </a:pPr>
-                      <a:r>
-                        <a:rPr lang="en-US" sz="1000" b="1" dirty="0">
-                          <a:solidFill>
-                            <a:srgbClr val="0B2A3D"/>
-                          </a:solidFill>
-                          <a:latin typeface="Calibri" pitchFamily="34" charset="0"/>
-                          <a:ea typeface="Calibri" pitchFamily="34" charset="-122"/>
-                          <a:cs typeface="Calibri" pitchFamily="34" charset="-120"/>
-                        </a:rPr>
-                        <a:t>US$ 150,0 mil</a:t>
-                      </a:r>
-                      <a:endParaRPr lang="en-US" sz="1000" dirty="0">
-                        <a:latin typeface="Calibri" charset="0"/>
-                        <a:ea typeface="Calibri" charset="0"/>
-                        <a:cs typeface="Calibri" charset="0"/>
-                      </a:endParaRPr>
-                    </a:p>
-                  </a:txBody>
-                  <a:tcPr marL="91440" marR="91440" marT="45720" marB="45720" anchor="ctr">
-                    <a:lnL w="6350" cap="flat" cmpd="sng" algn="ctr">
-                      <a:solidFill>
-                        <a:srgbClr val="E3E8E9"/>
-                      </a:solidFill>
-                      <a:prstDash val="solid"/>
-                      <a:round/>
-                      <a:headEnd type="none" w="med" len="med"/>
-                      <a:tailEnd type="none" w="med" len="med"/>
-                    </a:lnL>
-                    <a:lnR w="6350" cap="flat" cmpd="sng" algn="ctr">
-                      <a:solidFill>
-                        <a:srgbClr val="E3E8E9"/>
-                      </a:solidFill>
-                      <a:prstDash val="solid"/>
-                      <a:round/>
-                      <a:headEnd type="none" w="med" len="med"/>
-                      <a:tailEnd type="none" w="med" len="med"/>
-                    </a:lnR>
-                    <a:lnT w="6350" cap="flat" cmpd="sng" algn="ctr">
-                      <a:solidFill>
-                        <a:srgbClr val="E3E8E9"/>
-                      </a:solidFill>
-                      <a:prstDash val="solid"/>
-                      <a:round/>
-                      <a:headEnd type="none" w="med" len="med"/>
-                      <a:tailEnd type="none" w="med" len="med"/>
-                    </a:lnT>
-                    <a:lnB w="6350" cap="flat" cmpd="sng" algn="ctr">
-                      <a:solidFill>
-                        <a:srgbClr val="E3E8E9"/>
-                      </a:solidFill>
-                      <a:prstDash val="solid"/>
-                      <a:round/>
-                      <a:headEnd type="none" w="med" len="med"/>
-                      <a:tailEnd type="none" w="med" len="med"/>
-                    </a:lnB>
-                    <a:solidFill>
-                      <a:srgbClr val="FFFFFF"/>
-                    </a:solidFill>
-                  </a:tcPr>
-                </a:tc>
-              </a:tr>
-              <a:tr h="288036">
-                <a:tc>
-                  <a:txBody>
-                    <a:bodyPr/>
-                    <a:lstStyle/>
-                    <a:p>
-                      <a:pPr indent="0" marL="0">
-                        <a:buNone/>
-                      </a:pPr>
-                      <a:r>
-                        <a:rPr lang="en-US" sz="1000" dirty="0">
-                          <a:solidFill>
-                            <a:srgbClr val="1C2B33"/>
-                          </a:solidFill>
-                          <a:latin typeface="Calibri" pitchFamily="34" charset="0"/>
-                          <a:ea typeface="Calibri" pitchFamily="34" charset="-122"/>
-                          <a:cs typeface="Calibri" pitchFamily="34" charset="-120"/>
-                        </a:rPr>
-                        <a:t>PÓS TA - NR13</a:t>
-                      </a:r>
-                      <a:endParaRPr lang="en-US" sz="1000" dirty="0">
-                        <a:latin typeface="Calibri" charset="0"/>
-                        <a:ea typeface="Calibri" charset="0"/>
-                        <a:cs typeface="Calibri" charset="0"/>
-                      </a:endParaRPr>
-                    </a:p>
-                  </a:txBody>
-                  <a:tcPr marL="91440" marR="91440" marT="45720" marB="45720" anchor="ctr">
-                    <a:lnL w="6350" cap="flat" cmpd="sng" algn="ctr">
-                      <a:solidFill>
-                        <a:srgbClr val="E3E8E9"/>
-                      </a:solidFill>
-                      <a:prstDash val="solid"/>
-                      <a:round/>
-                      <a:headEnd type="none" w="med" len="med"/>
-                      <a:tailEnd type="none" w="med" len="med"/>
-                    </a:lnL>
-                    <a:lnR w="6350" cap="flat" cmpd="sng" algn="ctr">
-                      <a:solidFill>
-                        <a:srgbClr val="E3E8E9"/>
-                      </a:solidFill>
-                      <a:prstDash val="solid"/>
-                      <a:round/>
-                      <a:headEnd type="none" w="med" len="med"/>
-                      <a:tailEnd type="none" w="med" len="med"/>
-                    </a:lnR>
-                    <a:lnT w="6350" cap="flat" cmpd="sng" algn="ctr">
-                      <a:solidFill>
-                        <a:srgbClr val="E3E8E9"/>
-                      </a:solidFill>
-                      <a:prstDash val="solid"/>
-                      <a:round/>
-                      <a:headEnd type="none" w="med" len="med"/>
-                      <a:tailEnd type="none" w="med" len="med"/>
-                    </a:lnT>
-                    <a:lnB w="6350" cap="flat" cmpd="sng" algn="ctr">
-                      <a:solidFill>
-                        <a:srgbClr val="E3E8E9"/>
-                      </a:solidFill>
-                      <a:prstDash val="solid"/>
-                      <a:round/>
-                      <a:headEnd type="none" w="med" len="med"/>
-                      <a:tailEnd type="none" w="med" len="med"/>
-                    </a:lnB>
-                    <a:solidFill>
-                      <a:srgbClr val="F0F4F5"/>
-                    </a:solidFill>
-                  </a:tcPr>
-                </a:tc>
-                <a:tc>
-                  <a:txBody>
-                    <a:bodyPr/>
-                    <a:lstStyle/>
-                    <a:p>
-                      <a:pPr indent="0" marL="0">
-                        <a:buNone/>
-                      </a:pPr>
-                      <a:r>
-                        <a:rPr lang="en-US" sz="950" dirty="0">
-                          <a:solidFill>
-                            <a:srgbClr val="5B6B73"/>
-                          </a:solidFill>
-                          <a:latin typeface="Calibri" pitchFamily="34" charset="0"/>
-                          <a:ea typeface="Calibri" pitchFamily="34" charset="-122"/>
-                          <a:cs typeface="Calibri" pitchFamily="34" charset="-120"/>
-                        </a:rPr>
-                        <a:t>Eficiência de Produção</a:t>
-                      </a:r>
-                      <a:endParaRPr lang="en-US" sz="950" dirty="0">
-                        <a:latin typeface="Calibri" charset="0"/>
-                        <a:ea typeface="Calibri" charset="0"/>
-                        <a:cs typeface="Calibri" charset="0"/>
-                      </a:endParaRPr>
-                    </a:p>
-                  </a:txBody>
-                  <a:tcPr marL="91440" marR="91440" marT="45720" marB="45720" anchor="ctr">
-                    <a:lnL w="6350" cap="flat" cmpd="sng" algn="ctr">
-                      <a:solidFill>
-                        <a:srgbClr val="E3E8E9"/>
-                      </a:solidFill>
-                      <a:prstDash val="solid"/>
-                      <a:round/>
-                      <a:headEnd type="none" w="med" len="med"/>
-                      <a:tailEnd type="none" w="med" len="med"/>
-                    </a:lnL>
-                    <a:lnR w="6350" cap="flat" cmpd="sng" algn="ctr">
-                      <a:solidFill>
-                        <a:srgbClr val="E3E8E9"/>
-                      </a:solidFill>
-                      <a:prstDash val="solid"/>
-                      <a:round/>
-                      <a:headEnd type="none" w="med" len="med"/>
-                      <a:tailEnd type="none" w="med" len="med"/>
-                    </a:lnR>
-                    <a:lnT w="6350" cap="flat" cmpd="sng" algn="ctr">
-                      <a:solidFill>
-                        <a:srgbClr val="E3E8E9"/>
-                      </a:solidFill>
-                      <a:prstDash val="solid"/>
-                      <a:round/>
-                      <a:headEnd type="none" w="med" len="med"/>
-                      <a:tailEnd type="none" w="med" len="med"/>
-                    </a:lnT>
-                    <a:lnB w="6350" cap="flat" cmpd="sng" algn="ctr">
-                      <a:solidFill>
-                        <a:srgbClr val="E3E8E9"/>
-                      </a:solidFill>
-                      <a:prstDash val="solid"/>
-                      <a:round/>
-                      <a:headEnd type="none" w="med" len="med"/>
-                      <a:tailEnd type="none" w="med" len="med"/>
-                    </a:lnB>
-                    <a:solidFill>
-                      <a:srgbClr val="F0F4F5"/>
-                    </a:solidFill>
-                  </a:tcPr>
-                </a:tc>
-                <a:tc>
-                  <a:txBody>
-                    <a:bodyPr/>
-                    <a:lstStyle/>
-                    <a:p>
-                      <a:pPr indent="0" marL="0">
-                        <a:buNone/>
-                      </a:pPr>
-                      <a:r>
-                        <a:rPr lang="en-US" sz="950" dirty="0">
-                          <a:solidFill>
-                            <a:srgbClr val="5B6B73"/>
-                          </a:solidFill>
-                          <a:latin typeface="Calibri" pitchFamily="34" charset="0"/>
-                          <a:ea typeface="Calibri" pitchFamily="34" charset="-122"/>
-                          <a:cs typeface="Calibri" pitchFamily="34" charset="-120"/>
-                        </a:rPr>
-                        <a:t>TA - Parada Programada</a:t>
-                      </a:r>
-                      <a:endParaRPr lang="en-US" sz="950" dirty="0">
-                        <a:latin typeface="Calibri" charset="0"/>
-                        <a:ea typeface="Calibri" charset="0"/>
-                        <a:cs typeface="Calibri" charset="0"/>
-                      </a:endParaRPr>
-                    </a:p>
-                  </a:txBody>
-                  <a:tcPr marL="91440" marR="91440" marT="45720" marB="45720" anchor="ctr">
-                    <a:lnL w="6350" cap="flat" cmpd="sng" algn="ctr">
-                      <a:solidFill>
-                        <a:srgbClr val="E3E8E9"/>
-                      </a:solidFill>
-                      <a:prstDash val="solid"/>
-                      <a:round/>
-                      <a:headEnd type="none" w="med" len="med"/>
-                      <a:tailEnd type="none" w="med" len="med"/>
-                    </a:lnL>
-                    <a:lnR w="6350" cap="flat" cmpd="sng" algn="ctr">
-                      <a:solidFill>
-                        <a:srgbClr val="E3E8E9"/>
-                      </a:solidFill>
-                      <a:prstDash val="solid"/>
-                      <a:round/>
-                      <a:headEnd type="none" w="med" len="med"/>
-                      <a:tailEnd type="none" w="med" len="med"/>
-                    </a:lnR>
-                    <a:lnT w="6350" cap="flat" cmpd="sng" algn="ctr">
-                      <a:solidFill>
-                        <a:srgbClr val="E3E8E9"/>
-                      </a:solidFill>
-                      <a:prstDash val="solid"/>
-                      <a:round/>
-                      <a:headEnd type="none" w="med" len="med"/>
-                      <a:tailEnd type="none" w="med" len="med"/>
-                    </a:lnT>
-                    <a:lnB w="6350" cap="flat" cmpd="sng" algn="ctr">
-                      <a:solidFill>
-                        <a:srgbClr val="E3E8E9"/>
-                      </a:solidFill>
-                      <a:prstDash val="solid"/>
-                      <a:round/>
-                      <a:headEnd type="none" w="med" len="med"/>
-                      <a:tailEnd type="none" w="med" len="med"/>
-                    </a:lnB>
-                    <a:solidFill>
-                      <a:srgbClr val="F0F4F5"/>
-                    </a:solidFill>
-                  </a:tcPr>
-                </a:tc>
-                <a:tc>
-                  <a:txBody>
-                    <a:bodyPr/>
-                    <a:lstStyle/>
-                    <a:p>
-                      <a:pPr algn="r" indent="0" marL="0">
-                        <a:buNone/>
-                      </a:pPr>
-                      <a:r>
-                        <a:rPr lang="en-US" sz="1000" b="1" dirty="0">
-                          <a:solidFill>
-                            <a:srgbClr val="0B2A3D"/>
-                          </a:solidFill>
-                          <a:latin typeface="Calibri" pitchFamily="34" charset="0"/>
-                          <a:ea typeface="Calibri" pitchFamily="34" charset="-122"/>
-                          <a:cs typeface="Calibri" pitchFamily="34" charset="-120"/>
-                        </a:rPr>
-                        <a:t>US$ 135,6 mil</a:t>
-                      </a:r>
-                      <a:endParaRPr lang="en-US" sz="1000" dirty="0">
-                        <a:latin typeface="Calibri" charset="0"/>
-                        <a:ea typeface="Calibri" charset="0"/>
-                        <a:cs typeface="Calibri" charset="0"/>
-                      </a:endParaRPr>
-                    </a:p>
-                  </a:txBody>
-                  <a:tcPr marL="91440" marR="91440" marT="45720" marB="45720" anchor="ctr">
-                    <a:lnL w="6350" cap="flat" cmpd="sng" algn="ctr">
-                      <a:solidFill>
-                        <a:srgbClr val="E3E8E9"/>
-                      </a:solidFill>
-                      <a:prstDash val="solid"/>
-                      <a:round/>
-                      <a:headEnd type="none" w="med" len="med"/>
-                      <a:tailEnd type="none" w="med" len="med"/>
-                    </a:lnL>
-                    <a:lnR w="6350" cap="flat" cmpd="sng" algn="ctr">
-                      <a:solidFill>
-                        <a:srgbClr val="E3E8E9"/>
-                      </a:solidFill>
-                      <a:prstDash val="solid"/>
-                      <a:round/>
-                      <a:headEnd type="none" w="med" len="med"/>
-                      <a:tailEnd type="none" w="med" len="med"/>
-                    </a:lnR>
-                    <a:lnT w="6350" cap="flat" cmpd="sng" algn="ctr">
-                      <a:solidFill>
-                        <a:srgbClr val="E3E8E9"/>
-                      </a:solidFill>
-                      <a:prstDash val="solid"/>
-                      <a:round/>
-                      <a:headEnd type="none" w="med" len="med"/>
-                      <a:tailEnd type="none" w="med" len="med"/>
-                    </a:lnT>
-                    <a:lnB w="6350" cap="flat" cmpd="sng" algn="ctr">
-                      <a:solidFill>
-                        <a:srgbClr val="E3E8E9"/>
-                      </a:solidFill>
-                      <a:prstDash val="solid"/>
-                      <a:round/>
-                      <a:headEnd type="none" w="med" len="med"/>
-                      <a:tailEnd type="none" w="med" len="med"/>
-                    </a:lnB>
-                    <a:solidFill>
-                      <a:srgbClr val="F0F4F5"/>
-                    </a:solidFill>
-                  </a:tcPr>
-                </a:tc>
-              </a:tr>
-              <a:tr h="288036">
-                <a:tc>
-                  <a:txBody>
-                    <a:bodyPr/>
-                    <a:lstStyle/>
-                    <a:p>
-                      <a:pPr indent="0" marL="0">
-                        <a:buNone/>
-                      </a:pPr>
-                      <a:r>
-                        <a:rPr lang="en-US" sz="1000" dirty="0">
-                          <a:solidFill>
-                            <a:srgbClr val="1C2B33"/>
-                          </a:solidFill>
-                          <a:latin typeface="Calibri" pitchFamily="34" charset="0"/>
-                          <a:ea typeface="Calibri" pitchFamily="34" charset="-122"/>
-                          <a:cs typeface="Calibri" pitchFamily="34" charset="-120"/>
-                        </a:rPr>
-                        <a:t>PRÉ TA - Caldeiraria</a:t>
+                        <a:t>TA - Desmobilização</a:t>
                       </a:r>
                       <a:endParaRPr lang="en-US" sz="1000" dirty="0">
                         <a:latin typeface="Calibri" charset="0"/>
@@ -24314,7 +24960,7 @@
                           <a:ea typeface="Calibri" pitchFamily="34" charset="-122"/>
                           <a:cs typeface="Calibri" pitchFamily="34" charset="-120"/>
                         </a:rPr>
-                        <a:t>US$ 132,9 mil</a:t>
+                        <a:t>US$ 162,1 mil</a:t>
                       </a:r>
                       <a:endParaRPr lang="en-US" sz="1000" dirty="0">
                         <a:latin typeface="Calibri" charset="0"/>
@@ -24384,7 +25030,7 @@
                           <a:ea typeface="Calibri" pitchFamily="34" charset="-122"/>
                           <a:cs typeface="Calibri" pitchFamily="34" charset="-120"/>
                         </a:rPr>
-                        <a:t>ESTUDO DE ENGENHARIA</a:t>
+                        <a:t>Implantação do projeto 'Muster Digital'</a:t>
                       </a:r>
                       <a:endParaRPr lang="en-US" sz="1000" dirty="0">
                         <a:latin typeface="Calibri" charset="0"/>
@@ -24452,7 +25098,7 @@
                           <a:ea typeface="Calibri" pitchFamily="34" charset="-122"/>
                           <a:cs typeface="Calibri" pitchFamily="34" charset="-120"/>
                         </a:rPr>
-                        <a:t>Eficiência de Produção</a:t>
+                        <a:t>Bem Estar/Segurança</a:t>
                       </a:r>
                       <a:endParaRPr lang="en-US" sz="950" dirty="0">
                         <a:latin typeface="Calibri" charset="0"/>
@@ -24520,7 +25166,7 @@
                           <a:ea typeface="Calibri" pitchFamily="34" charset="-122"/>
                           <a:cs typeface="Calibri" pitchFamily="34" charset="-120"/>
                         </a:rPr>
-                        <a:t>Projetos</a:t>
+                        <a:t>Saúde e Segurança Ocupacional</a:t>
                       </a:r>
                       <a:endParaRPr lang="en-US" sz="950" dirty="0">
                         <a:latin typeface="Calibri" charset="0"/>
@@ -24588,555 +25234,7 @@
                           <a:ea typeface="Calibri" pitchFamily="34" charset="-122"/>
                           <a:cs typeface="Calibri" pitchFamily="34" charset="-120"/>
                         </a:rPr>
-                        <a:t>US$ 120,0 mil</a:t>
-                      </a:r>
-                      <a:endParaRPr lang="en-US" sz="1000" dirty="0">
-                        <a:latin typeface="Calibri" charset="0"/>
-                        <a:ea typeface="Calibri" charset="0"/>
-                        <a:cs typeface="Calibri" charset="0"/>
-                      </a:endParaRPr>
-                    </a:p>
-                  </a:txBody>
-                  <a:tcPr marL="91440" marR="91440" marT="45720" marB="45720" anchor="ctr">
-                    <a:lnL w="6350" cap="flat" cmpd="sng" algn="ctr">
-                      <a:solidFill>
-                        <a:srgbClr val="E3E8E9"/>
-                      </a:solidFill>
-                      <a:prstDash val="solid"/>
-                      <a:round/>
-                      <a:headEnd type="none" w="med" len="med"/>
-                      <a:tailEnd type="none" w="med" len="med"/>
-                    </a:lnL>
-                    <a:lnR w="6350" cap="flat" cmpd="sng" algn="ctr">
-                      <a:solidFill>
-                        <a:srgbClr val="E3E8E9"/>
-                      </a:solidFill>
-                      <a:prstDash val="solid"/>
-                      <a:round/>
-                      <a:headEnd type="none" w="med" len="med"/>
-                      <a:tailEnd type="none" w="med" len="med"/>
-                    </a:lnR>
-                    <a:lnT w="6350" cap="flat" cmpd="sng" algn="ctr">
-                      <a:solidFill>
-                        <a:srgbClr val="E3E8E9"/>
-                      </a:solidFill>
-                      <a:prstDash val="solid"/>
-                      <a:round/>
-                      <a:headEnd type="none" w="med" len="med"/>
-                      <a:tailEnd type="none" w="med" len="med"/>
-                    </a:lnT>
-                    <a:lnB w="6350" cap="flat" cmpd="sng" algn="ctr">
-                      <a:solidFill>
-                        <a:srgbClr val="E3E8E9"/>
-                      </a:solidFill>
-                      <a:prstDash val="solid"/>
-                      <a:round/>
-                      <a:headEnd type="none" w="med" len="med"/>
-                      <a:tailEnd type="none" w="med" len="med"/>
-                    </a:lnB>
-                    <a:solidFill>
-                      <a:srgbClr val="F0F4F5"/>
-                    </a:solidFill>
-                  </a:tcPr>
-                </a:tc>
-              </a:tr>
-              <a:tr h="288036">
-                <a:tc>
-                  <a:txBody>
-                    <a:bodyPr/>
-                    <a:lstStyle/>
-                    <a:p>
-                      <a:pPr indent="0" marL="0">
-                        <a:buNone/>
-                      </a:pPr>
-                      <a:r>
-                        <a:rPr lang="en-US" sz="1000" dirty="0">
-                          <a:solidFill>
-                            <a:srgbClr val="1C2B33"/>
-                          </a:solidFill>
-                          <a:latin typeface="Calibri" pitchFamily="34" charset="0"/>
-                          <a:ea typeface="Calibri" pitchFamily="34" charset="-122"/>
-                          <a:cs typeface="Calibri" pitchFamily="34" charset="-120"/>
-                        </a:rPr>
-                        <a:t>PRÉ TA - NR13</a:t>
-                      </a:r>
-                      <a:endParaRPr lang="en-US" sz="1000" dirty="0">
-                        <a:latin typeface="Calibri" charset="0"/>
-                        <a:ea typeface="Calibri" charset="0"/>
-                        <a:cs typeface="Calibri" charset="0"/>
-                      </a:endParaRPr>
-                    </a:p>
-                  </a:txBody>
-                  <a:tcPr marL="91440" marR="91440" marT="45720" marB="45720" anchor="ctr">
-                    <a:lnL w="6350" cap="flat" cmpd="sng" algn="ctr">
-                      <a:solidFill>
-                        <a:srgbClr val="E3E8E9"/>
-                      </a:solidFill>
-                      <a:prstDash val="solid"/>
-                      <a:round/>
-                      <a:headEnd type="none" w="med" len="med"/>
-                      <a:tailEnd type="none" w="med" len="med"/>
-                    </a:lnL>
-                    <a:lnR w="6350" cap="flat" cmpd="sng" algn="ctr">
-                      <a:solidFill>
-                        <a:srgbClr val="E3E8E9"/>
-                      </a:solidFill>
-                      <a:prstDash val="solid"/>
-                      <a:round/>
-                      <a:headEnd type="none" w="med" len="med"/>
-                      <a:tailEnd type="none" w="med" len="med"/>
-                    </a:lnR>
-                    <a:lnT w="6350" cap="flat" cmpd="sng" algn="ctr">
-                      <a:solidFill>
-                        <a:srgbClr val="E3E8E9"/>
-                      </a:solidFill>
-                      <a:prstDash val="solid"/>
-                      <a:round/>
-                      <a:headEnd type="none" w="med" len="med"/>
-                      <a:tailEnd type="none" w="med" len="med"/>
-                    </a:lnT>
-                    <a:lnB w="6350" cap="flat" cmpd="sng" algn="ctr">
-                      <a:solidFill>
-                        <a:srgbClr val="E3E8E9"/>
-                      </a:solidFill>
-                      <a:prstDash val="solid"/>
-                      <a:round/>
-                      <a:headEnd type="none" w="med" len="med"/>
-                      <a:tailEnd type="none" w="med" len="med"/>
-                    </a:lnB>
-                    <a:solidFill>
-                      <a:srgbClr val="FFFFFF"/>
-                    </a:solidFill>
-                  </a:tcPr>
-                </a:tc>
-                <a:tc>
-                  <a:txBody>
-                    <a:bodyPr/>
-                    <a:lstStyle/>
-                    <a:p>
-                      <a:pPr indent="0" marL="0">
-                        <a:buNone/>
-                      </a:pPr>
-                      <a:r>
-                        <a:rPr lang="en-US" sz="950" dirty="0">
-                          <a:solidFill>
-                            <a:srgbClr val="5B6B73"/>
-                          </a:solidFill>
-                          <a:latin typeface="Calibri" pitchFamily="34" charset="0"/>
-                          <a:ea typeface="Calibri" pitchFamily="34" charset="-122"/>
-                          <a:cs typeface="Calibri" pitchFamily="34" charset="-120"/>
-                        </a:rPr>
-                        <a:t>Eficiência de Produção</a:t>
-                      </a:r>
-                      <a:endParaRPr lang="en-US" sz="950" dirty="0">
-                        <a:latin typeface="Calibri" charset="0"/>
-                        <a:ea typeface="Calibri" charset="0"/>
-                        <a:cs typeface="Calibri" charset="0"/>
-                      </a:endParaRPr>
-                    </a:p>
-                  </a:txBody>
-                  <a:tcPr marL="91440" marR="91440" marT="45720" marB="45720" anchor="ctr">
-                    <a:lnL w="6350" cap="flat" cmpd="sng" algn="ctr">
-                      <a:solidFill>
-                        <a:srgbClr val="E3E8E9"/>
-                      </a:solidFill>
-                      <a:prstDash val="solid"/>
-                      <a:round/>
-                      <a:headEnd type="none" w="med" len="med"/>
-                      <a:tailEnd type="none" w="med" len="med"/>
-                    </a:lnL>
-                    <a:lnR w="6350" cap="flat" cmpd="sng" algn="ctr">
-                      <a:solidFill>
-                        <a:srgbClr val="E3E8E9"/>
-                      </a:solidFill>
-                      <a:prstDash val="solid"/>
-                      <a:round/>
-                      <a:headEnd type="none" w="med" len="med"/>
-                      <a:tailEnd type="none" w="med" len="med"/>
-                    </a:lnR>
-                    <a:lnT w="6350" cap="flat" cmpd="sng" algn="ctr">
-                      <a:solidFill>
-                        <a:srgbClr val="E3E8E9"/>
-                      </a:solidFill>
-                      <a:prstDash val="solid"/>
-                      <a:round/>
-                      <a:headEnd type="none" w="med" len="med"/>
-                      <a:tailEnd type="none" w="med" len="med"/>
-                    </a:lnT>
-                    <a:lnB w="6350" cap="flat" cmpd="sng" algn="ctr">
-                      <a:solidFill>
-                        <a:srgbClr val="E3E8E9"/>
-                      </a:solidFill>
-                      <a:prstDash val="solid"/>
-                      <a:round/>
-                      <a:headEnd type="none" w="med" len="med"/>
-                      <a:tailEnd type="none" w="med" len="med"/>
-                    </a:lnB>
-                    <a:solidFill>
-                      <a:srgbClr val="FFFFFF"/>
-                    </a:solidFill>
-                  </a:tcPr>
-                </a:tc>
-                <a:tc>
-                  <a:txBody>
-                    <a:bodyPr/>
-                    <a:lstStyle/>
-                    <a:p>
-                      <a:pPr indent="0" marL="0">
-                        <a:buNone/>
-                      </a:pPr>
-                      <a:r>
-                        <a:rPr lang="en-US" sz="950" dirty="0">
-                          <a:solidFill>
-                            <a:srgbClr val="5B6B73"/>
-                          </a:solidFill>
-                          <a:latin typeface="Calibri" pitchFamily="34" charset="0"/>
-                          <a:ea typeface="Calibri" pitchFamily="34" charset="-122"/>
-                          <a:cs typeface="Calibri" pitchFamily="34" charset="-120"/>
-                        </a:rPr>
-                        <a:t>TA - Parada Programada</a:t>
-                      </a:r>
-                      <a:endParaRPr lang="en-US" sz="950" dirty="0">
-                        <a:latin typeface="Calibri" charset="0"/>
-                        <a:ea typeface="Calibri" charset="0"/>
-                        <a:cs typeface="Calibri" charset="0"/>
-                      </a:endParaRPr>
-                    </a:p>
-                  </a:txBody>
-                  <a:tcPr marL="91440" marR="91440" marT="45720" marB="45720" anchor="ctr">
-                    <a:lnL w="6350" cap="flat" cmpd="sng" algn="ctr">
-                      <a:solidFill>
-                        <a:srgbClr val="E3E8E9"/>
-                      </a:solidFill>
-                      <a:prstDash val="solid"/>
-                      <a:round/>
-                      <a:headEnd type="none" w="med" len="med"/>
-                      <a:tailEnd type="none" w="med" len="med"/>
-                    </a:lnL>
-                    <a:lnR w="6350" cap="flat" cmpd="sng" algn="ctr">
-                      <a:solidFill>
-                        <a:srgbClr val="E3E8E9"/>
-                      </a:solidFill>
-                      <a:prstDash val="solid"/>
-                      <a:round/>
-                      <a:headEnd type="none" w="med" len="med"/>
-                      <a:tailEnd type="none" w="med" len="med"/>
-                    </a:lnR>
-                    <a:lnT w="6350" cap="flat" cmpd="sng" algn="ctr">
-                      <a:solidFill>
-                        <a:srgbClr val="E3E8E9"/>
-                      </a:solidFill>
-                      <a:prstDash val="solid"/>
-                      <a:round/>
-                      <a:headEnd type="none" w="med" len="med"/>
-                      <a:tailEnd type="none" w="med" len="med"/>
-                    </a:lnT>
-                    <a:lnB w="6350" cap="flat" cmpd="sng" algn="ctr">
-                      <a:solidFill>
-                        <a:srgbClr val="E3E8E9"/>
-                      </a:solidFill>
-                      <a:prstDash val="solid"/>
-                      <a:round/>
-                      <a:headEnd type="none" w="med" len="med"/>
-                      <a:tailEnd type="none" w="med" len="med"/>
-                    </a:lnB>
-                    <a:solidFill>
-                      <a:srgbClr val="FFFFFF"/>
-                    </a:solidFill>
-                  </a:tcPr>
-                </a:tc>
-                <a:tc>
-                  <a:txBody>
-                    <a:bodyPr/>
-                    <a:lstStyle/>
-                    <a:p>
-                      <a:pPr algn="r" indent="0" marL="0">
-                        <a:buNone/>
-                      </a:pPr>
-                      <a:r>
-                        <a:rPr lang="en-US" sz="1000" b="1" dirty="0">
-                          <a:solidFill>
-                            <a:srgbClr val="0B2A3D"/>
-                          </a:solidFill>
-                          <a:latin typeface="Calibri" pitchFamily="34" charset="0"/>
-                          <a:ea typeface="Calibri" pitchFamily="34" charset="-122"/>
-                          <a:cs typeface="Calibri" pitchFamily="34" charset="-120"/>
-                        </a:rPr>
-                        <a:t>US$ 65,1 mil</a:t>
-                      </a:r>
-                      <a:endParaRPr lang="en-US" sz="1000" dirty="0">
-                        <a:latin typeface="Calibri" charset="0"/>
-                        <a:ea typeface="Calibri" charset="0"/>
-                        <a:cs typeface="Calibri" charset="0"/>
-                      </a:endParaRPr>
-                    </a:p>
-                  </a:txBody>
-                  <a:tcPr marL="91440" marR="91440" marT="45720" marB="45720" anchor="ctr">
-                    <a:lnL w="6350" cap="flat" cmpd="sng" algn="ctr">
-                      <a:solidFill>
-                        <a:srgbClr val="E3E8E9"/>
-                      </a:solidFill>
-                      <a:prstDash val="solid"/>
-                      <a:round/>
-                      <a:headEnd type="none" w="med" len="med"/>
-                      <a:tailEnd type="none" w="med" len="med"/>
-                    </a:lnL>
-                    <a:lnR w="6350" cap="flat" cmpd="sng" algn="ctr">
-                      <a:solidFill>
-                        <a:srgbClr val="E3E8E9"/>
-                      </a:solidFill>
-                      <a:prstDash val="solid"/>
-                      <a:round/>
-                      <a:headEnd type="none" w="med" len="med"/>
-                      <a:tailEnd type="none" w="med" len="med"/>
-                    </a:lnR>
-                    <a:lnT w="6350" cap="flat" cmpd="sng" algn="ctr">
-                      <a:solidFill>
-                        <a:srgbClr val="E3E8E9"/>
-                      </a:solidFill>
-                      <a:prstDash val="solid"/>
-                      <a:round/>
-                      <a:headEnd type="none" w="med" len="med"/>
-                      <a:tailEnd type="none" w="med" len="med"/>
-                    </a:lnT>
-                    <a:lnB w="6350" cap="flat" cmpd="sng" algn="ctr">
-                      <a:solidFill>
-                        <a:srgbClr val="E3E8E9"/>
-                      </a:solidFill>
-                      <a:prstDash val="solid"/>
-                      <a:round/>
-                      <a:headEnd type="none" w="med" len="med"/>
-                      <a:tailEnd type="none" w="med" len="med"/>
-                    </a:lnB>
-                    <a:solidFill>
-                      <a:srgbClr val="FFFFFF"/>
-                    </a:solidFill>
-                  </a:tcPr>
-                </a:tc>
-              </a:tr>
-              <a:tr h="288036">
-                <a:tc>
-                  <a:txBody>
-                    <a:bodyPr/>
-                    <a:lstStyle/>
-                    <a:p>
-                      <a:pPr indent="0" marL="0">
-                        <a:buNone/>
-                      </a:pPr>
-                      <a:r>
-                        <a:rPr lang="en-US" sz="1000" dirty="0">
-                          <a:solidFill>
-                            <a:srgbClr val="1C2B33"/>
-                          </a:solidFill>
-                          <a:latin typeface="Calibri" pitchFamily="34" charset="0"/>
-                          <a:ea typeface="Calibri" pitchFamily="34" charset="-122"/>
-                          <a:cs typeface="Calibri" pitchFamily="34" charset="-120"/>
-                        </a:rPr>
-                        <a:t>Obstrução Sistema de Águas Cinzas</a:t>
-                      </a:r>
-                      <a:endParaRPr lang="en-US" sz="1000" dirty="0">
-                        <a:latin typeface="Calibri" charset="0"/>
-                        <a:ea typeface="Calibri" charset="0"/>
-                        <a:cs typeface="Calibri" charset="0"/>
-                      </a:endParaRPr>
-                    </a:p>
-                  </a:txBody>
-                  <a:tcPr marL="91440" marR="91440" marT="45720" marB="45720" anchor="ctr">
-                    <a:lnL w="6350" cap="flat" cmpd="sng" algn="ctr">
-                      <a:solidFill>
-                        <a:srgbClr val="E3E8E9"/>
-                      </a:solidFill>
-                      <a:prstDash val="solid"/>
-                      <a:round/>
-                      <a:headEnd type="none" w="med" len="med"/>
-                      <a:tailEnd type="none" w="med" len="med"/>
-                    </a:lnL>
-                    <a:lnR w="6350" cap="flat" cmpd="sng" algn="ctr">
-                      <a:solidFill>
-                        <a:srgbClr val="E3E8E9"/>
-                      </a:solidFill>
-                      <a:prstDash val="solid"/>
-                      <a:round/>
-                      <a:headEnd type="none" w="med" len="med"/>
-                      <a:tailEnd type="none" w="med" len="med"/>
-                    </a:lnR>
-                    <a:lnT w="6350" cap="flat" cmpd="sng" algn="ctr">
-                      <a:solidFill>
-                        <a:srgbClr val="E3E8E9"/>
-                      </a:solidFill>
-                      <a:prstDash val="solid"/>
-                      <a:round/>
-                      <a:headEnd type="none" w="med" len="med"/>
-                      <a:tailEnd type="none" w="med" len="med"/>
-                    </a:lnT>
-                    <a:lnB w="6350" cap="flat" cmpd="sng" algn="ctr">
-                      <a:solidFill>
-                        <a:srgbClr val="E3E8E9"/>
-                      </a:solidFill>
-                      <a:prstDash val="solid"/>
-                      <a:round/>
-                      <a:headEnd type="none" w="med" len="med"/>
-                      <a:tailEnd type="none" w="med" len="med"/>
-                    </a:lnB>
-                    <a:solidFill>
-                      <a:srgbClr val="F0F4F5"/>
-                    </a:solidFill>
-                  </a:tcPr>
-                </a:tc>
-                <a:tc>
-                  <a:txBody>
-                    <a:bodyPr/>
-                    <a:lstStyle/>
-                    <a:p>
-                      <a:pPr indent="0" marL="0">
-                        <a:buNone/>
-                      </a:pPr>
-                      <a:r>
-                        <a:rPr lang="en-US" sz="950" dirty="0">
-                          <a:solidFill>
-                            <a:srgbClr val="5B6B73"/>
-                          </a:solidFill>
-                          <a:latin typeface="Calibri" pitchFamily="34" charset="0"/>
-                          <a:ea typeface="Calibri" pitchFamily="34" charset="-122"/>
-                          <a:cs typeface="Calibri" pitchFamily="34" charset="-120"/>
-                        </a:rPr>
-                        <a:t>Integridade e Regulatório</a:t>
-                      </a:r>
-                      <a:endParaRPr lang="en-US" sz="950" dirty="0">
-                        <a:latin typeface="Calibri" charset="0"/>
-                        <a:ea typeface="Calibri" charset="0"/>
-                        <a:cs typeface="Calibri" charset="0"/>
-                      </a:endParaRPr>
-                    </a:p>
-                  </a:txBody>
-                  <a:tcPr marL="91440" marR="91440" marT="45720" marB="45720" anchor="ctr">
-                    <a:lnL w="6350" cap="flat" cmpd="sng" algn="ctr">
-                      <a:solidFill>
-                        <a:srgbClr val="E3E8E9"/>
-                      </a:solidFill>
-                      <a:prstDash val="solid"/>
-                      <a:round/>
-                      <a:headEnd type="none" w="med" len="med"/>
-                      <a:tailEnd type="none" w="med" len="med"/>
-                    </a:lnL>
-                    <a:lnR w="6350" cap="flat" cmpd="sng" algn="ctr">
-                      <a:solidFill>
-                        <a:srgbClr val="E3E8E9"/>
-                      </a:solidFill>
-                      <a:prstDash val="solid"/>
-                      <a:round/>
-                      <a:headEnd type="none" w="med" len="med"/>
-                      <a:tailEnd type="none" w="med" len="med"/>
-                    </a:lnR>
-                    <a:lnT w="6350" cap="flat" cmpd="sng" algn="ctr">
-                      <a:solidFill>
-                        <a:srgbClr val="E3E8E9"/>
-                      </a:solidFill>
-                      <a:prstDash val="solid"/>
-                      <a:round/>
-                      <a:headEnd type="none" w="med" len="med"/>
-                      <a:tailEnd type="none" w="med" len="med"/>
-                    </a:lnT>
-                    <a:lnB w="6350" cap="flat" cmpd="sng" algn="ctr">
-                      <a:solidFill>
-                        <a:srgbClr val="E3E8E9"/>
-                      </a:solidFill>
-                      <a:prstDash val="solid"/>
-                      <a:round/>
-                      <a:headEnd type="none" w="med" len="med"/>
-                      <a:tailEnd type="none" w="med" len="med"/>
-                    </a:lnB>
-                    <a:solidFill>
-                      <a:srgbClr val="F0F4F5"/>
-                    </a:solidFill>
-                  </a:tcPr>
-                </a:tc>
-                <a:tc>
-                  <a:txBody>
-                    <a:bodyPr/>
-                    <a:lstStyle/>
-                    <a:p>
-                      <a:pPr indent="0" marL="0">
-                        <a:buNone/>
-                      </a:pPr>
-                      <a:r>
-                        <a:rPr lang="en-US" sz="950" dirty="0">
-                          <a:solidFill>
-                            <a:srgbClr val="5B6B73"/>
-                          </a:solidFill>
-                          <a:latin typeface="Calibri" pitchFamily="34" charset="0"/>
-                          <a:ea typeface="Calibri" pitchFamily="34" charset="-122"/>
-                          <a:cs typeface="Calibri" pitchFamily="34" charset="-120"/>
-                        </a:rPr>
-                        <a:t>Projetos</a:t>
-                      </a:r>
-                      <a:endParaRPr lang="en-US" sz="950" dirty="0">
-                        <a:latin typeface="Calibri" charset="0"/>
-                        <a:ea typeface="Calibri" charset="0"/>
-                        <a:cs typeface="Calibri" charset="0"/>
-                      </a:endParaRPr>
-                    </a:p>
-                  </a:txBody>
-                  <a:tcPr marL="91440" marR="91440" marT="45720" marB="45720" anchor="ctr">
-                    <a:lnL w="6350" cap="flat" cmpd="sng" algn="ctr">
-                      <a:solidFill>
-                        <a:srgbClr val="E3E8E9"/>
-                      </a:solidFill>
-                      <a:prstDash val="solid"/>
-                      <a:round/>
-                      <a:headEnd type="none" w="med" len="med"/>
-                      <a:tailEnd type="none" w="med" len="med"/>
-                    </a:lnL>
-                    <a:lnR w="6350" cap="flat" cmpd="sng" algn="ctr">
-                      <a:solidFill>
-                        <a:srgbClr val="E3E8E9"/>
-                      </a:solidFill>
-                      <a:prstDash val="solid"/>
-                      <a:round/>
-                      <a:headEnd type="none" w="med" len="med"/>
-                      <a:tailEnd type="none" w="med" len="med"/>
-                    </a:lnR>
-                    <a:lnT w="6350" cap="flat" cmpd="sng" algn="ctr">
-                      <a:solidFill>
-                        <a:srgbClr val="E3E8E9"/>
-                      </a:solidFill>
-                      <a:prstDash val="solid"/>
-                      <a:round/>
-                      <a:headEnd type="none" w="med" len="med"/>
-                      <a:tailEnd type="none" w="med" len="med"/>
-                    </a:lnT>
-                    <a:lnB w="6350" cap="flat" cmpd="sng" algn="ctr">
-                      <a:solidFill>
-                        <a:srgbClr val="E3E8E9"/>
-                      </a:solidFill>
-                      <a:prstDash val="solid"/>
-                      <a:round/>
-                      <a:headEnd type="none" w="med" len="med"/>
-                      <a:tailEnd type="none" w="med" len="med"/>
-                    </a:lnB>
-                    <a:solidFill>
-                      <a:srgbClr val="F0F4F5"/>
-                    </a:solidFill>
-                  </a:tcPr>
-                </a:tc>
-                <a:tc>
-                  <a:txBody>
-                    <a:bodyPr/>
-                    <a:lstStyle/>
-                    <a:p>
-                      <a:pPr algn="r" indent="0" marL="0">
-                        <a:buNone/>
-                      </a:pPr>
-                      <a:r>
-                        <a:rPr lang="en-US" sz="1000" b="1" dirty="0">
-                          <a:solidFill>
-                            <a:srgbClr val="0B2A3D"/>
-                          </a:solidFill>
-                          <a:latin typeface="Calibri" pitchFamily="34" charset="0"/>
-                          <a:ea typeface="Calibri" pitchFamily="34" charset="-122"/>
-                          <a:cs typeface="Calibri" pitchFamily="34" charset="-120"/>
-                        </a:rPr>
-                        <a:t>US$ 50,9 mil</a:t>
+                        <a:t>US$ 150,0 mil</a:t>
                       </a:r>
                       <a:endParaRPr lang="en-US" sz="1000" dirty="0">
                         <a:latin typeface="Calibri" charset="0"/>
@@ -25206,7 +25304,7 @@
                           <a:ea typeface="Calibri" pitchFamily="34" charset="-122"/>
                           <a:cs typeface="Calibri" pitchFamily="34" charset="-120"/>
                         </a:rPr>
-                        <a:t>Outros 15 escopos (itens de menor valor individual)</a:t>
+                        <a:t>Outros 26 escopos (itens de menor valor individual)</a:t>
                       </a:r>
                       <a:endParaRPr lang="en-US" sz="950" dirty="0">
                         <a:latin typeface="Calibri" charset="0"/>
@@ -25280,7 +25378,7 @@
                           <a:ea typeface="Calibri" pitchFamily="34" charset="-122"/>
                           <a:cs typeface="Calibri" pitchFamily="34" charset="-120"/>
                         </a:rPr>
-                        <a:t>US$ 228,0 mil</a:t>
+                        <a:t>US$ 1,0 mi</a:t>
                       </a:r>
                       <a:endParaRPr lang="en-US" sz="1000" dirty="0">
                         <a:latin typeface="Calibri" charset="0"/>
